--- a/docs/starukhin_dissertation/magister_pres.pptx
+++ b/docs/starukhin_dissertation/magister_pres.pptx
@@ -148,7 +148,7 @@
       </p:grpSpPr>
       <p:sp>
         <p:nvSpPr>
-          <p:cNvPr id="1135556742" name="Верхний колонтитул 1"/>
+          <p:cNvPr id="1867600042" name="Верхний колонтитул 1"/>
           <p:cNvSpPr>
             <a:spLocks noGrp="1"/>
           </p:cNvSpPr>
@@ -182,7 +182,7 @@
       </p:sp>
       <p:sp>
         <p:nvSpPr>
-          <p:cNvPr id="920162180" name="Дата 2"/>
+          <p:cNvPr id="1620215679" name="Дата 2"/>
           <p:cNvSpPr>
             <a:spLocks noGrp="1"/>
           </p:cNvSpPr>
@@ -220,7 +220,7 @@
       </p:sp>
       <p:sp>
         <p:nvSpPr>
-          <p:cNvPr id="1057644866" name="Образ слайда 3"/>
+          <p:cNvPr id="810129978" name="Образ слайда 3"/>
           <p:cNvSpPr>
             <a:spLocks noChangeAspect="1" noGrp="1" noRot="1"/>
           </p:cNvSpPr>
@@ -256,7 +256,7 @@
       </p:sp>
       <p:sp>
         <p:nvSpPr>
-          <p:cNvPr id="1941498779" name="Заметки 4"/>
+          <p:cNvPr id="369944346" name="Заметки 4"/>
           <p:cNvSpPr>
             <a:spLocks noGrp="1"/>
           </p:cNvSpPr>
@@ -330,7 +330,7 @@
       </p:sp>
       <p:sp>
         <p:nvSpPr>
-          <p:cNvPr id="1687750482" name="Нижний колонтитул 5"/>
+          <p:cNvPr id="1274173431" name="Нижний колонтитул 5"/>
           <p:cNvSpPr>
             <a:spLocks noGrp="1"/>
           </p:cNvSpPr>
@@ -364,7 +364,7 @@
       </p:sp>
       <p:sp>
         <p:nvSpPr>
-          <p:cNvPr id="1390803634" name="Номер слайда 6"/>
+          <p:cNvPr id="1189613254" name="Номер слайда 6"/>
           <p:cNvSpPr>
             <a:spLocks noGrp="1"/>
           </p:cNvSpPr>
@@ -567,7 +567,7 @@
             <a:pPr>
               <a:defRPr/>
             </a:pPr>
-            <a:fld id="{817C5F6B-1229-047B-27B5-44A2E563B6A8}" type="slidenum">
+            <a:fld id="{B9993D39-5D40-723A-B7F6-46DBB08A9A62}" type="slidenum">
               <a:rPr/>
               <a:t/>
             </a:fld>
@@ -602,7 +602,7 @@
       </p:grpSpPr>
       <p:sp>
         <p:nvSpPr>
-          <p:cNvPr id="2057110400" name="Slide Image Placeholder 1"/>
+          <p:cNvPr id="1096759934" name="Slide Image Placeholder 1"/>
           <p:cNvSpPr>
             <a:spLocks noChangeAspect="1" noGrp="1" noRot="1"/>
           </p:cNvSpPr>
@@ -614,7 +614,7 @@
       </p:sp>
       <p:sp>
         <p:nvSpPr>
-          <p:cNvPr id="2112358850" name="Notes Placeholder 2"/>
+          <p:cNvPr id="1254749657" name="Notes Placeholder 2"/>
           <p:cNvSpPr>
             <a:spLocks noGrp="1"/>
           </p:cNvSpPr>
@@ -636,7 +636,7 @@
       </p:sp>
       <p:sp>
         <p:nvSpPr>
-          <p:cNvPr id="1957497801" name="Slide Number Placeholder 3"/>
+          <p:cNvPr id="856169940" name="Slide Number Placeholder 3"/>
           <p:cNvSpPr>
             <a:spLocks noGrp="1"/>
           </p:cNvSpPr>
@@ -652,7 +652,7 @@
             <a:pPr>
               <a:defRPr/>
             </a:pPr>
-            <a:fld id="{A4FE7883-973B-878E-357F-41AA8BFE4543}" type="slidenum">
+            <a:fld id="{4A85B0B4-A097-EC80-6511-5CB349CFD099}" type="slidenum">
               <a:rPr/>
               <a:t/>
             </a:fld>
@@ -687,7 +687,7 @@
       </p:grpSpPr>
       <p:sp>
         <p:nvSpPr>
-          <p:cNvPr id="3993194" name="Slide Image Placeholder 1"/>
+          <p:cNvPr id="2057110400" name="Slide Image Placeholder 1"/>
           <p:cNvSpPr>
             <a:spLocks noChangeAspect="1" noGrp="1" noRot="1"/>
           </p:cNvSpPr>
@@ -699,7 +699,7 @@
       </p:sp>
       <p:sp>
         <p:nvSpPr>
-          <p:cNvPr id="1442391341" name="Notes Placeholder 2"/>
+          <p:cNvPr id="2112358850" name="Notes Placeholder 2"/>
           <p:cNvSpPr>
             <a:spLocks noGrp="1"/>
           </p:cNvSpPr>
@@ -721,7 +721,7 @@
       </p:sp>
       <p:sp>
         <p:nvSpPr>
-          <p:cNvPr id="184885013" name="Slide Number Placeholder 3"/>
+          <p:cNvPr id="1957497801" name="Slide Number Placeholder 3"/>
           <p:cNvSpPr>
             <a:spLocks noGrp="1"/>
           </p:cNvSpPr>
@@ -737,7 +737,7 @@
             <a:pPr>
               <a:defRPr/>
             </a:pPr>
-            <a:fld id="{0A9BC998-3455-E361-253C-3B87DD69CA9D}" type="slidenum">
+            <a:fld id="{A4FE7883-973B-878E-357F-41AA8BFE4543}" type="slidenum">
               <a:rPr/>
               <a:t/>
             </a:fld>
@@ -772,7 +772,7 @@
       </p:grpSpPr>
       <p:sp>
         <p:nvSpPr>
-          <p:cNvPr id="962613758" name="Slide Image Placeholder 1"/>
+          <p:cNvPr id="3993194" name="Slide Image Placeholder 1"/>
           <p:cNvSpPr>
             <a:spLocks noChangeAspect="1" noGrp="1" noRot="1"/>
           </p:cNvSpPr>
@@ -784,7 +784,7 @@
       </p:sp>
       <p:sp>
         <p:nvSpPr>
-          <p:cNvPr id="108407130" name="Notes Placeholder 2"/>
+          <p:cNvPr id="1442391341" name="Notes Placeholder 2"/>
           <p:cNvSpPr>
             <a:spLocks noGrp="1"/>
           </p:cNvSpPr>
@@ -806,7 +806,7 @@
       </p:sp>
       <p:sp>
         <p:nvSpPr>
-          <p:cNvPr id="481464317" name="Slide Number Placeholder 3"/>
+          <p:cNvPr id="184885013" name="Slide Number Placeholder 3"/>
           <p:cNvSpPr>
             <a:spLocks noGrp="1"/>
           </p:cNvSpPr>
@@ -822,7 +822,7 @@
             <a:pPr>
               <a:defRPr/>
             </a:pPr>
-            <a:fld id="{86902816-76A5-4AF4-1E9E-ABAE37AB74E6}" type="slidenum">
+            <a:fld id="{0A9BC998-3455-E361-253C-3B87DD69CA9D}" type="slidenum">
               <a:rPr/>
               <a:t/>
             </a:fld>
@@ -907,7 +907,7 @@
             <a:pPr>
               <a:defRPr/>
             </a:pPr>
-            <a:fld id="{384742BA-856B-8F4C-B3FE-AC981AD18722}" type="slidenum">
+            <a:fld id="{463C25AB-F75B-ED55-9B43-2E895322D2B6}" type="slidenum">
               <a:rPr/>
               <a:t/>
             </a:fld>
@@ -992,7 +992,7 @@
             <a:pPr>
               <a:defRPr/>
             </a:pPr>
-            <a:fld id="{03E14580-EABE-8B82-39A8-68FB7C1701E0}" type="slidenum">
+            <a:fld id="{0E3B1206-5BC8-D1E1-57C3-7D177AE62E15}" type="slidenum">
               <a:rPr/>
               <a:t/>
             </a:fld>
@@ -1077,7 +1077,7 @@
             <a:pPr>
               <a:defRPr/>
             </a:pPr>
-            <a:fld id="{264DC10A-14CC-0FD5-732D-60DA7BAE4464}" type="slidenum">
+            <a:fld id="{188C1104-84A8-CC17-258A-A96B99F9A95E}" type="slidenum">
               <a:rPr/>
               <a:t/>
             </a:fld>
@@ -1162,7 +1162,7 @@
             <a:pPr>
               <a:defRPr/>
             </a:pPr>
-            <a:fld id="{5E82ABB8-C7B4-6AF6-ACAD-8140555805FA}" type="slidenum">
+            <a:fld id="{85F5C7D0-D7BE-2C63-050F-1DAFA286B6D7}" type="slidenum">
               <a:rPr/>
               <a:t/>
             </a:fld>
@@ -1247,7 +1247,7 @@
             <a:pPr>
               <a:defRPr/>
             </a:pPr>
-            <a:fld id="{DE9DC24C-A746-6A57-EC92-6763580FBD17}" type="slidenum">
+            <a:fld id="{F20EB7B1-6B7D-5CE5-D95F-5ED0A7232503}" type="slidenum">
               <a:rPr/>
               <a:t/>
             </a:fld>
@@ -1332,7 +1332,7 @@
             <a:pPr>
               <a:defRPr/>
             </a:pPr>
-            <a:fld id="{AD3D92CA-885E-64AA-3093-306FA5DBE223}" type="slidenum">
+            <a:fld id="{B355F3D9-BDFF-EDB5-6FC0-3B806BA109F3}" type="slidenum">
               <a:rPr/>
               <a:t/>
             </a:fld>
@@ -1417,7 +1417,7 @@
             <a:pPr>
               <a:defRPr/>
             </a:pPr>
-            <a:fld id="{7A1B6EEB-0949-913D-679C-4C511D64A78B}" type="slidenum">
+            <a:fld id="{18768EC4-D344-67C3-1C24-CF724D34C290}" type="slidenum">
               <a:rPr/>
               <a:t/>
             </a:fld>
@@ -1502,7 +1502,7 @@
             <a:pPr>
               <a:defRPr/>
             </a:pPr>
-            <a:fld id="{4FF782D5-9878-C332-239A-0AB964DD722E}" type="slidenum">
+            <a:fld id="{C7A0886C-666E-9836-41C4-83E600BD9668}" type="slidenum">
               <a:rPr/>
               <a:t/>
             </a:fld>
@@ -1537,7 +1537,7 @@
       </p:grpSpPr>
       <p:sp>
         <p:nvSpPr>
-          <p:cNvPr id="81617012" name="Slide Image Placeholder 1"/>
+          <p:cNvPr id="962613758" name="Slide Image Placeholder 1"/>
           <p:cNvSpPr>
             <a:spLocks noChangeAspect="1" noGrp="1" noRot="1"/>
           </p:cNvSpPr>
@@ -1549,7 +1549,7 @@
       </p:sp>
       <p:sp>
         <p:nvSpPr>
-          <p:cNvPr id="2812057" name="Notes Placeholder 2"/>
+          <p:cNvPr id="108407130" name="Notes Placeholder 2"/>
           <p:cNvSpPr>
             <a:spLocks noGrp="1"/>
           </p:cNvSpPr>
@@ -1571,7 +1571,7 @@
       </p:sp>
       <p:sp>
         <p:nvSpPr>
-          <p:cNvPr id="643399587" name="Slide Number Placeholder 3"/>
+          <p:cNvPr id="481464317" name="Slide Number Placeholder 3"/>
           <p:cNvSpPr>
             <a:spLocks noGrp="1"/>
           </p:cNvSpPr>
@@ -1587,7 +1587,7 @@
             <a:pPr>
               <a:defRPr/>
             </a:pPr>
-            <a:fld id="{E59DD143-F230-8BE5-DF47-2F712C202B39}" type="slidenum">
+            <a:fld id="{86902816-76A5-4AF4-1E9E-ABAE37AB74E6}" type="slidenum">
               <a:rPr/>
               <a:t/>
             </a:fld>
@@ -1622,7 +1622,7 @@
       </p:grpSpPr>
       <p:sp>
         <p:nvSpPr>
-          <p:cNvPr id="798112154" name="Slide Image Placeholder 1"/>
+          <p:cNvPr id="81617012" name="Slide Image Placeholder 1"/>
           <p:cNvSpPr>
             <a:spLocks noChangeAspect="1" noGrp="1" noRot="1"/>
           </p:cNvSpPr>
@@ -1634,7 +1634,7 @@
       </p:sp>
       <p:sp>
         <p:nvSpPr>
-          <p:cNvPr id="1158348604" name="Notes Placeholder 2"/>
+          <p:cNvPr id="2812057" name="Notes Placeholder 2"/>
           <p:cNvSpPr>
             <a:spLocks noGrp="1"/>
           </p:cNvSpPr>
@@ -1656,7 +1656,7 @@
       </p:sp>
       <p:sp>
         <p:nvSpPr>
-          <p:cNvPr id="1219910605" name="Slide Number Placeholder 3"/>
+          <p:cNvPr id="643399587" name="Slide Number Placeholder 3"/>
           <p:cNvSpPr>
             <a:spLocks noGrp="1"/>
           </p:cNvSpPr>
@@ -1672,7 +1672,7 @@
             <a:pPr>
               <a:defRPr/>
             </a:pPr>
-            <a:fld id="{6478E094-64B7-2766-BCC3-6C48145F116B}" type="slidenum">
+            <a:fld id="{E59DD143-F230-8BE5-DF47-2F712C202B39}" type="slidenum">
               <a:rPr/>
               <a:t/>
             </a:fld>
@@ -1707,7 +1707,7 @@
       </p:grpSpPr>
       <p:sp>
         <p:nvSpPr>
-          <p:cNvPr id="1096759934" name="Slide Image Placeholder 1"/>
+          <p:cNvPr id="798112154" name="Slide Image Placeholder 1"/>
           <p:cNvSpPr>
             <a:spLocks noChangeAspect="1" noGrp="1" noRot="1"/>
           </p:cNvSpPr>
@@ -1719,7 +1719,7 @@
       </p:sp>
       <p:sp>
         <p:nvSpPr>
-          <p:cNvPr id="1254749657" name="Notes Placeholder 2"/>
+          <p:cNvPr id="1158348604" name="Notes Placeholder 2"/>
           <p:cNvSpPr>
             <a:spLocks noGrp="1"/>
           </p:cNvSpPr>
@@ -1741,7 +1741,7 @@
       </p:sp>
       <p:sp>
         <p:nvSpPr>
-          <p:cNvPr id="856169940" name="Slide Number Placeholder 3"/>
+          <p:cNvPr id="1219910605" name="Slide Number Placeholder 3"/>
           <p:cNvSpPr>
             <a:spLocks noGrp="1"/>
           </p:cNvSpPr>
@@ -1757,7 +1757,7 @@
             <a:pPr>
               <a:defRPr/>
             </a:pPr>
-            <a:fld id="{4A85B0B4-A097-EC80-6511-5CB349CFD099}" type="slidenum">
+            <a:fld id="{6478E094-64B7-2766-BCC3-6C48145F116B}" type="slidenum">
               <a:rPr/>
               <a:t/>
             </a:fld>
@@ -1792,7 +1792,7 @@
       </p:grpSpPr>
       <p:pic>
         <p:nvPicPr>
-          <p:cNvPr id="1609927210" name="Picture 6" descr="HD-ShadowLong.png"/>
+          <p:cNvPr id="2109211206" name="Picture 6" descr="HD-ShadowLong.png"/>
           <p:cNvPicPr>
             <a:picLocks noChangeAspect="1"/>
           </p:cNvPicPr>
@@ -1814,7 +1814,7 @@
       </p:pic>
       <p:pic>
         <p:nvPicPr>
-          <p:cNvPr id="1899911100" name="Picture 7" descr="HD-ShadowShort.png"/>
+          <p:cNvPr id="1050962785" name="Picture 7" descr="HD-ShadowShort.png"/>
           <p:cNvPicPr>
             <a:picLocks noChangeAspect="1"/>
           </p:cNvPicPr>
@@ -1836,7 +1836,7 @@
       </p:pic>
       <p:sp>
         <p:nvSpPr>
-          <p:cNvPr id="1898315493" name="Rectangle 8"/>
+          <p:cNvPr id="365040855" name="Rectangle 8"/>
           <p:cNvSpPr/>
           <p:nvPr/>
         </p:nvSpPr>
@@ -1877,7 +1877,7 @@
       </p:sp>
       <p:sp>
         <p:nvSpPr>
-          <p:cNvPr id="618600037" name="Rectangle 9"/>
+          <p:cNvPr id="1121629349" name="Rectangle 9"/>
           <p:cNvSpPr/>
           <p:nvPr/>
         </p:nvSpPr>
@@ -1915,7 +1915,7 @@
       </p:sp>
       <p:sp>
         <p:nvSpPr>
-          <p:cNvPr id="2069231244" name="Title 1"/>
+          <p:cNvPr id="1012896447" name="Title 1"/>
           <p:cNvSpPr>
             <a:spLocks noGrp="1"/>
           </p:cNvSpPr>
@@ -1952,7 +1952,7 @@
       </p:sp>
       <p:sp>
         <p:nvSpPr>
-          <p:cNvPr id="419223168" name="Subtitle 2"/>
+          <p:cNvPr id="528725798" name="Subtitle 2"/>
           <p:cNvSpPr>
             <a:spLocks noGrp="1"/>
           </p:cNvSpPr>
@@ -2022,7 +2022,7 @@
       </p:sp>
       <p:sp>
         <p:nvSpPr>
-          <p:cNvPr id="1474924334" name="Date Placeholder 3"/>
+          <p:cNvPr id="242108461" name="Date Placeholder 3"/>
           <p:cNvSpPr>
             <a:spLocks noGrp="1"/>
           </p:cNvSpPr>
@@ -2048,7 +2048,7 @@
       </p:sp>
       <p:sp>
         <p:nvSpPr>
-          <p:cNvPr id="791633942" name="Footer Placeholder 4"/>
+          <p:cNvPr id="1604540460" name="Footer Placeholder 4"/>
           <p:cNvSpPr>
             <a:spLocks noGrp="1"/>
           </p:cNvSpPr>
@@ -2070,7 +2070,7 @@
       </p:sp>
       <p:sp>
         <p:nvSpPr>
-          <p:cNvPr id="599534649" name="Slide Number Placeholder 5"/>
+          <p:cNvPr id="2102498814" name="Slide Number Placeholder 5"/>
           <p:cNvSpPr>
             <a:spLocks noGrp="1"/>
           </p:cNvSpPr>
@@ -2126,7 +2126,7 @@
       </p:grpSpPr>
       <p:pic>
         <p:nvPicPr>
-          <p:cNvPr id="1197481773" name="Picture 7" descr="HD-ShadowLong.png"/>
+          <p:cNvPr id="1091372903" name="Picture 7" descr="HD-ShadowLong.png"/>
           <p:cNvPicPr>
             <a:picLocks noChangeAspect="1"/>
           </p:cNvPicPr>
@@ -2148,7 +2148,7 @@
       </p:pic>
       <p:pic>
         <p:nvPicPr>
-          <p:cNvPr id="127122754" name="Picture 8" descr="HD-ShadowShort.png"/>
+          <p:cNvPr id="613257239" name="Picture 8" descr="HD-ShadowShort.png"/>
           <p:cNvPicPr>
             <a:picLocks noChangeAspect="1"/>
           </p:cNvPicPr>
@@ -2170,7 +2170,7 @@
       </p:pic>
       <p:sp>
         <p:nvSpPr>
-          <p:cNvPr id="779907195" name="Rectangle 9"/>
+          <p:cNvPr id="57816750" name="Rectangle 9"/>
           <p:cNvSpPr/>
           <p:nvPr/>
         </p:nvSpPr>
@@ -2211,7 +2211,7 @@
       </p:sp>
       <p:sp>
         <p:nvSpPr>
-          <p:cNvPr id="417641922" name="Rectangle 10"/>
+          <p:cNvPr id="1639881770" name="Rectangle 10"/>
           <p:cNvSpPr/>
           <p:nvPr/>
         </p:nvSpPr>
@@ -2249,7 +2249,7 @@
       </p:sp>
       <p:sp>
         <p:nvSpPr>
-          <p:cNvPr id="410305841" name="Title 1"/>
+          <p:cNvPr id="1445690459" name="Title 1"/>
           <p:cNvSpPr>
             <a:spLocks noGrp="1"/>
           </p:cNvSpPr>
@@ -2286,7 +2286,7 @@
       </p:sp>
       <p:sp>
         <p:nvSpPr>
-          <p:cNvPr id="1496830975" name="Picture Placeholder 2"/>
+          <p:cNvPr id="13932161" name="Picture Placeholder 2"/>
           <p:cNvSpPr>
             <a:spLocks noChangeAspect="1" noGrp="1"/>
           </p:cNvSpPr>
@@ -2368,7 +2368,7 @@
       </p:sp>
       <p:sp>
         <p:nvSpPr>
-          <p:cNvPr id="554419258" name="Text Placeholder 3"/>
+          <p:cNvPr id="455200340" name="Text Placeholder 3"/>
           <p:cNvSpPr>
             <a:spLocks noGrp="1"/>
           </p:cNvSpPr>
@@ -2436,7 +2436,7 @@
       </p:sp>
       <p:sp>
         <p:nvSpPr>
-          <p:cNvPr id="1507088122" name="Date Placeholder 4"/>
+          <p:cNvPr id="426687459" name="Date Placeholder 4"/>
           <p:cNvSpPr>
             <a:spLocks noGrp="1"/>
           </p:cNvSpPr>
@@ -2462,7 +2462,7 @@
       </p:sp>
       <p:sp>
         <p:nvSpPr>
-          <p:cNvPr id="386262973" name="Footer Placeholder 5"/>
+          <p:cNvPr id="1914775912" name="Footer Placeholder 5"/>
           <p:cNvSpPr>
             <a:spLocks noGrp="1"/>
           </p:cNvSpPr>
@@ -2484,7 +2484,7 @@
       </p:sp>
       <p:sp>
         <p:nvSpPr>
-          <p:cNvPr id="1580857579" name="Slide Number Placeholder 6"/>
+          <p:cNvPr id="17591859" name="Slide Number Placeholder 6"/>
           <p:cNvSpPr>
             <a:spLocks noGrp="1"/>
           </p:cNvSpPr>
@@ -2540,7 +2540,7 @@
       </p:grpSpPr>
       <p:pic>
         <p:nvPicPr>
-          <p:cNvPr id="132127198" name="Picture 7" descr="HD-ShadowLong.png"/>
+          <p:cNvPr id="264341191" name="Picture 7" descr="HD-ShadowLong.png"/>
           <p:cNvPicPr>
             <a:picLocks noChangeAspect="1"/>
           </p:cNvPicPr>
@@ -2562,7 +2562,7 @@
       </p:pic>
       <p:pic>
         <p:nvPicPr>
-          <p:cNvPr id="308019010" name="Picture 8" descr="HD-ShadowShort.png"/>
+          <p:cNvPr id="395590212" name="Picture 8" descr="HD-ShadowShort.png"/>
           <p:cNvPicPr>
             <a:picLocks noChangeAspect="1"/>
           </p:cNvPicPr>
@@ -2584,7 +2584,7 @@
       </p:pic>
       <p:sp>
         <p:nvSpPr>
-          <p:cNvPr id="863084750" name="Rectangle 9"/>
+          <p:cNvPr id="295152757" name="Rectangle 9"/>
           <p:cNvSpPr/>
           <p:nvPr/>
         </p:nvSpPr>
@@ -2625,7 +2625,7 @@
       </p:sp>
       <p:sp>
         <p:nvSpPr>
-          <p:cNvPr id="86221952" name="Rectangle 10"/>
+          <p:cNvPr id="378457107" name="Rectangle 10"/>
           <p:cNvSpPr/>
           <p:nvPr/>
         </p:nvSpPr>
@@ -2663,7 +2663,7 @@
       </p:sp>
       <p:sp>
         <p:nvSpPr>
-          <p:cNvPr id="443982767" name="Title 1"/>
+          <p:cNvPr id="1904919064" name="Title 1"/>
           <p:cNvSpPr>
             <a:spLocks noGrp="1"/>
           </p:cNvSpPr>
@@ -2698,7 +2698,7 @@
       </p:sp>
       <p:sp>
         <p:nvSpPr>
-          <p:cNvPr id="1880229293" name="Text Placeholder 3"/>
+          <p:cNvPr id="1336987194" name="Text Placeholder 3"/>
           <p:cNvSpPr>
             <a:spLocks noGrp="1"/>
           </p:cNvSpPr>
@@ -2766,7 +2766,7 @@
       </p:sp>
       <p:sp>
         <p:nvSpPr>
-          <p:cNvPr id="1163792391" name="Date Placeholder 4"/>
+          <p:cNvPr id="1778673714" name="Date Placeholder 4"/>
           <p:cNvSpPr>
             <a:spLocks noGrp="1"/>
           </p:cNvSpPr>
@@ -2792,7 +2792,7 @@
       </p:sp>
       <p:sp>
         <p:nvSpPr>
-          <p:cNvPr id="674976302" name="Footer Placeholder 5"/>
+          <p:cNvPr id="1140677966" name="Footer Placeholder 5"/>
           <p:cNvSpPr>
             <a:spLocks noGrp="1"/>
           </p:cNvSpPr>
@@ -2814,7 +2814,7 @@
       </p:sp>
       <p:sp>
         <p:nvSpPr>
-          <p:cNvPr id="1730600222" name="Slide Number Placeholder 6"/>
+          <p:cNvPr id="577755057" name="Slide Number Placeholder 6"/>
           <p:cNvSpPr>
             <a:spLocks noGrp="1"/>
           </p:cNvSpPr>
@@ -2870,7 +2870,7 @@
       </p:grpSpPr>
       <p:pic>
         <p:nvPicPr>
-          <p:cNvPr id="1373735470" name="Picture 10" descr="HD-ShadowLong.png"/>
+          <p:cNvPr id="1198309954" name="Picture 10" descr="HD-ShadowLong.png"/>
           <p:cNvPicPr>
             <a:picLocks noChangeAspect="1"/>
           </p:cNvPicPr>
@@ -2892,7 +2892,7 @@
       </p:pic>
       <p:pic>
         <p:nvPicPr>
-          <p:cNvPr id="1992427127" name="Picture 12" descr="HD-ShadowShort.png"/>
+          <p:cNvPr id="1566185227" name="Picture 12" descr="HD-ShadowShort.png"/>
           <p:cNvPicPr>
             <a:picLocks noChangeAspect="1"/>
           </p:cNvPicPr>
@@ -2914,7 +2914,7 @@
       </p:pic>
       <p:sp>
         <p:nvSpPr>
-          <p:cNvPr id="1900193562" name="Rectangle 13"/>
+          <p:cNvPr id="720301802" name="Rectangle 13"/>
           <p:cNvSpPr/>
           <p:nvPr/>
         </p:nvSpPr>
@@ -2955,7 +2955,7 @@
       </p:sp>
       <p:sp>
         <p:nvSpPr>
-          <p:cNvPr id="987168465" name="Rectangle 14"/>
+          <p:cNvPr id="678297690" name="Rectangle 14"/>
           <p:cNvSpPr/>
           <p:nvPr/>
         </p:nvSpPr>
@@ -2993,7 +2993,7 @@
       </p:sp>
       <p:sp>
         <p:nvSpPr>
-          <p:cNvPr id="1078476752" name="Title 1"/>
+          <p:cNvPr id="1062823921" name="Title 1"/>
           <p:cNvSpPr>
             <a:spLocks noGrp="1"/>
           </p:cNvSpPr>
@@ -3028,7 +3028,7 @@
       </p:sp>
       <p:sp>
         <p:nvSpPr>
-          <p:cNvPr id="785276350" name="Text Placeholder 3"/>
+          <p:cNvPr id="1509123735" name="Text Placeholder 3"/>
           <p:cNvSpPr>
             <a:spLocks noGrp="1"/>
           </p:cNvSpPr>
@@ -3098,7 +3098,7 @@
       </p:sp>
       <p:sp>
         <p:nvSpPr>
-          <p:cNvPr id="1396326483" name="Text Placeholder 3"/>
+          <p:cNvPr id="227894160" name="Text Placeholder 3"/>
           <p:cNvSpPr>
             <a:spLocks noGrp="1"/>
           </p:cNvSpPr>
@@ -3168,7 +3168,7 @@
       </p:sp>
       <p:sp>
         <p:nvSpPr>
-          <p:cNvPr id="320263134" name="Date Placeholder 4"/>
+          <p:cNvPr id="983181635" name="Date Placeholder 4"/>
           <p:cNvSpPr>
             <a:spLocks noGrp="1"/>
           </p:cNvSpPr>
@@ -3194,7 +3194,7 @@
       </p:sp>
       <p:sp>
         <p:nvSpPr>
-          <p:cNvPr id="1849215010" name="Footer Placeholder 5"/>
+          <p:cNvPr id="2123273829" name="Footer Placeholder 5"/>
           <p:cNvSpPr>
             <a:spLocks noGrp="1"/>
           </p:cNvSpPr>
@@ -3216,7 +3216,7 @@
       </p:sp>
       <p:sp>
         <p:nvSpPr>
-          <p:cNvPr id="1065905435" name="Slide Number Placeholder 6"/>
+          <p:cNvPr id="1122435892" name="Slide Number Placeholder 6"/>
           <p:cNvSpPr>
             <a:spLocks noGrp="1"/>
           </p:cNvSpPr>
@@ -3247,7 +3247,7 @@
       </p:sp>
       <p:sp>
         <p:nvSpPr>
-          <p:cNvPr id="41172897" name="TextBox 15"/>
+          <p:cNvPr id="964732029" name="TextBox 15"/>
           <p:cNvSpPr txBox="1"/>
           <p:nvPr/>
         </p:nvSpPr>
@@ -3351,7 +3351,7 @@
       </p:sp>
       <p:sp>
         <p:nvSpPr>
-          <p:cNvPr id="1932976632" name="TextBox 16"/>
+          <p:cNvPr id="1583924282" name="TextBox 16"/>
           <p:cNvSpPr txBox="1"/>
           <p:nvPr/>
         </p:nvSpPr>
@@ -3480,7 +3480,7 @@
       </p:grpSpPr>
       <p:pic>
         <p:nvPicPr>
-          <p:cNvPr id="1557853767" name="Picture 8" descr="HD-ShadowLong.png"/>
+          <p:cNvPr id="1321943642" name="Picture 8" descr="HD-ShadowLong.png"/>
           <p:cNvPicPr>
             <a:picLocks noChangeAspect="1"/>
           </p:cNvPicPr>
@@ -3502,7 +3502,7 @@
       </p:pic>
       <p:pic>
         <p:nvPicPr>
-          <p:cNvPr id="1613816746" name="Picture 9" descr="HD-ShadowShort.png"/>
+          <p:cNvPr id="1988248187" name="Picture 9" descr="HD-ShadowShort.png"/>
           <p:cNvPicPr>
             <a:picLocks noChangeAspect="1"/>
           </p:cNvPicPr>
@@ -3524,7 +3524,7 @@
       </p:pic>
       <p:sp>
         <p:nvSpPr>
-          <p:cNvPr id="260243805" name="Rectangle 10"/>
+          <p:cNvPr id="545825747" name="Rectangle 10"/>
           <p:cNvSpPr/>
           <p:nvPr/>
         </p:nvSpPr>
@@ -3565,7 +3565,7 @@
       </p:sp>
       <p:sp>
         <p:nvSpPr>
-          <p:cNvPr id="465444219" name="Rectangle 11"/>
+          <p:cNvPr id="355113912" name="Rectangle 11"/>
           <p:cNvSpPr/>
           <p:nvPr/>
         </p:nvSpPr>
@@ -3603,7 +3603,7 @@
       </p:sp>
       <p:sp>
         <p:nvSpPr>
-          <p:cNvPr id="378052845" name="Title 1"/>
+          <p:cNvPr id="496869761" name="Title 1"/>
           <p:cNvSpPr>
             <a:spLocks noGrp="1"/>
           </p:cNvSpPr>
@@ -3638,7 +3638,7 @@
       </p:sp>
       <p:sp>
         <p:nvSpPr>
-          <p:cNvPr id="1198799201" name="Text Placeholder 3"/>
+          <p:cNvPr id="1055780982" name="Text Placeholder 3"/>
           <p:cNvSpPr>
             <a:spLocks noGrp="1"/>
           </p:cNvSpPr>
@@ -3706,7 +3706,7 @@
       </p:sp>
       <p:sp>
         <p:nvSpPr>
-          <p:cNvPr id="1210466781" name="Date Placeholder 4"/>
+          <p:cNvPr id="1199449835" name="Date Placeholder 4"/>
           <p:cNvSpPr>
             <a:spLocks noGrp="1"/>
           </p:cNvSpPr>
@@ -3732,7 +3732,7 @@
       </p:sp>
       <p:sp>
         <p:nvSpPr>
-          <p:cNvPr id="851596857" name="Footer Placeholder 5"/>
+          <p:cNvPr id="1957512551" name="Footer Placeholder 5"/>
           <p:cNvSpPr>
             <a:spLocks noGrp="1"/>
           </p:cNvSpPr>
@@ -3754,7 +3754,7 @@
       </p:sp>
       <p:sp>
         <p:nvSpPr>
-          <p:cNvPr id="399834361" name="Slide Number Placeholder 6"/>
+          <p:cNvPr id="1371711154" name="Slide Number Placeholder 6"/>
           <p:cNvSpPr>
             <a:spLocks noGrp="1"/>
           </p:cNvSpPr>
@@ -3810,7 +3810,7 @@
       </p:grpSpPr>
       <p:pic>
         <p:nvPicPr>
-          <p:cNvPr id="1020389651" name="Picture 12" descr="HD-ShadowLong.png"/>
+          <p:cNvPr id="1349797715" name="Picture 12" descr="HD-ShadowLong.png"/>
           <p:cNvPicPr>
             <a:picLocks noChangeAspect="1"/>
           </p:cNvPicPr>
@@ -3832,7 +3832,7 @@
       </p:pic>
       <p:pic>
         <p:nvPicPr>
-          <p:cNvPr id="504807607" name="Picture 13" descr="HD-ShadowShort.png"/>
+          <p:cNvPr id="1265163642" name="Picture 13" descr="HD-ShadowShort.png"/>
           <p:cNvPicPr>
             <a:picLocks noChangeAspect="1"/>
           </p:cNvPicPr>
@@ -3854,7 +3854,7 @@
       </p:pic>
       <p:sp>
         <p:nvSpPr>
-          <p:cNvPr id="1819472790" name="Rectangle 15"/>
+          <p:cNvPr id="1356387955" name="Rectangle 15"/>
           <p:cNvSpPr/>
           <p:nvPr/>
         </p:nvSpPr>
@@ -3895,7 +3895,7 @@
       </p:sp>
       <p:sp>
         <p:nvSpPr>
-          <p:cNvPr id="461409714" name="Rectangle 16"/>
+          <p:cNvPr id="540101535" name="Rectangle 16"/>
           <p:cNvSpPr/>
           <p:nvPr/>
         </p:nvSpPr>
@@ -3933,7 +3933,7 @@
       </p:sp>
       <p:sp>
         <p:nvSpPr>
-          <p:cNvPr id="1989439033" name="Title 1"/>
+          <p:cNvPr id="55775338" name="Title 1"/>
           <p:cNvSpPr>
             <a:spLocks noGrp="1"/>
           </p:cNvSpPr>
@@ -3964,7 +3964,7 @@
       </p:sp>
       <p:sp>
         <p:nvSpPr>
-          <p:cNvPr id="1001313232" name="Text Placeholder 2"/>
+          <p:cNvPr id="17775352" name="Text Placeholder 2"/>
           <p:cNvSpPr>
             <a:spLocks noGrp="1"/>
           </p:cNvSpPr>
@@ -4038,7 +4038,7 @@
       </p:sp>
       <p:sp>
         <p:nvSpPr>
-          <p:cNvPr id="1705358639" name="Text Placeholder 3"/>
+          <p:cNvPr id="51948938" name="Text Placeholder 3"/>
           <p:cNvSpPr>
             <a:spLocks noGrp="1"/>
           </p:cNvSpPr>
@@ -4108,7 +4108,7 @@
       </p:sp>
       <p:sp>
         <p:nvSpPr>
-          <p:cNvPr id="695634624" name="Text Placeholder 4"/>
+          <p:cNvPr id="564145351" name="Text Placeholder 4"/>
           <p:cNvSpPr>
             <a:spLocks noGrp="1"/>
           </p:cNvSpPr>
@@ -4182,7 +4182,7 @@
       </p:sp>
       <p:sp>
         <p:nvSpPr>
-          <p:cNvPr id="121218934" name="Text Placeholder 3"/>
+          <p:cNvPr id="152838856" name="Text Placeholder 3"/>
           <p:cNvSpPr>
             <a:spLocks noGrp="1"/>
           </p:cNvSpPr>
@@ -4252,7 +4252,7 @@
       </p:sp>
       <p:sp>
         <p:nvSpPr>
-          <p:cNvPr id="727496642" name="Text Placeholder 4"/>
+          <p:cNvPr id="148838342" name="Text Placeholder 4"/>
           <p:cNvSpPr>
             <a:spLocks noGrp="1"/>
           </p:cNvSpPr>
@@ -4326,7 +4326,7 @@
       </p:sp>
       <p:sp>
         <p:nvSpPr>
-          <p:cNvPr id="645824123" name="Text Placeholder 3"/>
+          <p:cNvPr id="898975096" name="Text Placeholder 3"/>
           <p:cNvSpPr>
             <a:spLocks noGrp="1"/>
           </p:cNvSpPr>
@@ -4396,7 +4396,7 @@
       </p:sp>
       <p:sp>
         <p:nvSpPr>
-          <p:cNvPr id="835084389" name="Date Placeholder 2"/>
+          <p:cNvPr id="1488311384" name="Date Placeholder 2"/>
           <p:cNvSpPr>
             <a:spLocks noGrp="1"/>
           </p:cNvSpPr>
@@ -4422,7 +4422,7 @@
       </p:sp>
       <p:sp>
         <p:nvSpPr>
-          <p:cNvPr id="1755009473" name="Footer Placeholder 3"/>
+          <p:cNvPr id="341254329" name="Footer Placeholder 3"/>
           <p:cNvSpPr>
             <a:spLocks noGrp="1"/>
           </p:cNvSpPr>
@@ -4444,7 +4444,7 @@
       </p:sp>
       <p:sp>
         <p:nvSpPr>
-          <p:cNvPr id="2123628243" name="Slide Number Placeholder 4"/>
+          <p:cNvPr id="388518136" name="Slide Number Placeholder 4"/>
           <p:cNvSpPr>
             <a:spLocks noGrp="1"/>
           </p:cNvSpPr>
@@ -4495,7 +4495,7 @@
       </p:grpSpPr>
       <p:pic>
         <p:nvPicPr>
-          <p:cNvPr id="1048338108" name="Picture 14" descr="HD-ShadowLong.png"/>
+          <p:cNvPr id="2025116697" name="Picture 14" descr="HD-ShadowLong.png"/>
           <p:cNvPicPr>
             <a:picLocks noChangeAspect="1"/>
           </p:cNvPicPr>
@@ -4517,7 +4517,7 @@
       </p:pic>
       <p:pic>
         <p:nvPicPr>
-          <p:cNvPr id="1526310207" name="Picture 15" descr="HD-ShadowShort.png"/>
+          <p:cNvPr id="241189257" name="Picture 15" descr="HD-ShadowShort.png"/>
           <p:cNvPicPr>
             <a:picLocks noChangeAspect="1"/>
           </p:cNvPicPr>
@@ -4539,7 +4539,7 @@
       </p:pic>
       <p:sp>
         <p:nvSpPr>
-          <p:cNvPr id="1618852297" name="Rectangle 16"/>
+          <p:cNvPr id="954090862" name="Rectangle 16"/>
           <p:cNvSpPr/>
           <p:nvPr/>
         </p:nvSpPr>
@@ -4580,7 +4580,7 @@
       </p:sp>
       <p:sp>
         <p:nvSpPr>
-          <p:cNvPr id="500863528" name="Rectangle 17"/>
+          <p:cNvPr id="1243203097" name="Rectangle 17"/>
           <p:cNvSpPr/>
           <p:nvPr/>
         </p:nvSpPr>
@@ -4618,7 +4618,7 @@
       </p:sp>
       <p:sp>
         <p:nvSpPr>
-          <p:cNvPr id="160999972" name="Title 1"/>
+          <p:cNvPr id="817889252" name="Title 1"/>
           <p:cNvSpPr>
             <a:spLocks noGrp="1"/>
           </p:cNvSpPr>
@@ -4649,7 +4649,7 @@
       </p:sp>
       <p:sp>
         <p:nvSpPr>
-          <p:cNvPr id="150375264" name="Text Placeholder 2"/>
+          <p:cNvPr id="1955987288" name="Text Placeholder 2"/>
           <p:cNvSpPr>
             <a:spLocks noGrp="1"/>
           </p:cNvSpPr>
@@ -4723,7 +4723,7 @@
       </p:sp>
       <p:sp>
         <p:nvSpPr>
-          <p:cNvPr id="493169918" name="Picture Placeholder 2"/>
+          <p:cNvPr id="770286965" name="Picture Placeholder 2"/>
           <p:cNvSpPr>
             <a:spLocks noChangeAspect="1" noGrp="1"/>
           </p:cNvSpPr>
@@ -4805,7 +4805,7 @@
       </p:sp>
       <p:sp>
         <p:nvSpPr>
-          <p:cNvPr id="739336679" name="Text Placeholder 3"/>
+          <p:cNvPr id="268466834" name="Text Placeholder 3"/>
           <p:cNvSpPr>
             <a:spLocks noGrp="1"/>
           </p:cNvSpPr>
@@ -4875,7 +4875,7 @@
       </p:sp>
       <p:sp>
         <p:nvSpPr>
-          <p:cNvPr id="470812070" name="Text Placeholder 4"/>
+          <p:cNvPr id="2042476306" name="Text Placeholder 4"/>
           <p:cNvSpPr>
             <a:spLocks noGrp="1"/>
           </p:cNvSpPr>
@@ -4949,7 +4949,7 @@
       </p:sp>
       <p:sp>
         <p:nvSpPr>
-          <p:cNvPr id="1406605168" name="Picture Placeholder 2"/>
+          <p:cNvPr id="1755148989" name="Picture Placeholder 2"/>
           <p:cNvSpPr>
             <a:spLocks noChangeAspect="1" noGrp="1"/>
           </p:cNvSpPr>
@@ -5031,7 +5031,7 @@
       </p:sp>
       <p:sp>
         <p:nvSpPr>
-          <p:cNvPr id="1109552243" name="Text Placeholder 3"/>
+          <p:cNvPr id="18943585" name="Text Placeholder 3"/>
           <p:cNvSpPr>
             <a:spLocks noGrp="1"/>
           </p:cNvSpPr>
@@ -5101,7 +5101,7 @@
       </p:sp>
       <p:sp>
         <p:nvSpPr>
-          <p:cNvPr id="1588487040" name="Text Placeholder 4"/>
+          <p:cNvPr id="980377680" name="Text Placeholder 4"/>
           <p:cNvSpPr>
             <a:spLocks noGrp="1"/>
           </p:cNvSpPr>
@@ -5175,7 +5175,7 @@
       </p:sp>
       <p:sp>
         <p:nvSpPr>
-          <p:cNvPr id="443157596" name="Picture Placeholder 2"/>
+          <p:cNvPr id="1929398258" name="Picture Placeholder 2"/>
           <p:cNvSpPr>
             <a:spLocks noChangeAspect="1" noGrp="1"/>
           </p:cNvSpPr>
@@ -5257,7 +5257,7 @@
       </p:sp>
       <p:sp>
         <p:nvSpPr>
-          <p:cNvPr id="551241935" name="Text Placeholder 3"/>
+          <p:cNvPr id="2076614127" name="Text Placeholder 3"/>
           <p:cNvSpPr>
             <a:spLocks noGrp="1"/>
           </p:cNvSpPr>
@@ -5327,7 +5327,7 @@
       </p:sp>
       <p:sp>
         <p:nvSpPr>
-          <p:cNvPr id="2126915560" name="Date Placeholder 2"/>
+          <p:cNvPr id="679005494" name="Date Placeholder 2"/>
           <p:cNvSpPr>
             <a:spLocks noGrp="1"/>
           </p:cNvSpPr>
@@ -5353,7 +5353,7 @@
       </p:sp>
       <p:sp>
         <p:nvSpPr>
-          <p:cNvPr id="1374565076" name="Footer Placeholder 3"/>
+          <p:cNvPr id="140272645" name="Footer Placeholder 3"/>
           <p:cNvSpPr>
             <a:spLocks noGrp="1"/>
           </p:cNvSpPr>
@@ -5375,7 +5375,7 @@
       </p:sp>
       <p:sp>
         <p:nvSpPr>
-          <p:cNvPr id="33195259" name="Slide Number Placeholder 4"/>
+          <p:cNvPr id="1036449416" name="Slide Number Placeholder 4"/>
           <p:cNvSpPr>
             <a:spLocks noGrp="1"/>
           </p:cNvSpPr>
@@ -5426,7 +5426,7 @@
       </p:grpSpPr>
       <p:pic>
         <p:nvPicPr>
-          <p:cNvPr id="594530775" name="Picture 6" descr="HD-ShadowLong.png"/>
+          <p:cNvPr id="36418109" name="Picture 6" descr="HD-ShadowLong.png"/>
           <p:cNvPicPr>
             <a:picLocks noChangeAspect="1"/>
           </p:cNvPicPr>
@@ -5448,7 +5448,7 @@
       </p:pic>
       <p:pic>
         <p:nvPicPr>
-          <p:cNvPr id="200008313" name="Picture 7" descr="HD-ShadowShort.png"/>
+          <p:cNvPr id="165723357" name="Picture 7" descr="HD-ShadowShort.png"/>
           <p:cNvPicPr>
             <a:picLocks noChangeAspect="1"/>
           </p:cNvPicPr>
@@ -5470,7 +5470,7 @@
       </p:pic>
       <p:sp>
         <p:nvSpPr>
-          <p:cNvPr id="1317742323" name="Rectangle 8"/>
+          <p:cNvPr id="1032203253" name="Rectangle 8"/>
           <p:cNvSpPr/>
           <p:nvPr/>
         </p:nvSpPr>
@@ -5511,7 +5511,7 @@
       </p:sp>
       <p:sp>
         <p:nvSpPr>
-          <p:cNvPr id="1483767323" name="Rectangle 9"/>
+          <p:cNvPr id="1482143054" name="Rectangle 9"/>
           <p:cNvSpPr/>
           <p:nvPr/>
         </p:nvSpPr>
@@ -5549,7 +5549,7 @@
       </p:sp>
       <p:sp>
         <p:nvSpPr>
-          <p:cNvPr id="585930241" name="Title 1"/>
+          <p:cNvPr id="1587612478" name="Title 1"/>
           <p:cNvSpPr>
             <a:spLocks noGrp="1"/>
           </p:cNvSpPr>
@@ -5579,7 +5579,7 @@
       </p:sp>
       <p:sp>
         <p:nvSpPr>
-          <p:cNvPr id="1617601575" name="Vertical Text Placeholder 2"/>
+          <p:cNvPr id="1449659613" name="Vertical Text Placeholder 2"/>
           <p:cNvSpPr>
             <a:spLocks noGrp="1"/>
           </p:cNvSpPr>
@@ -5645,7 +5645,7 @@
       </p:sp>
       <p:sp>
         <p:nvSpPr>
-          <p:cNvPr id="1014432598" name="Date Placeholder 3"/>
+          <p:cNvPr id="1172411210" name="Date Placeholder 3"/>
           <p:cNvSpPr>
             <a:spLocks noGrp="1"/>
           </p:cNvSpPr>
@@ -5671,7 +5671,7 @@
       </p:sp>
       <p:sp>
         <p:nvSpPr>
-          <p:cNvPr id="15355779" name="Footer Placeholder 4"/>
+          <p:cNvPr id="1628539526" name="Footer Placeholder 4"/>
           <p:cNvSpPr>
             <a:spLocks noGrp="1"/>
           </p:cNvSpPr>
@@ -5693,7 +5693,7 @@
       </p:sp>
       <p:sp>
         <p:nvSpPr>
-          <p:cNvPr id="1246873674" name="Slide Number Placeholder 5"/>
+          <p:cNvPr id="1841953611" name="Slide Number Placeholder 5"/>
           <p:cNvSpPr>
             <a:spLocks noGrp="1"/>
           </p:cNvSpPr>
@@ -5744,7 +5744,7 @@
       </p:grpSpPr>
       <p:sp>
         <p:nvSpPr>
-          <p:cNvPr id="2132144021" name="Rectangle 6"/>
+          <p:cNvPr id="1194517991" name="Rectangle 6"/>
           <p:cNvSpPr/>
           <p:nvPr/>
         </p:nvSpPr>
@@ -5785,7 +5785,7 @@
       </p:sp>
       <p:sp>
         <p:nvSpPr>
-          <p:cNvPr id="1817050668" name="Rectangle 7"/>
+          <p:cNvPr id="3657084" name="Rectangle 7"/>
           <p:cNvSpPr/>
           <p:nvPr/>
         </p:nvSpPr>
@@ -5823,7 +5823,7 @@
       </p:sp>
       <p:sp>
         <p:nvSpPr>
-          <p:cNvPr id="1522301477" name="Vertical Title 1"/>
+          <p:cNvPr id="1700705188" name="Vertical Title 1"/>
           <p:cNvSpPr>
             <a:spLocks noGrp="1"/>
           </p:cNvSpPr>
@@ -5854,7 +5854,7 @@
       </p:sp>
       <p:sp>
         <p:nvSpPr>
-          <p:cNvPr id="788130762" name="Vertical Text Placeholder 2"/>
+          <p:cNvPr id="890772643" name="Vertical Text Placeholder 2"/>
           <p:cNvSpPr>
             <a:spLocks noGrp="1"/>
           </p:cNvSpPr>
@@ -5925,7 +5925,7 @@
       </p:sp>
       <p:sp>
         <p:nvSpPr>
-          <p:cNvPr id="306540877" name="Date Placeholder 3"/>
+          <p:cNvPr id="1482094764" name="Date Placeholder 3"/>
           <p:cNvSpPr>
             <a:spLocks noGrp="1"/>
           </p:cNvSpPr>
@@ -5956,7 +5956,7 @@
       </p:sp>
       <p:sp>
         <p:nvSpPr>
-          <p:cNvPr id="174038860" name="Footer Placeholder 4"/>
+          <p:cNvPr id="1354453286" name="Footer Placeholder 4"/>
           <p:cNvSpPr>
             <a:spLocks noGrp="1"/>
           </p:cNvSpPr>
@@ -5983,7 +5983,7 @@
       </p:sp>
       <p:sp>
         <p:nvSpPr>
-          <p:cNvPr id="411653559" name="Slide Number Placeholder 5"/>
+          <p:cNvPr id="122046452" name="Slide Number Placeholder 5"/>
           <p:cNvSpPr>
             <a:spLocks noGrp="1"/>
           </p:cNvSpPr>
@@ -6043,7 +6043,7 @@
       </p:grpSpPr>
       <p:pic>
         <p:nvPicPr>
-          <p:cNvPr id="1039976046" name="Picture 14" descr="HD-ShadowLong.png"/>
+          <p:cNvPr id="1414134059" name="Picture 14" descr="HD-ShadowLong.png"/>
           <p:cNvPicPr>
             <a:picLocks noChangeAspect="1"/>
           </p:cNvPicPr>
@@ -6065,7 +6065,7 @@
       </p:pic>
       <p:pic>
         <p:nvPicPr>
-          <p:cNvPr id="42167911" name="Picture 15" descr="HD-ShadowShort.png"/>
+          <p:cNvPr id="346934239" name="Picture 15" descr="HD-ShadowShort.png"/>
           <p:cNvPicPr>
             <a:picLocks noChangeAspect="1"/>
           </p:cNvPicPr>
@@ -6087,7 +6087,7 @@
       </p:pic>
       <p:sp>
         <p:nvSpPr>
-          <p:cNvPr id="55094836" name="Rectangle 16"/>
+          <p:cNvPr id="843553658" name="Rectangle 16"/>
           <p:cNvSpPr/>
           <p:nvPr/>
         </p:nvSpPr>
@@ -6128,7 +6128,7 @@
       </p:sp>
       <p:sp>
         <p:nvSpPr>
-          <p:cNvPr id="1695470314" name="Rectangle 17"/>
+          <p:cNvPr id="2046760464" name="Rectangle 17"/>
           <p:cNvSpPr/>
           <p:nvPr/>
         </p:nvSpPr>
@@ -6166,7 +6166,7 @@
       </p:sp>
       <p:sp>
         <p:nvSpPr>
-          <p:cNvPr id="1515427572" name="Title 1"/>
+          <p:cNvPr id="1358188980" name="Title 1"/>
           <p:cNvSpPr>
             <a:spLocks noGrp="1"/>
           </p:cNvSpPr>
@@ -6192,7 +6192,7 @@
       </p:sp>
       <p:sp>
         <p:nvSpPr>
-          <p:cNvPr id="500602743" name="Content Placeholder 2"/>
+          <p:cNvPr id="606792868" name="Content Placeholder 2"/>
           <p:cNvSpPr>
             <a:spLocks noGrp="1"/>
           </p:cNvSpPr>
@@ -6258,7 +6258,7 @@
       </p:sp>
       <p:sp>
         <p:nvSpPr>
-          <p:cNvPr id="1479377853" name="Date Placeholder 3"/>
+          <p:cNvPr id="1165250028" name="Date Placeholder 3"/>
           <p:cNvSpPr>
             <a:spLocks noGrp="1"/>
           </p:cNvSpPr>
@@ -6284,7 +6284,7 @@
       </p:sp>
       <p:sp>
         <p:nvSpPr>
-          <p:cNvPr id="822577993" name="Footer Placeholder 4"/>
+          <p:cNvPr id="1268108060" name="Footer Placeholder 4"/>
           <p:cNvSpPr>
             <a:spLocks noGrp="1"/>
           </p:cNvSpPr>
@@ -6306,7 +6306,7 @@
       </p:sp>
       <p:sp>
         <p:nvSpPr>
-          <p:cNvPr id="2013396611" name="Slide Number Placeholder 5"/>
+          <p:cNvPr id="2140226862" name="Slide Number Placeholder 5"/>
           <p:cNvSpPr>
             <a:spLocks noGrp="1"/>
           </p:cNvSpPr>
@@ -6357,7 +6357,7 @@
       </p:grpSpPr>
       <p:pic>
         <p:nvPicPr>
-          <p:cNvPr id="1138842648" name="Picture 6" descr="HD-ShadowLong.png"/>
+          <p:cNvPr id="138529768" name="Picture 6" descr="HD-ShadowLong.png"/>
           <p:cNvPicPr>
             <a:picLocks noChangeAspect="1"/>
           </p:cNvPicPr>
@@ -6379,7 +6379,7 @@
       </p:pic>
       <p:pic>
         <p:nvPicPr>
-          <p:cNvPr id="271986155" name="Picture 7" descr="HD-ShadowShort.png"/>
+          <p:cNvPr id="1666246801" name="Picture 7" descr="HD-ShadowShort.png"/>
           <p:cNvPicPr>
             <a:picLocks noChangeAspect="1"/>
           </p:cNvPicPr>
@@ -6401,7 +6401,7 @@
       </p:pic>
       <p:sp>
         <p:nvSpPr>
-          <p:cNvPr id="958570159" name="Rectangle 8"/>
+          <p:cNvPr id="771321538" name="Rectangle 8"/>
           <p:cNvSpPr/>
           <p:nvPr/>
         </p:nvSpPr>
@@ -6442,7 +6442,7 @@
       </p:sp>
       <p:sp>
         <p:nvSpPr>
-          <p:cNvPr id="599981173" name="Rectangle 9"/>
+          <p:cNvPr id="696525487" name="Rectangle 9"/>
           <p:cNvSpPr/>
           <p:nvPr/>
         </p:nvSpPr>
@@ -6480,7 +6480,7 @@
       </p:sp>
       <p:sp>
         <p:nvSpPr>
-          <p:cNvPr id="922103101" name="Title 1"/>
+          <p:cNvPr id="1166024620" name="Title 1"/>
           <p:cNvSpPr>
             <a:spLocks noGrp="1"/>
           </p:cNvSpPr>
@@ -6517,7 +6517,7 @@
       </p:sp>
       <p:sp>
         <p:nvSpPr>
-          <p:cNvPr id="364097668" name="Text Placeholder 2"/>
+          <p:cNvPr id="81473258" name="Text Placeholder 2"/>
           <p:cNvSpPr>
             <a:spLocks noGrp="1"/>
           </p:cNvSpPr>
@@ -6641,7 +6641,7 @@
       </p:sp>
       <p:sp>
         <p:nvSpPr>
-          <p:cNvPr id="827717813" name="Date Placeholder 3"/>
+          <p:cNvPr id="994307595" name="Date Placeholder 3"/>
           <p:cNvSpPr>
             <a:spLocks noGrp="1"/>
           </p:cNvSpPr>
@@ -6667,7 +6667,7 @@
       </p:sp>
       <p:sp>
         <p:nvSpPr>
-          <p:cNvPr id="931311884" name="Footer Placeholder 4"/>
+          <p:cNvPr id="1410104720" name="Footer Placeholder 4"/>
           <p:cNvSpPr>
             <a:spLocks noGrp="1"/>
           </p:cNvSpPr>
@@ -6689,7 +6689,7 @@
       </p:sp>
       <p:sp>
         <p:nvSpPr>
-          <p:cNvPr id="1034806589" name="Slide Number Placeholder 5"/>
+          <p:cNvPr id="896154127" name="Slide Number Placeholder 5"/>
           <p:cNvSpPr>
             <a:spLocks noGrp="1"/>
           </p:cNvSpPr>
@@ -6745,7 +6745,7 @@
       </p:grpSpPr>
       <p:pic>
         <p:nvPicPr>
-          <p:cNvPr id="111791043" name="Picture 7" descr="HD-ShadowLong.png"/>
+          <p:cNvPr id="919548034" name="Picture 7" descr="HD-ShadowLong.png"/>
           <p:cNvPicPr>
             <a:picLocks noChangeAspect="1"/>
           </p:cNvPicPr>
@@ -6767,7 +6767,7 @@
       </p:pic>
       <p:pic>
         <p:nvPicPr>
-          <p:cNvPr id="1519935604" name="Picture 8" descr="HD-ShadowShort.png"/>
+          <p:cNvPr id="1920338069" name="Picture 8" descr="HD-ShadowShort.png"/>
           <p:cNvPicPr>
             <a:picLocks noChangeAspect="1"/>
           </p:cNvPicPr>
@@ -6789,7 +6789,7 @@
       </p:pic>
       <p:sp>
         <p:nvSpPr>
-          <p:cNvPr id="1809701863" name="Rectangle 9"/>
+          <p:cNvPr id="108033058" name="Rectangle 9"/>
           <p:cNvSpPr/>
           <p:nvPr/>
         </p:nvSpPr>
@@ -6830,7 +6830,7 @@
       </p:sp>
       <p:sp>
         <p:nvSpPr>
-          <p:cNvPr id="830194904" name="Rectangle 10"/>
+          <p:cNvPr id="1941279721" name="Rectangle 10"/>
           <p:cNvSpPr/>
           <p:nvPr/>
         </p:nvSpPr>
@@ -6868,7 +6868,7 @@
       </p:sp>
       <p:sp>
         <p:nvSpPr>
-          <p:cNvPr id="694352783" name="Title 1"/>
+          <p:cNvPr id="546448116" name="Title 1"/>
           <p:cNvSpPr>
             <a:spLocks noGrp="1"/>
           </p:cNvSpPr>
@@ -6894,7 +6894,7 @@
       </p:sp>
       <p:sp>
         <p:nvSpPr>
-          <p:cNvPr id="1781480468" name="Content Placeholder 2"/>
+          <p:cNvPr id="258564909" name="Content Placeholder 2"/>
           <p:cNvSpPr>
             <a:spLocks noGrp="1"/>
           </p:cNvSpPr>
@@ -6965,7 +6965,7 @@
       </p:sp>
       <p:sp>
         <p:nvSpPr>
-          <p:cNvPr id="1348284400" name="Content Placeholder 3"/>
+          <p:cNvPr id="1562894312" name="Content Placeholder 3"/>
           <p:cNvSpPr>
             <a:spLocks noGrp="1"/>
           </p:cNvSpPr>
@@ -7036,7 +7036,7 @@
       </p:sp>
       <p:sp>
         <p:nvSpPr>
-          <p:cNvPr id="1414966740" name="Date Placeholder 4"/>
+          <p:cNvPr id="1207491865" name="Date Placeholder 4"/>
           <p:cNvSpPr>
             <a:spLocks noGrp="1"/>
           </p:cNvSpPr>
@@ -7062,7 +7062,7 @@
       </p:sp>
       <p:sp>
         <p:nvSpPr>
-          <p:cNvPr id="2066206577" name="Footer Placeholder 5"/>
+          <p:cNvPr id="1272982945" name="Footer Placeholder 5"/>
           <p:cNvSpPr>
             <a:spLocks noGrp="1"/>
           </p:cNvSpPr>
@@ -7084,7 +7084,7 @@
       </p:sp>
       <p:sp>
         <p:nvSpPr>
-          <p:cNvPr id="1606035843" name="Slide Number Placeholder 6"/>
+          <p:cNvPr id="896155233" name="Slide Number Placeholder 6"/>
           <p:cNvSpPr>
             <a:spLocks noGrp="1"/>
           </p:cNvSpPr>
@@ -7135,7 +7135,7 @@
       </p:grpSpPr>
       <p:pic>
         <p:nvPicPr>
-          <p:cNvPr id="890017046" name="Picture 9" descr="HD-ShadowLong.png"/>
+          <p:cNvPr id="1042211627" name="Picture 9" descr="HD-ShadowLong.png"/>
           <p:cNvPicPr>
             <a:picLocks noChangeAspect="1"/>
           </p:cNvPicPr>
@@ -7157,7 +7157,7 @@
       </p:pic>
       <p:pic>
         <p:nvPicPr>
-          <p:cNvPr id="751272269" name="Picture 10" descr="HD-ShadowShort.png"/>
+          <p:cNvPr id="1658991798" name="Picture 10" descr="HD-ShadowShort.png"/>
           <p:cNvPicPr>
             <a:picLocks noChangeAspect="1"/>
           </p:cNvPicPr>
@@ -7179,7 +7179,7 @@
       </p:pic>
       <p:sp>
         <p:nvSpPr>
-          <p:cNvPr id="1281580172" name="Rectangle 11"/>
+          <p:cNvPr id="168923052" name="Rectangle 11"/>
           <p:cNvSpPr/>
           <p:nvPr/>
         </p:nvSpPr>
@@ -7220,7 +7220,7 @@
       </p:sp>
       <p:sp>
         <p:nvSpPr>
-          <p:cNvPr id="484302569" name="Rectangle 12"/>
+          <p:cNvPr id="1833220948" name="Rectangle 12"/>
           <p:cNvSpPr/>
           <p:nvPr/>
         </p:nvSpPr>
@@ -7258,7 +7258,7 @@
       </p:sp>
       <p:sp>
         <p:nvSpPr>
-          <p:cNvPr id="1592470589" name="Title 1"/>
+          <p:cNvPr id="507038339" name="Title 1"/>
           <p:cNvSpPr>
             <a:spLocks noGrp="1"/>
           </p:cNvSpPr>
@@ -7289,7 +7289,7 @@
       </p:sp>
       <p:sp>
         <p:nvSpPr>
-          <p:cNvPr id="192628180" name="Text Placeholder 2"/>
+          <p:cNvPr id="528773438" name="Text Placeholder 2"/>
           <p:cNvSpPr>
             <a:spLocks noGrp="1"/>
           </p:cNvSpPr>
@@ -7357,7 +7357,7 @@
       </p:sp>
       <p:sp>
         <p:nvSpPr>
-          <p:cNvPr id="2102057840" name="Content Placeholder 3"/>
+          <p:cNvPr id="143159809" name="Content Placeholder 3"/>
           <p:cNvSpPr>
             <a:spLocks noGrp="1"/>
           </p:cNvSpPr>
@@ -7428,7 +7428,7 @@
       </p:sp>
       <p:sp>
         <p:nvSpPr>
-          <p:cNvPr id="1704342284" name="Text Placeholder 4"/>
+          <p:cNvPr id="1212627445" name="Text Placeholder 4"/>
           <p:cNvSpPr>
             <a:spLocks noGrp="1"/>
           </p:cNvSpPr>
@@ -7496,7 +7496,7 @@
       </p:sp>
       <p:sp>
         <p:nvSpPr>
-          <p:cNvPr id="1492335335" name="Content Placeholder 5"/>
+          <p:cNvPr id="879531189" name="Content Placeholder 5"/>
           <p:cNvSpPr>
             <a:spLocks noGrp="1"/>
           </p:cNvSpPr>
@@ -7567,7 +7567,7 @@
       </p:sp>
       <p:sp>
         <p:nvSpPr>
-          <p:cNvPr id="2103456775" name="Date Placeholder 6"/>
+          <p:cNvPr id="1055259405" name="Date Placeholder 6"/>
           <p:cNvSpPr>
             <a:spLocks noGrp="1"/>
           </p:cNvSpPr>
@@ -7593,7 +7593,7 @@
       </p:sp>
       <p:sp>
         <p:nvSpPr>
-          <p:cNvPr id="1934023252" name="Footer Placeholder 7"/>
+          <p:cNvPr id="1102643908" name="Footer Placeholder 7"/>
           <p:cNvSpPr>
             <a:spLocks noGrp="1"/>
           </p:cNvSpPr>
@@ -7615,7 +7615,7 @@
       </p:sp>
       <p:sp>
         <p:nvSpPr>
-          <p:cNvPr id="2006940143" name="Slide Number Placeholder 8"/>
+          <p:cNvPr id="812783768" name="Slide Number Placeholder 8"/>
           <p:cNvSpPr>
             <a:spLocks noGrp="1"/>
           </p:cNvSpPr>
@@ -7666,7 +7666,7 @@
       </p:grpSpPr>
       <p:pic>
         <p:nvPicPr>
-          <p:cNvPr id="1863788738" name="Picture 5" descr="HD-ShadowLong.png"/>
+          <p:cNvPr id="1782245974" name="Picture 5" descr="HD-ShadowLong.png"/>
           <p:cNvPicPr>
             <a:picLocks noChangeAspect="1"/>
           </p:cNvPicPr>
@@ -7688,7 +7688,7 @@
       </p:pic>
       <p:pic>
         <p:nvPicPr>
-          <p:cNvPr id="2127295648" name="Picture 6" descr="HD-ShadowShort.png"/>
+          <p:cNvPr id="1685598967" name="Picture 6" descr="HD-ShadowShort.png"/>
           <p:cNvPicPr>
             <a:picLocks noChangeAspect="1"/>
           </p:cNvPicPr>
@@ -7710,7 +7710,7 @@
       </p:pic>
       <p:sp>
         <p:nvSpPr>
-          <p:cNvPr id="1908021520" name="Rectangle 7"/>
+          <p:cNvPr id="432628426" name="Rectangle 7"/>
           <p:cNvSpPr/>
           <p:nvPr/>
         </p:nvSpPr>
@@ -7751,7 +7751,7 @@
       </p:sp>
       <p:sp>
         <p:nvSpPr>
-          <p:cNvPr id="1231909603" name="Rectangle 8"/>
+          <p:cNvPr id="1185589091" name="Rectangle 8"/>
           <p:cNvSpPr/>
           <p:nvPr/>
         </p:nvSpPr>
@@ -7789,7 +7789,7 @@
       </p:sp>
       <p:sp>
         <p:nvSpPr>
-          <p:cNvPr id="1168926255" name="Title 1"/>
+          <p:cNvPr id="439069510" name="Title 1"/>
           <p:cNvSpPr>
             <a:spLocks noGrp="1"/>
           </p:cNvSpPr>
@@ -7815,7 +7815,7 @@
       </p:sp>
       <p:sp>
         <p:nvSpPr>
-          <p:cNvPr id="1937609024" name="Date Placeholder 2"/>
+          <p:cNvPr id="1275759498" name="Date Placeholder 2"/>
           <p:cNvSpPr>
             <a:spLocks noGrp="1"/>
           </p:cNvSpPr>
@@ -7841,7 +7841,7 @@
       </p:sp>
       <p:sp>
         <p:nvSpPr>
-          <p:cNvPr id="482057560" name="Footer Placeholder 3"/>
+          <p:cNvPr id="1463236284" name="Footer Placeholder 3"/>
           <p:cNvSpPr>
             <a:spLocks noGrp="1"/>
           </p:cNvSpPr>
@@ -7863,7 +7863,7 @@
       </p:sp>
       <p:sp>
         <p:nvSpPr>
-          <p:cNvPr id="1047623905" name="Slide Number Placeholder 4"/>
+          <p:cNvPr id="634103476" name="Slide Number Placeholder 4"/>
           <p:cNvSpPr>
             <a:spLocks noGrp="1"/>
           </p:cNvSpPr>
@@ -7914,7 +7914,7 @@
       </p:grpSpPr>
       <p:pic>
         <p:nvPicPr>
-          <p:cNvPr id="335975997" name="Picture 4" descr="HD-ShadowShort.png"/>
+          <p:cNvPr id="1987658235" name="Picture 4" descr="HD-ShadowShort.png"/>
           <p:cNvPicPr>
             <a:picLocks noChangeAspect="1"/>
           </p:cNvPicPr>
@@ -7936,7 +7936,7 @@
       </p:pic>
       <p:sp>
         <p:nvSpPr>
-          <p:cNvPr id="1204008860" name="Rectangle 5"/>
+          <p:cNvPr id="112259942" name="Rectangle 5"/>
           <p:cNvSpPr/>
           <p:nvPr/>
         </p:nvSpPr>
@@ -7974,7 +7974,7 @@
       </p:sp>
       <p:sp>
         <p:nvSpPr>
-          <p:cNvPr id="428453466" name="Date Placeholder 1"/>
+          <p:cNvPr id="404600492" name="Date Placeholder 1"/>
           <p:cNvSpPr>
             <a:spLocks noGrp="1"/>
           </p:cNvSpPr>
@@ -8000,7 +8000,7 @@
       </p:sp>
       <p:sp>
         <p:nvSpPr>
-          <p:cNvPr id="2099541744" name="Footer Placeholder 2"/>
+          <p:cNvPr id="1928679522" name="Footer Placeholder 2"/>
           <p:cNvSpPr>
             <a:spLocks noGrp="1"/>
           </p:cNvSpPr>
@@ -8022,7 +8022,7 @@
       </p:sp>
       <p:sp>
         <p:nvSpPr>
-          <p:cNvPr id="1588148704" name="Slide Number Placeholder 3"/>
+          <p:cNvPr id="269030328" name="Slide Number Placeholder 3"/>
           <p:cNvSpPr>
             <a:spLocks noGrp="1"/>
           </p:cNvSpPr>
@@ -8073,7 +8073,7 @@
       </p:grpSpPr>
       <p:pic>
         <p:nvPicPr>
-          <p:cNvPr id="1555427232" name="Picture 7" descr="HD-ShadowLong.png"/>
+          <p:cNvPr id="194990275" name="Picture 7" descr="HD-ShadowLong.png"/>
           <p:cNvPicPr>
             <a:picLocks noChangeAspect="1"/>
           </p:cNvPicPr>
@@ -8095,7 +8095,7 @@
       </p:pic>
       <p:pic>
         <p:nvPicPr>
-          <p:cNvPr id="1913786001" name="Picture 8" descr="HD-ShadowShort.png"/>
+          <p:cNvPr id="1279894507" name="Picture 8" descr="HD-ShadowShort.png"/>
           <p:cNvPicPr>
             <a:picLocks noChangeAspect="1"/>
           </p:cNvPicPr>
@@ -8117,7 +8117,7 @@
       </p:pic>
       <p:sp>
         <p:nvSpPr>
-          <p:cNvPr id="200730199" name="Rectangle 9"/>
+          <p:cNvPr id="2043073624" name="Rectangle 9"/>
           <p:cNvSpPr/>
           <p:nvPr/>
         </p:nvSpPr>
@@ -8158,7 +8158,7 @@
       </p:sp>
       <p:sp>
         <p:nvSpPr>
-          <p:cNvPr id="1330798151" name="Rectangle 10"/>
+          <p:cNvPr id="301696836" name="Rectangle 10"/>
           <p:cNvSpPr/>
           <p:nvPr/>
         </p:nvSpPr>
@@ -8196,7 +8196,7 @@
       </p:sp>
       <p:sp>
         <p:nvSpPr>
-          <p:cNvPr id="71572523" name="Title 1"/>
+          <p:cNvPr id="1426398279" name="Title 1"/>
           <p:cNvSpPr>
             <a:spLocks noGrp="1"/>
           </p:cNvSpPr>
@@ -8233,7 +8233,7 @@
       </p:sp>
       <p:sp>
         <p:nvSpPr>
-          <p:cNvPr id="1770555563" name="Content Placeholder 2"/>
+          <p:cNvPr id="68288078" name="Content Placeholder 2"/>
           <p:cNvSpPr>
             <a:spLocks noGrp="1"/>
           </p:cNvSpPr>
@@ -8304,7 +8304,7 @@
       </p:sp>
       <p:sp>
         <p:nvSpPr>
-          <p:cNvPr id="881422968" name="Text Placeholder 3"/>
+          <p:cNvPr id="319088323" name="Text Placeholder 3"/>
           <p:cNvSpPr>
             <a:spLocks noGrp="1"/>
           </p:cNvSpPr>
@@ -8372,7 +8372,7 @@
       </p:sp>
       <p:sp>
         <p:nvSpPr>
-          <p:cNvPr id="1648532415" name="Date Placeholder 4"/>
+          <p:cNvPr id="1487315620" name="Date Placeholder 4"/>
           <p:cNvSpPr>
             <a:spLocks noGrp="1"/>
           </p:cNvSpPr>
@@ -8398,7 +8398,7 @@
       </p:sp>
       <p:sp>
         <p:nvSpPr>
-          <p:cNvPr id="860267460" name="Footer Placeholder 5"/>
+          <p:cNvPr id="2139667072" name="Footer Placeholder 5"/>
           <p:cNvSpPr>
             <a:spLocks noGrp="1"/>
           </p:cNvSpPr>
@@ -8420,7 +8420,7 @@
       </p:sp>
       <p:sp>
         <p:nvSpPr>
-          <p:cNvPr id="1143132646" name="Slide Number Placeholder 6"/>
+          <p:cNvPr id="922021882" name="Slide Number Placeholder 6"/>
           <p:cNvSpPr>
             <a:spLocks noGrp="1"/>
           </p:cNvSpPr>
@@ -8471,7 +8471,7 @@
       </p:grpSpPr>
       <p:pic>
         <p:nvPicPr>
-          <p:cNvPr id="1554537630" name="Picture 7" descr="HD-ShadowLong.png"/>
+          <p:cNvPr id="1475428653" name="Picture 7" descr="HD-ShadowLong.png"/>
           <p:cNvPicPr>
             <a:picLocks noChangeAspect="1"/>
           </p:cNvPicPr>
@@ -8493,7 +8493,7 @@
       </p:pic>
       <p:pic>
         <p:nvPicPr>
-          <p:cNvPr id="823221627" name="Picture 8" descr="HD-ShadowShort.png"/>
+          <p:cNvPr id="342011102" name="Picture 8" descr="HD-ShadowShort.png"/>
           <p:cNvPicPr>
             <a:picLocks noChangeAspect="1"/>
           </p:cNvPicPr>
@@ -8515,7 +8515,7 @@
       </p:pic>
       <p:sp>
         <p:nvSpPr>
-          <p:cNvPr id="94168257" name="Rectangle 9"/>
+          <p:cNvPr id="1842717191" name="Rectangle 9"/>
           <p:cNvSpPr/>
           <p:nvPr/>
         </p:nvSpPr>
@@ -8556,7 +8556,7 @@
       </p:sp>
       <p:sp>
         <p:nvSpPr>
-          <p:cNvPr id="1583246927" name="Rectangle 10"/>
+          <p:cNvPr id="1073730678" name="Rectangle 10"/>
           <p:cNvSpPr/>
           <p:nvPr/>
         </p:nvSpPr>
@@ -8594,7 +8594,7 @@
       </p:sp>
       <p:sp>
         <p:nvSpPr>
-          <p:cNvPr id="1356748975" name="Title 1"/>
+          <p:cNvPr id="1522164944" name="Title 1"/>
           <p:cNvSpPr>
             <a:spLocks noGrp="1"/>
           </p:cNvSpPr>
@@ -8631,7 +8631,7 @@
       </p:sp>
       <p:sp>
         <p:nvSpPr>
-          <p:cNvPr id="2392098" name="Picture Placeholder 2"/>
+          <p:cNvPr id="1951347225" name="Picture Placeholder 2"/>
           <p:cNvSpPr>
             <a:spLocks noChangeAspect="1" noGrp="1"/>
           </p:cNvSpPr>
@@ -8713,7 +8713,7 @@
       </p:sp>
       <p:sp>
         <p:nvSpPr>
-          <p:cNvPr id="1820121339" name="Text Placeholder 3"/>
+          <p:cNvPr id="371117697" name="Text Placeholder 3"/>
           <p:cNvSpPr>
             <a:spLocks noGrp="1"/>
           </p:cNvSpPr>
@@ -8781,7 +8781,7 @@
       </p:sp>
       <p:sp>
         <p:nvSpPr>
-          <p:cNvPr id="2122894859" name="Date Placeholder 4"/>
+          <p:cNvPr id="1183476861" name="Date Placeholder 4"/>
           <p:cNvSpPr>
             <a:spLocks noGrp="1"/>
           </p:cNvSpPr>
@@ -8807,7 +8807,7 @@
       </p:sp>
       <p:sp>
         <p:nvSpPr>
-          <p:cNvPr id="193172544" name="Footer Placeholder 5"/>
+          <p:cNvPr id="812511953" name="Footer Placeholder 5"/>
           <p:cNvSpPr>
             <a:spLocks noGrp="1"/>
           </p:cNvSpPr>
@@ -8829,7 +8829,7 @@
       </p:sp>
       <p:sp>
         <p:nvSpPr>
-          <p:cNvPr id="200124782" name="Slide Number Placeholder 6"/>
+          <p:cNvPr id="1228999749" name="Slide Number Placeholder 6"/>
           <p:cNvSpPr>
             <a:spLocks noGrp="1"/>
           </p:cNvSpPr>
@@ -8885,7 +8885,7 @@
       </p:grpSpPr>
       <p:pic>
         <p:nvPicPr>
-          <p:cNvPr id="1907738070" name="Picture 6" descr="hashOverlay-FullResolve.png"/>
+          <p:cNvPr id="1361370531" name="Picture 6" descr="hashOverlay-FullResolve.png"/>
           <p:cNvPicPr>
             <a:picLocks noChangeAspect="1"/>
           </p:cNvPicPr>
@@ -8909,7 +8909,7 @@
       </p:pic>
       <p:sp>
         <p:nvSpPr>
-          <p:cNvPr id="789169213" name="Title Placeholder 1"/>
+          <p:cNvPr id="1983798839" name="Title Placeholder 1"/>
           <p:cNvSpPr>
             <a:spLocks noGrp="1"/>
           </p:cNvSpPr>
@@ -8945,7 +8945,7 @@
       </p:sp>
       <p:sp>
         <p:nvSpPr>
-          <p:cNvPr id="2142965553" name="Text Placeholder 2"/>
+          <p:cNvPr id="55189831" name="Text Placeholder 2"/>
           <p:cNvSpPr>
             <a:spLocks noGrp="1"/>
           </p:cNvSpPr>
@@ -9021,7 +9021,7 @@
       </p:sp>
       <p:sp>
         <p:nvSpPr>
-          <p:cNvPr id="1406364280" name="Date Placeholder 3"/>
+          <p:cNvPr id="387665419" name="Date Placeholder 3"/>
           <p:cNvSpPr>
             <a:spLocks noGrp="1"/>
           </p:cNvSpPr>
@@ -9065,7 +9065,7 @@
       </p:sp>
       <p:sp>
         <p:nvSpPr>
-          <p:cNvPr id="1667588972" name="Footer Placeholder 4"/>
+          <p:cNvPr id="1493771162" name="Footer Placeholder 4"/>
           <p:cNvSpPr>
             <a:spLocks noGrp="1"/>
           </p:cNvSpPr>
@@ -9105,7 +9105,7 @@
       </p:sp>
       <p:sp>
         <p:nvSpPr>
-          <p:cNvPr id="1219637287" name="Slide Number Placeholder 5"/>
+          <p:cNvPr id="2146597061" name="Slide Number Placeholder 5"/>
           <p:cNvSpPr>
             <a:spLocks noGrp="1"/>
           </p:cNvSpPr>
@@ -9505,7 +9505,7 @@
       </p:grpSpPr>
       <p:sp>
         <p:nvSpPr>
-          <p:cNvPr id="1208705062" name="Заголовок 1"/>
+          <p:cNvPr id="194431685" name="Заголовок 1"/>
           <p:cNvSpPr>
             <a:spLocks noGrp="1"/>
           </p:cNvSpPr>
@@ -9542,7 +9542,7 @@
       </p:sp>
       <p:sp>
         <p:nvSpPr>
-          <p:cNvPr id="1196660029" name="Подзаголовок 2"/>
+          <p:cNvPr id="182112916" name="Подзаголовок 2"/>
           <p:cNvSpPr>
             <a:spLocks noGrp="1"/>
           </p:cNvSpPr>
@@ -9585,7 +9585,15 @@
                   <a:schemeClr val="bg1"/>
                 </a:solidFill>
               </a:rPr>
-              <a:t>Сделал: студент 2 курса магистратуры 11 группа Старухин Данила Михайлович</a:t>
+              <a:t>Сделал: студент 2 курса магистратуры 11 группы</a:t>
+            </a:r>
+            <a:r>
+              <a:rPr lang="ru-RU">
+                <a:solidFill>
+                  <a:schemeClr val="bg1"/>
+                </a:solidFill>
+              </a:rPr>
+              <a:t> Старухин Данила Михайлович</a:t>
             </a:r>
             <a:endParaRPr/>
           </a:p>
@@ -9599,7 +9607,7 @@
                   <a:schemeClr val="bg1"/>
                 </a:solidFill>
               </a:rPr>
-              <a:t>Руководитель Авсеева О.В.</a:t>
+              <a:t>Руководитель: Авсеева О.В.</a:t>
             </a:r>
             <a:endParaRPr/>
           </a:p>
@@ -9673,7 +9681,7 @@
       </p:grpSpPr>
       <p:sp>
         <p:nvSpPr>
-          <p:cNvPr id="589820904" name="Заголовок 1"/>
+          <p:cNvPr id="281281277" name="Заголовок 1"/>
           <p:cNvSpPr>
             <a:spLocks noGrp="1"/>
           </p:cNvSpPr>
@@ -9683,7 +9691,9 @@
         </p:nvSpPr>
         <p:spPr bwMode="auto"/>
         <p:txBody>
-          <a:bodyPr/>
+          <a:bodyPr vertOverflow="overflow" horzOverflow="overflow" vert="horz" wrap="square" lIns="91440" tIns="45720" rIns="91440" bIns="45720" numCol="1" spcCol="0" rtlCol="0" fromWordArt="0" anchor="ctr" anchorCtr="0" forceAA="0" upright="0" compatLnSpc="0">
+            <a:normAutofit fontScale="90000" lnSpcReduction="2000"/>
+          </a:bodyPr>
           <a:lstStyle/>
           <a:p>
             <a:pPr>
@@ -9702,11 +9712,15 @@
             </a:r>
             <a:r>
               <a:rPr lang="ru-RU"/>
-              <a:t>: </a:t>
+              <a:t>: Интерконнект между </a:t>
             </a:r>
             <a:r>
               <a:rPr lang="en-US"/>
-              <a:t>Fetcher &amp; Decoder</a:t>
+              <a:t>LSU </a:t>
+            </a:r>
+            <a:r>
+              <a:rPr lang="ru-RU"/>
+              <a:t>и потоками</a:t>
             </a:r>
             <a:endParaRPr/>
           </a:p>
@@ -9714,7 +9728,7 @@
       </p:sp>
       <p:sp>
         <p:nvSpPr>
-          <p:cNvPr id="1247729536" name="Объект 2"/>
+          <p:cNvPr id="788302279" name="Объект 2"/>
           <p:cNvSpPr>
             <a:spLocks noGrp="1"/>
           </p:cNvSpPr>
@@ -9725,7 +9739,7 @@
         <p:spPr bwMode="auto">
           <a:xfrm flipH="0" flipV="0">
             <a:off x="680320" y="2336872"/>
-            <a:ext cx="5044973" cy="3599316"/>
+            <a:ext cx="4409973" cy="3599316"/>
           </a:xfrm>
         </p:spPr>
         <p:txBody>
@@ -9736,12 +9750,20 @@
               <a:defRPr/>
             </a:pPr>
             <a:r>
+              <a:rPr lang="ru-RU">
+                <a:solidFill>
+                  <a:schemeClr val="bg1"/>
+                </a:solidFill>
+              </a:rPr>
+              <a:t>Арбитр собирает с потоков данные и</a:t>
+            </a:r>
+            <a:r>
               <a:rPr lang="en-US">
                 <a:solidFill>
                   <a:schemeClr val="bg1"/>
                 </a:solidFill>
               </a:rPr>
-              <a:t>Fetcher – </a:t>
+              <a:t>/</a:t>
             </a:r>
             <a:r>
               <a:rPr lang="ru-RU">
@@ -9749,7 +9771,15 @@
                   <a:schemeClr val="bg1"/>
                 </a:solidFill>
               </a:rPr>
-              <a:t>блок захвата инструкций из памяти;</a:t>
+              <a:t>или</a:t>
+            </a:r>
+            <a:r>
+              <a:rPr lang="ru-RU">
+                <a:solidFill>
+                  <a:schemeClr val="bg1"/>
+                </a:solidFill>
+              </a:rPr>
+              <a:t> адреса;</a:t>
             </a:r>
             <a:endParaRPr lang="ru-RU">
               <a:solidFill>
@@ -9767,7 +9797,7 @@
                   <a:schemeClr val="bg1"/>
                 </a:solidFill>
               </a:rPr>
-              <a:t>Decoder</a:t>
+              <a:t>LSU</a:t>
             </a:r>
             <a:r>
               <a:rPr lang="ru-RU">
@@ -9775,15 +9805,7 @@
                   <a:schemeClr val="bg1"/>
                 </a:solidFill>
               </a:rPr>
-              <a:t> – </a:t>
-            </a:r>
-            <a:r>
-              <a:rPr lang="ru-RU">
-                <a:solidFill>
-                  <a:schemeClr val="bg1"/>
-                </a:solidFill>
-              </a:rPr>
-              <a:t>дешифрование инструкций в структуры для передачи исполняемым блокам;</a:t>
+              <a:t> выполняет запросы  с данными и адресами поочередно;</a:t>
             </a:r>
             <a:endParaRPr lang="ru-RU">
               <a:solidFill>
@@ -9801,7 +9823,15 @@
                   <a:schemeClr val="bg1"/>
                 </a:solidFill>
               </a:rPr>
-              <a:t>По программному счётчику </a:t>
+              <a:t>Арбитр выдаёт результаты потокам</a:t>
+            </a:r>
+            <a:r>
+              <a:rPr lang="ru-RU">
+                <a:solidFill>
+                  <a:schemeClr val="bg1"/>
+                </a:solidFill>
+              </a:rPr>
+              <a:t> и</a:t>
             </a:r>
             <a:r>
               <a:rPr lang="en-US">
@@ -9809,7 +9839,7 @@
                   <a:schemeClr val="bg1"/>
                 </a:solidFill>
               </a:rPr>
-              <a:t>(PC)</a:t>
+              <a:t>/</a:t>
             </a:r>
             <a:r>
               <a:rPr lang="ru-RU">
@@ -9817,23 +9847,7 @@
                   <a:schemeClr val="bg1"/>
                 </a:solidFill>
               </a:rPr>
-              <a:t> </a:t>
-            </a:r>
-            <a:r>
-              <a:rPr lang="en-US">
-                <a:solidFill>
-                  <a:schemeClr val="bg1"/>
-                </a:solidFill>
-              </a:rPr>
-              <a:t>Fetcher</a:t>
-            </a:r>
-            <a:r>
-              <a:rPr lang="ru-RU">
-                <a:solidFill>
-                  <a:schemeClr val="bg1"/>
-                </a:solidFill>
-              </a:rPr>
-              <a:t> делает смещение по адресу и получает адрес.</a:t>
+              <a:t>или статус готовности.</a:t>
             </a:r>
             <a:endParaRPr lang="ru-RU">
               <a:solidFill>
@@ -9845,7 +9859,7 @@
       </p:sp>
       <p:sp>
         <p:nvSpPr>
-          <p:cNvPr id="1136579917" name="Номер слайда 3"/>
+          <p:cNvPr id="1292555640" name="Номер слайда 3"/>
           <p:cNvSpPr>
             <a:spLocks noGrp="1"/>
           </p:cNvSpPr>
@@ -9861,9 +9875,9 @@
             <a:pPr>
               <a:defRPr/>
             </a:pPr>
-            <a:fld id="{6E0C4E4E-F03C-EE6B-08CF-E8796A069A1F}" type="slidenum">
-              <a:rPr lang="ru-RU"/>
-              <a:t>11</a:t>
+            <a:fld id="{19687AD8-1A48-903E-417E-81FF292386D7}" type="slidenum">
+              <a:rPr lang="ru-RU"/>
+              <a:t>8</a:t>
             </a:fld>
             <a:endParaRPr lang="ru-RU"/>
           </a:p>
@@ -9871,7 +9885,7 @@
       </p:sp>
       <p:pic>
         <p:nvPicPr>
-          <p:cNvPr id="323240157" name=""/>
+          <p:cNvPr id="779499102" name=""/>
           <p:cNvPicPr>
             <a:picLocks noChangeAspect="1"/>
           </p:cNvPicPr>
@@ -9888,9 +9902,9 @@
           <a:stretch/>
         </p:blipFill>
         <p:spPr bwMode="auto">
-          <a:xfrm>
-            <a:off x="7046156" y="2170112"/>
-            <a:ext cx="3248024" cy="4105274"/>
+          <a:xfrm flipH="0" flipV="0">
+            <a:off x="5669989" y="2101289"/>
+            <a:ext cx="5303392" cy="4412746"/>
           </a:xfrm>
           <a:prstGeom prst="rect">
             <a:avLst/>
@@ -9965,7 +9979,7 @@
       </p:grpSpPr>
       <p:sp>
         <p:nvSpPr>
-          <p:cNvPr id="1999538833" name="Заголовок 1"/>
+          <p:cNvPr id="589820904" name="Заголовок 1"/>
           <p:cNvSpPr>
             <a:spLocks noGrp="1"/>
           </p:cNvSpPr>
@@ -9994,7 +10008,11 @@
             </a:r>
             <a:r>
               <a:rPr lang="ru-RU"/>
-              <a:t>: Интерфейсы</a:t>
+              <a:t>: </a:t>
+            </a:r>
+            <a:r>
+              <a:rPr lang="en-US"/>
+              <a:t>Fetcher &amp; Decoder</a:t>
             </a:r>
             <a:endParaRPr/>
           </a:p>
@@ -10002,7 +10020,7 @@
       </p:sp>
       <p:sp>
         <p:nvSpPr>
-          <p:cNvPr id="1360229441" name="Объект 2"/>
+          <p:cNvPr id="1247729536" name="Объект 2"/>
           <p:cNvSpPr>
             <a:spLocks noGrp="1"/>
           </p:cNvSpPr>
@@ -10013,7 +10031,7 @@
         <p:spPr bwMode="auto">
           <a:xfrm flipH="0" flipV="0">
             <a:off x="680320" y="2336872"/>
-            <a:ext cx="5269090" cy="3599316"/>
+            <a:ext cx="5044973" cy="3599316"/>
           </a:xfrm>
         </p:spPr>
         <p:txBody>
@@ -10024,12 +10042,20 @@
               <a:defRPr/>
             </a:pPr>
             <a:r>
+              <a:rPr lang="en-US">
+                <a:solidFill>
+                  <a:schemeClr val="bg1"/>
+                </a:solidFill>
+              </a:rPr>
+              <a:t>Fetcher – </a:t>
+            </a:r>
+            <a:r>
               <a:rPr lang="ru-RU">
                 <a:solidFill>
                   <a:schemeClr val="bg1"/>
                 </a:solidFill>
               </a:rPr>
-              <a:t>Необходимы высокоскоростные интерфейсы;</a:t>
+              <a:t>блок захвата инструкций из памяти;</a:t>
             </a:r>
             <a:endParaRPr lang="ru-RU">
               <a:solidFill>
@@ -10042,28 +10068,28 @@
               <a:defRPr/>
             </a:pPr>
             <a:r>
+              <a:rPr lang="en-US">
+                <a:solidFill>
+                  <a:schemeClr val="bg1"/>
+                </a:solidFill>
+              </a:rPr>
+              <a:t>Decoder</a:t>
+            </a:r>
+            <a:r>
               <a:rPr lang="ru-RU">
                 <a:solidFill>
                   <a:schemeClr val="bg1"/>
                 </a:solidFill>
               </a:rPr>
-              <a:t>В качестве интерфейсов взяты</a:t>
-            </a:r>
-            <a:r>
-              <a:rPr lang="en-US">
+              <a:t> – </a:t>
+            </a:r>
+            <a:r>
+              <a:rPr lang="ru-RU">
                 <a:solidFill>
                   <a:schemeClr val="bg1"/>
                 </a:solidFill>
               </a:rPr>
-              <a:t>: AMBA APB,  AMBA AHB</a:t>
-            </a:r>
-            <a:r>
-              <a:rPr lang="ru-RU">
-                <a:solidFill>
-                  <a:schemeClr val="bg1"/>
-                </a:solidFill>
-              </a:rPr>
-              <a:t>;</a:t>
+              <a:t>дешифрование инструкций в структуры для передачи исполняемым блокам;</a:t>
             </a:r>
             <a:endParaRPr lang="ru-RU">
               <a:solidFill>
@@ -10081,7 +10107,7 @@
                   <a:schemeClr val="bg1"/>
                 </a:solidFill>
               </a:rPr>
-              <a:t>Для </a:t>
+              <a:t>По программному счётчику </a:t>
             </a:r>
             <a:r>
               <a:rPr lang="en-US">
@@ -10089,7 +10115,7 @@
                   <a:schemeClr val="bg1"/>
                 </a:solidFill>
               </a:rPr>
-              <a:t>Regmap</a:t>
+              <a:t>(PC)</a:t>
             </a:r>
             <a:r>
               <a:rPr lang="ru-RU">
@@ -10097,7 +10123,7 @@
                   <a:schemeClr val="bg1"/>
                 </a:solidFill>
               </a:rPr>
-              <a:t> интерфейс </a:t>
+              <a:t> </a:t>
             </a:r>
             <a:r>
               <a:rPr lang="en-US">
@@ -10105,7 +10131,7 @@
                   <a:schemeClr val="bg1"/>
                 </a:solidFill>
               </a:rPr>
-              <a:t>APB</a:t>
+              <a:t>Fetcher</a:t>
             </a:r>
             <a:r>
               <a:rPr lang="ru-RU">
@@ -10113,23 +10139,7 @@
                   <a:schemeClr val="bg1"/>
                 </a:solidFill>
               </a:rPr>
-              <a:t>, где </a:t>
-            </a:r>
-            <a:r>
-              <a:rPr lang="en-US">
-                <a:solidFill>
-                  <a:schemeClr val="bg1"/>
-                </a:solidFill>
-              </a:rPr>
-              <a:t>Regmap - </a:t>
-            </a:r>
-            <a:r>
-              <a:rPr lang="ru-RU">
-                <a:solidFill>
-                  <a:schemeClr val="bg1"/>
-                </a:solidFill>
-              </a:rPr>
-              <a:t>ведомый;</a:t>
+              <a:t> делает смещение по адресу и получает адрес.</a:t>
             </a:r>
             <a:endParaRPr lang="ru-RU">
               <a:solidFill>
@@ -10137,85 +10147,11 @@
               </a:solidFill>
             </a:endParaRPr>
           </a:p>
-          <a:p>
-            <a:pPr>
-              <a:defRPr/>
-            </a:pPr>
-            <a:r>
-              <a:rPr lang="ru-RU">
-                <a:solidFill>
-                  <a:schemeClr val="bg1"/>
-                </a:solidFill>
-              </a:rPr>
-              <a:t>Для </a:t>
-            </a:r>
-            <a:r>
-              <a:rPr lang="en-US">
-                <a:solidFill>
-                  <a:schemeClr val="bg1"/>
-                </a:solidFill>
-              </a:rPr>
-              <a:t>Fetcher </a:t>
-            </a:r>
-            <a:r>
-              <a:rPr lang="ru-RU">
-                <a:solidFill>
-                  <a:schemeClr val="bg1"/>
-                </a:solidFill>
-              </a:rPr>
-              <a:t>и </a:t>
-            </a:r>
-            <a:r>
-              <a:rPr lang="en-US">
-                <a:solidFill>
-                  <a:schemeClr val="bg1"/>
-                </a:solidFill>
-              </a:rPr>
-              <a:t>LSU</a:t>
-            </a:r>
-            <a:r>
-              <a:rPr lang="ru-RU">
-                <a:solidFill>
-                  <a:schemeClr val="bg1"/>
-                </a:solidFill>
-              </a:rPr>
-              <a:t> интерфейс </a:t>
-            </a:r>
-            <a:r>
-              <a:rPr lang="en-US">
-                <a:solidFill>
-                  <a:schemeClr val="bg1"/>
-                </a:solidFill>
-              </a:rPr>
-              <a:t>AHB</a:t>
-            </a:r>
-            <a:r>
-              <a:rPr lang="ru-RU">
-                <a:solidFill>
-                  <a:schemeClr val="bg1"/>
-                </a:solidFill>
-              </a:rPr>
-              <a:t>, где </a:t>
-            </a:r>
-            <a:r>
-              <a:rPr lang="ru-RU">
-                <a:solidFill>
-                  <a:schemeClr val="bg1"/>
-                </a:solidFill>
-              </a:rPr>
-              <a:t>они - ведущие.</a:t>
-            </a:r>
-            <a:endParaRPr lang="en-US">
-              <a:solidFill>
-                <a:schemeClr val="bg1"/>
-              </a:solidFill>
-            </a:endParaRPr>
-          </a:p>
-        </p:txBody>
-      </p:sp>
-      <p:sp>
-        <p:nvSpPr>
-          <p:cNvPr id="545049263" name="Номер слайда 3"/>
+        </p:txBody>
+      </p:sp>
+      <p:sp>
+        <p:nvSpPr>
+          <p:cNvPr id="1136579917" name="Номер слайда 3"/>
           <p:cNvSpPr>
             <a:spLocks noGrp="1"/>
           </p:cNvSpPr>
@@ -10231,9 +10167,9 @@
             <a:pPr>
               <a:defRPr/>
             </a:pPr>
-            <a:fld id="{BE2ADD01-EDAB-891B-508A-6962AD7A2457}" type="slidenum">
-              <a:rPr lang="ru-RU"/>
-              <a:t>14</a:t>
+            <a:fld id="{6E0C4E4E-F03C-EE6B-08CF-E8796A069A1F}" type="slidenum">
+              <a:rPr lang="ru-RU"/>
+              <a:t>11</a:t>
             </a:fld>
             <a:endParaRPr lang="ru-RU"/>
           </a:p>
@@ -10241,7 +10177,7 @@
       </p:sp>
       <p:pic>
         <p:nvPicPr>
-          <p:cNvPr id="2139026081" name=""/>
+          <p:cNvPr id="323240157" name=""/>
           <p:cNvPicPr>
             <a:picLocks noChangeAspect="1"/>
           </p:cNvPicPr>
@@ -10258,9 +10194,9 @@
           <a:stretch/>
         </p:blipFill>
         <p:spPr bwMode="auto">
-          <a:xfrm flipH="0" flipV="0">
-            <a:off x="5698034" y="2178122"/>
-            <a:ext cx="5523816" cy="4227906"/>
+          <a:xfrm>
+            <a:off x="7046156" y="2170112"/>
+            <a:ext cx="3248024" cy="4105274"/>
           </a:xfrm>
           <a:prstGeom prst="rect">
             <a:avLst/>
@@ -10335,7 +10271,7 @@
       </p:grpSpPr>
       <p:sp>
         <p:nvSpPr>
-          <p:cNvPr id="1359380248" name="Заголовок 1"/>
+          <p:cNvPr id="1999538833" name="Заголовок 1"/>
           <p:cNvSpPr>
             <a:spLocks noGrp="1"/>
           </p:cNvSpPr>
@@ -10364,7 +10300,7 @@
             </a:r>
             <a:r>
               <a:rPr lang="ru-RU"/>
-              <a:t>: Общая структура ядра</a:t>
+              <a:t>: Интерфейсы</a:t>
             </a:r>
             <a:endParaRPr/>
           </a:p>
@@ -10372,7 +10308,7 @@
       </p:sp>
       <p:sp>
         <p:nvSpPr>
-          <p:cNvPr id="950479278" name="Объект 2"/>
+          <p:cNvPr id="1360229441" name="Объект 2"/>
           <p:cNvSpPr>
             <a:spLocks noGrp="1"/>
           </p:cNvSpPr>
@@ -10383,33 +10319,23 @@
         <p:spPr bwMode="auto">
           <a:xfrm flipH="0" flipV="0">
             <a:off x="680320" y="2336872"/>
-            <a:ext cx="4176516" cy="3599316"/>
-          </a:xfrm>
-        </p:spPr>
-        <p:txBody>
-          <a:bodyPr vertOverflow="overflow" horzOverflow="overflow" vert="horz" wrap="square" lIns="91440" tIns="45720" rIns="91440" bIns="45720" numCol="1" spcCol="0" rtlCol="0" fromWordArt="0" anchor="t" anchorCtr="0" forceAA="0" upright="0" compatLnSpc="0">
-            <a:normAutofit fontScale="80000" lnSpcReduction="4000"/>
-          </a:bodyPr>
-          <a:lstStyle/>
-          <a:p>
-            <a:pPr>
-              <a:defRPr/>
-            </a:pPr>
-            <a:r>
-              <a:rPr lang="en-US">
+            <a:ext cx="5269090" cy="3599316"/>
+          </a:xfrm>
+        </p:spPr>
+        <p:txBody>
+          <a:bodyPr/>
+          <a:lstStyle/>
+          <a:p>
+            <a:pPr>
+              <a:defRPr/>
+            </a:pPr>
+            <a:r>
+              <a:rPr lang="ru-RU">
                 <a:solidFill>
                   <a:schemeClr val="bg1"/>
                 </a:solidFill>
               </a:rPr>
-              <a:t>Fetcher</a:t>
-            </a:r>
-            <a:r>
-              <a:rPr lang="ru-RU">
-                <a:solidFill>
-                  <a:schemeClr val="bg1"/>
-                </a:solidFill>
-              </a:rPr>
-              <a:t> захватывает инструкцию из памяти;</a:t>
+              <a:t>Необходимы высокоскоростные интерфейсы;</a:t>
             </a:r>
             <a:endParaRPr lang="ru-RU">
               <a:solidFill>
@@ -10422,44 +10348,20 @@
               <a:defRPr/>
             </a:pPr>
             <a:r>
+              <a:rPr lang="ru-RU">
+                <a:solidFill>
+                  <a:schemeClr val="bg1"/>
+                </a:solidFill>
+              </a:rPr>
+              <a:t>В качестве интерфейсов взяты</a:t>
+            </a:r>
+            <a:r>
               <a:rPr lang="en-US">
                 <a:solidFill>
                   <a:schemeClr val="bg1"/>
                 </a:solidFill>
               </a:rPr>
-              <a:t>Decoder</a:t>
-            </a:r>
-            <a:r>
-              <a:rPr lang="ru-RU">
-                <a:solidFill>
-                  <a:schemeClr val="bg1"/>
-                </a:solidFill>
-              </a:rPr>
-              <a:t> декодирует инструкцию для передачи </a:t>
-            </a:r>
-            <a:r>
-              <a:rPr lang="en-US">
-                <a:solidFill>
-                  <a:schemeClr val="bg1"/>
-                </a:solidFill>
-              </a:rPr>
-              <a:t>LSU</a:t>
-            </a:r>
-            <a:r>
-              <a:rPr lang="ru-RU">
-                <a:solidFill>
-                  <a:schemeClr val="bg1"/>
-                </a:solidFill>
-              </a:rPr>
-              <a:t> и </a:t>
-            </a:r>
-            <a:r>
-              <a:rPr lang="en-US">
-                <a:solidFill>
-                  <a:schemeClr val="bg1"/>
-                </a:solidFill>
-              </a:rPr>
-              <a:t>TU</a:t>
+              <a:t>: AMBA APB,  AMBA AHB</a:t>
             </a:r>
             <a:r>
               <a:rPr lang="ru-RU">
@@ -10480,12 +10382,20 @@
               <a:defRPr/>
             </a:pPr>
             <a:r>
+              <a:rPr lang="ru-RU">
+                <a:solidFill>
+                  <a:schemeClr val="bg1"/>
+                </a:solidFill>
+              </a:rPr>
+              <a:t>Для </a:t>
+            </a:r>
+            <a:r>
               <a:rPr lang="en-US">
                 <a:solidFill>
                   <a:schemeClr val="bg1"/>
                 </a:solidFill>
               </a:rPr>
-              <a:t>TU</a:t>
+              <a:t>Regmap</a:t>
             </a:r>
             <a:r>
               <a:rPr lang="ru-RU">
@@ -10493,7 +10403,15 @@
                   <a:schemeClr val="bg1"/>
                 </a:solidFill>
               </a:rPr>
-              <a:t> </a:t>
+              <a:t> интерфейс </a:t>
+            </a:r>
+            <a:r>
+              <a:rPr lang="en-US">
+                <a:solidFill>
+                  <a:schemeClr val="bg1"/>
+                </a:solidFill>
+              </a:rPr>
+              <a:t>APB</a:t>
             </a:r>
             <a:r>
               <a:rPr lang="ru-RU">
@@ -10501,7 +10419,7 @@
                   <a:schemeClr val="bg1"/>
                 </a:solidFill>
               </a:rPr>
-              <a:t>и</a:t>
+              <a:t>, где </a:t>
             </a:r>
             <a:r>
               <a:rPr lang="en-US">
@@ -10509,7 +10427,7 @@
                   <a:schemeClr val="bg1"/>
                 </a:solidFill>
               </a:rPr>
-              <a:t>/</a:t>
+              <a:t>Regmap - </a:t>
             </a:r>
             <a:r>
               <a:rPr lang="ru-RU">
@@ -10517,31 +10435,7 @@
                   <a:schemeClr val="bg1"/>
                 </a:solidFill>
               </a:rPr>
-              <a:t>или </a:t>
-            </a:r>
-            <a:r>
-              <a:rPr lang="en-US">
-                <a:solidFill>
-                  <a:schemeClr val="bg1"/>
-                </a:solidFill>
-              </a:rPr>
-              <a:t>LSU</a:t>
-            </a:r>
-            <a:r>
-              <a:rPr lang="ru-RU">
-                <a:solidFill>
-                  <a:schemeClr val="bg1"/>
-                </a:solidFill>
-              </a:rPr>
-              <a:t> выполняют ин</a:t>
-            </a:r>
-            <a:r>
-              <a:rPr lang="ru-RU">
-                <a:solidFill>
-                  <a:schemeClr val="bg1"/>
-                </a:solidFill>
-              </a:rPr>
-              <a:t>струкцию;</a:t>
+              <a:t>ведомый;</a:t>
             </a:r>
             <a:endParaRPr lang="ru-RU">
               <a:solidFill>
@@ -10559,25 +10453,15 @@
                   <a:schemeClr val="bg1"/>
                 </a:solidFill>
               </a:rPr>
-              <a:t>Результаты работы сохраняются во внешней памяти или памяти ядра;</a:t>
-            </a:r>
-            <a:endParaRPr lang="ru-RU">
-              <a:solidFill>
-                <a:schemeClr val="bg1"/>
-              </a:solidFill>
-            </a:endParaRPr>
-          </a:p>
-          <a:p>
-            <a:pPr>
-              <a:defRPr/>
-            </a:pPr>
+              <a:t>Для </a:t>
+            </a:r>
             <a:r>
               <a:rPr lang="en-US">
                 <a:solidFill>
                   <a:schemeClr val="bg1"/>
                 </a:solidFill>
               </a:rPr>
-              <a:t>Regmap</a:t>
+              <a:t>Fetcher </a:t>
             </a:r>
             <a:r>
               <a:rPr lang="ru-RU">
@@ -10585,7 +10469,47 @@
                   <a:schemeClr val="bg1"/>
                 </a:solidFill>
               </a:rPr>
-              <a:t> содержит статусные и управляющие сигналы.</a:t>
+              <a:t>и </a:t>
+            </a:r>
+            <a:r>
+              <a:rPr lang="en-US">
+                <a:solidFill>
+                  <a:schemeClr val="bg1"/>
+                </a:solidFill>
+              </a:rPr>
+              <a:t>LSU</a:t>
+            </a:r>
+            <a:r>
+              <a:rPr lang="ru-RU">
+                <a:solidFill>
+                  <a:schemeClr val="bg1"/>
+                </a:solidFill>
+              </a:rPr>
+              <a:t> интерфейс </a:t>
+            </a:r>
+            <a:r>
+              <a:rPr lang="en-US">
+                <a:solidFill>
+                  <a:schemeClr val="bg1"/>
+                </a:solidFill>
+              </a:rPr>
+              <a:t>AHB</a:t>
+            </a:r>
+            <a:r>
+              <a:rPr lang="ru-RU">
+                <a:solidFill>
+                  <a:schemeClr val="bg1"/>
+                </a:solidFill>
+              </a:rPr>
+              <a:t>, где </a:t>
+            </a:r>
+            <a:r>
+              <a:rPr lang="ru-RU">
+                <a:solidFill>
+                  <a:schemeClr val="bg1"/>
+                </a:solidFill>
+              </a:rPr>
+              <a:t>они - ведущие.</a:t>
             </a:r>
             <a:endParaRPr lang="en-US">
               <a:solidFill>
@@ -10597,7 +10521,7 @@
       </p:sp>
       <p:sp>
         <p:nvSpPr>
-          <p:cNvPr id="64735645" name="Номер слайда 3"/>
+          <p:cNvPr id="545049263" name="Номер слайда 3"/>
           <p:cNvSpPr>
             <a:spLocks noGrp="1"/>
           </p:cNvSpPr>
@@ -10613,9 +10537,9 @@
             <a:pPr>
               <a:defRPr/>
             </a:pPr>
-            <a:fld id="{ED02CFB1-EEA1-CD3C-8AAA-9D8034B9CDE8}" type="slidenum">
-              <a:rPr lang="ru-RU"/>
-              <a:t>15</a:t>
+            <a:fld id="{BE2ADD01-EDAB-891B-508A-6962AD7A2457}" type="slidenum">
+              <a:rPr lang="ru-RU"/>
+              <a:t>14</a:t>
             </a:fld>
             <a:endParaRPr lang="ru-RU"/>
           </a:p>
@@ -10623,7 +10547,7 @@
       </p:sp>
       <p:pic>
         <p:nvPicPr>
-          <p:cNvPr id="1109160971" name=""/>
+          <p:cNvPr id="2139026081" name=""/>
           <p:cNvPicPr>
             <a:picLocks noChangeAspect="1"/>
           </p:cNvPicPr>
@@ -10641,8 +10565,8 @@
         </p:blipFill>
         <p:spPr bwMode="auto">
           <a:xfrm flipH="0" flipV="0">
-            <a:off x="4856838" y="2095846"/>
-            <a:ext cx="6397483" cy="4081368"/>
+            <a:off x="5698034" y="2178122"/>
+            <a:ext cx="5523816" cy="4227906"/>
           </a:xfrm>
           <a:prstGeom prst="rect">
             <a:avLst/>
@@ -10717,7 +10641,7 @@
       </p:grpSpPr>
       <p:sp>
         <p:nvSpPr>
-          <p:cNvPr id="1058370931" name="Заголовок 1"/>
+          <p:cNvPr id="2135797218" name="Заголовок 1"/>
           <p:cNvSpPr>
             <a:spLocks noGrp="1"/>
           </p:cNvSpPr>
@@ -10743,7 +10667,7 @@
       </p:sp>
       <p:sp>
         <p:nvSpPr>
-          <p:cNvPr id="1846312412" name="Объект 2"/>
+          <p:cNvPr id="637220340" name="Объект 2"/>
           <p:cNvSpPr>
             <a:spLocks noGrp="1"/>
           </p:cNvSpPr>
@@ -10832,7 +10756,7 @@
                   <a:schemeClr val="bg1"/>
                 </a:solidFill>
               </a:rPr>
-              <a:t>Разработана архитектура упрощенного графического ядра;</a:t>
+              <a:t>Разработана архитектура упрощенного графического ядра с использованием метода поблочной декомпозиции;</a:t>
             </a:r>
             <a:endParaRPr/>
           </a:p>
@@ -10846,29 +10770,47 @@
                   <a:schemeClr val="bg1"/>
                 </a:solidFill>
               </a:rPr>
-              <a:t>Разработана архитектура упрощенного графического ядра с использованием метода поблочной декомпозиции;</a:t>
+              <a:t>Разработана упрощенная модель графического ядра</a:t>
+            </a:r>
+            <a:r>
+              <a:rPr lang="en-US">
+                <a:solidFill>
+                  <a:schemeClr val="bg1"/>
+                </a:solidFill>
+              </a:rPr>
+              <a:t> </a:t>
+            </a:r>
+            <a:r>
+              <a:rPr lang="ru-RU">
+                <a:solidFill>
+                  <a:schemeClr val="bg1"/>
+                </a:solidFill>
+              </a:rPr>
+              <a:t>на языке описания аппаратуры </a:t>
+            </a:r>
+            <a:r>
+              <a:rPr lang="en-US">
+                <a:solidFill>
+                  <a:schemeClr val="bg1"/>
+                </a:solidFill>
+              </a:rPr>
+              <a:t>SystemVerilog</a:t>
+            </a:r>
+            <a:r>
+              <a:rPr lang="ru-RU">
+                <a:solidFill>
+                  <a:schemeClr val="bg1"/>
+                </a:solidFill>
+              </a:rPr>
+              <a:t>.</a:t>
             </a:r>
             <a:endParaRPr/>
           </a:p>
-          <a:p>
-            <a:pPr lvl="1">
-              <a:defRPr/>
-            </a:pPr>
-            <a:r>
-              <a:rPr lang="ru-RU">
-                <a:solidFill>
-                  <a:schemeClr val="bg1"/>
-                </a:solidFill>
-              </a:rPr>
-              <a:t>Разработана упрощенная модель графического ядра.</a:t>
-            </a:r>
-            <a:endParaRPr/>
-          </a:p>
-        </p:txBody>
-      </p:sp>
-      <p:sp>
-        <p:nvSpPr>
-          <p:cNvPr id="264187441" name="Номер слайда 3"/>
+        </p:txBody>
+      </p:sp>
+      <p:sp>
+        <p:nvSpPr>
+          <p:cNvPr id="1920238445" name="Номер слайда 3"/>
           <p:cNvSpPr>
             <a:spLocks noGrp="1"/>
           </p:cNvSpPr>
@@ -10960,7 +10902,7 @@
       </p:grpSpPr>
       <p:sp>
         <p:nvSpPr>
-          <p:cNvPr id="1343369616" name="Заголовок 1"/>
+          <p:cNvPr id="927809051" name="Заголовок 1"/>
           <p:cNvSpPr>
             <a:spLocks noGrp="1"/>
           </p:cNvSpPr>
@@ -10986,7 +10928,7 @@
       </p:sp>
       <p:sp>
         <p:nvSpPr>
-          <p:cNvPr id="1903913265" name="Объект 2"/>
+          <p:cNvPr id="119898723" name="Объект 2"/>
           <p:cNvSpPr>
             <a:spLocks noGrp="1"/>
           </p:cNvSpPr>
@@ -11157,7 +11099,7 @@
       </p:sp>
       <p:sp>
         <p:nvSpPr>
-          <p:cNvPr id="712964842" name="Номер слайда 3"/>
+          <p:cNvPr id="2138786135" name="Номер слайда 3"/>
           <p:cNvSpPr>
             <a:spLocks noGrp="1"/>
           </p:cNvSpPr>
@@ -11249,7 +11191,7 @@
       </p:grpSpPr>
       <p:sp>
         <p:nvSpPr>
-          <p:cNvPr id="1011396138" name="Заголовок 1"/>
+          <p:cNvPr id="668226370" name="Заголовок 1"/>
           <p:cNvSpPr>
             <a:spLocks noGrp="1"/>
           </p:cNvSpPr>
@@ -11275,7 +11217,7 @@
       </p:sp>
       <p:sp>
         <p:nvSpPr>
-          <p:cNvPr id="1825982039" name="Объект 2"/>
+          <p:cNvPr id="1391196129" name="Объект 2"/>
           <p:cNvSpPr>
             <a:spLocks noGrp="1"/>
           </p:cNvSpPr>
@@ -11301,7 +11243,7 @@
       </p:sp>
       <p:sp>
         <p:nvSpPr>
-          <p:cNvPr id="1541915963" name="Номер слайда 3"/>
+          <p:cNvPr id="1694933476" name="Номер слайда 3"/>
           <p:cNvSpPr>
             <a:spLocks noGrp="1"/>
           </p:cNvSpPr>
@@ -11393,7 +11335,7 @@
       </p:grpSpPr>
       <p:sp>
         <p:nvSpPr>
-          <p:cNvPr id="1534458710" name="Заголовок 1"/>
+          <p:cNvPr id="664165814" name="Заголовок 1"/>
           <p:cNvSpPr>
             <a:spLocks noGrp="1"/>
           </p:cNvSpPr>
@@ -11419,7 +11361,7 @@
       </p:sp>
       <p:sp>
         <p:nvSpPr>
-          <p:cNvPr id="875269949" name="Объект 2"/>
+          <p:cNvPr id="1575658313" name="Объект 2"/>
           <p:cNvSpPr>
             <a:spLocks noGrp="1"/>
           </p:cNvSpPr>
@@ -11445,7 +11387,7 @@
       </p:sp>
       <p:sp>
         <p:nvSpPr>
-          <p:cNvPr id="1425886192" name="Номер слайда 3"/>
+          <p:cNvPr id="735863837" name="Номер слайда 3"/>
           <p:cNvSpPr>
             <a:spLocks noGrp="1"/>
           </p:cNvSpPr>
@@ -11537,7 +11479,7 @@
       </p:grpSpPr>
       <p:sp>
         <p:nvSpPr>
-          <p:cNvPr id="665646331" name="Заголовок 1"/>
+          <p:cNvPr id="342146868" name="Заголовок 1"/>
           <p:cNvSpPr>
             <a:spLocks noGrp="1"/>
           </p:cNvSpPr>
@@ -11563,7 +11505,7 @@
       </p:sp>
       <p:sp>
         <p:nvSpPr>
-          <p:cNvPr id="1397292244" name="Объект 2"/>
+          <p:cNvPr id="986220934" name="Объект 2"/>
           <p:cNvSpPr>
             <a:spLocks noGrp="1"/>
           </p:cNvSpPr>
@@ -11606,7 +11548,23 @@
                   <a:schemeClr val="bg1"/>
                 </a:solidFill>
               </a:rPr>
-              <a:t>Разработать упрощенную модель графического ядра.</a:t>
+              <a:t>Разработать упрощенную модель графического ядра на языке описания аппаратуры </a:t>
+            </a:r>
+            <a:r>
+              <a:rPr lang="en-US">
+                <a:solidFill>
+                  <a:schemeClr val="bg1"/>
+                </a:solidFill>
+              </a:rPr>
+              <a:t>SystemVerilog</a:t>
+            </a:r>
+            <a:r>
+              <a:rPr lang="ru-RU">
+                <a:solidFill>
+                  <a:schemeClr val="bg1"/>
+                </a:solidFill>
+              </a:rPr>
+              <a:t>.</a:t>
             </a:r>
             <a:endParaRPr/>
           </a:p>
@@ -11700,7 +11658,7 @@
       </p:sp>
       <p:sp>
         <p:nvSpPr>
-          <p:cNvPr id="2116252578" name="Номер слайда 3"/>
+          <p:cNvPr id="1424599218" name="Номер слайда 3"/>
           <p:cNvSpPr>
             <a:spLocks noGrp="1"/>
           </p:cNvSpPr>
@@ -11792,7 +11750,7 @@
       </p:grpSpPr>
       <p:sp>
         <p:nvSpPr>
-          <p:cNvPr id="1634220582" name="Заголовок 1"/>
+          <p:cNvPr id="1576617658" name="Заголовок 1"/>
           <p:cNvSpPr>
             <a:spLocks noGrp="1"/>
           </p:cNvSpPr>
@@ -11818,7 +11776,7 @@
       </p:sp>
       <p:sp>
         <p:nvSpPr>
-          <p:cNvPr id="815344679" name="Объект 2"/>
+          <p:cNvPr id="453060729" name="Объект 2"/>
           <p:cNvSpPr>
             <a:spLocks noGrp="1"/>
           </p:cNvSpPr>
@@ -11844,7 +11802,7 @@
       </p:sp>
       <p:sp>
         <p:nvSpPr>
-          <p:cNvPr id="1196122660" name="Номер слайда 3"/>
+          <p:cNvPr id="37530068" name="Номер слайда 3"/>
           <p:cNvSpPr>
             <a:spLocks noGrp="1"/>
           </p:cNvSpPr>
@@ -11936,7 +11894,7 @@
       </p:grpSpPr>
       <p:sp>
         <p:nvSpPr>
-          <p:cNvPr id="1084368190" name="Заголовок 1"/>
+          <p:cNvPr id="2068485794" name="Заголовок 1"/>
           <p:cNvSpPr>
             <a:spLocks noGrp="1"/>
           </p:cNvSpPr>
@@ -11962,7 +11920,7 @@
       </p:sp>
       <p:sp>
         <p:nvSpPr>
-          <p:cNvPr id="1383863890" name="Объект 2"/>
+          <p:cNvPr id="1144536380" name="Объект 2"/>
           <p:cNvSpPr>
             <a:spLocks noGrp="1"/>
           </p:cNvSpPr>
@@ -12015,7 +11973,7 @@
       </p:sp>
       <p:sp>
         <p:nvSpPr>
-          <p:cNvPr id="1463305009" name="Номер слайда 3"/>
+          <p:cNvPr id="2065129326" name="Номер слайда 3"/>
           <p:cNvSpPr>
             <a:spLocks noGrp="1"/>
           </p:cNvSpPr>
@@ -12427,7 +12385,7 @@
       </p:grpSpPr>
       <p:sp>
         <p:nvSpPr>
-          <p:cNvPr id="1940735190" name="Заголовок 1"/>
+          <p:cNvPr id="1900461559" name="Заголовок 1"/>
           <p:cNvSpPr>
             <a:spLocks noGrp="1"/>
           </p:cNvSpPr>
@@ -12459,7 +12417,7 @@
       </p:sp>
       <p:sp>
         <p:nvSpPr>
-          <p:cNvPr id="598484972" name="Объект 2"/>
+          <p:cNvPr id="1359258709" name="Объект 2"/>
           <p:cNvSpPr>
             <a:spLocks noGrp="1"/>
           </p:cNvSpPr>
@@ -12528,7 +12486,7 @@
       </p:sp>
       <p:sp>
         <p:nvSpPr>
-          <p:cNvPr id="1359751672" name="Номер слайда 3"/>
+          <p:cNvPr id="1296683772" name="Номер слайда 3"/>
           <p:cNvSpPr>
             <a:spLocks noGrp="1"/>
           </p:cNvSpPr>
@@ -12554,7 +12512,7 @@
       </p:sp>
       <p:pic>
         <p:nvPicPr>
-          <p:cNvPr id="453544401" name="Рисунок 5"/>
+          <p:cNvPr id="165655821" name="Рисунок 5"/>
           <p:cNvPicPr>
             <a:picLocks noChangeAspect="1"/>
           </p:cNvPicPr>
@@ -12584,20 +12542,56 @@
       </p:pic>
       <p:pic>
         <p:nvPicPr>
-          <p:cNvPr id="831698383" name="Рисунок 11"/>
+          <p:cNvPr id="1839524990" name="Рисунок 11"/>
           <p:cNvPicPr>
             <a:picLocks noChangeAspect="1"/>
           </p:cNvPicPr>
           <p:nvPr/>
         </p:nvPicPr>
         <p:blipFill rotWithShape="1">
-          <a:blip r:embed="rId4"/>
-          <a:stretch/>
+          <a:blip r:embed="rId4">
+            <a:extLst>
+              <a:ext uri="{96DAC541-7B7A-43D3-8B79-37D633B846F1}">
+                <asvg:svgBlip xmlns:asvg="http://schemas.microsoft.com/office/drawing/2016/SVG/main" r:embed="rId5"/>
+              </a:ext>
+            </a:extLst>
+          </a:blip>
         </p:blipFill>
         <p:spPr bwMode="auto">
           <a:xfrm flipH="0" flipV="0">
             <a:off x="4360834" y="4838043"/>
             <a:ext cx="4933574" cy="1810032"/>
+          </a:xfrm>
+          <a:prstGeom prst="rect">
+            <a:avLst/>
+          </a:prstGeom>
+          <a:ln w="28575">
+            <a:noFill/>
+            <a:prstDash val="solid"/>
+          </a:ln>
+        </p:spPr>
+      </p:pic>
+      <p:pic>
+        <p:nvPicPr>
+          <p:cNvPr id="1421075016" name=""/>
+          <p:cNvPicPr>
+            <a:picLocks noChangeAspect="1"/>
+          </p:cNvPicPr>
+          <p:nvPr/>
+        </p:nvPicPr>
+        <p:blipFill rotWithShape="1">
+          <a:blip r:embed="rId6">
+            <a:extLst>
+              <a:ext uri="{96DAC541-7B7A-43D3-8B79-37D633B846F1}">
+                <asvg:svgBlip xmlns:asvg="http://schemas.microsoft.com/office/drawing/2016/SVG/main" r:embed="rId7"/>
+              </a:ext>
+            </a:extLst>
+          </a:blip>
+        </p:blipFill>
+        <p:spPr bwMode="auto">
+          <a:xfrm flipH="0" flipV="0">
+            <a:off x="4220305" y="2378237"/>
+            <a:ext cx="2915269" cy="2101525"/>
           </a:xfrm>
           <a:prstGeom prst="rect">
             <a:avLst/>
@@ -12612,47 +12606,11 @@
           </a:ln>
         </p:spPr>
       </p:pic>
-      <p:pic>
-        <p:nvPicPr>
-          <p:cNvPr id="1421075016" name=""/>
-          <p:cNvPicPr>
-            <a:picLocks noChangeAspect="1"/>
-          </p:cNvPicPr>
-          <p:nvPr/>
-        </p:nvPicPr>
-        <p:blipFill rotWithShape="1">
-          <a:blip r:embed="rId5">
-            <a:extLst>
-              <a:ext uri="{96DAC541-7B7A-43D3-8B79-37D633B846F1}">
-                <asvg:svgBlip xmlns:asvg="http://schemas.microsoft.com/office/drawing/2016/SVG/main" r:embed="rId6"/>
-              </a:ext>
-            </a:extLst>
-          </a:blip>
-          <a:stretch/>
-        </p:blipFill>
-        <p:spPr bwMode="auto">
-          <a:xfrm>
-            <a:off x="4360834" y="2183515"/>
-            <a:ext cx="2581274" cy="2486025"/>
-          </a:xfrm>
-          <a:prstGeom prst="rect">
-            <a:avLst/>
-          </a:prstGeom>
-          <a:ln w="28575">
-            <a:solidFill>
-              <a:schemeClr val="accent1">
-                <a:lumMod val="50196"/>
-              </a:schemeClr>
-            </a:solidFill>
-            <a:prstDash val="solid"/>
-          </a:ln>
-        </p:spPr>
-      </p:pic>
       <p:cxnSp>
         <p:nvCxnSpPr>
           <p:cNvPr id="23000171" name=""/>
           <p:cNvCxnSpPr>
-            <a:stCxn id="453544401" idx="2"/>
+            <a:stCxn id="165655821" idx="2"/>
           </p:cNvCxnSpPr>
           <p:nvPr/>
         </p:nvCxnSpPr>
@@ -12695,15 +12653,15 @@
         <p:nvCxnSpPr>
           <p:cNvPr id="1281179738" name=""/>
           <p:cNvCxnSpPr>
-            <a:stCxn id="453544401" idx="1"/>
+            <a:stCxn id="165655821" idx="1"/>
             <a:endCxn id="1421075016" idx="3"/>
           </p:cNvCxnSpPr>
           <p:nvPr/>
         </p:nvCxnSpPr>
         <p:spPr bwMode="auto">
-          <a:xfrm rot="10800000" flipH="0" flipV="0">
-            <a:off x="6942109" y="3426527"/>
-            <a:ext cx="452300" cy="0"/>
+          <a:xfrm rot="10800000" flipH="0" flipV="1">
+            <a:off x="7135575" y="3427763"/>
+            <a:ext cx="258833" cy="0"/>
           </a:xfrm>
           <a:prstGeom prst="line">
             <a:avLst/>
@@ -12803,7 +12761,7 @@
       </p:grpSpPr>
       <p:sp>
         <p:nvSpPr>
-          <p:cNvPr id="1053853922" name="Заголовок 1"/>
+          <p:cNvPr id="1359380248" name="Заголовок 1"/>
           <p:cNvSpPr>
             <a:spLocks noGrp="1"/>
           </p:cNvSpPr>
@@ -12820,16 +12778,27 @@
               <a:defRPr/>
             </a:pPr>
             <a:r>
-              <a:rPr lang="ru-RU"/>
-              <a:t>Разработка потока модели упрощенного графического ядра: общая структура</a:t>
-            </a:r>
-            <a:endParaRPr lang="ru-RU"/>
-          </a:p>
-        </p:txBody>
-      </p:sp>
-      <p:sp>
-        <p:nvSpPr>
-          <p:cNvPr id="443765629" name="Объект 2"/>
+              <a:rPr lang="ru-RU" sz="3600" b="0" i="0" u="none" strike="noStrike" cap="none" spc="0">
+                <a:solidFill>
+                  <a:schemeClr val="tx1"/>
+                </a:solidFill>
+                <a:latin typeface="+mj-lt"/>
+                <a:ea typeface="+mj-ea"/>
+                <a:cs typeface="+mj-cs"/>
+              </a:rPr>
+              <a:t>Разработка модели упрощенного графического ядра</a:t>
+            </a:r>
+            <a:r>
+              <a:rPr lang="ru-RU"/>
+              <a:t>: Общая структура ядра</a:t>
+            </a:r>
+            <a:endParaRPr/>
+          </a:p>
+        </p:txBody>
+      </p:sp>
+      <p:sp>
+        <p:nvSpPr>
+          <p:cNvPr id="950479278" name="Объект 2"/>
           <p:cNvSpPr>
             <a:spLocks noGrp="1"/>
           </p:cNvSpPr>
@@ -12840,47 +12809,33 @@
         <p:spPr bwMode="auto">
           <a:xfrm flipH="0" flipV="0">
             <a:off x="680320" y="2336872"/>
-            <a:ext cx="3500037" cy="3599316"/>
-          </a:xfrm>
-        </p:spPr>
-        <p:txBody>
-          <a:bodyPr/>
-          <a:lstStyle/>
-          <a:p>
-            <a:pPr>
-              <a:defRPr/>
-            </a:pPr>
+            <a:ext cx="4176516" cy="3599316"/>
+          </a:xfrm>
+        </p:spPr>
+        <p:txBody>
+          <a:bodyPr vertOverflow="overflow" horzOverflow="overflow" vert="horz" wrap="square" lIns="91440" tIns="45720" rIns="91440" bIns="45720" numCol="1" spcCol="0" rtlCol="0" fromWordArt="0" anchor="t" anchorCtr="0" forceAA="0" upright="0" compatLnSpc="0">
+            <a:normAutofit fontScale="80000" lnSpcReduction="4000"/>
+          </a:bodyPr>
+          <a:lstStyle/>
+          <a:p>
+            <a:pPr>
+              <a:defRPr/>
+            </a:pPr>
+            <a:r>
+              <a:rPr lang="en-US">
+                <a:solidFill>
+                  <a:schemeClr val="bg1"/>
+                </a:solidFill>
+              </a:rPr>
+              <a:t>Fetcher</a:t>
+            </a:r>
             <a:r>
               <a:rPr lang="ru-RU">
                 <a:solidFill>
                   <a:schemeClr val="bg1"/>
                 </a:solidFill>
               </a:rPr>
-              <a:t>Поток</a:t>
-            </a:r>
-            <a:r>
-              <a:rPr lang="ru-RU">
-                <a:solidFill>
-                  <a:schemeClr val="bg1"/>
-                </a:solidFill>
-              </a:rPr>
-              <a:t> обрабатывает вещественные и целочисленные данные и хранит в промежуточной памяти </a:t>
-            </a:r>
-            <a:r>
-              <a:rPr lang="en-US">
-                <a:solidFill>
-                  <a:schemeClr val="bg1"/>
-                </a:solidFill>
-              </a:rPr>
-              <a:t>- Regfile</a:t>
-            </a:r>
-            <a:r>
-              <a:rPr lang="ru-RU">
-                <a:solidFill>
-                  <a:schemeClr val="bg1"/>
-                </a:solidFill>
-              </a:rPr>
-              <a:t>.</a:t>
+              <a:t> захватывает инструкцию из памяти;</a:t>
             </a:r>
             <a:endParaRPr lang="ru-RU">
               <a:solidFill>
@@ -12893,12 +12848,20 @@
               <a:defRPr/>
             </a:pPr>
             <a:r>
+              <a:rPr lang="en-US">
+                <a:solidFill>
+                  <a:schemeClr val="bg1"/>
+                </a:solidFill>
+              </a:rPr>
+              <a:t>Decoder</a:t>
+            </a:r>
+            <a:r>
               <a:rPr lang="ru-RU">
                 <a:solidFill>
                   <a:schemeClr val="bg1"/>
                 </a:solidFill>
               </a:rPr>
-              <a:t>Основные компоненты: </a:t>
+              <a:t> декодирует инструкцию для передачи </a:t>
             </a:r>
             <a:r>
               <a:rPr lang="en-US">
@@ -12906,7 +12869,31 @@
                   <a:schemeClr val="bg1"/>
                 </a:solidFill>
               </a:rPr>
-              <a:t>FPU, ALU, Regfile</a:t>
+              <a:t>LSU</a:t>
+            </a:r>
+            <a:r>
+              <a:rPr lang="ru-RU">
+                <a:solidFill>
+                  <a:schemeClr val="bg1"/>
+                </a:solidFill>
+              </a:rPr>
+              <a:t> и </a:t>
+            </a:r>
+            <a:r>
+              <a:rPr lang="en-US">
+                <a:solidFill>
+                  <a:schemeClr val="bg1"/>
+                </a:solidFill>
+              </a:rPr>
+              <a:t>TU</a:t>
+            </a:r>
+            <a:r>
+              <a:rPr lang="ru-RU">
+                <a:solidFill>
+                  <a:schemeClr val="bg1"/>
+                </a:solidFill>
+              </a:rPr>
+              <a:t>;</a:t>
             </a:r>
             <a:endParaRPr lang="ru-RU">
               <a:solidFill>
@@ -12914,11 +12901,129 @@
               </a:solidFill>
             </a:endParaRPr>
           </a:p>
-        </p:txBody>
-      </p:sp>
-      <p:sp>
-        <p:nvSpPr>
-          <p:cNvPr id="101735443" name="Номер слайда 3"/>
+          <a:p>
+            <a:pPr>
+              <a:defRPr/>
+            </a:pPr>
+            <a:r>
+              <a:rPr lang="en-US">
+                <a:solidFill>
+                  <a:schemeClr val="bg1"/>
+                </a:solidFill>
+              </a:rPr>
+              <a:t>TU</a:t>
+            </a:r>
+            <a:r>
+              <a:rPr lang="ru-RU">
+                <a:solidFill>
+                  <a:schemeClr val="bg1"/>
+                </a:solidFill>
+              </a:rPr>
+              <a:t> </a:t>
+            </a:r>
+            <a:r>
+              <a:rPr lang="ru-RU">
+                <a:solidFill>
+                  <a:schemeClr val="bg1"/>
+                </a:solidFill>
+              </a:rPr>
+              <a:t>и</a:t>
+            </a:r>
+            <a:r>
+              <a:rPr lang="en-US">
+                <a:solidFill>
+                  <a:schemeClr val="bg1"/>
+                </a:solidFill>
+              </a:rPr>
+              <a:t>/</a:t>
+            </a:r>
+            <a:r>
+              <a:rPr lang="ru-RU">
+                <a:solidFill>
+                  <a:schemeClr val="bg1"/>
+                </a:solidFill>
+              </a:rPr>
+              <a:t>или </a:t>
+            </a:r>
+            <a:r>
+              <a:rPr lang="en-US">
+                <a:solidFill>
+                  <a:schemeClr val="bg1"/>
+                </a:solidFill>
+              </a:rPr>
+              <a:t>LSU</a:t>
+            </a:r>
+            <a:r>
+              <a:rPr lang="ru-RU">
+                <a:solidFill>
+                  <a:schemeClr val="bg1"/>
+                </a:solidFill>
+              </a:rPr>
+              <a:t> выполняют ин</a:t>
+            </a:r>
+            <a:r>
+              <a:rPr lang="ru-RU">
+                <a:solidFill>
+                  <a:schemeClr val="bg1"/>
+                </a:solidFill>
+              </a:rPr>
+              <a:t>струкцию;</a:t>
+            </a:r>
+            <a:endParaRPr lang="ru-RU">
+              <a:solidFill>
+                <a:schemeClr val="bg1"/>
+              </a:solidFill>
+            </a:endParaRPr>
+          </a:p>
+          <a:p>
+            <a:pPr>
+              <a:defRPr/>
+            </a:pPr>
+            <a:r>
+              <a:rPr lang="ru-RU">
+                <a:solidFill>
+                  <a:schemeClr val="bg1"/>
+                </a:solidFill>
+              </a:rPr>
+              <a:t>Результаты работы сохраняются во внешней памяти или памяти ядра;</a:t>
+            </a:r>
+            <a:endParaRPr lang="ru-RU">
+              <a:solidFill>
+                <a:schemeClr val="bg1"/>
+              </a:solidFill>
+            </a:endParaRPr>
+          </a:p>
+          <a:p>
+            <a:pPr>
+              <a:defRPr/>
+            </a:pPr>
+            <a:r>
+              <a:rPr lang="en-US">
+                <a:solidFill>
+                  <a:schemeClr val="bg1"/>
+                </a:solidFill>
+              </a:rPr>
+              <a:t>Regmap</a:t>
+            </a:r>
+            <a:r>
+              <a:rPr lang="ru-RU">
+                <a:solidFill>
+                  <a:schemeClr val="bg1"/>
+                </a:solidFill>
+              </a:rPr>
+              <a:t> содержит статусные и управляющие сигналы.</a:t>
+            </a:r>
+            <a:endParaRPr lang="en-US">
+              <a:solidFill>
+                <a:schemeClr val="bg1"/>
+              </a:solidFill>
+            </a:endParaRPr>
+          </a:p>
+        </p:txBody>
+      </p:sp>
+      <p:sp>
+        <p:nvSpPr>
+          <p:cNvPr id="64735645" name="Номер слайда 3"/>
           <p:cNvSpPr>
             <a:spLocks noGrp="1"/>
           </p:cNvSpPr>
@@ -12934,9 +13039,9 @@
             <a:pPr>
               <a:defRPr/>
             </a:pPr>
-            <a:fld id="{8C44681A-2184-8FE6-7CA2-B2F449D07AD3}" type="slidenum">
-              <a:rPr lang="ru-RU"/>
-              <a:t>8</a:t>
+            <a:fld id="{ED02CFB1-EEA1-CD3C-8AAA-9D8034B9CDE8}" type="slidenum">
+              <a:rPr lang="ru-RU"/>
+              <a:t>15</a:t>
             </a:fld>
             <a:endParaRPr lang="ru-RU"/>
           </a:p>
@@ -12944,7 +13049,7 @@
       </p:sp>
       <p:pic>
         <p:nvPicPr>
-          <p:cNvPr id="823854662" name=""/>
+          <p:cNvPr id="1877794094" name=""/>
           <p:cNvPicPr>
             <a:picLocks noChangeAspect="1"/>
           </p:cNvPicPr>
@@ -12962,8 +13067,8 @@
         </p:blipFill>
         <p:spPr bwMode="auto">
           <a:xfrm flipH="0" flipV="0">
-            <a:off x="4180358" y="2404408"/>
-            <a:ext cx="7126171" cy="3583922"/>
+            <a:off x="4856838" y="2178122"/>
+            <a:ext cx="6699458" cy="4265670"/>
           </a:xfrm>
           <a:prstGeom prst="rect">
             <a:avLst/>
@@ -13038,7 +13143,7 @@
       </p:grpSpPr>
       <p:sp>
         <p:nvSpPr>
-          <p:cNvPr id="648181351" name="Заголовок 1"/>
+          <p:cNvPr id="1053853922" name="Заголовок 1"/>
           <p:cNvSpPr>
             <a:spLocks noGrp="1"/>
           </p:cNvSpPr>
@@ -13048,17 +13153,15 @@
         </p:nvSpPr>
         <p:spPr bwMode="auto"/>
         <p:txBody>
-          <a:bodyPr vertOverflow="overflow" horzOverflow="overflow" vert="horz" wrap="square" lIns="91440" tIns="45720" rIns="91440" bIns="45720" numCol="1" spcCol="0" rtlCol="0" fromWordArt="0" anchor="ctr" anchorCtr="0" forceAA="0" upright="0" compatLnSpc="0">
-            <a:normAutofit fontScale="90000" lnSpcReduction="2000"/>
-          </a:bodyPr>
-          <a:lstStyle/>
-          <a:p>
-            <a:pPr>
-              <a:defRPr/>
-            </a:pPr>
-            <a:r>
-              <a:rPr lang="ru-RU"/>
-              <a:t>Разработка модели упрощенного графического ядра: Блок загрузки и сохранения</a:t>
+          <a:bodyPr/>
+          <a:lstStyle/>
+          <a:p>
+            <a:pPr>
+              <a:defRPr/>
+            </a:pPr>
+            <a:r>
+              <a:rPr lang="ru-RU"/>
+              <a:t>Разработка потока модели упрощенного графического ядра: общая структура</a:t>
             </a:r>
             <a:endParaRPr lang="ru-RU"/>
           </a:p>
@@ -13066,7 +13169,7 @@
       </p:sp>
       <p:sp>
         <p:nvSpPr>
-          <p:cNvPr id="241652302" name="Объект 2"/>
+          <p:cNvPr id="443765629" name="Объект 2"/>
           <p:cNvSpPr>
             <a:spLocks noGrp="1"/>
           </p:cNvSpPr>
@@ -13077,7 +13180,7 @@
         <p:spPr bwMode="auto">
           <a:xfrm flipH="0" flipV="0">
             <a:off x="680320" y="2336872"/>
-            <a:ext cx="4736811" cy="3599316"/>
+            <a:ext cx="3500037" cy="3599316"/>
           </a:xfrm>
         </p:spPr>
         <p:txBody>
@@ -13093,7 +13196,7 @@
                   <a:schemeClr val="bg1"/>
                 </a:solidFill>
               </a:rPr>
-              <a:t>Предназначен для передачи </a:t>
+              <a:t>Поток</a:t>
             </a:r>
             <a:r>
               <a:rPr lang="ru-RU">
@@ -13101,7 +13204,15 @@
                   <a:schemeClr val="bg1"/>
                 </a:solidFill>
               </a:rPr>
-              <a:t>данных между внешней памятью и потоками</a:t>
+              <a:t> обрабатывает вещественные и целочисленные данные и хранит в промежуточной памяти </a:t>
+            </a:r>
+            <a:r>
+              <a:rPr lang="en-US">
+                <a:solidFill>
+                  <a:schemeClr val="bg1"/>
+                </a:solidFill>
+              </a:rPr>
+              <a:t>- Regfile</a:t>
             </a:r>
             <a:r>
               <a:rPr lang="ru-RU">
@@ -13109,7 +13220,7 @@
                   <a:schemeClr val="bg1"/>
                 </a:solidFill>
               </a:rPr>
-              <a:t>;</a:t>
+              <a:t>.</a:t>
             </a:r>
             <a:endParaRPr lang="ru-RU">
               <a:solidFill>
@@ -13127,7 +13238,7 @@
                   <a:schemeClr val="bg1"/>
                 </a:solidFill>
               </a:rPr>
-              <a:t>Может только загружать</a:t>
+              <a:t>Основные компоненты: </a:t>
             </a:r>
             <a:r>
               <a:rPr lang="en-US">
@@ -13135,31 +13246,7 @@
                   <a:schemeClr val="bg1"/>
                 </a:solidFill>
               </a:rPr>
-              <a:t> (LOAD)</a:t>
-            </a:r>
-            <a:r>
-              <a:rPr lang="ru-RU">
-                <a:solidFill>
-                  <a:schemeClr val="bg1"/>
-                </a:solidFill>
-              </a:rPr>
-              <a:t> или сохранять</a:t>
-            </a:r>
-            <a:r>
-              <a:rPr lang="en-US">
-                <a:solidFill>
-                  <a:schemeClr val="bg1"/>
-                </a:solidFill>
-              </a:rPr>
-              <a:t> (STORE)</a:t>
-            </a:r>
-            <a:r>
-              <a:rPr lang="ru-RU">
-                <a:solidFill>
-                  <a:schemeClr val="bg1"/>
-                </a:solidFill>
-              </a:rPr>
-              <a:t>;</a:t>
+              <a:t>FPU, ALU, Regfile</a:t>
             </a:r>
             <a:endParaRPr lang="ru-RU">
               <a:solidFill>
@@ -13167,39 +13254,11 @@
               </a:solidFill>
             </a:endParaRPr>
           </a:p>
-          <a:p>
-            <a:pPr>
-              <a:defRPr/>
-            </a:pPr>
-            <a:r>
-              <a:rPr lang="ru-RU">
-                <a:solidFill>
-                  <a:schemeClr val="bg1"/>
-                </a:solidFill>
-              </a:rPr>
-              <a:t>Работает по приходящей инструкции.</a:t>
-            </a:r>
-            <a:endParaRPr lang="ru-RU">
-              <a:solidFill>
-                <a:schemeClr val="bg1"/>
-              </a:solidFill>
-            </a:endParaRPr>
-          </a:p>
-          <a:p>
-            <a:pPr>
-              <a:defRPr/>
-            </a:pPr>
-            <a:endParaRPr lang="ru-RU">
-              <a:solidFill>
-                <a:schemeClr val="bg1"/>
-              </a:solidFill>
-            </a:endParaRPr>
-          </a:p>
-        </p:txBody>
-      </p:sp>
-      <p:sp>
-        <p:nvSpPr>
-          <p:cNvPr id="1950704629" name="Номер слайда 3"/>
+        </p:txBody>
+      </p:sp>
+      <p:sp>
+        <p:nvSpPr>
+          <p:cNvPr id="101735443" name="Номер слайда 3"/>
           <p:cNvSpPr>
             <a:spLocks noGrp="1"/>
           </p:cNvSpPr>
@@ -13215,9 +13274,9 @@
             <a:pPr>
               <a:defRPr/>
             </a:pPr>
-            <a:fld id="{3268CEBC-6C76-D4A5-843E-7A9602BB4FE0}" type="slidenum">
-              <a:rPr lang="ru-RU"/>
-              <a:t>9</a:t>
+            <a:fld id="{8C44681A-2184-8FE6-7CA2-B2F449D07AD3}" type="slidenum">
+              <a:rPr lang="ru-RU"/>
+              <a:t>8</a:t>
             </a:fld>
             <a:endParaRPr lang="ru-RU"/>
           </a:p>
@@ -13225,7 +13284,7 @@
       </p:sp>
       <p:pic>
         <p:nvPicPr>
-          <p:cNvPr id="1634201683" name=""/>
+          <p:cNvPr id="823854662" name=""/>
           <p:cNvPicPr>
             <a:picLocks noChangeAspect="1"/>
           </p:cNvPicPr>
@@ -13243,8 +13302,8 @@
         </p:blipFill>
         <p:spPr bwMode="auto">
           <a:xfrm flipH="0" flipV="0">
-            <a:off x="5282858" y="2336872"/>
-            <a:ext cx="5927972" cy="3797826"/>
+            <a:off x="4180358" y="2404408"/>
+            <a:ext cx="7126171" cy="3583922"/>
           </a:xfrm>
           <a:prstGeom prst="rect">
             <a:avLst/>
@@ -13319,7 +13378,7 @@
       </p:grpSpPr>
       <p:sp>
         <p:nvSpPr>
-          <p:cNvPr id="281281277" name="Заголовок 1"/>
+          <p:cNvPr id="648181351" name="Заголовок 1"/>
           <p:cNvSpPr>
             <a:spLocks noGrp="1"/>
           </p:cNvSpPr>
@@ -13338,35 +13397,16 @@
               <a:defRPr/>
             </a:pPr>
             <a:r>
-              <a:rPr lang="ru-RU" sz="3600" b="0" i="0" u="none" strike="noStrike" cap="none" spc="0">
-                <a:solidFill>
-                  <a:schemeClr val="tx1"/>
-                </a:solidFill>
-                <a:latin typeface="+mj-lt"/>
-                <a:ea typeface="+mj-ea"/>
-                <a:cs typeface="+mj-cs"/>
-              </a:rPr>
-              <a:t>Разработка модели упрощенного графического ядра</a:t>
-            </a:r>
-            <a:r>
-              <a:rPr lang="ru-RU"/>
-              <a:t>: Интерконнект между </a:t>
-            </a:r>
-            <a:r>
-              <a:rPr lang="en-US"/>
-              <a:t>LSU </a:t>
-            </a:r>
-            <a:r>
-              <a:rPr lang="ru-RU"/>
-              <a:t>и потоками</a:t>
-            </a:r>
-            <a:endParaRPr/>
-          </a:p>
-        </p:txBody>
-      </p:sp>
-      <p:sp>
-        <p:nvSpPr>
-          <p:cNvPr id="788302279" name="Объект 2"/>
+              <a:rPr lang="ru-RU"/>
+              <a:t>Разработка модели упрощенного графического ядра: Блок загрузки и сохранения</a:t>
+            </a:r>
+            <a:endParaRPr lang="ru-RU"/>
+          </a:p>
+        </p:txBody>
+      </p:sp>
+      <p:sp>
+        <p:nvSpPr>
+          <p:cNvPr id="241652302" name="Объект 2"/>
           <p:cNvSpPr>
             <a:spLocks noGrp="1"/>
           </p:cNvSpPr>
@@ -13377,7 +13417,7 @@
         <p:spPr bwMode="auto">
           <a:xfrm flipH="0" flipV="0">
             <a:off x="680320" y="2336872"/>
-            <a:ext cx="4409973" cy="3599316"/>
+            <a:ext cx="4736811" cy="3599316"/>
           </a:xfrm>
         </p:spPr>
         <p:txBody>
@@ -13393,15 +13433,15 @@
                   <a:schemeClr val="bg1"/>
                 </a:solidFill>
               </a:rPr>
-              <a:t>Арбитр собирает с потоков данные и</a:t>
-            </a:r>
-            <a:r>
-              <a:rPr lang="en-US">
+              <a:t>Предназначен для передачи </a:t>
+            </a:r>
+            <a:r>
+              <a:rPr lang="ru-RU">
                 <a:solidFill>
                   <a:schemeClr val="bg1"/>
                 </a:solidFill>
               </a:rPr>
-              <a:t>/</a:t>
+              <a:t>данных между внешней памятью и потоками</a:t>
             </a:r>
             <a:r>
               <a:rPr lang="ru-RU">
@@ -13409,15 +13449,7 @@
                   <a:schemeClr val="bg1"/>
                 </a:solidFill>
               </a:rPr>
-              <a:t>или</a:t>
-            </a:r>
-            <a:r>
-              <a:rPr lang="ru-RU">
-                <a:solidFill>
-                  <a:schemeClr val="bg1"/>
-                </a:solidFill>
-              </a:rPr>
-              <a:t> адреса;</a:t>
+              <a:t>;</a:t>
             </a:r>
             <a:endParaRPr lang="ru-RU">
               <a:solidFill>
@@ -13430,12 +13462,20 @@
               <a:defRPr/>
             </a:pPr>
             <a:r>
+              <a:rPr lang="ru-RU">
+                <a:solidFill>
+                  <a:schemeClr val="bg1"/>
+                </a:solidFill>
+              </a:rPr>
+              <a:t>Может только загружать</a:t>
+            </a:r>
+            <a:r>
               <a:rPr lang="en-US">
                 <a:solidFill>
                   <a:schemeClr val="bg1"/>
                 </a:solidFill>
               </a:rPr>
-              <a:t>LSU</a:t>
+              <a:t> (LOAD)</a:t>
             </a:r>
             <a:r>
               <a:rPr lang="ru-RU">
@@ -13443,7 +13483,23 @@
                   <a:schemeClr val="bg1"/>
                 </a:solidFill>
               </a:rPr>
-              <a:t> выполняет запросы  с данными и адресами поочередно;</a:t>
+              <a:t> или сохранять</a:t>
+            </a:r>
+            <a:r>
+              <a:rPr lang="en-US">
+                <a:solidFill>
+                  <a:schemeClr val="bg1"/>
+                </a:solidFill>
+              </a:rPr>
+              <a:t> (STORE)</a:t>
+            </a:r>
+            <a:r>
+              <a:rPr lang="ru-RU">
+                <a:solidFill>
+                  <a:schemeClr val="bg1"/>
+                </a:solidFill>
+              </a:rPr>
+              <a:t>;</a:t>
             </a:r>
             <a:endParaRPr lang="ru-RU">
               <a:solidFill>
@@ -13461,31 +13517,7 @@
                   <a:schemeClr val="bg1"/>
                 </a:solidFill>
               </a:rPr>
-              <a:t>Арбитр выдаёт результаты потокам</a:t>
-            </a:r>
-            <a:r>
-              <a:rPr lang="ru-RU">
-                <a:solidFill>
-                  <a:schemeClr val="bg1"/>
-                </a:solidFill>
-              </a:rPr>
-              <a:t> и</a:t>
-            </a:r>
-            <a:r>
-              <a:rPr lang="en-US">
-                <a:solidFill>
-                  <a:schemeClr val="bg1"/>
-                </a:solidFill>
-              </a:rPr>
-              <a:t>/</a:t>
-            </a:r>
-            <a:r>
-              <a:rPr lang="ru-RU">
-                <a:solidFill>
-                  <a:schemeClr val="bg1"/>
-                </a:solidFill>
-              </a:rPr>
-              <a:t>или статус готовности.</a:t>
+              <a:t>Работает по приходящей инструкции.</a:t>
             </a:r>
             <a:endParaRPr lang="ru-RU">
               <a:solidFill>
@@ -13493,11 +13525,21 @@
               </a:solidFill>
             </a:endParaRPr>
           </a:p>
-        </p:txBody>
-      </p:sp>
-      <p:sp>
-        <p:nvSpPr>
-          <p:cNvPr id="1292555640" name="Номер слайда 3"/>
+          <a:p>
+            <a:pPr>
+              <a:defRPr/>
+            </a:pPr>
+            <a:endParaRPr lang="ru-RU">
+              <a:solidFill>
+                <a:schemeClr val="bg1"/>
+              </a:solidFill>
+            </a:endParaRPr>
+          </a:p>
+        </p:txBody>
+      </p:sp>
+      <p:sp>
+        <p:nvSpPr>
+          <p:cNvPr id="1950704629" name="Номер слайда 3"/>
           <p:cNvSpPr>
             <a:spLocks noGrp="1"/>
           </p:cNvSpPr>
@@ -13513,9 +13555,9 @@
             <a:pPr>
               <a:defRPr/>
             </a:pPr>
-            <a:fld id="{19687AD8-1A48-903E-417E-81FF292386D7}" type="slidenum">
-              <a:rPr lang="ru-RU"/>
-              <a:t>8</a:t>
+            <a:fld id="{3268CEBC-6C76-D4A5-843E-7A9602BB4FE0}" type="slidenum">
+              <a:rPr lang="ru-RU"/>
+              <a:t>9</a:t>
             </a:fld>
             <a:endParaRPr lang="ru-RU"/>
           </a:p>
@@ -13523,7 +13565,7 @@
       </p:sp>
       <p:pic>
         <p:nvPicPr>
-          <p:cNvPr id="834456587" name=""/>
+          <p:cNvPr id="1472644960" name=""/>
           <p:cNvPicPr>
             <a:picLocks noChangeAspect="1"/>
           </p:cNvPicPr>
@@ -13541,8 +13583,8 @@
         </p:blipFill>
         <p:spPr bwMode="auto">
           <a:xfrm flipH="0" flipV="0">
-            <a:off x="5277783" y="2180571"/>
-            <a:ext cx="5266039" cy="4401765"/>
+            <a:off x="5092174" y="3007761"/>
+            <a:ext cx="6324098" cy="2257538"/>
           </a:xfrm>
           <a:prstGeom prst="rect">
             <a:avLst/>

--- a/docs/starukhin_dissertation/magister_pres.pptx
+++ b/docs/starukhin_dissertation/magister_pres.pptx
@@ -149,7 +149,7 @@
       </p:grpSpPr>
       <p:sp>
         <p:nvSpPr>
-          <p:cNvPr id="1955735315" name="Верхний колонтитул 1"/>
+          <p:cNvPr id="378152317" name="Верхний колонтитул 1"/>
           <p:cNvSpPr>
             <a:spLocks noGrp="1"/>
           </p:cNvSpPr>
@@ -183,7 +183,7 @@
       </p:sp>
       <p:sp>
         <p:nvSpPr>
-          <p:cNvPr id="75313338" name="Дата 2"/>
+          <p:cNvPr id="1512979661" name="Дата 2"/>
           <p:cNvSpPr>
             <a:spLocks noGrp="1"/>
           </p:cNvSpPr>
@@ -221,7 +221,7 @@
       </p:sp>
       <p:sp>
         <p:nvSpPr>
-          <p:cNvPr id="1462071746" name="Образ слайда 3"/>
+          <p:cNvPr id="57264332" name="Образ слайда 3"/>
           <p:cNvSpPr>
             <a:spLocks noChangeAspect="1" noGrp="1" noRot="1"/>
           </p:cNvSpPr>
@@ -257,7 +257,7 @@
       </p:sp>
       <p:sp>
         <p:nvSpPr>
-          <p:cNvPr id="1029992306" name="Заметки 4"/>
+          <p:cNvPr id="41142498" name="Заметки 4"/>
           <p:cNvSpPr>
             <a:spLocks noGrp="1"/>
           </p:cNvSpPr>
@@ -331,7 +331,7 @@
       </p:sp>
       <p:sp>
         <p:nvSpPr>
-          <p:cNvPr id="2013086466" name="Нижний колонтитул 5"/>
+          <p:cNvPr id="1635327804" name="Нижний колонтитул 5"/>
           <p:cNvSpPr>
             <a:spLocks noGrp="1"/>
           </p:cNvSpPr>
@@ -365,7 +365,7 @@
       </p:sp>
       <p:sp>
         <p:nvSpPr>
-          <p:cNvPr id="777271291" name="Номер слайда 6"/>
+          <p:cNvPr id="1277181526" name="Номер слайда 6"/>
           <p:cNvSpPr>
             <a:spLocks noGrp="1"/>
           </p:cNvSpPr>
@@ -518,7 +518,7 @@
       </p:grpSpPr>
       <p:sp>
         <p:nvSpPr>
-          <p:cNvPr id="1111457970" name="Slide Image Placeholder 1"/>
+          <p:cNvPr id="648512038" name="Slide Image Placeholder 1"/>
           <p:cNvSpPr>
             <a:spLocks noChangeAspect="1" noGrp="1" noRot="1"/>
           </p:cNvSpPr>
@@ -530,7 +530,7 @@
       </p:sp>
       <p:sp>
         <p:nvSpPr>
-          <p:cNvPr id="1825404917" name="Notes Placeholder 2"/>
+          <p:cNvPr id="227306547" name="Notes Placeholder 2"/>
           <p:cNvSpPr>
             <a:spLocks noGrp="1"/>
           </p:cNvSpPr>
@@ -552,7 +552,7 @@
       </p:sp>
       <p:sp>
         <p:nvSpPr>
-          <p:cNvPr id="2129937924" name="Slide Number Placeholder 3"/>
+          <p:cNvPr id="1444462650" name="Slide Number Placeholder 3"/>
           <p:cNvSpPr>
             <a:spLocks noGrp="1"/>
           </p:cNvSpPr>
@@ -603,7 +603,7 @@
       </p:grpSpPr>
       <p:sp>
         <p:nvSpPr>
-          <p:cNvPr id="3946966" name="Slide Image Placeholder 1"/>
+          <p:cNvPr id="2005682416" name="Slide Image Placeholder 1"/>
           <p:cNvSpPr>
             <a:spLocks noChangeAspect="1" noGrp="1" noRot="1"/>
           </p:cNvSpPr>
@@ -615,7 +615,7 @@
       </p:sp>
       <p:sp>
         <p:nvSpPr>
-          <p:cNvPr id="474051137" name="Notes Placeholder 2"/>
+          <p:cNvPr id="573031710" name="Notes Placeholder 2"/>
           <p:cNvSpPr>
             <a:spLocks noGrp="1"/>
           </p:cNvSpPr>
@@ -637,7 +637,7 @@
       </p:sp>
       <p:sp>
         <p:nvSpPr>
-          <p:cNvPr id="1818038476" name="Slide Number Placeholder 3"/>
+          <p:cNvPr id="1333981905" name="Slide Number Placeholder 3"/>
           <p:cNvSpPr>
             <a:spLocks noGrp="1"/>
           </p:cNvSpPr>
@@ -688,7 +688,7 @@
       </p:grpSpPr>
       <p:sp>
         <p:nvSpPr>
-          <p:cNvPr id="314302593" name="Slide Image Placeholder 1"/>
+          <p:cNvPr id="130361602" name="Slide Image Placeholder 1"/>
           <p:cNvSpPr>
             <a:spLocks noChangeAspect="1" noGrp="1" noRot="1"/>
           </p:cNvSpPr>
@@ -700,7 +700,7 @@
       </p:sp>
       <p:sp>
         <p:nvSpPr>
-          <p:cNvPr id="1824163988" name="Notes Placeholder 2"/>
+          <p:cNvPr id="1892395812" name="Notes Placeholder 2"/>
           <p:cNvSpPr>
             <a:spLocks noGrp="1"/>
           </p:cNvSpPr>
@@ -722,7 +722,7 @@
       </p:sp>
       <p:sp>
         <p:nvSpPr>
-          <p:cNvPr id="1476792029" name="Slide Number Placeholder 3"/>
+          <p:cNvPr id="841219195" name="Slide Number Placeholder 3"/>
           <p:cNvSpPr>
             <a:spLocks noGrp="1"/>
           </p:cNvSpPr>
@@ -773,7 +773,7 @@
       </p:grpSpPr>
       <p:sp>
         <p:nvSpPr>
-          <p:cNvPr id="889820135" name="Slide Image Placeholder 1"/>
+          <p:cNvPr id="1906292594" name="Slide Image Placeholder 1"/>
           <p:cNvSpPr>
             <a:spLocks noChangeAspect="1" noGrp="1" noRot="1"/>
           </p:cNvSpPr>
@@ -785,7 +785,7 @@
       </p:sp>
       <p:sp>
         <p:nvSpPr>
-          <p:cNvPr id="535589936" name="Notes Placeholder 2"/>
+          <p:cNvPr id="800672914" name="Notes Placeholder 2"/>
           <p:cNvSpPr>
             <a:spLocks noGrp="1"/>
           </p:cNvSpPr>
@@ -807,7 +807,7 @@
       </p:sp>
       <p:sp>
         <p:nvSpPr>
-          <p:cNvPr id="2073365242" name="Slide Number Placeholder 3"/>
+          <p:cNvPr id="746027177" name="Slide Number Placeholder 3"/>
           <p:cNvSpPr>
             <a:spLocks noGrp="1"/>
           </p:cNvSpPr>
@@ -858,7 +858,7 @@
       </p:grpSpPr>
       <p:sp>
         <p:nvSpPr>
-          <p:cNvPr id="527662197" name="Slide Image Placeholder 1"/>
+          <p:cNvPr id="1679470708" name="Slide Image Placeholder 1"/>
           <p:cNvSpPr>
             <a:spLocks noChangeAspect="1" noGrp="1" noRot="1"/>
           </p:cNvSpPr>
@@ -870,7 +870,7 @@
       </p:sp>
       <p:sp>
         <p:nvSpPr>
-          <p:cNvPr id="421782712" name="Notes Placeholder 2"/>
+          <p:cNvPr id="1954097245" name="Notes Placeholder 2"/>
           <p:cNvSpPr>
             <a:spLocks noGrp="1"/>
           </p:cNvSpPr>
@@ -892,7 +892,7 @@
       </p:sp>
       <p:sp>
         <p:nvSpPr>
-          <p:cNvPr id="183687219" name="Slide Number Placeholder 3"/>
+          <p:cNvPr id="466385429" name="Slide Number Placeholder 3"/>
           <p:cNvSpPr>
             <a:spLocks noGrp="1"/>
           </p:cNvSpPr>
@@ -943,7 +943,7 @@
       </p:grpSpPr>
       <p:sp>
         <p:nvSpPr>
-          <p:cNvPr id="1123376815" name="Slide Image Placeholder 1"/>
+          <p:cNvPr id="2067722888" name="Slide Image Placeholder 1"/>
           <p:cNvSpPr>
             <a:spLocks noChangeAspect="1" noGrp="1" noRot="1"/>
           </p:cNvSpPr>
@@ -955,7 +955,7 @@
       </p:sp>
       <p:sp>
         <p:nvSpPr>
-          <p:cNvPr id="226207624" name="Notes Placeholder 2"/>
+          <p:cNvPr id="1647924168" name="Notes Placeholder 2"/>
           <p:cNvSpPr>
             <a:spLocks noGrp="1"/>
           </p:cNvSpPr>
@@ -977,7 +977,7 @@
       </p:sp>
       <p:sp>
         <p:nvSpPr>
-          <p:cNvPr id="576575404" name="Slide Number Placeholder 3"/>
+          <p:cNvPr id="238480203" name="Slide Number Placeholder 3"/>
           <p:cNvSpPr>
             <a:spLocks noGrp="1"/>
           </p:cNvSpPr>
@@ -1028,7 +1028,7 @@
       </p:grpSpPr>
       <p:sp>
         <p:nvSpPr>
-          <p:cNvPr id="966879587" name="Slide Image Placeholder 1"/>
+          <p:cNvPr id="1420294490" name="Slide Image Placeholder 1"/>
           <p:cNvSpPr>
             <a:spLocks noChangeAspect="1" noGrp="1" noRot="1"/>
           </p:cNvSpPr>
@@ -1040,7 +1040,7 @@
       </p:sp>
       <p:sp>
         <p:nvSpPr>
-          <p:cNvPr id="1794322228" name="Notes Placeholder 2"/>
+          <p:cNvPr id="1562437981" name="Notes Placeholder 2"/>
           <p:cNvSpPr>
             <a:spLocks noGrp="1"/>
           </p:cNvSpPr>
@@ -1062,7 +1062,7 @@
       </p:sp>
       <p:sp>
         <p:nvSpPr>
-          <p:cNvPr id="16873417" name="Slide Number Placeholder 3"/>
+          <p:cNvPr id="1772592446" name="Slide Number Placeholder 3"/>
           <p:cNvSpPr>
             <a:spLocks noGrp="1"/>
           </p:cNvSpPr>
@@ -1113,7 +1113,7 @@
       </p:grpSpPr>
       <p:sp>
         <p:nvSpPr>
-          <p:cNvPr id="1703238532" name="Slide Image Placeholder 1"/>
+          <p:cNvPr id="1660077007" name="Slide Image Placeholder 1"/>
           <p:cNvSpPr>
             <a:spLocks noChangeAspect="1" noGrp="1" noRot="1"/>
           </p:cNvSpPr>
@@ -1125,7 +1125,7 @@
       </p:sp>
       <p:sp>
         <p:nvSpPr>
-          <p:cNvPr id="1088565514" name="Notes Placeholder 2"/>
+          <p:cNvPr id="1617119750" name="Notes Placeholder 2"/>
           <p:cNvSpPr>
             <a:spLocks noGrp="1"/>
           </p:cNvSpPr>
@@ -1147,7 +1147,7 @@
       </p:sp>
       <p:sp>
         <p:nvSpPr>
-          <p:cNvPr id="815814546" name="Slide Number Placeholder 3"/>
+          <p:cNvPr id="1295409349" name="Slide Number Placeholder 3"/>
           <p:cNvSpPr>
             <a:spLocks noGrp="1"/>
           </p:cNvSpPr>
@@ -1198,7 +1198,7 @@
       </p:grpSpPr>
       <p:sp>
         <p:nvSpPr>
-          <p:cNvPr id="36414649" name="Slide Image Placeholder 1"/>
+          <p:cNvPr id="1115521371" name="Slide Image Placeholder 1"/>
           <p:cNvSpPr>
             <a:spLocks noChangeAspect="1" noGrp="1" noRot="1"/>
           </p:cNvSpPr>
@@ -1210,7 +1210,7 @@
       </p:sp>
       <p:sp>
         <p:nvSpPr>
-          <p:cNvPr id="1925784116" name="Notes Placeholder 2"/>
+          <p:cNvPr id="1638792018" name="Notes Placeholder 2"/>
           <p:cNvSpPr>
             <a:spLocks noGrp="1"/>
           </p:cNvSpPr>
@@ -1232,7 +1232,7 @@
       </p:sp>
       <p:sp>
         <p:nvSpPr>
-          <p:cNvPr id="137985884" name="Slide Number Placeholder 3"/>
+          <p:cNvPr id="1906447812" name="Slide Number Placeholder 3"/>
           <p:cNvSpPr>
             <a:spLocks noGrp="1"/>
           </p:cNvSpPr>
@@ -1283,7 +1283,7 @@
       </p:grpSpPr>
       <p:sp>
         <p:nvSpPr>
-          <p:cNvPr id="1305798050" name="Slide Image Placeholder 1"/>
+          <p:cNvPr id="1663655987" name="Slide Image Placeholder 1"/>
           <p:cNvSpPr>
             <a:spLocks noChangeAspect="1" noGrp="1" noRot="1"/>
           </p:cNvSpPr>
@@ -1295,7 +1295,7 @@
       </p:sp>
       <p:sp>
         <p:nvSpPr>
-          <p:cNvPr id="2062024955" name="Notes Placeholder 2"/>
+          <p:cNvPr id="107266559" name="Notes Placeholder 2"/>
           <p:cNvSpPr>
             <a:spLocks noGrp="1"/>
           </p:cNvSpPr>
@@ -1317,7 +1317,7 @@
       </p:sp>
       <p:sp>
         <p:nvSpPr>
-          <p:cNvPr id="2041553537" name="Slide Number Placeholder 3"/>
+          <p:cNvPr id="1481685124" name="Slide Number Placeholder 3"/>
           <p:cNvSpPr>
             <a:spLocks noGrp="1"/>
           </p:cNvSpPr>
@@ -1368,7 +1368,7 @@
       </p:grpSpPr>
       <p:sp>
         <p:nvSpPr>
-          <p:cNvPr id="1380656609" name="Slide Image Placeholder 1"/>
+          <p:cNvPr id="887483382" name="Slide Image Placeholder 1"/>
           <p:cNvSpPr>
             <a:spLocks noChangeAspect="1" noGrp="1" noRot="1"/>
           </p:cNvSpPr>
@@ -1380,7 +1380,7 @@
       </p:sp>
       <p:sp>
         <p:nvSpPr>
-          <p:cNvPr id="581201666" name="Notes Placeholder 2"/>
+          <p:cNvPr id="765902535" name="Notes Placeholder 2"/>
           <p:cNvSpPr>
             <a:spLocks noGrp="1"/>
           </p:cNvSpPr>
@@ -1402,7 +1402,7 @@
       </p:sp>
       <p:sp>
         <p:nvSpPr>
-          <p:cNvPr id="116745701" name="Slide Number Placeholder 3"/>
+          <p:cNvPr id="1237751632" name="Slide Number Placeholder 3"/>
           <p:cNvSpPr>
             <a:spLocks noGrp="1"/>
           </p:cNvSpPr>
@@ -1453,7 +1453,7 @@
       </p:grpSpPr>
       <p:sp>
         <p:nvSpPr>
-          <p:cNvPr id="973489607" name="Slide Image Placeholder 1"/>
+          <p:cNvPr id="635839017" name="Slide Image Placeholder 1"/>
           <p:cNvSpPr>
             <a:spLocks noChangeAspect="1" noGrp="1" noRot="1"/>
           </p:cNvSpPr>
@@ -1465,7 +1465,7 @@
       </p:sp>
       <p:sp>
         <p:nvSpPr>
-          <p:cNvPr id="454305222" name="Notes Placeholder 2"/>
+          <p:cNvPr id="2038451647" name="Notes Placeholder 2"/>
           <p:cNvSpPr>
             <a:spLocks noGrp="1"/>
           </p:cNvSpPr>
@@ -1487,7 +1487,7 @@
       </p:sp>
       <p:sp>
         <p:nvSpPr>
-          <p:cNvPr id="480711839" name="Slide Number Placeholder 3"/>
+          <p:cNvPr id="656602091" name="Slide Number Placeholder 3"/>
           <p:cNvSpPr>
             <a:spLocks noGrp="1"/>
           </p:cNvSpPr>
@@ -1623,7 +1623,7 @@
       </p:grpSpPr>
       <p:sp>
         <p:nvSpPr>
-          <p:cNvPr id="296686697" name="Slide Image Placeholder 1"/>
+          <p:cNvPr id="141993073" name="Slide Image Placeholder 1"/>
           <p:cNvSpPr>
             <a:spLocks noChangeAspect="1" noGrp="1" noRot="1"/>
           </p:cNvSpPr>
@@ -1635,7 +1635,7 @@
       </p:sp>
       <p:sp>
         <p:nvSpPr>
-          <p:cNvPr id="680896614" name="Notes Placeholder 2"/>
+          <p:cNvPr id="1633962415" name="Notes Placeholder 2"/>
           <p:cNvSpPr>
             <a:spLocks noGrp="1"/>
           </p:cNvSpPr>
@@ -1657,7 +1657,7 @@
       </p:sp>
       <p:sp>
         <p:nvSpPr>
-          <p:cNvPr id="1756825596" name="Slide Number Placeholder 3"/>
+          <p:cNvPr id="1424971454" name="Slide Number Placeholder 3"/>
           <p:cNvSpPr>
             <a:spLocks noGrp="1"/>
           </p:cNvSpPr>
@@ -1708,7 +1708,7 @@
       </p:grpSpPr>
       <p:sp>
         <p:nvSpPr>
-          <p:cNvPr id="1502645111" name="Slide Image Placeholder 1"/>
+          <p:cNvPr id="627102878" name="Slide Image Placeholder 1"/>
           <p:cNvSpPr>
             <a:spLocks noChangeAspect="1" noGrp="1" noRot="1"/>
           </p:cNvSpPr>
@@ -1720,7 +1720,7 @@
       </p:sp>
       <p:sp>
         <p:nvSpPr>
-          <p:cNvPr id="762434863" name="Notes Placeholder 2"/>
+          <p:cNvPr id="1154629852" name="Notes Placeholder 2"/>
           <p:cNvSpPr>
             <a:spLocks noGrp="1"/>
           </p:cNvSpPr>
@@ -1742,7 +1742,7 @@
       </p:sp>
       <p:sp>
         <p:nvSpPr>
-          <p:cNvPr id="1898101853" name="Slide Number Placeholder 3"/>
+          <p:cNvPr id="1348789066" name="Slide Number Placeholder 3"/>
           <p:cNvSpPr>
             <a:spLocks noGrp="1"/>
           </p:cNvSpPr>
@@ -1793,7 +1793,7 @@
       </p:grpSpPr>
       <p:sp>
         <p:nvSpPr>
-          <p:cNvPr id="2078483540" name="Slide Image Placeholder 1"/>
+          <p:cNvPr id="8561268" name="Slide Image Placeholder 1"/>
           <p:cNvSpPr>
             <a:spLocks noChangeAspect="1" noGrp="1" noRot="1"/>
           </p:cNvSpPr>
@@ -1805,7 +1805,7 @@
       </p:sp>
       <p:sp>
         <p:nvSpPr>
-          <p:cNvPr id="888779382" name="Notes Placeholder 2"/>
+          <p:cNvPr id="2027030018" name="Notes Placeholder 2"/>
           <p:cNvSpPr>
             <a:spLocks noGrp="1"/>
           </p:cNvSpPr>
@@ -1827,7 +1827,7 @@
       </p:sp>
       <p:sp>
         <p:nvSpPr>
-          <p:cNvPr id="421356586" name="Slide Number Placeholder 3"/>
+          <p:cNvPr id="1178049777" name="Slide Number Placeholder 3"/>
           <p:cNvSpPr>
             <a:spLocks noGrp="1"/>
           </p:cNvSpPr>
@@ -1878,7 +1878,7 @@
       </p:grpSpPr>
       <p:sp>
         <p:nvSpPr>
-          <p:cNvPr id="140052192" name="Заголовок 1"/>
+          <p:cNvPr id="1373904706" name="Заголовок 1"/>
           <p:cNvSpPr>
             <a:spLocks noGrp="1"/>
           </p:cNvSpPr>
@@ -1913,7 +1913,7 @@
       </p:sp>
       <p:sp>
         <p:nvSpPr>
-          <p:cNvPr id="23376294" name="Подзаголовок 2"/>
+          <p:cNvPr id="1009674366" name="Подзаголовок 2"/>
           <p:cNvSpPr>
             <a:spLocks noGrp="1"/>
           </p:cNvSpPr>
@@ -1981,7 +1981,7 @@
       </p:sp>
       <p:sp>
         <p:nvSpPr>
-          <p:cNvPr id="1940400193" name="Дата 3"/>
+          <p:cNvPr id="544590494" name="Дата 3"/>
           <p:cNvSpPr>
             <a:spLocks noGrp="1"/>
           </p:cNvSpPr>
@@ -2007,7 +2007,7 @@
       </p:sp>
       <p:sp>
         <p:nvSpPr>
-          <p:cNvPr id="1686587003" name="Нижний колонтитул 4"/>
+          <p:cNvPr id="1521061760" name="Нижний колонтитул 4"/>
           <p:cNvSpPr>
             <a:spLocks noGrp="1"/>
           </p:cNvSpPr>
@@ -2029,7 +2029,7 @@
       </p:sp>
       <p:sp>
         <p:nvSpPr>
-          <p:cNvPr id="1957637731" name="Номер слайда 5"/>
+          <p:cNvPr id="780985378" name="Номер слайда 5"/>
           <p:cNvSpPr>
             <a:spLocks noGrp="1"/>
           </p:cNvSpPr>
@@ -2080,7 +2080,7 @@
       </p:grpSpPr>
       <p:sp>
         <p:nvSpPr>
-          <p:cNvPr id="1905576024" name="Заголовок 1"/>
+          <p:cNvPr id="1644056899" name="Заголовок 1"/>
           <p:cNvSpPr>
             <a:spLocks noGrp="1"/>
           </p:cNvSpPr>
@@ -2106,7 +2106,7 @@
       </p:sp>
       <p:sp>
         <p:nvSpPr>
-          <p:cNvPr id="1175242156" name="Вертикальный текст 2"/>
+          <p:cNvPr id="512398309" name="Вертикальный текст 2"/>
           <p:cNvSpPr>
             <a:spLocks noGrp="1"/>
           </p:cNvSpPr>
@@ -2172,7 +2172,7 @@
       </p:sp>
       <p:sp>
         <p:nvSpPr>
-          <p:cNvPr id="706822787" name="Дата 3"/>
+          <p:cNvPr id="679144038" name="Дата 3"/>
           <p:cNvSpPr>
             <a:spLocks noGrp="1"/>
           </p:cNvSpPr>
@@ -2198,7 +2198,7 @@
       </p:sp>
       <p:sp>
         <p:nvSpPr>
-          <p:cNvPr id="215753915" name="Нижний колонтитул 4"/>
+          <p:cNvPr id="452512991" name="Нижний колонтитул 4"/>
           <p:cNvSpPr>
             <a:spLocks noGrp="1"/>
           </p:cNvSpPr>
@@ -2220,7 +2220,7 @@
       </p:sp>
       <p:sp>
         <p:nvSpPr>
-          <p:cNvPr id="194376644" name="Номер слайда 5"/>
+          <p:cNvPr id="1542403309" name="Номер слайда 5"/>
           <p:cNvSpPr>
             <a:spLocks noGrp="1"/>
           </p:cNvSpPr>
@@ -2271,7 +2271,7 @@
       </p:grpSpPr>
       <p:sp>
         <p:nvSpPr>
-          <p:cNvPr id="1646293112" name="Вертикальный заголовок 1"/>
+          <p:cNvPr id="1421768297" name="Вертикальный заголовок 1"/>
           <p:cNvSpPr>
             <a:spLocks noGrp="1"/>
           </p:cNvSpPr>
@@ -2302,7 +2302,7 @@
       </p:sp>
       <p:sp>
         <p:nvSpPr>
-          <p:cNvPr id="629385852" name="Вертикальный текст 2"/>
+          <p:cNvPr id="701067690" name="Вертикальный текст 2"/>
           <p:cNvSpPr>
             <a:spLocks noGrp="1"/>
           </p:cNvSpPr>
@@ -2373,7 +2373,7 @@
       </p:sp>
       <p:sp>
         <p:nvSpPr>
-          <p:cNvPr id="989467152" name="Дата 3"/>
+          <p:cNvPr id="808753604" name="Дата 3"/>
           <p:cNvSpPr>
             <a:spLocks noGrp="1"/>
           </p:cNvSpPr>
@@ -2399,7 +2399,7 @@
       </p:sp>
       <p:sp>
         <p:nvSpPr>
-          <p:cNvPr id="1777267971" name="Нижний колонтитул 4"/>
+          <p:cNvPr id="1485421111" name="Нижний колонтитул 4"/>
           <p:cNvSpPr>
             <a:spLocks noGrp="1"/>
           </p:cNvSpPr>
@@ -2421,7 +2421,7 @@
       </p:sp>
       <p:sp>
         <p:nvSpPr>
-          <p:cNvPr id="691189460" name="Номер слайда 5"/>
+          <p:cNvPr id="226836088" name="Номер слайда 5"/>
           <p:cNvSpPr>
             <a:spLocks noGrp="1"/>
           </p:cNvSpPr>
@@ -2472,7 +2472,7 @@
       </p:grpSpPr>
       <p:pic>
         <p:nvPicPr>
-          <p:cNvPr id="717531628" name="Picture 6" descr="HD-ShadowLong.png"/>
+          <p:cNvPr id="1403881619" name="Picture 6" descr="HD-ShadowLong.png"/>
           <p:cNvPicPr>
             <a:picLocks noChangeAspect="1"/>
           </p:cNvPicPr>
@@ -2494,7 +2494,7 @@
       </p:pic>
       <p:pic>
         <p:nvPicPr>
-          <p:cNvPr id="822002329" name="Picture 7" descr="HD-ShadowShort.png"/>
+          <p:cNvPr id="2096148953" name="Picture 7" descr="HD-ShadowShort.png"/>
           <p:cNvPicPr>
             <a:picLocks noChangeAspect="1"/>
           </p:cNvPicPr>
@@ -2516,7 +2516,7 @@
       </p:pic>
       <p:sp>
         <p:nvSpPr>
-          <p:cNvPr id="1651184888" name="Rectangle 8"/>
+          <p:cNvPr id="1753135736" name="Rectangle 8"/>
           <p:cNvSpPr/>
           <p:nvPr/>
         </p:nvSpPr>
@@ -2557,7 +2557,7 @@
       </p:sp>
       <p:sp>
         <p:nvSpPr>
-          <p:cNvPr id="1060423919" name="Rectangle 9"/>
+          <p:cNvPr id="228288481" name="Rectangle 9"/>
           <p:cNvSpPr/>
           <p:nvPr/>
         </p:nvSpPr>
@@ -2595,7 +2595,7 @@
       </p:sp>
       <p:sp>
         <p:nvSpPr>
-          <p:cNvPr id="1677816805" name="Title 1"/>
+          <p:cNvPr id="562622277" name="Title 1"/>
           <p:cNvSpPr>
             <a:spLocks noGrp="1"/>
           </p:cNvSpPr>
@@ -2632,7 +2632,7 @@
       </p:sp>
       <p:sp>
         <p:nvSpPr>
-          <p:cNvPr id="1537135183" name="Subtitle 2"/>
+          <p:cNvPr id="1895641195" name="Subtitle 2"/>
           <p:cNvSpPr>
             <a:spLocks noGrp="1"/>
           </p:cNvSpPr>
@@ -2702,7 +2702,7 @@
       </p:sp>
       <p:sp>
         <p:nvSpPr>
-          <p:cNvPr id="1091790241" name="Date Placeholder 3"/>
+          <p:cNvPr id="1355832418" name="Date Placeholder 3"/>
           <p:cNvSpPr>
             <a:spLocks noGrp="1"/>
           </p:cNvSpPr>
@@ -2728,7 +2728,7 @@
       </p:sp>
       <p:sp>
         <p:nvSpPr>
-          <p:cNvPr id="730649976" name="Footer Placeholder 4"/>
+          <p:cNvPr id="194765017" name="Footer Placeholder 4"/>
           <p:cNvSpPr>
             <a:spLocks noGrp="1"/>
           </p:cNvSpPr>
@@ -2750,7 +2750,7 @@
       </p:sp>
       <p:sp>
         <p:nvSpPr>
-          <p:cNvPr id="178927716" name="Slide Number Placeholder 5"/>
+          <p:cNvPr id="1389313679" name="Slide Number Placeholder 5"/>
           <p:cNvSpPr>
             <a:spLocks noGrp="1"/>
           </p:cNvSpPr>
@@ -2806,7 +2806,7 @@
       </p:grpSpPr>
       <p:pic>
         <p:nvPicPr>
-          <p:cNvPr id="336166365" name="Picture 14" descr="HD-ShadowLong.png"/>
+          <p:cNvPr id="905243473" name="Picture 14" descr="HD-ShadowLong.png"/>
           <p:cNvPicPr>
             <a:picLocks noChangeAspect="1"/>
           </p:cNvPicPr>
@@ -2828,7 +2828,7 @@
       </p:pic>
       <p:pic>
         <p:nvPicPr>
-          <p:cNvPr id="1370824802" name="Picture 15" descr="HD-ShadowShort.png"/>
+          <p:cNvPr id="2117509437" name="Picture 15" descr="HD-ShadowShort.png"/>
           <p:cNvPicPr>
             <a:picLocks noChangeAspect="1"/>
           </p:cNvPicPr>
@@ -2850,7 +2850,7 @@
       </p:pic>
       <p:sp>
         <p:nvSpPr>
-          <p:cNvPr id="1136158675" name="Rectangle 16"/>
+          <p:cNvPr id="1476421852" name="Rectangle 16"/>
           <p:cNvSpPr/>
           <p:nvPr/>
         </p:nvSpPr>
@@ -2891,7 +2891,7 @@
       </p:sp>
       <p:sp>
         <p:nvSpPr>
-          <p:cNvPr id="63870765" name="Rectangle 17"/>
+          <p:cNvPr id="1725487788" name="Rectangle 17"/>
           <p:cNvSpPr/>
           <p:nvPr/>
         </p:nvSpPr>
@@ -2929,7 +2929,7 @@
       </p:sp>
       <p:sp>
         <p:nvSpPr>
-          <p:cNvPr id="594587615" name="Title 1"/>
+          <p:cNvPr id="873059702" name="Title 1"/>
           <p:cNvSpPr>
             <a:spLocks noGrp="1"/>
           </p:cNvSpPr>
@@ -2955,7 +2955,7 @@
       </p:sp>
       <p:sp>
         <p:nvSpPr>
-          <p:cNvPr id="766648908" name="Content Placeholder 2"/>
+          <p:cNvPr id="476412194" name="Content Placeholder 2"/>
           <p:cNvSpPr>
             <a:spLocks noGrp="1"/>
           </p:cNvSpPr>
@@ -3021,7 +3021,7 @@
       </p:sp>
       <p:sp>
         <p:nvSpPr>
-          <p:cNvPr id="1232498497" name="Date Placeholder 3"/>
+          <p:cNvPr id="1489004601" name="Date Placeholder 3"/>
           <p:cNvSpPr>
             <a:spLocks noGrp="1"/>
           </p:cNvSpPr>
@@ -3047,7 +3047,7 @@
       </p:sp>
       <p:sp>
         <p:nvSpPr>
-          <p:cNvPr id="613369088" name="Footer Placeholder 4"/>
+          <p:cNvPr id="1518259385" name="Footer Placeholder 4"/>
           <p:cNvSpPr>
             <a:spLocks noGrp="1"/>
           </p:cNvSpPr>
@@ -3069,7 +3069,7 @@
       </p:sp>
       <p:sp>
         <p:nvSpPr>
-          <p:cNvPr id="205946416" name="Slide Number Placeholder 5"/>
+          <p:cNvPr id="1500751933" name="Slide Number Placeholder 5"/>
           <p:cNvSpPr>
             <a:spLocks noGrp="1"/>
           </p:cNvSpPr>
@@ -3120,7 +3120,7 @@
       </p:grpSpPr>
       <p:pic>
         <p:nvPicPr>
-          <p:cNvPr id="353254116" name="Picture 6" descr="HD-ShadowLong.png"/>
+          <p:cNvPr id="1790036656" name="Picture 6" descr="HD-ShadowLong.png"/>
           <p:cNvPicPr>
             <a:picLocks noChangeAspect="1"/>
           </p:cNvPicPr>
@@ -3142,7 +3142,7 @@
       </p:pic>
       <p:pic>
         <p:nvPicPr>
-          <p:cNvPr id="1575720322" name="Picture 7" descr="HD-ShadowShort.png"/>
+          <p:cNvPr id="414040480" name="Picture 7" descr="HD-ShadowShort.png"/>
           <p:cNvPicPr>
             <a:picLocks noChangeAspect="1"/>
           </p:cNvPicPr>
@@ -3164,7 +3164,7 @@
       </p:pic>
       <p:sp>
         <p:nvSpPr>
-          <p:cNvPr id="778678633" name="Rectangle 8"/>
+          <p:cNvPr id="1894440177" name="Rectangle 8"/>
           <p:cNvSpPr/>
           <p:nvPr/>
         </p:nvSpPr>
@@ -3205,7 +3205,7 @@
       </p:sp>
       <p:sp>
         <p:nvSpPr>
-          <p:cNvPr id="1641099088" name="Rectangle 9"/>
+          <p:cNvPr id="650471797" name="Rectangle 9"/>
           <p:cNvSpPr/>
           <p:nvPr/>
         </p:nvSpPr>
@@ -3243,7 +3243,7 @@
       </p:sp>
       <p:sp>
         <p:nvSpPr>
-          <p:cNvPr id="460382468" name="Title 1"/>
+          <p:cNvPr id="875870215" name="Title 1"/>
           <p:cNvSpPr>
             <a:spLocks noGrp="1"/>
           </p:cNvSpPr>
@@ -3280,7 +3280,7 @@
       </p:sp>
       <p:sp>
         <p:nvSpPr>
-          <p:cNvPr id="44447529" name="Text Placeholder 2"/>
+          <p:cNvPr id="906931653" name="Text Placeholder 2"/>
           <p:cNvSpPr>
             <a:spLocks noGrp="1"/>
           </p:cNvSpPr>
@@ -3404,7 +3404,7 @@
       </p:sp>
       <p:sp>
         <p:nvSpPr>
-          <p:cNvPr id="363968583" name="Date Placeholder 3"/>
+          <p:cNvPr id="1019307359" name="Date Placeholder 3"/>
           <p:cNvSpPr>
             <a:spLocks noGrp="1"/>
           </p:cNvSpPr>
@@ -3430,7 +3430,7 @@
       </p:sp>
       <p:sp>
         <p:nvSpPr>
-          <p:cNvPr id="479633520" name="Footer Placeholder 4"/>
+          <p:cNvPr id="2103269541" name="Footer Placeholder 4"/>
           <p:cNvSpPr>
             <a:spLocks noGrp="1"/>
           </p:cNvSpPr>
@@ -3452,7 +3452,7 @@
       </p:sp>
       <p:sp>
         <p:nvSpPr>
-          <p:cNvPr id="1669262745" name="Slide Number Placeholder 5"/>
+          <p:cNvPr id="1499869823" name="Slide Number Placeholder 5"/>
           <p:cNvSpPr>
             <a:spLocks noGrp="1"/>
           </p:cNvSpPr>
@@ -3508,7 +3508,7 @@
       </p:grpSpPr>
       <p:pic>
         <p:nvPicPr>
-          <p:cNvPr id="818672249" name="Picture 7" descr="HD-ShadowLong.png"/>
+          <p:cNvPr id="1136653382" name="Picture 7" descr="HD-ShadowLong.png"/>
           <p:cNvPicPr>
             <a:picLocks noChangeAspect="1"/>
           </p:cNvPicPr>
@@ -3530,7 +3530,7 @@
       </p:pic>
       <p:pic>
         <p:nvPicPr>
-          <p:cNvPr id="986086892" name="Picture 8" descr="HD-ShadowShort.png"/>
+          <p:cNvPr id="336124619" name="Picture 8" descr="HD-ShadowShort.png"/>
           <p:cNvPicPr>
             <a:picLocks noChangeAspect="1"/>
           </p:cNvPicPr>
@@ -3552,7 +3552,7 @@
       </p:pic>
       <p:sp>
         <p:nvSpPr>
-          <p:cNvPr id="1005060902" name="Rectangle 9"/>
+          <p:cNvPr id="985293963" name="Rectangle 9"/>
           <p:cNvSpPr/>
           <p:nvPr/>
         </p:nvSpPr>
@@ -3593,7 +3593,7 @@
       </p:sp>
       <p:sp>
         <p:nvSpPr>
-          <p:cNvPr id="1176010605" name="Rectangle 10"/>
+          <p:cNvPr id="1434793917" name="Rectangle 10"/>
           <p:cNvSpPr/>
           <p:nvPr/>
         </p:nvSpPr>
@@ -3631,7 +3631,7 @@
       </p:sp>
       <p:sp>
         <p:nvSpPr>
-          <p:cNvPr id="1802100821" name="Title 1"/>
+          <p:cNvPr id="1902558729" name="Title 1"/>
           <p:cNvSpPr>
             <a:spLocks noGrp="1"/>
           </p:cNvSpPr>
@@ -3657,7 +3657,7 @@
       </p:sp>
       <p:sp>
         <p:nvSpPr>
-          <p:cNvPr id="1663097457" name="Content Placeholder 2"/>
+          <p:cNvPr id="1115954143" name="Content Placeholder 2"/>
           <p:cNvSpPr>
             <a:spLocks noGrp="1"/>
           </p:cNvSpPr>
@@ -3728,7 +3728,7 @@
       </p:sp>
       <p:sp>
         <p:nvSpPr>
-          <p:cNvPr id="150638092" name="Content Placeholder 3"/>
+          <p:cNvPr id="762798461" name="Content Placeholder 3"/>
           <p:cNvSpPr>
             <a:spLocks noGrp="1"/>
           </p:cNvSpPr>
@@ -3799,7 +3799,7 @@
       </p:sp>
       <p:sp>
         <p:nvSpPr>
-          <p:cNvPr id="1271690154" name="Date Placeholder 4"/>
+          <p:cNvPr id="1483676051" name="Date Placeholder 4"/>
           <p:cNvSpPr>
             <a:spLocks noGrp="1"/>
           </p:cNvSpPr>
@@ -3825,7 +3825,7 @@
       </p:sp>
       <p:sp>
         <p:nvSpPr>
-          <p:cNvPr id="1528028584" name="Footer Placeholder 5"/>
+          <p:cNvPr id="2057019045" name="Footer Placeholder 5"/>
           <p:cNvSpPr>
             <a:spLocks noGrp="1"/>
           </p:cNvSpPr>
@@ -3847,7 +3847,7 @@
       </p:sp>
       <p:sp>
         <p:nvSpPr>
-          <p:cNvPr id="1114449391" name="Slide Number Placeholder 6"/>
+          <p:cNvPr id="1121496567" name="Slide Number Placeholder 6"/>
           <p:cNvSpPr>
             <a:spLocks noGrp="1"/>
           </p:cNvSpPr>
@@ -3898,7 +3898,7 @@
       </p:grpSpPr>
       <p:pic>
         <p:nvPicPr>
-          <p:cNvPr id="831601874" name="Picture 9" descr="HD-ShadowLong.png"/>
+          <p:cNvPr id="453982463" name="Picture 9" descr="HD-ShadowLong.png"/>
           <p:cNvPicPr>
             <a:picLocks noChangeAspect="1"/>
           </p:cNvPicPr>
@@ -3920,7 +3920,7 @@
       </p:pic>
       <p:pic>
         <p:nvPicPr>
-          <p:cNvPr id="1537817575" name="Picture 10" descr="HD-ShadowShort.png"/>
+          <p:cNvPr id="2132784423" name="Picture 10" descr="HD-ShadowShort.png"/>
           <p:cNvPicPr>
             <a:picLocks noChangeAspect="1"/>
           </p:cNvPicPr>
@@ -3942,7 +3942,7 @@
       </p:pic>
       <p:sp>
         <p:nvSpPr>
-          <p:cNvPr id="780806100" name="Rectangle 11"/>
+          <p:cNvPr id="1364870304" name="Rectangle 11"/>
           <p:cNvSpPr/>
           <p:nvPr/>
         </p:nvSpPr>
@@ -3983,7 +3983,7 @@
       </p:sp>
       <p:sp>
         <p:nvSpPr>
-          <p:cNvPr id="91187196" name="Rectangle 12"/>
+          <p:cNvPr id="542537531" name="Rectangle 12"/>
           <p:cNvSpPr/>
           <p:nvPr/>
         </p:nvSpPr>
@@ -4021,7 +4021,7 @@
       </p:sp>
       <p:sp>
         <p:nvSpPr>
-          <p:cNvPr id="932373780" name="Title 1"/>
+          <p:cNvPr id="1293629978" name="Title 1"/>
           <p:cNvSpPr>
             <a:spLocks noGrp="1"/>
           </p:cNvSpPr>
@@ -4052,7 +4052,7 @@
       </p:sp>
       <p:sp>
         <p:nvSpPr>
-          <p:cNvPr id="1478895919" name="Text Placeholder 2"/>
+          <p:cNvPr id="2105650711" name="Text Placeholder 2"/>
           <p:cNvSpPr>
             <a:spLocks noGrp="1"/>
           </p:cNvSpPr>
@@ -4120,7 +4120,7 @@
       </p:sp>
       <p:sp>
         <p:nvSpPr>
-          <p:cNvPr id="1177602719" name="Content Placeholder 3"/>
+          <p:cNvPr id="1521909877" name="Content Placeholder 3"/>
           <p:cNvSpPr>
             <a:spLocks noGrp="1"/>
           </p:cNvSpPr>
@@ -4191,7 +4191,7 @@
       </p:sp>
       <p:sp>
         <p:nvSpPr>
-          <p:cNvPr id="799017585" name="Text Placeholder 4"/>
+          <p:cNvPr id="572521475" name="Text Placeholder 4"/>
           <p:cNvSpPr>
             <a:spLocks noGrp="1"/>
           </p:cNvSpPr>
@@ -4259,7 +4259,7 @@
       </p:sp>
       <p:sp>
         <p:nvSpPr>
-          <p:cNvPr id="89697077" name="Content Placeholder 5"/>
+          <p:cNvPr id="1040146684" name="Content Placeholder 5"/>
           <p:cNvSpPr>
             <a:spLocks noGrp="1"/>
           </p:cNvSpPr>
@@ -4330,7 +4330,7 @@
       </p:sp>
       <p:sp>
         <p:nvSpPr>
-          <p:cNvPr id="174384561" name="Date Placeholder 6"/>
+          <p:cNvPr id="1725398431" name="Date Placeholder 6"/>
           <p:cNvSpPr>
             <a:spLocks noGrp="1"/>
           </p:cNvSpPr>
@@ -4356,7 +4356,7 @@
       </p:sp>
       <p:sp>
         <p:nvSpPr>
-          <p:cNvPr id="290066173" name="Footer Placeholder 7"/>
+          <p:cNvPr id="1174561090" name="Footer Placeholder 7"/>
           <p:cNvSpPr>
             <a:spLocks noGrp="1"/>
           </p:cNvSpPr>
@@ -4378,7 +4378,7 @@
       </p:sp>
       <p:sp>
         <p:nvSpPr>
-          <p:cNvPr id="374292724" name="Slide Number Placeholder 8"/>
+          <p:cNvPr id="1869461782" name="Slide Number Placeholder 8"/>
           <p:cNvSpPr>
             <a:spLocks noGrp="1"/>
           </p:cNvSpPr>
@@ -4429,7 +4429,7 @@
       </p:grpSpPr>
       <p:pic>
         <p:nvPicPr>
-          <p:cNvPr id="1686801075" name="Picture 5" descr="HD-ShadowLong.png"/>
+          <p:cNvPr id="531131006" name="Picture 5" descr="HD-ShadowLong.png"/>
           <p:cNvPicPr>
             <a:picLocks noChangeAspect="1"/>
           </p:cNvPicPr>
@@ -4451,7 +4451,7 @@
       </p:pic>
       <p:pic>
         <p:nvPicPr>
-          <p:cNvPr id="2071491778" name="Picture 6" descr="HD-ShadowShort.png"/>
+          <p:cNvPr id="77008073" name="Picture 6" descr="HD-ShadowShort.png"/>
           <p:cNvPicPr>
             <a:picLocks noChangeAspect="1"/>
           </p:cNvPicPr>
@@ -4473,7 +4473,7 @@
       </p:pic>
       <p:sp>
         <p:nvSpPr>
-          <p:cNvPr id="1320681226" name="Rectangle 7"/>
+          <p:cNvPr id="1763575175" name="Rectangle 7"/>
           <p:cNvSpPr/>
           <p:nvPr/>
         </p:nvSpPr>
@@ -4514,7 +4514,7 @@
       </p:sp>
       <p:sp>
         <p:nvSpPr>
-          <p:cNvPr id="453781502" name="Rectangle 8"/>
+          <p:cNvPr id="1187585037" name="Rectangle 8"/>
           <p:cNvSpPr/>
           <p:nvPr/>
         </p:nvSpPr>
@@ -4552,7 +4552,7 @@
       </p:sp>
       <p:sp>
         <p:nvSpPr>
-          <p:cNvPr id="1117730881" name="Title 1"/>
+          <p:cNvPr id="1160365433" name="Title 1"/>
           <p:cNvSpPr>
             <a:spLocks noGrp="1"/>
           </p:cNvSpPr>
@@ -4578,7 +4578,7 @@
       </p:sp>
       <p:sp>
         <p:nvSpPr>
-          <p:cNvPr id="2077815952" name="Date Placeholder 2"/>
+          <p:cNvPr id="1884895854" name="Date Placeholder 2"/>
           <p:cNvSpPr>
             <a:spLocks noGrp="1"/>
           </p:cNvSpPr>
@@ -4604,7 +4604,7 @@
       </p:sp>
       <p:sp>
         <p:nvSpPr>
-          <p:cNvPr id="1760348163" name="Footer Placeholder 3"/>
+          <p:cNvPr id="2015138121" name="Footer Placeholder 3"/>
           <p:cNvSpPr>
             <a:spLocks noGrp="1"/>
           </p:cNvSpPr>
@@ -4626,7 +4626,7 @@
       </p:sp>
       <p:sp>
         <p:nvSpPr>
-          <p:cNvPr id="1230245292" name="Slide Number Placeholder 4"/>
+          <p:cNvPr id="656073657" name="Slide Number Placeholder 4"/>
           <p:cNvSpPr>
             <a:spLocks noGrp="1"/>
           </p:cNvSpPr>
@@ -4677,7 +4677,7 @@
       </p:grpSpPr>
       <p:pic>
         <p:nvPicPr>
-          <p:cNvPr id="1202468815" name="Picture 4" descr="HD-ShadowShort.png"/>
+          <p:cNvPr id="332825376" name="Picture 4" descr="HD-ShadowShort.png"/>
           <p:cNvPicPr>
             <a:picLocks noChangeAspect="1"/>
           </p:cNvPicPr>
@@ -4699,7 +4699,7 @@
       </p:pic>
       <p:sp>
         <p:nvSpPr>
-          <p:cNvPr id="1067466000" name="Rectangle 5"/>
+          <p:cNvPr id="134569681" name="Rectangle 5"/>
           <p:cNvSpPr/>
           <p:nvPr/>
         </p:nvSpPr>
@@ -4737,7 +4737,7 @@
       </p:sp>
       <p:sp>
         <p:nvSpPr>
-          <p:cNvPr id="697885031" name="Date Placeholder 1"/>
+          <p:cNvPr id="1368182467" name="Date Placeholder 1"/>
           <p:cNvSpPr>
             <a:spLocks noGrp="1"/>
           </p:cNvSpPr>
@@ -4763,7 +4763,7 @@
       </p:sp>
       <p:sp>
         <p:nvSpPr>
-          <p:cNvPr id="983342965" name="Footer Placeholder 2"/>
+          <p:cNvPr id="683034419" name="Footer Placeholder 2"/>
           <p:cNvSpPr>
             <a:spLocks noGrp="1"/>
           </p:cNvSpPr>
@@ -4785,7 +4785,7 @@
       </p:sp>
       <p:sp>
         <p:nvSpPr>
-          <p:cNvPr id="1413051605" name="Slide Number Placeholder 3"/>
+          <p:cNvPr id="1310934835" name="Slide Number Placeholder 3"/>
           <p:cNvSpPr>
             <a:spLocks noGrp="1"/>
           </p:cNvSpPr>
@@ -4836,7 +4836,7 @@
       </p:grpSpPr>
       <p:pic>
         <p:nvPicPr>
-          <p:cNvPr id="899832884" name="Picture 7" descr="HD-ShadowLong.png"/>
+          <p:cNvPr id="1081114685" name="Picture 7" descr="HD-ShadowLong.png"/>
           <p:cNvPicPr>
             <a:picLocks noChangeAspect="1"/>
           </p:cNvPicPr>
@@ -4858,7 +4858,7 @@
       </p:pic>
       <p:pic>
         <p:nvPicPr>
-          <p:cNvPr id="378975475" name="Picture 8" descr="HD-ShadowShort.png"/>
+          <p:cNvPr id="305940265" name="Picture 8" descr="HD-ShadowShort.png"/>
           <p:cNvPicPr>
             <a:picLocks noChangeAspect="1"/>
           </p:cNvPicPr>
@@ -4880,7 +4880,7 @@
       </p:pic>
       <p:sp>
         <p:nvSpPr>
-          <p:cNvPr id="770462109" name="Rectangle 9"/>
+          <p:cNvPr id="1562860586" name="Rectangle 9"/>
           <p:cNvSpPr/>
           <p:nvPr/>
         </p:nvSpPr>
@@ -4921,7 +4921,7 @@
       </p:sp>
       <p:sp>
         <p:nvSpPr>
-          <p:cNvPr id="1258624316" name="Rectangle 10"/>
+          <p:cNvPr id="1856307066" name="Rectangle 10"/>
           <p:cNvSpPr/>
           <p:nvPr/>
         </p:nvSpPr>
@@ -4959,7 +4959,7 @@
       </p:sp>
       <p:sp>
         <p:nvSpPr>
-          <p:cNvPr id="355281627" name="Title 1"/>
+          <p:cNvPr id="1576910892" name="Title 1"/>
           <p:cNvSpPr>
             <a:spLocks noGrp="1"/>
           </p:cNvSpPr>
@@ -4996,7 +4996,7 @@
       </p:sp>
       <p:sp>
         <p:nvSpPr>
-          <p:cNvPr id="740228987" name="Content Placeholder 2"/>
+          <p:cNvPr id="187148380" name="Content Placeholder 2"/>
           <p:cNvSpPr>
             <a:spLocks noGrp="1"/>
           </p:cNvSpPr>
@@ -5067,7 +5067,7 @@
       </p:sp>
       <p:sp>
         <p:nvSpPr>
-          <p:cNvPr id="885390208" name="Text Placeholder 3"/>
+          <p:cNvPr id="1275811826" name="Text Placeholder 3"/>
           <p:cNvSpPr>
             <a:spLocks noGrp="1"/>
           </p:cNvSpPr>
@@ -5135,7 +5135,7 @@
       </p:sp>
       <p:sp>
         <p:nvSpPr>
-          <p:cNvPr id="1610961616" name="Date Placeholder 4"/>
+          <p:cNvPr id="1026154535" name="Date Placeholder 4"/>
           <p:cNvSpPr>
             <a:spLocks noGrp="1"/>
           </p:cNvSpPr>
@@ -5161,7 +5161,7 @@
       </p:sp>
       <p:sp>
         <p:nvSpPr>
-          <p:cNvPr id="1415274404" name="Footer Placeholder 5"/>
+          <p:cNvPr id="457480428" name="Footer Placeholder 5"/>
           <p:cNvSpPr>
             <a:spLocks noGrp="1"/>
           </p:cNvSpPr>
@@ -5183,7 +5183,7 @@
       </p:sp>
       <p:sp>
         <p:nvSpPr>
-          <p:cNvPr id="1484157297" name="Slide Number Placeholder 6"/>
+          <p:cNvPr id="1631393079" name="Slide Number Placeholder 6"/>
           <p:cNvSpPr>
             <a:spLocks noGrp="1"/>
           </p:cNvSpPr>
@@ -5234,7 +5234,7 @@
       </p:grpSpPr>
       <p:sp>
         <p:nvSpPr>
-          <p:cNvPr id="1124047749" name="Заголовок 1"/>
+          <p:cNvPr id="1343928337" name="Заголовок 1"/>
           <p:cNvSpPr>
             <a:spLocks noGrp="1"/>
           </p:cNvSpPr>
@@ -5260,7 +5260,7 @@
       </p:sp>
       <p:sp>
         <p:nvSpPr>
-          <p:cNvPr id="927385587" name="Объект 2"/>
+          <p:cNvPr id="1638231810" name="Объект 2"/>
           <p:cNvSpPr>
             <a:spLocks noGrp="1"/>
           </p:cNvSpPr>
@@ -5326,7 +5326,7 @@
       </p:sp>
       <p:sp>
         <p:nvSpPr>
-          <p:cNvPr id="76557993" name="Дата 3"/>
+          <p:cNvPr id="877500364" name="Дата 3"/>
           <p:cNvSpPr>
             <a:spLocks noGrp="1"/>
           </p:cNvSpPr>
@@ -5352,7 +5352,7 @@
       </p:sp>
       <p:sp>
         <p:nvSpPr>
-          <p:cNvPr id="1178894900" name="Нижний колонтитул 4"/>
+          <p:cNvPr id="980377293" name="Нижний колонтитул 4"/>
           <p:cNvSpPr>
             <a:spLocks noGrp="1"/>
           </p:cNvSpPr>
@@ -5374,7 +5374,7 @@
       </p:sp>
       <p:sp>
         <p:nvSpPr>
-          <p:cNvPr id="1694752303" name="Номер слайда 5"/>
+          <p:cNvPr id="2121216910" name="Номер слайда 5"/>
           <p:cNvSpPr>
             <a:spLocks noGrp="1"/>
           </p:cNvSpPr>
@@ -5425,7 +5425,7 @@
       </p:grpSpPr>
       <p:pic>
         <p:nvPicPr>
-          <p:cNvPr id="619609788" name="Picture 7" descr="HD-ShadowLong.png"/>
+          <p:cNvPr id="1420974376" name="Picture 7" descr="HD-ShadowLong.png"/>
           <p:cNvPicPr>
             <a:picLocks noChangeAspect="1"/>
           </p:cNvPicPr>
@@ -5447,7 +5447,7 @@
       </p:pic>
       <p:pic>
         <p:nvPicPr>
-          <p:cNvPr id="137188809" name="Picture 8" descr="HD-ShadowShort.png"/>
+          <p:cNvPr id="865015418" name="Picture 8" descr="HD-ShadowShort.png"/>
           <p:cNvPicPr>
             <a:picLocks noChangeAspect="1"/>
           </p:cNvPicPr>
@@ -5469,7 +5469,7 @@
       </p:pic>
       <p:sp>
         <p:nvSpPr>
-          <p:cNvPr id="1170122928" name="Rectangle 9"/>
+          <p:cNvPr id="644822259" name="Rectangle 9"/>
           <p:cNvSpPr/>
           <p:nvPr/>
         </p:nvSpPr>
@@ -5510,7 +5510,7 @@
       </p:sp>
       <p:sp>
         <p:nvSpPr>
-          <p:cNvPr id="1945145742" name="Rectangle 10"/>
+          <p:cNvPr id="1021772991" name="Rectangle 10"/>
           <p:cNvSpPr/>
           <p:nvPr/>
         </p:nvSpPr>
@@ -5548,7 +5548,7 @@
       </p:sp>
       <p:sp>
         <p:nvSpPr>
-          <p:cNvPr id="416227685" name="Title 1"/>
+          <p:cNvPr id="921355218" name="Title 1"/>
           <p:cNvSpPr>
             <a:spLocks noGrp="1"/>
           </p:cNvSpPr>
@@ -5585,7 +5585,7 @@
       </p:sp>
       <p:sp>
         <p:nvSpPr>
-          <p:cNvPr id="1404055384" name="Picture Placeholder 2"/>
+          <p:cNvPr id="1697866201" name="Picture Placeholder 2"/>
           <p:cNvSpPr>
             <a:spLocks noChangeAspect="1" noGrp="1"/>
           </p:cNvSpPr>
@@ -5667,7 +5667,7 @@
       </p:sp>
       <p:sp>
         <p:nvSpPr>
-          <p:cNvPr id="933584001" name="Text Placeholder 3"/>
+          <p:cNvPr id="927457874" name="Text Placeholder 3"/>
           <p:cNvSpPr>
             <a:spLocks noGrp="1"/>
           </p:cNvSpPr>
@@ -5735,7 +5735,7 @@
       </p:sp>
       <p:sp>
         <p:nvSpPr>
-          <p:cNvPr id="280673709" name="Date Placeholder 4"/>
+          <p:cNvPr id="1916681737" name="Date Placeholder 4"/>
           <p:cNvSpPr>
             <a:spLocks noGrp="1"/>
           </p:cNvSpPr>
@@ -5761,7 +5761,7 @@
       </p:sp>
       <p:sp>
         <p:nvSpPr>
-          <p:cNvPr id="1459182335" name="Footer Placeholder 5"/>
+          <p:cNvPr id="1238205576" name="Footer Placeholder 5"/>
           <p:cNvSpPr>
             <a:spLocks noGrp="1"/>
           </p:cNvSpPr>
@@ -5783,7 +5783,7 @@
       </p:sp>
       <p:sp>
         <p:nvSpPr>
-          <p:cNvPr id="758059342" name="Slide Number Placeholder 6"/>
+          <p:cNvPr id="1309119975" name="Slide Number Placeholder 6"/>
           <p:cNvSpPr>
             <a:spLocks noGrp="1"/>
           </p:cNvSpPr>
@@ -5834,7 +5834,7 @@
       </p:grpSpPr>
       <p:pic>
         <p:nvPicPr>
-          <p:cNvPr id="1957269967" name="Picture 7" descr="HD-ShadowLong.png"/>
+          <p:cNvPr id="693462766" name="Picture 7" descr="HD-ShadowLong.png"/>
           <p:cNvPicPr>
             <a:picLocks noChangeAspect="1"/>
           </p:cNvPicPr>
@@ -5856,7 +5856,7 @@
       </p:pic>
       <p:pic>
         <p:nvPicPr>
-          <p:cNvPr id="1514993529" name="Picture 8" descr="HD-ShadowShort.png"/>
+          <p:cNvPr id="1209567020" name="Picture 8" descr="HD-ShadowShort.png"/>
           <p:cNvPicPr>
             <a:picLocks noChangeAspect="1"/>
           </p:cNvPicPr>
@@ -5878,7 +5878,7 @@
       </p:pic>
       <p:sp>
         <p:nvSpPr>
-          <p:cNvPr id="1561620832" name="Rectangle 9"/>
+          <p:cNvPr id="1664785485" name="Rectangle 9"/>
           <p:cNvSpPr/>
           <p:nvPr/>
         </p:nvSpPr>
@@ -5919,7 +5919,7 @@
       </p:sp>
       <p:sp>
         <p:nvSpPr>
-          <p:cNvPr id="1427071138" name="Rectangle 10"/>
+          <p:cNvPr id="2097152369" name="Rectangle 10"/>
           <p:cNvSpPr/>
           <p:nvPr/>
         </p:nvSpPr>
@@ -5957,7 +5957,7 @@
       </p:sp>
       <p:sp>
         <p:nvSpPr>
-          <p:cNvPr id="691470946" name="Title 1"/>
+          <p:cNvPr id="1866735379" name="Title 1"/>
           <p:cNvSpPr>
             <a:spLocks noGrp="1"/>
           </p:cNvSpPr>
@@ -5994,7 +5994,7 @@
       </p:sp>
       <p:sp>
         <p:nvSpPr>
-          <p:cNvPr id="77170769" name="Picture Placeholder 2"/>
+          <p:cNvPr id="417445502" name="Picture Placeholder 2"/>
           <p:cNvSpPr>
             <a:spLocks noChangeAspect="1" noGrp="1"/>
           </p:cNvSpPr>
@@ -6076,7 +6076,7 @@
       </p:sp>
       <p:sp>
         <p:nvSpPr>
-          <p:cNvPr id="659848925" name="Text Placeholder 3"/>
+          <p:cNvPr id="1301837205" name="Text Placeholder 3"/>
           <p:cNvSpPr>
             <a:spLocks noGrp="1"/>
           </p:cNvSpPr>
@@ -6144,7 +6144,7 @@
       </p:sp>
       <p:sp>
         <p:nvSpPr>
-          <p:cNvPr id="889160279" name="Date Placeholder 4"/>
+          <p:cNvPr id="1429598428" name="Date Placeholder 4"/>
           <p:cNvSpPr>
             <a:spLocks noGrp="1"/>
           </p:cNvSpPr>
@@ -6170,7 +6170,7 @@
       </p:sp>
       <p:sp>
         <p:nvSpPr>
-          <p:cNvPr id="2146702623" name="Footer Placeholder 5"/>
+          <p:cNvPr id="356251624" name="Footer Placeholder 5"/>
           <p:cNvSpPr>
             <a:spLocks noGrp="1"/>
           </p:cNvSpPr>
@@ -6192,7 +6192,7 @@
       </p:sp>
       <p:sp>
         <p:nvSpPr>
-          <p:cNvPr id="1704121005" name="Slide Number Placeholder 6"/>
+          <p:cNvPr id="295778713" name="Slide Number Placeholder 6"/>
           <p:cNvSpPr>
             <a:spLocks noGrp="1"/>
           </p:cNvSpPr>
@@ -6248,7 +6248,7 @@
       </p:grpSpPr>
       <p:pic>
         <p:nvPicPr>
-          <p:cNvPr id="170072089" name="Picture 7" descr="HD-ShadowLong.png"/>
+          <p:cNvPr id="1288989531" name="Picture 7" descr="HD-ShadowLong.png"/>
           <p:cNvPicPr>
             <a:picLocks noChangeAspect="1"/>
           </p:cNvPicPr>
@@ -6270,7 +6270,7 @@
       </p:pic>
       <p:pic>
         <p:nvPicPr>
-          <p:cNvPr id="1789534247" name="Picture 8" descr="HD-ShadowShort.png"/>
+          <p:cNvPr id="483064988" name="Picture 8" descr="HD-ShadowShort.png"/>
           <p:cNvPicPr>
             <a:picLocks noChangeAspect="1"/>
           </p:cNvPicPr>
@@ -6292,7 +6292,7 @@
       </p:pic>
       <p:sp>
         <p:nvSpPr>
-          <p:cNvPr id="674330875" name="Rectangle 9"/>
+          <p:cNvPr id="783222804" name="Rectangle 9"/>
           <p:cNvSpPr/>
           <p:nvPr/>
         </p:nvSpPr>
@@ -6333,7 +6333,7 @@
       </p:sp>
       <p:sp>
         <p:nvSpPr>
-          <p:cNvPr id="849616050" name="Rectangle 10"/>
+          <p:cNvPr id="1380693280" name="Rectangle 10"/>
           <p:cNvSpPr/>
           <p:nvPr/>
         </p:nvSpPr>
@@ -6371,7 +6371,7 @@
       </p:sp>
       <p:sp>
         <p:nvSpPr>
-          <p:cNvPr id="1610267981" name="Title 1"/>
+          <p:cNvPr id="623822411" name="Title 1"/>
           <p:cNvSpPr>
             <a:spLocks noGrp="1"/>
           </p:cNvSpPr>
@@ -6406,7 +6406,7 @@
       </p:sp>
       <p:sp>
         <p:nvSpPr>
-          <p:cNvPr id="1269433010" name="Text Placeholder 3"/>
+          <p:cNvPr id="1683745583" name="Text Placeholder 3"/>
           <p:cNvSpPr>
             <a:spLocks noGrp="1"/>
           </p:cNvSpPr>
@@ -6474,7 +6474,7 @@
       </p:sp>
       <p:sp>
         <p:nvSpPr>
-          <p:cNvPr id="851562375" name="Date Placeholder 4"/>
+          <p:cNvPr id="1212626459" name="Date Placeholder 4"/>
           <p:cNvSpPr>
             <a:spLocks noGrp="1"/>
           </p:cNvSpPr>
@@ -6500,7 +6500,7 @@
       </p:sp>
       <p:sp>
         <p:nvSpPr>
-          <p:cNvPr id="654204991" name="Footer Placeholder 5"/>
+          <p:cNvPr id="2005237670" name="Footer Placeholder 5"/>
           <p:cNvSpPr>
             <a:spLocks noGrp="1"/>
           </p:cNvSpPr>
@@ -6522,7 +6522,7 @@
       </p:sp>
       <p:sp>
         <p:nvSpPr>
-          <p:cNvPr id="1811007699" name="Slide Number Placeholder 6"/>
+          <p:cNvPr id="1939142324" name="Slide Number Placeholder 6"/>
           <p:cNvSpPr>
             <a:spLocks noGrp="1"/>
           </p:cNvSpPr>
@@ -6578,7 +6578,7 @@
       </p:grpSpPr>
       <p:pic>
         <p:nvPicPr>
-          <p:cNvPr id="410461835" name="Picture 10" descr="HD-ShadowLong.png"/>
+          <p:cNvPr id="360351157" name="Picture 10" descr="HD-ShadowLong.png"/>
           <p:cNvPicPr>
             <a:picLocks noChangeAspect="1"/>
           </p:cNvPicPr>
@@ -6600,7 +6600,7 @@
       </p:pic>
       <p:pic>
         <p:nvPicPr>
-          <p:cNvPr id="1214406087" name="Picture 12" descr="HD-ShadowShort.png"/>
+          <p:cNvPr id="116622883" name="Picture 12" descr="HD-ShadowShort.png"/>
           <p:cNvPicPr>
             <a:picLocks noChangeAspect="1"/>
           </p:cNvPicPr>
@@ -6622,7 +6622,7 @@
       </p:pic>
       <p:sp>
         <p:nvSpPr>
-          <p:cNvPr id="1195859113" name="Rectangle 13"/>
+          <p:cNvPr id="926575259" name="Rectangle 13"/>
           <p:cNvSpPr/>
           <p:nvPr/>
         </p:nvSpPr>
@@ -6663,7 +6663,7 @@
       </p:sp>
       <p:sp>
         <p:nvSpPr>
-          <p:cNvPr id="476953341" name="Rectangle 14"/>
+          <p:cNvPr id="1311358285" name="Rectangle 14"/>
           <p:cNvSpPr/>
           <p:nvPr/>
         </p:nvSpPr>
@@ -6701,7 +6701,7 @@
       </p:sp>
       <p:sp>
         <p:nvSpPr>
-          <p:cNvPr id="833815619" name="Title 1"/>
+          <p:cNvPr id="1303654178" name="Title 1"/>
           <p:cNvSpPr>
             <a:spLocks noGrp="1"/>
           </p:cNvSpPr>
@@ -6736,7 +6736,7 @@
       </p:sp>
       <p:sp>
         <p:nvSpPr>
-          <p:cNvPr id="605049749" name="Text Placeholder 3"/>
+          <p:cNvPr id="1949657302" name="Text Placeholder 3"/>
           <p:cNvSpPr>
             <a:spLocks noGrp="1"/>
           </p:cNvSpPr>
@@ -6806,7 +6806,7 @@
       </p:sp>
       <p:sp>
         <p:nvSpPr>
-          <p:cNvPr id="1639410339" name="Text Placeholder 3"/>
+          <p:cNvPr id="1147887821" name="Text Placeholder 3"/>
           <p:cNvSpPr>
             <a:spLocks noGrp="1"/>
           </p:cNvSpPr>
@@ -6876,7 +6876,7 @@
       </p:sp>
       <p:sp>
         <p:nvSpPr>
-          <p:cNvPr id="2124887498" name="Date Placeholder 4"/>
+          <p:cNvPr id="1442017006" name="Date Placeholder 4"/>
           <p:cNvSpPr>
             <a:spLocks noGrp="1"/>
           </p:cNvSpPr>
@@ -6902,7 +6902,7 @@
       </p:sp>
       <p:sp>
         <p:nvSpPr>
-          <p:cNvPr id="1953554786" name="Footer Placeholder 5"/>
+          <p:cNvPr id="1317648287" name="Footer Placeholder 5"/>
           <p:cNvSpPr>
             <a:spLocks noGrp="1"/>
           </p:cNvSpPr>
@@ -6924,7 +6924,7 @@
       </p:sp>
       <p:sp>
         <p:nvSpPr>
-          <p:cNvPr id="1974195899" name="Slide Number Placeholder 6"/>
+          <p:cNvPr id="2002095456" name="Slide Number Placeholder 6"/>
           <p:cNvSpPr>
             <a:spLocks noGrp="1"/>
           </p:cNvSpPr>
@@ -6955,7 +6955,7 @@
       </p:sp>
       <p:sp>
         <p:nvSpPr>
-          <p:cNvPr id="1118551304" name="TextBox 15"/>
+          <p:cNvPr id="1842168149" name="TextBox 15"/>
           <p:cNvSpPr txBox="1"/>
           <p:nvPr/>
         </p:nvSpPr>
@@ -7059,7 +7059,7 @@
       </p:sp>
       <p:sp>
         <p:nvSpPr>
-          <p:cNvPr id="19085042" name="TextBox 16"/>
+          <p:cNvPr id="1818684327" name="TextBox 16"/>
           <p:cNvSpPr txBox="1"/>
           <p:nvPr/>
         </p:nvSpPr>
@@ -7188,7 +7188,7 @@
       </p:grpSpPr>
       <p:pic>
         <p:nvPicPr>
-          <p:cNvPr id="439439821" name="Picture 8" descr="HD-ShadowLong.png"/>
+          <p:cNvPr id="281661447" name="Picture 8" descr="HD-ShadowLong.png"/>
           <p:cNvPicPr>
             <a:picLocks noChangeAspect="1"/>
           </p:cNvPicPr>
@@ -7210,7 +7210,7 @@
       </p:pic>
       <p:pic>
         <p:nvPicPr>
-          <p:cNvPr id="2143220445" name="Picture 9" descr="HD-ShadowShort.png"/>
+          <p:cNvPr id="2107729278" name="Picture 9" descr="HD-ShadowShort.png"/>
           <p:cNvPicPr>
             <a:picLocks noChangeAspect="1"/>
           </p:cNvPicPr>
@@ -7232,7 +7232,7 @@
       </p:pic>
       <p:sp>
         <p:nvSpPr>
-          <p:cNvPr id="1852080202" name="Rectangle 10"/>
+          <p:cNvPr id="1375911811" name="Rectangle 10"/>
           <p:cNvSpPr/>
           <p:nvPr/>
         </p:nvSpPr>
@@ -7273,7 +7273,7 @@
       </p:sp>
       <p:sp>
         <p:nvSpPr>
-          <p:cNvPr id="1660092420" name="Rectangle 11"/>
+          <p:cNvPr id="701274993" name="Rectangle 11"/>
           <p:cNvSpPr/>
           <p:nvPr/>
         </p:nvSpPr>
@@ -7311,7 +7311,7 @@
       </p:sp>
       <p:sp>
         <p:nvSpPr>
-          <p:cNvPr id="434024171" name="Title 1"/>
+          <p:cNvPr id="1633842903" name="Title 1"/>
           <p:cNvSpPr>
             <a:spLocks noGrp="1"/>
           </p:cNvSpPr>
@@ -7346,7 +7346,7 @@
       </p:sp>
       <p:sp>
         <p:nvSpPr>
-          <p:cNvPr id="352916657" name="Text Placeholder 3"/>
+          <p:cNvPr id="1893736794" name="Text Placeholder 3"/>
           <p:cNvSpPr>
             <a:spLocks noGrp="1"/>
           </p:cNvSpPr>
@@ -7414,7 +7414,7 @@
       </p:sp>
       <p:sp>
         <p:nvSpPr>
-          <p:cNvPr id="2030640302" name="Date Placeholder 4"/>
+          <p:cNvPr id="1144915242" name="Date Placeholder 4"/>
           <p:cNvSpPr>
             <a:spLocks noGrp="1"/>
           </p:cNvSpPr>
@@ -7440,7 +7440,7 @@
       </p:sp>
       <p:sp>
         <p:nvSpPr>
-          <p:cNvPr id="1445862396" name="Footer Placeholder 5"/>
+          <p:cNvPr id="830696756" name="Footer Placeholder 5"/>
           <p:cNvSpPr>
             <a:spLocks noGrp="1"/>
           </p:cNvSpPr>
@@ -7462,7 +7462,7 @@
       </p:sp>
       <p:sp>
         <p:nvSpPr>
-          <p:cNvPr id="2065516657" name="Slide Number Placeholder 6"/>
+          <p:cNvPr id="868949684" name="Slide Number Placeholder 6"/>
           <p:cNvSpPr>
             <a:spLocks noGrp="1"/>
           </p:cNvSpPr>
@@ -7518,7 +7518,7 @@
       </p:grpSpPr>
       <p:pic>
         <p:nvPicPr>
-          <p:cNvPr id="1373433772" name="Picture 12" descr="HD-ShadowLong.png"/>
+          <p:cNvPr id="1754865384" name="Picture 12" descr="HD-ShadowLong.png"/>
           <p:cNvPicPr>
             <a:picLocks noChangeAspect="1"/>
           </p:cNvPicPr>
@@ -7540,7 +7540,7 @@
       </p:pic>
       <p:pic>
         <p:nvPicPr>
-          <p:cNvPr id="391421276" name="Picture 13" descr="HD-ShadowShort.png"/>
+          <p:cNvPr id="1306463127" name="Picture 13" descr="HD-ShadowShort.png"/>
           <p:cNvPicPr>
             <a:picLocks noChangeAspect="1"/>
           </p:cNvPicPr>
@@ -7562,7 +7562,7 @@
       </p:pic>
       <p:sp>
         <p:nvSpPr>
-          <p:cNvPr id="1823159065" name="Rectangle 15"/>
+          <p:cNvPr id="674890538" name="Rectangle 15"/>
           <p:cNvSpPr/>
           <p:nvPr/>
         </p:nvSpPr>
@@ -7603,7 +7603,7 @@
       </p:sp>
       <p:sp>
         <p:nvSpPr>
-          <p:cNvPr id="1433636080" name="Rectangle 16"/>
+          <p:cNvPr id="952365648" name="Rectangle 16"/>
           <p:cNvSpPr/>
           <p:nvPr/>
         </p:nvSpPr>
@@ -7641,7 +7641,7 @@
       </p:sp>
       <p:sp>
         <p:nvSpPr>
-          <p:cNvPr id="568189381" name="Title 1"/>
+          <p:cNvPr id="32696837" name="Title 1"/>
           <p:cNvSpPr>
             <a:spLocks noGrp="1"/>
           </p:cNvSpPr>
@@ -7672,7 +7672,7 @@
       </p:sp>
       <p:sp>
         <p:nvSpPr>
-          <p:cNvPr id="1501304444" name="Text Placeholder 2"/>
+          <p:cNvPr id="1357535574" name="Text Placeholder 2"/>
           <p:cNvSpPr>
             <a:spLocks noGrp="1"/>
           </p:cNvSpPr>
@@ -7746,7 +7746,7 @@
       </p:sp>
       <p:sp>
         <p:nvSpPr>
-          <p:cNvPr id="1273684279" name="Text Placeholder 3"/>
+          <p:cNvPr id="188445988" name="Text Placeholder 3"/>
           <p:cNvSpPr>
             <a:spLocks noGrp="1"/>
           </p:cNvSpPr>
@@ -7816,7 +7816,7 @@
       </p:sp>
       <p:sp>
         <p:nvSpPr>
-          <p:cNvPr id="2023575008" name="Text Placeholder 4"/>
+          <p:cNvPr id="1489910517" name="Text Placeholder 4"/>
           <p:cNvSpPr>
             <a:spLocks noGrp="1"/>
           </p:cNvSpPr>
@@ -7890,7 +7890,7 @@
       </p:sp>
       <p:sp>
         <p:nvSpPr>
-          <p:cNvPr id="353765557" name="Text Placeholder 3"/>
+          <p:cNvPr id="693152476" name="Text Placeholder 3"/>
           <p:cNvSpPr>
             <a:spLocks noGrp="1"/>
           </p:cNvSpPr>
@@ -7960,7 +7960,7 @@
       </p:sp>
       <p:sp>
         <p:nvSpPr>
-          <p:cNvPr id="1139120142" name="Text Placeholder 4"/>
+          <p:cNvPr id="1899513800" name="Text Placeholder 4"/>
           <p:cNvSpPr>
             <a:spLocks noGrp="1"/>
           </p:cNvSpPr>
@@ -8034,7 +8034,7 @@
       </p:sp>
       <p:sp>
         <p:nvSpPr>
-          <p:cNvPr id="1300555518" name="Text Placeholder 3"/>
+          <p:cNvPr id="1593788033" name="Text Placeholder 3"/>
           <p:cNvSpPr>
             <a:spLocks noGrp="1"/>
           </p:cNvSpPr>
@@ -8104,7 +8104,7 @@
       </p:sp>
       <p:sp>
         <p:nvSpPr>
-          <p:cNvPr id="1656258156" name="Date Placeholder 2"/>
+          <p:cNvPr id="1085954339" name="Date Placeholder 2"/>
           <p:cNvSpPr>
             <a:spLocks noGrp="1"/>
           </p:cNvSpPr>
@@ -8130,7 +8130,7 @@
       </p:sp>
       <p:sp>
         <p:nvSpPr>
-          <p:cNvPr id="893253664" name="Footer Placeholder 3"/>
+          <p:cNvPr id="1633668894" name="Footer Placeholder 3"/>
           <p:cNvSpPr>
             <a:spLocks noGrp="1"/>
           </p:cNvSpPr>
@@ -8152,7 +8152,7 @@
       </p:sp>
       <p:sp>
         <p:nvSpPr>
-          <p:cNvPr id="976463983" name="Slide Number Placeholder 4"/>
+          <p:cNvPr id="909048052" name="Slide Number Placeholder 4"/>
           <p:cNvSpPr>
             <a:spLocks noGrp="1"/>
           </p:cNvSpPr>
@@ -8203,7 +8203,7 @@
       </p:grpSpPr>
       <p:pic>
         <p:nvPicPr>
-          <p:cNvPr id="832212926" name="Picture 14" descr="HD-ShadowLong.png"/>
+          <p:cNvPr id="1063118003" name="Picture 14" descr="HD-ShadowLong.png"/>
           <p:cNvPicPr>
             <a:picLocks noChangeAspect="1"/>
           </p:cNvPicPr>
@@ -8225,7 +8225,7 @@
       </p:pic>
       <p:pic>
         <p:nvPicPr>
-          <p:cNvPr id="2044796075" name="Picture 15" descr="HD-ShadowShort.png"/>
+          <p:cNvPr id="767657262" name="Picture 15" descr="HD-ShadowShort.png"/>
           <p:cNvPicPr>
             <a:picLocks noChangeAspect="1"/>
           </p:cNvPicPr>
@@ -8247,7 +8247,7 @@
       </p:pic>
       <p:sp>
         <p:nvSpPr>
-          <p:cNvPr id="1317858430" name="Rectangle 16"/>
+          <p:cNvPr id="560749345" name="Rectangle 16"/>
           <p:cNvSpPr/>
           <p:nvPr/>
         </p:nvSpPr>
@@ -8288,7 +8288,7 @@
       </p:sp>
       <p:sp>
         <p:nvSpPr>
-          <p:cNvPr id="1646377416" name="Rectangle 17"/>
+          <p:cNvPr id="98436754" name="Rectangle 17"/>
           <p:cNvSpPr/>
           <p:nvPr/>
         </p:nvSpPr>
@@ -8326,7 +8326,7 @@
       </p:sp>
       <p:sp>
         <p:nvSpPr>
-          <p:cNvPr id="1740352782" name="Title 1"/>
+          <p:cNvPr id="1244365783" name="Title 1"/>
           <p:cNvSpPr>
             <a:spLocks noGrp="1"/>
           </p:cNvSpPr>
@@ -8357,7 +8357,7 @@
       </p:sp>
       <p:sp>
         <p:nvSpPr>
-          <p:cNvPr id="1284689466" name="Text Placeholder 2"/>
+          <p:cNvPr id="1812491220" name="Text Placeholder 2"/>
           <p:cNvSpPr>
             <a:spLocks noGrp="1"/>
           </p:cNvSpPr>
@@ -8431,7 +8431,7 @@
       </p:sp>
       <p:sp>
         <p:nvSpPr>
-          <p:cNvPr id="293291533" name="Picture Placeholder 2"/>
+          <p:cNvPr id="631590052" name="Picture Placeholder 2"/>
           <p:cNvSpPr>
             <a:spLocks noChangeAspect="1" noGrp="1"/>
           </p:cNvSpPr>
@@ -8513,7 +8513,7 @@
       </p:sp>
       <p:sp>
         <p:nvSpPr>
-          <p:cNvPr id="1083128881" name="Text Placeholder 3"/>
+          <p:cNvPr id="404889681" name="Text Placeholder 3"/>
           <p:cNvSpPr>
             <a:spLocks noGrp="1"/>
           </p:cNvSpPr>
@@ -8583,7 +8583,7 @@
       </p:sp>
       <p:sp>
         <p:nvSpPr>
-          <p:cNvPr id="1117775818" name="Text Placeholder 4"/>
+          <p:cNvPr id="1998336575" name="Text Placeholder 4"/>
           <p:cNvSpPr>
             <a:spLocks noGrp="1"/>
           </p:cNvSpPr>
@@ -8657,7 +8657,7 @@
       </p:sp>
       <p:sp>
         <p:nvSpPr>
-          <p:cNvPr id="585204971" name="Picture Placeholder 2"/>
+          <p:cNvPr id="1390712538" name="Picture Placeholder 2"/>
           <p:cNvSpPr>
             <a:spLocks noChangeAspect="1" noGrp="1"/>
           </p:cNvSpPr>
@@ -8739,7 +8739,7 @@
       </p:sp>
       <p:sp>
         <p:nvSpPr>
-          <p:cNvPr id="245836772" name="Text Placeholder 3"/>
+          <p:cNvPr id="85841332" name="Text Placeholder 3"/>
           <p:cNvSpPr>
             <a:spLocks noGrp="1"/>
           </p:cNvSpPr>
@@ -8809,7 +8809,7 @@
       </p:sp>
       <p:sp>
         <p:nvSpPr>
-          <p:cNvPr id="219177922" name="Text Placeholder 4"/>
+          <p:cNvPr id="1721206876" name="Text Placeholder 4"/>
           <p:cNvSpPr>
             <a:spLocks noGrp="1"/>
           </p:cNvSpPr>
@@ -8883,7 +8883,7 @@
       </p:sp>
       <p:sp>
         <p:nvSpPr>
-          <p:cNvPr id="1186352940" name="Picture Placeholder 2"/>
+          <p:cNvPr id="133945264" name="Picture Placeholder 2"/>
           <p:cNvSpPr>
             <a:spLocks noChangeAspect="1" noGrp="1"/>
           </p:cNvSpPr>
@@ -8965,7 +8965,7 @@
       </p:sp>
       <p:sp>
         <p:nvSpPr>
-          <p:cNvPr id="787269023" name="Text Placeholder 3"/>
+          <p:cNvPr id="1873521340" name="Text Placeholder 3"/>
           <p:cNvSpPr>
             <a:spLocks noGrp="1"/>
           </p:cNvSpPr>
@@ -9035,7 +9035,7 @@
       </p:sp>
       <p:sp>
         <p:nvSpPr>
-          <p:cNvPr id="1915052551" name="Date Placeholder 2"/>
+          <p:cNvPr id="303693105" name="Date Placeholder 2"/>
           <p:cNvSpPr>
             <a:spLocks noGrp="1"/>
           </p:cNvSpPr>
@@ -9061,7 +9061,7 @@
       </p:sp>
       <p:sp>
         <p:nvSpPr>
-          <p:cNvPr id="1400066587" name="Footer Placeholder 3"/>
+          <p:cNvPr id="1801864571" name="Footer Placeholder 3"/>
           <p:cNvSpPr>
             <a:spLocks noGrp="1"/>
           </p:cNvSpPr>
@@ -9083,7 +9083,7 @@
       </p:sp>
       <p:sp>
         <p:nvSpPr>
-          <p:cNvPr id="843350949" name="Slide Number Placeholder 4"/>
+          <p:cNvPr id="1524930077" name="Slide Number Placeholder 4"/>
           <p:cNvSpPr>
             <a:spLocks noGrp="1"/>
           </p:cNvSpPr>
@@ -9134,7 +9134,7 @@
       </p:grpSpPr>
       <p:pic>
         <p:nvPicPr>
-          <p:cNvPr id="1023205717" name="Picture 6" descr="HD-ShadowLong.png"/>
+          <p:cNvPr id="1915313669" name="Picture 6" descr="HD-ShadowLong.png"/>
           <p:cNvPicPr>
             <a:picLocks noChangeAspect="1"/>
           </p:cNvPicPr>
@@ -9156,7 +9156,7 @@
       </p:pic>
       <p:pic>
         <p:nvPicPr>
-          <p:cNvPr id="1862895914" name="Picture 7" descr="HD-ShadowShort.png"/>
+          <p:cNvPr id="1964977553" name="Picture 7" descr="HD-ShadowShort.png"/>
           <p:cNvPicPr>
             <a:picLocks noChangeAspect="1"/>
           </p:cNvPicPr>
@@ -9178,7 +9178,7 @@
       </p:pic>
       <p:sp>
         <p:nvSpPr>
-          <p:cNvPr id="1123764253" name="Rectangle 8"/>
+          <p:cNvPr id="1373603433" name="Rectangle 8"/>
           <p:cNvSpPr/>
           <p:nvPr/>
         </p:nvSpPr>
@@ -9219,7 +9219,7 @@
       </p:sp>
       <p:sp>
         <p:nvSpPr>
-          <p:cNvPr id="1397553061" name="Rectangle 9"/>
+          <p:cNvPr id="1595398300" name="Rectangle 9"/>
           <p:cNvSpPr/>
           <p:nvPr/>
         </p:nvSpPr>
@@ -9257,7 +9257,7 @@
       </p:sp>
       <p:sp>
         <p:nvSpPr>
-          <p:cNvPr id="1859316454" name="Title 1"/>
+          <p:cNvPr id="1363267373" name="Title 1"/>
           <p:cNvSpPr>
             <a:spLocks noGrp="1"/>
           </p:cNvSpPr>
@@ -9287,7 +9287,7 @@
       </p:sp>
       <p:sp>
         <p:nvSpPr>
-          <p:cNvPr id="660013168" name="Vertical Text Placeholder 2"/>
+          <p:cNvPr id="479414662" name="Vertical Text Placeholder 2"/>
           <p:cNvSpPr>
             <a:spLocks noGrp="1"/>
           </p:cNvSpPr>
@@ -9353,7 +9353,7 @@
       </p:sp>
       <p:sp>
         <p:nvSpPr>
-          <p:cNvPr id="846614716" name="Date Placeholder 3"/>
+          <p:cNvPr id="1593329377" name="Date Placeholder 3"/>
           <p:cNvSpPr>
             <a:spLocks noGrp="1"/>
           </p:cNvSpPr>
@@ -9379,7 +9379,7 @@
       </p:sp>
       <p:sp>
         <p:nvSpPr>
-          <p:cNvPr id="2134072233" name="Footer Placeholder 4"/>
+          <p:cNvPr id="1096577487" name="Footer Placeholder 4"/>
           <p:cNvSpPr>
             <a:spLocks noGrp="1"/>
           </p:cNvSpPr>
@@ -9401,7 +9401,7 @@
       </p:sp>
       <p:sp>
         <p:nvSpPr>
-          <p:cNvPr id="1736433190" name="Slide Number Placeholder 5"/>
+          <p:cNvPr id="2127615889" name="Slide Number Placeholder 5"/>
           <p:cNvSpPr>
             <a:spLocks noGrp="1"/>
           </p:cNvSpPr>
@@ -9452,7 +9452,7 @@
       </p:grpSpPr>
       <p:sp>
         <p:nvSpPr>
-          <p:cNvPr id="513162208" name="Rectangle 6"/>
+          <p:cNvPr id="1625416766" name="Rectangle 6"/>
           <p:cNvSpPr/>
           <p:nvPr/>
         </p:nvSpPr>
@@ -9493,7 +9493,7 @@
       </p:sp>
       <p:sp>
         <p:nvSpPr>
-          <p:cNvPr id="1148693600" name="Rectangle 7"/>
+          <p:cNvPr id="1153215013" name="Rectangle 7"/>
           <p:cNvSpPr/>
           <p:nvPr/>
         </p:nvSpPr>
@@ -9531,7 +9531,7 @@
       </p:sp>
       <p:sp>
         <p:nvSpPr>
-          <p:cNvPr id="1548535692" name="Vertical Title 1"/>
+          <p:cNvPr id="1261967239" name="Vertical Title 1"/>
           <p:cNvSpPr>
             <a:spLocks noGrp="1"/>
           </p:cNvSpPr>
@@ -9562,7 +9562,7 @@
       </p:sp>
       <p:sp>
         <p:nvSpPr>
-          <p:cNvPr id="216795445" name="Vertical Text Placeholder 2"/>
+          <p:cNvPr id="1606844939" name="Vertical Text Placeholder 2"/>
           <p:cNvSpPr>
             <a:spLocks noGrp="1"/>
           </p:cNvSpPr>
@@ -9633,7 +9633,7 @@
       </p:sp>
       <p:sp>
         <p:nvSpPr>
-          <p:cNvPr id="330479020" name="Date Placeholder 3"/>
+          <p:cNvPr id="1319999356" name="Date Placeholder 3"/>
           <p:cNvSpPr>
             <a:spLocks noGrp="1"/>
           </p:cNvSpPr>
@@ -9664,7 +9664,7 @@
       </p:sp>
       <p:sp>
         <p:nvSpPr>
-          <p:cNvPr id="872347539" name="Footer Placeholder 4"/>
+          <p:cNvPr id="1993283807" name="Footer Placeholder 4"/>
           <p:cNvSpPr>
             <a:spLocks noGrp="1"/>
           </p:cNvSpPr>
@@ -9691,7 +9691,7 @@
       </p:sp>
       <p:sp>
         <p:nvSpPr>
-          <p:cNvPr id="101739470" name="Slide Number Placeholder 5"/>
+          <p:cNvPr id="466262420" name="Slide Number Placeholder 5"/>
           <p:cNvSpPr>
             <a:spLocks noGrp="1"/>
           </p:cNvSpPr>
@@ -9751,7 +9751,7 @@
       </p:grpSpPr>
       <p:sp>
         <p:nvSpPr>
-          <p:cNvPr id="242127255" name="Заголовок 1"/>
+          <p:cNvPr id="1167106336" name="Заголовок 1"/>
           <p:cNvSpPr>
             <a:spLocks noGrp="1"/>
           </p:cNvSpPr>
@@ -9786,7 +9786,7 @@
       </p:sp>
       <p:sp>
         <p:nvSpPr>
-          <p:cNvPr id="531372742" name="Текст 2"/>
+          <p:cNvPr id="1874945203" name="Текст 2"/>
           <p:cNvSpPr>
             <a:spLocks noGrp="1"/>
           </p:cNvSpPr>
@@ -9908,7 +9908,7 @@
       </p:sp>
       <p:sp>
         <p:nvSpPr>
-          <p:cNvPr id="368149412" name="Дата 3"/>
+          <p:cNvPr id="2127008943" name="Дата 3"/>
           <p:cNvSpPr>
             <a:spLocks noGrp="1"/>
           </p:cNvSpPr>
@@ -9934,7 +9934,7 @@
       </p:sp>
       <p:sp>
         <p:nvSpPr>
-          <p:cNvPr id="1593237903" name="Нижний колонтитул 4"/>
+          <p:cNvPr id="522681240" name="Нижний колонтитул 4"/>
           <p:cNvSpPr>
             <a:spLocks noGrp="1"/>
           </p:cNvSpPr>
@@ -9956,7 +9956,7 @@
       </p:sp>
       <p:sp>
         <p:nvSpPr>
-          <p:cNvPr id="1697357456" name="Номер слайда 5"/>
+          <p:cNvPr id="1071079241" name="Номер слайда 5"/>
           <p:cNvSpPr>
             <a:spLocks noGrp="1"/>
           </p:cNvSpPr>
@@ -10007,7 +10007,7 @@
       </p:grpSpPr>
       <p:sp>
         <p:nvSpPr>
-          <p:cNvPr id="1387713718" name="Заголовок 1"/>
+          <p:cNvPr id="1187047245" name="Заголовок 1"/>
           <p:cNvSpPr>
             <a:spLocks noGrp="1"/>
           </p:cNvSpPr>
@@ -10033,7 +10033,7 @@
       </p:sp>
       <p:sp>
         <p:nvSpPr>
-          <p:cNvPr id="1353203105" name="Объект 2"/>
+          <p:cNvPr id="1554156183" name="Объект 2"/>
           <p:cNvSpPr>
             <a:spLocks noGrp="1"/>
           </p:cNvSpPr>
@@ -10104,7 +10104,7 @@
       </p:sp>
       <p:sp>
         <p:nvSpPr>
-          <p:cNvPr id="673353767" name="Объект 3"/>
+          <p:cNvPr id="1074241464" name="Объект 3"/>
           <p:cNvSpPr>
             <a:spLocks noGrp="1"/>
           </p:cNvSpPr>
@@ -10175,7 +10175,7 @@
       </p:sp>
       <p:sp>
         <p:nvSpPr>
-          <p:cNvPr id="138128543" name="Дата 4"/>
+          <p:cNvPr id="28932297" name="Дата 4"/>
           <p:cNvSpPr>
             <a:spLocks noGrp="1"/>
           </p:cNvSpPr>
@@ -10201,7 +10201,7 @@
       </p:sp>
       <p:sp>
         <p:nvSpPr>
-          <p:cNvPr id="1048958698" name="Нижний колонтитул 5"/>
+          <p:cNvPr id="411817434" name="Нижний колонтитул 5"/>
           <p:cNvSpPr>
             <a:spLocks noGrp="1"/>
           </p:cNvSpPr>
@@ -10223,7 +10223,7 @@
       </p:sp>
       <p:sp>
         <p:nvSpPr>
-          <p:cNvPr id="43096411" name="Номер слайда 6"/>
+          <p:cNvPr id="1051211392" name="Номер слайда 6"/>
           <p:cNvSpPr>
             <a:spLocks noGrp="1"/>
           </p:cNvSpPr>
@@ -10274,7 +10274,7 @@
       </p:grpSpPr>
       <p:sp>
         <p:nvSpPr>
-          <p:cNvPr id="1834889782" name="Заголовок 1"/>
+          <p:cNvPr id="1223806280" name="Заголовок 1"/>
           <p:cNvSpPr>
             <a:spLocks noGrp="1"/>
           </p:cNvSpPr>
@@ -10305,7 +10305,7 @@
       </p:sp>
       <p:sp>
         <p:nvSpPr>
-          <p:cNvPr id="248536330" name="Текст 2"/>
+          <p:cNvPr id="464085853" name="Текст 2"/>
           <p:cNvSpPr>
             <a:spLocks noGrp="1"/>
           </p:cNvSpPr>
@@ -10373,7 +10373,7 @@
       </p:sp>
       <p:sp>
         <p:nvSpPr>
-          <p:cNvPr id="1681902612" name="Объект 3"/>
+          <p:cNvPr id="303151593" name="Объект 3"/>
           <p:cNvSpPr>
             <a:spLocks noGrp="1"/>
           </p:cNvSpPr>
@@ -10444,7 +10444,7 @@
       </p:sp>
       <p:sp>
         <p:nvSpPr>
-          <p:cNvPr id="1247811363" name="Текст 4"/>
+          <p:cNvPr id="468117293" name="Текст 4"/>
           <p:cNvSpPr>
             <a:spLocks noGrp="1"/>
           </p:cNvSpPr>
@@ -10512,7 +10512,7 @@
       </p:sp>
       <p:sp>
         <p:nvSpPr>
-          <p:cNvPr id="1648436480" name="Объект 5"/>
+          <p:cNvPr id="902572599" name="Объект 5"/>
           <p:cNvSpPr>
             <a:spLocks noGrp="1"/>
           </p:cNvSpPr>
@@ -10583,7 +10583,7 @@
       </p:sp>
       <p:sp>
         <p:nvSpPr>
-          <p:cNvPr id="463629396" name="Дата 6"/>
+          <p:cNvPr id="270180719" name="Дата 6"/>
           <p:cNvSpPr>
             <a:spLocks noGrp="1"/>
           </p:cNvSpPr>
@@ -10609,7 +10609,7 @@
       </p:sp>
       <p:sp>
         <p:nvSpPr>
-          <p:cNvPr id="806557814" name="Нижний колонтитул 7"/>
+          <p:cNvPr id="588029428" name="Нижний колонтитул 7"/>
           <p:cNvSpPr>
             <a:spLocks noGrp="1"/>
           </p:cNvSpPr>
@@ -10631,7 +10631,7 @@
       </p:sp>
       <p:sp>
         <p:nvSpPr>
-          <p:cNvPr id="1160479228" name="Номер слайда 8"/>
+          <p:cNvPr id="370260028" name="Номер слайда 8"/>
           <p:cNvSpPr>
             <a:spLocks noGrp="1"/>
           </p:cNvSpPr>
@@ -10682,7 +10682,7 @@
       </p:grpSpPr>
       <p:sp>
         <p:nvSpPr>
-          <p:cNvPr id="1281934812" name="Заголовок 1"/>
+          <p:cNvPr id="1393111412" name="Заголовок 1"/>
           <p:cNvSpPr>
             <a:spLocks noGrp="1"/>
           </p:cNvSpPr>
@@ -10708,7 +10708,7 @@
       </p:sp>
       <p:sp>
         <p:nvSpPr>
-          <p:cNvPr id="2046072064" name="Дата 2"/>
+          <p:cNvPr id="2144901511" name="Дата 2"/>
           <p:cNvSpPr>
             <a:spLocks noGrp="1"/>
           </p:cNvSpPr>
@@ -10734,7 +10734,7 @@
       </p:sp>
       <p:sp>
         <p:nvSpPr>
-          <p:cNvPr id="925760900" name="Нижний колонтитул 3"/>
+          <p:cNvPr id="1294565240" name="Нижний колонтитул 3"/>
           <p:cNvSpPr>
             <a:spLocks noGrp="1"/>
           </p:cNvSpPr>
@@ -10756,7 +10756,7 @@
       </p:sp>
       <p:sp>
         <p:nvSpPr>
-          <p:cNvPr id="1444299471" name="Номер слайда 4"/>
+          <p:cNvPr id="366437444" name="Номер слайда 4"/>
           <p:cNvSpPr>
             <a:spLocks noGrp="1"/>
           </p:cNvSpPr>
@@ -10807,7 +10807,7 @@
       </p:grpSpPr>
       <p:sp>
         <p:nvSpPr>
-          <p:cNvPr id="764410390" name="Дата 1"/>
+          <p:cNvPr id="412438151" name="Дата 1"/>
           <p:cNvSpPr>
             <a:spLocks noGrp="1"/>
           </p:cNvSpPr>
@@ -10833,7 +10833,7 @@
       </p:sp>
       <p:sp>
         <p:nvSpPr>
-          <p:cNvPr id="865070787" name="Нижний колонтитул 2"/>
+          <p:cNvPr id="1786187567" name="Нижний колонтитул 2"/>
           <p:cNvSpPr>
             <a:spLocks noGrp="1"/>
           </p:cNvSpPr>
@@ -10855,7 +10855,7 @@
       </p:sp>
       <p:sp>
         <p:nvSpPr>
-          <p:cNvPr id="1559032338" name="Номер слайда 3"/>
+          <p:cNvPr id="1379664793" name="Номер слайда 3"/>
           <p:cNvSpPr>
             <a:spLocks noGrp="1"/>
           </p:cNvSpPr>
@@ -10906,7 +10906,7 @@
       </p:grpSpPr>
       <p:sp>
         <p:nvSpPr>
-          <p:cNvPr id="2016402276" name="Заголовок 1"/>
+          <p:cNvPr id="366453477" name="Заголовок 1"/>
           <p:cNvSpPr>
             <a:spLocks noGrp="1"/>
           </p:cNvSpPr>
@@ -10941,7 +10941,7 @@
       </p:sp>
       <p:sp>
         <p:nvSpPr>
-          <p:cNvPr id="1548433965" name="Объект 2"/>
+          <p:cNvPr id="291626683" name="Объект 2"/>
           <p:cNvSpPr>
             <a:spLocks noGrp="1"/>
           </p:cNvSpPr>
@@ -11040,7 +11040,7 @@
       </p:sp>
       <p:sp>
         <p:nvSpPr>
-          <p:cNvPr id="1556658589" name="Текст 3"/>
+          <p:cNvPr id="2081632213" name="Текст 3"/>
           <p:cNvSpPr>
             <a:spLocks noGrp="1"/>
           </p:cNvSpPr>
@@ -11108,7 +11108,7 @@
       </p:sp>
       <p:sp>
         <p:nvSpPr>
-          <p:cNvPr id="950334942" name="Дата 4"/>
+          <p:cNvPr id="1354432165" name="Дата 4"/>
           <p:cNvSpPr>
             <a:spLocks noGrp="1"/>
           </p:cNvSpPr>
@@ -11134,7 +11134,7 @@
       </p:sp>
       <p:sp>
         <p:nvSpPr>
-          <p:cNvPr id="1072072449" name="Нижний колонтитул 5"/>
+          <p:cNvPr id="1245247655" name="Нижний колонтитул 5"/>
           <p:cNvSpPr>
             <a:spLocks noGrp="1"/>
           </p:cNvSpPr>
@@ -11156,7 +11156,7 @@
       </p:sp>
       <p:sp>
         <p:nvSpPr>
-          <p:cNvPr id="1295929803" name="Номер слайда 6"/>
+          <p:cNvPr id="1307926881" name="Номер слайда 6"/>
           <p:cNvSpPr>
             <a:spLocks noGrp="1"/>
           </p:cNvSpPr>
@@ -11207,7 +11207,7 @@
       </p:grpSpPr>
       <p:sp>
         <p:nvSpPr>
-          <p:cNvPr id="2114076230" name="Заголовок 1"/>
+          <p:cNvPr id="727784352" name="Заголовок 1"/>
           <p:cNvSpPr>
             <a:spLocks noGrp="1"/>
           </p:cNvSpPr>
@@ -11242,7 +11242,7 @@
       </p:sp>
       <p:sp>
         <p:nvSpPr>
-          <p:cNvPr id="894584814" name="Рисунок 2"/>
+          <p:cNvPr id="830316039" name="Рисунок 2"/>
           <p:cNvSpPr>
             <a:spLocks noGrp="1"/>
           </p:cNvSpPr>
@@ -11306,7 +11306,7 @@
       </p:sp>
       <p:sp>
         <p:nvSpPr>
-          <p:cNvPr id="2024400069" name="Текст 3"/>
+          <p:cNvPr id="328257174" name="Текст 3"/>
           <p:cNvSpPr>
             <a:spLocks noGrp="1"/>
           </p:cNvSpPr>
@@ -11374,7 +11374,7 @@
       </p:sp>
       <p:sp>
         <p:nvSpPr>
-          <p:cNvPr id="16561951" name="Дата 4"/>
+          <p:cNvPr id="657390116" name="Дата 4"/>
           <p:cNvSpPr>
             <a:spLocks noGrp="1"/>
           </p:cNvSpPr>
@@ -11400,7 +11400,7 @@
       </p:sp>
       <p:sp>
         <p:nvSpPr>
-          <p:cNvPr id="2023925822" name="Нижний колонтитул 5"/>
+          <p:cNvPr id="1064684142" name="Нижний колонтитул 5"/>
           <p:cNvSpPr>
             <a:spLocks noGrp="1"/>
           </p:cNvSpPr>
@@ -11422,7 +11422,7 @@
       </p:sp>
       <p:sp>
         <p:nvSpPr>
-          <p:cNvPr id="593445368" name="Номер слайда 6"/>
+          <p:cNvPr id="1195880777" name="Номер слайда 6"/>
           <p:cNvSpPr>
             <a:spLocks noGrp="1"/>
           </p:cNvSpPr>
@@ -11478,7 +11478,7 @@
       </p:grpSpPr>
       <p:sp>
         <p:nvSpPr>
-          <p:cNvPr id="272335625" name="Заголовок 1"/>
+          <p:cNvPr id="993938429" name="Заголовок 1"/>
           <p:cNvSpPr>
             <a:spLocks noGrp="1"/>
           </p:cNvSpPr>
@@ -11514,7 +11514,7 @@
       </p:sp>
       <p:sp>
         <p:nvSpPr>
-          <p:cNvPr id="1658935789" name="Текст 2"/>
+          <p:cNvPr id="398838772" name="Текст 2"/>
           <p:cNvSpPr>
             <a:spLocks noGrp="1"/>
           </p:cNvSpPr>
@@ -11590,7 +11590,7 @@
       </p:sp>
       <p:sp>
         <p:nvSpPr>
-          <p:cNvPr id="1220543865" name="Дата 3"/>
+          <p:cNvPr id="1380411619" name="Дата 3"/>
           <p:cNvSpPr>
             <a:spLocks noGrp="1"/>
           </p:cNvSpPr>
@@ -11634,7 +11634,7 @@
       </p:sp>
       <p:sp>
         <p:nvSpPr>
-          <p:cNvPr id="2135112438" name="Нижний колонтитул 4"/>
+          <p:cNvPr id="316686976" name="Нижний колонтитул 4"/>
           <p:cNvSpPr>
             <a:spLocks noGrp="1"/>
           </p:cNvSpPr>
@@ -11674,7 +11674,7 @@
       </p:sp>
       <p:sp>
         <p:nvSpPr>
-          <p:cNvPr id="265375742" name="Номер слайда 5"/>
+          <p:cNvPr id="1918571607" name="Номер слайда 5"/>
           <p:cNvSpPr>
             <a:spLocks noGrp="1"/>
           </p:cNvSpPr>
@@ -12085,7 +12085,7 @@
       </p:grpSpPr>
       <p:sp>
         <p:nvSpPr>
-          <p:cNvPr id="795241378" name="Прямоугольник 3"/>
+          <p:cNvPr id="2119498964" name="Прямоугольник 3"/>
           <p:cNvSpPr/>
           <p:nvPr/>
         </p:nvSpPr>
@@ -12135,7 +12135,7 @@
       </p:sp>
       <p:sp>
         <p:nvSpPr>
-          <p:cNvPr id="1378292442" name="Прямоугольник 4"/>
+          <p:cNvPr id="1765705191" name="Прямоугольник 4"/>
           <p:cNvSpPr/>
           <p:nvPr/>
         </p:nvSpPr>
@@ -12185,7 +12185,7 @@
       </p:sp>
       <p:sp>
         <p:nvSpPr>
-          <p:cNvPr id="591927687" name="Заголовок 1"/>
+          <p:cNvPr id="1148214580" name="Заголовок 1"/>
           <p:cNvSpPr>
             <a:spLocks noGrp="1"/>
           </p:cNvSpPr>
@@ -12226,7 +12226,7 @@
       </p:sp>
       <p:sp>
         <p:nvSpPr>
-          <p:cNvPr id="393143013" name="Подзаголовок 2"/>
+          <p:cNvPr id="905258746" name="Подзаголовок 2"/>
           <p:cNvSpPr>
             <a:spLocks noGrp="1"/>
           </p:cNvSpPr>
@@ -12371,7 +12371,7 @@
       </p:grpSpPr>
       <p:sp>
         <p:nvSpPr>
-          <p:cNvPr id="1102597146" name="Объект 2"/>
+          <p:cNvPr id="1668011248" name="Объект 2"/>
           <p:cNvSpPr>
             <a:spLocks noGrp="1"/>
           </p:cNvSpPr>
@@ -12450,7 +12450,7 @@
       </p:sp>
       <p:sp>
         <p:nvSpPr>
-          <p:cNvPr id="1420563746" name="Номер слайда 3"/>
+          <p:cNvPr id="1085215997" name="Номер слайда 3"/>
           <p:cNvSpPr>
             <a:spLocks noGrp="1"/>
           </p:cNvSpPr>
@@ -12491,7 +12491,7 @@
       </p:sp>
       <p:sp>
         <p:nvSpPr>
-          <p:cNvPr id="858570174" name="Прямоугольник 5"/>
+          <p:cNvPr id="553844427" name="Прямоугольник 5"/>
           <p:cNvSpPr/>
           <p:nvPr/>
         </p:nvSpPr>
@@ -12541,7 +12541,7 @@
       </p:sp>
       <p:sp>
         <p:nvSpPr>
-          <p:cNvPr id="19050207" name="Прямоугольник 6"/>
+          <p:cNvPr id="194605452" name="Прямоугольник 6"/>
           <p:cNvSpPr/>
           <p:nvPr/>
         </p:nvSpPr>
@@ -12591,7 +12591,7 @@
       </p:sp>
       <p:sp>
         <p:nvSpPr>
-          <p:cNvPr id="80862825" name="Заголовок 1"/>
+          <p:cNvPr id="1451586730" name="Заголовок 1"/>
           <p:cNvSpPr>
             <a:spLocks noGrp="1"/>
           </p:cNvSpPr>
@@ -12722,7 +12722,7 @@
       </p:grpSpPr>
       <p:sp>
         <p:nvSpPr>
-          <p:cNvPr id="910795611" name="Объект 2"/>
+          <p:cNvPr id="604735051" name="Объект 2"/>
           <p:cNvSpPr>
             <a:spLocks noGrp="1"/>
           </p:cNvSpPr>
@@ -12795,7 +12795,7 @@
       </p:sp>
       <p:sp>
         <p:nvSpPr>
-          <p:cNvPr id="845970412" name="Номер слайда 3"/>
+          <p:cNvPr id="1193862957" name="Номер слайда 3"/>
           <p:cNvSpPr>
             <a:spLocks noGrp="1"/>
           </p:cNvSpPr>
@@ -12836,7 +12836,7 @@
       </p:sp>
       <p:sp>
         <p:nvSpPr>
-          <p:cNvPr id="155104533" name="Прямоугольник 5"/>
+          <p:cNvPr id="1306721379" name="Прямоугольник 5"/>
           <p:cNvSpPr/>
           <p:nvPr/>
         </p:nvSpPr>
@@ -12886,7 +12886,7 @@
       </p:sp>
       <p:sp>
         <p:nvSpPr>
-          <p:cNvPr id="1889037058" name="Прямоугольник 6"/>
+          <p:cNvPr id="1210217771" name="Прямоугольник 6"/>
           <p:cNvSpPr/>
           <p:nvPr/>
         </p:nvSpPr>
@@ -12936,7 +12936,7 @@
       </p:sp>
       <p:sp>
         <p:nvSpPr>
-          <p:cNvPr id="1334745503" name="Заголовок 1"/>
+          <p:cNvPr id="1957287165" name="Заголовок 1"/>
           <p:cNvSpPr>
             <a:spLocks noGrp="1"/>
           </p:cNvSpPr>
@@ -13020,7 +13020,7 @@
       </p:sp>
       <p:pic>
         <p:nvPicPr>
-          <p:cNvPr id="1086724144" name=""/>
+          <p:cNvPr id="1035594074" name=""/>
           <p:cNvPicPr>
             <a:picLocks noChangeAspect="1"/>
           </p:cNvPicPr>
@@ -13038,8 +13038,8 @@
         </p:blipFill>
         <p:spPr bwMode="auto">
           <a:xfrm flipH="0" flipV="0">
-            <a:off x="6083555" y="1685925"/>
-            <a:ext cx="5527252" cy="4581524"/>
+            <a:off x="5534024" y="1452562"/>
+            <a:ext cx="5706450" cy="4769894"/>
           </a:xfrm>
           <a:prstGeom prst="rect">
             <a:avLst/>
@@ -13114,7 +13114,7 @@
       </p:grpSpPr>
       <p:sp>
         <p:nvSpPr>
-          <p:cNvPr id="444456525" name="Объект 2"/>
+          <p:cNvPr id="402041649" name="Объект 2"/>
           <p:cNvSpPr>
             <a:spLocks noGrp="1"/>
           </p:cNvSpPr>
@@ -13124,13 +13124,13 @@
         </p:nvSpPr>
         <p:spPr bwMode="auto">
           <a:xfrm>
-            <a:off x="680319" y="2336872"/>
+            <a:off x="604119" y="2041596"/>
             <a:ext cx="5044972" cy="3599316"/>
           </a:xfrm>
         </p:spPr>
         <p:txBody>
           <a:bodyPr vertOverflow="overflow" horzOverflow="overflow" vert="horz" wrap="square" lIns="91440" tIns="45720" rIns="91440" bIns="45720" numCol="1" spcCol="0" rtlCol="0" fromWordArt="0" anchor="t" anchorCtr="0" forceAA="0" upright="0" compatLnSpc="0">
-            <a:normAutofit fontScale="95000" lnSpcReduction="1000"/>
+            <a:normAutofit/>
           </a:bodyPr>
           <a:lstStyle/>
           <a:p>
@@ -13157,41 +13157,15 @@
             </a:r>
             <a:r>
               <a:rPr lang="ru-RU"/>
-              <a:t> – преобразование инструкций в структуры для передачи исполняемым блокам;</a:t>
+              <a:t> – преобразование инструкций в структуры для передачи исполняемым блокам.</a:t>
             </a:r>
             <a:endParaRPr/>
           </a:p>
-          <a:p>
-            <a:pPr>
-              <a:defRPr/>
-            </a:pPr>
-            <a:r>
-              <a:rPr lang="ru-RU"/>
-              <a:t>По программному счётчику </a:t>
-            </a:r>
-            <a:r>
-              <a:rPr lang="en-US"/>
-              <a:t>(PC)</a:t>
-            </a:r>
-            <a:r>
-              <a:rPr lang="ru-RU"/>
-              <a:t> </a:t>
-            </a:r>
-            <a:r>
-              <a:rPr lang="en-US"/>
-              <a:t>Fetcher</a:t>
-            </a:r>
-            <a:r>
-              <a:rPr lang="ru-RU"/>
-              <a:t> делает смещение по адресу и получает адрес.</a:t>
-            </a:r>
-            <a:endParaRPr/>
-          </a:p>
-        </p:txBody>
-      </p:sp>
-      <p:sp>
-        <p:nvSpPr>
-          <p:cNvPr id="1802770938" name="Номер слайда 3"/>
+        </p:txBody>
+      </p:sp>
+      <p:sp>
+        <p:nvSpPr>
+          <p:cNvPr id="1830861833" name="Номер слайда 3"/>
           <p:cNvSpPr>
             <a:spLocks noGrp="1"/>
           </p:cNvSpPr>
@@ -13232,7 +13206,7 @@
       </p:sp>
       <p:sp>
         <p:nvSpPr>
-          <p:cNvPr id="847998918" name="Прямоугольник 5"/>
+          <p:cNvPr id="2132542029" name="Прямоугольник 5"/>
           <p:cNvSpPr/>
           <p:nvPr/>
         </p:nvSpPr>
@@ -13282,7 +13256,7 @@
       </p:sp>
       <p:sp>
         <p:nvSpPr>
-          <p:cNvPr id="1126307737" name="Прямоугольник 6"/>
+          <p:cNvPr id="330258748" name="Прямоугольник 6"/>
           <p:cNvSpPr/>
           <p:nvPr/>
         </p:nvSpPr>
@@ -13332,7 +13306,7 @@
       </p:sp>
       <p:sp>
         <p:nvSpPr>
-          <p:cNvPr id="1969491247" name="Заголовок 1"/>
+          <p:cNvPr id="962595235" name="Заголовок 1"/>
           <p:cNvSpPr>
             <a:spLocks noGrp="1"/>
           </p:cNvSpPr>
@@ -13410,7 +13384,7 @@
         </p:blipFill>
         <p:spPr bwMode="auto">
           <a:xfrm flipH="0" flipV="0">
-            <a:off x="7420950" y="1624012"/>
+            <a:off x="7068524" y="1646902"/>
             <a:ext cx="3747112" cy="4845972"/>
           </a:xfrm>
           <a:prstGeom prst="rect">
@@ -13435,7 +13409,7 @@
 </file>
 
 <file path=ppt/slides/slide13.xml><?xml version="1.0" encoding="utf-8"?>
-<p:sld xmlns:a="http://schemas.openxmlformats.org/drawingml/2006/main" xmlns:r="http://schemas.openxmlformats.org/officeDocument/2006/relationships" xmlns:p="http://schemas.openxmlformats.org/presentationml/2006/main" xmlns:m="http://schemas.openxmlformats.org/officeDocument/2006/math" xmlns:w="http://schemas.openxmlformats.org/wordprocessingml/2006/main" xmlns:mc="http://schemas.openxmlformats.org/markup-compatibility/2006" showMasterPhAnim="0" showMasterSp="1" show="1">
+<p:sld xmlns:a="http://schemas.openxmlformats.org/drawingml/2006/main" xmlns:r="http://schemas.openxmlformats.org/officeDocument/2006/relationships" xmlns:p="http://schemas.openxmlformats.org/presentationml/2006/main" xmlns:m="http://schemas.openxmlformats.org/officeDocument/2006/math" xmlns:w="http://schemas.openxmlformats.org/wordprocessingml/2006/main" xmlns:mc="http://schemas.openxmlformats.org/markup-compatibility/2006" showMasterPhAnim="0" showMasterSp="1" show="0">
   <p:cSld name="">
     <p:bg>
       <p:bgPr shadeToTitle="0">
@@ -13486,7 +13460,7 @@
       </p:grpSpPr>
       <p:sp>
         <p:nvSpPr>
-          <p:cNvPr id="1496811791" name="Объект 2"/>
+          <p:cNvPr id="2043590722" name="Объект 2"/>
           <p:cNvSpPr>
             <a:spLocks noGrp="1"/>
           </p:cNvSpPr>
@@ -13609,7 +13583,7 @@
       </p:sp>
       <p:sp>
         <p:nvSpPr>
-          <p:cNvPr id="688327277" name="Номер слайда 3"/>
+          <p:cNvPr id="1941335714" name="Номер слайда 3"/>
           <p:cNvSpPr>
             <a:spLocks noGrp="1"/>
           </p:cNvSpPr>
@@ -13650,7 +13624,7 @@
       </p:sp>
       <p:sp>
         <p:nvSpPr>
-          <p:cNvPr id="345763988" name="Прямоугольник 5"/>
+          <p:cNvPr id="684204292" name="Прямоугольник 5"/>
           <p:cNvSpPr/>
           <p:nvPr/>
         </p:nvSpPr>
@@ -13700,7 +13674,7 @@
       </p:sp>
       <p:sp>
         <p:nvSpPr>
-          <p:cNvPr id="1600092281" name="Прямоугольник 6"/>
+          <p:cNvPr id="347670875" name="Прямоугольник 6"/>
           <p:cNvSpPr/>
           <p:nvPr/>
         </p:nvSpPr>
@@ -13750,7 +13724,7 @@
       </p:sp>
       <p:sp>
         <p:nvSpPr>
-          <p:cNvPr id="1277913887" name="Заголовок 1"/>
+          <p:cNvPr id="27212953" name="Заголовок 1"/>
           <p:cNvSpPr>
             <a:spLocks noGrp="1"/>
           </p:cNvSpPr>
@@ -13896,7 +13870,7 @@
       </p:grpSpPr>
       <p:sp>
         <p:nvSpPr>
-          <p:cNvPr id="2043887746" name="Объект 2"/>
+          <p:cNvPr id="2046775309" name="Объект 2"/>
           <p:cNvSpPr>
             <a:spLocks noGrp="1"/>
           </p:cNvSpPr>
@@ -13991,7 +13965,7 @@
       </p:sp>
       <p:sp>
         <p:nvSpPr>
-          <p:cNvPr id="1180608762" name="Номер слайда 3"/>
+          <p:cNvPr id="478779720" name="Номер слайда 3"/>
           <p:cNvSpPr>
             <a:spLocks noGrp="1"/>
           </p:cNvSpPr>
@@ -14032,7 +14006,7 @@
       </p:sp>
       <p:sp>
         <p:nvSpPr>
-          <p:cNvPr id="2106704317" name="Прямоугольник 4"/>
+          <p:cNvPr id="772204101" name="Прямоугольник 4"/>
           <p:cNvSpPr/>
           <p:nvPr/>
         </p:nvSpPr>
@@ -14082,7 +14056,7 @@
       </p:sp>
       <p:sp>
         <p:nvSpPr>
-          <p:cNvPr id="973952013" name="Прямоугольник 5"/>
+          <p:cNvPr id="587986942" name="Прямоугольник 5"/>
           <p:cNvSpPr/>
           <p:nvPr/>
         </p:nvSpPr>
@@ -14132,7 +14106,7 @@
       </p:sp>
       <p:sp>
         <p:nvSpPr>
-          <p:cNvPr id="2028995553" name="Заголовок 1"/>
+          <p:cNvPr id="219752888" name="Заголовок 1"/>
           <p:cNvSpPr>
             <a:spLocks noGrp="1"/>
           </p:cNvSpPr>
@@ -14237,7 +14211,7 @@
       </p:grpSpPr>
       <p:sp>
         <p:nvSpPr>
-          <p:cNvPr id="2095992934" name="Объект 2"/>
+          <p:cNvPr id="213781125" name="Объект 2"/>
           <p:cNvSpPr>
             <a:spLocks noGrp="1"/>
           </p:cNvSpPr>
@@ -14386,7 +14360,7 @@
       </p:sp>
       <p:sp>
         <p:nvSpPr>
-          <p:cNvPr id="133681853" name="Номер слайда 3"/>
+          <p:cNvPr id="1849573552" name="Номер слайда 3"/>
           <p:cNvSpPr>
             <a:spLocks noGrp="1"/>
           </p:cNvSpPr>
@@ -14427,7 +14401,7 @@
       </p:sp>
       <p:sp>
         <p:nvSpPr>
-          <p:cNvPr id="2047500724" name="Прямоугольник 4"/>
+          <p:cNvPr id="1247196733" name="Прямоугольник 4"/>
           <p:cNvSpPr/>
           <p:nvPr/>
         </p:nvSpPr>
@@ -14477,7 +14451,7 @@
       </p:sp>
       <p:sp>
         <p:nvSpPr>
-          <p:cNvPr id="712986061" name="Прямоугольник 5"/>
+          <p:cNvPr id="211312007" name="Прямоугольник 5"/>
           <p:cNvSpPr/>
           <p:nvPr/>
         </p:nvSpPr>
@@ -14527,7 +14501,7 @@
       </p:sp>
       <p:sp>
         <p:nvSpPr>
-          <p:cNvPr id="1943569084" name="Заголовок 1"/>
+          <p:cNvPr id="431674948" name="Заголовок 1"/>
           <p:cNvSpPr>
             <a:spLocks noGrp="1"/>
           </p:cNvSpPr>
@@ -14632,7 +14606,7 @@
       </p:grpSpPr>
       <p:sp>
         <p:nvSpPr>
-          <p:cNvPr id="780225731" name="Объект 2"/>
+          <p:cNvPr id="1674598459" name="Объект 2"/>
           <p:cNvSpPr>
             <a:spLocks noGrp="1"/>
           </p:cNvSpPr>
@@ -14658,7 +14632,7 @@
       </p:sp>
       <p:sp>
         <p:nvSpPr>
-          <p:cNvPr id="939329748" name="Номер слайда 3"/>
+          <p:cNvPr id="664510030" name="Номер слайда 3"/>
           <p:cNvSpPr>
             <a:spLocks noGrp="1"/>
           </p:cNvSpPr>
@@ -14699,7 +14673,7 @@
       </p:sp>
       <p:sp>
         <p:nvSpPr>
-          <p:cNvPr id="532143714" name="Прямоугольник 4"/>
+          <p:cNvPr id="1722892441" name="Прямоугольник 4"/>
           <p:cNvSpPr/>
           <p:nvPr/>
         </p:nvSpPr>
@@ -14749,7 +14723,7 @@
       </p:sp>
       <p:sp>
         <p:nvSpPr>
-          <p:cNvPr id="259117277" name="Прямоугольник 5"/>
+          <p:cNvPr id="1268552919" name="Прямоугольник 5"/>
           <p:cNvSpPr/>
           <p:nvPr/>
         </p:nvSpPr>
@@ -14799,7 +14773,7 @@
       </p:sp>
       <p:sp>
         <p:nvSpPr>
-          <p:cNvPr id="1718174798" name="Заголовок 1"/>
+          <p:cNvPr id="993902618" name="Заголовок 1"/>
           <p:cNvSpPr>
             <a:spLocks noGrp="1"/>
           </p:cNvSpPr>
@@ -14904,7 +14878,7 @@
       </p:grpSpPr>
       <p:sp>
         <p:nvSpPr>
-          <p:cNvPr id="1358834782" name="Прямоугольник 4"/>
+          <p:cNvPr id="540688655" name="Прямоугольник 4"/>
           <p:cNvSpPr/>
           <p:nvPr/>
         </p:nvSpPr>
@@ -14954,7 +14928,7 @@
       </p:sp>
       <p:sp>
         <p:nvSpPr>
-          <p:cNvPr id="1059084883" name="Заголовок 1"/>
+          <p:cNvPr id="869604524" name="Заголовок 1"/>
           <p:cNvSpPr>
             <a:spLocks noGrp="1"/>
           </p:cNvSpPr>
@@ -14993,7 +14967,7 @@
       </p:sp>
       <p:sp>
         <p:nvSpPr>
-          <p:cNvPr id="1174184765" name="Объект 2"/>
+          <p:cNvPr id="1390165828" name="Объект 2"/>
           <p:cNvSpPr>
             <a:spLocks noGrp="1"/>
           </p:cNvSpPr>
@@ -15067,7 +15041,7 @@
                   <a:schemeClr val="tx1"/>
                 </a:solidFill>
               </a:rPr>
-              <a:t>Основные поставщики графических ускорителей: </a:t>
+              <a:t>Основные компании-разработчики графических ускорителей: </a:t>
             </a:r>
             <a:r>
               <a:rPr lang="en-US">
@@ -15103,7 +15077,7 @@
       </p:sp>
       <p:sp>
         <p:nvSpPr>
-          <p:cNvPr id="1318068780" name="Номер слайда 3"/>
+          <p:cNvPr id="541650073" name="Номер слайда 3"/>
           <p:cNvSpPr>
             <a:spLocks noGrp="1"/>
           </p:cNvSpPr>
@@ -15144,7 +15118,7 @@
       </p:sp>
       <p:sp>
         <p:nvSpPr>
-          <p:cNvPr id="1904787699" name="Прямоугольник 5"/>
+          <p:cNvPr id="1643542223" name="Прямоугольник 5"/>
           <p:cNvSpPr/>
           <p:nvPr/>
         </p:nvSpPr>
@@ -15260,7 +15234,7 @@
       </p:grpSpPr>
       <p:sp>
         <p:nvSpPr>
-          <p:cNvPr id="1533329066" name="Объект 2"/>
+          <p:cNvPr id="926397687" name="Объект 2"/>
           <p:cNvSpPr>
             <a:spLocks noGrp="1"/>
           </p:cNvSpPr>
@@ -15373,7 +15347,7 @@
       </p:sp>
       <p:sp>
         <p:nvSpPr>
-          <p:cNvPr id="1033585347" name="Номер слайда 3"/>
+          <p:cNvPr id="2016395327" name="Номер слайда 3"/>
           <p:cNvSpPr>
             <a:spLocks noGrp="1"/>
           </p:cNvSpPr>
@@ -15414,7 +15388,7 @@
       </p:sp>
       <p:sp>
         <p:nvSpPr>
-          <p:cNvPr id="229186254" name="Прямоугольник 5"/>
+          <p:cNvPr id="726802362" name="Прямоугольник 5"/>
           <p:cNvSpPr/>
           <p:nvPr/>
         </p:nvSpPr>
@@ -15464,7 +15438,7 @@
       </p:sp>
       <p:sp>
         <p:nvSpPr>
-          <p:cNvPr id="1122392701" name="Заголовок 1"/>
+          <p:cNvPr id="1717735568" name="Заголовок 1"/>
           <p:cNvSpPr>
             <a:spLocks noGrp="1"/>
           </p:cNvSpPr>
@@ -15503,7 +15477,7 @@
       </p:sp>
       <p:sp>
         <p:nvSpPr>
-          <p:cNvPr id="374419691" name="Прямоугольник 6"/>
+          <p:cNvPr id="244443748" name="Прямоугольник 6"/>
           <p:cNvSpPr/>
           <p:nvPr/>
         </p:nvSpPr>
@@ -15619,7 +15593,7 @@
       </p:grpSpPr>
       <p:sp>
         <p:nvSpPr>
-          <p:cNvPr id="1660593969" name="Объект 2"/>
+          <p:cNvPr id="159789626" name="Объект 2"/>
           <p:cNvSpPr>
             <a:spLocks noGrp="1"/>
           </p:cNvSpPr>
@@ -15629,7 +15603,9 @@
         </p:nvSpPr>
         <p:spPr bwMode="auto"/>
         <p:txBody>
-          <a:bodyPr/>
+          <a:bodyPr vertOverflow="overflow" horzOverflow="overflow" vert="horz" wrap="square" lIns="91440" tIns="45720" rIns="91440" bIns="45720" numCol="1" spcCol="0" rtlCol="0" fromWordArt="0" anchor="t" anchorCtr="0" forceAA="0" upright="0" compatLnSpc="0">
+            <a:normAutofit fontScale="90000" lnSpcReduction="2000"/>
+          </a:bodyPr>
           <a:lstStyle/>
           <a:p>
             <a:pPr marL="0" indent="0">
@@ -15711,7 +15687,31 @@
                   <a:schemeClr val="tx1"/>
                 </a:solidFill>
               </a:rPr>
-              <a:t> На разработанной базе модели можно экспериментировать с различными техниками и способами, для получения их эмпирической эффективности в данной архитектуре.</a:t>
+              <a:t> На разработанной базе модели можно экспериментировать с различными техниками и способами</a:t>
+            </a:r>
+            <a:r>
+              <a:rPr lang="en-US">
+                <a:solidFill>
+                  <a:schemeClr val="tx1"/>
+                </a:solidFill>
+              </a:rPr>
+              <a:t> </a:t>
+            </a:r>
+            <a:r>
+              <a:rPr lang="ru-RU">
+                <a:solidFill>
+                  <a:schemeClr val="tx1"/>
+                </a:solidFill>
+              </a:rPr>
+              <a:t>в архитектуре процессорных систем</a:t>
+            </a:r>
+            <a:r>
+              <a:rPr>
+                <a:solidFill>
+                  <a:schemeClr val="tx1"/>
+                </a:solidFill>
+              </a:rPr>
+              <a:t>, для получения их эмпирической эффективности в данной архитектуре;</a:t>
             </a:r>
             <a:endParaRPr>
               <a:solidFill>
@@ -15719,11 +15719,31 @@
               </a:solidFill>
             </a:endParaRPr>
           </a:p>
-        </p:txBody>
-      </p:sp>
-      <p:sp>
-        <p:nvSpPr>
-          <p:cNvPr id="1588708495" name="Номер слайда 3"/>
+          <a:p>
+            <a:pPr>
+              <a:buFont typeface="Arial"/>
+              <a:buChar char="–"/>
+              <a:defRPr/>
+            </a:pPr>
+            <a:r>
+              <a:rPr>
+                <a:solidFill>
+                  <a:schemeClr val="tx1"/>
+                </a:solidFill>
+              </a:rPr>
+              <a:t> Приблизит к реализации полноценного графического ядра, а дальше – графического ускорителя.</a:t>
+            </a:r>
+            <a:endParaRPr>
+              <a:solidFill>
+                <a:schemeClr val="tx1"/>
+              </a:solidFill>
+            </a:endParaRPr>
+          </a:p>
+        </p:txBody>
+      </p:sp>
+      <p:sp>
+        <p:nvSpPr>
+          <p:cNvPr id="1605771366" name="Номер слайда 3"/>
           <p:cNvSpPr>
             <a:spLocks noGrp="1"/>
           </p:cNvSpPr>
@@ -15764,7 +15784,7 @@
       </p:sp>
       <p:sp>
         <p:nvSpPr>
-          <p:cNvPr id="280988965" name="Прямоугольник 4"/>
+          <p:cNvPr id="1121215079" name="Прямоугольник 4"/>
           <p:cNvSpPr/>
           <p:nvPr/>
         </p:nvSpPr>
@@ -15814,7 +15834,7 @@
       </p:sp>
       <p:sp>
         <p:nvSpPr>
-          <p:cNvPr id="1662314870" name="Заголовок 1"/>
+          <p:cNvPr id="1029657622" name="Заголовок 1"/>
           <p:cNvSpPr>
             <a:spLocks noGrp="1"/>
           </p:cNvSpPr>
@@ -15853,7 +15873,7 @@
       </p:sp>
       <p:sp>
         <p:nvSpPr>
-          <p:cNvPr id="1234798136" name="Прямоугольник 5"/>
+          <p:cNvPr id="1388606064" name="Прямоугольник 5"/>
           <p:cNvSpPr/>
           <p:nvPr/>
         </p:nvSpPr>
@@ -15969,7 +15989,7 @@
       </p:grpSpPr>
       <p:sp>
         <p:nvSpPr>
-          <p:cNvPr id="1923982345" name="Прямоугольник 9"/>
+          <p:cNvPr id="278519678" name="Прямоугольник 9"/>
           <p:cNvSpPr/>
           <p:nvPr/>
         </p:nvSpPr>
@@ -16019,7 +16039,7 @@
       </p:sp>
       <p:sp>
         <p:nvSpPr>
-          <p:cNvPr id="1005594784" name="Прямоугольник 10"/>
+          <p:cNvPr id="1067345400" name="Прямоугольник 10"/>
           <p:cNvSpPr/>
           <p:nvPr/>
         </p:nvSpPr>
@@ -16069,7 +16089,7 @@
       </p:sp>
       <p:sp>
         <p:nvSpPr>
-          <p:cNvPr id="858244658" name="Заголовок 1"/>
+          <p:cNvPr id="1785780863" name="Заголовок 1"/>
           <p:cNvSpPr>
             <a:spLocks noGrp="1"/>
           </p:cNvSpPr>
@@ -16116,7 +16136,7 @@
       </p:sp>
       <p:sp>
         <p:nvSpPr>
-          <p:cNvPr id="1448765701" name="Объект 2"/>
+          <p:cNvPr id="1671965891" name="Объект 2"/>
           <p:cNvSpPr>
             <a:spLocks noGrp="1"/>
           </p:cNvSpPr>
@@ -16171,7 +16191,7 @@
       </p:sp>
       <p:sp>
         <p:nvSpPr>
-          <p:cNvPr id="346900598" name="Номер слайда 3"/>
+          <p:cNvPr id="407468574" name="Номер слайда 3"/>
           <p:cNvSpPr>
             <a:spLocks noGrp="1"/>
           </p:cNvSpPr>
@@ -16212,7 +16232,7 @@
       </p:sp>
       <p:pic>
         <p:nvPicPr>
-          <p:cNvPr id="1785821000" name="Рисунок 7"/>
+          <p:cNvPr id="1177467375" name="Рисунок 7"/>
           <p:cNvPicPr>
             <a:picLocks noChangeAspect="1"/>
           </p:cNvPicPr>
@@ -16690,7 +16710,7 @@
       </p:grpSpPr>
       <p:sp>
         <p:nvSpPr>
-          <p:cNvPr id="782843311" name="Объект 2"/>
+          <p:cNvPr id="218480208" name="Объект 2"/>
           <p:cNvSpPr>
             <a:spLocks noGrp="1"/>
           </p:cNvSpPr>
@@ -16741,7 +16761,7 @@
       </p:sp>
       <p:sp>
         <p:nvSpPr>
-          <p:cNvPr id="840677090" name="Номер слайда 3"/>
+          <p:cNvPr id="689741051" name="Номер слайда 3"/>
           <p:cNvSpPr>
             <a:spLocks noGrp="1"/>
           </p:cNvSpPr>
@@ -16782,7 +16802,7 @@
       </p:sp>
       <p:pic>
         <p:nvPicPr>
-          <p:cNvPr id="1048005843" name="Рисунок 5"/>
+          <p:cNvPr id="1732777502" name="Рисунок 5"/>
           <p:cNvPicPr>
             <a:picLocks noChangeAspect="1"/>
           </p:cNvPicPr>
@@ -16812,7 +16832,7 @@
       </p:pic>
       <p:pic>
         <p:nvPicPr>
-          <p:cNvPr id="1990718543" name="Рисунок 1421075015"/>
+          <p:cNvPr id="1059245539" name="Рисунок 1421075015"/>
           <p:cNvPicPr>
             <a:picLocks noChangeAspect="1"/>
           </p:cNvPicPr>
@@ -16847,7 +16867,7 @@
       </p:pic>
       <p:sp>
         <p:nvSpPr>
-          <p:cNvPr id="782030701" name="Прямоугольник 10"/>
+          <p:cNvPr id="150001607" name="Прямоугольник 10"/>
           <p:cNvSpPr/>
           <p:nvPr/>
         </p:nvSpPr>
@@ -16897,7 +16917,7 @@
       </p:sp>
       <p:sp>
         <p:nvSpPr>
-          <p:cNvPr id="954627379" name="Прямоугольник 11"/>
+          <p:cNvPr id="1970930413" name="Прямоугольник 11"/>
           <p:cNvSpPr/>
           <p:nvPr/>
         </p:nvSpPr>
@@ -16947,7 +16967,7 @@
       </p:sp>
       <p:sp>
         <p:nvSpPr>
-          <p:cNvPr id="574792027" name="Заголовок 1"/>
+          <p:cNvPr id="1627979841" name="Заголовок 1"/>
           <p:cNvSpPr>
             <a:spLocks noGrp="1"/>
           </p:cNvSpPr>
@@ -16996,7 +17016,7 @@
       </p:sp>
       <p:pic>
         <p:nvPicPr>
-          <p:cNvPr id="2023348104" name="Рисунок 2"/>
+          <p:cNvPr id="1555268725" name="Рисунок 2"/>
           <p:cNvPicPr>
             <a:picLocks noChangeAspect="1"/>
           </p:cNvPicPr>
@@ -17120,7 +17140,7 @@
       </p:grpSpPr>
       <p:sp>
         <p:nvSpPr>
-          <p:cNvPr id="553398658" name="Объект 2"/>
+          <p:cNvPr id="1299174877" name="Объект 2"/>
           <p:cNvSpPr>
             <a:spLocks noGrp="1"/>
           </p:cNvSpPr>
@@ -17245,7 +17265,7 @@
       </p:sp>
       <p:sp>
         <p:nvSpPr>
-          <p:cNvPr id="1208465083" name="Номер слайда 3"/>
+          <p:cNvPr id="1636747347" name="Номер слайда 3"/>
           <p:cNvSpPr>
             <a:spLocks noGrp="1"/>
           </p:cNvSpPr>
@@ -17286,7 +17306,7 @@
       </p:sp>
       <p:sp>
         <p:nvSpPr>
-          <p:cNvPr id="1857069577" name="Прямоугольник 5"/>
+          <p:cNvPr id="534537205" name="Прямоугольник 5"/>
           <p:cNvSpPr/>
           <p:nvPr/>
         </p:nvSpPr>
@@ -17336,7 +17356,7 @@
       </p:sp>
       <p:sp>
         <p:nvSpPr>
-          <p:cNvPr id="1744765801" name="Прямоугольник 6"/>
+          <p:cNvPr id="1730040083" name="Прямоугольник 6"/>
           <p:cNvSpPr/>
           <p:nvPr/>
         </p:nvSpPr>
@@ -17386,7 +17406,7 @@
       </p:sp>
       <p:sp>
         <p:nvSpPr>
-          <p:cNvPr id="45281339" name="Заголовок 1"/>
+          <p:cNvPr id="1109080447" name="Заголовок 1"/>
           <p:cNvSpPr>
             <a:spLocks noGrp="1"/>
           </p:cNvSpPr>
@@ -17532,7 +17552,7 @@
       </p:grpSpPr>
       <p:sp>
         <p:nvSpPr>
-          <p:cNvPr id="883563393" name="Объект 2"/>
+          <p:cNvPr id="924604707" name="Объект 2"/>
           <p:cNvSpPr>
             <a:spLocks noGrp="1"/>
           </p:cNvSpPr>
@@ -17607,7 +17627,7 @@
       </p:sp>
       <p:sp>
         <p:nvSpPr>
-          <p:cNvPr id="1059568745" name="Номер слайда 3"/>
+          <p:cNvPr id="539439231" name="Номер слайда 3"/>
           <p:cNvSpPr>
             <a:spLocks noGrp="1"/>
           </p:cNvSpPr>
@@ -17648,7 +17668,7 @@
       </p:sp>
       <p:sp>
         <p:nvSpPr>
-          <p:cNvPr id="840929692" name="Прямоугольник 6"/>
+          <p:cNvPr id="522519587" name="Прямоугольник 6"/>
           <p:cNvSpPr/>
           <p:nvPr/>
         </p:nvSpPr>
@@ -17698,7 +17718,7 @@
       </p:sp>
       <p:sp>
         <p:nvSpPr>
-          <p:cNvPr id="482067498" name="Прямоугольник 7"/>
+          <p:cNvPr id="2088590454" name="Прямоугольник 7"/>
           <p:cNvSpPr/>
           <p:nvPr/>
         </p:nvSpPr>
@@ -17748,7 +17768,7 @@
       </p:sp>
       <p:sp>
         <p:nvSpPr>
-          <p:cNvPr id="1410570347" name="Заголовок 1"/>
+          <p:cNvPr id="1584440433" name="Заголовок 1"/>
           <p:cNvSpPr>
             <a:spLocks noGrp="1"/>
           </p:cNvSpPr>

--- a/docs/starukhin_dissertation/magister_pres.pptx
+++ b/docs/starukhin_dissertation/magister_pres.pptx
@@ -5,7 +5,7 @@
     <p:sldMasterId id="2147483648" r:id="rId1"/>
   </p:sldMasterIdLst>
   <p:notesMasterIdLst>
-    <p:notesMasterId r:id="rId20"/>
+    <p:notesMasterId r:id="rId19"/>
   </p:notesMasterIdLst>
   <p:sldIdLst>
     <p:sldId id="256" r:id="rId4"/>
@@ -23,7 +23,6 @@
     <p:sldId id="268" r:id="rId16"/>
     <p:sldId id="269" r:id="rId17"/>
     <p:sldId id="270" r:id="rId18"/>
-    <p:sldId id="271" r:id="rId19"/>
   </p:sldIdLst>
   <p:sldSz cx="12192000" cy="6858000"/>
   <p:notesSz cx="6858000" cy="9144000"/>
@@ -149,7 +148,7 @@
       </p:grpSpPr>
       <p:sp>
         <p:nvSpPr>
-          <p:cNvPr id="378152317" name="Верхний колонтитул 1"/>
+          <p:cNvPr id="2125784802" name="Верхний колонтитул 1"/>
           <p:cNvSpPr>
             <a:spLocks noGrp="1"/>
           </p:cNvSpPr>
@@ -183,7 +182,7 @@
       </p:sp>
       <p:sp>
         <p:nvSpPr>
-          <p:cNvPr id="1512979661" name="Дата 2"/>
+          <p:cNvPr id="1102153904" name="Дата 2"/>
           <p:cNvSpPr>
             <a:spLocks noGrp="1"/>
           </p:cNvSpPr>
@@ -221,7 +220,7 @@
       </p:sp>
       <p:sp>
         <p:nvSpPr>
-          <p:cNvPr id="57264332" name="Образ слайда 3"/>
+          <p:cNvPr id="466935396" name="Образ слайда 3"/>
           <p:cNvSpPr>
             <a:spLocks noChangeAspect="1" noGrp="1" noRot="1"/>
           </p:cNvSpPr>
@@ -257,7 +256,7 @@
       </p:sp>
       <p:sp>
         <p:nvSpPr>
-          <p:cNvPr id="41142498" name="Заметки 4"/>
+          <p:cNvPr id="1013768272" name="Заметки 4"/>
           <p:cNvSpPr>
             <a:spLocks noGrp="1"/>
           </p:cNvSpPr>
@@ -331,7 +330,7 @@
       </p:sp>
       <p:sp>
         <p:nvSpPr>
-          <p:cNvPr id="1635327804" name="Нижний колонтитул 5"/>
+          <p:cNvPr id="1762652176" name="Нижний колонтитул 5"/>
           <p:cNvSpPr>
             <a:spLocks noGrp="1"/>
           </p:cNvSpPr>
@@ -365,7 +364,7 @@
       </p:sp>
       <p:sp>
         <p:nvSpPr>
-          <p:cNvPr id="1277181526" name="Номер слайда 6"/>
+          <p:cNvPr id="1428335279" name="Номер слайда 6"/>
           <p:cNvSpPr>
             <a:spLocks noGrp="1"/>
           </p:cNvSpPr>
@@ -518,7 +517,7 @@
       </p:grpSpPr>
       <p:sp>
         <p:nvSpPr>
-          <p:cNvPr id="648512038" name="Slide Image Placeholder 1"/>
+          <p:cNvPr id="1096554833" name="Slide Image Placeholder 1"/>
           <p:cNvSpPr>
             <a:spLocks noChangeAspect="1" noGrp="1" noRot="1"/>
           </p:cNvSpPr>
@@ -530,7 +529,7 @@
       </p:sp>
       <p:sp>
         <p:nvSpPr>
-          <p:cNvPr id="227306547" name="Notes Placeholder 2"/>
+          <p:cNvPr id="91776163" name="Notes Placeholder 2"/>
           <p:cNvSpPr>
             <a:spLocks noGrp="1"/>
           </p:cNvSpPr>
@@ -552,7 +551,7 @@
       </p:sp>
       <p:sp>
         <p:nvSpPr>
-          <p:cNvPr id="1444462650" name="Slide Number Placeholder 3"/>
+          <p:cNvPr id="40276719" name="Slide Number Placeholder 3"/>
           <p:cNvSpPr>
             <a:spLocks noGrp="1"/>
           </p:cNvSpPr>
@@ -603,7 +602,7 @@
       </p:grpSpPr>
       <p:sp>
         <p:nvSpPr>
-          <p:cNvPr id="2005682416" name="Slide Image Placeholder 1"/>
+          <p:cNvPr id="1552585880" name="Slide Image Placeholder 1"/>
           <p:cNvSpPr>
             <a:spLocks noChangeAspect="1" noGrp="1" noRot="1"/>
           </p:cNvSpPr>
@@ -615,7 +614,7 @@
       </p:sp>
       <p:sp>
         <p:nvSpPr>
-          <p:cNvPr id="573031710" name="Notes Placeholder 2"/>
+          <p:cNvPr id="1631722075" name="Notes Placeholder 2"/>
           <p:cNvSpPr>
             <a:spLocks noGrp="1"/>
           </p:cNvSpPr>
@@ -637,7 +636,7 @@
       </p:sp>
       <p:sp>
         <p:nvSpPr>
-          <p:cNvPr id="1333981905" name="Slide Number Placeholder 3"/>
+          <p:cNvPr id="1881898884" name="Slide Number Placeholder 3"/>
           <p:cNvSpPr>
             <a:spLocks noGrp="1"/>
           </p:cNvSpPr>
@@ -688,7 +687,7 @@
       </p:grpSpPr>
       <p:sp>
         <p:nvSpPr>
-          <p:cNvPr id="130361602" name="Slide Image Placeholder 1"/>
+          <p:cNvPr id="1095869910" name="Slide Image Placeholder 1"/>
           <p:cNvSpPr>
             <a:spLocks noChangeAspect="1" noGrp="1" noRot="1"/>
           </p:cNvSpPr>
@@ -700,7 +699,7 @@
       </p:sp>
       <p:sp>
         <p:nvSpPr>
-          <p:cNvPr id="1892395812" name="Notes Placeholder 2"/>
+          <p:cNvPr id="1798374543" name="Notes Placeholder 2"/>
           <p:cNvSpPr>
             <a:spLocks noGrp="1"/>
           </p:cNvSpPr>
@@ -722,7 +721,7 @@
       </p:sp>
       <p:sp>
         <p:nvSpPr>
-          <p:cNvPr id="841219195" name="Slide Number Placeholder 3"/>
+          <p:cNvPr id="1503287132" name="Slide Number Placeholder 3"/>
           <p:cNvSpPr>
             <a:spLocks noGrp="1"/>
           </p:cNvSpPr>
@@ -773,7 +772,7 @@
       </p:grpSpPr>
       <p:sp>
         <p:nvSpPr>
-          <p:cNvPr id="1906292594" name="Slide Image Placeholder 1"/>
+          <p:cNvPr id="185656241" name="Slide Image Placeholder 1"/>
           <p:cNvSpPr>
             <a:spLocks noChangeAspect="1" noGrp="1" noRot="1"/>
           </p:cNvSpPr>
@@ -785,7 +784,7 @@
       </p:sp>
       <p:sp>
         <p:nvSpPr>
-          <p:cNvPr id="800672914" name="Notes Placeholder 2"/>
+          <p:cNvPr id="477515411" name="Notes Placeholder 2"/>
           <p:cNvSpPr>
             <a:spLocks noGrp="1"/>
           </p:cNvSpPr>
@@ -807,7 +806,7 @@
       </p:sp>
       <p:sp>
         <p:nvSpPr>
-          <p:cNvPr id="746027177" name="Slide Number Placeholder 3"/>
+          <p:cNvPr id="318681274" name="Slide Number Placeholder 3"/>
           <p:cNvSpPr>
             <a:spLocks noGrp="1"/>
           </p:cNvSpPr>
@@ -858,7 +857,7 @@
       </p:grpSpPr>
       <p:sp>
         <p:nvSpPr>
-          <p:cNvPr id="1679470708" name="Slide Image Placeholder 1"/>
+          <p:cNvPr id="1229885240" name="Slide Image Placeholder 1"/>
           <p:cNvSpPr>
             <a:spLocks noChangeAspect="1" noGrp="1" noRot="1"/>
           </p:cNvSpPr>
@@ -870,7 +869,7 @@
       </p:sp>
       <p:sp>
         <p:nvSpPr>
-          <p:cNvPr id="1954097245" name="Notes Placeholder 2"/>
+          <p:cNvPr id="556484586" name="Notes Placeholder 2"/>
           <p:cNvSpPr>
             <a:spLocks noGrp="1"/>
           </p:cNvSpPr>
@@ -892,7 +891,7 @@
       </p:sp>
       <p:sp>
         <p:nvSpPr>
-          <p:cNvPr id="466385429" name="Slide Number Placeholder 3"/>
+          <p:cNvPr id="12559504" name="Slide Number Placeholder 3"/>
           <p:cNvSpPr>
             <a:spLocks noGrp="1"/>
           </p:cNvSpPr>
@@ -908,9 +907,9 @@
             <a:pPr>
               <a:defRPr/>
             </a:pPr>
-            <a:fld id="{0A9BC998-3455-E361-253C-3B87DD69CA9D}" type="slidenum">
+            <a:fld id="{463C25AB-F75B-ED55-9B43-2E895322D2B6}" type="slidenum">
               <a:rPr/>
-              <a:t>12</a:t>
+              <a:t>13</a:t>
             </a:fld>
             <a:endParaRPr/>
           </a:p>
@@ -943,7 +942,7 @@
       </p:grpSpPr>
       <p:sp>
         <p:nvSpPr>
-          <p:cNvPr id="2067722888" name="Slide Image Placeholder 1"/>
+          <p:cNvPr id="128386848" name="Slide Image Placeholder 1"/>
           <p:cNvSpPr>
             <a:spLocks noChangeAspect="1" noGrp="1" noRot="1"/>
           </p:cNvSpPr>
@@ -955,7 +954,7 @@
       </p:sp>
       <p:sp>
         <p:nvSpPr>
-          <p:cNvPr id="1647924168" name="Notes Placeholder 2"/>
+          <p:cNvPr id="642605106" name="Notes Placeholder 2"/>
           <p:cNvSpPr>
             <a:spLocks noGrp="1"/>
           </p:cNvSpPr>
@@ -977,7 +976,7 @@
       </p:sp>
       <p:sp>
         <p:nvSpPr>
-          <p:cNvPr id="238480203" name="Slide Number Placeholder 3"/>
+          <p:cNvPr id="1382330898" name="Slide Number Placeholder 3"/>
           <p:cNvSpPr>
             <a:spLocks noGrp="1"/>
           </p:cNvSpPr>
@@ -993,9 +992,9 @@
             <a:pPr>
               <a:defRPr/>
             </a:pPr>
-            <a:fld id="{463C25AB-F75B-ED55-9B43-2E895322D2B6}" type="slidenum">
+            <a:fld id="{0E3B1206-5BC8-D1E1-57C3-7D177AE62E15}" type="slidenum">
               <a:rPr/>
-              <a:t>13</a:t>
+              <a:t>14</a:t>
             </a:fld>
             <a:endParaRPr/>
           </a:p>
@@ -1028,7 +1027,7 @@
       </p:grpSpPr>
       <p:sp>
         <p:nvSpPr>
-          <p:cNvPr id="1420294490" name="Slide Image Placeholder 1"/>
+          <p:cNvPr id="2069516497" name="Slide Image Placeholder 1"/>
           <p:cNvSpPr>
             <a:spLocks noChangeAspect="1" noGrp="1" noRot="1"/>
           </p:cNvSpPr>
@@ -1040,7 +1039,7 @@
       </p:sp>
       <p:sp>
         <p:nvSpPr>
-          <p:cNvPr id="1562437981" name="Notes Placeholder 2"/>
+          <p:cNvPr id="1157745042" name="Notes Placeholder 2"/>
           <p:cNvSpPr>
             <a:spLocks noGrp="1"/>
           </p:cNvSpPr>
@@ -1062,92 +1061,7 @@
       </p:sp>
       <p:sp>
         <p:nvSpPr>
-          <p:cNvPr id="1772592446" name="Slide Number Placeholder 3"/>
-          <p:cNvSpPr>
-            <a:spLocks noGrp="1"/>
-          </p:cNvSpPr>
-          <p:nvPr>
-            <p:ph type="sldNum" sz="quarter" idx="10"/>
-          </p:nvPr>
-        </p:nvSpPr>
-        <p:spPr bwMode="auto"/>
-        <p:txBody>
-          <a:bodyPr/>
-          <a:lstStyle/>
-          <a:p>
-            <a:pPr>
-              <a:defRPr/>
-            </a:pPr>
-            <a:fld id="{0E3B1206-5BC8-D1E1-57C3-7D177AE62E15}" type="slidenum">
-              <a:rPr/>
-              <a:t>14</a:t>
-            </a:fld>
-            <a:endParaRPr/>
-          </a:p>
-        </p:txBody>
-      </p:sp>
-    </p:spTree>
-  </p:cSld>
-  <p:clrMapOvr>
-    <a:masterClrMapping/>
-  </p:clrMapOvr>
-</p:notes>
-</file>
-
-<file path=ppt/notesSlides/notesSlide16.xml><?xml version="1.0" encoding="utf-8"?>
-<p:notes xmlns:a="http://schemas.openxmlformats.org/drawingml/2006/main" xmlns:r="http://schemas.openxmlformats.org/officeDocument/2006/relationships" xmlns:p="http://schemas.openxmlformats.org/presentationml/2006/main" xmlns:m="http://schemas.openxmlformats.org/officeDocument/2006/math" xmlns:w="http://schemas.openxmlformats.org/wordprocessingml/2006/main">
-  <p:cSld name="">
-    <p:spTree>
-      <p:nvGrpSpPr>
-        <p:cNvPr id="1" name=""/>
-        <p:cNvGrpSpPr/>
-        <p:nvPr/>
-      </p:nvGrpSpPr>
-      <p:grpSpPr bwMode="auto">
-        <a:xfrm>
-          <a:off x="0" y="0"/>
-          <a:ext cx="0" cy="0"/>
-          <a:chOff x="0" y="0"/>
-          <a:chExt cx="0" cy="0"/>
-        </a:xfrm>
-      </p:grpSpPr>
-      <p:sp>
-        <p:nvSpPr>
-          <p:cNvPr id="1660077007" name="Slide Image Placeholder 1"/>
-          <p:cNvSpPr>
-            <a:spLocks noChangeAspect="1" noGrp="1" noRot="1"/>
-          </p:cNvSpPr>
-          <p:nvPr>
-            <p:ph type="sldImg"/>
-          </p:nvPr>
-        </p:nvSpPr>
-        <p:spPr bwMode="auto"/>
-      </p:sp>
-      <p:sp>
-        <p:nvSpPr>
-          <p:cNvPr id="1617119750" name="Notes Placeholder 2"/>
-          <p:cNvSpPr>
-            <a:spLocks noGrp="1"/>
-          </p:cNvSpPr>
-          <p:nvPr>
-            <p:ph type="body" idx="1"/>
-          </p:nvPr>
-        </p:nvSpPr>
-        <p:spPr bwMode="auto"/>
-        <p:txBody>
-          <a:bodyPr/>
-          <a:lstStyle/>
-          <a:p>
-            <a:pPr>
-              <a:defRPr/>
-            </a:pPr>
-            <a:endParaRPr/>
-          </a:p>
-        </p:txBody>
-      </p:sp>
-      <p:sp>
-        <p:nvSpPr>
-          <p:cNvPr id="1295409349" name="Slide Number Placeholder 3"/>
+          <p:cNvPr id="641261609" name="Slide Number Placeholder 3"/>
           <p:cNvSpPr>
             <a:spLocks noGrp="1"/>
           </p:cNvSpPr>
@@ -1198,7 +1112,7 @@
       </p:grpSpPr>
       <p:sp>
         <p:nvSpPr>
-          <p:cNvPr id="1115521371" name="Slide Image Placeholder 1"/>
+          <p:cNvPr id="1162261534" name="Slide Image Placeholder 1"/>
           <p:cNvSpPr>
             <a:spLocks noChangeAspect="1" noGrp="1" noRot="1"/>
           </p:cNvSpPr>
@@ -1210,7 +1124,7 @@
       </p:sp>
       <p:sp>
         <p:nvSpPr>
-          <p:cNvPr id="1638792018" name="Notes Placeholder 2"/>
+          <p:cNvPr id="83486063" name="Notes Placeholder 2"/>
           <p:cNvSpPr>
             <a:spLocks noGrp="1"/>
           </p:cNvSpPr>
@@ -1232,7 +1146,7 @@
       </p:sp>
       <p:sp>
         <p:nvSpPr>
-          <p:cNvPr id="1906447812" name="Slide Number Placeholder 3"/>
+          <p:cNvPr id="1103272113" name="Slide Number Placeholder 3"/>
           <p:cNvSpPr>
             <a:spLocks noGrp="1"/>
           </p:cNvSpPr>
@@ -1283,7 +1197,7 @@
       </p:grpSpPr>
       <p:sp>
         <p:nvSpPr>
-          <p:cNvPr id="1663655987" name="Slide Image Placeholder 1"/>
+          <p:cNvPr id="1486708420" name="Slide Image Placeholder 1"/>
           <p:cNvSpPr>
             <a:spLocks noChangeAspect="1" noGrp="1" noRot="1"/>
           </p:cNvSpPr>
@@ -1295,7 +1209,7 @@
       </p:sp>
       <p:sp>
         <p:nvSpPr>
-          <p:cNvPr id="107266559" name="Notes Placeholder 2"/>
+          <p:cNvPr id="308926549" name="Notes Placeholder 2"/>
           <p:cNvSpPr>
             <a:spLocks noGrp="1"/>
           </p:cNvSpPr>
@@ -1317,7 +1231,7 @@
       </p:sp>
       <p:sp>
         <p:nvSpPr>
-          <p:cNvPr id="1481685124" name="Slide Number Placeholder 3"/>
+          <p:cNvPr id="893812784" name="Slide Number Placeholder 3"/>
           <p:cNvSpPr>
             <a:spLocks noGrp="1"/>
           </p:cNvSpPr>
@@ -1368,7 +1282,7 @@
       </p:grpSpPr>
       <p:sp>
         <p:nvSpPr>
-          <p:cNvPr id="887483382" name="Slide Image Placeholder 1"/>
+          <p:cNvPr id="1178613835" name="Slide Image Placeholder 1"/>
           <p:cNvSpPr>
             <a:spLocks noChangeAspect="1" noGrp="1" noRot="1"/>
           </p:cNvSpPr>
@@ -1380,7 +1294,7 @@
       </p:sp>
       <p:sp>
         <p:nvSpPr>
-          <p:cNvPr id="765902535" name="Notes Placeholder 2"/>
+          <p:cNvPr id="2075501376" name="Notes Placeholder 2"/>
           <p:cNvSpPr>
             <a:spLocks noGrp="1"/>
           </p:cNvSpPr>
@@ -1402,7 +1316,7 @@
       </p:sp>
       <p:sp>
         <p:nvSpPr>
-          <p:cNvPr id="1237751632" name="Slide Number Placeholder 3"/>
+          <p:cNvPr id="889314643" name="Slide Number Placeholder 3"/>
           <p:cNvSpPr>
             <a:spLocks noGrp="1"/>
           </p:cNvSpPr>
@@ -1453,7 +1367,7 @@
       </p:grpSpPr>
       <p:sp>
         <p:nvSpPr>
-          <p:cNvPr id="635839017" name="Slide Image Placeholder 1"/>
+          <p:cNvPr id="161798591" name="Slide Image Placeholder 1"/>
           <p:cNvSpPr>
             <a:spLocks noChangeAspect="1" noGrp="1" noRot="1"/>
           </p:cNvSpPr>
@@ -1465,7 +1379,7 @@
       </p:sp>
       <p:sp>
         <p:nvSpPr>
-          <p:cNvPr id="2038451647" name="Notes Placeholder 2"/>
+          <p:cNvPr id="2123198391" name="Notes Placeholder 2"/>
           <p:cNvSpPr>
             <a:spLocks noGrp="1"/>
           </p:cNvSpPr>
@@ -1487,7 +1401,7 @@
       </p:sp>
       <p:sp>
         <p:nvSpPr>
-          <p:cNvPr id="656602091" name="Slide Number Placeholder 3"/>
+          <p:cNvPr id="187274734" name="Slide Number Placeholder 3"/>
           <p:cNvSpPr>
             <a:spLocks noGrp="1"/>
           </p:cNvSpPr>
@@ -1623,7 +1537,7 @@
       </p:grpSpPr>
       <p:sp>
         <p:nvSpPr>
-          <p:cNvPr id="141993073" name="Slide Image Placeholder 1"/>
+          <p:cNvPr id="1974162722" name="Slide Image Placeholder 1"/>
           <p:cNvSpPr>
             <a:spLocks noChangeAspect="1" noGrp="1" noRot="1"/>
           </p:cNvSpPr>
@@ -1635,7 +1549,7 @@
       </p:sp>
       <p:sp>
         <p:nvSpPr>
-          <p:cNvPr id="1633962415" name="Notes Placeholder 2"/>
+          <p:cNvPr id="1514390977" name="Notes Placeholder 2"/>
           <p:cNvSpPr>
             <a:spLocks noGrp="1"/>
           </p:cNvSpPr>
@@ -1657,7 +1571,7 @@
       </p:sp>
       <p:sp>
         <p:nvSpPr>
-          <p:cNvPr id="1424971454" name="Slide Number Placeholder 3"/>
+          <p:cNvPr id="1991306707" name="Slide Number Placeholder 3"/>
           <p:cNvSpPr>
             <a:spLocks noGrp="1"/>
           </p:cNvSpPr>
@@ -1708,7 +1622,7 @@
       </p:grpSpPr>
       <p:sp>
         <p:nvSpPr>
-          <p:cNvPr id="627102878" name="Slide Image Placeholder 1"/>
+          <p:cNvPr id="795942837" name="Slide Image Placeholder 1"/>
           <p:cNvSpPr>
             <a:spLocks noChangeAspect="1" noGrp="1" noRot="1"/>
           </p:cNvSpPr>
@@ -1720,7 +1634,7 @@
       </p:sp>
       <p:sp>
         <p:nvSpPr>
-          <p:cNvPr id="1154629852" name="Notes Placeholder 2"/>
+          <p:cNvPr id="1305987587" name="Notes Placeholder 2"/>
           <p:cNvSpPr>
             <a:spLocks noGrp="1"/>
           </p:cNvSpPr>
@@ -1742,7 +1656,7 @@
       </p:sp>
       <p:sp>
         <p:nvSpPr>
-          <p:cNvPr id="1348789066" name="Slide Number Placeholder 3"/>
+          <p:cNvPr id="914481353" name="Slide Number Placeholder 3"/>
           <p:cNvSpPr>
             <a:spLocks noGrp="1"/>
           </p:cNvSpPr>
@@ -1793,7 +1707,7 @@
       </p:grpSpPr>
       <p:sp>
         <p:nvSpPr>
-          <p:cNvPr id="8561268" name="Slide Image Placeholder 1"/>
+          <p:cNvPr id="1676717293" name="Slide Image Placeholder 1"/>
           <p:cNvSpPr>
             <a:spLocks noChangeAspect="1" noGrp="1" noRot="1"/>
           </p:cNvSpPr>
@@ -1805,7 +1719,7 @@
       </p:sp>
       <p:sp>
         <p:nvSpPr>
-          <p:cNvPr id="2027030018" name="Notes Placeholder 2"/>
+          <p:cNvPr id="686371424" name="Notes Placeholder 2"/>
           <p:cNvSpPr>
             <a:spLocks noGrp="1"/>
           </p:cNvSpPr>
@@ -1827,7 +1741,7 @@
       </p:sp>
       <p:sp>
         <p:nvSpPr>
-          <p:cNvPr id="1178049777" name="Slide Number Placeholder 3"/>
+          <p:cNvPr id="678576962" name="Slide Number Placeholder 3"/>
           <p:cNvSpPr>
             <a:spLocks noGrp="1"/>
           </p:cNvSpPr>
@@ -1878,7 +1792,7 @@
       </p:grpSpPr>
       <p:sp>
         <p:nvSpPr>
-          <p:cNvPr id="1373904706" name="Заголовок 1"/>
+          <p:cNvPr id="1486901129" name="Заголовок 1"/>
           <p:cNvSpPr>
             <a:spLocks noGrp="1"/>
           </p:cNvSpPr>
@@ -1913,7 +1827,7 @@
       </p:sp>
       <p:sp>
         <p:nvSpPr>
-          <p:cNvPr id="1009674366" name="Подзаголовок 2"/>
+          <p:cNvPr id="1475423288" name="Подзаголовок 2"/>
           <p:cNvSpPr>
             <a:spLocks noGrp="1"/>
           </p:cNvSpPr>
@@ -1981,7 +1895,7 @@
       </p:sp>
       <p:sp>
         <p:nvSpPr>
-          <p:cNvPr id="544590494" name="Дата 3"/>
+          <p:cNvPr id="1799980486" name="Дата 3"/>
           <p:cNvSpPr>
             <a:spLocks noGrp="1"/>
           </p:cNvSpPr>
@@ -2007,7 +1921,7 @@
       </p:sp>
       <p:sp>
         <p:nvSpPr>
-          <p:cNvPr id="1521061760" name="Нижний колонтитул 4"/>
+          <p:cNvPr id="351623302" name="Нижний колонтитул 4"/>
           <p:cNvSpPr>
             <a:spLocks noGrp="1"/>
           </p:cNvSpPr>
@@ -2029,7 +1943,7 @@
       </p:sp>
       <p:sp>
         <p:nvSpPr>
-          <p:cNvPr id="780985378" name="Номер слайда 5"/>
+          <p:cNvPr id="899808733" name="Номер слайда 5"/>
           <p:cNvSpPr>
             <a:spLocks noGrp="1"/>
           </p:cNvSpPr>
@@ -2080,7 +1994,7 @@
       </p:grpSpPr>
       <p:sp>
         <p:nvSpPr>
-          <p:cNvPr id="1644056899" name="Заголовок 1"/>
+          <p:cNvPr id="1426906987" name="Заголовок 1"/>
           <p:cNvSpPr>
             <a:spLocks noGrp="1"/>
           </p:cNvSpPr>
@@ -2106,7 +2020,7 @@
       </p:sp>
       <p:sp>
         <p:nvSpPr>
-          <p:cNvPr id="512398309" name="Вертикальный текст 2"/>
+          <p:cNvPr id="756860841" name="Вертикальный текст 2"/>
           <p:cNvSpPr>
             <a:spLocks noGrp="1"/>
           </p:cNvSpPr>
@@ -2172,7 +2086,7 @@
       </p:sp>
       <p:sp>
         <p:nvSpPr>
-          <p:cNvPr id="679144038" name="Дата 3"/>
+          <p:cNvPr id="855484900" name="Дата 3"/>
           <p:cNvSpPr>
             <a:spLocks noGrp="1"/>
           </p:cNvSpPr>
@@ -2198,7 +2112,7 @@
       </p:sp>
       <p:sp>
         <p:nvSpPr>
-          <p:cNvPr id="452512991" name="Нижний колонтитул 4"/>
+          <p:cNvPr id="1132563909" name="Нижний колонтитул 4"/>
           <p:cNvSpPr>
             <a:spLocks noGrp="1"/>
           </p:cNvSpPr>
@@ -2220,7 +2134,7 @@
       </p:sp>
       <p:sp>
         <p:nvSpPr>
-          <p:cNvPr id="1542403309" name="Номер слайда 5"/>
+          <p:cNvPr id="1826199026" name="Номер слайда 5"/>
           <p:cNvSpPr>
             <a:spLocks noGrp="1"/>
           </p:cNvSpPr>
@@ -2271,7 +2185,7 @@
       </p:grpSpPr>
       <p:sp>
         <p:nvSpPr>
-          <p:cNvPr id="1421768297" name="Вертикальный заголовок 1"/>
+          <p:cNvPr id="475925044" name="Вертикальный заголовок 1"/>
           <p:cNvSpPr>
             <a:spLocks noGrp="1"/>
           </p:cNvSpPr>
@@ -2302,7 +2216,7 @@
       </p:sp>
       <p:sp>
         <p:nvSpPr>
-          <p:cNvPr id="701067690" name="Вертикальный текст 2"/>
+          <p:cNvPr id="1428144964" name="Вертикальный текст 2"/>
           <p:cNvSpPr>
             <a:spLocks noGrp="1"/>
           </p:cNvSpPr>
@@ -2373,7 +2287,7 @@
       </p:sp>
       <p:sp>
         <p:nvSpPr>
-          <p:cNvPr id="808753604" name="Дата 3"/>
+          <p:cNvPr id="1739621655" name="Дата 3"/>
           <p:cNvSpPr>
             <a:spLocks noGrp="1"/>
           </p:cNvSpPr>
@@ -2399,7 +2313,7 @@
       </p:sp>
       <p:sp>
         <p:nvSpPr>
-          <p:cNvPr id="1485421111" name="Нижний колонтитул 4"/>
+          <p:cNvPr id="1143992548" name="Нижний колонтитул 4"/>
           <p:cNvSpPr>
             <a:spLocks noGrp="1"/>
           </p:cNvSpPr>
@@ -2421,7 +2335,7 @@
       </p:sp>
       <p:sp>
         <p:nvSpPr>
-          <p:cNvPr id="226836088" name="Номер слайда 5"/>
+          <p:cNvPr id="783984544" name="Номер слайда 5"/>
           <p:cNvSpPr>
             <a:spLocks noGrp="1"/>
           </p:cNvSpPr>
@@ -2472,7 +2386,7 @@
       </p:grpSpPr>
       <p:pic>
         <p:nvPicPr>
-          <p:cNvPr id="1403881619" name="Picture 6" descr="HD-ShadowLong.png"/>
+          <p:cNvPr id="1336185939" name="Picture 6" descr="HD-ShadowLong.png"/>
           <p:cNvPicPr>
             <a:picLocks noChangeAspect="1"/>
           </p:cNvPicPr>
@@ -2494,7 +2408,7 @@
       </p:pic>
       <p:pic>
         <p:nvPicPr>
-          <p:cNvPr id="2096148953" name="Picture 7" descr="HD-ShadowShort.png"/>
+          <p:cNvPr id="1247918679" name="Picture 7" descr="HD-ShadowShort.png"/>
           <p:cNvPicPr>
             <a:picLocks noChangeAspect="1"/>
           </p:cNvPicPr>
@@ -2516,7 +2430,7 @@
       </p:pic>
       <p:sp>
         <p:nvSpPr>
-          <p:cNvPr id="1753135736" name="Rectangle 8"/>
+          <p:cNvPr id="402950752" name="Rectangle 8"/>
           <p:cNvSpPr/>
           <p:nvPr/>
         </p:nvSpPr>
@@ -2557,7 +2471,7 @@
       </p:sp>
       <p:sp>
         <p:nvSpPr>
-          <p:cNvPr id="228288481" name="Rectangle 9"/>
+          <p:cNvPr id="298095893" name="Rectangle 9"/>
           <p:cNvSpPr/>
           <p:nvPr/>
         </p:nvSpPr>
@@ -2595,7 +2509,7 @@
       </p:sp>
       <p:sp>
         <p:nvSpPr>
-          <p:cNvPr id="562622277" name="Title 1"/>
+          <p:cNvPr id="687201703" name="Title 1"/>
           <p:cNvSpPr>
             <a:spLocks noGrp="1"/>
           </p:cNvSpPr>
@@ -2632,7 +2546,7 @@
       </p:sp>
       <p:sp>
         <p:nvSpPr>
-          <p:cNvPr id="1895641195" name="Subtitle 2"/>
+          <p:cNvPr id="850342436" name="Subtitle 2"/>
           <p:cNvSpPr>
             <a:spLocks noGrp="1"/>
           </p:cNvSpPr>
@@ -2702,7 +2616,7 @@
       </p:sp>
       <p:sp>
         <p:nvSpPr>
-          <p:cNvPr id="1355832418" name="Date Placeholder 3"/>
+          <p:cNvPr id="886646324" name="Date Placeholder 3"/>
           <p:cNvSpPr>
             <a:spLocks noGrp="1"/>
           </p:cNvSpPr>
@@ -2728,7 +2642,7 @@
       </p:sp>
       <p:sp>
         <p:nvSpPr>
-          <p:cNvPr id="194765017" name="Footer Placeholder 4"/>
+          <p:cNvPr id="460959330" name="Footer Placeholder 4"/>
           <p:cNvSpPr>
             <a:spLocks noGrp="1"/>
           </p:cNvSpPr>
@@ -2750,7 +2664,7 @@
       </p:sp>
       <p:sp>
         <p:nvSpPr>
-          <p:cNvPr id="1389313679" name="Slide Number Placeholder 5"/>
+          <p:cNvPr id="575612141" name="Slide Number Placeholder 5"/>
           <p:cNvSpPr>
             <a:spLocks noGrp="1"/>
           </p:cNvSpPr>
@@ -2806,7 +2720,7 @@
       </p:grpSpPr>
       <p:pic>
         <p:nvPicPr>
-          <p:cNvPr id="905243473" name="Picture 14" descr="HD-ShadowLong.png"/>
+          <p:cNvPr id="1507753634" name="Picture 14" descr="HD-ShadowLong.png"/>
           <p:cNvPicPr>
             <a:picLocks noChangeAspect="1"/>
           </p:cNvPicPr>
@@ -2828,7 +2742,7 @@
       </p:pic>
       <p:pic>
         <p:nvPicPr>
-          <p:cNvPr id="2117509437" name="Picture 15" descr="HD-ShadowShort.png"/>
+          <p:cNvPr id="1003838153" name="Picture 15" descr="HD-ShadowShort.png"/>
           <p:cNvPicPr>
             <a:picLocks noChangeAspect="1"/>
           </p:cNvPicPr>
@@ -2850,7 +2764,7 @@
       </p:pic>
       <p:sp>
         <p:nvSpPr>
-          <p:cNvPr id="1476421852" name="Rectangle 16"/>
+          <p:cNvPr id="1692410333" name="Rectangle 16"/>
           <p:cNvSpPr/>
           <p:nvPr/>
         </p:nvSpPr>
@@ -2891,7 +2805,7 @@
       </p:sp>
       <p:sp>
         <p:nvSpPr>
-          <p:cNvPr id="1725487788" name="Rectangle 17"/>
+          <p:cNvPr id="1046899879" name="Rectangle 17"/>
           <p:cNvSpPr/>
           <p:nvPr/>
         </p:nvSpPr>
@@ -2929,7 +2843,7 @@
       </p:sp>
       <p:sp>
         <p:nvSpPr>
-          <p:cNvPr id="873059702" name="Title 1"/>
+          <p:cNvPr id="678517155" name="Title 1"/>
           <p:cNvSpPr>
             <a:spLocks noGrp="1"/>
           </p:cNvSpPr>
@@ -2955,7 +2869,7 @@
       </p:sp>
       <p:sp>
         <p:nvSpPr>
-          <p:cNvPr id="476412194" name="Content Placeholder 2"/>
+          <p:cNvPr id="1759863564" name="Content Placeholder 2"/>
           <p:cNvSpPr>
             <a:spLocks noGrp="1"/>
           </p:cNvSpPr>
@@ -3021,7 +2935,7 @@
       </p:sp>
       <p:sp>
         <p:nvSpPr>
-          <p:cNvPr id="1489004601" name="Date Placeholder 3"/>
+          <p:cNvPr id="671928580" name="Date Placeholder 3"/>
           <p:cNvSpPr>
             <a:spLocks noGrp="1"/>
           </p:cNvSpPr>
@@ -3047,7 +2961,7 @@
       </p:sp>
       <p:sp>
         <p:nvSpPr>
-          <p:cNvPr id="1518259385" name="Footer Placeholder 4"/>
+          <p:cNvPr id="1168042294" name="Footer Placeholder 4"/>
           <p:cNvSpPr>
             <a:spLocks noGrp="1"/>
           </p:cNvSpPr>
@@ -3069,7 +2983,7 @@
       </p:sp>
       <p:sp>
         <p:nvSpPr>
-          <p:cNvPr id="1500751933" name="Slide Number Placeholder 5"/>
+          <p:cNvPr id="1884600558" name="Slide Number Placeholder 5"/>
           <p:cNvSpPr>
             <a:spLocks noGrp="1"/>
           </p:cNvSpPr>
@@ -3120,7 +3034,7 @@
       </p:grpSpPr>
       <p:pic>
         <p:nvPicPr>
-          <p:cNvPr id="1790036656" name="Picture 6" descr="HD-ShadowLong.png"/>
+          <p:cNvPr id="737382204" name="Picture 6" descr="HD-ShadowLong.png"/>
           <p:cNvPicPr>
             <a:picLocks noChangeAspect="1"/>
           </p:cNvPicPr>
@@ -3142,7 +3056,7 @@
       </p:pic>
       <p:pic>
         <p:nvPicPr>
-          <p:cNvPr id="414040480" name="Picture 7" descr="HD-ShadowShort.png"/>
+          <p:cNvPr id="1190450147" name="Picture 7" descr="HD-ShadowShort.png"/>
           <p:cNvPicPr>
             <a:picLocks noChangeAspect="1"/>
           </p:cNvPicPr>
@@ -3164,7 +3078,7 @@
       </p:pic>
       <p:sp>
         <p:nvSpPr>
-          <p:cNvPr id="1894440177" name="Rectangle 8"/>
+          <p:cNvPr id="1221017168" name="Rectangle 8"/>
           <p:cNvSpPr/>
           <p:nvPr/>
         </p:nvSpPr>
@@ -3205,7 +3119,7 @@
       </p:sp>
       <p:sp>
         <p:nvSpPr>
-          <p:cNvPr id="650471797" name="Rectangle 9"/>
+          <p:cNvPr id="1803945555" name="Rectangle 9"/>
           <p:cNvSpPr/>
           <p:nvPr/>
         </p:nvSpPr>
@@ -3243,7 +3157,7 @@
       </p:sp>
       <p:sp>
         <p:nvSpPr>
-          <p:cNvPr id="875870215" name="Title 1"/>
+          <p:cNvPr id="2109329292" name="Title 1"/>
           <p:cNvSpPr>
             <a:spLocks noGrp="1"/>
           </p:cNvSpPr>
@@ -3280,7 +3194,7 @@
       </p:sp>
       <p:sp>
         <p:nvSpPr>
-          <p:cNvPr id="906931653" name="Text Placeholder 2"/>
+          <p:cNvPr id="690514041" name="Text Placeholder 2"/>
           <p:cNvSpPr>
             <a:spLocks noGrp="1"/>
           </p:cNvSpPr>
@@ -3404,7 +3318,7 @@
       </p:sp>
       <p:sp>
         <p:nvSpPr>
-          <p:cNvPr id="1019307359" name="Date Placeholder 3"/>
+          <p:cNvPr id="811224734" name="Date Placeholder 3"/>
           <p:cNvSpPr>
             <a:spLocks noGrp="1"/>
           </p:cNvSpPr>
@@ -3430,7 +3344,7 @@
       </p:sp>
       <p:sp>
         <p:nvSpPr>
-          <p:cNvPr id="2103269541" name="Footer Placeholder 4"/>
+          <p:cNvPr id="1592921855" name="Footer Placeholder 4"/>
           <p:cNvSpPr>
             <a:spLocks noGrp="1"/>
           </p:cNvSpPr>
@@ -3452,7 +3366,7 @@
       </p:sp>
       <p:sp>
         <p:nvSpPr>
-          <p:cNvPr id="1499869823" name="Slide Number Placeholder 5"/>
+          <p:cNvPr id="1093365710" name="Slide Number Placeholder 5"/>
           <p:cNvSpPr>
             <a:spLocks noGrp="1"/>
           </p:cNvSpPr>
@@ -3508,7 +3422,7 @@
       </p:grpSpPr>
       <p:pic>
         <p:nvPicPr>
-          <p:cNvPr id="1136653382" name="Picture 7" descr="HD-ShadowLong.png"/>
+          <p:cNvPr id="1791580090" name="Picture 7" descr="HD-ShadowLong.png"/>
           <p:cNvPicPr>
             <a:picLocks noChangeAspect="1"/>
           </p:cNvPicPr>
@@ -3530,7 +3444,7 @@
       </p:pic>
       <p:pic>
         <p:nvPicPr>
-          <p:cNvPr id="336124619" name="Picture 8" descr="HD-ShadowShort.png"/>
+          <p:cNvPr id="600494288" name="Picture 8" descr="HD-ShadowShort.png"/>
           <p:cNvPicPr>
             <a:picLocks noChangeAspect="1"/>
           </p:cNvPicPr>
@@ -3552,7 +3466,7 @@
       </p:pic>
       <p:sp>
         <p:nvSpPr>
-          <p:cNvPr id="985293963" name="Rectangle 9"/>
+          <p:cNvPr id="937707837" name="Rectangle 9"/>
           <p:cNvSpPr/>
           <p:nvPr/>
         </p:nvSpPr>
@@ -3593,7 +3507,7 @@
       </p:sp>
       <p:sp>
         <p:nvSpPr>
-          <p:cNvPr id="1434793917" name="Rectangle 10"/>
+          <p:cNvPr id="488389718" name="Rectangle 10"/>
           <p:cNvSpPr/>
           <p:nvPr/>
         </p:nvSpPr>
@@ -3631,7 +3545,7 @@
       </p:sp>
       <p:sp>
         <p:nvSpPr>
-          <p:cNvPr id="1902558729" name="Title 1"/>
+          <p:cNvPr id="1124433554" name="Title 1"/>
           <p:cNvSpPr>
             <a:spLocks noGrp="1"/>
           </p:cNvSpPr>
@@ -3657,7 +3571,7 @@
       </p:sp>
       <p:sp>
         <p:nvSpPr>
-          <p:cNvPr id="1115954143" name="Content Placeholder 2"/>
+          <p:cNvPr id="1850966666" name="Content Placeholder 2"/>
           <p:cNvSpPr>
             <a:spLocks noGrp="1"/>
           </p:cNvSpPr>
@@ -3728,7 +3642,7 @@
       </p:sp>
       <p:sp>
         <p:nvSpPr>
-          <p:cNvPr id="762798461" name="Content Placeholder 3"/>
+          <p:cNvPr id="1387986846" name="Content Placeholder 3"/>
           <p:cNvSpPr>
             <a:spLocks noGrp="1"/>
           </p:cNvSpPr>
@@ -3799,7 +3713,7 @@
       </p:sp>
       <p:sp>
         <p:nvSpPr>
-          <p:cNvPr id="1483676051" name="Date Placeholder 4"/>
+          <p:cNvPr id="1327722056" name="Date Placeholder 4"/>
           <p:cNvSpPr>
             <a:spLocks noGrp="1"/>
           </p:cNvSpPr>
@@ -3825,7 +3739,7 @@
       </p:sp>
       <p:sp>
         <p:nvSpPr>
-          <p:cNvPr id="2057019045" name="Footer Placeholder 5"/>
+          <p:cNvPr id="180153579" name="Footer Placeholder 5"/>
           <p:cNvSpPr>
             <a:spLocks noGrp="1"/>
           </p:cNvSpPr>
@@ -3847,7 +3761,7 @@
       </p:sp>
       <p:sp>
         <p:nvSpPr>
-          <p:cNvPr id="1121496567" name="Slide Number Placeholder 6"/>
+          <p:cNvPr id="1625500776" name="Slide Number Placeholder 6"/>
           <p:cNvSpPr>
             <a:spLocks noGrp="1"/>
           </p:cNvSpPr>
@@ -3898,7 +3812,7 @@
       </p:grpSpPr>
       <p:pic>
         <p:nvPicPr>
-          <p:cNvPr id="453982463" name="Picture 9" descr="HD-ShadowLong.png"/>
+          <p:cNvPr id="1709004653" name="Picture 9" descr="HD-ShadowLong.png"/>
           <p:cNvPicPr>
             <a:picLocks noChangeAspect="1"/>
           </p:cNvPicPr>
@@ -3920,7 +3834,7 @@
       </p:pic>
       <p:pic>
         <p:nvPicPr>
-          <p:cNvPr id="2132784423" name="Picture 10" descr="HD-ShadowShort.png"/>
+          <p:cNvPr id="1590442368" name="Picture 10" descr="HD-ShadowShort.png"/>
           <p:cNvPicPr>
             <a:picLocks noChangeAspect="1"/>
           </p:cNvPicPr>
@@ -3942,7 +3856,7 @@
       </p:pic>
       <p:sp>
         <p:nvSpPr>
-          <p:cNvPr id="1364870304" name="Rectangle 11"/>
+          <p:cNvPr id="644265866" name="Rectangle 11"/>
           <p:cNvSpPr/>
           <p:nvPr/>
         </p:nvSpPr>
@@ -3983,7 +3897,7 @@
       </p:sp>
       <p:sp>
         <p:nvSpPr>
-          <p:cNvPr id="542537531" name="Rectangle 12"/>
+          <p:cNvPr id="351190140" name="Rectangle 12"/>
           <p:cNvSpPr/>
           <p:nvPr/>
         </p:nvSpPr>
@@ -4021,7 +3935,7 @@
       </p:sp>
       <p:sp>
         <p:nvSpPr>
-          <p:cNvPr id="1293629978" name="Title 1"/>
+          <p:cNvPr id="1270404257" name="Title 1"/>
           <p:cNvSpPr>
             <a:spLocks noGrp="1"/>
           </p:cNvSpPr>
@@ -4052,7 +3966,7 @@
       </p:sp>
       <p:sp>
         <p:nvSpPr>
-          <p:cNvPr id="2105650711" name="Text Placeholder 2"/>
+          <p:cNvPr id="797909979" name="Text Placeholder 2"/>
           <p:cNvSpPr>
             <a:spLocks noGrp="1"/>
           </p:cNvSpPr>
@@ -4120,7 +4034,7 @@
       </p:sp>
       <p:sp>
         <p:nvSpPr>
-          <p:cNvPr id="1521909877" name="Content Placeholder 3"/>
+          <p:cNvPr id="1340951018" name="Content Placeholder 3"/>
           <p:cNvSpPr>
             <a:spLocks noGrp="1"/>
           </p:cNvSpPr>
@@ -4191,7 +4105,7 @@
       </p:sp>
       <p:sp>
         <p:nvSpPr>
-          <p:cNvPr id="572521475" name="Text Placeholder 4"/>
+          <p:cNvPr id="1091377704" name="Text Placeholder 4"/>
           <p:cNvSpPr>
             <a:spLocks noGrp="1"/>
           </p:cNvSpPr>
@@ -4259,7 +4173,7 @@
       </p:sp>
       <p:sp>
         <p:nvSpPr>
-          <p:cNvPr id="1040146684" name="Content Placeholder 5"/>
+          <p:cNvPr id="1441329299" name="Content Placeholder 5"/>
           <p:cNvSpPr>
             <a:spLocks noGrp="1"/>
           </p:cNvSpPr>
@@ -4330,7 +4244,7 @@
       </p:sp>
       <p:sp>
         <p:nvSpPr>
-          <p:cNvPr id="1725398431" name="Date Placeholder 6"/>
+          <p:cNvPr id="449068706" name="Date Placeholder 6"/>
           <p:cNvSpPr>
             <a:spLocks noGrp="1"/>
           </p:cNvSpPr>
@@ -4356,7 +4270,7 @@
       </p:sp>
       <p:sp>
         <p:nvSpPr>
-          <p:cNvPr id="1174561090" name="Footer Placeholder 7"/>
+          <p:cNvPr id="1474482549" name="Footer Placeholder 7"/>
           <p:cNvSpPr>
             <a:spLocks noGrp="1"/>
           </p:cNvSpPr>
@@ -4378,7 +4292,7 @@
       </p:sp>
       <p:sp>
         <p:nvSpPr>
-          <p:cNvPr id="1869461782" name="Slide Number Placeholder 8"/>
+          <p:cNvPr id="1164821374" name="Slide Number Placeholder 8"/>
           <p:cNvSpPr>
             <a:spLocks noGrp="1"/>
           </p:cNvSpPr>
@@ -4429,7 +4343,7 @@
       </p:grpSpPr>
       <p:pic>
         <p:nvPicPr>
-          <p:cNvPr id="531131006" name="Picture 5" descr="HD-ShadowLong.png"/>
+          <p:cNvPr id="1175117219" name="Picture 5" descr="HD-ShadowLong.png"/>
           <p:cNvPicPr>
             <a:picLocks noChangeAspect="1"/>
           </p:cNvPicPr>
@@ -4451,7 +4365,7 @@
       </p:pic>
       <p:pic>
         <p:nvPicPr>
-          <p:cNvPr id="77008073" name="Picture 6" descr="HD-ShadowShort.png"/>
+          <p:cNvPr id="169902175" name="Picture 6" descr="HD-ShadowShort.png"/>
           <p:cNvPicPr>
             <a:picLocks noChangeAspect="1"/>
           </p:cNvPicPr>
@@ -4473,7 +4387,7 @@
       </p:pic>
       <p:sp>
         <p:nvSpPr>
-          <p:cNvPr id="1763575175" name="Rectangle 7"/>
+          <p:cNvPr id="1540113404" name="Rectangle 7"/>
           <p:cNvSpPr/>
           <p:nvPr/>
         </p:nvSpPr>
@@ -4514,7 +4428,7 @@
       </p:sp>
       <p:sp>
         <p:nvSpPr>
-          <p:cNvPr id="1187585037" name="Rectangle 8"/>
+          <p:cNvPr id="1351167115" name="Rectangle 8"/>
           <p:cNvSpPr/>
           <p:nvPr/>
         </p:nvSpPr>
@@ -4552,7 +4466,7 @@
       </p:sp>
       <p:sp>
         <p:nvSpPr>
-          <p:cNvPr id="1160365433" name="Title 1"/>
+          <p:cNvPr id="263383376" name="Title 1"/>
           <p:cNvSpPr>
             <a:spLocks noGrp="1"/>
           </p:cNvSpPr>
@@ -4578,7 +4492,7 @@
       </p:sp>
       <p:sp>
         <p:nvSpPr>
-          <p:cNvPr id="1884895854" name="Date Placeholder 2"/>
+          <p:cNvPr id="612249375" name="Date Placeholder 2"/>
           <p:cNvSpPr>
             <a:spLocks noGrp="1"/>
           </p:cNvSpPr>
@@ -4604,7 +4518,7 @@
       </p:sp>
       <p:sp>
         <p:nvSpPr>
-          <p:cNvPr id="2015138121" name="Footer Placeholder 3"/>
+          <p:cNvPr id="1499781259" name="Footer Placeholder 3"/>
           <p:cNvSpPr>
             <a:spLocks noGrp="1"/>
           </p:cNvSpPr>
@@ -4626,7 +4540,7 @@
       </p:sp>
       <p:sp>
         <p:nvSpPr>
-          <p:cNvPr id="656073657" name="Slide Number Placeholder 4"/>
+          <p:cNvPr id="1539099915" name="Slide Number Placeholder 4"/>
           <p:cNvSpPr>
             <a:spLocks noGrp="1"/>
           </p:cNvSpPr>
@@ -4677,7 +4591,7 @@
       </p:grpSpPr>
       <p:pic>
         <p:nvPicPr>
-          <p:cNvPr id="332825376" name="Picture 4" descr="HD-ShadowShort.png"/>
+          <p:cNvPr id="1446914306" name="Picture 4" descr="HD-ShadowShort.png"/>
           <p:cNvPicPr>
             <a:picLocks noChangeAspect="1"/>
           </p:cNvPicPr>
@@ -4699,7 +4613,7 @@
       </p:pic>
       <p:sp>
         <p:nvSpPr>
-          <p:cNvPr id="134569681" name="Rectangle 5"/>
+          <p:cNvPr id="672852698" name="Rectangle 5"/>
           <p:cNvSpPr/>
           <p:nvPr/>
         </p:nvSpPr>
@@ -4737,7 +4651,7 @@
       </p:sp>
       <p:sp>
         <p:nvSpPr>
-          <p:cNvPr id="1368182467" name="Date Placeholder 1"/>
+          <p:cNvPr id="141782526" name="Date Placeholder 1"/>
           <p:cNvSpPr>
             <a:spLocks noGrp="1"/>
           </p:cNvSpPr>
@@ -4763,7 +4677,7 @@
       </p:sp>
       <p:sp>
         <p:nvSpPr>
-          <p:cNvPr id="683034419" name="Footer Placeholder 2"/>
+          <p:cNvPr id="1260905299" name="Footer Placeholder 2"/>
           <p:cNvSpPr>
             <a:spLocks noGrp="1"/>
           </p:cNvSpPr>
@@ -4785,7 +4699,7 @@
       </p:sp>
       <p:sp>
         <p:nvSpPr>
-          <p:cNvPr id="1310934835" name="Slide Number Placeholder 3"/>
+          <p:cNvPr id="142719168" name="Slide Number Placeholder 3"/>
           <p:cNvSpPr>
             <a:spLocks noGrp="1"/>
           </p:cNvSpPr>
@@ -4836,7 +4750,7 @@
       </p:grpSpPr>
       <p:pic>
         <p:nvPicPr>
-          <p:cNvPr id="1081114685" name="Picture 7" descr="HD-ShadowLong.png"/>
+          <p:cNvPr id="228099507" name="Picture 7" descr="HD-ShadowLong.png"/>
           <p:cNvPicPr>
             <a:picLocks noChangeAspect="1"/>
           </p:cNvPicPr>
@@ -4858,7 +4772,7 @@
       </p:pic>
       <p:pic>
         <p:nvPicPr>
-          <p:cNvPr id="305940265" name="Picture 8" descr="HD-ShadowShort.png"/>
+          <p:cNvPr id="720221782" name="Picture 8" descr="HD-ShadowShort.png"/>
           <p:cNvPicPr>
             <a:picLocks noChangeAspect="1"/>
           </p:cNvPicPr>
@@ -4880,7 +4794,7 @@
       </p:pic>
       <p:sp>
         <p:nvSpPr>
-          <p:cNvPr id="1562860586" name="Rectangle 9"/>
+          <p:cNvPr id="682599920" name="Rectangle 9"/>
           <p:cNvSpPr/>
           <p:nvPr/>
         </p:nvSpPr>
@@ -4921,7 +4835,7 @@
       </p:sp>
       <p:sp>
         <p:nvSpPr>
-          <p:cNvPr id="1856307066" name="Rectangle 10"/>
+          <p:cNvPr id="942019449" name="Rectangle 10"/>
           <p:cNvSpPr/>
           <p:nvPr/>
         </p:nvSpPr>
@@ -4959,7 +4873,7 @@
       </p:sp>
       <p:sp>
         <p:nvSpPr>
-          <p:cNvPr id="1576910892" name="Title 1"/>
+          <p:cNvPr id="1377992475" name="Title 1"/>
           <p:cNvSpPr>
             <a:spLocks noGrp="1"/>
           </p:cNvSpPr>
@@ -4996,7 +4910,7 @@
       </p:sp>
       <p:sp>
         <p:nvSpPr>
-          <p:cNvPr id="187148380" name="Content Placeholder 2"/>
+          <p:cNvPr id="1796634667" name="Content Placeholder 2"/>
           <p:cNvSpPr>
             <a:spLocks noGrp="1"/>
           </p:cNvSpPr>
@@ -5067,7 +4981,7 @@
       </p:sp>
       <p:sp>
         <p:nvSpPr>
-          <p:cNvPr id="1275811826" name="Text Placeholder 3"/>
+          <p:cNvPr id="1873829899" name="Text Placeholder 3"/>
           <p:cNvSpPr>
             <a:spLocks noGrp="1"/>
           </p:cNvSpPr>
@@ -5135,7 +5049,7 @@
       </p:sp>
       <p:sp>
         <p:nvSpPr>
-          <p:cNvPr id="1026154535" name="Date Placeholder 4"/>
+          <p:cNvPr id="687641522" name="Date Placeholder 4"/>
           <p:cNvSpPr>
             <a:spLocks noGrp="1"/>
           </p:cNvSpPr>
@@ -5161,7 +5075,7 @@
       </p:sp>
       <p:sp>
         <p:nvSpPr>
-          <p:cNvPr id="457480428" name="Footer Placeholder 5"/>
+          <p:cNvPr id="1850807144" name="Footer Placeholder 5"/>
           <p:cNvSpPr>
             <a:spLocks noGrp="1"/>
           </p:cNvSpPr>
@@ -5183,7 +5097,7 @@
       </p:sp>
       <p:sp>
         <p:nvSpPr>
-          <p:cNvPr id="1631393079" name="Slide Number Placeholder 6"/>
+          <p:cNvPr id="1510415186" name="Slide Number Placeholder 6"/>
           <p:cNvSpPr>
             <a:spLocks noGrp="1"/>
           </p:cNvSpPr>
@@ -5234,7 +5148,7 @@
       </p:grpSpPr>
       <p:sp>
         <p:nvSpPr>
-          <p:cNvPr id="1343928337" name="Заголовок 1"/>
+          <p:cNvPr id="1340095094" name="Заголовок 1"/>
           <p:cNvSpPr>
             <a:spLocks noGrp="1"/>
           </p:cNvSpPr>
@@ -5260,7 +5174,7 @@
       </p:sp>
       <p:sp>
         <p:nvSpPr>
-          <p:cNvPr id="1638231810" name="Объект 2"/>
+          <p:cNvPr id="386458543" name="Объект 2"/>
           <p:cNvSpPr>
             <a:spLocks noGrp="1"/>
           </p:cNvSpPr>
@@ -5326,7 +5240,7 @@
       </p:sp>
       <p:sp>
         <p:nvSpPr>
-          <p:cNvPr id="877500364" name="Дата 3"/>
+          <p:cNvPr id="1144812020" name="Дата 3"/>
           <p:cNvSpPr>
             <a:spLocks noGrp="1"/>
           </p:cNvSpPr>
@@ -5352,7 +5266,7 @@
       </p:sp>
       <p:sp>
         <p:nvSpPr>
-          <p:cNvPr id="980377293" name="Нижний колонтитул 4"/>
+          <p:cNvPr id="1034901801" name="Нижний колонтитул 4"/>
           <p:cNvSpPr>
             <a:spLocks noGrp="1"/>
           </p:cNvSpPr>
@@ -5374,7 +5288,7 @@
       </p:sp>
       <p:sp>
         <p:nvSpPr>
-          <p:cNvPr id="2121216910" name="Номер слайда 5"/>
+          <p:cNvPr id="1079621729" name="Номер слайда 5"/>
           <p:cNvSpPr>
             <a:spLocks noGrp="1"/>
           </p:cNvSpPr>
@@ -5425,7 +5339,7 @@
       </p:grpSpPr>
       <p:pic>
         <p:nvPicPr>
-          <p:cNvPr id="1420974376" name="Picture 7" descr="HD-ShadowLong.png"/>
+          <p:cNvPr id="1402048872" name="Picture 7" descr="HD-ShadowLong.png"/>
           <p:cNvPicPr>
             <a:picLocks noChangeAspect="1"/>
           </p:cNvPicPr>
@@ -5447,7 +5361,7 @@
       </p:pic>
       <p:pic>
         <p:nvPicPr>
-          <p:cNvPr id="865015418" name="Picture 8" descr="HD-ShadowShort.png"/>
+          <p:cNvPr id="2027145045" name="Picture 8" descr="HD-ShadowShort.png"/>
           <p:cNvPicPr>
             <a:picLocks noChangeAspect="1"/>
           </p:cNvPicPr>
@@ -5469,7 +5383,7 @@
       </p:pic>
       <p:sp>
         <p:nvSpPr>
-          <p:cNvPr id="644822259" name="Rectangle 9"/>
+          <p:cNvPr id="2028579240" name="Rectangle 9"/>
           <p:cNvSpPr/>
           <p:nvPr/>
         </p:nvSpPr>
@@ -5510,7 +5424,7 @@
       </p:sp>
       <p:sp>
         <p:nvSpPr>
-          <p:cNvPr id="1021772991" name="Rectangle 10"/>
+          <p:cNvPr id="1949198225" name="Rectangle 10"/>
           <p:cNvSpPr/>
           <p:nvPr/>
         </p:nvSpPr>
@@ -5548,7 +5462,7 @@
       </p:sp>
       <p:sp>
         <p:nvSpPr>
-          <p:cNvPr id="921355218" name="Title 1"/>
+          <p:cNvPr id="326401395" name="Title 1"/>
           <p:cNvSpPr>
             <a:spLocks noGrp="1"/>
           </p:cNvSpPr>
@@ -5585,7 +5499,7 @@
       </p:sp>
       <p:sp>
         <p:nvSpPr>
-          <p:cNvPr id="1697866201" name="Picture Placeholder 2"/>
+          <p:cNvPr id="491304985" name="Picture Placeholder 2"/>
           <p:cNvSpPr>
             <a:spLocks noChangeAspect="1" noGrp="1"/>
           </p:cNvSpPr>
@@ -5667,7 +5581,7 @@
       </p:sp>
       <p:sp>
         <p:nvSpPr>
-          <p:cNvPr id="927457874" name="Text Placeholder 3"/>
+          <p:cNvPr id="456004256" name="Text Placeholder 3"/>
           <p:cNvSpPr>
             <a:spLocks noGrp="1"/>
           </p:cNvSpPr>
@@ -5735,7 +5649,7 @@
       </p:sp>
       <p:sp>
         <p:nvSpPr>
-          <p:cNvPr id="1916681737" name="Date Placeholder 4"/>
+          <p:cNvPr id="1611988589" name="Date Placeholder 4"/>
           <p:cNvSpPr>
             <a:spLocks noGrp="1"/>
           </p:cNvSpPr>
@@ -5761,7 +5675,7 @@
       </p:sp>
       <p:sp>
         <p:nvSpPr>
-          <p:cNvPr id="1238205576" name="Footer Placeholder 5"/>
+          <p:cNvPr id="1385770614" name="Footer Placeholder 5"/>
           <p:cNvSpPr>
             <a:spLocks noGrp="1"/>
           </p:cNvSpPr>
@@ -5783,7 +5697,7 @@
       </p:sp>
       <p:sp>
         <p:nvSpPr>
-          <p:cNvPr id="1309119975" name="Slide Number Placeholder 6"/>
+          <p:cNvPr id="391744454" name="Slide Number Placeholder 6"/>
           <p:cNvSpPr>
             <a:spLocks noGrp="1"/>
           </p:cNvSpPr>
@@ -5834,7 +5748,7 @@
       </p:grpSpPr>
       <p:pic>
         <p:nvPicPr>
-          <p:cNvPr id="693462766" name="Picture 7" descr="HD-ShadowLong.png"/>
+          <p:cNvPr id="397028298" name="Picture 7" descr="HD-ShadowLong.png"/>
           <p:cNvPicPr>
             <a:picLocks noChangeAspect="1"/>
           </p:cNvPicPr>
@@ -5856,7 +5770,7 @@
       </p:pic>
       <p:pic>
         <p:nvPicPr>
-          <p:cNvPr id="1209567020" name="Picture 8" descr="HD-ShadowShort.png"/>
+          <p:cNvPr id="1023754564" name="Picture 8" descr="HD-ShadowShort.png"/>
           <p:cNvPicPr>
             <a:picLocks noChangeAspect="1"/>
           </p:cNvPicPr>
@@ -5878,7 +5792,7 @@
       </p:pic>
       <p:sp>
         <p:nvSpPr>
-          <p:cNvPr id="1664785485" name="Rectangle 9"/>
+          <p:cNvPr id="510818368" name="Rectangle 9"/>
           <p:cNvSpPr/>
           <p:nvPr/>
         </p:nvSpPr>
@@ -5919,7 +5833,7 @@
       </p:sp>
       <p:sp>
         <p:nvSpPr>
-          <p:cNvPr id="2097152369" name="Rectangle 10"/>
+          <p:cNvPr id="2084539152" name="Rectangle 10"/>
           <p:cNvSpPr/>
           <p:nvPr/>
         </p:nvSpPr>
@@ -5957,7 +5871,7 @@
       </p:sp>
       <p:sp>
         <p:nvSpPr>
-          <p:cNvPr id="1866735379" name="Title 1"/>
+          <p:cNvPr id="2072169962" name="Title 1"/>
           <p:cNvSpPr>
             <a:spLocks noGrp="1"/>
           </p:cNvSpPr>
@@ -5994,7 +5908,7 @@
       </p:sp>
       <p:sp>
         <p:nvSpPr>
-          <p:cNvPr id="417445502" name="Picture Placeholder 2"/>
+          <p:cNvPr id="1863216149" name="Picture Placeholder 2"/>
           <p:cNvSpPr>
             <a:spLocks noChangeAspect="1" noGrp="1"/>
           </p:cNvSpPr>
@@ -6076,7 +5990,7 @@
       </p:sp>
       <p:sp>
         <p:nvSpPr>
-          <p:cNvPr id="1301837205" name="Text Placeholder 3"/>
+          <p:cNvPr id="763873188" name="Text Placeholder 3"/>
           <p:cNvSpPr>
             <a:spLocks noGrp="1"/>
           </p:cNvSpPr>
@@ -6144,7 +6058,7 @@
       </p:sp>
       <p:sp>
         <p:nvSpPr>
-          <p:cNvPr id="1429598428" name="Date Placeholder 4"/>
+          <p:cNvPr id="128215475" name="Date Placeholder 4"/>
           <p:cNvSpPr>
             <a:spLocks noGrp="1"/>
           </p:cNvSpPr>
@@ -6170,7 +6084,7 @@
       </p:sp>
       <p:sp>
         <p:nvSpPr>
-          <p:cNvPr id="356251624" name="Footer Placeholder 5"/>
+          <p:cNvPr id="1412786735" name="Footer Placeholder 5"/>
           <p:cNvSpPr>
             <a:spLocks noGrp="1"/>
           </p:cNvSpPr>
@@ -6192,7 +6106,7 @@
       </p:sp>
       <p:sp>
         <p:nvSpPr>
-          <p:cNvPr id="295778713" name="Slide Number Placeholder 6"/>
+          <p:cNvPr id="18652261" name="Slide Number Placeholder 6"/>
           <p:cNvSpPr>
             <a:spLocks noGrp="1"/>
           </p:cNvSpPr>
@@ -6248,7 +6162,7 @@
       </p:grpSpPr>
       <p:pic>
         <p:nvPicPr>
-          <p:cNvPr id="1288989531" name="Picture 7" descr="HD-ShadowLong.png"/>
+          <p:cNvPr id="620935841" name="Picture 7" descr="HD-ShadowLong.png"/>
           <p:cNvPicPr>
             <a:picLocks noChangeAspect="1"/>
           </p:cNvPicPr>
@@ -6270,7 +6184,7 @@
       </p:pic>
       <p:pic>
         <p:nvPicPr>
-          <p:cNvPr id="483064988" name="Picture 8" descr="HD-ShadowShort.png"/>
+          <p:cNvPr id="1463594036" name="Picture 8" descr="HD-ShadowShort.png"/>
           <p:cNvPicPr>
             <a:picLocks noChangeAspect="1"/>
           </p:cNvPicPr>
@@ -6292,7 +6206,7 @@
       </p:pic>
       <p:sp>
         <p:nvSpPr>
-          <p:cNvPr id="783222804" name="Rectangle 9"/>
+          <p:cNvPr id="1072315444" name="Rectangle 9"/>
           <p:cNvSpPr/>
           <p:nvPr/>
         </p:nvSpPr>
@@ -6333,7 +6247,7 @@
       </p:sp>
       <p:sp>
         <p:nvSpPr>
-          <p:cNvPr id="1380693280" name="Rectangle 10"/>
+          <p:cNvPr id="1850679545" name="Rectangle 10"/>
           <p:cNvSpPr/>
           <p:nvPr/>
         </p:nvSpPr>
@@ -6371,7 +6285,7 @@
       </p:sp>
       <p:sp>
         <p:nvSpPr>
-          <p:cNvPr id="623822411" name="Title 1"/>
+          <p:cNvPr id="1738424554" name="Title 1"/>
           <p:cNvSpPr>
             <a:spLocks noGrp="1"/>
           </p:cNvSpPr>
@@ -6406,7 +6320,7 @@
       </p:sp>
       <p:sp>
         <p:nvSpPr>
-          <p:cNvPr id="1683745583" name="Text Placeholder 3"/>
+          <p:cNvPr id="1808316330" name="Text Placeholder 3"/>
           <p:cNvSpPr>
             <a:spLocks noGrp="1"/>
           </p:cNvSpPr>
@@ -6474,7 +6388,7 @@
       </p:sp>
       <p:sp>
         <p:nvSpPr>
-          <p:cNvPr id="1212626459" name="Date Placeholder 4"/>
+          <p:cNvPr id="507268053" name="Date Placeholder 4"/>
           <p:cNvSpPr>
             <a:spLocks noGrp="1"/>
           </p:cNvSpPr>
@@ -6500,7 +6414,7 @@
       </p:sp>
       <p:sp>
         <p:nvSpPr>
-          <p:cNvPr id="2005237670" name="Footer Placeholder 5"/>
+          <p:cNvPr id="1369456348" name="Footer Placeholder 5"/>
           <p:cNvSpPr>
             <a:spLocks noGrp="1"/>
           </p:cNvSpPr>
@@ -6522,7 +6436,7 @@
       </p:sp>
       <p:sp>
         <p:nvSpPr>
-          <p:cNvPr id="1939142324" name="Slide Number Placeholder 6"/>
+          <p:cNvPr id="1976686985" name="Slide Number Placeholder 6"/>
           <p:cNvSpPr>
             <a:spLocks noGrp="1"/>
           </p:cNvSpPr>
@@ -6578,7 +6492,7 @@
       </p:grpSpPr>
       <p:pic>
         <p:nvPicPr>
-          <p:cNvPr id="360351157" name="Picture 10" descr="HD-ShadowLong.png"/>
+          <p:cNvPr id="996754741" name="Picture 10" descr="HD-ShadowLong.png"/>
           <p:cNvPicPr>
             <a:picLocks noChangeAspect="1"/>
           </p:cNvPicPr>
@@ -6600,7 +6514,7 @@
       </p:pic>
       <p:pic>
         <p:nvPicPr>
-          <p:cNvPr id="116622883" name="Picture 12" descr="HD-ShadowShort.png"/>
+          <p:cNvPr id="1341503441" name="Picture 12" descr="HD-ShadowShort.png"/>
           <p:cNvPicPr>
             <a:picLocks noChangeAspect="1"/>
           </p:cNvPicPr>
@@ -6622,7 +6536,7 @@
       </p:pic>
       <p:sp>
         <p:nvSpPr>
-          <p:cNvPr id="926575259" name="Rectangle 13"/>
+          <p:cNvPr id="304718076" name="Rectangle 13"/>
           <p:cNvSpPr/>
           <p:nvPr/>
         </p:nvSpPr>
@@ -6663,7 +6577,7 @@
       </p:sp>
       <p:sp>
         <p:nvSpPr>
-          <p:cNvPr id="1311358285" name="Rectangle 14"/>
+          <p:cNvPr id="816928808" name="Rectangle 14"/>
           <p:cNvSpPr/>
           <p:nvPr/>
         </p:nvSpPr>
@@ -6701,7 +6615,7 @@
       </p:sp>
       <p:sp>
         <p:nvSpPr>
-          <p:cNvPr id="1303654178" name="Title 1"/>
+          <p:cNvPr id="1275541030" name="Title 1"/>
           <p:cNvSpPr>
             <a:spLocks noGrp="1"/>
           </p:cNvSpPr>
@@ -6736,7 +6650,7 @@
       </p:sp>
       <p:sp>
         <p:nvSpPr>
-          <p:cNvPr id="1949657302" name="Text Placeholder 3"/>
+          <p:cNvPr id="2135855805" name="Text Placeholder 3"/>
           <p:cNvSpPr>
             <a:spLocks noGrp="1"/>
           </p:cNvSpPr>
@@ -6806,7 +6720,7 @@
       </p:sp>
       <p:sp>
         <p:nvSpPr>
-          <p:cNvPr id="1147887821" name="Text Placeholder 3"/>
+          <p:cNvPr id="806421712" name="Text Placeholder 3"/>
           <p:cNvSpPr>
             <a:spLocks noGrp="1"/>
           </p:cNvSpPr>
@@ -6876,7 +6790,7 @@
       </p:sp>
       <p:sp>
         <p:nvSpPr>
-          <p:cNvPr id="1442017006" name="Date Placeholder 4"/>
+          <p:cNvPr id="2032261581" name="Date Placeholder 4"/>
           <p:cNvSpPr>
             <a:spLocks noGrp="1"/>
           </p:cNvSpPr>
@@ -6902,7 +6816,7 @@
       </p:sp>
       <p:sp>
         <p:nvSpPr>
-          <p:cNvPr id="1317648287" name="Footer Placeholder 5"/>
+          <p:cNvPr id="2087025637" name="Footer Placeholder 5"/>
           <p:cNvSpPr>
             <a:spLocks noGrp="1"/>
           </p:cNvSpPr>
@@ -6924,7 +6838,7 @@
       </p:sp>
       <p:sp>
         <p:nvSpPr>
-          <p:cNvPr id="2002095456" name="Slide Number Placeholder 6"/>
+          <p:cNvPr id="235820119" name="Slide Number Placeholder 6"/>
           <p:cNvSpPr>
             <a:spLocks noGrp="1"/>
           </p:cNvSpPr>
@@ -6955,7 +6869,7 @@
       </p:sp>
       <p:sp>
         <p:nvSpPr>
-          <p:cNvPr id="1842168149" name="TextBox 15"/>
+          <p:cNvPr id="1666182973" name="TextBox 15"/>
           <p:cNvSpPr txBox="1"/>
           <p:nvPr/>
         </p:nvSpPr>
@@ -7059,7 +6973,7 @@
       </p:sp>
       <p:sp>
         <p:nvSpPr>
-          <p:cNvPr id="1818684327" name="TextBox 16"/>
+          <p:cNvPr id="383860639" name="TextBox 16"/>
           <p:cNvSpPr txBox="1"/>
           <p:nvPr/>
         </p:nvSpPr>
@@ -7188,7 +7102,7 @@
       </p:grpSpPr>
       <p:pic>
         <p:nvPicPr>
-          <p:cNvPr id="281661447" name="Picture 8" descr="HD-ShadowLong.png"/>
+          <p:cNvPr id="1974125989" name="Picture 8" descr="HD-ShadowLong.png"/>
           <p:cNvPicPr>
             <a:picLocks noChangeAspect="1"/>
           </p:cNvPicPr>
@@ -7210,7 +7124,7 @@
       </p:pic>
       <p:pic>
         <p:nvPicPr>
-          <p:cNvPr id="2107729278" name="Picture 9" descr="HD-ShadowShort.png"/>
+          <p:cNvPr id="1161818354" name="Picture 9" descr="HD-ShadowShort.png"/>
           <p:cNvPicPr>
             <a:picLocks noChangeAspect="1"/>
           </p:cNvPicPr>
@@ -7232,7 +7146,7 @@
       </p:pic>
       <p:sp>
         <p:nvSpPr>
-          <p:cNvPr id="1375911811" name="Rectangle 10"/>
+          <p:cNvPr id="862985469" name="Rectangle 10"/>
           <p:cNvSpPr/>
           <p:nvPr/>
         </p:nvSpPr>
@@ -7273,7 +7187,7 @@
       </p:sp>
       <p:sp>
         <p:nvSpPr>
-          <p:cNvPr id="701274993" name="Rectangle 11"/>
+          <p:cNvPr id="933650176" name="Rectangle 11"/>
           <p:cNvSpPr/>
           <p:nvPr/>
         </p:nvSpPr>
@@ -7311,7 +7225,7 @@
       </p:sp>
       <p:sp>
         <p:nvSpPr>
-          <p:cNvPr id="1633842903" name="Title 1"/>
+          <p:cNvPr id="1904329327" name="Title 1"/>
           <p:cNvSpPr>
             <a:spLocks noGrp="1"/>
           </p:cNvSpPr>
@@ -7346,7 +7260,7 @@
       </p:sp>
       <p:sp>
         <p:nvSpPr>
-          <p:cNvPr id="1893736794" name="Text Placeholder 3"/>
+          <p:cNvPr id="307512275" name="Text Placeholder 3"/>
           <p:cNvSpPr>
             <a:spLocks noGrp="1"/>
           </p:cNvSpPr>
@@ -7414,7 +7328,7 @@
       </p:sp>
       <p:sp>
         <p:nvSpPr>
-          <p:cNvPr id="1144915242" name="Date Placeholder 4"/>
+          <p:cNvPr id="303311661" name="Date Placeholder 4"/>
           <p:cNvSpPr>
             <a:spLocks noGrp="1"/>
           </p:cNvSpPr>
@@ -7440,7 +7354,7 @@
       </p:sp>
       <p:sp>
         <p:nvSpPr>
-          <p:cNvPr id="830696756" name="Footer Placeholder 5"/>
+          <p:cNvPr id="674971886" name="Footer Placeholder 5"/>
           <p:cNvSpPr>
             <a:spLocks noGrp="1"/>
           </p:cNvSpPr>
@@ -7462,7 +7376,7 @@
       </p:sp>
       <p:sp>
         <p:nvSpPr>
-          <p:cNvPr id="868949684" name="Slide Number Placeholder 6"/>
+          <p:cNvPr id="1967435798" name="Slide Number Placeholder 6"/>
           <p:cNvSpPr>
             <a:spLocks noGrp="1"/>
           </p:cNvSpPr>
@@ -7518,7 +7432,7 @@
       </p:grpSpPr>
       <p:pic>
         <p:nvPicPr>
-          <p:cNvPr id="1754865384" name="Picture 12" descr="HD-ShadowLong.png"/>
+          <p:cNvPr id="1788865815" name="Picture 12" descr="HD-ShadowLong.png"/>
           <p:cNvPicPr>
             <a:picLocks noChangeAspect="1"/>
           </p:cNvPicPr>
@@ -7540,7 +7454,7 @@
       </p:pic>
       <p:pic>
         <p:nvPicPr>
-          <p:cNvPr id="1306463127" name="Picture 13" descr="HD-ShadowShort.png"/>
+          <p:cNvPr id="1947179426" name="Picture 13" descr="HD-ShadowShort.png"/>
           <p:cNvPicPr>
             <a:picLocks noChangeAspect="1"/>
           </p:cNvPicPr>
@@ -7562,7 +7476,7 @@
       </p:pic>
       <p:sp>
         <p:nvSpPr>
-          <p:cNvPr id="674890538" name="Rectangle 15"/>
+          <p:cNvPr id="1129433219" name="Rectangle 15"/>
           <p:cNvSpPr/>
           <p:nvPr/>
         </p:nvSpPr>
@@ -7603,7 +7517,7 @@
       </p:sp>
       <p:sp>
         <p:nvSpPr>
-          <p:cNvPr id="952365648" name="Rectangle 16"/>
+          <p:cNvPr id="1148121149" name="Rectangle 16"/>
           <p:cNvSpPr/>
           <p:nvPr/>
         </p:nvSpPr>
@@ -7641,7 +7555,7 @@
       </p:sp>
       <p:sp>
         <p:nvSpPr>
-          <p:cNvPr id="32696837" name="Title 1"/>
+          <p:cNvPr id="955876716" name="Title 1"/>
           <p:cNvSpPr>
             <a:spLocks noGrp="1"/>
           </p:cNvSpPr>
@@ -7672,7 +7586,7 @@
       </p:sp>
       <p:sp>
         <p:nvSpPr>
-          <p:cNvPr id="1357535574" name="Text Placeholder 2"/>
+          <p:cNvPr id="409853184" name="Text Placeholder 2"/>
           <p:cNvSpPr>
             <a:spLocks noGrp="1"/>
           </p:cNvSpPr>
@@ -7746,7 +7660,7 @@
       </p:sp>
       <p:sp>
         <p:nvSpPr>
-          <p:cNvPr id="188445988" name="Text Placeholder 3"/>
+          <p:cNvPr id="2049074468" name="Text Placeholder 3"/>
           <p:cNvSpPr>
             <a:spLocks noGrp="1"/>
           </p:cNvSpPr>
@@ -7816,7 +7730,7 @@
       </p:sp>
       <p:sp>
         <p:nvSpPr>
-          <p:cNvPr id="1489910517" name="Text Placeholder 4"/>
+          <p:cNvPr id="14963742" name="Text Placeholder 4"/>
           <p:cNvSpPr>
             <a:spLocks noGrp="1"/>
           </p:cNvSpPr>
@@ -7890,7 +7804,7 @@
       </p:sp>
       <p:sp>
         <p:nvSpPr>
-          <p:cNvPr id="693152476" name="Text Placeholder 3"/>
+          <p:cNvPr id="1337582074" name="Text Placeholder 3"/>
           <p:cNvSpPr>
             <a:spLocks noGrp="1"/>
           </p:cNvSpPr>
@@ -7960,7 +7874,7 @@
       </p:sp>
       <p:sp>
         <p:nvSpPr>
-          <p:cNvPr id="1899513800" name="Text Placeholder 4"/>
+          <p:cNvPr id="216215726" name="Text Placeholder 4"/>
           <p:cNvSpPr>
             <a:spLocks noGrp="1"/>
           </p:cNvSpPr>
@@ -8034,7 +7948,7 @@
       </p:sp>
       <p:sp>
         <p:nvSpPr>
-          <p:cNvPr id="1593788033" name="Text Placeholder 3"/>
+          <p:cNvPr id="568305960" name="Text Placeholder 3"/>
           <p:cNvSpPr>
             <a:spLocks noGrp="1"/>
           </p:cNvSpPr>
@@ -8104,7 +8018,7 @@
       </p:sp>
       <p:sp>
         <p:nvSpPr>
-          <p:cNvPr id="1085954339" name="Date Placeholder 2"/>
+          <p:cNvPr id="1506676091" name="Date Placeholder 2"/>
           <p:cNvSpPr>
             <a:spLocks noGrp="1"/>
           </p:cNvSpPr>
@@ -8130,7 +8044,7 @@
       </p:sp>
       <p:sp>
         <p:nvSpPr>
-          <p:cNvPr id="1633668894" name="Footer Placeholder 3"/>
+          <p:cNvPr id="370875864" name="Footer Placeholder 3"/>
           <p:cNvSpPr>
             <a:spLocks noGrp="1"/>
           </p:cNvSpPr>
@@ -8152,7 +8066,7 @@
       </p:sp>
       <p:sp>
         <p:nvSpPr>
-          <p:cNvPr id="909048052" name="Slide Number Placeholder 4"/>
+          <p:cNvPr id="1282912291" name="Slide Number Placeholder 4"/>
           <p:cNvSpPr>
             <a:spLocks noGrp="1"/>
           </p:cNvSpPr>
@@ -8203,7 +8117,7 @@
       </p:grpSpPr>
       <p:pic>
         <p:nvPicPr>
-          <p:cNvPr id="1063118003" name="Picture 14" descr="HD-ShadowLong.png"/>
+          <p:cNvPr id="849188249" name="Picture 14" descr="HD-ShadowLong.png"/>
           <p:cNvPicPr>
             <a:picLocks noChangeAspect="1"/>
           </p:cNvPicPr>
@@ -8225,7 +8139,7 @@
       </p:pic>
       <p:pic>
         <p:nvPicPr>
-          <p:cNvPr id="767657262" name="Picture 15" descr="HD-ShadowShort.png"/>
+          <p:cNvPr id="1530966511" name="Picture 15" descr="HD-ShadowShort.png"/>
           <p:cNvPicPr>
             <a:picLocks noChangeAspect="1"/>
           </p:cNvPicPr>
@@ -8247,7 +8161,7 @@
       </p:pic>
       <p:sp>
         <p:nvSpPr>
-          <p:cNvPr id="560749345" name="Rectangle 16"/>
+          <p:cNvPr id="1435784747" name="Rectangle 16"/>
           <p:cNvSpPr/>
           <p:nvPr/>
         </p:nvSpPr>
@@ -8288,7 +8202,7 @@
       </p:sp>
       <p:sp>
         <p:nvSpPr>
-          <p:cNvPr id="98436754" name="Rectangle 17"/>
+          <p:cNvPr id="522713893" name="Rectangle 17"/>
           <p:cNvSpPr/>
           <p:nvPr/>
         </p:nvSpPr>
@@ -8326,7 +8240,7 @@
       </p:sp>
       <p:sp>
         <p:nvSpPr>
-          <p:cNvPr id="1244365783" name="Title 1"/>
+          <p:cNvPr id="1345938604" name="Title 1"/>
           <p:cNvSpPr>
             <a:spLocks noGrp="1"/>
           </p:cNvSpPr>
@@ -8357,7 +8271,7 @@
       </p:sp>
       <p:sp>
         <p:nvSpPr>
-          <p:cNvPr id="1812491220" name="Text Placeholder 2"/>
+          <p:cNvPr id="1326194195" name="Text Placeholder 2"/>
           <p:cNvSpPr>
             <a:spLocks noGrp="1"/>
           </p:cNvSpPr>
@@ -8431,7 +8345,7 @@
       </p:sp>
       <p:sp>
         <p:nvSpPr>
-          <p:cNvPr id="631590052" name="Picture Placeholder 2"/>
+          <p:cNvPr id="65839950" name="Picture Placeholder 2"/>
           <p:cNvSpPr>
             <a:spLocks noChangeAspect="1" noGrp="1"/>
           </p:cNvSpPr>
@@ -8513,7 +8427,7 @@
       </p:sp>
       <p:sp>
         <p:nvSpPr>
-          <p:cNvPr id="404889681" name="Text Placeholder 3"/>
+          <p:cNvPr id="1407022285" name="Text Placeholder 3"/>
           <p:cNvSpPr>
             <a:spLocks noGrp="1"/>
           </p:cNvSpPr>
@@ -8583,7 +8497,7 @@
       </p:sp>
       <p:sp>
         <p:nvSpPr>
-          <p:cNvPr id="1998336575" name="Text Placeholder 4"/>
+          <p:cNvPr id="943875953" name="Text Placeholder 4"/>
           <p:cNvSpPr>
             <a:spLocks noGrp="1"/>
           </p:cNvSpPr>
@@ -8657,7 +8571,7 @@
       </p:sp>
       <p:sp>
         <p:nvSpPr>
-          <p:cNvPr id="1390712538" name="Picture Placeholder 2"/>
+          <p:cNvPr id="25122385" name="Picture Placeholder 2"/>
           <p:cNvSpPr>
             <a:spLocks noChangeAspect="1" noGrp="1"/>
           </p:cNvSpPr>
@@ -8739,7 +8653,7 @@
       </p:sp>
       <p:sp>
         <p:nvSpPr>
-          <p:cNvPr id="85841332" name="Text Placeholder 3"/>
+          <p:cNvPr id="1484205128" name="Text Placeholder 3"/>
           <p:cNvSpPr>
             <a:spLocks noGrp="1"/>
           </p:cNvSpPr>
@@ -8809,7 +8723,7 @@
       </p:sp>
       <p:sp>
         <p:nvSpPr>
-          <p:cNvPr id="1721206876" name="Text Placeholder 4"/>
+          <p:cNvPr id="968428637" name="Text Placeholder 4"/>
           <p:cNvSpPr>
             <a:spLocks noGrp="1"/>
           </p:cNvSpPr>
@@ -8883,7 +8797,7 @@
       </p:sp>
       <p:sp>
         <p:nvSpPr>
-          <p:cNvPr id="133945264" name="Picture Placeholder 2"/>
+          <p:cNvPr id="387538774" name="Picture Placeholder 2"/>
           <p:cNvSpPr>
             <a:spLocks noChangeAspect="1" noGrp="1"/>
           </p:cNvSpPr>
@@ -8965,7 +8879,7 @@
       </p:sp>
       <p:sp>
         <p:nvSpPr>
-          <p:cNvPr id="1873521340" name="Text Placeholder 3"/>
+          <p:cNvPr id="1116566358" name="Text Placeholder 3"/>
           <p:cNvSpPr>
             <a:spLocks noGrp="1"/>
           </p:cNvSpPr>
@@ -9035,7 +8949,7 @@
       </p:sp>
       <p:sp>
         <p:nvSpPr>
-          <p:cNvPr id="303693105" name="Date Placeholder 2"/>
+          <p:cNvPr id="1110835665" name="Date Placeholder 2"/>
           <p:cNvSpPr>
             <a:spLocks noGrp="1"/>
           </p:cNvSpPr>
@@ -9061,7 +8975,7 @@
       </p:sp>
       <p:sp>
         <p:nvSpPr>
-          <p:cNvPr id="1801864571" name="Footer Placeholder 3"/>
+          <p:cNvPr id="989496011" name="Footer Placeholder 3"/>
           <p:cNvSpPr>
             <a:spLocks noGrp="1"/>
           </p:cNvSpPr>
@@ -9083,7 +8997,7 @@
       </p:sp>
       <p:sp>
         <p:nvSpPr>
-          <p:cNvPr id="1524930077" name="Slide Number Placeholder 4"/>
+          <p:cNvPr id="688708943" name="Slide Number Placeholder 4"/>
           <p:cNvSpPr>
             <a:spLocks noGrp="1"/>
           </p:cNvSpPr>
@@ -9134,7 +9048,7 @@
       </p:grpSpPr>
       <p:pic>
         <p:nvPicPr>
-          <p:cNvPr id="1915313669" name="Picture 6" descr="HD-ShadowLong.png"/>
+          <p:cNvPr id="434643743" name="Picture 6" descr="HD-ShadowLong.png"/>
           <p:cNvPicPr>
             <a:picLocks noChangeAspect="1"/>
           </p:cNvPicPr>
@@ -9156,7 +9070,7 @@
       </p:pic>
       <p:pic>
         <p:nvPicPr>
-          <p:cNvPr id="1964977553" name="Picture 7" descr="HD-ShadowShort.png"/>
+          <p:cNvPr id="1778943405" name="Picture 7" descr="HD-ShadowShort.png"/>
           <p:cNvPicPr>
             <a:picLocks noChangeAspect="1"/>
           </p:cNvPicPr>
@@ -9178,7 +9092,7 @@
       </p:pic>
       <p:sp>
         <p:nvSpPr>
-          <p:cNvPr id="1373603433" name="Rectangle 8"/>
+          <p:cNvPr id="1092766167" name="Rectangle 8"/>
           <p:cNvSpPr/>
           <p:nvPr/>
         </p:nvSpPr>
@@ -9219,7 +9133,7 @@
       </p:sp>
       <p:sp>
         <p:nvSpPr>
-          <p:cNvPr id="1595398300" name="Rectangle 9"/>
+          <p:cNvPr id="362701914" name="Rectangle 9"/>
           <p:cNvSpPr/>
           <p:nvPr/>
         </p:nvSpPr>
@@ -9257,7 +9171,7 @@
       </p:sp>
       <p:sp>
         <p:nvSpPr>
-          <p:cNvPr id="1363267373" name="Title 1"/>
+          <p:cNvPr id="1999920660" name="Title 1"/>
           <p:cNvSpPr>
             <a:spLocks noGrp="1"/>
           </p:cNvSpPr>
@@ -9287,7 +9201,7 @@
       </p:sp>
       <p:sp>
         <p:nvSpPr>
-          <p:cNvPr id="479414662" name="Vertical Text Placeholder 2"/>
+          <p:cNvPr id="390456609" name="Vertical Text Placeholder 2"/>
           <p:cNvSpPr>
             <a:spLocks noGrp="1"/>
           </p:cNvSpPr>
@@ -9353,7 +9267,7 @@
       </p:sp>
       <p:sp>
         <p:nvSpPr>
-          <p:cNvPr id="1593329377" name="Date Placeholder 3"/>
+          <p:cNvPr id="1331820931" name="Date Placeholder 3"/>
           <p:cNvSpPr>
             <a:spLocks noGrp="1"/>
           </p:cNvSpPr>
@@ -9379,7 +9293,7 @@
       </p:sp>
       <p:sp>
         <p:nvSpPr>
-          <p:cNvPr id="1096577487" name="Footer Placeholder 4"/>
+          <p:cNvPr id="1861627410" name="Footer Placeholder 4"/>
           <p:cNvSpPr>
             <a:spLocks noGrp="1"/>
           </p:cNvSpPr>
@@ -9401,7 +9315,7 @@
       </p:sp>
       <p:sp>
         <p:nvSpPr>
-          <p:cNvPr id="2127615889" name="Slide Number Placeholder 5"/>
+          <p:cNvPr id="703502409" name="Slide Number Placeholder 5"/>
           <p:cNvSpPr>
             <a:spLocks noGrp="1"/>
           </p:cNvSpPr>
@@ -9452,7 +9366,7 @@
       </p:grpSpPr>
       <p:sp>
         <p:nvSpPr>
-          <p:cNvPr id="1625416766" name="Rectangle 6"/>
+          <p:cNvPr id="1800859990" name="Rectangle 6"/>
           <p:cNvSpPr/>
           <p:nvPr/>
         </p:nvSpPr>
@@ -9493,7 +9407,7 @@
       </p:sp>
       <p:sp>
         <p:nvSpPr>
-          <p:cNvPr id="1153215013" name="Rectangle 7"/>
+          <p:cNvPr id="301070386" name="Rectangle 7"/>
           <p:cNvSpPr/>
           <p:nvPr/>
         </p:nvSpPr>
@@ -9531,7 +9445,7 @@
       </p:sp>
       <p:sp>
         <p:nvSpPr>
-          <p:cNvPr id="1261967239" name="Vertical Title 1"/>
+          <p:cNvPr id="1044660263" name="Vertical Title 1"/>
           <p:cNvSpPr>
             <a:spLocks noGrp="1"/>
           </p:cNvSpPr>
@@ -9562,7 +9476,7 @@
       </p:sp>
       <p:sp>
         <p:nvSpPr>
-          <p:cNvPr id="1606844939" name="Vertical Text Placeholder 2"/>
+          <p:cNvPr id="2098166728" name="Vertical Text Placeholder 2"/>
           <p:cNvSpPr>
             <a:spLocks noGrp="1"/>
           </p:cNvSpPr>
@@ -9633,7 +9547,7 @@
       </p:sp>
       <p:sp>
         <p:nvSpPr>
-          <p:cNvPr id="1319999356" name="Date Placeholder 3"/>
+          <p:cNvPr id="2082713330" name="Date Placeholder 3"/>
           <p:cNvSpPr>
             <a:spLocks noGrp="1"/>
           </p:cNvSpPr>
@@ -9664,7 +9578,7 @@
       </p:sp>
       <p:sp>
         <p:nvSpPr>
-          <p:cNvPr id="1993283807" name="Footer Placeholder 4"/>
+          <p:cNvPr id="1627636278" name="Footer Placeholder 4"/>
           <p:cNvSpPr>
             <a:spLocks noGrp="1"/>
           </p:cNvSpPr>
@@ -9691,7 +9605,7 @@
       </p:sp>
       <p:sp>
         <p:nvSpPr>
-          <p:cNvPr id="466262420" name="Slide Number Placeholder 5"/>
+          <p:cNvPr id="1317675565" name="Slide Number Placeholder 5"/>
           <p:cNvSpPr>
             <a:spLocks noGrp="1"/>
           </p:cNvSpPr>
@@ -9751,7 +9665,7 @@
       </p:grpSpPr>
       <p:sp>
         <p:nvSpPr>
-          <p:cNvPr id="1167106336" name="Заголовок 1"/>
+          <p:cNvPr id="109063446" name="Заголовок 1"/>
           <p:cNvSpPr>
             <a:spLocks noGrp="1"/>
           </p:cNvSpPr>
@@ -9786,7 +9700,7 @@
       </p:sp>
       <p:sp>
         <p:nvSpPr>
-          <p:cNvPr id="1874945203" name="Текст 2"/>
+          <p:cNvPr id="272128535" name="Текст 2"/>
           <p:cNvSpPr>
             <a:spLocks noGrp="1"/>
           </p:cNvSpPr>
@@ -9908,7 +9822,7 @@
       </p:sp>
       <p:sp>
         <p:nvSpPr>
-          <p:cNvPr id="2127008943" name="Дата 3"/>
+          <p:cNvPr id="466540434" name="Дата 3"/>
           <p:cNvSpPr>
             <a:spLocks noGrp="1"/>
           </p:cNvSpPr>
@@ -9934,7 +9848,7 @@
       </p:sp>
       <p:sp>
         <p:nvSpPr>
-          <p:cNvPr id="522681240" name="Нижний колонтитул 4"/>
+          <p:cNvPr id="2142046034" name="Нижний колонтитул 4"/>
           <p:cNvSpPr>
             <a:spLocks noGrp="1"/>
           </p:cNvSpPr>
@@ -9956,7 +9870,7 @@
       </p:sp>
       <p:sp>
         <p:nvSpPr>
-          <p:cNvPr id="1071079241" name="Номер слайда 5"/>
+          <p:cNvPr id="1709469930" name="Номер слайда 5"/>
           <p:cNvSpPr>
             <a:spLocks noGrp="1"/>
           </p:cNvSpPr>
@@ -10007,7 +9921,7 @@
       </p:grpSpPr>
       <p:sp>
         <p:nvSpPr>
-          <p:cNvPr id="1187047245" name="Заголовок 1"/>
+          <p:cNvPr id="741603318" name="Заголовок 1"/>
           <p:cNvSpPr>
             <a:spLocks noGrp="1"/>
           </p:cNvSpPr>
@@ -10033,7 +9947,7 @@
       </p:sp>
       <p:sp>
         <p:nvSpPr>
-          <p:cNvPr id="1554156183" name="Объект 2"/>
+          <p:cNvPr id="1792332139" name="Объект 2"/>
           <p:cNvSpPr>
             <a:spLocks noGrp="1"/>
           </p:cNvSpPr>
@@ -10104,7 +10018,7 @@
       </p:sp>
       <p:sp>
         <p:nvSpPr>
-          <p:cNvPr id="1074241464" name="Объект 3"/>
+          <p:cNvPr id="346961568" name="Объект 3"/>
           <p:cNvSpPr>
             <a:spLocks noGrp="1"/>
           </p:cNvSpPr>
@@ -10175,7 +10089,7 @@
       </p:sp>
       <p:sp>
         <p:nvSpPr>
-          <p:cNvPr id="28932297" name="Дата 4"/>
+          <p:cNvPr id="1585844048" name="Дата 4"/>
           <p:cNvSpPr>
             <a:spLocks noGrp="1"/>
           </p:cNvSpPr>
@@ -10201,7 +10115,7 @@
       </p:sp>
       <p:sp>
         <p:nvSpPr>
-          <p:cNvPr id="411817434" name="Нижний колонтитул 5"/>
+          <p:cNvPr id="1068117565" name="Нижний колонтитул 5"/>
           <p:cNvSpPr>
             <a:spLocks noGrp="1"/>
           </p:cNvSpPr>
@@ -10223,7 +10137,7 @@
       </p:sp>
       <p:sp>
         <p:nvSpPr>
-          <p:cNvPr id="1051211392" name="Номер слайда 6"/>
+          <p:cNvPr id="284990761" name="Номер слайда 6"/>
           <p:cNvSpPr>
             <a:spLocks noGrp="1"/>
           </p:cNvSpPr>
@@ -10274,7 +10188,7 @@
       </p:grpSpPr>
       <p:sp>
         <p:nvSpPr>
-          <p:cNvPr id="1223806280" name="Заголовок 1"/>
+          <p:cNvPr id="1980151492" name="Заголовок 1"/>
           <p:cNvSpPr>
             <a:spLocks noGrp="1"/>
           </p:cNvSpPr>
@@ -10305,7 +10219,7 @@
       </p:sp>
       <p:sp>
         <p:nvSpPr>
-          <p:cNvPr id="464085853" name="Текст 2"/>
+          <p:cNvPr id="685589892" name="Текст 2"/>
           <p:cNvSpPr>
             <a:spLocks noGrp="1"/>
           </p:cNvSpPr>
@@ -10373,7 +10287,7 @@
       </p:sp>
       <p:sp>
         <p:nvSpPr>
-          <p:cNvPr id="303151593" name="Объект 3"/>
+          <p:cNvPr id="1919064004" name="Объект 3"/>
           <p:cNvSpPr>
             <a:spLocks noGrp="1"/>
           </p:cNvSpPr>
@@ -10444,7 +10358,7 @@
       </p:sp>
       <p:sp>
         <p:nvSpPr>
-          <p:cNvPr id="468117293" name="Текст 4"/>
+          <p:cNvPr id="813068489" name="Текст 4"/>
           <p:cNvSpPr>
             <a:spLocks noGrp="1"/>
           </p:cNvSpPr>
@@ -10512,7 +10426,7 @@
       </p:sp>
       <p:sp>
         <p:nvSpPr>
-          <p:cNvPr id="902572599" name="Объект 5"/>
+          <p:cNvPr id="1874585451" name="Объект 5"/>
           <p:cNvSpPr>
             <a:spLocks noGrp="1"/>
           </p:cNvSpPr>
@@ -10583,7 +10497,7 @@
       </p:sp>
       <p:sp>
         <p:nvSpPr>
-          <p:cNvPr id="270180719" name="Дата 6"/>
+          <p:cNvPr id="695858790" name="Дата 6"/>
           <p:cNvSpPr>
             <a:spLocks noGrp="1"/>
           </p:cNvSpPr>
@@ -10609,7 +10523,7 @@
       </p:sp>
       <p:sp>
         <p:nvSpPr>
-          <p:cNvPr id="588029428" name="Нижний колонтитул 7"/>
+          <p:cNvPr id="42027271" name="Нижний колонтитул 7"/>
           <p:cNvSpPr>
             <a:spLocks noGrp="1"/>
           </p:cNvSpPr>
@@ -10631,7 +10545,7 @@
       </p:sp>
       <p:sp>
         <p:nvSpPr>
-          <p:cNvPr id="370260028" name="Номер слайда 8"/>
+          <p:cNvPr id="153464571" name="Номер слайда 8"/>
           <p:cNvSpPr>
             <a:spLocks noGrp="1"/>
           </p:cNvSpPr>
@@ -10682,7 +10596,7 @@
       </p:grpSpPr>
       <p:sp>
         <p:nvSpPr>
-          <p:cNvPr id="1393111412" name="Заголовок 1"/>
+          <p:cNvPr id="2096650089" name="Заголовок 1"/>
           <p:cNvSpPr>
             <a:spLocks noGrp="1"/>
           </p:cNvSpPr>
@@ -10708,7 +10622,7 @@
       </p:sp>
       <p:sp>
         <p:nvSpPr>
-          <p:cNvPr id="2144901511" name="Дата 2"/>
+          <p:cNvPr id="225544685" name="Дата 2"/>
           <p:cNvSpPr>
             <a:spLocks noGrp="1"/>
           </p:cNvSpPr>
@@ -10734,7 +10648,7 @@
       </p:sp>
       <p:sp>
         <p:nvSpPr>
-          <p:cNvPr id="1294565240" name="Нижний колонтитул 3"/>
+          <p:cNvPr id="289092037" name="Нижний колонтитул 3"/>
           <p:cNvSpPr>
             <a:spLocks noGrp="1"/>
           </p:cNvSpPr>
@@ -10756,7 +10670,7 @@
       </p:sp>
       <p:sp>
         <p:nvSpPr>
-          <p:cNvPr id="366437444" name="Номер слайда 4"/>
+          <p:cNvPr id="403648122" name="Номер слайда 4"/>
           <p:cNvSpPr>
             <a:spLocks noGrp="1"/>
           </p:cNvSpPr>
@@ -10807,7 +10721,7 @@
       </p:grpSpPr>
       <p:sp>
         <p:nvSpPr>
-          <p:cNvPr id="412438151" name="Дата 1"/>
+          <p:cNvPr id="184900850" name="Дата 1"/>
           <p:cNvSpPr>
             <a:spLocks noGrp="1"/>
           </p:cNvSpPr>
@@ -10833,7 +10747,7 @@
       </p:sp>
       <p:sp>
         <p:nvSpPr>
-          <p:cNvPr id="1786187567" name="Нижний колонтитул 2"/>
+          <p:cNvPr id="1727297342" name="Нижний колонтитул 2"/>
           <p:cNvSpPr>
             <a:spLocks noGrp="1"/>
           </p:cNvSpPr>
@@ -10855,7 +10769,7 @@
       </p:sp>
       <p:sp>
         <p:nvSpPr>
-          <p:cNvPr id="1379664793" name="Номер слайда 3"/>
+          <p:cNvPr id="2130201838" name="Номер слайда 3"/>
           <p:cNvSpPr>
             <a:spLocks noGrp="1"/>
           </p:cNvSpPr>
@@ -10906,7 +10820,7 @@
       </p:grpSpPr>
       <p:sp>
         <p:nvSpPr>
-          <p:cNvPr id="366453477" name="Заголовок 1"/>
+          <p:cNvPr id="1925671696" name="Заголовок 1"/>
           <p:cNvSpPr>
             <a:spLocks noGrp="1"/>
           </p:cNvSpPr>
@@ -10941,7 +10855,7 @@
       </p:sp>
       <p:sp>
         <p:nvSpPr>
-          <p:cNvPr id="291626683" name="Объект 2"/>
+          <p:cNvPr id="1459081648" name="Объект 2"/>
           <p:cNvSpPr>
             <a:spLocks noGrp="1"/>
           </p:cNvSpPr>
@@ -11040,7 +10954,7 @@
       </p:sp>
       <p:sp>
         <p:nvSpPr>
-          <p:cNvPr id="2081632213" name="Текст 3"/>
+          <p:cNvPr id="1897723798" name="Текст 3"/>
           <p:cNvSpPr>
             <a:spLocks noGrp="1"/>
           </p:cNvSpPr>
@@ -11108,7 +11022,7 @@
       </p:sp>
       <p:sp>
         <p:nvSpPr>
-          <p:cNvPr id="1354432165" name="Дата 4"/>
+          <p:cNvPr id="895755618" name="Дата 4"/>
           <p:cNvSpPr>
             <a:spLocks noGrp="1"/>
           </p:cNvSpPr>
@@ -11134,7 +11048,7 @@
       </p:sp>
       <p:sp>
         <p:nvSpPr>
-          <p:cNvPr id="1245247655" name="Нижний колонтитул 5"/>
+          <p:cNvPr id="1646582499" name="Нижний колонтитул 5"/>
           <p:cNvSpPr>
             <a:spLocks noGrp="1"/>
           </p:cNvSpPr>
@@ -11156,7 +11070,7 @@
       </p:sp>
       <p:sp>
         <p:nvSpPr>
-          <p:cNvPr id="1307926881" name="Номер слайда 6"/>
+          <p:cNvPr id="1581438441" name="Номер слайда 6"/>
           <p:cNvSpPr>
             <a:spLocks noGrp="1"/>
           </p:cNvSpPr>
@@ -11207,7 +11121,7 @@
       </p:grpSpPr>
       <p:sp>
         <p:nvSpPr>
-          <p:cNvPr id="727784352" name="Заголовок 1"/>
+          <p:cNvPr id="2029577845" name="Заголовок 1"/>
           <p:cNvSpPr>
             <a:spLocks noGrp="1"/>
           </p:cNvSpPr>
@@ -11242,7 +11156,7 @@
       </p:sp>
       <p:sp>
         <p:nvSpPr>
-          <p:cNvPr id="830316039" name="Рисунок 2"/>
+          <p:cNvPr id="209025110" name="Рисунок 2"/>
           <p:cNvSpPr>
             <a:spLocks noGrp="1"/>
           </p:cNvSpPr>
@@ -11306,7 +11220,7 @@
       </p:sp>
       <p:sp>
         <p:nvSpPr>
-          <p:cNvPr id="328257174" name="Текст 3"/>
+          <p:cNvPr id="101257365" name="Текст 3"/>
           <p:cNvSpPr>
             <a:spLocks noGrp="1"/>
           </p:cNvSpPr>
@@ -11374,7 +11288,7 @@
       </p:sp>
       <p:sp>
         <p:nvSpPr>
-          <p:cNvPr id="657390116" name="Дата 4"/>
+          <p:cNvPr id="105504078" name="Дата 4"/>
           <p:cNvSpPr>
             <a:spLocks noGrp="1"/>
           </p:cNvSpPr>
@@ -11400,7 +11314,7 @@
       </p:sp>
       <p:sp>
         <p:nvSpPr>
-          <p:cNvPr id="1064684142" name="Нижний колонтитул 5"/>
+          <p:cNvPr id="1572777110" name="Нижний колонтитул 5"/>
           <p:cNvSpPr>
             <a:spLocks noGrp="1"/>
           </p:cNvSpPr>
@@ -11422,7 +11336,7 @@
       </p:sp>
       <p:sp>
         <p:nvSpPr>
-          <p:cNvPr id="1195880777" name="Номер слайда 6"/>
+          <p:cNvPr id="1105840253" name="Номер слайда 6"/>
           <p:cNvSpPr>
             <a:spLocks noGrp="1"/>
           </p:cNvSpPr>
@@ -11478,7 +11392,7 @@
       </p:grpSpPr>
       <p:sp>
         <p:nvSpPr>
-          <p:cNvPr id="993938429" name="Заголовок 1"/>
+          <p:cNvPr id="1458738045" name="Заголовок 1"/>
           <p:cNvSpPr>
             <a:spLocks noGrp="1"/>
           </p:cNvSpPr>
@@ -11514,7 +11428,7 @@
       </p:sp>
       <p:sp>
         <p:nvSpPr>
-          <p:cNvPr id="398838772" name="Текст 2"/>
+          <p:cNvPr id="37395239" name="Текст 2"/>
           <p:cNvSpPr>
             <a:spLocks noGrp="1"/>
           </p:cNvSpPr>
@@ -11590,7 +11504,7 @@
       </p:sp>
       <p:sp>
         <p:nvSpPr>
-          <p:cNvPr id="1380411619" name="Дата 3"/>
+          <p:cNvPr id="1974398298" name="Дата 3"/>
           <p:cNvSpPr>
             <a:spLocks noGrp="1"/>
           </p:cNvSpPr>
@@ -11634,7 +11548,7 @@
       </p:sp>
       <p:sp>
         <p:nvSpPr>
-          <p:cNvPr id="316686976" name="Нижний колонтитул 4"/>
+          <p:cNvPr id="441802273" name="Нижний колонтитул 4"/>
           <p:cNvSpPr>
             <a:spLocks noGrp="1"/>
           </p:cNvSpPr>
@@ -11674,7 +11588,7 @@
       </p:sp>
       <p:sp>
         <p:nvSpPr>
-          <p:cNvPr id="1918571607" name="Номер слайда 5"/>
+          <p:cNvPr id="392620856" name="Номер слайда 5"/>
           <p:cNvSpPr>
             <a:spLocks noGrp="1"/>
           </p:cNvSpPr>
@@ -12085,7 +11999,7 @@
       </p:grpSpPr>
       <p:sp>
         <p:nvSpPr>
-          <p:cNvPr id="2119498964" name="Прямоугольник 3"/>
+          <p:cNvPr id="956773983" name="Прямоугольник 3"/>
           <p:cNvSpPr/>
           <p:nvPr/>
         </p:nvSpPr>
@@ -12135,7 +12049,7 @@
       </p:sp>
       <p:sp>
         <p:nvSpPr>
-          <p:cNvPr id="1765705191" name="Прямоугольник 4"/>
+          <p:cNvPr id="75062187" name="Прямоугольник 4"/>
           <p:cNvSpPr/>
           <p:nvPr/>
         </p:nvSpPr>
@@ -12185,7 +12099,7 @@
       </p:sp>
       <p:sp>
         <p:nvSpPr>
-          <p:cNvPr id="1148214580" name="Заголовок 1"/>
+          <p:cNvPr id="1627004354" name="Заголовок 1"/>
           <p:cNvSpPr>
             <a:spLocks noGrp="1"/>
           </p:cNvSpPr>
@@ -12214,7 +12128,31 @@
                   <a:schemeClr val="bg1"/>
                 </a:solidFill>
               </a:rPr>
-              <a:t>Разработка упрощенного графического ускорителя. Разработка модели упрощенного графического ядра.</a:t>
+              <a:t>Разработка </a:t>
+            </a:r>
+            <a:r>
+              <a:rPr lang="ru-RU" sz="3200">
+                <a:solidFill>
+                  <a:schemeClr val="bg1"/>
+                </a:solidFill>
+              </a:rPr>
+              <a:t>ядра упрощенного графического ускорителя. Разработка </a:t>
+            </a:r>
+            <a:r>
+              <a:rPr lang="en-US" sz="3200">
+                <a:solidFill>
+                  <a:schemeClr val="bg1"/>
+                </a:solidFill>
+              </a:rPr>
+              <a:t>HDL </a:t>
+            </a:r>
+            <a:r>
+              <a:rPr lang="ru-RU" sz="3200">
+                <a:solidFill>
+                  <a:schemeClr val="bg1"/>
+                </a:solidFill>
+              </a:rPr>
+              <a:t>модели</a:t>
             </a:r>
             <a:endParaRPr>
               <a:solidFill>
@@ -12226,7 +12164,7 @@
       </p:sp>
       <p:sp>
         <p:nvSpPr>
-          <p:cNvPr id="905258746" name="Подзаголовок 2"/>
+          <p:cNvPr id="2100245361" name="Подзаголовок 2"/>
           <p:cNvSpPr>
             <a:spLocks noGrp="1"/>
           </p:cNvSpPr>
@@ -12371,7 +12309,7 @@
       </p:grpSpPr>
       <p:sp>
         <p:nvSpPr>
-          <p:cNvPr id="1668011248" name="Объект 2"/>
+          <p:cNvPr id="1290920620" name="Объект 2"/>
           <p:cNvSpPr>
             <a:spLocks noGrp="1"/>
           </p:cNvSpPr>
@@ -12380,14 +12318,14 @@
           </p:nvPr>
         </p:nvSpPr>
         <p:spPr bwMode="auto">
-          <a:xfrm>
-            <a:off x="456385" y="2059377"/>
-            <a:ext cx="4736811" cy="3599316"/>
-          </a:xfrm>
-        </p:spPr>
-        <p:txBody>
-          <a:bodyPr>
-            <a:normAutofit lnSpcReduction="10000"/>
+          <a:xfrm flipH="0" flipV="0">
+            <a:off x="208734" y="1552574"/>
+            <a:ext cx="4736810" cy="4940299"/>
+          </a:xfrm>
+        </p:spPr>
+        <p:txBody>
+          <a:bodyPr vertOverflow="overflow" horzOverflow="overflow" vert="horz" wrap="square" lIns="91440" tIns="45720" rIns="91440" bIns="45720" numCol="1" spcCol="0" rtlCol="0" fromWordArt="0" anchor="t" anchorCtr="0" forceAA="0" upright="0" compatLnSpc="0">
+            <a:normAutofit/>
           </a:bodyPr>
           <a:lstStyle/>
           <a:p>
@@ -12396,7 +12334,7 @@
             </a:pPr>
             <a:r>
               <a:rPr lang="ru-RU"/>
-              <a:t>Предназначен для передачи данных между внешней памятью и потоками;</a:t>
+              <a:t>Предназначен для передачи данных между внешней памятью и вычислительными блоками;</a:t>
             </a:r>
             <a:endParaRPr/>
           </a:p>
@@ -12422,6 +12360,10 @@
             </a:r>
             <a:r>
               <a:rPr lang="ru-RU"/>
+              <a:t> данные</a:t>
+            </a:r>
+            <a:r>
+              <a:rPr lang="ru-RU"/>
               <a:t>;</a:t>
             </a:r>
             <a:endParaRPr/>
@@ -12432,7 +12374,23 @@
             </a:pPr>
             <a:r>
               <a:rPr lang="ru-RU"/>
-              <a:t>Работает по приходящей инструкции.</a:t>
+              <a:t>Работает </a:t>
+            </a:r>
+            <a:r>
+              <a:rPr lang="ru-RU"/>
+              <a:t>только при получении </a:t>
+            </a:r>
+            <a:r>
+              <a:rPr lang="en-US"/>
+              <a:t>LD/ST </a:t>
+            </a:r>
+            <a:r>
+              <a:rPr lang="ru-RU"/>
+              <a:t>инструкции</a:t>
+            </a:r>
+            <a:r>
+              <a:rPr lang="ru-RU"/>
+              <a:t>.</a:t>
             </a:r>
             <a:endParaRPr/>
           </a:p>
@@ -12450,7 +12408,7 @@
       </p:sp>
       <p:sp>
         <p:nvSpPr>
-          <p:cNvPr id="1085215997" name="Номер слайда 3"/>
+          <p:cNvPr id="1329150430" name="Номер слайда 3"/>
           <p:cNvSpPr>
             <a:spLocks noGrp="1"/>
           </p:cNvSpPr>
@@ -12491,7 +12449,7 @@
       </p:sp>
       <p:sp>
         <p:nvSpPr>
-          <p:cNvPr id="553844427" name="Прямоугольник 5"/>
+          <p:cNvPr id="2058404542" name="Прямоугольник 5"/>
           <p:cNvSpPr/>
           <p:nvPr/>
         </p:nvSpPr>
@@ -12541,7 +12499,7 @@
       </p:sp>
       <p:sp>
         <p:nvSpPr>
-          <p:cNvPr id="194605452" name="Прямоугольник 6"/>
+          <p:cNvPr id="1712630877" name="Прямоугольник 6"/>
           <p:cNvSpPr/>
           <p:nvPr/>
         </p:nvSpPr>
@@ -12591,7 +12549,7 @@
       </p:sp>
       <p:sp>
         <p:nvSpPr>
-          <p:cNvPr id="1451586730" name="Заголовок 1"/>
+          <p:cNvPr id="2035598514" name="Заголовок 1"/>
           <p:cNvSpPr>
             <a:spLocks noGrp="1"/>
           </p:cNvSpPr>
@@ -12620,7 +12578,7 @@
                   <a:schemeClr val="bg1"/>
                 </a:solidFill>
               </a:rPr>
-              <a:t>Разработка модели упрощенного графического ядра: Блок загрузки и сохранения</a:t>
+              <a:t>Блок загрузки и сохранения</a:t>
             </a:r>
             <a:endParaRPr/>
           </a:p>
@@ -12722,7 +12680,7 @@
       </p:grpSpPr>
       <p:sp>
         <p:nvSpPr>
-          <p:cNvPr id="604735051" name="Объект 2"/>
+          <p:cNvPr id="1105841711" name="Объект 2"/>
           <p:cNvSpPr>
             <a:spLocks noGrp="1"/>
           </p:cNvSpPr>
@@ -12731,14 +12689,14 @@
           </p:nvPr>
         </p:nvSpPr>
         <p:spPr bwMode="auto">
-          <a:xfrm>
-            <a:off x="680319" y="2336872"/>
-            <a:ext cx="4409973" cy="3599316"/>
-          </a:xfrm>
-        </p:spPr>
-        <p:txBody>
-          <a:bodyPr>
-            <a:normAutofit lnSpcReduction="10000"/>
+          <a:xfrm flipH="0" flipV="0">
+            <a:off x="0" y="1350173"/>
+            <a:ext cx="5668349" cy="5507825"/>
+          </a:xfrm>
+        </p:spPr>
+        <p:txBody>
+          <a:bodyPr vertOverflow="overflow" horzOverflow="overflow" vert="horz" wrap="square" lIns="91440" tIns="45720" rIns="91440" bIns="45720" numCol="1" spcCol="0" rtlCol="0" fromWordArt="0" anchor="t" anchorCtr="0" forceAA="0" upright="0" compatLnSpc="0">
+            <a:normAutofit/>
           </a:bodyPr>
           <a:lstStyle/>
           <a:p>
@@ -12747,15 +12705,11 @@
             </a:pPr>
             <a:r>
               <a:rPr lang="ru-RU"/>
-              <a:t>Арбитр собирает с потоков данные и</a:t>
-            </a:r>
-            <a:r>
-              <a:rPr lang="en-US"/>
-              <a:t>/</a:t>
-            </a:r>
-            <a:r>
-              <a:rPr lang="ru-RU"/>
-              <a:t>или адреса;</a:t>
+              <a:t>Арбитр </a:t>
+            </a:r>
+            <a:r>
+              <a:rPr lang="ru-RU"/>
+              <a:t>отслеживает запросы к памяти данных от вычислительных блоков;</a:t>
             </a:r>
             <a:endParaRPr/>
           </a:p>
@@ -12769,33 +12723,62 @@
             </a:r>
             <a:r>
               <a:rPr lang="ru-RU"/>
-              <a:t> выполняет запросы  с данными и адресами поочередно;</a:t>
+              <a:t> выполняет запросы в порядке очереди (</a:t>
+            </a:r>
+            <a:r>
+              <a:rPr lang="en-US"/>
+              <a:t>round-robin</a:t>
+            </a:r>
+            <a:r>
+              <a:rPr lang="ru-RU"/>
+              <a:t>);</a:t>
+            </a:r>
+            <a:endParaRPr lang="ru-RU"/>
+          </a:p>
+          <a:p>
+            <a:pPr>
+              <a:defRPr/>
+            </a:pPr>
+            <a:r>
+              <a:rPr lang="ru-RU" sz="2800" b="0" i="0" u="none" strike="noStrike" cap="none" spc="0">
+                <a:solidFill>
+                  <a:schemeClr val="tx1"/>
+                </a:solidFill>
+                <a:latin typeface="Calibri"/>
+                <a:ea typeface="Arial"/>
+                <a:cs typeface="Arial"/>
+              </a:rPr>
+              <a:t>Арбитр </a:t>
+            </a:r>
+            <a:r>
+              <a:rPr lang="ru-RU" sz="2800" b="0" i="0" u="none" strike="noStrike" cap="none" spc="0">
+                <a:solidFill>
+                  <a:schemeClr val="tx1"/>
+                </a:solidFill>
+                <a:latin typeface="Calibri"/>
+                <a:ea typeface="Arial"/>
+                <a:cs typeface="Arial"/>
+              </a:rPr>
+              <a:t>управляет </a:t>
+            </a:r>
+            <a:r>
+              <a:rPr lang="ru-RU" sz="2800" b="0" i="0" u="none" strike="noStrike" cap="none" spc="0">
+                <a:solidFill>
+                  <a:schemeClr val="tx1"/>
+                </a:solidFill>
+                <a:latin typeface="Calibri"/>
+                <a:ea typeface="Arial"/>
+                <a:cs typeface="Arial"/>
+              </a:rPr>
+              <a:t>демультиплексором считанных данных и мультиплексором записываемых данных.</a:t>
             </a:r>
             <a:endParaRPr/>
           </a:p>
-          <a:p>
-            <a:pPr>
-              <a:defRPr/>
-            </a:pPr>
-            <a:r>
-              <a:rPr lang="ru-RU"/>
-              <a:t>Арбитр выдаёт результаты потокам и</a:t>
-            </a:r>
-            <a:r>
-              <a:rPr lang="en-US"/>
-              <a:t>/</a:t>
-            </a:r>
-            <a:r>
-              <a:rPr lang="ru-RU"/>
-              <a:t>или статус готовности.</a:t>
-            </a:r>
-            <a:endParaRPr/>
-          </a:p>
-        </p:txBody>
-      </p:sp>
-      <p:sp>
-        <p:nvSpPr>
-          <p:cNvPr id="1193862957" name="Номер слайда 3"/>
+        </p:txBody>
+      </p:sp>
+      <p:sp>
+        <p:nvSpPr>
+          <p:cNvPr id="2133545582" name="Номер слайда 3"/>
           <p:cNvSpPr>
             <a:spLocks noGrp="1"/>
           </p:cNvSpPr>
@@ -12836,7 +12819,7 @@
       </p:sp>
       <p:sp>
         <p:nvSpPr>
-          <p:cNvPr id="1306721379" name="Прямоугольник 5"/>
+          <p:cNvPr id="1063521747" name="Прямоугольник 5"/>
           <p:cNvSpPr/>
           <p:nvPr/>
         </p:nvSpPr>
@@ -12886,7 +12869,7 @@
       </p:sp>
       <p:sp>
         <p:nvSpPr>
-          <p:cNvPr id="1210217771" name="Прямоугольник 6"/>
+          <p:cNvPr id="1096588799" name="Прямоугольник 6"/>
           <p:cNvSpPr/>
           <p:nvPr/>
         </p:nvSpPr>
@@ -12936,7 +12919,7 @@
       </p:sp>
       <p:sp>
         <p:nvSpPr>
-          <p:cNvPr id="1957287165" name="Заголовок 1"/>
+          <p:cNvPr id="1134403629" name="Заголовок 1"/>
           <p:cNvSpPr>
             <a:spLocks noGrp="1"/>
           </p:cNvSpPr>
@@ -12959,25 +12942,6 @@
             <a:pPr>
               <a:defRPr/>
             </a:pPr>
-            <a:r>
-              <a:rPr lang="ru-RU" sz="3600" b="0" i="0" u="none" strike="noStrike" cap="none" spc="0">
-                <a:solidFill>
-                  <a:schemeClr val="bg1"/>
-                </a:solidFill>
-                <a:latin typeface="+mj-lt"/>
-                <a:ea typeface="+mj-ea"/>
-                <a:cs typeface="+mj-cs"/>
-              </a:rPr>
-              <a:t>Разработка модели упрощенного графического ядра</a:t>
-            </a:r>
-            <a:r>
-              <a:rPr lang="ru-RU" sz="3600">
-                <a:solidFill>
-                  <a:schemeClr val="bg1"/>
-                </a:solidFill>
-              </a:rPr>
-              <a:t>: </a:t>
-            </a:r>
             <a:r>
               <a:rPr lang="ru-RU" sz="3600">
                 <a:solidFill>
@@ -13114,7 +13078,7 @@
       </p:grpSpPr>
       <p:sp>
         <p:nvSpPr>
-          <p:cNvPr id="402041649" name="Объект 2"/>
+          <p:cNvPr id="963941245" name="Объект 2"/>
           <p:cNvSpPr>
             <a:spLocks noGrp="1"/>
           </p:cNvSpPr>
@@ -13123,9 +13087,9 @@
           </p:nvPr>
         </p:nvSpPr>
         <p:spPr bwMode="auto">
-          <a:xfrm>
-            <a:off x="604119" y="2041596"/>
-            <a:ext cx="5044972" cy="3599316"/>
+          <a:xfrm flipH="0" flipV="0">
+            <a:off x="77174" y="1350173"/>
+            <a:ext cx="6838949" cy="5507825"/>
           </a:xfrm>
         </p:spPr>
         <p:txBody>
@@ -13143,7 +13107,15 @@
             </a:r>
             <a:r>
               <a:rPr lang="ru-RU"/>
-              <a:t>блок захвата инструкций из памяти;</a:t>
+              <a:t>блок загрузки инструкций из памяти программ. Вычитывает инструкцию на которую указывает счётчик инструкций (</a:t>
+            </a:r>
+            <a:r>
+              <a:rPr lang="en-US"/>
+              <a:t>PC – program counter</a:t>
+            </a:r>
+            <a:r>
+              <a:rPr lang="ru-RU"/>
+              <a:t>);</a:t>
             </a:r>
             <a:endParaRPr/>
           </a:p>
@@ -13157,7 +13129,23 @@
             </a:r>
             <a:r>
               <a:rPr lang="ru-RU"/>
-              <a:t> – преобразование инструкций в структуры для передачи исполняемым блокам.</a:t>
+              <a:t> – преобразование инструкций в </a:t>
+            </a:r>
+            <a:r>
+              <a:rPr lang="ru-RU"/>
+              <a:t>управляющие сигналы для исполнительных блоков (</a:t>
+            </a:r>
+            <a:r>
+              <a:rPr lang="en-US"/>
+              <a:t>TU, LSU</a:t>
+            </a:r>
+            <a:r>
+              <a:rPr lang="ru-RU"/>
+              <a:t>)</a:t>
+            </a:r>
+            <a:r>
+              <a:rPr lang="en-US"/>
+              <a:t>.</a:t>
             </a:r>
             <a:endParaRPr/>
           </a:p>
@@ -13165,7 +13153,7 @@
       </p:sp>
       <p:sp>
         <p:nvSpPr>
-          <p:cNvPr id="1830861833" name="Номер слайда 3"/>
+          <p:cNvPr id="1083974936" name="Номер слайда 3"/>
           <p:cNvSpPr>
             <a:spLocks noGrp="1"/>
           </p:cNvSpPr>
@@ -13206,7 +13194,7 @@
       </p:sp>
       <p:sp>
         <p:nvSpPr>
-          <p:cNvPr id="2132542029" name="Прямоугольник 5"/>
+          <p:cNvPr id="1511801505" name="Прямоугольник 5"/>
           <p:cNvSpPr/>
           <p:nvPr/>
         </p:nvSpPr>
@@ -13256,7 +13244,7 @@
       </p:sp>
       <p:sp>
         <p:nvSpPr>
-          <p:cNvPr id="330258748" name="Прямоугольник 6"/>
+          <p:cNvPr id="388520019" name="Прямоугольник 6"/>
           <p:cNvSpPr/>
           <p:nvPr/>
         </p:nvSpPr>
@@ -13306,7 +13294,7 @@
       </p:sp>
       <p:sp>
         <p:nvSpPr>
-          <p:cNvPr id="962595235" name="Заголовок 1"/>
+          <p:cNvPr id="1766017754" name="Заголовок 1"/>
           <p:cNvSpPr>
             <a:spLocks noGrp="1"/>
           </p:cNvSpPr>
@@ -13329,25 +13317,6 @@
             <a:pPr>
               <a:defRPr/>
             </a:pPr>
-            <a:r>
-              <a:rPr lang="ru-RU" sz="3600" b="0" i="0" u="none" strike="noStrike" cap="none" spc="0">
-                <a:solidFill>
-                  <a:schemeClr val="bg1"/>
-                </a:solidFill>
-                <a:latin typeface="+mj-lt"/>
-                <a:ea typeface="+mj-ea"/>
-                <a:cs typeface="+mj-cs"/>
-              </a:rPr>
-              <a:t>Разработка модели упрощенного графического ядра</a:t>
-            </a:r>
-            <a:r>
-              <a:rPr lang="ru-RU" sz="3600">
-                <a:solidFill>
-                  <a:schemeClr val="bg1"/>
-                </a:solidFill>
-              </a:rPr>
-              <a:t>: </a:t>
-            </a:r>
             <a:r>
               <a:rPr lang="en-US" sz="3600">
                 <a:solidFill>
@@ -13409,7 +13378,7 @@
 </file>
 
 <file path=ppt/slides/slide13.xml><?xml version="1.0" encoding="utf-8"?>
-<p:sld xmlns:a="http://schemas.openxmlformats.org/drawingml/2006/main" xmlns:r="http://schemas.openxmlformats.org/officeDocument/2006/relationships" xmlns:p="http://schemas.openxmlformats.org/presentationml/2006/main" xmlns:m="http://schemas.openxmlformats.org/officeDocument/2006/math" xmlns:w="http://schemas.openxmlformats.org/wordprocessingml/2006/main" xmlns:mc="http://schemas.openxmlformats.org/markup-compatibility/2006" showMasterPhAnim="0" showMasterSp="1" show="0">
+<p:sld xmlns:a="http://schemas.openxmlformats.org/drawingml/2006/main" xmlns:r="http://schemas.openxmlformats.org/officeDocument/2006/relationships" xmlns:p="http://schemas.openxmlformats.org/presentationml/2006/main" xmlns:m="http://schemas.openxmlformats.org/officeDocument/2006/math" xmlns:w="http://schemas.openxmlformats.org/wordprocessingml/2006/main" xmlns:mc="http://schemas.openxmlformats.org/markup-compatibility/2006" showMasterPhAnim="0" showMasterSp="1" show="1">
   <p:cSld name="">
     <p:bg>
       <p:bgPr shadeToTitle="0">
@@ -13460,7 +13429,7 @@
       </p:grpSpPr>
       <p:sp>
         <p:nvSpPr>
-          <p:cNvPr id="2043590722" name="Объект 2"/>
+          <p:cNvPr id="1018353479" name="Объект 2"/>
           <p:cNvSpPr>
             <a:spLocks noGrp="1"/>
           </p:cNvSpPr>
@@ -13469,14 +13438,14 @@
           </p:nvPr>
         </p:nvSpPr>
         <p:spPr bwMode="auto">
-          <a:xfrm>
-            <a:off x="680319" y="2336872"/>
-            <a:ext cx="5269090" cy="3599316"/>
-          </a:xfrm>
-        </p:spPr>
-        <p:txBody>
-          <a:bodyPr>
-            <a:normAutofit lnSpcReduction="10000"/>
+          <a:xfrm flipH="0" flipV="0">
+            <a:off x="156445" y="1959773"/>
+            <a:ext cx="4816578" cy="3599316"/>
+          </a:xfrm>
+        </p:spPr>
+        <p:txBody>
+          <a:bodyPr vertOverflow="overflow" horzOverflow="overflow" vert="horz" wrap="square" lIns="91440" tIns="45720" rIns="91440" bIns="45720" numCol="1" spcCol="0" rtlCol="0" fromWordArt="0" anchor="t" anchorCtr="0" forceAA="0" upright="0" compatLnSpc="0">
+            <a:normAutofit/>
           </a:bodyPr>
           <a:lstStyle/>
           <a:p>
@@ -13484,106 +13453,80 @@
               <a:defRPr/>
             </a:pPr>
             <a:r>
-              <a:rPr lang="ru-RU"/>
-              <a:t>Необходимы высокоскоростные интерфейсы;</a:t>
-            </a:r>
-            <a:endParaRPr/>
-          </a:p>
-          <a:p>
-            <a:pPr>
-              <a:defRPr/>
-            </a:pPr>
-            <a:r>
-              <a:rPr lang="ru-RU"/>
-              <a:t>В качестве интерфейсов взяты</a:t>
-            </a:r>
-            <a:r>
-              <a:rPr lang="en-US"/>
-              <a:t>: AMBA APB,  AMBA AHB</a:t>
-            </a:r>
-            <a:r>
-              <a:rPr lang="ru-RU"/>
+              <a:rPr lang="ru-RU" sz="1600"/>
+              <a:t>В результате работы:</a:t>
+            </a:r>
+            <a:endParaRPr sz="1600"/>
+          </a:p>
+          <a:p>
+            <a:pPr lvl="1">
+              <a:defRPr/>
+            </a:pPr>
+            <a:r>
+              <a:rPr lang="ru-RU" sz="1600"/>
+              <a:t>Проведен анализ существующих архитектур графических процессоров и ядер</a:t>
+            </a:r>
+            <a:r>
+              <a:rPr lang="en-US" sz="1600"/>
               <a:t>;</a:t>
             </a:r>
-            <a:endParaRPr/>
-          </a:p>
-          <a:p>
-            <a:pPr>
-              <a:defRPr/>
-            </a:pPr>
-            <a:r>
-              <a:rPr lang="ru-RU"/>
-              <a:t>Для </a:t>
-            </a:r>
-            <a:r>
-              <a:rPr lang="en-US"/>
-              <a:t>Regmap</a:t>
-            </a:r>
-            <a:r>
-              <a:rPr lang="ru-RU"/>
-              <a:t> интерфейс </a:t>
-            </a:r>
-            <a:r>
-              <a:rPr lang="en-US"/>
-              <a:t>APB</a:t>
-            </a:r>
-            <a:r>
-              <a:rPr lang="ru-RU"/>
-              <a:t>, где </a:t>
-            </a:r>
-            <a:r>
-              <a:rPr lang="en-US"/>
-              <a:t>Regmap</a:t>
-            </a:r>
-            <a:r>
-              <a:rPr lang="en-US"/>
-              <a:t> - </a:t>
-            </a:r>
-            <a:r>
-              <a:rPr lang="ru-RU"/>
-              <a:t>ведомый;</a:t>
-            </a:r>
-            <a:endParaRPr/>
-          </a:p>
-          <a:p>
-            <a:pPr>
-              <a:defRPr/>
-            </a:pPr>
-            <a:r>
-              <a:rPr lang="ru-RU"/>
-              <a:t>Для </a:t>
-            </a:r>
-            <a:r>
-              <a:rPr lang="en-US"/>
-              <a:t>Fetcher </a:t>
-            </a:r>
-            <a:r>
-              <a:rPr lang="ru-RU"/>
-              <a:t>и </a:t>
-            </a:r>
-            <a:r>
-              <a:rPr lang="en-US"/>
-              <a:t>LSU</a:t>
-            </a:r>
-            <a:r>
-              <a:rPr lang="ru-RU"/>
-              <a:t> интерфейс </a:t>
-            </a:r>
-            <a:r>
-              <a:rPr lang="en-US"/>
-              <a:t>AHB</a:t>
-            </a:r>
-            <a:r>
-              <a:rPr lang="ru-RU"/>
-              <a:t>, где они - ведущие.</a:t>
-            </a:r>
-            <a:endParaRPr lang="en-US"/>
-          </a:p>
-        </p:txBody>
-      </p:sp>
-      <p:sp>
-        <p:nvSpPr>
-          <p:cNvPr id="1941335714" name="Номер слайда 3"/>
+            <a:endParaRPr sz="1600"/>
+          </a:p>
+          <a:p>
+            <a:pPr lvl="1">
+              <a:defRPr/>
+            </a:pPr>
+            <a:r>
+              <a:rPr lang="ru-RU" sz="1600"/>
+              <a:t>Спроектирована минимально необходимая архитектура набора инструкций </a:t>
+            </a:r>
+            <a:r>
+              <a:rPr lang="en-US" sz="1600"/>
+              <a:t>(ISA);</a:t>
+            </a:r>
+            <a:endParaRPr sz="1600"/>
+          </a:p>
+          <a:p>
+            <a:pPr lvl="1">
+              <a:defRPr/>
+            </a:pPr>
+            <a:r>
+              <a:rPr lang="ru-RU" sz="1600"/>
+              <a:t>Разработана архитектура упрощенного графического ядра с использованием метода поблочной декомпозиции;</a:t>
+            </a:r>
+            <a:endParaRPr sz="1600"/>
+          </a:p>
+          <a:p>
+            <a:pPr lvl="1">
+              <a:defRPr/>
+            </a:pPr>
+            <a:r>
+              <a:rPr lang="ru-RU" sz="1600"/>
+              <a:t>Разработана упрощенная модель графического ядра</a:t>
+            </a:r>
+            <a:r>
+              <a:rPr lang="en-US" sz="1600"/>
+              <a:t> </a:t>
+            </a:r>
+            <a:r>
+              <a:rPr lang="ru-RU" sz="1600"/>
+              <a:t>на языке описания аппаратуры </a:t>
+            </a:r>
+            <a:r>
+              <a:rPr lang="en-US" sz="1600"/>
+              <a:t>SystemVerilog</a:t>
+            </a:r>
+            <a:r>
+              <a:rPr lang="ru-RU" sz="1600"/>
+              <a:t>.</a:t>
+            </a:r>
+            <a:endParaRPr sz="1600"/>
+          </a:p>
+        </p:txBody>
+      </p:sp>
+      <p:sp>
+        <p:nvSpPr>
+          <p:cNvPr id="1760509968" name="Номер слайда 3"/>
           <p:cNvSpPr>
             <a:spLocks noGrp="1"/>
           </p:cNvSpPr>
@@ -13604,14 +13547,14 @@
             <a:pPr>
               <a:defRPr/>
             </a:pPr>
-            <a:fld id="{BE2ADD01-EDAB-891B-508A-6962AD7A2457}" type="slidenum">
+            <a:fld id="{1CF8DEEF-AAF2-493E-906B-C0B6A8D6E6A2}" type="slidenum">
               <a:rPr lang="ru-RU" sz="1800">
                 <a:solidFill>
                   <a:schemeClr val="tx1"/>
                 </a:solidFill>
                 <a:latin typeface="Trebuchet MS"/>
               </a:rPr>
-              <a:t>12</a:t>
+              <a:t>13</a:t>
             </a:fld>
             <a:endParaRPr lang="ru-RU">
               <a:solidFill>
@@ -13624,7 +13567,7 @@
       </p:sp>
       <p:sp>
         <p:nvSpPr>
-          <p:cNvPr id="684204292" name="Прямоугольник 5"/>
+          <p:cNvPr id="640739623" name="Прямоугольник 4"/>
           <p:cNvSpPr/>
           <p:nvPr/>
         </p:nvSpPr>
@@ -13674,7 +13617,7 @@
       </p:sp>
       <p:sp>
         <p:nvSpPr>
-          <p:cNvPr id="347670875" name="Прямоугольник 6"/>
+          <p:cNvPr id="335280813" name="Прямоугольник 5"/>
           <p:cNvSpPr/>
           <p:nvPr/>
         </p:nvSpPr>
@@ -13724,7 +13667,7 @@
       </p:sp>
       <p:sp>
         <p:nvSpPr>
-          <p:cNvPr id="27212953" name="Заголовок 1"/>
+          <p:cNvPr id="774046090" name="Заголовок 1"/>
           <p:cNvSpPr>
             <a:spLocks noGrp="1"/>
           </p:cNvSpPr>
@@ -13734,39 +13677,26 @@
         </p:nvSpPr>
         <p:spPr bwMode="auto">
           <a:xfrm>
-            <a:off x="838200" y="-59681"/>
+            <a:off x="838200" y="0"/>
             <a:ext cx="10515600" cy="1325563"/>
           </a:xfrm>
         </p:spPr>
         <p:txBody>
-          <a:bodyPr>
-            <a:normAutofit/>
-          </a:bodyPr>
-          <a:lstStyle/>
-          <a:p>
-            <a:pPr>
-              <a:defRPr/>
-            </a:pPr>
-            <a:r>
-              <a:rPr lang="ru-RU" sz="3600" b="0" i="0" u="none" strike="noStrike" cap="none" spc="0">
-                <a:solidFill>
-                  <a:schemeClr val="bg1"/>
-                </a:solidFill>
-                <a:latin typeface="+mj-lt"/>
-                <a:ea typeface="+mj-ea"/>
-                <a:cs typeface="+mj-cs"/>
-              </a:rPr>
-              <a:t>Разработка модели упрощенного графического ядра</a:t>
-            </a:r>
-            <a:r>
-              <a:rPr lang="ru-RU" sz="3600">
+          <a:bodyPr/>
+          <a:lstStyle/>
+          <a:p>
+            <a:pPr>
+              <a:defRPr/>
+            </a:pPr>
+            <a:r>
+              <a:rPr lang="ru-RU">
                 <a:solidFill>
                   <a:schemeClr val="bg1"/>
                 </a:solidFill>
               </a:rPr>
-              <a:t>: Интерфейсы</a:t>
-            </a:r>
-            <a:endParaRPr sz="3600">
+              <a:t>Заключение</a:t>
+            </a:r>
+            <a:endParaRPr>
               <a:solidFill>
                 <a:schemeClr val="bg1"/>
               </a:solidFill>
@@ -13776,26 +13706,20 @@
       </p:sp>
       <p:pic>
         <p:nvPicPr>
-          <p:cNvPr id="710391347" name=""/>
+          <p:cNvPr id="535113363" name=""/>
           <p:cNvPicPr>
             <a:picLocks noChangeAspect="1"/>
           </p:cNvPicPr>
           <p:nvPr/>
         </p:nvPicPr>
         <p:blipFill rotWithShape="1">
-          <a:blip r:embed="rId3">
-            <a:extLst>
-              <a:ext uri="{96DAC541-7B7A-43D3-8B79-37D633B846F1}">
-                <asvg:svgBlip xmlns:asvg="http://schemas.microsoft.com/office/drawing/2016/SVG/main" r:embed="rId4"/>
-              </a:ext>
-            </a:extLst>
-          </a:blip>
+          <a:blip r:embed="rId3"/>
           <a:stretch/>
         </p:blipFill>
         <p:spPr bwMode="auto">
           <a:xfrm flipH="0" flipV="0">
-            <a:off x="5485251" y="1755279"/>
-            <a:ext cx="5599302" cy="4285682"/>
+            <a:off x="4952470" y="1438274"/>
+            <a:ext cx="7184591" cy="4905374"/>
           </a:xfrm>
           <a:prstGeom prst="rect">
             <a:avLst/>
@@ -13870,7 +13794,7 @@
       </p:grpSpPr>
       <p:sp>
         <p:nvSpPr>
-          <p:cNvPr id="2046775309" name="Объект 2"/>
+          <p:cNvPr id="954651927" name="Объект 2"/>
           <p:cNvSpPr>
             <a:spLocks noGrp="1"/>
           </p:cNvSpPr>
@@ -13878,94 +13802,148 @@
             <p:ph idx="1"/>
           </p:nvPr>
         </p:nvSpPr>
-        <p:spPr bwMode="auto">
-          <a:xfrm>
-            <a:off x="680321" y="2336873"/>
-            <a:ext cx="11753144" cy="3599316"/>
-          </a:xfrm>
-        </p:spPr>
-        <p:txBody>
-          <a:bodyPr/>
-          <a:lstStyle/>
-          <a:p>
-            <a:pPr>
-              <a:defRPr/>
-            </a:pPr>
-            <a:r>
-              <a:rPr lang="ru-RU"/>
-              <a:t>В результате работы:</a:t>
-            </a:r>
-            <a:endParaRPr/>
-          </a:p>
-          <a:p>
-            <a:pPr lvl="1">
-              <a:defRPr/>
-            </a:pPr>
-            <a:r>
-              <a:rPr lang="ru-RU"/>
-              <a:t>Проведен анализ существующих архитектур графических процессоров и ядер</a:t>
-            </a:r>
-            <a:r>
-              <a:rPr lang="en-US"/>
-              <a:t>;</a:t>
-            </a:r>
-            <a:endParaRPr lang="ru-RU"/>
-          </a:p>
-          <a:p>
-            <a:pPr lvl="1">
-              <a:defRPr/>
-            </a:pPr>
-            <a:r>
-              <a:rPr lang="ru-RU"/>
-              <a:t>Спроектирована минимально необходимая архитектура набора инструкций </a:t>
-            </a:r>
-            <a:r>
-              <a:rPr lang="en-US"/>
-              <a:t>(ISA);</a:t>
-            </a:r>
-            <a:endParaRPr/>
-          </a:p>
-          <a:p>
-            <a:pPr lvl="1">
-              <a:defRPr/>
-            </a:pPr>
-            <a:r>
-              <a:rPr lang="ru-RU"/>
-              <a:t>Разработана архитектура упрощенного графического ядра с использованием метода поблочной декомпозиции;</a:t>
-            </a:r>
-            <a:endParaRPr/>
-          </a:p>
-          <a:p>
-            <a:pPr lvl="1">
-              <a:defRPr/>
-            </a:pPr>
-            <a:r>
-              <a:rPr lang="ru-RU"/>
-              <a:t>Разработана упрощенная модель графического ядра</a:t>
-            </a:r>
-            <a:r>
-              <a:rPr lang="en-US"/>
-              <a:t> </a:t>
-            </a:r>
-            <a:r>
-              <a:rPr lang="ru-RU"/>
-              <a:t>на языке описания аппаратуры </a:t>
-            </a:r>
-            <a:r>
-              <a:rPr lang="en-US"/>
-              <a:t>SystemVerilog</a:t>
-            </a:r>
-            <a:r>
-              <a:rPr lang="ru-RU"/>
+        <p:spPr bwMode="auto"/>
+        <p:txBody>
+          <a:bodyPr vertOverflow="overflow" horzOverflow="overflow" vert="horz" wrap="square" lIns="91440" tIns="45720" rIns="91440" bIns="45720" numCol="1" spcCol="0" rtlCol="0" fromWordArt="0" anchor="t" anchorCtr="0" forceAA="0" compatLnSpc="0">
+            <a:normAutofit/>
+          </a:bodyPr>
+          <a:lstStyle/>
+          <a:p>
+            <a:pPr>
+              <a:defRPr/>
+            </a:pPr>
+            <a:r>
+              <a:rPr lang="ru-RU" sz="2000" b="0" i="0" u="none">
+                <a:solidFill>
+                  <a:srgbClr val="000000"/>
+                </a:solidFill>
+                <a:latin typeface="Trebuchet MS"/>
+                <a:ea typeface="Trebuchet MS"/>
+                <a:cs typeface="Trebuchet MS"/>
+              </a:rPr>
+              <a:t>Старухин Д</a:t>
+            </a:r>
+            <a:r>
+              <a:rPr sz="2000" b="0" i="0" u="none">
+                <a:solidFill>
+                  <a:srgbClr val="000000"/>
+                </a:solidFill>
+                <a:latin typeface="Trebuchet MS"/>
+                <a:ea typeface="Trebuchet MS"/>
+                <a:cs typeface="Trebuchet MS"/>
+              </a:rPr>
               <a:t>.</a:t>
             </a:r>
-            <a:endParaRPr/>
-          </a:p>
-        </p:txBody>
-      </p:sp>
-      <p:sp>
-        <p:nvSpPr>
-          <p:cNvPr id="478779720" name="Номер слайда 3"/>
+            <a:r>
+              <a:rPr lang="ru-RU" sz="2000" b="0" i="0" u="none">
+                <a:solidFill>
+                  <a:srgbClr val="000000"/>
+                </a:solidFill>
+                <a:latin typeface="Trebuchet MS"/>
+                <a:ea typeface="Trebuchet MS"/>
+                <a:cs typeface="Trebuchet MS"/>
+              </a:rPr>
+              <a:t>М</a:t>
+            </a:r>
+            <a:r>
+              <a:rPr sz="2000" b="0" i="0" u="none">
+                <a:solidFill>
+                  <a:srgbClr val="000000"/>
+                </a:solidFill>
+                <a:latin typeface="Trebuchet MS"/>
+                <a:ea typeface="Trebuchet MS"/>
+                <a:cs typeface="Trebuchet MS"/>
+              </a:rPr>
+              <a:t>. Обзор аналогов 2D графических ускорителей во встроенных системах / И.А. Дудкин, Д.М. Старухин, В.В. Черкасов \/\/ Математика, информационные технологии, приложения : сборник материалов Межвузовской научной конференции «Математика, информационные технологии, приложения» (Воронеж, 24-25 апреля 2025 г.). -- Воронеж : Издательско-полиграфический центр «Научная книга», 2025. -- С.209-216</a:t>
+            </a:r>
+            <a:endParaRPr sz="4800">
+              <a:solidFill>
+                <a:schemeClr val="bg1"/>
+              </a:solidFill>
+              <a:latin typeface="Trebuchet MS"/>
+              <a:cs typeface="Trebuchet MS"/>
+            </a:endParaRPr>
+          </a:p>
+          <a:p>
+            <a:pPr>
+              <a:defRPr/>
+            </a:pPr>
+            <a:r>
+              <a:rPr lang="ru-RU" sz="2000" b="0" i="0" u="none">
+                <a:solidFill>
+                  <a:srgbClr val="000000"/>
+                </a:solidFill>
+                <a:latin typeface="Trebuchet MS"/>
+                <a:ea typeface="Trebuchet MS"/>
+                <a:cs typeface="Trebuchet MS"/>
+              </a:rPr>
+              <a:t>Старухин Д</a:t>
+            </a:r>
+            <a:r>
+              <a:rPr sz="2000" b="0" i="0" u="none">
+                <a:solidFill>
+                  <a:srgbClr val="000000"/>
+                </a:solidFill>
+                <a:latin typeface="Trebuchet MS"/>
+                <a:ea typeface="Trebuchet MS"/>
+                <a:cs typeface="Trebuchet MS"/>
+              </a:rPr>
+              <a:t>.</a:t>
+            </a:r>
+            <a:r>
+              <a:rPr lang="ru-RU" sz="2000" b="0" i="0" u="none">
+                <a:solidFill>
+                  <a:srgbClr val="000000"/>
+                </a:solidFill>
+                <a:latin typeface="Trebuchet MS"/>
+                <a:ea typeface="Trebuchet MS"/>
+                <a:cs typeface="Trebuchet MS"/>
+              </a:rPr>
+              <a:t>М</a:t>
+            </a:r>
+            <a:r>
+              <a:rPr sz="2000" b="0" i="0" u="none">
+                <a:solidFill>
+                  <a:srgbClr val="000000"/>
+                </a:solidFill>
+                <a:latin typeface="Trebuchet MS"/>
+                <a:ea typeface="Trebuchet MS"/>
+                <a:cs typeface="Trebuchet MS"/>
+              </a:rPr>
+              <a:t>. </a:t>
+            </a:r>
+            <a:r>
+              <a:rPr sz="2200" b="0" i="0" u="none">
+                <a:solidFill>
+                  <a:srgbClr val="000000"/>
+                </a:solidFill>
+                <a:latin typeface="Trebuchet MS"/>
+                <a:ea typeface="Trebuchet MS"/>
+                <a:cs typeface="Trebuchet MS"/>
+              </a:rPr>
+              <a:t>Разработка архитектуры аппаратной реализации 2D графического ускорителя / И.А. Дудкин, Д.М. Старухин, В.В. Черкасов \/\/ Актуальные проблемы прикладной математики, информатики и механики : сборник материалов Международной научной конференции «Актуальные проблемы прикладной математики, информатики и механики» (Воронеж, 1-3 декабря 2025 г.). -- Воронеж : ООО «Издательство Прометей», 2026. -- С.1584-1588.</a:t>
+            </a:r>
+            <a:br>
+              <a:rPr sz="2200" b="0" i="0" u="none">
+                <a:solidFill>
+                  <a:srgbClr val="000000"/>
+                </a:solidFill>
+                <a:latin typeface="Trebuchet MS"/>
+                <a:ea typeface="Trebuchet MS"/>
+                <a:cs typeface="Trebuchet MS"/>
+              </a:rPr>
+            </a:br>
+            <a:endParaRPr lang="ru-RU">
+              <a:solidFill>
+                <a:schemeClr val="bg1"/>
+              </a:solidFill>
+            </a:endParaRPr>
+          </a:p>
+        </p:txBody>
+      </p:sp>
+      <p:sp>
+        <p:nvSpPr>
+          <p:cNvPr id="2008767247" name="Номер слайда 3"/>
           <p:cNvSpPr>
             <a:spLocks noGrp="1"/>
           </p:cNvSpPr>
@@ -13975,7 +13953,7 @@
         </p:nvSpPr>
         <p:spPr bwMode="auto">
           <a:xfrm>
-            <a:off x="11084554" y="6492875"/>
+            <a:off x="11084553" y="6492875"/>
             <a:ext cx="1052508" cy="365125"/>
           </a:xfrm>
         </p:spPr>
@@ -13993,7 +13971,7 @@
                 </a:solidFill>
                 <a:latin typeface="Trebuchet MS"/>
               </a:rPr>
-              <a:t>13</a:t>
+              <a:t>14</a:t>
             </a:fld>
             <a:endParaRPr lang="ru-RU">
               <a:solidFill>
@@ -14006,7 +13984,7 @@
       </p:sp>
       <p:sp>
         <p:nvSpPr>
-          <p:cNvPr id="772204101" name="Прямоугольник 4"/>
+          <p:cNvPr id="1438935459" name="Прямоугольник 4"/>
           <p:cNvSpPr/>
           <p:nvPr/>
         </p:nvSpPr>
@@ -14056,7 +14034,7 @@
       </p:sp>
       <p:sp>
         <p:nvSpPr>
-          <p:cNvPr id="587986942" name="Прямоугольник 5"/>
+          <p:cNvPr id="504451494" name="Прямоугольник 5"/>
           <p:cNvSpPr/>
           <p:nvPr/>
         </p:nvSpPr>
@@ -14106,7 +14084,7 @@
       </p:sp>
       <p:sp>
         <p:nvSpPr>
-          <p:cNvPr id="219752888" name="Заголовок 1"/>
+          <p:cNvPr id="723042891" name="Заголовок 1"/>
           <p:cNvSpPr>
             <a:spLocks noGrp="1"/>
           </p:cNvSpPr>
@@ -14116,7 +14094,7 @@
         </p:nvSpPr>
         <p:spPr bwMode="auto">
           <a:xfrm>
-            <a:off x="838200" y="0"/>
+            <a:off x="838200" y="18255"/>
             <a:ext cx="10515600" cy="1325563"/>
           </a:xfrm>
         </p:spPr>
@@ -14133,7 +14111,7 @@
                   <a:schemeClr val="bg1"/>
                 </a:solidFill>
               </a:rPr>
-              <a:t>Заключение</a:t>
+              <a:t>Публикация статьи</a:t>
             </a:r>
             <a:endParaRPr>
               <a:solidFill>
@@ -14211,7 +14189,7 @@
       </p:grpSpPr>
       <p:sp>
         <p:nvSpPr>
-          <p:cNvPr id="213781125" name="Объект 2"/>
+          <p:cNvPr id="172445670" name="Объект 2"/>
           <p:cNvSpPr>
             <a:spLocks noGrp="1"/>
           </p:cNvSpPr>
@@ -14221,135 +14199,12 @@
         </p:nvSpPr>
         <p:spPr bwMode="auto"/>
         <p:txBody>
-          <a:bodyPr vertOverflow="overflow" horzOverflow="overflow" vert="horz" wrap="square" lIns="91440" tIns="45720" rIns="91440" bIns="45720" numCol="1" spcCol="0" rtlCol="0" fromWordArt="0" anchor="t" anchorCtr="0" forceAA="0" compatLnSpc="0">
-            <a:normAutofit/>
-          </a:bodyPr>
-          <a:lstStyle/>
-          <a:p>
-            <a:pPr>
-              <a:defRPr/>
-            </a:pPr>
-            <a:r>
-              <a:rPr lang="ru-RU" sz="2000" b="0" i="0" u="none">
-                <a:solidFill>
-                  <a:srgbClr val="000000"/>
-                </a:solidFill>
-                <a:latin typeface="Trebuchet MS"/>
-                <a:ea typeface="Trebuchet MS"/>
-                <a:cs typeface="Trebuchet MS"/>
-              </a:rPr>
-              <a:t>Старухин Д</a:t>
-            </a:r>
-            <a:r>
-              <a:rPr sz="2000" b="0" i="0" u="none">
-                <a:solidFill>
-                  <a:srgbClr val="000000"/>
-                </a:solidFill>
-                <a:latin typeface="Trebuchet MS"/>
-                <a:ea typeface="Trebuchet MS"/>
-                <a:cs typeface="Trebuchet MS"/>
-              </a:rPr>
-              <a:t>.</a:t>
-            </a:r>
-            <a:r>
-              <a:rPr lang="ru-RU" sz="2000" b="0" i="0" u="none">
-                <a:solidFill>
-                  <a:srgbClr val="000000"/>
-                </a:solidFill>
-                <a:latin typeface="Trebuchet MS"/>
-                <a:ea typeface="Trebuchet MS"/>
-                <a:cs typeface="Trebuchet MS"/>
-              </a:rPr>
-              <a:t>М</a:t>
-            </a:r>
-            <a:r>
-              <a:rPr sz="2000" b="0" i="0" u="none">
-                <a:solidFill>
-                  <a:srgbClr val="000000"/>
-                </a:solidFill>
-                <a:latin typeface="Trebuchet MS"/>
-                <a:ea typeface="Trebuchet MS"/>
-                <a:cs typeface="Trebuchet MS"/>
-              </a:rPr>
-              <a:t>. Обзор аналогов 2D графических ускорителей во встроенных системах / И.А. Дудкин, Д.М. Старухин, В.В. Черкасов \/\/ Математика, информационные технологии, приложения : сборник материалов Межвузовской научной конференции «Математика, информационные технологии, приложения» (Воронеж, 24-25 апреля 2025 г.). -- Воронеж : Издательско-полиграфический центр «Научная книга», 2025. -- С.209-216</a:t>
-            </a:r>
-            <a:endParaRPr sz="4800">
-              <a:solidFill>
-                <a:schemeClr val="bg1"/>
-              </a:solidFill>
-              <a:latin typeface="Trebuchet MS"/>
-              <a:cs typeface="Trebuchet MS"/>
-            </a:endParaRPr>
-          </a:p>
-          <a:p>
-            <a:pPr>
-              <a:defRPr/>
-            </a:pPr>
-            <a:r>
-              <a:rPr lang="ru-RU" sz="2000" b="0" i="0" u="none">
-                <a:solidFill>
-                  <a:srgbClr val="000000"/>
-                </a:solidFill>
-                <a:latin typeface="Trebuchet MS"/>
-                <a:ea typeface="Trebuchet MS"/>
-                <a:cs typeface="Trebuchet MS"/>
-              </a:rPr>
-              <a:t>Старухин Д</a:t>
-            </a:r>
-            <a:r>
-              <a:rPr sz="2000" b="0" i="0" u="none">
-                <a:solidFill>
-                  <a:srgbClr val="000000"/>
-                </a:solidFill>
-                <a:latin typeface="Trebuchet MS"/>
-                <a:ea typeface="Trebuchet MS"/>
-                <a:cs typeface="Trebuchet MS"/>
-              </a:rPr>
-              <a:t>.</a:t>
-            </a:r>
-            <a:r>
-              <a:rPr lang="ru-RU" sz="2000" b="0" i="0" u="none">
-                <a:solidFill>
-                  <a:srgbClr val="000000"/>
-                </a:solidFill>
-                <a:latin typeface="Trebuchet MS"/>
-                <a:ea typeface="Trebuchet MS"/>
-                <a:cs typeface="Trebuchet MS"/>
-              </a:rPr>
-              <a:t>М</a:t>
-            </a:r>
-            <a:r>
-              <a:rPr sz="2000" b="0" i="0" u="none">
-                <a:solidFill>
-                  <a:srgbClr val="000000"/>
-                </a:solidFill>
-                <a:latin typeface="Trebuchet MS"/>
-                <a:ea typeface="Trebuchet MS"/>
-                <a:cs typeface="Trebuchet MS"/>
-              </a:rPr>
-              <a:t>. </a:t>
-            </a:r>
-            <a:r>
-              <a:rPr sz="2200" b="0" i="0" u="none">
-                <a:solidFill>
-                  <a:srgbClr val="000000"/>
-                </a:solidFill>
-                <a:latin typeface="Trebuchet MS"/>
-                <a:ea typeface="Trebuchet MS"/>
-                <a:cs typeface="Trebuchet MS"/>
-              </a:rPr>
-              <a:t>Разработка архитектуры аппаратной реализации 2D графического ускорителя / И.А. Дудкин, Д.М. Старухин, В.В. Черкасов \/\/ Актуальные проблемы прикладной математики, информатики и механики : сборник материалов Международной научной конференции «Актуальные проблемы прикладной математики, информатики и механики» (Воронеж, 1-3 декабря 2025 г.). -- Воронеж : ООО «Издательство Прометей», 2026. -- С.1584-1588.</a:t>
-            </a:r>
-            <a:br>
-              <a:rPr sz="2200" b="0" i="0" u="none">
-                <a:solidFill>
-                  <a:srgbClr val="000000"/>
-                </a:solidFill>
-                <a:latin typeface="Trebuchet MS"/>
-                <a:ea typeface="Trebuchet MS"/>
-                <a:cs typeface="Trebuchet MS"/>
-              </a:rPr>
-            </a:br>
+          <a:bodyPr/>
+          <a:lstStyle/>
+          <a:p>
+            <a:pPr>
+              <a:defRPr/>
+            </a:pPr>
             <a:endParaRPr lang="ru-RU">
               <a:solidFill>
                 <a:schemeClr val="bg1"/>
@@ -14360,7 +14215,7 @@
       </p:sp>
       <p:sp>
         <p:nvSpPr>
-          <p:cNvPr id="1849573552" name="Номер слайда 3"/>
+          <p:cNvPr id="144927220" name="Номер слайда 3"/>
           <p:cNvSpPr>
             <a:spLocks noGrp="1"/>
           </p:cNvSpPr>
@@ -14388,9 +14243,9 @@
                 </a:solidFill>
                 <a:latin typeface="Trebuchet MS"/>
               </a:rPr>
-              <a:t>14</a:t>
+              <a:t>15</a:t>
             </a:fld>
-            <a:endParaRPr lang="ru-RU">
+            <a:endParaRPr lang="ru-RU" sz="1800">
               <a:solidFill>
                 <a:schemeClr val="tx1"/>
               </a:solidFill>
@@ -14401,7 +14256,7 @@
       </p:sp>
       <p:sp>
         <p:nvSpPr>
-          <p:cNvPr id="1247196733" name="Прямоугольник 4"/>
+          <p:cNvPr id="1279456680" name="Прямоугольник 4"/>
           <p:cNvSpPr/>
           <p:nvPr/>
         </p:nvSpPr>
@@ -14451,7 +14306,7 @@
       </p:sp>
       <p:sp>
         <p:nvSpPr>
-          <p:cNvPr id="211312007" name="Прямоугольник 5"/>
+          <p:cNvPr id="1607240024" name="Прямоугольник 5"/>
           <p:cNvSpPr/>
           <p:nvPr/>
         </p:nvSpPr>
@@ -14501,279 +14356,7 @@
       </p:sp>
       <p:sp>
         <p:nvSpPr>
-          <p:cNvPr id="431674948" name="Заголовок 1"/>
-          <p:cNvSpPr>
-            <a:spLocks noGrp="1"/>
-          </p:cNvSpPr>
-          <p:nvPr>
-            <p:ph type="title"/>
-          </p:nvPr>
-        </p:nvSpPr>
-        <p:spPr bwMode="auto">
-          <a:xfrm>
-            <a:off x="838200" y="18255"/>
-            <a:ext cx="10515600" cy="1325563"/>
-          </a:xfrm>
-        </p:spPr>
-        <p:txBody>
-          <a:bodyPr/>
-          <a:lstStyle/>
-          <a:p>
-            <a:pPr>
-              <a:defRPr/>
-            </a:pPr>
-            <a:r>
-              <a:rPr lang="ru-RU">
-                <a:solidFill>
-                  <a:schemeClr val="bg1"/>
-                </a:solidFill>
-              </a:rPr>
-              <a:t>Публикация статьи</a:t>
-            </a:r>
-            <a:endParaRPr>
-              <a:solidFill>
-                <a:schemeClr val="bg1"/>
-              </a:solidFill>
-            </a:endParaRPr>
-          </a:p>
-        </p:txBody>
-      </p:sp>
-    </p:spTree>
-  </p:cSld>
-  <p:clrMapOvr>
-    <a:masterClrMapping/>
-  </p:clrMapOvr>
-  <mc:AlternateContent xmlns:mc="http://schemas.openxmlformats.org/markup-compatibility/2006">
-    <mc:Choice xmlns:p159="http://schemas.microsoft.com/office/powerpoint/2015/09/main" xmlns:p14="http://schemas.microsoft.com/office/powerpoint/2010/main" Requires="p159">
-      <p:transition p14:dur="500" advClick="1"/>
-    </mc:Choice>
-    <mc:Fallback>
-      <p:transition advClick="1"/>
-    </mc:Fallback>
-  </mc:AlternateContent>
-</p:sld>
-</file>
-
-<file path=ppt/slides/slide16.xml><?xml version="1.0" encoding="utf-8"?>
-<p:sld xmlns:a="http://schemas.openxmlformats.org/drawingml/2006/main" xmlns:r="http://schemas.openxmlformats.org/officeDocument/2006/relationships" xmlns:p="http://schemas.openxmlformats.org/presentationml/2006/main" xmlns:m="http://schemas.openxmlformats.org/officeDocument/2006/math" xmlns:w="http://schemas.openxmlformats.org/wordprocessingml/2006/main" xmlns:mc="http://schemas.openxmlformats.org/markup-compatibility/2006" showMasterPhAnim="0" showMasterSp="1" show="1">
-  <p:cSld name="">
-    <p:bg>
-      <p:bgPr shadeToTitle="0">
-        <a:gradFill>
-          <a:gsLst>
-            <a:gs pos="0">
-              <a:schemeClr val="accent1">
-                <a:lumMod val="5000"/>
-                <a:lumOff val="95000"/>
-              </a:schemeClr>
-            </a:gs>
-            <a:gs pos="74000">
-              <a:schemeClr val="accent1">
-                <a:lumMod val="45000"/>
-                <a:lumOff val="55000"/>
-              </a:schemeClr>
-            </a:gs>
-            <a:gs pos="83000">
-              <a:schemeClr val="accent1">
-                <a:lumMod val="45000"/>
-                <a:lumOff val="55000"/>
-              </a:schemeClr>
-            </a:gs>
-            <a:gs pos="100000">
-              <a:schemeClr val="accent1">
-                <a:lumMod val="30000"/>
-                <a:lumOff val="70000"/>
-              </a:schemeClr>
-            </a:gs>
-          </a:gsLst>
-          <a:lin ang="13500000" scaled="1"/>
-        </a:gradFill>
-      </p:bgPr>
-    </p:bg>
-    <p:spTree>
-      <p:nvGrpSpPr>
-        <p:cNvPr id="1" name=""/>
-        <p:cNvGrpSpPr/>
-        <p:nvPr/>
-      </p:nvGrpSpPr>
-      <p:grpSpPr bwMode="auto">
-        <a:xfrm>
-          <a:off x="0" y="0"/>
-          <a:ext cx="0" cy="0"/>
-          <a:chOff x="0" y="0"/>
-          <a:chExt cx="0" cy="0"/>
-        </a:xfrm>
-      </p:grpSpPr>
-      <p:sp>
-        <p:nvSpPr>
-          <p:cNvPr id="1674598459" name="Объект 2"/>
-          <p:cNvSpPr>
-            <a:spLocks noGrp="1"/>
-          </p:cNvSpPr>
-          <p:nvPr>
-            <p:ph idx="1"/>
-          </p:nvPr>
-        </p:nvSpPr>
-        <p:spPr bwMode="auto"/>
-        <p:txBody>
-          <a:bodyPr/>
-          <a:lstStyle/>
-          <a:p>
-            <a:pPr>
-              <a:defRPr/>
-            </a:pPr>
-            <a:endParaRPr lang="ru-RU">
-              <a:solidFill>
-                <a:schemeClr val="bg1"/>
-              </a:solidFill>
-            </a:endParaRPr>
-          </a:p>
-        </p:txBody>
-      </p:sp>
-      <p:sp>
-        <p:nvSpPr>
-          <p:cNvPr id="664510030" name="Номер слайда 3"/>
-          <p:cNvSpPr>
-            <a:spLocks noGrp="1"/>
-          </p:cNvSpPr>
-          <p:nvPr>
-            <p:ph type="sldNum" sz="quarter" idx="12"/>
-          </p:nvPr>
-        </p:nvSpPr>
-        <p:spPr bwMode="auto">
-          <a:xfrm>
-            <a:off x="11084553" y="6492875"/>
-            <a:ext cx="1052508" cy="365125"/>
-          </a:xfrm>
-        </p:spPr>
-        <p:txBody>
-          <a:bodyPr/>
-          <a:lstStyle/>
-          <a:p>
-            <a:pPr>
-              <a:defRPr/>
-            </a:pPr>
-            <a:fld id="{1CF8DEEF-AAF2-493E-906B-C0B6A8D6E6A2}" type="slidenum">
-              <a:rPr lang="ru-RU" sz="1800">
-                <a:solidFill>
-                  <a:schemeClr val="tx1"/>
-                </a:solidFill>
-                <a:latin typeface="Trebuchet MS"/>
-              </a:rPr>
-              <a:t>15</a:t>
-            </a:fld>
-            <a:endParaRPr lang="ru-RU" sz="1800">
-              <a:solidFill>
-                <a:schemeClr val="tx1"/>
-              </a:solidFill>
-              <a:latin typeface="Trebuchet MS"/>
-            </a:endParaRPr>
-          </a:p>
-        </p:txBody>
-      </p:sp>
-      <p:sp>
-        <p:nvSpPr>
-          <p:cNvPr id="1722892441" name="Прямоугольник 4"/>
-          <p:cNvSpPr/>
-          <p:nvPr/>
-        </p:nvSpPr>
-        <p:spPr bwMode="auto">
-          <a:xfrm>
-            <a:off x="-9298" y="-10415"/>
-            <a:ext cx="12210596" cy="1160099"/>
-          </a:xfrm>
-          <a:prstGeom prst="rect">
-            <a:avLst/>
-          </a:prstGeom>
-          <a:solidFill>
-            <a:srgbClr val="1A3260">
-              <a:alpha val="65098"/>
-            </a:srgbClr>
-          </a:solidFill>
-          <a:ln>
-            <a:noFill/>
-          </a:ln>
-        </p:spPr>
-        <p:style>
-          <a:lnRef idx="2">
-            <a:schemeClr val="accent1">
-              <a:shade val="50000"/>
-            </a:schemeClr>
-          </a:lnRef>
-          <a:fillRef idx="1">
-            <a:schemeClr val="accent1"/>
-          </a:fillRef>
-          <a:effectRef idx="0">
-            <a:schemeClr val="accent1"/>
-          </a:effectRef>
-          <a:fontRef idx="minor">
-            <a:schemeClr val="lt1"/>
-          </a:fontRef>
-        </p:style>
-        <p:txBody>
-          <a:bodyPr rtlCol="0" anchor="ctr"/>
-          <a:lstStyle/>
-          <a:p>
-            <a:pPr algn="ctr">
-              <a:defRPr/>
-            </a:pPr>
-            <a:endParaRPr lang="ru-RU"/>
-          </a:p>
-        </p:txBody>
-      </p:sp>
-      <p:sp>
-        <p:nvSpPr>
-          <p:cNvPr id="1268552919" name="Прямоугольник 5"/>
-          <p:cNvSpPr/>
-          <p:nvPr/>
-        </p:nvSpPr>
-        <p:spPr bwMode="auto">
-          <a:xfrm>
-            <a:off x="0" y="1181591"/>
-            <a:ext cx="12201298" cy="168583"/>
-          </a:xfrm>
-          <a:prstGeom prst="rect">
-            <a:avLst/>
-          </a:prstGeom>
-          <a:solidFill>
-            <a:srgbClr val="000000">
-              <a:alpha val="65098"/>
-            </a:srgbClr>
-          </a:solidFill>
-          <a:ln>
-            <a:noFill/>
-          </a:ln>
-        </p:spPr>
-        <p:style>
-          <a:lnRef idx="2">
-            <a:schemeClr val="accent1">
-              <a:shade val="50000"/>
-            </a:schemeClr>
-          </a:lnRef>
-          <a:fillRef idx="1">
-            <a:schemeClr val="accent1"/>
-          </a:fillRef>
-          <a:effectRef idx="0">
-            <a:schemeClr val="accent1"/>
-          </a:effectRef>
-          <a:fontRef idx="minor">
-            <a:schemeClr val="lt1"/>
-          </a:fontRef>
-        </p:style>
-        <p:txBody>
-          <a:bodyPr rtlCol="0" anchor="ctr"/>
-          <a:lstStyle/>
-          <a:p>
-            <a:pPr algn="ctr">
-              <a:defRPr/>
-            </a:pPr>
-            <a:endParaRPr lang="ru-RU"/>
-          </a:p>
-        </p:txBody>
-      </p:sp>
-      <p:sp>
-        <p:nvSpPr>
-          <p:cNvPr id="993902618" name="Заголовок 1"/>
+          <p:cNvPr id="40931380" name="Заголовок 1"/>
           <p:cNvSpPr>
             <a:spLocks noGrp="1"/>
           </p:cNvSpPr>
@@ -14878,7 +14461,7 @@
       </p:grpSpPr>
       <p:sp>
         <p:nvSpPr>
-          <p:cNvPr id="540688655" name="Прямоугольник 4"/>
+          <p:cNvPr id="1045420831" name="Прямоугольник 4"/>
           <p:cNvSpPr/>
           <p:nvPr/>
         </p:nvSpPr>
@@ -14928,7 +14511,7 @@
       </p:sp>
       <p:sp>
         <p:nvSpPr>
-          <p:cNvPr id="869604524" name="Заголовок 1"/>
+          <p:cNvPr id="1134414186" name="Заголовок 1"/>
           <p:cNvSpPr>
             <a:spLocks noGrp="1"/>
           </p:cNvSpPr>
@@ -14967,7 +14550,7 @@
       </p:sp>
       <p:sp>
         <p:nvSpPr>
-          <p:cNvPr id="1390165828" name="Объект 2"/>
+          <p:cNvPr id="66902840" name="Объект 2"/>
           <p:cNvSpPr>
             <a:spLocks noGrp="1"/>
           </p:cNvSpPr>
@@ -15005,7 +14588,7 @@
                   <a:schemeClr val="tx1"/>
                 </a:solidFill>
               </a:rPr>
-              <a:t> – это специализированный процессор, оптимизированный для параллельной обработки вычислительных данных;</a:t>
+              <a:t> – это специализированный процессор, оптимизированный для параллельной обработки данных;</a:t>
             </a:r>
             <a:endParaRPr lang="ru-RU">
               <a:solidFill>
@@ -15041,7 +14624,7 @@
                   <a:schemeClr val="tx1"/>
                 </a:solidFill>
               </a:rPr>
-              <a:t>Основные компании-разработчики графических ускорителей: </a:t>
+              <a:t>Основные компании-разработчики дискретных графических ускорителей: </a:t>
             </a:r>
             <a:r>
               <a:rPr lang="en-US">
@@ -15049,7 +14632,7 @@
                   <a:schemeClr val="tx1"/>
                 </a:solidFill>
               </a:rPr>
-              <a:t>AMD </a:t>
+              <a:t>AMD,</a:t>
             </a:r>
             <a:r>
               <a:rPr lang="ru-RU">
@@ -15057,7 +14640,7 @@
                   <a:schemeClr val="tx1"/>
                 </a:solidFill>
               </a:rPr>
-              <a:t>и </a:t>
+              <a:t> </a:t>
             </a:r>
             <a:r>
               <a:rPr lang="en-US">
@@ -15065,7 +14648,31 @@
                   <a:schemeClr val="tx1"/>
                 </a:solidFill>
               </a:rPr>
-              <a:t>NVIDIA</a:t>
+              <a:t>NVIDIA, Intel (c </a:t>
+            </a:r>
+            <a:r>
+              <a:rPr lang="ru-RU">
+                <a:solidFill>
+                  <a:schemeClr val="tx1"/>
+                </a:solidFill>
+              </a:rPr>
+              <a:t>недавних пор</a:t>
+            </a:r>
+            <a:r>
+              <a:rPr lang="en-US">
+                <a:solidFill>
+                  <a:schemeClr val="tx1"/>
+                </a:solidFill>
+              </a:rPr>
+              <a:t>)</a:t>
+            </a:r>
+            <a:r>
+              <a:rPr lang="ru-RU">
+                <a:solidFill>
+                  <a:schemeClr val="tx1"/>
+                </a:solidFill>
+              </a:rPr>
+              <a:t>.</a:t>
             </a:r>
             <a:endParaRPr lang="ru-RU">
               <a:solidFill>
@@ -15077,7 +14684,7 @@
       </p:sp>
       <p:sp>
         <p:nvSpPr>
-          <p:cNvPr id="541650073" name="Номер слайда 3"/>
+          <p:cNvPr id="645700091" name="Номер слайда 3"/>
           <p:cNvSpPr>
             <a:spLocks noGrp="1"/>
           </p:cNvSpPr>
@@ -15118,7 +14725,7 @@
       </p:sp>
       <p:sp>
         <p:nvSpPr>
-          <p:cNvPr id="1643542223" name="Прямоугольник 5"/>
+          <p:cNvPr id="778515660" name="Прямоугольник 5"/>
           <p:cNvSpPr/>
           <p:nvPr/>
         </p:nvSpPr>
@@ -15234,7 +14841,7 @@
       </p:grpSpPr>
       <p:sp>
         <p:nvSpPr>
-          <p:cNvPr id="926397687" name="Объект 2"/>
+          <p:cNvPr id="1483331314" name="Объект 2"/>
           <p:cNvSpPr>
             <a:spLocks noGrp="1"/>
           </p:cNvSpPr>
@@ -15273,7 +14880,7 @@
             </a:pPr>
             <a:r>
               <a:rPr lang="ru-RU" sz="2000"/>
-              <a:t>Разработать упрощенную модель графического ядра на языке описания аппаратуры </a:t>
+              <a:t>Разработать модель упрощённого графического ядра на языке описания аппаратуры </a:t>
             </a:r>
             <a:r>
               <a:rPr lang="en-US" sz="2000"/>
@@ -15311,7 +14918,7 @@
             </a:pPr>
             <a:r>
               <a:rPr lang="ru-RU" sz="2000"/>
-              <a:t>Спроектировать минимальную необходимую архитектуру набора инструкций (</a:t>
+              <a:t>Спроектировать минимально необходимую архитектуру набора инструкций (</a:t>
             </a:r>
             <a:r>
               <a:rPr lang="en-US" sz="2000"/>
@@ -15347,7 +14954,7 @@
       </p:sp>
       <p:sp>
         <p:nvSpPr>
-          <p:cNvPr id="2016395327" name="Номер слайда 3"/>
+          <p:cNvPr id="672877458" name="Номер слайда 3"/>
           <p:cNvSpPr>
             <a:spLocks noGrp="1"/>
           </p:cNvSpPr>
@@ -15388,7 +14995,7 @@
       </p:sp>
       <p:sp>
         <p:nvSpPr>
-          <p:cNvPr id="726802362" name="Прямоугольник 5"/>
+          <p:cNvPr id="1052467105" name="Прямоугольник 5"/>
           <p:cNvSpPr/>
           <p:nvPr/>
         </p:nvSpPr>
@@ -15438,7 +15045,7 @@
       </p:sp>
       <p:sp>
         <p:nvSpPr>
-          <p:cNvPr id="1717735568" name="Заголовок 1"/>
+          <p:cNvPr id="1614169718" name="Заголовок 1"/>
           <p:cNvSpPr>
             <a:spLocks noGrp="1"/>
           </p:cNvSpPr>
@@ -15477,7 +15084,7 @@
       </p:sp>
       <p:sp>
         <p:nvSpPr>
-          <p:cNvPr id="244443748" name="Прямоугольник 6"/>
+          <p:cNvPr id="1618619112" name="Прямоугольник 6"/>
           <p:cNvSpPr/>
           <p:nvPr/>
         </p:nvSpPr>
@@ -15593,7 +15200,7 @@
       </p:grpSpPr>
       <p:sp>
         <p:nvSpPr>
-          <p:cNvPr id="159789626" name="Объект 2"/>
+          <p:cNvPr id="1769514325" name="Объект 2"/>
           <p:cNvSpPr>
             <a:spLocks noGrp="1"/>
           </p:cNvSpPr>
@@ -15604,7 +15211,7 @@
         <p:spPr bwMode="auto"/>
         <p:txBody>
           <a:bodyPr vertOverflow="overflow" horzOverflow="overflow" vert="horz" wrap="square" lIns="91440" tIns="45720" rIns="91440" bIns="45720" numCol="1" spcCol="0" rtlCol="0" fromWordArt="0" anchor="t" anchorCtr="0" forceAA="0" upright="0" compatLnSpc="0">
-            <a:normAutofit fontScale="90000" lnSpcReduction="2000"/>
+            <a:normAutofit fontScale="95000" lnSpcReduction="1000"/>
           </a:bodyPr>
           <a:lstStyle/>
           <a:p>
@@ -15647,7 +15254,15 @@
                   <a:schemeClr val="tx1"/>
                 </a:solidFill>
               </a:rPr>
-              <a:t> Образовать минимально необходимые требования для графического ядра и минимальный набор инструкций;</a:t>
+              <a:t> Определить</a:t>
+            </a:r>
+            <a:r>
+              <a:rPr>
+                <a:solidFill>
+                  <a:schemeClr val="tx1"/>
+                </a:solidFill>
+              </a:rPr>
+              <a:t> требования для построения минимального графического ядра и минимальный набор инструкций;</a:t>
             </a:r>
             <a:endParaRPr>
               <a:solidFill>
@@ -15667,7 +15282,7 @@
                   <a:schemeClr val="tx1"/>
                 </a:solidFill>
               </a:rPr>
-              <a:t> Разработать упрощенную модель графического ядра, которую можно модернизировать и изучать;</a:t>
+              <a:t> Разработать модель упрощенного графического ядра, которую можно модернизировать и изучать;</a:t>
             </a:r>
             <a:endParaRPr>
               <a:solidFill>
@@ -15687,7 +15302,7 @@
                   <a:schemeClr val="tx1"/>
                 </a:solidFill>
               </a:rPr>
-              <a:t> На разработанной базе модели можно экспериментировать с различными техниками и способами</a:t>
+              <a:t> На базе разработанной модели можно экспериментировать с различными техниками и способами</a:t>
             </a:r>
             <a:r>
               <a:rPr lang="en-US">
@@ -15703,7 +15318,15 @@
                   <a:schemeClr val="tx1"/>
                 </a:solidFill>
               </a:rPr>
-              <a:t>в архитектуре процессорных систем</a:t>
+              <a:t>построения </a:t>
+            </a:r>
+            <a:r>
+              <a:rPr lang="ru-RU">
+                <a:solidFill>
+                  <a:schemeClr val="tx1"/>
+                </a:solidFill>
+              </a:rPr>
+              <a:t>архитектур процессорных систем</a:t>
             </a:r>
             <a:r>
               <a:rPr>
@@ -15711,7 +15334,7 @@
                   <a:schemeClr val="tx1"/>
                 </a:solidFill>
               </a:rPr>
-              <a:t>, для получения их эмпирической эффективности в данной архитектуре;</a:t>
+              <a:t>;</a:t>
             </a:r>
             <a:endParaRPr>
               <a:solidFill>
@@ -15731,7 +15354,7 @@
                   <a:schemeClr val="tx1"/>
                 </a:solidFill>
               </a:rPr>
-              <a:t> Приблизит к реализации полноценного графического ядра, а дальше – графического ускорителя.</a:t>
+              <a:t> Приблизиться к реализации полноценного графического ядра, а в перспективе и полноценного графического ускорителя.</a:t>
             </a:r>
             <a:endParaRPr>
               <a:solidFill>
@@ -15743,7 +15366,7 @@
       </p:sp>
       <p:sp>
         <p:nvSpPr>
-          <p:cNvPr id="1605771366" name="Номер слайда 3"/>
+          <p:cNvPr id="757514086" name="Номер слайда 3"/>
           <p:cNvSpPr>
             <a:spLocks noGrp="1"/>
           </p:cNvSpPr>
@@ -15784,7 +15407,7 @@
       </p:sp>
       <p:sp>
         <p:nvSpPr>
-          <p:cNvPr id="1121215079" name="Прямоугольник 4"/>
+          <p:cNvPr id="1157378375" name="Прямоугольник 4"/>
           <p:cNvSpPr/>
           <p:nvPr/>
         </p:nvSpPr>
@@ -15834,7 +15457,7 @@
       </p:sp>
       <p:sp>
         <p:nvSpPr>
-          <p:cNvPr id="1029657622" name="Заголовок 1"/>
+          <p:cNvPr id="869618670" name="Заголовок 1"/>
           <p:cNvSpPr>
             <a:spLocks noGrp="1"/>
           </p:cNvSpPr>
@@ -15873,7 +15496,7 @@
       </p:sp>
       <p:sp>
         <p:nvSpPr>
-          <p:cNvPr id="1388606064" name="Прямоугольник 5"/>
+          <p:cNvPr id="2023920784" name="Прямоугольник 5"/>
           <p:cNvSpPr/>
           <p:nvPr/>
         </p:nvSpPr>
@@ -15989,7 +15612,7 @@
       </p:grpSpPr>
       <p:sp>
         <p:nvSpPr>
-          <p:cNvPr id="278519678" name="Прямоугольник 9"/>
+          <p:cNvPr id="769270170" name="Прямоугольник 9"/>
           <p:cNvSpPr/>
           <p:nvPr/>
         </p:nvSpPr>
@@ -16039,7 +15662,7 @@
       </p:sp>
       <p:sp>
         <p:nvSpPr>
-          <p:cNvPr id="1067345400" name="Прямоугольник 10"/>
+          <p:cNvPr id="881265108" name="Прямоугольник 10"/>
           <p:cNvSpPr/>
           <p:nvPr/>
         </p:nvSpPr>
@@ -16089,7 +15712,7 @@
       </p:sp>
       <p:sp>
         <p:nvSpPr>
-          <p:cNvPr id="1785780863" name="Заголовок 1"/>
+          <p:cNvPr id="1896901441" name="Заголовок 1"/>
           <p:cNvSpPr>
             <a:spLocks noGrp="1"/>
           </p:cNvSpPr>
@@ -16099,7 +15722,7 @@
         </p:nvSpPr>
         <p:spPr bwMode="auto">
           <a:xfrm>
-            <a:off x="461983" y="44221"/>
+            <a:off x="383823" y="-10414"/>
             <a:ext cx="10515600" cy="1325563"/>
           </a:xfrm>
         </p:spPr>
@@ -16126,6 +15749,21 @@
               </a:rPr>
               <a:t>: AMD</a:t>
             </a:r>
+            <a:br>
+              <a:rPr lang="en-US">
+                <a:solidFill>
+                  <a:schemeClr val="bg1"/>
+                </a:solidFill>
+              </a:rPr>
+            </a:br>
+            <a:r>
+              <a:rPr lang="en-US">
+                <a:solidFill>
+                  <a:schemeClr val="bg1"/>
+                </a:solidFill>
+              </a:rPr>
+              <a:t>Souther Islands</a:t>
+            </a:r>
             <a:endParaRPr>
               <a:solidFill>
                 <a:schemeClr val="bg1"/>
@@ -16136,7 +15774,7 @@
       </p:sp>
       <p:sp>
         <p:nvSpPr>
-          <p:cNvPr id="1671965891" name="Объект 2"/>
+          <p:cNvPr id="1531733712" name="Объект 2"/>
           <p:cNvSpPr>
             <a:spLocks noGrp="1"/>
           </p:cNvSpPr>
@@ -16146,15 +15784,39 @@
         </p:nvSpPr>
         <p:spPr bwMode="auto">
           <a:xfrm flipH="0" flipV="0">
-            <a:off x="642375" y="1835767"/>
-            <a:ext cx="3271301" cy="1650381"/>
+            <a:off x="383823" y="1350173"/>
+            <a:ext cx="3684326" cy="2802726"/>
           </a:xfrm>
         </p:spPr>
         <p:txBody>
           <a:bodyPr vertOverflow="overflow" horzOverflow="overflow" vert="horz" wrap="square" lIns="91440" tIns="45720" rIns="91440" bIns="45720" numCol="1" spcCol="0" rtlCol="0" fromWordArt="0" anchor="t" anchorCtr="0" forceAA="0" upright="0" compatLnSpc="0">
-            <a:normAutofit fontScale="55000" lnSpcReduction="9000"/>
+            <a:normAutofit fontScale="85000" lnSpcReduction="3000"/>
           </a:bodyPr>
           <a:lstStyle/>
+          <a:p>
+            <a:pPr marL="0" indent="0">
+              <a:buFont typeface="Arial"/>
+              <a:buNone/>
+              <a:defRPr/>
+            </a:pPr>
+            <a:r>
+              <a:rPr lang="ru-RU" sz="2000"/>
+              <a:t>Ядро (</a:t>
+            </a:r>
+            <a:r>
+              <a:rPr lang="en-US" sz="2000"/>
+              <a:t>CU</a:t>
+            </a:r>
+            <a:r>
+              <a:rPr lang="ru-RU" sz="2000"/>
+              <a:t>) содержит</a:t>
+            </a:r>
+            <a:r>
+              <a:rPr lang="en-US" sz="2000"/>
+              <a:t>:</a:t>
+            </a:r>
+            <a:endParaRPr sz="2000"/>
+          </a:p>
           <a:p>
             <a:pPr>
               <a:buFont typeface="Arial"/>
@@ -16162,18 +15824,18 @@
               <a:defRPr/>
             </a:pPr>
             <a:r>
-              <a:rPr lang="ru-RU"/>
-              <a:t>Ядро содержит промежуточные регистры для хранения данных:</a:t>
-            </a:r>
-            <a:r>
-              <a:rPr lang="en-US"/>
-              <a:t> GPR</a:t>
-            </a:r>
-            <a:r>
-              <a:rPr lang="ru-RU"/>
+              <a:rPr lang="en-US" sz="2000"/>
+              <a:t>v/sGPR - </a:t>
+            </a:r>
+            <a:r>
+              <a:rPr lang="ru-RU" sz="2000"/>
+              <a:t>векторный/скалярный регистровый файл</a:t>
+            </a:r>
+            <a:r>
+              <a:rPr lang="en-US" sz="2000"/>
               <a:t>;</a:t>
             </a:r>
-            <a:endParaRPr lang="en-US"/>
+            <a:endParaRPr sz="2000"/>
           </a:p>
           <a:p>
             <a:pPr>
@@ -16182,16 +15844,88 @@
               <a:defRPr/>
             </a:pPr>
             <a:r>
-              <a:rPr lang="ru-RU"/>
-              <a:t>Ядро содержит несколько наборов из арифметико-логических элементов для вещественных и целочисленных данных.</a:t>
-            </a:r>
-            <a:endParaRPr lang="ru-RU"/>
-          </a:p>
-        </p:txBody>
-      </p:sp>
-      <p:sp>
-        <p:nvSpPr>
-          <p:cNvPr id="407468574" name="Номер слайда 3"/>
+              <a:rPr lang="en-US" sz="2000"/>
+              <a:t>LSU – </a:t>
+            </a:r>
+            <a:r>
+              <a:rPr lang="ru-RU" sz="2000"/>
+              <a:t>блок загузки/сохранения</a:t>
+            </a:r>
+            <a:r>
+              <a:rPr lang="en-US" sz="2000"/>
+              <a:t>;</a:t>
+            </a:r>
+            <a:endParaRPr sz="2000"/>
+          </a:p>
+          <a:p>
+            <a:pPr>
+              <a:buFont typeface="Arial"/>
+              <a:buChar char="–"/>
+              <a:defRPr/>
+            </a:pPr>
+            <a:r>
+              <a:rPr lang="en-US" sz="2000"/>
+              <a:t>vALU – </a:t>
+            </a:r>
+            <a:r>
+              <a:rPr lang="ru-RU" sz="2000"/>
+              <a:t>векторное арифметико-логическое устройство</a:t>
+            </a:r>
+            <a:r>
+              <a:rPr lang="en-US" sz="2000"/>
+              <a:t> (</a:t>
+            </a:r>
+            <a:r>
+              <a:rPr lang="en-US" sz="2000"/>
+              <a:t>INT </a:t>
+            </a:r>
+            <a:r>
+              <a:rPr lang="ru-RU" sz="2000"/>
+              <a:t>и </a:t>
+            </a:r>
+            <a:r>
+              <a:rPr lang="en-US" sz="2000"/>
+              <a:t>FP</a:t>
+            </a:r>
+            <a:r>
+              <a:rPr lang="en-US" sz="2000"/>
+              <a:t>);</a:t>
+            </a:r>
+            <a:endParaRPr sz="2000"/>
+          </a:p>
+          <a:p>
+            <a:pPr>
+              <a:buFont typeface="Arial"/>
+              <a:buChar char="–"/>
+              <a:defRPr/>
+            </a:pPr>
+            <a:r>
+              <a:rPr lang="ru-RU" sz="2000"/>
+              <a:t>Блок получения, декодирования и планирования инструкций</a:t>
+            </a:r>
+            <a:r>
+              <a:rPr lang="ru-RU" sz="2000"/>
+              <a:t>;</a:t>
+            </a:r>
+            <a:endParaRPr sz="2000"/>
+          </a:p>
+          <a:p>
+            <a:pPr>
+              <a:buFont typeface="Arial"/>
+              <a:buChar char="–"/>
+              <a:defRPr/>
+            </a:pPr>
+            <a:r>
+              <a:rPr lang="ru-RU" sz="2000"/>
+              <a:t>Локальная общая память.</a:t>
+            </a:r>
+            <a:endParaRPr sz="2000"/>
+          </a:p>
+        </p:txBody>
+      </p:sp>
+      <p:sp>
+        <p:nvSpPr>
+          <p:cNvPr id="462629056" name="Номер слайда 3"/>
           <p:cNvSpPr>
             <a:spLocks noGrp="1"/>
           </p:cNvSpPr>
@@ -16232,7 +15966,7 @@
       </p:sp>
       <p:pic>
         <p:nvPicPr>
-          <p:cNvPr id="1177467375" name="Рисунок 7"/>
+          <p:cNvPr id="1796255708" name="Рисунок 7"/>
           <p:cNvPicPr>
             <a:picLocks noChangeAspect="1"/>
           </p:cNvPicPr>
@@ -16244,7 +15978,7 @@
         </p:blipFill>
         <p:spPr bwMode="auto">
           <a:xfrm flipH="0" flipV="0">
-            <a:off x="4152516" y="1611910"/>
+            <a:off x="4152516" y="2208315"/>
             <a:ext cx="7854704" cy="4271176"/>
           </a:xfrm>
           <a:prstGeom prst="rect">
@@ -16278,7 +16012,7 @@
         </p:blipFill>
         <p:spPr bwMode="auto">
           <a:xfrm flipH="0" flipV="0">
-            <a:off x="383823" y="3653740"/>
+            <a:off x="383823" y="4250145"/>
             <a:ext cx="3576543" cy="2229347"/>
           </a:xfrm>
           <a:prstGeom prst="rect">
@@ -16472,7 +16206,7 @@
         </p:nvSpPr>
         <p:spPr bwMode="auto">
           <a:xfrm>
-            <a:off x="461982" y="44220"/>
+            <a:off x="461982" y="-10414"/>
             <a:ext cx="10515600" cy="1325562"/>
           </a:xfrm>
         </p:spPr>
@@ -16499,6 +16233,21 @@
               </a:rPr>
               <a:t>: NVIDIA</a:t>
             </a:r>
+            <a:br>
+              <a:rPr>
+                <a:solidFill>
+                  <a:schemeClr val="bg1"/>
+                </a:solidFill>
+              </a:rPr>
+            </a:br>
+            <a:r>
+              <a:rPr lang="en-US">
+                <a:solidFill>
+                  <a:schemeClr val="bg1"/>
+                </a:solidFill>
+              </a:rPr>
+              <a:t>Fermi</a:t>
+            </a:r>
             <a:endParaRPr>
               <a:solidFill>
                 <a:schemeClr val="bg1"/>
@@ -16520,12 +16269,12 @@
         <p:spPr bwMode="auto">
           <a:xfrm flipH="0" flipV="0">
             <a:off x="285750" y="1444489"/>
-            <a:ext cx="3620475" cy="3681412"/>
+            <a:ext cx="6925649" cy="5035002"/>
           </a:xfrm>
         </p:spPr>
         <p:txBody>
           <a:bodyPr vertOverflow="overflow" horzOverflow="overflow" vert="horz" wrap="square" lIns="91440" tIns="45720" rIns="91440" bIns="45720" numCol="1" spcCol="0" rtlCol="0" fromWordArt="0" anchor="t" anchorCtr="0" forceAA="0" upright="0" compatLnSpc="0">
-            <a:normAutofit fontScale="90000" lnSpcReduction="2000"/>
+            <a:normAutofit/>
           </a:bodyPr>
           <a:lstStyle/>
           <a:p>
@@ -16534,15 +16283,45 @@
             </a:pPr>
             <a:r>
               <a:rPr lang="ru-RU"/>
-              <a:t>Ядра лишь содержат арифметико-логические блоки для </a:t>
+              <a:t>Общий регистровый файл большого размера для множества ядер;</a:t>
+            </a:r>
+            <a:endParaRPr lang="ru-RU"/>
+          </a:p>
+          <a:p>
+            <a:pPr>
+              <a:defRPr/>
+            </a:pPr>
+            <a:r>
+              <a:rPr lang="ru-RU"/>
+              <a:t>Каждому ядру в регистровом файле выделена своя область;</a:t>
+            </a:r>
+            <a:endParaRPr lang="ru-RU"/>
+          </a:p>
+          <a:p>
+            <a:pPr>
+              <a:defRPr/>
+            </a:pPr>
+            <a:r>
+              <a:rPr lang="ru-RU"/>
+              <a:t>Каждое ядро </a:t>
             </a:r>
             <a:r>
               <a:rPr lang="en-US"/>
-              <a:t>FP </a:t>
-            </a:r>
-            <a:r>
-              <a:rPr lang="ru-RU"/>
-              <a:t>и </a:t>
+              <a:t>CUDA </a:t>
+            </a:r>
+            <a:r>
+              <a:rPr lang="ru-RU"/>
+              <a:t>является однопоточным;</a:t>
+            </a:r>
+            <a:endParaRPr lang="ru-RU"/>
+          </a:p>
+          <a:p>
+            <a:pPr>
+              <a:defRPr/>
+            </a:pPr>
+            <a:r>
+              <a:rPr lang="ru-RU"/>
+              <a:t>Каждое ядро содержит вычислительные блоки для </a:t>
             </a:r>
             <a:r>
               <a:rPr lang="en-US"/>
@@ -16550,19 +16329,35 @@
             </a:r>
             <a:r>
               <a:rPr lang="ru-RU"/>
-              <a:t>данных, буферы, порты и простую логику;</a:t>
-            </a:r>
-            <a:endParaRPr lang="ru-RU"/>
-          </a:p>
-          <a:p>
-            <a:pPr>
-              <a:defRPr/>
-            </a:pPr>
-            <a:r>
-              <a:rPr lang="ru-RU"/>
-              <a:t>Ядра являются однопоточными, за счёт их количества;</a:t>
-            </a:r>
-            <a:endParaRPr lang="ru-RU"/>
+              <a:t>и </a:t>
+            </a:r>
+            <a:r>
+              <a:rPr lang="en-US"/>
+              <a:t>FP</a:t>
+            </a:r>
+            <a:r>
+              <a:rPr lang="ru-RU"/>
+              <a:t>;</a:t>
+            </a:r>
+            <a:endParaRPr lang="en-US"/>
+          </a:p>
+          <a:p>
+            <a:pPr>
+              <a:defRPr/>
+            </a:pPr>
+            <a:r>
+              <a:rPr lang="en-US"/>
+              <a:t>SFU – </a:t>
+            </a:r>
+            <a:r>
+              <a:rPr lang="ru-RU"/>
+              <a:t>специализированный ускоритель, в частности для тригонометрических функций</a:t>
+            </a:r>
+            <a:r>
+              <a:rPr lang="ru-RU"/>
+              <a:t>.</a:t>
+            </a:r>
+            <a:endParaRPr/>
           </a:p>
         </p:txBody>
       </p:sp>
@@ -16622,7 +16417,7 @@
         </p:blipFill>
         <p:spPr bwMode="auto">
           <a:xfrm flipH="0" flipV="0">
-            <a:off x="5114045" y="1444489"/>
+            <a:off x="7284603" y="1568869"/>
             <a:ext cx="4326204" cy="4910622"/>
           </a:xfrm>
           <a:prstGeom prst="rect">
@@ -16710,7 +16505,7 @@
       </p:grpSpPr>
       <p:sp>
         <p:nvSpPr>
-          <p:cNvPr id="218480208" name="Объект 2"/>
+          <p:cNvPr id="277276575" name="Объект 2"/>
           <p:cNvSpPr>
             <a:spLocks noGrp="1"/>
           </p:cNvSpPr>
@@ -16720,13 +16515,13 @@
         </p:nvSpPr>
         <p:spPr bwMode="auto">
           <a:xfrm flipH="0" flipV="0">
-            <a:off x="33402" y="1847460"/>
+            <a:off x="-9297" y="1350173"/>
             <a:ext cx="3310846" cy="3599316"/>
           </a:xfrm>
         </p:spPr>
         <p:txBody>
           <a:bodyPr vertOverflow="overflow" horzOverflow="overflow" vert="horz" wrap="square" lIns="91440" tIns="45720" rIns="91440" bIns="45720" numCol="1" spcCol="0" rtlCol="0" fromWordArt="0" anchor="t" anchorCtr="0" forceAA="0" upright="0" compatLnSpc="0">
-            <a:normAutofit fontScale="80000" lnSpcReduction="4000"/>
+            <a:normAutofit fontScale="90000" lnSpcReduction="2000"/>
           </a:bodyPr>
           <a:lstStyle/>
           <a:p>
@@ -16735,11 +16530,27 @@
             </a:pPr>
             <a:r>
               <a:rPr lang="ru-RU"/>
-              <a:t>Минимально необходимый набор инструкций взят с дампа промежуточного представления</a:t>
+              <a:t>Набор инструкций взят с дампа промежуточного представления</a:t>
             </a:r>
             <a:r>
               <a:rPr lang="en-US"/>
-              <a:t> VKCUBE</a:t>
+              <a:t> </a:t>
+            </a:r>
+            <a:r>
+              <a:rPr lang="ru-RU"/>
+              <a:t>шейдера </a:t>
+            </a:r>
+            <a:r>
+              <a:rPr lang="ru-RU"/>
+              <a:t>из </a:t>
+            </a:r>
+            <a:r>
+              <a:rPr lang="en-US"/>
+              <a:t>VKCUBE</a:t>
+            </a:r>
+            <a:r>
+              <a:rPr/>
+              <a:t>;</a:t>
             </a:r>
             <a:endParaRPr/>
           </a:p>
@@ -16755,13 +16566,17 @@
               <a:rPr lang="en-US"/>
               <a:t>RISC-V</a:t>
             </a:r>
+            <a:r>
+              <a:rPr lang="ru-RU"/>
+              <a:t>.</a:t>
+            </a:r>
             <a:endParaRPr lang="ru-RU"/>
           </a:p>
         </p:txBody>
       </p:sp>
       <p:sp>
         <p:nvSpPr>
-          <p:cNvPr id="689741051" name="Номер слайда 3"/>
+          <p:cNvPr id="572819494" name="Номер слайда 3"/>
           <p:cNvSpPr>
             <a:spLocks noGrp="1"/>
           </p:cNvSpPr>
@@ -16802,7 +16617,7 @@
       </p:sp>
       <p:pic>
         <p:nvPicPr>
-          <p:cNvPr id="1732777502" name="Рисунок 5"/>
+          <p:cNvPr id="269082523" name="Рисунок 5"/>
           <p:cNvPicPr>
             <a:picLocks noChangeAspect="1"/>
           </p:cNvPicPr>
@@ -16813,9 +16628,9 @@
           <a:stretch/>
         </p:blipFill>
         <p:spPr bwMode="auto">
-          <a:xfrm>
-            <a:off x="7234392" y="1543092"/>
-            <a:ext cx="4522692" cy="1901649"/>
+          <a:xfrm flipH="0" flipV="0">
+            <a:off x="1595387" y="4634649"/>
+            <a:ext cx="4981511" cy="2094567"/>
           </a:xfrm>
           <a:prstGeom prst="rect">
             <a:avLst/>
@@ -16832,7 +16647,7 @@
       </p:pic>
       <p:pic>
         <p:nvPicPr>
-          <p:cNvPr id="1059245539" name="Рисунок 1421075015"/>
+          <p:cNvPr id="130952141" name="Рисунок 1421075015"/>
           <p:cNvPicPr>
             <a:picLocks noChangeAspect="1"/>
           </p:cNvPicPr>
@@ -16849,7 +16664,7 @@
         </p:blipFill>
         <p:spPr bwMode="auto">
           <a:xfrm>
-            <a:off x="3083953" y="4363986"/>
+            <a:off x="9048129" y="1683548"/>
             <a:ext cx="2915269" cy="2101525"/>
           </a:xfrm>
           <a:prstGeom prst="rect">
@@ -16867,7 +16682,7 @@
       </p:pic>
       <p:sp>
         <p:nvSpPr>
-          <p:cNvPr id="150001607" name="Прямоугольник 10"/>
+          <p:cNvPr id="1997876584" name="Прямоугольник 10"/>
           <p:cNvSpPr/>
           <p:nvPr/>
         </p:nvSpPr>
@@ -16917,7 +16732,7 @@
       </p:sp>
       <p:sp>
         <p:nvSpPr>
-          <p:cNvPr id="1970930413" name="Прямоугольник 11"/>
+          <p:cNvPr id="177229540" name="Прямоугольник 11"/>
           <p:cNvSpPr/>
           <p:nvPr/>
         </p:nvSpPr>
@@ -16967,7 +16782,7 @@
       </p:sp>
       <p:sp>
         <p:nvSpPr>
-          <p:cNvPr id="1627979841" name="Заголовок 1"/>
+          <p:cNvPr id="713862053" name="Заголовок 1"/>
           <p:cNvSpPr>
             <a:spLocks noGrp="1"/>
           </p:cNvSpPr>
@@ -16982,8 +16797,8 @@
           </a:xfrm>
         </p:spPr>
         <p:txBody>
-          <a:bodyPr>
-            <a:normAutofit fontScale="90000"/>
+          <a:bodyPr vertOverflow="overflow" horzOverflow="overflow" vert="horz" wrap="square" lIns="91440" tIns="45720" rIns="91440" bIns="45720" numCol="1" spcCol="0" rtlCol="0" fromWordArt="0" anchor="ctr" anchorCtr="0" forceAA="0" upright="0" compatLnSpc="0">
+            <a:normAutofit fontScale="90000" lnSpcReduction="2000"/>
           </a:bodyPr>
           <a:lstStyle/>
           <a:p>
@@ -17016,7 +16831,7 @@
       </p:sp>
       <p:pic>
         <p:nvPicPr>
-          <p:cNvPr id="1555268725" name="Рисунок 2"/>
+          <p:cNvPr id="1125678989" name="Рисунок 2"/>
           <p:cNvPicPr>
             <a:picLocks noChangeAspect="1"/>
           </p:cNvPicPr>
@@ -17034,8 +16849,8 @@
         </p:blipFill>
         <p:spPr bwMode="auto">
           <a:xfrm flipH="0" flipV="0">
-            <a:off x="3344249" y="1847460"/>
-            <a:ext cx="3574672" cy="1166471"/>
+            <a:off x="7184853" y="4882815"/>
+            <a:ext cx="4489170" cy="1464886"/>
           </a:xfrm>
           <a:prstGeom prst="rect">
             <a:avLst/>
@@ -17056,7 +16871,7 @@
         </p:blipFill>
         <p:spPr bwMode="auto">
           <a:xfrm flipH="0" flipV="0">
-            <a:off x="6227977" y="3573342"/>
+            <a:off x="3234668" y="1350173"/>
             <a:ext cx="5529106" cy="3009811"/>
           </a:xfrm>
           <a:prstGeom prst="rect">
@@ -17140,7 +16955,7 @@
       </p:grpSpPr>
       <p:sp>
         <p:nvSpPr>
-          <p:cNvPr id="1299174877" name="Объект 2"/>
+          <p:cNvPr id="784908699" name="Объект 2"/>
           <p:cNvSpPr>
             <a:spLocks noGrp="1"/>
           </p:cNvSpPr>
@@ -17149,14 +16964,14 @@
           </p:nvPr>
         </p:nvSpPr>
         <p:spPr bwMode="auto">
-          <a:xfrm>
-            <a:off x="568954" y="2054142"/>
-            <a:ext cx="4176516" cy="3599316"/>
+          <a:xfrm flipH="0" flipV="0">
+            <a:off x="153374" y="1523999"/>
+            <a:ext cx="5067299" cy="4762499"/>
           </a:xfrm>
         </p:spPr>
         <p:txBody>
           <a:bodyPr vertOverflow="overflow" horzOverflow="overflow" vert="horz" wrap="square" lIns="91440" tIns="45720" rIns="91440" bIns="45720" numCol="1" spcCol="0" rtlCol="0" fromWordArt="0" anchor="t" anchorCtr="0" forceAA="0" upright="0" compatLnSpc="0">
-            <a:normAutofit fontScale="65000" lnSpcReduction="7000"/>
+            <a:normAutofit fontScale="90000" lnSpcReduction="2000"/>
           </a:bodyPr>
           <a:lstStyle/>
           <a:p>
@@ -17169,7 +16984,7 @@
             </a:r>
             <a:r>
               <a:rPr lang="ru-RU"/>
-              <a:t> захватывает инструкцию из памяти;</a:t>
+              <a:t> - захватывает инструкцию из памяти;</a:t>
             </a:r>
             <a:endParaRPr/>
           </a:p>
@@ -17183,7 +16998,7 @@
             </a:r>
             <a:r>
               <a:rPr lang="ru-RU"/>
-              <a:t> декодирует инструкцию для передачи </a:t>
+              <a:t> - декодирует инструкцию, управляет </a:t>
             </a:r>
             <a:r>
               <a:rPr lang="en-US"/>
@@ -17213,33 +17028,29 @@
             </a:r>
             <a:r>
               <a:rPr lang="ru-RU"/>
-              <a:t> и</a:t>
-            </a:r>
+              <a:t> </a:t>
+            </a:r>
+            <a:r>
+              <a:rPr lang="ru-RU"/>
+              <a:t>– вычислительный блок;</a:t>
+            </a:r>
+            <a:endParaRPr/>
+          </a:p>
+          <a:p>
+            <a:pPr>
+              <a:defRPr/>
+            </a:pPr>
             <a:r>
               <a:rPr lang="en-US"/>
-              <a:t>/</a:t>
-            </a:r>
-            <a:r>
-              <a:rPr lang="ru-RU"/>
-              <a:t>или </a:t>
-            </a:r>
-            <a:r>
-              <a:rPr lang="en-US"/>
-              <a:t>LSU</a:t>
-            </a:r>
-            <a:r>
-              <a:rPr lang="ru-RU"/>
-              <a:t> выполняют инструкцию;</a:t>
-            </a:r>
-            <a:endParaRPr/>
-          </a:p>
-          <a:p>
-            <a:pPr>
-              <a:defRPr/>
-            </a:pPr>
-            <a:r>
-              <a:rPr lang="ru-RU"/>
-              <a:t>Результаты работы сохраняются во внешней памяти или памяти ядра;</a:t>
+              <a:t>LSU -  </a:t>
+            </a:r>
+            <a:r>
+              <a:rPr lang="ru-RU"/>
+              <a:t>блок загрузки/сохранения данных</a:t>
+            </a:r>
+            <a:r>
+              <a:rPr lang="ru-RU"/>
+              <a:t>;</a:t>
             </a:r>
             <a:endParaRPr/>
           </a:p>
@@ -17253,11 +17064,29 @@
             </a:r>
             <a:r>
               <a:rPr lang="ru-RU"/>
-              <a:t>(контрольно-статусные регистры) </a:t>
-            </a:r>
-            <a:r>
-              <a:rPr lang="ru-RU"/>
-              <a:t>содержат статусные и управляющие сигналы связанные с самим графическим ядром.</a:t>
+              <a:t>- контрольно-статусные регистры. </a:t>
+            </a:r>
+            <a:r>
+              <a:rPr lang="ru-RU"/>
+              <a:t>Содержат статусные и управляющие сигналы связанные с самим графическим ядром;</a:t>
+            </a:r>
+            <a:endParaRPr lang="ru-RU"/>
+          </a:p>
+          <a:p>
+            <a:pPr>
+              <a:defRPr/>
+            </a:pPr>
+            <a:r>
+              <a:rPr lang="en-US"/>
+              <a:t>PC – </a:t>
+            </a:r>
+            <a:r>
+              <a:rPr lang="ru-RU"/>
+              <a:t>счётчик инструкций</a:t>
+            </a:r>
+            <a:r>
+              <a:rPr lang="ru-RU"/>
+              <a:t>.</a:t>
             </a:r>
             <a:endParaRPr lang="en-US"/>
           </a:p>
@@ -17265,7 +17094,7 @@
       </p:sp>
       <p:sp>
         <p:nvSpPr>
-          <p:cNvPr id="1636747347" name="Номер слайда 3"/>
+          <p:cNvPr id="1126670140" name="Номер слайда 3"/>
           <p:cNvSpPr>
             <a:spLocks noGrp="1"/>
           </p:cNvSpPr>
@@ -17306,7 +17135,7 @@
       </p:sp>
       <p:sp>
         <p:nvSpPr>
-          <p:cNvPr id="534537205" name="Прямоугольник 5"/>
+          <p:cNvPr id="1814906234" name="Прямоугольник 5"/>
           <p:cNvSpPr/>
           <p:nvPr/>
         </p:nvSpPr>
@@ -17356,7 +17185,7 @@
       </p:sp>
       <p:sp>
         <p:nvSpPr>
-          <p:cNvPr id="1730040083" name="Прямоугольник 6"/>
+          <p:cNvPr id="1662558537" name="Прямоугольник 6"/>
           <p:cNvSpPr/>
           <p:nvPr/>
         </p:nvSpPr>
@@ -17406,7 +17235,7 @@
       </p:sp>
       <p:sp>
         <p:nvSpPr>
-          <p:cNvPr id="1109080447" name="Заголовок 1"/>
+          <p:cNvPr id="1733818903" name="Заголовок 1"/>
           <p:cNvSpPr>
             <a:spLocks noGrp="1"/>
           </p:cNvSpPr>
@@ -17476,7 +17305,7 @@
         </p:blipFill>
         <p:spPr bwMode="auto">
           <a:xfrm flipH="0" flipV="0">
-            <a:off x="4849200" y="1876424"/>
+            <a:off x="5034770" y="1876424"/>
             <a:ext cx="6576037" cy="4195280"/>
           </a:xfrm>
           <a:prstGeom prst="rect">
@@ -17552,7 +17381,7 @@
       </p:grpSpPr>
       <p:sp>
         <p:nvSpPr>
-          <p:cNvPr id="924604707" name="Объект 2"/>
+          <p:cNvPr id="1708686" name="Объект 2"/>
           <p:cNvSpPr>
             <a:spLocks noGrp="1"/>
           </p:cNvSpPr>
@@ -17561,14 +17390,14 @@
           </p:nvPr>
         </p:nvSpPr>
         <p:spPr bwMode="auto">
-          <a:xfrm>
-            <a:off x="615398" y="1944098"/>
-            <a:ext cx="3500036" cy="3599316"/>
+          <a:xfrm flipH="0" flipV="0">
+            <a:off x="66674" y="1350173"/>
+            <a:ext cx="4134825" cy="5142700"/>
           </a:xfrm>
         </p:spPr>
         <p:txBody>
           <a:bodyPr vertOverflow="overflow" horzOverflow="overflow" vert="horz" wrap="square" lIns="91440" tIns="45720" rIns="91440" bIns="45720" numCol="1" spcCol="0" rtlCol="0" fromWordArt="0" anchor="t" anchorCtr="0" forceAA="0" upright="0" compatLnSpc="0">
-            <a:normAutofit fontScale="80000" lnSpcReduction="4000"/>
+            <a:normAutofit/>
           </a:bodyPr>
           <a:lstStyle/>
           <a:p>
@@ -17576,58 +17405,104 @@
               <a:defRPr/>
             </a:pPr>
             <a:r>
-              <a:rPr lang="ru-RU"/>
-              <a:t>Вычислительный элемент </a:t>
-            </a:r>
-            <a:r>
-              <a:rPr lang="en-US"/>
+              <a:rPr lang="ru-RU" sz="1600"/>
+              <a:t>Вычислительный </a:t>
+            </a:r>
+            <a:r>
+              <a:rPr lang="ru-RU" sz="1600"/>
+              <a:t>блок </a:t>
+            </a:r>
+            <a:r>
+              <a:rPr lang="en-US" sz="1600"/>
               <a:t>(Tread Unit) </a:t>
             </a:r>
             <a:r>
-              <a:rPr lang="ru-RU"/>
-              <a:t>обрабатывает вещественные и целочисленные данные и хранит в промежуточной памяти </a:t>
-            </a:r>
-            <a:r>
-              <a:rPr lang="en-US"/>
-              <a:t>– </a:t>
-            </a:r>
-            <a:r>
-              <a:rPr lang="ru-RU"/>
-              <a:t>регистровой карте - </a:t>
-            </a:r>
-            <a:r>
-              <a:rPr lang="en-US"/>
+              <a:rPr lang="ru-RU" sz="1600"/>
+              <a:t>обрабатывает вещественные и целочисленные данные из регистрового файла</a:t>
+            </a:r>
+            <a:r>
+              <a:rPr lang="ru-RU" sz="1600"/>
+              <a:t> (</a:t>
+            </a:r>
+            <a:r>
+              <a:rPr lang="en-US" sz="1600"/>
               <a:t>Regfile</a:t>
             </a:r>
             <a:r>
-              <a:rPr lang="ru-RU"/>
-              <a:t>.</a:t>
-            </a:r>
-            <a:endParaRPr/>
-          </a:p>
-          <a:p>
-            <a:pPr>
-              <a:defRPr/>
-            </a:pPr>
-            <a:r>
-              <a:rPr lang="ru-RU"/>
+              <a:rPr lang="ru-RU" sz="1600"/>
+              <a:t>) и сохраняет их обратно</a:t>
+            </a:r>
+            <a:r>
+              <a:rPr lang="ru-RU" sz="1600"/>
+              <a:t>;</a:t>
+            </a:r>
+            <a:endParaRPr sz="1600"/>
+          </a:p>
+          <a:p>
+            <a:pPr>
+              <a:defRPr/>
+            </a:pPr>
+            <a:r>
+              <a:rPr lang="ru-RU" sz="1600"/>
               <a:t>Основные компоненты: </a:t>
             </a:r>
-            <a:r>
-              <a:rPr lang="en-US"/>
-              <a:t>FPU, ALU, </a:t>
-            </a:r>
-            <a:r>
-              <a:rPr lang="en-US"/>
-              <a:t>Regfile</a:t>
-            </a:r>
-            <a:endParaRPr lang="ru-RU"/>
-          </a:p>
-        </p:txBody>
-      </p:sp>
-      <p:sp>
-        <p:nvSpPr>
-          <p:cNvPr id="539439231" name="Номер слайда 3"/>
+            <a:endParaRPr sz="1600"/>
+          </a:p>
+          <a:p>
+            <a:pPr lvl="1">
+              <a:defRPr/>
+            </a:pPr>
+            <a:r>
+              <a:rPr lang="en-US" sz="1600"/>
+              <a:t>FPU – </a:t>
+            </a:r>
+            <a:r>
+              <a:rPr lang="ru-RU" sz="1600"/>
+              <a:t>блок операций с плавающей запятой</a:t>
+            </a:r>
+            <a:r>
+              <a:rPr lang="en-US" sz="1600"/>
+              <a:t>;</a:t>
+            </a:r>
+            <a:endParaRPr sz="1600"/>
+          </a:p>
+          <a:p>
+            <a:pPr lvl="1">
+              <a:defRPr/>
+            </a:pPr>
+            <a:r>
+              <a:rPr lang="en-US" sz="1600"/>
+              <a:t>ALU – </a:t>
+            </a:r>
+            <a:r>
+              <a:rPr lang="ru-RU" sz="1600"/>
+              <a:t>целочисленное арифметико-логическое устройство (в основном используется для расчёта адресов и смещений)</a:t>
+            </a:r>
+            <a:r>
+              <a:rPr lang="en-US" sz="1600"/>
+              <a:t>;</a:t>
+            </a:r>
+            <a:endParaRPr sz="1600"/>
+          </a:p>
+          <a:p>
+            <a:pPr lvl="1">
+              <a:defRPr/>
+            </a:pPr>
+            <a:r>
+              <a:rPr lang="en-US" sz="1600"/>
+              <a:t>Regfile – </a:t>
+            </a:r>
+            <a:r>
+              <a:rPr lang="ru-RU" sz="1600"/>
+              <a:t>регистровый файл, хранит операнды и результаты операций. 30 регистров общего назначения, 2 специализированных регистра (индекс вычислительного блока и константный нуль).</a:t>
+            </a:r>
+            <a:endParaRPr sz="1600"/>
+          </a:p>
+        </p:txBody>
+      </p:sp>
+      <p:sp>
+        <p:nvSpPr>
+          <p:cNvPr id="1832140326" name="Номер слайда 3"/>
           <p:cNvSpPr>
             <a:spLocks noGrp="1"/>
           </p:cNvSpPr>
@@ -17668,7 +17543,7 @@
       </p:sp>
       <p:sp>
         <p:nvSpPr>
-          <p:cNvPr id="522519587" name="Прямоугольник 6"/>
+          <p:cNvPr id="304249789" name="Прямоугольник 6"/>
           <p:cNvSpPr/>
           <p:nvPr/>
         </p:nvSpPr>
@@ -17718,7 +17593,7 @@
       </p:sp>
       <p:sp>
         <p:nvSpPr>
-          <p:cNvPr id="2088590454" name="Прямоугольник 7"/>
+          <p:cNvPr id="941254918" name="Прямоугольник 7"/>
           <p:cNvSpPr/>
           <p:nvPr/>
         </p:nvSpPr>
@@ -17768,7 +17643,7 @@
       </p:sp>
       <p:sp>
         <p:nvSpPr>
-          <p:cNvPr id="1584440433" name="Заголовок 1"/>
+          <p:cNvPr id="612281607" name="Заголовок 1"/>
           <p:cNvSpPr>
             <a:spLocks noGrp="1"/>
           </p:cNvSpPr>
@@ -17797,7 +17672,22 @@
                   <a:schemeClr val="bg1"/>
                 </a:solidFill>
               </a:rPr>
-              <a:t>Разработка вычислительного блока модели упрощенного графического ядра: общая структура</a:t>
+              <a:t>Разработка вычислительного блока:</a:t>
+            </a:r>
+            <a:br>
+              <a:rPr lang="ru-RU" sz="3600">
+                <a:solidFill>
+                  <a:schemeClr val="bg1"/>
+                </a:solidFill>
+              </a:rPr>
+            </a:br>
+            <a:r>
+              <a:rPr lang="ru-RU" sz="3600">
+                <a:solidFill>
+                  <a:schemeClr val="bg1"/>
+                </a:solidFill>
+              </a:rPr>
+              <a:t>общая структура</a:t>
             </a:r>
             <a:endParaRPr/>
           </a:p>
@@ -17823,8 +17713,8 @@
         </p:blipFill>
         <p:spPr bwMode="auto">
           <a:xfrm flipH="0" flipV="0">
-            <a:off x="4370128" y="2224087"/>
-            <a:ext cx="6825791" cy="3452812"/>
+            <a:off x="4057989" y="1944097"/>
+            <a:ext cx="7983821" cy="4038599"/>
           </a:xfrm>
           <a:prstGeom prst="rect">
             <a:avLst/>

--- a/docs/starukhin_dissertation/magister_pres.pptx
+++ b/docs/starukhin_dissertation/magister_pres.pptx
@@ -5,7 +5,7 @@
     <p:sldMasterId id="2147483648" r:id="rId1"/>
   </p:sldMasterIdLst>
   <p:notesMasterIdLst>
-    <p:notesMasterId r:id="rId19"/>
+    <p:notesMasterId r:id="rId21"/>
   </p:notesMasterIdLst>
   <p:sldIdLst>
     <p:sldId id="256" r:id="rId4"/>
@@ -23,6 +23,8 @@
     <p:sldId id="268" r:id="rId16"/>
     <p:sldId id="269" r:id="rId17"/>
     <p:sldId id="270" r:id="rId18"/>
+    <p:sldId id="271" r:id="rId19"/>
+    <p:sldId id="272" r:id="rId20"/>
   </p:sldIdLst>
   <p:sldSz cx="12192000" cy="6858000"/>
   <p:notesSz cx="6858000" cy="9144000"/>
@@ -148,7 +150,7 @@
       </p:grpSpPr>
       <p:sp>
         <p:nvSpPr>
-          <p:cNvPr id="2125784802" name="Верхний колонтитул 1"/>
+          <p:cNvPr id="1008909446" name="Верхний колонтитул 1"/>
           <p:cNvSpPr>
             <a:spLocks noGrp="1"/>
           </p:cNvSpPr>
@@ -182,7 +184,7 @@
       </p:sp>
       <p:sp>
         <p:nvSpPr>
-          <p:cNvPr id="1102153904" name="Дата 2"/>
+          <p:cNvPr id="1926778905" name="Дата 2"/>
           <p:cNvSpPr>
             <a:spLocks noGrp="1"/>
           </p:cNvSpPr>
@@ -220,7 +222,7 @@
       </p:sp>
       <p:sp>
         <p:nvSpPr>
-          <p:cNvPr id="466935396" name="Образ слайда 3"/>
+          <p:cNvPr id="524395339" name="Образ слайда 3"/>
           <p:cNvSpPr>
             <a:spLocks noChangeAspect="1" noGrp="1" noRot="1"/>
           </p:cNvSpPr>
@@ -256,7 +258,7 @@
       </p:sp>
       <p:sp>
         <p:nvSpPr>
-          <p:cNvPr id="1013768272" name="Заметки 4"/>
+          <p:cNvPr id="1551658170" name="Заметки 4"/>
           <p:cNvSpPr>
             <a:spLocks noGrp="1"/>
           </p:cNvSpPr>
@@ -330,7 +332,7 @@
       </p:sp>
       <p:sp>
         <p:nvSpPr>
-          <p:cNvPr id="1762652176" name="Нижний колонтитул 5"/>
+          <p:cNvPr id="1466183126" name="Нижний колонтитул 5"/>
           <p:cNvSpPr>
             <a:spLocks noGrp="1"/>
           </p:cNvSpPr>
@@ -364,7 +366,7 @@
       </p:sp>
       <p:sp>
         <p:nvSpPr>
-          <p:cNvPr id="1428335279" name="Номер слайда 6"/>
+          <p:cNvPr id="1877250646" name="Номер слайда 6"/>
           <p:cNvSpPr>
             <a:spLocks noGrp="1"/>
           </p:cNvSpPr>
@@ -517,7 +519,7 @@
       </p:grpSpPr>
       <p:sp>
         <p:nvSpPr>
-          <p:cNvPr id="1096554833" name="Slide Image Placeholder 1"/>
+          <p:cNvPr id="1514011381" name="Slide Image Placeholder 1"/>
           <p:cNvSpPr>
             <a:spLocks noChangeAspect="1" noGrp="1" noRot="1"/>
           </p:cNvSpPr>
@@ -529,7 +531,7 @@
       </p:sp>
       <p:sp>
         <p:nvSpPr>
-          <p:cNvPr id="91776163" name="Notes Placeholder 2"/>
+          <p:cNvPr id="723938031" name="Notes Placeholder 2"/>
           <p:cNvSpPr>
             <a:spLocks noGrp="1"/>
           </p:cNvSpPr>
@@ -551,7 +553,7 @@
       </p:sp>
       <p:sp>
         <p:nvSpPr>
-          <p:cNvPr id="40276719" name="Slide Number Placeholder 3"/>
+          <p:cNvPr id="1485746519" name="Slide Number Placeholder 3"/>
           <p:cNvSpPr>
             <a:spLocks noGrp="1"/>
           </p:cNvSpPr>
@@ -602,7 +604,7 @@
       </p:grpSpPr>
       <p:sp>
         <p:nvSpPr>
-          <p:cNvPr id="1552585880" name="Slide Image Placeholder 1"/>
+          <p:cNvPr id="375579186" name="Slide Image Placeholder 1"/>
           <p:cNvSpPr>
             <a:spLocks noChangeAspect="1" noGrp="1" noRot="1"/>
           </p:cNvSpPr>
@@ -614,7 +616,7 @@
       </p:sp>
       <p:sp>
         <p:nvSpPr>
-          <p:cNvPr id="1631722075" name="Notes Placeholder 2"/>
+          <p:cNvPr id="1922002273" name="Notes Placeholder 2"/>
           <p:cNvSpPr>
             <a:spLocks noGrp="1"/>
           </p:cNvSpPr>
@@ -636,7 +638,7 @@
       </p:sp>
       <p:sp>
         <p:nvSpPr>
-          <p:cNvPr id="1881898884" name="Slide Number Placeholder 3"/>
+          <p:cNvPr id="196699625" name="Slide Number Placeholder 3"/>
           <p:cNvSpPr>
             <a:spLocks noGrp="1"/>
           </p:cNvSpPr>
@@ -652,9 +654,9 @@
             <a:pPr>
               <a:defRPr/>
             </a:pPr>
-            <a:fld id="{6478E094-64B7-2766-BCC3-6C48145F116B}" type="slidenum">
+            <a:fld id="{E59DD143-F230-8BE5-DF47-2F712C202B39}" type="slidenum">
               <a:rPr/>
-              <a:t>9</a:t>
+              <a:t>8</a:t>
             </a:fld>
             <a:endParaRPr/>
           </a:p>
@@ -687,7 +689,7 @@
       </p:grpSpPr>
       <p:sp>
         <p:nvSpPr>
-          <p:cNvPr id="1095869910" name="Slide Image Placeholder 1"/>
+          <p:cNvPr id="1994669891" name="Slide Image Placeholder 1"/>
           <p:cNvSpPr>
             <a:spLocks noChangeAspect="1" noGrp="1" noRot="1"/>
           </p:cNvSpPr>
@@ -699,7 +701,7 @@
       </p:sp>
       <p:sp>
         <p:nvSpPr>
-          <p:cNvPr id="1798374543" name="Notes Placeholder 2"/>
+          <p:cNvPr id="682548313" name="Notes Placeholder 2"/>
           <p:cNvSpPr>
             <a:spLocks noGrp="1"/>
           </p:cNvSpPr>
@@ -721,7 +723,7 @@
       </p:sp>
       <p:sp>
         <p:nvSpPr>
-          <p:cNvPr id="1503287132" name="Slide Number Placeholder 3"/>
+          <p:cNvPr id="508454201" name="Slide Number Placeholder 3"/>
           <p:cNvSpPr>
             <a:spLocks noGrp="1"/>
           </p:cNvSpPr>
@@ -737,9 +739,9 @@
             <a:pPr>
               <a:defRPr/>
             </a:pPr>
-            <a:fld id="{4A85B0B4-A097-EC80-6511-5CB349CFD099}" type="slidenum">
+            <a:fld id="{6478E094-64B7-2766-BCC3-6C48145F116B}" type="slidenum">
               <a:rPr/>
-              <a:t>10</a:t>
+              <a:t>9</a:t>
             </a:fld>
             <a:endParaRPr/>
           </a:p>
@@ -772,7 +774,7 @@
       </p:grpSpPr>
       <p:sp>
         <p:nvSpPr>
-          <p:cNvPr id="185656241" name="Slide Image Placeholder 1"/>
+          <p:cNvPr id="943427430" name="Slide Image Placeholder 1"/>
           <p:cNvSpPr>
             <a:spLocks noChangeAspect="1" noGrp="1" noRot="1"/>
           </p:cNvSpPr>
@@ -784,7 +786,7 @@
       </p:sp>
       <p:sp>
         <p:nvSpPr>
-          <p:cNvPr id="477515411" name="Notes Placeholder 2"/>
+          <p:cNvPr id="686155696" name="Notes Placeholder 2"/>
           <p:cNvSpPr>
             <a:spLocks noGrp="1"/>
           </p:cNvSpPr>
@@ -806,7 +808,7 @@
       </p:sp>
       <p:sp>
         <p:nvSpPr>
-          <p:cNvPr id="318681274" name="Slide Number Placeholder 3"/>
+          <p:cNvPr id="450857605" name="Slide Number Placeholder 3"/>
           <p:cNvSpPr>
             <a:spLocks noGrp="1"/>
           </p:cNvSpPr>
@@ -822,9 +824,9 @@
             <a:pPr>
               <a:defRPr/>
             </a:pPr>
-            <a:fld id="{A4FE7883-973B-878E-357F-41AA8BFE4543}" type="slidenum">
+            <a:fld id="{4A85B0B4-A097-EC80-6511-5CB349CFD099}" type="slidenum">
               <a:rPr/>
-              <a:t>11</a:t>
+              <a:t>10</a:t>
             </a:fld>
             <a:endParaRPr/>
           </a:p>
@@ -857,7 +859,7 @@
       </p:grpSpPr>
       <p:sp>
         <p:nvSpPr>
-          <p:cNvPr id="1229885240" name="Slide Image Placeholder 1"/>
+          <p:cNvPr id="629654329" name="Slide Image Placeholder 1"/>
           <p:cNvSpPr>
             <a:spLocks noChangeAspect="1" noGrp="1" noRot="1"/>
           </p:cNvSpPr>
@@ -869,7 +871,7 @@
       </p:sp>
       <p:sp>
         <p:nvSpPr>
-          <p:cNvPr id="556484586" name="Notes Placeholder 2"/>
+          <p:cNvPr id="390824498" name="Notes Placeholder 2"/>
           <p:cNvSpPr>
             <a:spLocks noGrp="1"/>
           </p:cNvSpPr>
@@ -891,7 +893,7 @@
       </p:sp>
       <p:sp>
         <p:nvSpPr>
-          <p:cNvPr id="12559504" name="Slide Number Placeholder 3"/>
+          <p:cNvPr id="1461670010" name="Slide Number Placeholder 3"/>
           <p:cNvSpPr>
             <a:spLocks noGrp="1"/>
           </p:cNvSpPr>
@@ -907,9 +909,9 @@
             <a:pPr>
               <a:defRPr/>
             </a:pPr>
-            <a:fld id="{463C25AB-F75B-ED55-9B43-2E895322D2B6}" type="slidenum">
+            <a:fld id="{A4FE7883-973B-878E-357F-41AA8BFE4543}" type="slidenum">
               <a:rPr/>
-              <a:t>13</a:t>
+              <a:t>11</a:t>
             </a:fld>
             <a:endParaRPr/>
           </a:p>
@@ -942,7 +944,7 @@
       </p:grpSpPr>
       <p:sp>
         <p:nvSpPr>
-          <p:cNvPr id="128386848" name="Slide Image Placeholder 1"/>
+          <p:cNvPr id="557468585" name="Slide Image Placeholder 1"/>
           <p:cNvSpPr>
             <a:spLocks noChangeAspect="1" noGrp="1" noRot="1"/>
           </p:cNvSpPr>
@@ -954,7 +956,7 @@
       </p:sp>
       <p:sp>
         <p:nvSpPr>
-          <p:cNvPr id="642605106" name="Notes Placeholder 2"/>
+          <p:cNvPr id="47710696" name="Notes Placeholder 2"/>
           <p:cNvSpPr>
             <a:spLocks noGrp="1"/>
           </p:cNvSpPr>
@@ -976,7 +978,7 @@
       </p:sp>
       <p:sp>
         <p:nvSpPr>
-          <p:cNvPr id="1382330898" name="Slide Number Placeholder 3"/>
+          <p:cNvPr id="178897965" name="Slide Number Placeholder 3"/>
           <p:cNvSpPr>
             <a:spLocks noGrp="1"/>
           </p:cNvSpPr>
@@ -992,9 +994,9 @@
             <a:pPr>
               <a:defRPr/>
             </a:pPr>
-            <a:fld id="{0E3B1206-5BC8-D1E1-57C3-7D177AE62E15}" type="slidenum">
+            <a:fld id="{463C25AB-F75B-ED55-9B43-2E895322D2B6}" type="slidenum">
               <a:rPr/>
-              <a:t>14</a:t>
+              <a:t>13</a:t>
             </a:fld>
             <a:endParaRPr/>
           </a:p>
@@ -1027,7 +1029,7 @@
       </p:grpSpPr>
       <p:sp>
         <p:nvSpPr>
-          <p:cNvPr id="2069516497" name="Slide Image Placeholder 1"/>
+          <p:cNvPr id="1569904296" name="Slide Image Placeholder 1"/>
           <p:cNvSpPr>
             <a:spLocks noChangeAspect="1" noGrp="1" noRot="1"/>
           </p:cNvSpPr>
@@ -1039,7 +1041,7 @@
       </p:sp>
       <p:sp>
         <p:nvSpPr>
-          <p:cNvPr id="1157745042" name="Notes Placeholder 2"/>
+          <p:cNvPr id="1313057222" name="Notes Placeholder 2"/>
           <p:cNvSpPr>
             <a:spLocks noGrp="1"/>
           </p:cNvSpPr>
@@ -1061,7 +1063,177 @@
       </p:sp>
       <p:sp>
         <p:nvSpPr>
-          <p:cNvPr id="641261609" name="Slide Number Placeholder 3"/>
+          <p:cNvPr id="1094026707" name="Slide Number Placeholder 3"/>
+          <p:cNvSpPr>
+            <a:spLocks noGrp="1"/>
+          </p:cNvSpPr>
+          <p:nvPr>
+            <p:ph type="sldNum" sz="quarter" idx="10"/>
+          </p:nvPr>
+        </p:nvSpPr>
+        <p:spPr bwMode="auto"/>
+        <p:txBody>
+          <a:bodyPr/>
+          <a:lstStyle/>
+          <a:p>
+            <a:pPr>
+              <a:defRPr/>
+            </a:pPr>
+            <a:fld id="{0E3B1206-5BC8-D1E1-57C3-7D177AE62E15}" type="slidenum">
+              <a:rPr/>
+              <a:t>14</a:t>
+            </a:fld>
+            <a:endParaRPr/>
+          </a:p>
+        </p:txBody>
+      </p:sp>
+    </p:spTree>
+  </p:cSld>
+  <p:clrMapOvr>
+    <a:masterClrMapping/>
+  </p:clrMapOvr>
+</p:notes>
+</file>
+
+<file path=ppt/notesSlides/notesSlide16.xml><?xml version="1.0" encoding="utf-8"?>
+<p:notes xmlns:a="http://schemas.openxmlformats.org/drawingml/2006/main" xmlns:r="http://schemas.openxmlformats.org/officeDocument/2006/relationships" xmlns:p="http://schemas.openxmlformats.org/presentationml/2006/main" xmlns:m="http://schemas.openxmlformats.org/officeDocument/2006/math" xmlns:w="http://schemas.openxmlformats.org/wordprocessingml/2006/main">
+  <p:cSld name="">
+    <p:spTree>
+      <p:nvGrpSpPr>
+        <p:cNvPr id="1" name=""/>
+        <p:cNvGrpSpPr/>
+        <p:nvPr/>
+      </p:nvGrpSpPr>
+      <p:grpSpPr bwMode="auto">
+        <a:xfrm>
+          <a:off x="0" y="0"/>
+          <a:ext cx="0" cy="0"/>
+          <a:chOff x="0" y="0"/>
+          <a:chExt cx="0" cy="0"/>
+        </a:xfrm>
+      </p:grpSpPr>
+      <p:sp>
+        <p:nvSpPr>
+          <p:cNvPr id="1205505234" name="Slide Image Placeholder 1"/>
+          <p:cNvSpPr>
+            <a:spLocks noChangeAspect="1" noGrp="1" noRot="1"/>
+          </p:cNvSpPr>
+          <p:nvPr>
+            <p:ph type="sldImg"/>
+          </p:nvPr>
+        </p:nvSpPr>
+        <p:spPr bwMode="auto"/>
+      </p:sp>
+      <p:sp>
+        <p:nvSpPr>
+          <p:cNvPr id="1376835201" name="Notes Placeholder 2"/>
+          <p:cNvSpPr>
+            <a:spLocks noGrp="1"/>
+          </p:cNvSpPr>
+          <p:nvPr>
+            <p:ph type="body" idx="1"/>
+          </p:nvPr>
+        </p:nvSpPr>
+        <p:spPr bwMode="auto"/>
+        <p:txBody>
+          <a:bodyPr/>
+          <a:lstStyle/>
+          <a:p>
+            <a:pPr>
+              <a:defRPr/>
+            </a:pPr>
+            <a:endParaRPr/>
+          </a:p>
+        </p:txBody>
+      </p:sp>
+      <p:sp>
+        <p:nvSpPr>
+          <p:cNvPr id="1987228138" name="Slide Number Placeholder 3"/>
+          <p:cNvSpPr>
+            <a:spLocks noGrp="1"/>
+          </p:cNvSpPr>
+          <p:nvPr>
+            <p:ph type="sldNum" sz="quarter" idx="10"/>
+          </p:nvPr>
+        </p:nvSpPr>
+        <p:spPr bwMode="auto"/>
+        <p:txBody>
+          <a:bodyPr/>
+          <a:lstStyle/>
+          <a:p>
+            <a:pPr>
+              <a:defRPr/>
+            </a:pPr>
+            <a:fld id="{FF611C26-A18A-CE56-9368-8EAD053C4851}" type="slidenum">
+              <a:rPr/>
+              <a:t>14</a:t>
+            </a:fld>
+            <a:endParaRPr/>
+          </a:p>
+        </p:txBody>
+      </p:sp>
+    </p:spTree>
+  </p:cSld>
+  <p:clrMapOvr>
+    <a:masterClrMapping/>
+  </p:clrMapOvr>
+</p:notes>
+</file>
+
+<file path=ppt/notesSlides/notesSlide17.xml><?xml version="1.0" encoding="utf-8"?>
+<p:notes xmlns:a="http://schemas.openxmlformats.org/drawingml/2006/main" xmlns:r="http://schemas.openxmlformats.org/officeDocument/2006/relationships" xmlns:p="http://schemas.openxmlformats.org/presentationml/2006/main" xmlns:m="http://schemas.openxmlformats.org/officeDocument/2006/math" xmlns:w="http://schemas.openxmlformats.org/wordprocessingml/2006/main">
+  <p:cSld name="">
+    <p:spTree>
+      <p:nvGrpSpPr>
+        <p:cNvPr id="1" name=""/>
+        <p:cNvGrpSpPr/>
+        <p:nvPr/>
+      </p:nvGrpSpPr>
+      <p:grpSpPr bwMode="auto">
+        <a:xfrm>
+          <a:off x="0" y="0"/>
+          <a:ext cx="0" cy="0"/>
+          <a:chOff x="0" y="0"/>
+          <a:chExt cx="0" cy="0"/>
+        </a:xfrm>
+      </p:grpSpPr>
+      <p:sp>
+        <p:nvSpPr>
+          <p:cNvPr id="45101802" name="Slide Image Placeholder 1"/>
+          <p:cNvSpPr>
+            <a:spLocks noChangeAspect="1" noGrp="1" noRot="1"/>
+          </p:cNvSpPr>
+          <p:nvPr>
+            <p:ph type="sldImg"/>
+          </p:nvPr>
+        </p:nvSpPr>
+        <p:spPr bwMode="auto"/>
+      </p:sp>
+      <p:sp>
+        <p:nvSpPr>
+          <p:cNvPr id="826519773" name="Notes Placeholder 2"/>
+          <p:cNvSpPr>
+            <a:spLocks noGrp="1"/>
+          </p:cNvSpPr>
+          <p:nvPr>
+            <p:ph type="body" idx="1"/>
+          </p:nvPr>
+        </p:nvSpPr>
+        <p:spPr bwMode="auto"/>
+        <p:txBody>
+          <a:bodyPr/>
+          <a:lstStyle/>
+          <a:p>
+            <a:pPr>
+              <a:defRPr/>
+            </a:pPr>
+            <a:endParaRPr/>
+          </a:p>
+        </p:txBody>
+      </p:sp>
+      <p:sp>
+        <p:nvSpPr>
+          <p:cNvPr id="2028139566" name="Slide Number Placeholder 3"/>
           <p:cNvSpPr>
             <a:spLocks noGrp="1"/>
           </p:cNvSpPr>
@@ -1112,7 +1284,7 @@
       </p:grpSpPr>
       <p:sp>
         <p:nvSpPr>
-          <p:cNvPr id="1162261534" name="Slide Image Placeholder 1"/>
+          <p:cNvPr id="1181997035" name="Slide Image Placeholder 1"/>
           <p:cNvSpPr>
             <a:spLocks noChangeAspect="1" noGrp="1" noRot="1"/>
           </p:cNvSpPr>
@@ -1124,7 +1296,7 @@
       </p:sp>
       <p:sp>
         <p:nvSpPr>
-          <p:cNvPr id="83486063" name="Notes Placeholder 2"/>
+          <p:cNvPr id="269427887" name="Notes Placeholder 2"/>
           <p:cNvSpPr>
             <a:spLocks noGrp="1"/>
           </p:cNvSpPr>
@@ -1146,7 +1318,7 @@
       </p:sp>
       <p:sp>
         <p:nvSpPr>
-          <p:cNvPr id="1103272113" name="Slide Number Placeholder 3"/>
+          <p:cNvPr id="1303455438" name="Slide Number Placeholder 3"/>
           <p:cNvSpPr>
             <a:spLocks noGrp="1"/>
           </p:cNvSpPr>
@@ -1197,7 +1369,7 @@
       </p:grpSpPr>
       <p:sp>
         <p:nvSpPr>
-          <p:cNvPr id="1486708420" name="Slide Image Placeholder 1"/>
+          <p:cNvPr id="1143364465" name="Slide Image Placeholder 1"/>
           <p:cNvSpPr>
             <a:spLocks noChangeAspect="1" noGrp="1" noRot="1"/>
           </p:cNvSpPr>
@@ -1209,7 +1381,7 @@
       </p:sp>
       <p:sp>
         <p:nvSpPr>
-          <p:cNvPr id="308926549" name="Notes Placeholder 2"/>
+          <p:cNvPr id="507556535" name="Notes Placeholder 2"/>
           <p:cNvSpPr>
             <a:spLocks noGrp="1"/>
           </p:cNvSpPr>
@@ -1231,7 +1403,7 @@
       </p:sp>
       <p:sp>
         <p:nvSpPr>
-          <p:cNvPr id="893812784" name="Slide Number Placeholder 3"/>
+          <p:cNvPr id="6523398" name="Slide Number Placeholder 3"/>
           <p:cNvSpPr>
             <a:spLocks noGrp="1"/>
           </p:cNvSpPr>
@@ -1247,9 +1419,9 @@
             <a:pPr>
               <a:defRPr/>
             </a:pPr>
-            <a:fld id="{F20EB7B1-6B7D-5CE5-D95F-5ED0A7232503}" type="slidenum">
+            <a:fld id="{B355F3D9-BDFF-EDB5-6FC0-3B806BA109F3}" type="slidenum">
               <a:rPr/>
-              <a:t>3</a:t>
+              <a:t>4</a:t>
             </a:fld>
             <a:endParaRPr/>
           </a:p>
@@ -1282,7 +1454,7 @@
       </p:grpSpPr>
       <p:sp>
         <p:nvSpPr>
-          <p:cNvPr id="1178613835" name="Slide Image Placeholder 1"/>
+          <p:cNvPr id="1367111149" name="Slide Image Placeholder 1"/>
           <p:cNvSpPr>
             <a:spLocks noChangeAspect="1" noGrp="1" noRot="1"/>
           </p:cNvSpPr>
@@ -1294,7 +1466,7 @@
       </p:sp>
       <p:sp>
         <p:nvSpPr>
-          <p:cNvPr id="2075501376" name="Notes Placeholder 2"/>
+          <p:cNvPr id="284181762" name="Notes Placeholder 2"/>
           <p:cNvSpPr>
             <a:spLocks noGrp="1"/>
           </p:cNvSpPr>
@@ -1316,7 +1488,7 @@
       </p:sp>
       <p:sp>
         <p:nvSpPr>
-          <p:cNvPr id="889314643" name="Slide Number Placeholder 3"/>
+          <p:cNvPr id="853835779" name="Slide Number Placeholder 3"/>
           <p:cNvSpPr>
             <a:spLocks noGrp="1"/>
           </p:cNvSpPr>
@@ -1332,9 +1504,9 @@
             <a:pPr>
               <a:defRPr/>
             </a:pPr>
-            <a:fld id="{B355F3D9-BDFF-EDB5-6FC0-3B806BA109F3}" type="slidenum">
+            <a:fld id="{F20EB7B1-6B7D-5CE5-D95F-5ED0A7232503}" type="slidenum">
               <a:rPr/>
-              <a:t>4</a:t>
+              <a:t>3</a:t>
             </a:fld>
             <a:endParaRPr/>
           </a:p>
@@ -1367,7 +1539,7 @@
       </p:grpSpPr>
       <p:sp>
         <p:nvSpPr>
-          <p:cNvPr id="161798591" name="Slide Image Placeholder 1"/>
+          <p:cNvPr id="954195659" name="Slide Image Placeholder 1"/>
           <p:cNvSpPr>
             <a:spLocks noChangeAspect="1" noGrp="1" noRot="1"/>
           </p:cNvSpPr>
@@ -1379,7 +1551,7 @@
       </p:sp>
       <p:sp>
         <p:nvSpPr>
-          <p:cNvPr id="2123198391" name="Notes Placeholder 2"/>
+          <p:cNvPr id="333068556" name="Notes Placeholder 2"/>
           <p:cNvSpPr>
             <a:spLocks noGrp="1"/>
           </p:cNvSpPr>
@@ -1401,7 +1573,7 @@
       </p:sp>
       <p:sp>
         <p:nvSpPr>
-          <p:cNvPr id="187274734" name="Slide Number Placeholder 3"/>
+          <p:cNvPr id="1233805774" name="Slide Number Placeholder 3"/>
           <p:cNvSpPr>
             <a:spLocks noGrp="1"/>
           </p:cNvSpPr>
@@ -1417,9 +1589,9 @@
             <a:pPr>
               <a:defRPr/>
             </a:pPr>
-            <a:fld id="{18768EC4-D344-67C3-1C24-CF724D34C290}" type="slidenum">
+            <a:fld id="{9F6C2A48-3D77-7BE2-EE5A-0222396F1E07}" type="slidenum">
               <a:rPr/>
-              <a:t>5</a:t>
+              <a:t>3</a:t>
             </a:fld>
             <a:endParaRPr/>
           </a:p>
@@ -1452,7 +1624,7 @@
       </p:grpSpPr>
       <p:sp>
         <p:nvSpPr>
-          <p:cNvPr id="542792772" name="Slide Image Placeholder 1"/>
+          <p:cNvPr id="1202491036" name="Slide Image Placeholder 1"/>
           <p:cNvSpPr>
             <a:spLocks noChangeAspect="1" noGrp="1" noRot="1"/>
           </p:cNvSpPr>
@@ -1464,7 +1636,7 @@
       </p:sp>
       <p:sp>
         <p:nvSpPr>
-          <p:cNvPr id="1099807654" name="Notes Placeholder 2"/>
+          <p:cNvPr id="72037785" name="Notes Placeholder 2"/>
           <p:cNvSpPr>
             <a:spLocks noGrp="1"/>
           </p:cNvSpPr>
@@ -1486,7 +1658,7 @@
       </p:sp>
       <p:sp>
         <p:nvSpPr>
-          <p:cNvPr id="153899387" name="Slide Number Placeholder 3"/>
+          <p:cNvPr id="1893682065" name="Slide Number Placeholder 3"/>
           <p:cNvSpPr>
             <a:spLocks noGrp="1"/>
           </p:cNvSpPr>
@@ -1502,7 +1674,7 @@
             <a:pPr>
               <a:defRPr/>
             </a:pPr>
-            <a:fld id="{EADFCB82-4ABC-C1C4-5E79-18F3785DD755}" type="slidenum">
+            <a:fld id="{18768EC4-D344-67C3-1C24-CF724D34C290}" type="slidenum">
               <a:rPr/>
               <a:t>5</a:t>
             </a:fld>
@@ -1537,7 +1709,7 @@
       </p:grpSpPr>
       <p:sp>
         <p:nvSpPr>
-          <p:cNvPr id="1974162722" name="Slide Image Placeholder 1"/>
+          <p:cNvPr id="809538723" name="Slide Image Placeholder 1"/>
           <p:cNvSpPr>
             <a:spLocks noChangeAspect="1" noGrp="1" noRot="1"/>
           </p:cNvSpPr>
@@ -1549,7 +1721,7 @@
       </p:sp>
       <p:sp>
         <p:nvSpPr>
-          <p:cNvPr id="1514390977" name="Notes Placeholder 2"/>
+          <p:cNvPr id="96117503" name="Notes Placeholder 2"/>
           <p:cNvSpPr>
             <a:spLocks noGrp="1"/>
           </p:cNvSpPr>
@@ -1571,7 +1743,7 @@
       </p:sp>
       <p:sp>
         <p:nvSpPr>
-          <p:cNvPr id="1991306707" name="Slide Number Placeholder 3"/>
+          <p:cNvPr id="1896444647" name="Slide Number Placeholder 3"/>
           <p:cNvSpPr>
             <a:spLocks noGrp="1"/>
           </p:cNvSpPr>
@@ -1587,9 +1759,9 @@
             <a:pPr>
               <a:defRPr/>
             </a:pPr>
-            <a:fld id="{C7A0886C-666E-9836-41C4-83E600BD9668}" type="slidenum">
+            <a:fld id="{EADFCB82-4ABC-C1C4-5E79-18F3785DD755}" type="slidenum">
               <a:rPr/>
-              <a:t>6</a:t>
+              <a:t>5</a:t>
             </a:fld>
             <a:endParaRPr/>
           </a:p>
@@ -1622,7 +1794,7 @@
       </p:grpSpPr>
       <p:sp>
         <p:nvSpPr>
-          <p:cNvPr id="795942837" name="Slide Image Placeholder 1"/>
+          <p:cNvPr id="206725692" name="Slide Image Placeholder 1"/>
           <p:cNvSpPr>
             <a:spLocks noChangeAspect="1" noGrp="1" noRot="1"/>
           </p:cNvSpPr>
@@ -1634,7 +1806,7 @@
       </p:sp>
       <p:sp>
         <p:nvSpPr>
-          <p:cNvPr id="1305987587" name="Notes Placeholder 2"/>
+          <p:cNvPr id="1646175688" name="Notes Placeholder 2"/>
           <p:cNvSpPr>
             <a:spLocks noGrp="1"/>
           </p:cNvSpPr>
@@ -1656,7 +1828,7 @@
       </p:sp>
       <p:sp>
         <p:nvSpPr>
-          <p:cNvPr id="914481353" name="Slide Number Placeholder 3"/>
+          <p:cNvPr id="1552698433" name="Slide Number Placeholder 3"/>
           <p:cNvSpPr>
             <a:spLocks noGrp="1"/>
           </p:cNvSpPr>
@@ -1672,9 +1844,9 @@
             <a:pPr>
               <a:defRPr/>
             </a:pPr>
-            <a:fld id="{86902816-76A5-4AF4-1E9E-ABAE37AB74E6}" type="slidenum">
+            <a:fld id="{C7A0886C-666E-9836-41C4-83E600BD9668}" type="slidenum">
               <a:rPr/>
-              <a:t>7</a:t>
+              <a:t>6</a:t>
             </a:fld>
             <a:endParaRPr/>
           </a:p>
@@ -1707,7 +1879,7 @@
       </p:grpSpPr>
       <p:sp>
         <p:nvSpPr>
-          <p:cNvPr id="1676717293" name="Slide Image Placeholder 1"/>
+          <p:cNvPr id="972664367" name="Slide Image Placeholder 1"/>
           <p:cNvSpPr>
             <a:spLocks noChangeAspect="1" noGrp="1" noRot="1"/>
           </p:cNvSpPr>
@@ -1719,7 +1891,7 @@
       </p:sp>
       <p:sp>
         <p:nvSpPr>
-          <p:cNvPr id="686371424" name="Notes Placeholder 2"/>
+          <p:cNvPr id="785362708" name="Notes Placeholder 2"/>
           <p:cNvSpPr>
             <a:spLocks noGrp="1"/>
           </p:cNvSpPr>
@@ -1741,7 +1913,7 @@
       </p:sp>
       <p:sp>
         <p:nvSpPr>
-          <p:cNvPr id="678576962" name="Slide Number Placeholder 3"/>
+          <p:cNvPr id="938480980" name="Slide Number Placeholder 3"/>
           <p:cNvSpPr>
             <a:spLocks noGrp="1"/>
           </p:cNvSpPr>
@@ -1757,9 +1929,9 @@
             <a:pPr>
               <a:defRPr/>
             </a:pPr>
-            <a:fld id="{E59DD143-F230-8BE5-DF47-2F712C202B39}" type="slidenum">
+            <a:fld id="{86902816-76A5-4AF4-1E9E-ABAE37AB74E6}" type="slidenum">
               <a:rPr/>
-              <a:t>8</a:t>
+              <a:t>7</a:t>
             </a:fld>
             <a:endParaRPr/>
           </a:p>
@@ -1792,7 +1964,7 @@
       </p:grpSpPr>
       <p:sp>
         <p:nvSpPr>
-          <p:cNvPr id="1486901129" name="Заголовок 1"/>
+          <p:cNvPr id="1511828941" name="Заголовок 1"/>
           <p:cNvSpPr>
             <a:spLocks noGrp="1"/>
           </p:cNvSpPr>
@@ -1827,7 +1999,7 @@
       </p:sp>
       <p:sp>
         <p:nvSpPr>
-          <p:cNvPr id="1475423288" name="Подзаголовок 2"/>
+          <p:cNvPr id="1948947964" name="Подзаголовок 2"/>
           <p:cNvSpPr>
             <a:spLocks noGrp="1"/>
           </p:cNvSpPr>
@@ -1895,7 +2067,7 @@
       </p:sp>
       <p:sp>
         <p:nvSpPr>
-          <p:cNvPr id="1799980486" name="Дата 3"/>
+          <p:cNvPr id="1038408730" name="Дата 3"/>
           <p:cNvSpPr>
             <a:spLocks noGrp="1"/>
           </p:cNvSpPr>
@@ -1921,7 +2093,7 @@
       </p:sp>
       <p:sp>
         <p:nvSpPr>
-          <p:cNvPr id="351623302" name="Нижний колонтитул 4"/>
+          <p:cNvPr id="378021907" name="Нижний колонтитул 4"/>
           <p:cNvSpPr>
             <a:spLocks noGrp="1"/>
           </p:cNvSpPr>
@@ -1943,7 +2115,7 @@
       </p:sp>
       <p:sp>
         <p:nvSpPr>
-          <p:cNvPr id="899808733" name="Номер слайда 5"/>
+          <p:cNvPr id="764849934" name="Номер слайда 5"/>
           <p:cNvSpPr>
             <a:spLocks noGrp="1"/>
           </p:cNvSpPr>
@@ -1994,7 +2166,7 @@
       </p:grpSpPr>
       <p:sp>
         <p:nvSpPr>
-          <p:cNvPr id="1426906987" name="Заголовок 1"/>
+          <p:cNvPr id="1815020405" name="Заголовок 1"/>
           <p:cNvSpPr>
             <a:spLocks noGrp="1"/>
           </p:cNvSpPr>
@@ -2020,7 +2192,7 @@
       </p:sp>
       <p:sp>
         <p:nvSpPr>
-          <p:cNvPr id="756860841" name="Вертикальный текст 2"/>
+          <p:cNvPr id="2116905233" name="Вертикальный текст 2"/>
           <p:cNvSpPr>
             <a:spLocks noGrp="1"/>
           </p:cNvSpPr>
@@ -2086,7 +2258,7 @@
       </p:sp>
       <p:sp>
         <p:nvSpPr>
-          <p:cNvPr id="855484900" name="Дата 3"/>
+          <p:cNvPr id="727257238" name="Дата 3"/>
           <p:cNvSpPr>
             <a:spLocks noGrp="1"/>
           </p:cNvSpPr>
@@ -2112,7 +2284,7 @@
       </p:sp>
       <p:sp>
         <p:nvSpPr>
-          <p:cNvPr id="1132563909" name="Нижний колонтитул 4"/>
+          <p:cNvPr id="188747366" name="Нижний колонтитул 4"/>
           <p:cNvSpPr>
             <a:spLocks noGrp="1"/>
           </p:cNvSpPr>
@@ -2134,7 +2306,7 @@
       </p:sp>
       <p:sp>
         <p:nvSpPr>
-          <p:cNvPr id="1826199026" name="Номер слайда 5"/>
+          <p:cNvPr id="1329911625" name="Номер слайда 5"/>
           <p:cNvSpPr>
             <a:spLocks noGrp="1"/>
           </p:cNvSpPr>
@@ -2185,7 +2357,7 @@
       </p:grpSpPr>
       <p:sp>
         <p:nvSpPr>
-          <p:cNvPr id="475925044" name="Вертикальный заголовок 1"/>
+          <p:cNvPr id="1923154828" name="Вертикальный заголовок 1"/>
           <p:cNvSpPr>
             <a:spLocks noGrp="1"/>
           </p:cNvSpPr>
@@ -2216,7 +2388,7 @@
       </p:sp>
       <p:sp>
         <p:nvSpPr>
-          <p:cNvPr id="1428144964" name="Вертикальный текст 2"/>
+          <p:cNvPr id="1225803582" name="Вертикальный текст 2"/>
           <p:cNvSpPr>
             <a:spLocks noGrp="1"/>
           </p:cNvSpPr>
@@ -2287,7 +2459,7 @@
       </p:sp>
       <p:sp>
         <p:nvSpPr>
-          <p:cNvPr id="1739621655" name="Дата 3"/>
+          <p:cNvPr id="1766735015" name="Дата 3"/>
           <p:cNvSpPr>
             <a:spLocks noGrp="1"/>
           </p:cNvSpPr>
@@ -2313,7 +2485,7 @@
       </p:sp>
       <p:sp>
         <p:nvSpPr>
-          <p:cNvPr id="1143992548" name="Нижний колонтитул 4"/>
+          <p:cNvPr id="531187906" name="Нижний колонтитул 4"/>
           <p:cNvSpPr>
             <a:spLocks noGrp="1"/>
           </p:cNvSpPr>
@@ -2335,7 +2507,7 @@
       </p:sp>
       <p:sp>
         <p:nvSpPr>
-          <p:cNvPr id="783984544" name="Номер слайда 5"/>
+          <p:cNvPr id="572073402" name="Номер слайда 5"/>
           <p:cNvSpPr>
             <a:spLocks noGrp="1"/>
           </p:cNvSpPr>
@@ -2386,7 +2558,7 @@
       </p:grpSpPr>
       <p:pic>
         <p:nvPicPr>
-          <p:cNvPr id="1336185939" name="Picture 6" descr="HD-ShadowLong.png"/>
+          <p:cNvPr id="212374885" name="Picture 6" descr="HD-ShadowLong.png"/>
           <p:cNvPicPr>
             <a:picLocks noChangeAspect="1"/>
           </p:cNvPicPr>
@@ -2408,7 +2580,7 @@
       </p:pic>
       <p:pic>
         <p:nvPicPr>
-          <p:cNvPr id="1247918679" name="Picture 7" descr="HD-ShadowShort.png"/>
+          <p:cNvPr id="860520886" name="Picture 7" descr="HD-ShadowShort.png"/>
           <p:cNvPicPr>
             <a:picLocks noChangeAspect="1"/>
           </p:cNvPicPr>
@@ -2430,7 +2602,7 @@
       </p:pic>
       <p:sp>
         <p:nvSpPr>
-          <p:cNvPr id="402950752" name="Rectangle 8"/>
+          <p:cNvPr id="1372211083" name="Rectangle 8"/>
           <p:cNvSpPr/>
           <p:nvPr/>
         </p:nvSpPr>
@@ -2471,7 +2643,7 @@
       </p:sp>
       <p:sp>
         <p:nvSpPr>
-          <p:cNvPr id="298095893" name="Rectangle 9"/>
+          <p:cNvPr id="357219531" name="Rectangle 9"/>
           <p:cNvSpPr/>
           <p:nvPr/>
         </p:nvSpPr>
@@ -2509,7 +2681,7 @@
       </p:sp>
       <p:sp>
         <p:nvSpPr>
-          <p:cNvPr id="687201703" name="Title 1"/>
+          <p:cNvPr id="249742464" name="Title 1"/>
           <p:cNvSpPr>
             <a:spLocks noGrp="1"/>
           </p:cNvSpPr>
@@ -2546,7 +2718,7 @@
       </p:sp>
       <p:sp>
         <p:nvSpPr>
-          <p:cNvPr id="850342436" name="Subtitle 2"/>
+          <p:cNvPr id="436299171" name="Subtitle 2"/>
           <p:cNvSpPr>
             <a:spLocks noGrp="1"/>
           </p:cNvSpPr>
@@ -2616,7 +2788,7 @@
       </p:sp>
       <p:sp>
         <p:nvSpPr>
-          <p:cNvPr id="886646324" name="Date Placeholder 3"/>
+          <p:cNvPr id="308933876" name="Date Placeholder 3"/>
           <p:cNvSpPr>
             <a:spLocks noGrp="1"/>
           </p:cNvSpPr>
@@ -2642,7 +2814,7 @@
       </p:sp>
       <p:sp>
         <p:nvSpPr>
-          <p:cNvPr id="460959330" name="Footer Placeholder 4"/>
+          <p:cNvPr id="1983556531" name="Footer Placeholder 4"/>
           <p:cNvSpPr>
             <a:spLocks noGrp="1"/>
           </p:cNvSpPr>
@@ -2664,7 +2836,7 @@
       </p:sp>
       <p:sp>
         <p:nvSpPr>
-          <p:cNvPr id="575612141" name="Slide Number Placeholder 5"/>
+          <p:cNvPr id="72837612" name="Slide Number Placeholder 5"/>
           <p:cNvSpPr>
             <a:spLocks noGrp="1"/>
           </p:cNvSpPr>
@@ -2720,7 +2892,7 @@
       </p:grpSpPr>
       <p:pic>
         <p:nvPicPr>
-          <p:cNvPr id="1507753634" name="Picture 14" descr="HD-ShadowLong.png"/>
+          <p:cNvPr id="858560092" name="Picture 14" descr="HD-ShadowLong.png"/>
           <p:cNvPicPr>
             <a:picLocks noChangeAspect="1"/>
           </p:cNvPicPr>
@@ -2742,7 +2914,7 @@
       </p:pic>
       <p:pic>
         <p:nvPicPr>
-          <p:cNvPr id="1003838153" name="Picture 15" descr="HD-ShadowShort.png"/>
+          <p:cNvPr id="2040604025" name="Picture 15" descr="HD-ShadowShort.png"/>
           <p:cNvPicPr>
             <a:picLocks noChangeAspect="1"/>
           </p:cNvPicPr>
@@ -2764,7 +2936,7 @@
       </p:pic>
       <p:sp>
         <p:nvSpPr>
-          <p:cNvPr id="1692410333" name="Rectangle 16"/>
+          <p:cNvPr id="1264708468" name="Rectangle 16"/>
           <p:cNvSpPr/>
           <p:nvPr/>
         </p:nvSpPr>
@@ -2805,7 +2977,7 @@
       </p:sp>
       <p:sp>
         <p:nvSpPr>
-          <p:cNvPr id="1046899879" name="Rectangle 17"/>
+          <p:cNvPr id="1838220868" name="Rectangle 17"/>
           <p:cNvSpPr/>
           <p:nvPr/>
         </p:nvSpPr>
@@ -2843,7 +3015,7 @@
       </p:sp>
       <p:sp>
         <p:nvSpPr>
-          <p:cNvPr id="678517155" name="Title 1"/>
+          <p:cNvPr id="655595148" name="Title 1"/>
           <p:cNvSpPr>
             <a:spLocks noGrp="1"/>
           </p:cNvSpPr>
@@ -2869,7 +3041,7 @@
       </p:sp>
       <p:sp>
         <p:nvSpPr>
-          <p:cNvPr id="1759863564" name="Content Placeholder 2"/>
+          <p:cNvPr id="1644560578" name="Content Placeholder 2"/>
           <p:cNvSpPr>
             <a:spLocks noGrp="1"/>
           </p:cNvSpPr>
@@ -2935,7 +3107,7 @@
       </p:sp>
       <p:sp>
         <p:nvSpPr>
-          <p:cNvPr id="671928580" name="Date Placeholder 3"/>
+          <p:cNvPr id="166699740" name="Date Placeholder 3"/>
           <p:cNvSpPr>
             <a:spLocks noGrp="1"/>
           </p:cNvSpPr>
@@ -2961,7 +3133,7 @@
       </p:sp>
       <p:sp>
         <p:nvSpPr>
-          <p:cNvPr id="1168042294" name="Footer Placeholder 4"/>
+          <p:cNvPr id="497363406" name="Footer Placeholder 4"/>
           <p:cNvSpPr>
             <a:spLocks noGrp="1"/>
           </p:cNvSpPr>
@@ -2983,7 +3155,7 @@
       </p:sp>
       <p:sp>
         <p:nvSpPr>
-          <p:cNvPr id="1884600558" name="Slide Number Placeholder 5"/>
+          <p:cNvPr id="1234837928" name="Slide Number Placeholder 5"/>
           <p:cNvSpPr>
             <a:spLocks noGrp="1"/>
           </p:cNvSpPr>
@@ -3034,7 +3206,7 @@
       </p:grpSpPr>
       <p:pic>
         <p:nvPicPr>
-          <p:cNvPr id="737382204" name="Picture 6" descr="HD-ShadowLong.png"/>
+          <p:cNvPr id="2088797981" name="Picture 6" descr="HD-ShadowLong.png"/>
           <p:cNvPicPr>
             <a:picLocks noChangeAspect="1"/>
           </p:cNvPicPr>
@@ -3056,7 +3228,7 @@
       </p:pic>
       <p:pic>
         <p:nvPicPr>
-          <p:cNvPr id="1190450147" name="Picture 7" descr="HD-ShadowShort.png"/>
+          <p:cNvPr id="1412756727" name="Picture 7" descr="HD-ShadowShort.png"/>
           <p:cNvPicPr>
             <a:picLocks noChangeAspect="1"/>
           </p:cNvPicPr>
@@ -3078,7 +3250,7 @@
       </p:pic>
       <p:sp>
         <p:nvSpPr>
-          <p:cNvPr id="1221017168" name="Rectangle 8"/>
+          <p:cNvPr id="438850150" name="Rectangle 8"/>
           <p:cNvSpPr/>
           <p:nvPr/>
         </p:nvSpPr>
@@ -3119,7 +3291,7 @@
       </p:sp>
       <p:sp>
         <p:nvSpPr>
-          <p:cNvPr id="1803945555" name="Rectangle 9"/>
+          <p:cNvPr id="490088821" name="Rectangle 9"/>
           <p:cNvSpPr/>
           <p:nvPr/>
         </p:nvSpPr>
@@ -3157,7 +3329,7 @@
       </p:sp>
       <p:sp>
         <p:nvSpPr>
-          <p:cNvPr id="2109329292" name="Title 1"/>
+          <p:cNvPr id="1622128784" name="Title 1"/>
           <p:cNvSpPr>
             <a:spLocks noGrp="1"/>
           </p:cNvSpPr>
@@ -3194,7 +3366,7 @@
       </p:sp>
       <p:sp>
         <p:nvSpPr>
-          <p:cNvPr id="690514041" name="Text Placeholder 2"/>
+          <p:cNvPr id="1438952253" name="Text Placeholder 2"/>
           <p:cNvSpPr>
             <a:spLocks noGrp="1"/>
           </p:cNvSpPr>
@@ -3318,7 +3490,7 @@
       </p:sp>
       <p:sp>
         <p:nvSpPr>
-          <p:cNvPr id="811224734" name="Date Placeholder 3"/>
+          <p:cNvPr id="1634217882" name="Date Placeholder 3"/>
           <p:cNvSpPr>
             <a:spLocks noGrp="1"/>
           </p:cNvSpPr>
@@ -3344,7 +3516,7 @@
       </p:sp>
       <p:sp>
         <p:nvSpPr>
-          <p:cNvPr id="1592921855" name="Footer Placeholder 4"/>
+          <p:cNvPr id="1229765503" name="Footer Placeholder 4"/>
           <p:cNvSpPr>
             <a:spLocks noGrp="1"/>
           </p:cNvSpPr>
@@ -3366,7 +3538,7 @@
       </p:sp>
       <p:sp>
         <p:nvSpPr>
-          <p:cNvPr id="1093365710" name="Slide Number Placeholder 5"/>
+          <p:cNvPr id="232801857" name="Slide Number Placeholder 5"/>
           <p:cNvSpPr>
             <a:spLocks noGrp="1"/>
           </p:cNvSpPr>
@@ -3422,7 +3594,7 @@
       </p:grpSpPr>
       <p:pic>
         <p:nvPicPr>
-          <p:cNvPr id="1791580090" name="Picture 7" descr="HD-ShadowLong.png"/>
+          <p:cNvPr id="1269470865" name="Picture 7" descr="HD-ShadowLong.png"/>
           <p:cNvPicPr>
             <a:picLocks noChangeAspect="1"/>
           </p:cNvPicPr>
@@ -3444,7 +3616,7 @@
       </p:pic>
       <p:pic>
         <p:nvPicPr>
-          <p:cNvPr id="600494288" name="Picture 8" descr="HD-ShadowShort.png"/>
+          <p:cNvPr id="116465415" name="Picture 8" descr="HD-ShadowShort.png"/>
           <p:cNvPicPr>
             <a:picLocks noChangeAspect="1"/>
           </p:cNvPicPr>
@@ -3466,7 +3638,7 @@
       </p:pic>
       <p:sp>
         <p:nvSpPr>
-          <p:cNvPr id="937707837" name="Rectangle 9"/>
+          <p:cNvPr id="107655203" name="Rectangle 9"/>
           <p:cNvSpPr/>
           <p:nvPr/>
         </p:nvSpPr>
@@ -3507,7 +3679,7 @@
       </p:sp>
       <p:sp>
         <p:nvSpPr>
-          <p:cNvPr id="488389718" name="Rectangle 10"/>
+          <p:cNvPr id="901148690" name="Rectangle 10"/>
           <p:cNvSpPr/>
           <p:nvPr/>
         </p:nvSpPr>
@@ -3545,7 +3717,7 @@
       </p:sp>
       <p:sp>
         <p:nvSpPr>
-          <p:cNvPr id="1124433554" name="Title 1"/>
+          <p:cNvPr id="1629294217" name="Title 1"/>
           <p:cNvSpPr>
             <a:spLocks noGrp="1"/>
           </p:cNvSpPr>
@@ -3571,7 +3743,7 @@
       </p:sp>
       <p:sp>
         <p:nvSpPr>
-          <p:cNvPr id="1850966666" name="Content Placeholder 2"/>
+          <p:cNvPr id="578543822" name="Content Placeholder 2"/>
           <p:cNvSpPr>
             <a:spLocks noGrp="1"/>
           </p:cNvSpPr>
@@ -3642,7 +3814,7 @@
       </p:sp>
       <p:sp>
         <p:nvSpPr>
-          <p:cNvPr id="1387986846" name="Content Placeholder 3"/>
+          <p:cNvPr id="1435442327" name="Content Placeholder 3"/>
           <p:cNvSpPr>
             <a:spLocks noGrp="1"/>
           </p:cNvSpPr>
@@ -3713,7 +3885,7 @@
       </p:sp>
       <p:sp>
         <p:nvSpPr>
-          <p:cNvPr id="1327722056" name="Date Placeholder 4"/>
+          <p:cNvPr id="202747450" name="Date Placeholder 4"/>
           <p:cNvSpPr>
             <a:spLocks noGrp="1"/>
           </p:cNvSpPr>
@@ -3739,7 +3911,7 @@
       </p:sp>
       <p:sp>
         <p:nvSpPr>
-          <p:cNvPr id="180153579" name="Footer Placeholder 5"/>
+          <p:cNvPr id="766849730" name="Footer Placeholder 5"/>
           <p:cNvSpPr>
             <a:spLocks noGrp="1"/>
           </p:cNvSpPr>
@@ -3761,7 +3933,7 @@
       </p:sp>
       <p:sp>
         <p:nvSpPr>
-          <p:cNvPr id="1625500776" name="Slide Number Placeholder 6"/>
+          <p:cNvPr id="622516380" name="Slide Number Placeholder 6"/>
           <p:cNvSpPr>
             <a:spLocks noGrp="1"/>
           </p:cNvSpPr>
@@ -3812,7 +3984,7 @@
       </p:grpSpPr>
       <p:pic>
         <p:nvPicPr>
-          <p:cNvPr id="1709004653" name="Picture 9" descr="HD-ShadowLong.png"/>
+          <p:cNvPr id="216359669" name="Picture 9" descr="HD-ShadowLong.png"/>
           <p:cNvPicPr>
             <a:picLocks noChangeAspect="1"/>
           </p:cNvPicPr>
@@ -3834,7 +4006,7 @@
       </p:pic>
       <p:pic>
         <p:nvPicPr>
-          <p:cNvPr id="1590442368" name="Picture 10" descr="HD-ShadowShort.png"/>
+          <p:cNvPr id="834219924" name="Picture 10" descr="HD-ShadowShort.png"/>
           <p:cNvPicPr>
             <a:picLocks noChangeAspect="1"/>
           </p:cNvPicPr>
@@ -3856,7 +4028,7 @@
       </p:pic>
       <p:sp>
         <p:nvSpPr>
-          <p:cNvPr id="644265866" name="Rectangle 11"/>
+          <p:cNvPr id="1455377248" name="Rectangle 11"/>
           <p:cNvSpPr/>
           <p:nvPr/>
         </p:nvSpPr>
@@ -3897,7 +4069,7 @@
       </p:sp>
       <p:sp>
         <p:nvSpPr>
-          <p:cNvPr id="351190140" name="Rectangle 12"/>
+          <p:cNvPr id="1801838367" name="Rectangle 12"/>
           <p:cNvSpPr/>
           <p:nvPr/>
         </p:nvSpPr>
@@ -3935,7 +4107,7 @@
       </p:sp>
       <p:sp>
         <p:nvSpPr>
-          <p:cNvPr id="1270404257" name="Title 1"/>
+          <p:cNvPr id="1675056706" name="Title 1"/>
           <p:cNvSpPr>
             <a:spLocks noGrp="1"/>
           </p:cNvSpPr>
@@ -3966,7 +4138,7 @@
       </p:sp>
       <p:sp>
         <p:nvSpPr>
-          <p:cNvPr id="797909979" name="Text Placeholder 2"/>
+          <p:cNvPr id="1572798189" name="Text Placeholder 2"/>
           <p:cNvSpPr>
             <a:spLocks noGrp="1"/>
           </p:cNvSpPr>
@@ -4034,7 +4206,7 @@
       </p:sp>
       <p:sp>
         <p:nvSpPr>
-          <p:cNvPr id="1340951018" name="Content Placeholder 3"/>
+          <p:cNvPr id="55814126" name="Content Placeholder 3"/>
           <p:cNvSpPr>
             <a:spLocks noGrp="1"/>
           </p:cNvSpPr>
@@ -4105,7 +4277,7 @@
       </p:sp>
       <p:sp>
         <p:nvSpPr>
-          <p:cNvPr id="1091377704" name="Text Placeholder 4"/>
+          <p:cNvPr id="419294746" name="Text Placeholder 4"/>
           <p:cNvSpPr>
             <a:spLocks noGrp="1"/>
           </p:cNvSpPr>
@@ -4173,7 +4345,7 @@
       </p:sp>
       <p:sp>
         <p:nvSpPr>
-          <p:cNvPr id="1441329299" name="Content Placeholder 5"/>
+          <p:cNvPr id="1466499387" name="Content Placeholder 5"/>
           <p:cNvSpPr>
             <a:spLocks noGrp="1"/>
           </p:cNvSpPr>
@@ -4244,7 +4416,7 @@
       </p:sp>
       <p:sp>
         <p:nvSpPr>
-          <p:cNvPr id="449068706" name="Date Placeholder 6"/>
+          <p:cNvPr id="859607374" name="Date Placeholder 6"/>
           <p:cNvSpPr>
             <a:spLocks noGrp="1"/>
           </p:cNvSpPr>
@@ -4270,7 +4442,7 @@
       </p:sp>
       <p:sp>
         <p:nvSpPr>
-          <p:cNvPr id="1474482549" name="Footer Placeholder 7"/>
+          <p:cNvPr id="703742006" name="Footer Placeholder 7"/>
           <p:cNvSpPr>
             <a:spLocks noGrp="1"/>
           </p:cNvSpPr>
@@ -4292,7 +4464,7 @@
       </p:sp>
       <p:sp>
         <p:nvSpPr>
-          <p:cNvPr id="1164821374" name="Slide Number Placeholder 8"/>
+          <p:cNvPr id="1353543065" name="Slide Number Placeholder 8"/>
           <p:cNvSpPr>
             <a:spLocks noGrp="1"/>
           </p:cNvSpPr>
@@ -4343,7 +4515,7 @@
       </p:grpSpPr>
       <p:pic>
         <p:nvPicPr>
-          <p:cNvPr id="1175117219" name="Picture 5" descr="HD-ShadowLong.png"/>
+          <p:cNvPr id="18609248" name="Picture 5" descr="HD-ShadowLong.png"/>
           <p:cNvPicPr>
             <a:picLocks noChangeAspect="1"/>
           </p:cNvPicPr>
@@ -4365,7 +4537,7 @@
       </p:pic>
       <p:pic>
         <p:nvPicPr>
-          <p:cNvPr id="169902175" name="Picture 6" descr="HD-ShadowShort.png"/>
+          <p:cNvPr id="51211182" name="Picture 6" descr="HD-ShadowShort.png"/>
           <p:cNvPicPr>
             <a:picLocks noChangeAspect="1"/>
           </p:cNvPicPr>
@@ -4387,7 +4559,7 @@
       </p:pic>
       <p:sp>
         <p:nvSpPr>
-          <p:cNvPr id="1540113404" name="Rectangle 7"/>
+          <p:cNvPr id="807281676" name="Rectangle 7"/>
           <p:cNvSpPr/>
           <p:nvPr/>
         </p:nvSpPr>
@@ -4428,7 +4600,7 @@
       </p:sp>
       <p:sp>
         <p:nvSpPr>
-          <p:cNvPr id="1351167115" name="Rectangle 8"/>
+          <p:cNvPr id="1079471218" name="Rectangle 8"/>
           <p:cNvSpPr/>
           <p:nvPr/>
         </p:nvSpPr>
@@ -4466,7 +4638,7 @@
       </p:sp>
       <p:sp>
         <p:nvSpPr>
-          <p:cNvPr id="263383376" name="Title 1"/>
+          <p:cNvPr id="340877773" name="Title 1"/>
           <p:cNvSpPr>
             <a:spLocks noGrp="1"/>
           </p:cNvSpPr>
@@ -4492,7 +4664,7 @@
       </p:sp>
       <p:sp>
         <p:nvSpPr>
-          <p:cNvPr id="612249375" name="Date Placeholder 2"/>
+          <p:cNvPr id="1933373246" name="Date Placeholder 2"/>
           <p:cNvSpPr>
             <a:spLocks noGrp="1"/>
           </p:cNvSpPr>
@@ -4518,7 +4690,7 @@
       </p:sp>
       <p:sp>
         <p:nvSpPr>
-          <p:cNvPr id="1499781259" name="Footer Placeholder 3"/>
+          <p:cNvPr id="1898882001" name="Footer Placeholder 3"/>
           <p:cNvSpPr>
             <a:spLocks noGrp="1"/>
           </p:cNvSpPr>
@@ -4540,7 +4712,7 @@
       </p:sp>
       <p:sp>
         <p:nvSpPr>
-          <p:cNvPr id="1539099915" name="Slide Number Placeholder 4"/>
+          <p:cNvPr id="1557512205" name="Slide Number Placeholder 4"/>
           <p:cNvSpPr>
             <a:spLocks noGrp="1"/>
           </p:cNvSpPr>
@@ -4591,7 +4763,7 @@
       </p:grpSpPr>
       <p:pic>
         <p:nvPicPr>
-          <p:cNvPr id="1446914306" name="Picture 4" descr="HD-ShadowShort.png"/>
+          <p:cNvPr id="353243567" name="Picture 4" descr="HD-ShadowShort.png"/>
           <p:cNvPicPr>
             <a:picLocks noChangeAspect="1"/>
           </p:cNvPicPr>
@@ -4613,7 +4785,7 @@
       </p:pic>
       <p:sp>
         <p:nvSpPr>
-          <p:cNvPr id="672852698" name="Rectangle 5"/>
+          <p:cNvPr id="1815435822" name="Rectangle 5"/>
           <p:cNvSpPr/>
           <p:nvPr/>
         </p:nvSpPr>
@@ -4651,7 +4823,7 @@
       </p:sp>
       <p:sp>
         <p:nvSpPr>
-          <p:cNvPr id="141782526" name="Date Placeholder 1"/>
+          <p:cNvPr id="840056932" name="Date Placeholder 1"/>
           <p:cNvSpPr>
             <a:spLocks noGrp="1"/>
           </p:cNvSpPr>
@@ -4677,7 +4849,7 @@
       </p:sp>
       <p:sp>
         <p:nvSpPr>
-          <p:cNvPr id="1260905299" name="Footer Placeholder 2"/>
+          <p:cNvPr id="1174921068" name="Footer Placeholder 2"/>
           <p:cNvSpPr>
             <a:spLocks noGrp="1"/>
           </p:cNvSpPr>
@@ -4699,7 +4871,7 @@
       </p:sp>
       <p:sp>
         <p:nvSpPr>
-          <p:cNvPr id="142719168" name="Slide Number Placeholder 3"/>
+          <p:cNvPr id="189253090" name="Slide Number Placeholder 3"/>
           <p:cNvSpPr>
             <a:spLocks noGrp="1"/>
           </p:cNvSpPr>
@@ -4750,7 +4922,7 @@
       </p:grpSpPr>
       <p:pic>
         <p:nvPicPr>
-          <p:cNvPr id="228099507" name="Picture 7" descr="HD-ShadowLong.png"/>
+          <p:cNvPr id="886160717" name="Picture 7" descr="HD-ShadowLong.png"/>
           <p:cNvPicPr>
             <a:picLocks noChangeAspect="1"/>
           </p:cNvPicPr>
@@ -4772,7 +4944,7 @@
       </p:pic>
       <p:pic>
         <p:nvPicPr>
-          <p:cNvPr id="720221782" name="Picture 8" descr="HD-ShadowShort.png"/>
+          <p:cNvPr id="23127682" name="Picture 8" descr="HD-ShadowShort.png"/>
           <p:cNvPicPr>
             <a:picLocks noChangeAspect="1"/>
           </p:cNvPicPr>
@@ -4794,7 +4966,7 @@
       </p:pic>
       <p:sp>
         <p:nvSpPr>
-          <p:cNvPr id="682599920" name="Rectangle 9"/>
+          <p:cNvPr id="283666622" name="Rectangle 9"/>
           <p:cNvSpPr/>
           <p:nvPr/>
         </p:nvSpPr>
@@ -4835,7 +5007,7 @@
       </p:sp>
       <p:sp>
         <p:nvSpPr>
-          <p:cNvPr id="942019449" name="Rectangle 10"/>
+          <p:cNvPr id="626396779" name="Rectangle 10"/>
           <p:cNvSpPr/>
           <p:nvPr/>
         </p:nvSpPr>
@@ -4873,7 +5045,7 @@
       </p:sp>
       <p:sp>
         <p:nvSpPr>
-          <p:cNvPr id="1377992475" name="Title 1"/>
+          <p:cNvPr id="544497723" name="Title 1"/>
           <p:cNvSpPr>
             <a:spLocks noGrp="1"/>
           </p:cNvSpPr>
@@ -4910,7 +5082,7 @@
       </p:sp>
       <p:sp>
         <p:nvSpPr>
-          <p:cNvPr id="1796634667" name="Content Placeholder 2"/>
+          <p:cNvPr id="1125246673" name="Content Placeholder 2"/>
           <p:cNvSpPr>
             <a:spLocks noGrp="1"/>
           </p:cNvSpPr>
@@ -4981,7 +5153,7 @@
       </p:sp>
       <p:sp>
         <p:nvSpPr>
-          <p:cNvPr id="1873829899" name="Text Placeholder 3"/>
+          <p:cNvPr id="160882335" name="Text Placeholder 3"/>
           <p:cNvSpPr>
             <a:spLocks noGrp="1"/>
           </p:cNvSpPr>
@@ -5049,7 +5221,7 @@
       </p:sp>
       <p:sp>
         <p:nvSpPr>
-          <p:cNvPr id="687641522" name="Date Placeholder 4"/>
+          <p:cNvPr id="2068733915" name="Date Placeholder 4"/>
           <p:cNvSpPr>
             <a:spLocks noGrp="1"/>
           </p:cNvSpPr>
@@ -5075,7 +5247,7 @@
       </p:sp>
       <p:sp>
         <p:nvSpPr>
-          <p:cNvPr id="1850807144" name="Footer Placeholder 5"/>
+          <p:cNvPr id="1336447002" name="Footer Placeholder 5"/>
           <p:cNvSpPr>
             <a:spLocks noGrp="1"/>
           </p:cNvSpPr>
@@ -5097,7 +5269,7 @@
       </p:sp>
       <p:sp>
         <p:nvSpPr>
-          <p:cNvPr id="1510415186" name="Slide Number Placeholder 6"/>
+          <p:cNvPr id="1976779372" name="Slide Number Placeholder 6"/>
           <p:cNvSpPr>
             <a:spLocks noGrp="1"/>
           </p:cNvSpPr>
@@ -5148,7 +5320,7 @@
       </p:grpSpPr>
       <p:sp>
         <p:nvSpPr>
-          <p:cNvPr id="1340095094" name="Заголовок 1"/>
+          <p:cNvPr id="411829291" name="Заголовок 1"/>
           <p:cNvSpPr>
             <a:spLocks noGrp="1"/>
           </p:cNvSpPr>
@@ -5174,7 +5346,7 @@
       </p:sp>
       <p:sp>
         <p:nvSpPr>
-          <p:cNvPr id="386458543" name="Объект 2"/>
+          <p:cNvPr id="1191476946" name="Объект 2"/>
           <p:cNvSpPr>
             <a:spLocks noGrp="1"/>
           </p:cNvSpPr>
@@ -5240,7 +5412,7 @@
       </p:sp>
       <p:sp>
         <p:nvSpPr>
-          <p:cNvPr id="1144812020" name="Дата 3"/>
+          <p:cNvPr id="1170739389" name="Дата 3"/>
           <p:cNvSpPr>
             <a:spLocks noGrp="1"/>
           </p:cNvSpPr>
@@ -5266,7 +5438,7 @@
       </p:sp>
       <p:sp>
         <p:nvSpPr>
-          <p:cNvPr id="1034901801" name="Нижний колонтитул 4"/>
+          <p:cNvPr id="1288938550" name="Нижний колонтитул 4"/>
           <p:cNvSpPr>
             <a:spLocks noGrp="1"/>
           </p:cNvSpPr>
@@ -5288,7 +5460,7 @@
       </p:sp>
       <p:sp>
         <p:nvSpPr>
-          <p:cNvPr id="1079621729" name="Номер слайда 5"/>
+          <p:cNvPr id="357470915" name="Номер слайда 5"/>
           <p:cNvSpPr>
             <a:spLocks noGrp="1"/>
           </p:cNvSpPr>
@@ -5339,7 +5511,7 @@
       </p:grpSpPr>
       <p:pic>
         <p:nvPicPr>
-          <p:cNvPr id="1402048872" name="Picture 7" descr="HD-ShadowLong.png"/>
+          <p:cNvPr id="1680527327" name="Picture 7" descr="HD-ShadowLong.png"/>
           <p:cNvPicPr>
             <a:picLocks noChangeAspect="1"/>
           </p:cNvPicPr>
@@ -5361,7 +5533,7 @@
       </p:pic>
       <p:pic>
         <p:nvPicPr>
-          <p:cNvPr id="2027145045" name="Picture 8" descr="HD-ShadowShort.png"/>
+          <p:cNvPr id="1713962559" name="Picture 8" descr="HD-ShadowShort.png"/>
           <p:cNvPicPr>
             <a:picLocks noChangeAspect="1"/>
           </p:cNvPicPr>
@@ -5383,7 +5555,7 @@
       </p:pic>
       <p:sp>
         <p:nvSpPr>
-          <p:cNvPr id="2028579240" name="Rectangle 9"/>
+          <p:cNvPr id="770326036" name="Rectangle 9"/>
           <p:cNvSpPr/>
           <p:nvPr/>
         </p:nvSpPr>
@@ -5424,7 +5596,7 @@
       </p:sp>
       <p:sp>
         <p:nvSpPr>
-          <p:cNvPr id="1949198225" name="Rectangle 10"/>
+          <p:cNvPr id="1572123296" name="Rectangle 10"/>
           <p:cNvSpPr/>
           <p:nvPr/>
         </p:nvSpPr>
@@ -5462,7 +5634,7 @@
       </p:sp>
       <p:sp>
         <p:nvSpPr>
-          <p:cNvPr id="326401395" name="Title 1"/>
+          <p:cNvPr id="831344582" name="Title 1"/>
           <p:cNvSpPr>
             <a:spLocks noGrp="1"/>
           </p:cNvSpPr>
@@ -5499,7 +5671,7 @@
       </p:sp>
       <p:sp>
         <p:nvSpPr>
-          <p:cNvPr id="491304985" name="Picture Placeholder 2"/>
+          <p:cNvPr id="248455126" name="Picture Placeholder 2"/>
           <p:cNvSpPr>
             <a:spLocks noChangeAspect="1" noGrp="1"/>
           </p:cNvSpPr>
@@ -5581,7 +5753,7 @@
       </p:sp>
       <p:sp>
         <p:nvSpPr>
-          <p:cNvPr id="456004256" name="Text Placeholder 3"/>
+          <p:cNvPr id="1749904477" name="Text Placeholder 3"/>
           <p:cNvSpPr>
             <a:spLocks noGrp="1"/>
           </p:cNvSpPr>
@@ -5649,7 +5821,7 @@
       </p:sp>
       <p:sp>
         <p:nvSpPr>
-          <p:cNvPr id="1611988589" name="Date Placeholder 4"/>
+          <p:cNvPr id="1616261920" name="Date Placeholder 4"/>
           <p:cNvSpPr>
             <a:spLocks noGrp="1"/>
           </p:cNvSpPr>
@@ -5675,7 +5847,7 @@
       </p:sp>
       <p:sp>
         <p:nvSpPr>
-          <p:cNvPr id="1385770614" name="Footer Placeholder 5"/>
+          <p:cNvPr id="1304794235" name="Footer Placeholder 5"/>
           <p:cNvSpPr>
             <a:spLocks noGrp="1"/>
           </p:cNvSpPr>
@@ -5697,7 +5869,7 @@
       </p:sp>
       <p:sp>
         <p:nvSpPr>
-          <p:cNvPr id="391744454" name="Slide Number Placeholder 6"/>
+          <p:cNvPr id="829900291" name="Slide Number Placeholder 6"/>
           <p:cNvSpPr>
             <a:spLocks noGrp="1"/>
           </p:cNvSpPr>
@@ -5748,7 +5920,7 @@
       </p:grpSpPr>
       <p:pic>
         <p:nvPicPr>
-          <p:cNvPr id="397028298" name="Picture 7" descr="HD-ShadowLong.png"/>
+          <p:cNvPr id="680086266" name="Picture 7" descr="HD-ShadowLong.png"/>
           <p:cNvPicPr>
             <a:picLocks noChangeAspect="1"/>
           </p:cNvPicPr>
@@ -5770,7 +5942,7 @@
       </p:pic>
       <p:pic>
         <p:nvPicPr>
-          <p:cNvPr id="1023754564" name="Picture 8" descr="HD-ShadowShort.png"/>
+          <p:cNvPr id="1987866869" name="Picture 8" descr="HD-ShadowShort.png"/>
           <p:cNvPicPr>
             <a:picLocks noChangeAspect="1"/>
           </p:cNvPicPr>
@@ -5792,7 +5964,7 @@
       </p:pic>
       <p:sp>
         <p:nvSpPr>
-          <p:cNvPr id="510818368" name="Rectangle 9"/>
+          <p:cNvPr id="467697009" name="Rectangle 9"/>
           <p:cNvSpPr/>
           <p:nvPr/>
         </p:nvSpPr>
@@ -5833,7 +6005,7 @@
       </p:sp>
       <p:sp>
         <p:nvSpPr>
-          <p:cNvPr id="2084539152" name="Rectangle 10"/>
+          <p:cNvPr id="913207234" name="Rectangle 10"/>
           <p:cNvSpPr/>
           <p:nvPr/>
         </p:nvSpPr>
@@ -5871,7 +6043,7 @@
       </p:sp>
       <p:sp>
         <p:nvSpPr>
-          <p:cNvPr id="2072169962" name="Title 1"/>
+          <p:cNvPr id="1227191211" name="Title 1"/>
           <p:cNvSpPr>
             <a:spLocks noGrp="1"/>
           </p:cNvSpPr>
@@ -5908,7 +6080,7 @@
       </p:sp>
       <p:sp>
         <p:nvSpPr>
-          <p:cNvPr id="1863216149" name="Picture Placeholder 2"/>
+          <p:cNvPr id="1881115345" name="Picture Placeholder 2"/>
           <p:cNvSpPr>
             <a:spLocks noChangeAspect="1" noGrp="1"/>
           </p:cNvSpPr>
@@ -5990,7 +6162,7 @@
       </p:sp>
       <p:sp>
         <p:nvSpPr>
-          <p:cNvPr id="763873188" name="Text Placeholder 3"/>
+          <p:cNvPr id="135923970" name="Text Placeholder 3"/>
           <p:cNvSpPr>
             <a:spLocks noGrp="1"/>
           </p:cNvSpPr>
@@ -6058,7 +6230,7 @@
       </p:sp>
       <p:sp>
         <p:nvSpPr>
-          <p:cNvPr id="128215475" name="Date Placeholder 4"/>
+          <p:cNvPr id="1864991915" name="Date Placeholder 4"/>
           <p:cNvSpPr>
             <a:spLocks noGrp="1"/>
           </p:cNvSpPr>
@@ -6084,7 +6256,7 @@
       </p:sp>
       <p:sp>
         <p:nvSpPr>
-          <p:cNvPr id="1412786735" name="Footer Placeholder 5"/>
+          <p:cNvPr id="1650644422" name="Footer Placeholder 5"/>
           <p:cNvSpPr>
             <a:spLocks noGrp="1"/>
           </p:cNvSpPr>
@@ -6106,7 +6278,7 @@
       </p:sp>
       <p:sp>
         <p:nvSpPr>
-          <p:cNvPr id="18652261" name="Slide Number Placeholder 6"/>
+          <p:cNvPr id="2040294216" name="Slide Number Placeholder 6"/>
           <p:cNvSpPr>
             <a:spLocks noGrp="1"/>
           </p:cNvSpPr>
@@ -6162,7 +6334,7 @@
       </p:grpSpPr>
       <p:pic>
         <p:nvPicPr>
-          <p:cNvPr id="620935841" name="Picture 7" descr="HD-ShadowLong.png"/>
+          <p:cNvPr id="178689149" name="Picture 7" descr="HD-ShadowLong.png"/>
           <p:cNvPicPr>
             <a:picLocks noChangeAspect="1"/>
           </p:cNvPicPr>
@@ -6184,7 +6356,7 @@
       </p:pic>
       <p:pic>
         <p:nvPicPr>
-          <p:cNvPr id="1463594036" name="Picture 8" descr="HD-ShadowShort.png"/>
+          <p:cNvPr id="346774747" name="Picture 8" descr="HD-ShadowShort.png"/>
           <p:cNvPicPr>
             <a:picLocks noChangeAspect="1"/>
           </p:cNvPicPr>
@@ -6206,7 +6378,7 @@
       </p:pic>
       <p:sp>
         <p:nvSpPr>
-          <p:cNvPr id="1072315444" name="Rectangle 9"/>
+          <p:cNvPr id="1477291723" name="Rectangle 9"/>
           <p:cNvSpPr/>
           <p:nvPr/>
         </p:nvSpPr>
@@ -6247,7 +6419,7 @@
       </p:sp>
       <p:sp>
         <p:nvSpPr>
-          <p:cNvPr id="1850679545" name="Rectangle 10"/>
+          <p:cNvPr id="1083799813" name="Rectangle 10"/>
           <p:cNvSpPr/>
           <p:nvPr/>
         </p:nvSpPr>
@@ -6285,7 +6457,7 @@
       </p:sp>
       <p:sp>
         <p:nvSpPr>
-          <p:cNvPr id="1738424554" name="Title 1"/>
+          <p:cNvPr id="978418471" name="Title 1"/>
           <p:cNvSpPr>
             <a:spLocks noGrp="1"/>
           </p:cNvSpPr>
@@ -6320,7 +6492,7 @@
       </p:sp>
       <p:sp>
         <p:nvSpPr>
-          <p:cNvPr id="1808316330" name="Text Placeholder 3"/>
+          <p:cNvPr id="202531569" name="Text Placeholder 3"/>
           <p:cNvSpPr>
             <a:spLocks noGrp="1"/>
           </p:cNvSpPr>
@@ -6388,7 +6560,7 @@
       </p:sp>
       <p:sp>
         <p:nvSpPr>
-          <p:cNvPr id="507268053" name="Date Placeholder 4"/>
+          <p:cNvPr id="657452635" name="Date Placeholder 4"/>
           <p:cNvSpPr>
             <a:spLocks noGrp="1"/>
           </p:cNvSpPr>
@@ -6414,7 +6586,7 @@
       </p:sp>
       <p:sp>
         <p:nvSpPr>
-          <p:cNvPr id="1369456348" name="Footer Placeholder 5"/>
+          <p:cNvPr id="1324359413" name="Footer Placeholder 5"/>
           <p:cNvSpPr>
             <a:spLocks noGrp="1"/>
           </p:cNvSpPr>
@@ -6436,7 +6608,7 @@
       </p:sp>
       <p:sp>
         <p:nvSpPr>
-          <p:cNvPr id="1976686985" name="Slide Number Placeholder 6"/>
+          <p:cNvPr id="1886779784" name="Slide Number Placeholder 6"/>
           <p:cNvSpPr>
             <a:spLocks noGrp="1"/>
           </p:cNvSpPr>
@@ -6492,7 +6664,7 @@
       </p:grpSpPr>
       <p:pic>
         <p:nvPicPr>
-          <p:cNvPr id="996754741" name="Picture 10" descr="HD-ShadowLong.png"/>
+          <p:cNvPr id="59406957" name="Picture 10" descr="HD-ShadowLong.png"/>
           <p:cNvPicPr>
             <a:picLocks noChangeAspect="1"/>
           </p:cNvPicPr>
@@ -6514,7 +6686,7 @@
       </p:pic>
       <p:pic>
         <p:nvPicPr>
-          <p:cNvPr id="1341503441" name="Picture 12" descr="HD-ShadowShort.png"/>
+          <p:cNvPr id="1283401421" name="Picture 12" descr="HD-ShadowShort.png"/>
           <p:cNvPicPr>
             <a:picLocks noChangeAspect="1"/>
           </p:cNvPicPr>
@@ -6536,7 +6708,7 @@
       </p:pic>
       <p:sp>
         <p:nvSpPr>
-          <p:cNvPr id="304718076" name="Rectangle 13"/>
+          <p:cNvPr id="1868851730" name="Rectangle 13"/>
           <p:cNvSpPr/>
           <p:nvPr/>
         </p:nvSpPr>
@@ -6577,7 +6749,7 @@
       </p:sp>
       <p:sp>
         <p:nvSpPr>
-          <p:cNvPr id="816928808" name="Rectangle 14"/>
+          <p:cNvPr id="700680903" name="Rectangle 14"/>
           <p:cNvSpPr/>
           <p:nvPr/>
         </p:nvSpPr>
@@ -6615,7 +6787,7 @@
       </p:sp>
       <p:sp>
         <p:nvSpPr>
-          <p:cNvPr id="1275541030" name="Title 1"/>
+          <p:cNvPr id="1105962811" name="Title 1"/>
           <p:cNvSpPr>
             <a:spLocks noGrp="1"/>
           </p:cNvSpPr>
@@ -6650,7 +6822,7 @@
       </p:sp>
       <p:sp>
         <p:nvSpPr>
-          <p:cNvPr id="2135855805" name="Text Placeholder 3"/>
+          <p:cNvPr id="1010881291" name="Text Placeholder 3"/>
           <p:cNvSpPr>
             <a:spLocks noGrp="1"/>
           </p:cNvSpPr>
@@ -6720,7 +6892,7 @@
       </p:sp>
       <p:sp>
         <p:nvSpPr>
-          <p:cNvPr id="806421712" name="Text Placeholder 3"/>
+          <p:cNvPr id="1455265633" name="Text Placeholder 3"/>
           <p:cNvSpPr>
             <a:spLocks noGrp="1"/>
           </p:cNvSpPr>
@@ -6790,7 +6962,7 @@
       </p:sp>
       <p:sp>
         <p:nvSpPr>
-          <p:cNvPr id="2032261581" name="Date Placeholder 4"/>
+          <p:cNvPr id="1491080020" name="Date Placeholder 4"/>
           <p:cNvSpPr>
             <a:spLocks noGrp="1"/>
           </p:cNvSpPr>
@@ -6816,7 +6988,7 @@
       </p:sp>
       <p:sp>
         <p:nvSpPr>
-          <p:cNvPr id="2087025637" name="Footer Placeholder 5"/>
+          <p:cNvPr id="534909845" name="Footer Placeholder 5"/>
           <p:cNvSpPr>
             <a:spLocks noGrp="1"/>
           </p:cNvSpPr>
@@ -6838,7 +7010,7 @@
       </p:sp>
       <p:sp>
         <p:nvSpPr>
-          <p:cNvPr id="235820119" name="Slide Number Placeholder 6"/>
+          <p:cNvPr id="1440901773" name="Slide Number Placeholder 6"/>
           <p:cNvSpPr>
             <a:spLocks noGrp="1"/>
           </p:cNvSpPr>
@@ -6869,7 +7041,7 @@
       </p:sp>
       <p:sp>
         <p:nvSpPr>
-          <p:cNvPr id="1666182973" name="TextBox 15"/>
+          <p:cNvPr id="119104017" name="TextBox 15"/>
           <p:cNvSpPr txBox="1"/>
           <p:nvPr/>
         </p:nvSpPr>
@@ -6973,7 +7145,7 @@
       </p:sp>
       <p:sp>
         <p:nvSpPr>
-          <p:cNvPr id="383860639" name="TextBox 16"/>
+          <p:cNvPr id="1397720600" name="TextBox 16"/>
           <p:cNvSpPr txBox="1"/>
           <p:nvPr/>
         </p:nvSpPr>
@@ -7102,7 +7274,7 @@
       </p:grpSpPr>
       <p:pic>
         <p:nvPicPr>
-          <p:cNvPr id="1974125989" name="Picture 8" descr="HD-ShadowLong.png"/>
+          <p:cNvPr id="1423197751" name="Picture 8" descr="HD-ShadowLong.png"/>
           <p:cNvPicPr>
             <a:picLocks noChangeAspect="1"/>
           </p:cNvPicPr>
@@ -7124,7 +7296,7 @@
       </p:pic>
       <p:pic>
         <p:nvPicPr>
-          <p:cNvPr id="1161818354" name="Picture 9" descr="HD-ShadowShort.png"/>
+          <p:cNvPr id="1228663050" name="Picture 9" descr="HD-ShadowShort.png"/>
           <p:cNvPicPr>
             <a:picLocks noChangeAspect="1"/>
           </p:cNvPicPr>
@@ -7146,7 +7318,7 @@
       </p:pic>
       <p:sp>
         <p:nvSpPr>
-          <p:cNvPr id="862985469" name="Rectangle 10"/>
+          <p:cNvPr id="798176419" name="Rectangle 10"/>
           <p:cNvSpPr/>
           <p:nvPr/>
         </p:nvSpPr>
@@ -7187,7 +7359,7 @@
       </p:sp>
       <p:sp>
         <p:nvSpPr>
-          <p:cNvPr id="933650176" name="Rectangle 11"/>
+          <p:cNvPr id="1548083128" name="Rectangle 11"/>
           <p:cNvSpPr/>
           <p:nvPr/>
         </p:nvSpPr>
@@ -7225,7 +7397,7 @@
       </p:sp>
       <p:sp>
         <p:nvSpPr>
-          <p:cNvPr id="1904329327" name="Title 1"/>
+          <p:cNvPr id="1179403723" name="Title 1"/>
           <p:cNvSpPr>
             <a:spLocks noGrp="1"/>
           </p:cNvSpPr>
@@ -7260,7 +7432,7 @@
       </p:sp>
       <p:sp>
         <p:nvSpPr>
-          <p:cNvPr id="307512275" name="Text Placeholder 3"/>
+          <p:cNvPr id="509217420" name="Text Placeholder 3"/>
           <p:cNvSpPr>
             <a:spLocks noGrp="1"/>
           </p:cNvSpPr>
@@ -7328,7 +7500,7 @@
       </p:sp>
       <p:sp>
         <p:nvSpPr>
-          <p:cNvPr id="303311661" name="Date Placeholder 4"/>
+          <p:cNvPr id="342078780" name="Date Placeholder 4"/>
           <p:cNvSpPr>
             <a:spLocks noGrp="1"/>
           </p:cNvSpPr>
@@ -7354,7 +7526,7 @@
       </p:sp>
       <p:sp>
         <p:nvSpPr>
-          <p:cNvPr id="674971886" name="Footer Placeholder 5"/>
+          <p:cNvPr id="1390755054" name="Footer Placeholder 5"/>
           <p:cNvSpPr>
             <a:spLocks noGrp="1"/>
           </p:cNvSpPr>
@@ -7376,7 +7548,7 @@
       </p:sp>
       <p:sp>
         <p:nvSpPr>
-          <p:cNvPr id="1967435798" name="Slide Number Placeholder 6"/>
+          <p:cNvPr id="2128360170" name="Slide Number Placeholder 6"/>
           <p:cNvSpPr>
             <a:spLocks noGrp="1"/>
           </p:cNvSpPr>
@@ -7432,7 +7604,7 @@
       </p:grpSpPr>
       <p:pic>
         <p:nvPicPr>
-          <p:cNvPr id="1788865815" name="Picture 12" descr="HD-ShadowLong.png"/>
+          <p:cNvPr id="1075176072" name="Picture 12" descr="HD-ShadowLong.png"/>
           <p:cNvPicPr>
             <a:picLocks noChangeAspect="1"/>
           </p:cNvPicPr>
@@ -7454,7 +7626,7 @@
       </p:pic>
       <p:pic>
         <p:nvPicPr>
-          <p:cNvPr id="1947179426" name="Picture 13" descr="HD-ShadowShort.png"/>
+          <p:cNvPr id="921394955" name="Picture 13" descr="HD-ShadowShort.png"/>
           <p:cNvPicPr>
             <a:picLocks noChangeAspect="1"/>
           </p:cNvPicPr>
@@ -7476,7 +7648,7 @@
       </p:pic>
       <p:sp>
         <p:nvSpPr>
-          <p:cNvPr id="1129433219" name="Rectangle 15"/>
+          <p:cNvPr id="1211753460" name="Rectangle 15"/>
           <p:cNvSpPr/>
           <p:nvPr/>
         </p:nvSpPr>
@@ -7517,7 +7689,7 @@
       </p:sp>
       <p:sp>
         <p:nvSpPr>
-          <p:cNvPr id="1148121149" name="Rectangle 16"/>
+          <p:cNvPr id="1802264422" name="Rectangle 16"/>
           <p:cNvSpPr/>
           <p:nvPr/>
         </p:nvSpPr>
@@ -7555,7 +7727,7 @@
       </p:sp>
       <p:sp>
         <p:nvSpPr>
-          <p:cNvPr id="955876716" name="Title 1"/>
+          <p:cNvPr id="327781410" name="Title 1"/>
           <p:cNvSpPr>
             <a:spLocks noGrp="1"/>
           </p:cNvSpPr>
@@ -7586,7 +7758,7 @@
       </p:sp>
       <p:sp>
         <p:nvSpPr>
-          <p:cNvPr id="409853184" name="Text Placeholder 2"/>
+          <p:cNvPr id="1152697771" name="Text Placeholder 2"/>
           <p:cNvSpPr>
             <a:spLocks noGrp="1"/>
           </p:cNvSpPr>
@@ -7660,7 +7832,7 @@
       </p:sp>
       <p:sp>
         <p:nvSpPr>
-          <p:cNvPr id="2049074468" name="Text Placeholder 3"/>
+          <p:cNvPr id="1754309287" name="Text Placeholder 3"/>
           <p:cNvSpPr>
             <a:spLocks noGrp="1"/>
           </p:cNvSpPr>
@@ -7730,7 +7902,7 @@
       </p:sp>
       <p:sp>
         <p:nvSpPr>
-          <p:cNvPr id="14963742" name="Text Placeholder 4"/>
+          <p:cNvPr id="2008508467" name="Text Placeholder 4"/>
           <p:cNvSpPr>
             <a:spLocks noGrp="1"/>
           </p:cNvSpPr>
@@ -7804,7 +7976,7 @@
       </p:sp>
       <p:sp>
         <p:nvSpPr>
-          <p:cNvPr id="1337582074" name="Text Placeholder 3"/>
+          <p:cNvPr id="1938585604" name="Text Placeholder 3"/>
           <p:cNvSpPr>
             <a:spLocks noGrp="1"/>
           </p:cNvSpPr>
@@ -7874,7 +8046,7 @@
       </p:sp>
       <p:sp>
         <p:nvSpPr>
-          <p:cNvPr id="216215726" name="Text Placeholder 4"/>
+          <p:cNvPr id="722857320" name="Text Placeholder 4"/>
           <p:cNvSpPr>
             <a:spLocks noGrp="1"/>
           </p:cNvSpPr>
@@ -7948,7 +8120,7 @@
       </p:sp>
       <p:sp>
         <p:nvSpPr>
-          <p:cNvPr id="568305960" name="Text Placeholder 3"/>
+          <p:cNvPr id="913641396" name="Text Placeholder 3"/>
           <p:cNvSpPr>
             <a:spLocks noGrp="1"/>
           </p:cNvSpPr>
@@ -8018,7 +8190,7 @@
       </p:sp>
       <p:sp>
         <p:nvSpPr>
-          <p:cNvPr id="1506676091" name="Date Placeholder 2"/>
+          <p:cNvPr id="196900026" name="Date Placeholder 2"/>
           <p:cNvSpPr>
             <a:spLocks noGrp="1"/>
           </p:cNvSpPr>
@@ -8044,7 +8216,7 @@
       </p:sp>
       <p:sp>
         <p:nvSpPr>
-          <p:cNvPr id="370875864" name="Footer Placeholder 3"/>
+          <p:cNvPr id="1724434587" name="Footer Placeholder 3"/>
           <p:cNvSpPr>
             <a:spLocks noGrp="1"/>
           </p:cNvSpPr>
@@ -8066,7 +8238,7 @@
       </p:sp>
       <p:sp>
         <p:nvSpPr>
-          <p:cNvPr id="1282912291" name="Slide Number Placeholder 4"/>
+          <p:cNvPr id="543308311" name="Slide Number Placeholder 4"/>
           <p:cNvSpPr>
             <a:spLocks noGrp="1"/>
           </p:cNvSpPr>
@@ -8117,7 +8289,7 @@
       </p:grpSpPr>
       <p:pic>
         <p:nvPicPr>
-          <p:cNvPr id="849188249" name="Picture 14" descr="HD-ShadowLong.png"/>
+          <p:cNvPr id="990040029" name="Picture 14" descr="HD-ShadowLong.png"/>
           <p:cNvPicPr>
             <a:picLocks noChangeAspect="1"/>
           </p:cNvPicPr>
@@ -8139,7 +8311,7 @@
       </p:pic>
       <p:pic>
         <p:nvPicPr>
-          <p:cNvPr id="1530966511" name="Picture 15" descr="HD-ShadowShort.png"/>
+          <p:cNvPr id="209499313" name="Picture 15" descr="HD-ShadowShort.png"/>
           <p:cNvPicPr>
             <a:picLocks noChangeAspect="1"/>
           </p:cNvPicPr>
@@ -8161,7 +8333,7 @@
       </p:pic>
       <p:sp>
         <p:nvSpPr>
-          <p:cNvPr id="1435784747" name="Rectangle 16"/>
+          <p:cNvPr id="1954718349" name="Rectangle 16"/>
           <p:cNvSpPr/>
           <p:nvPr/>
         </p:nvSpPr>
@@ -8202,7 +8374,7 @@
       </p:sp>
       <p:sp>
         <p:nvSpPr>
-          <p:cNvPr id="522713893" name="Rectangle 17"/>
+          <p:cNvPr id="1971143276" name="Rectangle 17"/>
           <p:cNvSpPr/>
           <p:nvPr/>
         </p:nvSpPr>
@@ -8240,7 +8412,7 @@
       </p:sp>
       <p:sp>
         <p:nvSpPr>
-          <p:cNvPr id="1345938604" name="Title 1"/>
+          <p:cNvPr id="1505176539" name="Title 1"/>
           <p:cNvSpPr>
             <a:spLocks noGrp="1"/>
           </p:cNvSpPr>
@@ -8271,7 +8443,7 @@
       </p:sp>
       <p:sp>
         <p:nvSpPr>
-          <p:cNvPr id="1326194195" name="Text Placeholder 2"/>
+          <p:cNvPr id="879335849" name="Text Placeholder 2"/>
           <p:cNvSpPr>
             <a:spLocks noGrp="1"/>
           </p:cNvSpPr>
@@ -8345,7 +8517,7 @@
       </p:sp>
       <p:sp>
         <p:nvSpPr>
-          <p:cNvPr id="65839950" name="Picture Placeholder 2"/>
+          <p:cNvPr id="1855068860" name="Picture Placeholder 2"/>
           <p:cNvSpPr>
             <a:spLocks noChangeAspect="1" noGrp="1"/>
           </p:cNvSpPr>
@@ -8427,7 +8599,7 @@
       </p:sp>
       <p:sp>
         <p:nvSpPr>
-          <p:cNvPr id="1407022285" name="Text Placeholder 3"/>
+          <p:cNvPr id="901079654" name="Text Placeholder 3"/>
           <p:cNvSpPr>
             <a:spLocks noGrp="1"/>
           </p:cNvSpPr>
@@ -8497,7 +8669,7 @@
       </p:sp>
       <p:sp>
         <p:nvSpPr>
-          <p:cNvPr id="943875953" name="Text Placeholder 4"/>
+          <p:cNvPr id="1363389028" name="Text Placeholder 4"/>
           <p:cNvSpPr>
             <a:spLocks noGrp="1"/>
           </p:cNvSpPr>
@@ -8571,7 +8743,7 @@
       </p:sp>
       <p:sp>
         <p:nvSpPr>
-          <p:cNvPr id="25122385" name="Picture Placeholder 2"/>
+          <p:cNvPr id="849672771" name="Picture Placeholder 2"/>
           <p:cNvSpPr>
             <a:spLocks noChangeAspect="1" noGrp="1"/>
           </p:cNvSpPr>
@@ -8653,7 +8825,7 @@
       </p:sp>
       <p:sp>
         <p:nvSpPr>
-          <p:cNvPr id="1484205128" name="Text Placeholder 3"/>
+          <p:cNvPr id="893326674" name="Text Placeholder 3"/>
           <p:cNvSpPr>
             <a:spLocks noGrp="1"/>
           </p:cNvSpPr>
@@ -8723,7 +8895,7 @@
       </p:sp>
       <p:sp>
         <p:nvSpPr>
-          <p:cNvPr id="968428637" name="Text Placeholder 4"/>
+          <p:cNvPr id="1175405141" name="Text Placeholder 4"/>
           <p:cNvSpPr>
             <a:spLocks noGrp="1"/>
           </p:cNvSpPr>
@@ -8797,7 +8969,7 @@
       </p:sp>
       <p:sp>
         <p:nvSpPr>
-          <p:cNvPr id="387538774" name="Picture Placeholder 2"/>
+          <p:cNvPr id="1901446938" name="Picture Placeholder 2"/>
           <p:cNvSpPr>
             <a:spLocks noChangeAspect="1" noGrp="1"/>
           </p:cNvSpPr>
@@ -8879,7 +9051,7 @@
       </p:sp>
       <p:sp>
         <p:nvSpPr>
-          <p:cNvPr id="1116566358" name="Text Placeholder 3"/>
+          <p:cNvPr id="1005129983" name="Text Placeholder 3"/>
           <p:cNvSpPr>
             <a:spLocks noGrp="1"/>
           </p:cNvSpPr>
@@ -8949,7 +9121,7 @@
       </p:sp>
       <p:sp>
         <p:nvSpPr>
-          <p:cNvPr id="1110835665" name="Date Placeholder 2"/>
+          <p:cNvPr id="1756156099" name="Date Placeholder 2"/>
           <p:cNvSpPr>
             <a:spLocks noGrp="1"/>
           </p:cNvSpPr>
@@ -8975,7 +9147,7 @@
       </p:sp>
       <p:sp>
         <p:nvSpPr>
-          <p:cNvPr id="989496011" name="Footer Placeholder 3"/>
+          <p:cNvPr id="797115076" name="Footer Placeholder 3"/>
           <p:cNvSpPr>
             <a:spLocks noGrp="1"/>
           </p:cNvSpPr>
@@ -8997,7 +9169,7 @@
       </p:sp>
       <p:sp>
         <p:nvSpPr>
-          <p:cNvPr id="688708943" name="Slide Number Placeholder 4"/>
+          <p:cNvPr id="1594833181" name="Slide Number Placeholder 4"/>
           <p:cNvSpPr>
             <a:spLocks noGrp="1"/>
           </p:cNvSpPr>
@@ -9048,7 +9220,7 @@
       </p:grpSpPr>
       <p:pic>
         <p:nvPicPr>
-          <p:cNvPr id="434643743" name="Picture 6" descr="HD-ShadowLong.png"/>
+          <p:cNvPr id="500820123" name="Picture 6" descr="HD-ShadowLong.png"/>
           <p:cNvPicPr>
             <a:picLocks noChangeAspect="1"/>
           </p:cNvPicPr>
@@ -9070,7 +9242,7 @@
       </p:pic>
       <p:pic>
         <p:nvPicPr>
-          <p:cNvPr id="1778943405" name="Picture 7" descr="HD-ShadowShort.png"/>
+          <p:cNvPr id="96535896" name="Picture 7" descr="HD-ShadowShort.png"/>
           <p:cNvPicPr>
             <a:picLocks noChangeAspect="1"/>
           </p:cNvPicPr>
@@ -9092,7 +9264,7 @@
       </p:pic>
       <p:sp>
         <p:nvSpPr>
-          <p:cNvPr id="1092766167" name="Rectangle 8"/>
+          <p:cNvPr id="1640652263" name="Rectangle 8"/>
           <p:cNvSpPr/>
           <p:nvPr/>
         </p:nvSpPr>
@@ -9133,7 +9305,7 @@
       </p:sp>
       <p:sp>
         <p:nvSpPr>
-          <p:cNvPr id="362701914" name="Rectangle 9"/>
+          <p:cNvPr id="489587005" name="Rectangle 9"/>
           <p:cNvSpPr/>
           <p:nvPr/>
         </p:nvSpPr>
@@ -9171,7 +9343,7 @@
       </p:sp>
       <p:sp>
         <p:nvSpPr>
-          <p:cNvPr id="1999920660" name="Title 1"/>
+          <p:cNvPr id="897367596" name="Title 1"/>
           <p:cNvSpPr>
             <a:spLocks noGrp="1"/>
           </p:cNvSpPr>
@@ -9201,7 +9373,7 @@
       </p:sp>
       <p:sp>
         <p:nvSpPr>
-          <p:cNvPr id="390456609" name="Vertical Text Placeholder 2"/>
+          <p:cNvPr id="573886166" name="Vertical Text Placeholder 2"/>
           <p:cNvSpPr>
             <a:spLocks noGrp="1"/>
           </p:cNvSpPr>
@@ -9267,7 +9439,7 @@
       </p:sp>
       <p:sp>
         <p:nvSpPr>
-          <p:cNvPr id="1331820931" name="Date Placeholder 3"/>
+          <p:cNvPr id="1024057033" name="Date Placeholder 3"/>
           <p:cNvSpPr>
             <a:spLocks noGrp="1"/>
           </p:cNvSpPr>
@@ -9293,7 +9465,7 @@
       </p:sp>
       <p:sp>
         <p:nvSpPr>
-          <p:cNvPr id="1861627410" name="Footer Placeholder 4"/>
+          <p:cNvPr id="892902088" name="Footer Placeholder 4"/>
           <p:cNvSpPr>
             <a:spLocks noGrp="1"/>
           </p:cNvSpPr>
@@ -9315,7 +9487,7 @@
       </p:sp>
       <p:sp>
         <p:nvSpPr>
-          <p:cNvPr id="703502409" name="Slide Number Placeholder 5"/>
+          <p:cNvPr id="1965314837" name="Slide Number Placeholder 5"/>
           <p:cNvSpPr>
             <a:spLocks noGrp="1"/>
           </p:cNvSpPr>
@@ -9366,7 +9538,7 @@
       </p:grpSpPr>
       <p:sp>
         <p:nvSpPr>
-          <p:cNvPr id="1800859990" name="Rectangle 6"/>
+          <p:cNvPr id="704663975" name="Rectangle 6"/>
           <p:cNvSpPr/>
           <p:nvPr/>
         </p:nvSpPr>
@@ -9407,7 +9579,7 @@
       </p:sp>
       <p:sp>
         <p:nvSpPr>
-          <p:cNvPr id="301070386" name="Rectangle 7"/>
+          <p:cNvPr id="1870888505" name="Rectangle 7"/>
           <p:cNvSpPr/>
           <p:nvPr/>
         </p:nvSpPr>
@@ -9445,7 +9617,7 @@
       </p:sp>
       <p:sp>
         <p:nvSpPr>
-          <p:cNvPr id="1044660263" name="Vertical Title 1"/>
+          <p:cNvPr id="2086025445" name="Vertical Title 1"/>
           <p:cNvSpPr>
             <a:spLocks noGrp="1"/>
           </p:cNvSpPr>
@@ -9476,7 +9648,7 @@
       </p:sp>
       <p:sp>
         <p:nvSpPr>
-          <p:cNvPr id="2098166728" name="Vertical Text Placeholder 2"/>
+          <p:cNvPr id="1923823100" name="Vertical Text Placeholder 2"/>
           <p:cNvSpPr>
             <a:spLocks noGrp="1"/>
           </p:cNvSpPr>
@@ -9547,7 +9719,7 @@
       </p:sp>
       <p:sp>
         <p:nvSpPr>
-          <p:cNvPr id="2082713330" name="Date Placeholder 3"/>
+          <p:cNvPr id="855104403" name="Date Placeholder 3"/>
           <p:cNvSpPr>
             <a:spLocks noGrp="1"/>
           </p:cNvSpPr>
@@ -9578,7 +9750,7 @@
       </p:sp>
       <p:sp>
         <p:nvSpPr>
-          <p:cNvPr id="1627636278" name="Footer Placeholder 4"/>
+          <p:cNvPr id="674487083" name="Footer Placeholder 4"/>
           <p:cNvSpPr>
             <a:spLocks noGrp="1"/>
           </p:cNvSpPr>
@@ -9605,7 +9777,7 @@
       </p:sp>
       <p:sp>
         <p:nvSpPr>
-          <p:cNvPr id="1317675565" name="Slide Number Placeholder 5"/>
+          <p:cNvPr id="2033703079" name="Slide Number Placeholder 5"/>
           <p:cNvSpPr>
             <a:spLocks noGrp="1"/>
           </p:cNvSpPr>
@@ -9665,7 +9837,7 @@
       </p:grpSpPr>
       <p:sp>
         <p:nvSpPr>
-          <p:cNvPr id="109063446" name="Заголовок 1"/>
+          <p:cNvPr id="1066399726" name="Заголовок 1"/>
           <p:cNvSpPr>
             <a:spLocks noGrp="1"/>
           </p:cNvSpPr>
@@ -9700,7 +9872,7 @@
       </p:sp>
       <p:sp>
         <p:nvSpPr>
-          <p:cNvPr id="272128535" name="Текст 2"/>
+          <p:cNvPr id="844569830" name="Текст 2"/>
           <p:cNvSpPr>
             <a:spLocks noGrp="1"/>
           </p:cNvSpPr>
@@ -9822,7 +9994,7 @@
       </p:sp>
       <p:sp>
         <p:nvSpPr>
-          <p:cNvPr id="466540434" name="Дата 3"/>
+          <p:cNvPr id="191785381" name="Дата 3"/>
           <p:cNvSpPr>
             <a:spLocks noGrp="1"/>
           </p:cNvSpPr>
@@ -9848,7 +10020,7 @@
       </p:sp>
       <p:sp>
         <p:nvSpPr>
-          <p:cNvPr id="2142046034" name="Нижний колонтитул 4"/>
+          <p:cNvPr id="1758759739" name="Нижний колонтитул 4"/>
           <p:cNvSpPr>
             <a:spLocks noGrp="1"/>
           </p:cNvSpPr>
@@ -9870,7 +10042,7 @@
       </p:sp>
       <p:sp>
         <p:nvSpPr>
-          <p:cNvPr id="1709469930" name="Номер слайда 5"/>
+          <p:cNvPr id="1407252197" name="Номер слайда 5"/>
           <p:cNvSpPr>
             <a:spLocks noGrp="1"/>
           </p:cNvSpPr>
@@ -9921,7 +10093,7 @@
       </p:grpSpPr>
       <p:sp>
         <p:nvSpPr>
-          <p:cNvPr id="741603318" name="Заголовок 1"/>
+          <p:cNvPr id="1589410618" name="Заголовок 1"/>
           <p:cNvSpPr>
             <a:spLocks noGrp="1"/>
           </p:cNvSpPr>
@@ -9947,7 +10119,7 @@
       </p:sp>
       <p:sp>
         <p:nvSpPr>
-          <p:cNvPr id="1792332139" name="Объект 2"/>
+          <p:cNvPr id="518232802" name="Объект 2"/>
           <p:cNvSpPr>
             <a:spLocks noGrp="1"/>
           </p:cNvSpPr>
@@ -10018,7 +10190,7 @@
       </p:sp>
       <p:sp>
         <p:nvSpPr>
-          <p:cNvPr id="346961568" name="Объект 3"/>
+          <p:cNvPr id="1065528384" name="Объект 3"/>
           <p:cNvSpPr>
             <a:spLocks noGrp="1"/>
           </p:cNvSpPr>
@@ -10089,7 +10261,7 @@
       </p:sp>
       <p:sp>
         <p:nvSpPr>
-          <p:cNvPr id="1585844048" name="Дата 4"/>
+          <p:cNvPr id="401821845" name="Дата 4"/>
           <p:cNvSpPr>
             <a:spLocks noGrp="1"/>
           </p:cNvSpPr>
@@ -10115,7 +10287,7 @@
       </p:sp>
       <p:sp>
         <p:nvSpPr>
-          <p:cNvPr id="1068117565" name="Нижний колонтитул 5"/>
+          <p:cNvPr id="916400218" name="Нижний колонтитул 5"/>
           <p:cNvSpPr>
             <a:spLocks noGrp="1"/>
           </p:cNvSpPr>
@@ -10137,7 +10309,7 @@
       </p:sp>
       <p:sp>
         <p:nvSpPr>
-          <p:cNvPr id="284990761" name="Номер слайда 6"/>
+          <p:cNvPr id="954146317" name="Номер слайда 6"/>
           <p:cNvSpPr>
             <a:spLocks noGrp="1"/>
           </p:cNvSpPr>
@@ -10188,7 +10360,7 @@
       </p:grpSpPr>
       <p:sp>
         <p:nvSpPr>
-          <p:cNvPr id="1980151492" name="Заголовок 1"/>
+          <p:cNvPr id="1940585574" name="Заголовок 1"/>
           <p:cNvSpPr>
             <a:spLocks noGrp="1"/>
           </p:cNvSpPr>
@@ -10219,7 +10391,7 @@
       </p:sp>
       <p:sp>
         <p:nvSpPr>
-          <p:cNvPr id="685589892" name="Текст 2"/>
+          <p:cNvPr id="1826292590" name="Текст 2"/>
           <p:cNvSpPr>
             <a:spLocks noGrp="1"/>
           </p:cNvSpPr>
@@ -10287,7 +10459,7 @@
       </p:sp>
       <p:sp>
         <p:nvSpPr>
-          <p:cNvPr id="1919064004" name="Объект 3"/>
+          <p:cNvPr id="620900476" name="Объект 3"/>
           <p:cNvSpPr>
             <a:spLocks noGrp="1"/>
           </p:cNvSpPr>
@@ -10358,7 +10530,7 @@
       </p:sp>
       <p:sp>
         <p:nvSpPr>
-          <p:cNvPr id="813068489" name="Текст 4"/>
+          <p:cNvPr id="2093941636" name="Текст 4"/>
           <p:cNvSpPr>
             <a:spLocks noGrp="1"/>
           </p:cNvSpPr>
@@ -10426,7 +10598,7 @@
       </p:sp>
       <p:sp>
         <p:nvSpPr>
-          <p:cNvPr id="1874585451" name="Объект 5"/>
+          <p:cNvPr id="669470468" name="Объект 5"/>
           <p:cNvSpPr>
             <a:spLocks noGrp="1"/>
           </p:cNvSpPr>
@@ -10497,7 +10669,7 @@
       </p:sp>
       <p:sp>
         <p:nvSpPr>
-          <p:cNvPr id="695858790" name="Дата 6"/>
+          <p:cNvPr id="1349630695" name="Дата 6"/>
           <p:cNvSpPr>
             <a:spLocks noGrp="1"/>
           </p:cNvSpPr>
@@ -10523,7 +10695,7 @@
       </p:sp>
       <p:sp>
         <p:nvSpPr>
-          <p:cNvPr id="42027271" name="Нижний колонтитул 7"/>
+          <p:cNvPr id="1418074972" name="Нижний колонтитул 7"/>
           <p:cNvSpPr>
             <a:spLocks noGrp="1"/>
           </p:cNvSpPr>
@@ -10545,7 +10717,7 @@
       </p:sp>
       <p:sp>
         <p:nvSpPr>
-          <p:cNvPr id="153464571" name="Номер слайда 8"/>
+          <p:cNvPr id="1463157166" name="Номер слайда 8"/>
           <p:cNvSpPr>
             <a:spLocks noGrp="1"/>
           </p:cNvSpPr>
@@ -10596,7 +10768,7 @@
       </p:grpSpPr>
       <p:sp>
         <p:nvSpPr>
-          <p:cNvPr id="2096650089" name="Заголовок 1"/>
+          <p:cNvPr id="1741218214" name="Заголовок 1"/>
           <p:cNvSpPr>
             <a:spLocks noGrp="1"/>
           </p:cNvSpPr>
@@ -10622,7 +10794,7 @@
       </p:sp>
       <p:sp>
         <p:nvSpPr>
-          <p:cNvPr id="225544685" name="Дата 2"/>
+          <p:cNvPr id="1089423099" name="Дата 2"/>
           <p:cNvSpPr>
             <a:spLocks noGrp="1"/>
           </p:cNvSpPr>
@@ -10648,7 +10820,7 @@
       </p:sp>
       <p:sp>
         <p:nvSpPr>
-          <p:cNvPr id="289092037" name="Нижний колонтитул 3"/>
+          <p:cNvPr id="1763505212" name="Нижний колонтитул 3"/>
           <p:cNvSpPr>
             <a:spLocks noGrp="1"/>
           </p:cNvSpPr>
@@ -10670,7 +10842,7 @@
       </p:sp>
       <p:sp>
         <p:nvSpPr>
-          <p:cNvPr id="403648122" name="Номер слайда 4"/>
+          <p:cNvPr id="884736666" name="Номер слайда 4"/>
           <p:cNvSpPr>
             <a:spLocks noGrp="1"/>
           </p:cNvSpPr>
@@ -10721,7 +10893,7 @@
       </p:grpSpPr>
       <p:sp>
         <p:nvSpPr>
-          <p:cNvPr id="184900850" name="Дата 1"/>
+          <p:cNvPr id="357549572" name="Дата 1"/>
           <p:cNvSpPr>
             <a:spLocks noGrp="1"/>
           </p:cNvSpPr>
@@ -10747,7 +10919,7 @@
       </p:sp>
       <p:sp>
         <p:nvSpPr>
-          <p:cNvPr id="1727297342" name="Нижний колонтитул 2"/>
+          <p:cNvPr id="534502877" name="Нижний колонтитул 2"/>
           <p:cNvSpPr>
             <a:spLocks noGrp="1"/>
           </p:cNvSpPr>
@@ -10769,7 +10941,7 @@
       </p:sp>
       <p:sp>
         <p:nvSpPr>
-          <p:cNvPr id="2130201838" name="Номер слайда 3"/>
+          <p:cNvPr id="467728609" name="Номер слайда 3"/>
           <p:cNvSpPr>
             <a:spLocks noGrp="1"/>
           </p:cNvSpPr>
@@ -10820,7 +10992,7 @@
       </p:grpSpPr>
       <p:sp>
         <p:nvSpPr>
-          <p:cNvPr id="1925671696" name="Заголовок 1"/>
+          <p:cNvPr id="1951791193" name="Заголовок 1"/>
           <p:cNvSpPr>
             <a:spLocks noGrp="1"/>
           </p:cNvSpPr>
@@ -10855,7 +11027,7 @@
       </p:sp>
       <p:sp>
         <p:nvSpPr>
-          <p:cNvPr id="1459081648" name="Объект 2"/>
+          <p:cNvPr id="1526137546" name="Объект 2"/>
           <p:cNvSpPr>
             <a:spLocks noGrp="1"/>
           </p:cNvSpPr>
@@ -10954,7 +11126,7 @@
       </p:sp>
       <p:sp>
         <p:nvSpPr>
-          <p:cNvPr id="1897723798" name="Текст 3"/>
+          <p:cNvPr id="90218498" name="Текст 3"/>
           <p:cNvSpPr>
             <a:spLocks noGrp="1"/>
           </p:cNvSpPr>
@@ -11022,7 +11194,7 @@
       </p:sp>
       <p:sp>
         <p:nvSpPr>
-          <p:cNvPr id="895755618" name="Дата 4"/>
+          <p:cNvPr id="975449086" name="Дата 4"/>
           <p:cNvSpPr>
             <a:spLocks noGrp="1"/>
           </p:cNvSpPr>
@@ -11048,7 +11220,7 @@
       </p:sp>
       <p:sp>
         <p:nvSpPr>
-          <p:cNvPr id="1646582499" name="Нижний колонтитул 5"/>
+          <p:cNvPr id="773505591" name="Нижний колонтитул 5"/>
           <p:cNvSpPr>
             <a:spLocks noGrp="1"/>
           </p:cNvSpPr>
@@ -11070,7 +11242,7 @@
       </p:sp>
       <p:sp>
         <p:nvSpPr>
-          <p:cNvPr id="1581438441" name="Номер слайда 6"/>
+          <p:cNvPr id="995840635" name="Номер слайда 6"/>
           <p:cNvSpPr>
             <a:spLocks noGrp="1"/>
           </p:cNvSpPr>
@@ -11121,7 +11293,7 @@
       </p:grpSpPr>
       <p:sp>
         <p:nvSpPr>
-          <p:cNvPr id="2029577845" name="Заголовок 1"/>
+          <p:cNvPr id="1021463461" name="Заголовок 1"/>
           <p:cNvSpPr>
             <a:spLocks noGrp="1"/>
           </p:cNvSpPr>
@@ -11156,7 +11328,7 @@
       </p:sp>
       <p:sp>
         <p:nvSpPr>
-          <p:cNvPr id="209025110" name="Рисунок 2"/>
+          <p:cNvPr id="432884306" name="Рисунок 2"/>
           <p:cNvSpPr>
             <a:spLocks noGrp="1"/>
           </p:cNvSpPr>
@@ -11220,7 +11392,7 @@
       </p:sp>
       <p:sp>
         <p:nvSpPr>
-          <p:cNvPr id="101257365" name="Текст 3"/>
+          <p:cNvPr id="1705493992" name="Текст 3"/>
           <p:cNvSpPr>
             <a:spLocks noGrp="1"/>
           </p:cNvSpPr>
@@ -11288,7 +11460,7 @@
       </p:sp>
       <p:sp>
         <p:nvSpPr>
-          <p:cNvPr id="105504078" name="Дата 4"/>
+          <p:cNvPr id="1895035539" name="Дата 4"/>
           <p:cNvSpPr>
             <a:spLocks noGrp="1"/>
           </p:cNvSpPr>
@@ -11314,7 +11486,7 @@
       </p:sp>
       <p:sp>
         <p:nvSpPr>
-          <p:cNvPr id="1572777110" name="Нижний колонтитул 5"/>
+          <p:cNvPr id="960917054" name="Нижний колонтитул 5"/>
           <p:cNvSpPr>
             <a:spLocks noGrp="1"/>
           </p:cNvSpPr>
@@ -11336,7 +11508,7 @@
       </p:sp>
       <p:sp>
         <p:nvSpPr>
-          <p:cNvPr id="1105840253" name="Номер слайда 6"/>
+          <p:cNvPr id="216432235" name="Номер слайда 6"/>
           <p:cNvSpPr>
             <a:spLocks noGrp="1"/>
           </p:cNvSpPr>
@@ -11392,7 +11564,7 @@
       </p:grpSpPr>
       <p:sp>
         <p:nvSpPr>
-          <p:cNvPr id="1458738045" name="Заголовок 1"/>
+          <p:cNvPr id="1535475343" name="Заголовок 1"/>
           <p:cNvSpPr>
             <a:spLocks noGrp="1"/>
           </p:cNvSpPr>
@@ -11428,7 +11600,7 @@
       </p:sp>
       <p:sp>
         <p:nvSpPr>
-          <p:cNvPr id="37395239" name="Текст 2"/>
+          <p:cNvPr id="695132574" name="Текст 2"/>
           <p:cNvSpPr>
             <a:spLocks noGrp="1"/>
           </p:cNvSpPr>
@@ -11504,7 +11676,7 @@
       </p:sp>
       <p:sp>
         <p:nvSpPr>
-          <p:cNvPr id="1974398298" name="Дата 3"/>
+          <p:cNvPr id="1230072073" name="Дата 3"/>
           <p:cNvSpPr>
             <a:spLocks noGrp="1"/>
           </p:cNvSpPr>
@@ -11548,7 +11720,7 @@
       </p:sp>
       <p:sp>
         <p:nvSpPr>
-          <p:cNvPr id="441802273" name="Нижний колонтитул 4"/>
+          <p:cNvPr id="823413144" name="Нижний колонтитул 4"/>
           <p:cNvSpPr>
             <a:spLocks noGrp="1"/>
           </p:cNvSpPr>
@@ -11588,7 +11760,7 @@
       </p:sp>
       <p:sp>
         <p:nvSpPr>
-          <p:cNvPr id="392620856" name="Номер слайда 5"/>
+          <p:cNvPr id="351384171" name="Номер слайда 5"/>
           <p:cNvSpPr>
             <a:spLocks noGrp="1"/>
           </p:cNvSpPr>
@@ -11999,7 +12171,7 @@
       </p:grpSpPr>
       <p:sp>
         <p:nvSpPr>
-          <p:cNvPr id="956773983" name="Прямоугольник 3"/>
+          <p:cNvPr id="1018223286" name="Прямоугольник 3"/>
           <p:cNvSpPr/>
           <p:nvPr/>
         </p:nvSpPr>
@@ -12049,7 +12221,7 @@
       </p:sp>
       <p:sp>
         <p:nvSpPr>
-          <p:cNvPr id="75062187" name="Прямоугольник 4"/>
+          <p:cNvPr id="1296122844" name="Прямоугольник 4"/>
           <p:cNvSpPr/>
           <p:nvPr/>
         </p:nvSpPr>
@@ -12099,7 +12271,7 @@
       </p:sp>
       <p:sp>
         <p:nvSpPr>
-          <p:cNvPr id="1627004354" name="Заголовок 1"/>
+          <p:cNvPr id="845006590" name="Заголовок 1"/>
           <p:cNvSpPr>
             <a:spLocks noGrp="1"/>
           </p:cNvSpPr>
@@ -12164,7 +12336,7 @@
       </p:sp>
       <p:sp>
         <p:nvSpPr>
-          <p:cNvPr id="2100245361" name="Подзаголовок 2"/>
+          <p:cNvPr id="377099550" name="Подзаголовок 2"/>
           <p:cNvSpPr>
             <a:spLocks noGrp="1"/>
           </p:cNvSpPr>
@@ -12309,7 +12481,7 @@
       </p:grpSpPr>
       <p:sp>
         <p:nvSpPr>
-          <p:cNvPr id="1290920620" name="Объект 2"/>
+          <p:cNvPr id="1479437824" name="Объект 2"/>
           <p:cNvSpPr>
             <a:spLocks noGrp="1"/>
           </p:cNvSpPr>
@@ -12319,8 +12491,8 @@
         </p:nvSpPr>
         <p:spPr bwMode="auto">
           <a:xfrm flipH="0" flipV="0">
-            <a:off x="208734" y="1552574"/>
-            <a:ext cx="4736810" cy="4940299"/>
+            <a:off x="66674" y="1350173"/>
+            <a:ext cx="4134825" cy="5142700"/>
           </a:xfrm>
         </p:spPr>
         <p:txBody>
@@ -12333,82 +12505,104 @@
               <a:defRPr/>
             </a:pPr>
             <a:r>
-              <a:rPr lang="ru-RU"/>
-              <a:t>Предназначен для передачи данных между внешней памятью и вычислительными блоками;</a:t>
-            </a:r>
-            <a:endParaRPr/>
-          </a:p>
-          <a:p>
-            <a:pPr>
-              <a:defRPr/>
-            </a:pPr>
-            <a:r>
-              <a:rPr lang="ru-RU"/>
-              <a:t>Может только загружать</a:t>
-            </a:r>
-            <a:r>
-              <a:rPr lang="en-US"/>
-              <a:t> (LOAD)</a:t>
-            </a:r>
-            <a:r>
-              <a:rPr lang="ru-RU"/>
-              <a:t> или сохранять</a:t>
-            </a:r>
-            <a:r>
-              <a:rPr lang="en-US"/>
-              <a:t> (STORE)</a:t>
-            </a:r>
-            <a:r>
-              <a:rPr lang="ru-RU"/>
-              <a:t> данные</a:t>
-            </a:r>
-            <a:r>
-              <a:rPr lang="ru-RU"/>
+              <a:rPr lang="ru-RU" sz="1600"/>
+              <a:t>Вычислительный </a:t>
+            </a:r>
+            <a:r>
+              <a:rPr lang="ru-RU" sz="1600"/>
+              <a:t>блок </a:t>
+            </a:r>
+            <a:r>
+              <a:rPr lang="en-US" sz="1600"/>
+              <a:t>(Tread Unit) </a:t>
+            </a:r>
+            <a:r>
+              <a:rPr lang="ru-RU" sz="1600"/>
+              <a:t>обрабатывает вещественные и целочисленные данные из регистрового файла</a:t>
+            </a:r>
+            <a:r>
+              <a:rPr lang="ru-RU" sz="1600"/>
+              <a:t> (</a:t>
+            </a:r>
+            <a:r>
+              <a:rPr lang="en-US" sz="1600"/>
+              <a:t>Regfile</a:t>
+            </a:r>
+            <a:r>
+              <a:rPr lang="ru-RU" sz="1600"/>
+              <a:t>) и сохраняет их обратно</a:t>
+            </a:r>
+            <a:r>
+              <a:rPr lang="ru-RU" sz="1600"/>
               <a:t>;</a:t>
             </a:r>
-            <a:endParaRPr/>
-          </a:p>
-          <a:p>
-            <a:pPr>
-              <a:defRPr/>
-            </a:pPr>
-            <a:r>
-              <a:rPr lang="ru-RU"/>
-              <a:t>Работает </a:t>
-            </a:r>
-            <a:r>
-              <a:rPr lang="ru-RU"/>
-              <a:t>только при получении </a:t>
-            </a:r>
-            <a:r>
-              <a:rPr lang="en-US"/>
-              <a:t>LD/ST </a:t>
-            </a:r>
-            <a:r>
-              <a:rPr lang="ru-RU"/>
-              <a:t>инструкции</a:t>
-            </a:r>
-            <a:r>
-              <a:rPr lang="ru-RU"/>
-              <a:t>.</a:t>
-            </a:r>
-            <a:endParaRPr/>
-          </a:p>
-          <a:p>
-            <a:pPr>
-              <a:defRPr/>
-            </a:pPr>
-            <a:endParaRPr lang="ru-RU">
-              <a:solidFill>
-                <a:schemeClr val="bg1"/>
-              </a:solidFill>
-            </a:endParaRPr>
-          </a:p>
-        </p:txBody>
-      </p:sp>
-      <p:sp>
-        <p:nvSpPr>
-          <p:cNvPr id="1329150430" name="Номер слайда 3"/>
+            <a:endParaRPr sz="1600"/>
+          </a:p>
+          <a:p>
+            <a:pPr>
+              <a:defRPr/>
+            </a:pPr>
+            <a:r>
+              <a:rPr lang="ru-RU" sz="1600"/>
+              <a:t>Основные компоненты: </a:t>
+            </a:r>
+            <a:endParaRPr sz="1600"/>
+          </a:p>
+          <a:p>
+            <a:pPr lvl="1">
+              <a:defRPr/>
+            </a:pPr>
+            <a:r>
+              <a:rPr lang="en-US" sz="1600"/>
+              <a:t>FPU – </a:t>
+            </a:r>
+            <a:r>
+              <a:rPr lang="ru-RU" sz="1600"/>
+              <a:t>блок операций с плавающей запятой</a:t>
+            </a:r>
+            <a:r>
+              <a:rPr lang="en-US" sz="1600"/>
+              <a:t>;</a:t>
+            </a:r>
+            <a:endParaRPr sz="1600"/>
+          </a:p>
+          <a:p>
+            <a:pPr lvl="1">
+              <a:defRPr/>
+            </a:pPr>
+            <a:r>
+              <a:rPr lang="en-US" sz="1600"/>
+              <a:t>ALU – </a:t>
+            </a:r>
+            <a:r>
+              <a:rPr lang="ru-RU" sz="1600"/>
+              <a:t>целочисленное арифметико-логическое устройство (в основном используется для расчёта адресов и смещений)</a:t>
+            </a:r>
+            <a:r>
+              <a:rPr lang="en-US" sz="1600"/>
+              <a:t>;</a:t>
+            </a:r>
+            <a:endParaRPr sz="1600"/>
+          </a:p>
+          <a:p>
+            <a:pPr lvl="1">
+              <a:defRPr/>
+            </a:pPr>
+            <a:r>
+              <a:rPr lang="en-US" sz="1600"/>
+              <a:t>Regfile – </a:t>
+            </a:r>
+            <a:r>
+              <a:rPr lang="ru-RU" sz="1600"/>
+              <a:t>регистровый файл, хранит операнды и результаты операций. 30 регистров общего назначения, 2 специализированных регистра (индекс вычислительного блока и константный нуль).</a:t>
+            </a:r>
+            <a:endParaRPr sz="1600"/>
+          </a:p>
+        </p:txBody>
+      </p:sp>
+      <p:sp>
+        <p:nvSpPr>
+          <p:cNvPr id="2080346837" name="Номер слайда 3"/>
           <p:cNvSpPr>
             <a:spLocks noGrp="1"/>
           </p:cNvSpPr>
@@ -12429,14 +12623,14 @@
             <a:pPr>
               <a:defRPr/>
             </a:pPr>
-            <a:fld id="{3268CEBC-6C76-D4A5-843E-7A9602BB4FE0}" type="slidenum">
+            <a:fld id="{8C44681A-2184-8FE6-7CA2-B2F449D07AD3}" type="slidenum">
               <a:rPr lang="ru-RU" sz="1800">
                 <a:solidFill>
                   <a:schemeClr val="tx1"/>
                 </a:solidFill>
                 <a:latin typeface="Trebuchet MS"/>
               </a:rPr>
-              <a:t>9</a:t>
+              <a:t>8</a:t>
             </a:fld>
             <a:endParaRPr lang="ru-RU" sz="1800">
               <a:solidFill>
@@ -12449,7 +12643,7 @@
       </p:sp>
       <p:sp>
         <p:nvSpPr>
-          <p:cNvPr id="2058404542" name="Прямоугольник 5"/>
+          <p:cNvPr id="1502716427" name="Прямоугольник 6"/>
           <p:cNvSpPr/>
           <p:nvPr/>
         </p:nvSpPr>
@@ -12499,7 +12693,7 @@
       </p:sp>
       <p:sp>
         <p:nvSpPr>
-          <p:cNvPr id="1712630877" name="Прямоугольник 6"/>
+          <p:cNvPr id="364058926" name="Прямоугольник 7"/>
           <p:cNvSpPr/>
           <p:nvPr/>
         </p:nvSpPr>
@@ -12549,7 +12743,7 @@
       </p:sp>
       <p:sp>
         <p:nvSpPr>
-          <p:cNvPr id="2035598514" name="Заголовок 1"/>
+          <p:cNvPr id="1830808074" name="Заголовок 1"/>
           <p:cNvSpPr>
             <a:spLocks noGrp="1"/>
           </p:cNvSpPr>
@@ -12559,12 +12753,12 @@
         </p:nvSpPr>
         <p:spPr bwMode="auto">
           <a:xfrm>
-            <a:off x="680319" y="-45985"/>
+            <a:off x="680319" y="-37878"/>
             <a:ext cx="10515600" cy="1325563"/>
           </a:xfrm>
         </p:spPr>
         <p:txBody>
-          <a:bodyPr vertOverflow="overflow" horzOverflow="overflow" vert="horz" wrap="square" lIns="91440" tIns="45720" rIns="91440" bIns="45720" numCol="1" spcCol="0" rtlCol="0" fromWordArt="0" anchor="ctr" anchorCtr="0" forceAA="0" compatLnSpc="0">
+          <a:bodyPr>
             <a:normAutofit/>
           </a:bodyPr>
           <a:lstStyle/>
@@ -12578,7 +12772,22 @@
                   <a:schemeClr val="bg1"/>
                 </a:solidFill>
               </a:rPr>
-              <a:t>Блок загрузки и сохранения</a:t>
+              <a:t>Разработка вычислительного блока:</a:t>
+            </a:r>
+            <a:br>
+              <a:rPr lang="ru-RU" sz="3600">
+                <a:solidFill>
+                  <a:schemeClr val="bg1"/>
+                </a:solidFill>
+              </a:rPr>
+            </a:br>
+            <a:r>
+              <a:rPr lang="ru-RU" sz="3600">
+                <a:solidFill>
+                  <a:schemeClr val="bg1"/>
+                </a:solidFill>
+              </a:rPr>
+              <a:t>общая структура</a:t>
             </a:r>
             <a:endParaRPr/>
           </a:p>
@@ -12586,7 +12795,7 @@
       </p:sp>
       <p:pic>
         <p:nvPicPr>
-          <p:cNvPr id="60031363" name=""/>
+          <p:cNvPr id="837484347" name=""/>
           <p:cNvPicPr>
             <a:picLocks noChangeAspect="1"/>
           </p:cNvPicPr>
@@ -12604,8 +12813,8 @@
         </p:blipFill>
         <p:spPr bwMode="auto">
           <a:xfrm flipH="0" flipV="0">
-            <a:off x="4862512" y="2376487"/>
-            <a:ext cx="6550581" cy="2338387"/>
+            <a:off x="5207840" y="1443556"/>
+            <a:ext cx="5541424" cy="5157668"/>
           </a:xfrm>
           <a:prstGeom prst="rect">
             <a:avLst/>
@@ -12680,7 +12889,7 @@
       </p:grpSpPr>
       <p:sp>
         <p:nvSpPr>
-          <p:cNvPr id="1105841711" name="Объект 2"/>
+          <p:cNvPr id="995164572" name="Объект 2"/>
           <p:cNvSpPr>
             <a:spLocks noGrp="1"/>
           </p:cNvSpPr>
@@ -12690,8 +12899,8 @@
         </p:nvSpPr>
         <p:spPr bwMode="auto">
           <a:xfrm flipH="0" flipV="0">
-            <a:off x="0" y="1350173"/>
-            <a:ext cx="5668349" cy="5507825"/>
+            <a:off x="208734" y="1552574"/>
+            <a:ext cx="4736810" cy="4940299"/>
           </a:xfrm>
         </p:spPr>
         <p:txBody>
@@ -12705,11 +12914,7 @@
             </a:pPr>
             <a:r>
               <a:rPr lang="ru-RU"/>
-              <a:t>Арбитр </a:t>
-            </a:r>
-            <a:r>
-              <a:rPr lang="ru-RU"/>
-              <a:t>отслеживает запросы к памяти данных от вычислительных блоков;</a:t>
+              <a:t>Предназначен для передачи данных между внешней памятью и вычислительными блоками;</a:t>
             </a:r>
             <a:endParaRPr/>
           </a:p>
@@ -12718,67 +12923,72 @@
               <a:defRPr/>
             </a:pPr>
             <a:r>
+              <a:rPr lang="ru-RU"/>
+              <a:t>Может только загружать</a:t>
+            </a:r>
+            <a:r>
               <a:rPr lang="en-US"/>
-              <a:t>LSU</a:t>
-            </a:r>
-            <a:r>
-              <a:rPr lang="ru-RU"/>
-              <a:t> выполняет запросы в порядке очереди (</a:t>
+              <a:t> (LOAD)</a:t>
+            </a:r>
+            <a:r>
+              <a:rPr lang="ru-RU"/>
+              <a:t> или сохранять</a:t>
             </a:r>
             <a:r>
               <a:rPr lang="en-US"/>
-              <a:t>round-robin</a:t>
-            </a:r>
-            <a:r>
-              <a:rPr lang="ru-RU"/>
-              <a:t>);</a:t>
-            </a:r>
-            <a:endParaRPr lang="ru-RU"/>
-          </a:p>
-          <a:p>
-            <a:pPr>
-              <a:defRPr/>
-            </a:pPr>
-            <a:r>
-              <a:rPr lang="ru-RU" sz="2800" b="0" i="0" u="none" strike="noStrike" cap="none" spc="0">
-                <a:solidFill>
-                  <a:schemeClr val="tx1"/>
-                </a:solidFill>
-                <a:latin typeface="Calibri"/>
-                <a:ea typeface="Arial"/>
-                <a:cs typeface="Arial"/>
-              </a:rPr>
-              <a:t>Арбитр </a:t>
-            </a:r>
-            <a:r>
-              <a:rPr lang="ru-RU" sz="2800" b="0" i="0" u="none" strike="noStrike" cap="none" spc="0">
-                <a:solidFill>
-                  <a:schemeClr val="tx1"/>
-                </a:solidFill>
-                <a:latin typeface="Calibri"/>
-                <a:ea typeface="Arial"/>
-                <a:cs typeface="Arial"/>
-              </a:rPr>
-              <a:t>управляет </a:t>
-            </a:r>
-            <a:r>
-              <a:rPr lang="ru-RU" sz="2800" b="0" i="0" u="none" strike="noStrike" cap="none" spc="0">
-                <a:solidFill>
-                  <a:schemeClr val="tx1"/>
-                </a:solidFill>
-                <a:latin typeface="Calibri"/>
-                <a:ea typeface="Arial"/>
-                <a:cs typeface="Arial"/>
-              </a:rPr>
-              <a:t>демультиплексором считанных данных и мультиплексором записываемых данных.</a:t>
+              <a:t> (STORE)</a:t>
+            </a:r>
+            <a:r>
+              <a:rPr lang="ru-RU"/>
+              <a:t> данные</a:t>
+            </a:r>
+            <a:r>
+              <a:rPr lang="ru-RU"/>
+              <a:t>;</a:t>
             </a:r>
             <a:endParaRPr/>
           </a:p>
-        </p:txBody>
-      </p:sp>
-      <p:sp>
-        <p:nvSpPr>
-          <p:cNvPr id="2133545582" name="Номер слайда 3"/>
+          <a:p>
+            <a:pPr>
+              <a:defRPr/>
+            </a:pPr>
+            <a:r>
+              <a:rPr lang="ru-RU"/>
+              <a:t>Работает </a:t>
+            </a:r>
+            <a:r>
+              <a:rPr lang="ru-RU"/>
+              <a:t>только при получении </a:t>
+            </a:r>
+            <a:r>
+              <a:rPr lang="en-US"/>
+              <a:t>LD/ST </a:t>
+            </a:r>
+            <a:r>
+              <a:rPr lang="ru-RU"/>
+              <a:t>инструкции</a:t>
+            </a:r>
+            <a:r>
+              <a:rPr lang="ru-RU"/>
+              <a:t>.</a:t>
+            </a:r>
+            <a:endParaRPr/>
+          </a:p>
+          <a:p>
+            <a:pPr>
+              <a:defRPr/>
+            </a:pPr>
+            <a:endParaRPr lang="ru-RU">
+              <a:solidFill>
+                <a:schemeClr val="bg1"/>
+              </a:solidFill>
+            </a:endParaRPr>
+          </a:p>
+        </p:txBody>
+      </p:sp>
+      <p:sp>
+        <p:nvSpPr>
+          <p:cNvPr id="196414311" name="Номер слайда 3"/>
           <p:cNvSpPr>
             <a:spLocks noGrp="1"/>
           </p:cNvSpPr>
@@ -12799,14 +13009,14 @@
             <a:pPr>
               <a:defRPr/>
             </a:pPr>
-            <a:fld id="{19687AD8-1A48-903E-417E-81FF292386D7}" type="slidenum">
+            <a:fld id="{3268CEBC-6C76-D4A5-843E-7A9602BB4FE0}" type="slidenum">
               <a:rPr lang="ru-RU" sz="1800">
                 <a:solidFill>
                   <a:schemeClr val="tx1"/>
                 </a:solidFill>
                 <a:latin typeface="Trebuchet MS"/>
               </a:rPr>
-              <a:t>10</a:t>
+              <a:t>9</a:t>
             </a:fld>
             <a:endParaRPr lang="ru-RU" sz="1800">
               <a:solidFill>
@@ -12819,7 +13029,7 @@
       </p:sp>
       <p:sp>
         <p:nvSpPr>
-          <p:cNvPr id="1063521747" name="Прямоугольник 5"/>
+          <p:cNvPr id="1233898055" name="Прямоугольник 5"/>
           <p:cNvSpPr/>
           <p:nvPr/>
         </p:nvSpPr>
@@ -12869,7 +13079,7 @@
       </p:sp>
       <p:sp>
         <p:nvSpPr>
-          <p:cNvPr id="1096588799" name="Прямоугольник 6"/>
+          <p:cNvPr id="11396128" name="Прямоугольник 6"/>
           <p:cNvSpPr/>
           <p:nvPr/>
         </p:nvSpPr>
@@ -12919,7 +13129,7 @@
       </p:sp>
       <p:sp>
         <p:nvSpPr>
-          <p:cNvPr id="1134403629" name="Заголовок 1"/>
+          <p:cNvPr id="1950562802" name="Заголовок 1"/>
           <p:cNvSpPr>
             <a:spLocks noGrp="1"/>
           </p:cNvSpPr>
@@ -12929,7 +13139,7 @@
         </p:nvSpPr>
         <p:spPr bwMode="auto">
           <a:xfrm>
-            <a:off x="838200" y="-10415"/>
+            <a:off x="680319" y="-45985"/>
             <a:ext cx="10515600" cy="1325563"/>
           </a:xfrm>
         </p:spPr>
@@ -12948,43 +13158,15 @@
                   <a:schemeClr val="bg1"/>
                 </a:solidFill>
               </a:rPr>
-              <a:t>Интерконнект</a:t>
-            </a:r>
-            <a:r>
-              <a:rPr lang="ru-RU" sz="3600">
-                <a:solidFill>
-                  <a:schemeClr val="bg1"/>
-                </a:solidFill>
-              </a:rPr>
-              <a:t> между </a:t>
-            </a:r>
-            <a:r>
-              <a:rPr lang="en-US" sz="3600">
-                <a:solidFill>
-                  <a:schemeClr val="bg1"/>
-                </a:solidFill>
-              </a:rPr>
-              <a:t>LSU </a:t>
-            </a:r>
-            <a:r>
-              <a:rPr lang="ru-RU" sz="3600">
-                <a:solidFill>
-                  <a:schemeClr val="bg1"/>
-                </a:solidFill>
-              </a:rPr>
-              <a:t>и потоками</a:t>
-            </a:r>
-            <a:endParaRPr sz="3600">
-              <a:solidFill>
-                <a:schemeClr val="bg1"/>
-              </a:solidFill>
-            </a:endParaRPr>
+              <a:t>Блок загрузки и сохранения</a:t>
+            </a:r>
+            <a:endParaRPr/>
           </a:p>
         </p:txBody>
       </p:sp>
       <p:pic>
         <p:nvPicPr>
-          <p:cNvPr id="1035594074" name=""/>
+          <p:cNvPr id="1321009105" name=""/>
           <p:cNvPicPr>
             <a:picLocks noChangeAspect="1"/>
           </p:cNvPicPr>
@@ -13002,8 +13184,8 @@
         </p:blipFill>
         <p:spPr bwMode="auto">
           <a:xfrm flipH="0" flipV="0">
-            <a:off x="5534024" y="1452562"/>
-            <a:ext cx="5706450" cy="4769894"/>
+            <a:off x="5025438" y="1481884"/>
+            <a:ext cx="7175859" cy="5010990"/>
           </a:xfrm>
           <a:prstGeom prst="rect">
             <a:avLst/>
@@ -13078,7 +13260,7 @@
       </p:grpSpPr>
       <p:sp>
         <p:nvSpPr>
-          <p:cNvPr id="963941245" name="Объект 2"/>
+          <p:cNvPr id="138074253" name="Объект 2"/>
           <p:cNvSpPr>
             <a:spLocks noGrp="1"/>
           </p:cNvSpPr>
@@ -13088,8 +13270,8 @@
         </p:nvSpPr>
         <p:spPr bwMode="auto">
           <a:xfrm flipH="0" flipV="0">
-            <a:off x="77174" y="1350173"/>
-            <a:ext cx="6838949" cy="5507825"/>
+            <a:off x="0" y="1350173"/>
+            <a:ext cx="5668349" cy="5507825"/>
           </a:xfrm>
         </p:spPr>
         <p:txBody>
@@ -13102,58 +13284,81 @@
               <a:defRPr/>
             </a:pPr>
             <a:r>
+              <a:rPr lang="ru-RU"/>
+              <a:t>Арбитр </a:t>
+            </a:r>
+            <a:r>
+              <a:rPr lang="ru-RU"/>
+              <a:t>отслеживает запросы к памяти данных от вычислительных блоков;</a:t>
+            </a:r>
+            <a:endParaRPr/>
+          </a:p>
+          <a:p>
+            <a:pPr>
+              <a:defRPr/>
+            </a:pPr>
+            <a:r>
               <a:rPr lang="en-US"/>
-              <a:t>Fetcher – </a:t>
-            </a:r>
-            <a:r>
-              <a:rPr lang="ru-RU"/>
-              <a:t>блок загрузки инструкций из памяти программ. Вычитывает инструкцию на которую указывает счётчик инструкций (</a:t>
+              <a:t>LSU</a:t>
+            </a:r>
+            <a:r>
+              <a:rPr lang="ru-RU"/>
+              <a:t> выполняет запросы в порядке очереди (</a:t>
             </a:r>
             <a:r>
               <a:rPr lang="en-US"/>
-              <a:t>PC – program counter</a:t>
+              <a:t>round-robin</a:t>
             </a:r>
             <a:r>
               <a:rPr lang="ru-RU"/>
               <a:t>);</a:t>
             </a:r>
+            <a:endParaRPr lang="ru-RU"/>
+          </a:p>
+          <a:p>
+            <a:pPr>
+              <a:defRPr/>
+            </a:pPr>
+            <a:r>
+              <a:rPr lang="ru-RU" sz="2800" b="0" i="0" u="none" strike="noStrike" cap="none" spc="0">
+                <a:solidFill>
+                  <a:schemeClr val="tx1"/>
+                </a:solidFill>
+                <a:latin typeface="Calibri"/>
+                <a:ea typeface="Arial"/>
+                <a:cs typeface="Arial"/>
+              </a:rPr>
+              <a:t>Арбитр </a:t>
+            </a:r>
+            <a:r>
+              <a:rPr lang="ru-RU" sz="2800" b="0" i="0" u="none" strike="noStrike" cap="none" spc="0">
+                <a:solidFill>
+                  <a:schemeClr val="tx1"/>
+                </a:solidFill>
+                <a:latin typeface="Calibri"/>
+                <a:ea typeface="Arial"/>
+                <a:cs typeface="Arial"/>
+              </a:rPr>
+              <a:t>управляет </a:t>
+            </a:r>
+            <a:r>
+              <a:rPr lang="ru-RU" sz="2800" b="0" i="0" u="none" strike="noStrike" cap="none" spc="0">
+                <a:solidFill>
+                  <a:schemeClr val="tx1"/>
+                </a:solidFill>
+                <a:latin typeface="Calibri"/>
+                <a:ea typeface="Arial"/>
+                <a:cs typeface="Arial"/>
+              </a:rPr>
+              <a:t>демультиплексором считанных данных и мультиплексором записываемых данных.</a:t>
+            </a:r>
             <a:endParaRPr/>
           </a:p>
-          <a:p>
-            <a:pPr>
-              <a:defRPr/>
-            </a:pPr>
-            <a:r>
-              <a:rPr lang="en-US"/>
-              <a:t>Decoder</a:t>
-            </a:r>
-            <a:r>
-              <a:rPr lang="ru-RU"/>
-              <a:t> – преобразование инструкций в </a:t>
-            </a:r>
-            <a:r>
-              <a:rPr lang="ru-RU"/>
-              <a:t>управляющие сигналы для исполнительных блоков (</a:t>
-            </a:r>
-            <a:r>
-              <a:rPr lang="en-US"/>
-              <a:t>TU, LSU</a:t>
-            </a:r>
-            <a:r>
-              <a:rPr lang="ru-RU"/>
-              <a:t>)</a:t>
-            </a:r>
-            <a:r>
-              <a:rPr lang="en-US"/>
-              <a:t>.</a:t>
-            </a:r>
-            <a:endParaRPr/>
-          </a:p>
-        </p:txBody>
-      </p:sp>
-      <p:sp>
-        <p:nvSpPr>
-          <p:cNvPr id="1083974936" name="Номер слайда 3"/>
+        </p:txBody>
+      </p:sp>
+      <p:sp>
+        <p:nvSpPr>
+          <p:cNvPr id="636799432" name="Номер слайда 3"/>
           <p:cNvSpPr>
             <a:spLocks noGrp="1"/>
           </p:cNvSpPr>
@@ -13174,16 +13379,16 @@
             <a:pPr>
               <a:defRPr/>
             </a:pPr>
-            <a:fld id="{6E0C4E4E-F03C-EE6B-08CF-E8796A069A1F}" type="slidenum">
+            <a:fld id="{19687AD8-1A48-903E-417E-81FF292386D7}" type="slidenum">
               <a:rPr lang="ru-RU" sz="1800">
                 <a:solidFill>
                   <a:schemeClr val="tx1"/>
                 </a:solidFill>
                 <a:latin typeface="Trebuchet MS"/>
               </a:rPr>
-              <a:t>11</a:t>
+              <a:t>10</a:t>
             </a:fld>
-            <a:endParaRPr lang="ru-RU">
+            <a:endParaRPr lang="ru-RU" sz="1800">
               <a:solidFill>
                 <a:schemeClr val="tx1"/>
               </a:solidFill>
@@ -13194,7 +13399,7 @@
       </p:sp>
       <p:sp>
         <p:nvSpPr>
-          <p:cNvPr id="1511801505" name="Прямоугольник 5"/>
+          <p:cNvPr id="1755558817" name="Прямоугольник 5"/>
           <p:cNvSpPr/>
           <p:nvPr/>
         </p:nvSpPr>
@@ -13244,7 +13449,7 @@
       </p:sp>
       <p:sp>
         <p:nvSpPr>
-          <p:cNvPr id="388520019" name="Прямоугольник 6"/>
+          <p:cNvPr id="572303450" name="Прямоугольник 6"/>
           <p:cNvSpPr/>
           <p:nvPr/>
         </p:nvSpPr>
@@ -13294,7 +13499,7 @@
       </p:sp>
       <p:sp>
         <p:nvSpPr>
-          <p:cNvPr id="1766017754" name="Заголовок 1"/>
+          <p:cNvPr id="1173033675" name="Заголовок 1"/>
           <p:cNvSpPr>
             <a:spLocks noGrp="1"/>
           </p:cNvSpPr>
@@ -13304,12 +13509,12 @@
         </p:nvSpPr>
         <p:spPr bwMode="auto">
           <a:xfrm>
-            <a:off x="838200" y="-10415"/>
+            <a:off x="842848" y="-10414"/>
             <a:ext cx="10515600" cy="1325563"/>
           </a:xfrm>
         </p:spPr>
         <p:txBody>
-          <a:bodyPr>
+          <a:bodyPr vertOverflow="overflow" horzOverflow="overflow" vert="horz" wrap="square" lIns="91440" tIns="45720" rIns="91440" bIns="45720" numCol="1" spcCol="0" rtlCol="0" fromWordArt="0" anchor="ctr" anchorCtr="0" forceAA="0" compatLnSpc="0">
             <a:normAutofit/>
           </a:bodyPr>
           <a:lstStyle/>
@@ -13317,13 +13522,37 @@
             <a:pPr>
               <a:defRPr/>
             </a:pPr>
+            <a:r>
+              <a:rPr lang="ru-RU" sz="3600">
+                <a:solidFill>
+                  <a:schemeClr val="bg1"/>
+                </a:solidFill>
+              </a:rPr>
+              <a:t>Интерконнект</a:t>
+            </a:r>
+            <a:r>
+              <a:rPr lang="ru-RU" sz="3600">
+                <a:solidFill>
+                  <a:schemeClr val="bg1"/>
+                </a:solidFill>
+              </a:rPr>
+              <a:t> между </a:t>
+            </a:r>
             <a:r>
               <a:rPr lang="en-US" sz="3600">
                 <a:solidFill>
                   <a:schemeClr val="bg1"/>
                 </a:solidFill>
               </a:rPr>
-              <a:t>Fetcher &amp; Decoder</a:t>
+              <a:t>LSU </a:t>
+            </a:r>
+            <a:r>
+              <a:rPr lang="ru-RU" sz="3600">
+                <a:solidFill>
+                  <a:schemeClr val="bg1"/>
+                </a:solidFill>
+              </a:rPr>
+              <a:t>и потоками</a:t>
             </a:r>
             <a:endParaRPr sz="3600">
               <a:solidFill>
@@ -13335,7 +13564,7 @@
       </p:sp>
       <p:pic>
         <p:nvPicPr>
-          <p:cNvPr id="711475362" name=""/>
+          <p:cNvPr id="827371434" name=""/>
           <p:cNvPicPr>
             <a:picLocks noChangeAspect="1"/>
           </p:cNvPicPr>
@@ -13353,8 +13582,8 @@
         </p:blipFill>
         <p:spPr bwMode="auto">
           <a:xfrm flipH="0" flipV="0">
-            <a:off x="7068524" y="1646902"/>
-            <a:ext cx="3747112" cy="4845972"/>
+            <a:off x="6868500" y="1437959"/>
+            <a:ext cx="5268560" cy="5237478"/>
           </a:xfrm>
           <a:prstGeom prst="rect">
             <a:avLst/>
@@ -13429,7 +13658,7 @@
       </p:grpSpPr>
       <p:sp>
         <p:nvSpPr>
-          <p:cNvPr id="1018353479" name="Объект 2"/>
+          <p:cNvPr id="1483690805" name="Объект 2"/>
           <p:cNvSpPr>
             <a:spLocks noGrp="1"/>
           </p:cNvSpPr>
@@ -13439,8 +13668,8 @@
         </p:nvSpPr>
         <p:spPr bwMode="auto">
           <a:xfrm flipH="0" flipV="0">
-            <a:off x="156445" y="1959773"/>
-            <a:ext cx="4816578" cy="3599316"/>
+            <a:off x="77173" y="1350172"/>
+            <a:ext cx="4826355" cy="5507824"/>
           </a:xfrm>
         </p:spPr>
         <p:txBody>
@@ -13453,80 +13682,58 @@
               <a:defRPr/>
             </a:pPr>
             <a:r>
-              <a:rPr lang="ru-RU" sz="1600"/>
-              <a:t>В результате работы:</a:t>
-            </a:r>
-            <a:endParaRPr sz="1600"/>
-          </a:p>
-          <a:p>
-            <a:pPr lvl="1">
-              <a:defRPr/>
-            </a:pPr>
-            <a:r>
-              <a:rPr lang="ru-RU" sz="1600"/>
-              <a:t>Проведен анализ существующих архитектур графических процессоров и ядер</a:t>
-            </a:r>
-            <a:r>
-              <a:rPr lang="en-US" sz="1600"/>
-              <a:t>;</a:t>
-            </a:r>
-            <a:endParaRPr sz="1600"/>
-          </a:p>
-          <a:p>
-            <a:pPr lvl="1">
-              <a:defRPr/>
-            </a:pPr>
-            <a:r>
-              <a:rPr lang="ru-RU" sz="1600"/>
-              <a:t>Спроектирована минимально необходимая архитектура набора инструкций </a:t>
-            </a:r>
-            <a:r>
-              <a:rPr lang="en-US" sz="1600"/>
-              <a:t>(ISA);</a:t>
-            </a:r>
-            <a:endParaRPr sz="1600"/>
-          </a:p>
-          <a:p>
-            <a:pPr lvl="1">
-              <a:defRPr/>
-            </a:pPr>
-            <a:r>
-              <a:rPr lang="ru-RU" sz="1600"/>
-              <a:t>Разработана архитектура упрощенного графического ядра с использованием метода поблочной декомпозиции;</a:t>
-            </a:r>
-            <a:endParaRPr sz="1600"/>
-          </a:p>
-          <a:p>
-            <a:pPr lvl="1">
-              <a:defRPr/>
-            </a:pPr>
-            <a:r>
-              <a:rPr lang="ru-RU" sz="1600"/>
-              <a:t>Разработана упрощенная модель графического ядра</a:t>
-            </a:r>
-            <a:r>
-              <a:rPr lang="en-US" sz="1600"/>
-              <a:t> </a:t>
-            </a:r>
-            <a:r>
-              <a:rPr lang="ru-RU" sz="1600"/>
-              <a:t>на языке описания аппаратуры </a:t>
-            </a:r>
-            <a:r>
-              <a:rPr lang="en-US" sz="1600"/>
-              <a:t>SystemVerilog</a:t>
-            </a:r>
-            <a:r>
-              <a:rPr lang="ru-RU" sz="1600"/>
+              <a:rPr lang="en-US"/>
+              <a:t>Fetcher – </a:t>
+            </a:r>
+            <a:r>
+              <a:rPr lang="ru-RU"/>
+              <a:t>блок загрузки инструкций из памяти программ. Вычитывает инструкцию на которую указывает счётчик инструкций (</a:t>
+            </a:r>
+            <a:r>
+              <a:rPr lang="en-US"/>
+              <a:t>PC – program counter</a:t>
+            </a:r>
+            <a:r>
+              <a:rPr lang="ru-RU"/>
+              <a:t>);</a:t>
+            </a:r>
+            <a:endParaRPr/>
+          </a:p>
+          <a:p>
+            <a:pPr>
+              <a:defRPr/>
+            </a:pPr>
+            <a:r>
+              <a:rPr lang="en-US"/>
+              <a:t>Decoder</a:t>
+            </a:r>
+            <a:r>
+              <a:rPr lang="ru-RU"/>
+              <a:t> – преобразование инструкций в </a:t>
+            </a:r>
+            <a:r>
+              <a:rPr lang="ru-RU"/>
+              <a:t>управляющие сигналы для исполнительных блоков (</a:t>
+            </a:r>
+            <a:r>
+              <a:rPr lang="en-US"/>
+              <a:t>TU, LSU</a:t>
+            </a:r>
+            <a:r>
+              <a:rPr lang="ru-RU"/>
+              <a:t>)</a:t>
+            </a:r>
+            <a:r>
+              <a:rPr lang="en-US"/>
               <a:t>.</a:t>
             </a:r>
-            <a:endParaRPr sz="1600"/>
-          </a:p>
-        </p:txBody>
-      </p:sp>
-      <p:sp>
-        <p:nvSpPr>
-          <p:cNvPr id="1760509968" name="Номер слайда 3"/>
+            <a:endParaRPr/>
+          </a:p>
+        </p:txBody>
+      </p:sp>
+      <p:sp>
+        <p:nvSpPr>
+          <p:cNvPr id="403883129" name="Номер слайда 3"/>
           <p:cNvSpPr>
             <a:spLocks noGrp="1"/>
           </p:cNvSpPr>
@@ -13547,14 +13754,14 @@
             <a:pPr>
               <a:defRPr/>
             </a:pPr>
-            <a:fld id="{1CF8DEEF-AAF2-493E-906B-C0B6A8D6E6A2}" type="slidenum">
+            <a:fld id="{6E0C4E4E-F03C-EE6B-08CF-E8796A069A1F}" type="slidenum">
               <a:rPr lang="ru-RU" sz="1800">
                 <a:solidFill>
                   <a:schemeClr val="tx1"/>
                 </a:solidFill>
                 <a:latin typeface="Trebuchet MS"/>
               </a:rPr>
-              <a:t>13</a:t>
+              <a:t>11</a:t>
             </a:fld>
             <a:endParaRPr lang="ru-RU">
               <a:solidFill>
@@ -13567,7 +13774,7 @@
       </p:sp>
       <p:sp>
         <p:nvSpPr>
-          <p:cNvPr id="640739623" name="Прямоугольник 4"/>
+          <p:cNvPr id="1045862264" name="Прямоугольник 5"/>
           <p:cNvSpPr/>
           <p:nvPr/>
         </p:nvSpPr>
@@ -13617,7 +13824,7 @@
       </p:sp>
       <p:sp>
         <p:nvSpPr>
-          <p:cNvPr id="335280813" name="Прямоугольник 5"/>
+          <p:cNvPr id="978395966" name="Прямоугольник 6"/>
           <p:cNvSpPr/>
           <p:nvPr/>
         </p:nvSpPr>
@@ -13667,7 +13874,7 @@
       </p:sp>
       <p:sp>
         <p:nvSpPr>
-          <p:cNvPr id="774046090" name="Заголовок 1"/>
+          <p:cNvPr id="1715940462" name="Заголовок 1"/>
           <p:cNvSpPr>
             <a:spLocks noGrp="1"/>
           </p:cNvSpPr>
@@ -13677,26 +13884,28 @@
         </p:nvSpPr>
         <p:spPr bwMode="auto">
           <a:xfrm>
-            <a:off x="838200" y="0"/>
+            <a:off x="838200" y="-10415"/>
             <a:ext cx="10515600" cy="1325563"/>
           </a:xfrm>
         </p:spPr>
         <p:txBody>
-          <a:bodyPr/>
-          <a:lstStyle/>
-          <a:p>
-            <a:pPr>
-              <a:defRPr/>
-            </a:pPr>
-            <a:r>
-              <a:rPr lang="ru-RU">
+          <a:bodyPr>
+            <a:normAutofit/>
+          </a:bodyPr>
+          <a:lstStyle/>
+          <a:p>
+            <a:pPr>
+              <a:defRPr/>
+            </a:pPr>
+            <a:r>
+              <a:rPr lang="en-US" sz="3600">
                 <a:solidFill>
                   <a:schemeClr val="bg1"/>
                 </a:solidFill>
               </a:rPr>
-              <a:t>Заключение</a:t>
-            </a:r>
-            <a:endParaRPr>
+              <a:t>Fetcher &amp; Decoder</a:t>
+            </a:r>
+            <a:endParaRPr sz="3600">
               <a:solidFill>
                 <a:schemeClr val="bg1"/>
               </a:solidFill>
@@ -13706,20 +13915,26 @@
       </p:sp>
       <p:pic>
         <p:nvPicPr>
-          <p:cNvPr id="535113363" name=""/>
+          <p:cNvPr id="1094439899" name=""/>
           <p:cNvPicPr>
             <a:picLocks noChangeAspect="1"/>
           </p:cNvPicPr>
           <p:nvPr/>
         </p:nvPicPr>
         <p:blipFill rotWithShape="1">
-          <a:blip r:embed="rId3"/>
+          <a:blip r:embed="rId3">
+            <a:extLst>
+              <a:ext uri="{96DAC541-7B7A-43D3-8B79-37D633B846F1}">
+                <asvg:svgBlip xmlns:asvg="http://schemas.microsoft.com/office/drawing/2016/SVG/main" r:embed="rId4"/>
+              </a:ext>
+            </a:extLst>
+          </a:blip>
           <a:stretch/>
         </p:blipFill>
         <p:spPr bwMode="auto">
           <a:xfrm flipH="0" flipV="0">
-            <a:off x="4952470" y="1438274"/>
-            <a:ext cx="7184591" cy="4905374"/>
+            <a:off x="4996911" y="1396865"/>
+            <a:ext cx="6875366" cy="5133470"/>
           </a:xfrm>
           <a:prstGeom prst="rect">
             <a:avLst/>
@@ -13794,7 +14009,7 @@
       </p:grpSpPr>
       <p:sp>
         <p:nvSpPr>
-          <p:cNvPr id="954651927" name="Объект 2"/>
+          <p:cNvPr id="124390741" name="Объект 2"/>
           <p:cNvSpPr>
             <a:spLocks noGrp="1"/>
           </p:cNvSpPr>
@@ -13802,9 +14017,14 @@
             <p:ph idx="1"/>
           </p:nvPr>
         </p:nvSpPr>
-        <p:spPr bwMode="auto"/>
-        <p:txBody>
-          <a:bodyPr vertOverflow="overflow" horzOverflow="overflow" vert="horz" wrap="square" lIns="91440" tIns="45720" rIns="91440" bIns="45720" numCol="1" spcCol="0" rtlCol="0" fromWordArt="0" anchor="t" anchorCtr="0" forceAA="0" compatLnSpc="0">
+        <p:spPr bwMode="auto">
+          <a:xfrm flipH="0" flipV="0">
+            <a:off x="156445" y="1959773"/>
+            <a:ext cx="4816578" cy="3599316"/>
+          </a:xfrm>
+        </p:spPr>
+        <p:txBody>
+          <a:bodyPr vertOverflow="overflow" horzOverflow="overflow" vert="horz" wrap="square" lIns="91440" tIns="45720" rIns="91440" bIns="45720" numCol="1" spcCol="0" rtlCol="0" fromWordArt="0" anchor="t" anchorCtr="0" forceAA="0" upright="0" compatLnSpc="0">
             <a:normAutofit/>
           </a:bodyPr>
           <a:lstStyle/>
@@ -13813,137 +14033,80 @@
               <a:defRPr/>
             </a:pPr>
             <a:r>
-              <a:rPr lang="ru-RU" sz="2000" b="0" i="0" u="none">
-                <a:solidFill>
-                  <a:srgbClr val="000000"/>
-                </a:solidFill>
-                <a:latin typeface="Trebuchet MS"/>
-                <a:ea typeface="Trebuchet MS"/>
-                <a:cs typeface="Trebuchet MS"/>
-              </a:rPr>
-              <a:t>Старухин Д</a:t>
-            </a:r>
-            <a:r>
-              <a:rPr sz="2000" b="0" i="0" u="none">
-                <a:solidFill>
-                  <a:srgbClr val="000000"/>
-                </a:solidFill>
-                <a:latin typeface="Trebuchet MS"/>
-                <a:ea typeface="Trebuchet MS"/>
-                <a:cs typeface="Trebuchet MS"/>
-              </a:rPr>
+              <a:rPr lang="ru-RU" sz="1600"/>
+              <a:t>В результате работы:</a:t>
+            </a:r>
+            <a:endParaRPr sz="1600"/>
+          </a:p>
+          <a:p>
+            <a:pPr lvl="1">
+              <a:defRPr/>
+            </a:pPr>
+            <a:r>
+              <a:rPr lang="ru-RU" sz="1600"/>
+              <a:t>Проведен анализ существующих архитектур графических процессоров и ядер</a:t>
+            </a:r>
+            <a:r>
+              <a:rPr lang="en-US" sz="1600"/>
+              <a:t>;</a:t>
+            </a:r>
+            <a:endParaRPr sz="1600"/>
+          </a:p>
+          <a:p>
+            <a:pPr lvl="1">
+              <a:defRPr/>
+            </a:pPr>
+            <a:r>
+              <a:rPr lang="ru-RU" sz="1600"/>
+              <a:t>Спроектирована минимально необходимая архитектура набора инструкций </a:t>
+            </a:r>
+            <a:r>
+              <a:rPr lang="en-US" sz="1600"/>
+              <a:t>(ISA);</a:t>
+            </a:r>
+            <a:endParaRPr sz="1600"/>
+          </a:p>
+          <a:p>
+            <a:pPr lvl="1">
+              <a:defRPr/>
+            </a:pPr>
+            <a:r>
+              <a:rPr lang="ru-RU" sz="1600"/>
+              <a:t>Разработана архитектура упрощенного графического ядра с использованием метода поблочной декомпозиции;</a:t>
+            </a:r>
+            <a:endParaRPr sz="1600"/>
+          </a:p>
+          <a:p>
+            <a:pPr lvl="1">
+              <a:defRPr/>
+            </a:pPr>
+            <a:r>
+              <a:rPr lang="ru-RU" sz="1600"/>
+              <a:t>Разработана упрощенная модель графического ядра</a:t>
+            </a:r>
+            <a:r>
+              <a:rPr lang="en-US" sz="1600"/>
+              <a:t> </a:t>
+            </a:r>
+            <a:r>
+              <a:rPr lang="ru-RU" sz="1600"/>
+              <a:t>на языке описания аппаратуры </a:t>
+            </a:r>
+            <a:r>
+              <a:rPr lang="en-US" sz="1600"/>
+              <a:t>SystemVerilog</a:t>
+            </a:r>
+            <a:r>
+              <a:rPr lang="ru-RU" sz="1600"/>
               <a:t>.</a:t>
             </a:r>
-            <a:r>
-              <a:rPr lang="ru-RU" sz="2000" b="0" i="0" u="none">
-                <a:solidFill>
-                  <a:srgbClr val="000000"/>
-                </a:solidFill>
-                <a:latin typeface="Trebuchet MS"/>
-                <a:ea typeface="Trebuchet MS"/>
-                <a:cs typeface="Trebuchet MS"/>
-              </a:rPr>
-              <a:t>М</a:t>
-            </a:r>
-            <a:r>
-              <a:rPr sz="2000" b="0" i="0" u="none">
-                <a:solidFill>
-                  <a:srgbClr val="000000"/>
-                </a:solidFill>
-                <a:latin typeface="Trebuchet MS"/>
-                <a:ea typeface="Trebuchet MS"/>
-                <a:cs typeface="Trebuchet MS"/>
-              </a:rPr>
-              <a:t>. Обзор аналогов 2D графических ускорителей во встроенных системах / И.А. Дудкин, Д.М. Старухин, В.В. Черкасов \/\/ Математика, информационные технологии, приложения : сборник материалов Межвузовской научной конференции «Математика, информационные технологии, приложения» (Воронеж, 24-25 апреля 2025 г.). -- Воронеж : Издательско-полиграфический центр «Научная книга», 2025. -- С.209-216</a:t>
-            </a:r>
-            <a:endParaRPr sz="4800">
-              <a:solidFill>
-                <a:schemeClr val="bg1"/>
-              </a:solidFill>
-              <a:latin typeface="Trebuchet MS"/>
-              <a:cs typeface="Trebuchet MS"/>
-            </a:endParaRPr>
-          </a:p>
-          <a:p>
-            <a:pPr>
-              <a:defRPr/>
-            </a:pPr>
-            <a:r>
-              <a:rPr lang="ru-RU" sz="2000" b="0" i="0" u="none">
-                <a:solidFill>
-                  <a:srgbClr val="000000"/>
-                </a:solidFill>
-                <a:latin typeface="Trebuchet MS"/>
-                <a:ea typeface="Trebuchet MS"/>
-                <a:cs typeface="Trebuchet MS"/>
-              </a:rPr>
-              <a:t>Старухин Д</a:t>
-            </a:r>
-            <a:r>
-              <a:rPr sz="2000" b="0" i="0" u="none">
-                <a:solidFill>
-                  <a:srgbClr val="000000"/>
-                </a:solidFill>
-                <a:latin typeface="Trebuchet MS"/>
-                <a:ea typeface="Trebuchet MS"/>
-                <a:cs typeface="Trebuchet MS"/>
-              </a:rPr>
-              <a:t>.</a:t>
-            </a:r>
-            <a:r>
-              <a:rPr lang="ru-RU" sz="2000" b="0" i="0" u="none">
-                <a:solidFill>
-                  <a:srgbClr val="000000"/>
-                </a:solidFill>
-                <a:latin typeface="Trebuchet MS"/>
-                <a:ea typeface="Trebuchet MS"/>
-                <a:cs typeface="Trebuchet MS"/>
-              </a:rPr>
-              <a:t>М</a:t>
-            </a:r>
-            <a:r>
-              <a:rPr sz="2000" b="0" i="0" u="none">
-                <a:solidFill>
-                  <a:srgbClr val="000000"/>
-                </a:solidFill>
-                <a:latin typeface="Trebuchet MS"/>
-                <a:ea typeface="Trebuchet MS"/>
-                <a:cs typeface="Trebuchet MS"/>
-              </a:rPr>
-              <a:t>. </a:t>
-            </a:r>
-            <a:r>
-              <a:rPr sz="2200" b="0" i="0" u="none">
-                <a:solidFill>
-                  <a:srgbClr val="000000"/>
-                </a:solidFill>
-                <a:latin typeface="Trebuchet MS"/>
-                <a:ea typeface="Trebuchet MS"/>
-                <a:cs typeface="Trebuchet MS"/>
-              </a:rPr>
-              <a:t>Разработка архитектуры аппаратной реализации 2D графического ускорителя / И.А. Дудкин, Д.М. Старухин, В.В. Черкасов \/\/ Актуальные проблемы прикладной математики, информатики и механики : сборник материалов Международной научной конференции «Актуальные проблемы прикладной математики, информатики и механики» (Воронеж, 1-3 декабря 2025 г.). -- Воронеж : ООО «Издательство Прометей», 2026. -- С.1584-1588.</a:t>
-            </a:r>
-            <a:br>
-              <a:rPr sz="2200" b="0" i="0" u="none">
-                <a:solidFill>
-                  <a:srgbClr val="000000"/>
-                </a:solidFill>
-                <a:latin typeface="Trebuchet MS"/>
-                <a:ea typeface="Trebuchet MS"/>
-                <a:cs typeface="Trebuchet MS"/>
-              </a:rPr>
-            </a:br>
-            <a:endParaRPr lang="ru-RU">
-              <a:solidFill>
-                <a:schemeClr val="bg1"/>
-              </a:solidFill>
-            </a:endParaRPr>
-          </a:p>
-        </p:txBody>
-      </p:sp>
-      <p:sp>
-        <p:nvSpPr>
-          <p:cNvPr id="2008767247" name="Номер слайда 3"/>
+            <a:endParaRPr sz="1600"/>
+          </a:p>
+        </p:txBody>
+      </p:sp>
+      <p:sp>
+        <p:nvSpPr>
+          <p:cNvPr id="1461562504" name="Номер слайда 3"/>
           <p:cNvSpPr>
             <a:spLocks noGrp="1"/>
           </p:cNvSpPr>
@@ -13953,7 +14116,7 @@
         </p:nvSpPr>
         <p:spPr bwMode="auto">
           <a:xfrm>
-            <a:off x="11084553" y="6492875"/>
+            <a:off x="11084554" y="6492875"/>
             <a:ext cx="1052508" cy="365125"/>
           </a:xfrm>
         </p:spPr>
@@ -13971,7 +14134,7 @@
                 </a:solidFill>
                 <a:latin typeface="Trebuchet MS"/>
               </a:rPr>
-              <a:t>14</a:t>
+              <a:t>13</a:t>
             </a:fld>
             <a:endParaRPr lang="ru-RU">
               <a:solidFill>
@@ -13984,7 +14147,7 @@
       </p:sp>
       <p:sp>
         <p:nvSpPr>
-          <p:cNvPr id="1438935459" name="Прямоугольник 4"/>
+          <p:cNvPr id="2069221344" name="Прямоугольник 4"/>
           <p:cNvSpPr/>
           <p:nvPr/>
         </p:nvSpPr>
@@ -14034,7 +14197,7 @@
       </p:sp>
       <p:sp>
         <p:nvSpPr>
-          <p:cNvPr id="504451494" name="Прямоугольник 5"/>
+          <p:cNvPr id="1121685863" name="Прямоугольник 5"/>
           <p:cNvSpPr/>
           <p:nvPr/>
         </p:nvSpPr>
@@ -14084,7 +14247,7 @@
       </p:sp>
       <p:sp>
         <p:nvSpPr>
-          <p:cNvPr id="723042891" name="Заголовок 1"/>
+          <p:cNvPr id="957087503" name="Заголовок 1"/>
           <p:cNvSpPr>
             <a:spLocks noGrp="1"/>
           </p:cNvSpPr>
@@ -14094,7 +14257,7 @@
         </p:nvSpPr>
         <p:spPr bwMode="auto">
           <a:xfrm>
-            <a:off x="838200" y="18255"/>
+            <a:off x="838200" y="0"/>
             <a:ext cx="10515600" cy="1325563"/>
           </a:xfrm>
         </p:spPr>
@@ -14111,7 +14274,7 @@
                   <a:schemeClr val="bg1"/>
                 </a:solidFill>
               </a:rPr>
-              <a:t>Публикация статьи</a:t>
+              <a:t>Заключение</a:t>
             </a:r>
             <a:endParaRPr>
               <a:solidFill>
@@ -14121,6 +14284,28 @@
           </a:p>
         </p:txBody>
       </p:sp>
+      <p:pic>
+        <p:nvPicPr>
+          <p:cNvPr id="2129392047" name=""/>
+          <p:cNvPicPr>
+            <a:picLocks noChangeAspect="1"/>
+          </p:cNvPicPr>
+          <p:nvPr/>
+        </p:nvPicPr>
+        <p:blipFill rotWithShape="1">
+          <a:blip r:embed="rId3"/>
+          <a:stretch/>
+        </p:blipFill>
+        <p:spPr bwMode="auto">
+          <a:xfrm flipH="0" flipV="0">
+            <a:off x="4952470" y="1438274"/>
+            <a:ext cx="7184591" cy="4905374"/>
+          </a:xfrm>
+          <a:prstGeom prst="rect">
+            <a:avLst/>
+          </a:prstGeom>
+        </p:spPr>
+      </p:pic>
     </p:spTree>
   </p:cSld>
   <p:clrMapOvr>
@@ -14189,7 +14374,7 @@
       </p:grpSpPr>
       <p:sp>
         <p:nvSpPr>
-          <p:cNvPr id="172445670" name="Объект 2"/>
+          <p:cNvPr id="170494551" name="Объект 2"/>
           <p:cNvSpPr>
             <a:spLocks noGrp="1"/>
           </p:cNvSpPr>
@@ -14199,12 +14384,135 @@
         </p:nvSpPr>
         <p:spPr bwMode="auto"/>
         <p:txBody>
-          <a:bodyPr/>
-          <a:lstStyle/>
-          <a:p>
-            <a:pPr>
-              <a:defRPr/>
-            </a:pPr>
+          <a:bodyPr vertOverflow="overflow" horzOverflow="overflow" vert="horz" wrap="square" lIns="91440" tIns="45720" rIns="91440" bIns="45720" numCol="1" spcCol="0" rtlCol="0" fromWordArt="0" anchor="t" anchorCtr="0" forceAA="0" compatLnSpc="0">
+            <a:normAutofit/>
+          </a:bodyPr>
+          <a:lstStyle/>
+          <a:p>
+            <a:pPr>
+              <a:defRPr/>
+            </a:pPr>
+            <a:r>
+              <a:rPr lang="ru-RU" sz="2000" b="0" i="0" u="none">
+                <a:solidFill>
+                  <a:srgbClr val="000000"/>
+                </a:solidFill>
+                <a:latin typeface="Trebuchet MS"/>
+                <a:ea typeface="Trebuchet MS"/>
+                <a:cs typeface="Trebuchet MS"/>
+              </a:rPr>
+              <a:t>Старухин Д</a:t>
+            </a:r>
+            <a:r>
+              <a:rPr sz="2000" b="0" i="0" u="none">
+                <a:solidFill>
+                  <a:srgbClr val="000000"/>
+                </a:solidFill>
+                <a:latin typeface="Trebuchet MS"/>
+                <a:ea typeface="Trebuchet MS"/>
+                <a:cs typeface="Trebuchet MS"/>
+              </a:rPr>
+              <a:t>.</a:t>
+            </a:r>
+            <a:r>
+              <a:rPr lang="ru-RU" sz="2000" b="0" i="0" u="none">
+                <a:solidFill>
+                  <a:srgbClr val="000000"/>
+                </a:solidFill>
+                <a:latin typeface="Trebuchet MS"/>
+                <a:ea typeface="Trebuchet MS"/>
+                <a:cs typeface="Trebuchet MS"/>
+              </a:rPr>
+              <a:t>М</a:t>
+            </a:r>
+            <a:r>
+              <a:rPr sz="2000" b="0" i="0" u="none">
+                <a:solidFill>
+                  <a:srgbClr val="000000"/>
+                </a:solidFill>
+                <a:latin typeface="Trebuchet MS"/>
+                <a:ea typeface="Trebuchet MS"/>
+                <a:cs typeface="Trebuchet MS"/>
+              </a:rPr>
+              <a:t>. Обзор аналогов 2D графических ускорителей во встроенных системах / И.А. Дудкин, Д.М. Старухин, В.В. Черкасов \/\/ Математика, информационные технологии, приложения : сборник материалов Межвузовской научной конференции «Математика, информационные технологии, приложения» (Воронеж, 24-25 апреля 2025 г.). -- Воронеж : Издательско-полиграфический центр «Научная книга», 2025. -- С.209-216</a:t>
+            </a:r>
+            <a:endParaRPr sz="4800">
+              <a:solidFill>
+                <a:schemeClr val="bg1"/>
+              </a:solidFill>
+              <a:latin typeface="Trebuchet MS"/>
+              <a:cs typeface="Trebuchet MS"/>
+            </a:endParaRPr>
+          </a:p>
+          <a:p>
+            <a:pPr>
+              <a:defRPr/>
+            </a:pPr>
+            <a:r>
+              <a:rPr lang="ru-RU" sz="2000" b="0" i="0" u="none">
+                <a:solidFill>
+                  <a:srgbClr val="000000"/>
+                </a:solidFill>
+                <a:latin typeface="Trebuchet MS"/>
+                <a:ea typeface="Trebuchet MS"/>
+                <a:cs typeface="Trebuchet MS"/>
+              </a:rPr>
+              <a:t>Старухин Д</a:t>
+            </a:r>
+            <a:r>
+              <a:rPr sz="2000" b="0" i="0" u="none">
+                <a:solidFill>
+                  <a:srgbClr val="000000"/>
+                </a:solidFill>
+                <a:latin typeface="Trebuchet MS"/>
+                <a:ea typeface="Trebuchet MS"/>
+                <a:cs typeface="Trebuchet MS"/>
+              </a:rPr>
+              <a:t>.</a:t>
+            </a:r>
+            <a:r>
+              <a:rPr lang="ru-RU" sz="2000" b="0" i="0" u="none">
+                <a:solidFill>
+                  <a:srgbClr val="000000"/>
+                </a:solidFill>
+                <a:latin typeface="Trebuchet MS"/>
+                <a:ea typeface="Trebuchet MS"/>
+                <a:cs typeface="Trebuchet MS"/>
+              </a:rPr>
+              <a:t>М</a:t>
+            </a:r>
+            <a:r>
+              <a:rPr sz="2000" b="0" i="0" u="none">
+                <a:solidFill>
+                  <a:srgbClr val="000000"/>
+                </a:solidFill>
+                <a:latin typeface="Trebuchet MS"/>
+                <a:ea typeface="Trebuchet MS"/>
+                <a:cs typeface="Trebuchet MS"/>
+              </a:rPr>
+              <a:t>. </a:t>
+            </a:r>
+            <a:r>
+              <a:rPr sz="2200" b="0" i="0" u="none">
+                <a:solidFill>
+                  <a:srgbClr val="000000"/>
+                </a:solidFill>
+                <a:latin typeface="Trebuchet MS"/>
+                <a:ea typeface="Trebuchet MS"/>
+                <a:cs typeface="Trebuchet MS"/>
+              </a:rPr>
+              <a:t>Разработка архитектуры аппаратной реализации 2D графического ускорителя / И.А. Дудкин, Д.М. Старухин, В.В. Черкасов \/\/ Актуальные проблемы прикладной математики, информатики и механики : сборник материалов Международной научной конференции «Актуальные проблемы прикладной математики, информатики и механики» (Воронеж, 1-3 декабря 2025 г.). -- Воронеж : ООО «Издательство Прометей», 2026. -- С.1584-1588.</a:t>
+            </a:r>
+            <a:br>
+              <a:rPr sz="2200" b="0" i="0" u="none">
+                <a:solidFill>
+                  <a:srgbClr val="000000"/>
+                </a:solidFill>
+                <a:latin typeface="Trebuchet MS"/>
+                <a:ea typeface="Trebuchet MS"/>
+                <a:cs typeface="Trebuchet MS"/>
+              </a:rPr>
+            </a:br>
             <a:endParaRPr lang="ru-RU">
               <a:solidFill>
                 <a:schemeClr val="bg1"/>
@@ -14215,7 +14523,7 @@
       </p:sp>
       <p:sp>
         <p:nvSpPr>
-          <p:cNvPr id="144927220" name="Номер слайда 3"/>
+          <p:cNvPr id="1688554905" name="Номер слайда 3"/>
           <p:cNvSpPr>
             <a:spLocks noGrp="1"/>
           </p:cNvSpPr>
@@ -14243,9 +14551,9 @@
                 </a:solidFill>
                 <a:latin typeface="Trebuchet MS"/>
               </a:rPr>
-              <a:t>15</a:t>
+              <a:t>14</a:t>
             </a:fld>
-            <a:endParaRPr lang="ru-RU" sz="1800">
+            <a:endParaRPr lang="ru-RU">
               <a:solidFill>
                 <a:schemeClr val="tx1"/>
               </a:solidFill>
@@ -14256,7 +14564,7 @@
       </p:sp>
       <p:sp>
         <p:nvSpPr>
-          <p:cNvPr id="1279456680" name="Прямоугольник 4"/>
+          <p:cNvPr id="1596128868" name="Прямоугольник 4"/>
           <p:cNvSpPr/>
           <p:nvPr/>
         </p:nvSpPr>
@@ -14306,7 +14614,7 @@
       </p:sp>
       <p:sp>
         <p:nvSpPr>
-          <p:cNvPr id="1607240024" name="Прямоугольник 5"/>
+          <p:cNvPr id="1258224964" name="Прямоугольник 5"/>
           <p:cNvSpPr/>
           <p:nvPr/>
         </p:nvSpPr>
@@ -14356,7 +14664,566 @@
       </p:sp>
       <p:sp>
         <p:nvSpPr>
-          <p:cNvPr id="40931380" name="Заголовок 1"/>
+          <p:cNvPr id="1880460539" name="Заголовок 1"/>
+          <p:cNvSpPr>
+            <a:spLocks noGrp="1"/>
+          </p:cNvSpPr>
+          <p:nvPr>
+            <p:ph type="title"/>
+          </p:nvPr>
+        </p:nvSpPr>
+        <p:spPr bwMode="auto">
+          <a:xfrm>
+            <a:off x="838200" y="18255"/>
+            <a:ext cx="10515600" cy="1325563"/>
+          </a:xfrm>
+        </p:spPr>
+        <p:txBody>
+          <a:bodyPr/>
+          <a:lstStyle/>
+          <a:p>
+            <a:pPr>
+              <a:defRPr/>
+            </a:pPr>
+            <a:r>
+              <a:rPr lang="ru-RU">
+                <a:solidFill>
+                  <a:schemeClr val="bg1"/>
+                </a:solidFill>
+              </a:rPr>
+              <a:t>Публикация статьи</a:t>
+            </a:r>
+            <a:endParaRPr>
+              <a:solidFill>
+                <a:schemeClr val="bg1"/>
+              </a:solidFill>
+            </a:endParaRPr>
+          </a:p>
+        </p:txBody>
+      </p:sp>
+    </p:spTree>
+  </p:cSld>
+  <p:clrMapOvr>
+    <a:masterClrMapping/>
+  </p:clrMapOvr>
+  <mc:AlternateContent xmlns:mc="http://schemas.openxmlformats.org/markup-compatibility/2006">
+    <mc:Choice xmlns:p159="http://schemas.microsoft.com/office/powerpoint/2015/09/main" xmlns:p14="http://schemas.microsoft.com/office/powerpoint/2010/main" Requires="p159">
+      <p:transition p14:dur="500" advClick="1"/>
+    </mc:Choice>
+    <mc:Fallback>
+      <p:transition advClick="1"/>
+    </mc:Fallback>
+  </mc:AlternateContent>
+</p:sld>
+</file>
+
+<file path=ppt/slides/slide16.xml><?xml version="1.0" encoding="utf-8"?>
+<p:sld xmlns:a="http://schemas.openxmlformats.org/drawingml/2006/main" xmlns:r="http://schemas.openxmlformats.org/officeDocument/2006/relationships" xmlns:p="http://schemas.openxmlformats.org/presentationml/2006/main" xmlns:m="http://schemas.openxmlformats.org/officeDocument/2006/math" xmlns:w="http://schemas.openxmlformats.org/wordprocessingml/2006/main" xmlns:mc="http://schemas.openxmlformats.org/markup-compatibility/2006" showMasterPhAnim="0" showMasterSp="1" show="1">
+  <p:cSld name="">
+    <p:bg>
+      <p:bgPr shadeToTitle="0">
+        <a:gradFill>
+          <a:gsLst>
+            <a:gs pos="0">
+              <a:schemeClr val="accent1">
+                <a:lumMod val="5000"/>
+                <a:lumOff val="95000"/>
+              </a:schemeClr>
+            </a:gs>
+            <a:gs pos="74000">
+              <a:schemeClr val="accent1">
+                <a:lumMod val="45000"/>
+                <a:lumOff val="55000"/>
+              </a:schemeClr>
+            </a:gs>
+            <a:gs pos="83000">
+              <a:schemeClr val="accent1">
+                <a:lumMod val="45000"/>
+                <a:lumOff val="55000"/>
+              </a:schemeClr>
+            </a:gs>
+            <a:gs pos="100000">
+              <a:schemeClr val="accent1">
+                <a:lumMod val="30000"/>
+                <a:lumOff val="70000"/>
+              </a:schemeClr>
+            </a:gs>
+          </a:gsLst>
+          <a:lin ang="13500000" scaled="1"/>
+        </a:gradFill>
+      </p:bgPr>
+    </p:bg>
+    <p:spTree>
+      <p:nvGrpSpPr>
+        <p:cNvPr id="1" name=""/>
+        <p:cNvGrpSpPr/>
+        <p:nvPr/>
+      </p:nvGrpSpPr>
+      <p:grpSpPr bwMode="auto">
+        <a:xfrm>
+          <a:off x="0" y="0"/>
+          <a:ext cx="0" cy="0"/>
+          <a:chOff x="0" y="0"/>
+          <a:chExt cx="0" cy="0"/>
+        </a:xfrm>
+      </p:grpSpPr>
+      <p:sp>
+        <p:nvSpPr>
+          <p:cNvPr id="1178860012" name="Объект 2"/>
+          <p:cNvSpPr>
+            <a:spLocks noGrp="1"/>
+          </p:cNvSpPr>
+          <p:nvPr>
+            <p:ph idx="1"/>
+          </p:nvPr>
+        </p:nvSpPr>
+        <p:spPr bwMode="auto"/>
+        <p:txBody>
+          <a:bodyPr vertOverflow="overflow" horzOverflow="overflow" vert="horz" wrap="square" lIns="91440" tIns="45720" rIns="91440" bIns="45720" numCol="1" spcCol="0" rtlCol="0" fromWordArt="0" anchor="t" anchorCtr="0" forceAA="0" compatLnSpc="0">
+            <a:normAutofit/>
+          </a:bodyPr>
+          <a:lstStyle/>
+          <a:p>
+            <a:pPr>
+              <a:defRPr/>
+            </a:pPr>
+            <a:r>
+              <a:rPr sz="2400" b="0" i="0" u="none">
+                <a:solidFill>
+                  <a:srgbClr val="000000"/>
+                </a:solidFill>
+                <a:latin typeface="Trebuchet MS"/>
+                <a:ea typeface="Trebuchet MS"/>
+                <a:cs typeface="Trebuchet MS"/>
+              </a:rPr>
+              <a:t>По результатам текущей работы получен акт о внедрении разработки в деятельность АО «ПКК Миландр» №04-3 от 04.06.2026</a:t>
+            </a:r>
+            <a:endParaRPr sz="10000">
+              <a:solidFill>
+                <a:schemeClr val="bg1"/>
+              </a:solidFill>
+              <a:latin typeface="Trebuchet MS"/>
+              <a:cs typeface="Trebuchet MS"/>
+            </a:endParaRPr>
+          </a:p>
+        </p:txBody>
+      </p:sp>
+      <p:sp>
+        <p:nvSpPr>
+          <p:cNvPr id="591398118" name="Номер слайда 3"/>
+          <p:cNvSpPr>
+            <a:spLocks noGrp="1"/>
+          </p:cNvSpPr>
+          <p:nvPr>
+            <p:ph type="sldNum" sz="quarter" idx="12"/>
+          </p:nvPr>
+        </p:nvSpPr>
+        <p:spPr bwMode="auto">
+          <a:xfrm>
+            <a:off x="11084553" y="6492874"/>
+            <a:ext cx="1052507" cy="365124"/>
+          </a:xfrm>
+        </p:spPr>
+        <p:txBody>
+          <a:bodyPr/>
+          <a:lstStyle/>
+          <a:p>
+            <a:pPr>
+              <a:defRPr/>
+            </a:pPr>
+            <a:fld id="{6737BC9E-E183-A7EE-0C01-BA6DD5EB0490}" type="slidenum">
+              <a:rPr lang="ru-RU" sz="1800">
+                <a:solidFill>
+                  <a:schemeClr val="tx1"/>
+                </a:solidFill>
+                <a:latin typeface="Trebuchet MS"/>
+              </a:rPr>
+              <a:t>15</a:t>
+            </a:fld>
+            <a:endParaRPr lang="ru-RU">
+              <a:solidFill>
+                <a:schemeClr val="tx1"/>
+              </a:solidFill>
+              <a:latin typeface="Trebuchet MS"/>
+            </a:endParaRPr>
+          </a:p>
+        </p:txBody>
+      </p:sp>
+      <p:sp>
+        <p:nvSpPr>
+          <p:cNvPr id="960061280" name="Прямоугольник 4"/>
+          <p:cNvSpPr/>
+          <p:nvPr/>
+        </p:nvSpPr>
+        <p:spPr bwMode="auto">
+          <a:xfrm>
+            <a:off x="-9297" y="-10414"/>
+            <a:ext cx="12210595" cy="1160098"/>
+          </a:xfrm>
+          <a:prstGeom prst="rect">
+            <a:avLst/>
+          </a:prstGeom>
+          <a:solidFill>
+            <a:srgbClr val="1A3260">
+              <a:alpha val="65098"/>
+            </a:srgbClr>
+          </a:solidFill>
+          <a:ln>
+            <a:noFill/>
+          </a:ln>
+        </p:spPr>
+        <p:style>
+          <a:lnRef idx="2">
+            <a:schemeClr val="accent1">
+              <a:shade val="50000"/>
+            </a:schemeClr>
+          </a:lnRef>
+          <a:fillRef idx="1">
+            <a:schemeClr val="accent1"/>
+          </a:fillRef>
+          <a:effectRef idx="0">
+            <a:schemeClr val="accent1"/>
+          </a:effectRef>
+          <a:fontRef idx="minor">
+            <a:schemeClr val="lt1"/>
+          </a:fontRef>
+        </p:style>
+        <p:txBody>
+          <a:bodyPr rtlCol="0" anchor="ctr"/>
+          <a:lstStyle/>
+          <a:p>
+            <a:pPr algn="ctr">
+              <a:defRPr/>
+            </a:pPr>
+            <a:endParaRPr lang="ru-RU"/>
+          </a:p>
+        </p:txBody>
+      </p:sp>
+      <p:sp>
+        <p:nvSpPr>
+          <p:cNvPr id="82881855" name="Прямоугольник 5"/>
+          <p:cNvSpPr/>
+          <p:nvPr/>
+        </p:nvSpPr>
+        <p:spPr bwMode="auto">
+          <a:xfrm>
+            <a:off x="0" y="1181590"/>
+            <a:ext cx="12201298" cy="168582"/>
+          </a:xfrm>
+          <a:prstGeom prst="rect">
+            <a:avLst/>
+          </a:prstGeom>
+          <a:solidFill>
+            <a:srgbClr val="000000">
+              <a:alpha val="65098"/>
+            </a:srgbClr>
+          </a:solidFill>
+          <a:ln>
+            <a:noFill/>
+          </a:ln>
+        </p:spPr>
+        <p:style>
+          <a:lnRef idx="2">
+            <a:schemeClr val="accent1">
+              <a:shade val="50000"/>
+            </a:schemeClr>
+          </a:lnRef>
+          <a:fillRef idx="1">
+            <a:schemeClr val="accent1"/>
+          </a:fillRef>
+          <a:effectRef idx="0">
+            <a:schemeClr val="accent1"/>
+          </a:effectRef>
+          <a:fontRef idx="minor">
+            <a:schemeClr val="lt1"/>
+          </a:fontRef>
+        </p:style>
+        <p:txBody>
+          <a:bodyPr rtlCol="0" anchor="ctr"/>
+          <a:lstStyle/>
+          <a:p>
+            <a:pPr algn="ctr">
+              <a:defRPr/>
+            </a:pPr>
+            <a:endParaRPr lang="ru-RU"/>
+          </a:p>
+        </p:txBody>
+      </p:sp>
+      <p:sp>
+        <p:nvSpPr>
+          <p:cNvPr id="1298019095" name="Заголовок 1"/>
+          <p:cNvSpPr>
+            <a:spLocks noGrp="1"/>
+          </p:cNvSpPr>
+          <p:nvPr>
+            <p:ph type="title"/>
+          </p:nvPr>
+        </p:nvSpPr>
+        <p:spPr bwMode="auto">
+          <a:xfrm>
+            <a:off x="838199" y="18254"/>
+            <a:ext cx="10515600" cy="1325562"/>
+          </a:xfrm>
+        </p:spPr>
+        <p:txBody>
+          <a:bodyPr/>
+          <a:lstStyle/>
+          <a:p>
+            <a:pPr>
+              <a:defRPr/>
+            </a:pPr>
+            <a:r>
+              <a:rPr lang="ru-RU">
+                <a:solidFill>
+                  <a:schemeClr val="bg1"/>
+                </a:solidFill>
+              </a:rPr>
+              <a:t>Внедрение</a:t>
+            </a:r>
+            <a:endParaRPr>
+              <a:solidFill>
+                <a:schemeClr val="bg1"/>
+              </a:solidFill>
+            </a:endParaRPr>
+          </a:p>
+        </p:txBody>
+      </p:sp>
+    </p:spTree>
+  </p:cSld>
+  <p:clrMapOvr>
+    <a:masterClrMapping/>
+  </p:clrMapOvr>
+  <mc:AlternateContent xmlns:mc="http://schemas.openxmlformats.org/markup-compatibility/2006">
+    <mc:Choice xmlns:p159="http://schemas.microsoft.com/office/powerpoint/2015/09/main" xmlns:p14="http://schemas.microsoft.com/office/powerpoint/2010/main" Requires="p159">
+      <p:transition p14:dur="500" advClick="1"/>
+    </mc:Choice>
+    <mc:Fallback>
+      <p:transition advClick="1"/>
+    </mc:Fallback>
+  </mc:AlternateContent>
+</p:sld>
+</file>
+
+<file path=ppt/slides/slide17.xml><?xml version="1.0" encoding="utf-8"?>
+<p:sld xmlns:a="http://schemas.openxmlformats.org/drawingml/2006/main" xmlns:r="http://schemas.openxmlformats.org/officeDocument/2006/relationships" xmlns:p="http://schemas.openxmlformats.org/presentationml/2006/main" xmlns:m="http://schemas.openxmlformats.org/officeDocument/2006/math" xmlns:w="http://schemas.openxmlformats.org/wordprocessingml/2006/main" xmlns:mc="http://schemas.openxmlformats.org/markup-compatibility/2006" showMasterPhAnim="0" showMasterSp="1" show="1">
+  <p:cSld name="">
+    <p:bg>
+      <p:bgPr shadeToTitle="0">
+        <a:gradFill>
+          <a:gsLst>
+            <a:gs pos="0">
+              <a:schemeClr val="accent1">
+                <a:lumMod val="5000"/>
+                <a:lumOff val="95000"/>
+              </a:schemeClr>
+            </a:gs>
+            <a:gs pos="74000">
+              <a:schemeClr val="accent1">
+                <a:lumMod val="45000"/>
+                <a:lumOff val="55000"/>
+              </a:schemeClr>
+            </a:gs>
+            <a:gs pos="83000">
+              <a:schemeClr val="accent1">
+                <a:lumMod val="45000"/>
+                <a:lumOff val="55000"/>
+              </a:schemeClr>
+            </a:gs>
+            <a:gs pos="100000">
+              <a:schemeClr val="accent1">
+                <a:lumMod val="30000"/>
+                <a:lumOff val="70000"/>
+              </a:schemeClr>
+            </a:gs>
+          </a:gsLst>
+          <a:lin ang="13500000" scaled="1"/>
+        </a:gradFill>
+      </p:bgPr>
+    </p:bg>
+    <p:spTree>
+      <p:nvGrpSpPr>
+        <p:cNvPr id="1" name=""/>
+        <p:cNvGrpSpPr/>
+        <p:nvPr/>
+      </p:nvGrpSpPr>
+      <p:grpSpPr bwMode="auto">
+        <a:xfrm>
+          <a:off x="0" y="0"/>
+          <a:ext cx="0" cy="0"/>
+          <a:chOff x="0" y="0"/>
+          <a:chExt cx="0" cy="0"/>
+        </a:xfrm>
+      </p:grpSpPr>
+      <p:sp>
+        <p:nvSpPr>
+          <p:cNvPr id="35323964" name="Объект 2"/>
+          <p:cNvSpPr>
+            <a:spLocks noGrp="1"/>
+          </p:cNvSpPr>
+          <p:nvPr>
+            <p:ph idx="1"/>
+          </p:nvPr>
+        </p:nvSpPr>
+        <p:spPr bwMode="auto"/>
+        <p:txBody>
+          <a:bodyPr/>
+          <a:lstStyle/>
+          <a:p>
+            <a:pPr>
+              <a:defRPr/>
+            </a:pPr>
+            <a:endParaRPr lang="ru-RU">
+              <a:solidFill>
+                <a:schemeClr val="bg1"/>
+              </a:solidFill>
+            </a:endParaRPr>
+          </a:p>
+        </p:txBody>
+      </p:sp>
+      <p:sp>
+        <p:nvSpPr>
+          <p:cNvPr id="556531881" name="Номер слайда 3"/>
+          <p:cNvSpPr>
+            <a:spLocks noGrp="1"/>
+          </p:cNvSpPr>
+          <p:nvPr>
+            <p:ph type="sldNum" sz="quarter" idx="12"/>
+          </p:nvPr>
+        </p:nvSpPr>
+        <p:spPr bwMode="auto">
+          <a:xfrm>
+            <a:off x="11084553" y="6492875"/>
+            <a:ext cx="1052508" cy="365125"/>
+          </a:xfrm>
+        </p:spPr>
+        <p:txBody>
+          <a:bodyPr/>
+          <a:lstStyle/>
+          <a:p>
+            <a:pPr>
+              <a:defRPr/>
+            </a:pPr>
+            <a:fld id="{1CF8DEEF-AAF2-493E-906B-C0B6A8D6E6A2}" type="slidenum">
+              <a:rPr lang="ru-RU" sz="1800">
+                <a:solidFill>
+                  <a:schemeClr val="tx1"/>
+                </a:solidFill>
+                <a:latin typeface="Trebuchet MS"/>
+              </a:rPr>
+              <a:t>15</a:t>
+            </a:fld>
+            <a:endParaRPr lang="ru-RU" sz="1800">
+              <a:solidFill>
+                <a:schemeClr val="tx1"/>
+              </a:solidFill>
+              <a:latin typeface="Trebuchet MS"/>
+            </a:endParaRPr>
+          </a:p>
+        </p:txBody>
+      </p:sp>
+      <p:sp>
+        <p:nvSpPr>
+          <p:cNvPr id="1220916765" name="Прямоугольник 4"/>
+          <p:cNvSpPr/>
+          <p:nvPr/>
+        </p:nvSpPr>
+        <p:spPr bwMode="auto">
+          <a:xfrm>
+            <a:off x="-9298" y="-10415"/>
+            <a:ext cx="12210596" cy="1160099"/>
+          </a:xfrm>
+          <a:prstGeom prst="rect">
+            <a:avLst/>
+          </a:prstGeom>
+          <a:solidFill>
+            <a:srgbClr val="1A3260">
+              <a:alpha val="65098"/>
+            </a:srgbClr>
+          </a:solidFill>
+          <a:ln>
+            <a:noFill/>
+          </a:ln>
+        </p:spPr>
+        <p:style>
+          <a:lnRef idx="2">
+            <a:schemeClr val="accent1">
+              <a:shade val="50000"/>
+            </a:schemeClr>
+          </a:lnRef>
+          <a:fillRef idx="1">
+            <a:schemeClr val="accent1"/>
+          </a:fillRef>
+          <a:effectRef idx="0">
+            <a:schemeClr val="accent1"/>
+          </a:effectRef>
+          <a:fontRef idx="minor">
+            <a:schemeClr val="lt1"/>
+          </a:fontRef>
+        </p:style>
+        <p:txBody>
+          <a:bodyPr rtlCol="0" anchor="ctr"/>
+          <a:lstStyle/>
+          <a:p>
+            <a:pPr algn="ctr">
+              <a:defRPr/>
+            </a:pPr>
+            <a:endParaRPr lang="ru-RU"/>
+          </a:p>
+        </p:txBody>
+      </p:sp>
+      <p:sp>
+        <p:nvSpPr>
+          <p:cNvPr id="1584964398" name="Прямоугольник 5"/>
+          <p:cNvSpPr/>
+          <p:nvPr/>
+        </p:nvSpPr>
+        <p:spPr bwMode="auto">
+          <a:xfrm>
+            <a:off x="0" y="1181591"/>
+            <a:ext cx="12201298" cy="168583"/>
+          </a:xfrm>
+          <a:prstGeom prst="rect">
+            <a:avLst/>
+          </a:prstGeom>
+          <a:solidFill>
+            <a:srgbClr val="000000">
+              <a:alpha val="65098"/>
+            </a:srgbClr>
+          </a:solidFill>
+          <a:ln>
+            <a:noFill/>
+          </a:ln>
+        </p:spPr>
+        <p:style>
+          <a:lnRef idx="2">
+            <a:schemeClr val="accent1">
+              <a:shade val="50000"/>
+            </a:schemeClr>
+          </a:lnRef>
+          <a:fillRef idx="1">
+            <a:schemeClr val="accent1"/>
+          </a:fillRef>
+          <a:effectRef idx="0">
+            <a:schemeClr val="accent1"/>
+          </a:effectRef>
+          <a:fontRef idx="minor">
+            <a:schemeClr val="lt1"/>
+          </a:fontRef>
+        </p:style>
+        <p:txBody>
+          <a:bodyPr rtlCol="0" anchor="ctr"/>
+          <a:lstStyle/>
+          <a:p>
+            <a:pPr algn="ctr">
+              <a:defRPr/>
+            </a:pPr>
+            <a:endParaRPr lang="ru-RU"/>
+          </a:p>
+        </p:txBody>
+      </p:sp>
+      <p:sp>
+        <p:nvSpPr>
+          <p:cNvPr id="476382534" name="Заголовок 1"/>
           <p:cNvSpPr>
             <a:spLocks noGrp="1"/>
           </p:cNvSpPr>
@@ -14461,7 +15328,7 @@
       </p:grpSpPr>
       <p:sp>
         <p:nvSpPr>
-          <p:cNvPr id="1045420831" name="Прямоугольник 4"/>
+          <p:cNvPr id="684247047" name="Прямоугольник 4"/>
           <p:cNvSpPr/>
           <p:nvPr/>
         </p:nvSpPr>
@@ -14511,7 +15378,7 @@
       </p:sp>
       <p:sp>
         <p:nvSpPr>
-          <p:cNvPr id="1134414186" name="Заголовок 1"/>
+          <p:cNvPr id="334443020" name="Заголовок 1"/>
           <p:cNvSpPr>
             <a:spLocks noGrp="1"/>
           </p:cNvSpPr>
@@ -14550,7 +15417,7 @@
       </p:sp>
       <p:sp>
         <p:nvSpPr>
-          <p:cNvPr id="66902840" name="Объект 2"/>
+          <p:cNvPr id="1720181102" name="Объект 2"/>
           <p:cNvSpPr>
             <a:spLocks noGrp="1"/>
           </p:cNvSpPr>
@@ -14676,7 +15543,7 @@
             </a:r>
             <a:endParaRPr lang="ru-RU">
               <a:solidFill>
-                <a:schemeClr val="bg1"/>
+                <a:schemeClr val="tx1"/>
               </a:solidFill>
             </a:endParaRPr>
           </a:p>
@@ -14684,7 +15551,7 @@
       </p:sp>
       <p:sp>
         <p:nvSpPr>
-          <p:cNvPr id="645700091" name="Номер слайда 3"/>
+          <p:cNvPr id="1828357409" name="Номер слайда 3"/>
           <p:cNvSpPr>
             <a:spLocks noGrp="1"/>
           </p:cNvSpPr>
@@ -14725,7 +15592,7 @@
       </p:sp>
       <p:sp>
         <p:nvSpPr>
-          <p:cNvPr id="778515660" name="Прямоугольник 5"/>
+          <p:cNvPr id="1732759579" name="Прямоугольник 5"/>
           <p:cNvSpPr/>
           <p:nvPr/>
         </p:nvSpPr>
@@ -14841,7 +15708,7 @@
       </p:grpSpPr>
       <p:sp>
         <p:nvSpPr>
-          <p:cNvPr id="1483331314" name="Объект 2"/>
+          <p:cNvPr id="917763893" name="Объект 2"/>
           <p:cNvSpPr>
             <a:spLocks noGrp="1"/>
           </p:cNvSpPr>
@@ -14849,112 +15716,165 @@
             <p:ph idx="1"/>
           </p:nvPr>
         </p:nvSpPr>
-        <p:spPr bwMode="auto">
-          <a:xfrm>
-            <a:off x="4649" y="1635966"/>
-            <a:ext cx="12201298" cy="3600467"/>
-          </a:xfrm>
-          <a:prstGeom prst="rect">
-            <a:avLst/>
-          </a:prstGeom>
-          <a:noFill/>
-        </p:spPr>
-        <p:txBody>
-          <a:bodyPr>
-            <a:normAutofit/>
+        <p:spPr bwMode="auto"/>
+        <p:txBody>
+          <a:bodyPr vertOverflow="overflow" horzOverflow="overflow" vert="horz" wrap="square" lIns="91440" tIns="45720" rIns="91440" bIns="45720" numCol="1" spcCol="0" rtlCol="0" fromWordArt="0" anchor="t" anchorCtr="0" forceAA="0" upright="0" compatLnSpc="0">
+            <a:normAutofit fontScale="95000" lnSpcReduction="1000"/>
           </a:bodyPr>
           <a:lstStyle/>
           <a:p>
-            <a:pPr>
-              <a:defRPr/>
-            </a:pPr>
-            <a:r>
-              <a:rPr lang="ru-RU" sz="2400"/>
-              <a:t>Цели</a:t>
-            </a:r>
-            <a:endParaRPr sz="2400"/>
-          </a:p>
-          <a:p>
-            <a:pPr lvl="1">
-              <a:defRPr/>
-            </a:pPr>
-            <a:r>
-              <a:rPr lang="ru-RU" sz="2000"/>
-              <a:t>Разработать модель упрощённого графического ядра на языке описания аппаратуры </a:t>
-            </a:r>
-            <a:r>
-              <a:rPr lang="en-US" sz="2000"/>
-              <a:t>SystemVerilog</a:t>
-            </a:r>
-            <a:r>
-              <a:rPr lang="ru-RU" sz="2000"/>
-              <a:t>.</a:t>
-            </a:r>
-            <a:endParaRPr sz="2000"/>
-          </a:p>
-          <a:p>
-            <a:pPr>
-              <a:defRPr/>
-            </a:pPr>
-            <a:r>
-              <a:rPr lang="ru-RU" sz="2400"/>
-              <a:t>Задачи</a:t>
-            </a:r>
-            <a:endParaRPr sz="2400"/>
-          </a:p>
-          <a:p>
-            <a:pPr lvl="1">
-              <a:defRPr/>
-            </a:pPr>
-            <a:r>
-              <a:rPr lang="ru-RU" sz="2000"/>
-              <a:t>Провести анализ существующих архитектур графических процессоров и ядер;</a:t>
-            </a:r>
-            <a:endParaRPr sz="2000"/>
-          </a:p>
-          <a:p>
-            <a:pPr lvl="1">
-              <a:defRPr/>
-            </a:pPr>
-            <a:r>
-              <a:rPr lang="ru-RU" sz="2000"/>
-              <a:t>Спроектировать минимально необходимую архитектуру набора инструкций (</a:t>
-            </a:r>
-            <a:r>
-              <a:rPr lang="en-US" sz="2000"/>
-              <a:t>ISA)</a:t>
-            </a:r>
-            <a:r>
-              <a:rPr lang="ru-RU" sz="2000"/>
+            <a:pPr marL="0" indent="0">
+              <a:buFont typeface="Arial"/>
+              <a:buNone/>
+              <a:defRPr/>
+            </a:pPr>
+            <a:r>
+              <a:rPr lang="ru-RU">
+                <a:solidFill>
+                  <a:schemeClr val="tx1"/>
+                </a:solidFill>
+              </a:rPr>
+              <a:t>Реализация модели упрощенного графического ядра </a:t>
+            </a:r>
+            <a:r>
+              <a:rPr>
+                <a:solidFill>
+                  <a:schemeClr val="tx1"/>
+                </a:solidFill>
+              </a:rPr>
+              <a:t>позволит:</a:t>
+            </a:r>
+            <a:endParaRPr>
+              <a:solidFill>
+                <a:schemeClr val="tx1"/>
+              </a:solidFill>
+            </a:endParaRPr>
+          </a:p>
+          <a:p>
+            <a:pPr>
+              <a:buFont typeface="Arial"/>
+              <a:buChar char="–"/>
+              <a:defRPr/>
+            </a:pPr>
+            <a:r>
+              <a:rPr>
+                <a:solidFill>
+                  <a:schemeClr val="tx1"/>
+                </a:solidFill>
+              </a:rPr>
+              <a:t> Определить</a:t>
+            </a:r>
+            <a:r>
+              <a:rPr>
+                <a:solidFill>
+                  <a:schemeClr val="tx1"/>
+                </a:solidFill>
+              </a:rPr>
+              <a:t> требования для построения минимального графического ядра и минимальный набор инструкций;</a:t>
+            </a:r>
+            <a:endParaRPr>
+              <a:solidFill>
+                <a:schemeClr val="tx1"/>
+              </a:solidFill>
+            </a:endParaRPr>
+          </a:p>
+          <a:p>
+            <a:pPr>
+              <a:buFont typeface="Arial"/>
+              <a:buChar char="–"/>
+              <a:defRPr/>
+            </a:pPr>
+            <a:r>
+              <a:rPr>
+                <a:solidFill>
+                  <a:schemeClr val="tx1"/>
+                </a:solidFill>
+              </a:rPr>
+              <a:t> Разработать модель упрощенного графического ядра, которую можно модернизировать и изучать;</a:t>
+            </a:r>
+            <a:endParaRPr>
+              <a:solidFill>
+                <a:schemeClr val="tx1"/>
+              </a:solidFill>
+            </a:endParaRPr>
+          </a:p>
+          <a:p>
+            <a:pPr>
+              <a:buFont typeface="Arial"/>
+              <a:buChar char="–"/>
+              <a:defRPr/>
+            </a:pPr>
+            <a:r>
+              <a:rPr>
+                <a:solidFill>
+                  <a:schemeClr val="tx1"/>
+                </a:solidFill>
+              </a:rPr>
+              <a:t> На базе разработанной модели можно экспериментировать с различными техниками и способами</a:t>
+            </a:r>
+            <a:r>
+              <a:rPr lang="en-US">
+                <a:solidFill>
+                  <a:schemeClr val="tx1"/>
+                </a:solidFill>
+              </a:rPr>
+              <a:t> </a:t>
+            </a:r>
+            <a:r>
+              <a:rPr lang="ru-RU">
+                <a:solidFill>
+                  <a:schemeClr val="tx1"/>
+                </a:solidFill>
+              </a:rPr>
+              <a:t>построения </a:t>
+            </a:r>
+            <a:r>
+              <a:rPr lang="ru-RU">
+                <a:solidFill>
+                  <a:schemeClr val="tx1"/>
+                </a:solidFill>
+              </a:rPr>
+              <a:t>архитектур процессорных систем</a:t>
+            </a:r>
+            <a:r>
+              <a:rPr>
+                <a:solidFill>
+                  <a:schemeClr val="tx1"/>
+                </a:solidFill>
+              </a:rPr>
               <a:t>;</a:t>
             </a:r>
-            <a:endParaRPr sz="2000"/>
-          </a:p>
-          <a:p>
-            <a:pPr lvl="1">
-              <a:defRPr/>
-            </a:pPr>
-            <a:r>
-              <a:rPr lang="ru-RU" sz="2000"/>
-              <a:t>Разработать архитектуру упрощенного графического ядра;</a:t>
-            </a:r>
-            <a:endParaRPr sz="2000"/>
-          </a:p>
-          <a:p>
-            <a:pPr lvl="1">
-              <a:defRPr/>
-            </a:pPr>
-            <a:r>
-              <a:rPr lang="ru-RU" sz="2000"/>
-              <a:t>Разработать модель упрощенного графического ядра, используя метод поблочной декомпозиции.</a:t>
-            </a:r>
-            <a:endParaRPr sz="2000"/>
-          </a:p>
-        </p:txBody>
-      </p:sp>
-      <p:sp>
-        <p:nvSpPr>
-          <p:cNvPr id="672877458" name="Номер слайда 3"/>
+            <a:endParaRPr>
+              <a:solidFill>
+                <a:schemeClr val="tx1"/>
+              </a:solidFill>
+            </a:endParaRPr>
+          </a:p>
+          <a:p>
+            <a:pPr>
+              <a:buFont typeface="Arial"/>
+              <a:buChar char="–"/>
+              <a:defRPr/>
+            </a:pPr>
+            <a:r>
+              <a:rPr>
+                <a:solidFill>
+                  <a:schemeClr val="tx1"/>
+                </a:solidFill>
+              </a:rPr>
+              <a:t> Приблизиться к реализации полноценного графического ядра, а в перспективе и полноценного графического ускорителя.</a:t>
+            </a:r>
+            <a:endParaRPr>
+              <a:solidFill>
+                <a:schemeClr val="tx1"/>
+              </a:solidFill>
+            </a:endParaRPr>
+          </a:p>
+        </p:txBody>
+      </p:sp>
+      <p:sp>
+        <p:nvSpPr>
+          <p:cNvPr id="1709281133" name="Номер слайда 3"/>
           <p:cNvSpPr>
             <a:spLocks noGrp="1"/>
           </p:cNvSpPr>
@@ -14964,7 +15884,7 @@
         </p:nvSpPr>
         <p:spPr bwMode="auto">
           <a:xfrm>
-            <a:off x="11084554" y="6492875"/>
+            <a:off x="11084553" y="6492875"/>
             <a:ext cx="1052508" cy="365125"/>
           </a:xfrm>
         </p:spPr>
@@ -14982,9 +15902,9 @@
                 </a:solidFill>
                 <a:latin typeface="Trebuchet MS"/>
               </a:rPr>
-              <a:t>3</a:t>
+              <a:t>4</a:t>
             </a:fld>
-            <a:endParaRPr lang="ru-RU" sz="1800">
+            <a:endParaRPr lang="ru-RU">
               <a:solidFill>
                 <a:schemeClr val="tx1"/>
               </a:solidFill>
@@ -14995,14 +15915,14 @@
       </p:sp>
       <p:sp>
         <p:nvSpPr>
-          <p:cNvPr id="1052467105" name="Прямоугольник 5"/>
+          <p:cNvPr id="316054823" name="Прямоугольник 4"/>
           <p:cNvSpPr/>
           <p:nvPr/>
         </p:nvSpPr>
         <p:spPr bwMode="auto">
           <a:xfrm>
-            <a:off x="-9298" y="-10415"/>
-            <a:ext cx="12210596" cy="1160099"/>
+            <a:off x="0" y="-72479"/>
+            <a:ext cx="12192000" cy="1160099"/>
           </a:xfrm>
           <a:prstGeom prst="rect">
             <a:avLst/>
@@ -15045,7 +15965,7 @@
       </p:sp>
       <p:sp>
         <p:nvSpPr>
-          <p:cNvPr id="1614169718" name="Заголовок 1"/>
+          <p:cNvPr id="1945025936" name="Заголовок 1"/>
           <p:cNvSpPr>
             <a:spLocks noGrp="1"/>
           </p:cNvSpPr>
@@ -15055,7 +15975,7 @@
         </p:nvSpPr>
         <p:spPr bwMode="auto">
           <a:xfrm>
-            <a:off x="847498" y="56519"/>
+            <a:off x="838200" y="-72479"/>
             <a:ext cx="10515600" cy="1325563"/>
           </a:xfrm>
         </p:spPr>
@@ -15072,7 +15992,7 @@
                   <a:schemeClr val="bg1"/>
                 </a:solidFill>
               </a:rPr>
-              <a:t>Постановка задачи</a:t>
+              <a:t>Актуальность работы</a:t>
             </a:r>
             <a:endParaRPr>
               <a:solidFill>
@@ -15084,14 +16004,14 @@
       </p:sp>
       <p:sp>
         <p:nvSpPr>
-          <p:cNvPr id="1618619112" name="Прямоугольник 6"/>
+          <p:cNvPr id="1096262877" name="Прямоугольник 5"/>
           <p:cNvSpPr/>
           <p:nvPr/>
         </p:nvSpPr>
         <p:spPr bwMode="auto">
           <a:xfrm>
-            <a:off x="0" y="1181591"/>
-            <a:ext cx="12201298" cy="168583"/>
+            <a:off x="0" y="1121016"/>
+            <a:ext cx="12192000" cy="168583"/>
           </a:xfrm>
           <a:prstGeom prst="rect">
             <a:avLst/>
@@ -15200,7 +16120,7 @@
       </p:grpSpPr>
       <p:sp>
         <p:nvSpPr>
-          <p:cNvPr id="1769514325" name="Объект 2"/>
+          <p:cNvPr id="1493096460" name="Объект 2"/>
           <p:cNvSpPr>
             <a:spLocks noGrp="1"/>
           </p:cNvSpPr>
@@ -15208,165 +16128,112 @@
             <p:ph idx="1"/>
           </p:nvPr>
         </p:nvSpPr>
-        <p:spPr bwMode="auto"/>
-        <p:txBody>
-          <a:bodyPr vertOverflow="overflow" horzOverflow="overflow" vert="horz" wrap="square" lIns="91440" tIns="45720" rIns="91440" bIns="45720" numCol="1" spcCol="0" rtlCol="0" fromWordArt="0" anchor="t" anchorCtr="0" forceAA="0" upright="0" compatLnSpc="0">
-            <a:normAutofit fontScale="95000" lnSpcReduction="1000"/>
+        <p:spPr bwMode="auto">
+          <a:xfrm>
+            <a:off x="4649" y="1635966"/>
+            <a:ext cx="12201298" cy="3600467"/>
+          </a:xfrm>
+          <a:prstGeom prst="rect">
+            <a:avLst/>
+          </a:prstGeom>
+          <a:noFill/>
+        </p:spPr>
+        <p:txBody>
+          <a:bodyPr>
+            <a:normAutofit/>
           </a:bodyPr>
           <a:lstStyle/>
           <a:p>
-            <a:pPr marL="0" indent="0">
-              <a:buFont typeface="Arial"/>
-              <a:buNone/>
-              <a:defRPr/>
-            </a:pPr>
-            <a:r>
-              <a:rPr lang="ru-RU">
-                <a:solidFill>
-                  <a:schemeClr val="tx1"/>
-                </a:solidFill>
-              </a:rPr>
-              <a:t>Реализация модели упрощенного графического ядра </a:t>
-            </a:r>
-            <a:r>
-              <a:rPr>
-                <a:solidFill>
-                  <a:schemeClr val="tx1"/>
-                </a:solidFill>
-              </a:rPr>
-              <a:t>позволит:</a:t>
-            </a:r>
-            <a:endParaRPr>
-              <a:solidFill>
-                <a:schemeClr val="tx1"/>
-              </a:solidFill>
-            </a:endParaRPr>
-          </a:p>
-          <a:p>
-            <a:pPr>
-              <a:buFont typeface="Arial"/>
-              <a:buChar char="–"/>
-              <a:defRPr/>
-            </a:pPr>
-            <a:r>
-              <a:rPr>
-                <a:solidFill>
-                  <a:schemeClr val="tx1"/>
-                </a:solidFill>
-              </a:rPr>
-              <a:t> Определить</a:t>
-            </a:r>
-            <a:r>
-              <a:rPr>
-                <a:solidFill>
-                  <a:schemeClr val="tx1"/>
-                </a:solidFill>
-              </a:rPr>
-              <a:t> требования для построения минимального графического ядра и минимальный набор инструкций;</a:t>
-            </a:r>
-            <a:endParaRPr>
-              <a:solidFill>
-                <a:schemeClr val="tx1"/>
-              </a:solidFill>
-            </a:endParaRPr>
-          </a:p>
-          <a:p>
-            <a:pPr>
-              <a:buFont typeface="Arial"/>
-              <a:buChar char="–"/>
-              <a:defRPr/>
-            </a:pPr>
-            <a:r>
-              <a:rPr>
-                <a:solidFill>
-                  <a:schemeClr val="tx1"/>
-                </a:solidFill>
-              </a:rPr>
-              <a:t> Разработать модель упрощенного графического ядра, которую можно модернизировать и изучать;</a:t>
-            </a:r>
-            <a:endParaRPr>
-              <a:solidFill>
-                <a:schemeClr val="tx1"/>
-              </a:solidFill>
-            </a:endParaRPr>
-          </a:p>
-          <a:p>
-            <a:pPr>
-              <a:buFont typeface="Arial"/>
-              <a:buChar char="–"/>
-              <a:defRPr/>
-            </a:pPr>
-            <a:r>
-              <a:rPr>
-                <a:solidFill>
-                  <a:schemeClr val="tx1"/>
-                </a:solidFill>
-              </a:rPr>
-              <a:t> На базе разработанной модели можно экспериментировать с различными техниками и способами</a:t>
-            </a:r>
-            <a:r>
-              <a:rPr lang="en-US">
-                <a:solidFill>
-                  <a:schemeClr val="tx1"/>
-                </a:solidFill>
-              </a:rPr>
-              <a:t> </a:t>
-            </a:r>
-            <a:r>
-              <a:rPr lang="ru-RU">
-                <a:solidFill>
-                  <a:schemeClr val="tx1"/>
-                </a:solidFill>
-              </a:rPr>
-              <a:t>построения </a:t>
-            </a:r>
-            <a:r>
-              <a:rPr lang="ru-RU">
-                <a:solidFill>
-                  <a:schemeClr val="tx1"/>
-                </a:solidFill>
-              </a:rPr>
-              <a:t>архитектур процессорных систем</a:t>
-            </a:r>
-            <a:r>
-              <a:rPr>
-                <a:solidFill>
-                  <a:schemeClr val="tx1"/>
-                </a:solidFill>
-              </a:rPr>
+            <a:pPr>
+              <a:defRPr/>
+            </a:pPr>
+            <a:r>
+              <a:rPr lang="ru-RU" sz="2400"/>
+              <a:t>Цели</a:t>
+            </a:r>
+            <a:endParaRPr sz="2400"/>
+          </a:p>
+          <a:p>
+            <a:pPr lvl="1">
+              <a:defRPr/>
+            </a:pPr>
+            <a:r>
+              <a:rPr lang="ru-RU" sz="2000"/>
+              <a:t>Разработать модель упрощённого графического ядра на языке описания аппаратуры </a:t>
+            </a:r>
+            <a:r>
+              <a:rPr lang="en-US" sz="2000"/>
+              <a:t>SystemVerilog</a:t>
+            </a:r>
+            <a:r>
+              <a:rPr lang="ru-RU" sz="2000"/>
+              <a:t>.</a:t>
+            </a:r>
+            <a:endParaRPr sz="2000"/>
+          </a:p>
+          <a:p>
+            <a:pPr>
+              <a:defRPr/>
+            </a:pPr>
+            <a:r>
+              <a:rPr lang="ru-RU" sz="2400"/>
+              <a:t>Задачи</a:t>
+            </a:r>
+            <a:endParaRPr sz="2400"/>
+          </a:p>
+          <a:p>
+            <a:pPr lvl="1">
+              <a:defRPr/>
+            </a:pPr>
+            <a:r>
+              <a:rPr lang="ru-RU" sz="2000"/>
+              <a:t>Провести анализ существующих архитектур графических процессоров и ядер;</a:t>
+            </a:r>
+            <a:endParaRPr sz="2000"/>
+          </a:p>
+          <a:p>
+            <a:pPr lvl="1">
+              <a:defRPr/>
+            </a:pPr>
+            <a:r>
+              <a:rPr lang="ru-RU" sz="2000"/>
+              <a:t>Спроектировать минимально необходимую архитектуру набора инструкций (</a:t>
+            </a:r>
+            <a:r>
+              <a:rPr lang="en-US" sz="2000"/>
+              <a:t>ISA)</a:t>
+            </a:r>
+            <a:r>
+              <a:rPr lang="ru-RU" sz="2000"/>
               <a:t>;</a:t>
             </a:r>
-            <a:endParaRPr>
-              <a:solidFill>
-                <a:schemeClr val="tx1"/>
-              </a:solidFill>
-            </a:endParaRPr>
-          </a:p>
-          <a:p>
-            <a:pPr>
-              <a:buFont typeface="Arial"/>
-              <a:buChar char="–"/>
-              <a:defRPr/>
-            </a:pPr>
-            <a:r>
-              <a:rPr>
-                <a:solidFill>
-                  <a:schemeClr val="tx1"/>
-                </a:solidFill>
-              </a:rPr>
-              <a:t> Приблизиться к реализации полноценного графического ядра, а в перспективе и полноценного графического ускорителя.</a:t>
-            </a:r>
-            <a:endParaRPr>
-              <a:solidFill>
-                <a:schemeClr val="tx1"/>
-              </a:solidFill>
-            </a:endParaRPr>
-          </a:p>
-        </p:txBody>
-      </p:sp>
-      <p:sp>
-        <p:nvSpPr>
-          <p:cNvPr id="757514086" name="Номер слайда 3"/>
+            <a:endParaRPr sz="2000"/>
+          </a:p>
+          <a:p>
+            <a:pPr lvl="1">
+              <a:defRPr/>
+            </a:pPr>
+            <a:r>
+              <a:rPr lang="ru-RU" sz="2000"/>
+              <a:t>Разработать архитектуру упрощенного графического ядра;</a:t>
+            </a:r>
+            <a:endParaRPr sz="2000"/>
+          </a:p>
+          <a:p>
+            <a:pPr lvl="1">
+              <a:defRPr/>
+            </a:pPr>
+            <a:r>
+              <a:rPr lang="ru-RU" sz="2000"/>
+              <a:t>Разработать модель упрощенного графического ядра, используя метод поблочной декомпозиции.</a:t>
+            </a:r>
+            <a:endParaRPr sz="2000"/>
+          </a:p>
+        </p:txBody>
+      </p:sp>
+      <p:sp>
+        <p:nvSpPr>
+          <p:cNvPr id="607929515" name="Номер слайда 3"/>
           <p:cNvSpPr>
             <a:spLocks noGrp="1"/>
           </p:cNvSpPr>
@@ -15376,7 +16243,7 @@
         </p:nvSpPr>
         <p:spPr bwMode="auto">
           <a:xfrm>
-            <a:off x="11084553" y="6492875"/>
+            <a:off x="11084554" y="6492875"/>
             <a:ext cx="1052508" cy="365125"/>
           </a:xfrm>
         </p:spPr>
@@ -15394,9 +16261,9 @@
                 </a:solidFill>
                 <a:latin typeface="Trebuchet MS"/>
               </a:rPr>
-              <a:t>4</a:t>
+              <a:t>3</a:t>
             </a:fld>
-            <a:endParaRPr lang="ru-RU">
+            <a:endParaRPr lang="ru-RU" sz="1800">
               <a:solidFill>
                 <a:schemeClr val="tx1"/>
               </a:solidFill>
@@ -15407,14 +16274,14 @@
       </p:sp>
       <p:sp>
         <p:nvSpPr>
-          <p:cNvPr id="1157378375" name="Прямоугольник 4"/>
+          <p:cNvPr id="1180678852" name="Прямоугольник 5"/>
           <p:cNvSpPr/>
           <p:nvPr/>
         </p:nvSpPr>
         <p:spPr bwMode="auto">
           <a:xfrm>
-            <a:off x="0" y="-72479"/>
-            <a:ext cx="12192000" cy="1160099"/>
+            <a:off x="-9298" y="-10415"/>
+            <a:ext cx="12210596" cy="1160099"/>
           </a:xfrm>
           <a:prstGeom prst="rect">
             <a:avLst/>
@@ -15457,7 +16324,7 @@
       </p:sp>
       <p:sp>
         <p:nvSpPr>
-          <p:cNvPr id="869618670" name="Заголовок 1"/>
+          <p:cNvPr id="1566291400" name="Заголовок 1"/>
           <p:cNvSpPr>
             <a:spLocks noGrp="1"/>
           </p:cNvSpPr>
@@ -15467,7 +16334,7 @@
         </p:nvSpPr>
         <p:spPr bwMode="auto">
           <a:xfrm>
-            <a:off x="838200" y="-72479"/>
+            <a:off x="847498" y="56519"/>
             <a:ext cx="10515600" cy="1325563"/>
           </a:xfrm>
         </p:spPr>
@@ -15484,7 +16351,7 @@
                   <a:schemeClr val="bg1"/>
                 </a:solidFill>
               </a:rPr>
-              <a:t>Актуальность работы</a:t>
+              <a:t>Постановка задачи</a:t>
             </a:r>
             <a:endParaRPr>
               <a:solidFill>
@@ -15496,14 +16363,14 @@
       </p:sp>
       <p:sp>
         <p:nvSpPr>
-          <p:cNvPr id="2023920784" name="Прямоугольник 5"/>
+          <p:cNvPr id="1063207145" name="Прямоугольник 6"/>
           <p:cNvSpPr/>
           <p:nvPr/>
         </p:nvSpPr>
         <p:spPr bwMode="auto">
           <a:xfrm>
-            <a:off x="0" y="1121016"/>
-            <a:ext cx="12192000" cy="168583"/>
+            <a:off x="0" y="1181591"/>
+            <a:ext cx="12201298" cy="168583"/>
           </a:xfrm>
           <a:prstGeom prst="rect">
             <a:avLst/>
@@ -15612,14 +16479,110 @@
       </p:grpSpPr>
       <p:sp>
         <p:nvSpPr>
-          <p:cNvPr id="769270170" name="Прямоугольник 9"/>
+          <p:cNvPr id="112184230" name="Объект 2"/>
+          <p:cNvSpPr>
+            <a:spLocks noGrp="1"/>
+          </p:cNvSpPr>
+          <p:nvPr>
+            <p:ph idx="1"/>
+          </p:nvPr>
+        </p:nvSpPr>
+        <p:spPr bwMode="auto">
+          <a:xfrm flipH="0" flipV="0">
+            <a:off x="182075" y="1628766"/>
+            <a:ext cx="2592336" cy="4864108"/>
+          </a:xfrm>
+          <a:prstGeom prst="rect">
+            <a:avLst/>
+          </a:prstGeom>
+          <a:noFill/>
+        </p:spPr>
+        <p:txBody>
+          <a:bodyPr vertOverflow="overflow" horzOverflow="overflow" vert="horz" wrap="square" lIns="91440" tIns="45720" rIns="91440" bIns="45720" numCol="1" spcCol="0" rtlCol="0" fromWordArt="0" anchor="t" anchorCtr="0" forceAA="0" upright="0" compatLnSpc="0">
+            <a:normAutofit fontScale="80000" lnSpcReduction="4000"/>
+          </a:bodyPr>
+          <a:lstStyle/>
+          <a:p>
+            <a:pPr>
+              <a:defRPr/>
+            </a:pPr>
+            <a:r>
+              <a:rPr/>
+              <a:t>Работа является общим проектом: разработка ядра упрощенного графического ускорителя</a:t>
+            </a:r>
+            <a:endParaRPr/>
+          </a:p>
+          <a:p>
+            <a:pPr>
+              <a:defRPr/>
+            </a:pPr>
+            <a:r>
+              <a:rPr/>
+              <a:t>В данной работе выполнена конкретная часть проекта: </a:t>
+            </a:r>
+            <a:r>
+              <a:rPr lang="en-US"/>
+              <a:t>RTL-</a:t>
+            </a:r>
+            <a:r>
+              <a:rPr lang="ru-RU"/>
+              <a:t>описание ядра упрощенного графического ускорителя</a:t>
+            </a:r>
+            <a:endParaRPr/>
+          </a:p>
+        </p:txBody>
+      </p:sp>
+      <p:sp>
+        <p:nvSpPr>
+          <p:cNvPr id="555354155" name="Номер слайда 3"/>
+          <p:cNvSpPr>
+            <a:spLocks noGrp="1"/>
+          </p:cNvSpPr>
+          <p:nvPr>
+            <p:ph type="sldNum" sz="quarter" idx="12"/>
+          </p:nvPr>
+        </p:nvSpPr>
+        <p:spPr bwMode="auto">
+          <a:xfrm>
+            <a:off x="11084553" y="6492874"/>
+            <a:ext cx="1052507" cy="365124"/>
+          </a:xfrm>
+        </p:spPr>
+        <p:txBody>
+          <a:bodyPr/>
+          <a:lstStyle/>
+          <a:p>
+            <a:pPr>
+              <a:defRPr/>
+            </a:pPr>
+            <a:fld id="{2C3BA63A-6FFD-E575-38C0-7BEA8FDEC7FB}" type="slidenum">
+              <a:rPr lang="ru-RU" sz="1800">
+                <a:solidFill>
+                  <a:schemeClr val="tx1"/>
+                </a:solidFill>
+                <a:latin typeface="Trebuchet MS"/>
+              </a:rPr>
+              <a:t>4</a:t>
+            </a:fld>
+            <a:endParaRPr lang="ru-RU" sz="1800">
+              <a:solidFill>
+                <a:schemeClr val="tx1"/>
+              </a:solidFill>
+              <a:latin typeface="Trebuchet MS"/>
+            </a:endParaRPr>
+          </a:p>
+        </p:txBody>
+      </p:sp>
+      <p:sp>
+        <p:nvSpPr>
+          <p:cNvPr id="1547078223" name="Прямоугольник 5"/>
           <p:cNvSpPr/>
           <p:nvPr/>
         </p:nvSpPr>
         <p:spPr bwMode="auto">
           <a:xfrm>
-            <a:off x="-9298" y="-10415"/>
-            <a:ext cx="12210596" cy="1160099"/>
+            <a:off x="-9297" y="-10414"/>
+            <a:ext cx="12210595" cy="1160098"/>
           </a:xfrm>
           <a:prstGeom prst="rect">
             <a:avLst/>
@@ -15662,14 +16625,53 @@
       </p:sp>
       <p:sp>
         <p:nvSpPr>
-          <p:cNvPr id="881265108" name="Прямоугольник 10"/>
+          <p:cNvPr id="696182111" name="Заголовок 1"/>
+          <p:cNvSpPr>
+            <a:spLocks noGrp="1"/>
+          </p:cNvSpPr>
+          <p:nvPr>
+            <p:ph type="title"/>
+          </p:nvPr>
+        </p:nvSpPr>
+        <p:spPr bwMode="auto">
+          <a:xfrm>
+            <a:off x="847497" y="56518"/>
+            <a:ext cx="10515600" cy="1325562"/>
+          </a:xfrm>
+        </p:spPr>
+        <p:txBody>
+          <a:bodyPr/>
+          <a:lstStyle/>
+          <a:p>
+            <a:pPr>
+              <a:defRPr/>
+            </a:pPr>
+            <a:r>
+              <a:rPr lang="ru-RU">
+                <a:solidFill>
+                  <a:schemeClr val="bg1"/>
+                </a:solidFill>
+              </a:rPr>
+              <a:t>Комплексная структура проекта</a:t>
+            </a:r>
+            <a:endParaRPr>
+              <a:solidFill>
+                <a:schemeClr val="bg1"/>
+              </a:solidFill>
+            </a:endParaRPr>
+          </a:p>
+        </p:txBody>
+      </p:sp>
+      <p:sp>
+        <p:nvSpPr>
+          <p:cNvPr id="309347674" name="Прямоугольник 6"/>
           <p:cNvSpPr/>
           <p:nvPr/>
         </p:nvSpPr>
         <p:spPr bwMode="auto">
           <a:xfrm>
-            <a:off x="0" y="1181591"/>
-            <a:ext cx="12201298" cy="168583"/>
+            <a:off x="0" y="1181590"/>
+            <a:ext cx="12201297" cy="168582"/>
           </a:xfrm>
           <a:prstGeom prst="rect">
             <a:avLst/>
@@ -15710,322 +16712,32 @@
           </a:p>
         </p:txBody>
       </p:sp>
-      <p:sp>
-        <p:nvSpPr>
-          <p:cNvPr id="1896901441" name="Заголовок 1"/>
-          <p:cNvSpPr>
-            <a:spLocks noGrp="1"/>
-          </p:cNvSpPr>
-          <p:nvPr>
-            <p:ph type="title"/>
-          </p:nvPr>
-        </p:nvSpPr>
-        <p:spPr bwMode="auto">
-          <a:xfrm>
-            <a:off x="383823" y="-10414"/>
-            <a:ext cx="10515600" cy="1325563"/>
-          </a:xfrm>
-        </p:spPr>
-        <p:txBody>
-          <a:bodyPr/>
-          <a:lstStyle/>
-          <a:p>
-            <a:pPr>
-              <a:defRPr/>
-            </a:pPr>
-            <a:r>
-              <a:rPr lang="ru-RU">
-                <a:solidFill>
-                  <a:schemeClr val="bg1"/>
-                </a:solidFill>
-              </a:rPr>
-              <a:t>Обзор существующих архитектур</a:t>
-            </a:r>
-            <a:r>
-              <a:rPr lang="en-US">
-                <a:solidFill>
-                  <a:schemeClr val="bg1"/>
-                </a:solidFill>
-              </a:rPr>
-              <a:t>: AMD</a:t>
-            </a:r>
-            <a:br>
-              <a:rPr lang="en-US">
-                <a:solidFill>
-                  <a:schemeClr val="bg1"/>
-                </a:solidFill>
-              </a:rPr>
-            </a:br>
-            <a:r>
-              <a:rPr lang="en-US">
-                <a:solidFill>
-                  <a:schemeClr val="bg1"/>
-                </a:solidFill>
-              </a:rPr>
-              <a:t>Souther Islands</a:t>
-            </a:r>
-            <a:endParaRPr>
-              <a:solidFill>
-                <a:schemeClr val="bg1"/>
-              </a:solidFill>
-            </a:endParaRPr>
-          </a:p>
-        </p:txBody>
-      </p:sp>
-      <p:sp>
-        <p:nvSpPr>
-          <p:cNvPr id="1531733712" name="Объект 2"/>
-          <p:cNvSpPr>
-            <a:spLocks noGrp="1"/>
-          </p:cNvSpPr>
-          <p:nvPr>
-            <p:ph idx="1"/>
-          </p:nvPr>
-        </p:nvSpPr>
-        <p:spPr bwMode="auto">
-          <a:xfrm flipH="0" flipV="0">
-            <a:off x="383823" y="1350173"/>
-            <a:ext cx="3684326" cy="2802726"/>
-          </a:xfrm>
-        </p:spPr>
-        <p:txBody>
-          <a:bodyPr vertOverflow="overflow" horzOverflow="overflow" vert="horz" wrap="square" lIns="91440" tIns="45720" rIns="91440" bIns="45720" numCol="1" spcCol="0" rtlCol="0" fromWordArt="0" anchor="t" anchorCtr="0" forceAA="0" upright="0" compatLnSpc="0">
-            <a:normAutofit fontScale="85000" lnSpcReduction="3000"/>
-          </a:bodyPr>
-          <a:lstStyle/>
-          <a:p>
-            <a:pPr marL="0" indent="0">
-              <a:buFont typeface="Arial"/>
-              <a:buNone/>
-              <a:defRPr/>
-            </a:pPr>
-            <a:r>
-              <a:rPr lang="ru-RU" sz="2000"/>
-              <a:t>Ядро (</a:t>
-            </a:r>
-            <a:r>
-              <a:rPr lang="en-US" sz="2000"/>
-              <a:t>CU</a:t>
-            </a:r>
-            <a:r>
-              <a:rPr lang="ru-RU" sz="2000"/>
-              <a:t>) содержит</a:t>
-            </a:r>
-            <a:r>
-              <a:rPr lang="en-US" sz="2000"/>
-              <a:t>:</a:t>
-            </a:r>
-            <a:endParaRPr sz="2000"/>
-          </a:p>
-          <a:p>
-            <a:pPr>
-              <a:buFont typeface="Arial"/>
-              <a:buChar char="–"/>
-              <a:defRPr/>
-            </a:pPr>
-            <a:r>
-              <a:rPr lang="en-US" sz="2000"/>
-              <a:t>v/sGPR - </a:t>
-            </a:r>
-            <a:r>
-              <a:rPr lang="ru-RU" sz="2000"/>
-              <a:t>векторный/скалярный регистровый файл</a:t>
-            </a:r>
-            <a:r>
-              <a:rPr lang="en-US" sz="2000"/>
-              <a:t>;</a:t>
-            </a:r>
-            <a:endParaRPr sz="2000"/>
-          </a:p>
-          <a:p>
-            <a:pPr>
-              <a:buFont typeface="Arial"/>
-              <a:buChar char="–"/>
-              <a:defRPr/>
-            </a:pPr>
-            <a:r>
-              <a:rPr lang="en-US" sz="2000"/>
-              <a:t>LSU – </a:t>
-            </a:r>
-            <a:r>
-              <a:rPr lang="ru-RU" sz="2000"/>
-              <a:t>блок загузки/сохранения</a:t>
-            </a:r>
-            <a:r>
-              <a:rPr lang="en-US" sz="2000"/>
-              <a:t>;</a:t>
-            </a:r>
-            <a:endParaRPr sz="2000"/>
-          </a:p>
-          <a:p>
-            <a:pPr>
-              <a:buFont typeface="Arial"/>
-              <a:buChar char="–"/>
-              <a:defRPr/>
-            </a:pPr>
-            <a:r>
-              <a:rPr lang="en-US" sz="2000"/>
-              <a:t>vALU – </a:t>
-            </a:r>
-            <a:r>
-              <a:rPr lang="ru-RU" sz="2000"/>
-              <a:t>векторное арифметико-логическое устройство</a:t>
-            </a:r>
-            <a:r>
-              <a:rPr lang="en-US" sz="2000"/>
-              <a:t> (</a:t>
-            </a:r>
-            <a:r>
-              <a:rPr lang="en-US" sz="2000"/>
-              <a:t>INT </a:t>
-            </a:r>
-            <a:r>
-              <a:rPr lang="ru-RU" sz="2000"/>
-              <a:t>и </a:t>
-            </a:r>
-            <a:r>
-              <a:rPr lang="en-US" sz="2000"/>
-              <a:t>FP</a:t>
-            </a:r>
-            <a:r>
-              <a:rPr lang="en-US" sz="2000"/>
-              <a:t>);</a:t>
-            </a:r>
-            <a:endParaRPr sz="2000"/>
-          </a:p>
-          <a:p>
-            <a:pPr>
-              <a:buFont typeface="Arial"/>
-              <a:buChar char="–"/>
-              <a:defRPr/>
-            </a:pPr>
-            <a:r>
-              <a:rPr lang="ru-RU" sz="2000"/>
-              <a:t>Блок получения, декодирования и планирования инструкций</a:t>
-            </a:r>
-            <a:r>
-              <a:rPr lang="ru-RU" sz="2000"/>
-              <a:t>;</a:t>
-            </a:r>
-            <a:endParaRPr sz="2000"/>
-          </a:p>
-          <a:p>
-            <a:pPr>
-              <a:buFont typeface="Arial"/>
-              <a:buChar char="–"/>
-              <a:defRPr/>
-            </a:pPr>
-            <a:r>
-              <a:rPr lang="ru-RU" sz="2000"/>
-              <a:t>Локальная общая память.</a:t>
-            </a:r>
-            <a:endParaRPr sz="2000"/>
-          </a:p>
-        </p:txBody>
-      </p:sp>
-      <p:sp>
-        <p:nvSpPr>
-          <p:cNvPr id="462629056" name="Номер слайда 3"/>
-          <p:cNvSpPr>
-            <a:spLocks noGrp="1"/>
-          </p:cNvSpPr>
-          <p:nvPr>
-            <p:ph type="sldNum" sz="quarter" idx="12"/>
-          </p:nvPr>
-        </p:nvSpPr>
-        <p:spPr bwMode="auto">
-          <a:xfrm>
-            <a:off x="11084554" y="6479493"/>
-            <a:ext cx="1052508" cy="365125"/>
-          </a:xfrm>
-        </p:spPr>
-        <p:txBody>
-          <a:bodyPr/>
-          <a:lstStyle/>
-          <a:p>
-            <a:pPr>
-              <a:defRPr/>
-            </a:pPr>
-            <a:fld id="{1CF8DEEF-AAF2-493E-906B-C0B6A8D6E6A2}" type="slidenum">
-              <a:rPr lang="ru-RU" sz="1800">
-                <a:solidFill>
-                  <a:schemeClr val="tx1"/>
-                </a:solidFill>
-                <a:latin typeface="Trebuchet MS"/>
-              </a:rPr>
-              <a:t>5</a:t>
-            </a:fld>
-            <a:endParaRPr lang="ru-RU" sz="1800">
-              <a:solidFill>
-                <a:schemeClr val="tx1"/>
-              </a:solidFill>
-              <a:latin typeface="Trebuchet MS"/>
-            </a:endParaRPr>
-          </a:p>
-        </p:txBody>
-      </p:sp>
       <p:pic>
         <p:nvPicPr>
-          <p:cNvPr id="1796255708" name="Рисунок 7"/>
+          <p:cNvPr id="1747239641" name=""/>
           <p:cNvPicPr>
             <a:picLocks noChangeAspect="1"/>
           </p:cNvPicPr>
           <p:nvPr/>
         </p:nvPicPr>
         <p:blipFill rotWithShape="1">
-          <a:blip r:embed="rId3"/>
+          <a:blip r:embed="rId3">
+            <a:extLst>
+              <a:ext uri="{96DAC541-7B7A-43D3-8B79-37D633B846F1}">
+                <asvg:svgBlip xmlns:asvg="http://schemas.microsoft.com/office/drawing/2016/SVG/main" r:embed="rId4"/>
+              </a:ext>
+            </a:extLst>
+          </a:blip>
           <a:stretch/>
         </p:blipFill>
         <p:spPr bwMode="auto">
           <a:xfrm flipH="0" flipV="0">
-            <a:off x="4152516" y="2208315"/>
-            <a:ext cx="7854704" cy="4271176"/>
+            <a:off x="2988149" y="1979705"/>
+            <a:ext cx="8946183" cy="3922058"/>
           </a:xfrm>
           <a:prstGeom prst="rect">
             <a:avLst/>
           </a:prstGeom>
-          <a:ln w="19050" cap="sq" cmpd="thickThin">
-            <a:solidFill>
-              <a:srgbClr val="000000"/>
-            </a:solidFill>
-            <a:prstDash val="solid"/>
-            <a:miter lim="800000"/>
-          </a:ln>
-          <a:effectLst>
-            <a:innerShdw blurRad="76200">
-              <a:srgbClr val="000000"/>
-            </a:innerShdw>
-          </a:effectLst>
-        </p:spPr>
-      </p:pic>
-      <p:pic>
-        <p:nvPicPr>
-          <p:cNvPr id="2035705845" name=""/>
-          <p:cNvPicPr>
-            <a:picLocks noChangeAspect="1"/>
-          </p:cNvPicPr>
-          <p:nvPr/>
-        </p:nvPicPr>
-        <p:blipFill rotWithShape="1">
-          <a:blip r:embed="rId4"/>
-          <a:stretch/>
-        </p:blipFill>
-        <p:spPr bwMode="auto">
-          <a:xfrm flipH="0" flipV="0">
-            <a:off x="383823" y="4250145"/>
-            <a:ext cx="3576543" cy="2229347"/>
-          </a:xfrm>
-          <a:prstGeom prst="rect">
-            <a:avLst/>
-          </a:prstGeom>
-          <a:ln w="19050">
-            <a:solidFill>
-              <a:schemeClr val="accent1">
-                <a:lumMod val="50196"/>
-              </a:schemeClr>
-            </a:solidFill>
-            <a:prstDash val="solid"/>
-          </a:ln>
         </p:spPr>
       </p:pic>
     </p:spTree>
@@ -16096,14 +16808,14 @@
       </p:grpSpPr>
       <p:sp>
         <p:nvSpPr>
-          <p:cNvPr id="829499262" name="Прямоугольник 9"/>
+          <p:cNvPr id="406971306" name="Прямоугольник 9"/>
           <p:cNvSpPr/>
           <p:nvPr/>
         </p:nvSpPr>
         <p:spPr bwMode="auto">
           <a:xfrm>
-            <a:off x="-9297" y="-10414"/>
-            <a:ext cx="12210595" cy="1160098"/>
+            <a:off x="-9298" y="-10415"/>
+            <a:ext cx="12210596" cy="1160099"/>
           </a:xfrm>
           <a:prstGeom prst="rect">
             <a:avLst/>
@@ -16146,14 +16858,14 @@
       </p:sp>
       <p:sp>
         <p:nvSpPr>
-          <p:cNvPr id="1303613120" name="Прямоугольник 10"/>
+          <p:cNvPr id="546962322" name="Прямоугольник 10"/>
           <p:cNvSpPr/>
           <p:nvPr/>
         </p:nvSpPr>
         <p:spPr bwMode="auto">
           <a:xfrm>
-            <a:off x="0" y="1181590"/>
-            <a:ext cx="12201297" cy="168582"/>
+            <a:off x="0" y="1181591"/>
+            <a:ext cx="12201298" cy="168583"/>
           </a:xfrm>
           <a:prstGeom prst="rect">
             <a:avLst/>
@@ -16196,7 +16908,7 @@
       </p:sp>
       <p:sp>
         <p:nvSpPr>
-          <p:cNvPr id="1081994364" name="Заголовок 1"/>
+          <p:cNvPr id="840808342" name="Заголовок 1"/>
           <p:cNvSpPr>
             <a:spLocks noGrp="1"/>
           </p:cNvSpPr>
@@ -16206,8 +16918,8 @@
         </p:nvSpPr>
         <p:spPr bwMode="auto">
           <a:xfrm>
-            <a:off x="461982" y="-10414"/>
-            <a:ext cx="10515600" cy="1325562"/>
+            <a:off x="383823" y="-10414"/>
+            <a:ext cx="10515600" cy="1325563"/>
           </a:xfrm>
         </p:spPr>
         <p:txBody>
@@ -16231,10 +16943,10 @@
                   <a:schemeClr val="bg1"/>
                 </a:solidFill>
               </a:rPr>
-              <a:t>: NVIDIA</a:t>
+              <a:t>: AMD</a:t>
             </a:r>
             <a:br>
-              <a:rPr>
+              <a:rPr lang="en-US">
                 <a:solidFill>
                   <a:schemeClr val="bg1"/>
                 </a:solidFill>
@@ -16246,7 +16958,7 @@
                   <a:schemeClr val="bg1"/>
                 </a:solidFill>
               </a:rPr>
-              <a:t>Fermi</a:t>
+              <a:t>Souther Islands</a:t>
             </a:r>
             <a:endParaRPr>
               <a:solidFill>
@@ -16258,7 +16970,7 @@
       </p:sp>
       <p:sp>
         <p:nvSpPr>
-          <p:cNvPr id="1052301060" name="Объект 2"/>
+          <p:cNvPr id="155359854" name="Объект 2"/>
           <p:cNvSpPr>
             <a:spLocks noGrp="1"/>
           </p:cNvSpPr>
@@ -16268,102 +16980,148 @@
         </p:nvSpPr>
         <p:spPr bwMode="auto">
           <a:xfrm flipH="0" flipV="0">
-            <a:off x="285750" y="1444489"/>
-            <a:ext cx="6925649" cy="5035002"/>
+            <a:off x="383823" y="1350173"/>
+            <a:ext cx="3684326" cy="2802726"/>
           </a:xfrm>
         </p:spPr>
         <p:txBody>
           <a:bodyPr vertOverflow="overflow" horzOverflow="overflow" vert="horz" wrap="square" lIns="91440" tIns="45720" rIns="91440" bIns="45720" numCol="1" spcCol="0" rtlCol="0" fromWordArt="0" anchor="t" anchorCtr="0" forceAA="0" upright="0" compatLnSpc="0">
-            <a:normAutofit/>
+            <a:normAutofit fontScale="85000" lnSpcReduction="3000"/>
           </a:bodyPr>
           <a:lstStyle/>
           <a:p>
-            <a:pPr>
-              <a:defRPr/>
-            </a:pPr>
-            <a:r>
-              <a:rPr lang="ru-RU"/>
-              <a:t>Общий регистровый файл большого размера для множества ядер;</a:t>
-            </a:r>
-            <a:endParaRPr lang="ru-RU"/>
-          </a:p>
-          <a:p>
-            <a:pPr>
-              <a:defRPr/>
-            </a:pPr>
-            <a:r>
-              <a:rPr lang="ru-RU"/>
-              <a:t>Каждому ядру в регистровом файле выделена своя область;</a:t>
-            </a:r>
-            <a:endParaRPr lang="ru-RU"/>
-          </a:p>
-          <a:p>
-            <a:pPr>
-              <a:defRPr/>
-            </a:pPr>
-            <a:r>
-              <a:rPr lang="ru-RU"/>
-              <a:t>Каждое ядро </a:t>
-            </a:r>
-            <a:r>
-              <a:rPr lang="en-US"/>
-              <a:t>CUDA </a:t>
-            </a:r>
-            <a:r>
-              <a:rPr lang="ru-RU"/>
-              <a:t>является однопоточным;</a:t>
-            </a:r>
-            <a:endParaRPr lang="ru-RU"/>
-          </a:p>
-          <a:p>
-            <a:pPr>
-              <a:defRPr/>
-            </a:pPr>
-            <a:r>
-              <a:rPr lang="ru-RU"/>
-              <a:t>Каждое ядро содержит вычислительные блоки для </a:t>
-            </a:r>
-            <a:r>
-              <a:rPr lang="en-US"/>
+            <a:pPr marL="0" indent="0">
+              <a:buFont typeface="Arial"/>
+              <a:buNone/>
+              <a:defRPr/>
+            </a:pPr>
+            <a:r>
+              <a:rPr lang="ru-RU" sz="2000"/>
+              <a:t>Ядро (</a:t>
+            </a:r>
+            <a:r>
+              <a:rPr lang="en-US" sz="2000"/>
+              <a:t>CU</a:t>
+            </a:r>
+            <a:r>
+              <a:rPr lang="ru-RU" sz="2000"/>
+              <a:t>) содержит</a:t>
+            </a:r>
+            <a:r>
+              <a:rPr lang="en-US" sz="2000"/>
+              <a:t>:</a:t>
+            </a:r>
+            <a:endParaRPr sz="2000"/>
+          </a:p>
+          <a:p>
+            <a:pPr>
+              <a:buFont typeface="Arial"/>
+              <a:buChar char="–"/>
+              <a:defRPr/>
+            </a:pPr>
+            <a:r>
+              <a:rPr lang="en-US" sz="2000"/>
+              <a:t>v/sGPR - </a:t>
+            </a:r>
+            <a:r>
+              <a:rPr lang="ru-RU" sz="2000"/>
+              <a:t>векторный/скалярный регистровый файл</a:t>
+            </a:r>
+            <a:r>
+              <a:rPr lang="en-US" sz="2000"/>
+              <a:t>;</a:t>
+            </a:r>
+            <a:endParaRPr sz="2000"/>
+          </a:p>
+          <a:p>
+            <a:pPr>
+              <a:buFont typeface="Arial"/>
+              <a:buChar char="–"/>
+              <a:defRPr/>
+            </a:pPr>
+            <a:r>
+              <a:rPr lang="en-US" sz="2000"/>
+              <a:t>LSU – </a:t>
+            </a:r>
+            <a:r>
+              <a:rPr lang="ru-RU" sz="2000"/>
+              <a:t>блок загузки/сохранения</a:t>
+            </a:r>
+            <a:r>
+              <a:rPr lang="en-US" sz="2000"/>
+              <a:t>;</a:t>
+            </a:r>
+            <a:endParaRPr sz="2000"/>
+          </a:p>
+          <a:p>
+            <a:pPr>
+              <a:buFont typeface="Arial"/>
+              <a:buChar char="–"/>
+              <a:defRPr/>
+            </a:pPr>
+            <a:r>
+              <a:rPr lang="en-US" sz="2000"/>
+              <a:t>vALU – </a:t>
+            </a:r>
+            <a:r>
+              <a:rPr lang="ru-RU" sz="2000"/>
+              <a:t>векторное арифметико-логическое устройство</a:t>
+            </a:r>
+            <a:r>
+              <a:rPr lang="en-US" sz="2000"/>
+              <a:t> (</a:t>
+            </a:r>
+            <a:r>
+              <a:rPr lang="en-US" sz="2000"/>
               <a:t>INT </a:t>
             </a:r>
             <a:r>
-              <a:rPr lang="ru-RU"/>
+              <a:rPr lang="ru-RU" sz="2000"/>
               <a:t>и </a:t>
             </a:r>
             <a:r>
-              <a:rPr lang="en-US"/>
+              <a:rPr lang="en-US" sz="2000"/>
               <a:t>FP</a:t>
             </a:r>
             <a:r>
-              <a:rPr lang="ru-RU"/>
+              <a:rPr lang="en-US" sz="2000"/>
+              <a:t>);</a:t>
+            </a:r>
+            <a:endParaRPr sz="2000"/>
+          </a:p>
+          <a:p>
+            <a:pPr>
+              <a:buFont typeface="Arial"/>
+              <a:buChar char="–"/>
+              <a:defRPr/>
+            </a:pPr>
+            <a:r>
+              <a:rPr lang="ru-RU" sz="2000"/>
+              <a:t>Блок получения, декодирования и планирования инструкций</a:t>
+            </a:r>
+            <a:r>
+              <a:rPr lang="ru-RU" sz="2000"/>
               <a:t>;</a:t>
             </a:r>
-            <a:endParaRPr lang="en-US"/>
-          </a:p>
-          <a:p>
-            <a:pPr>
-              <a:defRPr/>
-            </a:pPr>
-            <a:r>
-              <a:rPr lang="en-US"/>
-              <a:t>SFU – </a:t>
-            </a:r>
-            <a:r>
-              <a:rPr lang="ru-RU"/>
-              <a:t>специализированный ускоритель, в частности для тригонометрических функций</a:t>
-            </a:r>
-            <a:r>
-              <a:rPr lang="ru-RU"/>
-              <a:t>.</a:t>
-            </a:r>
-            <a:endParaRPr/>
-          </a:p>
-        </p:txBody>
-      </p:sp>
-      <p:sp>
-        <p:nvSpPr>
-          <p:cNvPr id="1267097560" name="Номер слайда 3"/>
+            <a:endParaRPr sz="2000"/>
+          </a:p>
+          <a:p>
+            <a:pPr>
+              <a:buFont typeface="Arial"/>
+              <a:buChar char="–"/>
+              <a:defRPr/>
+            </a:pPr>
+            <a:r>
+              <a:rPr lang="ru-RU" sz="2000"/>
+              <a:t>Локальная общая память.</a:t>
+            </a:r>
+            <a:endParaRPr sz="2000"/>
+          </a:p>
+        </p:txBody>
+      </p:sp>
+      <p:sp>
+        <p:nvSpPr>
+          <p:cNvPr id="768875596" name="Номер слайда 3"/>
           <p:cNvSpPr>
             <a:spLocks noGrp="1"/>
           </p:cNvSpPr>
@@ -16373,8 +17131,8 @@
         </p:nvSpPr>
         <p:spPr bwMode="auto">
           <a:xfrm>
-            <a:off x="11084553" y="6479492"/>
-            <a:ext cx="1052507" cy="365124"/>
+            <a:off x="11084554" y="6479493"/>
+            <a:ext cx="1052508" cy="365125"/>
           </a:xfrm>
         </p:spPr>
         <p:txBody>
@@ -16384,7 +17142,7 @@
             <a:pPr>
               <a:defRPr/>
             </a:pPr>
-            <a:fld id="{4E8A3A8F-0B9D-0C84-2979-0C48658383B8}" type="slidenum">
+            <a:fld id="{1CF8DEEF-AAF2-493E-906B-C0B6A8D6E6A2}" type="slidenum">
               <a:rPr lang="ru-RU" sz="1800">
                 <a:solidFill>
                   <a:schemeClr val="tx1"/>
@@ -16404,7 +17162,7 @@
       </p:sp>
       <p:pic>
         <p:nvPicPr>
-          <p:cNvPr id="1953303344" name="Рисунок 5"/>
+          <p:cNvPr id="1217119807" name="Рисунок 7"/>
           <p:cNvPicPr>
             <a:picLocks noChangeAspect="1"/>
           </p:cNvPicPr>
@@ -16412,13 +17170,12 @@
         </p:nvPicPr>
         <p:blipFill rotWithShape="1">
           <a:blip r:embed="rId3"/>
-          <a:srcRect l="0" t="0" r="33409" b="0"/>
           <a:stretch/>
         </p:blipFill>
         <p:spPr bwMode="auto">
           <a:xfrm flipH="0" flipV="0">
-            <a:off x="7284603" y="1568869"/>
-            <a:ext cx="4326204" cy="4910622"/>
+            <a:off x="4152516" y="2208315"/>
+            <a:ext cx="7854704" cy="4271176"/>
           </a:xfrm>
           <a:prstGeom prst="rect">
             <a:avLst/>
@@ -16435,6 +17192,36 @@
               <a:srgbClr val="000000"/>
             </a:innerShdw>
           </a:effectLst>
+        </p:spPr>
+      </p:pic>
+      <p:pic>
+        <p:nvPicPr>
+          <p:cNvPr id="1515494110" name=""/>
+          <p:cNvPicPr>
+            <a:picLocks noChangeAspect="1"/>
+          </p:cNvPicPr>
+          <p:nvPr/>
+        </p:nvPicPr>
+        <p:blipFill rotWithShape="1">
+          <a:blip r:embed="rId4"/>
+          <a:stretch/>
+        </p:blipFill>
+        <p:spPr bwMode="auto">
+          <a:xfrm flipH="0" flipV="0">
+            <a:off x="383823" y="4250145"/>
+            <a:ext cx="3576543" cy="2229347"/>
+          </a:xfrm>
+          <a:prstGeom prst="rect">
+            <a:avLst/>
+          </a:prstGeom>
+          <a:ln w="19050">
+            <a:solidFill>
+              <a:schemeClr val="accent1">
+                <a:lumMod val="50196"/>
+              </a:schemeClr>
+            </a:solidFill>
+            <a:prstDash val="solid"/>
+          </a:ln>
         </p:spPr>
       </p:pic>
     </p:spTree>
@@ -16505,191 +17292,14 @@
       </p:grpSpPr>
       <p:sp>
         <p:nvSpPr>
-          <p:cNvPr id="277276575" name="Объект 2"/>
-          <p:cNvSpPr>
-            <a:spLocks noGrp="1"/>
-          </p:cNvSpPr>
-          <p:nvPr>
-            <p:ph idx="1"/>
-          </p:nvPr>
-        </p:nvSpPr>
-        <p:spPr bwMode="auto">
-          <a:xfrm flipH="0" flipV="0">
-            <a:off x="-9297" y="1350173"/>
-            <a:ext cx="3310846" cy="3599316"/>
-          </a:xfrm>
-        </p:spPr>
-        <p:txBody>
-          <a:bodyPr vertOverflow="overflow" horzOverflow="overflow" vert="horz" wrap="square" lIns="91440" tIns="45720" rIns="91440" bIns="45720" numCol="1" spcCol="0" rtlCol="0" fromWordArt="0" anchor="t" anchorCtr="0" forceAA="0" upright="0" compatLnSpc="0">
-            <a:normAutofit fontScale="90000" lnSpcReduction="2000"/>
-          </a:bodyPr>
-          <a:lstStyle/>
-          <a:p>
-            <a:pPr>
-              <a:defRPr/>
-            </a:pPr>
-            <a:r>
-              <a:rPr lang="ru-RU"/>
-              <a:t>Набор инструкций взят с дампа промежуточного представления</a:t>
-            </a:r>
-            <a:r>
-              <a:rPr lang="en-US"/>
-              <a:t> </a:t>
-            </a:r>
-            <a:r>
-              <a:rPr lang="ru-RU"/>
-              <a:t>шейдера </a:t>
-            </a:r>
-            <a:r>
-              <a:rPr lang="ru-RU"/>
-              <a:t>из </a:t>
-            </a:r>
-            <a:r>
-              <a:rPr lang="en-US"/>
-              <a:t>VKCUBE</a:t>
-            </a:r>
-            <a:r>
-              <a:rPr/>
-              <a:t>;</a:t>
-            </a:r>
-            <a:endParaRPr/>
-          </a:p>
-          <a:p>
-            <a:pPr>
-              <a:defRPr/>
-            </a:pPr>
-            <a:r>
-              <a:rPr lang="ru-RU"/>
-              <a:t>В качестве основы взята архитектура набора инструкций </a:t>
-            </a:r>
-            <a:r>
-              <a:rPr lang="en-US"/>
-              <a:t>RISC-V</a:t>
-            </a:r>
-            <a:r>
-              <a:rPr lang="ru-RU"/>
-              <a:t>.</a:t>
-            </a:r>
-            <a:endParaRPr lang="ru-RU"/>
-          </a:p>
-        </p:txBody>
-      </p:sp>
-      <p:sp>
-        <p:nvSpPr>
-          <p:cNvPr id="572819494" name="Номер слайда 3"/>
-          <p:cNvSpPr>
-            <a:spLocks noGrp="1"/>
-          </p:cNvSpPr>
-          <p:nvPr>
-            <p:ph type="sldNum" sz="quarter" idx="12"/>
-          </p:nvPr>
-        </p:nvSpPr>
-        <p:spPr bwMode="auto">
-          <a:xfrm>
-            <a:off x="11084554" y="6465512"/>
-            <a:ext cx="1052508" cy="365125"/>
-          </a:xfrm>
-        </p:spPr>
-        <p:txBody>
-          <a:bodyPr/>
-          <a:lstStyle/>
-          <a:p>
-            <a:pPr>
-              <a:defRPr/>
-            </a:pPr>
-            <a:fld id="{1CF8DEEF-AAF2-493E-906B-C0B6A8D6E6A2}" type="slidenum">
-              <a:rPr lang="ru-RU" sz="1800">
-                <a:solidFill>
-                  <a:schemeClr val="tx1"/>
-                </a:solidFill>
-                <a:latin typeface="Trebuchet MS"/>
-              </a:rPr>
-              <a:t>6</a:t>
-            </a:fld>
-            <a:endParaRPr lang="ru-RU" sz="1800">
-              <a:solidFill>
-                <a:schemeClr val="tx1"/>
-              </a:solidFill>
-              <a:latin typeface="Trebuchet MS"/>
-            </a:endParaRPr>
-          </a:p>
-        </p:txBody>
-      </p:sp>
-      <p:pic>
-        <p:nvPicPr>
-          <p:cNvPr id="269082523" name="Рисунок 5"/>
-          <p:cNvPicPr>
-            <a:picLocks noChangeAspect="1"/>
-          </p:cNvPicPr>
-          <p:nvPr/>
-        </p:nvPicPr>
-        <p:blipFill rotWithShape="1">
-          <a:blip r:embed="rId3"/>
-          <a:stretch/>
-        </p:blipFill>
-        <p:spPr bwMode="auto">
-          <a:xfrm flipH="0" flipV="0">
-            <a:off x="1595387" y="4634649"/>
-            <a:ext cx="4981511" cy="2094567"/>
-          </a:xfrm>
-          <a:prstGeom prst="rect">
-            <a:avLst/>
-          </a:prstGeom>
-          <a:ln w="19050">
-            <a:solidFill>
-              <a:schemeClr val="accent1">
-                <a:lumMod val="50196"/>
-              </a:schemeClr>
-            </a:solidFill>
-            <a:prstDash val="solid"/>
-          </a:ln>
-        </p:spPr>
-      </p:pic>
-      <p:pic>
-        <p:nvPicPr>
-          <p:cNvPr id="130952141" name="Рисунок 1421075015"/>
-          <p:cNvPicPr>
-            <a:picLocks noChangeAspect="1"/>
-          </p:cNvPicPr>
-          <p:nvPr/>
-        </p:nvPicPr>
-        <p:blipFill rotWithShape="1">
-          <a:blip r:embed="rId4">
-            <a:extLst>
-              <a:ext uri="{96DAC541-7B7A-43D3-8B79-37D633B846F1}">
-                <asvg:svgBlip xmlns:asvg="http://schemas.microsoft.com/office/drawing/2016/SVG/main" r:embed="rId5"/>
-              </a:ext>
-            </a:extLst>
-          </a:blip>
-        </p:blipFill>
-        <p:spPr bwMode="auto">
-          <a:xfrm>
-            <a:off x="9048129" y="1683548"/>
-            <a:ext cx="2915269" cy="2101525"/>
-          </a:xfrm>
-          <a:prstGeom prst="rect">
-            <a:avLst/>
-          </a:prstGeom>
-          <a:ln w="19050">
-            <a:solidFill>
-              <a:schemeClr val="accent1">
-                <a:lumMod val="50196"/>
-              </a:schemeClr>
-            </a:solidFill>
-            <a:prstDash val="solid"/>
-          </a:ln>
-        </p:spPr>
-      </p:pic>
-      <p:sp>
-        <p:nvSpPr>
-          <p:cNvPr id="1997876584" name="Прямоугольник 10"/>
+          <p:cNvPr id="1795250823" name="Прямоугольник 9"/>
           <p:cNvSpPr/>
           <p:nvPr/>
         </p:nvSpPr>
         <p:spPr bwMode="auto">
           <a:xfrm>
-            <a:off x="-9298" y="-10415"/>
-            <a:ext cx="12210596" cy="1160099"/>
+            <a:off x="-9297" y="-10414"/>
+            <a:ext cx="12210595" cy="1160098"/>
           </a:xfrm>
           <a:prstGeom prst="rect">
             <a:avLst/>
@@ -16732,14 +17342,14 @@
       </p:sp>
       <p:sp>
         <p:nvSpPr>
-          <p:cNvPr id="177229540" name="Прямоугольник 11"/>
+          <p:cNvPr id="1947151901" name="Прямоугольник 10"/>
           <p:cNvSpPr/>
           <p:nvPr/>
         </p:nvSpPr>
         <p:spPr bwMode="auto">
           <a:xfrm>
-            <a:off x="0" y="1181591"/>
-            <a:ext cx="12201298" cy="168583"/>
+            <a:off x="0" y="1181590"/>
+            <a:ext cx="12201297" cy="168582"/>
           </a:xfrm>
           <a:prstGeom prst="rect">
             <a:avLst/>
@@ -16782,7 +17392,7 @@
       </p:sp>
       <p:sp>
         <p:nvSpPr>
-          <p:cNvPr id="713862053" name="Заголовок 1"/>
+          <p:cNvPr id="1800754129" name="Заголовок 1"/>
           <p:cNvSpPr>
             <a:spLocks noGrp="1"/>
           </p:cNvSpPr>
@@ -16792,14 +17402,12 @@
         </p:nvSpPr>
         <p:spPr bwMode="auto">
           <a:xfrm>
-            <a:off x="387637" y="-116036"/>
-            <a:ext cx="11223171" cy="1325563"/>
-          </a:xfrm>
-        </p:spPr>
-        <p:txBody>
-          <a:bodyPr vertOverflow="overflow" horzOverflow="overflow" vert="horz" wrap="square" lIns="91440" tIns="45720" rIns="91440" bIns="45720" numCol="1" spcCol="0" rtlCol="0" fromWordArt="0" anchor="ctr" anchorCtr="0" forceAA="0" upright="0" compatLnSpc="0">
-            <a:normAutofit fontScale="90000" lnSpcReduction="2000"/>
-          </a:bodyPr>
+            <a:off x="461982" y="-10414"/>
+            <a:ext cx="10515600" cy="1325562"/>
+          </a:xfrm>
+        </p:spPr>
+        <p:txBody>
+          <a:bodyPr/>
           <a:lstStyle/>
           <a:p>
             <a:pPr>
@@ -16811,7 +17419,7 @@
                   <a:schemeClr val="bg1"/>
                 </a:solidFill>
               </a:rPr>
-              <a:t>Разработка модели графического ядра: разработка архитектуры набора инструкций </a:t>
+              <a:t>Обзор существующих архитектур</a:t>
             </a:r>
             <a:r>
               <a:rPr lang="en-US">
@@ -16819,9 +17427,24 @@
                   <a:schemeClr val="bg1"/>
                 </a:solidFill>
               </a:rPr>
-              <a:t>(ISA)</a:t>
-            </a:r>
-            <a:endParaRPr lang="ru-RU">
+              <a:t>: NVIDIA</a:t>
+            </a:r>
+            <a:br>
+              <a:rPr>
+                <a:solidFill>
+                  <a:schemeClr val="bg1"/>
+                </a:solidFill>
+              </a:rPr>
+            </a:br>
+            <a:r>
+              <a:rPr lang="en-US">
+                <a:solidFill>
+                  <a:schemeClr val="bg1"/>
+                </a:solidFill>
+              </a:rPr>
+              <a:t>Fermi</a:t>
+            </a:r>
+            <a:endParaRPr>
               <a:solidFill>
                 <a:schemeClr val="bg1"/>
               </a:solidFill>
@@ -16829,62 +17452,185 @@
           </a:p>
         </p:txBody>
       </p:sp>
+      <p:sp>
+        <p:nvSpPr>
+          <p:cNvPr id="1566269292" name="Объект 2"/>
+          <p:cNvSpPr>
+            <a:spLocks noGrp="1"/>
+          </p:cNvSpPr>
+          <p:nvPr>
+            <p:ph idx="1"/>
+          </p:nvPr>
+        </p:nvSpPr>
+        <p:spPr bwMode="auto">
+          <a:xfrm flipH="0" flipV="0">
+            <a:off x="285750" y="1444489"/>
+            <a:ext cx="6925649" cy="5035002"/>
+          </a:xfrm>
+        </p:spPr>
+        <p:txBody>
+          <a:bodyPr vertOverflow="overflow" horzOverflow="overflow" vert="horz" wrap="square" lIns="91440" tIns="45720" rIns="91440" bIns="45720" numCol="1" spcCol="0" rtlCol="0" fromWordArt="0" anchor="t" anchorCtr="0" forceAA="0" upright="0" compatLnSpc="0">
+            <a:normAutofit/>
+          </a:bodyPr>
+          <a:lstStyle/>
+          <a:p>
+            <a:pPr>
+              <a:defRPr/>
+            </a:pPr>
+            <a:r>
+              <a:rPr lang="ru-RU"/>
+              <a:t>Общий регистровый файл большого размера для множества ядер;</a:t>
+            </a:r>
+            <a:endParaRPr lang="ru-RU"/>
+          </a:p>
+          <a:p>
+            <a:pPr>
+              <a:defRPr/>
+            </a:pPr>
+            <a:r>
+              <a:rPr lang="ru-RU"/>
+              <a:t>Каждому ядру в регистровом файле выделена своя область;</a:t>
+            </a:r>
+            <a:endParaRPr lang="ru-RU"/>
+          </a:p>
+          <a:p>
+            <a:pPr>
+              <a:defRPr/>
+            </a:pPr>
+            <a:r>
+              <a:rPr lang="ru-RU"/>
+              <a:t>Каждое ядро </a:t>
+            </a:r>
+            <a:r>
+              <a:rPr lang="en-US"/>
+              <a:t>CUDA </a:t>
+            </a:r>
+            <a:r>
+              <a:rPr lang="ru-RU"/>
+              <a:t>является однопоточным;</a:t>
+            </a:r>
+            <a:endParaRPr lang="ru-RU"/>
+          </a:p>
+          <a:p>
+            <a:pPr>
+              <a:defRPr/>
+            </a:pPr>
+            <a:r>
+              <a:rPr lang="ru-RU"/>
+              <a:t>Каждое ядро содержит вычислительные блоки для </a:t>
+            </a:r>
+            <a:r>
+              <a:rPr lang="en-US"/>
+              <a:t>INT </a:t>
+            </a:r>
+            <a:r>
+              <a:rPr lang="ru-RU"/>
+              <a:t>и </a:t>
+            </a:r>
+            <a:r>
+              <a:rPr lang="en-US"/>
+              <a:t>FP</a:t>
+            </a:r>
+            <a:r>
+              <a:rPr lang="ru-RU"/>
+              <a:t>;</a:t>
+            </a:r>
+            <a:endParaRPr lang="en-US"/>
+          </a:p>
+          <a:p>
+            <a:pPr>
+              <a:defRPr/>
+            </a:pPr>
+            <a:r>
+              <a:rPr lang="en-US"/>
+              <a:t>SFU – </a:t>
+            </a:r>
+            <a:r>
+              <a:rPr lang="ru-RU"/>
+              <a:t>специализированный ускоритель, в частности для тригонометрических функций</a:t>
+            </a:r>
+            <a:r>
+              <a:rPr lang="ru-RU"/>
+              <a:t>.</a:t>
+            </a:r>
+            <a:endParaRPr/>
+          </a:p>
+        </p:txBody>
+      </p:sp>
+      <p:sp>
+        <p:nvSpPr>
+          <p:cNvPr id="473318622" name="Номер слайда 3"/>
+          <p:cNvSpPr>
+            <a:spLocks noGrp="1"/>
+          </p:cNvSpPr>
+          <p:nvPr>
+            <p:ph type="sldNum" sz="quarter" idx="12"/>
+          </p:nvPr>
+        </p:nvSpPr>
+        <p:spPr bwMode="auto">
+          <a:xfrm>
+            <a:off x="11084553" y="6479492"/>
+            <a:ext cx="1052507" cy="365124"/>
+          </a:xfrm>
+        </p:spPr>
+        <p:txBody>
+          <a:bodyPr/>
+          <a:lstStyle/>
+          <a:p>
+            <a:pPr>
+              <a:defRPr/>
+            </a:pPr>
+            <a:fld id="{4E8A3A8F-0B9D-0C84-2979-0C48658383B8}" type="slidenum">
+              <a:rPr lang="ru-RU" sz="1800">
+                <a:solidFill>
+                  <a:schemeClr val="tx1"/>
+                </a:solidFill>
+                <a:latin typeface="Trebuchet MS"/>
+              </a:rPr>
+              <a:t>5</a:t>
+            </a:fld>
+            <a:endParaRPr lang="ru-RU" sz="1800">
+              <a:solidFill>
+                <a:schemeClr val="tx1"/>
+              </a:solidFill>
+              <a:latin typeface="Trebuchet MS"/>
+            </a:endParaRPr>
+          </a:p>
+        </p:txBody>
+      </p:sp>
       <p:pic>
         <p:nvPicPr>
-          <p:cNvPr id="1125678989" name="Рисунок 2"/>
+          <p:cNvPr id="1266386167" name="Рисунок 5"/>
           <p:cNvPicPr>
             <a:picLocks noChangeAspect="1"/>
           </p:cNvPicPr>
           <p:nvPr/>
         </p:nvPicPr>
         <p:blipFill rotWithShape="1">
-          <a:blip r:embed="rId6">
-            <a:extLst>
-              <a:ext uri="{96DAC541-7B7A-43D3-8B79-37D633B846F1}">
-                <asvg:svgBlip xmlns:asvg="http://schemas.microsoft.com/office/drawing/2016/SVG/main" r:embed="rId7"/>
-              </a:ext>
-            </a:extLst>
-          </a:blip>
+          <a:blip r:embed="rId3"/>
+          <a:srcRect l="0" t="0" r="33408" b="0"/>
           <a:stretch/>
         </p:blipFill>
         <p:spPr bwMode="auto">
           <a:xfrm flipH="0" flipV="0">
-            <a:off x="7184853" y="4882815"/>
-            <a:ext cx="4489170" cy="1464886"/>
+            <a:off x="7284603" y="1568869"/>
+            <a:ext cx="4326204" cy="4910622"/>
           </a:xfrm>
           <a:prstGeom prst="rect">
             <a:avLst/>
           </a:prstGeom>
-        </p:spPr>
-      </p:pic>
-      <p:pic>
-        <p:nvPicPr>
-          <p:cNvPr id="1032567309" name=""/>
-          <p:cNvPicPr>
-            <a:picLocks noChangeAspect="1"/>
-          </p:cNvPicPr>
-          <p:nvPr/>
-        </p:nvPicPr>
-        <p:blipFill rotWithShape="1">
-          <a:blip r:embed="rId8"/>
-          <a:stretch/>
-        </p:blipFill>
-        <p:spPr bwMode="auto">
-          <a:xfrm flipH="0" flipV="0">
-            <a:off x="3234668" y="1350173"/>
-            <a:ext cx="5529106" cy="3009811"/>
-          </a:xfrm>
-          <a:prstGeom prst="rect">
-            <a:avLst/>
-          </a:prstGeom>
-          <a:ln w="19050">
+          <a:ln w="19050" cap="sq" cmpd="thickThin">
             <a:solidFill>
-              <a:schemeClr val="accent1">
-                <a:lumMod val="50196"/>
-              </a:schemeClr>
+              <a:srgbClr val="000000"/>
             </a:solidFill>
             <a:prstDash val="solid"/>
+            <a:miter lim="800000"/>
           </a:ln>
+          <a:effectLst>
+            <a:innerShdw blurRad="76200">
+              <a:srgbClr val="000000"/>
+            </a:innerShdw>
+          </a:effectLst>
         </p:spPr>
       </p:pic>
     </p:spTree>
@@ -16955,7 +17701,7 @@
       </p:grpSpPr>
       <p:sp>
         <p:nvSpPr>
-          <p:cNvPr id="784908699" name="Объект 2"/>
+          <p:cNvPr id="1971574250" name="Объект 2"/>
           <p:cNvSpPr>
             <a:spLocks noGrp="1"/>
           </p:cNvSpPr>
@@ -16965,8 +17711,8 @@
         </p:nvSpPr>
         <p:spPr bwMode="auto">
           <a:xfrm flipH="0" flipV="0">
-            <a:off x="153374" y="1523999"/>
-            <a:ext cx="5067299" cy="4762499"/>
+            <a:off x="-9297" y="1350173"/>
+            <a:ext cx="3310846" cy="3599316"/>
           </a:xfrm>
         </p:spPr>
         <p:txBody>
@@ -16979,12 +17725,28 @@
               <a:defRPr/>
             </a:pPr>
             <a:r>
+              <a:rPr lang="ru-RU"/>
+              <a:t>Набор инструкций взят с дампа промежуточного представления</a:t>
+            </a:r>
+            <a:r>
               <a:rPr lang="en-US"/>
-              <a:t>Fetcher</a:t>
-            </a:r>
-            <a:r>
-              <a:rPr lang="ru-RU"/>
-              <a:t> - захватывает инструкцию из памяти;</a:t>
+              <a:t> </a:t>
+            </a:r>
+            <a:r>
+              <a:rPr lang="ru-RU"/>
+              <a:t>шейдера </a:t>
+            </a:r>
+            <a:r>
+              <a:rPr lang="ru-RU"/>
+              <a:t>из </a:t>
+            </a:r>
+            <a:r>
+              <a:rPr lang="en-US"/>
+              <a:t>VKCUBE</a:t>
+            </a:r>
+            <a:r>
+              <a:rPr/>
+              <a:t>;</a:t>
             </a:r>
             <a:endParaRPr/>
           </a:p>
@@ -16993,108 +17755,24 @@
               <a:defRPr/>
             </a:pPr>
             <a:r>
+              <a:rPr lang="ru-RU"/>
+              <a:t>В качестве основы взята архитектура набора инструкций </a:t>
+            </a:r>
+            <a:r>
               <a:rPr lang="en-US"/>
-              <a:t>Decoder</a:t>
-            </a:r>
-            <a:r>
-              <a:rPr lang="ru-RU"/>
-              <a:t> - декодирует инструкцию, управляет </a:t>
-            </a:r>
-            <a:r>
-              <a:rPr lang="en-US"/>
-              <a:t>LSU</a:t>
-            </a:r>
-            <a:r>
-              <a:rPr lang="ru-RU"/>
-              <a:t> и </a:t>
-            </a:r>
-            <a:r>
-              <a:rPr lang="en-US"/>
-              <a:t>TU</a:t>
-            </a:r>
-            <a:r>
-              <a:rPr lang="ru-RU"/>
-              <a:t>;</a:t>
-            </a:r>
-            <a:endParaRPr/>
-          </a:p>
-          <a:p>
-            <a:pPr>
-              <a:defRPr/>
-            </a:pPr>
-            <a:r>
-              <a:rPr lang="en-US"/>
-              <a:t>TU</a:t>
-            </a:r>
-            <a:r>
-              <a:rPr lang="ru-RU"/>
-              <a:t> </a:t>
-            </a:r>
-            <a:r>
-              <a:rPr lang="ru-RU"/>
-              <a:t>– вычислительный блок;</a:t>
-            </a:r>
-            <a:endParaRPr/>
-          </a:p>
-          <a:p>
-            <a:pPr>
-              <a:defRPr/>
-            </a:pPr>
-            <a:r>
-              <a:rPr lang="en-US"/>
-              <a:t>LSU -  </a:t>
-            </a:r>
-            <a:r>
-              <a:rPr lang="ru-RU"/>
-              <a:t>блок загрузки/сохранения данных</a:t>
-            </a:r>
-            <a:r>
-              <a:rPr lang="ru-RU"/>
-              <a:t>;</a:t>
-            </a:r>
-            <a:endParaRPr/>
-          </a:p>
-          <a:p>
-            <a:pPr>
-              <a:defRPr/>
-            </a:pPr>
-            <a:r>
-              <a:rPr lang="en-US"/>
-              <a:t>CSR </a:t>
-            </a:r>
-            <a:r>
-              <a:rPr lang="ru-RU"/>
-              <a:t>- контрольно-статусные регистры. </a:t>
-            </a:r>
-            <a:r>
-              <a:rPr lang="ru-RU"/>
-              <a:t>Содержат статусные и управляющие сигналы связанные с самим графическим ядром;</a:t>
+              <a:t>RISC-V</a:t>
+            </a:r>
+            <a:r>
+              <a:rPr lang="ru-RU"/>
+              <a:t>.</a:t>
             </a:r>
             <a:endParaRPr lang="ru-RU"/>
           </a:p>
-          <a:p>
-            <a:pPr>
-              <a:defRPr/>
-            </a:pPr>
-            <a:r>
-              <a:rPr lang="en-US"/>
-              <a:t>PC – </a:t>
-            </a:r>
-            <a:r>
-              <a:rPr lang="ru-RU"/>
-              <a:t>счётчик инструкций</a:t>
-            </a:r>
-            <a:r>
-              <a:rPr lang="ru-RU"/>
-              <a:t>.</a:t>
-            </a:r>
-            <a:endParaRPr lang="en-US"/>
-          </a:p>
-        </p:txBody>
-      </p:sp>
-      <p:sp>
-        <p:nvSpPr>
-          <p:cNvPr id="1126670140" name="Номер слайда 3"/>
+        </p:txBody>
+      </p:sp>
+      <p:sp>
+        <p:nvSpPr>
+          <p:cNvPr id="1286389898" name="Номер слайда 3"/>
           <p:cNvSpPr>
             <a:spLocks noGrp="1"/>
           </p:cNvSpPr>
@@ -17104,7 +17782,7 @@
         </p:nvSpPr>
         <p:spPr bwMode="auto">
           <a:xfrm>
-            <a:off x="11084554" y="6478335"/>
+            <a:off x="11084554" y="6465512"/>
             <a:ext cx="1052508" cy="365125"/>
           </a:xfrm>
         </p:spPr>
@@ -17115,14 +17793,14 @@
             <a:pPr>
               <a:defRPr/>
             </a:pPr>
-            <a:fld id="{ED02CFB1-EEA1-CD3C-8AAA-9D8034B9CDE8}" type="slidenum">
+            <a:fld id="{1CF8DEEF-AAF2-493E-906B-C0B6A8D6E6A2}" type="slidenum">
               <a:rPr lang="ru-RU" sz="1800">
                 <a:solidFill>
                   <a:schemeClr val="tx1"/>
                 </a:solidFill>
                 <a:latin typeface="Trebuchet MS"/>
               </a:rPr>
-              <a:t>7</a:t>
+              <a:t>6</a:t>
             </a:fld>
             <a:endParaRPr lang="ru-RU" sz="1800">
               <a:solidFill>
@@ -17133,15 +17811,80 @@
           </a:p>
         </p:txBody>
       </p:sp>
-      <p:sp>
-        <p:nvSpPr>
-          <p:cNvPr id="1814906234" name="Прямоугольник 5"/>
+      <p:pic>
+        <p:nvPicPr>
+          <p:cNvPr id="405019113" name="Рисунок 5"/>
+          <p:cNvPicPr>
+            <a:picLocks noChangeAspect="1"/>
+          </p:cNvPicPr>
+          <p:nvPr/>
+        </p:nvPicPr>
+        <p:blipFill rotWithShape="1">
+          <a:blip r:embed="rId3"/>
+          <a:stretch/>
+        </p:blipFill>
+        <p:spPr bwMode="auto">
+          <a:xfrm flipH="0" flipV="0">
+            <a:off x="2856290" y="4580893"/>
+            <a:ext cx="4981510" cy="2094567"/>
+          </a:xfrm>
+          <a:prstGeom prst="rect">
+            <a:avLst/>
+          </a:prstGeom>
+          <a:ln w="19050">
+            <a:solidFill>
+              <a:schemeClr val="accent1">
+                <a:lumMod val="50196"/>
+              </a:schemeClr>
+            </a:solidFill>
+            <a:prstDash val="solid"/>
+          </a:ln>
+        </p:spPr>
+      </p:pic>
+      <p:pic>
+        <p:nvPicPr>
+          <p:cNvPr id="1223278306" name="Рисунок 1421075015"/>
+          <p:cNvPicPr>
+            <a:picLocks noChangeAspect="1"/>
+          </p:cNvPicPr>
+          <p:nvPr/>
+        </p:nvPicPr>
+        <p:blipFill rotWithShape="1">
+          <a:blip r:embed="rId4">
+            <a:extLst>
+              <a:ext uri="{96DAC541-7B7A-43D3-8B79-37D633B846F1}">
+                <asvg:svgBlip xmlns:asvg="http://schemas.microsoft.com/office/drawing/2016/SVG/main" r:embed="rId5"/>
+              </a:ext>
+            </a:extLst>
+          </a:blip>
+        </p:blipFill>
+        <p:spPr bwMode="auto">
+          <a:xfrm flipH="0" flipV="0">
+            <a:off x="9204466" y="1593351"/>
+            <a:ext cx="2824299" cy="2035947"/>
+          </a:xfrm>
+          <a:prstGeom prst="rect">
+            <a:avLst/>
+          </a:prstGeom>
+          <a:ln w="19050">
+            <a:solidFill>
+              <a:schemeClr val="accent1">
+                <a:lumMod val="50196"/>
+              </a:schemeClr>
+            </a:solidFill>
+            <a:prstDash val="solid"/>
+          </a:ln>
+        </p:spPr>
+      </p:pic>
+      <p:sp>
+        <p:nvSpPr>
+          <p:cNvPr id="579381362" name="Прямоугольник 10"/>
           <p:cNvSpPr/>
           <p:nvPr/>
         </p:nvSpPr>
         <p:spPr bwMode="auto">
           <a:xfrm>
-            <a:off x="0" y="0"/>
+            <a:off x="-9298" y="-10415"/>
             <a:ext cx="12210596" cy="1160099"/>
           </a:xfrm>
           <a:prstGeom prst="rect">
@@ -17185,13 +17928,13 @@
       </p:sp>
       <p:sp>
         <p:nvSpPr>
-          <p:cNvPr id="1662558537" name="Прямоугольник 6"/>
+          <p:cNvPr id="842502536" name="Прямоугольник 11"/>
           <p:cNvSpPr/>
           <p:nvPr/>
         </p:nvSpPr>
         <p:spPr bwMode="auto">
           <a:xfrm>
-            <a:off x="9298" y="1192006"/>
+            <a:off x="0" y="1181591"/>
             <a:ext cx="12201298" cy="168583"/>
           </a:xfrm>
           <a:prstGeom prst="rect">
@@ -17235,7 +17978,7 @@
       </p:sp>
       <p:sp>
         <p:nvSpPr>
-          <p:cNvPr id="1733818903" name="Заголовок 1"/>
+          <p:cNvPr id="722072276" name="Заголовок 1"/>
           <p:cNvSpPr>
             <a:spLocks noGrp="1"/>
           </p:cNvSpPr>
@@ -17245,13 +17988,13 @@
         </p:nvSpPr>
         <p:spPr bwMode="auto">
           <a:xfrm>
-            <a:off x="568954" y="0"/>
-            <a:ext cx="10515600" cy="1325563"/>
-          </a:xfrm>
-        </p:spPr>
-        <p:txBody>
-          <a:bodyPr>
-            <a:normAutofit/>
+            <a:off x="387637" y="-116036"/>
+            <a:ext cx="11223171" cy="1325563"/>
+          </a:xfrm>
+        </p:spPr>
+        <p:txBody>
+          <a:bodyPr vertOverflow="overflow" horzOverflow="overflow" vert="horz" wrap="square" lIns="91440" tIns="45720" rIns="91440" bIns="45720" numCol="1" spcCol="0" rtlCol="0" fromWordArt="0" anchor="ctr" anchorCtr="0" forceAA="0" upright="0" compatLnSpc="0">
+            <a:normAutofit fontScale="90000" lnSpcReduction="2000"/>
           </a:bodyPr>
           <a:lstStyle/>
           <a:p>
@@ -17259,25 +18002,22 @@
               <a:defRPr/>
             </a:pPr>
             <a:r>
-              <a:rPr lang="ru-RU" sz="3600" b="0" i="0" u="none" strike="noStrike" cap="none" spc="0">
-                <a:solidFill>
-                  <a:schemeClr val="bg1"/>
-                </a:solidFill>
-                <a:latin typeface="+mj-lt"/>
-                <a:ea typeface="+mj-ea"/>
-                <a:cs typeface="+mj-cs"/>
-              </a:rPr>
-              <a:t>Разработка модели упрощенного графического ядра</a:t>
-            </a:r>
-            <a:r>
-              <a:rPr lang="ru-RU" sz="3600">
+              <a:rPr lang="ru-RU">
                 <a:solidFill>
                   <a:schemeClr val="bg1"/>
                 </a:solidFill>
               </a:rPr>
-              <a:t>: Общая структура ядра</a:t>
-            </a:r>
-            <a:endParaRPr sz="3600">
+              <a:t>Разработка модели графического ядра: разработка архитектуры набора инструкций </a:t>
+            </a:r>
+            <a:r>
+              <a:rPr lang="en-US">
+                <a:solidFill>
+                  <a:schemeClr val="bg1"/>
+                </a:solidFill>
+              </a:rPr>
+              <a:t>(ISA)</a:t>
+            </a:r>
+            <a:endParaRPr lang="ru-RU">
               <a:solidFill>
                 <a:schemeClr val="bg1"/>
               </a:solidFill>
@@ -17287,17 +18027,17 @@
       </p:sp>
       <p:pic>
         <p:nvPicPr>
-          <p:cNvPr id="1829737820" name=""/>
+          <p:cNvPr id="1263729467" name="Рисунок 2"/>
           <p:cNvPicPr>
             <a:picLocks noChangeAspect="1"/>
           </p:cNvPicPr>
           <p:nvPr/>
         </p:nvPicPr>
         <p:blipFill rotWithShape="1">
-          <a:blip r:embed="rId3">
+          <a:blip r:embed="rId6">
             <a:extLst>
               <a:ext uri="{96DAC541-7B7A-43D3-8B79-37D633B846F1}">
-                <asvg:svgBlip xmlns:asvg="http://schemas.microsoft.com/office/drawing/2016/SVG/main" r:embed="rId4"/>
+                <asvg:svgBlip xmlns:asvg="http://schemas.microsoft.com/office/drawing/2016/SVG/main" r:embed="rId7"/>
               </a:ext>
             </a:extLst>
           </a:blip>
@@ -17305,14 +18045,216 @@
         </p:blipFill>
         <p:spPr bwMode="auto">
           <a:xfrm flipH="0" flipV="0">
-            <a:off x="5034770" y="1876424"/>
-            <a:ext cx="6576037" cy="4195280"/>
+            <a:off x="8265294" y="5237432"/>
+            <a:ext cx="3763471" cy="1228079"/>
           </a:xfrm>
           <a:prstGeom prst="rect">
             <a:avLst/>
           </a:prstGeom>
         </p:spPr>
       </p:pic>
+      <p:pic>
+        <p:nvPicPr>
+          <p:cNvPr id="1018873478" name=""/>
+          <p:cNvPicPr>
+            <a:picLocks noChangeAspect="1"/>
+          </p:cNvPicPr>
+          <p:nvPr/>
+        </p:nvPicPr>
+        <p:blipFill rotWithShape="1">
+          <a:blip r:embed="rId8"/>
+          <a:stretch/>
+        </p:blipFill>
+        <p:spPr bwMode="auto">
+          <a:xfrm flipH="0" flipV="0">
+            <a:off x="3122609" y="1415540"/>
+            <a:ext cx="5529106" cy="3009811"/>
+          </a:xfrm>
+          <a:prstGeom prst="rect">
+            <a:avLst/>
+          </a:prstGeom>
+          <a:ln w="19050">
+            <a:solidFill>
+              <a:schemeClr val="accent1">
+                <a:lumMod val="50196"/>
+              </a:schemeClr>
+            </a:solidFill>
+            <a:prstDash val="solid"/>
+          </a:ln>
+        </p:spPr>
+      </p:pic>
+      <p:cxnSp>
+        <p:nvCxnSpPr>
+          <p:cNvPr id="1150155137" name=""/>
+          <p:cNvCxnSpPr>
+            <a:stCxn id="405019113" idx="3"/>
+            <a:endCxn id="1263729467" idx="1"/>
+          </p:cNvCxnSpPr>
+          <p:nvPr/>
+        </p:nvCxnSpPr>
+        <p:spPr bwMode="auto">
+          <a:xfrm rot="0" flipH="0" flipV="0">
+            <a:off x="7837801" y="5628176"/>
+            <a:ext cx="427492" cy="223295"/>
+          </a:xfrm>
+          <a:prstGeom prst="line">
+            <a:avLst/>
+          </a:prstGeom>
+          <a:ln w="28575" cap="flat" cmpd="sng" algn="ctr">
+            <a:solidFill>
+              <a:schemeClr val="tx1"/>
+            </a:solidFill>
+            <a:prstDash val="solid"/>
+            <a:miter lim="800000"/>
+            <a:tailEnd type="arrow" len="med"/>
+          </a:ln>
+        </p:spPr>
+        <p:style>
+          <a:lnRef idx="1">
+            <a:schemeClr val="accent1">
+              <a:shade val="50000"/>
+            </a:schemeClr>
+          </a:lnRef>
+          <a:fillRef idx="0">
+            <a:schemeClr val="accent1"/>
+          </a:fillRef>
+          <a:effectRef idx="0">
+            <a:schemeClr val="accent1"/>
+          </a:effectRef>
+          <a:fontRef idx="minor">
+            <a:schemeClr val="tx1"/>
+          </a:fontRef>
+        </p:style>
+      </p:cxnSp>
+      <p:cxnSp>
+        <p:nvCxnSpPr>
+          <p:cNvPr id="953161365" name=""/>
+          <p:cNvCxnSpPr>
+            <a:stCxn id="405019113" idx="3"/>
+            <a:endCxn id="1223278306" idx="2"/>
+          </p:cNvCxnSpPr>
+          <p:nvPr/>
+        </p:nvCxnSpPr>
+        <p:spPr bwMode="auto">
+          <a:xfrm rot="0" flipH="0" flipV="1">
+            <a:off x="7837801" y="3629299"/>
+            <a:ext cx="2778814" cy="1998876"/>
+          </a:xfrm>
+          <a:prstGeom prst="line">
+            <a:avLst/>
+          </a:prstGeom>
+          <a:ln w="28575" cap="flat" cmpd="sng" algn="ctr">
+            <a:solidFill>
+              <a:schemeClr val="tx1"/>
+            </a:solidFill>
+            <a:prstDash val="solid"/>
+            <a:miter lim="800000"/>
+            <a:tailEnd type="arrow" len="med"/>
+          </a:ln>
+        </p:spPr>
+        <p:style>
+          <a:lnRef idx="1">
+            <a:schemeClr val="accent1">
+              <a:shade val="50000"/>
+            </a:schemeClr>
+          </a:lnRef>
+          <a:fillRef idx="0">
+            <a:schemeClr val="accent1"/>
+          </a:fillRef>
+          <a:effectRef idx="0">
+            <a:schemeClr val="accent1"/>
+          </a:effectRef>
+          <a:fontRef idx="minor">
+            <a:schemeClr val="tx1"/>
+          </a:fontRef>
+        </p:style>
+      </p:cxnSp>
+      <p:cxnSp>
+        <p:nvCxnSpPr>
+          <p:cNvPr id="1000365914" name=""/>
+          <p:cNvCxnSpPr>
+            <a:stCxn id="1018873478" idx="3"/>
+            <a:endCxn id="1223278306" idx="1"/>
+          </p:cNvCxnSpPr>
+          <p:nvPr/>
+        </p:nvCxnSpPr>
+        <p:spPr bwMode="auto">
+          <a:xfrm rot="0" flipH="0" flipV="1">
+            <a:off x="8651715" y="2611325"/>
+            <a:ext cx="552751" cy="309120"/>
+          </a:xfrm>
+          <a:prstGeom prst="line">
+            <a:avLst/>
+          </a:prstGeom>
+          <a:ln w="28575" cap="flat" cmpd="sng" algn="ctr">
+            <a:solidFill>
+              <a:schemeClr val="tx1"/>
+            </a:solidFill>
+            <a:prstDash val="solid"/>
+            <a:miter lim="800000"/>
+            <a:tailEnd type="arrow" len="med"/>
+          </a:ln>
+        </p:spPr>
+        <p:style>
+          <a:lnRef idx="1">
+            <a:schemeClr val="accent1">
+              <a:shade val="50000"/>
+            </a:schemeClr>
+          </a:lnRef>
+          <a:fillRef idx="0">
+            <a:schemeClr val="accent1"/>
+          </a:fillRef>
+          <a:effectRef idx="0">
+            <a:schemeClr val="accent1"/>
+          </a:effectRef>
+          <a:fontRef idx="minor">
+            <a:schemeClr val="tx1"/>
+          </a:fontRef>
+        </p:style>
+      </p:cxnSp>
+      <p:cxnSp>
+        <p:nvCxnSpPr>
+          <p:cNvPr id="799810659" name=""/>
+          <p:cNvCxnSpPr>
+            <a:stCxn id="1018873478" idx="3"/>
+            <a:endCxn id="1263729467" idx="0"/>
+          </p:cNvCxnSpPr>
+          <p:nvPr/>
+        </p:nvCxnSpPr>
+        <p:spPr bwMode="auto">
+          <a:xfrm rot="0" flipH="0" flipV="0">
+            <a:off x="8651715" y="2920446"/>
+            <a:ext cx="1495314" cy="2316986"/>
+          </a:xfrm>
+          <a:prstGeom prst="line">
+            <a:avLst/>
+          </a:prstGeom>
+          <a:ln w="28575" cap="flat" cmpd="sng" algn="ctr">
+            <a:solidFill>
+              <a:schemeClr val="tx1"/>
+            </a:solidFill>
+            <a:prstDash val="solid"/>
+            <a:miter lim="800000"/>
+            <a:tailEnd type="arrow" len="med"/>
+          </a:ln>
+        </p:spPr>
+        <p:style>
+          <a:lnRef idx="1">
+            <a:schemeClr val="accent1">
+              <a:shade val="50000"/>
+            </a:schemeClr>
+          </a:lnRef>
+          <a:fillRef idx="0">
+            <a:schemeClr val="accent1"/>
+          </a:fillRef>
+          <a:effectRef idx="0">
+            <a:schemeClr val="accent1"/>
+          </a:effectRef>
+          <a:fontRef idx="minor">
+            <a:schemeClr val="tx1"/>
+          </a:fontRef>
+        </p:style>
+      </p:cxnSp>
     </p:spTree>
   </p:cSld>
   <p:clrMapOvr>
@@ -17381,7 +18323,7 @@
       </p:grpSpPr>
       <p:sp>
         <p:nvSpPr>
-          <p:cNvPr id="1708686" name="Объект 2"/>
+          <p:cNvPr id="1407148718" name="Объект 2"/>
           <p:cNvSpPr>
             <a:spLocks noGrp="1"/>
           </p:cNvSpPr>
@@ -17391,13 +18333,13 @@
         </p:nvSpPr>
         <p:spPr bwMode="auto">
           <a:xfrm flipH="0" flipV="0">
-            <a:off x="66674" y="1350173"/>
-            <a:ext cx="4134825" cy="5142700"/>
+            <a:off x="153374" y="1523999"/>
+            <a:ext cx="5067299" cy="4762499"/>
           </a:xfrm>
         </p:spPr>
         <p:txBody>
           <a:bodyPr vertOverflow="overflow" horzOverflow="overflow" vert="horz" wrap="square" lIns="91440" tIns="45720" rIns="91440" bIns="45720" numCol="1" spcCol="0" rtlCol="0" fromWordArt="0" anchor="t" anchorCtr="0" forceAA="0" upright="0" compatLnSpc="0">
-            <a:normAutofit/>
+            <a:normAutofit fontScale="90000" lnSpcReduction="2000"/>
           </a:bodyPr>
           <a:lstStyle/>
           <a:p>
@@ -17405,104 +18347,122 @@
               <a:defRPr/>
             </a:pPr>
             <a:r>
-              <a:rPr lang="ru-RU" sz="1600"/>
-              <a:t>Вычислительный </a:t>
-            </a:r>
-            <a:r>
-              <a:rPr lang="ru-RU" sz="1600"/>
-              <a:t>блок </a:t>
-            </a:r>
-            <a:r>
-              <a:rPr lang="en-US" sz="1600"/>
-              <a:t>(Tread Unit) </a:t>
-            </a:r>
-            <a:r>
-              <a:rPr lang="ru-RU" sz="1600"/>
-              <a:t>обрабатывает вещественные и целочисленные данные из регистрового файла</a:t>
-            </a:r>
-            <a:r>
-              <a:rPr lang="ru-RU" sz="1600"/>
-              <a:t> (</a:t>
-            </a:r>
-            <a:r>
-              <a:rPr lang="en-US" sz="1600"/>
-              <a:t>Regfile</a:t>
-            </a:r>
-            <a:r>
-              <a:rPr lang="ru-RU" sz="1600"/>
-              <a:t>) и сохраняет их обратно</a:t>
-            </a:r>
-            <a:r>
-              <a:rPr lang="ru-RU" sz="1600"/>
+              <a:rPr lang="en-US"/>
+              <a:t>Fetcher</a:t>
+            </a:r>
+            <a:r>
+              <a:rPr lang="ru-RU"/>
+              <a:t> - захватывает инструкцию из памяти;</a:t>
+            </a:r>
+            <a:endParaRPr/>
+          </a:p>
+          <a:p>
+            <a:pPr>
+              <a:defRPr/>
+            </a:pPr>
+            <a:r>
+              <a:rPr lang="en-US"/>
+              <a:t>Decoder</a:t>
+            </a:r>
+            <a:r>
+              <a:rPr lang="ru-RU"/>
+              <a:t> - декодирует инструкцию, управляет </a:t>
+            </a:r>
+            <a:r>
+              <a:rPr lang="en-US"/>
+              <a:t>LSU</a:t>
+            </a:r>
+            <a:r>
+              <a:rPr lang="ru-RU"/>
+              <a:t> и </a:t>
+            </a:r>
+            <a:r>
+              <a:rPr lang="en-US"/>
+              <a:t>TU</a:t>
+            </a:r>
+            <a:r>
+              <a:rPr lang="ru-RU"/>
               <a:t>;</a:t>
             </a:r>
-            <a:endParaRPr sz="1600"/>
-          </a:p>
-          <a:p>
-            <a:pPr>
-              <a:defRPr/>
-            </a:pPr>
-            <a:r>
-              <a:rPr lang="ru-RU" sz="1600"/>
-              <a:t>Основные компоненты: </a:t>
-            </a:r>
-            <a:endParaRPr sz="1600"/>
-          </a:p>
-          <a:p>
-            <a:pPr lvl="1">
-              <a:defRPr/>
-            </a:pPr>
-            <a:r>
-              <a:rPr lang="en-US" sz="1600"/>
-              <a:t>FPU – </a:t>
-            </a:r>
-            <a:r>
-              <a:rPr lang="ru-RU" sz="1600"/>
-              <a:t>блок операций с плавающей запятой</a:t>
-            </a:r>
-            <a:r>
-              <a:rPr lang="en-US" sz="1600"/>
+            <a:endParaRPr/>
+          </a:p>
+          <a:p>
+            <a:pPr>
+              <a:defRPr/>
+            </a:pPr>
+            <a:r>
+              <a:rPr lang="en-US"/>
+              <a:t>TU</a:t>
+            </a:r>
+            <a:r>
+              <a:rPr lang="ru-RU"/>
+              <a:t> </a:t>
+            </a:r>
+            <a:r>
+              <a:rPr lang="ru-RU"/>
+              <a:t>– вычислительный блок;</a:t>
+            </a:r>
+            <a:endParaRPr/>
+          </a:p>
+          <a:p>
+            <a:pPr>
+              <a:defRPr/>
+            </a:pPr>
+            <a:r>
+              <a:rPr lang="en-US"/>
+              <a:t>LSU -  </a:t>
+            </a:r>
+            <a:r>
+              <a:rPr lang="ru-RU"/>
+              <a:t>блок загрузки/сохранения данных</a:t>
+            </a:r>
+            <a:r>
+              <a:rPr lang="ru-RU"/>
               <a:t>;</a:t>
             </a:r>
-            <a:endParaRPr sz="1600"/>
-          </a:p>
-          <a:p>
-            <a:pPr lvl="1">
-              <a:defRPr/>
-            </a:pPr>
-            <a:r>
-              <a:rPr lang="en-US" sz="1600"/>
-              <a:t>ALU – </a:t>
-            </a:r>
-            <a:r>
-              <a:rPr lang="ru-RU" sz="1600"/>
-              <a:t>целочисленное арифметико-логическое устройство (в основном используется для расчёта адресов и смещений)</a:t>
-            </a:r>
-            <a:r>
-              <a:rPr lang="en-US" sz="1600"/>
-              <a:t>;</a:t>
-            </a:r>
-            <a:endParaRPr sz="1600"/>
-          </a:p>
-          <a:p>
-            <a:pPr lvl="1">
-              <a:defRPr/>
-            </a:pPr>
-            <a:r>
-              <a:rPr lang="en-US" sz="1600"/>
-              <a:t>Regfile – </a:t>
-            </a:r>
-            <a:r>
-              <a:rPr lang="ru-RU" sz="1600"/>
-              <a:t>регистровый файл, хранит операнды и результаты операций. 30 регистров общего назначения, 2 специализированных регистра (индекс вычислительного блока и константный нуль).</a:t>
-            </a:r>
-            <a:endParaRPr sz="1600"/>
-          </a:p>
-        </p:txBody>
-      </p:sp>
-      <p:sp>
-        <p:nvSpPr>
-          <p:cNvPr id="1832140326" name="Номер слайда 3"/>
+            <a:endParaRPr/>
+          </a:p>
+          <a:p>
+            <a:pPr>
+              <a:defRPr/>
+            </a:pPr>
+            <a:r>
+              <a:rPr lang="en-US"/>
+              <a:t>CSR </a:t>
+            </a:r>
+            <a:r>
+              <a:rPr lang="ru-RU"/>
+              <a:t>- контрольно-статусные регистры. </a:t>
+            </a:r>
+            <a:r>
+              <a:rPr lang="ru-RU"/>
+              <a:t>Содержат статусные и управляющие сигналы связанные с самим графическим ядром;</a:t>
+            </a:r>
+            <a:endParaRPr lang="ru-RU"/>
+          </a:p>
+          <a:p>
+            <a:pPr>
+              <a:defRPr/>
+            </a:pPr>
+            <a:r>
+              <a:rPr lang="en-US"/>
+              <a:t>PC – </a:t>
+            </a:r>
+            <a:r>
+              <a:rPr lang="ru-RU"/>
+              <a:t>счётчик инструкций</a:t>
+            </a:r>
+            <a:r>
+              <a:rPr lang="ru-RU"/>
+              <a:t>.</a:t>
+            </a:r>
+            <a:endParaRPr lang="en-US"/>
+          </a:p>
+        </p:txBody>
+      </p:sp>
+      <p:sp>
+        <p:nvSpPr>
+          <p:cNvPr id="417506553" name="Номер слайда 3"/>
           <p:cNvSpPr>
             <a:spLocks noGrp="1"/>
           </p:cNvSpPr>
@@ -17512,7 +18472,7 @@
         </p:nvSpPr>
         <p:spPr bwMode="auto">
           <a:xfrm>
-            <a:off x="11084554" y="6492875"/>
+            <a:off x="11084554" y="6478335"/>
             <a:ext cx="1052508" cy="365125"/>
           </a:xfrm>
         </p:spPr>
@@ -17523,14 +18483,14 @@
             <a:pPr>
               <a:defRPr/>
             </a:pPr>
-            <a:fld id="{8C44681A-2184-8FE6-7CA2-B2F449D07AD3}" type="slidenum">
+            <a:fld id="{ED02CFB1-EEA1-CD3C-8AAA-9D8034B9CDE8}" type="slidenum">
               <a:rPr lang="ru-RU" sz="1800">
                 <a:solidFill>
                   <a:schemeClr val="tx1"/>
                 </a:solidFill>
                 <a:latin typeface="Trebuchet MS"/>
               </a:rPr>
-              <a:t>8</a:t>
+              <a:t>7</a:t>
             </a:fld>
             <a:endParaRPr lang="ru-RU" sz="1800">
               <a:solidFill>
@@ -17543,13 +18503,13 @@
       </p:sp>
       <p:sp>
         <p:nvSpPr>
-          <p:cNvPr id="304249789" name="Прямоугольник 6"/>
+          <p:cNvPr id="965651225" name="Прямоугольник 5"/>
           <p:cNvSpPr/>
           <p:nvPr/>
         </p:nvSpPr>
         <p:spPr bwMode="auto">
           <a:xfrm>
-            <a:off x="-9298" y="-10415"/>
+            <a:off x="0" y="0"/>
             <a:ext cx="12210596" cy="1160099"/>
           </a:xfrm>
           <a:prstGeom prst="rect">
@@ -17593,13 +18553,13 @@
       </p:sp>
       <p:sp>
         <p:nvSpPr>
-          <p:cNvPr id="941254918" name="Прямоугольник 7"/>
+          <p:cNvPr id="1046053022" name="Прямоугольник 6"/>
           <p:cNvSpPr/>
           <p:nvPr/>
         </p:nvSpPr>
         <p:spPr bwMode="auto">
           <a:xfrm>
-            <a:off x="0" y="1181591"/>
+            <a:off x="9298" y="1192006"/>
             <a:ext cx="12201298" cy="168583"/>
           </a:xfrm>
           <a:prstGeom prst="rect">
@@ -17643,7 +18603,7 @@
       </p:sp>
       <p:sp>
         <p:nvSpPr>
-          <p:cNvPr id="612281607" name="Заголовок 1"/>
+          <p:cNvPr id="1080473041" name="Заголовок 1"/>
           <p:cNvSpPr>
             <a:spLocks noGrp="1"/>
           </p:cNvSpPr>
@@ -17653,7 +18613,7 @@
         </p:nvSpPr>
         <p:spPr bwMode="auto">
           <a:xfrm>
-            <a:off x="680319" y="-37878"/>
+            <a:off x="568954" y="0"/>
             <a:ext cx="10515600" cy="1325563"/>
           </a:xfrm>
         </p:spPr>
@@ -17666,36 +18626,36 @@
             <a:pPr>
               <a:defRPr/>
             </a:pPr>
+            <a:r>
+              <a:rPr lang="ru-RU" sz="3600" b="0" i="0" u="none" strike="noStrike" cap="none" spc="0">
+                <a:solidFill>
+                  <a:schemeClr val="bg1"/>
+                </a:solidFill>
+                <a:latin typeface="+mj-lt"/>
+                <a:ea typeface="+mj-ea"/>
+                <a:cs typeface="+mj-cs"/>
+              </a:rPr>
+              <a:t>Разработка модели упрощенного графического ядра</a:t>
+            </a:r>
             <a:r>
               <a:rPr lang="ru-RU" sz="3600">
                 <a:solidFill>
                   <a:schemeClr val="bg1"/>
                 </a:solidFill>
               </a:rPr>
-              <a:t>Разработка вычислительного блока:</a:t>
-            </a:r>
-            <a:br>
-              <a:rPr lang="ru-RU" sz="3600">
-                <a:solidFill>
-                  <a:schemeClr val="bg1"/>
-                </a:solidFill>
-              </a:rPr>
-            </a:br>
-            <a:r>
-              <a:rPr lang="ru-RU" sz="3600">
-                <a:solidFill>
-                  <a:schemeClr val="bg1"/>
-                </a:solidFill>
-              </a:rPr>
-              <a:t>общая структура</a:t>
-            </a:r>
-            <a:endParaRPr/>
+              <a:t>: Общая структура ядра</a:t>
+            </a:r>
+            <a:endParaRPr sz="3600">
+              <a:solidFill>
+                <a:schemeClr val="bg1"/>
+              </a:solidFill>
+            </a:endParaRPr>
           </a:p>
         </p:txBody>
       </p:sp>
       <p:pic>
         <p:nvPicPr>
-          <p:cNvPr id="792293840" name=""/>
+          <p:cNvPr id="1986150859" name=""/>
           <p:cNvPicPr>
             <a:picLocks noChangeAspect="1"/>
           </p:cNvPicPr>
@@ -17713,8 +18673,8 @@
         </p:blipFill>
         <p:spPr bwMode="auto">
           <a:xfrm flipH="0" flipV="0">
-            <a:off x="4057989" y="1944097"/>
-            <a:ext cx="7983821" cy="4038599"/>
+            <a:off x="5695574" y="1406524"/>
+            <a:ext cx="5915233" cy="5375733"/>
           </a:xfrm>
           <a:prstGeom prst="rect">
             <a:avLst/>

--- a/docs/starukhin_dissertation/magister_pres.pptx
+++ b/docs/starukhin_dissertation/magister_pres.pptx
@@ -150,7 +150,7 @@
       </p:grpSpPr>
       <p:sp>
         <p:nvSpPr>
-          <p:cNvPr id="1008909446" name="Верхний колонтитул 1"/>
+          <p:cNvPr id="146555648" name="Верхний колонтитул 1"/>
           <p:cNvSpPr>
             <a:spLocks noGrp="1"/>
           </p:cNvSpPr>
@@ -184,7 +184,7 @@
       </p:sp>
       <p:sp>
         <p:nvSpPr>
-          <p:cNvPr id="1926778905" name="Дата 2"/>
+          <p:cNvPr id="1769402897" name="Дата 2"/>
           <p:cNvSpPr>
             <a:spLocks noGrp="1"/>
           </p:cNvSpPr>
@@ -222,7 +222,7 @@
       </p:sp>
       <p:sp>
         <p:nvSpPr>
-          <p:cNvPr id="524395339" name="Образ слайда 3"/>
+          <p:cNvPr id="1162990744" name="Образ слайда 3"/>
           <p:cNvSpPr>
             <a:spLocks noChangeAspect="1" noGrp="1" noRot="1"/>
           </p:cNvSpPr>
@@ -258,7 +258,7 @@
       </p:sp>
       <p:sp>
         <p:nvSpPr>
-          <p:cNvPr id="1551658170" name="Заметки 4"/>
+          <p:cNvPr id="1636096988" name="Заметки 4"/>
           <p:cNvSpPr>
             <a:spLocks noGrp="1"/>
           </p:cNvSpPr>
@@ -332,7 +332,7 @@
       </p:sp>
       <p:sp>
         <p:nvSpPr>
-          <p:cNvPr id="1466183126" name="Нижний колонтитул 5"/>
+          <p:cNvPr id="1354838155" name="Нижний колонтитул 5"/>
           <p:cNvSpPr>
             <a:spLocks noGrp="1"/>
           </p:cNvSpPr>
@@ -366,7 +366,7 @@
       </p:sp>
       <p:sp>
         <p:nvSpPr>
-          <p:cNvPr id="1877250646" name="Номер слайда 6"/>
+          <p:cNvPr id="324635798" name="Номер слайда 6"/>
           <p:cNvSpPr>
             <a:spLocks noGrp="1"/>
           </p:cNvSpPr>
@@ -519,7 +519,7 @@
       </p:grpSpPr>
       <p:sp>
         <p:nvSpPr>
-          <p:cNvPr id="1514011381" name="Slide Image Placeholder 1"/>
+          <p:cNvPr id="1612894675" name="Slide Image Placeholder 1"/>
           <p:cNvSpPr>
             <a:spLocks noChangeAspect="1" noGrp="1" noRot="1"/>
           </p:cNvSpPr>
@@ -531,7 +531,7 @@
       </p:sp>
       <p:sp>
         <p:nvSpPr>
-          <p:cNvPr id="723938031" name="Notes Placeholder 2"/>
+          <p:cNvPr id="1800236599" name="Notes Placeholder 2"/>
           <p:cNvSpPr>
             <a:spLocks noGrp="1"/>
           </p:cNvSpPr>
@@ -553,7 +553,7 @@
       </p:sp>
       <p:sp>
         <p:nvSpPr>
-          <p:cNvPr id="1485746519" name="Slide Number Placeholder 3"/>
+          <p:cNvPr id="1264110815" name="Slide Number Placeholder 3"/>
           <p:cNvSpPr>
             <a:spLocks noGrp="1"/>
           </p:cNvSpPr>
@@ -604,7 +604,7 @@
       </p:grpSpPr>
       <p:sp>
         <p:nvSpPr>
-          <p:cNvPr id="375579186" name="Slide Image Placeholder 1"/>
+          <p:cNvPr id="1851939593" name="Slide Image Placeholder 1"/>
           <p:cNvSpPr>
             <a:spLocks noChangeAspect="1" noGrp="1" noRot="1"/>
           </p:cNvSpPr>
@@ -616,7 +616,7 @@
       </p:sp>
       <p:sp>
         <p:nvSpPr>
-          <p:cNvPr id="1922002273" name="Notes Placeholder 2"/>
+          <p:cNvPr id="1501839364" name="Notes Placeholder 2"/>
           <p:cNvSpPr>
             <a:spLocks noGrp="1"/>
           </p:cNvSpPr>
@@ -638,7 +638,7 @@
       </p:sp>
       <p:sp>
         <p:nvSpPr>
-          <p:cNvPr id="196699625" name="Slide Number Placeholder 3"/>
+          <p:cNvPr id="1484776516" name="Slide Number Placeholder 3"/>
           <p:cNvSpPr>
             <a:spLocks noGrp="1"/>
           </p:cNvSpPr>
@@ -689,7 +689,7 @@
       </p:grpSpPr>
       <p:sp>
         <p:nvSpPr>
-          <p:cNvPr id="1994669891" name="Slide Image Placeholder 1"/>
+          <p:cNvPr id="1560951283" name="Slide Image Placeholder 1"/>
           <p:cNvSpPr>
             <a:spLocks noChangeAspect="1" noGrp="1" noRot="1"/>
           </p:cNvSpPr>
@@ -701,7 +701,7 @@
       </p:sp>
       <p:sp>
         <p:nvSpPr>
-          <p:cNvPr id="682548313" name="Notes Placeholder 2"/>
+          <p:cNvPr id="395179755" name="Notes Placeholder 2"/>
           <p:cNvSpPr>
             <a:spLocks noGrp="1"/>
           </p:cNvSpPr>
@@ -723,7 +723,7 @@
       </p:sp>
       <p:sp>
         <p:nvSpPr>
-          <p:cNvPr id="508454201" name="Slide Number Placeholder 3"/>
+          <p:cNvPr id="1750846342" name="Slide Number Placeholder 3"/>
           <p:cNvSpPr>
             <a:spLocks noGrp="1"/>
           </p:cNvSpPr>
@@ -774,7 +774,7 @@
       </p:grpSpPr>
       <p:sp>
         <p:nvSpPr>
-          <p:cNvPr id="943427430" name="Slide Image Placeholder 1"/>
+          <p:cNvPr id="384495068" name="Slide Image Placeholder 1"/>
           <p:cNvSpPr>
             <a:spLocks noChangeAspect="1" noGrp="1" noRot="1"/>
           </p:cNvSpPr>
@@ -786,7 +786,7 @@
       </p:sp>
       <p:sp>
         <p:nvSpPr>
-          <p:cNvPr id="686155696" name="Notes Placeholder 2"/>
+          <p:cNvPr id="416880015" name="Notes Placeholder 2"/>
           <p:cNvSpPr>
             <a:spLocks noGrp="1"/>
           </p:cNvSpPr>
@@ -808,7 +808,7 @@
       </p:sp>
       <p:sp>
         <p:nvSpPr>
-          <p:cNvPr id="450857605" name="Slide Number Placeholder 3"/>
+          <p:cNvPr id="847499035" name="Slide Number Placeholder 3"/>
           <p:cNvSpPr>
             <a:spLocks noGrp="1"/>
           </p:cNvSpPr>
@@ -859,7 +859,7 @@
       </p:grpSpPr>
       <p:sp>
         <p:nvSpPr>
-          <p:cNvPr id="629654329" name="Slide Image Placeholder 1"/>
+          <p:cNvPr id="1631222715" name="Slide Image Placeholder 1"/>
           <p:cNvSpPr>
             <a:spLocks noChangeAspect="1" noGrp="1" noRot="1"/>
           </p:cNvSpPr>
@@ -871,7 +871,7 @@
       </p:sp>
       <p:sp>
         <p:nvSpPr>
-          <p:cNvPr id="390824498" name="Notes Placeholder 2"/>
+          <p:cNvPr id="362243400" name="Notes Placeholder 2"/>
           <p:cNvSpPr>
             <a:spLocks noGrp="1"/>
           </p:cNvSpPr>
@@ -893,7 +893,7 @@
       </p:sp>
       <p:sp>
         <p:nvSpPr>
-          <p:cNvPr id="1461670010" name="Slide Number Placeholder 3"/>
+          <p:cNvPr id="1343210007" name="Slide Number Placeholder 3"/>
           <p:cNvSpPr>
             <a:spLocks noGrp="1"/>
           </p:cNvSpPr>
@@ -944,7 +944,7 @@
       </p:grpSpPr>
       <p:sp>
         <p:nvSpPr>
-          <p:cNvPr id="557468585" name="Slide Image Placeholder 1"/>
+          <p:cNvPr id="653331553" name="Slide Image Placeholder 1"/>
           <p:cNvSpPr>
             <a:spLocks noChangeAspect="1" noGrp="1" noRot="1"/>
           </p:cNvSpPr>
@@ -956,7 +956,7 @@
       </p:sp>
       <p:sp>
         <p:nvSpPr>
-          <p:cNvPr id="47710696" name="Notes Placeholder 2"/>
+          <p:cNvPr id="611649930" name="Notes Placeholder 2"/>
           <p:cNvSpPr>
             <a:spLocks noGrp="1"/>
           </p:cNvSpPr>
@@ -978,7 +978,7 @@
       </p:sp>
       <p:sp>
         <p:nvSpPr>
-          <p:cNvPr id="178897965" name="Slide Number Placeholder 3"/>
+          <p:cNvPr id="936041752" name="Slide Number Placeholder 3"/>
           <p:cNvSpPr>
             <a:spLocks noGrp="1"/>
           </p:cNvSpPr>
@@ -1029,7 +1029,7 @@
       </p:grpSpPr>
       <p:sp>
         <p:nvSpPr>
-          <p:cNvPr id="1569904296" name="Slide Image Placeholder 1"/>
+          <p:cNvPr id="1027710970" name="Slide Image Placeholder 1"/>
           <p:cNvSpPr>
             <a:spLocks noChangeAspect="1" noGrp="1" noRot="1"/>
           </p:cNvSpPr>
@@ -1041,7 +1041,7 @@
       </p:sp>
       <p:sp>
         <p:nvSpPr>
-          <p:cNvPr id="1313057222" name="Notes Placeholder 2"/>
+          <p:cNvPr id="2129463095" name="Notes Placeholder 2"/>
           <p:cNvSpPr>
             <a:spLocks noGrp="1"/>
           </p:cNvSpPr>
@@ -1063,7 +1063,7 @@
       </p:sp>
       <p:sp>
         <p:nvSpPr>
-          <p:cNvPr id="1094026707" name="Slide Number Placeholder 3"/>
+          <p:cNvPr id="1036942901" name="Slide Number Placeholder 3"/>
           <p:cNvSpPr>
             <a:spLocks noGrp="1"/>
           </p:cNvSpPr>
@@ -1199,7 +1199,7 @@
       </p:grpSpPr>
       <p:sp>
         <p:nvSpPr>
-          <p:cNvPr id="45101802" name="Slide Image Placeholder 1"/>
+          <p:cNvPr id="1622014842" name="Slide Image Placeholder 1"/>
           <p:cNvSpPr>
             <a:spLocks noChangeAspect="1" noGrp="1" noRot="1"/>
           </p:cNvSpPr>
@@ -1211,7 +1211,7 @@
       </p:sp>
       <p:sp>
         <p:nvSpPr>
-          <p:cNvPr id="826519773" name="Notes Placeholder 2"/>
+          <p:cNvPr id="1675340667" name="Notes Placeholder 2"/>
           <p:cNvSpPr>
             <a:spLocks noGrp="1"/>
           </p:cNvSpPr>
@@ -1233,7 +1233,7 @@
       </p:sp>
       <p:sp>
         <p:nvSpPr>
-          <p:cNvPr id="2028139566" name="Slide Number Placeholder 3"/>
+          <p:cNvPr id="1492683537" name="Slide Number Placeholder 3"/>
           <p:cNvSpPr>
             <a:spLocks noGrp="1"/>
           </p:cNvSpPr>
@@ -1284,7 +1284,7 @@
       </p:grpSpPr>
       <p:sp>
         <p:nvSpPr>
-          <p:cNvPr id="1181997035" name="Slide Image Placeholder 1"/>
+          <p:cNvPr id="697788022" name="Slide Image Placeholder 1"/>
           <p:cNvSpPr>
             <a:spLocks noChangeAspect="1" noGrp="1" noRot="1"/>
           </p:cNvSpPr>
@@ -1296,7 +1296,7 @@
       </p:sp>
       <p:sp>
         <p:nvSpPr>
-          <p:cNvPr id="269427887" name="Notes Placeholder 2"/>
+          <p:cNvPr id="1319940628" name="Notes Placeholder 2"/>
           <p:cNvSpPr>
             <a:spLocks noGrp="1"/>
           </p:cNvSpPr>
@@ -1318,7 +1318,7 @@
       </p:sp>
       <p:sp>
         <p:nvSpPr>
-          <p:cNvPr id="1303455438" name="Slide Number Placeholder 3"/>
+          <p:cNvPr id="1257090300" name="Slide Number Placeholder 3"/>
           <p:cNvSpPr>
             <a:spLocks noGrp="1"/>
           </p:cNvSpPr>
@@ -1369,7 +1369,7 @@
       </p:grpSpPr>
       <p:sp>
         <p:nvSpPr>
-          <p:cNvPr id="1143364465" name="Slide Image Placeholder 1"/>
+          <p:cNvPr id="710141094" name="Slide Image Placeholder 1"/>
           <p:cNvSpPr>
             <a:spLocks noChangeAspect="1" noGrp="1" noRot="1"/>
           </p:cNvSpPr>
@@ -1381,7 +1381,7 @@
       </p:sp>
       <p:sp>
         <p:nvSpPr>
-          <p:cNvPr id="507556535" name="Notes Placeholder 2"/>
+          <p:cNvPr id="1975947540" name="Notes Placeholder 2"/>
           <p:cNvSpPr>
             <a:spLocks noGrp="1"/>
           </p:cNvSpPr>
@@ -1403,7 +1403,7 @@
       </p:sp>
       <p:sp>
         <p:nvSpPr>
-          <p:cNvPr id="6523398" name="Slide Number Placeholder 3"/>
+          <p:cNvPr id="1035217438" name="Slide Number Placeholder 3"/>
           <p:cNvSpPr>
             <a:spLocks noGrp="1"/>
           </p:cNvSpPr>
@@ -1454,7 +1454,7 @@
       </p:grpSpPr>
       <p:sp>
         <p:nvSpPr>
-          <p:cNvPr id="1367111149" name="Slide Image Placeholder 1"/>
+          <p:cNvPr id="808360750" name="Slide Image Placeholder 1"/>
           <p:cNvSpPr>
             <a:spLocks noChangeAspect="1" noGrp="1" noRot="1"/>
           </p:cNvSpPr>
@@ -1466,7 +1466,7 @@
       </p:sp>
       <p:sp>
         <p:nvSpPr>
-          <p:cNvPr id="284181762" name="Notes Placeholder 2"/>
+          <p:cNvPr id="360775886" name="Notes Placeholder 2"/>
           <p:cNvSpPr>
             <a:spLocks noGrp="1"/>
           </p:cNvSpPr>
@@ -1488,7 +1488,7 @@
       </p:sp>
       <p:sp>
         <p:nvSpPr>
-          <p:cNvPr id="853835779" name="Slide Number Placeholder 3"/>
+          <p:cNvPr id="1651902301" name="Slide Number Placeholder 3"/>
           <p:cNvSpPr>
             <a:spLocks noGrp="1"/>
           </p:cNvSpPr>
@@ -1624,7 +1624,7 @@
       </p:grpSpPr>
       <p:sp>
         <p:nvSpPr>
-          <p:cNvPr id="1202491036" name="Slide Image Placeholder 1"/>
+          <p:cNvPr id="2018413479" name="Slide Image Placeholder 1"/>
           <p:cNvSpPr>
             <a:spLocks noChangeAspect="1" noGrp="1" noRot="1"/>
           </p:cNvSpPr>
@@ -1636,7 +1636,7 @@
       </p:sp>
       <p:sp>
         <p:nvSpPr>
-          <p:cNvPr id="72037785" name="Notes Placeholder 2"/>
+          <p:cNvPr id="5438758" name="Notes Placeholder 2"/>
           <p:cNvSpPr>
             <a:spLocks noGrp="1"/>
           </p:cNvSpPr>
@@ -1658,7 +1658,7 @@
       </p:sp>
       <p:sp>
         <p:nvSpPr>
-          <p:cNvPr id="1893682065" name="Slide Number Placeholder 3"/>
+          <p:cNvPr id="2077705117" name="Slide Number Placeholder 3"/>
           <p:cNvSpPr>
             <a:spLocks noGrp="1"/>
           </p:cNvSpPr>
@@ -1709,7 +1709,7 @@
       </p:grpSpPr>
       <p:sp>
         <p:nvSpPr>
-          <p:cNvPr id="809538723" name="Slide Image Placeholder 1"/>
+          <p:cNvPr id="94720085" name="Slide Image Placeholder 1"/>
           <p:cNvSpPr>
             <a:spLocks noChangeAspect="1" noGrp="1" noRot="1"/>
           </p:cNvSpPr>
@@ -1721,7 +1721,7 @@
       </p:sp>
       <p:sp>
         <p:nvSpPr>
-          <p:cNvPr id="96117503" name="Notes Placeholder 2"/>
+          <p:cNvPr id="1784202183" name="Notes Placeholder 2"/>
           <p:cNvSpPr>
             <a:spLocks noGrp="1"/>
           </p:cNvSpPr>
@@ -1743,7 +1743,7 @@
       </p:sp>
       <p:sp>
         <p:nvSpPr>
-          <p:cNvPr id="1896444647" name="Slide Number Placeholder 3"/>
+          <p:cNvPr id="861688934" name="Slide Number Placeholder 3"/>
           <p:cNvSpPr>
             <a:spLocks noGrp="1"/>
           </p:cNvSpPr>
@@ -1794,7 +1794,7 @@
       </p:grpSpPr>
       <p:sp>
         <p:nvSpPr>
-          <p:cNvPr id="206725692" name="Slide Image Placeholder 1"/>
+          <p:cNvPr id="754147924" name="Slide Image Placeholder 1"/>
           <p:cNvSpPr>
             <a:spLocks noChangeAspect="1" noGrp="1" noRot="1"/>
           </p:cNvSpPr>
@@ -1806,7 +1806,7 @@
       </p:sp>
       <p:sp>
         <p:nvSpPr>
-          <p:cNvPr id="1646175688" name="Notes Placeholder 2"/>
+          <p:cNvPr id="1512171989" name="Notes Placeholder 2"/>
           <p:cNvSpPr>
             <a:spLocks noGrp="1"/>
           </p:cNvSpPr>
@@ -1828,7 +1828,7 @@
       </p:sp>
       <p:sp>
         <p:nvSpPr>
-          <p:cNvPr id="1552698433" name="Slide Number Placeholder 3"/>
+          <p:cNvPr id="2049726020" name="Slide Number Placeholder 3"/>
           <p:cNvSpPr>
             <a:spLocks noGrp="1"/>
           </p:cNvSpPr>
@@ -1879,7 +1879,7 @@
       </p:grpSpPr>
       <p:sp>
         <p:nvSpPr>
-          <p:cNvPr id="972664367" name="Slide Image Placeholder 1"/>
+          <p:cNvPr id="99679420" name="Slide Image Placeholder 1"/>
           <p:cNvSpPr>
             <a:spLocks noChangeAspect="1" noGrp="1" noRot="1"/>
           </p:cNvSpPr>
@@ -1891,7 +1891,7 @@
       </p:sp>
       <p:sp>
         <p:nvSpPr>
-          <p:cNvPr id="785362708" name="Notes Placeholder 2"/>
+          <p:cNvPr id="1960577188" name="Notes Placeholder 2"/>
           <p:cNvSpPr>
             <a:spLocks noGrp="1"/>
           </p:cNvSpPr>
@@ -1913,7 +1913,7 @@
       </p:sp>
       <p:sp>
         <p:nvSpPr>
-          <p:cNvPr id="938480980" name="Slide Number Placeholder 3"/>
+          <p:cNvPr id="1268934110" name="Slide Number Placeholder 3"/>
           <p:cNvSpPr>
             <a:spLocks noGrp="1"/>
           </p:cNvSpPr>
@@ -1964,7 +1964,7 @@
       </p:grpSpPr>
       <p:sp>
         <p:nvSpPr>
-          <p:cNvPr id="1511828941" name="Заголовок 1"/>
+          <p:cNvPr id="1544513276" name="Заголовок 1"/>
           <p:cNvSpPr>
             <a:spLocks noGrp="1"/>
           </p:cNvSpPr>
@@ -1999,7 +1999,7 @@
       </p:sp>
       <p:sp>
         <p:nvSpPr>
-          <p:cNvPr id="1948947964" name="Подзаголовок 2"/>
+          <p:cNvPr id="2105021586" name="Подзаголовок 2"/>
           <p:cNvSpPr>
             <a:spLocks noGrp="1"/>
           </p:cNvSpPr>
@@ -2067,7 +2067,7 @@
       </p:sp>
       <p:sp>
         <p:nvSpPr>
-          <p:cNvPr id="1038408730" name="Дата 3"/>
+          <p:cNvPr id="1486710633" name="Дата 3"/>
           <p:cNvSpPr>
             <a:spLocks noGrp="1"/>
           </p:cNvSpPr>
@@ -2093,7 +2093,7 @@
       </p:sp>
       <p:sp>
         <p:nvSpPr>
-          <p:cNvPr id="378021907" name="Нижний колонтитул 4"/>
+          <p:cNvPr id="1785357374" name="Нижний колонтитул 4"/>
           <p:cNvSpPr>
             <a:spLocks noGrp="1"/>
           </p:cNvSpPr>
@@ -2115,7 +2115,7 @@
       </p:sp>
       <p:sp>
         <p:nvSpPr>
-          <p:cNvPr id="764849934" name="Номер слайда 5"/>
+          <p:cNvPr id="1945320491" name="Номер слайда 5"/>
           <p:cNvSpPr>
             <a:spLocks noGrp="1"/>
           </p:cNvSpPr>
@@ -2166,7 +2166,7 @@
       </p:grpSpPr>
       <p:sp>
         <p:nvSpPr>
-          <p:cNvPr id="1815020405" name="Заголовок 1"/>
+          <p:cNvPr id="1151930323" name="Заголовок 1"/>
           <p:cNvSpPr>
             <a:spLocks noGrp="1"/>
           </p:cNvSpPr>
@@ -2192,7 +2192,7 @@
       </p:sp>
       <p:sp>
         <p:nvSpPr>
-          <p:cNvPr id="2116905233" name="Вертикальный текст 2"/>
+          <p:cNvPr id="1652784177" name="Вертикальный текст 2"/>
           <p:cNvSpPr>
             <a:spLocks noGrp="1"/>
           </p:cNvSpPr>
@@ -2258,7 +2258,7 @@
       </p:sp>
       <p:sp>
         <p:nvSpPr>
-          <p:cNvPr id="727257238" name="Дата 3"/>
+          <p:cNvPr id="2059832466" name="Дата 3"/>
           <p:cNvSpPr>
             <a:spLocks noGrp="1"/>
           </p:cNvSpPr>
@@ -2284,7 +2284,7 @@
       </p:sp>
       <p:sp>
         <p:nvSpPr>
-          <p:cNvPr id="188747366" name="Нижний колонтитул 4"/>
+          <p:cNvPr id="563144274" name="Нижний колонтитул 4"/>
           <p:cNvSpPr>
             <a:spLocks noGrp="1"/>
           </p:cNvSpPr>
@@ -2306,7 +2306,7 @@
       </p:sp>
       <p:sp>
         <p:nvSpPr>
-          <p:cNvPr id="1329911625" name="Номер слайда 5"/>
+          <p:cNvPr id="1106434825" name="Номер слайда 5"/>
           <p:cNvSpPr>
             <a:spLocks noGrp="1"/>
           </p:cNvSpPr>
@@ -2357,7 +2357,7 @@
       </p:grpSpPr>
       <p:sp>
         <p:nvSpPr>
-          <p:cNvPr id="1923154828" name="Вертикальный заголовок 1"/>
+          <p:cNvPr id="1396215593" name="Вертикальный заголовок 1"/>
           <p:cNvSpPr>
             <a:spLocks noGrp="1"/>
           </p:cNvSpPr>
@@ -2388,7 +2388,7 @@
       </p:sp>
       <p:sp>
         <p:nvSpPr>
-          <p:cNvPr id="1225803582" name="Вертикальный текст 2"/>
+          <p:cNvPr id="2078095737" name="Вертикальный текст 2"/>
           <p:cNvSpPr>
             <a:spLocks noGrp="1"/>
           </p:cNvSpPr>
@@ -2459,7 +2459,7 @@
       </p:sp>
       <p:sp>
         <p:nvSpPr>
-          <p:cNvPr id="1766735015" name="Дата 3"/>
+          <p:cNvPr id="621304060" name="Дата 3"/>
           <p:cNvSpPr>
             <a:spLocks noGrp="1"/>
           </p:cNvSpPr>
@@ -2485,7 +2485,7 @@
       </p:sp>
       <p:sp>
         <p:nvSpPr>
-          <p:cNvPr id="531187906" name="Нижний колонтитул 4"/>
+          <p:cNvPr id="1489635126" name="Нижний колонтитул 4"/>
           <p:cNvSpPr>
             <a:spLocks noGrp="1"/>
           </p:cNvSpPr>
@@ -2507,7 +2507,7 @@
       </p:sp>
       <p:sp>
         <p:nvSpPr>
-          <p:cNvPr id="572073402" name="Номер слайда 5"/>
+          <p:cNvPr id="1647979662" name="Номер слайда 5"/>
           <p:cNvSpPr>
             <a:spLocks noGrp="1"/>
           </p:cNvSpPr>
@@ -2558,7 +2558,7 @@
       </p:grpSpPr>
       <p:pic>
         <p:nvPicPr>
-          <p:cNvPr id="212374885" name="Picture 6" descr="HD-ShadowLong.png"/>
+          <p:cNvPr id="244536984" name="Picture 6" descr="HD-ShadowLong.png"/>
           <p:cNvPicPr>
             <a:picLocks noChangeAspect="1"/>
           </p:cNvPicPr>
@@ -2580,7 +2580,7 @@
       </p:pic>
       <p:pic>
         <p:nvPicPr>
-          <p:cNvPr id="860520886" name="Picture 7" descr="HD-ShadowShort.png"/>
+          <p:cNvPr id="1230666818" name="Picture 7" descr="HD-ShadowShort.png"/>
           <p:cNvPicPr>
             <a:picLocks noChangeAspect="1"/>
           </p:cNvPicPr>
@@ -2602,7 +2602,7 @@
       </p:pic>
       <p:sp>
         <p:nvSpPr>
-          <p:cNvPr id="1372211083" name="Rectangle 8"/>
+          <p:cNvPr id="745942002" name="Rectangle 8"/>
           <p:cNvSpPr/>
           <p:nvPr/>
         </p:nvSpPr>
@@ -2643,7 +2643,7 @@
       </p:sp>
       <p:sp>
         <p:nvSpPr>
-          <p:cNvPr id="357219531" name="Rectangle 9"/>
+          <p:cNvPr id="1811851683" name="Rectangle 9"/>
           <p:cNvSpPr/>
           <p:nvPr/>
         </p:nvSpPr>
@@ -2681,7 +2681,7 @@
       </p:sp>
       <p:sp>
         <p:nvSpPr>
-          <p:cNvPr id="249742464" name="Title 1"/>
+          <p:cNvPr id="359248440" name="Title 1"/>
           <p:cNvSpPr>
             <a:spLocks noGrp="1"/>
           </p:cNvSpPr>
@@ -2718,7 +2718,7 @@
       </p:sp>
       <p:sp>
         <p:nvSpPr>
-          <p:cNvPr id="436299171" name="Subtitle 2"/>
+          <p:cNvPr id="195606608" name="Subtitle 2"/>
           <p:cNvSpPr>
             <a:spLocks noGrp="1"/>
           </p:cNvSpPr>
@@ -2788,7 +2788,7 @@
       </p:sp>
       <p:sp>
         <p:nvSpPr>
-          <p:cNvPr id="308933876" name="Date Placeholder 3"/>
+          <p:cNvPr id="1567574483" name="Date Placeholder 3"/>
           <p:cNvSpPr>
             <a:spLocks noGrp="1"/>
           </p:cNvSpPr>
@@ -2814,7 +2814,7 @@
       </p:sp>
       <p:sp>
         <p:nvSpPr>
-          <p:cNvPr id="1983556531" name="Footer Placeholder 4"/>
+          <p:cNvPr id="1023534629" name="Footer Placeholder 4"/>
           <p:cNvSpPr>
             <a:spLocks noGrp="1"/>
           </p:cNvSpPr>
@@ -2836,7 +2836,7 @@
       </p:sp>
       <p:sp>
         <p:nvSpPr>
-          <p:cNvPr id="72837612" name="Slide Number Placeholder 5"/>
+          <p:cNvPr id="381610664" name="Slide Number Placeholder 5"/>
           <p:cNvSpPr>
             <a:spLocks noGrp="1"/>
           </p:cNvSpPr>
@@ -2892,7 +2892,7 @@
       </p:grpSpPr>
       <p:pic>
         <p:nvPicPr>
-          <p:cNvPr id="858560092" name="Picture 14" descr="HD-ShadowLong.png"/>
+          <p:cNvPr id="528529123" name="Picture 14" descr="HD-ShadowLong.png"/>
           <p:cNvPicPr>
             <a:picLocks noChangeAspect="1"/>
           </p:cNvPicPr>
@@ -2914,7 +2914,7 @@
       </p:pic>
       <p:pic>
         <p:nvPicPr>
-          <p:cNvPr id="2040604025" name="Picture 15" descr="HD-ShadowShort.png"/>
+          <p:cNvPr id="1556386907" name="Picture 15" descr="HD-ShadowShort.png"/>
           <p:cNvPicPr>
             <a:picLocks noChangeAspect="1"/>
           </p:cNvPicPr>
@@ -2936,7 +2936,7 @@
       </p:pic>
       <p:sp>
         <p:nvSpPr>
-          <p:cNvPr id="1264708468" name="Rectangle 16"/>
+          <p:cNvPr id="837819775" name="Rectangle 16"/>
           <p:cNvSpPr/>
           <p:nvPr/>
         </p:nvSpPr>
@@ -2977,7 +2977,7 @@
       </p:sp>
       <p:sp>
         <p:nvSpPr>
-          <p:cNvPr id="1838220868" name="Rectangle 17"/>
+          <p:cNvPr id="1448344126" name="Rectangle 17"/>
           <p:cNvSpPr/>
           <p:nvPr/>
         </p:nvSpPr>
@@ -3015,7 +3015,7 @@
       </p:sp>
       <p:sp>
         <p:nvSpPr>
-          <p:cNvPr id="655595148" name="Title 1"/>
+          <p:cNvPr id="698507803" name="Title 1"/>
           <p:cNvSpPr>
             <a:spLocks noGrp="1"/>
           </p:cNvSpPr>
@@ -3041,7 +3041,7 @@
       </p:sp>
       <p:sp>
         <p:nvSpPr>
-          <p:cNvPr id="1644560578" name="Content Placeholder 2"/>
+          <p:cNvPr id="964609422" name="Content Placeholder 2"/>
           <p:cNvSpPr>
             <a:spLocks noGrp="1"/>
           </p:cNvSpPr>
@@ -3107,7 +3107,7 @@
       </p:sp>
       <p:sp>
         <p:nvSpPr>
-          <p:cNvPr id="166699740" name="Date Placeholder 3"/>
+          <p:cNvPr id="1295177857" name="Date Placeholder 3"/>
           <p:cNvSpPr>
             <a:spLocks noGrp="1"/>
           </p:cNvSpPr>
@@ -3133,7 +3133,7 @@
       </p:sp>
       <p:sp>
         <p:nvSpPr>
-          <p:cNvPr id="497363406" name="Footer Placeholder 4"/>
+          <p:cNvPr id="10729474" name="Footer Placeholder 4"/>
           <p:cNvSpPr>
             <a:spLocks noGrp="1"/>
           </p:cNvSpPr>
@@ -3155,7 +3155,7 @@
       </p:sp>
       <p:sp>
         <p:nvSpPr>
-          <p:cNvPr id="1234837928" name="Slide Number Placeholder 5"/>
+          <p:cNvPr id="115031650" name="Slide Number Placeholder 5"/>
           <p:cNvSpPr>
             <a:spLocks noGrp="1"/>
           </p:cNvSpPr>
@@ -3206,7 +3206,7 @@
       </p:grpSpPr>
       <p:pic>
         <p:nvPicPr>
-          <p:cNvPr id="2088797981" name="Picture 6" descr="HD-ShadowLong.png"/>
+          <p:cNvPr id="1426255095" name="Picture 6" descr="HD-ShadowLong.png"/>
           <p:cNvPicPr>
             <a:picLocks noChangeAspect="1"/>
           </p:cNvPicPr>
@@ -3228,7 +3228,7 @@
       </p:pic>
       <p:pic>
         <p:nvPicPr>
-          <p:cNvPr id="1412756727" name="Picture 7" descr="HD-ShadowShort.png"/>
+          <p:cNvPr id="1060677140" name="Picture 7" descr="HD-ShadowShort.png"/>
           <p:cNvPicPr>
             <a:picLocks noChangeAspect="1"/>
           </p:cNvPicPr>
@@ -3250,7 +3250,7 @@
       </p:pic>
       <p:sp>
         <p:nvSpPr>
-          <p:cNvPr id="438850150" name="Rectangle 8"/>
+          <p:cNvPr id="1805971104" name="Rectangle 8"/>
           <p:cNvSpPr/>
           <p:nvPr/>
         </p:nvSpPr>
@@ -3291,7 +3291,7 @@
       </p:sp>
       <p:sp>
         <p:nvSpPr>
-          <p:cNvPr id="490088821" name="Rectangle 9"/>
+          <p:cNvPr id="1276844395" name="Rectangle 9"/>
           <p:cNvSpPr/>
           <p:nvPr/>
         </p:nvSpPr>
@@ -3329,7 +3329,7 @@
       </p:sp>
       <p:sp>
         <p:nvSpPr>
-          <p:cNvPr id="1622128784" name="Title 1"/>
+          <p:cNvPr id="1213843123" name="Title 1"/>
           <p:cNvSpPr>
             <a:spLocks noGrp="1"/>
           </p:cNvSpPr>
@@ -3366,7 +3366,7 @@
       </p:sp>
       <p:sp>
         <p:nvSpPr>
-          <p:cNvPr id="1438952253" name="Text Placeholder 2"/>
+          <p:cNvPr id="909413144" name="Text Placeholder 2"/>
           <p:cNvSpPr>
             <a:spLocks noGrp="1"/>
           </p:cNvSpPr>
@@ -3490,7 +3490,7 @@
       </p:sp>
       <p:sp>
         <p:nvSpPr>
-          <p:cNvPr id="1634217882" name="Date Placeholder 3"/>
+          <p:cNvPr id="972023547" name="Date Placeholder 3"/>
           <p:cNvSpPr>
             <a:spLocks noGrp="1"/>
           </p:cNvSpPr>
@@ -3516,7 +3516,7 @@
       </p:sp>
       <p:sp>
         <p:nvSpPr>
-          <p:cNvPr id="1229765503" name="Footer Placeholder 4"/>
+          <p:cNvPr id="1858693723" name="Footer Placeholder 4"/>
           <p:cNvSpPr>
             <a:spLocks noGrp="1"/>
           </p:cNvSpPr>
@@ -3538,7 +3538,7 @@
       </p:sp>
       <p:sp>
         <p:nvSpPr>
-          <p:cNvPr id="232801857" name="Slide Number Placeholder 5"/>
+          <p:cNvPr id="1993432570" name="Slide Number Placeholder 5"/>
           <p:cNvSpPr>
             <a:spLocks noGrp="1"/>
           </p:cNvSpPr>
@@ -3594,7 +3594,7 @@
       </p:grpSpPr>
       <p:pic>
         <p:nvPicPr>
-          <p:cNvPr id="1269470865" name="Picture 7" descr="HD-ShadowLong.png"/>
+          <p:cNvPr id="638304686" name="Picture 7" descr="HD-ShadowLong.png"/>
           <p:cNvPicPr>
             <a:picLocks noChangeAspect="1"/>
           </p:cNvPicPr>
@@ -3616,7 +3616,7 @@
       </p:pic>
       <p:pic>
         <p:nvPicPr>
-          <p:cNvPr id="116465415" name="Picture 8" descr="HD-ShadowShort.png"/>
+          <p:cNvPr id="1209488918" name="Picture 8" descr="HD-ShadowShort.png"/>
           <p:cNvPicPr>
             <a:picLocks noChangeAspect="1"/>
           </p:cNvPicPr>
@@ -3638,7 +3638,7 @@
       </p:pic>
       <p:sp>
         <p:nvSpPr>
-          <p:cNvPr id="107655203" name="Rectangle 9"/>
+          <p:cNvPr id="2110106078" name="Rectangle 9"/>
           <p:cNvSpPr/>
           <p:nvPr/>
         </p:nvSpPr>
@@ -3679,7 +3679,7 @@
       </p:sp>
       <p:sp>
         <p:nvSpPr>
-          <p:cNvPr id="901148690" name="Rectangle 10"/>
+          <p:cNvPr id="1966257460" name="Rectangle 10"/>
           <p:cNvSpPr/>
           <p:nvPr/>
         </p:nvSpPr>
@@ -3717,7 +3717,7 @@
       </p:sp>
       <p:sp>
         <p:nvSpPr>
-          <p:cNvPr id="1629294217" name="Title 1"/>
+          <p:cNvPr id="1878047190" name="Title 1"/>
           <p:cNvSpPr>
             <a:spLocks noGrp="1"/>
           </p:cNvSpPr>
@@ -3743,7 +3743,7 @@
       </p:sp>
       <p:sp>
         <p:nvSpPr>
-          <p:cNvPr id="578543822" name="Content Placeholder 2"/>
+          <p:cNvPr id="167960289" name="Content Placeholder 2"/>
           <p:cNvSpPr>
             <a:spLocks noGrp="1"/>
           </p:cNvSpPr>
@@ -3814,7 +3814,7 @@
       </p:sp>
       <p:sp>
         <p:nvSpPr>
-          <p:cNvPr id="1435442327" name="Content Placeholder 3"/>
+          <p:cNvPr id="625505721" name="Content Placeholder 3"/>
           <p:cNvSpPr>
             <a:spLocks noGrp="1"/>
           </p:cNvSpPr>
@@ -3885,7 +3885,7 @@
       </p:sp>
       <p:sp>
         <p:nvSpPr>
-          <p:cNvPr id="202747450" name="Date Placeholder 4"/>
+          <p:cNvPr id="1591143355" name="Date Placeholder 4"/>
           <p:cNvSpPr>
             <a:spLocks noGrp="1"/>
           </p:cNvSpPr>
@@ -3911,7 +3911,7 @@
       </p:sp>
       <p:sp>
         <p:nvSpPr>
-          <p:cNvPr id="766849730" name="Footer Placeholder 5"/>
+          <p:cNvPr id="2116668213" name="Footer Placeholder 5"/>
           <p:cNvSpPr>
             <a:spLocks noGrp="1"/>
           </p:cNvSpPr>
@@ -3933,7 +3933,7 @@
       </p:sp>
       <p:sp>
         <p:nvSpPr>
-          <p:cNvPr id="622516380" name="Slide Number Placeholder 6"/>
+          <p:cNvPr id="1984555394" name="Slide Number Placeholder 6"/>
           <p:cNvSpPr>
             <a:spLocks noGrp="1"/>
           </p:cNvSpPr>
@@ -3984,7 +3984,7 @@
       </p:grpSpPr>
       <p:pic>
         <p:nvPicPr>
-          <p:cNvPr id="216359669" name="Picture 9" descr="HD-ShadowLong.png"/>
+          <p:cNvPr id="1498325894" name="Picture 9" descr="HD-ShadowLong.png"/>
           <p:cNvPicPr>
             <a:picLocks noChangeAspect="1"/>
           </p:cNvPicPr>
@@ -4006,7 +4006,7 @@
       </p:pic>
       <p:pic>
         <p:nvPicPr>
-          <p:cNvPr id="834219924" name="Picture 10" descr="HD-ShadowShort.png"/>
+          <p:cNvPr id="837332872" name="Picture 10" descr="HD-ShadowShort.png"/>
           <p:cNvPicPr>
             <a:picLocks noChangeAspect="1"/>
           </p:cNvPicPr>
@@ -4028,7 +4028,7 @@
       </p:pic>
       <p:sp>
         <p:nvSpPr>
-          <p:cNvPr id="1455377248" name="Rectangle 11"/>
+          <p:cNvPr id="1778684034" name="Rectangle 11"/>
           <p:cNvSpPr/>
           <p:nvPr/>
         </p:nvSpPr>
@@ -4069,7 +4069,7 @@
       </p:sp>
       <p:sp>
         <p:nvSpPr>
-          <p:cNvPr id="1801838367" name="Rectangle 12"/>
+          <p:cNvPr id="974285690" name="Rectangle 12"/>
           <p:cNvSpPr/>
           <p:nvPr/>
         </p:nvSpPr>
@@ -4107,7 +4107,7 @@
       </p:sp>
       <p:sp>
         <p:nvSpPr>
-          <p:cNvPr id="1675056706" name="Title 1"/>
+          <p:cNvPr id="932613914" name="Title 1"/>
           <p:cNvSpPr>
             <a:spLocks noGrp="1"/>
           </p:cNvSpPr>
@@ -4138,7 +4138,7 @@
       </p:sp>
       <p:sp>
         <p:nvSpPr>
-          <p:cNvPr id="1572798189" name="Text Placeholder 2"/>
+          <p:cNvPr id="189222093" name="Text Placeholder 2"/>
           <p:cNvSpPr>
             <a:spLocks noGrp="1"/>
           </p:cNvSpPr>
@@ -4206,7 +4206,7 @@
       </p:sp>
       <p:sp>
         <p:nvSpPr>
-          <p:cNvPr id="55814126" name="Content Placeholder 3"/>
+          <p:cNvPr id="251876630" name="Content Placeholder 3"/>
           <p:cNvSpPr>
             <a:spLocks noGrp="1"/>
           </p:cNvSpPr>
@@ -4277,7 +4277,7 @@
       </p:sp>
       <p:sp>
         <p:nvSpPr>
-          <p:cNvPr id="419294746" name="Text Placeholder 4"/>
+          <p:cNvPr id="1373883036" name="Text Placeholder 4"/>
           <p:cNvSpPr>
             <a:spLocks noGrp="1"/>
           </p:cNvSpPr>
@@ -4345,7 +4345,7 @@
       </p:sp>
       <p:sp>
         <p:nvSpPr>
-          <p:cNvPr id="1466499387" name="Content Placeholder 5"/>
+          <p:cNvPr id="851836315" name="Content Placeholder 5"/>
           <p:cNvSpPr>
             <a:spLocks noGrp="1"/>
           </p:cNvSpPr>
@@ -4416,7 +4416,7 @@
       </p:sp>
       <p:sp>
         <p:nvSpPr>
-          <p:cNvPr id="859607374" name="Date Placeholder 6"/>
+          <p:cNvPr id="809598423" name="Date Placeholder 6"/>
           <p:cNvSpPr>
             <a:spLocks noGrp="1"/>
           </p:cNvSpPr>
@@ -4442,7 +4442,7 @@
       </p:sp>
       <p:sp>
         <p:nvSpPr>
-          <p:cNvPr id="703742006" name="Footer Placeholder 7"/>
+          <p:cNvPr id="27511994" name="Footer Placeholder 7"/>
           <p:cNvSpPr>
             <a:spLocks noGrp="1"/>
           </p:cNvSpPr>
@@ -4464,7 +4464,7 @@
       </p:sp>
       <p:sp>
         <p:nvSpPr>
-          <p:cNvPr id="1353543065" name="Slide Number Placeholder 8"/>
+          <p:cNvPr id="1671524844" name="Slide Number Placeholder 8"/>
           <p:cNvSpPr>
             <a:spLocks noGrp="1"/>
           </p:cNvSpPr>
@@ -4515,7 +4515,7 @@
       </p:grpSpPr>
       <p:pic>
         <p:nvPicPr>
-          <p:cNvPr id="18609248" name="Picture 5" descr="HD-ShadowLong.png"/>
+          <p:cNvPr id="829148157" name="Picture 5" descr="HD-ShadowLong.png"/>
           <p:cNvPicPr>
             <a:picLocks noChangeAspect="1"/>
           </p:cNvPicPr>
@@ -4537,7 +4537,7 @@
       </p:pic>
       <p:pic>
         <p:nvPicPr>
-          <p:cNvPr id="51211182" name="Picture 6" descr="HD-ShadowShort.png"/>
+          <p:cNvPr id="490272192" name="Picture 6" descr="HD-ShadowShort.png"/>
           <p:cNvPicPr>
             <a:picLocks noChangeAspect="1"/>
           </p:cNvPicPr>
@@ -4559,7 +4559,7 @@
       </p:pic>
       <p:sp>
         <p:nvSpPr>
-          <p:cNvPr id="807281676" name="Rectangle 7"/>
+          <p:cNvPr id="2066949020" name="Rectangle 7"/>
           <p:cNvSpPr/>
           <p:nvPr/>
         </p:nvSpPr>
@@ -4600,7 +4600,7 @@
       </p:sp>
       <p:sp>
         <p:nvSpPr>
-          <p:cNvPr id="1079471218" name="Rectangle 8"/>
+          <p:cNvPr id="577618086" name="Rectangle 8"/>
           <p:cNvSpPr/>
           <p:nvPr/>
         </p:nvSpPr>
@@ -4638,7 +4638,7 @@
       </p:sp>
       <p:sp>
         <p:nvSpPr>
-          <p:cNvPr id="340877773" name="Title 1"/>
+          <p:cNvPr id="1191209328" name="Title 1"/>
           <p:cNvSpPr>
             <a:spLocks noGrp="1"/>
           </p:cNvSpPr>
@@ -4664,7 +4664,7 @@
       </p:sp>
       <p:sp>
         <p:nvSpPr>
-          <p:cNvPr id="1933373246" name="Date Placeholder 2"/>
+          <p:cNvPr id="93889277" name="Date Placeholder 2"/>
           <p:cNvSpPr>
             <a:spLocks noGrp="1"/>
           </p:cNvSpPr>
@@ -4690,7 +4690,7 @@
       </p:sp>
       <p:sp>
         <p:nvSpPr>
-          <p:cNvPr id="1898882001" name="Footer Placeholder 3"/>
+          <p:cNvPr id="732855905" name="Footer Placeholder 3"/>
           <p:cNvSpPr>
             <a:spLocks noGrp="1"/>
           </p:cNvSpPr>
@@ -4712,7 +4712,7 @@
       </p:sp>
       <p:sp>
         <p:nvSpPr>
-          <p:cNvPr id="1557512205" name="Slide Number Placeholder 4"/>
+          <p:cNvPr id="1009117610" name="Slide Number Placeholder 4"/>
           <p:cNvSpPr>
             <a:spLocks noGrp="1"/>
           </p:cNvSpPr>
@@ -4763,7 +4763,7 @@
       </p:grpSpPr>
       <p:pic>
         <p:nvPicPr>
-          <p:cNvPr id="353243567" name="Picture 4" descr="HD-ShadowShort.png"/>
+          <p:cNvPr id="766643990" name="Picture 4" descr="HD-ShadowShort.png"/>
           <p:cNvPicPr>
             <a:picLocks noChangeAspect="1"/>
           </p:cNvPicPr>
@@ -4785,7 +4785,7 @@
       </p:pic>
       <p:sp>
         <p:nvSpPr>
-          <p:cNvPr id="1815435822" name="Rectangle 5"/>
+          <p:cNvPr id="1500828022" name="Rectangle 5"/>
           <p:cNvSpPr/>
           <p:nvPr/>
         </p:nvSpPr>
@@ -4823,7 +4823,7 @@
       </p:sp>
       <p:sp>
         <p:nvSpPr>
-          <p:cNvPr id="840056932" name="Date Placeholder 1"/>
+          <p:cNvPr id="1949385328" name="Date Placeholder 1"/>
           <p:cNvSpPr>
             <a:spLocks noGrp="1"/>
           </p:cNvSpPr>
@@ -4849,7 +4849,7 @@
       </p:sp>
       <p:sp>
         <p:nvSpPr>
-          <p:cNvPr id="1174921068" name="Footer Placeholder 2"/>
+          <p:cNvPr id="1123972457" name="Footer Placeholder 2"/>
           <p:cNvSpPr>
             <a:spLocks noGrp="1"/>
           </p:cNvSpPr>
@@ -4871,7 +4871,7 @@
       </p:sp>
       <p:sp>
         <p:nvSpPr>
-          <p:cNvPr id="189253090" name="Slide Number Placeholder 3"/>
+          <p:cNvPr id="6293639" name="Slide Number Placeholder 3"/>
           <p:cNvSpPr>
             <a:spLocks noGrp="1"/>
           </p:cNvSpPr>
@@ -4922,7 +4922,7 @@
       </p:grpSpPr>
       <p:pic>
         <p:nvPicPr>
-          <p:cNvPr id="886160717" name="Picture 7" descr="HD-ShadowLong.png"/>
+          <p:cNvPr id="1522919797" name="Picture 7" descr="HD-ShadowLong.png"/>
           <p:cNvPicPr>
             <a:picLocks noChangeAspect="1"/>
           </p:cNvPicPr>
@@ -4944,7 +4944,7 @@
       </p:pic>
       <p:pic>
         <p:nvPicPr>
-          <p:cNvPr id="23127682" name="Picture 8" descr="HD-ShadowShort.png"/>
+          <p:cNvPr id="236470557" name="Picture 8" descr="HD-ShadowShort.png"/>
           <p:cNvPicPr>
             <a:picLocks noChangeAspect="1"/>
           </p:cNvPicPr>
@@ -4966,7 +4966,7 @@
       </p:pic>
       <p:sp>
         <p:nvSpPr>
-          <p:cNvPr id="283666622" name="Rectangle 9"/>
+          <p:cNvPr id="1242707064" name="Rectangle 9"/>
           <p:cNvSpPr/>
           <p:nvPr/>
         </p:nvSpPr>
@@ -5007,7 +5007,7 @@
       </p:sp>
       <p:sp>
         <p:nvSpPr>
-          <p:cNvPr id="626396779" name="Rectangle 10"/>
+          <p:cNvPr id="1651589171" name="Rectangle 10"/>
           <p:cNvSpPr/>
           <p:nvPr/>
         </p:nvSpPr>
@@ -5045,7 +5045,7 @@
       </p:sp>
       <p:sp>
         <p:nvSpPr>
-          <p:cNvPr id="544497723" name="Title 1"/>
+          <p:cNvPr id="1111160712" name="Title 1"/>
           <p:cNvSpPr>
             <a:spLocks noGrp="1"/>
           </p:cNvSpPr>
@@ -5082,7 +5082,7 @@
       </p:sp>
       <p:sp>
         <p:nvSpPr>
-          <p:cNvPr id="1125246673" name="Content Placeholder 2"/>
+          <p:cNvPr id="261318104" name="Content Placeholder 2"/>
           <p:cNvSpPr>
             <a:spLocks noGrp="1"/>
           </p:cNvSpPr>
@@ -5153,7 +5153,7 @@
       </p:sp>
       <p:sp>
         <p:nvSpPr>
-          <p:cNvPr id="160882335" name="Text Placeholder 3"/>
+          <p:cNvPr id="721977878" name="Text Placeholder 3"/>
           <p:cNvSpPr>
             <a:spLocks noGrp="1"/>
           </p:cNvSpPr>
@@ -5221,7 +5221,7 @@
       </p:sp>
       <p:sp>
         <p:nvSpPr>
-          <p:cNvPr id="2068733915" name="Date Placeholder 4"/>
+          <p:cNvPr id="881386818" name="Date Placeholder 4"/>
           <p:cNvSpPr>
             <a:spLocks noGrp="1"/>
           </p:cNvSpPr>
@@ -5247,7 +5247,7 @@
       </p:sp>
       <p:sp>
         <p:nvSpPr>
-          <p:cNvPr id="1336447002" name="Footer Placeholder 5"/>
+          <p:cNvPr id="1473277448" name="Footer Placeholder 5"/>
           <p:cNvSpPr>
             <a:spLocks noGrp="1"/>
           </p:cNvSpPr>
@@ -5269,7 +5269,7 @@
       </p:sp>
       <p:sp>
         <p:nvSpPr>
-          <p:cNvPr id="1976779372" name="Slide Number Placeholder 6"/>
+          <p:cNvPr id="224971378" name="Slide Number Placeholder 6"/>
           <p:cNvSpPr>
             <a:spLocks noGrp="1"/>
           </p:cNvSpPr>
@@ -5320,7 +5320,7 @@
       </p:grpSpPr>
       <p:sp>
         <p:nvSpPr>
-          <p:cNvPr id="411829291" name="Заголовок 1"/>
+          <p:cNvPr id="742923005" name="Заголовок 1"/>
           <p:cNvSpPr>
             <a:spLocks noGrp="1"/>
           </p:cNvSpPr>
@@ -5346,7 +5346,7 @@
       </p:sp>
       <p:sp>
         <p:nvSpPr>
-          <p:cNvPr id="1191476946" name="Объект 2"/>
+          <p:cNvPr id="1628838131" name="Объект 2"/>
           <p:cNvSpPr>
             <a:spLocks noGrp="1"/>
           </p:cNvSpPr>
@@ -5412,7 +5412,7 @@
       </p:sp>
       <p:sp>
         <p:nvSpPr>
-          <p:cNvPr id="1170739389" name="Дата 3"/>
+          <p:cNvPr id="1849904970" name="Дата 3"/>
           <p:cNvSpPr>
             <a:spLocks noGrp="1"/>
           </p:cNvSpPr>
@@ -5438,7 +5438,7 @@
       </p:sp>
       <p:sp>
         <p:nvSpPr>
-          <p:cNvPr id="1288938550" name="Нижний колонтитул 4"/>
+          <p:cNvPr id="730875048" name="Нижний колонтитул 4"/>
           <p:cNvSpPr>
             <a:spLocks noGrp="1"/>
           </p:cNvSpPr>
@@ -5460,7 +5460,7 @@
       </p:sp>
       <p:sp>
         <p:nvSpPr>
-          <p:cNvPr id="357470915" name="Номер слайда 5"/>
+          <p:cNvPr id="840107525" name="Номер слайда 5"/>
           <p:cNvSpPr>
             <a:spLocks noGrp="1"/>
           </p:cNvSpPr>
@@ -5511,7 +5511,7 @@
       </p:grpSpPr>
       <p:pic>
         <p:nvPicPr>
-          <p:cNvPr id="1680527327" name="Picture 7" descr="HD-ShadowLong.png"/>
+          <p:cNvPr id="1580001990" name="Picture 7" descr="HD-ShadowLong.png"/>
           <p:cNvPicPr>
             <a:picLocks noChangeAspect="1"/>
           </p:cNvPicPr>
@@ -5533,7 +5533,7 @@
       </p:pic>
       <p:pic>
         <p:nvPicPr>
-          <p:cNvPr id="1713962559" name="Picture 8" descr="HD-ShadowShort.png"/>
+          <p:cNvPr id="366540290" name="Picture 8" descr="HD-ShadowShort.png"/>
           <p:cNvPicPr>
             <a:picLocks noChangeAspect="1"/>
           </p:cNvPicPr>
@@ -5555,7 +5555,7 @@
       </p:pic>
       <p:sp>
         <p:nvSpPr>
-          <p:cNvPr id="770326036" name="Rectangle 9"/>
+          <p:cNvPr id="2014859998" name="Rectangle 9"/>
           <p:cNvSpPr/>
           <p:nvPr/>
         </p:nvSpPr>
@@ -5596,7 +5596,7 @@
       </p:sp>
       <p:sp>
         <p:nvSpPr>
-          <p:cNvPr id="1572123296" name="Rectangle 10"/>
+          <p:cNvPr id="132988889" name="Rectangle 10"/>
           <p:cNvSpPr/>
           <p:nvPr/>
         </p:nvSpPr>
@@ -5634,7 +5634,7 @@
       </p:sp>
       <p:sp>
         <p:nvSpPr>
-          <p:cNvPr id="831344582" name="Title 1"/>
+          <p:cNvPr id="920352069" name="Title 1"/>
           <p:cNvSpPr>
             <a:spLocks noGrp="1"/>
           </p:cNvSpPr>
@@ -5671,7 +5671,7 @@
       </p:sp>
       <p:sp>
         <p:nvSpPr>
-          <p:cNvPr id="248455126" name="Picture Placeholder 2"/>
+          <p:cNvPr id="1832052605" name="Picture Placeholder 2"/>
           <p:cNvSpPr>
             <a:spLocks noChangeAspect="1" noGrp="1"/>
           </p:cNvSpPr>
@@ -5753,7 +5753,7 @@
       </p:sp>
       <p:sp>
         <p:nvSpPr>
-          <p:cNvPr id="1749904477" name="Text Placeholder 3"/>
+          <p:cNvPr id="1440732667" name="Text Placeholder 3"/>
           <p:cNvSpPr>
             <a:spLocks noGrp="1"/>
           </p:cNvSpPr>
@@ -5821,7 +5821,7 @@
       </p:sp>
       <p:sp>
         <p:nvSpPr>
-          <p:cNvPr id="1616261920" name="Date Placeholder 4"/>
+          <p:cNvPr id="1067416388" name="Date Placeholder 4"/>
           <p:cNvSpPr>
             <a:spLocks noGrp="1"/>
           </p:cNvSpPr>
@@ -5847,7 +5847,7 @@
       </p:sp>
       <p:sp>
         <p:nvSpPr>
-          <p:cNvPr id="1304794235" name="Footer Placeholder 5"/>
+          <p:cNvPr id="1671513310" name="Footer Placeholder 5"/>
           <p:cNvSpPr>
             <a:spLocks noGrp="1"/>
           </p:cNvSpPr>
@@ -5869,7 +5869,7 @@
       </p:sp>
       <p:sp>
         <p:nvSpPr>
-          <p:cNvPr id="829900291" name="Slide Number Placeholder 6"/>
+          <p:cNvPr id="386911762" name="Slide Number Placeholder 6"/>
           <p:cNvSpPr>
             <a:spLocks noGrp="1"/>
           </p:cNvSpPr>
@@ -5920,7 +5920,7 @@
       </p:grpSpPr>
       <p:pic>
         <p:nvPicPr>
-          <p:cNvPr id="680086266" name="Picture 7" descr="HD-ShadowLong.png"/>
+          <p:cNvPr id="596760280" name="Picture 7" descr="HD-ShadowLong.png"/>
           <p:cNvPicPr>
             <a:picLocks noChangeAspect="1"/>
           </p:cNvPicPr>
@@ -5942,7 +5942,7 @@
       </p:pic>
       <p:pic>
         <p:nvPicPr>
-          <p:cNvPr id="1987866869" name="Picture 8" descr="HD-ShadowShort.png"/>
+          <p:cNvPr id="898851785" name="Picture 8" descr="HD-ShadowShort.png"/>
           <p:cNvPicPr>
             <a:picLocks noChangeAspect="1"/>
           </p:cNvPicPr>
@@ -5964,7 +5964,7 @@
       </p:pic>
       <p:sp>
         <p:nvSpPr>
-          <p:cNvPr id="467697009" name="Rectangle 9"/>
+          <p:cNvPr id="278388376" name="Rectangle 9"/>
           <p:cNvSpPr/>
           <p:nvPr/>
         </p:nvSpPr>
@@ -6005,7 +6005,7 @@
       </p:sp>
       <p:sp>
         <p:nvSpPr>
-          <p:cNvPr id="913207234" name="Rectangle 10"/>
+          <p:cNvPr id="927553660" name="Rectangle 10"/>
           <p:cNvSpPr/>
           <p:nvPr/>
         </p:nvSpPr>
@@ -6043,7 +6043,7 @@
       </p:sp>
       <p:sp>
         <p:nvSpPr>
-          <p:cNvPr id="1227191211" name="Title 1"/>
+          <p:cNvPr id="48539574" name="Title 1"/>
           <p:cNvSpPr>
             <a:spLocks noGrp="1"/>
           </p:cNvSpPr>
@@ -6080,7 +6080,7 @@
       </p:sp>
       <p:sp>
         <p:nvSpPr>
-          <p:cNvPr id="1881115345" name="Picture Placeholder 2"/>
+          <p:cNvPr id="772227616" name="Picture Placeholder 2"/>
           <p:cNvSpPr>
             <a:spLocks noChangeAspect="1" noGrp="1"/>
           </p:cNvSpPr>
@@ -6162,7 +6162,7 @@
       </p:sp>
       <p:sp>
         <p:nvSpPr>
-          <p:cNvPr id="135923970" name="Text Placeholder 3"/>
+          <p:cNvPr id="921430147" name="Text Placeholder 3"/>
           <p:cNvSpPr>
             <a:spLocks noGrp="1"/>
           </p:cNvSpPr>
@@ -6230,7 +6230,7 @@
       </p:sp>
       <p:sp>
         <p:nvSpPr>
-          <p:cNvPr id="1864991915" name="Date Placeholder 4"/>
+          <p:cNvPr id="251545952" name="Date Placeholder 4"/>
           <p:cNvSpPr>
             <a:spLocks noGrp="1"/>
           </p:cNvSpPr>
@@ -6256,7 +6256,7 @@
       </p:sp>
       <p:sp>
         <p:nvSpPr>
-          <p:cNvPr id="1650644422" name="Footer Placeholder 5"/>
+          <p:cNvPr id="1195789787" name="Footer Placeholder 5"/>
           <p:cNvSpPr>
             <a:spLocks noGrp="1"/>
           </p:cNvSpPr>
@@ -6278,7 +6278,7 @@
       </p:sp>
       <p:sp>
         <p:nvSpPr>
-          <p:cNvPr id="2040294216" name="Slide Number Placeholder 6"/>
+          <p:cNvPr id="92856711" name="Slide Number Placeholder 6"/>
           <p:cNvSpPr>
             <a:spLocks noGrp="1"/>
           </p:cNvSpPr>
@@ -6334,7 +6334,7 @@
       </p:grpSpPr>
       <p:pic>
         <p:nvPicPr>
-          <p:cNvPr id="178689149" name="Picture 7" descr="HD-ShadowLong.png"/>
+          <p:cNvPr id="404725213" name="Picture 7" descr="HD-ShadowLong.png"/>
           <p:cNvPicPr>
             <a:picLocks noChangeAspect="1"/>
           </p:cNvPicPr>
@@ -6356,7 +6356,7 @@
       </p:pic>
       <p:pic>
         <p:nvPicPr>
-          <p:cNvPr id="346774747" name="Picture 8" descr="HD-ShadowShort.png"/>
+          <p:cNvPr id="1221759558" name="Picture 8" descr="HD-ShadowShort.png"/>
           <p:cNvPicPr>
             <a:picLocks noChangeAspect="1"/>
           </p:cNvPicPr>
@@ -6378,7 +6378,7 @@
       </p:pic>
       <p:sp>
         <p:nvSpPr>
-          <p:cNvPr id="1477291723" name="Rectangle 9"/>
+          <p:cNvPr id="2145939725" name="Rectangle 9"/>
           <p:cNvSpPr/>
           <p:nvPr/>
         </p:nvSpPr>
@@ -6419,7 +6419,7 @@
       </p:sp>
       <p:sp>
         <p:nvSpPr>
-          <p:cNvPr id="1083799813" name="Rectangle 10"/>
+          <p:cNvPr id="1338687795" name="Rectangle 10"/>
           <p:cNvSpPr/>
           <p:nvPr/>
         </p:nvSpPr>
@@ -6457,7 +6457,7 @@
       </p:sp>
       <p:sp>
         <p:nvSpPr>
-          <p:cNvPr id="978418471" name="Title 1"/>
+          <p:cNvPr id="483273275" name="Title 1"/>
           <p:cNvSpPr>
             <a:spLocks noGrp="1"/>
           </p:cNvSpPr>
@@ -6492,7 +6492,7 @@
       </p:sp>
       <p:sp>
         <p:nvSpPr>
-          <p:cNvPr id="202531569" name="Text Placeholder 3"/>
+          <p:cNvPr id="758392105" name="Text Placeholder 3"/>
           <p:cNvSpPr>
             <a:spLocks noGrp="1"/>
           </p:cNvSpPr>
@@ -6560,7 +6560,7 @@
       </p:sp>
       <p:sp>
         <p:nvSpPr>
-          <p:cNvPr id="657452635" name="Date Placeholder 4"/>
+          <p:cNvPr id="1420396417" name="Date Placeholder 4"/>
           <p:cNvSpPr>
             <a:spLocks noGrp="1"/>
           </p:cNvSpPr>
@@ -6586,7 +6586,7 @@
       </p:sp>
       <p:sp>
         <p:nvSpPr>
-          <p:cNvPr id="1324359413" name="Footer Placeholder 5"/>
+          <p:cNvPr id="464492150" name="Footer Placeholder 5"/>
           <p:cNvSpPr>
             <a:spLocks noGrp="1"/>
           </p:cNvSpPr>
@@ -6608,7 +6608,7 @@
       </p:sp>
       <p:sp>
         <p:nvSpPr>
-          <p:cNvPr id="1886779784" name="Slide Number Placeholder 6"/>
+          <p:cNvPr id="2109684813" name="Slide Number Placeholder 6"/>
           <p:cNvSpPr>
             <a:spLocks noGrp="1"/>
           </p:cNvSpPr>
@@ -6664,7 +6664,7 @@
       </p:grpSpPr>
       <p:pic>
         <p:nvPicPr>
-          <p:cNvPr id="59406957" name="Picture 10" descr="HD-ShadowLong.png"/>
+          <p:cNvPr id="437064429" name="Picture 10" descr="HD-ShadowLong.png"/>
           <p:cNvPicPr>
             <a:picLocks noChangeAspect="1"/>
           </p:cNvPicPr>
@@ -6686,7 +6686,7 @@
       </p:pic>
       <p:pic>
         <p:nvPicPr>
-          <p:cNvPr id="1283401421" name="Picture 12" descr="HD-ShadowShort.png"/>
+          <p:cNvPr id="1994700004" name="Picture 12" descr="HD-ShadowShort.png"/>
           <p:cNvPicPr>
             <a:picLocks noChangeAspect="1"/>
           </p:cNvPicPr>
@@ -6708,7 +6708,7 @@
       </p:pic>
       <p:sp>
         <p:nvSpPr>
-          <p:cNvPr id="1868851730" name="Rectangle 13"/>
+          <p:cNvPr id="1236797030" name="Rectangle 13"/>
           <p:cNvSpPr/>
           <p:nvPr/>
         </p:nvSpPr>
@@ -6749,7 +6749,7 @@
       </p:sp>
       <p:sp>
         <p:nvSpPr>
-          <p:cNvPr id="700680903" name="Rectangle 14"/>
+          <p:cNvPr id="1654611857" name="Rectangle 14"/>
           <p:cNvSpPr/>
           <p:nvPr/>
         </p:nvSpPr>
@@ -6787,7 +6787,7 @@
       </p:sp>
       <p:sp>
         <p:nvSpPr>
-          <p:cNvPr id="1105962811" name="Title 1"/>
+          <p:cNvPr id="1089448490" name="Title 1"/>
           <p:cNvSpPr>
             <a:spLocks noGrp="1"/>
           </p:cNvSpPr>
@@ -6822,7 +6822,7 @@
       </p:sp>
       <p:sp>
         <p:nvSpPr>
-          <p:cNvPr id="1010881291" name="Text Placeholder 3"/>
+          <p:cNvPr id="1940683606" name="Text Placeholder 3"/>
           <p:cNvSpPr>
             <a:spLocks noGrp="1"/>
           </p:cNvSpPr>
@@ -6892,7 +6892,7 @@
       </p:sp>
       <p:sp>
         <p:nvSpPr>
-          <p:cNvPr id="1455265633" name="Text Placeholder 3"/>
+          <p:cNvPr id="1808853887" name="Text Placeholder 3"/>
           <p:cNvSpPr>
             <a:spLocks noGrp="1"/>
           </p:cNvSpPr>
@@ -6962,7 +6962,7 @@
       </p:sp>
       <p:sp>
         <p:nvSpPr>
-          <p:cNvPr id="1491080020" name="Date Placeholder 4"/>
+          <p:cNvPr id="125362079" name="Date Placeholder 4"/>
           <p:cNvSpPr>
             <a:spLocks noGrp="1"/>
           </p:cNvSpPr>
@@ -6988,7 +6988,7 @@
       </p:sp>
       <p:sp>
         <p:nvSpPr>
-          <p:cNvPr id="534909845" name="Footer Placeholder 5"/>
+          <p:cNvPr id="1260012143" name="Footer Placeholder 5"/>
           <p:cNvSpPr>
             <a:spLocks noGrp="1"/>
           </p:cNvSpPr>
@@ -7010,7 +7010,7 @@
       </p:sp>
       <p:sp>
         <p:nvSpPr>
-          <p:cNvPr id="1440901773" name="Slide Number Placeholder 6"/>
+          <p:cNvPr id="945032628" name="Slide Number Placeholder 6"/>
           <p:cNvSpPr>
             <a:spLocks noGrp="1"/>
           </p:cNvSpPr>
@@ -7041,7 +7041,7 @@
       </p:sp>
       <p:sp>
         <p:nvSpPr>
-          <p:cNvPr id="119104017" name="TextBox 15"/>
+          <p:cNvPr id="1201607488" name="TextBox 15"/>
           <p:cNvSpPr txBox="1"/>
           <p:nvPr/>
         </p:nvSpPr>
@@ -7145,7 +7145,7 @@
       </p:sp>
       <p:sp>
         <p:nvSpPr>
-          <p:cNvPr id="1397720600" name="TextBox 16"/>
+          <p:cNvPr id="2032048272" name="TextBox 16"/>
           <p:cNvSpPr txBox="1"/>
           <p:nvPr/>
         </p:nvSpPr>
@@ -7274,7 +7274,7 @@
       </p:grpSpPr>
       <p:pic>
         <p:nvPicPr>
-          <p:cNvPr id="1423197751" name="Picture 8" descr="HD-ShadowLong.png"/>
+          <p:cNvPr id="1101420804" name="Picture 8" descr="HD-ShadowLong.png"/>
           <p:cNvPicPr>
             <a:picLocks noChangeAspect="1"/>
           </p:cNvPicPr>
@@ -7296,7 +7296,7 @@
       </p:pic>
       <p:pic>
         <p:nvPicPr>
-          <p:cNvPr id="1228663050" name="Picture 9" descr="HD-ShadowShort.png"/>
+          <p:cNvPr id="1031553418" name="Picture 9" descr="HD-ShadowShort.png"/>
           <p:cNvPicPr>
             <a:picLocks noChangeAspect="1"/>
           </p:cNvPicPr>
@@ -7318,7 +7318,7 @@
       </p:pic>
       <p:sp>
         <p:nvSpPr>
-          <p:cNvPr id="798176419" name="Rectangle 10"/>
+          <p:cNvPr id="285596640" name="Rectangle 10"/>
           <p:cNvSpPr/>
           <p:nvPr/>
         </p:nvSpPr>
@@ -7359,7 +7359,7 @@
       </p:sp>
       <p:sp>
         <p:nvSpPr>
-          <p:cNvPr id="1548083128" name="Rectangle 11"/>
+          <p:cNvPr id="661207370" name="Rectangle 11"/>
           <p:cNvSpPr/>
           <p:nvPr/>
         </p:nvSpPr>
@@ -7397,7 +7397,7 @@
       </p:sp>
       <p:sp>
         <p:nvSpPr>
-          <p:cNvPr id="1179403723" name="Title 1"/>
+          <p:cNvPr id="245932104" name="Title 1"/>
           <p:cNvSpPr>
             <a:spLocks noGrp="1"/>
           </p:cNvSpPr>
@@ -7432,7 +7432,7 @@
       </p:sp>
       <p:sp>
         <p:nvSpPr>
-          <p:cNvPr id="509217420" name="Text Placeholder 3"/>
+          <p:cNvPr id="2019186629" name="Text Placeholder 3"/>
           <p:cNvSpPr>
             <a:spLocks noGrp="1"/>
           </p:cNvSpPr>
@@ -7500,7 +7500,7 @@
       </p:sp>
       <p:sp>
         <p:nvSpPr>
-          <p:cNvPr id="342078780" name="Date Placeholder 4"/>
+          <p:cNvPr id="1276943865" name="Date Placeholder 4"/>
           <p:cNvSpPr>
             <a:spLocks noGrp="1"/>
           </p:cNvSpPr>
@@ -7526,7 +7526,7 @@
       </p:sp>
       <p:sp>
         <p:nvSpPr>
-          <p:cNvPr id="1390755054" name="Footer Placeholder 5"/>
+          <p:cNvPr id="512562219" name="Footer Placeholder 5"/>
           <p:cNvSpPr>
             <a:spLocks noGrp="1"/>
           </p:cNvSpPr>
@@ -7548,7 +7548,7 @@
       </p:sp>
       <p:sp>
         <p:nvSpPr>
-          <p:cNvPr id="2128360170" name="Slide Number Placeholder 6"/>
+          <p:cNvPr id="1290121641" name="Slide Number Placeholder 6"/>
           <p:cNvSpPr>
             <a:spLocks noGrp="1"/>
           </p:cNvSpPr>
@@ -7604,7 +7604,7 @@
       </p:grpSpPr>
       <p:pic>
         <p:nvPicPr>
-          <p:cNvPr id="1075176072" name="Picture 12" descr="HD-ShadowLong.png"/>
+          <p:cNvPr id="1116581426" name="Picture 12" descr="HD-ShadowLong.png"/>
           <p:cNvPicPr>
             <a:picLocks noChangeAspect="1"/>
           </p:cNvPicPr>
@@ -7626,7 +7626,7 @@
       </p:pic>
       <p:pic>
         <p:nvPicPr>
-          <p:cNvPr id="921394955" name="Picture 13" descr="HD-ShadowShort.png"/>
+          <p:cNvPr id="506470193" name="Picture 13" descr="HD-ShadowShort.png"/>
           <p:cNvPicPr>
             <a:picLocks noChangeAspect="1"/>
           </p:cNvPicPr>
@@ -7648,7 +7648,7 @@
       </p:pic>
       <p:sp>
         <p:nvSpPr>
-          <p:cNvPr id="1211753460" name="Rectangle 15"/>
+          <p:cNvPr id="205086261" name="Rectangle 15"/>
           <p:cNvSpPr/>
           <p:nvPr/>
         </p:nvSpPr>
@@ -7689,7 +7689,7 @@
       </p:sp>
       <p:sp>
         <p:nvSpPr>
-          <p:cNvPr id="1802264422" name="Rectangle 16"/>
+          <p:cNvPr id="1905443243" name="Rectangle 16"/>
           <p:cNvSpPr/>
           <p:nvPr/>
         </p:nvSpPr>
@@ -7727,7 +7727,7 @@
       </p:sp>
       <p:sp>
         <p:nvSpPr>
-          <p:cNvPr id="327781410" name="Title 1"/>
+          <p:cNvPr id="1222604337" name="Title 1"/>
           <p:cNvSpPr>
             <a:spLocks noGrp="1"/>
           </p:cNvSpPr>
@@ -7758,7 +7758,7 @@
       </p:sp>
       <p:sp>
         <p:nvSpPr>
-          <p:cNvPr id="1152697771" name="Text Placeholder 2"/>
+          <p:cNvPr id="330638467" name="Text Placeholder 2"/>
           <p:cNvSpPr>
             <a:spLocks noGrp="1"/>
           </p:cNvSpPr>
@@ -7832,7 +7832,7 @@
       </p:sp>
       <p:sp>
         <p:nvSpPr>
-          <p:cNvPr id="1754309287" name="Text Placeholder 3"/>
+          <p:cNvPr id="1617808302" name="Text Placeholder 3"/>
           <p:cNvSpPr>
             <a:spLocks noGrp="1"/>
           </p:cNvSpPr>
@@ -7902,7 +7902,7 @@
       </p:sp>
       <p:sp>
         <p:nvSpPr>
-          <p:cNvPr id="2008508467" name="Text Placeholder 4"/>
+          <p:cNvPr id="1739269834" name="Text Placeholder 4"/>
           <p:cNvSpPr>
             <a:spLocks noGrp="1"/>
           </p:cNvSpPr>
@@ -7976,7 +7976,7 @@
       </p:sp>
       <p:sp>
         <p:nvSpPr>
-          <p:cNvPr id="1938585604" name="Text Placeholder 3"/>
+          <p:cNvPr id="303235923" name="Text Placeholder 3"/>
           <p:cNvSpPr>
             <a:spLocks noGrp="1"/>
           </p:cNvSpPr>
@@ -8046,7 +8046,7 @@
       </p:sp>
       <p:sp>
         <p:nvSpPr>
-          <p:cNvPr id="722857320" name="Text Placeholder 4"/>
+          <p:cNvPr id="1636165459" name="Text Placeholder 4"/>
           <p:cNvSpPr>
             <a:spLocks noGrp="1"/>
           </p:cNvSpPr>
@@ -8120,7 +8120,7 @@
       </p:sp>
       <p:sp>
         <p:nvSpPr>
-          <p:cNvPr id="913641396" name="Text Placeholder 3"/>
+          <p:cNvPr id="13251368" name="Text Placeholder 3"/>
           <p:cNvSpPr>
             <a:spLocks noGrp="1"/>
           </p:cNvSpPr>
@@ -8190,7 +8190,7 @@
       </p:sp>
       <p:sp>
         <p:nvSpPr>
-          <p:cNvPr id="196900026" name="Date Placeholder 2"/>
+          <p:cNvPr id="1011688420" name="Date Placeholder 2"/>
           <p:cNvSpPr>
             <a:spLocks noGrp="1"/>
           </p:cNvSpPr>
@@ -8216,7 +8216,7 @@
       </p:sp>
       <p:sp>
         <p:nvSpPr>
-          <p:cNvPr id="1724434587" name="Footer Placeholder 3"/>
+          <p:cNvPr id="731241721" name="Footer Placeholder 3"/>
           <p:cNvSpPr>
             <a:spLocks noGrp="1"/>
           </p:cNvSpPr>
@@ -8238,7 +8238,7 @@
       </p:sp>
       <p:sp>
         <p:nvSpPr>
-          <p:cNvPr id="543308311" name="Slide Number Placeholder 4"/>
+          <p:cNvPr id="1716762495" name="Slide Number Placeholder 4"/>
           <p:cNvSpPr>
             <a:spLocks noGrp="1"/>
           </p:cNvSpPr>
@@ -8289,7 +8289,7 @@
       </p:grpSpPr>
       <p:pic>
         <p:nvPicPr>
-          <p:cNvPr id="990040029" name="Picture 14" descr="HD-ShadowLong.png"/>
+          <p:cNvPr id="28446495" name="Picture 14" descr="HD-ShadowLong.png"/>
           <p:cNvPicPr>
             <a:picLocks noChangeAspect="1"/>
           </p:cNvPicPr>
@@ -8311,7 +8311,7 @@
       </p:pic>
       <p:pic>
         <p:nvPicPr>
-          <p:cNvPr id="209499313" name="Picture 15" descr="HD-ShadowShort.png"/>
+          <p:cNvPr id="949659277" name="Picture 15" descr="HD-ShadowShort.png"/>
           <p:cNvPicPr>
             <a:picLocks noChangeAspect="1"/>
           </p:cNvPicPr>
@@ -8333,7 +8333,7 @@
       </p:pic>
       <p:sp>
         <p:nvSpPr>
-          <p:cNvPr id="1954718349" name="Rectangle 16"/>
+          <p:cNvPr id="833330822" name="Rectangle 16"/>
           <p:cNvSpPr/>
           <p:nvPr/>
         </p:nvSpPr>
@@ -8374,7 +8374,7 @@
       </p:sp>
       <p:sp>
         <p:nvSpPr>
-          <p:cNvPr id="1971143276" name="Rectangle 17"/>
+          <p:cNvPr id="1816657785" name="Rectangle 17"/>
           <p:cNvSpPr/>
           <p:nvPr/>
         </p:nvSpPr>
@@ -8412,7 +8412,7 @@
       </p:sp>
       <p:sp>
         <p:nvSpPr>
-          <p:cNvPr id="1505176539" name="Title 1"/>
+          <p:cNvPr id="1019390644" name="Title 1"/>
           <p:cNvSpPr>
             <a:spLocks noGrp="1"/>
           </p:cNvSpPr>
@@ -8443,7 +8443,7 @@
       </p:sp>
       <p:sp>
         <p:nvSpPr>
-          <p:cNvPr id="879335849" name="Text Placeholder 2"/>
+          <p:cNvPr id="899811787" name="Text Placeholder 2"/>
           <p:cNvSpPr>
             <a:spLocks noGrp="1"/>
           </p:cNvSpPr>
@@ -8517,7 +8517,7 @@
       </p:sp>
       <p:sp>
         <p:nvSpPr>
-          <p:cNvPr id="1855068860" name="Picture Placeholder 2"/>
+          <p:cNvPr id="308003652" name="Picture Placeholder 2"/>
           <p:cNvSpPr>
             <a:spLocks noChangeAspect="1" noGrp="1"/>
           </p:cNvSpPr>
@@ -8599,7 +8599,7 @@
       </p:sp>
       <p:sp>
         <p:nvSpPr>
-          <p:cNvPr id="901079654" name="Text Placeholder 3"/>
+          <p:cNvPr id="741335974" name="Text Placeholder 3"/>
           <p:cNvSpPr>
             <a:spLocks noGrp="1"/>
           </p:cNvSpPr>
@@ -8669,7 +8669,7 @@
       </p:sp>
       <p:sp>
         <p:nvSpPr>
-          <p:cNvPr id="1363389028" name="Text Placeholder 4"/>
+          <p:cNvPr id="705293368" name="Text Placeholder 4"/>
           <p:cNvSpPr>
             <a:spLocks noGrp="1"/>
           </p:cNvSpPr>
@@ -8743,7 +8743,7 @@
       </p:sp>
       <p:sp>
         <p:nvSpPr>
-          <p:cNvPr id="849672771" name="Picture Placeholder 2"/>
+          <p:cNvPr id="1290140798" name="Picture Placeholder 2"/>
           <p:cNvSpPr>
             <a:spLocks noChangeAspect="1" noGrp="1"/>
           </p:cNvSpPr>
@@ -8825,7 +8825,7 @@
       </p:sp>
       <p:sp>
         <p:nvSpPr>
-          <p:cNvPr id="893326674" name="Text Placeholder 3"/>
+          <p:cNvPr id="267145840" name="Text Placeholder 3"/>
           <p:cNvSpPr>
             <a:spLocks noGrp="1"/>
           </p:cNvSpPr>
@@ -8895,7 +8895,7 @@
       </p:sp>
       <p:sp>
         <p:nvSpPr>
-          <p:cNvPr id="1175405141" name="Text Placeholder 4"/>
+          <p:cNvPr id="2002883352" name="Text Placeholder 4"/>
           <p:cNvSpPr>
             <a:spLocks noGrp="1"/>
           </p:cNvSpPr>
@@ -8969,7 +8969,7 @@
       </p:sp>
       <p:sp>
         <p:nvSpPr>
-          <p:cNvPr id="1901446938" name="Picture Placeholder 2"/>
+          <p:cNvPr id="1732894312" name="Picture Placeholder 2"/>
           <p:cNvSpPr>
             <a:spLocks noChangeAspect="1" noGrp="1"/>
           </p:cNvSpPr>
@@ -9051,7 +9051,7 @@
       </p:sp>
       <p:sp>
         <p:nvSpPr>
-          <p:cNvPr id="1005129983" name="Text Placeholder 3"/>
+          <p:cNvPr id="2122966859" name="Text Placeholder 3"/>
           <p:cNvSpPr>
             <a:spLocks noGrp="1"/>
           </p:cNvSpPr>
@@ -9121,7 +9121,7 @@
       </p:sp>
       <p:sp>
         <p:nvSpPr>
-          <p:cNvPr id="1756156099" name="Date Placeholder 2"/>
+          <p:cNvPr id="977514411" name="Date Placeholder 2"/>
           <p:cNvSpPr>
             <a:spLocks noGrp="1"/>
           </p:cNvSpPr>
@@ -9147,7 +9147,7 @@
       </p:sp>
       <p:sp>
         <p:nvSpPr>
-          <p:cNvPr id="797115076" name="Footer Placeholder 3"/>
+          <p:cNvPr id="619488648" name="Footer Placeholder 3"/>
           <p:cNvSpPr>
             <a:spLocks noGrp="1"/>
           </p:cNvSpPr>
@@ -9169,7 +9169,7 @@
       </p:sp>
       <p:sp>
         <p:nvSpPr>
-          <p:cNvPr id="1594833181" name="Slide Number Placeholder 4"/>
+          <p:cNvPr id="1912771389" name="Slide Number Placeholder 4"/>
           <p:cNvSpPr>
             <a:spLocks noGrp="1"/>
           </p:cNvSpPr>
@@ -9220,7 +9220,7 @@
       </p:grpSpPr>
       <p:pic>
         <p:nvPicPr>
-          <p:cNvPr id="500820123" name="Picture 6" descr="HD-ShadowLong.png"/>
+          <p:cNvPr id="1957357512" name="Picture 6" descr="HD-ShadowLong.png"/>
           <p:cNvPicPr>
             <a:picLocks noChangeAspect="1"/>
           </p:cNvPicPr>
@@ -9242,7 +9242,7 @@
       </p:pic>
       <p:pic>
         <p:nvPicPr>
-          <p:cNvPr id="96535896" name="Picture 7" descr="HD-ShadowShort.png"/>
+          <p:cNvPr id="1798724760" name="Picture 7" descr="HD-ShadowShort.png"/>
           <p:cNvPicPr>
             <a:picLocks noChangeAspect="1"/>
           </p:cNvPicPr>
@@ -9264,7 +9264,7 @@
       </p:pic>
       <p:sp>
         <p:nvSpPr>
-          <p:cNvPr id="1640652263" name="Rectangle 8"/>
+          <p:cNvPr id="1382871887" name="Rectangle 8"/>
           <p:cNvSpPr/>
           <p:nvPr/>
         </p:nvSpPr>
@@ -9305,7 +9305,7 @@
       </p:sp>
       <p:sp>
         <p:nvSpPr>
-          <p:cNvPr id="489587005" name="Rectangle 9"/>
+          <p:cNvPr id="739209897" name="Rectangle 9"/>
           <p:cNvSpPr/>
           <p:nvPr/>
         </p:nvSpPr>
@@ -9343,7 +9343,7 @@
       </p:sp>
       <p:sp>
         <p:nvSpPr>
-          <p:cNvPr id="897367596" name="Title 1"/>
+          <p:cNvPr id="1543537344" name="Title 1"/>
           <p:cNvSpPr>
             <a:spLocks noGrp="1"/>
           </p:cNvSpPr>
@@ -9373,7 +9373,7 @@
       </p:sp>
       <p:sp>
         <p:nvSpPr>
-          <p:cNvPr id="573886166" name="Vertical Text Placeholder 2"/>
+          <p:cNvPr id="665159185" name="Vertical Text Placeholder 2"/>
           <p:cNvSpPr>
             <a:spLocks noGrp="1"/>
           </p:cNvSpPr>
@@ -9439,7 +9439,7 @@
       </p:sp>
       <p:sp>
         <p:nvSpPr>
-          <p:cNvPr id="1024057033" name="Date Placeholder 3"/>
+          <p:cNvPr id="1769517563" name="Date Placeholder 3"/>
           <p:cNvSpPr>
             <a:spLocks noGrp="1"/>
           </p:cNvSpPr>
@@ -9465,7 +9465,7 @@
       </p:sp>
       <p:sp>
         <p:nvSpPr>
-          <p:cNvPr id="892902088" name="Footer Placeholder 4"/>
+          <p:cNvPr id="1321122018" name="Footer Placeholder 4"/>
           <p:cNvSpPr>
             <a:spLocks noGrp="1"/>
           </p:cNvSpPr>
@@ -9487,7 +9487,7 @@
       </p:sp>
       <p:sp>
         <p:nvSpPr>
-          <p:cNvPr id="1965314837" name="Slide Number Placeholder 5"/>
+          <p:cNvPr id="463328357" name="Slide Number Placeholder 5"/>
           <p:cNvSpPr>
             <a:spLocks noGrp="1"/>
           </p:cNvSpPr>
@@ -9538,7 +9538,7 @@
       </p:grpSpPr>
       <p:sp>
         <p:nvSpPr>
-          <p:cNvPr id="704663975" name="Rectangle 6"/>
+          <p:cNvPr id="681976559" name="Rectangle 6"/>
           <p:cNvSpPr/>
           <p:nvPr/>
         </p:nvSpPr>
@@ -9579,7 +9579,7 @@
       </p:sp>
       <p:sp>
         <p:nvSpPr>
-          <p:cNvPr id="1870888505" name="Rectangle 7"/>
+          <p:cNvPr id="1264213573" name="Rectangle 7"/>
           <p:cNvSpPr/>
           <p:nvPr/>
         </p:nvSpPr>
@@ -9617,7 +9617,7 @@
       </p:sp>
       <p:sp>
         <p:nvSpPr>
-          <p:cNvPr id="2086025445" name="Vertical Title 1"/>
+          <p:cNvPr id="657167389" name="Vertical Title 1"/>
           <p:cNvSpPr>
             <a:spLocks noGrp="1"/>
           </p:cNvSpPr>
@@ -9648,7 +9648,7 @@
       </p:sp>
       <p:sp>
         <p:nvSpPr>
-          <p:cNvPr id="1923823100" name="Vertical Text Placeholder 2"/>
+          <p:cNvPr id="362584113" name="Vertical Text Placeholder 2"/>
           <p:cNvSpPr>
             <a:spLocks noGrp="1"/>
           </p:cNvSpPr>
@@ -9719,7 +9719,7 @@
       </p:sp>
       <p:sp>
         <p:nvSpPr>
-          <p:cNvPr id="855104403" name="Date Placeholder 3"/>
+          <p:cNvPr id="1441207233" name="Date Placeholder 3"/>
           <p:cNvSpPr>
             <a:spLocks noGrp="1"/>
           </p:cNvSpPr>
@@ -9750,7 +9750,7 @@
       </p:sp>
       <p:sp>
         <p:nvSpPr>
-          <p:cNvPr id="674487083" name="Footer Placeholder 4"/>
+          <p:cNvPr id="1350405191" name="Footer Placeholder 4"/>
           <p:cNvSpPr>
             <a:spLocks noGrp="1"/>
           </p:cNvSpPr>
@@ -9777,7 +9777,7 @@
       </p:sp>
       <p:sp>
         <p:nvSpPr>
-          <p:cNvPr id="2033703079" name="Slide Number Placeholder 5"/>
+          <p:cNvPr id="2122997156" name="Slide Number Placeholder 5"/>
           <p:cNvSpPr>
             <a:spLocks noGrp="1"/>
           </p:cNvSpPr>
@@ -9837,7 +9837,7 @@
       </p:grpSpPr>
       <p:sp>
         <p:nvSpPr>
-          <p:cNvPr id="1066399726" name="Заголовок 1"/>
+          <p:cNvPr id="1003375033" name="Заголовок 1"/>
           <p:cNvSpPr>
             <a:spLocks noGrp="1"/>
           </p:cNvSpPr>
@@ -9872,7 +9872,7 @@
       </p:sp>
       <p:sp>
         <p:nvSpPr>
-          <p:cNvPr id="844569830" name="Текст 2"/>
+          <p:cNvPr id="221462366" name="Текст 2"/>
           <p:cNvSpPr>
             <a:spLocks noGrp="1"/>
           </p:cNvSpPr>
@@ -9994,7 +9994,7 @@
       </p:sp>
       <p:sp>
         <p:nvSpPr>
-          <p:cNvPr id="191785381" name="Дата 3"/>
+          <p:cNvPr id="1763590388" name="Дата 3"/>
           <p:cNvSpPr>
             <a:spLocks noGrp="1"/>
           </p:cNvSpPr>
@@ -10020,7 +10020,7 @@
       </p:sp>
       <p:sp>
         <p:nvSpPr>
-          <p:cNvPr id="1758759739" name="Нижний колонтитул 4"/>
+          <p:cNvPr id="118524673" name="Нижний колонтитул 4"/>
           <p:cNvSpPr>
             <a:spLocks noGrp="1"/>
           </p:cNvSpPr>
@@ -10042,7 +10042,7 @@
       </p:sp>
       <p:sp>
         <p:nvSpPr>
-          <p:cNvPr id="1407252197" name="Номер слайда 5"/>
+          <p:cNvPr id="2105851435" name="Номер слайда 5"/>
           <p:cNvSpPr>
             <a:spLocks noGrp="1"/>
           </p:cNvSpPr>
@@ -10093,7 +10093,7 @@
       </p:grpSpPr>
       <p:sp>
         <p:nvSpPr>
-          <p:cNvPr id="1589410618" name="Заголовок 1"/>
+          <p:cNvPr id="693393986" name="Заголовок 1"/>
           <p:cNvSpPr>
             <a:spLocks noGrp="1"/>
           </p:cNvSpPr>
@@ -10119,7 +10119,7 @@
       </p:sp>
       <p:sp>
         <p:nvSpPr>
-          <p:cNvPr id="518232802" name="Объект 2"/>
+          <p:cNvPr id="1663917599" name="Объект 2"/>
           <p:cNvSpPr>
             <a:spLocks noGrp="1"/>
           </p:cNvSpPr>
@@ -10190,7 +10190,7 @@
       </p:sp>
       <p:sp>
         <p:nvSpPr>
-          <p:cNvPr id="1065528384" name="Объект 3"/>
+          <p:cNvPr id="1150040139" name="Объект 3"/>
           <p:cNvSpPr>
             <a:spLocks noGrp="1"/>
           </p:cNvSpPr>
@@ -10261,7 +10261,7 @@
       </p:sp>
       <p:sp>
         <p:nvSpPr>
-          <p:cNvPr id="401821845" name="Дата 4"/>
+          <p:cNvPr id="171612722" name="Дата 4"/>
           <p:cNvSpPr>
             <a:spLocks noGrp="1"/>
           </p:cNvSpPr>
@@ -10287,7 +10287,7 @@
       </p:sp>
       <p:sp>
         <p:nvSpPr>
-          <p:cNvPr id="916400218" name="Нижний колонтитул 5"/>
+          <p:cNvPr id="1195891744" name="Нижний колонтитул 5"/>
           <p:cNvSpPr>
             <a:spLocks noGrp="1"/>
           </p:cNvSpPr>
@@ -10309,7 +10309,7 @@
       </p:sp>
       <p:sp>
         <p:nvSpPr>
-          <p:cNvPr id="954146317" name="Номер слайда 6"/>
+          <p:cNvPr id="1420583143" name="Номер слайда 6"/>
           <p:cNvSpPr>
             <a:spLocks noGrp="1"/>
           </p:cNvSpPr>
@@ -10360,7 +10360,7 @@
       </p:grpSpPr>
       <p:sp>
         <p:nvSpPr>
-          <p:cNvPr id="1940585574" name="Заголовок 1"/>
+          <p:cNvPr id="673387688" name="Заголовок 1"/>
           <p:cNvSpPr>
             <a:spLocks noGrp="1"/>
           </p:cNvSpPr>
@@ -10391,7 +10391,7 @@
       </p:sp>
       <p:sp>
         <p:nvSpPr>
-          <p:cNvPr id="1826292590" name="Текст 2"/>
+          <p:cNvPr id="1923214330" name="Текст 2"/>
           <p:cNvSpPr>
             <a:spLocks noGrp="1"/>
           </p:cNvSpPr>
@@ -10459,7 +10459,7 @@
       </p:sp>
       <p:sp>
         <p:nvSpPr>
-          <p:cNvPr id="620900476" name="Объект 3"/>
+          <p:cNvPr id="647423755" name="Объект 3"/>
           <p:cNvSpPr>
             <a:spLocks noGrp="1"/>
           </p:cNvSpPr>
@@ -10530,7 +10530,7 @@
       </p:sp>
       <p:sp>
         <p:nvSpPr>
-          <p:cNvPr id="2093941636" name="Текст 4"/>
+          <p:cNvPr id="133142693" name="Текст 4"/>
           <p:cNvSpPr>
             <a:spLocks noGrp="1"/>
           </p:cNvSpPr>
@@ -10598,7 +10598,7 @@
       </p:sp>
       <p:sp>
         <p:nvSpPr>
-          <p:cNvPr id="669470468" name="Объект 5"/>
+          <p:cNvPr id="190102797" name="Объект 5"/>
           <p:cNvSpPr>
             <a:spLocks noGrp="1"/>
           </p:cNvSpPr>
@@ -10669,7 +10669,7 @@
       </p:sp>
       <p:sp>
         <p:nvSpPr>
-          <p:cNvPr id="1349630695" name="Дата 6"/>
+          <p:cNvPr id="722933352" name="Дата 6"/>
           <p:cNvSpPr>
             <a:spLocks noGrp="1"/>
           </p:cNvSpPr>
@@ -10695,7 +10695,7 @@
       </p:sp>
       <p:sp>
         <p:nvSpPr>
-          <p:cNvPr id="1418074972" name="Нижний колонтитул 7"/>
+          <p:cNvPr id="1911867720" name="Нижний колонтитул 7"/>
           <p:cNvSpPr>
             <a:spLocks noGrp="1"/>
           </p:cNvSpPr>
@@ -10717,7 +10717,7 @@
       </p:sp>
       <p:sp>
         <p:nvSpPr>
-          <p:cNvPr id="1463157166" name="Номер слайда 8"/>
+          <p:cNvPr id="893521625" name="Номер слайда 8"/>
           <p:cNvSpPr>
             <a:spLocks noGrp="1"/>
           </p:cNvSpPr>
@@ -10768,7 +10768,7 @@
       </p:grpSpPr>
       <p:sp>
         <p:nvSpPr>
-          <p:cNvPr id="1741218214" name="Заголовок 1"/>
+          <p:cNvPr id="1078285677" name="Заголовок 1"/>
           <p:cNvSpPr>
             <a:spLocks noGrp="1"/>
           </p:cNvSpPr>
@@ -10794,7 +10794,7 @@
       </p:sp>
       <p:sp>
         <p:nvSpPr>
-          <p:cNvPr id="1089423099" name="Дата 2"/>
+          <p:cNvPr id="26054557" name="Дата 2"/>
           <p:cNvSpPr>
             <a:spLocks noGrp="1"/>
           </p:cNvSpPr>
@@ -10820,7 +10820,7 @@
       </p:sp>
       <p:sp>
         <p:nvSpPr>
-          <p:cNvPr id="1763505212" name="Нижний колонтитул 3"/>
+          <p:cNvPr id="1102307177" name="Нижний колонтитул 3"/>
           <p:cNvSpPr>
             <a:spLocks noGrp="1"/>
           </p:cNvSpPr>
@@ -10842,7 +10842,7 @@
       </p:sp>
       <p:sp>
         <p:nvSpPr>
-          <p:cNvPr id="884736666" name="Номер слайда 4"/>
+          <p:cNvPr id="2046138871" name="Номер слайда 4"/>
           <p:cNvSpPr>
             <a:spLocks noGrp="1"/>
           </p:cNvSpPr>
@@ -10893,7 +10893,7 @@
       </p:grpSpPr>
       <p:sp>
         <p:nvSpPr>
-          <p:cNvPr id="357549572" name="Дата 1"/>
+          <p:cNvPr id="165073003" name="Дата 1"/>
           <p:cNvSpPr>
             <a:spLocks noGrp="1"/>
           </p:cNvSpPr>
@@ -10919,7 +10919,7 @@
       </p:sp>
       <p:sp>
         <p:nvSpPr>
-          <p:cNvPr id="534502877" name="Нижний колонтитул 2"/>
+          <p:cNvPr id="1156930830" name="Нижний колонтитул 2"/>
           <p:cNvSpPr>
             <a:spLocks noGrp="1"/>
           </p:cNvSpPr>
@@ -10941,7 +10941,7 @@
       </p:sp>
       <p:sp>
         <p:nvSpPr>
-          <p:cNvPr id="467728609" name="Номер слайда 3"/>
+          <p:cNvPr id="787189360" name="Номер слайда 3"/>
           <p:cNvSpPr>
             <a:spLocks noGrp="1"/>
           </p:cNvSpPr>
@@ -10992,7 +10992,7 @@
       </p:grpSpPr>
       <p:sp>
         <p:nvSpPr>
-          <p:cNvPr id="1951791193" name="Заголовок 1"/>
+          <p:cNvPr id="1036416679" name="Заголовок 1"/>
           <p:cNvSpPr>
             <a:spLocks noGrp="1"/>
           </p:cNvSpPr>
@@ -11027,7 +11027,7 @@
       </p:sp>
       <p:sp>
         <p:nvSpPr>
-          <p:cNvPr id="1526137546" name="Объект 2"/>
+          <p:cNvPr id="1415074586" name="Объект 2"/>
           <p:cNvSpPr>
             <a:spLocks noGrp="1"/>
           </p:cNvSpPr>
@@ -11126,7 +11126,7 @@
       </p:sp>
       <p:sp>
         <p:nvSpPr>
-          <p:cNvPr id="90218498" name="Текст 3"/>
+          <p:cNvPr id="479327672" name="Текст 3"/>
           <p:cNvSpPr>
             <a:spLocks noGrp="1"/>
           </p:cNvSpPr>
@@ -11194,7 +11194,7 @@
       </p:sp>
       <p:sp>
         <p:nvSpPr>
-          <p:cNvPr id="975449086" name="Дата 4"/>
+          <p:cNvPr id="962870556" name="Дата 4"/>
           <p:cNvSpPr>
             <a:spLocks noGrp="1"/>
           </p:cNvSpPr>
@@ -11220,7 +11220,7 @@
       </p:sp>
       <p:sp>
         <p:nvSpPr>
-          <p:cNvPr id="773505591" name="Нижний колонтитул 5"/>
+          <p:cNvPr id="751907170" name="Нижний колонтитул 5"/>
           <p:cNvSpPr>
             <a:spLocks noGrp="1"/>
           </p:cNvSpPr>
@@ -11242,7 +11242,7 @@
       </p:sp>
       <p:sp>
         <p:nvSpPr>
-          <p:cNvPr id="995840635" name="Номер слайда 6"/>
+          <p:cNvPr id="985547062" name="Номер слайда 6"/>
           <p:cNvSpPr>
             <a:spLocks noGrp="1"/>
           </p:cNvSpPr>
@@ -11293,7 +11293,7 @@
       </p:grpSpPr>
       <p:sp>
         <p:nvSpPr>
-          <p:cNvPr id="1021463461" name="Заголовок 1"/>
+          <p:cNvPr id="180137716" name="Заголовок 1"/>
           <p:cNvSpPr>
             <a:spLocks noGrp="1"/>
           </p:cNvSpPr>
@@ -11328,7 +11328,7 @@
       </p:sp>
       <p:sp>
         <p:nvSpPr>
-          <p:cNvPr id="432884306" name="Рисунок 2"/>
+          <p:cNvPr id="78536471" name="Рисунок 2"/>
           <p:cNvSpPr>
             <a:spLocks noGrp="1"/>
           </p:cNvSpPr>
@@ -11392,7 +11392,7 @@
       </p:sp>
       <p:sp>
         <p:nvSpPr>
-          <p:cNvPr id="1705493992" name="Текст 3"/>
+          <p:cNvPr id="1658874403" name="Текст 3"/>
           <p:cNvSpPr>
             <a:spLocks noGrp="1"/>
           </p:cNvSpPr>
@@ -11460,7 +11460,7 @@
       </p:sp>
       <p:sp>
         <p:nvSpPr>
-          <p:cNvPr id="1895035539" name="Дата 4"/>
+          <p:cNvPr id="469758893" name="Дата 4"/>
           <p:cNvSpPr>
             <a:spLocks noGrp="1"/>
           </p:cNvSpPr>
@@ -11486,7 +11486,7 @@
       </p:sp>
       <p:sp>
         <p:nvSpPr>
-          <p:cNvPr id="960917054" name="Нижний колонтитул 5"/>
+          <p:cNvPr id="125748387" name="Нижний колонтитул 5"/>
           <p:cNvSpPr>
             <a:spLocks noGrp="1"/>
           </p:cNvSpPr>
@@ -11508,7 +11508,7 @@
       </p:sp>
       <p:sp>
         <p:nvSpPr>
-          <p:cNvPr id="216432235" name="Номер слайда 6"/>
+          <p:cNvPr id="1534661774" name="Номер слайда 6"/>
           <p:cNvSpPr>
             <a:spLocks noGrp="1"/>
           </p:cNvSpPr>
@@ -11564,7 +11564,7 @@
       </p:grpSpPr>
       <p:sp>
         <p:nvSpPr>
-          <p:cNvPr id="1535475343" name="Заголовок 1"/>
+          <p:cNvPr id="1732620889" name="Заголовок 1"/>
           <p:cNvSpPr>
             <a:spLocks noGrp="1"/>
           </p:cNvSpPr>
@@ -11600,7 +11600,7 @@
       </p:sp>
       <p:sp>
         <p:nvSpPr>
-          <p:cNvPr id="695132574" name="Текст 2"/>
+          <p:cNvPr id="1430294459" name="Текст 2"/>
           <p:cNvSpPr>
             <a:spLocks noGrp="1"/>
           </p:cNvSpPr>
@@ -11676,7 +11676,7 @@
       </p:sp>
       <p:sp>
         <p:nvSpPr>
-          <p:cNvPr id="1230072073" name="Дата 3"/>
+          <p:cNvPr id="806591759" name="Дата 3"/>
           <p:cNvSpPr>
             <a:spLocks noGrp="1"/>
           </p:cNvSpPr>
@@ -11720,7 +11720,7 @@
       </p:sp>
       <p:sp>
         <p:nvSpPr>
-          <p:cNvPr id="823413144" name="Нижний колонтитул 4"/>
+          <p:cNvPr id="1544732345" name="Нижний колонтитул 4"/>
           <p:cNvSpPr>
             <a:spLocks noGrp="1"/>
           </p:cNvSpPr>
@@ -11760,7 +11760,7 @@
       </p:sp>
       <p:sp>
         <p:nvSpPr>
-          <p:cNvPr id="351384171" name="Номер слайда 5"/>
+          <p:cNvPr id="792303212" name="Номер слайда 5"/>
           <p:cNvSpPr>
             <a:spLocks noGrp="1"/>
           </p:cNvSpPr>
@@ -12171,7 +12171,7 @@
       </p:grpSpPr>
       <p:sp>
         <p:nvSpPr>
-          <p:cNvPr id="1018223286" name="Прямоугольник 3"/>
+          <p:cNvPr id="1726315123" name="Прямоугольник 3"/>
           <p:cNvSpPr/>
           <p:nvPr/>
         </p:nvSpPr>
@@ -12221,7 +12221,7 @@
       </p:sp>
       <p:sp>
         <p:nvSpPr>
-          <p:cNvPr id="1296122844" name="Прямоугольник 4"/>
+          <p:cNvPr id="777957635" name="Прямоугольник 4"/>
           <p:cNvSpPr/>
           <p:nvPr/>
         </p:nvSpPr>
@@ -12271,7 +12271,7 @@
       </p:sp>
       <p:sp>
         <p:nvSpPr>
-          <p:cNvPr id="845006590" name="Заголовок 1"/>
+          <p:cNvPr id="2147379119" name="Заголовок 1"/>
           <p:cNvSpPr>
             <a:spLocks noGrp="1"/>
           </p:cNvSpPr>
@@ -12336,7 +12336,7 @@
       </p:sp>
       <p:sp>
         <p:nvSpPr>
-          <p:cNvPr id="377099550" name="Подзаголовок 2"/>
+          <p:cNvPr id="502607029" name="Подзаголовок 2"/>
           <p:cNvSpPr>
             <a:spLocks noGrp="1"/>
           </p:cNvSpPr>
@@ -12481,7 +12481,7 @@
       </p:grpSpPr>
       <p:sp>
         <p:nvSpPr>
-          <p:cNvPr id="1479437824" name="Объект 2"/>
+          <p:cNvPr id="1366935849" name="Объект 2"/>
           <p:cNvSpPr>
             <a:spLocks noGrp="1"/>
           </p:cNvSpPr>
@@ -12602,7 +12602,7 @@
       </p:sp>
       <p:sp>
         <p:nvSpPr>
-          <p:cNvPr id="2080346837" name="Номер слайда 3"/>
+          <p:cNvPr id="1905721661" name="Номер слайда 3"/>
           <p:cNvSpPr>
             <a:spLocks noGrp="1"/>
           </p:cNvSpPr>
@@ -12643,7 +12643,7 @@
       </p:sp>
       <p:sp>
         <p:nvSpPr>
-          <p:cNvPr id="1502716427" name="Прямоугольник 6"/>
+          <p:cNvPr id="402361355" name="Прямоугольник 6"/>
           <p:cNvSpPr/>
           <p:nvPr/>
         </p:nvSpPr>
@@ -12693,7 +12693,7 @@
       </p:sp>
       <p:sp>
         <p:nvSpPr>
-          <p:cNvPr id="364058926" name="Прямоугольник 7"/>
+          <p:cNvPr id="871079030" name="Прямоугольник 7"/>
           <p:cNvSpPr/>
           <p:nvPr/>
         </p:nvSpPr>
@@ -12743,7 +12743,7 @@
       </p:sp>
       <p:sp>
         <p:nvSpPr>
-          <p:cNvPr id="1830808074" name="Заголовок 1"/>
+          <p:cNvPr id="912920671" name="Заголовок 1"/>
           <p:cNvSpPr>
             <a:spLocks noGrp="1"/>
           </p:cNvSpPr>
@@ -12889,7 +12889,7 @@
       </p:grpSpPr>
       <p:sp>
         <p:nvSpPr>
-          <p:cNvPr id="995164572" name="Объект 2"/>
+          <p:cNvPr id="2069389772" name="Объект 2"/>
           <p:cNvSpPr>
             <a:spLocks noGrp="1"/>
           </p:cNvSpPr>
@@ -12988,7 +12988,7 @@
       </p:sp>
       <p:sp>
         <p:nvSpPr>
-          <p:cNvPr id="196414311" name="Номер слайда 3"/>
+          <p:cNvPr id="784086288" name="Номер слайда 3"/>
           <p:cNvSpPr>
             <a:spLocks noGrp="1"/>
           </p:cNvSpPr>
@@ -13029,7 +13029,7 @@
       </p:sp>
       <p:sp>
         <p:nvSpPr>
-          <p:cNvPr id="1233898055" name="Прямоугольник 5"/>
+          <p:cNvPr id="397360" name="Прямоугольник 5"/>
           <p:cNvSpPr/>
           <p:nvPr/>
         </p:nvSpPr>
@@ -13079,7 +13079,7 @@
       </p:sp>
       <p:sp>
         <p:nvSpPr>
-          <p:cNvPr id="11396128" name="Прямоугольник 6"/>
+          <p:cNvPr id="101703978" name="Прямоугольник 6"/>
           <p:cNvSpPr/>
           <p:nvPr/>
         </p:nvSpPr>
@@ -13129,7 +13129,7 @@
       </p:sp>
       <p:sp>
         <p:nvSpPr>
-          <p:cNvPr id="1950562802" name="Заголовок 1"/>
+          <p:cNvPr id="1240477708" name="Заголовок 1"/>
           <p:cNvSpPr>
             <a:spLocks noGrp="1"/>
           </p:cNvSpPr>
@@ -13260,7 +13260,7 @@
       </p:grpSpPr>
       <p:sp>
         <p:nvSpPr>
-          <p:cNvPr id="138074253" name="Объект 2"/>
+          <p:cNvPr id="1433619793" name="Объект 2"/>
           <p:cNvSpPr>
             <a:spLocks noGrp="1"/>
           </p:cNvSpPr>
@@ -13358,7 +13358,7 @@
       </p:sp>
       <p:sp>
         <p:nvSpPr>
-          <p:cNvPr id="636799432" name="Номер слайда 3"/>
+          <p:cNvPr id="1820415611" name="Номер слайда 3"/>
           <p:cNvSpPr>
             <a:spLocks noGrp="1"/>
           </p:cNvSpPr>
@@ -13399,7 +13399,7 @@
       </p:sp>
       <p:sp>
         <p:nvSpPr>
-          <p:cNvPr id="1755558817" name="Прямоугольник 5"/>
+          <p:cNvPr id="483974506" name="Прямоугольник 5"/>
           <p:cNvSpPr/>
           <p:nvPr/>
         </p:nvSpPr>
@@ -13449,7 +13449,7 @@
       </p:sp>
       <p:sp>
         <p:nvSpPr>
-          <p:cNvPr id="572303450" name="Прямоугольник 6"/>
+          <p:cNvPr id="1797950954" name="Прямоугольник 6"/>
           <p:cNvSpPr/>
           <p:nvPr/>
         </p:nvSpPr>
@@ -13499,7 +13499,7 @@
       </p:sp>
       <p:sp>
         <p:nvSpPr>
-          <p:cNvPr id="1173033675" name="Заголовок 1"/>
+          <p:cNvPr id="416124017" name="Заголовок 1"/>
           <p:cNvSpPr>
             <a:spLocks noGrp="1"/>
           </p:cNvSpPr>
@@ -13658,7 +13658,7 @@
       </p:grpSpPr>
       <p:sp>
         <p:nvSpPr>
-          <p:cNvPr id="1483690805" name="Объект 2"/>
+          <p:cNvPr id="1564836383" name="Объект 2"/>
           <p:cNvSpPr>
             <a:spLocks noGrp="1"/>
           </p:cNvSpPr>
@@ -13733,7 +13733,7 @@
       </p:sp>
       <p:sp>
         <p:nvSpPr>
-          <p:cNvPr id="403883129" name="Номер слайда 3"/>
+          <p:cNvPr id="928786922" name="Номер слайда 3"/>
           <p:cNvSpPr>
             <a:spLocks noGrp="1"/>
           </p:cNvSpPr>
@@ -13774,7 +13774,7 @@
       </p:sp>
       <p:sp>
         <p:nvSpPr>
-          <p:cNvPr id="1045862264" name="Прямоугольник 5"/>
+          <p:cNvPr id="2016060669" name="Прямоугольник 5"/>
           <p:cNvSpPr/>
           <p:nvPr/>
         </p:nvSpPr>
@@ -13824,7 +13824,7 @@
       </p:sp>
       <p:sp>
         <p:nvSpPr>
-          <p:cNvPr id="978395966" name="Прямоугольник 6"/>
+          <p:cNvPr id="710393967" name="Прямоугольник 6"/>
           <p:cNvSpPr/>
           <p:nvPr/>
         </p:nvSpPr>
@@ -13874,7 +13874,7 @@
       </p:sp>
       <p:sp>
         <p:nvSpPr>
-          <p:cNvPr id="1715940462" name="Заголовок 1"/>
+          <p:cNvPr id="409378877" name="Заголовок 1"/>
           <p:cNvSpPr>
             <a:spLocks noGrp="1"/>
           </p:cNvSpPr>
@@ -14009,7 +14009,7 @@
       </p:grpSpPr>
       <p:sp>
         <p:nvSpPr>
-          <p:cNvPr id="124390741" name="Объект 2"/>
+          <p:cNvPr id="2027873669" name="Объект 2"/>
           <p:cNvSpPr>
             <a:spLocks noGrp="1"/>
           </p:cNvSpPr>
@@ -14106,7 +14106,7 @@
       </p:sp>
       <p:sp>
         <p:nvSpPr>
-          <p:cNvPr id="1461562504" name="Номер слайда 3"/>
+          <p:cNvPr id="1337482575" name="Номер слайда 3"/>
           <p:cNvSpPr>
             <a:spLocks noGrp="1"/>
           </p:cNvSpPr>
@@ -14147,7 +14147,7 @@
       </p:sp>
       <p:sp>
         <p:nvSpPr>
-          <p:cNvPr id="2069221344" name="Прямоугольник 4"/>
+          <p:cNvPr id="1334222644" name="Прямоугольник 4"/>
           <p:cNvSpPr/>
           <p:nvPr/>
         </p:nvSpPr>
@@ -14197,7 +14197,7 @@
       </p:sp>
       <p:sp>
         <p:nvSpPr>
-          <p:cNvPr id="1121685863" name="Прямоугольник 5"/>
+          <p:cNvPr id="1635625274" name="Прямоугольник 5"/>
           <p:cNvSpPr/>
           <p:nvPr/>
         </p:nvSpPr>
@@ -14247,7 +14247,7 @@
       </p:sp>
       <p:sp>
         <p:nvSpPr>
-          <p:cNvPr id="957087503" name="Заголовок 1"/>
+          <p:cNvPr id="1315923771" name="Заголовок 1"/>
           <p:cNvSpPr>
             <a:spLocks noGrp="1"/>
           </p:cNvSpPr>
@@ -14286,7 +14286,7 @@
       </p:sp>
       <p:pic>
         <p:nvPicPr>
-          <p:cNvPr id="2129392047" name=""/>
+          <p:cNvPr id="1022635312" name=""/>
           <p:cNvPicPr>
             <a:picLocks noChangeAspect="1"/>
           </p:cNvPicPr>
@@ -14374,7 +14374,7 @@
       </p:grpSpPr>
       <p:sp>
         <p:nvSpPr>
-          <p:cNvPr id="170494551" name="Объект 2"/>
+          <p:cNvPr id="856821674" name="Объект 2"/>
           <p:cNvSpPr>
             <a:spLocks noGrp="1"/>
           </p:cNvSpPr>
@@ -14523,7 +14523,7 @@
       </p:sp>
       <p:sp>
         <p:nvSpPr>
-          <p:cNvPr id="1688554905" name="Номер слайда 3"/>
+          <p:cNvPr id="794568358" name="Номер слайда 3"/>
           <p:cNvSpPr>
             <a:spLocks noGrp="1"/>
           </p:cNvSpPr>
@@ -14564,7 +14564,7 @@
       </p:sp>
       <p:sp>
         <p:nvSpPr>
-          <p:cNvPr id="1596128868" name="Прямоугольник 4"/>
+          <p:cNvPr id="2111971076" name="Прямоугольник 4"/>
           <p:cNvSpPr/>
           <p:nvPr/>
         </p:nvSpPr>
@@ -14614,7 +14614,7 @@
       </p:sp>
       <p:sp>
         <p:nvSpPr>
-          <p:cNvPr id="1258224964" name="Прямоугольник 5"/>
+          <p:cNvPr id="545069015" name="Прямоугольник 5"/>
           <p:cNvSpPr/>
           <p:nvPr/>
         </p:nvSpPr>
@@ -14664,7 +14664,7 @@
       </p:sp>
       <p:sp>
         <p:nvSpPr>
-          <p:cNvPr id="1880460539" name="Заголовок 1"/>
+          <p:cNvPr id="614997509" name="Заголовок 1"/>
           <p:cNvSpPr>
             <a:spLocks noGrp="1"/>
           </p:cNvSpPr>
@@ -15056,7 +15056,7 @@
       </p:grpSpPr>
       <p:sp>
         <p:nvSpPr>
-          <p:cNvPr id="35323964" name="Объект 2"/>
+          <p:cNvPr id="227669657" name="Объект 2"/>
           <p:cNvSpPr>
             <a:spLocks noGrp="1"/>
           </p:cNvSpPr>
@@ -15082,7 +15082,7 @@
       </p:sp>
       <p:sp>
         <p:nvSpPr>
-          <p:cNvPr id="556531881" name="Номер слайда 3"/>
+          <p:cNvPr id="590024601" name="Номер слайда 3"/>
           <p:cNvSpPr>
             <a:spLocks noGrp="1"/>
           </p:cNvSpPr>
@@ -15123,7 +15123,7 @@
       </p:sp>
       <p:sp>
         <p:nvSpPr>
-          <p:cNvPr id="1220916765" name="Прямоугольник 4"/>
+          <p:cNvPr id="2111822317" name="Прямоугольник 4"/>
           <p:cNvSpPr/>
           <p:nvPr/>
         </p:nvSpPr>
@@ -15173,7 +15173,7 @@
       </p:sp>
       <p:sp>
         <p:nvSpPr>
-          <p:cNvPr id="1584964398" name="Прямоугольник 5"/>
+          <p:cNvPr id="243478445" name="Прямоугольник 5"/>
           <p:cNvSpPr/>
           <p:nvPr/>
         </p:nvSpPr>
@@ -15223,7 +15223,7 @@
       </p:sp>
       <p:sp>
         <p:nvSpPr>
-          <p:cNvPr id="476382534" name="Заголовок 1"/>
+          <p:cNvPr id="564058951" name="Заголовок 1"/>
           <p:cNvSpPr>
             <a:spLocks noGrp="1"/>
           </p:cNvSpPr>
@@ -15328,7 +15328,7 @@
       </p:grpSpPr>
       <p:sp>
         <p:nvSpPr>
-          <p:cNvPr id="684247047" name="Прямоугольник 4"/>
+          <p:cNvPr id="1536915693" name="Прямоугольник 4"/>
           <p:cNvSpPr/>
           <p:nvPr/>
         </p:nvSpPr>
@@ -15378,7 +15378,7 @@
       </p:sp>
       <p:sp>
         <p:nvSpPr>
-          <p:cNvPr id="334443020" name="Заголовок 1"/>
+          <p:cNvPr id="1041489406" name="Заголовок 1"/>
           <p:cNvSpPr>
             <a:spLocks noGrp="1"/>
           </p:cNvSpPr>
@@ -15417,7 +15417,7 @@
       </p:sp>
       <p:sp>
         <p:nvSpPr>
-          <p:cNvPr id="1720181102" name="Объект 2"/>
+          <p:cNvPr id="912930153" name="Объект 2"/>
           <p:cNvSpPr>
             <a:spLocks noGrp="1"/>
           </p:cNvSpPr>
@@ -15551,7 +15551,7 @@
       </p:sp>
       <p:sp>
         <p:nvSpPr>
-          <p:cNvPr id="1828357409" name="Номер слайда 3"/>
+          <p:cNvPr id="2143570291" name="Номер слайда 3"/>
           <p:cNvSpPr>
             <a:spLocks noGrp="1"/>
           </p:cNvSpPr>
@@ -15592,7 +15592,7 @@
       </p:sp>
       <p:sp>
         <p:nvSpPr>
-          <p:cNvPr id="1732759579" name="Прямоугольник 5"/>
+          <p:cNvPr id="1805127466" name="Прямоугольник 5"/>
           <p:cNvSpPr/>
           <p:nvPr/>
         </p:nvSpPr>
@@ -15708,7 +15708,7 @@
       </p:grpSpPr>
       <p:sp>
         <p:nvSpPr>
-          <p:cNvPr id="917763893" name="Объект 2"/>
+          <p:cNvPr id="22217447" name="Объект 2"/>
           <p:cNvSpPr>
             <a:spLocks noGrp="1"/>
           </p:cNvSpPr>
@@ -15874,7 +15874,7 @@
       </p:sp>
       <p:sp>
         <p:nvSpPr>
-          <p:cNvPr id="1709281133" name="Номер слайда 3"/>
+          <p:cNvPr id="368936029" name="Номер слайда 3"/>
           <p:cNvSpPr>
             <a:spLocks noGrp="1"/>
           </p:cNvSpPr>
@@ -15915,7 +15915,7 @@
       </p:sp>
       <p:sp>
         <p:nvSpPr>
-          <p:cNvPr id="316054823" name="Прямоугольник 4"/>
+          <p:cNvPr id="558647450" name="Прямоугольник 4"/>
           <p:cNvSpPr/>
           <p:nvPr/>
         </p:nvSpPr>
@@ -15965,7 +15965,7 @@
       </p:sp>
       <p:sp>
         <p:nvSpPr>
-          <p:cNvPr id="1945025936" name="Заголовок 1"/>
+          <p:cNvPr id="1906672834" name="Заголовок 1"/>
           <p:cNvSpPr>
             <a:spLocks noGrp="1"/>
           </p:cNvSpPr>
@@ -16004,7 +16004,7 @@
       </p:sp>
       <p:sp>
         <p:nvSpPr>
-          <p:cNvPr id="1096262877" name="Прямоугольник 5"/>
+          <p:cNvPr id="469110556" name="Прямоугольник 5"/>
           <p:cNvSpPr/>
           <p:nvPr/>
         </p:nvSpPr>
@@ -16120,7 +16120,7 @@
       </p:grpSpPr>
       <p:sp>
         <p:nvSpPr>
-          <p:cNvPr id="1493096460" name="Объект 2"/>
+          <p:cNvPr id="542753073" name="Объект 2"/>
           <p:cNvSpPr>
             <a:spLocks noGrp="1"/>
           </p:cNvSpPr>
@@ -16233,7 +16233,7 @@
       </p:sp>
       <p:sp>
         <p:nvSpPr>
-          <p:cNvPr id="607929515" name="Номер слайда 3"/>
+          <p:cNvPr id="652467180" name="Номер слайда 3"/>
           <p:cNvSpPr>
             <a:spLocks noGrp="1"/>
           </p:cNvSpPr>
@@ -16274,7 +16274,7 @@
       </p:sp>
       <p:sp>
         <p:nvSpPr>
-          <p:cNvPr id="1180678852" name="Прямоугольник 5"/>
+          <p:cNvPr id="327575086" name="Прямоугольник 5"/>
           <p:cNvSpPr/>
           <p:nvPr/>
         </p:nvSpPr>
@@ -16324,7 +16324,7 @@
       </p:sp>
       <p:sp>
         <p:nvSpPr>
-          <p:cNvPr id="1566291400" name="Заголовок 1"/>
+          <p:cNvPr id="592068979" name="Заголовок 1"/>
           <p:cNvSpPr>
             <a:spLocks noGrp="1"/>
           </p:cNvSpPr>
@@ -16363,7 +16363,7 @@
       </p:sp>
       <p:sp>
         <p:nvSpPr>
-          <p:cNvPr id="1063207145" name="Прямоугольник 6"/>
+          <p:cNvPr id="2054225186" name="Прямоугольник 6"/>
           <p:cNvSpPr/>
           <p:nvPr/>
         </p:nvSpPr>
@@ -16508,7 +16508,7 @@
             </a:pPr>
             <a:r>
               <a:rPr/>
-              <a:t>Работа является общим проектом: разработка ядра упрощенного графического ускорителя</a:t>
+              <a:t>Работа является общим проектом по теме: разработка ядра упрощенного графического ускорителя</a:t>
             </a:r>
             <a:endParaRPr/>
           </a:p>
@@ -16808,7 +16808,7 @@
       </p:grpSpPr>
       <p:sp>
         <p:nvSpPr>
-          <p:cNvPr id="406971306" name="Прямоугольник 9"/>
+          <p:cNvPr id="1048868640" name="Прямоугольник 9"/>
           <p:cNvSpPr/>
           <p:nvPr/>
         </p:nvSpPr>
@@ -16858,7 +16858,7 @@
       </p:sp>
       <p:sp>
         <p:nvSpPr>
-          <p:cNvPr id="546962322" name="Прямоугольник 10"/>
+          <p:cNvPr id="881491857" name="Прямоугольник 10"/>
           <p:cNvSpPr/>
           <p:nvPr/>
         </p:nvSpPr>
@@ -16908,7 +16908,7 @@
       </p:sp>
       <p:sp>
         <p:nvSpPr>
-          <p:cNvPr id="840808342" name="Заголовок 1"/>
+          <p:cNvPr id="1570794232" name="Заголовок 1"/>
           <p:cNvSpPr>
             <a:spLocks noGrp="1"/>
           </p:cNvSpPr>
@@ -16970,7 +16970,7 @@
       </p:sp>
       <p:sp>
         <p:nvSpPr>
-          <p:cNvPr id="155359854" name="Объект 2"/>
+          <p:cNvPr id="1394958162" name="Объект 2"/>
           <p:cNvSpPr>
             <a:spLocks noGrp="1"/>
           </p:cNvSpPr>
@@ -17121,7 +17121,7 @@
       </p:sp>
       <p:sp>
         <p:nvSpPr>
-          <p:cNvPr id="768875596" name="Номер слайда 3"/>
+          <p:cNvPr id="871252132" name="Номер слайда 3"/>
           <p:cNvSpPr>
             <a:spLocks noGrp="1"/>
           </p:cNvSpPr>
@@ -17162,7 +17162,7 @@
       </p:sp>
       <p:pic>
         <p:nvPicPr>
-          <p:cNvPr id="1217119807" name="Рисунок 7"/>
+          <p:cNvPr id="1192846521" name="Рисунок 7"/>
           <p:cNvPicPr>
             <a:picLocks noChangeAspect="1"/>
           </p:cNvPicPr>
@@ -17196,7 +17196,7 @@
       </p:pic>
       <p:pic>
         <p:nvPicPr>
-          <p:cNvPr id="1515494110" name=""/>
+          <p:cNvPr id="1232751434" name=""/>
           <p:cNvPicPr>
             <a:picLocks noChangeAspect="1"/>
           </p:cNvPicPr>
@@ -17292,7 +17292,7 @@
       </p:grpSpPr>
       <p:sp>
         <p:nvSpPr>
-          <p:cNvPr id="1795250823" name="Прямоугольник 9"/>
+          <p:cNvPr id="1985977684" name="Прямоугольник 9"/>
           <p:cNvSpPr/>
           <p:nvPr/>
         </p:nvSpPr>
@@ -17342,7 +17342,7 @@
       </p:sp>
       <p:sp>
         <p:nvSpPr>
-          <p:cNvPr id="1947151901" name="Прямоугольник 10"/>
+          <p:cNvPr id="947805732" name="Прямоугольник 10"/>
           <p:cNvSpPr/>
           <p:nvPr/>
         </p:nvSpPr>
@@ -17392,7 +17392,7 @@
       </p:sp>
       <p:sp>
         <p:nvSpPr>
-          <p:cNvPr id="1800754129" name="Заголовок 1"/>
+          <p:cNvPr id="2013633170" name="Заголовок 1"/>
           <p:cNvSpPr>
             <a:spLocks noGrp="1"/>
           </p:cNvSpPr>
@@ -17454,7 +17454,7 @@
       </p:sp>
       <p:sp>
         <p:nvSpPr>
-          <p:cNvPr id="1566269292" name="Объект 2"/>
+          <p:cNvPr id="149897325" name="Объект 2"/>
           <p:cNvSpPr>
             <a:spLocks noGrp="1"/>
           </p:cNvSpPr>
@@ -17559,7 +17559,7 @@
       </p:sp>
       <p:sp>
         <p:nvSpPr>
-          <p:cNvPr id="473318622" name="Номер слайда 3"/>
+          <p:cNvPr id="1779205059" name="Номер слайда 3"/>
           <p:cNvSpPr>
             <a:spLocks noGrp="1"/>
           </p:cNvSpPr>
@@ -17600,7 +17600,7 @@
       </p:sp>
       <p:pic>
         <p:nvPicPr>
-          <p:cNvPr id="1266386167" name="Рисунок 5"/>
+          <p:cNvPr id="1409452169" name="Рисунок 5"/>
           <p:cNvPicPr>
             <a:picLocks noChangeAspect="1"/>
           </p:cNvPicPr>
@@ -17701,7 +17701,7 @@
       </p:grpSpPr>
       <p:sp>
         <p:nvSpPr>
-          <p:cNvPr id="1971574250" name="Объект 2"/>
+          <p:cNvPr id="4483213" name="Объект 2"/>
           <p:cNvSpPr>
             <a:spLocks noGrp="1"/>
           </p:cNvSpPr>
@@ -17772,7 +17772,7 @@
       </p:sp>
       <p:sp>
         <p:nvSpPr>
-          <p:cNvPr id="1286389898" name="Номер слайда 3"/>
+          <p:cNvPr id="904480107" name="Номер слайда 3"/>
           <p:cNvSpPr>
             <a:spLocks noGrp="1"/>
           </p:cNvSpPr>
@@ -17813,7 +17813,7 @@
       </p:sp>
       <p:pic>
         <p:nvPicPr>
-          <p:cNvPr id="405019113" name="Рисунок 5"/>
+          <p:cNvPr id="1983175843" name="Рисунок 5"/>
           <p:cNvPicPr>
             <a:picLocks noChangeAspect="1"/>
           </p:cNvPicPr>
@@ -17843,7 +17843,7 @@
       </p:pic>
       <p:pic>
         <p:nvPicPr>
-          <p:cNvPr id="1223278306" name="Рисунок 1421075015"/>
+          <p:cNvPr id="2082847302" name="Рисунок 1421075015"/>
           <p:cNvPicPr>
             <a:picLocks noChangeAspect="1"/>
           </p:cNvPicPr>
@@ -17878,7 +17878,7 @@
       </p:pic>
       <p:sp>
         <p:nvSpPr>
-          <p:cNvPr id="579381362" name="Прямоугольник 10"/>
+          <p:cNvPr id="606452157" name="Прямоугольник 10"/>
           <p:cNvSpPr/>
           <p:nvPr/>
         </p:nvSpPr>
@@ -17928,7 +17928,7 @@
       </p:sp>
       <p:sp>
         <p:nvSpPr>
-          <p:cNvPr id="842502536" name="Прямоугольник 11"/>
+          <p:cNvPr id="1733975431" name="Прямоугольник 11"/>
           <p:cNvSpPr/>
           <p:nvPr/>
         </p:nvSpPr>
@@ -17978,7 +17978,7 @@
       </p:sp>
       <p:sp>
         <p:nvSpPr>
-          <p:cNvPr id="722072276" name="Заголовок 1"/>
+          <p:cNvPr id="487439328" name="Заголовок 1"/>
           <p:cNvSpPr>
             <a:spLocks noGrp="1"/>
           </p:cNvSpPr>
@@ -18027,7 +18027,7 @@
       </p:sp>
       <p:pic>
         <p:nvPicPr>
-          <p:cNvPr id="1263729467" name="Рисунок 2"/>
+          <p:cNvPr id="109469017" name="Рисунок 2"/>
           <p:cNvPicPr>
             <a:picLocks noChangeAspect="1"/>
           </p:cNvPicPr>
@@ -18055,7 +18055,7 @@
       </p:pic>
       <p:pic>
         <p:nvPicPr>
-          <p:cNvPr id="1018873478" name=""/>
+          <p:cNvPr id="89087981" name=""/>
           <p:cNvPicPr>
             <a:picLocks noChangeAspect="1"/>
           </p:cNvPicPr>
@@ -18087,8 +18087,8 @@
         <p:nvCxnSpPr>
           <p:cNvPr id="1150155137" name=""/>
           <p:cNvCxnSpPr>
-            <a:stCxn id="405019113" idx="3"/>
-            <a:endCxn id="1263729467" idx="1"/>
+            <a:stCxn id="1983175843" idx="3"/>
+            <a:endCxn id="109469017" idx="1"/>
           </p:cNvCxnSpPr>
           <p:nvPr/>
         </p:nvCxnSpPr>
@@ -18130,8 +18130,8 @@
         <p:nvCxnSpPr>
           <p:cNvPr id="953161365" name=""/>
           <p:cNvCxnSpPr>
-            <a:stCxn id="405019113" idx="3"/>
-            <a:endCxn id="1223278306" idx="2"/>
+            <a:stCxn id="1983175843" idx="3"/>
+            <a:endCxn id="2082847302" idx="2"/>
           </p:cNvCxnSpPr>
           <p:nvPr/>
         </p:nvCxnSpPr>
@@ -18173,8 +18173,8 @@
         <p:nvCxnSpPr>
           <p:cNvPr id="1000365914" name=""/>
           <p:cNvCxnSpPr>
-            <a:stCxn id="1018873478" idx="3"/>
-            <a:endCxn id="1223278306" idx="1"/>
+            <a:stCxn id="89087981" idx="3"/>
+            <a:endCxn id="2082847302" idx="1"/>
           </p:cNvCxnSpPr>
           <p:nvPr/>
         </p:nvCxnSpPr>
@@ -18216,8 +18216,8 @@
         <p:nvCxnSpPr>
           <p:cNvPr id="799810659" name=""/>
           <p:cNvCxnSpPr>
-            <a:stCxn id="1018873478" idx="3"/>
-            <a:endCxn id="1263729467" idx="0"/>
+            <a:stCxn id="89087981" idx="3"/>
+            <a:endCxn id="109469017" idx="0"/>
           </p:cNvCxnSpPr>
           <p:nvPr/>
         </p:nvCxnSpPr>
@@ -18323,7 +18323,7 @@
       </p:grpSpPr>
       <p:sp>
         <p:nvSpPr>
-          <p:cNvPr id="1407148718" name="Объект 2"/>
+          <p:cNvPr id="1180795162" name="Объект 2"/>
           <p:cNvSpPr>
             <a:spLocks noGrp="1"/>
           </p:cNvSpPr>
@@ -18462,7 +18462,7 @@
       </p:sp>
       <p:sp>
         <p:nvSpPr>
-          <p:cNvPr id="417506553" name="Номер слайда 3"/>
+          <p:cNvPr id="409630572" name="Номер слайда 3"/>
           <p:cNvSpPr>
             <a:spLocks noGrp="1"/>
           </p:cNvSpPr>
@@ -18503,7 +18503,7 @@
       </p:sp>
       <p:sp>
         <p:nvSpPr>
-          <p:cNvPr id="965651225" name="Прямоугольник 5"/>
+          <p:cNvPr id="1957135082" name="Прямоугольник 5"/>
           <p:cNvSpPr/>
           <p:nvPr/>
         </p:nvSpPr>
@@ -18553,7 +18553,7 @@
       </p:sp>
       <p:sp>
         <p:nvSpPr>
-          <p:cNvPr id="1046053022" name="Прямоугольник 6"/>
+          <p:cNvPr id="2107844844" name="Прямоугольник 6"/>
           <p:cNvSpPr/>
           <p:nvPr/>
         </p:nvSpPr>
@@ -18603,7 +18603,7 @@
       </p:sp>
       <p:sp>
         <p:nvSpPr>
-          <p:cNvPr id="1080473041" name="Заголовок 1"/>
+          <p:cNvPr id="1554530214" name="Заголовок 1"/>
           <p:cNvSpPr>
             <a:spLocks noGrp="1"/>
           </p:cNvSpPr>

--- a/docs/starukhin_dissertation/magister_pres.pptx
+++ b/docs/starukhin_dissertation/magister_pres.pptx
@@ -5,7 +5,7 @@
     <p:sldMasterId id="2147483648" r:id="rId1"/>
   </p:sldMasterIdLst>
   <p:notesMasterIdLst>
-    <p:notesMasterId r:id="rId21"/>
+    <p:notesMasterId r:id="rId22"/>
   </p:notesMasterIdLst>
   <p:sldIdLst>
     <p:sldId id="256" r:id="rId4"/>
@@ -25,6 +25,7 @@
     <p:sldId id="270" r:id="rId18"/>
     <p:sldId id="271" r:id="rId19"/>
     <p:sldId id="272" r:id="rId20"/>
+    <p:sldId id="273" r:id="rId21"/>
   </p:sldIdLst>
   <p:sldSz cx="12192000" cy="6858000"/>
   <p:notesSz cx="6858000" cy="9144000"/>
@@ -150,7 +151,7 @@
       </p:grpSpPr>
       <p:sp>
         <p:nvSpPr>
-          <p:cNvPr id="146555648" name="Верхний колонтитул 1"/>
+          <p:cNvPr id="1126395799" name="Верхний колонтитул 1"/>
           <p:cNvSpPr>
             <a:spLocks noGrp="1"/>
           </p:cNvSpPr>
@@ -184,7 +185,7 @@
       </p:sp>
       <p:sp>
         <p:nvSpPr>
-          <p:cNvPr id="1769402897" name="Дата 2"/>
+          <p:cNvPr id="893809610" name="Дата 2"/>
           <p:cNvSpPr>
             <a:spLocks noGrp="1"/>
           </p:cNvSpPr>
@@ -222,7 +223,7 @@
       </p:sp>
       <p:sp>
         <p:nvSpPr>
-          <p:cNvPr id="1162990744" name="Образ слайда 3"/>
+          <p:cNvPr id="783958055" name="Образ слайда 3"/>
           <p:cNvSpPr>
             <a:spLocks noChangeAspect="1" noGrp="1" noRot="1"/>
           </p:cNvSpPr>
@@ -258,7 +259,7 @@
       </p:sp>
       <p:sp>
         <p:nvSpPr>
-          <p:cNvPr id="1636096988" name="Заметки 4"/>
+          <p:cNvPr id="1423181241" name="Заметки 4"/>
           <p:cNvSpPr>
             <a:spLocks noGrp="1"/>
           </p:cNvSpPr>
@@ -332,7 +333,7 @@
       </p:sp>
       <p:sp>
         <p:nvSpPr>
-          <p:cNvPr id="1354838155" name="Нижний колонтитул 5"/>
+          <p:cNvPr id="1679632732" name="Нижний колонтитул 5"/>
           <p:cNvSpPr>
             <a:spLocks noGrp="1"/>
           </p:cNvSpPr>
@@ -366,7 +367,7 @@
       </p:sp>
       <p:sp>
         <p:nvSpPr>
-          <p:cNvPr id="324635798" name="Номер слайда 6"/>
+          <p:cNvPr id="142787384" name="Номер слайда 6"/>
           <p:cNvSpPr>
             <a:spLocks noGrp="1"/>
           </p:cNvSpPr>
@@ -519,7 +520,7 @@
       </p:grpSpPr>
       <p:sp>
         <p:nvSpPr>
-          <p:cNvPr id="1612894675" name="Slide Image Placeholder 1"/>
+          <p:cNvPr id="567902080" name="Slide Image Placeholder 1"/>
           <p:cNvSpPr>
             <a:spLocks noChangeAspect="1" noGrp="1" noRot="1"/>
           </p:cNvSpPr>
@@ -531,7 +532,7 @@
       </p:sp>
       <p:sp>
         <p:nvSpPr>
-          <p:cNvPr id="1800236599" name="Notes Placeholder 2"/>
+          <p:cNvPr id="142545383" name="Notes Placeholder 2"/>
           <p:cNvSpPr>
             <a:spLocks noGrp="1"/>
           </p:cNvSpPr>
@@ -553,7 +554,7 @@
       </p:sp>
       <p:sp>
         <p:nvSpPr>
-          <p:cNvPr id="1264110815" name="Slide Number Placeholder 3"/>
+          <p:cNvPr id="21211330" name="Slide Number Placeholder 3"/>
           <p:cNvSpPr>
             <a:spLocks noGrp="1"/>
           </p:cNvSpPr>
@@ -604,7 +605,7 @@
       </p:grpSpPr>
       <p:sp>
         <p:nvSpPr>
-          <p:cNvPr id="1851939593" name="Slide Image Placeholder 1"/>
+          <p:cNvPr id="1532364270" name="Slide Image Placeholder 1"/>
           <p:cNvSpPr>
             <a:spLocks noChangeAspect="1" noGrp="1" noRot="1"/>
           </p:cNvSpPr>
@@ -616,7 +617,7 @@
       </p:sp>
       <p:sp>
         <p:nvSpPr>
-          <p:cNvPr id="1501839364" name="Notes Placeholder 2"/>
+          <p:cNvPr id="1539798233" name="Notes Placeholder 2"/>
           <p:cNvSpPr>
             <a:spLocks noGrp="1"/>
           </p:cNvSpPr>
@@ -638,7 +639,7 @@
       </p:sp>
       <p:sp>
         <p:nvSpPr>
-          <p:cNvPr id="1484776516" name="Slide Number Placeholder 3"/>
+          <p:cNvPr id="1084836597" name="Slide Number Placeholder 3"/>
           <p:cNvSpPr>
             <a:spLocks noGrp="1"/>
           </p:cNvSpPr>
@@ -689,7 +690,7 @@
       </p:grpSpPr>
       <p:sp>
         <p:nvSpPr>
-          <p:cNvPr id="1560951283" name="Slide Image Placeholder 1"/>
+          <p:cNvPr id="1752815374" name="Slide Image Placeholder 1"/>
           <p:cNvSpPr>
             <a:spLocks noChangeAspect="1" noGrp="1" noRot="1"/>
           </p:cNvSpPr>
@@ -701,7 +702,7 @@
       </p:sp>
       <p:sp>
         <p:nvSpPr>
-          <p:cNvPr id="395179755" name="Notes Placeholder 2"/>
+          <p:cNvPr id="549803960" name="Notes Placeholder 2"/>
           <p:cNvSpPr>
             <a:spLocks noGrp="1"/>
           </p:cNvSpPr>
@@ -723,7 +724,7 @@
       </p:sp>
       <p:sp>
         <p:nvSpPr>
-          <p:cNvPr id="1750846342" name="Slide Number Placeholder 3"/>
+          <p:cNvPr id="1192721116" name="Slide Number Placeholder 3"/>
           <p:cNvSpPr>
             <a:spLocks noGrp="1"/>
           </p:cNvSpPr>
@@ -774,7 +775,7 @@
       </p:grpSpPr>
       <p:sp>
         <p:nvSpPr>
-          <p:cNvPr id="384495068" name="Slide Image Placeholder 1"/>
+          <p:cNvPr id="1604845010" name="Slide Image Placeholder 1"/>
           <p:cNvSpPr>
             <a:spLocks noChangeAspect="1" noGrp="1" noRot="1"/>
           </p:cNvSpPr>
@@ -786,7 +787,7 @@
       </p:sp>
       <p:sp>
         <p:nvSpPr>
-          <p:cNvPr id="416880015" name="Notes Placeholder 2"/>
+          <p:cNvPr id="825463307" name="Notes Placeholder 2"/>
           <p:cNvSpPr>
             <a:spLocks noGrp="1"/>
           </p:cNvSpPr>
@@ -808,7 +809,7 @@
       </p:sp>
       <p:sp>
         <p:nvSpPr>
-          <p:cNvPr id="847499035" name="Slide Number Placeholder 3"/>
+          <p:cNvPr id="1217655388" name="Slide Number Placeholder 3"/>
           <p:cNvSpPr>
             <a:spLocks noGrp="1"/>
           </p:cNvSpPr>
@@ -859,7 +860,7 @@
       </p:grpSpPr>
       <p:sp>
         <p:nvSpPr>
-          <p:cNvPr id="1631222715" name="Slide Image Placeholder 1"/>
+          <p:cNvPr id="1269053467" name="Slide Image Placeholder 1"/>
           <p:cNvSpPr>
             <a:spLocks noChangeAspect="1" noGrp="1" noRot="1"/>
           </p:cNvSpPr>
@@ -871,7 +872,7 @@
       </p:sp>
       <p:sp>
         <p:nvSpPr>
-          <p:cNvPr id="362243400" name="Notes Placeholder 2"/>
+          <p:cNvPr id="144882064" name="Notes Placeholder 2"/>
           <p:cNvSpPr>
             <a:spLocks noGrp="1"/>
           </p:cNvSpPr>
@@ -893,7 +894,7 @@
       </p:sp>
       <p:sp>
         <p:nvSpPr>
-          <p:cNvPr id="1343210007" name="Slide Number Placeholder 3"/>
+          <p:cNvPr id="1482747105" name="Slide Number Placeholder 3"/>
           <p:cNvSpPr>
             <a:spLocks noGrp="1"/>
           </p:cNvSpPr>
@@ -944,7 +945,7 @@
       </p:grpSpPr>
       <p:sp>
         <p:nvSpPr>
-          <p:cNvPr id="653331553" name="Slide Image Placeholder 1"/>
+          <p:cNvPr id="922701654" name="Slide Image Placeholder 1"/>
           <p:cNvSpPr>
             <a:spLocks noChangeAspect="1" noGrp="1" noRot="1"/>
           </p:cNvSpPr>
@@ -956,7 +957,7 @@
       </p:sp>
       <p:sp>
         <p:nvSpPr>
-          <p:cNvPr id="611649930" name="Notes Placeholder 2"/>
+          <p:cNvPr id="496126638" name="Notes Placeholder 2"/>
           <p:cNvSpPr>
             <a:spLocks noGrp="1"/>
           </p:cNvSpPr>
@@ -978,7 +979,7 @@
       </p:sp>
       <p:sp>
         <p:nvSpPr>
-          <p:cNvPr id="936041752" name="Slide Number Placeholder 3"/>
+          <p:cNvPr id="975537664" name="Slide Number Placeholder 3"/>
           <p:cNvSpPr>
             <a:spLocks noGrp="1"/>
           </p:cNvSpPr>
@@ -1029,7 +1030,7 @@
       </p:grpSpPr>
       <p:sp>
         <p:nvSpPr>
-          <p:cNvPr id="1027710970" name="Slide Image Placeholder 1"/>
+          <p:cNvPr id="2076191163" name="Slide Image Placeholder 1"/>
           <p:cNvSpPr>
             <a:spLocks noChangeAspect="1" noGrp="1" noRot="1"/>
           </p:cNvSpPr>
@@ -1041,7 +1042,7 @@
       </p:sp>
       <p:sp>
         <p:nvSpPr>
-          <p:cNvPr id="2129463095" name="Notes Placeholder 2"/>
+          <p:cNvPr id="1268017586" name="Notes Placeholder 2"/>
           <p:cNvSpPr>
             <a:spLocks noGrp="1"/>
           </p:cNvSpPr>
@@ -1063,7 +1064,7 @@
       </p:sp>
       <p:sp>
         <p:nvSpPr>
-          <p:cNvPr id="1036942901" name="Slide Number Placeholder 3"/>
+          <p:cNvPr id="523570005" name="Slide Number Placeholder 3"/>
           <p:cNvSpPr>
             <a:spLocks noGrp="1"/>
           </p:cNvSpPr>
@@ -1199,7 +1200,7 @@
       </p:grpSpPr>
       <p:sp>
         <p:nvSpPr>
-          <p:cNvPr id="1622014842" name="Slide Image Placeholder 1"/>
+          <p:cNvPr id="2119051406" name="Slide Image Placeholder 1"/>
           <p:cNvSpPr>
             <a:spLocks noChangeAspect="1" noGrp="1" noRot="1"/>
           </p:cNvSpPr>
@@ -1211,7 +1212,7 @@
       </p:sp>
       <p:sp>
         <p:nvSpPr>
-          <p:cNvPr id="1675340667" name="Notes Placeholder 2"/>
+          <p:cNvPr id="1144695736" name="Notes Placeholder 2"/>
           <p:cNvSpPr>
             <a:spLocks noGrp="1"/>
           </p:cNvSpPr>
@@ -1233,7 +1234,7 @@
       </p:sp>
       <p:sp>
         <p:nvSpPr>
-          <p:cNvPr id="1492683537" name="Slide Number Placeholder 3"/>
+          <p:cNvPr id="1262870708" name="Slide Number Placeholder 3"/>
           <p:cNvSpPr>
             <a:spLocks noGrp="1"/>
           </p:cNvSpPr>
@@ -1252,6 +1253,91 @@
             <a:fld id="{188C1104-84A8-CC17-258A-A96B99F9A95E}" type="slidenum">
               <a:rPr/>
               <a:t>15</a:t>
+            </a:fld>
+            <a:endParaRPr/>
+          </a:p>
+        </p:txBody>
+      </p:sp>
+    </p:spTree>
+  </p:cSld>
+  <p:clrMapOvr>
+    <a:masterClrMapping/>
+  </p:clrMapOvr>
+</p:notes>
+</file>
+
+<file path=ppt/notesSlides/notesSlide18.xml><?xml version="1.0" encoding="utf-8"?>
+<p:notes xmlns:a="http://schemas.openxmlformats.org/drawingml/2006/main" xmlns:r="http://schemas.openxmlformats.org/officeDocument/2006/relationships" xmlns:p="http://schemas.openxmlformats.org/presentationml/2006/main" xmlns:m="http://schemas.openxmlformats.org/officeDocument/2006/math" xmlns:w="http://schemas.openxmlformats.org/wordprocessingml/2006/main">
+  <p:cSld name="">
+    <p:spTree>
+      <p:nvGrpSpPr>
+        <p:cNvPr id="1" name=""/>
+        <p:cNvGrpSpPr/>
+        <p:nvPr/>
+      </p:nvGrpSpPr>
+      <p:grpSpPr bwMode="auto">
+        <a:xfrm>
+          <a:off x="0" y="0"/>
+          <a:ext cx="0" cy="0"/>
+          <a:chOff x="0" y="0"/>
+          <a:chExt cx="0" cy="0"/>
+        </a:xfrm>
+      </p:grpSpPr>
+      <p:sp>
+        <p:nvSpPr>
+          <p:cNvPr id="821583980" name="Slide Image Placeholder 1"/>
+          <p:cNvSpPr>
+            <a:spLocks noChangeAspect="1" noGrp="1" noRot="1"/>
+          </p:cNvSpPr>
+          <p:nvPr>
+            <p:ph type="sldImg"/>
+          </p:nvPr>
+        </p:nvSpPr>
+        <p:spPr bwMode="auto"/>
+      </p:sp>
+      <p:sp>
+        <p:nvSpPr>
+          <p:cNvPr id="119467836" name="Notes Placeholder 2"/>
+          <p:cNvSpPr>
+            <a:spLocks noGrp="1"/>
+          </p:cNvSpPr>
+          <p:nvPr>
+            <p:ph type="body" idx="1"/>
+          </p:nvPr>
+        </p:nvSpPr>
+        <p:spPr bwMode="auto"/>
+        <p:txBody>
+          <a:bodyPr/>
+          <a:lstStyle/>
+          <a:p>
+            <a:pPr>
+              <a:defRPr/>
+            </a:pPr>
+            <a:endParaRPr/>
+          </a:p>
+        </p:txBody>
+      </p:sp>
+      <p:sp>
+        <p:nvSpPr>
+          <p:cNvPr id="875830894" name="Slide Number Placeholder 3"/>
+          <p:cNvSpPr>
+            <a:spLocks noGrp="1"/>
+          </p:cNvSpPr>
+          <p:nvPr>
+            <p:ph type="sldNum" sz="quarter" idx="10"/>
+          </p:nvPr>
+        </p:nvSpPr>
+        <p:spPr bwMode="auto"/>
+        <p:txBody>
+          <a:bodyPr/>
+          <a:lstStyle/>
+          <a:p>
+            <a:pPr>
+              <a:defRPr/>
+            </a:pPr>
+            <a:fld id="{88900006-DE8E-E061-C9AE-0E64162B086A}" type="slidenum">
+              <a:rPr/>
+              <a:t>1</a:t>
             </a:fld>
             <a:endParaRPr/>
           </a:p>
@@ -1284,7 +1370,7 @@
       </p:grpSpPr>
       <p:sp>
         <p:nvSpPr>
-          <p:cNvPr id="697788022" name="Slide Image Placeholder 1"/>
+          <p:cNvPr id="1302970166" name="Slide Image Placeholder 1"/>
           <p:cNvSpPr>
             <a:spLocks noChangeAspect="1" noGrp="1" noRot="1"/>
           </p:cNvSpPr>
@@ -1296,7 +1382,7 @@
       </p:sp>
       <p:sp>
         <p:nvSpPr>
-          <p:cNvPr id="1319940628" name="Notes Placeholder 2"/>
+          <p:cNvPr id="1560526699" name="Notes Placeholder 2"/>
           <p:cNvSpPr>
             <a:spLocks noGrp="1"/>
           </p:cNvSpPr>
@@ -1318,7 +1404,7 @@
       </p:sp>
       <p:sp>
         <p:nvSpPr>
-          <p:cNvPr id="1257090300" name="Slide Number Placeholder 3"/>
+          <p:cNvPr id="1542511720" name="Slide Number Placeholder 3"/>
           <p:cNvSpPr>
             <a:spLocks noGrp="1"/>
           </p:cNvSpPr>
@@ -1369,7 +1455,7 @@
       </p:grpSpPr>
       <p:sp>
         <p:nvSpPr>
-          <p:cNvPr id="710141094" name="Slide Image Placeholder 1"/>
+          <p:cNvPr id="1838805396" name="Slide Image Placeholder 1"/>
           <p:cNvSpPr>
             <a:spLocks noChangeAspect="1" noGrp="1" noRot="1"/>
           </p:cNvSpPr>
@@ -1381,7 +1467,7 @@
       </p:sp>
       <p:sp>
         <p:nvSpPr>
-          <p:cNvPr id="1975947540" name="Notes Placeholder 2"/>
+          <p:cNvPr id="397081443" name="Notes Placeholder 2"/>
           <p:cNvSpPr>
             <a:spLocks noGrp="1"/>
           </p:cNvSpPr>
@@ -1403,7 +1489,7 @@
       </p:sp>
       <p:sp>
         <p:nvSpPr>
-          <p:cNvPr id="1035217438" name="Slide Number Placeholder 3"/>
+          <p:cNvPr id="927862397" name="Slide Number Placeholder 3"/>
           <p:cNvSpPr>
             <a:spLocks noGrp="1"/>
           </p:cNvSpPr>
@@ -1454,7 +1540,7 @@
       </p:grpSpPr>
       <p:sp>
         <p:nvSpPr>
-          <p:cNvPr id="808360750" name="Slide Image Placeholder 1"/>
+          <p:cNvPr id="328187369" name="Slide Image Placeholder 1"/>
           <p:cNvSpPr>
             <a:spLocks noChangeAspect="1" noGrp="1" noRot="1"/>
           </p:cNvSpPr>
@@ -1466,7 +1552,7 @@
       </p:sp>
       <p:sp>
         <p:nvSpPr>
-          <p:cNvPr id="360775886" name="Notes Placeholder 2"/>
+          <p:cNvPr id="1339887662" name="Notes Placeholder 2"/>
           <p:cNvSpPr>
             <a:spLocks noGrp="1"/>
           </p:cNvSpPr>
@@ -1488,7 +1574,7 @@
       </p:sp>
       <p:sp>
         <p:nvSpPr>
-          <p:cNvPr id="1651902301" name="Slide Number Placeholder 3"/>
+          <p:cNvPr id="1022034553" name="Slide Number Placeholder 3"/>
           <p:cNvSpPr>
             <a:spLocks noGrp="1"/>
           </p:cNvSpPr>
@@ -1624,7 +1710,7 @@
       </p:grpSpPr>
       <p:sp>
         <p:nvSpPr>
-          <p:cNvPr id="2018413479" name="Slide Image Placeholder 1"/>
+          <p:cNvPr id="1033307967" name="Slide Image Placeholder 1"/>
           <p:cNvSpPr>
             <a:spLocks noChangeAspect="1" noGrp="1" noRot="1"/>
           </p:cNvSpPr>
@@ -1636,7 +1722,7 @@
       </p:sp>
       <p:sp>
         <p:nvSpPr>
-          <p:cNvPr id="5438758" name="Notes Placeholder 2"/>
+          <p:cNvPr id="52044889" name="Notes Placeholder 2"/>
           <p:cNvSpPr>
             <a:spLocks noGrp="1"/>
           </p:cNvSpPr>
@@ -1658,7 +1744,7 @@
       </p:sp>
       <p:sp>
         <p:nvSpPr>
-          <p:cNvPr id="2077705117" name="Slide Number Placeholder 3"/>
+          <p:cNvPr id="2028409336" name="Slide Number Placeholder 3"/>
           <p:cNvSpPr>
             <a:spLocks noGrp="1"/>
           </p:cNvSpPr>
@@ -1709,7 +1795,7 @@
       </p:grpSpPr>
       <p:sp>
         <p:nvSpPr>
-          <p:cNvPr id="94720085" name="Slide Image Placeholder 1"/>
+          <p:cNvPr id="1851965187" name="Slide Image Placeholder 1"/>
           <p:cNvSpPr>
             <a:spLocks noChangeAspect="1" noGrp="1" noRot="1"/>
           </p:cNvSpPr>
@@ -1721,7 +1807,7 @@
       </p:sp>
       <p:sp>
         <p:nvSpPr>
-          <p:cNvPr id="1784202183" name="Notes Placeholder 2"/>
+          <p:cNvPr id="119313565" name="Notes Placeholder 2"/>
           <p:cNvSpPr>
             <a:spLocks noGrp="1"/>
           </p:cNvSpPr>
@@ -1743,7 +1829,7 @@
       </p:sp>
       <p:sp>
         <p:nvSpPr>
-          <p:cNvPr id="861688934" name="Slide Number Placeholder 3"/>
+          <p:cNvPr id="1103514434" name="Slide Number Placeholder 3"/>
           <p:cNvSpPr>
             <a:spLocks noGrp="1"/>
           </p:cNvSpPr>
@@ -1794,7 +1880,7 @@
       </p:grpSpPr>
       <p:sp>
         <p:nvSpPr>
-          <p:cNvPr id="754147924" name="Slide Image Placeholder 1"/>
+          <p:cNvPr id="2054534315" name="Slide Image Placeholder 1"/>
           <p:cNvSpPr>
             <a:spLocks noChangeAspect="1" noGrp="1" noRot="1"/>
           </p:cNvSpPr>
@@ -1806,7 +1892,7 @@
       </p:sp>
       <p:sp>
         <p:nvSpPr>
-          <p:cNvPr id="1512171989" name="Notes Placeholder 2"/>
+          <p:cNvPr id="2079842227" name="Notes Placeholder 2"/>
           <p:cNvSpPr>
             <a:spLocks noGrp="1"/>
           </p:cNvSpPr>
@@ -1828,7 +1914,7 @@
       </p:sp>
       <p:sp>
         <p:nvSpPr>
-          <p:cNvPr id="2049726020" name="Slide Number Placeholder 3"/>
+          <p:cNvPr id="247289998" name="Slide Number Placeholder 3"/>
           <p:cNvSpPr>
             <a:spLocks noGrp="1"/>
           </p:cNvSpPr>
@@ -1879,7 +1965,7 @@
       </p:grpSpPr>
       <p:sp>
         <p:nvSpPr>
-          <p:cNvPr id="99679420" name="Slide Image Placeholder 1"/>
+          <p:cNvPr id="650865050" name="Slide Image Placeholder 1"/>
           <p:cNvSpPr>
             <a:spLocks noChangeAspect="1" noGrp="1" noRot="1"/>
           </p:cNvSpPr>
@@ -1891,7 +1977,7 @@
       </p:sp>
       <p:sp>
         <p:nvSpPr>
-          <p:cNvPr id="1960577188" name="Notes Placeholder 2"/>
+          <p:cNvPr id="822075055" name="Notes Placeholder 2"/>
           <p:cNvSpPr>
             <a:spLocks noGrp="1"/>
           </p:cNvSpPr>
@@ -1913,7 +1999,7 @@
       </p:sp>
       <p:sp>
         <p:nvSpPr>
-          <p:cNvPr id="1268934110" name="Slide Number Placeholder 3"/>
+          <p:cNvPr id="458887736" name="Slide Number Placeholder 3"/>
           <p:cNvSpPr>
             <a:spLocks noGrp="1"/>
           </p:cNvSpPr>
@@ -1964,7 +2050,7 @@
       </p:grpSpPr>
       <p:sp>
         <p:nvSpPr>
-          <p:cNvPr id="1544513276" name="Заголовок 1"/>
+          <p:cNvPr id="1783363823" name="Заголовок 1"/>
           <p:cNvSpPr>
             <a:spLocks noGrp="1"/>
           </p:cNvSpPr>
@@ -1999,7 +2085,7 @@
       </p:sp>
       <p:sp>
         <p:nvSpPr>
-          <p:cNvPr id="2105021586" name="Подзаголовок 2"/>
+          <p:cNvPr id="2086414785" name="Подзаголовок 2"/>
           <p:cNvSpPr>
             <a:spLocks noGrp="1"/>
           </p:cNvSpPr>
@@ -2067,7 +2153,7 @@
       </p:sp>
       <p:sp>
         <p:nvSpPr>
-          <p:cNvPr id="1486710633" name="Дата 3"/>
+          <p:cNvPr id="882137897" name="Дата 3"/>
           <p:cNvSpPr>
             <a:spLocks noGrp="1"/>
           </p:cNvSpPr>
@@ -2093,7 +2179,7 @@
       </p:sp>
       <p:sp>
         <p:nvSpPr>
-          <p:cNvPr id="1785357374" name="Нижний колонтитул 4"/>
+          <p:cNvPr id="409071911" name="Нижний колонтитул 4"/>
           <p:cNvSpPr>
             <a:spLocks noGrp="1"/>
           </p:cNvSpPr>
@@ -2115,7 +2201,7 @@
       </p:sp>
       <p:sp>
         <p:nvSpPr>
-          <p:cNvPr id="1945320491" name="Номер слайда 5"/>
+          <p:cNvPr id="544941944" name="Номер слайда 5"/>
           <p:cNvSpPr>
             <a:spLocks noGrp="1"/>
           </p:cNvSpPr>
@@ -2166,7 +2252,7 @@
       </p:grpSpPr>
       <p:sp>
         <p:nvSpPr>
-          <p:cNvPr id="1151930323" name="Заголовок 1"/>
+          <p:cNvPr id="307537153" name="Заголовок 1"/>
           <p:cNvSpPr>
             <a:spLocks noGrp="1"/>
           </p:cNvSpPr>
@@ -2192,7 +2278,7 @@
       </p:sp>
       <p:sp>
         <p:nvSpPr>
-          <p:cNvPr id="1652784177" name="Вертикальный текст 2"/>
+          <p:cNvPr id="418963915" name="Вертикальный текст 2"/>
           <p:cNvSpPr>
             <a:spLocks noGrp="1"/>
           </p:cNvSpPr>
@@ -2258,7 +2344,7 @@
       </p:sp>
       <p:sp>
         <p:nvSpPr>
-          <p:cNvPr id="2059832466" name="Дата 3"/>
+          <p:cNvPr id="322097990" name="Дата 3"/>
           <p:cNvSpPr>
             <a:spLocks noGrp="1"/>
           </p:cNvSpPr>
@@ -2284,7 +2370,7 @@
       </p:sp>
       <p:sp>
         <p:nvSpPr>
-          <p:cNvPr id="563144274" name="Нижний колонтитул 4"/>
+          <p:cNvPr id="22644829" name="Нижний колонтитул 4"/>
           <p:cNvSpPr>
             <a:spLocks noGrp="1"/>
           </p:cNvSpPr>
@@ -2306,7 +2392,7 @@
       </p:sp>
       <p:sp>
         <p:nvSpPr>
-          <p:cNvPr id="1106434825" name="Номер слайда 5"/>
+          <p:cNvPr id="309086023" name="Номер слайда 5"/>
           <p:cNvSpPr>
             <a:spLocks noGrp="1"/>
           </p:cNvSpPr>
@@ -2357,7 +2443,7 @@
       </p:grpSpPr>
       <p:sp>
         <p:nvSpPr>
-          <p:cNvPr id="1396215593" name="Вертикальный заголовок 1"/>
+          <p:cNvPr id="1150570800" name="Вертикальный заголовок 1"/>
           <p:cNvSpPr>
             <a:spLocks noGrp="1"/>
           </p:cNvSpPr>
@@ -2388,7 +2474,7 @@
       </p:sp>
       <p:sp>
         <p:nvSpPr>
-          <p:cNvPr id="2078095737" name="Вертикальный текст 2"/>
+          <p:cNvPr id="1874463492" name="Вертикальный текст 2"/>
           <p:cNvSpPr>
             <a:spLocks noGrp="1"/>
           </p:cNvSpPr>
@@ -2459,7 +2545,7 @@
       </p:sp>
       <p:sp>
         <p:nvSpPr>
-          <p:cNvPr id="621304060" name="Дата 3"/>
+          <p:cNvPr id="1267168139" name="Дата 3"/>
           <p:cNvSpPr>
             <a:spLocks noGrp="1"/>
           </p:cNvSpPr>
@@ -2485,7 +2571,7 @@
       </p:sp>
       <p:sp>
         <p:nvSpPr>
-          <p:cNvPr id="1489635126" name="Нижний колонтитул 4"/>
+          <p:cNvPr id="27193663" name="Нижний колонтитул 4"/>
           <p:cNvSpPr>
             <a:spLocks noGrp="1"/>
           </p:cNvSpPr>
@@ -2507,7 +2593,7 @@
       </p:sp>
       <p:sp>
         <p:nvSpPr>
-          <p:cNvPr id="1647979662" name="Номер слайда 5"/>
+          <p:cNvPr id="835312890" name="Номер слайда 5"/>
           <p:cNvSpPr>
             <a:spLocks noGrp="1"/>
           </p:cNvSpPr>
@@ -2558,7 +2644,7 @@
       </p:grpSpPr>
       <p:pic>
         <p:nvPicPr>
-          <p:cNvPr id="244536984" name="Picture 6" descr="HD-ShadowLong.png"/>
+          <p:cNvPr id="938155408" name="Picture 6" descr="HD-ShadowLong.png"/>
           <p:cNvPicPr>
             <a:picLocks noChangeAspect="1"/>
           </p:cNvPicPr>
@@ -2580,7 +2666,7 @@
       </p:pic>
       <p:pic>
         <p:nvPicPr>
-          <p:cNvPr id="1230666818" name="Picture 7" descr="HD-ShadowShort.png"/>
+          <p:cNvPr id="659946607" name="Picture 7" descr="HD-ShadowShort.png"/>
           <p:cNvPicPr>
             <a:picLocks noChangeAspect="1"/>
           </p:cNvPicPr>
@@ -2602,7 +2688,7 @@
       </p:pic>
       <p:sp>
         <p:nvSpPr>
-          <p:cNvPr id="745942002" name="Rectangle 8"/>
+          <p:cNvPr id="539485779" name="Rectangle 8"/>
           <p:cNvSpPr/>
           <p:nvPr/>
         </p:nvSpPr>
@@ -2643,7 +2729,7 @@
       </p:sp>
       <p:sp>
         <p:nvSpPr>
-          <p:cNvPr id="1811851683" name="Rectangle 9"/>
+          <p:cNvPr id="919771917" name="Rectangle 9"/>
           <p:cNvSpPr/>
           <p:nvPr/>
         </p:nvSpPr>
@@ -2681,7 +2767,7 @@
       </p:sp>
       <p:sp>
         <p:nvSpPr>
-          <p:cNvPr id="359248440" name="Title 1"/>
+          <p:cNvPr id="922357951" name="Title 1"/>
           <p:cNvSpPr>
             <a:spLocks noGrp="1"/>
           </p:cNvSpPr>
@@ -2718,7 +2804,7 @@
       </p:sp>
       <p:sp>
         <p:nvSpPr>
-          <p:cNvPr id="195606608" name="Subtitle 2"/>
+          <p:cNvPr id="1439374905" name="Subtitle 2"/>
           <p:cNvSpPr>
             <a:spLocks noGrp="1"/>
           </p:cNvSpPr>
@@ -2788,7 +2874,7 @@
       </p:sp>
       <p:sp>
         <p:nvSpPr>
-          <p:cNvPr id="1567574483" name="Date Placeholder 3"/>
+          <p:cNvPr id="704201076" name="Date Placeholder 3"/>
           <p:cNvSpPr>
             <a:spLocks noGrp="1"/>
           </p:cNvSpPr>
@@ -2814,7 +2900,7 @@
       </p:sp>
       <p:sp>
         <p:nvSpPr>
-          <p:cNvPr id="1023534629" name="Footer Placeholder 4"/>
+          <p:cNvPr id="796448544" name="Footer Placeholder 4"/>
           <p:cNvSpPr>
             <a:spLocks noGrp="1"/>
           </p:cNvSpPr>
@@ -2836,7 +2922,7 @@
       </p:sp>
       <p:sp>
         <p:nvSpPr>
-          <p:cNvPr id="381610664" name="Slide Number Placeholder 5"/>
+          <p:cNvPr id="1223045142" name="Slide Number Placeholder 5"/>
           <p:cNvSpPr>
             <a:spLocks noGrp="1"/>
           </p:cNvSpPr>
@@ -2892,7 +2978,7 @@
       </p:grpSpPr>
       <p:pic>
         <p:nvPicPr>
-          <p:cNvPr id="528529123" name="Picture 14" descr="HD-ShadowLong.png"/>
+          <p:cNvPr id="734184449" name="Picture 14" descr="HD-ShadowLong.png"/>
           <p:cNvPicPr>
             <a:picLocks noChangeAspect="1"/>
           </p:cNvPicPr>
@@ -2914,7 +3000,7 @@
       </p:pic>
       <p:pic>
         <p:nvPicPr>
-          <p:cNvPr id="1556386907" name="Picture 15" descr="HD-ShadowShort.png"/>
+          <p:cNvPr id="915792173" name="Picture 15" descr="HD-ShadowShort.png"/>
           <p:cNvPicPr>
             <a:picLocks noChangeAspect="1"/>
           </p:cNvPicPr>
@@ -2936,7 +3022,7 @@
       </p:pic>
       <p:sp>
         <p:nvSpPr>
-          <p:cNvPr id="837819775" name="Rectangle 16"/>
+          <p:cNvPr id="453003051" name="Rectangle 16"/>
           <p:cNvSpPr/>
           <p:nvPr/>
         </p:nvSpPr>
@@ -2977,7 +3063,7 @@
       </p:sp>
       <p:sp>
         <p:nvSpPr>
-          <p:cNvPr id="1448344126" name="Rectangle 17"/>
+          <p:cNvPr id="1731874301" name="Rectangle 17"/>
           <p:cNvSpPr/>
           <p:nvPr/>
         </p:nvSpPr>
@@ -3015,7 +3101,7 @@
       </p:sp>
       <p:sp>
         <p:nvSpPr>
-          <p:cNvPr id="698507803" name="Title 1"/>
+          <p:cNvPr id="1824697268" name="Title 1"/>
           <p:cNvSpPr>
             <a:spLocks noGrp="1"/>
           </p:cNvSpPr>
@@ -3041,7 +3127,7 @@
       </p:sp>
       <p:sp>
         <p:nvSpPr>
-          <p:cNvPr id="964609422" name="Content Placeholder 2"/>
+          <p:cNvPr id="17350254" name="Content Placeholder 2"/>
           <p:cNvSpPr>
             <a:spLocks noGrp="1"/>
           </p:cNvSpPr>
@@ -3107,7 +3193,7 @@
       </p:sp>
       <p:sp>
         <p:nvSpPr>
-          <p:cNvPr id="1295177857" name="Date Placeholder 3"/>
+          <p:cNvPr id="1487259964" name="Date Placeholder 3"/>
           <p:cNvSpPr>
             <a:spLocks noGrp="1"/>
           </p:cNvSpPr>
@@ -3133,7 +3219,7 @@
       </p:sp>
       <p:sp>
         <p:nvSpPr>
-          <p:cNvPr id="10729474" name="Footer Placeholder 4"/>
+          <p:cNvPr id="1122499849" name="Footer Placeholder 4"/>
           <p:cNvSpPr>
             <a:spLocks noGrp="1"/>
           </p:cNvSpPr>
@@ -3155,7 +3241,7 @@
       </p:sp>
       <p:sp>
         <p:nvSpPr>
-          <p:cNvPr id="115031650" name="Slide Number Placeholder 5"/>
+          <p:cNvPr id="1628235153" name="Slide Number Placeholder 5"/>
           <p:cNvSpPr>
             <a:spLocks noGrp="1"/>
           </p:cNvSpPr>
@@ -3206,7 +3292,7 @@
       </p:grpSpPr>
       <p:pic>
         <p:nvPicPr>
-          <p:cNvPr id="1426255095" name="Picture 6" descr="HD-ShadowLong.png"/>
+          <p:cNvPr id="1494919589" name="Picture 6" descr="HD-ShadowLong.png"/>
           <p:cNvPicPr>
             <a:picLocks noChangeAspect="1"/>
           </p:cNvPicPr>
@@ -3228,7 +3314,7 @@
       </p:pic>
       <p:pic>
         <p:nvPicPr>
-          <p:cNvPr id="1060677140" name="Picture 7" descr="HD-ShadowShort.png"/>
+          <p:cNvPr id="485828551" name="Picture 7" descr="HD-ShadowShort.png"/>
           <p:cNvPicPr>
             <a:picLocks noChangeAspect="1"/>
           </p:cNvPicPr>
@@ -3250,7 +3336,7 @@
       </p:pic>
       <p:sp>
         <p:nvSpPr>
-          <p:cNvPr id="1805971104" name="Rectangle 8"/>
+          <p:cNvPr id="577361997" name="Rectangle 8"/>
           <p:cNvSpPr/>
           <p:nvPr/>
         </p:nvSpPr>
@@ -3291,7 +3377,7 @@
       </p:sp>
       <p:sp>
         <p:nvSpPr>
-          <p:cNvPr id="1276844395" name="Rectangle 9"/>
+          <p:cNvPr id="610308170" name="Rectangle 9"/>
           <p:cNvSpPr/>
           <p:nvPr/>
         </p:nvSpPr>
@@ -3329,7 +3415,7 @@
       </p:sp>
       <p:sp>
         <p:nvSpPr>
-          <p:cNvPr id="1213843123" name="Title 1"/>
+          <p:cNvPr id="1833837621" name="Title 1"/>
           <p:cNvSpPr>
             <a:spLocks noGrp="1"/>
           </p:cNvSpPr>
@@ -3366,7 +3452,7 @@
       </p:sp>
       <p:sp>
         <p:nvSpPr>
-          <p:cNvPr id="909413144" name="Text Placeholder 2"/>
+          <p:cNvPr id="2085782401" name="Text Placeholder 2"/>
           <p:cNvSpPr>
             <a:spLocks noGrp="1"/>
           </p:cNvSpPr>
@@ -3490,7 +3576,7 @@
       </p:sp>
       <p:sp>
         <p:nvSpPr>
-          <p:cNvPr id="972023547" name="Date Placeholder 3"/>
+          <p:cNvPr id="2012998731" name="Date Placeholder 3"/>
           <p:cNvSpPr>
             <a:spLocks noGrp="1"/>
           </p:cNvSpPr>
@@ -3516,7 +3602,7 @@
       </p:sp>
       <p:sp>
         <p:nvSpPr>
-          <p:cNvPr id="1858693723" name="Footer Placeholder 4"/>
+          <p:cNvPr id="1431619237" name="Footer Placeholder 4"/>
           <p:cNvSpPr>
             <a:spLocks noGrp="1"/>
           </p:cNvSpPr>
@@ -3538,7 +3624,7 @@
       </p:sp>
       <p:sp>
         <p:nvSpPr>
-          <p:cNvPr id="1993432570" name="Slide Number Placeholder 5"/>
+          <p:cNvPr id="1713267684" name="Slide Number Placeholder 5"/>
           <p:cNvSpPr>
             <a:spLocks noGrp="1"/>
           </p:cNvSpPr>
@@ -3594,7 +3680,7 @@
       </p:grpSpPr>
       <p:pic>
         <p:nvPicPr>
-          <p:cNvPr id="638304686" name="Picture 7" descr="HD-ShadowLong.png"/>
+          <p:cNvPr id="2128959427" name="Picture 7" descr="HD-ShadowLong.png"/>
           <p:cNvPicPr>
             <a:picLocks noChangeAspect="1"/>
           </p:cNvPicPr>
@@ -3616,7 +3702,7 @@
       </p:pic>
       <p:pic>
         <p:nvPicPr>
-          <p:cNvPr id="1209488918" name="Picture 8" descr="HD-ShadowShort.png"/>
+          <p:cNvPr id="802809474" name="Picture 8" descr="HD-ShadowShort.png"/>
           <p:cNvPicPr>
             <a:picLocks noChangeAspect="1"/>
           </p:cNvPicPr>
@@ -3638,7 +3724,7 @@
       </p:pic>
       <p:sp>
         <p:nvSpPr>
-          <p:cNvPr id="2110106078" name="Rectangle 9"/>
+          <p:cNvPr id="233071334" name="Rectangle 9"/>
           <p:cNvSpPr/>
           <p:nvPr/>
         </p:nvSpPr>
@@ -3679,7 +3765,7 @@
       </p:sp>
       <p:sp>
         <p:nvSpPr>
-          <p:cNvPr id="1966257460" name="Rectangle 10"/>
+          <p:cNvPr id="911031080" name="Rectangle 10"/>
           <p:cNvSpPr/>
           <p:nvPr/>
         </p:nvSpPr>
@@ -3717,7 +3803,7 @@
       </p:sp>
       <p:sp>
         <p:nvSpPr>
-          <p:cNvPr id="1878047190" name="Title 1"/>
+          <p:cNvPr id="1432820848" name="Title 1"/>
           <p:cNvSpPr>
             <a:spLocks noGrp="1"/>
           </p:cNvSpPr>
@@ -3743,7 +3829,7 @@
       </p:sp>
       <p:sp>
         <p:nvSpPr>
-          <p:cNvPr id="167960289" name="Content Placeholder 2"/>
+          <p:cNvPr id="896832175" name="Content Placeholder 2"/>
           <p:cNvSpPr>
             <a:spLocks noGrp="1"/>
           </p:cNvSpPr>
@@ -3814,7 +3900,7 @@
       </p:sp>
       <p:sp>
         <p:nvSpPr>
-          <p:cNvPr id="625505721" name="Content Placeholder 3"/>
+          <p:cNvPr id="771938876" name="Content Placeholder 3"/>
           <p:cNvSpPr>
             <a:spLocks noGrp="1"/>
           </p:cNvSpPr>
@@ -3885,7 +3971,7 @@
       </p:sp>
       <p:sp>
         <p:nvSpPr>
-          <p:cNvPr id="1591143355" name="Date Placeholder 4"/>
+          <p:cNvPr id="1122841613" name="Date Placeholder 4"/>
           <p:cNvSpPr>
             <a:spLocks noGrp="1"/>
           </p:cNvSpPr>
@@ -3911,7 +3997,7 @@
       </p:sp>
       <p:sp>
         <p:nvSpPr>
-          <p:cNvPr id="2116668213" name="Footer Placeholder 5"/>
+          <p:cNvPr id="724777218" name="Footer Placeholder 5"/>
           <p:cNvSpPr>
             <a:spLocks noGrp="1"/>
           </p:cNvSpPr>
@@ -3933,7 +4019,7 @@
       </p:sp>
       <p:sp>
         <p:nvSpPr>
-          <p:cNvPr id="1984555394" name="Slide Number Placeholder 6"/>
+          <p:cNvPr id="1611728354" name="Slide Number Placeholder 6"/>
           <p:cNvSpPr>
             <a:spLocks noGrp="1"/>
           </p:cNvSpPr>
@@ -3984,7 +4070,7 @@
       </p:grpSpPr>
       <p:pic>
         <p:nvPicPr>
-          <p:cNvPr id="1498325894" name="Picture 9" descr="HD-ShadowLong.png"/>
+          <p:cNvPr id="221155728" name="Picture 9" descr="HD-ShadowLong.png"/>
           <p:cNvPicPr>
             <a:picLocks noChangeAspect="1"/>
           </p:cNvPicPr>
@@ -4006,7 +4092,7 @@
       </p:pic>
       <p:pic>
         <p:nvPicPr>
-          <p:cNvPr id="837332872" name="Picture 10" descr="HD-ShadowShort.png"/>
+          <p:cNvPr id="1605616505" name="Picture 10" descr="HD-ShadowShort.png"/>
           <p:cNvPicPr>
             <a:picLocks noChangeAspect="1"/>
           </p:cNvPicPr>
@@ -4028,7 +4114,7 @@
       </p:pic>
       <p:sp>
         <p:nvSpPr>
-          <p:cNvPr id="1778684034" name="Rectangle 11"/>
+          <p:cNvPr id="1070896288" name="Rectangle 11"/>
           <p:cNvSpPr/>
           <p:nvPr/>
         </p:nvSpPr>
@@ -4069,7 +4155,7 @@
       </p:sp>
       <p:sp>
         <p:nvSpPr>
-          <p:cNvPr id="974285690" name="Rectangle 12"/>
+          <p:cNvPr id="640581567" name="Rectangle 12"/>
           <p:cNvSpPr/>
           <p:nvPr/>
         </p:nvSpPr>
@@ -4107,7 +4193,7 @@
       </p:sp>
       <p:sp>
         <p:nvSpPr>
-          <p:cNvPr id="932613914" name="Title 1"/>
+          <p:cNvPr id="1281435760" name="Title 1"/>
           <p:cNvSpPr>
             <a:spLocks noGrp="1"/>
           </p:cNvSpPr>
@@ -4138,7 +4224,7 @@
       </p:sp>
       <p:sp>
         <p:nvSpPr>
-          <p:cNvPr id="189222093" name="Text Placeholder 2"/>
+          <p:cNvPr id="1030737287" name="Text Placeholder 2"/>
           <p:cNvSpPr>
             <a:spLocks noGrp="1"/>
           </p:cNvSpPr>
@@ -4206,7 +4292,7 @@
       </p:sp>
       <p:sp>
         <p:nvSpPr>
-          <p:cNvPr id="251876630" name="Content Placeholder 3"/>
+          <p:cNvPr id="1098352314" name="Content Placeholder 3"/>
           <p:cNvSpPr>
             <a:spLocks noGrp="1"/>
           </p:cNvSpPr>
@@ -4277,7 +4363,7 @@
       </p:sp>
       <p:sp>
         <p:nvSpPr>
-          <p:cNvPr id="1373883036" name="Text Placeholder 4"/>
+          <p:cNvPr id="1581274553" name="Text Placeholder 4"/>
           <p:cNvSpPr>
             <a:spLocks noGrp="1"/>
           </p:cNvSpPr>
@@ -4345,7 +4431,7 @@
       </p:sp>
       <p:sp>
         <p:nvSpPr>
-          <p:cNvPr id="851836315" name="Content Placeholder 5"/>
+          <p:cNvPr id="1816724393" name="Content Placeholder 5"/>
           <p:cNvSpPr>
             <a:spLocks noGrp="1"/>
           </p:cNvSpPr>
@@ -4416,7 +4502,7 @@
       </p:sp>
       <p:sp>
         <p:nvSpPr>
-          <p:cNvPr id="809598423" name="Date Placeholder 6"/>
+          <p:cNvPr id="1127169681" name="Date Placeholder 6"/>
           <p:cNvSpPr>
             <a:spLocks noGrp="1"/>
           </p:cNvSpPr>
@@ -4442,7 +4528,7 @@
       </p:sp>
       <p:sp>
         <p:nvSpPr>
-          <p:cNvPr id="27511994" name="Footer Placeholder 7"/>
+          <p:cNvPr id="914413634" name="Footer Placeholder 7"/>
           <p:cNvSpPr>
             <a:spLocks noGrp="1"/>
           </p:cNvSpPr>
@@ -4464,7 +4550,7 @@
       </p:sp>
       <p:sp>
         <p:nvSpPr>
-          <p:cNvPr id="1671524844" name="Slide Number Placeholder 8"/>
+          <p:cNvPr id="1784812969" name="Slide Number Placeholder 8"/>
           <p:cNvSpPr>
             <a:spLocks noGrp="1"/>
           </p:cNvSpPr>
@@ -4515,7 +4601,7 @@
       </p:grpSpPr>
       <p:pic>
         <p:nvPicPr>
-          <p:cNvPr id="829148157" name="Picture 5" descr="HD-ShadowLong.png"/>
+          <p:cNvPr id="1226707638" name="Picture 5" descr="HD-ShadowLong.png"/>
           <p:cNvPicPr>
             <a:picLocks noChangeAspect="1"/>
           </p:cNvPicPr>
@@ -4537,7 +4623,7 @@
       </p:pic>
       <p:pic>
         <p:nvPicPr>
-          <p:cNvPr id="490272192" name="Picture 6" descr="HD-ShadowShort.png"/>
+          <p:cNvPr id="155222090" name="Picture 6" descr="HD-ShadowShort.png"/>
           <p:cNvPicPr>
             <a:picLocks noChangeAspect="1"/>
           </p:cNvPicPr>
@@ -4559,7 +4645,7 @@
       </p:pic>
       <p:sp>
         <p:nvSpPr>
-          <p:cNvPr id="2066949020" name="Rectangle 7"/>
+          <p:cNvPr id="1862371981" name="Rectangle 7"/>
           <p:cNvSpPr/>
           <p:nvPr/>
         </p:nvSpPr>
@@ -4600,7 +4686,7 @@
       </p:sp>
       <p:sp>
         <p:nvSpPr>
-          <p:cNvPr id="577618086" name="Rectangle 8"/>
+          <p:cNvPr id="2146958950" name="Rectangle 8"/>
           <p:cNvSpPr/>
           <p:nvPr/>
         </p:nvSpPr>
@@ -4638,7 +4724,7 @@
       </p:sp>
       <p:sp>
         <p:nvSpPr>
-          <p:cNvPr id="1191209328" name="Title 1"/>
+          <p:cNvPr id="42214948" name="Title 1"/>
           <p:cNvSpPr>
             <a:spLocks noGrp="1"/>
           </p:cNvSpPr>
@@ -4664,7 +4750,7 @@
       </p:sp>
       <p:sp>
         <p:nvSpPr>
-          <p:cNvPr id="93889277" name="Date Placeholder 2"/>
+          <p:cNvPr id="239853278" name="Date Placeholder 2"/>
           <p:cNvSpPr>
             <a:spLocks noGrp="1"/>
           </p:cNvSpPr>
@@ -4690,7 +4776,7 @@
       </p:sp>
       <p:sp>
         <p:nvSpPr>
-          <p:cNvPr id="732855905" name="Footer Placeholder 3"/>
+          <p:cNvPr id="1091690442" name="Footer Placeholder 3"/>
           <p:cNvSpPr>
             <a:spLocks noGrp="1"/>
           </p:cNvSpPr>
@@ -4712,7 +4798,7 @@
       </p:sp>
       <p:sp>
         <p:nvSpPr>
-          <p:cNvPr id="1009117610" name="Slide Number Placeholder 4"/>
+          <p:cNvPr id="22637444" name="Slide Number Placeholder 4"/>
           <p:cNvSpPr>
             <a:spLocks noGrp="1"/>
           </p:cNvSpPr>
@@ -4763,7 +4849,7 @@
       </p:grpSpPr>
       <p:pic>
         <p:nvPicPr>
-          <p:cNvPr id="766643990" name="Picture 4" descr="HD-ShadowShort.png"/>
+          <p:cNvPr id="133677540" name="Picture 4" descr="HD-ShadowShort.png"/>
           <p:cNvPicPr>
             <a:picLocks noChangeAspect="1"/>
           </p:cNvPicPr>
@@ -4785,7 +4871,7 @@
       </p:pic>
       <p:sp>
         <p:nvSpPr>
-          <p:cNvPr id="1500828022" name="Rectangle 5"/>
+          <p:cNvPr id="2127938542" name="Rectangle 5"/>
           <p:cNvSpPr/>
           <p:nvPr/>
         </p:nvSpPr>
@@ -4823,7 +4909,7 @@
       </p:sp>
       <p:sp>
         <p:nvSpPr>
-          <p:cNvPr id="1949385328" name="Date Placeholder 1"/>
+          <p:cNvPr id="1859777424" name="Date Placeholder 1"/>
           <p:cNvSpPr>
             <a:spLocks noGrp="1"/>
           </p:cNvSpPr>
@@ -4849,7 +4935,7 @@
       </p:sp>
       <p:sp>
         <p:nvSpPr>
-          <p:cNvPr id="1123972457" name="Footer Placeholder 2"/>
+          <p:cNvPr id="243233018" name="Footer Placeholder 2"/>
           <p:cNvSpPr>
             <a:spLocks noGrp="1"/>
           </p:cNvSpPr>
@@ -4871,7 +4957,7 @@
       </p:sp>
       <p:sp>
         <p:nvSpPr>
-          <p:cNvPr id="6293639" name="Slide Number Placeholder 3"/>
+          <p:cNvPr id="382793334" name="Slide Number Placeholder 3"/>
           <p:cNvSpPr>
             <a:spLocks noGrp="1"/>
           </p:cNvSpPr>
@@ -4922,7 +5008,7 @@
       </p:grpSpPr>
       <p:pic>
         <p:nvPicPr>
-          <p:cNvPr id="1522919797" name="Picture 7" descr="HD-ShadowLong.png"/>
+          <p:cNvPr id="1656286348" name="Picture 7" descr="HD-ShadowLong.png"/>
           <p:cNvPicPr>
             <a:picLocks noChangeAspect="1"/>
           </p:cNvPicPr>
@@ -4944,7 +5030,7 @@
       </p:pic>
       <p:pic>
         <p:nvPicPr>
-          <p:cNvPr id="236470557" name="Picture 8" descr="HD-ShadowShort.png"/>
+          <p:cNvPr id="417459057" name="Picture 8" descr="HD-ShadowShort.png"/>
           <p:cNvPicPr>
             <a:picLocks noChangeAspect="1"/>
           </p:cNvPicPr>
@@ -4966,7 +5052,7 @@
       </p:pic>
       <p:sp>
         <p:nvSpPr>
-          <p:cNvPr id="1242707064" name="Rectangle 9"/>
+          <p:cNvPr id="1127311654" name="Rectangle 9"/>
           <p:cNvSpPr/>
           <p:nvPr/>
         </p:nvSpPr>
@@ -5007,7 +5093,7 @@
       </p:sp>
       <p:sp>
         <p:nvSpPr>
-          <p:cNvPr id="1651589171" name="Rectangle 10"/>
+          <p:cNvPr id="471319452" name="Rectangle 10"/>
           <p:cNvSpPr/>
           <p:nvPr/>
         </p:nvSpPr>
@@ -5045,7 +5131,7 @@
       </p:sp>
       <p:sp>
         <p:nvSpPr>
-          <p:cNvPr id="1111160712" name="Title 1"/>
+          <p:cNvPr id="161091321" name="Title 1"/>
           <p:cNvSpPr>
             <a:spLocks noGrp="1"/>
           </p:cNvSpPr>
@@ -5082,7 +5168,7 @@
       </p:sp>
       <p:sp>
         <p:nvSpPr>
-          <p:cNvPr id="261318104" name="Content Placeholder 2"/>
+          <p:cNvPr id="633472151" name="Content Placeholder 2"/>
           <p:cNvSpPr>
             <a:spLocks noGrp="1"/>
           </p:cNvSpPr>
@@ -5153,7 +5239,7 @@
       </p:sp>
       <p:sp>
         <p:nvSpPr>
-          <p:cNvPr id="721977878" name="Text Placeholder 3"/>
+          <p:cNvPr id="1413706193" name="Text Placeholder 3"/>
           <p:cNvSpPr>
             <a:spLocks noGrp="1"/>
           </p:cNvSpPr>
@@ -5221,7 +5307,7 @@
       </p:sp>
       <p:sp>
         <p:nvSpPr>
-          <p:cNvPr id="881386818" name="Date Placeholder 4"/>
+          <p:cNvPr id="1661692492" name="Date Placeholder 4"/>
           <p:cNvSpPr>
             <a:spLocks noGrp="1"/>
           </p:cNvSpPr>
@@ -5247,7 +5333,7 @@
       </p:sp>
       <p:sp>
         <p:nvSpPr>
-          <p:cNvPr id="1473277448" name="Footer Placeholder 5"/>
+          <p:cNvPr id="529059068" name="Footer Placeholder 5"/>
           <p:cNvSpPr>
             <a:spLocks noGrp="1"/>
           </p:cNvSpPr>
@@ -5269,7 +5355,7 @@
       </p:sp>
       <p:sp>
         <p:nvSpPr>
-          <p:cNvPr id="224971378" name="Slide Number Placeholder 6"/>
+          <p:cNvPr id="1474048373" name="Slide Number Placeholder 6"/>
           <p:cNvSpPr>
             <a:spLocks noGrp="1"/>
           </p:cNvSpPr>
@@ -5320,7 +5406,7 @@
       </p:grpSpPr>
       <p:sp>
         <p:nvSpPr>
-          <p:cNvPr id="742923005" name="Заголовок 1"/>
+          <p:cNvPr id="1669953478" name="Заголовок 1"/>
           <p:cNvSpPr>
             <a:spLocks noGrp="1"/>
           </p:cNvSpPr>
@@ -5346,7 +5432,7 @@
       </p:sp>
       <p:sp>
         <p:nvSpPr>
-          <p:cNvPr id="1628838131" name="Объект 2"/>
+          <p:cNvPr id="716051571" name="Объект 2"/>
           <p:cNvSpPr>
             <a:spLocks noGrp="1"/>
           </p:cNvSpPr>
@@ -5412,7 +5498,7 @@
       </p:sp>
       <p:sp>
         <p:nvSpPr>
-          <p:cNvPr id="1849904970" name="Дата 3"/>
+          <p:cNvPr id="1016662137" name="Дата 3"/>
           <p:cNvSpPr>
             <a:spLocks noGrp="1"/>
           </p:cNvSpPr>
@@ -5438,7 +5524,7 @@
       </p:sp>
       <p:sp>
         <p:nvSpPr>
-          <p:cNvPr id="730875048" name="Нижний колонтитул 4"/>
+          <p:cNvPr id="1214480906" name="Нижний колонтитул 4"/>
           <p:cNvSpPr>
             <a:spLocks noGrp="1"/>
           </p:cNvSpPr>
@@ -5460,7 +5546,7 @@
       </p:sp>
       <p:sp>
         <p:nvSpPr>
-          <p:cNvPr id="840107525" name="Номер слайда 5"/>
+          <p:cNvPr id="1161921485" name="Номер слайда 5"/>
           <p:cNvSpPr>
             <a:spLocks noGrp="1"/>
           </p:cNvSpPr>
@@ -5511,7 +5597,7 @@
       </p:grpSpPr>
       <p:pic>
         <p:nvPicPr>
-          <p:cNvPr id="1580001990" name="Picture 7" descr="HD-ShadowLong.png"/>
+          <p:cNvPr id="2125299307" name="Picture 7" descr="HD-ShadowLong.png"/>
           <p:cNvPicPr>
             <a:picLocks noChangeAspect="1"/>
           </p:cNvPicPr>
@@ -5533,7 +5619,7 @@
       </p:pic>
       <p:pic>
         <p:nvPicPr>
-          <p:cNvPr id="366540290" name="Picture 8" descr="HD-ShadowShort.png"/>
+          <p:cNvPr id="208085409" name="Picture 8" descr="HD-ShadowShort.png"/>
           <p:cNvPicPr>
             <a:picLocks noChangeAspect="1"/>
           </p:cNvPicPr>
@@ -5555,7 +5641,7 @@
       </p:pic>
       <p:sp>
         <p:nvSpPr>
-          <p:cNvPr id="2014859998" name="Rectangle 9"/>
+          <p:cNvPr id="516158612" name="Rectangle 9"/>
           <p:cNvSpPr/>
           <p:nvPr/>
         </p:nvSpPr>
@@ -5596,7 +5682,7 @@
       </p:sp>
       <p:sp>
         <p:nvSpPr>
-          <p:cNvPr id="132988889" name="Rectangle 10"/>
+          <p:cNvPr id="737676905" name="Rectangle 10"/>
           <p:cNvSpPr/>
           <p:nvPr/>
         </p:nvSpPr>
@@ -5634,7 +5720,7 @@
       </p:sp>
       <p:sp>
         <p:nvSpPr>
-          <p:cNvPr id="920352069" name="Title 1"/>
+          <p:cNvPr id="518406108" name="Title 1"/>
           <p:cNvSpPr>
             <a:spLocks noGrp="1"/>
           </p:cNvSpPr>
@@ -5671,7 +5757,7 @@
       </p:sp>
       <p:sp>
         <p:nvSpPr>
-          <p:cNvPr id="1832052605" name="Picture Placeholder 2"/>
+          <p:cNvPr id="1643189285" name="Picture Placeholder 2"/>
           <p:cNvSpPr>
             <a:spLocks noChangeAspect="1" noGrp="1"/>
           </p:cNvSpPr>
@@ -5753,7 +5839,7 @@
       </p:sp>
       <p:sp>
         <p:nvSpPr>
-          <p:cNvPr id="1440732667" name="Text Placeholder 3"/>
+          <p:cNvPr id="757870604" name="Text Placeholder 3"/>
           <p:cNvSpPr>
             <a:spLocks noGrp="1"/>
           </p:cNvSpPr>
@@ -5821,7 +5907,7 @@
       </p:sp>
       <p:sp>
         <p:nvSpPr>
-          <p:cNvPr id="1067416388" name="Date Placeholder 4"/>
+          <p:cNvPr id="368457423" name="Date Placeholder 4"/>
           <p:cNvSpPr>
             <a:spLocks noGrp="1"/>
           </p:cNvSpPr>
@@ -5847,7 +5933,7 @@
       </p:sp>
       <p:sp>
         <p:nvSpPr>
-          <p:cNvPr id="1671513310" name="Footer Placeholder 5"/>
+          <p:cNvPr id="565884551" name="Footer Placeholder 5"/>
           <p:cNvSpPr>
             <a:spLocks noGrp="1"/>
           </p:cNvSpPr>
@@ -5869,7 +5955,7 @@
       </p:sp>
       <p:sp>
         <p:nvSpPr>
-          <p:cNvPr id="386911762" name="Slide Number Placeholder 6"/>
+          <p:cNvPr id="362633072" name="Slide Number Placeholder 6"/>
           <p:cNvSpPr>
             <a:spLocks noGrp="1"/>
           </p:cNvSpPr>
@@ -5920,7 +6006,7 @@
       </p:grpSpPr>
       <p:pic>
         <p:nvPicPr>
-          <p:cNvPr id="596760280" name="Picture 7" descr="HD-ShadowLong.png"/>
+          <p:cNvPr id="1439427040" name="Picture 7" descr="HD-ShadowLong.png"/>
           <p:cNvPicPr>
             <a:picLocks noChangeAspect="1"/>
           </p:cNvPicPr>
@@ -5942,7 +6028,7 @@
       </p:pic>
       <p:pic>
         <p:nvPicPr>
-          <p:cNvPr id="898851785" name="Picture 8" descr="HD-ShadowShort.png"/>
+          <p:cNvPr id="878643578" name="Picture 8" descr="HD-ShadowShort.png"/>
           <p:cNvPicPr>
             <a:picLocks noChangeAspect="1"/>
           </p:cNvPicPr>
@@ -5964,7 +6050,7 @@
       </p:pic>
       <p:sp>
         <p:nvSpPr>
-          <p:cNvPr id="278388376" name="Rectangle 9"/>
+          <p:cNvPr id="991270232" name="Rectangle 9"/>
           <p:cNvSpPr/>
           <p:nvPr/>
         </p:nvSpPr>
@@ -6005,7 +6091,7 @@
       </p:sp>
       <p:sp>
         <p:nvSpPr>
-          <p:cNvPr id="927553660" name="Rectangle 10"/>
+          <p:cNvPr id="1188042556" name="Rectangle 10"/>
           <p:cNvSpPr/>
           <p:nvPr/>
         </p:nvSpPr>
@@ -6043,7 +6129,7 @@
       </p:sp>
       <p:sp>
         <p:nvSpPr>
-          <p:cNvPr id="48539574" name="Title 1"/>
+          <p:cNvPr id="1298455299" name="Title 1"/>
           <p:cNvSpPr>
             <a:spLocks noGrp="1"/>
           </p:cNvSpPr>
@@ -6080,7 +6166,7 @@
       </p:sp>
       <p:sp>
         <p:nvSpPr>
-          <p:cNvPr id="772227616" name="Picture Placeholder 2"/>
+          <p:cNvPr id="2126616334" name="Picture Placeholder 2"/>
           <p:cNvSpPr>
             <a:spLocks noChangeAspect="1" noGrp="1"/>
           </p:cNvSpPr>
@@ -6162,7 +6248,7 @@
       </p:sp>
       <p:sp>
         <p:nvSpPr>
-          <p:cNvPr id="921430147" name="Text Placeholder 3"/>
+          <p:cNvPr id="827087626" name="Text Placeholder 3"/>
           <p:cNvSpPr>
             <a:spLocks noGrp="1"/>
           </p:cNvSpPr>
@@ -6230,7 +6316,7 @@
       </p:sp>
       <p:sp>
         <p:nvSpPr>
-          <p:cNvPr id="251545952" name="Date Placeholder 4"/>
+          <p:cNvPr id="944424641" name="Date Placeholder 4"/>
           <p:cNvSpPr>
             <a:spLocks noGrp="1"/>
           </p:cNvSpPr>
@@ -6256,7 +6342,7 @@
       </p:sp>
       <p:sp>
         <p:nvSpPr>
-          <p:cNvPr id="1195789787" name="Footer Placeholder 5"/>
+          <p:cNvPr id="1434062675" name="Footer Placeholder 5"/>
           <p:cNvSpPr>
             <a:spLocks noGrp="1"/>
           </p:cNvSpPr>
@@ -6278,7 +6364,7 @@
       </p:sp>
       <p:sp>
         <p:nvSpPr>
-          <p:cNvPr id="92856711" name="Slide Number Placeholder 6"/>
+          <p:cNvPr id="45076893" name="Slide Number Placeholder 6"/>
           <p:cNvSpPr>
             <a:spLocks noGrp="1"/>
           </p:cNvSpPr>
@@ -6334,7 +6420,7 @@
       </p:grpSpPr>
       <p:pic>
         <p:nvPicPr>
-          <p:cNvPr id="404725213" name="Picture 7" descr="HD-ShadowLong.png"/>
+          <p:cNvPr id="1830290643" name="Picture 7" descr="HD-ShadowLong.png"/>
           <p:cNvPicPr>
             <a:picLocks noChangeAspect="1"/>
           </p:cNvPicPr>
@@ -6356,7 +6442,7 @@
       </p:pic>
       <p:pic>
         <p:nvPicPr>
-          <p:cNvPr id="1221759558" name="Picture 8" descr="HD-ShadowShort.png"/>
+          <p:cNvPr id="2100072523" name="Picture 8" descr="HD-ShadowShort.png"/>
           <p:cNvPicPr>
             <a:picLocks noChangeAspect="1"/>
           </p:cNvPicPr>
@@ -6378,7 +6464,7 @@
       </p:pic>
       <p:sp>
         <p:nvSpPr>
-          <p:cNvPr id="2145939725" name="Rectangle 9"/>
+          <p:cNvPr id="2061546496" name="Rectangle 9"/>
           <p:cNvSpPr/>
           <p:nvPr/>
         </p:nvSpPr>
@@ -6419,7 +6505,7 @@
       </p:sp>
       <p:sp>
         <p:nvSpPr>
-          <p:cNvPr id="1338687795" name="Rectangle 10"/>
+          <p:cNvPr id="593506152" name="Rectangle 10"/>
           <p:cNvSpPr/>
           <p:nvPr/>
         </p:nvSpPr>
@@ -6457,7 +6543,7 @@
       </p:sp>
       <p:sp>
         <p:nvSpPr>
-          <p:cNvPr id="483273275" name="Title 1"/>
+          <p:cNvPr id="1793017953" name="Title 1"/>
           <p:cNvSpPr>
             <a:spLocks noGrp="1"/>
           </p:cNvSpPr>
@@ -6492,7 +6578,7 @@
       </p:sp>
       <p:sp>
         <p:nvSpPr>
-          <p:cNvPr id="758392105" name="Text Placeholder 3"/>
+          <p:cNvPr id="2137433405" name="Text Placeholder 3"/>
           <p:cNvSpPr>
             <a:spLocks noGrp="1"/>
           </p:cNvSpPr>
@@ -6560,7 +6646,7 @@
       </p:sp>
       <p:sp>
         <p:nvSpPr>
-          <p:cNvPr id="1420396417" name="Date Placeholder 4"/>
+          <p:cNvPr id="1836240995" name="Date Placeholder 4"/>
           <p:cNvSpPr>
             <a:spLocks noGrp="1"/>
           </p:cNvSpPr>
@@ -6586,7 +6672,7 @@
       </p:sp>
       <p:sp>
         <p:nvSpPr>
-          <p:cNvPr id="464492150" name="Footer Placeholder 5"/>
+          <p:cNvPr id="1720341191" name="Footer Placeholder 5"/>
           <p:cNvSpPr>
             <a:spLocks noGrp="1"/>
           </p:cNvSpPr>
@@ -6608,7 +6694,7 @@
       </p:sp>
       <p:sp>
         <p:nvSpPr>
-          <p:cNvPr id="2109684813" name="Slide Number Placeholder 6"/>
+          <p:cNvPr id="736560547" name="Slide Number Placeholder 6"/>
           <p:cNvSpPr>
             <a:spLocks noGrp="1"/>
           </p:cNvSpPr>
@@ -6664,7 +6750,7 @@
       </p:grpSpPr>
       <p:pic>
         <p:nvPicPr>
-          <p:cNvPr id="437064429" name="Picture 10" descr="HD-ShadowLong.png"/>
+          <p:cNvPr id="1312364831" name="Picture 10" descr="HD-ShadowLong.png"/>
           <p:cNvPicPr>
             <a:picLocks noChangeAspect="1"/>
           </p:cNvPicPr>
@@ -6686,7 +6772,7 @@
       </p:pic>
       <p:pic>
         <p:nvPicPr>
-          <p:cNvPr id="1994700004" name="Picture 12" descr="HD-ShadowShort.png"/>
+          <p:cNvPr id="531495366" name="Picture 12" descr="HD-ShadowShort.png"/>
           <p:cNvPicPr>
             <a:picLocks noChangeAspect="1"/>
           </p:cNvPicPr>
@@ -6708,7 +6794,7 @@
       </p:pic>
       <p:sp>
         <p:nvSpPr>
-          <p:cNvPr id="1236797030" name="Rectangle 13"/>
+          <p:cNvPr id="2060407419" name="Rectangle 13"/>
           <p:cNvSpPr/>
           <p:nvPr/>
         </p:nvSpPr>
@@ -6749,7 +6835,7 @@
       </p:sp>
       <p:sp>
         <p:nvSpPr>
-          <p:cNvPr id="1654611857" name="Rectangle 14"/>
+          <p:cNvPr id="164367344" name="Rectangle 14"/>
           <p:cNvSpPr/>
           <p:nvPr/>
         </p:nvSpPr>
@@ -6787,7 +6873,7 @@
       </p:sp>
       <p:sp>
         <p:nvSpPr>
-          <p:cNvPr id="1089448490" name="Title 1"/>
+          <p:cNvPr id="1126240483" name="Title 1"/>
           <p:cNvSpPr>
             <a:spLocks noGrp="1"/>
           </p:cNvSpPr>
@@ -6822,7 +6908,7 @@
       </p:sp>
       <p:sp>
         <p:nvSpPr>
-          <p:cNvPr id="1940683606" name="Text Placeholder 3"/>
+          <p:cNvPr id="1115879384" name="Text Placeholder 3"/>
           <p:cNvSpPr>
             <a:spLocks noGrp="1"/>
           </p:cNvSpPr>
@@ -6892,7 +6978,7 @@
       </p:sp>
       <p:sp>
         <p:nvSpPr>
-          <p:cNvPr id="1808853887" name="Text Placeholder 3"/>
+          <p:cNvPr id="1891847081" name="Text Placeholder 3"/>
           <p:cNvSpPr>
             <a:spLocks noGrp="1"/>
           </p:cNvSpPr>
@@ -6962,7 +7048,7 @@
       </p:sp>
       <p:sp>
         <p:nvSpPr>
-          <p:cNvPr id="125362079" name="Date Placeholder 4"/>
+          <p:cNvPr id="844160208" name="Date Placeholder 4"/>
           <p:cNvSpPr>
             <a:spLocks noGrp="1"/>
           </p:cNvSpPr>
@@ -6988,7 +7074,7 @@
       </p:sp>
       <p:sp>
         <p:nvSpPr>
-          <p:cNvPr id="1260012143" name="Footer Placeholder 5"/>
+          <p:cNvPr id="1157037542" name="Footer Placeholder 5"/>
           <p:cNvSpPr>
             <a:spLocks noGrp="1"/>
           </p:cNvSpPr>
@@ -7010,7 +7096,7 @@
       </p:sp>
       <p:sp>
         <p:nvSpPr>
-          <p:cNvPr id="945032628" name="Slide Number Placeholder 6"/>
+          <p:cNvPr id="1772963285" name="Slide Number Placeholder 6"/>
           <p:cNvSpPr>
             <a:spLocks noGrp="1"/>
           </p:cNvSpPr>
@@ -7041,7 +7127,7 @@
       </p:sp>
       <p:sp>
         <p:nvSpPr>
-          <p:cNvPr id="1201607488" name="TextBox 15"/>
+          <p:cNvPr id="877749602" name="TextBox 15"/>
           <p:cNvSpPr txBox="1"/>
           <p:nvPr/>
         </p:nvSpPr>
@@ -7145,7 +7231,7 @@
       </p:sp>
       <p:sp>
         <p:nvSpPr>
-          <p:cNvPr id="2032048272" name="TextBox 16"/>
+          <p:cNvPr id="1629433155" name="TextBox 16"/>
           <p:cNvSpPr txBox="1"/>
           <p:nvPr/>
         </p:nvSpPr>
@@ -7274,7 +7360,7 @@
       </p:grpSpPr>
       <p:pic>
         <p:nvPicPr>
-          <p:cNvPr id="1101420804" name="Picture 8" descr="HD-ShadowLong.png"/>
+          <p:cNvPr id="43307348" name="Picture 8" descr="HD-ShadowLong.png"/>
           <p:cNvPicPr>
             <a:picLocks noChangeAspect="1"/>
           </p:cNvPicPr>
@@ -7296,7 +7382,7 @@
       </p:pic>
       <p:pic>
         <p:nvPicPr>
-          <p:cNvPr id="1031553418" name="Picture 9" descr="HD-ShadowShort.png"/>
+          <p:cNvPr id="1943456685" name="Picture 9" descr="HD-ShadowShort.png"/>
           <p:cNvPicPr>
             <a:picLocks noChangeAspect="1"/>
           </p:cNvPicPr>
@@ -7318,7 +7404,7 @@
       </p:pic>
       <p:sp>
         <p:nvSpPr>
-          <p:cNvPr id="285596640" name="Rectangle 10"/>
+          <p:cNvPr id="929950136" name="Rectangle 10"/>
           <p:cNvSpPr/>
           <p:nvPr/>
         </p:nvSpPr>
@@ -7359,7 +7445,7 @@
       </p:sp>
       <p:sp>
         <p:nvSpPr>
-          <p:cNvPr id="661207370" name="Rectangle 11"/>
+          <p:cNvPr id="359390030" name="Rectangle 11"/>
           <p:cNvSpPr/>
           <p:nvPr/>
         </p:nvSpPr>
@@ -7397,7 +7483,7 @@
       </p:sp>
       <p:sp>
         <p:nvSpPr>
-          <p:cNvPr id="245932104" name="Title 1"/>
+          <p:cNvPr id="1593412522" name="Title 1"/>
           <p:cNvSpPr>
             <a:spLocks noGrp="1"/>
           </p:cNvSpPr>
@@ -7432,7 +7518,7 @@
       </p:sp>
       <p:sp>
         <p:nvSpPr>
-          <p:cNvPr id="2019186629" name="Text Placeholder 3"/>
+          <p:cNvPr id="1766179571" name="Text Placeholder 3"/>
           <p:cNvSpPr>
             <a:spLocks noGrp="1"/>
           </p:cNvSpPr>
@@ -7500,7 +7586,7 @@
       </p:sp>
       <p:sp>
         <p:nvSpPr>
-          <p:cNvPr id="1276943865" name="Date Placeholder 4"/>
+          <p:cNvPr id="818786391" name="Date Placeholder 4"/>
           <p:cNvSpPr>
             <a:spLocks noGrp="1"/>
           </p:cNvSpPr>
@@ -7526,7 +7612,7 @@
       </p:sp>
       <p:sp>
         <p:nvSpPr>
-          <p:cNvPr id="512562219" name="Footer Placeholder 5"/>
+          <p:cNvPr id="1246192800" name="Footer Placeholder 5"/>
           <p:cNvSpPr>
             <a:spLocks noGrp="1"/>
           </p:cNvSpPr>
@@ -7548,7 +7634,7 @@
       </p:sp>
       <p:sp>
         <p:nvSpPr>
-          <p:cNvPr id="1290121641" name="Slide Number Placeholder 6"/>
+          <p:cNvPr id="1436054107" name="Slide Number Placeholder 6"/>
           <p:cNvSpPr>
             <a:spLocks noGrp="1"/>
           </p:cNvSpPr>
@@ -7604,7 +7690,7 @@
       </p:grpSpPr>
       <p:pic>
         <p:nvPicPr>
-          <p:cNvPr id="1116581426" name="Picture 12" descr="HD-ShadowLong.png"/>
+          <p:cNvPr id="1704772973" name="Picture 12" descr="HD-ShadowLong.png"/>
           <p:cNvPicPr>
             <a:picLocks noChangeAspect="1"/>
           </p:cNvPicPr>
@@ -7626,7 +7712,7 @@
       </p:pic>
       <p:pic>
         <p:nvPicPr>
-          <p:cNvPr id="506470193" name="Picture 13" descr="HD-ShadowShort.png"/>
+          <p:cNvPr id="1814588044" name="Picture 13" descr="HD-ShadowShort.png"/>
           <p:cNvPicPr>
             <a:picLocks noChangeAspect="1"/>
           </p:cNvPicPr>
@@ -7648,7 +7734,7 @@
       </p:pic>
       <p:sp>
         <p:nvSpPr>
-          <p:cNvPr id="205086261" name="Rectangle 15"/>
+          <p:cNvPr id="48255133" name="Rectangle 15"/>
           <p:cNvSpPr/>
           <p:nvPr/>
         </p:nvSpPr>
@@ -7689,7 +7775,7 @@
       </p:sp>
       <p:sp>
         <p:nvSpPr>
-          <p:cNvPr id="1905443243" name="Rectangle 16"/>
+          <p:cNvPr id="761578460" name="Rectangle 16"/>
           <p:cNvSpPr/>
           <p:nvPr/>
         </p:nvSpPr>
@@ -7727,7 +7813,7 @@
       </p:sp>
       <p:sp>
         <p:nvSpPr>
-          <p:cNvPr id="1222604337" name="Title 1"/>
+          <p:cNvPr id="2127493226" name="Title 1"/>
           <p:cNvSpPr>
             <a:spLocks noGrp="1"/>
           </p:cNvSpPr>
@@ -7758,7 +7844,7 @@
       </p:sp>
       <p:sp>
         <p:nvSpPr>
-          <p:cNvPr id="330638467" name="Text Placeholder 2"/>
+          <p:cNvPr id="404453703" name="Text Placeholder 2"/>
           <p:cNvSpPr>
             <a:spLocks noGrp="1"/>
           </p:cNvSpPr>
@@ -7832,7 +7918,7 @@
       </p:sp>
       <p:sp>
         <p:nvSpPr>
-          <p:cNvPr id="1617808302" name="Text Placeholder 3"/>
+          <p:cNvPr id="1378909655" name="Text Placeholder 3"/>
           <p:cNvSpPr>
             <a:spLocks noGrp="1"/>
           </p:cNvSpPr>
@@ -7902,7 +7988,7 @@
       </p:sp>
       <p:sp>
         <p:nvSpPr>
-          <p:cNvPr id="1739269834" name="Text Placeholder 4"/>
+          <p:cNvPr id="36315581" name="Text Placeholder 4"/>
           <p:cNvSpPr>
             <a:spLocks noGrp="1"/>
           </p:cNvSpPr>
@@ -7976,7 +8062,7 @@
       </p:sp>
       <p:sp>
         <p:nvSpPr>
-          <p:cNvPr id="303235923" name="Text Placeholder 3"/>
+          <p:cNvPr id="2062711299" name="Text Placeholder 3"/>
           <p:cNvSpPr>
             <a:spLocks noGrp="1"/>
           </p:cNvSpPr>
@@ -8046,7 +8132,7 @@
       </p:sp>
       <p:sp>
         <p:nvSpPr>
-          <p:cNvPr id="1636165459" name="Text Placeholder 4"/>
+          <p:cNvPr id="2137805135" name="Text Placeholder 4"/>
           <p:cNvSpPr>
             <a:spLocks noGrp="1"/>
           </p:cNvSpPr>
@@ -8120,7 +8206,7 @@
       </p:sp>
       <p:sp>
         <p:nvSpPr>
-          <p:cNvPr id="13251368" name="Text Placeholder 3"/>
+          <p:cNvPr id="860718820" name="Text Placeholder 3"/>
           <p:cNvSpPr>
             <a:spLocks noGrp="1"/>
           </p:cNvSpPr>
@@ -8190,7 +8276,7 @@
       </p:sp>
       <p:sp>
         <p:nvSpPr>
-          <p:cNvPr id="1011688420" name="Date Placeholder 2"/>
+          <p:cNvPr id="1422894238" name="Date Placeholder 2"/>
           <p:cNvSpPr>
             <a:spLocks noGrp="1"/>
           </p:cNvSpPr>
@@ -8216,7 +8302,7 @@
       </p:sp>
       <p:sp>
         <p:nvSpPr>
-          <p:cNvPr id="731241721" name="Footer Placeholder 3"/>
+          <p:cNvPr id="1487245781" name="Footer Placeholder 3"/>
           <p:cNvSpPr>
             <a:spLocks noGrp="1"/>
           </p:cNvSpPr>
@@ -8238,7 +8324,7 @@
       </p:sp>
       <p:sp>
         <p:nvSpPr>
-          <p:cNvPr id="1716762495" name="Slide Number Placeholder 4"/>
+          <p:cNvPr id="1542647052" name="Slide Number Placeholder 4"/>
           <p:cNvSpPr>
             <a:spLocks noGrp="1"/>
           </p:cNvSpPr>
@@ -8289,7 +8375,7 @@
       </p:grpSpPr>
       <p:pic>
         <p:nvPicPr>
-          <p:cNvPr id="28446495" name="Picture 14" descr="HD-ShadowLong.png"/>
+          <p:cNvPr id="1113748233" name="Picture 14" descr="HD-ShadowLong.png"/>
           <p:cNvPicPr>
             <a:picLocks noChangeAspect="1"/>
           </p:cNvPicPr>
@@ -8311,7 +8397,7 @@
       </p:pic>
       <p:pic>
         <p:nvPicPr>
-          <p:cNvPr id="949659277" name="Picture 15" descr="HD-ShadowShort.png"/>
+          <p:cNvPr id="826911965" name="Picture 15" descr="HD-ShadowShort.png"/>
           <p:cNvPicPr>
             <a:picLocks noChangeAspect="1"/>
           </p:cNvPicPr>
@@ -8333,7 +8419,7 @@
       </p:pic>
       <p:sp>
         <p:nvSpPr>
-          <p:cNvPr id="833330822" name="Rectangle 16"/>
+          <p:cNvPr id="1477900973" name="Rectangle 16"/>
           <p:cNvSpPr/>
           <p:nvPr/>
         </p:nvSpPr>
@@ -8374,7 +8460,7 @@
       </p:sp>
       <p:sp>
         <p:nvSpPr>
-          <p:cNvPr id="1816657785" name="Rectangle 17"/>
+          <p:cNvPr id="2042849925" name="Rectangle 17"/>
           <p:cNvSpPr/>
           <p:nvPr/>
         </p:nvSpPr>
@@ -8412,7 +8498,7 @@
       </p:sp>
       <p:sp>
         <p:nvSpPr>
-          <p:cNvPr id="1019390644" name="Title 1"/>
+          <p:cNvPr id="484260401" name="Title 1"/>
           <p:cNvSpPr>
             <a:spLocks noGrp="1"/>
           </p:cNvSpPr>
@@ -8443,7 +8529,7 @@
       </p:sp>
       <p:sp>
         <p:nvSpPr>
-          <p:cNvPr id="899811787" name="Text Placeholder 2"/>
+          <p:cNvPr id="1511384832" name="Text Placeholder 2"/>
           <p:cNvSpPr>
             <a:spLocks noGrp="1"/>
           </p:cNvSpPr>
@@ -8517,7 +8603,7 @@
       </p:sp>
       <p:sp>
         <p:nvSpPr>
-          <p:cNvPr id="308003652" name="Picture Placeholder 2"/>
+          <p:cNvPr id="1301474807" name="Picture Placeholder 2"/>
           <p:cNvSpPr>
             <a:spLocks noChangeAspect="1" noGrp="1"/>
           </p:cNvSpPr>
@@ -8599,7 +8685,7 @@
       </p:sp>
       <p:sp>
         <p:nvSpPr>
-          <p:cNvPr id="741335974" name="Text Placeholder 3"/>
+          <p:cNvPr id="39603913" name="Text Placeholder 3"/>
           <p:cNvSpPr>
             <a:spLocks noGrp="1"/>
           </p:cNvSpPr>
@@ -8669,7 +8755,7 @@
       </p:sp>
       <p:sp>
         <p:nvSpPr>
-          <p:cNvPr id="705293368" name="Text Placeholder 4"/>
+          <p:cNvPr id="1746331201" name="Text Placeholder 4"/>
           <p:cNvSpPr>
             <a:spLocks noGrp="1"/>
           </p:cNvSpPr>
@@ -8743,7 +8829,7 @@
       </p:sp>
       <p:sp>
         <p:nvSpPr>
-          <p:cNvPr id="1290140798" name="Picture Placeholder 2"/>
+          <p:cNvPr id="1008202037" name="Picture Placeholder 2"/>
           <p:cNvSpPr>
             <a:spLocks noChangeAspect="1" noGrp="1"/>
           </p:cNvSpPr>
@@ -8825,7 +8911,7 @@
       </p:sp>
       <p:sp>
         <p:nvSpPr>
-          <p:cNvPr id="267145840" name="Text Placeholder 3"/>
+          <p:cNvPr id="1194300476" name="Text Placeholder 3"/>
           <p:cNvSpPr>
             <a:spLocks noGrp="1"/>
           </p:cNvSpPr>
@@ -8895,7 +8981,7 @@
       </p:sp>
       <p:sp>
         <p:nvSpPr>
-          <p:cNvPr id="2002883352" name="Text Placeholder 4"/>
+          <p:cNvPr id="1897535357" name="Text Placeholder 4"/>
           <p:cNvSpPr>
             <a:spLocks noGrp="1"/>
           </p:cNvSpPr>
@@ -8969,7 +9055,7 @@
       </p:sp>
       <p:sp>
         <p:nvSpPr>
-          <p:cNvPr id="1732894312" name="Picture Placeholder 2"/>
+          <p:cNvPr id="1975031898" name="Picture Placeholder 2"/>
           <p:cNvSpPr>
             <a:spLocks noChangeAspect="1" noGrp="1"/>
           </p:cNvSpPr>
@@ -9051,7 +9137,7 @@
       </p:sp>
       <p:sp>
         <p:nvSpPr>
-          <p:cNvPr id="2122966859" name="Text Placeholder 3"/>
+          <p:cNvPr id="229042417" name="Text Placeholder 3"/>
           <p:cNvSpPr>
             <a:spLocks noGrp="1"/>
           </p:cNvSpPr>
@@ -9121,7 +9207,7 @@
       </p:sp>
       <p:sp>
         <p:nvSpPr>
-          <p:cNvPr id="977514411" name="Date Placeholder 2"/>
+          <p:cNvPr id="887408442" name="Date Placeholder 2"/>
           <p:cNvSpPr>
             <a:spLocks noGrp="1"/>
           </p:cNvSpPr>
@@ -9147,7 +9233,7 @@
       </p:sp>
       <p:sp>
         <p:nvSpPr>
-          <p:cNvPr id="619488648" name="Footer Placeholder 3"/>
+          <p:cNvPr id="2088383631" name="Footer Placeholder 3"/>
           <p:cNvSpPr>
             <a:spLocks noGrp="1"/>
           </p:cNvSpPr>
@@ -9169,7 +9255,7 @@
       </p:sp>
       <p:sp>
         <p:nvSpPr>
-          <p:cNvPr id="1912771389" name="Slide Number Placeholder 4"/>
+          <p:cNvPr id="859212284" name="Slide Number Placeholder 4"/>
           <p:cNvSpPr>
             <a:spLocks noGrp="1"/>
           </p:cNvSpPr>
@@ -9220,7 +9306,7 @@
       </p:grpSpPr>
       <p:pic>
         <p:nvPicPr>
-          <p:cNvPr id="1957357512" name="Picture 6" descr="HD-ShadowLong.png"/>
+          <p:cNvPr id="1679287587" name="Picture 6" descr="HD-ShadowLong.png"/>
           <p:cNvPicPr>
             <a:picLocks noChangeAspect="1"/>
           </p:cNvPicPr>
@@ -9242,7 +9328,7 @@
       </p:pic>
       <p:pic>
         <p:nvPicPr>
-          <p:cNvPr id="1798724760" name="Picture 7" descr="HD-ShadowShort.png"/>
+          <p:cNvPr id="1084336795" name="Picture 7" descr="HD-ShadowShort.png"/>
           <p:cNvPicPr>
             <a:picLocks noChangeAspect="1"/>
           </p:cNvPicPr>
@@ -9264,7 +9350,7 @@
       </p:pic>
       <p:sp>
         <p:nvSpPr>
-          <p:cNvPr id="1382871887" name="Rectangle 8"/>
+          <p:cNvPr id="754436489" name="Rectangle 8"/>
           <p:cNvSpPr/>
           <p:nvPr/>
         </p:nvSpPr>
@@ -9305,7 +9391,7 @@
       </p:sp>
       <p:sp>
         <p:nvSpPr>
-          <p:cNvPr id="739209897" name="Rectangle 9"/>
+          <p:cNvPr id="1493504268" name="Rectangle 9"/>
           <p:cNvSpPr/>
           <p:nvPr/>
         </p:nvSpPr>
@@ -9343,7 +9429,7 @@
       </p:sp>
       <p:sp>
         <p:nvSpPr>
-          <p:cNvPr id="1543537344" name="Title 1"/>
+          <p:cNvPr id="1102955243" name="Title 1"/>
           <p:cNvSpPr>
             <a:spLocks noGrp="1"/>
           </p:cNvSpPr>
@@ -9373,7 +9459,7 @@
       </p:sp>
       <p:sp>
         <p:nvSpPr>
-          <p:cNvPr id="665159185" name="Vertical Text Placeholder 2"/>
+          <p:cNvPr id="2025263155" name="Vertical Text Placeholder 2"/>
           <p:cNvSpPr>
             <a:spLocks noGrp="1"/>
           </p:cNvSpPr>
@@ -9439,7 +9525,7 @@
       </p:sp>
       <p:sp>
         <p:nvSpPr>
-          <p:cNvPr id="1769517563" name="Date Placeholder 3"/>
+          <p:cNvPr id="1717524952" name="Date Placeholder 3"/>
           <p:cNvSpPr>
             <a:spLocks noGrp="1"/>
           </p:cNvSpPr>
@@ -9465,7 +9551,7 @@
       </p:sp>
       <p:sp>
         <p:nvSpPr>
-          <p:cNvPr id="1321122018" name="Footer Placeholder 4"/>
+          <p:cNvPr id="525386963" name="Footer Placeholder 4"/>
           <p:cNvSpPr>
             <a:spLocks noGrp="1"/>
           </p:cNvSpPr>
@@ -9487,7 +9573,7 @@
       </p:sp>
       <p:sp>
         <p:nvSpPr>
-          <p:cNvPr id="463328357" name="Slide Number Placeholder 5"/>
+          <p:cNvPr id="658133550" name="Slide Number Placeholder 5"/>
           <p:cNvSpPr>
             <a:spLocks noGrp="1"/>
           </p:cNvSpPr>
@@ -9538,7 +9624,7 @@
       </p:grpSpPr>
       <p:sp>
         <p:nvSpPr>
-          <p:cNvPr id="681976559" name="Rectangle 6"/>
+          <p:cNvPr id="1941920017" name="Rectangle 6"/>
           <p:cNvSpPr/>
           <p:nvPr/>
         </p:nvSpPr>
@@ -9579,7 +9665,7 @@
       </p:sp>
       <p:sp>
         <p:nvSpPr>
-          <p:cNvPr id="1264213573" name="Rectangle 7"/>
+          <p:cNvPr id="1337698340" name="Rectangle 7"/>
           <p:cNvSpPr/>
           <p:nvPr/>
         </p:nvSpPr>
@@ -9617,7 +9703,7 @@
       </p:sp>
       <p:sp>
         <p:nvSpPr>
-          <p:cNvPr id="657167389" name="Vertical Title 1"/>
+          <p:cNvPr id="1584361131" name="Vertical Title 1"/>
           <p:cNvSpPr>
             <a:spLocks noGrp="1"/>
           </p:cNvSpPr>
@@ -9648,7 +9734,7 @@
       </p:sp>
       <p:sp>
         <p:nvSpPr>
-          <p:cNvPr id="362584113" name="Vertical Text Placeholder 2"/>
+          <p:cNvPr id="468252508" name="Vertical Text Placeholder 2"/>
           <p:cNvSpPr>
             <a:spLocks noGrp="1"/>
           </p:cNvSpPr>
@@ -9719,7 +9805,7 @@
       </p:sp>
       <p:sp>
         <p:nvSpPr>
-          <p:cNvPr id="1441207233" name="Date Placeholder 3"/>
+          <p:cNvPr id="274608831" name="Date Placeholder 3"/>
           <p:cNvSpPr>
             <a:spLocks noGrp="1"/>
           </p:cNvSpPr>
@@ -9750,7 +9836,7 @@
       </p:sp>
       <p:sp>
         <p:nvSpPr>
-          <p:cNvPr id="1350405191" name="Footer Placeholder 4"/>
+          <p:cNvPr id="1096722963" name="Footer Placeholder 4"/>
           <p:cNvSpPr>
             <a:spLocks noGrp="1"/>
           </p:cNvSpPr>
@@ -9777,7 +9863,7 @@
       </p:sp>
       <p:sp>
         <p:nvSpPr>
-          <p:cNvPr id="2122997156" name="Slide Number Placeholder 5"/>
+          <p:cNvPr id="2046805833" name="Slide Number Placeholder 5"/>
           <p:cNvSpPr>
             <a:spLocks noGrp="1"/>
           </p:cNvSpPr>
@@ -9837,7 +9923,7 @@
       </p:grpSpPr>
       <p:sp>
         <p:nvSpPr>
-          <p:cNvPr id="1003375033" name="Заголовок 1"/>
+          <p:cNvPr id="1620143013" name="Заголовок 1"/>
           <p:cNvSpPr>
             <a:spLocks noGrp="1"/>
           </p:cNvSpPr>
@@ -9872,7 +9958,7 @@
       </p:sp>
       <p:sp>
         <p:nvSpPr>
-          <p:cNvPr id="221462366" name="Текст 2"/>
+          <p:cNvPr id="677369185" name="Текст 2"/>
           <p:cNvSpPr>
             <a:spLocks noGrp="1"/>
           </p:cNvSpPr>
@@ -9994,7 +10080,7 @@
       </p:sp>
       <p:sp>
         <p:nvSpPr>
-          <p:cNvPr id="1763590388" name="Дата 3"/>
+          <p:cNvPr id="1044166835" name="Дата 3"/>
           <p:cNvSpPr>
             <a:spLocks noGrp="1"/>
           </p:cNvSpPr>
@@ -10020,7 +10106,7 @@
       </p:sp>
       <p:sp>
         <p:nvSpPr>
-          <p:cNvPr id="118524673" name="Нижний колонтитул 4"/>
+          <p:cNvPr id="700251629" name="Нижний колонтитул 4"/>
           <p:cNvSpPr>
             <a:spLocks noGrp="1"/>
           </p:cNvSpPr>
@@ -10042,7 +10128,7 @@
       </p:sp>
       <p:sp>
         <p:nvSpPr>
-          <p:cNvPr id="2105851435" name="Номер слайда 5"/>
+          <p:cNvPr id="393604612" name="Номер слайда 5"/>
           <p:cNvSpPr>
             <a:spLocks noGrp="1"/>
           </p:cNvSpPr>
@@ -10093,7 +10179,7 @@
       </p:grpSpPr>
       <p:sp>
         <p:nvSpPr>
-          <p:cNvPr id="693393986" name="Заголовок 1"/>
+          <p:cNvPr id="1142897589" name="Заголовок 1"/>
           <p:cNvSpPr>
             <a:spLocks noGrp="1"/>
           </p:cNvSpPr>
@@ -10119,7 +10205,7 @@
       </p:sp>
       <p:sp>
         <p:nvSpPr>
-          <p:cNvPr id="1663917599" name="Объект 2"/>
+          <p:cNvPr id="1152410086" name="Объект 2"/>
           <p:cNvSpPr>
             <a:spLocks noGrp="1"/>
           </p:cNvSpPr>
@@ -10190,7 +10276,7 @@
       </p:sp>
       <p:sp>
         <p:nvSpPr>
-          <p:cNvPr id="1150040139" name="Объект 3"/>
+          <p:cNvPr id="1245827266" name="Объект 3"/>
           <p:cNvSpPr>
             <a:spLocks noGrp="1"/>
           </p:cNvSpPr>
@@ -10261,7 +10347,7 @@
       </p:sp>
       <p:sp>
         <p:nvSpPr>
-          <p:cNvPr id="171612722" name="Дата 4"/>
+          <p:cNvPr id="779700217" name="Дата 4"/>
           <p:cNvSpPr>
             <a:spLocks noGrp="1"/>
           </p:cNvSpPr>
@@ -10287,7 +10373,7 @@
       </p:sp>
       <p:sp>
         <p:nvSpPr>
-          <p:cNvPr id="1195891744" name="Нижний колонтитул 5"/>
+          <p:cNvPr id="1706472091" name="Нижний колонтитул 5"/>
           <p:cNvSpPr>
             <a:spLocks noGrp="1"/>
           </p:cNvSpPr>
@@ -10309,7 +10395,7 @@
       </p:sp>
       <p:sp>
         <p:nvSpPr>
-          <p:cNvPr id="1420583143" name="Номер слайда 6"/>
+          <p:cNvPr id="1742585337" name="Номер слайда 6"/>
           <p:cNvSpPr>
             <a:spLocks noGrp="1"/>
           </p:cNvSpPr>
@@ -10360,7 +10446,7 @@
       </p:grpSpPr>
       <p:sp>
         <p:nvSpPr>
-          <p:cNvPr id="673387688" name="Заголовок 1"/>
+          <p:cNvPr id="676712213" name="Заголовок 1"/>
           <p:cNvSpPr>
             <a:spLocks noGrp="1"/>
           </p:cNvSpPr>
@@ -10391,7 +10477,7 @@
       </p:sp>
       <p:sp>
         <p:nvSpPr>
-          <p:cNvPr id="1923214330" name="Текст 2"/>
+          <p:cNvPr id="666560356" name="Текст 2"/>
           <p:cNvSpPr>
             <a:spLocks noGrp="1"/>
           </p:cNvSpPr>
@@ -10459,7 +10545,7 @@
       </p:sp>
       <p:sp>
         <p:nvSpPr>
-          <p:cNvPr id="647423755" name="Объект 3"/>
+          <p:cNvPr id="272822471" name="Объект 3"/>
           <p:cNvSpPr>
             <a:spLocks noGrp="1"/>
           </p:cNvSpPr>
@@ -10530,7 +10616,7 @@
       </p:sp>
       <p:sp>
         <p:nvSpPr>
-          <p:cNvPr id="133142693" name="Текст 4"/>
+          <p:cNvPr id="1997113485" name="Текст 4"/>
           <p:cNvSpPr>
             <a:spLocks noGrp="1"/>
           </p:cNvSpPr>
@@ -10598,7 +10684,7 @@
       </p:sp>
       <p:sp>
         <p:nvSpPr>
-          <p:cNvPr id="190102797" name="Объект 5"/>
+          <p:cNvPr id="847085397" name="Объект 5"/>
           <p:cNvSpPr>
             <a:spLocks noGrp="1"/>
           </p:cNvSpPr>
@@ -10669,7 +10755,7 @@
       </p:sp>
       <p:sp>
         <p:nvSpPr>
-          <p:cNvPr id="722933352" name="Дата 6"/>
+          <p:cNvPr id="944403918" name="Дата 6"/>
           <p:cNvSpPr>
             <a:spLocks noGrp="1"/>
           </p:cNvSpPr>
@@ -10695,7 +10781,7 @@
       </p:sp>
       <p:sp>
         <p:nvSpPr>
-          <p:cNvPr id="1911867720" name="Нижний колонтитул 7"/>
+          <p:cNvPr id="985663556" name="Нижний колонтитул 7"/>
           <p:cNvSpPr>
             <a:spLocks noGrp="1"/>
           </p:cNvSpPr>
@@ -10717,7 +10803,7 @@
       </p:sp>
       <p:sp>
         <p:nvSpPr>
-          <p:cNvPr id="893521625" name="Номер слайда 8"/>
+          <p:cNvPr id="918442414" name="Номер слайда 8"/>
           <p:cNvSpPr>
             <a:spLocks noGrp="1"/>
           </p:cNvSpPr>
@@ -10768,7 +10854,7 @@
       </p:grpSpPr>
       <p:sp>
         <p:nvSpPr>
-          <p:cNvPr id="1078285677" name="Заголовок 1"/>
+          <p:cNvPr id="2070237272" name="Заголовок 1"/>
           <p:cNvSpPr>
             <a:spLocks noGrp="1"/>
           </p:cNvSpPr>
@@ -10794,7 +10880,7 @@
       </p:sp>
       <p:sp>
         <p:nvSpPr>
-          <p:cNvPr id="26054557" name="Дата 2"/>
+          <p:cNvPr id="487727434" name="Дата 2"/>
           <p:cNvSpPr>
             <a:spLocks noGrp="1"/>
           </p:cNvSpPr>
@@ -10820,7 +10906,7 @@
       </p:sp>
       <p:sp>
         <p:nvSpPr>
-          <p:cNvPr id="1102307177" name="Нижний колонтитул 3"/>
+          <p:cNvPr id="1757747789" name="Нижний колонтитул 3"/>
           <p:cNvSpPr>
             <a:spLocks noGrp="1"/>
           </p:cNvSpPr>
@@ -10842,7 +10928,7 @@
       </p:sp>
       <p:sp>
         <p:nvSpPr>
-          <p:cNvPr id="2046138871" name="Номер слайда 4"/>
+          <p:cNvPr id="159579350" name="Номер слайда 4"/>
           <p:cNvSpPr>
             <a:spLocks noGrp="1"/>
           </p:cNvSpPr>
@@ -10893,7 +10979,7 @@
       </p:grpSpPr>
       <p:sp>
         <p:nvSpPr>
-          <p:cNvPr id="165073003" name="Дата 1"/>
+          <p:cNvPr id="1135102512" name="Дата 1"/>
           <p:cNvSpPr>
             <a:spLocks noGrp="1"/>
           </p:cNvSpPr>
@@ -10919,7 +11005,7 @@
       </p:sp>
       <p:sp>
         <p:nvSpPr>
-          <p:cNvPr id="1156930830" name="Нижний колонтитул 2"/>
+          <p:cNvPr id="169586844" name="Нижний колонтитул 2"/>
           <p:cNvSpPr>
             <a:spLocks noGrp="1"/>
           </p:cNvSpPr>
@@ -10941,7 +11027,7 @@
       </p:sp>
       <p:sp>
         <p:nvSpPr>
-          <p:cNvPr id="787189360" name="Номер слайда 3"/>
+          <p:cNvPr id="608500691" name="Номер слайда 3"/>
           <p:cNvSpPr>
             <a:spLocks noGrp="1"/>
           </p:cNvSpPr>
@@ -10992,7 +11078,7 @@
       </p:grpSpPr>
       <p:sp>
         <p:nvSpPr>
-          <p:cNvPr id="1036416679" name="Заголовок 1"/>
+          <p:cNvPr id="504147749" name="Заголовок 1"/>
           <p:cNvSpPr>
             <a:spLocks noGrp="1"/>
           </p:cNvSpPr>
@@ -11027,7 +11113,7 @@
       </p:sp>
       <p:sp>
         <p:nvSpPr>
-          <p:cNvPr id="1415074586" name="Объект 2"/>
+          <p:cNvPr id="369209786" name="Объект 2"/>
           <p:cNvSpPr>
             <a:spLocks noGrp="1"/>
           </p:cNvSpPr>
@@ -11126,7 +11212,7 @@
       </p:sp>
       <p:sp>
         <p:nvSpPr>
-          <p:cNvPr id="479327672" name="Текст 3"/>
+          <p:cNvPr id="1374886731" name="Текст 3"/>
           <p:cNvSpPr>
             <a:spLocks noGrp="1"/>
           </p:cNvSpPr>
@@ -11194,7 +11280,7 @@
       </p:sp>
       <p:sp>
         <p:nvSpPr>
-          <p:cNvPr id="962870556" name="Дата 4"/>
+          <p:cNvPr id="2025535815" name="Дата 4"/>
           <p:cNvSpPr>
             <a:spLocks noGrp="1"/>
           </p:cNvSpPr>
@@ -11220,7 +11306,7 @@
       </p:sp>
       <p:sp>
         <p:nvSpPr>
-          <p:cNvPr id="751907170" name="Нижний колонтитул 5"/>
+          <p:cNvPr id="279079964" name="Нижний колонтитул 5"/>
           <p:cNvSpPr>
             <a:spLocks noGrp="1"/>
           </p:cNvSpPr>
@@ -11242,7 +11328,7 @@
       </p:sp>
       <p:sp>
         <p:nvSpPr>
-          <p:cNvPr id="985547062" name="Номер слайда 6"/>
+          <p:cNvPr id="927312294" name="Номер слайда 6"/>
           <p:cNvSpPr>
             <a:spLocks noGrp="1"/>
           </p:cNvSpPr>
@@ -11293,7 +11379,7 @@
       </p:grpSpPr>
       <p:sp>
         <p:nvSpPr>
-          <p:cNvPr id="180137716" name="Заголовок 1"/>
+          <p:cNvPr id="827928724" name="Заголовок 1"/>
           <p:cNvSpPr>
             <a:spLocks noGrp="1"/>
           </p:cNvSpPr>
@@ -11328,7 +11414,7 @@
       </p:sp>
       <p:sp>
         <p:nvSpPr>
-          <p:cNvPr id="78536471" name="Рисунок 2"/>
+          <p:cNvPr id="1160443437" name="Рисунок 2"/>
           <p:cNvSpPr>
             <a:spLocks noGrp="1"/>
           </p:cNvSpPr>
@@ -11392,7 +11478,7 @@
       </p:sp>
       <p:sp>
         <p:nvSpPr>
-          <p:cNvPr id="1658874403" name="Текст 3"/>
+          <p:cNvPr id="1561576975" name="Текст 3"/>
           <p:cNvSpPr>
             <a:spLocks noGrp="1"/>
           </p:cNvSpPr>
@@ -11460,7 +11546,7 @@
       </p:sp>
       <p:sp>
         <p:nvSpPr>
-          <p:cNvPr id="469758893" name="Дата 4"/>
+          <p:cNvPr id="1821633118" name="Дата 4"/>
           <p:cNvSpPr>
             <a:spLocks noGrp="1"/>
           </p:cNvSpPr>
@@ -11486,7 +11572,7 @@
       </p:sp>
       <p:sp>
         <p:nvSpPr>
-          <p:cNvPr id="125748387" name="Нижний колонтитул 5"/>
+          <p:cNvPr id="2106429213" name="Нижний колонтитул 5"/>
           <p:cNvSpPr>
             <a:spLocks noGrp="1"/>
           </p:cNvSpPr>
@@ -11508,7 +11594,7 @@
       </p:sp>
       <p:sp>
         <p:nvSpPr>
-          <p:cNvPr id="1534661774" name="Номер слайда 6"/>
+          <p:cNvPr id="685384174" name="Номер слайда 6"/>
           <p:cNvSpPr>
             <a:spLocks noGrp="1"/>
           </p:cNvSpPr>
@@ -11564,7 +11650,7 @@
       </p:grpSpPr>
       <p:sp>
         <p:nvSpPr>
-          <p:cNvPr id="1732620889" name="Заголовок 1"/>
+          <p:cNvPr id="1459119225" name="Заголовок 1"/>
           <p:cNvSpPr>
             <a:spLocks noGrp="1"/>
           </p:cNvSpPr>
@@ -11600,7 +11686,7 @@
       </p:sp>
       <p:sp>
         <p:nvSpPr>
-          <p:cNvPr id="1430294459" name="Текст 2"/>
+          <p:cNvPr id="500034345" name="Текст 2"/>
           <p:cNvSpPr>
             <a:spLocks noGrp="1"/>
           </p:cNvSpPr>
@@ -11676,7 +11762,7 @@
       </p:sp>
       <p:sp>
         <p:nvSpPr>
-          <p:cNvPr id="806591759" name="Дата 3"/>
+          <p:cNvPr id="209470484" name="Дата 3"/>
           <p:cNvSpPr>
             <a:spLocks noGrp="1"/>
           </p:cNvSpPr>
@@ -11720,7 +11806,7 @@
       </p:sp>
       <p:sp>
         <p:nvSpPr>
-          <p:cNvPr id="1544732345" name="Нижний колонтитул 4"/>
+          <p:cNvPr id="400323147" name="Нижний колонтитул 4"/>
           <p:cNvSpPr>
             <a:spLocks noGrp="1"/>
           </p:cNvSpPr>
@@ -11760,7 +11846,7 @@
       </p:sp>
       <p:sp>
         <p:nvSpPr>
-          <p:cNvPr id="792303212" name="Номер слайда 5"/>
+          <p:cNvPr id="70617587" name="Номер слайда 5"/>
           <p:cNvSpPr>
             <a:spLocks noGrp="1"/>
           </p:cNvSpPr>
@@ -12171,14 +12257,14 @@
       </p:grpSpPr>
       <p:sp>
         <p:nvSpPr>
-          <p:cNvPr id="1726315123" name="Прямоугольник 3"/>
+          <p:cNvPr id="2035640291" name="Прямоугольник 3"/>
           <p:cNvSpPr/>
           <p:nvPr/>
         </p:nvSpPr>
         <p:spPr bwMode="auto">
-          <a:xfrm>
-            <a:off x="0" y="1381233"/>
-            <a:ext cx="12192000" cy="1810533"/>
+          <a:xfrm flipH="0" flipV="0">
+            <a:off x="0" y="246891"/>
+            <a:ext cx="12191999" cy="4221198"/>
           </a:xfrm>
           <a:prstGeom prst="rect">
             <a:avLst/>
@@ -12221,14 +12307,14 @@
       </p:sp>
       <p:sp>
         <p:nvSpPr>
-          <p:cNvPr id="777957635" name="Прямоугольник 4"/>
+          <p:cNvPr id="917529796" name="Прямоугольник 4"/>
           <p:cNvSpPr/>
           <p:nvPr/>
         </p:nvSpPr>
         <p:spPr bwMode="auto">
-          <a:xfrm>
-            <a:off x="0" y="5021126"/>
-            <a:ext cx="12192000" cy="1385894"/>
+          <a:xfrm flipH="0" flipV="0">
+            <a:off x="0" y="5021125"/>
+            <a:ext cx="12191999" cy="1646373"/>
           </a:xfrm>
           <a:prstGeom prst="rect">
             <a:avLst/>
@@ -12271,7 +12357,7 @@
       </p:sp>
       <p:sp>
         <p:nvSpPr>
-          <p:cNvPr id="2147379119" name="Заголовок 1"/>
+          <p:cNvPr id="1621466560" name="Заголовок 1"/>
           <p:cNvSpPr>
             <a:spLocks noGrp="1"/>
           </p:cNvSpPr>
@@ -12281,7 +12367,7 @@
         </p:nvSpPr>
         <p:spPr bwMode="auto">
           <a:xfrm>
-            <a:off x="422988" y="1604865"/>
+            <a:off x="1644243" y="2028711"/>
             <a:ext cx="8345668" cy="1400288"/>
           </a:xfrm>
         </p:spPr>
@@ -12291,11 +12377,11 @@
           </a:bodyPr>
           <a:lstStyle/>
           <a:p>
-            <a:pPr algn="l">
-              <a:defRPr/>
-            </a:pPr>
-            <a:r>
-              <a:rPr lang="ru-RU" sz="3200">
+            <a:pPr algn="ctr">
+              <a:defRPr/>
+            </a:pPr>
+            <a:r>
+              <a:rPr lang="ru-RU" sz="3200" b="1">
                 <a:solidFill>
                   <a:schemeClr val="bg1"/>
                 </a:solidFill>
@@ -12303,7 +12389,7 @@
               <a:t>Разработка </a:t>
             </a:r>
             <a:r>
-              <a:rPr lang="ru-RU" sz="3200">
+              <a:rPr lang="ru-RU" sz="3200" b="1">
                 <a:solidFill>
                   <a:schemeClr val="bg1"/>
                 </a:solidFill>
@@ -12311,7 +12397,7 @@
               <a:t>ядра упрощенного графического ускорителя. Разработка </a:t>
             </a:r>
             <a:r>
-              <a:rPr lang="en-US" sz="3200">
+              <a:rPr lang="en-US" sz="3200" b="1">
                 <a:solidFill>
                   <a:schemeClr val="bg1"/>
                 </a:solidFill>
@@ -12319,14 +12405,14 @@
               <a:t>HDL </a:t>
             </a:r>
             <a:r>
-              <a:rPr lang="ru-RU" sz="3200">
+              <a:rPr lang="ru-RU" sz="3200" b="1">
                 <a:solidFill>
                   <a:schemeClr val="bg1"/>
                 </a:solidFill>
               </a:rPr>
               <a:t>модели</a:t>
             </a:r>
-            <a:endParaRPr>
+            <a:endParaRPr b="1">
               <a:solidFill>
                 <a:schemeClr val="bg1"/>
               </a:solidFill>
@@ -12336,7 +12422,7 @@
       </p:sp>
       <p:sp>
         <p:nvSpPr>
-          <p:cNvPr id="502607029" name="Подзаголовок 2"/>
+          <p:cNvPr id="94531969" name="Подзаголовок 2"/>
           <p:cNvSpPr>
             <a:spLocks noGrp="1"/>
           </p:cNvSpPr>
@@ -12410,6 +12496,279 @@
               <a:t>e-mail: staruhind@yandex.ru</a:t>
             </a:r>
             <a:endParaRPr/>
+          </a:p>
+        </p:txBody>
+      </p:sp>
+      <p:sp>
+        <p:nvSpPr>
+          <p:cNvPr id="875720329" name="Заголовок 1"/>
+          <p:cNvSpPr>
+            <a:spLocks noGrp="1"/>
+          </p:cNvSpPr>
+          <p:nvPr/>
+        </p:nvSpPr>
+        <p:spPr bwMode="auto">
+          <a:xfrm flipH="0" flipV="0">
+            <a:off x="1644243" y="383435"/>
+            <a:ext cx="8345667" cy="766221"/>
+          </a:xfrm>
+        </p:spPr>
+        <p:txBody>
+          <a:bodyPr vert="horz" lIns="91440" tIns="45720" rIns="91440" bIns="45720" rtlCol="0" anchor="b">
+            <a:noAutofit/>
+          </a:bodyPr>
+          <a:lstStyle>
+            <a:lvl1pPr algn="ctr" defTabSz="914400" rtl="0">
+              <a:lnSpc>
+                <a:spcPct val="90000"/>
+              </a:lnSpc>
+              <a:spcBef>
+                <a:spcPts val="0"/>
+              </a:spcBef>
+              <a:buNone/>
+              <a:defRPr sz="6000">
+                <a:solidFill>
+                  <a:schemeClr val="tx1"/>
+                </a:solidFill>
+                <a:latin typeface="+mj-lt"/>
+                <a:ea typeface="+mj-ea"/>
+                <a:cs typeface="+mj-cs"/>
+              </a:defRPr>
+            </a:lvl1pPr>
+          </a:lstStyle>
+          <a:p>
+            <a:pPr>
+              <a:defRPr/>
+            </a:pPr>
+            <a:r>
+              <a:rPr sz="1600" b="0" i="0" u="none">
+                <a:solidFill>
+                  <a:schemeClr val="bg1"/>
+                </a:solidFill>
+                <a:latin typeface="Trebuchet MS"/>
+                <a:ea typeface="Trebuchet MS"/>
+                <a:cs typeface="Trebuchet MS"/>
+              </a:rPr>
+              <a:t>МИНОБРНАУКИ РОССИИ ФЕДЕРАЛЬНОЕ ГОСУДАРСТВЕННОЕ БЮДЖЕТНОЕ ОБРАЗОВАТЕЛЬНОЕ УЧРЕЖДЕНИЕ ВЫСШЕГО ОБРАЗОВАНИЯ «ВОРОНЕЖСКИЙ ГОСУДАРСТВЕННЫЙ УНИВЕРСИТЕТ» (ФГБОУ ВО «ВГУ»)</a:t>
+            </a:r>
+            <a:endParaRPr sz="8000">
+              <a:solidFill>
+                <a:schemeClr val="bg1"/>
+              </a:solidFill>
+              <a:latin typeface="Trebuchet MS"/>
+              <a:cs typeface="Trebuchet MS"/>
+            </a:endParaRPr>
+          </a:p>
+        </p:txBody>
+      </p:sp>
+      <p:sp>
+        <p:nvSpPr>
+          <p:cNvPr id="33718914" name="Заголовок 1"/>
+          <p:cNvSpPr>
+            <a:spLocks noGrp="1"/>
+          </p:cNvSpPr>
+          <p:nvPr/>
+        </p:nvSpPr>
+        <p:spPr bwMode="auto">
+          <a:xfrm flipH="0" flipV="0">
+            <a:off x="1644243" y="1149656"/>
+            <a:ext cx="8345667" cy="766220"/>
+          </a:xfrm>
+        </p:spPr>
+        <p:txBody>
+          <a:bodyPr vert="horz" lIns="91440" tIns="45720" rIns="91440" bIns="45720" rtlCol="0" anchor="b">
+            <a:noAutofit/>
+          </a:bodyPr>
+          <a:lstStyle>
+            <a:lvl1pPr algn="ctr" defTabSz="914400" rtl="0">
+              <a:lnSpc>
+                <a:spcPct val="90000"/>
+              </a:lnSpc>
+              <a:spcBef>
+                <a:spcPts val="0"/>
+              </a:spcBef>
+              <a:buNone/>
+              <a:defRPr sz="6000">
+                <a:solidFill>
+                  <a:schemeClr val="tx1"/>
+                </a:solidFill>
+                <a:latin typeface="+mj-lt"/>
+                <a:ea typeface="+mj-ea"/>
+                <a:cs typeface="+mj-cs"/>
+              </a:defRPr>
+            </a:lvl1pPr>
+          </a:lstStyle>
+          <a:p>
+            <a:pPr>
+              <a:defRPr/>
+            </a:pPr>
+            <a:r>
+              <a:rPr sz="1600" b="0" i="0" u="none">
+                <a:solidFill>
+                  <a:schemeClr val="bg1"/>
+                </a:solidFill>
+                <a:latin typeface="Trebuchet MS"/>
+                <a:ea typeface="Trebuchet MS"/>
+                <a:cs typeface="Trebuchet MS"/>
+              </a:rPr>
+              <a:t>Факультет прикладной математики, информатики и механики Кафедра вычислительной математики и прикладных информационных технологий</a:t>
+            </a:r>
+            <a:endParaRPr sz="8000">
+              <a:solidFill>
+                <a:schemeClr val="bg1"/>
+              </a:solidFill>
+              <a:latin typeface="Trebuchet MS"/>
+              <a:cs typeface="Trebuchet MS"/>
+            </a:endParaRPr>
+          </a:p>
+        </p:txBody>
+      </p:sp>
+      <p:sp>
+        <p:nvSpPr>
+          <p:cNvPr id="250831301" name="Заголовок 1"/>
+          <p:cNvSpPr>
+            <a:spLocks noGrp="1"/>
+          </p:cNvSpPr>
+          <p:nvPr/>
+        </p:nvSpPr>
+        <p:spPr bwMode="auto">
+          <a:xfrm flipH="0" flipV="0">
+            <a:off x="1644243" y="3544760"/>
+            <a:ext cx="8345667" cy="766220"/>
+          </a:xfrm>
+        </p:spPr>
+        <p:txBody>
+          <a:bodyPr vert="horz" lIns="91440" tIns="45720" rIns="91440" bIns="45720" rtlCol="0" anchor="b">
+            <a:noAutofit/>
+          </a:bodyPr>
+          <a:lstStyle>
+            <a:lvl1pPr algn="ctr" defTabSz="914400" rtl="0">
+              <a:lnSpc>
+                <a:spcPct val="90000"/>
+              </a:lnSpc>
+              <a:spcBef>
+                <a:spcPts val="0"/>
+              </a:spcBef>
+              <a:buNone/>
+              <a:defRPr sz="6000">
+                <a:solidFill>
+                  <a:schemeClr val="tx1"/>
+                </a:solidFill>
+                <a:latin typeface="+mj-lt"/>
+                <a:ea typeface="+mj-ea"/>
+                <a:cs typeface="+mj-cs"/>
+              </a:defRPr>
+            </a:lvl1pPr>
+          </a:lstStyle>
+          <a:p>
+            <a:pPr>
+              <a:defRPr/>
+            </a:pPr>
+            <a:r>
+              <a:rPr lang="ru-RU" sz="1600" b="0" i="0" u="none">
+                <a:solidFill>
+                  <a:schemeClr val="bg1"/>
+                </a:solidFill>
+                <a:latin typeface="Trebuchet MS"/>
+                <a:ea typeface="Trebuchet MS"/>
+                <a:cs typeface="Trebuchet MS"/>
+              </a:rPr>
+              <a:t>Магистерская диссертация</a:t>
+            </a:r>
+            <a:endParaRPr lang="ru-RU" sz="1600" b="0" i="0" u="none">
+              <a:solidFill>
+                <a:schemeClr val="bg1"/>
+              </a:solidFill>
+              <a:latin typeface="Trebuchet MS"/>
+              <a:ea typeface="Trebuchet MS"/>
+              <a:cs typeface="Trebuchet MS"/>
+            </a:endParaRPr>
+          </a:p>
+          <a:p>
+            <a:pPr>
+              <a:defRPr/>
+            </a:pPr>
+            <a:r>
+              <a:rPr lang="ru-RU" sz="1600" b="0" i="0" u="none">
+                <a:solidFill>
+                  <a:schemeClr val="bg1"/>
+                </a:solidFill>
+                <a:latin typeface="Trebuchet MS"/>
+                <a:ea typeface="Trebuchet MS"/>
+                <a:cs typeface="Trebuchet MS"/>
+              </a:rPr>
+              <a:t>Направление 01.04.02 Прикладная математика и информатика</a:t>
+            </a:r>
+            <a:endParaRPr lang="ru-RU" sz="1600" b="0" i="0" u="none">
+              <a:solidFill>
+                <a:schemeClr val="bg1"/>
+              </a:solidFill>
+              <a:latin typeface="Trebuchet MS"/>
+              <a:ea typeface="Trebuchet MS"/>
+              <a:cs typeface="Trebuchet MS"/>
+            </a:endParaRPr>
+          </a:p>
+        </p:txBody>
+      </p:sp>
+      <p:sp>
+        <p:nvSpPr>
+          <p:cNvPr id="652760012" name="Заголовок 1"/>
+          <p:cNvSpPr>
+            <a:spLocks noGrp="1"/>
+          </p:cNvSpPr>
+          <p:nvPr/>
+        </p:nvSpPr>
+        <p:spPr bwMode="auto">
+          <a:xfrm flipH="0" flipV="0">
+            <a:off x="5170877" y="5951875"/>
+            <a:ext cx="1850245" cy="630957"/>
+          </a:xfrm>
+        </p:spPr>
+        <p:txBody>
+          <a:bodyPr vert="horz" lIns="91440" tIns="45720" rIns="91440" bIns="45720" rtlCol="0" anchor="b">
+            <a:noAutofit/>
+          </a:bodyPr>
+          <a:lstStyle>
+            <a:lvl1pPr algn="ctr" defTabSz="914400" rtl="0">
+              <a:lnSpc>
+                <a:spcPct val="90000"/>
+              </a:lnSpc>
+              <a:spcBef>
+                <a:spcPts val="0"/>
+              </a:spcBef>
+              <a:buNone/>
+              <a:defRPr sz="6000">
+                <a:solidFill>
+                  <a:schemeClr val="tx1"/>
+                </a:solidFill>
+                <a:latin typeface="+mj-lt"/>
+                <a:ea typeface="+mj-ea"/>
+                <a:cs typeface="+mj-cs"/>
+              </a:defRPr>
+            </a:lvl1pPr>
+          </a:lstStyle>
+          <a:p>
+            <a:pPr>
+              <a:defRPr/>
+            </a:pPr>
+            <a:r>
+              <a:rPr sz="1600" b="0" i="0" u="none">
+                <a:solidFill>
+                  <a:schemeClr val="bg1"/>
+                </a:solidFill>
+                <a:latin typeface="Trebuchet MS"/>
+                <a:ea typeface="Trebuchet MS"/>
+                <a:cs typeface="Trebuchet MS"/>
+              </a:rPr>
+              <a:t>Воронеж 2026</a:t>
+            </a:r>
+            <a:endParaRPr sz="8000">
+              <a:solidFill>
+                <a:schemeClr val="bg1"/>
+              </a:solidFill>
+              <a:latin typeface="Trebuchet MS"/>
+              <a:cs typeface="Trebuchet MS"/>
+            </a:endParaRPr>
           </a:p>
         </p:txBody>
       </p:sp>
@@ -12481,7 +12840,7 @@
       </p:grpSpPr>
       <p:sp>
         <p:nvSpPr>
-          <p:cNvPr id="1366935849" name="Объект 2"/>
+          <p:cNvPr id="1124795381" name="Объект 2"/>
           <p:cNvSpPr>
             <a:spLocks noGrp="1"/>
           </p:cNvSpPr>
@@ -12602,7 +12961,7 @@
       </p:sp>
       <p:sp>
         <p:nvSpPr>
-          <p:cNvPr id="1905721661" name="Номер слайда 3"/>
+          <p:cNvPr id="223051315" name="Номер слайда 3"/>
           <p:cNvSpPr>
             <a:spLocks noGrp="1"/>
           </p:cNvSpPr>
@@ -12643,7 +13002,7 @@
       </p:sp>
       <p:sp>
         <p:nvSpPr>
-          <p:cNvPr id="402361355" name="Прямоугольник 6"/>
+          <p:cNvPr id="1447051687" name="Прямоугольник 6"/>
           <p:cNvSpPr/>
           <p:nvPr/>
         </p:nvSpPr>
@@ -12693,7 +13052,7 @@
       </p:sp>
       <p:sp>
         <p:nvSpPr>
-          <p:cNvPr id="871079030" name="Прямоугольник 7"/>
+          <p:cNvPr id="391797941" name="Прямоугольник 7"/>
           <p:cNvSpPr/>
           <p:nvPr/>
         </p:nvSpPr>
@@ -12743,7 +13102,7 @@
       </p:sp>
       <p:sp>
         <p:nvSpPr>
-          <p:cNvPr id="912920671" name="Заголовок 1"/>
+          <p:cNvPr id="796153121" name="Заголовок 1"/>
           <p:cNvSpPr>
             <a:spLocks noGrp="1"/>
           </p:cNvSpPr>
@@ -12889,7 +13248,7 @@
       </p:grpSpPr>
       <p:sp>
         <p:nvSpPr>
-          <p:cNvPr id="2069389772" name="Объект 2"/>
+          <p:cNvPr id="408398221" name="Объект 2"/>
           <p:cNvSpPr>
             <a:spLocks noGrp="1"/>
           </p:cNvSpPr>
@@ -12988,7 +13347,7 @@
       </p:sp>
       <p:sp>
         <p:nvSpPr>
-          <p:cNvPr id="784086288" name="Номер слайда 3"/>
+          <p:cNvPr id="1771061276" name="Номер слайда 3"/>
           <p:cNvSpPr>
             <a:spLocks noGrp="1"/>
           </p:cNvSpPr>
@@ -13029,7 +13388,7 @@
       </p:sp>
       <p:sp>
         <p:nvSpPr>
-          <p:cNvPr id="397360" name="Прямоугольник 5"/>
+          <p:cNvPr id="1190051559" name="Прямоугольник 5"/>
           <p:cNvSpPr/>
           <p:nvPr/>
         </p:nvSpPr>
@@ -13079,7 +13438,7 @@
       </p:sp>
       <p:sp>
         <p:nvSpPr>
-          <p:cNvPr id="101703978" name="Прямоугольник 6"/>
+          <p:cNvPr id="172595363" name="Прямоугольник 6"/>
           <p:cNvSpPr/>
           <p:nvPr/>
         </p:nvSpPr>
@@ -13129,7 +13488,7 @@
       </p:sp>
       <p:sp>
         <p:nvSpPr>
-          <p:cNvPr id="1240477708" name="Заголовок 1"/>
+          <p:cNvPr id="1592403614" name="Заголовок 1"/>
           <p:cNvSpPr>
             <a:spLocks noGrp="1"/>
           </p:cNvSpPr>
@@ -13260,7 +13619,7 @@
       </p:grpSpPr>
       <p:sp>
         <p:nvSpPr>
-          <p:cNvPr id="1433619793" name="Объект 2"/>
+          <p:cNvPr id="491396386" name="Объект 2"/>
           <p:cNvSpPr>
             <a:spLocks noGrp="1"/>
           </p:cNvSpPr>
@@ -13358,7 +13717,7 @@
       </p:sp>
       <p:sp>
         <p:nvSpPr>
-          <p:cNvPr id="1820415611" name="Номер слайда 3"/>
+          <p:cNvPr id="17392764" name="Номер слайда 3"/>
           <p:cNvSpPr>
             <a:spLocks noGrp="1"/>
           </p:cNvSpPr>
@@ -13399,7 +13758,7 @@
       </p:sp>
       <p:sp>
         <p:nvSpPr>
-          <p:cNvPr id="483974506" name="Прямоугольник 5"/>
+          <p:cNvPr id="1810838613" name="Прямоугольник 5"/>
           <p:cNvSpPr/>
           <p:nvPr/>
         </p:nvSpPr>
@@ -13449,7 +13808,7 @@
       </p:sp>
       <p:sp>
         <p:nvSpPr>
-          <p:cNvPr id="1797950954" name="Прямоугольник 6"/>
+          <p:cNvPr id="1907668671" name="Прямоугольник 6"/>
           <p:cNvSpPr/>
           <p:nvPr/>
         </p:nvSpPr>
@@ -13499,7 +13858,7 @@
       </p:sp>
       <p:sp>
         <p:nvSpPr>
-          <p:cNvPr id="416124017" name="Заголовок 1"/>
+          <p:cNvPr id="1986948501" name="Заголовок 1"/>
           <p:cNvSpPr>
             <a:spLocks noGrp="1"/>
           </p:cNvSpPr>
@@ -13658,7 +14017,7 @@
       </p:grpSpPr>
       <p:sp>
         <p:nvSpPr>
-          <p:cNvPr id="1564836383" name="Объект 2"/>
+          <p:cNvPr id="136340521" name="Объект 2"/>
           <p:cNvSpPr>
             <a:spLocks noGrp="1"/>
           </p:cNvSpPr>
@@ -13733,7 +14092,7 @@
       </p:sp>
       <p:sp>
         <p:nvSpPr>
-          <p:cNvPr id="928786922" name="Номер слайда 3"/>
+          <p:cNvPr id="1131737907" name="Номер слайда 3"/>
           <p:cNvSpPr>
             <a:spLocks noGrp="1"/>
           </p:cNvSpPr>
@@ -13774,7 +14133,7 @@
       </p:sp>
       <p:sp>
         <p:nvSpPr>
-          <p:cNvPr id="2016060669" name="Прямоугольник 5"/>
+          <p:cNvPr id="878846792" name="Прямоугольник 5"/>
           <p:cNvSpPr/>
           <p:nvPr/>
         </p:nvSpPr>
@@ -13824,7 +14183,7 @@
       </p:sp>
       <p:sp>
         <p:nvSpPr>
-          <p:cNvPr id="710393967" name="Прямоугольник 6"/>
+          <p:cNvPr id="943646927" name="Прямоугольник 6"/>
           <p:cNvSpPr/>
           <p:nvPr/>
         </p:nvSpPr>
@@ -13874,7 +14233,7 @@
       </p:sp>
       <p:sp>
         <p:nvSpPr>
-          <p:cNvPr id="409378877" name="Заголовок 1"/>
+          <p:cNvPr id="1175389652" name="Заголовок 1"/>
           <p:cNvSpPr>
             <a:spLocks noGrp="1"/>
           </p:cNvSpPr>
@@ -14009,7 +14368,7 @@
       </p:grpSpPr>
       <p:sp>
         <p:nvSpPr>
-          <p:cNvPr id="2027873669" name="Объект 2"/>
+          <p:cNvPr id="506611265" name="Объект 2"/>
           <p:cNvSpPr>
             <a:spLocks noGrp="1"/>
           </p:cNvSpPr>
@@ -14106,7 +14465,7 @@
       </p:sp>
       <p:sp>
         <p:nvSpPr>
-          <p:cNvPr id="1337482575" name="Номер слайда 3"/>
+          <p:cNvPr id="776025192" name="Номер слайда 3"/>
           <p:cNvSpPr>
             <a:spLocks noGrp="1"/>
           </p:cNvSpPr>
@@ -14147,7 +14506,7 @@
       </p:sp>
       <p:sp>
         <p:nvSpPr>
-          <p:cNvPr id="1334222644" name="Прямоугольник 4"/>
+          <p:cNvPr id="1456219130" name="Прямоугольник 4"/>
           <p:cNvSpPr/>
           <p:nvPr/>
         </p:nvSpPr>
@@ -14197,7 +14556,7 @@
       </p:sp>
       <p:sp>
         <p:nvSpPr>
-          <p:cNvPr id="1635625274" name="Прямоугольник 5"/>
+          <p:cNvPr id="572534065" name="Прямоугольник 5"/>
           <p:cNvSpPr/>
           <p:nvPr/>
         </p:nvSpPr>
@@ -14247,7 +14606,7 @@
       </p:sp>
       <p:sp>
         <p:nvSpPr>
-          <p:cNvPr id="1315923771" name="Заголовок 1"/>
+          <p:cNvPr id="46940852" name="Заголовок 1"/>
           <p:cNvSpPr>
             <a:spLocks noGrp="1"/>
           </p:cNvSpPr>
@@ -14286,7 +14645,7 @@
       </p:sp>
       <p:pic>
         <p:nvPicPr>
-          <p:cNvPr id="1022635312" name=""/>
+          <p:cNvPr id="2145269862" name=""/>
           <p:cNvPicPr>
             <a:picLocks noChangeAspect="1"/>
           </p:cNvPicPr>
@@ -14374,7 +14733,7 @@
       </p:grpSpPr>
       <p:sp>
         <p:nvSpPr>
-          <p:cNvPr id="856821674" name="Объект 2"/>
+          <p:cNvPr id="415279506" name="Объект 2"/>
           <p:cNvSpPr>
             <a:spLocks noGrp="1"/>
           </p:cNvSpPr>
@@ -14523,7 +14882,7 @@
       </p:sp>
       <p:sp>
         <p:nvSpPr>
-          <p:cNvPr id="794568358" name="Номер слайда 3"/>
+          <p:cNvPr id="1154533369" name="Номер слайда 3"/>
           <p:cNvSpPr>
             <a:spLocks noGrp="1"/>
           </p:cNvSpPr>
@@ -14564,7 +14923,7 @@
       </p:sp>
       <p:sp>
         <p:nvSpPr>
-          <p:cNvPr id="2111971076" name="Прямоугольник 4"/>
+          <p:cNvPr id="654524633" name="Прямоугольник 4"/>
           <p:cNvSpPr/>
           <p:nvPr/>
         </p:nvSpPr>
@@ -14614,7 +14973,7 @@
       </p:sp>
       <p:sp>
         <p:nvSpPr>
-          <p:cNvPr id="545069015" name="Прямоугольник 5"/>
+          <p:cNvPr id="364241861" name="Прямоугольник 5"/>
           <p:cNvSpPr/>
           <p:nvPr/>
         </p:nvSpPr>
@@ -14664,7 +15023,7 @@
       </p:sp>
       <p:sp>
         <p:nvSpPr>
-          <p:cNvPr id="614997509" name="Заголовок 1"/>
+          <p:cNvPr id="1154214127" name="Заголовок 1"/>
           <p:cNvSpPr>
             <a:spLocks noGrp="1"/>
           </p:cNvSpPr>
@@ -15056,7 +15415,7 @@
       </p:grpSpPr>
       <p:sp>
         <p:nvSpPr>
-          <p:cNvPr id="227669657" name="Объект 2"/>
+          <p:cNvPr id="1692479279" name="Объект 2"/>
           <p:cNvSpPr>
             <a:spLocks noGrp="1"/>
           </p:cNvSpPr>
@@ -15082,7 +15441,7 @@
       </p:sp>
       <p:sp>
         <p:nvSpPr>
-          <p:cNvPr id="590024601" name="Номер слайда 3"/>
+          <p:cNvPr id="1686578090" name="Номер слайда 3"/>
           <p:cNvSpPr>
             <a:spLocks noGrp="1"/>
           </p:cNvSpPr>
@@ -15123,7 +15482,7 @@
       </p:sp>
       <p:sp>
         <p:nvSpPr>
-          <p:cNvPr id="2111822317" name="Прямоугольник 4"/>
+          <p:cNvPr id="1389914587" name="Прямоугольник 4"/>
           <p:cNvSpPr/>
           <p:nvPr/>
         </p:nvSpPr>
@@ -15173,7 +15532,7 @@
       </p:sp>
       <p:sp>
         <p:nvSpPr>
-          <p:cNvPr id="243478445" name="Прямоугольник 5"/>
+          <p:cNvPr id="1095420108" name="Прямоугольник 5"/>
           <p:cNvSpPr/>
           <p:nvPr/>
         </p:nvSpPr>
@@ -15223,7 +15582,7 @@
       </p:sp>
       <p:sp>
         <p:nvSpPr>
-          <p:cNvPr id="564058951" name="Заголовок 1"/>
+          <p:cNvPr id="2039413330" name="Заголовок 1"/>
           <p:cNvSpPr>
             <a:spLocks noGrp="1"/>
           </p:cNvSpPr>
@@ -15233,7 +15592,7 @@
         </p:nvSpPr>
         <p:spPr bwMode="auto">
           <a:xfrm>
-            <a:off x="838200" y="78986"/>
+            <a:off x="916446" y="174984"/>
             <a:ext cx="10515600" cy="1325563"/>
           </a:xfrm>
         </p:spPr>
@@ -15256,6 +15615,589 @@
               <a:solidFill>
                 <a:schemeClr val="bg1"/>
               </a:solidFill>
+            </a:endParaRPr>
+          </a:p>
+        </p:txBody>
+      </p:sp>
+    </p:spTree>
+  </p:cSld>
+  <p:clrMapOvr>
+    <a:masterClrMapping/>
+  </p:clrMapOvr>
+  <mc:AlternateContent xmlns:mc="http://schemas.openxmlformats.org/markup-compatibility/2006">
+    <mc:Choice xmlns:p159="http://schemas.microsoft.com/office/powerpoint/2015/09/main" xmlns:p14="http://schemas.microsoft.com/office/powerpoint/2010/main" Requires="p159">
+      <p:transition p14:dur="500" advClick="1"/>
+    </mc:Choice>
+    <mc:Fallback>
+      <p:transition advClick="1"/>
+    </mc:Fallback>
+  </mc:AlternateContent>
+</p:sld>
+</file>
+
+<file path=ppt/slides/slide18.xml><?xml version="1.0" encoding="utf-8"?>
+<p:sld xmlns:a="http://schemas.openxmlformats.org/drawingml/2006/main" xmlns:r="http://schemas.openxmlformats.org/officeDocument/2006/relationships" xmlns:p="http://schemas.openxmlformats.org/presentationml/2006/main" xmlns:m="http://schemas.openxmlformats.org/officeDocument/2006/math" xmlns:w="http://schemas.openxmlformats.org/wordprocessingml/2006/main" xmlns:mc="http://schemas.openxmlformats.org/markup-compatibility/2006" showMasterPhAnim="0" showMasterSp="1" show="1">
+  <p:cSld name="">
+    <p:bg>
+      <p:bgPr shadeToTitle="0">
+        <a:gradFill>
+          <a:gsLst>
+            <a:gs pos="0">
+              <a:schemeClr val="accent1">
+                <a:lumMod val="5000"/>
+                <a:lumOff val="95000"/>
+              </a:schemeClr>
+            </a:gs>
+            <a:gs pos="74000">
+              <a:schemeClr val="accent1">
+                <a:lumMod val="45000"/>
+                <a:lumOff val="55000"/>
+              </a:schemeClr>
+            </a:gs>
+            <a:gs pos="83000">
+              <a:schemeClr val="accent1">
+                <a:lumMod val="45000"/>
+                <a:lumOff val="55000"/>
+              </a:schemeClr>
+            </a:gs>
+            <a:gs pos="100000">
+              <a:schemeClr val="accent1">
+                <a:lumMod val="30000"/>
+                <a:lumOff val="70000"/>
+              </a:schemeClr>
+            </a:gs>
+          </a:gsLst>
+          <a:lin ang="5400000" scaled="1"/>
+        </a:gradFill>
+      </p:bgPr>
+    </p:bg>
+    <p:spTree>
+      <p:nvGrpSpPr>
+        <p:cNvPr id="1" name=""/>
+        <p:cNvGrpSpPr/>
+        <p:nvPr/>
+      </p:nvGrpSpPr>
+      <p:grpSpPr bwMode="auto">
+        <a:xfrm>
+          <a:off x="0" y="0"/>
+          <a:ext cx="0" cy="0"/>
+          <a:chOff x="0" y="0"/>
+          <a:chExt cx="0" cy="0"/>
+        </a:xfrm>
+      </p:grpSpPr>
+      <p:sp>
+        <p:nvSpPr>
+          <p:cNvPr id="622541533" name="Прямоугольник 3"/>
+          <p:cNvSpPr/>
+          <p:nvPr/>
+        </p:nvSpPr>
+        <p:spPr bwMode="auto">
+          <a:xfrm flipH="0" flipV="0">
+            <a:off x="0" y="246891"/>
+            <a:ext cx="12191999" cy="4221198"/>
+          </a:xfrm>
+          <a:prstGeom prst="rect">
+            <a:avLst/>
+          </a:prstGeom>
+          <a:solidFill>
+            <a:srgbClr val="1A3260">
+              <a:alpha val="65098"/>
+            </a:srgbClr>
+          </a:solidFill>
+          <a:ln>
+            <a:noFill/>
+          </a:ln>
+        </p:spPr>
+        <p:style>
+          <a:lnRef idx="2">
+            <a:schemeClr val="accent1">
+              <a:shade val="50000"/>
+            </a:schemeClr>
+          </a:lnRef>
+          <a:fillRef idx="1">
+            <a:schemeClr val="accent1"/>
+          </a:fillRef>
+          <a:effectRef idx="0">
+            <a:schemeClr val="accent1"/>
+          </a:effectRef>
+          <a:fontRef idx="minor">
+            <a:schemeClr val="lt1"/>
+          </a:fontRef>
+        </p:style>
+        <p:txBody>
+          <a:bodyPr rtlCol="0" anchor="ctr"/>
+          <a:lstStyle/>
+          <a:p>
+            <a:pPr algn="ctr">
+              <a:defRPr/>
+            </a:pPr>
+            <a:endParaRPr lang="ru-RU"/>
+          </a:p>
+        </p:txBody>
+      </p:sp>
+      <p:sp>
+        <p:nvSpPr>
+          <p:cNvPr id="431252980" name="Прямоугольник 4"/>
+          <p:cNvSpPr/>
+          <p:nvPr/>
+        </p:nvSpPr>
+        <p:spPr bwMode="auto">
+          <a:xfrm flipH="0" flipV="0">
+            <a:off x="0" y="5021125"/>
+            <a:ext cx="12191999" cy="1646373"/>
+          </a:xfrm>
+          <a:prstGeom prst="rect">
+            <a:avLst/>
+          </a:prstGeom>
+          <a:solidFill>
+            <a:srgbClr val="000000">
+              <a:alpha val="65098"/>
+            </a:srgbClr>
+          </a:solidFill>
+          <a:ln>
+            <a:noFill/>
+          </a:ln>
+        </p:spPr>
+        <p:style>
+          <a:lnRef idx="2">
+            <a:schemeClr val="accent1">
+              <a:shade val="50000"/>
+            </a:schemeClr>
+          </a:lnRef>
+          <a:fillRef idx="1">
+            <a:schemeClr val="accent1"/>
+          </a:fillRef>
+          <a:effectRef idx="0">
+            <a:schemeClr val="accent1"/>
+          </a:effectRef>
+          <a:fontRef idx="minor">
+            <a:schemeClr val="lt1"/>
+          </a:fontRef>
+        </p:style>
+        <p:txBody>
+          <a:bodyPr rtlCol="0" anchor="ctr"/>
+          <a:lstStyle/>
+          <a:p>
+            <a:pPr algn="ctr">
+              <a:defRPr/>
+            </a:pPr>
+            <a:endParaRPr lang="ru-RU"/>
+          </a:p>
+        </p:txBody>
+      </p:sp>
+      <p:sp>
+        <p:nvSpPr>
+          <p:cNvPr id="48159157" name="Заголовок 1"/>
+          <p:cNvSpPr>
+            <a:spLocks noGrp="1"/>
+          </p:cNvSpPr>
+          <p:nvPr>
+            <p:ph type="ctrTitle"/>
+          </p:nvPr>
+        </p:nvSpPr>
+        <p:spPr bwMode="auto">
+          <a:xfrm>
+            <a:off x="1644243" y="2028711"/>
+            <a:ext cx="8345667" cy="1400287"/>
+          </a:xfrm>
+        </p:spPr>
+        <p:txBody>
+          <a:bodyPr>
+            <a:noAutofit/>
+          </a:bodyPr>
+          <a:lstStyle/>
+          <a:p>
+            <a:pPr algn="ctr">
+              <a:defRPr/>
+            </a:pPr>
+            <a:r>
+              <a:rPr lang="ru-RU" sz="3200" b="1">
+                <a:solidFill>
+                  <a:schemeClr val="bg1"/>
+                </a:solidFill>
+              </a:rPr>
+              <a:t>Разработка </a:t>
+            </a:r>
+            <a:r>
+              <a:rPr lang="ru-RU" sz="3200" b="1">
+                <a:solidFill>
+                  <a:schemeClr val="bg1"/>
+                </a:solidFill>
+              </a:rPr>
+              <a:t>ядра упрощенного графического ускорителя. Разработка </a:t>
+            </a:r>
+            <a:r>
+              <a:rPr lang="en-US" sz="3200" b="1">
+                <a:solidFill>
+                  <a:schemeClr val="bg1"/>
+                </a:solidFill>
+              </a:rPr>
+              <a:t>HDL </a:t>
+            </a:r>
+            <a:r>
+              <a:rPr lang="ru-RU" sz="3200" b="1">
+                <a:solidFill>
+                  <a:schemeClr val="bg1"/>
+                </a:solidFill>
+              </a:rPr>
+              <a:t>модели</a:t>
+            </a:r>
+            <a:endParaRPr b="1">
+              <a:solidFill>
+                <a:schemeClr val="bg1"/>
+              </a:solidFill>
+            </a:endParaRPr>
+          </a:p>
+        </p:txBody>
+      </p:sp>
+      <p:sp>
+        <p:nvSpPr>
+          <p:cNvPr id="352170646" name="Подзаголовок 2"/>
+          <p:cNvSpPr>
+            <a:spLocks noGrp="1"/>
+          </p:cNvSpPr>
+          <p:nvPr>
+            <p:ph type="subTitle" idx="1"/>
+          </p:nvPr>
+        </p:nvSpPr>
+        <p:spPr bwMode="auto">
+          <a:xfrm>
+            <a:off x="5817078" y="5093157"/>
+            <a:ext cx="6051235" cy="1241827"/>
+          </a:xfrm>
+        </p:spPr>
+        <p:txBody>
+          <a:bodyPr vertOverflow="overflow" horzOverflow="overflow" vert="horz" wrap="square" lIns="91440" tIns="45720" rIns="91440" bIns="45720" numCol="1" spcCol="0" rtlCol="0" fromWordArt="0" anchor="t" anchorCtr="0" forceAA="0" upright="0" compatLnSpc="0">
+            <a:normAutofit fontScale="55000" lnSpcReduction="9000"/>
+          </a:bodyPr>
+          <a:lstStyle/>
+          <a:p>
+            <a:pPr algn="r">
+              <a:defRPr/>
+            </a:pPr>
+            <a:r>
+              <a:rPr lang="ru-RU">
+                <a:solidFill>
+                  <a:schemeClr val="bg1"/>
+                </a:solidFill>
+              </a:rPr>
+              <a:t>Воронежский Государственный Университет</a:t>
+            </a:r>
+            <a:endParaRPr/>
+          </a:p>
+          <a:p>
+            <a:pPr algn="r">
+              <a:defRPr/>
+            </a:pPr>
+            <a:r>
+              <a:rPr lang="ru-RU">
+                <a:solidFill>
+                  <a:schemeClr val="bg1"/>
+                </a:solidFill>
+              </a:rPr>
+              <a:t>Сделал: студент 2 курса магистратуры 11 группы Старухин Данила Михайлович</a:t>
+            </a:r>
+            <a:endParaRPr/>
+          </a:p>
+          <a:p>
+            <a:pPr algn="r">
+              <a:defRPr/>
+            </a:pPr>
+            <a:r>
+              <a:rPr lang="ru-RU">
+                <a:solidFill>
+                  <a:schemeClr val="bg1"/>
+                </a:solidFill>
+              </a:rPr>
+              <a:t>Руководитель: Авсеева О.В.</a:t>
+            </a:r>
+            <a:endParaRPr/>
+          </a:p>
+          <a:p>
+            <a:pPr algn="r">
+              <a:defRPr/>
+            </a:pPr>
+            <a:r>
+              <a:rPr lang="en-US">
+                <a:solidFill>
+                  <a:schemeClr val="bg1"/>
+                </a:solidFill>
+              </a:rPr>
+              <a:t>e-mail: staruhind@yandex.ru</a:t>
+            </a:r>
+            <a:endParaRPr/>
+          </a:p>
+        </p:txBody>
+      </p:sp>
+      <p:sp>
+        <p:nvSpPr>
+          <p:cNvPr id="693866138" name="Заголовок 1"/>
+          <p:cNvSpPr>
+            <a:spLocks noGrp="1"/>
+          </p:cNvSpPr>
+          <p:nvPr/>
+        </p:nvSpPr>
+        <p:spPr bwMode="auto">
+          <a:xfrm flipH="0" flipV="0">
+            <a:off x="1644243" y="383435"/>
+            <a:ext cx="8345667" cy="766221"/>
+          </a:xfrm>
+        </p:spPr>
+        <p:txBody>
+          <a:bodyPr vert="horz" lIns="91440" tIns="45720" rIns="91440" bIns="45720" rtlCol="0" anchor="b">
+            <a:noAutofit/>
+          </a:bodyPr>
+          <a:lstStyle>
+            <a:lvl1pPr algn="ctr" defTabSz="914400" rtl="0">
+              <a:lnSpc>
+                <a:spcPct val="90000"/>
+              </a:lnSpc>
+              <a:spcBef>
+                <a:spcPts val="0"/>
+              </a:spcBef>
+              <a:buNone/>
+              <a:defRPr sz="6000">
+                <a:solidFill>
+                  <a:schemeClr val="tx1"/>
+                </a:solidFill>
+                <a:latin typeface="+mj-lt"/>
+                <a:ea typeface="+mj-ea"/>
+                <a:cs typeface="+mj-cs"/>
+              </a:defRPr>
+            </a:lvl1pPr>
+          </a:lstStyle>
+          <a:p>
+            <a:pPr>
+              <a:defRPr/>
+            </a:pPr>
+            <a:r>
+              <a:rPr sz="1600" b="0" i="0" u="none">
+                <a:solidFill>
+                  <a:schemeClr val="bg1"/>
+                </a:solidFill>
+                <a:latin typeface="Trebuchet MS"/>
+                <a:ea typeface="Trebuchet MS"/>
+                <a:cs typeface="Trebuchet MS"/>
+              </a:rPr>
+              <a:t>МИНОБРНАУКИ РОССИИ ФЕДЕРАЛЬНОЕ ГОСУДАРСТВЕННОЕ БЮДЖЕТНОЕ ОБРАЗОВАТЕЛЬНОЕ УЧРЕЖДЕНИЕ ВЫСШЕГО ОБРАЗОВАНИЯ «ВОРОНЕЖСКИЙ ГОСУДАРСТВЕННЫЙ УНИВЕРСИТЕТ» (ФГБОУ ВО «ВГУ»)</a:t>
+            </a:r>
+            <a:endParaRPr sz="8000">
+              <a:solidFill>
+                <a:schemeClr val="bg1"/>
+              </a:solidFill>
+              <a:latin typeface="Trebuchet MS"/>
+              <a:cs typeface="Trebuchet MS"/>
+            </a:endParaRPr>
+          </a:p>
+        </p:txBody>
+      </p:sp>
+      <p:sp>
+        <p:nvSpPr>
+          <p:cNvPr id="889558957" name="Заголовок 1"/>
+          <p:cNvSpPr>
+            <a:spLocks noGrp="1"/>
+          </p:cNvSpPr>
+          <p:nvPr/>
+        </p:nvSpPr>
+        <p:spPr bwMode="auto">
+          <a:xfrm flipH="0" flipV="0">
+            <a:off x="1644243" y="1149656"/>
+            <a:ext cx="8345667" cy="766220"/>
+          </a:xfrm>
+        </p:spPr>
+        <p:txBody>
+          <a:bodyPr vert="horz" lIns="91440" tIns="45720" rIns="91440" bIns="45720" rtlCol="0" anchor="b">
+            <a:noAutofit/>
+          </a:bodyPr>
+          <a:lstStyle>
+            <a:lvl1pPr algn="ctr" defTabSz="914400" rtl="0">
+              <a:lnSpc>
+                <a:spcPct val="90000"/>
+              </a:lnSpc>
+              <a:spcBef>
+                <a:spcPts val="0"/>
+              </a:spcBef>
+              <a:buNone/>
+              <a:defRPr sz="6000">
+                <a:solidFill>
+                  <a:schemeClr val="tx1"/>
+                </a:solidFill>
+                <a:latin typeface="+mj-lt"/>
+                <a:ea typeface="+mj-ea"/>
+                <a:cs typeface="+mj-cs"/>
+              </a:defRPr>
+            </a:lvl1pPr>
+          </a:lstStyle>
+          <a:p>
+            <a:pPr>
+              <a:defRPr/>
+            </a:pPr>
+            <a:r>
+              <a:rPr sz="1600" b="0" i="0" u="none">
+                <a:solidFill>
+                  <a:schemeClr val="bg1"/>
+                </a:solidFill>
+                <a:latin typeface="Trebuchet MS"/>
+                <a:ea typeface="Trebuchet MS"/>
+                <a:cs typeface="Trebuchet MS"/>
+              </a:rPr>
+              <a:t>Факультет прикладной математики, информатики и механики Кафедра вычислительной математики и прикладных информационных технологий</a:t>
+            </a:r>
+            <a:endParaRPr sz="8000">
+              <a:solidFill>
+                <a:schemeClr val="bg1"/>
+              </a:solidFill>
+              <a:latin typeface="Trebuchet MS"/>
+              <a:cs typeface="Trebuchet MS"/>
+            </a:endParaRPr>
+          </a:p>
+        </p:txBody>
+      </p:sp>
+      <p:sp>
+        <p:nvSpPr>
+          <p:cNvPr id="708361508" name="Заголовок 1"/>
+          <p:cNvSpPr>
+            <a:spLocks noGrp="1"/>
+          </p:cNvSpPr>
+          <p:nvPr/>
+        </p:nvSpPr>
+        <p:spPr bwMode="auto">
+          <a:xfrm flipH="0" flipV="0">
+            <a:off x="1644243" y="3544760"/>
+            <a:ext cx="8345667" cy="766220"/>
+          </a:xfrm>
+        </p:spPr>
+        <p:txBody>
+          <a:bodyPr vert="horz" lIns="91440" tIns="45720" rIns="91440" bIns="45720" rtlCol="0" anchor="b">
+            <a:noAutofit/>
+          </a:bodyPr>
+          <a:lstStyle>
+            <a:lvl1pPr algn="ctr" defTabSz="914400" rtl="0">
+              <a:lnSpc>
+                <a:spcPct val="90000"/>
+              </a:lnSpc>
+              <a:spcBef>
+                <a:spcPts val="0"/>
+              </a:spcBef>
+              <a:buNone/>
+              <a:defRPr sz="6000">
+                <a:solidFill>
+                  <a:schemeClr val="tx1"/>
+                </a:solidFill>
+                <a:latin typeface="+mj-lt"/>
+                <a:ea typeface="+mj-ea"/>
+                <a:cs typeface="+mj-cs"/>
+              </a:defRPr>
+            </a:lvl1pPr>
+          </a:lstStyle>
+          <a:p>
+            <a:pPr>
+              <a:defRPr/>
+            </a:pPr>
+            <a:r>
+              <a:rPr lang="ru-RU" sz="1600" b="0" i="0" u="none">
+                <a:solidFill>
+                  <a:schemeClr val="bg1"/>
+                </a:solidFill>
+                <a:latin typeface="Trebuchet MS"/>
+                <a:ea typeface="Trebuchet MS"/>
+                <a:cs typeface="Trebuchet MS"/>
+              </a:rPr>
+              <a:t>Магистерская диссертация</a:t>
+            </a:r>
+            <a:endParaRPr lang="ru-RU" sz="1600" b="0" i="0" u="none">
+              <a:solidFill>
+                <a:schemeClr val="bg1"/>
+              </a:solidFill>
+              <a:latin typeface="Trebuchet MS"/>
+              <a:ea typeface="Trebuchet MS"/>
+              <a:cs typeface="Trebuchet MS"/>
+            </a:endParaRPr>
+          </a:p>
+          <a:p>
+            <a:pPr>
+              <a:defRPr/>
+            </a:pPr>
+            <a:r>
+              <a:rPr lang="ru-RU" sz="1600" b="0" i="0" u="none">
+                <a:solidFill>
+                  <a:schemeClr val="bg1"/>
+                </a:solidFill>
+                <a:latin typeface="Trebuchet MS"/>
+                <a:ea typeface="Trebuchet MS"/>
+                <a:cs typeface="Trebuchet MS"/>
+              </a:rPr>
+              <a:t>Направление 01.04.02 Прикладная математика и информатика</a:t>
+            </a:r>
+            <a:endParaRPr lang="ru-RU" sz="1600" b="0" i="0" u="none">
+              <a:solidFill>
+                <a:schemeClr val="bg1"/>
+              </a:solidFill>
+              <a:latin typeface="Trebuchet MS"/>
+              <a:ea typeface="Trebuchet MS"/>
+              <a:cs typeface="Trebuchet MS"/>
+            </a:endParaRPr>
+          </a:p>
+        </p:txBody>
+      </p:sp>
+      <p:sp>
+        <p:nvSpPr>
+          <p:cNvPr id="1500733134" name="Заголовок 1"/>
+          <p:cNvSpPr>
+            <a:spLocks noGrp="1"/>
+          </p:cNvSpPr>
+          <p:nvPr/>
+        </p:nvSpPr>
+        <p:spPr bwMode="auto">
+          <a:xfrm flipH="0" flipV="0">
+            <a:off x="5170877" y="5951875"/>
+            <a:ext cx="1850245" cy="630957"/>
+          </a:xfrm>
+        </p:spPr>
+        <p:txBody>
+          <a:bodyPr vert="horz" lIns="91440" tIns="45720" rIns="91440" bIns="45720" rtlCol="0" anchor="b">
+            <a:noAutofit/>
+          </a:bodyPr>
+          <a:lstStyle>
+            <a:lvl1pPr algn="ctr" defTabSz="914400" rtl="0">
+              <a:lnSpc>
+                <a:spcPct val="90000"/>
+              </a:lnSpc>
+              <a:spcBef>
+                <a:spcPts val="0"/>
+              </a:spcBef>
+              <a:buNone/>
+              <a:defRPr sz="6000">
+                <a:solidFill>
+                  <a:schemeClr val="tx1"/>
+                </a:solidFill>
+                <a:latin typeface="+mj-lt"/>
+                <a:ea typeface="+mj-ea"/>
+                <a:cs typeface="+mj-cs"/>
+              </a:defRPr>
+            </a:lvl1pPr>
+          </a:lstStyle>
+          <a:p>
+            <a:pPr>
+              <a:defRPr/>
+            </a:pPr>
+            <a:r>
+              <a:rPr sz="1600" b="0" i="0" u="none">
+                <a:solidFill>
+                  <a:schemeClr val="bg1"/>
+                </a:solidFill>
+                <a:latin typeface="Trebuchet MS"/>
+                <a:ea typeface="Trebuchet MS"/>
+                <a:cs typeface="Trebuchet MS"/>
+              </a:rPr>
+              <a:t>Воронеж 2026</a:t>
+            </a:r>
+            <a:endParaRPr sz="8000">
+              <a:solidFill>
+                <a:schemeClr val="bg1"/>
+              </a:solidFill>
+              <a:latin typeface="Trebuchet MS"/>
+              <a:cs typeface="Trebuchet MS"/>
             </a:endParaRPr>
           </a:p>
         </p:txBody>
@@ -15328,7 +16270,7 @@
       </p:grpSpPr>
       <p:sp>
         <p:nvSpPr>
-          <p:cNvPr id="1536915693" name="Прямоугольник 4"/>
+          <p:cNvPr id="700935763" name="Прямоугольник 4"/>
           <p:cNvSpPr/>
           <p:nvPr/>
         </p:nvSpPr>
@@ -15378,7 +16320,7 @@
       </p:sp>
       <p:sp>
         <p:nvSpPr>
-          <p:cNvPr id="1041489406" name="Заголовок 1"/>
+          <p:cNvPr id="1074408407" name="Заголовок 1"/>
           <p:cNvSpPr>
             <a:spLocks noGrp="1"/>
           </p:cNvSpPr>
@@ -15388,7 +16330,7 @@
         </p:nvSpPr>
         <p:spPr bwMode="auto">
           <a:xfrm>
-            <a:off x="838200" y="178480"/>
+            <a:off x="838199" y="-21181"/>
             <a:ext cx="10515600" cy="1325563"/>
           </a:xfrm>
         </p:spPr>
@@ -15417,7 +16359,7 @@
       </p:sp>
       <p:sp>
         <p:nvSpPr>
-          <p:cNvPr id="912930153" name="Объект 2"/>
+          <p:cNvPr id="2127714472" name="Объект 2"/>
           <p:cNvSpPr>
             <a:spLocks noGrp="1"/>
           </p:cNvSpPr>
@@ -15551,7 +16493,7 @@
       </p:sp>
       <p:sp>
         <p:nvSpPr>
-          <p:cNvPr id="2143570291" name="Номер слайда 3"/>
+          <p:cNvPr id="1042796111" name="Номер слайда 3"/>
           <p:cNvSpPr>
             <a:spLocks noGrp="1"/>
           </p:cNvSpPr>
@@ -15592,7 +16534,7 @@
       </p:sp>
       <p:sp>
         <p:nvSpPr>
-          <p:cNvPr id="1805127466" name="Прямоугольник 5"/>
+          <p:cNvPr id="136035772" name="Прямоугольник 5"/>
           <p:cNvSpPr/>
           <p:nvPr/>
         </p:nvSpPr>
@@ -15708,7 +16650,7 @@
       </p:grpSpPr>
       <p:sp>
         <p:nvSpPr>
-          <p:cNvPr id="22217447" name="Объект 2"/>
+          <p:cNvPr id="2142498775" name="Объект 2"/>
           <p:cNvSpPr>
             <a:spLocks noGrp="1"/>
           </p:cNvSpPr>
@@ -15874,7 +16816,7 @@
       </p:sp>
       <p:sp>
         <p:nvSpPr>
-          <p:cNvPr id="368936029" name="Номер слайда 3"/>
+          <p:cNvPr id="2137353283" name="Номер слайда 3"/>
           <p:cNvSpPr>
             <a:spLocks noGrp="1"/>
           </p:cNvSpPr>
@@ -15915,7 +16857,7 @@
       </p:sp>
       <p:sp>
         <p:nvSpPr>
-          <p:cNvPr id="558647450" name="Прямоугольник 4"/>
+          <p:cNvPr id="277488781" name="Прямоугольник 4"/>
           <p:cNvSpPr/>
           <p:nvPr/>
         </p:nvSpPr>
@@ -15965,7 +16907,7 @@
       </p:sp>
       <p:sp>
         <p:nvSpPr>
-          <p:cNvPr id="1906672834" name="Заголовок 1"/>
+          <p:cNvPr id="104791586" name="Заголовок 1"/>
           <p:cNvSpPr>
             <a:spLocks noGrp="1"/>
           </p:cNvSpPr>
@@ -16004,7 +16946,7 @@
       </p:sp>
       <p:sp>
         <p:nvSpPr>
-          <p:cNvPr id="469110556" name="Прямоугольник 5"/>
+          <p:cNvPr id="629279921" name="Прямоугольник 5"/>
           <p:cNvSpPr/>
           <p:nvPr/>
         </p:nvSpPr>
@@ -16120,7 +17062,7 @@
       </p:grpSpPr>
       <p:sp>
         <p:nvSpPr>
-          <p:cNvPr id="542753073" name="Объект 2"/>
+          <p:cNvPr id="983339132" name="Объект 2"/>
           <p:cNvSpPr>
             <a:spLocks noGrp="1"/>
           </p:cNvSpPr>
@@ -16233,7 +17175,7 @@
       </p:sp>
       <p:sp>
         <p:nvSpPr>
-          <p:cNvPr id="652467180" name="Номер слайда 3"/>
+          <p:cNvPr id="706007542" name="Номер слайда 3"/>
           <p:cNvSpPr>
             <a:spLocks noGrp="1"/>
           </p:cNvSpPr>
@@ -16274,7 +17216,7 @@
       </p:sp>
       <p:sp>
         <p:nvSpPr>
-          <p:cNvPr id="327575086" name="Прямоугольник 5"/>
+          <p:cNvPr id="1434313078" name="Прямоугольник 5"/>
           <p:cNvSpPr/>
           <p:nvPr/>
         </p:nvSpPr>
@@ -16324,7 +17266,7 @@
       </p:sp>
       <p:sp>
         <p:nvSpPr>
-          <p:cNvPr id="592068979" name="Заголовок 1"/>
+          <p:cNvPr id="1586582149" name="Заголовок 1"/>
           <p:cNvSpPr>
             <a:spLocks noGrp="1"/>
           </p:cNvSpPr>
@@ -16363,7 +17305,7 @@
       </p:sp>
       <p:sp>
         <p:nvSpPr>
-          <p:cNvPr id="2054225186" name="Прямоугольник 6"/>
+          <p:cNvPr id="1463668194" name="Прямоугольник 6"/>
           <p:cNvSpPr/>
           <p:nvPr/>
         </p:nvSpPr>
@@ -16489,7 +17431,7 @@
         </p:nvSpPr>
         <p:spPr bwMode="auto">
           <a:xfrm flipH="0" flipV="0">
-            <a:off x="182075" y="1628766"/>
+            <a:off x="320620" y="1628766"/>
             <a:ext cx="2592336" cy="4864108"/>
           </a:xfrm>
           <a:prstGeom prst="rect">
@@ -16508,7 +17450,7 @@
             </a:pPr>
             <a:r>
               <a:rPr/>
-              <a:t>Работа является общим проектом по теме: разработка ядра упрощенного графического ускорителя</a:t>
+              <a:t>Работа является общим проектом по теме: разработка ядра упрощенного графического ускорителя;</a:t>
             </a:r>
             <a:endParaRPr/>
           </a:p>
@@ -16526,7 +17468,7 @@
             </a:r>
             <a:r>
               <a:rPr lang="ru-RU"/>
-              <a:t>описание ядра упрощенного графического ускорителя</a:t>
+              <a:t>описание ядра упрощенного графического ускорителя.</a:t>
             </a:r>
             <a:endParaRPr/>
           </a:p>
@@ -16732,8 +17674,8 @@
         </p:blipFill>
         <p:spPr bwMode="auto">
           <a:xfrm flipH="0" flipV="0">
-            <a:off x="2988149" y="1979705"/>
-            <a:ext cx="8946183" cy="3922058"/>
+            <a:off x="3328593" y="2135569"/>
+            <a:ext cx="8156721" cy="3575954"/>
           </a:xfrm>
           <a:prstGeom prst="rect">
             <a:avLst/>
@@ -16808,7 +17750,7 @@
       </p:grpSpPr>
       <p:sp>
         <p:nvSpPr>
-          <p:cNvPr id="1048868640" name="Прямоугольник 9"/>
+          <p:cNvPr id="296762033" name="Прямоугольник 9"/>
           <p:cNvSpPr/>
           <p:nvPr/>
         </p:nvSpPr>
@@ -16858,7 +17800,7 @@
       </p:sp>
       <p:sp>
         <p:nvSpPr>
-          <p:cNvPr id="881491857" name="Прямоугольник 10"/>
+          <p:cNvPr id="759620513" name="Прямоугольник 10"/>
           <p:cNvSpPr/>
           <p:nvPr/>
         </p:nvSpPr>
@@ -16908,7 +17850,7 @@
       </p:sp>
       <p:sp>
         <p:nvSpPr>
-          <p:cNvPr id="1570794232" name="Заголовок 1"/>
+          <p:cNvPr id="1722661618" name="Заголовок 1"/>
           <p:cNvSpPr>
             <a:spLocks noGrp="1"/>
           </p:cNvSpPr>
@@ -16970,7 +17912,7 @@
       </p:sp>
       <p:sp>
         <p:nvSpPr>
-          <p:cNvPr id="1394958162" name="Объект 2"/>
+          <p:cNvPr id="1502360217" name="Объект 2"/>
           <p:cNvSpPr>
             <a:spLocks noGrp="1"/>
           </p:cNvSpPr>
@@ -17121,7 +18063,7 @@
       </p:sp>
       <p:sp>
         <p:nvSpPr>
-          <p:cNvPr id="871252132" name="Номер слайда 3"/>
+          <p:cNvPr id="1380640703" name="Номер слайда 3"/>
           <p:cNvSpPr>
             <a:spLocks noGrp="1"/>
           </p:cNvSpPr>
@@ -17162,7 +18104,7 @@
       </p:sp>
       <p:pic>
         <p:nvPicPr>
-          <p:cNvPr id="1192846521" name="Рисунок 7"/>
+          <p:cNvPr id="186628306" name="Рисунок 7"/>
           <p:cNvPicPr>
             <a:picLocks noChangeAspect="1"/>
           </p:cNvPicPr>
@@ -17196,7 +18138,7 @@
       </p:pic>
       <p:pic>
         <p:nvPicPr>
-          <p:cNvPr id="1232751434" name=""/>
+          <p:cNvPr id="1263050474" name=""/>
           <p:cNvPicPr>
             <a:picLocks noChangeAspect="1"/>
           </p:cNvPicPr>
@@ -17292,7 +18234,7 @@
       </p:grpSpPr>
       <p:sp>
         <p:nvSpPr>
-          <p:cNvPr id="1985977684" name="Прямоугольник 9"/>
+          <p:cNvPr id="494590506" name="Прямоугольник 9"/>
           <p:cNvSpPr/>
           <p:nvPr/>
         </p:nvSpPr>
@@ -17342,7 +18284,7 @@
       </p:sp>
       <p:sp>
         <p:nvSpPr>
-          <p:cNvPr id="947805732" name="Прямоугольник 10"/>
+          <p:cNvPr id="609028605" name="Прямоугольник 10"/>
           <p:cNvSpPr/>
           <p:nvPr/>
         </p:nvSpPr>
@@ -17392,7 +18334,7 @@
       </p:sp>
       <p:sp>
         <p:nvSpPr>
-          <p:cNvPr id="2013633170" name="Заголовок 1"/>
+          <p:cNvPr id="1006492301" name="Заголовок 1"/>
           <p:cNvSpPr>
             <a:spLocks noGrp="1"/>
           </p:cNvSpPr>
@@ -17454,7 +18396,7 @@
       </p:sp>
       <p:sp>
         <p:nvSpPr>
-          <p:cNvPr id="149897325" name="Объект 2"/>
+          <p:cNvPr id="659508379" name="Объект 2"/>
           <p:cNvSpPr>
             <a:spLocks noGrp="1"/>
           </p:cNvSpPr>
@@ -17559,7 +18501,7 @@
       </p:sp>
       <p:sp>
         <p:nvSpPr>
-          <p:cNvPr id="1779205059" name="Номер слайда 3"/>
+          <p:cNvPr id="1737458157" name="Номер слайда 3"/>
           <p:cNvSpPr>
             <a:spLocks noGrp="1"/>
           </p:cNvSpPr>
@@ -17600,7 +18542,7 @@
       </p:sp>
       <p:pic>
         <p:nvPicPr>
-          <p:cNvPr id="1409452169" name="Рисунок 5"/>
+          <p:cNvPr id="949809153" name="Рисунок 5"/>
           <p:cNvPicPr>
             <a:picLocks noChangeAspect="1"/>
           </p:cNvPicPr>
@@ -17701,7 +18643,7 @@
       </p:grpSpPr>
       <p:sp>
         <p:nvSpPr>
-          <p:cNvPr id="4483213" name="Объект 2"/>
+          <p:cNvPr id="1517323705" name="Объект 2"/>
           <p:cNvSpPr>
             <a:spLocks noGrp="1"/>
           </p:cNvSpPr>
@@ -17772,7 +18714,7 @@
       </p:sp>
       <p:sp>
         <p:nvSpPr>
-          <p:cNvPr id="904480107" name="Номер слайда 3"/>
+          <p:cNvPr id="1920413033" name="Номер слайда 3"/>
           <p:cNvSpPr>
             <a:spLocks noGrp="1"/>
           </p:cNvSpPr>
@@ -17813,7 +18755,7 @@
       </p:sp>
       <p:pic>
         <p:nvPicPr>
-          <p:cNvPr id="1983175843" name="Рисунок 5"/>
+          <p:cNvPr id="1276716197" name="Рисунок 5"/>
           <p:cNvPicPr>
             <a:picLocks noChangeAspect="1"/>
           </p:cNvPicPr>
@@ -17843,7 +18785,7 @@
       </p:pic>
       <p:pic>
         <p:nvPicPr>
-          <p:cNvPr id="2082847302" name="Рисунок 1421075015"/>
+          <p:cNvPr id="1375227130" name="Рисунок 1421075015"/>
           <p:cNvPicPr>
             <a:picLocks noChangeAspect="1"/>
           </p:cNvPicPr>
@@ -17878,7 +18820,7 @@
       </p:pic>
       <p:sp>
         <p:nvSpPr>
-          <p:cNvPr id="606452157" name="Прямоугольник 10"/>
+          <p:cNvPr id="1419657390" name="Прямоугольник 10"/>
           <p:cNvSpPr/>
           <p:nvPr/>
         </p:nvSpPr>
@@ -17928,7 +18870,7 @@
       </p:sp>
       <p:sp>
         <p:nvSpPr>
-          <p:cNvPr id="1733975431" name="Прямоугольник 11"/>
+          <p:cNvPr id="927609044" name="Прямоугольник 11"/>
           <p:cNvSpPr/>
           <p:nvPr/>
         </p:nvSpPr>
@@ -17978,7 +18920,7 @@
       </p:sp>
       <p:sp>
         <p:nvSpPr>
-          <p:cNvPr id="487439328" name="Заголовок 1"/>
+          <p:cNvPr id="699473213" name="Заголовок 1"/>
           <p:cNvSpPr>
             <a:spLocks noGrp="1"/>
           </p:cNvSpPr>
@@ -18027,7 +18969,7 @@
       </p:sp>
       <p:pic>
         <p:nvPicPr>
-          <p:cNvPr id="109469017" name="Рисунок 2"/>
+          <p:cNvPr id="1620540191" name="Рисунок 2"/>
           <p:cNvPicPr>
             <a:picLocks noChangeAspect="1"/>
           </p:cNvPicPr>
@@ -18055,7 +18997,7 @@
       </p:pic>
       <p:pic>
         <p:nvPicPr>
-          <p:cNvPr id="89087981" name=""/>
+          <p:cNvPr id="203531627" name=""/>
           <p:cNvPicPr>
             <a:picLocks noChangeAspect="1"/>
           </p:cNvPicPr>
@@ -18087,8 +19029,8 @@
         <p:nvCxnSpPr>
           <p:cNvPr id="1150155137" name=""/>
           <p:cNvCxnSpPr>
-            <a:stCxn id="1983175843" idx="3"/>
-            <a:endCxn id="109469017" idx="1"/>
+            <a:stCxn id="1276716197" idx="3"/>
+            <a:endCxn id="1620540191" idx="1"/>
           </p:cNvCxnSpPr>
           <p:nvPr/>
         </p:nvCxnSpPr>
@@ -18130,8 +19072,8 @@
         <p:nvCxnSpPr>
           <p:cNvPr id="953161365" name=""/>
           <p:cNvCxnSpPr>
-            <a:stCxn id="1983175843" idx="3"/>
-            <a:endCxn id="2082847302" idx="2"/>
+            <a:stCxn id="1276716197" idx="3"/>
+            <a:endCxn id="1375227130" idx="2"/>
           </p:cNvCxnSpPr>
           <p:nvPr/>
         </p:nvCxnSpPr>
@@ -18173,8 +19115,8 @@
         <p:nvCxnSpPr>
           <p:cNvPr id="1000365914" name=""/>
           <p:cNvCxnSpPr>
-            <a:stCxn id="89087981" idx="3"/>
-            <a:endCxn id="2082847302" idx="1"/>
+            <a:stCxn id="203531627" idx="3"/>
+            <a:endCxn id="1375227130" idx="1"/>
           </p:cNvCxnSpPr>
           <p:nvPr/>
         </p:nvCxnSpPr>
@@ -18216,8 +19158,8 @@
         <p:nvCxnSpPr>
           <p:cNvPr id="799810659" name=""/>
           <p:cNvCxnSpPr>
-            <a:stCxn id="89087981" idx="3"/>
-            <a:endCxn id="109469017" idx="0"/>
+            <a:stCxn id="203531627" idx="3"/>
+            <a:endCxn id="1620540191" idx="0"/>
           </p:cNvCxnSpPr>
           <p:nvPr/>
         </p:nvCxnSpPr>
@@ -18323,7 +19265,7 @@
       </p:grpSpPr>
       <p:sp>
         <p:nvSpPr>
-          <p:cNvPr id="1180795162" name="Объект 2"/>
+          <p:cNvPr id="2080250404" name="Объект 2"/>
           <p:cNvSpPr>
             <a:spLocks noGrp="1"/>
           </p:cNvSpPr>
@@ -18462,7 +19404,7 @@
       </p:sp>
       <p:sp>
         <p:nvSpPr>
-          <p:cNvPr id="409630572" name="Номер слайда 3"/>
+          <p:cNvPr id="673810560" name="Номер слайда 3"/>
           <p:cNvSpPr>
             <a:spLocks noGrp="1"/>
           </p:cNvSpPr>
@@ -18503,7 +19445,7 @@
       </p:sp>
       <p:sp>
         <p:nvSpPr>
-          <p:cNvPr id="1957135082" name="Прямоугольник 5"/>
+          <p:cNvPr id="1069022113" name="Прямоугольник 5"/>
           <p:cNvSpPr/>
           <p:nvPr/>
         </p:nvSpPr>
@@ -18553,7 +19495,7 @@
       </p:sp>
       <p:sp>
         <p:nvSpPr>
-          <p:cNvPr id="2107844844" name="Прямоугольник 6"/>
+          <p:cNvPr id="1714461096" name="Прямоугольник 6"/>
           <p:cNvSpPr/>
           <p:nvPr/>
         </p:nvSpPr>
@@ -18603,7 +19545,7 @@
       </p:sp>
       <p:sp>
         <p:nvSpPr>
-          <p:cNvPr id="1554530214" name="Заголовок 1"/>
+          <p:cNvPr id="1364298097" name="Заголовок 1"/>
           <p:cNvSpPr>
             <a:spLocks noGrp="1"/>
           </p:cNvSpPr>
@@ -18655,7 +19597,7 @@
       </p:sp>
       <p:pic>
         <p:nvPicPr>
-          <p:cNvPr id="1986150859" name=""/>
+          <p:cNvPr id="1213647715" name=""/>
           <p:cNvPicPr>
             <a:picLocks noChangeAspect="1"/>
           </p:cNvPicPr>
@@ -18673,8 +19615,8 @@
         </p:blipFill>
         <p:spPr bwMode="auto">
           <a:xfrm flipH="0" flipV="0">
-            <a:off x="5695574" y="1406524"/>
-            <a:ext cx="5915233" cy="5375733"/>
+            <a:off x="5603317" y="1473409"/>
+            <a:ext cx="5766954" cy="5249527"/>
           </a:xfrm>
           <a:prstGeom prst="rect">
             <a:avLst/>

--- a/docs/starukhin_dissertation/magister_pres.pptx
+++ b/docs/starukhin_dissertation/magister_pres.pptx
@@ -151,7 +151,7 @@
       </p:grpSpPr>
       <p:sp>
         <p:nvSpPr>
-          <p:cNvPr id="1126395799" name="Верхний колонтитул 1"/>
+          <p:cNvPr id="861447053" name="Верхний колонтитул 1"/>
           <p:cNvSpPr>
             <a:spLocks noGrp="1"/>
           </p:cNvSpPr>
@@ -185,7 +185,7 @@
       </p:sp>
       <p:sp>
         <p:nvSpPr>
-          <p:cNvPr id="893809610" name="Дата 2"/>
+          <p:cNvPr id="725398542" name="Дата 2"/>
           <p:cNvSpPr>
             <a:spLocks noGrp="1"/>
           </p:cNvSpPr>
@@ -223,7 +223,7 @@
       </p:sp>
       <p:sp>
         <p:nvSpPr>
-          <p:cNvPr id="783958055" name="Образ слайда 3"/>
+          <p:cNvPr id="904706316" name="Образ слайда 3"/>
           <p:cNvSpPr>
             <a:spLocks noChangeAspect="1" noGrp="1" noRot="1"/>
           </p:cNvSpPr>
@@ -259,7 +259,7 @@
       </p:sp>
       <p:sp>
         <p:nvSpPr>
-          <p:cNvPr id="1423181241" name="Заметки 4"/>
+          <p:cNvPr id="1089257951" name="Заметки 4"/>
           <p:cNvSpPr>
             <a:spLocks noGrp="1"/>
           </p:cNvSpPr>
@@ -333,7 +333,7 @@
       </p:sp>
       <p:sp>
         <p:nvSpPr>
-          <p:cNvPr id="1679632732" name="Нижний колонтитул 5"/>
+          <p:cNvPr id="1687356465" name="Нижний колонтитул 5"/>
           <p:cNvSpPr>
             <a:spLocks noGrp="1"/>
           </p:cNvSpPr>
@@ -367,7 +367,7 @@
       </p:sp>
       <p:sp>
         <p:nvSpPr>
-          <p:cNvPr id="142787384" name="Номер слайда 6"/>
+          <p:cNvPr id="1970450285" name="Номер слайда 6"/>
           <p:cNvSpPr>
             <a:spLocks noGrp="1"/>
           </p:cNvSpPr>
@@ -520,7 +520,7 @@
       </p:grpSpPr>
       <p:sp>
         <p:nvSpPr>
-          <p:cNvPr id="567902080" name="Slide Image Placeholder 1"/>
+          <p:cNvPr id="1176383874" name="Slide Image Placeholder 1"/>
           <p:cNvSpPr>
             <a:spLocks noChangeAspect="1" noGrp="1" noRot="1"/>
           </p:cNvSpPr>
@@ -532,7 +532,7 @@
       </p:sp>
       <p:sp>
         <p:nvSpPr>
-          <p:cNvPr id="142545383" name="Notes Placeholder 2"/>
+          <p:cNvPr id="383589639" name="Notes Placeholder 2"/>
           <p:cNvSpPr>
             <a:spLocks noGrp="1"/>
           </p:cNvSpPr>
@@ -554,7 +554,7 @@
       </p:sp>
       <p:sp>
         <p:nvSpPr>
-          <p:cNvPr id="21211330" name="Slide Number Placeholder 3"/>
+          <p:cNvPr id="442896309" name="Slide Number Placeholder 3"/>
           <p:cNvSpPr>
             <a:spLocks noGrp="1"/>
           </p:cNvSpPr>
@@ -605,7 +605,7 @@
       </p:grpSpPr>
       <p:sp>
         <p:nvSpPr>
-          <p:cNvPr id="1532364270" name="Slide Image Placeholder 1"/>
+          <p:cNvPr id="1844303156" name="Slide Image Placeholder 1"/>
           <p:cNvSpPr>
             <a:spLocks noChangeAspect="1" noGrp="1" noRot="1"/>
           </p:cNvSpPr>
@@ -617,7 +617,7 @@
       </p:sp>
       <p:sp>
         <p:nvSpPr>
-          <p:cNvPr id="1539798233" name="Notes Placeholder 2"/>
+          <p:cNvPr id="231162881" name="Notes Placeholder 2"/>
           <p:cNvSpPr>
             <a:spLocks noGrp="1"/>
           </p:cNvSpPr>
@@ -639,7 +639,7 @@
       </p:sp>
       <p:sp>
         <p:nvSpPr>
-          <p:cNvPr id="1084836597" name="Slide Number Placeholder 3"/>
+          <p:cNvPr id="599922468" name="Slide Number Placeholder 3"/>
           <p:cNvSpPr>
             <a:spLocks noGrp="1"/>
           </p:cNvSpPr>
@@ -690,7 +690,7 @@
       </p:grpSpPr>
       <p:sp>
         <p:nvSpPr>
-          <p:cNvPr id="1752815374" name="Slide Image Placeholder 1"/>
+          <p:cNvPr id="1360746033" name="Slide Image Placeholder 1"/>
           <p:cNvSpPr>
             <a:spLocks noChangeAspect="1" noGrp="1" noRot="1"/>
           </p:cNvSpPr>
@@ -702,7 +702,7 @@
       </p:sp>
       <p:sp>
         <p:nvSpPr>
-          <p:cNvPr id="549803960" name="Notes Placeholder 2"/>
+          <p:cNvPr id="508495723" name="Notes Placeholder 2"/>
           <p:cNvSpPr>
             <a:spLocks noGrp="1"/>
           </p:cNvSpPr>
@@ -724,7 +724,7 @@
       </p:sp>
       <p:sp>
         <p:nvSpPr>
-          <p:cNvPr id="1192721116" name="Slide Number Placeholder 3"/>
+          <p:cNvPr id="487905151" name="Slide Number Placeholder 3"/>
           <p:cNvSpPr>
             <a:spLocks noGrp="1"/>
           </p:cNvSpPr>
@@ -775,7 +775,7 @@
       </p:grpSpPr>
       <p:sp>
         <p:nvSpPr>
-          <p:cNvPr id="1604845010" name="Slide Image Placeholder 1"/>
+          <p:cNvPr id="1446248241" name="Slide Image Placeholder 1"/>
           <p:cNvSpPr>
             <a:spLocks noChangeAspect="1" noGrp="1" noRot="1"/>
           </p:cNvSpPr>
@@ -787,7 +787,7 @@
       </p:sp>
       <p:sp>
         <p:nvSpPr>
-          <p:cNvPr id="825463307" name="Notes Placeholder 2"/>
+          <p:cNvPr id="648139380" name="Notes Placeholder 2"/>
           <p:cNvSpPr>
             <a:spLocks noGrp="1"/>
           </p:cNvSpPr>
@@ -809,7 +809,7 @@
       </p:sp>
       <p:sp>
         <p:nvSpPr>
-          <p:cNvPr id="1217655388" name="Slide Number Placeholder 3"/>
+          <p:cNvPr id="2043642903" name="Slide Number Placeholder 3"/>
           <p:cNvSpPr>
             <a:spLocks noGrp="1"/>
           </p:cNvSpPr>
@@ -860,7 +860,7 @@
       </p:grpSpPr>
       <p:sp>
         <p:nvSpPr>
-          <p:cNvPr id="1269053467" name="Slide Image Placeholder 1"/>
+          <p:cNvPr id="748108435" name="Slide Image Placeholder 1"/>
           <p:cNvSpPr>
             <a:spLocks noChangeAspect="1" noGrp="1" noRot="1"/>
           </p:cNvSpPr>
@@ -872,7 +872,7 @@
       </p:sp>
       <p:sp>
         <p:nvSpPr>
-          <p:cNvPr id="144882064" name="Notes Placeholder 2"/>
+          <p:cNvPr id="373351338" name="Notes Placeholder 2"/>
           <p:cNvSpPr>
             <a:spLocks noGrp="1"/>
           </p:cNvSpPr>
@@ -894,7 +894,7 @@
       </p:sp>
       <p:sp>
         <p:nvSpPr>
-          <p:cNvPr id="1482747105" name="Slide Number Placeholder 3"/>
+          <p:cNvPr id="1399785132" name="Slide Number Placeholder 3"/>
           <p:cNvSpPr>
             <a:spLocks noGrp="1"/>
           </p:cNvSpPr>
@@ -945,7 +945,7 @@
       </p:grpSpPr>
       <p:sp>
         <p:nvSpPr>
-          <p:cNvPr id="922701654" name="Slide Image Placeholder 1"/>
+          <p:cNvPr id="1210414645" name="Slide Image Placeholder 1"/>
           <p:cNvSpPr>
             <a:spLocks noChangeAspect="1" noGrp="1" noRot="1"/>
           </p:cNvSpPr>
@@ -957,7 +957,7 @@
       </p:sp>
       <p:sp>
         <p:nvSpPr>
-          <p:cNvPr id="496126638" name="Notes Placeholder 2"/>
+          <p:cNvPr id="1698323830" name="Notes Placeholder 2"/>
           <p:cNvSpPr>
             <a:spLocks noGrp="1"/>
           </p:cNvSpPr>
@@ -979,7 +979,7 @@
       </p:sp>
       <p:sp>
         <p:nvSpPr>
-          <p:cNvPr id="975537664" name="Slide Number Placeholder 3"/>
+          <p:cNvPr id="1562455965" name="Slide Number Placeholder 3"/>
           <p:cNvSpPr>
             <a:spLocks noGrp="1"/>
           </p:cNvSpPr>
@@ -1030,7 +1030,7 @@
       </p:grpSpPr>
       <p:sp>
         <p:nvSpPr>
-          <p:cNvPr id="2076191163" name="Slide Image Placeholder 1"/>
+          <p:cNvPr id="1442240051" name="Slide Image Placeholder 1"/>
           <p:cNvSpPr>
             <a:spLocks noChangeAspect="1" noGrp="1" noRot="1"/>
           </p:cNvSpPr>
@@ -1042,7 +1042,7 @@
       </p:sp>
       <p:sp>
         <p:nvSpPr>
-          <p:cNvPr id="1268017586" name="Notes Placeholder 2"/>
+          <p:cNvPr id="1063744653" name="Notes Placeholder 2"/>
           <p:cNvSpPr>
             <a:spLocks noGrp="1"/>
           </p:cNvSpPr>
@@ -1064,7 +1064,7 @@
       </p:sp>
       <p:sp>
         <p:nvSpPr>
-          <p:cNvPr id="523570005" name="Slide Number Placeholder 3"/>
+          <p:cNvPr id="49037459" name="Slide Number Placeholder 3"/>
           <p:cNvSpPr>
             <a:spLocks noGrp="1"/>
           </p:cNvSpPr>
@@ -1115,7 +1115,7 @@
       </p:grpSpPr>
       <p:sp>
         <p:nvSpPr>
-          <p:cNvPr id="1205505234" name="Slide Image Placeholder 1"/>
+          <p:cNvPr id="1629091729" name="Slide Image Placeholder 1"/>
           <p:cNvSpPr>
             <a:spLocks noChangeAspect="1" noGrp="1" noRot="1"/>
           </p:cNvSpPr>
@@ -1127,7 +1127,7 @@
       </p:sp>
       <p:sp>
         <p:nvSpPr>
-          <p:cNvPr id="1376835201" name="Notes Placeholder 2"/>
+          <p:cNvPr id="520105219" name="Notes Placeholder 2"/>
           <p:cNvSpPr>
             <a:spLocks noGrp="1"/>
           </p:cNvSpPr>
@@ -1149,7 +1149,7 @@
       </p:sp>
       <p:sp>
         <p:nvSpPr>
-          <p:cNvPr id="1987228138" name="Slide Number Placeholder 3"/>
+          <p:cNvPr id="1884189682" name="Slide Number Placeholder 3"/>
           <p:cNvSpPr>
             <a:spLocks noGrp="1"/>
           </p:cNvSpPr>
@@ -1200,7 +1200,7 @@
       </p:grpSpPr>
       <p:sp>
         <p:nvSpPr>
-          <p:cNvPr id="2119051406" name="Slide Image Placeholder 1"/>
+          <p:cNvPr id="579814954" name="Slide Image Placeholder 1"/>
           <p:cNvSpPr>
             <a:spLocks noChangeAspect="1" noGrp="1" noRot="1"/>
           </p:cNvSpPr>
@@ -1212,7 +1212,7 @@
       </p:sp>
       <p:sp>
         <p:nvSpPr>
-          <p:cNvPr id="1144695736" name="Notes Placeholder 2"/>
+          <p:cNvPr id="965124091" name="Notes Placeholder 2"/>
           <p:cNvSpPr>
             <a:spLocks noGrp="1"/>
           </p:cNvSpPr>
@@ -1234,7 +1234,7 @@
       </p:sp>
       <p:sp>
         <p:nvSpPr>
-          <p:cNvPr id="1262870708" name="Slide Number Placeholder 3"/>
+          <p:cNvPr id="703261554" name="Slide Number Placeholder 3"/>
           <p:cNvSpPr>
             <a:spLocks noGrp="1"/>
           </p:cNvSpPr>
@@ -1285,7 +1285,7 @@
       </p:grpSpPr>
       <p:sp>
         <p:nvSpPr>
-          <p:cNvPr id="821583980" name="Slide Image Placeholder 1"/>
+          <p:cNvPr id="1467559802" name="Slide Image Placeholder 1"/>
           <p:cNvSpPr>
             <a:spLocks noChangeAspect="1" noGrp="1" noRot="1"/>
           </p:cNvSpPr>
@@ -1297,7 +1297,7 @@
       </p:sp>
       <p:sp>
         <p:nvSpPr>
-          <p:cNvPr id="119467836" name="Notes Placeholder 2"/>
+          <p:cNvPr id="1176631659" name="Notes Placeholder 2"/>
           <p:cNvSpPr>
             <a:spLocks noGrp="1"/>
           </p:cNvSpPr>
@@ -1319,7 +1319,7 @@
       </p:sp>
       <p:sp>
         <p:nvSpPr>
-          <p:cNvPr id="875830894" name="Slide Number Placeholder 3"/>
+          <p:cNvPr id="1311754721" name="Slide Number Placeholder 3"/>
           <p:cNvSpPr>
             <a:spLocks noGrp="1"/>
           </p:cNvSpPr>
@@ -1370,7 +1370,7 @@
       </p:grpSpPr>
       <p:sp>
         <p:nvSpPr>
-          <p:cNvPr id="1302970166" name="Slide Image Placeholder 1"/>
+          <p:cNvPr id="128642517" name="Slide Image Placeholder 1"/>
           <p:cNvSpPr>
             <a:spLocks noChangeAspect="1" noGrp="1" noRot="1"/>
           </p:cNvSpPr>
@@ -1382,7 +1382,7 @@
       </p:sp>
       <p:sp>
         <p:nvSpPr>
-          <p:cNvPr id="1560526699" name="Notes Placeholder 2"/>
+          <p:cNvPr id="1251892049" name="Notes Placeholder 2"/>
           <p:cNvSpPr>
             <a:spLocks noGrp="1"/>
           </p:cNvSpPr>
@@ -1404,7 +1404,7 @@
       </p:sp>
       <p:sp>
         <p:nvSpPr>
-          <p:cNvPr id="1542511720" name="Slide Number Placeholder 3"/>
+          <p:cNvPr id="32319566" name="Slide Number Placeholder 3"/>
           <p:cNvSpPr>
             <a:spLocks noGrp="1"/>
           </p:cNvSpPr>
@@ -1455,7 +1455,7 @@
       </p:grpSpPr>
       <p:sp>
         <p:nvSpPr>
-          <p:cNvPr id="1838805396" name="Slide Image Placeholder 1"/>
+          <p:cNvPr id="1519603960" name="Slide Image Placeholder 1"/>
           <p:cNvSpPr>
             <a:spLocks noChangeAspect="1" noGrp="1" noRot="1"/>
           </p:cNvSpPr>
@@ -1467,7 +1467,7 @@
       </p:sp>
       <p:sp>
         <p:nvSpPr>
-          <p:cNvPr id="397081443" name="Notes Placeholder 2"/>
+          <p:cNvPr id="62414314" name="Notes Placeholder 2"/>
           <p:cNvSpPr>
             <a:spLocks noGrp="1"/>
           </p:cNvSpPr>
@@ -1489,7 +1489,7 @@
       </p:sp>
       <p:sp>
         <p:nvSpPr>
-          <p:cNvPr id="927862397" name="Slide Number Placeholder 3"/>
+          <p:cNvPr id="1696586852" name="Slide Number Placeholder 3"/>
           <p:cNvSpPr>
             <a:spLocks noGrp="1"/>
           </p:cNvSpPr>
@@ -1540,7 +1540,7 @@
       </p:grpSpPr>
       <p:sp>
         <p:nvSpPr>
-          <p:cNvPr id="328187369" name="Slide Image Placeholder 1"/>
+          <p:cNvPr id="1154723301" name="Slide Image Placeholder 1"/>
           <p:cNvSpPr>
             <a:spLocks noChangeAspect="1" noGrp="1" noRot="1"/>
           </p:cNvSpPr>
@@ -1552,7 +1552,7 @@
       </p:sp>
       <p:sp>
         <p:nvSpPr>
-          <p:cNvPr id="1339887662" name="Notes Placeholder 2"/>
+          <p:cNvPr id="1005547640" name="Notes Placeholder 2"/>
           <p:cNvSpPr>
             <a:spLocks noGrp="1"/>
           </p:cNvSpPr>
@@ -1574,7 +1574,7 @@
       </p:sp>
       <p:sp>
         <p:nvSpPr>
-          <p:cNvPr id="1022034553" name="Slide Number Placeholder 3"/>
+          <p:cNvPr id="1628232333" name="Slide Number Placeholder 3"/>
           <p:cNvSpPr>
             <a:spLocks noGrp="1"/>
           </p:cNvSpPr>
@@ -1625,7 +1625,7 @@
       </p:grpSpPr>
       <p:sp>
         <p:nvSpPr>
-          <p:cNvPr id="954195659" name="Slide Image Placeholder 1"/>
+          <p:cNvPr id="694017208" name="Slide Image Placeholder 1"/>
           <p:cNvSpPr>
             <a:spLocks noChangeAspect="1" noGrp="1" noRot="1"/>
           </p:cNvSpPr>
@@ -1637,7 +1637,7 @@
       </p:sp>
       <p:sp>
         <p:nvSpPr>
-          <p:cNvPr id="333068556" name="Notes Placeholder 2"/>
+          <p:cNvPr id="719057232" name="Notes Placeholder 2"/>
           <p:cNvSpPr>
             <a:spLocks noGrp="1"/>
           </p:cNvSpPr>
@@ -1659,7 +1659,7 @@
       </p:sp>
       <p:sp>
         <p:nvSpPr>
-          <p:cNvPr id="1233805774" name="Slide Number Placeholder 3"/>
+          <p:cNvPr id="357259447" name="Slide Number Placeholder 3"/>
           <p:cNvSpPr>
             <a:spLocks noGrp="1"/>
           </p:cNvSpPr>
@@ -1710,7 +1710,7 @@
       </p:grpSpPr>
       <p:sp>
         <p:nvSpPr>
-          <p:cNvPr id="1033307967" name="Slide Image Placeholder 1"/>
+          <p:cNvPr id="585751420" name="Slide Image Placeholder 1"/>
           <p:cNvSpPr>
             <a:spLocks noChangeAspect="1" noGrp="1" noRot="1"/>
           </p:cNvSpPr>
@@ -1722,7 +1722,7 @@
       </p:sp>
       <p:sp>
         <p:nvSpPr>
-          <p:cNvPr id="52044889" name="Notes Placeholder 2"/>
+          <p:cNvPr id="462206312" name="Notes Placeholder 2"/>
           <p:cNvSpPr>
             <a:spLocks noGrp="1"/>
           </p:cNvSpPr>
@@ -1744,7 +1744,7 @@
       </p:sp>
       <p:sp>
         <p:nvSpPr>
-          <p:cNvPr id="2028409336" name="Slide Number Placeholder 3"/>
+          <p:cNvPr id="1955038052" name="Slide Number Placeholder 3"/>
           <p:cNvSpPr>
             <a:spLocks noGrp="1"/>
           </p:cNvSpPr>
@@ -1795,7 +1795,7 @@
       </p:grpSpPr>
       <p:sp>
         <p:nvSpPr>
-          <p:cNvPr id="1851965187" name="Slide Image Placeholder 1"/>
+          <p:cNvPr id="1119514018" name="Slide Image Placeholder 1"/>
           <p:cNvSpPr>
             <a:spLocks noChangeAspect="1" noGrp="1" noRot="1"/>
           </p:cNvSpPr>
@@ -1807,7 +1807,7 @@
       </p:sp>
       <p:sp>
         <p:nvSpPr>
-          <p:cNvPr id="119313565" name="Notes Placeholder 2"/>
+          <p:cNvPr id="1597759935" name="Notes Placeholder 2"/>
           <p:cNvSpPr>
             <a:spLocks noGrp="1"/>
           </p:cNvSpPr>
@@ -1829,7 +1829,7 @@
       </p:sp>
       <p:sp>
         <p:nvSpPr>
-          <p:cNvPr id="1103514434" name="Slide Number Placeholder 3"/>
+          <p:cNvPr id="1982224231" name="Slide Number Placeholder 3"/>
           <p:cNvSpPr>
             <a:spLocks noGrp="1"/>
           </p:cNvSpPr>
@@ -1880,7 +1880,7 @@
       </p:grpSpPr>
       <p:sp>
         <p:nvSpPr>
-          <p:cNvPr id="2054534315" name="Slide Image Placeholder 1"/>
+          <p:cNvPr id="1744523828" name="Slide Image Placeholder 1"/>
           <p:cNvSpPr>
             <a:spLocks noChangeAspect="1" noGrp="1" noRot="1"/>
           </p:cNvSpPr>
@@ -1892,7 +1892,7 @@
       </p:sp>
       <p:sp>
         <p:nvSpPr>
-          <p:cNvPr id="2079842227" name="Notes Placeholder 2"/>
+          <p:cNvPr id="348004285" name="Notes Placeholder 2"/>
           <p:cNvSpPr>
             <a:spLocks noGrp="1"/>
           </p:cNvSpPr>
@@ -1914,7 +1914,7 @@
       </p:sp>
       <p:sp>
         <p:nvSpPr>
-          <p:cNvPr id="247289998" name="Slide Number Placeholder 3"/>
+          <p:cNvPr id="1428988834" name="Slide Number Placeholder 3"/>
           <p:cNvSpPr>
             <a:spLocks noGrp="1"/>
           </p:cNvSpPr>
@@ -1965,7 +1965,7 @@
       </p:grpSpPr>
       <p:sp>
         <p:nvSpPr>
-          <p:cNvPr id="650865050" name="Slide Image Placeholder 1"/>
+          <p:cNvPr id="1929082166" name="Slide Image Placeholder 1"/>
           <p:cNvSpPr>
             <a:spLocks noChangeAspect="1" noGrp="1" noRot="1"/>
           </p:cNvSpPr>
@@ -1977,7 +1977,7 @@
       </p:sp>
       <p:sp>
         <p:nvSpPr>
-          <p:cNvPr id="822075055" name="Notes Placeholder 2"/>
+          <p:cNvPr id="103094433" name="Notes Placeholder 2"/>
           <p:cNvSpPr>
             <a:spLocks noGrp="1"/>
           </p:cNvSpPr>
@@ -1999,7 +1999,7 @@
       </p:sp>
       <p:sp>
         <p:nvSpPr>
-          <p:cNvPr id="458887736" name="Slide Number Placeholder 3"/>
+          <p:cNvPr id="1042299724" name="Slide Number Placeholder 3"/>
           <p:cNvSpPr>
             <a:spLocks noGrp="1"/>
           </p:cNvSpPr>
@@ -2050,7 +2050,7 @@
       </p:grpSpPr>
       <p:sp>
         <p:nvSpPr>
-          <p:cNvPr id="1783363823" name="Заголовок 1"/>
+          <p:cNvPr id="1476223654" name="Заголовок 1"/>
           <p:cNvSpPr>
             <a:spLocks noGrp="1"/>
           </p:cNvSpPr>
@@ -2085,7 +2085,7 @@
       </p:sp>
       <p:sp>
         <p:nvSpPr>
-          <p:cNvPr id="2086414785" name="Подзаголовок 2"/>
+          <p:cNvPr id="1468853472" name="Подзаголовок 2"/>
           <p:cNvSpPr>
             <a:spLocks noGrp="1"/>
           </p:cNvSpPr>
@@ -2153,7 +2153,7 @@
       </p:sp>
       <p:sp>
         <p:nvSpPr>
-          <p:cNvPr id="882137897" name="Дата 3"/>
+          <p:cNvPr id="365602764" name="Дата 3"/>
           <p:cNvSpPr>
             <a:spLocks noGrp="1"/>
           </p:cNvSpPr>
@@ -2179,7 +2179,7 @@
       </p:sp>
       <p:sp>
         <p:nvSpPr>
-          <p:cNvPr id="409071911" name="Нижний колонтитул 4"/>
+          <p:cNvPr id="355162924" name="Нижний колонтитул 4"/>
           <p:cNvSpPr>
             <a:spLocks noGrp="1"/>
           </p:cNvSpPr>
@@ -2201,7 +2201,7 @@
       </p:sp>
       <p:sp>
         <p:nvSpPr>
-          <p:cNvPr id="544941944" name="Номер слайда 5"/>
+          <p:cNvPr id="885071683" name="Номер слайда 5"/>
           <p:cNvSpPr>
             <a:spLocks noGrp="1"/>
           </p:cNvSpPr>
@@ -2252,7 +2252,7 @@
       </p:grpSpPr>
       <p:sp>
         <p:nvSpPr>
-          <p:cNvPr id="307537153" name="Заголовок 1"/>
+          <p:cNvPr id="2131441616" name="Заголовок 1"/>
           <p:cNvSpPr>
             <a:spLocks noGrp="1"/>
           </p:cNvSpPr>
@@ -2278,7 +2278,7 @@
       </p:sp>
       <p:sp>
         <p:nvSpPr>
-          <p:cNvPr id="418963915" name="Вертикальный текст 2"/>
+          <p:cNvPr id="1326612565" name="Вертикальный текст 2"/>
           <p:cNvSpPr>
             <a:spLocks noGrp="1"/>
           </p:cNvSpPr>
@@ -2344,7 +2344,7 @@
       </p:sp>
       <p:sp>
         <p:nvSpPr>
-          <p:cNvPr id="322097990" name="Дата 3"/>
+          <p:cNvPr id="1514684649" name="Дата 3"/>
           <p:cNvSpPr>
             <a:spLocks noGrp="1"/>
           </p:cNvSpPr>
@@ -2370,7 +2370,7 @@
       </p:sp>
       <p:sp>
         <p:nvSpPr>
-          <p:cNvPr id="22644829" name="Нижний колонтитул 4"/>
+          <p:cNvPr id="1994495992" name="Нижний колонтитул 4"/>
           <p:cNvSpPr>
             <a:spLocks noGrp="1"/>
           </p:cNvSpPr>
@@ -2392,7 +2392,7 @@
       </p:sp>
       <p:sp>
         <p:nvSpPr>
-          <p:cNvPr id="309086023" name="Номер слайда 5"/>
+          <p:cNvPr id="937671911" name="Номер слайда 5"/>
           <p:cNvSpPr>
             <a:spLocks noGrp="1"/>
           </p:cNvSpPr>
@@ -2443,7 +2443,7 @@
       </p:grpSpPr>
       <p:sp>
         <p:nvSpPr>
-          <p:cNvPr id="1150570800" name="Вертикальный заголовок 1"/>
+          <p:cNvPr id="2078012175" name="Вертикальный заголовок 1"/>
           <p:cNvSpPr>
             <a:spLocks noGrp="1"/>
           </p:cNvSpPr>
@@ -2474,7 +2474,7 @@
       </p:sp>
       <p:sp>
         <p:nvSpPr>
-          <p:cNvPr id="1874463492" name="Вертикальный текст 2"/>
+          <p:cNvPr id="1645442367" name="Вертикальный текст 2"/>
           <p:cNvSpPr>
             <a:spLocks noGrp="1"/>
           </p:cNvSpPr>
@@ -2545,7 +2545,7 @@
       </p:sp>
       <p:sp>
         <p:nvSpPr>
-          <p:cNvPr id="1267168139" name="Дата 3"/>
+          <p:cNvPr id="1200554935" name="Дата 3"/>
           <p:cNvSpPr>
             <a:spLocks noGrp="1"/>
           </p:cNvSpPr>
@@ -2571,7 +2571,7 @@
       </p:sp>
       <p:sp>
         <p:nvSpPr>
-          <p:cNvPr id="27193663" name="Нижний колонтитул 4"/>
+          <p:cNvPr id="455680969" name="Нижний колонтитул 4"/>
           <p:cNvSpPr>
             <a:spLocks noGrp="1"/>
           </p:cNvSpPr>
@@ -2593,7 +2593,7 @@
       </p:sp>
       <p:sp>
         <p:nvSpPr>
-          <p:cNvPr id="835312890" name="Номер слайда 5"/>
+          <p:cNvPr id="1708001462" name="Номер слайда 5"/>
           <p:cNvSpPr>
             <a:spLocks noGrp="1"/>
           </p:cNvSpPr>
@@ -2644,7 +2644,7 @@
       </p:grpSpPr>
       <p:pic>
         <p:nvPicPr>
-          <p:cNvPr id="938155408" name="Picture 6" descr="HD-ShadowLong.png"/>
+          <p:cNvPr id="256381749" name="Picture 6" descr="HD-ShadowLong.png"/>
           <p:cNvPicPr>
             <a:picLocks noChangeAspect="1"/>
           </p:cNvPicPr>
@@ -2666,7 +2666,7 @@
       </p:pic>
       <p:pic>
         <p:nvPicPr>
-          <p:cNvPr id="659946607" name="Picture 7" descr="HD-ShadowShort.png"/>
+          <p:cNvPr id="1386943393" name="Picture 7" descr="HD-ShadowShort.png"/>
           <p:cNvPicPr>
             <a:picLocks noChangeAspect="1"/>
           </p:cNvPicPr>
@@ -2688,7 +2688,7 @@
       </p:pic>
       <p:sp>
         <p:nvSpPr>
-          <p:cNvPr id="539485779" name="Rectangle 8"/>
+          <p:cNvPr id="1256911902" name="Rectangle 8"/>
           <p:cNvSpPr/>
           <p:nvPr/>
         </p:nvSpPr>
@@ -2729,7 +2729,7 @@
       </p:sp>
       <p:sp>
         <p:nvSpPr>
-          <p:cNvPr id="919771917" name="Rectangle 9"/>
+          <p:cNvPr id="65874816" name="Rectangle 9"/>
           <p:cNvSpPr/>
           <p:nvPr/>
         </p:nvSpPr>
@@ -2767,7 +2767,7 @@
       </p:sp>
       <p:sp>
         <p:nvSpPr>
-          <p:cNvPr id="922357951" name="Title 1"/>
+          <p:cNvPr id="1364768472" name="Title 1"/>
           <p:cNvSpPr>
             <a:spLocks noGrp="1"/>
           </p:cNvSpPr>
@@ -2804,7 +2804,7 @@
       </p:sp>
       <p:sp>
         <p:nvSpPr>
-          <p:cNvPr id="1439374905" name="Subtitle 2"/>
+          <p:cNvPr id="596678076" name="Subtitle 2"/>
           <p:cNvSpPr>
             <a:spLocks noGrp="1"/>
           </p:cNvSpPr>
@@ -2874,7 +2874,7 @@
       </p:sp>
       <p:sp>
         <p:nvSpPr>
-          <p:cNvPr id="704201076" name="Date Placeholder 3"/>
+          <p:cNvPr id="34584425" name="Date Placeholder 3"/>
           <p:cNvSpPr>
             <a:spLocks noGrp="1"/>
           </p:cNvSpPr>
@@ -2900,7 +2900,7 @@
       </p:sp>
       <p:sp>
         <p:nvSpPr>
-          <p:cNvPr id="796448544" name="Footer Placeholder 4"/>
+          <p:cNvPr id="850918959" name="Footer Placeholder 4"/>
           <p:cNvSpPr>
             <a:spLocks noGrp="1"/>
           </p:cNvSpPr>
@@ -2922,7 +2922,7 @@
       </p:sp>
       <p:sp>
         <p:nvSpPr>
-          <p:cNvPr id="1223045142" name="Slide Number Placeholder 5"/>
+          <p:cNvPr id="740060001" name="Slide Number Placeholder 5"/>
           <p:cNvSpPr>
             <a:spLocks noGrp="1"/>
           </p:cNvSpPr>
@@ -2978,7 +2978,7 @@
       </p:grpSpPr>
       <p:pic>
         <p:nvPicPr>
-          <p:cNvPr id="734184449" name="Picture 14" descr="HD-ShadowLong.png"/>
+          <p:cNvPr id="1537405515" name="Picture 14" descr="HD-ShadowLong.png"/>
           <p:cNvPicPr>
             <a:picLocks noChangeAspect="1"/>
           </p:cNvPicPr>
@@ -3000,7 +3000,7 @@
       </p:pic>
       <p:pic>
         <p:nvPicPr>
-          <p:cNvPr id="915792173" name="Picture 15" descr="HD-ShadowShort.png"/>
+          <p:cNvPr id="687146211" name="Picture 15" descr="HD-ShadowShort.png"/>
           <p:cNvPicPr>
             <a:picLocks noChangeAspect="1"/>
           </p:cNvPicPr>
@@ -3022,7 +3022,7 @@
       </p:pic>
       <p:sp>
         <p:nvSpPr>
-          <p:cNvPr id="453003051" name="Rectangle 16"/>
+          <p:cNvPr id="2139853914" name="Rectangle 16"/>
           <p:cNvSpPr/>
           <p:nvPr/>
         </p:nvSpPr>
@@ -3063,7 +3063,7 @@
       </p:sp>
       <p:sp>
         <p:nvSpPr>
-          <p:cNvPr id="1731874301" name="Rectangle 17"/>
+          <p:cNvPr id="1481624075" name="Rectangle 17"/>
           <p:cNvSpPr/>
           <p:nvPr/>
         </p:nvSpPr>
@@ -3101,7 +3101,7 @@
       </p:sp>
       <p:sp>
         <p:nvSpPr>
-          <p:cNvPr id="1824697268" name="Title 1"/>
+          <p:cNvPr id="574719932" name="Title 1"/>
           <p:cNvSpPr>
             <a:spLocks noGrp="1"/>
           </p:cNvSpPr>
@@ -3127,7 +3127,7 @@
       </p:sp>
       <p:sp>
         <p:nvSpPr>
-          <p:cNvPr id="17350254" name="Content Placeholder 2"/>
+          <p:cNvPr id="2071645381" name="Content Placeholder 2"/>
           <p:cNvSpPr>
             <a:spLocks noGrp="1"/>
           </p:cNvSpPr>
@@ -3193,7 +3193,7 @@
       </p:sp>
       <p:sp>
         <p:nvSpPr>
-          <p:cNvPr id="1487259964" name="Date Placeholder 3"/>
+          <p:cNvPr id="449567260" name="Date Placeholder 3"/>
           <p:cNvSpPr>
             <a:spLocks noGrp="1"/>
           </p:cNvSpPr>
@@ -3219,7 +3219,7 @@
       </p:sp>
       <p:sp>
         <p:nvSpPr>
-          <p:cNvPr id="1122499849" name="Footer Placeholder 4"/>
+          <p:cNvPr id="1487400725" name="Footer Placeholder 4"/>
           <p:cNvSpPr>
             <a:spLocks noGrp="1"/>
           </p:cNvSpPr>
@@ -3241,7 +3241,7 @@
       </p:sp>
       <p:sp>
         <p:nvSpPr>
-          <p:cNvPr id="1628235153" name="Slide Number Placeholder 5"/>
+          <p:cNvPr id="832400854" name="Slide Number Placeholder 5"/>
           <p:cNvSpPr>
             <a:spLocks noGrp="1"/>
           </p:cNvSpPr>
@@ -3292,7 +3292,7 @@
       </p:grpSpPr>
       <p:pic>
         <p:nvPicPr>
-          <p:cNvPr id="1494919589" name="Picture 6" descr="HD-ShadowLong.png"/>
+          <p:cNvPr id="960928336" name="Picture 6" descr="HD-ShadowLong.png"/>
           <p:cNvPicPr>
             <a:picLocks noChangeAspect="1"/>
           </p:cNvPicPr>
@@ -3314,7 +3314,7 @@
       </p:pic>
       <p:pic>
         <p:nvPicPr>
-          <p:cNvPr id="485828551" name="Picture 7" descr="HD-ShadowShort.png"/>
+          <p:cNvPr id="1396009945" name="Picture 7" descr="HD-ShadowShort.png"/>
           <p:cNvPicPr>
             <a:picLocks noChangeAspect="1"/>
           </p:cNvPicPr>
@@ -3336,7 +3336,7 @@
       </p:pic>
       <p:sp>
         <p:nvSpPr>
-          <p:cNvPr id="577361997" name="Rectangle 8"/>
+          <p:cNvPr id="1873942768" name="Rectangle 8"/>
           <p:cNvSpPr/>
           <p:nvPr/>
         </p:nvSpPr>
@@ -3377,7 +3377,7 @@
       </p:sp>
       <p:sp>
         <p:nvSpPr>
-          <p:cNvPr id="610308170" name="Rectangle 9"/>
+          <p:cNvPr id="1284999014" name="Rectangle 9"/>
           <p:cNvSpPr/>
           <p:nvPr/>
         </p:nvSpPr>
@@ -3415,7 +3415,7 @@
       </p:sp>
       <p:sp>
         <p:nvSpPr>
-          <p:cNvPr id="1833837621" name="Title 1"/>
+          <p:cNvPr id="1374944103" name="Title 1"/>
           <p:cNvSpPr>
             <a:spLocks noGrp="1"/>
           </p:cNvSpPr>
@@ -3452,7 +3452,7 @@
       </p:sp>
       <p:sp>
         <p:nvSpPr>
-          <p:cNvPr id="2085782401" name="Text Placeholder 2"/>
+          <p:cNvPr id="44220420" name="Text Placeholder 2"/>
           <p:cNvSpPr>
             <a:spLocks noGrp="1"/>
           </p:cNvSpPr>
@@ -3576,7 +3576,7 @@
       </p:sp>
       <p:sp>
         <p:nvSpPr>
-          <p:cNvPr id="2012998731" name="Date Placeholder 3"/>
+          <p:cNvPr id="1686949770" name="Date Placeholder 3"/>
           <p:cNvSpPr>
             <a:spLocks noGrp="1"/>
           </p:cNvSpPr>
@@ -3602,7 +3602,7 @@
       </p:sp>
       <p:sp>
         <p:nvSpPr>
-          <p:cNvPr id="1431619237" name="Footer Placeholder 4"/>
+          <p:cNvPr id="473362589" name="Footer Placeholder 4"/>
           <p:cNvSpPr>
             <a:spLocks noGrp="1"/>
           </p:cNvSpPr>
@@ -3624,7 +3624,7 @@
       </p:sp>
       <p:sp>
         <p:nvSpPr>
-          <p:cNvPr id="1713267684" name="Slide Number Placeholder 5"/>
+          <p:cNvPr id="1269216839" name="Slide Number Placeholder 5"/>
           <p:cNvSpPr>
             <a:spLocks noGrp="1"/>
           </p:cNvSpPr>
@@ -3680,7 +3680,7 @@
       </p:grpSpPr>
       <p:pic>
         <p:nvPicPr>
-          <p:cNvPr id="2128959427" name="Picture 7" descr="HD-ShadowLong.png"/>
+          <p:cNvPr id="1117512021" name="Picture 7" descr="HD-ShadowLong.png"/>
           <p:cNvPicPr>
             <a:picLocks noChangeAspect="1"/>
           </p:cNvPicPr>
@@ -3702,7 +3702,7 @@
       </p:pic>
       <p:pic>
         <p:nvPicPr>
-          <p:cNvPr id="802809474" name="Picture 8" descr="HD-ShadowShort.png"/>
+          <p:cNvPr id="1344074197" name="Picture 8" descr="HD-ShadowShort.png"/>
           <p:cNvPicPr>
             <a:picLocks noChangeAspect="1"/>
           </p:cNvPicPr>
@@ -3724,7 +3724,7 @@
       </p:pic>
       <p:sp>
         <p:nvSpPr>
-          <p:cNvPr id="233071334" name="Rectangle 9"/>
+          <p:cNvPr id="1517418917" name="Rectangle 9"/>
           <p:cNvSpPr/>
           <p:nvPr/>
         </p:nvSpPr>
@@ -3765,7 +3765,7 @@
       </p:sp>
       <p:sp>
         <p:nvSpPr>
-          <p:cNvPr id="911031080" name="Rectangle 10"/>
+          <p:cNvPr id="1255080735" name="Rectangle 10"/>
           <p:cNvSpPr/>
           <p:nvPr/>
         </p:nvSpPr>
@@ -3803,7 +3803,7 @@
       </p:sp>
       <p:sp>
         <p:nvSpPr>
-          <p:cNvPr id="1432820848" name="Title 1"/>
+          <p:cNvPr id="515043131" name="Title 1"/>
           <p:cNvSpPr>
             <a:spLocks noGrp="1"/>
           </p:cNvSpPr>
@@ -3829,7 +3829,7 @@
       </p:sp>
       <p:sp>
         <p:nvSpPr>
-          <p:cNvPr id="896832175" name="Content Placeholder 2"/>
+          <p:cNvPr id="273481586" name="Content Placeholder 2"/>
           <p:cNvSpPr>
             <a:spLocks noGrp="1"/>
           </p:cNvSpPr>
@@ -3900,7 +3900,7 @@
       </p:sp>
       <p:sp>
         <p:nvSpPr>
-          <p:cNvPr id="771938876" name="Content Placeholder 3"/>
+          <p:cNvPr id="966287632" name="Content Placeholder 3"/>
           <p:cNvSpPr>
             <a:spLocks noGrp="1"/>
           </p:cNvSpPr>
@@ -3971,7 +3971,7 @@
       </p:sp>
       <p:sp>
         <p:nvSpPr>
-          <p:cNvPr id="1122841613" name="Date Placeholder 4"/>
+          <p:cNvPr id="1974461994" name="Date Placeholder 4"/>
           <p:cNvSpPr>
             <a:spLocks noGrp="1"/>
           </p:cNvSpPr>
@@ -3997,7 +3997,7 @@
       </p:sp>
       <p:sp>
         <p:nvSpPr>
-          <p:cNvPr id="724777218" name="Footer Placeholder 5"/>
+          <p:cNvPr id="387063028" name="Footer Placeholder 5"/>
           <p:cNvSpPr>
             <a:spLocks noGrp="1"/>
           </p:cNvSpPr>
@@ -4019,7 +4019,7 @@
       </p:sp>
       <p:sp>
         <p:nvSpPr>
-          <p:cNvPr id="1611728354" name="Slide Number Placeholder 6"/>
+          <p:cNvPr id="2082075574" name="Slide Number Placeholder 6"/>
           <p:cNvSpPr>
             <a:spLocks noGrp="1"/>
           </p:cNvSpPr>
@@ -4070,7 +4070,7 @@
       </p:grpSpPr>
       <p:pic>
         <p:nvPicPr>
-          <p:cNvPr id="221155728" name="Picture 9" descr="HD-ShadowLong.png"/>
+          <p:cNvPr id="1942024010" name="Picture 9" descr="HD-ShadowLong.png"/>
           <p:cNvPicPr>
             <a:picLocks noChangeAspect="1"/>
           </p:cNvPicPr>
@@ -4092,7 +4092,7 @@
       </p:pic>
       <p:pic>
         <p:nvPicPr>
-          <p:cNvPr id="1605616505" name="Picture 10" descr="HD-ShadowShort.png"/>
+          <p:cNvPr id="1533934631" name="Picture 10" descr="HD-ShadowShort.png"/>
           <p:cNvPicPr>
             <a:picLocks noChangeAspect="1"/>
           </p:cNvPicPr>
@@ -4114,7 +4114,7 @@
       </p:pic>
       <p:sp>
         <p:nvSpPr>
-          <p:cNvPr id="1070896288" name="Rectangle 11"/>
+          <p:cNvPr id="1562917759" name="Rectangle 11"/>
           <p:cNvSpPr/>
           <p:nvPr/>
         </p:nvSpPr>
@@ -4155,7 +4155,7 @@
       </p:sp>
       <p:sp>
         <p:nvSpPr>
-          <p:cNvPr id="640581567" name="Rectangle 12"/>
+          <p:cNvPr id="1997275393" name="Rectangle 12"/>
           <p:cNvSpPr/>
           <p:nvPr/>
         </p:nvSpPr>
@@ -4193,7 +4193,7 @@
       </p:sp>
       <p:sp>
         <p:nvSpPr>
-          <p:cNvPr id="1281435760" name="Title 1"/>
+          <p:cNvPr id="1531193543" name="Title 1"/>
           <p:cNvSpPr>
             <a:spLocks noGrp="1"/>
           </p:cNvSpPr>
@@ -4224,7 +4224,7 @@
       </p:sp>
       <p:sp>
         <p:nvSpPr>
-          <p:cNvPr id="1030737287" name="Text Placeholder 2"/>
+          <p:cNvPr id="557980628" name="Text Placeholder 2"/>
           <p:cNvSpPr>
             <a:spLocks noGrp="1"/>
           </p:cNvSpPr>
@@ -4292,7 +4292,7 @@
       </p:sp>
       <p:sp>
         <p:nvSpPr>
-          <p:cNvPr id="1098352314" name="Content Placeholder 3"/>
+          <p:cNvPr id="1861243600" name="Content Placeholder 3"/>
           <p:cNvSpPr>
             <a:spLocks noGrp="1"/>
           </p:cNvSpPr>
@@ -4363,7 +4363,7 @@
       </p:sp>
       <p:sp>
         <p:nvSpPr>
-          <p:cNvPr id="1581274553" name="Text Placeholder 4"/>
+          <p:cNvPr id="727166565" name="Text Placeholder 4"/>
           <p:cNvSpPr>
             <a:spLocks noGrp="1"/>
           </p:cNvSpPr>
@@ -4431,7 +4431,7 @@
       </p:sp>
       <p:sp>
         <p:nvSpPr>
-          <p:cNvPr id="1816724393" name="Content Placeholder 5"/>
+          <p:cNvPr id="1607072540" name="Content Placeholder 5"/>
           <p:cNvSpPr>
             <a:spLocks noGrp="1"/>
           </p:cNvSpPr>
@@ -4502,7 +4502,7 @@
       </p:sp>
       <p:sp>
         <p:nvSpPr>
-          <p:cNvPr id="1127169681" name="Date Placeholder 6"/>
+          <p:cNvPr id="389072476" name="Date Placeholder 6"/>
           <p:cNvSpPr>
             <a:spLocks noGrp="1"/>
           </p:cNvSpPr>
@@ -4528,7 +4528,7 @@
       </p:sp>
       <p:sp>
         <p:nvSpPr>
-          <p:cNvPr id="914413634" name="Footer Placeholder 7"/>
+          <p:cNvPr id="4791134" name="Footer Placeholder 7"/>
           <p:cNvSpPr>
             <a:spLocks noGrp="1"/>
           </p:cNvSpPr>
@@ -4550,7 +4550,7 @@
       </p:sp>
       <p:sp>
         <p:nvSpPr>
-          <p:cNvPr id="1784812969" name="Slide Number Placeholder 8"/>
+          <p:cNvPr id="1906377965" name="Slide Number Placeholder 8"/>
           <p:cNvSpPr>
             <a:spLocks noGrp="1"/>
           </p:cNvSpPr>
@@ -4601,7 +4601,7 @@
       </p:grpSpPr>
       <p:pic>
         <p:nvPicPr>
-          <p:cNvPr id="1226707638" name="Picture 5" descr="HD-ShadowLong.png"/>
+          <p:cNvPr id="1254846908" name="Picture 5" descr="HD-ShadowLong.png"/>
           <p:cNvPicPr>
             <a:picLocks noChangeAspect="1"/>
           </p:cNvPicPr>
@@ -4623,7 +4623,7 @@
       </p:pic>
       <p:pic>
         <p:nvPicPr>
-          <p:cNvPr id="155222090" name="Picture 6" descr="HD-ShadowShort.png"/>
+          <p:cNvPr id="1023628694" name="Picture 6" descr="HD-ShadowShort.png"/>
           <p:cNvPicPr>
             <a:picLocks noChangeAspect="1"/>
           </p:cNvPicPr>
@@ -4645,7 +4645,7 @@
       </p:pic>
       <p:sp>
         <p:nvSpPr>
-          <p:cNvPr id="1862371981" name="Rectangle 7"/>
+          <p:cNvPr id="1731451118" name="Rectangle 7"/>
           <p:cNvSpPr/>
           <p:nvPr/>
         </p:nvSpPr>
@@ -4686,7 +4686,7 @@
       </p:sp>
       <p:sp>
         <p:nvSpPr>
-          <p:cNvPr id="2146958950" name="Rectangle 8"/>
+          <p:cNvPr id="1125855248" name="Rectangle 8"/>
           <p:cNvSpPr/>
           <p:nvPr/>
         </p:nvSpPr>
@@ -4724,7 +4724,7 @@
       </p:sp>
       <p:sp>
         <p:nvSpPr>
-          <p:cNvPr id="42214948" name="Title 1"/>
+          <p:cNvPr id="704712594" name="Title 1"/>
           <p:cNvSpPr>
             <a:spLocks noGrp="1"/>
           </p:cNvSpPr>
@@ -4750,7 +4750,7 @@
       </p:sp>
       <p:sp>
         <p:nvSpPr>
-          <p:cNvPr id="239853278" name="Date Placeholder 2"/>
+          <p:cNvPr id="1853318538" name="Date Placeholder 2"/>
           <p:cNvSpPr>
             <a:spLocks noGrp="1"/>
           </p:cNvSpPr>
@@ -4776,7 +4776,7 @@
       </p:sp>
       <p:sp>
         <p:nvSpPr>
-          <p:cNvPr id="1091690442" name="Footer Placeholder 3"/>
+          <p:cNvPr id="180565417" name="Footer Placeholder 3"/>
           <p:cNvSpPr>
             <a:spLocks noGrp="1"/>
           </p:cNvSpPr>
@@ -4798,7 +4798,7 @@
       </p:sp>
       <p:sp>
         <p:nvSpPr>
-          <p:cNvPr id="22637444" name="Slide Number Placeholder 4"/>
+          <p:cNvPr id="2057638186" name="Slide Number Placeholder 4"/>
           <p:cNvSpPr>
             <a:spLocks noGrp="1"/>
           </p:cNvSpPr>
@@ -4849,7 +4849,7 @@
       </p:grpSpPr>
       <p:pic>
         <p:nvPicPr>
-          <p:cNvPr id="133677540" name="Picture 4" descr="HD-ShadowShort.png"/>
+          <p:cNvPr id="779196013" name="Picture 4" descr="HD-ShadowShort.png"/>
           <p:cNvPicPr>
             <a:picLocks noChangeAspect="1"/>
           </p:cNvPicPr>
@@ -4871,7 +4871,7 @@
       </p:pic>
       <p:sp>
         <p:nvSpPr>
-          <p:cNvPr id="2127938542" name="Rectangle 5"/>
+          <p:cNvPr id="883164638" name="Rectangle 5"/>
           <p:cNvSpPr/>
           <p:nvPr/>
         </p:nvSpPr>
@@ -4909,7 +4909,7 @@
       </p:sp>
       <p:sp>
         <p:nvSpPr>
-          <p:cNvPr id="1859777424" name="Date Placeholder 1"/>
+          <p:cNvPr id="140288839" name="Date Placeholder 1"/>
           <p:cNvSpPr>
             <a:spLocks noGrp="1"/>
           </p:cNvSpPr>
@@ -4935,7 +4935,7 @@
       </p:sp>
       <p:sp>
         <p:nvSpPr>
-          <p:cNvPr id="243233018" name="Footer Placeholder 2"/>
+          <p:cNvPr id="245481780" name="Footer Placeholder 2"/>
           <p:cNvSpPr>
             <a:spLocks noGrp="1"/>
           </p:cNvSpPr>
@@ -4957,7 +4957,7 @@
       </p:sp>
       <p:sp>
         <p:nvSpPr>
-          <p:cNvPr id="382793334" name="Slide Number Placeholder 3"/>
+          <p:cNvPr id="1682361269" name="Slide Number Placeholder 3"/>
           <p:cNvSpPr>
             <a:spLocks noGrp="1"/>
           </p:cNvSpPr>
@@ -5008,7 +5008,7 @@
       </p:grpSpPr>
       <p:pic>
         <p:nvPicPr>
-          <p:cNvPr id="1656286348" name="Picture 7" descr="HD-ShadowLong.png"/>
+          <p:cNvPr id="1763154306" name="Picture 7" descr="HD-ShadowLong.png"/>
           <p:cNvPicPr>
             <a:picLocks noChangeAspect="1"/>
           </p:cNvPicPr>
@@ -5030,7 +5030,7 @@
       </p:pic>
       <p:pic>
         <p:nvPicPr>
-          <p:cNvPr id="417459057" name="Picture 8" descr="HD-ShadowShort.png"/>
+          <p:cNvPr id="2142434214" name="Picture 8" descr="HD-ShadowShort.png"/>
           <p:cNvPicPr>
             <a:picLocks noChangeAspect="1"/>
           </p:cNvPicPr>
@@ -5052,7 +5052,7 @@
       </p:pic>
       <p:sp>
         <p:nvSpPr>
-          <p:cNvPr id="1127311654" name="Rectangle 9"/>
+          <p:cNvPr id="368014218" name="Rectangle 9"/>
           <p:cNvSpPr/>
           <p:nvPr/>
         </p:nvSpPr>
@@ -5093,7 +5093,7 @@
       </p:sp>
       <p:sp>
         <p:nvSpPr>
-          <p:cNvPr id="471319452" name="Rectangle 10"/>
+          <p:cNvPr id="670885192" name="Rectangle 10"/>
           <p:cNvSpPr/>
           <p:nvPr/>
         </p:nvSpPr>
@@ -5131,7 +5131,7 @@
       </p:sp>
       <p:sp>
         <p:nvSpPr>
-          <p:cNvPr id="161091321" name="Title 1"/>
+          <p:cNvPr id="380260985" name="Title 1"/>
           <p:cNvSpPr>
             <a:spLocks noGrp="1"/>
           </p:cNvSpPr>
@@ -5168,7 +5168,7 @@
       </p:sp>
       <p:sp>
         <p:nvSpPr>
-          <p:cNvPr id="633472151" name="Content Placeholder 2"/>
+          <p:cNvPr id="739401052" name="Content Placeholder 2"/>
           <p:cNvSpPr>
             <a:spLocks noGrp="1"/>
           </p:cNvSpPr>
@@ -5239,7 +5239,7 @@
       </p:sp>
       <p:sp>
         <p:nvSpPr>
-          <p:cNvPr id="1413706193" name="Text Placeholder 3"/>
+          <p:cNvPr id="221901945" name="Text Placeholder 3"/>
           <p:cNvSpPr>
             <a:spLocks noGrp="1"/>
           </p:cNvSpPr>
@@ -5307,7 +5307,7 @@
       </p:sp>
       <p:sp>
         <p:nvSpPr>
-          <p:cNvPr id="1661692492" name="Date Placeholder 4"/>
+          <p:cNvPr id="452635696" name="Date Placeholder 4"/>
           <p:cNvSpPr>
             <a:spLocks noGrp="1"/>
           </p:cNvSpPr>
@@ -5333,7 +5333,7 @@
       </p:sp>
       <p:sp>
         <p:nvSpPr>
-          <p:cNvPr id="529059068" name="Footer Placeholder 5"/>
+          <p:cNvPr id="1052948025" name="Footer Placeholder 5"/>
           <p:cNvSpPr>
             <a:spLocks noGrp="1"/>
           </p:cNvSpPr>
@@ -5355,7 +5355,7 @@
       </p:sp>
       <p:sp>
         <p:nvSpPr>
-          <p:cNvPr id="1474048373" name="Slide Number Placeholder 6"/>
+          <p:cNvPr id="1867628764" name="Slide Number Placeholder 6"/>
           <p:cNvSpPr>
             <a:spLocks noGrp="1"/>
           </p:cNvSpPr>
@@ -5406,7 +5406,7 @@
       </p:grpSpPr>
       <p:sp>
         <p:nvSpPr>
-          <p:cNvPr id="1669953478" name="Заголовок 1"/>
+          <p:cNvPr id="1412456014" name="Заголовок 1"/>
           <p:cNvSpPr>
             <a:spLocks noGrp="1"/>
           </p:cNvSpPr>
@@ -5432,7 +5432,7 @@
       </p:sp>
       <p:sp>
         <p:nvSpPr>
-          <p:cNvPr id="716051571" name="Объект 2"/>
+          <p:cNvPr id="1489063781" name="Объект 2"/>
           <p:cNvSpPr>
             <a:spLocks noGrp="1"/>
           </p:cNvSpPr>
@@ -5498,7 +5498,7 @@
       </p:sp>
       <p:sp>
         <p:nvSpPr>
-          <p:cNvPr id="1016662137" name="Дата 3"/>
+          <p:cNvPr id="1960421324" name="Дата 3"/>
           <p:cNvSpPr>
             <a:spLocks noGrp="1"/>
           </p:cNvSpPr>
@@ -5524,7 +5524,7 @@
       </p:sp>
       <p:sp>
         <p:nvSpPr>
-          <p:cNvPr id="1214480906" name="Нижний колонтитул 4"/>
+          <p:cNvPr id="204433431" name="Нижний колонтитул 4"/>
           <p:cNvSpPr>
             <a:spLocks noGrp="1"/>
           </p:cNvSpPr>
@@ -5546,7 +5546,7 @@
       </p:sp>
       <p:sp>
         <p:nvSpPr>
-          <p:cNvPr id="1161921485" name="Номер слайда 5"/>
+          <p:cNvPr id="1782249760" name="Номер слайда 5"/>
           <p:cNvSpPr>
             <a:spLocks noGrp="1"/>
           </p:cNvSpPr>
@@ -5597,7 +5597,7 @@
       </p:grpSpPr>
       <p:pic>
         <p:nvPicPr>
-          <p:cNvPr id="2125299307" name="Picture 7" descr="HD-ShadowLong.png"/>
+          <p:cNvPr id="1995206400" name="Picture 7" descr="HD-ShadowLong.png"/>
           <p:cNvPicPr>
             <a:picLocks noChangeAspect="1"/>
           </p:cNvPicPr>
@@ -5619,7 +5619,7 @@
       </p:pic>
       <p:pic>
         <p:nvPicPr>
-          <p:cNvPr id="208085409" name="Picture 8" descr="HD-ShadowShort.png"/>
+          <p:cNvPr id="1731484283" name="Picture 8" descr="HD-ShadowShort.png"/>
           <p:cNvPicPr>
             <a:picLocks noChangeAspect="1"/>
           </p:cNvPicPr>
@@ -5641,7 +5641,7 @@
       </p:pic>
       <p:sp>
         <p:nvSpPr>
-          <p:cNvPr id="516158612" name="Rectangle 9"/>
+          <p:cNvPr id="22138846" name="Rectangle 9"/>
           <p:cNvSpPr/>
           <p:nvPr/>
         </p:nvSpPr>
@@ -5682,7 +5682,7 @@
       </p:sp>
       <p:sp>
         <p:nvSpPr>
-          <p:cNvPr id="737676905" name="Rectangle 10"/>
+          <p:cNvPr id="2040590332" name="Rectangle 10"/>
           <p:cNvSpPr/>
           <p:nvPr/>
         </p:nvSpPr>
@@ -5720,7 +5720,7 @@
       </p:sp>
       <p:sp>
         <p:nvSpPr>
-          <p:cNvPr id="518406108" name="Title 1"/>
+          <p:cNvPr id="266314955" name="Title 1"/>
           <p:cNvSpPr>
             <a:spLocks noGrp="1"/>
           </p:cNvSpPr>
@@ -5757,7 +5757,7 @@
       </p:sp>
       <p:sp>
         <p:nvSpPr>
-          <p:cNvPr id="1643189285" name="Picture Placeholder 2"/>
+          <p:cNvPr id="63885608" name="Picture Placeholder 2"/>
           <p:cNvSpPr>
             <a:spLocks noChangeAspect="1" noGrp="1"/>
           </p:cNvSpPr>
@@ -5839,7 +5839,7 @@
       </p:sp>
       <p:sp>
         <p:nvSpPr>
-          <p:cNvPr id="757870604" name="Text Placeholder 3"/>
+          <p:cNvPr id="1851684729" name="Text Placeholder 3"/>
           <p:cNvSpPr>
             <a:spLocks noGrp="1"/>
           </p:cNvSpPr>
@@ -5907,7 +5907,7 @@
       </p:sp>
       <p:sp>
         <p:nvSpPr>
-          <p:cNvPr id="368457423" name="Date Placeholder 4"/>
+          <p:cNvPr id="331226851" name="Date Placeholder 4"/>
           <p:cNvSpPr>
             <a:spLocks noGrp="1"/>
           </p:cNvSpPr>
@@ -5933,7 +5933,7 @@
       </p:sp>
       <p:sp>
         <p:nvSpPr>
-          <p:cNvPr id="565884551" name="Footer Placeholder 5"/>
+          <p:cNvPr id="1416645511" name="Footer Placeholder 5"/>
           <p:cNvSpPr>
             <a:spLocks noGrp="1"/>
           </p:cNvSpPr>
@@ -5955,7 +5955,7 @@
       </p:sp>
       <p:sp>
         <p:nvSpPr>
-          <p:cNvPr id="362633072" name="Slide Number Placeholder 6"/>
+          <p:cNvPr id="1016095474" name="Slide Number Placeholder 6"/>
           <p:cNvSpPr>
             <a:spLocks noGrp="1"/>
           </p:cNvSpPr>
@@ -6006,7 +6006,7 @@
       </p:grpSpPr>
       <p:pic>
         <p:nvPicPr>
-          <p:cNvPr id="1439427040" name="Picture 7" descr="HD-ShadowLong.png"/>
+          <p:cNvPr id="1404064762" name="Picture 7" descr="HD-ShadowLong.png"/>
           <p:cNvPicPr>
             <a:picLocks noChangeAspect="1"/>
           </p:cNvPicPr>
@@ -6028,7 +6028,7 @@
       </p:pic>
       <p:pic>
         <p:nvPicPr>
-          <p:cNvPr id="878643578" name="Picture 8" descr="HD-ShadowShort.png"/>
+          <p:cNvPr id="1647312713" name="Picture 8" descr="HD-ShadowShort.png"/>
           <p:cNvPicPr>
             <a:picLocks noChangeAspect="1"/>
           </p:cNvPicPr>
@@ -6050,7 +6050,7 @@
       </p:pic>
       <p:sp>
         <p:nvSpPr>
-          <p:cNvPr id="991270232" name="Rectangle 9"/>
+          <p:cNvPr id="824141271" name="Rectangle 9"/>
           <p:cNvSpPr/>
           <p:nvPr/>
         </p:nvSpPr>
@@ -6091,7 +6091,7 @@
       </p:sp>
       <p:sp>
         <p:nvSpPr>
-          <p:cNvPr id="1188042556" name="Rectangle 10"/>
+          <p:cNvPr id="128662828" name="Rectangle 10"/>
           <p:cNvSpPr/>
           <p:nvPr/>
         </p:nvSpPr>
@@ -6129,7 +6129,7 @@
       </p:sp>
       <p:sp>
         <p:nvSpPr>
-          <p:cNvPr id="1298455299" name="Title 1"/>
+          <p:cNvPr id="768346136" name="Title 1"/>
           <p:cNvSpPr>
             <a:spLocks noGrp="1"/>
           </p:cNvSpPr>
@@ -6166,7 +6166,7 @@
       </p:sp>
       <p:sp>
         <p:nvSpPr>
-          <p:cNvPr id="2126616334" name="Picture Placeholder 2"/>
+          <p:cNvPr id="1447468428" name="Picture Placeholder 2"/>
           <p:cNvSpPr>
             <a:spLocks noChangeAspect="1" noGrp="1"/>
           </p:cNvSpPr>
@@ -6248,7 +6248,7 @@
       </p:sp>
       <p:sp>
         <p:nvSpPr>
-          <p:cNvPr id="827087626" name="Text Placeholder 3"/>
+          <p:cNvPr id="933732781" name="Text Placeholder 3"/>
           <p:cNvSpPr>
             <a:spLocks noGrp="1"/>
           </p:cNvSpPr>
@@ -6316,7 +6316,7 @@
       </p:sp>
       <p:sp>
         <p:nvSpPr>
-          <p:cNvPr id="944424641" name="Date Placeholder 4"/>
+          <p:cNvPr id="888328974" name="Date Placeholder 4"/>
           <p:cNvSpPr>
             <a:spLocks noGrp="1"/>
           </p:cNvSpPr>
@@ -6342,7 +6342,7 @@
       </p:sp>
       <p:sp>
         <p:nvSpPr>
-          <p:cNvPr id="1434062675" name="Footer Placeholder 5"/>
+          <p:cNvPr id="630732340" name="Footer Placeholder 5"/>
           <p:cNvSpPr>
             <a:spLocks noGrp="1"/>
           </p:cNvSpPr>
@@ -6364,7 +6364,7 @@
       </p:sp>
       <p:sp>
         <p:nvSpPr>
-          <p:cNvPr id="45076893" name="Slide Number Placeholder 6"/>
+          <p:cNvPr id="346057190" name="Slide Number Placeholder 6"/>
           <p:cNvSpPr>
             <a:spLocks noGrp="1"/>
           </p:cNvSpPr>
@@ -6420,7 +6420,7 @@
       </p:grpSpPr>
       <p:pic>
         <p:nvPicPr>
-          <p:cNvPr id="1830290643" name="Picture 7" descr="HD-ShadowLong.png"/>
+          <p:cNvPr id="1524628644" name="Picture 7" descr="HD-ShadowLong.png"/>
           <p:cNvPicPr>
             <a:picLocks noChangeAspect="1"/>
           </p:cNvPicPr>
@@ -6442,7 +6442,7 @@
       </p:pic>
       <p:pic>
         <p:nvPicPr>
-          <p:cNvPr id="2100072523" name="Picture 8" descr="HD-ShadowShort.png"/>
+          <p:cNvPr id="743276234" name="Picture 8" descr="HD-ShadowShort.png"/>
           <p:cNvPicPr>
             <a:picLocks noChangeAspect="1"/>
           </p:cNvPicPr>
@@ -6464,7 +6464,7 @@
       </p:pic>
       <p:sp>
         <p:nvSpPr>
-          <p:cNvPr id="2061546496" name="Rectangle 9"/>
+          <p:cNvPr id="648890744" name="Rectangle 9"/>
           <p:cNvSpPr/>
           <p:nvPr/>
         </p:nvSpPr>
@@ -6505,7 +6505,7 @@
       </p:sp>
       <p:sp>
         <p:nvSpPr>
-          <p:cNvPr id="593506152" name="Rectangle 10"/>
+          <p:cNvPr id="910797804" name="Rectangle 10"/>
           <p:cNvSpPr/>
           <p:nvPr/>
         </p:nvSpPr>
@@ -6543,7 +6543,7 @@
       </p:sp>
       <p:sp>
         <p:nvSpPr>
-          <p:cNvPr id="1793017953" name="Title 1"/>
+          <p:cNvPr id="1563668867" name="Title 1"/>
           <p:cNvSpPr>
             <a:spLocks noGrp="1"/>
           </p:cNvSpPr>
@@ -6578,7 +6578,7 @@
       </p:sp>
       <p:sp>
         <p:nvSpPr>
-          <p:cNvPr id="2137433405" name="Text Placeholder 3"/>
+          <p:cNvPr id="1183356081" name="Text Placeholder 3"/>
           <p:cNvSpPr>
             <a:spLocks noGrp="1"/>
           </p:cNvSpPr>
@@ -6646,7 +6646,7 @@
       </p:sp>
       <p:sp>
         <p:nvSpPr>
-          <p:cNvPr id="1836240995" name="Date Placeholder 4"/>
+          <p:cNvPr id="1405035263" name="Date Placeholder 4"/>
           <p:cNvSpPr>
             <a:spLocks noGrp="1"/>
           </p:cNvSpPr>
@@ -6672,7 +6672,7 @@
       </p:sp>
       <p:sp>
         <p:nvSpPr>
-          <p:cNvPr id="1720341191" name="Footer Placeholder 5"/>
+          <p:cNvPr id="335846271" name="Footer Placeholder 5"/>
           <p:cNvSpPr>
             <a:spLocks noGrp="1"/>
           </p:cNvSpPr>
@@ -6694,7 +6694,7 @@
       </p:sp>
       <p:sp>
         <p:nvSpPr>
-          <p:cNvPr id="736560547" name="Slide Number Placeholder 6"/>
+          <p:cNvPr id="1603097143" name="Slide Number Placeholder 6"/>
           <p:cNvSpPr>
             <a:spLocks noGrp="1"/>
           </p:cNvSpPr>
@@ -6750,7 +6750,7 @@
       </p:grpSpPr>
       <p:pic>
         <p:nvPicPr>
-          <p:cNvPr id="1312364831" name="Picture 10" descr="HD-ShadowLong.png"/>
+          <p:cNvPr id="1202112170" name="Picture 10" descr="HD-ShadowLong.png"/>
           <p:cNvPicPr>
             <a:picLocks noChangeAspect="1"/>
           </p:cNvPicPr>
@@ -6772,7 +6772,7 @@
       </p:pic>
       <p:pic>
         <p:nvPicPr>
-          <p:cNvPr id="531495366" name="Picture 12" descr="HD-ShadowShort.png"/>
+          <p:cNvPr id="1793643335" name="Picture 12" descr="HD-ShadowShort.png"/>
           <p:cNvPicPr>
             <a:picLocks noChangeAspect="1"/>
           </p:cNvPicPr>
@@ -6794,7 +6794,7 @@
       </p:pic>
       <p:sp>
         <p:nvSpPr>
-          <p:cNvPr id="2060407419" name="Rectangle 13"/>
+          <p:cNvPr id="743134224" name="Rectangle 13"/>
           <p:cNvSpPr/>
           <p:nvPr/>
         </p:nvSpPr>
@@ -6835,7 +6835,7 @@
       </p:sp>
       <p:sp>
         <p:nvSpPr>
-          <p:cNvPr id="164367344" name="Rectangle 14"/>
+          <p:cNvPr id="1351984263" name="Rectangle 14"/>
           <p:cNvSpPr/>
           <p:nvPr/>
         </p:nvSpPr>
@@ -6873,7 +6873,7 @@
       </p:sp>
       <p:sp>
         <p:nvSpPr>
-          <p:cNvPr id="1126240483" name="Title 1"/>
+          <p:cNvPr id="327205382" name="Title 1"/>
           <p:cNvSpPr>
             <a:spLocks noGrp="1"/>
           </p:cNvSpPr>
@@ -6908,7 +6908,7 @@
       </p:sp>
       <p:sp>
         <p:nvSpPr>
-          <p:cNvPr id="1115879384" name="Text Placeholder 3"/>
+          <p:cNvPr id="1770587646" name="Text Placeholder 3"/>
           <p:cNvSpPr>
             <a:spLocks noGrp="1"/>
           </p:cNvSpPr>
@@ -6978,7 +6978,7 @@
       </p:sp>
       <p:sp>
         <p:nvSpPr>
-          <p:cNvPr id="1891847081" name="Text Placeholder 3"/>
+          <p:cNvPr id="987261513" name="Text Placeholder 3"/>
           <p:cNvSpPr>
             <a:spLocks noGrp="1"/>
           </p:cNvSpPr>
@@ -7048,7 +7048,7 @@
       </p:sp>
       <p:sp>
         <p:nvSpPr>
-          <p:cNvPr id="844160208" name="Date Placeholder 4"/>
+          <p:cNvPr id="625480251" name="Date Placeholder 4"/>
           <p:cNvSpPr>
             <a:spLocks noGrp="1"/>
           </p:cNvSpPr>
@@ -7074,7 +7074,7 @@
       </p:sp>
       <p:sp>
         <p:nvSpPr>
-          <p:cNvPr id="1157037542" name="Footer Placeholder 5"/>
+          <p:cNvPr id="1182948243" name="Footer Placeholder 5"/>
           <p:cNvSpPr>
             <a:spLocks noGrp="1"/>
           </p:cNvSpPr>
@@ -7096,7 +7096,7 @@
       </p:sp>
       <p:sp>
         <p:nvSpPr>
-          <p:cNvPr id="1772963285" name="Slide Number Placeholder 6"/>
+          <p:cNvPr id="1892899862" name="Slide Number Placeholder 6"/>
           <p:cNvSpPr>
             <a:spLocks noGrp="1"/>
           </p:cNvSpPr>
@@ -7127,7 +7127,7 @@
       </p:sp>
       <p:sp>
         <p:nvSpPr>
-          <p:cNvPr id="877749602" name="TextBox 15"/>
+          <p:cNvPr id="943070463" name="TextBox 15"/>
           <p:cNvSpPr txBox="1"/>
           <p:nvPr/>
         </p:nvSpPr>
@@ -7231,7 +7231,7 @@
       </p:sp>
       <p:sp>
         <p:nvSpPr>
-          <p:cNvPr id="1629433155" name="TextBox 16"/>
+          <p:cNvPr id="1295003461" name="TextBox 16"/>
           <p:cNvSpPr txBox="1"/>
           <p:nvPr/>
         </p:nvSpPr>
@@ -7360,7 +7360,7 @@
       </p:grpSpPr>
       <p:pic>
         <p:nvPicPr>
-          <p:cNvPr id="43307348" name="Picture 8" descr="HD-ShadowLong.png"/>
+          <p:cNvPr id="500702290" name="Picture 8" descr="HD-ShadowLong.png"/>
           <p:cNvPicPr>
             <a:picLocks noChangeAspect="1"/>
           </p:cNvPicPr>
@@ -7382,7 +7382,7 @@
       </p:pic>
       <p:pic>
         <p:nvPicPr>
-          <p:cNvPr id="1943456685" name="Picture 9" descr="HD-ShadowShort.png"/>
+          <p:cNvPr id="305400705" name="Picture 9" descr="HD-ShadowShort.png"/>
           <p:cNvPicPr>
             <a:picLocks noChangeAspect="1"/>
           </p:cNvPicPr>
@@ -7404,7 +7404,7 @@
       </p:pic>
       <p:sp>
         <p:nvSpPr>
-          <p:cNvPr id="929950136" name="Rectangle 10"/>
+          <p:cNvPr id="2060369209" name="Rectangle 10"/>
           <p:cNvSpPr/>
           <p:nvPr/>
         </p:nvSpPr>
@@ -7445,7 +7445,7 @@
       </p:sp>
       <p:sp>
         <p:nvSpPr>
-          <p:cNvPr id="359390030" name="Rectangle 11"/>
+          <p:cNvPr id="1310659683" name="Rectangle 11"/>
           <p:cNvSpPr/>
           <p:nvPr/>
         </p:nvSpPr>
@@ -7483,7 +7483,7 @@
       </p:sp>
       <p:sp>
         <p:nvSpPr>
-          <p:cNvPr id="1593412522" name="Title 1"/>
+          <p:cNvPr id="1415063036" name="Title 1"/>
           <p:cNvSpPr>
             <a:spLocks noGrp="1"/>
           </p:cNvSpPr>
@@ -7518,7 +7518,7 @@
       </p:sp>
       <p:sp>
         <p:nvSpPr>
-          <p:cNvPr id="1766179571" name="Text Placeholder 3"/>
+          <p:cNvPr id="1633970637" name="Text Placeholder 3"/>
           <p:cNvSpPr>
             <a:spLocks noGrp="1"/>
           </p:cNvSpPr>
@@ -7586,7 +7586,7 @@
       </p:sp>
       <p:sp>
         <p:nvSpPr>
-          <p:cNvPr id="818786391" name="Date Placeholder 4"/>
+          <p:cNvPr id="1583586363" name="Date Placeholder 4"/>
           <p:cNvSpPr>
             <a:spLocks noGrp="1"/>
           </p:cNvSpPr>
@@ -7612,7 +7612,7 @@
       </p:sp>
       <p:sp>
         <p:nvSpPr>
-          <p:cNvPr id="1246192800" name="Footer Placeholder 5"/>
+          <p:cNvPr id="1453205426" name="Footer Placeholder 5"/>
           <p:cNvSpPr>
             <a:spLocks noGrp="1"/>
           </p:cNvSpPr>
@@ -7634,7 +7634,7 @@
       </p:sp>
       <p:sp>
         <p:nvSpPr>
-          <p:cNvPr id="1436054107" name="Slide Number Placeholder 6"/>
+          <p:cNvPr id="1706099540" name="Slide Number Placeholder 6"/>
           <p:cNvSpPr>
             <a:spLocks noGrp="1"/>
           </p:cNvSpPr>
@@ -7690,7 +7690,7 @@
       </p:grpSpPr>
       <p:pic>
         <p:nvPicPr>
-          <p:cNvPr id="1704772973" name="Picture 12" descr="HD-ShadowLong.png"/>
+          <p:cNvPr id="1477814288" name="Picture 12" descr="HD-ShadowLong.png"/>
           <p:cNvPicPr>
             <a:picLocks noChangeAspect="1"/>
           </p:cNvPicPr>
@@ -7712,7 +7712,7 @@
       </p:pic>
       <p:pic>
         <p:nvPicPr>
-          <p:cNvPr id="1814588044" name="Picture 13" descr="HD-ShadowShort.png"/>
+          <p:cNvPr id="1474409693" name="Picture 13" descr="HD-ShadowShort.png"/>
           <p:cNvPicPr>
             <a:picLocks noChangeAspect="1"/>
           </p:cNvPicPr>
@@ -7734,7 +7734,7 @@
       </p:pic>
       <p:sp>
         <p:nvSpPr>
-          <p:cNvPr id="48255133" name="Rectangle 15"/>
+          <p:cNvPr id="1502383493" name="Rectangle 15"/>
           <p:cNvSpPr/>
           <p:nvPr/>
         </p:nvSpPr>
@@ -7775,7 +7775,7 @@
       </p:sp>
       <p:sp>
         <p:nvSpPr>
-          <p:cNvPr id="761578460" name="Rectangle 16"/>
+          <p:cNvPr id="444764156" name="Rectangle 16"/>
           <p:cNvSpPr/>
           <p:nvPr/>
         </p:nvSpPr>
@@ -7813,7 +7813,7 @@
       </p:sp>
       <p:sp>
         <p:nvSpPr>
-          <p:cNvPr id="2127493226" name="Title 1"/>
+          <p:cNvPr id="1720872390" name="Title 1"/>
           <p:cNvSpPr>
             <a:spLocks noGrp="1"/>
           </p:cNvSpPr>
@@ -7844,7 +7844,7 @@
       </p:sp>
       <p:sp>
         <p:nvSpPr>
-          <p:cNvPr id="404453703" name="Text Placeholder 2"/>
+          <p:cNvPr id="705802294" name="Text Placeholder 2"/>
           <p:cNvSpPr>
             <a:spLocks noGrp="1"/>
           </p:cNvSpPr>
@@ -7918,7 +7918,7 @@
       </p:sp>
       <p:sp>
         <p:nvSpPr>
-          <p:cNvPr id="1378909655" name="Text Placeholder 3"/>
+          <p:cNvPr id="1882390533" name="Text Placeholder 3"/>
           <p:cNvSpPr>
             <a:spLocks noGrp="1"/>
           </p:cNvSpPr>
@@ -7988,7 +7988,7 @@
       </p:sp>
       <p:sp>
         <p:nvSpPr>
-          <p:cNvPr id="36315581" name="Text Placeholder 4"/>
+          <p:cNvPr id="1821758088" name="Text Placeholder 4"/>
           <p:cNvSpPr>
             <a:spLocks noGrp="1"/>
           </p:cNvSpPr>
@@ -8062,7 +8062,7 @@
       </p:sp>
       <p:sp>
         <p:nvSpPr>
-          <p:cNvPr id="2062711299" name="Text Placeholder 3"/>
+          <p:cNvPr id="1898725430" name="Text Placeholder 3"/>
           <p:cNvSpPr>
             <a:spLocks noGrp="1"/>
           </p:cNvSpPr>
@@ -8132,7 +8132,7 @@
       </p:sp>
       <p:sp>
         <p:nvSpPr>
-          <p:cNvPr id="2137805135" name="Text Placeholder 4"/>
+          <p:cNvPr id="270585860" name="Text Placeholder 4"/>
           <p:cNvSpPr>
             <a:spLocks noGrp="1"/>
           </p:cNvSpPr>
@@ -8206,7 +8206,7 @@
       </p:sp>
       <p:sp>
         <p:nvSpPr>
-          <p:cNvPr id="860718820" name="Text Placeholder 3"/>
+          <p:cNvPr id="472500792" name="Text Placeholder 3"/>
           <p:cNvSpPr>
             <a:spLocks noGrp="1"/>
           </p:cNvSpPr>
@@ -8276,7 +8276,7 @@
       </p:sp>
       <p:sp>
         <p:nvSpPr>
-          <p:cNvPr id="1422894238" name="Date Placeholder 2"/>
+          <p:cNvPr id="970873882" name="Date Placeholder 2"/>
           <p:cNvSpPr>
             <a:spLocks noGrp="1"/>
           </p:cNvSpPr>
@@ -8302,7 +8302,7 @@
       </p:sp>
       <p:sp>
         <p:nvSpPr>
-          <p:cNvPr id="1487245781" name="Footer Placeholder 3"/>
+          <p:cNvPr id="1575933730" name="Footer Placeholder 3"/>
           <p:cNvSpPr>
             <a:spLocks noGrp="1"/>
           </p:cNvSpPr>
@@ -8324,7 +8324,7 @@
       </p:sp>
       <p:sp>
         <p:nvSpPr>
-          <p:cNvPr id="1542647052" name="Slide Number Placeholder 4"/>
+          <p:cNvPr id="192018026" name="Slide Number Placeholder 4"/>
           <p:cNvSpPr>
             <a:spLocks noGrp="1"/>
           </p:cNvSpPr>
@@ -8375,7 +8375,7 @@
       </p:grpSpPr>
       <p:pic>
         <p:nvPicPr>
-          <p:cNvPr id="1113748233" name="Picture 14" descr="HD-ShadowLong.png"/>
+          <p:cNvPr id="1645990442" name="Picture 14" descr="HD-ShadowLong.png"/>
           <p:cNvPicPr>
             <a:picLocks noChangeAspect="1"/>
           </p:cNvPicPr>
@@ -8397,7 +8397,7 @@
       </p:pic>
       <p:pic>
         <p:nvPicPr>
-          <p:cNvPr id="826911965" name="Picture 15" descr="HD-ShadowShort.png"/>
+          <p:cNvPr id="1354810208" name="Picture 15" descr="HD-ShadowShort.png"/>
           <p:cNvPicPr>
             <a:picLocks noChangeAspect="1"/>
           </p:cNvPicPr>
@@ -8419,7 +8419,7 @@
       </p:pic>
       <p:sp>
         <p:nvSpPr>
-          <p:cNvPr id="1477900973" name="Rectangle 16"/>
+          <p:cNvPr id="1292919341" name="Rectangle 16"/>
           <p:cNvSpPr/>
           <p:nvPr/>
         </p:nvSpPr>
@@ -8460,7 +8460,7 @@
       </p:sp>
       <p:sp>
         <p:nvSpPr>
-          <p:cNvPr id="2042849925" name="Rectangle 17"/>
+          <p:cNvPr id="1430309795" name="Rectangle 17"/>
           <p:cNvSpPr/>
           <p:nvPr/>
         </p:nvSpPr>
@@ -8498,7 +8498,7 @@
       </p:sp>
       <p:sp>
         <p:nvSpPr>
-          <p:cNvPr id="484260401" name="Title 1"/>
+          <p:cNvPr id="285094060" name="Title 1"/>
           <p:cNvSpPr>
             <a:spLocks noGrp="1"/>
           </p:cNvSpPr>
@@ -8529,7 +8529,7 @@
       </p:sp>
       <p:sp>
         <p:nvSpPr>
-          <p:cNvPr id="1511384832" name="Text Placeholder 2"/>
+          <p:cNvPr id="276891140" name="Text Placeholder 2"/>
           <p:cNvSpPr>
             <a:spLocks noGrp="1"/>
           </p:cNvSpPr>
@@ -8603,7 +8603,7 @@
       </p:sp>
       <p:sp>
         <p:nvSpPr>
-          <p:cNvPr id="1301474807" name="Picture Placeholder 2"/>
+          <p:cNvPr id="41151580" name="Picture Placeholder 2"/>
           <p:cNvSpPr>
             <a:spLocks noChangeAspect="1" noGrp="1"/>
           </p:cNvSpPr>
@@ -8685,7 +8685,7 @@
       </p:sp>
       <p:sp>
         <p:nvSpPr>
-          <p:cNvPr id="39603913" name="Text Placeholder 3"/>
+          <p:cNvPr id="1934907076" name="Text Placeholder 3"/>
           <p:cNvSpPr>
             <a:spLocks noGrp="1"/>
           </p:cNvSpPr>
@@ -8755,7 +8755,7 @@
       </p:sp>
       <p:sp>
         <p:nvSpPr>
-          <p:cNvPr id="1746331201" name="Text Placeholder 4"/>
+          <p:cNvPr id="614845576" name="Text Placeholder 4"/>
           <p:cNvSpPr>
             <a:spLocks noGrp="1"/>
           </p:cNvSpPr>
@@ -8829,7 +8829,7 @@
       </p:sp>
       <p:sp>
         <p:nvSpPr>
-          <p:cNvPr id="1008202037" name="Picture Placeholder 2"/>
+          <p:cNvPr id="352062566" name="Picture Placeholder 2"/>
           <p:cNvSpPr>
             <a:spLocks noChangeAspect="1" noGrp="1"/>
           </p:cNvSpPr>
@@ -8911,7 +8911,7 @@
       </p:sp>
       <p:sp>
         <p:nvSpPr>
-          <p:cNvPr id="1194300476" name="Text Placeholder 3"/>
+          <p:cNvPr id="1559801176" name="Text Placeholder 3"/>
           <p:cNvSpPr>
             <a:spLocks noGrp="1"/>
           </p:cNvSpPr>
@@ -8981,7 +8981,7 @@
       </p:sp>
       <p:sp>
         <p:nvSpPr>
-          <p:cNvPr id="1897535357" name="Text Placeholder 4"/>
+          <p:cNvPr id="2140153181" name="Text Placeholder 4"/>
           <p:cNvSpPr>
             <a:spLocks noGrp="1"/>
           </p:cNvSpPr>
@@ -9055,7 +9055,7 @@
       </p:sp>
       <p:sp>
         <p:nvSpPr>
-          <p:cNvPr id="1975031898" name="Picture Placeholder 2"/>
+          <p:cNvPr id="674669207" name="Picture Placeholder 2"/>
           <p:cNvSpPr>
             <a:spLocks noChangeAspect="1" noGrp="1"/>
           </p:cNvSpPr>
@@ -9137,7 +9137,7 @@
       </p:sp>
       <p:sp>
         <p:nvSpPr>
-          <p:cNvPr id="229042417" name="Text Placeholder 3"/>
+          <p:cNvPr id="1559794484" name="Text Placeholder 3"/>
           <p:cNvSpPr>
             <a:spLocks noGrp="1"/>
           </p:cNvSpPr>
@@ -9207,7 +9207,7 @@
       </p:sp>
       <p:sp>
         <p:nvSpPr>
-          <p:cNvPr id="887408442" name="Date Placeholder 2"/>
+          <p:cNvPr id="31281894" name="Date Placeholder 2"/>
           <p:cNvSpPr>
             <a:spLocks noGrp="1"/>
           </p:cNvSpPr>
@@ -9233,7 +9233,7 @@
       </p:sp>
       <p:sp>
         <p:nvSpPr>
-          <p:cNvPr id="2088383631" name="Footer Placeholder 3"/>
+          <p:cNvPr id="750022855" name="Footer Placeholder 3"/>
           <p:cNvSpPr>
             <a:spLocks noGrp="1"/>
           </p:cNvSpPr>
@@ -9255,7 +9255,7 @@
       </p:sp>
       <p:sp>
         <p:nvSpPr>
-          <p:cNvPr id="859212284" name="Slide Number Placeholder 4"/>
+          <p:cNvPr id="1346498643" name="Slide Number Placeholder 4"/>
           <p:cNvSpPr>
             <a:spLocks noGrp="1"/>
           </p:cNvSpPr>
@@ -9306,7 +9306,7 @@
       </p:grpSpPr>
       <p:pic>
         <p:nvPicPr>
-          <p:cNvPr id="1679287587" name="Picture 6" descr="HD-ShadowLong.png"/>
+          <p:cNvPr id="1652516757" name="Picture 6" descr="HD-ShadowLong.png"/>
           <p:cNvPicPr>
             <a:picLocks noChangeAspect="1"/>
           </p:cNvPicPr>
@@ -9328,7 +9328,7 @@
       </p:pic>
       <p:pic>
         <p:nvPicPr>
-          <p:cNvPr id="1084336795" name="Picture 7" descr="HD-ShadowShort.png"/>
+          <p:cNvPr id="1493073894" name="Picture 7" descr="HD-ShadowShort.png"/>
           <p:cNvPicPr>
             <a:picLocks noChangeAspect="1"/>
           </p:cNvPicPr>
@@ -9350,7 +9350,7 @@
       </p:pic>
       <p:sp>
         <p:nvSpPr>
-          <p:cNvPr id="754436489" name="Rectangle 8"/>
+          <p:cNvPr id="706581129" name="Rectangle 8"/>
           <p:cNvSpPr/>
           <p:nvPr/>
         </p:nvSpPr>
@@ -9391,7 +9391,7 @@
       </p:sp>
       <p:sp>
         <p:nvSpPr>
-          <p:cNvPr id="1493504268" name="Rectangle 9"/>
+          <p:cNvPr id="1589870076" name="Rectangle 9"/>
           <p:cNvSpPr/>
           <p:nvPr/>
         </p:nvSpPr>
@@ -9429,7 +9429,7 @@
       </p:sp>
       <p:sp>
         <p:nvSpPr>
-          <p:cNvPr id="1102955243" name="Title 1"/>
+          <p:cNvPr id="1004436172" name="Title 1"/>
           <p:cNvSpPr>
             <a:spLocks noGrp="1"/>
           </p:cNvSpPr>
@@ -9459,7 +9459,7 @@
       </p:sp>
       <p:sp>
         <p:nvSpPr>
-          <p:cNvPr id="2025263155" name="Vertical Text Placeholder 2"/>
+          <p:cNvPr id="1658302288" name="Vertical Text Placeholder 2"/>
           <p:cNvSpPr>
             <a:spLocks noGrp="1"/>
           </p:cNvSpPr>
@@ -9525,7 +9525,7 @@
       </p:sp>
       <p:sp>
         <p:nvSpPr>
-          <p:cNvPr id="1717524952" name="Date Placeholder 3"/>
+          <p:cNvPr id="2118259019" name="Date Placeholder 3"/>
           <p:cNvSpPr>
             <a:spLocks noGrp="1"/>
           </p:cNvSpPr>
@@ -9551,7 +9551,7 @@
       </p:sp>
       <p:sp>
         <p:nvSpPr>
-          <p:cNvPr id="525386963" name="Footer Placeholder 4"/>
+          <p:cNvPr id="1298939837" name="Footer Placeholder 4"/>
           <p:cNvSpPr>
             <a:spLocks noGrp="1"/>
           </p:cNvSpPr>
@@ -9573,7 +9573,7 @@
       </p:sp>
       <p:sp>
         <p:nvSpPr>
-          <p:cNvPr id="658133550" name="Slide Number Placeholder 5"/>
+          <p:cNvPr id="735650626" name="Slide Number Placeholder 5"/>
           <p:cNvSpPr>
             <a:spLocks noGrp="1"/>
           </p:cNvSpPr>
@@ -9624,7 +9624,7 @@
       </p:grpSpPr>
       <p:sp>
         <p:nvSpPr>
-          <p:cNvPr id="1941920017" name="Rectangle 6"/>
+          <p:cNvPr id="1579822142" name="Rectangle 6"/>
           <p:cNvSpPr/>
           <p:nvPr/>
         </p:nvSpPr>
@@ -9665,7 +9665,7 @@
       </p:sp>
       <p:sp>
         <p:nvSpPr>
-          <p:cNvPr id="1337698340" name="Rectangle 7"/>
+          <p:cNvPr id="1676670777" name="Rectangle 7"/>
           <p:cNvSpPr/>
           <p:nvPr/>
         </p:nvSpPr>
@@ -9703,7 +9703,7 @@
       </p:sp>
       <p:sp>
         <p:nvSpPr>
-          <p:cNvPr id="1584361131" name="Vertical Title 1"/>
+          <p:cNvPr id="348164760" name="Vertical Title 1"/>
           <p:cNvSpPr>
             <a:spLocks noGrp="1"/>
           </p:cNvSpPr>
@@ -9734,7 +9734,7 @@
       </p:sp>
       <p:sp>
         <p:nvSpPr>
-          <p:cNvPr id="468252508" name="Vertical Text Placeholder 2"/>
+          <p:cNvPr id="1904941572" name="Vertical Text Placeholder 2"/>
           <p:cNvSpPr>
             <a:spLocks noGrp="1"/>
           </p:cNvSpPr>
@@ -9805,7 +9805,7 @@
       </p:sp>
       <p:sp>
         <p:nvSpPr>
-          <p:cNvPr id="274608831" name="Date Placeholder 3"/>
+          <p:cNvPr id="1691887511" name="Date Placeholder 3"/>
           <p:cNvSpPr>
             <a:spLocks noGrp="1"/>
           </p:cNvSpPr>
@@ -9836,7 +9836,7 @@
       </p:sp>
       <p:sp>
         <p:nvSpPr>
-          <p:cNvPr id="1096722963" name="Footer Placeholder 4"/>
+          <p:cNvPr id="92779191" name="Footer Placeholder 4"/>
           <p:cNvSpPr>
             <a:spLocks noGrp="1"/>
           </p:cNvSpPr>
@@ -9863,7 +9863,7 @@
       </p:sp>
       <p:sp>
         <p:nvSpPr>
-          <p:cNvPr id="2046805833" name="Slide Number Placeholder 5"/>
+          <p:cNvPr id="618751683" name="Slide Number Placeholder 5"/>
           <p:cNvSpPr>
             <a:spLocks noGrp="1"/>
           </p:cNvSpPr>
@@ -9923,7 +9923,7 @@
       </p:grpSpPr>
       <p:sp>
         <p:nvSpPr>
-          <p:cNvPr id="1620143013" name="Заголовок 1"/>
+          <p:cNvPr id="591645988" name="Заголовок 1"/>
           <p:cNvSpPr>
             <a:spLocks noGrp="1"/>
           </p:cNvSpPr>
@@ -9958,7 +9958,7 @@
       </p:sp>
       <p:sp>
         <p:nvSpPr>
-          <p:cNvPr id="677369185" name="Текст 2"/>
+          <p:cNvPr id="1534187374" name="Текст 2"/>
           <p:cNvSpPr>
             <a:spLocks noGrp="1"/>
           </p:cNvSpPr>
@@ -10080,7 +10080,7 @@
       </p:sp>
       <p:sp>
         <p:nvSpPr>
-          <p:cNvPr id="1044166835" name="Дата 3"/>
+          <p:cNvPr id="575576146" name="Дата 3"/>
           <p:cNvSpPr>
             <a:spLocks noGrp="1"/>
           </p:cNvSpPr>
@@ -10106,7 +10106,7 @@
       </p:sp>
       <p:sp>
         <p:nvSpPr>
-          <p:cNvPr id="700251629" name="Нижний колонтитул 4"/>
+          <p:cNvPr id="508223457" name="Нижний колонтитул 4"/>
           <p:cNvSpPr>
             <a:spLocks noGrp="1"/>
           </p:cNvSpPr>
@@ -10128,7 +10128,7 @@
       </p:sp>
       <p:sp>
         <p:nvSpPr>
-          <p:cNvPr id="393604612" name="Номер слайда 5"/>
+          <p:cNvPr id="2133204204" name="Номер слайда 5"/>
           <p:cNvSpPr>
             <a:spLocks noGrp="1"/>
           </p:cNvSpPr>
@@ -10179,7 +10179,7 @@
       </p:grpSpPr>
       <p:sp>
         <p:nvSpPr>
-          <p:cNvPr id="1142897589" name="Заголовок 1"/>
+          <p:cNvPr id="1650488093" name="Заголовок 1"/>
           <p:cNvSpPr>
             <a:spLocks noGrp="1"/>
           </p:cNvSpPr>
@@ -10205,7 +10205,7 @@
       </p:sp>
       <p:sp>
         <p:nvSpPr>
-          <p:cNvPr id="1152410086" name="Объект 2"/>
+          <p:cNvPr id="362469501" name="Объект 2"/>
           <p:cNvSpPr>
             <a:spLocks noGrp="1"/>
           </p:cNvSpPr>
@@ -10276,7 +10276,7 @@
       </p:sp>
       <p:sp>
         <p:nvSpPr>
-          <p:cNvPr id="1245827266" name="Объект 3"/>
+          <p:cNvPr id="56365839" name="Объект 3"/>
           <p:cNvSpPr>
             <a:spLocks noGrp="1"/>
           </p:cNvSpPr>
@@ -10347,7 +10347,7 @@
       </p:sp>
       <p:sp>
         <p:nvSpPr>
-          <p:cNvPr id="779700217" name="Дата 4"/>
+          <p:cNvPr id="1448704947" name="Дата 4"/>
           <p:cNvSpPr>
             <a:spLocks noGrp="1"/>
           </p:cNvSpPr>
@@ -10373,7 +10373,7 @@
       </p:sp>
       <p:sp>
         <p:nvSpPr>
-          <p:cNvPr id="1706472091" name="Нижний колонтитул 5"/>
+          <p:cNvPr id="46957694" name="Нижний колонтитул 5"/>
           <p:cNvSpPr>
             <a:spLocks noGrp="1"/>
           </p:cNvSpPr>
@@ -10395,7 +10395,7 @@
       </p:sp>
       <p:sp>
         <p:nvSpPr>
-          <p:cNvPr id="1742585337" name="Номер слайда 6"/>
+          <p:cNvPr id="20609956" name="Номер слайда 6"/>
           <p:cNvSpPr>
             <a:spLocks noGrp="1"/>
           </p:cNvSpPr>
@@ -10446,7 +10446,7 @@
       </p:grpSpPr>
       <p:sp>
         <p:nvSpPr>
-          <p:cNvPr id="676712213" name="Заголовок 1"/>
+          <p:cNvPr id="1242151261" name="Заголовок 1"/>
           <p:cNvSpPr>
             <a:spLocks noGrp="1"/>
           </p:cNvSpPr>
@@ -10477,7 +10477,7 @@
       </p:sp>
       <p:sp>
         <p:nvSpPr>
-          <p:cNvPr id="666560356" name="Текст 2"/>
+          <p:cNvPr id="1842301384" name="Текст 2"/>
           <p:cNvSpPr>
             <a:spLocks noGrp="1"/>
           </p:cNvSpPr>
@@ -10545,7 +10545,7 @@
       </p:sp>
       <p:sp>
         <p:nvSpPr>
-          <p:cNvPr id="272822471" name="Объект 3"/>
+          <p:cNvPr id="392195090" name="Объект 3"/>
           <p:cNvSpPr>
             <a:spLocks noGrp="1"/>
           </p:cNvSpPr>
@@ -10616,7 +10616,7 @@
       </p:sp>
       <p:sp>
         <p:nvSpPr>
-          <p:cNvPr id="1997113485" name="Текст 4"/>
+          <p:cNvPr id="1865615867" name="Текст 4"/>
           <p:cNvSpPr>
             <a:spLocks noGrp="1"/>
           </p:cNvSpPr>
@@ -10684,7 +10684,7 @@
       </p:sp>
       <p:sp>
         <p:nvSpPr>
-          <p:cNvPr id="847085397" name="Объект 5"/>
+          <p:cNvPr id="1593258210" name="Объект 5"/>
           <p:cNvSpPr>
             <a:spLocks noGrp="1"/>
           </p:cNvSpPr>
@@ -10755,7 +10755,7 @@
       </p:sp>
       <p:sp>
         <p:nvSpPr>
-          <p:cNvPr id="944403918" name="Дата 6"/>
+          <p:cNvPr id="1634035583" name="Дата 6"/>
           <p:cNvSpPr>
             <a:spLocks noGrp="1"/>
           </p:cNvSpPr>
@@ -10781,7 +10781,7 @@
       </p:sp>
       <p:sp>
         <p:nvSpPr>
-          <p:cNvPr id="985663556" name="Нижний колонтитул 7"/>
+          <p:cNvPr id="937505948" name="Нижний колонтитул 7"/>
           <p:cNvSpPr>
             <a:spLocks noGrp="1"/>
           </p:cNvSpPr>
@@ -10803,7 +10803,7 @@
       </p:sp>
       <p:sp>
         <p:nvSpPr>
-          <p:cNvPr id="918442414" name="Номер слайда 8"/>
+          <p:cNvPr id="249317406" name="Номер слайда 8"/>
           <p:cNvSpPr>
             <a:spLocks noGrp="1"/>
           </p:cNvSpPr>
@@ -10854,7 +10854,7 @@
       </p:grpSpPr>
       <p:sp>
         <p:nvSpPr>
-          <p:cNvPr id="2070237272" name="Заголовок 1"/>
+          <p:cNvPr id="810583327" name="Заголовок 1"/>
           <p:cNvSpPr>
             <a:spLocks noGrp="1"/>
           </p:cNvSpPr>
@@ -10880,7 +10880,7 @@
       </p:sp>
       <p:sp>
         <p:nvSpPr>
-          <p:cNvPr id="487727434" name="Дата 2"/>
+          <p:cNvPr id="1041368458" name="Дата 2"/>
           <p:cNvSpPr>
             <a:spLocks noGrp="1"/>
           </p:cNvSpPr>
@@ -10906,7 +10906,7 @@
       </p:sp>
       <p:sp>
         <p:nvSpPr>
-          <p:cNvPr id="1757747789" name="Нижний колонтитул 3"/>
+          <p:cNvPr id="312357175" name="Нижний колонтитул 3"/>
           <p:cNvSpPr>
             <a:spLocks noGrp="1"/>
           </p:cNvSpPr>
@@ -10928,7 +10928,7 @@
       </p:sp>
       <p:sp>
         <p:nvSpPr>
-          <p:cNvPr id="159579350" name="Номер слайда 4"/>
+          <p:cNvPr id="1207151119" name="Номер слайда 4"/>
           <p:cNvSpPr>
             <a:spLocks noGrp="1"/>
           </p:cNvSpPr>
@@ -10979,7 +10979,7 @@
       </p:grpSpPr>
       <p:sp>
         <p:nvSpPr>
-          <p:cNvPr id="1135102512" name="Дата 1"/>
+          <p:cNvPr id="2093100909" name="Дата 1"/>
           <p:cNvSpPr>
             <a:spLocks noGrp="1"/>
           </p:cNvSpPr>
@@ -11005,7 +11005,7 @@
       </p:sp>
       <p:sp>
         <p:nvSpPr>
-          <p:cNvPr id="169586844" name="Нижний колонтитул 2"/>
+          <p:cNvPr id="1267232492" name="Нижний колонтитул 2"/>
           <p:cNvSpPr>
             <a:spLocks noGrp="1"/>
           </p:cNvSpPr>
@@ -11027,7 +11027,7 @@
       </p:sp>
       <p:sp>
         <p:nvSpPr>
-          <p:cNvPr id="608500691" name="Номер слайда 3"/>
+          <p:cNvPr id="721910885" name="Номер слайда 3"/>
           <p:cNvSpPr>
             <a:spLocks noGrp="1"/>
           </p:cNvSpPr>
@@ -11078,7 +11078,7 @@
       </p:grpSpPr>
       <p:sp>
         <p:nvSpPr>
-          <p:cNvPr id="504147749" name="Заголовок 1"/>
+          <p:cNvPr id="1941388685" name="Заголовок 1"/>
           <p:cNvSpPr>
             <a:spLocks noGrp="1"/>
           </p:cNvSpPr>
@@ -11113,7 +11113,7 @@
       </p:sp>
       <p:sp>
         <p:nvSpPr>
-          <p:cNvPr id="369209786" name="Объект 2"/>
+          <p:cNvPr id="1647706847" name="Объект 2"/>
           <p:cNvSpPr>
             <a:spLocks noGrp="1"/>
           </p:cNvSpPr>
@@ -11212,7 +11212,7 @@
       </p:sp>
       <p:sp>
         <p:nvSpPr>
-          <p:cNvPr id="1374886731" name="Текст 3"/>
+          <p:cNvPr id="234275794" name="Текст 3"/>
           <p:cNvSpPr>
             <a:spLocks noGrp="1"/>
           </p:cNvSpPr>
@@ -11280,7 +11280,7 @@
       </p:sp>
       <p:sp>
         <p:nvSpPr>
-          <p:cNvPr id="2025535815" name="Дата 4"/>
+          <p:cNvPr id="129125042" name="Дата 4"/>
           <p:cNvSpPr>
             <a:spLocks noGrp="1"/>
           </p:cNvSpPr>
@@ -11306,7 +11306,7 @@
       </p:sp>
       <p:sp>
         <p:nvSpPr>
-          <p:cNvPr id="279079964" name="Нижний колонтитул 5"/>
+          <p:cNvPr id="970550267" name="Нижний колонтитул 5"/>
           <p:cNvSpPr>
             <a:spLocks noGrp="1"/>
           </p:cNvSpPr>
@@ -11328,7 +11328,7 @@
       </p:sp>
       <p:sp>
         <p:nvSpPr>
-          <p:cNvPr id="927312294" name="Номер слайда 6"/>
+          <p:cNvPr id="2031982839" name="Номер слайда 6"/>
           <p:cNvSpPr>
             <a:spLocks noGrp="1"/>
           </p:cNvSpPr>
@@ -11379,7 +11379,7 @@
       </p:grpSpPr>
       <p:sp>
         <p:nvSpPr>
-          <p:cNvPr id="827928724" name="Заголовок 1"/>
+          <p:cNvPr id="1670765905" name="Заголовок 1"/>
           <p:cNvSpPr>
             <a:spLocks noGrp="1"/>
           </p:cNvSpPr>
@@ -11414,7 +11414,7 @@
       </p:sp>
       <p:sp>
         <p:nvSpPr>
-          <p:cNvPr id="1160443437" name="Рисунок 2"/>
+          <p:cNvPr id="1132818048" name="Рисунок 2"/>
           <p:cNvSpPr>
             <a:spLocks noGrp="1"/>
           </p:cNvSpPr>
@@ -11478,7 +11478,7 @@
       </p:sp>
       <p:sp>
         <p:nvSpPr>
-          <p:cNvPr id="1561576975" name="Текст 3"/>
+          <p:cNvPr id="720037525" name="Текст 3"/>
           <p:cNvSpPr>
             <a:spLocks noGrp="1"/>
           </p:cNvSpPr>
@@ -11546,7 +11546,7 @@
       </p:sp>
       <p:sp>
         <p:nvSpPr>
-          <p:cNvPr id="1821633118" name="Дата 4"/>
+          <p:cNvPr id="527548720" name="Дата 4"/>
           <p:cNvSpPr>
             <a:spLocks noGrp="1"/>
           </p:cNvSpPr>
@@ -11572,7 +11572,7 @@
       </p:sp>
       <p:sp>
         <p:nvSpPr>
-          <p:cNvPr id="2106429213" name="Нижний колонтитул 5"/>
+          <p:cNvPr id="649449264" name="Нижний колонтитул 5"/>
           <p:cNvSpPr>
             <a:spLocks noGrp="1"/>
           </p:cNvSpPr>
@@ -11594,7 +11594,7 @@
       </p:sp>
       <p:sp>
         <p:nvSpPr>
-          <p:cNvPr id="685384174" name="Номер слайда 6"/>
+          <p:cNvPr id="1760301776" name="Номер слайда 6"/>
           <p:cNvSpPr>
             <a:spLocks noGrp="1"/>
           </p:cNvSpPr>
@@ -11650,7 +11650,7 @@
       </p:grpSpPr>
       <p:sp>
         <p:nvSpPr>
-          <p:cNvPr id="1459119225" name="Заголовок 1"/>
+          <p:cNvPr id="1753740332" name="Заголовок 1"/>
           <p:cNvSpPr>
             <a:spLocks noGrp="1"/>
           </p:cNvSpPr>
@@ -11686,7 +11686,7 @@
       </p:sp>
       <p:sp>
         <p:nvSpPr>
-          <p:cNvPr id="500034345" name="Текст 2"/>
+          <p:cNvPr id="955472939" name="Текст 2"/>
           <p:cNvSpPr>
             <a:spLocks noGrp="1"/>
           </p:cNvSpPr>
@@ -11762,7 +11762,7 @@
       </p:sp>
       <p:sp>
         <p:nvSpPr>
-          <p:cNvPr id="209470484" name="Дата 3"/>
+          <p:cNvPr id="1340174794" name="Дата 3"/>
           <p:cNvSpPr>
             <a:spLocks noGrp="1"/>
           </p:cNvSpPr>
@@ -11806,7 +11806,7 @@
       </p:sp>
       <p:sp>
         <p:nvSpPr>
-          <p:cNvPr id="400323147" name="Нижний колонтитул 4"/>
+          <p:cNvPr id="102164760" name="Нижний колонтитул 4"/>
           <p:cNvSpPr>
             <a:spLocks noGrp="1"/>
           </p:cNvSpPr>
@@ -11846,7 +11846,7 @@
       </p:sp>
       <p:sp>
         <p:nvSpPr>
-          <p:cNvPr id="70617587" name="Номер слайда 5"/>
+          <p:cNvPr id="692280782" name="Номер слайда 5"/>
           <p:cNvSpPr>
             <a:spLocks noGrp="1"/>
           </p:cNvSpPr>
@@ -12257,7 +12257,7 @@
       </p:grpSpPr>
       <p:sp>
         <p:nvSpPr>
-          <p:cNvPr id="2035640291" name="Прямоугольник 3"/>
+          <p:cNvPr id="1795020893" name="Прямоугольник 3"/>
           <p:cNvSpPr/>
           <p:nvPr/>
         </p:nvSpPr>
@@ -12307,7 +12307,7 @@
       </p:sp>
       <p:sp>
         <p:nvSpPr>
-          <p:cNvPr id="917529796" name="Прямоугольник 4"/>
+          <p:cNvPr id="522773401" name="Прямоугольник 4"/>
           <p:cNvSpPr/>
           <p:nvPr/>
         </p:nvSpPr>
@@ -12357,7 +12357,7 @@
       </p:sp>
       <p:sp>
         <p:nvSpPr>
-          <p:cNvPr id="1621466560" name="Заголовок 1"/>
+          <p:cNvPr id="1740115863" name="Заголовок 1"/>
           <p:cNvSpPr>
             <a:spLocks noGrp="1"/>
           </p:cNvSpPr>
@@ -12422,7 +12422,7 @@
       </p:sp>
       <p:sp>
         <p:nvSpPr>
-          <p:cNvPr id="94531969" name="Подзаголовок 2"/>
+          <p:cNvPr id="913434310" name="Подзаголовок 2"/>
           <p:cNvSpPr>
             <a:spLocks noGrp="1"/>
           </p:cNvSpPr>
@@ -12501,7 +12501,7 @@
       </p:sp>
       <p:sp>
         <p:nvSpPr>
-          <p:cNvPr id="875720329" name="Заголовок 1"/>
+          <p:cNvPr id="1173006462" name="Заголовок 1"/>
           <p:cNvSpPr>
             <a:spLocks noGrp="1"/>
           </p:cNvSpPr>
@@ -12563,7 +12563,7 @@
       </p:sp>
       <p:sp>
         <p:nvSpPr>
-          <p:cNvPr id="33718914" name="Заголовок 1"/>
+          <p:cNvPr id="614951249" name="Заголовок 1"/>
           <p:cNvSpPr>
             <a:spLocks noGrp="1"/>
           </p:cNvSpPr>
@@ -12625,7 +12625,7 @@
       </p:sp>
       <p:sp>
         <p:nvSpPr>
-          <p:cNvPr id="250831301" name="Заголовок 1"/>
+          <p:cNvPr id="1678758342" name="Заголовок 1"/>
           <p:cNvSpPr>
             <a:spLocks noGrp="1"/>
           </p:cNvSpPr>
@@ -12712,7 +12712,7 @@
       </p:sp>
       <p:sp>
         <p:nvSpPr>
-          <p:cNvPr id="652760012" name="Заголовок 1"/>
+          <p:cNvPr id="409678823" name="Заголовок 1"/>
           <p:cNvSpPr>
             <a:spLocks noGrp="1"/>
           </p:cNvSpPr>
@@ -12840,7 +12840,7 @@
       </p:grpSpPr>
       <p:sp>
         <p:nvSpPr>
-          <p:cNvPr id="1124795381" name="Объект 2"/>
+          <p:cNvPr id="349654219" name="Объект 2"/>
           <p:cNvSpPr>
             <a:spLocks noGrp="1"/>
           </p:cNvSpPr>
@@ -12961,7 +12961,7 @@
       </p:sp>
       <p:sp>
         <p:nvSpPr>
-          <p:cNvPr id="223051315" name="Номер слайда 3"/>
+          <p:cNvPr id="2035826893" name="Номер слайда 3"/>
           <p:cNvSpPr>
             <a:spLocks noGrp="1"/>
           </p:cNvSpPr>
@@ -13002,7 +13002,7 @@
       </p:sp>
       <p:sp>
         <p:nvSpPr>
-          <p:cNvPr id="1447051687" name="Прямоугольник 6"/>
+          <p:cNvPr id="1134814939" name="Прямоугольник 6"/>
           <p:cNvSpPr/>
           <p:nvPr/>
         </p:nvSpPr>
@@ -13052,7 +13052,7 @@
       </p:sp>
       <p:sp>
         <p:nvSpPr>
-          <p:cNvPr id="391797941" name="Прямоугольник 7"/>
+          <p:cNvPr id="1151867970" name="Прямоугольник 7"/>
           <p:cNvSpPr/>
           <p:nvPr/>
         </p:nvSpPr>
@@ -13102,7 +13102,7 @@
       </p:sp>
       <p:sp>
         <p:nvSpPr>
-          <p:cNvPr id="796153121" name="Заголовок 1"/>
+          <p:cNvPr id="284852237" name="Заголовок 1"/>
           <p:cNvSpPr>
             <a:spLocks noGrp="1"/>
           </p:cNvSpPr>
@@ -13154,7 +13154,7 @@
       </p:sp>
       <p:pic>
         <p:nvPicPr>
-          <p:cNvPr id="837484347" name=""/>
+          <p:cNvPr id="1531096696" name=""/>
           <p:cNvPicPr>
             <a:picLocks noChangeAspect="1"/>
           </p:cNvPicPr>
@@ -13248,7 +13248,7 @@
       </p:grpSpPr>
       <p:sp>
         <p:nvSpPr>
-          <p:cNvPr id="408398221" name="Объект 2"/>
+          <p:cNvPr id="2031984234" name="Объект 2"/>
           <p:cNvSpPr>
             <a:spLocks noGrp="1"/>
           </p:cNvSpPr>
@@ -13347,7 +13347,7 @@
       </p:sp>
       <p:sp>
         <p:nvSpPr>
-          <p:cNvPr id="1771061276" name="Номер слайда 3"/>
+          <p:cNvPr id="1878264434" name="Номер слайда 3"/>
           <p:cNvSpPr>
             <a:spLocks noGrp="1"/>
           </p:cNvSpPr>
@@ -13388,7 +13388,7 @@
       </p:sp>
       <p:sp>
         <p:nvSpPr>
-          <p:cNvPr id="1190051559" name="Прямоугольник 5"/>
+          <p:cNvPr id="1776334560" name="Прямоугольник 5"/>
           <p:cNvSpPr/>
           <p:nvPr/>
         </p:nvSpPr>
@@ -13438,7 +13438,7 @@
       </p:sp>
       <p:sp>
         <p:nvSpPr>
-          <p:cNvPr id="172595363" name="Прямоугольник 6"/>
+          <p:cNvPr id="1866550093" name="Прямоугольник 6"/>
           <p:cNvSpPr/>
           <p:nvPr/>
         </p:nvSpPr>
@@ -13488,7 +13488,7 @@
       </p:sp>
       <p:sp>
         <p:nvSpPr>
-          <p:cNvPr id="1592403614" name="Заголовок 1"/>
+          <p:cNvPr id="1766437462" name="Заголовок 1"/>
           <p:cNvSpPr>
             <a:spLocks noGrp="1"/>
           </p:cNvSpPr>
@@ -13525,7 +13525,7 @@
       </p:sp>
       <p:pic>
         <p:nvPicPr>
-          <p:cNvPr id="1321009105" name=""/>
+          <p:cNvPr id="613794049" name=""/>
           <p:cNvPicPr>
             <a:picLocks noChangeAspect="1"/>
           </p:cNvPicPr>
@@ -13543,7 +13543,7 @@
         </p:blipFill>
         <p:spPr bwMode="auto">
           <a:xfrm flipH="0" flipV="0">
-            <a:off x="5025438" y="1481884"/>
+            <a:off x="5025437" y="1481884"/>
             <a:ext cx="7175859" cy="5010990"/>
           </a:xfrm>
           <a:prstGeom prst="rect">
@@ -13619,7 +13619,7 @@
       </p:grpSpPr>
       <p:sp>
         <p:nvSpPr>
-          <p:cNvPr id="491396386" name="Объект 2"/>
+          <p:cNvPr id="1526714233" name="Объект 2"/>
           <p:cNvSpPr>
             <a:spLocks noGrp="1"/>
           </p:cNvSpPr>
@@ -13717,7 +13717,7 @@
       </p:sp>
       <p:sp>
         <p:nvSpPr>
-          <p:cNvPr id="17392764" name="Номер слайда 3"/>
+          <p:cNvPr id="1602057177" name="Номер слайда 3"/>
           <p:cNvSpPr>
             <a:spLocks noGrp="1"/>
           </p:cNvSpPr>
@@ -13758,7 +13758,7 @@
       </p:sp>
       <p:sp>
         <p:nvSpPr>
-          <p:cNvPr id="1810838613" name="Прямоугольник 5"/>
+          <p:cNvPr id="178426784" name="Прямоугольник 5"/>
           <p:cNvSpPr/>
           <p:nvPr/>
         </p:nvSpPr>
@@ -13808,7 +13808,7 @@
       </p:sp>
       <p:sp>
         <p:nvSpPr>
-          <p:cNvPr id="1907668671" name="Прямоугольник 6"/>
+          <p:cNvPr id="92457800" name="Прямоугольник 6"/>
           <p:cNvSpPr/>
           <p:nvPr/>
         </p:nvSpPr>
@@ -13858,7 +13858,7 @@
       </p:sp>
       <p:sp>
         <p:nvSpPr>
-          <p:cNvPr id="1986948501" name="Заголовок 1"/>
+          <p:cNvPr id="1899184066" name="Заголовок 1"/>
           <p:cNvSpPr>
             <a:spLocks noGrp="1"/>
           </p:cNvSpPr>
@@ -13923,7 +13923,7 @@
       </p:sp>
       <p:pic>
         <p:nvPicPr>
-          <p:cNvPr id="827371434" name=""/>
+          <p:cNvPr id="270544937" name=""/>
           <p:cNvPicPr>
             <a:picLocks noChangeAspect="1"/>
           </p:cNvPicPr>
@@ -14017,7 +14017,7 @@
       </p:grpSpPr>
       <p:sp>
         <p:nvSpPr>
-          <p:cNvPr id="136340521" name="Объект 2"/>
+          <p:cNvPr id="1491693079" name="Объект 2"/>
           <p:cNvSpPr>
             <a:spLocks noGrp="1"/>
           </p:cNvSpPr>
@@ -14092,7 +14092,7 @@
       </p:sp>
       <p:sp>
         <p:nvSpPr>
-          <p:cNvPr id="1131737907" name="Номер слайда 3"/>
+          <p:cNvPr id="794364055" name="Номер слайда 3"/>
           <p:cNvSpPr>
             <a:spLocks noGrp="1"/>
           </p:cNvSpPr>
@@ -14133,7 +14133,7 @@
       </p:sp>
       <p:sp>
         <p:nvSpPr>
-          <p:cNvPr id="878846792" name="Прямоугольник 5"/>
+          <p:cNvPr id="1894471373" name="Прямоугольник 5"/>
           <p:cNvSpPr/>
           <p:nvPr/>
         </p:nvSpPr>
@@ -14183,7 +14183,7 @@
       </p:sp>
       <p:sp>
         <p:nvSpPr>
-          <p:cNvPr id="943646927" name="Прямоугольник 6"/>
+          <p:cNvPr id="2132353222" name="Прямоугольник 6"/>
           <p:cNvSpPr/>
           <p:nvPr/>
         </p:nvSpPr>
@@ -14233,7 +14233,7 @@
       </p:sp>
       <p:sp>
         <p:nvSpPr>
-          <p:cNvPr id="1175389652" name="Заголовок 1"/>
+          <p:cNvPr id="1010093458" name="Заголовок 1"/>
           <p:cNvSpPr>
             <a:spLocks noGrp="1"/>
           </p:cNvSpPr>
@@ -14274,7 +14274,7 @@
       </p:sp>
       <p:pic>
         <p:nvPicPr>
-          <p:cNvPr id="1094439899" name=""/>
+          <p:cNvPr id="1227987581" name=""/>
           <p:cNvPicPr>
             <a:picLocks noChangeAspect="1"/>
           </p:cNvPicPr>
@@ -14292,7 +14292,7 @@
         </p:blipFill>
         <p:spPr bwMode="auto">
           <a:xfrm flipH="0" flipV="0">
-            <a:off x="4996911" y="1396865"/>
+            <a:off x="4996910" y="1396865"/>
             <a:ext cx="6875366" cy="5133470"/>
           </a:xfrm>
           <a:prstGeom prst="rect">
@@ -14368,7 +14368,7 @@
       </p:grpSpPr>
       <p:sp>
         <p:nvSpPr>
-          <p:cNvPr id="506611265" name="Объект 2"/>
+          <p:cNvPr id="1256890979" name="Объект 2"/>
           <p:cNvSpPr>
             <a:spLocks noGrp="1"/>
           </p:cNvSpPr>
@@ -14465,7 +14465,7 @@
       </p:sp>
       <p:sp>
         <p:nvSpPr>
-          <p:cNvPr id="776025192" name="Номер слайда 3"/>
+          <p:cNvPr id="1162946526" name="Номер слайда 3"/>
           <p:cNvSpPr>
             <a:spLocks noGrp="1"/>
           </p:cNvSpPr>
@@ -14506,7 +14506,7 @@
       </p:sp>
       <p:sp>
         <p:nvSpPr>
-          <p:cNvPr id="1456219130" name="Прямоугольник 4"/>
+          <p:cNvPr id="1747357668" name="Прямоугольник 4"/>
           <p:cNvSpPr/>
           <p:nvPr/>
         </p:nvSpPr>
@@ -14556,7 +14556,7 @@
       </p:sp>
       <p:sp>
         <p:nvSpPr>
-          <p:cNvPr id="572534065" name="Прямоугольник 5"/>
+          <p:cNvPr id="1346254602" name="Прямоугольник 5"/>
           <p:cNvSpPr/>
           <p:nvPr/>
         </p:nvSpPr>
@@ -14606,7 +14606,7 @@
       </p:sp>
       <p:sp>
         <p:nvSpPr>
-          <p:cNvPr id="46940852" name="Заголовок 1"/>
+          <p:cNvPr id="1275204830" name="Заголовок 1"/>
           <p:cNvSpPr>
             <a:spLocks noGrp="1"/>
           </p:cNvSpPr>
@@ -14645,7 +14645,7 @@
       </p:sp>
       <p:pic>
         <p:nvPicPr>
-          <p:cNvPr id="2145269862" name=""/>
+          <p:cNvPr id="235346357" name=""/>
           <p:cNvPicPr>
             <a:picLocks noChangeAspect="1"/>
           </p:cNvPicPr>
@@ -14733,7 +14733,7 @@
       </p:grpSpPr>
       <p:sp>
         <p:nvSpPr>
-          <p:cNvPr id="415279506" name="Объект 2"/>
+          <p:cNvPr id="48757452" name="Объект 2"/>
           <p:cNvSpPr>
             <a:spLocks noGrp="1"/>
           </p:cNvSpPr>
@@ -14882,7 +14882,7 @@
       </p:sp>
       <p:sp>
         <p:nvSpPr>
-          <p:cNvPr id="1154533369" name="Номер слайда 3"/>
+          <p:cNvPr id="206755022" name="Номер слайда 3"/>
           <p:cNvSpPr>
             <a:spLocks noGrp="1"/>
           </p:cNvSpPr>
@@ -14923,7 +14923,7 @@
       </p:sp>
       <p:sp>
         <p:nvSpPr>
-          <p:cNvPr id="654524633" name="Прямоугольник 4"/>
+          <p:cNvPr id="991181727" name="Прямоугольник 4"/>
           <p:cNvSpPr/>
           <p:nvPr/>
         </p:nvSpPr>
@@ -14973,7 +14973,7 @@
       </p:sp>
       <p:sp>
         <p:nvSpPr>
-          <p:cNvPr id="364241861" name="Прямоугольник 5"/>
+          <p:cNvPr id="2145317706" name="Прямоугольник 5"/>
           <p:cNvSpPr/>
           <p:nvPr/>
         </p:nvSpPr>
@@ -15023,7 +15023,7 @@
       </p:sp>
       <p:sp>
         <p:nvSpPr>
-          <p:cNvPr id="1154214127" name="Заголовок 1"/>
+          <p:cNvPr id="462162977" name="Заголовок 1"/>
           <p:cNvSpPr>
             <a:spLocks noGrp="1"/>
           </p:cNvSpPr>
@@ -15128,7 +15128,7 @@
       </p:grpSpPr>
       <p:sp>
         <p:nvSpPr>
-          <p:cNvPr id="1178860012" name="Объект 2"/>
+          <p:cNvPr id="1694982185" name="Объект 2"/>
           <p:cNvSpPr>
             <a:spLocks noGrp="1"/>
           </p:cNvSpPr>
@@ -15169,7 +15169,7 @@
       </p:sp>
       <p:sp>
         <p:nvSpPr>
-          <p:cNvPr id="591398118" name="Номер слайда 3"/>
+          <p:cNvPr id="1615170719" name="Номер слайда 3"/>
           <p:cNvSpPr>
             <a:spLocks noGrp="1"/>
           </p:cNvSpPr>
@@ -15210,7 +15210,7 @@
       </p:sp>
       <p:sp>
         <p:nvSpPr>
-          <p:cNvPr id="960061280" name="Прямоугольник 4"/>
+          <p:cNvPr id="50905720" name="Прямоугольник 4"/>
           <p:cNvSpPr/>
           <p:nvPr/>
         </p:nvSpPr>
@@ -15260,7 +15260,7 @@
       </p:sp>
       <p:sp>
         <p:nvSpPr>
-          <p:cNvPr id="82881855" name="Прямоугольник 5"/>
+          <p:cNvPr id="1170983545" name="Прямоугольник 5"/>
           <p:cNvSpPr/>
           <p:nvPr/>
         </p:nvSpPr>
@@ -15310,7 +15310,7 @@
       </p:sp>
       <p:sp>
         <p:nvSpPr>
-          <p:cNvPr id="1298019095" name="Заголовок 1"/>
+          <p:cNvPr id="954249315" name="Заголовок 1"/>
           <p:cNvSpPr>
             <a:spLocks noGrp="1"/>
           </p:cNvSpPr>
@@ -15320,7 +15320,7 @@
         </p:nvSpPr>
         <p:spPr bwMode="auto">
           <a:xfrm>
-            <a:off x="838199" y="18254"/>
+            <a:off x="838198" y="18254"/>
             <a:ext cx="10515600" cy="1325562"/>
           </a:xfrm>
         </p:spPr>
@@ -15415,7 +15415,7 @@
       </p:grpSpPr>
       <p:sp>
         <p:nvSpPr>
-          <p:cNvPr id="1692479279" name="Объект 2"/>
+          <p:cNvPr id="757263584" name="Объект 2"/>
           <p:cNvSpPr>
             <a:spLocks noGrp="1"/>
           </p:cNvSpPr>
@@ -15441,7 +15441,7 @@
       </p:sp>
       <p:sp>
         <p:nvSpPr>
-          <p:cNvPr id="1686578090" name="Номер слайда 3"/>
+          <p:cNvPr id="1808773600" name="Номер слайда 3"/>
           <p:cNvSpPr>
             <a:spLocks noGrp="1"/>
           </p:cNvSpPr>
@@ -15482,7 +15482,7 @@
       </p:sp>
       <p:sp>
         <p:nvSpPr>
-          <p:cNvPr id="1389914587" name="Прямоугольник 4"/>
+          <p:cNvPr id="1574214106" name="Прямоугольник 4"/>
           <p:cNvSpPr/>
           <p:nvPr/>
         </p:nvSpPr>
@@ -15532,7 +15532,7 @@
       </p:sp>
       <p:sp>
         <p:nvSpPr>
-          <p:cNvPr id="1095420108" name="Прямоугольник 5"/>
+          <p:cNvPr id="942950245" name="Прямоугольник 5"/>
           <p:cNvSpPr/>
           <p:nvPr/>
         </p:nvSpPr>
@@ -15582,7 +15582,7 @@
       </p:sp>
       <p:sp>
         <p:nvSpPr>
-          <p:cNvPr id="2039413330" name="Заголовок 1"/>
+          <p:cNvPr id="93761591" name="Заголовок 1"/>
           <p:cNvSpPr>
             <a:spLocks noGrp="1"/>
           </p:cNvSpPr>
@@ -15687,7 +15687,7 @@
       </p:grpSpPr>
       <p:sp>
         <p:nvSpPr>
-          <p:cNvPr id="622541533" name="Прямоугольник 3"/>
+          <p:cNvPr id="354833914" name="Прямоугольник 3"/>
           <p:cNvSpPr/>
           <p:nvPr/>
         </p:nvSpPr>
@@ -15737,7 +15737,7 @@
       </p:sp>
       <p:sp>
         <p:nvSpPr>
-          <p:cNvPr id="431252980" name="Прямоугольник 4"/>
+          <p:cNvPr id="300333708" name="Прямоугольник 4"/>
           <p:cNvSpPr/>
           <p:nvPr/>
         </p:nvSpPr>
@@ -15787,7 +15787,7 @@
       </p:sp>
       <p:sp>
         <p:nvSpPr>
-          <p:cNvPr id="48159157" name="Заголовок 1"/>
+          <p:cNvPr id="1109579211" name="Заголовок 1"/>
           <p:cNvSpPr>
             <a:spLocks noGrp="1"/>
           </p:cNvSpPr>
@@ -15852,7 +15852,7 @@
       </p:sp>
       <p:sp>
         <p:nvSpPr>
-          <p:cNvPr id="352170646" name="Подзаголовок 2"/>
+          <p:cNvPr id="416488080" name="Подзаголовок 2"/>
           <p:cNvSpPr>
             <a:spLocks noGrp="1"/>
           </p:cNvSpPr>
@@ -15931,7 +15931,7 @@
       </p:sp>
       <p:sp>
         <p:nvSpPr>
-          <p:cNvPr id="693866138" name="Заголовок 1"/>
+          <p:cNvPr id="1895930118" name="Заголовок 1"/>
           <p:cNvSpPr>
             <a:spLocks noGrp="1"/>
           </p:cNvSpPr>
@@ -15993,7 +15993,7 @@
       </p:sp>
       <p:sp>
         <p:nvSpPr>
-          <p:cNvPr id="889558957" name="Заголовок 1"/>
+          <p:cNvPr id="1296297913" name="Заголовок 1"/>
           <p:cNvSpPr>
             <a:spLocks noGrp="1"/>
           </p:cNvSpPr>
@@ -16055,7 +16055,7 @@
       </p:sp>
       <p:sp>
         <p:nvSpPr>
-          <p:cNvPr id="708361508" name="Заголовок 1"/>
+          <p:cNvPr id="1709871118" name="Заголовок 1"/>
           <p:cNvSpPr>
             <a:spLocks noGrp="1"/>
           </p:cNvSpPr>
@@ -16142,7 +16142,7 @@
       </p:sp>
       <p:sp>
         <p:nvSpPr>
-          <p:cNvPr id="1500733134" name="Заголовок 1"/>
+          <p:cNvPr id="182876864" name="Заголовок 1"/>
           <p:cNvSpPr>
             <a:spLocks noGrp="1"/>
           </p:cNvSpPr>
@@ -16270,7 +16270,7 @@
       </p:grpSpPr>
       <p:sp>
         <p:nvSpPr>
-          <p:cNvPr id="700935763" name="Прямоугольник 4"/>
+          <p:cNvPr id="1565779063" name="Прямоугольник 4"/>
           <p:cNvSpPr/>
           <p:nvPr/>
         </p:nvSpPr>
@@ -16320,7 +16320,7 @@
       </p:sp>
       <p:sp>
         <p:nvSpPr>
-          <p:cNvPr id="1074408407" name="Заголовок 1"/>
+          <p:cNvPr id="515862974" name="Заголовок 1"/>
           <p:cNvSpPr>
             <a:spLocks noGrp="1"/>
           </p:cNvSpPr>
@@ -16330,7 +16330,7 @@
         </p:nvSpPr>
         <p:spPr bwMode="auto">
           <a:xfrm>
-            <a:off x="838199" y="-21181"/>
+            <a:off x="838198" y="-21181"/>
             <a:ext cx="10515600" cy="1325563"/>
           </a:xfrm>
         </p:spPr>
@@ -16359,7 +16359,7 @@
       </p:sp>
       <p:sp>
         <p:nvSpPr>
-          <p:cNvPr id="2127714472" name="Объект 2"/>
+          <p:cNvPr id="1358657633" name="Объект 2"/>
           <p:cNvSpPr>
             <a:spLocks noGrp="1"/>
           </p:cNvSpPr>
@@ -16493,7 +16493,7 @@
       </p:sp>
       <p:sp>
         <p:nvSpPr>
-          <p:cNvPr id="1042796111" name="Номер слайда 3"/>
+          <p:cNvPr id="838486096" name="Номер слайда 3"/>
           <p:cNvSpPr>
             <a:spLocks noGrp="1"/>
           </p:cNvSpPr>
@@ -16534,7 +16534,7 @@
       </p:sp>
       <p:sp>
         <p:nvSpPr>
-          <p:cNvPr id="136035772" name="Прямоугольник 5"/>
+          <p:cNvPr id="2054196351" name="Прямоугольник 5"/>
           <p:cNvSpPr/>
           <p:nvPr/>
         </p:nvSpPr>
@@ -16650,7 +16650,7 @@
       </p:grpSpPr>
       <p:sp>
         <p:nvSpPr>
-          <p:cNvPr id="2142498775" name="Объект 2"/>
+          <p:cNvPr id="1875691032" name="Объект 2"/>
           <p:cNvSpPr>
             <a:spLocks noGrp="1"/>
           </p:cNvSpPr>
@@ -16816,7 +16816,7 @@
       </p:sp>
       <p:sp>
         <p:nvSpPr>
-          <p:cNvPr id="2137353283" name="Номер слайда 3"/>
+          <p:cNvPr id="2128433960" name="Номер слайда 3"/>
           <p:cNvSpPr>
             <a:spLocks noGrp="1"/>
           </p:cNvSpPr>
@@ -16857,7 +16857,7 @@
       </p:sp>
       <p:sp>
         <p:nvSpPr>
-          <p:cNvPr id="277488781" name="Прямоугольник 4"/>
+          <p:cNvPr id="1685427653" name="Прямоугольник 4"/>
           <p:cNvSpPr/>
           <p:nvPr/>
         </p:nvSpPr>
@@ -16907,7 +16907,7 @@
       </p:sp>
       <p:sp>
         <p:nvSpPr>
-          <p:cNvPr id="104791586" name="Заголовок 1"/>
+          <p:cNvPr id="2103475145" name="Заголовок 1"/>
           <p:cNvSpPr>
             <a:spLocks noGrp="1"/>
           </p:cNvSpPr>
@@ -16946,7 +16946,7 @@
       </p:sp>
       <p:sp>
         <p:nvSpPr>
-          <p:cNvPr id="629279921" name="Прямоугольник 5"/>
+          <p:cNvPr id="62659119" name="Прямоугольник 5"/>
           <p:cNvSpPr/>
           <p:nvPr/>
         </p:nvSpPr>
@@ -17062,7 +17062,7 @@
       </p:grpSpPr>
       <p:sp>
         <p:nvSpPr>
-          <p:cNvPr id="983339132" name="Объект 2"/>
+          <p:cNvPr id="1225500309" name="Объект 2"/>
           <p:cNvSpPr>
             <a:spLocks noGrp="1"/>
           </p:cNvSpPr>
@@ -17175,7 +17175,7 @@
       </p:sp>
       <p:sp>
         <p:nvSpPr>
-          <p:cNvPr id="706007542" name="Номер слайда 3"/>
+          <p:cNvPr id="370870461" name="Номер слайда 3"/>
           <p:cNvSpPr>
             <a:spLocks noGrp="1"/>
           </p:cNvSpPr>
@@ -17216,7 +17216,7 @@
       </p:sp>
       <p:sp>
         <p:nvSpPr>
-          <p:cNvPr id="1434313078" name="Прямоугольник 5"/>
+          <p:cNvPr id="879430464" name="Прямоугольник 5"/>
           <p:cNvSpPr/>
           <p:nvPr/>
         </p:nvSpPr>
@@ -17266,7 +17266,7 @@
       </p:sp>
       <p:sp>
         <p:nvSpPr>
-          <p:cNvPr id="1586582149" name="Заголовок 1"/>
+          <p:cNvPr id="526278542" name="Заголовок 1"/>
           <p:cNvSpPr>
             <a:spLocks noGrp="1"/>
           </p:cNvSpPr>
@@ -17305,7 +17305,7 @@
       </p:sp>
       <p:sp>
         <p:nvSpPr>
-          <p:cNvPr id="1463668194" name="Прямоугольник 6"/>
+          <p:cNvPr id="651187755" name="Прямоугольник 6"/>
           <p:cNvSpPr/>
           <p:nvPr/>
         </p:nvSpPr>
@@ -17421,7 +17421,7 @@
       </p:grpSpPr>
       <p:sp>
         <p:nvSpPr>
-          <p:cNvPr id="112184230" name="Объект 2"/>
+          <p:cNvPr id="1543479085" name="Объект 2"/>
           <p:cNvSpPr>
             <a:spLocks noGrp="1"/>
           </p:cNvSpPr>
@@ -17476,7 +17476,7 @@
       </p:sp>
       <p:sp>
         <p:nvSpPr>
-          <p:cNvPr id="555354155" name="Номер слайда 3"/>
+          <p:cNvPr id="1361445578" name="Номер слайда 3"/>
           <p:cNvSpPr>
             <a:spLocks noGrp="1"/>
           </p:cNvSpPr>
@@ -17517,7 +17517,7 @@
       </p:sp>
       <p:sp>
         <p:nvSpPr>
-          <p:cNvPr id="1547078223" name="Прямоугольник 5"/>
+          <p:cNvPr id="378098118" name="Прямоугольник 5"/>
           <p:cNvSpPr/>
           <p:nvPr/>
         </p:nvSpPr>
@@ -17567,7 +17567,7 @@
       </p:sp>
       <p:sp>
         <p:nvSpPr>
-          <p:cNvPr id="696182111" name="Заголовок 1"/>
+          <p:cNvPr id="144945904" name="Заголовок 1"/>
           <p:cNvSpPr>
             <a:spLocks noGrp="1"/>
           </p:cNvSpPr>
@@ -17606,7 +17606,7 @@
       </p:sp>
       <p:sp>
         <p:nvSpPr>
-          <p:cNvPr id="309347674" name="Прямоугольник 6"/>
+          <p:cNvPr id="1146587446" name="Прямоугольник 6"/>
           <p:cNvSpPr/>
           <p:nvPr/>
         </p:nvSpPr>
@@ -17656,7 +17656,7 @@
       </p:sp>
       <p:pic>
         <p:nvPicPr>
-          <p:cNvPr id="1747239641" name=""/>
+          <p:cNvPr id="1781676119" name=""/>
           <p:cNvPicPr>
             <a:picLocks noChangeAspect="1"/>
           </p:cNvPicPr>
@@ -17750,7 +17750,7 @@
       </p:grpSpPr>
       <p:sp>
         <p:nvSpPr>
-          <p:cNvPr id="296762033" name="Прямоугольник 9"/>
+          <p:cNvPr id="2019281279" name="Прямоугольник 9"/>
           <p:cNvSpPr/>
           <p:nvPr/>
         </p:nvSpPr>
@@ -17800,7 +17800,7 @@
       </p:sp>
       <p:sp>
         <p:nvSpPr>
-          <p:cNvPr id="759620513" name="Прямоугольник 10"/>
+          <p:cNvPr id="1976699372" name="Прямоугольник 10"/>
           <p:cNvSpPr/>
           <p:nvPr/>
         </p:nvSpPr>
@@ -17850,7 +17850,7 @@
       </p:sp>
       <p:sp>
         <p:nvSpPr>
-          <p:cNvPr id="1722661618" name="Заголовок 1"/>
+          <p:cNvPr id="1041080130" name="Заголовок 1"/>
           <p:cNvSpPr>
             <a:spLocks noGrp="1"/>
           </p:cNvSpPr>
@@ -17912,7 +17912,7 @@
       </p:sp>
       <p:sp>
         <p:nvSpPr>
-          <p:cNvPr id="1502360217" name="Объект 2"/>
+          <p:cNvPr id="1537813849" name="Объект 2"/>
           <p:cNvSpPr>
             <a:spLocks noGrp="1"/>
           </p:cNvSpPr>
@@ -18063,7 +18063,7 @@
       </p:sp>
       <p:sp>
         <p:nvSpPr>
-          <p:cNvPr id="1380640703" name="Номер слайда 3"/>
+          <p:cNvPr id="1247746418" name="Номер слайда 3"/>
           <p:cNvSpPr>
             <a:spLocks noGrp="1"/>
           </p:cNvSpPr>
@@ -18104,7 +18104,7 @@
       </p:sp>
       <p:pic>
         <p:nvPicPr>
-          <p:cNvPr id="186628306" name="Рисунок 7"/>
+          <p:cNvPr id="1656802653" name="Рисунок 7"/>
           <p:cNvPicPr>
             <a:picLocks noChangeAspect="1"/>
           </p:cNvPicPr>
@@ -18138,7 +18138,7 @@
       </p:pic>
       <p:pic>
         <p:nvPicPr>
-          <p:cNvPr id="1263050474" name=""/>
+          <p:cNvPr id="365062225" name=""/>
           <p:cNvPicPr>
             <a:picLocks noChangeAspect="1"/>
           </p:cNvPicPr>
@@ -18234,7 +18234,7 @@
       </p:grpSpPr>
       <p:sp>
         <p:nvSpPr>
-          <p:cNvPr id="494590506" name="Прямоугольник 9"/>
+          <p:cNvPr id="586043087" name="Прямоугольник 9"/>
           <p:cNvSpPr/>
           <p:nvPr/>
         </p:nvSpPr>
@@ -18284,7 +18284,7 @@
       </p:sp>
       <p:sp>
         <p:nvSpPr>
-          <p:cNvPr id="609028605" name="Прямоугольник 10"/>
+          <p:cNvPr id="529859763" name="Прямоугольник 10"/>
           <p:cNvSpPr/>
           <p:nvPr/>
         </p:nvSpPr>
@@ -18334,7 +18334,7 @@
       </p:sp>
       <p:sp>
         <p:nvSpPr>
-          <p:cNvPr id="1006492301" name="Заголовок 1"/>
+          <p:cNvPr id="560072677" name="Заголовок 1"/>
           <p:cNvSpPr>
             <a:spLocks noGrp="1"/>
           </p:cNvSpPr>
@@ -18396,7 +18396,7 @@
       </p:sp>
       <p:sp>
         <p:nvSpPr>
-          <p:cNvPr id="659508379" name="Объект 2"/>
+          <p:cNvPr id="1680346621" name="Объект 2"/>
           <p:cNvSpPr>
             <a:spLocks noGrp="1"/>
           </p:cNvSpPr>
@@ -18501,7 +18501,7 @@
       </p:sp>
       <p:sp>
         <p:nvSpPr>
-          <p:cNvPr id="1737458157" name="Номер слайда 3"/>
+          <p:cNvPr id="1949388289" name="Номер слайда 3"/>
           <p:cNvSpPr>
             <a:spLocks noGrp="1"/>
           </p:cNvSpPr>
@@ -18542,7 +18542,7 @@
       </p:sp>
       <p:pic>
         <p:nvPicPr>
-          <p:cNvPr id="949809153" name="Рисунок 5"/>
+          <p:cNvPr id="1573154655" name="Рисунок 5"/>
           <p:cNvPicPr>
             <a:picLocks noChangeAspect="1"/>
           </p:cNvPicPr>
@@ -18643,7 +18643,7 @@
       </p:grpSpPr>
       <p:sp>
         <p:nvSpPr>
-          <p:cNvPr id="1517323705" name="Объект 2"/>
+          <p:cNvPr id="540126628" name="Объект 2"/>
           <p:cNvSpPr>
             <a:spLocks noGrp="1"/>
           </p:cNvSpPr>
@@ -18714,7 +18714,7 @@
       </p:sp>
       <p:sp>
         <p:nvSpPr>
-          <p:cNvPr id="1920413033" name="Номер слайда 3"/>
+          <p:cNvPr id="1524166395" name="Номер слайда 3"/>
           <p:cNvSpPr>
             <a:spLocks noGrp="1"/>
           </p:cNvSpPr>
@@ -18755,7 +18755,7 @@
       </p:sp>
       <p:pic>
         <p:nvPicPr>
-          <p:cNvPr id="1276716197" name="Рисунок 5"/>
+          <p:cNvPr id="1785505106" name="Рисунок 5"/>
           <p:cNvPicPr>
             <a:picLocks noChangeAspect="1"/>
           </p:cNvPicPr>
@@ -18785,7 +18785,7 @@
       </p:pic>
       <p:pic>
         <p:nvPicPr>
-          <p:cNvPr id="1375227130" name="Рисунок 1421075015"/>
+          <p:cNvPr id="2008336051" name="Рисунок 1421075015"/>
           <p:cNvPicPr>
             <a:picLocks noChangeAspect="1"/>
           </p:cNvPicPr>
@@ -18820,7 +18820,7 @@
       </p:pic>
       <p:sp>
         <p:nvSpPr>
-          <p:cNvPr id="1419657390" name="Прямоугольник 10"/>
+          <p:cNvPr id="2045719039" name="Прямоугольник 10"/>
           <p:cNvSpPr/>
           <p:nvPr/>
         </p:nvSpPr>
@@ -18870,7 +18870,7 @@
       </p:sp>
       <p:sp>
         <p:nvSpPr>
-          <p:cNvPr id="927609044" name="Прямоугольник 11"/>
+          <p:cNvPr id="245975416" name="Прямоугольник 11"/>
           <p:cNvSpPr/>
           <p:nvPr/>
         </p:nvSpPr>
@@ -18920,7 +18920,7 @@
       </p:sp>
       <p:sp>
         <p:nvSpPr>
-          <p:cNvPr id="699473213" name="Заголовок 1"/>
+          <p:cNvPr id="580665397" name="Заголовок 1"/>
           <p:cNvSpPr>
             <a:spLocks noGrp="1"/>
           </p:cNvSpPr>
@@ -18969,7 +18969,7 @@
       </p:sp>
       <p:pic>
         <p:nvPicPr>
-          <p:cNvPr id="1620540191" name="Рисунок 2"/>
+          <p:cNvPr id="1701558354" name="Рисунок 2"/>
           <p:cNvPicPr>
             <a:picLocks noChangeAspect="1"/>
           </p:cNvPicPr>
@@ -18997,7 +18997,7 @@
       </p:pic>
       <p:pic>
         <p:nvPicPr>
-          <p:cNvPr id="203531627" name=""/>
+          <p:cNvPr id="2025097376" name=""/>
           <p:cNvPicPr>
             <a:picLocks noChangeAspect="1"/>
           </p:cNvPicPr>
@@ -19027,10 +19027,10 @@
       </p:pic>
       <p:cxnSp>
         <p:nvCxnSpPr>
-          <p:cNvPr id="1150155137" name=""/>
+          <p:cNvPr id="451818861" name=""/>
           <p:cNvCxnSpPr>
-            <a:stCxn id="1276716197" idx="3"/>
-            <a:endCxn id="1620540191" idx="1"/>
+            <a:stCxn id="1785505106" idx="3"/>
+            <a:endCxn id="1701558354" idx="1"/>
           </p:cNvCxnSpPr>
           <p:nvPr/>
         </p:nvCxnSpPr>
@@ -19070,10 +19070,10 @@
       </p:cxnSp>
       <p:cxnSp>
         <p:nvCxnSpPr>
-          <p:cNvPr id="953161365" name=""/>
+          <p:cNvPr id="368556323" name=""/>
           <p:cNvCxnSpPr>
-            <a:stCxn id="1276716197" idx="3"/>
-            <a:endCxn id="1375227130" idx="2"/>
+            <a:stCxn id="1785505106" idx="3"/>
+            <a:endCxn id="2008336051" idx="2"/>
           </p:cNvCxnSpPr>
           <p:nvPr/>
         </p:nvCxnSpPr>
@@ -19113,10 +19113,10 @@
       </p:cxnSp>
       <p:cxnSp>
         <p:nvCxnSpPr>
-          <p:cNvPr id="1000365914" name=""/>
+          <p:cNvPr id="1096949245" name=""/>
           <p:cNvCxnSpPr>
-            <a:stCxn id="203531627" idx="3"/>
-            <a:endCxn id="1375227130" idx="1"/>
+            <a:stCxn id="2025097376" idx="3"/>
+            <a:endCxn id="2008336051" idx="1"/>
           </p:cNvCxnSpPr>
           <p:nvPr/>
         </p:nvCxnSpPr>
@@ -19156,17 +19156,17 @@
       </p:cxnSp>
       <p:cxnSp>
         <p:nvCxnSpPr>
-          <p:cNvPr id="799810659" name=""/>
+          <p:cNvPr id="481502652" name=""/>
           <p:cNvCxnSpPr>
-            <a:stCxn id="203531627" idx="3"/>
-            <a:endCxn id="1620540191" idx="0"/>
+            <a:stCxn id="2025097376" idx="3"/>
+            <a:endCxn id="1701558354" idx="0"/>
           </p:cNvCxnSpPr>
           <p:nvPr/>
         </p:nvCxnSpPr>
         <p:spPr bwMode="auto">
           <a:xfrm rot="0" flipH="0" flipV="0">
             <a:off x="8651715" y="2920446"/>
-            <a:ext cx="1495314" cy="2316986"/>
+            <a:ext cx="1495313" cy="2316986"/>
           </a:xfrm>
           <a:prstGeom prst="line">
             <a:avLst/>
@@ -19265,7 +19265,7 @@
       </p:grpSpPr>
       <p:sp>
         <p:nvSpPr>
-          <p:cNvPr id="2080250404" name="Объект 2"/>
+          <p:cNvPr id="1843145468" name="Объект 2"/>
           <p:cNvSpPr>
             <a:spLocks noGrp="1"/>
           </p:cNvSpPr>
@@ -19404,7 +19404,7 @@
       </p:sp>
       <p:sp>
         <p:nvSpPr>
-          <p:cNvPr id="673810560" name="Номер слайда 3"/>
+          <p:cNvPr id="533920025" name="Номер слайда 3"/>
           <p:cNvSpPr>
             <a:spLocks noGrp="1"/>
           </p:cNvSpPr>
@@ -19445,7 +19445,7 @@
       </p:sp>
       <p:sp>
         <p:nvSpPr>
-          <p:cNvPr id="1069022113" name="Прямоугольник 5"/>
+          <p:cNvPr id="1707214923" name="Прямоугольник 5"/>
           <p:cNvSpPr/>
           <p:nvPr/>
         </p:nvSpPr>
@@ -19495,7 +19495,7 @@
       </p:sp>
       <p:sp>
         <p:nvSpPr>
-          <p:cNvPr id="1714461096" name="Прямоугольник 6"/>
+          <p:cNvPr id="1482991266" name="Прямоугольник 6"/>
           <p:cNvSpPr/>
           <p:nvPr/>
         </p:nvSpPr>
@@ -19545,7 +19545,7 @@
       </p:sp>
       <p:sp>
         <p:nvSpPr>
-          <p:cNvPr id="1364298097" name="Заголовок 1"/>
+          <p:cNvPr id="406811040" name="Заголовок 1"/>
           <p:cNvSpPr>
             <a:spLocks noGrp="1"/>
           </p:cNvSpPr>
@@ -19597,7 +19597,7 @@
       </p:sp>
       <p:pic>
         <p:nvPicPr>
-          <p:cNvPr id="1213647715" name=""/>
+          <p:cNvPr id="769429157" name=""/>
           <p:cNvPicPr>
             <a:picLocks noChangeAspect="1"/>
           </p:cNvPicPr>

--- a/docs/starukhin_dissertation/magister_pres.pptx
+++ b/docs/starukhin_dissertation/magister_pres.pptx
@@ -151,7 +151,7 @@
       </p:grpSpPr>
       <p:sp>
         <p:nvSpPr>
-          <p:cNvPr id="861447053" name="Верхний колонтитул 1"/>
+          <p:cNvPr id="613492894" name="Верхний колонтитул 1"/>
           <p:cNvSpPr>
             <a:spLocks noGrp="1"/>
           </p:cNvSpPr>
@@ -185,7 +185,7 @@
       </p:sp>
       <p:sp>
         <p:nvSpPr>
-          <p:cNvPr id="725398542" name="Дата 2"/>
+          <p:cNvPr id="1451211002" name="Дата 2"/>
           <p:cNvSpPr>
             <a:spLocks noGrp="1"/>
           </p:cNvSpPr>
@@ -223,7 +223,7 @@
       </p:sp>
       <p:sp>
         <p:nvSpPr>
-          <p:cNvPr id="904706316" name="Образ слайда 3"/>
+          <p:cNvPr id="1923654100" name="Образ слайда 3"/>
           <p:cNvSpPr>
             <a:spLocks noChangeAspect="1" noGrp="1" noRot="1"/>
           </p:cNvSpPr>
@@ -259,7 +259,7 @@
       </p:sp>
       <p:sp>
         <p:nvSpPr>
-          <p:cNvPr id="1089257951" name="Заметки 4"/>
+          <p:cNvPr id="1837309069" name="Заметки 4"/>
           <p:cNvSpPr>
             <a:spLocks noGrp="1"/>
           </p:cNvSpPr>
@@ -333,7 +333,7 @@
       </p:sp>
       <p:sp>
         <p:nvSpPr>
-          <p:cNvPr id="1687356465" name="Нижний колонтитул 5"/>
+          <p:cNvPr id="961089406" name="Нижний колонтитул 5"/>
           <p:cNvSpPr>
             <a:spLocks noGrp="1"/>
           </p:cNvSpPr>
@@ -367,7 +367,7 @@
       </p:sp>
       <p:sp>
         <p:nvSpPr>
-          <p:cNvPr id="1970450285" name="Номер слайда 6"/>
+          <p:cNvPr id="985991578" name="Номер слайда 6"/>
           <p:cNvSpPr>
             <a:spLocks noGrp="1"/>
           </p:cNvSpPr>
@@ -520,7 +520,7 @@
       </p:grpSpPr>
       <p:sp>
         <p:nvSpPr>
-          <p:cNvPr id="1176383874" name="Slide Image Placeholder 1"/>
+          <p:cNvPr id="1200468979" name="Slide Image Placeholder 1"/>
           <p:cNvSpPr>
             <a:spLocks noChangeAspect="1" noGrp="1" noRot="1"/>
           </p:cNvSpPr>
@@ -532,7 +532,7 @@
       </p:sp>
       <p:sp>
         <p:nvSpPr>
-          <p:cNvPr id="383589639" name="Notes Placeholder 2"/>
+          <p:cNvPr id="1533459332" name="Notes Placeholder 2"/>
           <p:cNvSpPr>
             <a:spLocks noGrp="1"/>
           </p:cNvSpPr>
@@ -554,7 +554,7 @@
       </p:sp>
       <p:sp>
         <p:nvSpPr>
-          <p:cNvPr id="442896309" name="Slide Number Placeholder 3"/>
+          <p:cNvPr id="798826818" name="Slide Number Placeholder 3"/>
           <p:cNvSpPr>
             <a:spLocks noGrp="1"/>
           </p:cNvSpPr>
@@ -605,7 +605,7 @@
       </p:grpSpPr>
       <p:sp>
         <p:nvSpPr>
-          <p:cNvPr id="1844303156" name="Slide Image Placeholder 1"/>
+          <p:cNvPr id="230713662" name="Slide Image Placeholder 1"/>
           <p:cNvSpPr>
             <a:spLocks noChangeAspect="1" noGrp="1" noRot="1"/>
           </p:cNvSpPr>
@@ -617,7 +617,7 @@
       </p:sp>
       <p:sp>
         <p:nvSpPr>
-          <p:cNvPr id="231162881" name="Notes Placeholder 2"/>
+          <p:cNvPr id="676609688" name="Notes Placeholder 2"/>
           <p:cNvSpPr>
             <a:spLocks noGrp="1"/>
           </p:cNvSpPr>
@@ -639,7 +639,7 @@
       </p:sp>
       <p:sp>
         <p:nvSpPr>
-          <p:cNvPr id="599922468" name="Slide Number Placeholder 3"/>
+          <p:cNvPr id="1578448574" name="Slide Number Placeholder 3"/>
           <p:cNvSpPr>
             <a:spLocks noGrp="1"/>
           </p:cNvSpPr>
@@ -690,7 +690,7 @@
       </p:grpSpPr>
       <p:sp>
         <p:nvSpPr>
-          <p:cNvPr id="1360746033" name="Slide Image Placeholder 1"/>
+          <p:cNvPr id="1930854287" name="Slide Image Placeholder 1"/>
           <p:cNvSpPr>
             <a:spLocks noChangeAspect="1" noGrp="1" noRot="1"/>
           </p:cNvSpPr>
@@ -702,7 +702,7 @@
       </p:sp>
       <p:sp>
         <p:nvSpPr>
-          <p:cNvPr id="508495723" name="Notes Placeholder 2"/>
+          <p:cNvPr id="99185634" name="Notes Placeholder 2"/>
           <p:cNvSpPr>
             <a:spLocks noGrp="1"/>
           </p:cNvSpPr>
@@ -724,7 +724,7 @@
       </p:sp>
       <p:sp>
         <p:nvSpPr>
-          <p:cNvPr id="487905151" name="Slide Number Placeholder 3"/>
+          <p:cNvPr id="1158794774" name="Slide Number Placeholder 3"/>
           <p:cNvSpPr>
             <a:spLocks noGrp="1"/>
           </p:cNvSpPr>
@@ -775,7 +775,7 @@
       </p:grpSpPr>
       <p:sp>
         <p:nvSpPr>
-          <p:cNvPr id="1446248241" name="Slide Image Placeholder 1"/>
+          <p:cNvPr id="850822328" name="Slide Image Placeholder 1"/>
           <p:cNvSpPr>
             <a:spLocks noChangeAspect="1" noGrp="1" noRot="1"/>
           </p:cNvSpPr>
@@ -787,7 +787,7 @@
       </p:sp>
       <p:sp>
         <p:nvSpPr>
-          <p:cNvPr id="648139380" name="Notes Placeholder 2"/>
+          <p:cNvPr id="720177746" name="Notes Placeholder 2"/>
           <p:cNvSpPr>
             <a:spLocks noGrp="1"/>
           </p:cNvSpPr>
@@ -809,7 +809,7 @@
       </p:sp>
       <p:sp>
         <p:nvSpPr>
-          <p:cNvPr id="2043642903" name="Slide Number Placeholder 3"/>
+          <p:cNvPr id="1694362018" name="Slide Number Placeholder 3"/>
           <p:cNvSpPr>
             <a:spLocks noGrp="1"/>
           </p:cNvSpPr>
@@ -860,7 +860,7 @@
       </p:grpSpPr>
       <p:sp>
         <p:nvSpPr>
-          <p:cNvPr id="748108435" name="Slide Image Placeholder 1"/>
+          <p:cNvPr id="1925336933" name="Slide Image Placeholder 1"/>
           <p:cNvSpPr>
             <a:spLocks noChangeAspect="1" noGrp="1" noRot="1"/>
           </p:cNvSpPr>
@@ -872,7 +872,7 @@
       </p:sp>
       <p:sp>
         <p:nvSpPr>
-          <p:cNvPr id="373351338" name="Notes Placeholder 2"/>
+          <p:cNvPr id="1243346850" name="Notes Placeholder 2"/>
           <p:cNvSpPr>
             <a:spLocks noGrp="1"/>
           </p:cNvSpPr>
@@ -894,7 +894,7 @@
       </p:sp>
       <p:sp>
         <p:nvSpPr>
-          <p:cNvPr id="1399785132" name="Slide Number Placeholder 3"/>
+          <p:cNvPr id="554086966" name="Slide Number Placeholder 3"/>
           <p:cNvSpPr>
             <a:spLocks noGrp="1"/>
           </p:cNvSpPr>
@@ -945,7 +945,7 @@
       </p:grpSpPr>
       <p:sp>
         <p:nvSpPr>
-          <p:cNvPr id="1210414645" name="Slide Image Placeholder 1"/>
+          <p:cNvPr id="581956924" name="Slide Image Placeholder 1"/>
           <p:cNvSpPr>
             <a:spLocks noChangeAspect="1" noGrp="1" noRot="1"/>
           </p:cNvSpPr>
@@ -957,7 +957,7 @@
       </p:sp>
       <p:sp>
         <p:nvSpPr>
-          <p:cNvPr id="1698323830" name="Notes Placeholder 2"/>
+          <p:cNvPr id="886435613" name="Notes Placeholder 2"/>
           <p:cNvSpPr>
             <a:spLocks noGrp="1"/>
           </p:cNvSpPr>
@@ -979,7 +979,7 @@
       </p:sp>
       <p:sp>
         <p:nvSpPr>
-          <p:cNvPr id="1562455965" name="Slide Number Placeholder 3"/>
+          <p:cNvPr id="125210300" name="Slide Number Placeholder 3"/>
           <p:cNvSpPr>
             <a:spLocks noGrp="1"/>
           </p:cNvSpPr>
@@ -1030,7 +1030,7 @@
       </p:grpSpPr>
       <p:sp>
         <p:nvSpPr>
-          <p:cNvPr id="1442240051" name="Slide Image Placeholder 1"/>
+          <p:cNvPr id="1944066094" name="Slide Image Placeholder 1"/>
           <p:cNvSpPr>
             <a:spLocks noChangeAspect="1" noGrp="1" noRot="1"/>
           </p:cNvSpPr>
@@ -1042,7 +1042,7 @@
       </p:sp>
       <p:sp>
         <p:nvSpPr>
-          <p:cNvPr id="1063744653" name="Notes Placeholder 2"/>
+          <p:cNvPr id="1722288007" name="Notes Placeholder 2"/>
           <p:cNvSpPr>
             <a:spLocks noGrp="1"/>
           </p:cNvSpPr>
@@ -1064,7 +1064,7 @@
       </p:sp>
       <p:sp>
         <p:nvSpPr>
-          <p:cNvPr id="49037459" name="Slide Number Placeholder 3"/>
+          <p:cNvPr id="792690866" name="Slide Number Placeholder 3"/>
           <p:cNvSpPr>
             <a:spLocks noGrp="1"/>
           </p:cNvSpPr>
@@ -1115,7 +1115,7 @@
       </p:grpSpPr>
       <p:sp>
         <p:nvSpPr>
-          <p:cNvPr id="1629091729" name="Slide Image Placeholder 1"/>
+          <p:cNvPr id="1333211821" name="Slide Image Placeholder 1"/>
           <p:cNvSpPr>
             <a:spLocks noChangeAspect="1" noGrp="1" noRot="1"/>
           </p:cNvSpPr>
@@ -1127,7 +1127,7 @@
       </p:sp>
       <p:sp>
         <p:nvSpPr>
-          <p:cNvPr id="520105219" name="Notes Placeholder 2"/>
+          <p:cNvPr id="1061664223" name="Notes Placeholder 2"/>
           <p:cNvSpPr>
             <a:spLocks noGrp="1"/>
           </p:cNvSpPr>
@@ -1149,7 +1149,7 @@
       </p:sp>
       <p:sp>
         <p:nvSpPr>
-          <p:cNvPr id="1884189682" name="Slide Number Placeholder 3"/>
+          <p:cNvPr id="479548429" name="Slide Number Placeholder 3"/>
           <p:cNvSpPr>
             <a:spLocks noGrp="1"/>
           </p:cNvSpPr>
@@ -1200,7 +1200,7 @@
       </p:grpSpPr>
       <p:sp>
         <p:nvSpPr>
-          <p:cNvPr id="579814954" name="Slide Image Placeholder 1"/>
+          <p:cNvPr id="995372931" name="Slide Image Placeholder 1"/>
           <p:cNvSpPr>
             <a:spLocks noChangeAspect="1" noGrp="1" noRot="1"/>
           </p:cNvSpPr>
@@ -1212,7 +1212,7 @@
       </p:sp>
       <p:sp>
         <p:nvSpPr>
-          <p:cNvPr id="965124091" name="Notes Placeholder 2"/>
+          <p:cNvPr id="1535050605" name="Notes Placeholder 2"/>
           <p:cNvSpPr>
             <a:spLocks noGrp="1"/>
           </p:cNvSpPr>
@@ -1234,7 +1234,7 @@
       </p:sp>
       <p:sp>
         <p:nvSpPr>
-          <p:cNvPr id="703261554" name="Slide Number Placeholder 3"/>
+          <p:cNvPr id="550258393" name="Slide Number Placeholder 3"/>
           <p:cNvSpPr>
             <a:spLocks noGrp="1"/>
           </p:cNvSpPr>
@@ -1285,7 +1285,7 @@
       </p:grpSpPr>
       <p:sp>
         <p:nvSpPr>
-          <p:cNvPr id="1467559802" name="Slide Image Placeholder 1"/>
+          <p:cNvPr id="91154543" name="Slide Image Placeholder 1"/>
           <p:cNvSpPr>
             <a:spLocks noChangeAspect="1" noGrp="1" noRot="1"/>
           </p:cNvSpPr>
@@ -1297,7 +1297,7 @@
       </p:sp>
       <p:sp>
         <p:nvSpPr>
-          <p:cNvPr id="1176631659" name="Notes Placeholder 2"/>
+          <p:cNvPr id="776915959" name="Notes Placeholder 2"/>
           <p:cNvSpPr>
             <a:spLocks noGrp="1"/>
           </p:cNvSpPr>
@@ -1319,7 +1319,7 @@
       </p:sp>
       <p:sp>
         <p:nvSpPr>
-          <p:cNvPr id="1311754721" name="Slide Number Placeholder 3"/>
+          <p:cNvPr id="78952644" name="Slide Number Placeholder 3"/>
           <p:cNvSpPr>
             <a:spLocks noGrp="1"/>
           </p:cNvSpPr>
@@ -1370,7 +1370,7 @@
       </p:grpSpPr>
       <p:sp>
         <p:nvSpPr>
-          <p:cNvPr id="128642517" name="Slide Image Placeholder 1"/>
+          <p:cNvPr id="1653231406" name="Slide Image Placeholder 1"/>
           <p:cNvSpPr>
             <a:spLocks noChangeAspect="1" noGrp="1" noRot="1"/>
           </p:cNvSpPr>
@@ -1382,7 +1382,7 @@
       </p:sp>
       <p:sp>
         <p:nvSpPr>
-          <p:cNvPr id="1251892049" name="Notes Placeholder 2"/>
+          <p:cNvPr id="778572678" name="Notes Placeholder 2"/>
           <p:cNvSpPr>
             <a:spLocks noGrp="1"/>
           </p:cNvSpPr>
@@ -1404,7 +1404,7 @@
       </p:sp>
       <p:sp>
         <p:nvSpPr>
-          <p:cNvPr id="32319566" name="Slide Number Placeholder 3"/>
+          <p:cNvPr id="2086018418" name="Slide Number Placeholder 3"/>
           <p:cNvSpPr>
             <a:spLocks noGrp="1"/>
           </p:cNvSpPr>
@@ -1455,7 +1455,7 @@
       </p:grpSpPr>
       <p:sp>
         <p:nvSpPr>
-          <p:cNvPr id="1519603960" name="Slide Image Placeholder 1"/>
+          <p:cNvPr id="966336959" name="Slide Image Placeholder 1"/>
           <p:cNvSpPr>
             <a:spLocks noChangeAspect="1" noGrp="1" noRot="1"/>
           </p:cNvSpPr>
@@ -1467,7 +1467,7 @@
       </p:sp>
       <p:sp>
         <p:nvSpPr>
-          <p:cNvPr id="62414314" name="Notes Placeholder 2"/>
+          <p:cNvPr id="133267500" name="Notes Placeholder 2"/>
           <p:cNvSpPr>
             <a:spLocks noGrp="1"/>
           </p:cNvSpPr>
@@ -1489,7 +1489,7 @@
       </p:sp>
       <p:sp>
         <p:nvSpPr>
-          <p:cNvPr id="1696586852" name="Slide Number Placeholder 3"/>
+          <p:cNvPr id="880027123" name="Slide Number Placeholder 3"/>
           <p:cNvSpPr>
             <a:spLocks noGrp="1"/>
           </p:cNvSpPr>
@@ -1540,7 +1540,7 @@
       </p:grpSpPr>
       <p:sp>
         <p:nvSpPr>
-          <p:cNvPr id="1154723301" name="Slide Image Placeholder 1"/>
+          <p:cNvPr id="1098142643" name="Slide Image Placeholder 1"/>
           <p:cNvSpPr>
             <a:spLocks noChangeAspect="1" noGrp="1" noRot="1"/>
           </p:cNvSpPr>
@@ -1552,7 +1552,7 @@
       </p:sp>
       <p:sp>
         <p:nvSpPr>
-          <p:cNvPr id="1005547640" name="Notes Placeholder 2"/>
+          <p:cNvPr id="1726465862" name="Notes Placeholder 2"/>
           <p:cNvSpPr>
             <a:spLocks noGrp="1"/>
           </p:cNvSpPr>
@@ -1574,7 +1574,7 @@
       </p:sp>
       <p:sp>
         <p:nvSpPr>
-          <p:cNvPr id="1628232333" name="Slide Number Placeholder 3"/>
+          <p:cNvPr id="532480724" name="Slide Number Placeholder 3"/>
           <p:cNvSpPr>
             <a:spLocks noGrp="1"/>
           </p:cNvSpPr>
@@ -1625,7 +1625,7 @@
       </p:grpSpPr>
       <p:sp>
         <p:nvSpPr>
-          <p:cNvPr id="694017208" name="Slide Image Placeholder 1"/>
+          <p:cNvPr id="572187620" name="Slide Image Placeholder 1"/>
           <p:cNvSpPr>
             <a:spLocks noChangeAspect="1" noGrp="1" noRot="1"/>
           </p:cNvSpPr>
@@ -1637,7 +1637,7 @@
       </p:sp>
       <p:sp>
         <p:nvSpPr>
-          <p:cNvPr id="719057232" name="Notes Placeholder 2"/>
+          <p:cNvPr id="1776485501" name="Notes Placeholder 2"/>
           <p:cNvSpPr>
             <a:spLocks noGrp="1"/>
           </p:cNvSpPr>
@@ -1659,7 +1659,7 @@
       </p:sp>
       <p:sp>
         <p:nvSpPr>
-          <p:cNvPr id="357259447" name="Slide Number Placeholder 3"/>
+          <p:cNvPr id="1783218809" name="Slide Number Placeholder 3"/>
           <p:cNvSpPr>
             <a:spLocks noGrp="1"/>
           </p:cNvSpPr>
@@ -1710,7 +1710,7 @@
       </p:grpSpPr>
       <p:sp>
         <p:nvSpPr>
-          <p:cNvPr id="585751420" name="Slide Image Placeholder 1"/>
+          <p:cNvPr id="266269361" name="Slide Image Placeholder 1"/>
           <p:cNvSpPr>
             <a:spLocks noChangeAspect="1" noGrp="1" noRot="1"/>
           </p:cNvSpPr>
@@ -1722,7 +1722,7 @@
       </p:sp>
       <p:sp>
         <p:nvSpPr>
-          <p:cNvPr id="462206312" name="Notes Placeholder 2"/>
+          <p:cNvPr id="1166872284" name="Notes Placeholder 2"/>
           <p:cNvSpPr>
             <a:spLocks noGrp="1"/>
           </p:cNvSpPr>
@@ -1744,7 +1744,7 @@
       </p:sp>
       <p:sp>
         <p:nvSpPr>
-          <p:cNvPr id="1955038052" name="Slide Number Placeholder 3"/>
+          <p:cNvPr id="574958795" name="Slide Number Placeholder 3"/>
           <p:cNvSpPr>
             <a:spLocks noGrp="1"/>
           </p:cNvSpPr>
@@ -1795,7 +1795,7 @@
       </p:grpSpPr>
       <p:sp>
         <p:nvSpPr>
-          <p:cNvPr id="1119514018" name="Slide Image Placeholder 1"/>
+          <p:cNvPr id="182036509" name="Slide Image Placeholder 1"/>
           <p:cNvSpPr>
             <a:spLocks noChangeAspect="1" noGrp="1" noRot="1"/>
           </p:cNvSpPr>
@@ -1807,7 +1807,7 @@
       </p:sp>
       <p:sp>
         <p:nvSpPr>
-          <p:cNvPr id="1597759935" name="Notes Placeholder 2"/>
+          <p:cNvPr id="401701879" name="Notes Placeholder 2"/>
           <p:cNvSpPr>
             <a:spLocks noGrp="1"/>
           </p:cNvSpPr>
@@ -1829,7 +1829,7 @@
       </p:sp>
       <p:sp>
         <p:nvSpPr>
-          <p:cNvPr id="1982224231" name="Slide Number Placeholder 3"/>
+          <p:cNvPr id="1211305767" name="Slide Number Placeholder 3"/>
           <p:cNvSpPr>
             <a:spLocks noGrp="1"/>
           </p:cNvSpPr>
@@ -1880,7 +1880,7 @@
       </p:grpSpPr>
       <p:sp>
         <p:nvSpPr>
-          <p:cNvPr id="1744523828" name="Slide Image Placeholder 1"/>
+          <p:cNvPr id="1817775596" name="Slide Image Placeholder 1"/>
           <p:cNvSpPr>
             <a:spLocks noChangeAspect="1" noGrp="1" noRot="1"/>
           </p:cNvSpPr>
@@ -1892,7 +1892,7 @@
       </p:sp>
       <p:sp>
         <p:nvSpPr>
-          <p:cNvPr id="348004285" name="Notes Placeholder 2"/>
+          <p:cNvPr id="472292892" name="Notes Placeholder 2"/>
           <p:cNvSpPr>
             <a:spLocks noGrp="1"/>
           </p:cNvSpPr>
@@ -1914,7 +1914,7 @@
       </p:sp>
       <p:sp>
         <p:nvSpPr>
-          <p:cNvPr id="1428988834" name="Slide Number Placeholder 3"/>
+          <p:cNvPr id="1549381218" name="Slide Number Placeholder 3"/>
           <p:cNvSpPr>
             <a:spLocks noGrp="1"/>
           </p:cNvSpPr>
@@ -1965,7 +1965,7 @@
       </p:grpSpPr>
       <p:sp>
         <p:nvSpPr>
-          <p:cNvPr id="1929082166" name="Slide Image Placeholder 1"/>
+          <p:cNvPr id="1017770136" name="Slide Image Placeholder 1"/>
           <p:cNvSpPr>
             <a:spLocks noChangeAspect="1" noGrp="1" noRot="1"/>
           </p:cNvSpPr>
@@ -1977,7 +1977,7 @@
       </p:sp>
       <p:sp>
         <p:nvSpPr>
-          <p:cNvPr id="103094433" name="Notes Placeholder 2"/>
+          <p:cNvPr id="890895803" name="Notes Placeholder 2"/>
           <p:cNvSpPr>
             <a:spLocks noGrp="1"/>
           </p:cNvSpPr>
@@ -1999,7 +1999,7 @@
       </p:sp>
       <p:sp>
         <p:nvSpPr>
-          <p:cNvPr id="1042299724" name="Slide Number Placeholder 3"/>
+          <p:cNvPr id="115694462" name="Slide Number Placeholder 3"/>
           <p:cNvSpPr>
             <a:spLocks noGrp="1"/>
           </p:cNvSpPr>
@@ -2050,7 +2050,7 @@
       </p:grpSpPr>
       <p:sp>
         <p:nvSpPr>
-          <p:cNvPr id="1476223654" name="Заголовок 1"/>
+          <p:cNvPr id="2080928051" name="Заголовок 1"/>
           <p:cNvSpPr>
             <a:spLocks noGrp="1"/>
           </p:cNvSpPr>
@@ -2085,7 +2085,7 @@
       </p:sp>
       <p:sp>
         <p:nvSpPr>
-          <p:cNvPr id="1468853472" name="Подзаголовок 2"/>
+          <p:cNvPr id="1024859571" name="Подзаголовок 2"/>
           <p:cNvSpPr>
             <a:spLocks noGrp="1"/>
           </p:cNvSpPr>
@@ -2153,7 +2153,7 @@
       </p:sp>
       <p:sp>
         <p:nvSpPr>
-          <p:cNvPr id="365602764" name="Дата 3"/>
+          <p:cNvPr id="999610919" name="Дата 3"/>
           <p:cNvSpPr>
             <a:spLocks noGrp="1"/>
           </p:cNvSpPr>
@@ -2179,7 +2179,7 @@
       </p:sp>
       <p:sp>
         <p:nvSpPr>
-          <p:cNvPr id="355162924" name="Нижний колонтитул 4"/>
+          <p:cNvPr id="352256580" name="Нижний колонтитул 4"/>
           <p:cNvSpPr>
             <a:spLocks noGrp="1"/>
           </p:cNvSpPr>
@@ -2201,7 +2201,7 @@
       </p:sp>
       <p:sp>
         <p:nvSpPr>
-          <p:cNvPr id="885071683" name="Номер слайда 5"/>
+          <p:cNvPr id="434250292" name="Номер слайда 5"/>
           <p:cNvSpPr>
             <a:spLocks noGrp="1"/>
           </p:cNvSpPr>
@@ -2252,7 +2252,7 @@
       </p:grpSpPr>
       <p:sp>
         <p:nvSpPr>
-          <p:cNvPr id="2131441616" name="Заголовок 1"/>
+          <p:cNvPr id="2033299201" name="Заголовок 1"/>
           <p:cNvSpPr>
             <a:spLocks noGrp="1"/>
           </p:cNvSpPr>
@@ -2278,7 +2278,7 @@
       </p:sp>
       <p:sp>
         <p:nvSpPr>
-          <p:cNvPr id="1326612565" name="Вертикальный текст 2"/>
+          <p:cNvPr id="1232915827" name="Вертикальный текст 2"/>
           <p:cNvSpPr>
             <a:spLocks noGrp="1"/>
           </p:cNvSpPr>
@@ -2344,7 +2344,7 @@
       </p:sp>
       <p:sp>
         <p:nvSpPr>
-          <p:cNvPr id="1514684649" name="Дата 3"/>
+          <p:cNvPr id="1660309105" name="Дата 3"/>
           <p:cNvSpPr>
             <a:spLocks noGrp="1"/>
           </p:cNvSpPr>
@@ -2370,7 +2370,7 @@
       </p:sp>
       <p:sp>
         <p:nvSpPr>
-          <p:cNvPr id="1994495992" name="Нижний колонтитул 4"/>
+          <p:cNvPr id="1661826262" name="Нижний колонтитул 4"/>
           <p:cNvSpPr>
             <a:spLocks noGrp="1"/>
           </p:cNvSpPr>
@@ -2392,7 +2392,7 @@
       </p:sp>
       <p:sp>
         <p:nvSpPr>
-          <p:cNvPr id="937671911" name="Номер слайда 5"/>
+          <p:cNvPr id="1070288153" name="Номер слайда 5"/>
           <p:cNvSpPr>
             <a:spLocks noGrp="1"/>
           </p:cNvSpPr>
@@ -2443,7 +2443,7 @@
       </p:grpSpPr>
       <p:sp>
         <p:nvSpPr>
-          <p:cNvPr id="2078012175" name="Вертикальный заголовок 1"/>
+          <p:cNvPr id="615955108" name="Вертикальный заголовок 1"/>
           <p:cNvSpPr>
             <a:spLocks noGrp="1"/>
           </p:cNvSpPr>
@@ -2474,7 +2474,7 @@
       </p:sp>
       <p:sp>
         <p:nvSpPr>
-          <p:cNvPr id="1645442367" name="Вертикальный текст 2"/>
+          <p:cNvPr id="1769331192" name="Вертикальный текст 2"/>
           <p:cNvSpPr>
             <a:spLocks noGrp="1"/>
           </p:cNvSpPr>
@@ -2545,7 +2545,7 @@
       </p:sp>
       <p:sp>
         <p:nvSpPr>
-          <p:cNvPr id="1200554935" name="Дата 3"/>
+          <p:cNvPr id="1132875379" name="Дата 3"/>
           <p:cNvSpPr>
             <a:spLocks noGrp="1"/>
           </p:cNvSpPr>
@@ -2571,7 +2571,7 @@
       </p:sp>
       <p:sp>
         <p:nvSpPr>
-          <p:cNvPr id="455680969" name="Нижний колонтитул 4"/>
+          <p:cNvPr id="17132060" name="Нижний колонтитул 4"/>
           <p:cNvSpPr>
             <a:spLocks noGrp="1"/>
           </p:cNvSpPr>
@@ -2593,7 +2593,7 @@
       </p:sp>
       <p:sp>
         <p:nvSpPr>
-          <p:cNvPr id="1708001462" name="Номер слайда 5"/>
+          <p:cNvPr id="1001010915" name="Номер слайда 5"/>
           <p:cNvSpPr>
             <a:spLocks noGrp="1"/>
           </p:cNvSpPr>
@@ -2644,7 +2644,7 @@
       </p:grpSpPr>
       <p:pic>
         <p:nvPicPr>
-          <p:cNvPr id="256381749" name="Picture 6" descr="HD-ShadowLong.png"/>
+          <p:cNvPr id="1347165987" name="Picture 6" descr="HD-ShadowLong.png"/>
           <p:cNvPicPr>
             <a:picLocks noChangeAspect="1"/>
           </p:cNvPicPr>
@@ -2666,7 +2666,7 @@
       </p:pic>
       <p:pic>
         <p:nvPicPr>
-          <p:cNvPr id="1386943393" name="Picture 7" descr="HD-ShadowShort.png"/>
+          <p:cNvPr id="617970983" name="Picture 7" descr="HD-ShadowShort.png"/>
           <p:cNvPicPr>
             <a:picLocks noChangeAspect="1"/>
           </p:cNvPicPr>
@@ -2688,7 +2688,7 @@
       </p:pic>
       <p:sp>
         <p:nvSpPr>
-          <p:cNvPr id="1256911902" name="Rectangle 8"/>
+          <p:cNvPr id="853541788" name="Rectangle 8"/>
           <p:cNvSpPr/>
           <p:nvPr/>
         </p:nvSpPr>
@@ -2729,7 +2729,7 @@
       </p:sp>
       <p:sp>
         <p:nvSpPr>
-          <p:cNvPr id="65874816" name="Rectangle 9"/>
+          <p:cNvPr id="673055578" name="Rectangle 9"/>
           <p:cNvSpPr/>
           <p:nvPr/>
         </p:nvSpPr>
@@ -2767,7 +2767,7 @@
       </p:sp>
       <p:sp>
         <p:nvSpPr>
-          <p:cNvPr id="1364768472" name="Title 1"/>
+          <p:cNvPr id="827577626" name="Title 1"/>
           <p:cNvSpPr>
             <a:spLocks noGrp="1"/>
           </p:cNvSpPr>
@@ -2804,7 +2804,7 @@
       </p:sp>
       <p:sp>
         <p:nvSpPr>
-          <p:cNvPr id="596678076" name="Subtitle 2"/>
+          <p:cNvPr id="684495137" name="Subtitle 2"/>
           <p:cNvSpPr>
             <a:spLocks noGrp="1"/>
           </p:cNvSpPr>
@@ -2874,7 +2874,7 @@
       </p:sp>
       <p:sp>
         <p:nvSpPr>
-          <p:cNvPr id="34584425" name="Date Placeholder 3"/>
+          <p:cNvPr id="1110430350" name="Date Placeholder 3"/>
           <p:cNvSpPr>
             <a:spLocks noGrp="1"/>
           </p:cNvSpPr>
@@ -2900,7 +2900,7 @@
       </p:sp>
       <p:sp>
         <p:nvSpPr>
-          <p:cNvPr id="850918959" name="Footer Placeholder 4"/>
+          <p:cNvPr id="1667690485" name="Footer Placeholder 4"/>
           <p:cNvSpPr>
             <a:spLocks noGrp="1"/>
           </p:cNvSpPr>
@@ -2922,7 +2922,7 @@
       </p:sp>
       <p:sp>
         <p:nvSpPr>
-          <p:cNvPr id="740060001" name="Slide Number Placeholder 5"/>
+          <p:cNvPr id="892209424" name="Slide Number Placeholder 5"/>
           <p:cNvSpPr>
             <a:spLocks noGrp="1"/>
           </p:cNvSpPr>
@@ -2978,7 +2978,7 @@
       </p:grpSpPr>
       <p:pic>
         <p:nvPicPr>
-          <p:cNvPr id="1537405515" name="Picture 14" descr="HD-ShadowLong.png"/>
+          <p:cNvPr id="1834700556" name="Picture 14" descr="HD-ShadowLong.png"/>
           <p:cNvPicPr>
             <a:picLocks noChangeAspect="1"/>
           </p:cNvPicPr>
@@ -3000,7 +3000,7 @@
       </p:pic>
       <p:pic>
         <p:nvPicPr>
-          <p:cNvPr id="687146211" name="Picture 15" descr="HD-ShadowShort.png"/>
+          <p:cNvPr id="811837007" name="Picture 15" descr="HD-ShadowShort.png"/>
           <p:cNvPicPr>
             <a:picLocks noChangeAspect="1"/>
           </p:cNvPicPr>
@@ -3022,7 +3022,7 @@
       </p:pic>
       <p:sp>
         <p:nvSpPr>
-          <p:cNvPr id="2139853914" name="Rectangle 16"/>
+          <p:cNvPr id="393035077" name="Rectangle 16"/>
           <p:cNvSpPr/>
           <p:nvPr/>
         </p:nvSpPr>
@@ -3063,7 +3063,7 @@
       </p:sp>
       <p:sp>
         <p:nvSpPr>
-          <p:cNvPr id="1481624075" name="Rectangle 17"/>
+          <p:cNvPr id="643690548" name="Rectangle 17"/>
           <p:cNvSpPr/>
           <p:nvPr/>
         </p:nvSpPr>
@@ -3101,7 +3101,7 @@
       </p:sp>
       <p:sp>
         <p:nvSpPr>
-          <p:cNvPr id="574719932" name="Title 1"/>
+          <p:cNvPr id="454811574" name="Title 1"/>
           <p:cNvSpPr>
             <a:spLocks noGrp="1"/>
           </p:cNvSpPr>
@@ -3127,7 +3127,7 @@
       </p:sp>
       <p:sp>
         <p:nvSpPr>
-          <p:cNvPr id="2071645381" name="Content Placeholder 2"/>
+          <p:cNvPr id="1857867045" name="Content Placeholder 2"/>
           <p:cNvSpPr>
             <a:spLocks noGrp="1"/>
           </p:cNvSpPr>
@@ -3193,7 +3193,7 @@
       </p:sp>
       <p:sp>
         <p:nvSpPr>
-          <p:cNvPr id="449567260" name="Date Placeholder 3"/>
+          <p:cNvPr id="308771421" name="Date Placeholder 3"/>
           <p:cNvSpPr>
             <a:spLocks noGrp="1"/>
           </p:cNvSpPr>
@@ -3219,7 +3219,7 @@
       </p:sp>
       <p:sp>
         <p:nvSpPr>
-          <p:cNvPr id="1487400725" name="Footer Placeholder 4"/>
+          <p:cNvPr id="1049347105" name="Footer Placeholder 4"/>
           <p:cNvSpPr>
             <a:spLocks noGrp="1"/>
           </p:cNvSpPr>
@@ -3241,7 +3241,7 @@
       </p:sp>
       <p:sp>
         <p:nvSpPr>
-          <p:cNvPr id="832400854" name="Slide Number Placeholder 5"/>
+          <p:cNvPr id="1968246769" name="Slide Number Placeholder 5"/>
           <p:cNvSpPr>
             <a:spLocks noGrp="1"/>
           </p:cNvSpPr>
@@ -3292,7 +3292,7 @@
       </p:grpSpPr>
       <p:pic>
         <p:nvPicPr>
-          <p:cNvPr id="960928336" name="Picture 6" descr="HD-ShadowLong.png"/>
+          <p:cNvPr id="47848199" name="Picture 6" descr="HD-ShadowLong.png"/>
           <p:cNvPicPr>
             <a:picLocks noChangeAspect="1"/>
           </p:cNvPicPr>
@@ -3314,7 +3314,7 @@
       </p:pic>
       <p:pic>
         <p:nvPicPr>
-          <p:cNvPr id="1396009945" name="Picture 7" descr="HD-ShadowShort.png"/>
+          <p:cNvPr id="70626481" name="Picture 7" descr="HD-ShadowShort.png"/>
           <p:cNvPicPr>
             <a:picLocks noChangeAspect="1"/>
           </p:cNvPicPr>
@@ -3336,7 +3336,7 @@
       </p:pic>
       <p:sp>
         <p:nvSpPr>
-          <p:cNvPr id="1873942768" name="Rectangle 8"/>
+          <p:cNvPr id="223293187" name="Rectangle 8"/>
           <p:cNvSpPr/>
           <p:nvPr/>
         </p:nvSpPr>
@@ -3377,7 +3377,7 @@
       </p:sp>
       <p:sp>
         <p:nvSpPr>
-          <p:cNvPr id="1284999014" name="Rectangle 9"/>
+          <p:cNvPr id="187340680" name="Rectangle 9"/>
           <p:cNvSpPr/>
           <p:nvPr/>
         </p:nvSpPr>
@@ -3415,7 +3415,7 @@
       </p:sp>
       <p:sp>
         <p:nvSpPr>
-          <p:cNvPr id="1374944103" name="Title 1"/>
+          <p:cNvPr id="1041177092" name="Title 1"/>
           <p:cNvSpPr>
             <a:spLocks noGrp="1"/>
           </p:cNvSpPr>
@@ -3452,7 +3452,7 @@
       </p:sp>
       <p:sp>
         <p:nvSpPr>
-          <p:cNvPr id="44220420" name="Text Placeholder 2"/>
+          <p:cNvPr id="1887224217" name="Text Placeholder 2"/>
           <p:cNvSpPr>
             <a:spLocks noGrp="1"/>
           </p:cNvSpPr>
@@ -3576,7 +3576,7 @@
       </p:sp>
       <p:sp>
         <p:nvSpPr>
-          <p:cNvPr id="1686949770" name="Date Placeholder 3"/>
+          <p:cNvPr id="1029104409" name="Date Placeholder 3"/>
           <p:cNvSpPr>
             <a:spLocks noGrp="1"/>
           </p:cNvSpPr>
@@ -3602,7 +3602,7 @@
       </p:sp>
       <p:sp>
         <p:nvSpPr>
-          <p:cNvPr id="473362589" name="Footer Placeholder 4"/>
+          <p:cNvPr id="318126034" name="Footer Placeholder 4"/>
           <p:cNvSpPr>
             <a:spLocks noGrp="1"/>
           </p:cNvSpPr>
@@ -3624,7 +3624,7 @@
       </p:sp>
       <p:sp>
         <p:nvSpPr>
-          <p:cNvPr id="1269216839" name="Slide Number Placeholder 5"/>
+          <p:cNvPr id="1582887656" name="Slide Number Placeholder 5"/>
           <p:cNvSpPr>
             <a:spLocks noGrp="1"/>
           </p:cNvSpPr>
@@ -3680,7 +3680,7 @@
       </p:grpSpPr>
       <p:pic>
         <p:nvPicPr>
-          <p:cNvPr id="1117512021" name="Picture 7" descr="HD-ShadowLong.png"/>
+          <p:cNvPr id="1990530080" name="Picture 7" descr="HD-ShadowLong.png"/>
           <p:cNvPicPr>
             <a:picLocks noChangeAspect="1"/>
           </p:cNvPicPr>
@@ -3702,7 +3702,7 @@
       </p:pic>
       <p:pic>
         <p:nvPicPr>
-          <p:cNvPr id="1344074197" name="Picture 8" descr="HD-ShadowShort.png"/>
+          <p:cNvPr id="569431448" name="Picture 8" descr="HD-ShadowShort.png"/>
           <p:cNvPicPr>
             <a:picLocks noChangeAspect="1"/>
           </p:cNvPicPr>
@@ -3724,7 +3724,7 @@
       </p:pic>
       <p:sp>
         <p:nvSpPr>
-          <p:cNvPr id="1517418917" name="Rectangle 9"/>
+          <p:cNvPr id="1364202438" name="Rectangle 9"/>
           <p:cNvSpPr/>
           <p:nvPr/>
         </p:nvSpPr>
@@ -3765,7 +3765,7 @@
       </p:sp>
       <p:sp>
         <p:nvSpPr>
-          <p:cNvPr id="1255080735" name="Rectangle 10"/>
+          <p:cNvPr id="918307440" name="Rectangle 10"/>
           <p:cNvSpPr/>
           <p:nvPr/>
         </p:nvSpPr>
@@ -3803,7 +3803,7 @@
       </p:sp>
       <p:sp>
         <p:nvSpPr>
-          <p:cNvPr id="515043131" name="Title 1"/>
+          <p:cNvPr id="1573780824" name="Title 1"/>
           <p:cNvSpPr>
             <a:spLocks noGrp="1"/>
           </p:cNvSpPr>
@@ -3829,7 +3829,7 @@
       </p:sp>
       <p:sp>
         <p:nvSpPr>
-          <p:cNvPr id="273481586" name="Content Placeholder 2"/>
+          <p:cNvPr id="834016053" name="Content Placeholder 2"/>
           <p:cNvSpPr>
             <a:spLocks noGrp="1"/>
           </p:cNvSpPr>
@@ -3900,7 +3900,7 @@
       </p:sp>
       <p:sp>
         <p:nvSpPr>
-          <p:cNvPr id="966287632" name="Content Placeholder 3"/>
+          <p:cNvPr id="639522489" name="Content Placeholder 3"/>
           <p:cNvSpPr>
             <a:spLocks noGrp="1"/>
           </p:cNvSpPr>
@@ -3971,7 +3971,7 @@
       </p:sp>
       <p:sp>
         <p:nvSpPr>
-          <p:cNvPr id="1974461994" name="Date Placeholder 4"/>
+          <p:cNvPr id="1986750372" name="Date Placeholder 4"/>
           <p:cNvSpPr>
             <a:spLocks noGrp="1"/>
           </p:cNvSpPr>
@@ -3997,7 +3997,7 @@
       </p:sp>
       <p:sp>
         <p:nvSpPr>
-          <p:cNvPr id="387063028" name="Footer Placeholder 5"/>
+          <p:cNvPr id="204817690" name="Footer Placeholder 5"/>
           <p:cNvSpPr>
             <a:spLocks noGrp="1"/>
           </p:cNvSpPr>
@@ -4019,7 +4019,7 @@
       </p:sp>
       <p:sp>
         <p:nvSpPr>
-          <p:cNvPr id="2082075574" name="Slide Number Placeholder 6"/>
+          <p:cNvPr id="1982600501" name="Slide Number Placeholder 6"/>
           <p:cNvSpPr>
             <a:spLocks noGrp="1"/>
           </p:cNvSpPr>
@@ -4070,7 +4070,7 @@
       </p:grpSpPr>
       <p:pic>
         <p:nvPicPr>
-          <p:cNvPr id="1942024010" name="Picture 9" descr="HD-ShadowLong.png"/>
+          <p:cNvPr id="940321677" name="Picture 9" descr="HD-ShadowLong.png"/>
           <p:cNvPicPr>
             <a:picLocks noChangeAspect="1"/>
           </p:cNvPicPr>
@@ -4092,7 +4092,7 @@
       </p:pic>
       <p:pic>
         <p:nvPicPr>
-          <p:cNvPr id="1533934631" name="Picture 10" descr="HD-ShadowShort.png"/>
+          <p:cNvPr id="2021696965" name="Picture 10" descr="HD-ShadowShort.png"/>
           <p:cNvPicPr>
             <a:picLocks noChangeAspect="1"/>
           </p:cNvPicPr>
@@ -4114,7 +4114,7 @@
       </p:pic>
       <p:sp>
         <p:nvSpPr>
-          <p:cNvPr id="1562917759" name="Rectangle 11"/>
+          <p:cNvPr id="326980156" name="Rectangle 11"/>
           <p:cNvSpPr/>
           <p:nvPr/>
         </p:nvSpPr>
@@ -4155,7 +4155,7 @@
       </p:sp>
       <p:sp>
         <p:nvSpPr>
-          <p:cNvPr id="1997275393" name="Rectangle 12"/>
+          <p:cNvPr id="1591714048" name="Rectangle 12"/>
           <p:cNvSpPr/>
           <p:nvPr/>
         </p:nvSpPr>
@@ -4193,7 +4193,7 @@
       </p:sp>
       <p:sp>
         <p:nvSpPr>
-          <p:cNvPr id="1531193543" name="Title 1"/>
+          <p:cNvPr id="2123285681" name="Title 1"/>
           <p:cNvSpPr>
             <a:spLocks noGrp="1"/>
           </p:cNvSpPr>
@@ -4224,7 +4224,7 @@
       </p:sp>
       <p:sp>
         <p:nvSpPr>
-          <p:cNvPr id="557980628" name="Text Placeholder 2"/>
+          <p:cNvPr id="1490518794" name="Text Placeholder 2"/>
           <p:cNvSpPr>
             <a:spLocks noGrp="1"/>
           </p:cNvSpPr>
@@ -4292,7 +4292,7 @@
       </p:sp>
       <p:sp>
         <p:nvSpPr>
-          <p:cNvPr id="1861243600" name="Content Placeholder 3"/>
+          <p:cNvPr id="1746759790" name="Content Placeholder 3"/>
           <p:cNvSpPr>
             <a:spLocks noGrp="1"/>
           </p:cNvSpPr>
@@ -4363,7 +4363,7 @@
       </p:sp>
       <p:sp>
         <p:nvSpPr>
-          <p:cNvPr id="727166565" name="Text Placeholder 4"/>
+          <p:cNvPr id="412860913" name="Text Placeholder 4"/>
           <p:cNvSpPr>
             <a:spLocks noGrp="1"/>
           </p:cNvSpPr>
@@ -4431,7 +4431,7 @@
       </p:sp>
       <p:sp>
         <p:nvSpPr>
-          <p:cNvPr id="1607072540" name="Content Placeholder 5"/>
+          <p:cNvPr id="825345860" name="Content Placeholder 5"/>
           <p:cNvSpPr>
             <a:spLocks noGrp="1"/>
           </p:cNvSpPr>
@@ -4502,7 +4502,7 @@
       </p:sp>
       <p:sp>
         <p:nvSpPr>
-          <p:cNvPr id="389072476" name="Date Placeholder 6"/>
+          <p:cNvPr id="1099224981" name="Date Placeholder 6"/>
           <p:cNvSpPr>
             <a:spLocks noGrp="1"/>
           </p:cNvSpPr>
@@ -4528,7 +4528,7 @@
       </p:sp>
       <p:sp>
         <p:nvSpPr>
-          <p:cNvPr id="4791134" name="Footer Placeholder 7"/>
+          <p:cNvPr id="359672024" name="Footer Placeholder 7"/>
           <p:cNvSpPr>
             <a:spLocks noGrp="1"/>
           </p:cNvSpPr>
@@ -4550,7 +4550,7 @@
       </p:sp>
       <p:sp>
         <p:nvSpPr>
-          <p:cNvPr id="1906377965" name="Slide Number Placeholder 8"/>
+          <p:cNvPr id="879293271" name="Slide Number Placeholder 8"/>
           <p:cNvSpPr>
             <a:spLocks noGrp="1"/>
           </p:cNvSpPr>
@@ -4601,7 +4601,7 @@
       </p:grpSpPr>
       <p:pic>
         <p:nvPicPr>
-          <p:cNvPr id="1254846908" name="Picture 5" descr="HD-ShadowLong.png"/>
+          <p:cNvPr id="472328068" name="Picture 5" descr="HD-ShadowLong.png"/>
           <p:cNvPicPr>
             <a:picLocks noChangeAspect="1"/>
           </p:cNvPicPr>
@@ -4623,7 +4623,7 @@
       </p:pic>
       <p:pic>
         <p:nvPicPr>
-          <p:cNvPr id="1023628694" name="Picture 6" descr="HD-ShadowShort.png"/>
+          <p:cNvPr id="210114609" name="Picture 6" descr="HD-ShadowShort.png"/>
           <p:cNvPicPr>
             <a:picLocks noChangeAspect="1"/>
           </p:cNvPicPr>
@@ -4645,7 +4645,7 @@
       </p:pic>
       <p:sp>
         <p:nvSpPr>
-          <p:cNvPr id="1731451118" name="Rectangle 7"/>
+          <p:cNvPr id="1327167317" name="Rectangle 7"/>
           <p:cNvSpPr/>
           <p:nvPr/>
         </p:nvSpPr>
@@ -4686,7 +4686,7 @@
       </p:sp>
       <p:sp>
         <p:nvSpPr>
-          <p:cNvPr id="1125855248" name="Rectangle 8"/>
+          <p:cNvPr id="708377840" name="Rectangle 8"/>
           <p:cNvSpPr/>
           <p:nvPr/>
         </p:nvSpPr>
@@ -4724,7 +4724,7 @@
       </p:sp>
       <p:sp>
         <p:nvSpPr>
-          <p:cNvPr id="704712594" name="Title 1"/>
+          <p:cNvPr id="2001909140" name="Title 1"/>
           <p:cNvSpPr>
             <a:spLocks noGrp="1"/>
           </p:cNvSpPr>
@@ -4750,7 +4750,7 @@
       </p:sp>
       <p:sp>
         <p:nvSpPr>
-          <p:cNvPr id="1853318538" name="Date Placeholder 2"/>
+          <p:cNvPr id="1830228862" name="Date Placeholder 2"/>
           <p:cNvSpPr>
             <a:spLocks noGrp="1"/>
           </p:cNvSpPr>
@@ -4776,7 +4776,7 @@
       </p:sp>
       <p:sp>
         <p:nvSpPr>
-          <p:cNvPr id="180565417" name="Footer Placeholder 3"/>
+          <p:cNvPr id="765661052" name="Footer Placeholder 3"/>
           <p:cNvSpPr>
             <a:spLocks noGrp="1"/>
           </p:cNvSpPr>
@@ -4798,7 +4798,7 @@
       </p:sp>
       <p:sp>
         <p:nvSpPr>
-          <p:cNvPr id="2057638186" name="Slide Number Placeholder 4"/>
+          <p:cNvPr id="179690220" name="Slide Number Placeholder 4"/>
           <p:cNvSpPr>
             <a:spLocks noGrp="1"/>
           </p:cNvSpPr>
@@ -4849,7 +4849,7 @@
       </p:grpSpPr>
       <p:pic>
         <p:nvPicPr>
-          <p:cNvPr id="779196013" name="Picture 4" descr="HD-ShadowShort.png"/>
+          <p:cNvPr id="449675574" name="Picture 4" descr="HD-ShadowShort.png"/>
           <p:cNvPicPr>
             <a:picLocks noChangeAspect="1"/>
           </p:cNvPicPr>
@@ -4871,7 +4871,7 @@
       </p:pic>
       <p:sp>
         <p:nvSpPr>
-          <p:cNvPr id="883164638" name="Rectangle 5"/>
+          <p:cNvPr id="500199933" name="Rectangle 5"/>
           <p:cNvSpPr/>
           <p:nvPr/>
         </p:nvSpPr>
@@ -4909,7 +4909,7 @@
       </p:sp>
       <p:sp>
         <p:nvSpPr>
-          <p:cNvPr id="140288839" name="Date Placeholder 1"/>
+          <p:cNvPr id="1916627774" name="Date Placeholder 1"/>
           <p:cNvSpPr>
             <a:spLocks noGrp="1"/>
           </p:cNvSpPr>
@@ -4935,7 +4935,7 @@
       </p:sp>
       <p:sp>
         <p:nvSpPr>
-          <p:cNvPr id="245481780" name="Footer Placeholder 2"/>
+          <p:cNvPr id="1222793595" name="Footer Placeholder 2"/>
           <p:cNvSpPr>
             <a:spLocks noGrp="1"/>
           </p:cNvSpPr>
@@ -4957,7 +4957,7 @@
       </p:sp>
       <p:sp>
         <p:nvSpPr>
-          <p:cNvPr id="1682361269" name="Slide Number Placeholder 3"/>
+          <p:cNvPr id="1466886564" name="Slide Number Placeholder 3"/>
           <p:cNvSpPr>
             <a:spLocks noGrp="1"/>
           </p:cNvSpPr>
@@ -5008,7 +5008,7 @@
       </p:grpSpPr>
       <p:pic>
         <p:nvPicPr>
-          <p:cNvPr id="1763154306" name="Picture 7" descr="HD-ShadowLong.png"/>
+          <p:cNvPr id="1285177234" name="Picture 7" descr="HD-ShadowLong.png"/>
           <p:cNvPicPr>
             <a:picLocks noChangeAspect="1"/>
           </p:cNvPicPr>
@@ -5030,7 +5030,7 @@
       </p:pic>
       <p:pic>
         <p:nvPicPr>
-          <p:cNvPr id="2142434214" name="Picture 8" descr="HD-ShadowShort.png"/>
+          <p:cNvPr id="1524121593" name="Picture 8" descr="HD-ShadowShort.png"/>
           <p:cNvPicPr>
             <a:picLocks noChangeAspect="1"/>
           </p:cNvPicPr>
@@ -5052,7 +5052,7 @@
       </p:pic>
       <p:sp>
         <p:nvSpPr>
-          <p:cNvPr id="368014218" name="Rectangle 9"/>
+          <p:cNvPr id="1427733504" name="Rectangle 9"/>
           <p:cNvSpPr/>
           <p:nvPr/>
         </p:nvSpPr>
@@ -5093,7 +5093,7 @@
       </p:sp>
       <p:sp>
         <p:nvSpPr>
-          <p:cNvPr id="670885192" name="Rectangle 10"/>
+          <p:cNvPr id="107972478" name="Rectangle 10"/>
           <p:cNvSpPr/>
           <p:nvPr/>
         </p:nvSpPr>
@@ -5131,7 +5131,7 @@
       </p:sp>
       <p:sp>
         <p:nvSpPr>
-          <p:cNvPr id="380260985" name="Title 1"/>
+          <p:cNvPr id="1108915019" name="Title 1"/>
           <p:cNvSpPr>
             <a:spLocks noGrp="1"/>
           </p:cNvSpPr>
@@ -5168,7 +5168,7 @@
       </p:sp>
       <p:sp>
         <p:nvSpPr>
-          <p:cNvPr id="739401052" name="Content Placeholder 2"/>
+          <p:cNvPr id="1864279751" name="Content Placeholder 2"/>
           <p:cNvSpPr>
             <a:spLocks noGrp="1"/>
           </p:cNvSpPr>
@@ -5239,7 +5239,7 @@
       </p:sp>
       <p:sp>
         <p:nvSpPr>
-          <p:cNvPr id="221901945" name="Text Placeholder 3"/>
+          <p:cNvPr id="1551444133" name="Text Placeholder 3"/>
           <p:cNvSpPr>
             <a:spLocks noGrp="1"/>
           </p:cNvSpPr>
@@ -5307,7 +5307,7 @@
       </p:sp>
       <p:sp>
         <p:nvSpPr>
-          <p:cNvPr id="452635696" name="Date Placeholder 4"/>
+          <p:cNvPr id="1751702281" name="Date Placeholder 4"/>
           <p:cNvSpPr>
             <a:spLocks noGrp="1"/>
           </p:cNvSpPr>
@@ -5333,7 +5333,7 @@
       </p:sp>
       <p:sp>
         <p:nvSpPr>
-          <p:cNvPr id="1052948025" name="Footer Placeholder 5"/>
+          <p:cNvPr id="1914220232" name="Footer Placeholder 5"/>
           <p:cNvSpPr>
             <a:spLocks noGrp="1"/>
           </p:cNvSpPr>
@@ -5355,7 +5355,7 @@
       </p:sp>
       <p:sp>
         <p:nvSpPr>
-          <p:cNvPr id="1867628764" name="Slide Number Placeholder 6"/>
+          <p:cNvPr id="9543168" name="Slide Number Placeholder 6"/>
           <p:cNvSpPr>
             <a:spLocks noGrp="1"/>
           </p:cNvSpPr>
@@ -5406,7 +5406,7 @@
       </p:grpSpPr>
       <p:sp>
         <p:nvSpPr>
-          <p:cNvPr id="1412456014" name="Заголовок 1"/>
+          <p:cNvPr id="955896150" name="Заголовок 1"/>
           <p:cNvSpPr>
             <a:spLocks noGrp="1"/>
           </p:cNvSpPr>
@@ -5432,7 +5432,7 @@
       </p:sp>
       <p:sp>
         <p:nvSpPr>
-          <p:cNvPr id="1489063781" name="Объект 2"/>
+          <p:cNvPr id="2146656591" name="Объект 2"/>
           <p:cNvSpPr>
             <a:spLocks noGrp="1"/>
           </p:cNvSpPr>
@@ -5498,7 +5498,7 @@
       </p:sp>
       <p:sp>
         <p:nvSpPr>
-          <p:cNvPr id="1960421324" name="Дата 3"/>
+          <p:cNvPr id="708094448" name="Дата 3"/>
           <p:cNvSpPr>
             <a:spLocks noGrp="1"/>
           </p:cNvSpPr>
@@ -5524,7 +5524,7 @@
       </p:sp>
       <p:sp>
         <p:nvSpPr>
-          <p:cNvPr id="204433431" name="Нижний колонтитул 4"/>
+          <p:cNvPr id="9125617" name="Нижний колонтитул 4"/>
           <p:cNvSpPr>
             <a:spLocks noGrp="1"/>
           </p:cNvSpPr>
@@ -5546,7 +5546,7 @@
       </p:sp>
       <p:sp>
         <p:nvSpPr>
-          <p:cNvPr id="1782249760" name="Номер слайда 5"/>
+          <p:cNvPr id="1035869192" name="Номер слайда 5"/>
           <p:cNvSpPr>
             <a:spLocks noGrp="1"/>
           </p:cNvSpPr>
@@ -5597,7 +5597,7 @@
       </p:grpSpPr>
       <p:pic>
         <p:nvPicPr>
-          <p:cNvPr id="1995206400" name="Picture 7" descr="HD-ShadowLong.png"/>
+          <p:cNvPr id="1804106501" name="Picture 7" descr="HD-ShadowLong.png"/>
           <p:cNvPicPr>
             <a:picLocks noChangeAspect="1"/>
           </p:cNvPicPr>
@@ -5619,7 +5619,7 @@
       </p:pic>
       <p:pic>
         <p:nvPicPr>
-          <p:cNvPr id="1731484283" name="Picture 8" descr="HD-ShadowShort.png"/>
+          <p:cNvPr id="912628000" name="Picture 8" descr="HD-ShadowShort.png"/>
           <p:cNvPicPr>
             <a:picLocks noChangeAspect="1"/>
           </p:cNvPicPr>
@@ -5641,7 +5641,7 @@
       </p:pic>
       <p:sp>
         <p:nvSpPr>
-          <p:cNvPr id="22138846" name="Rectangle 9"/>
+          <p:cNvPr id="832092858" name="Rectangle 9"/>
           <p:cNvSpPr/>
           <p:nvPr/>
         </p:nvSpPr>
@@ -5682,7 +5682,7 @@
       </p:sp>
       <p:sp>
         <p:nvSpPr>
-          <p:cNvPr id="2040590332" name="Rectangle 10"/>
+          <p:cNvPr id="1215719611" name="Rectangle 10"/>
           <p:cNvSpPr/>
           <p:nvPr/>
         </p:nvSpPr>
@@ -5720,7 +5720,7 @@
       </p:sp>
       <p:sp>
         <p:nvSpPr>
-          <p:cNvPr id="266314955" name="Title 1"/>
+          <p:cNvPr id="2005596291" name="Title 1"/>
           <p:cNvSpPr>
             <a:spLocks noGrp="1"/>
           </p:cNvSpPr>
@@ -5757,7 +5757,7 @@
       </p:sp>
       <p:sp>
         <p:nvSpPr>
-          <p:cNvPr id="63885608" name="Picture Placeholder 2"/>
+          <p:cNvPr id="394012585" name="Picture Placeholder 2"/>
           <p:cNvSpPr>
             <a:spLocks noChangeAspect="1" noGrp="1"/>
           </p:cNvSpPr>
@@ -5839,7 +5839,7 @@
       </p:sp>
       <p:sp>
         <p:nvSpPr>
-          <p:cNvPr id="1851684729" name="Text Placeholder 3"/>
+          <p:cNvPr id="1852015701" name="Text Placeholder 3"/>
           <p:cNvSpPr>
             <a:spLocks noGrp="1"/>
           </p:cNvSpPr>
@@ -5907,7 +5907,7 @@
       </p:sp>
       <p:sp>
         <p:nvSpPr>
-          <p:cNvPr id="331226851" name="Date Placeholder 4"/>
+          <p:cNvPr id="1114559009" name="Date Placeholder 4"/>
           <p:cNvSpPr>
             <a:spLocks noGrp="1"/>
           </p:cNvSpPr>
@@ -5933,7 +5933,7 @@
       </p:sp>
       <p:sp>
         <p:nvSpPr>
-          <p:cNvPr id="1416645511" name="Footer Placeholder 5"/>
+          <p:cNvPr id="408358131" name="Footer Placeholder 5"/>
           <p:cNvSpPr>
             <a:spLocks noGrp="1"/>
           </p:cNvSpPr>
@@ -5955,7 +5955,7 @@
       </p:sp>
       <p:sp>
         <p:nvSpPr>
-          <p:cNvPr id="1016095474" name="Slide Number Placeholder 6"/>
+          <p:cNvPr id="1718108850" name="Slide Number Placeholder 6"/>
           <p:cNvSpPr>
             <a:spLocks noGrp="1"/>
           </p:cNvSpPr>
@@ -6006,7 +6006,7 @@
       </p:grpSpPr>
       <p:pic>
         <p:nvPicPr>
-          <p:cNvPr id="1404064762" name="Picture 7" descr="HD-ShadowLong.png"/>
+          <p:cNvPr id="987565293" name="Picture 7" descr="HD-ShadowLong.png"/>
           <p:cNvPicPr>
             <a:picLocks noChangeAspect="1"/>
           </p:cNvPicPr>
@@ -6028,7 +6028,7 @@
       </p:pic>
       <p:pic>
         <p:nvPicPr>
-          <p:cNvPr id="1647312713" name="Picture 8" descr="HD-ShadowShort.png"/>
+          <p:cNvPr id="1948382810" name="Picture 8" descr="HD-ShadowShort.png"/>
           <p:cNvPicPr>
             <a:picLocks noChangeAspect="1"/>
           </p:cNvPicPr>
@@ -6050,7 +6050,7 @@
       </p:pic>
       <p:sp>
         <p:nvSpPr>
-          <p:cNvPr id="824141271" name="Rectangle 9"/>
+          <p:cNvPr id="608905111" name="Rectangle 9"/>
           <p:cNvSpPr/>
           <p:nvPr/>
         </p:nvSpPr>
@@ -6091,7 +6091,7 @@
       </p:sp>
       <p:sp>
         <p:nvSpPr>
-          <p:cNvPr id="128662828" name="Rectangle 10"/>
+          <p:cNvPr id="1770411865" name="Rectangle 10"/>
           <p:cNvSpPr/>
           <p:nvPr/>
         </p:nvSpPr>
@@ -6129,7 +6129,7 @@
       </p:sp>
       <p:sp>
         <p:nvSpPr>
-          <p:cNvPr id="768346136" name="Title 1"/>
+          <p:cNvPr id="339355642" name="Title 1"/>
           <p:cNvSpPr>
             <a:spLocks noGrp="1"/>
           </p:cNvSpPr>
@@ -6166,7 +6166,7 @@
       </p:sp>
       <p:sp>
         <p:nvSpPr>
-          <p:cNvPr id="1447468428" name="Picture Placeholder 2"/>
+          <p:cNvPr id="626131037" name="Picture Placeholder 2"/>
           <p:cNvSpPr>
             <a:spLocks noChangeAspect="1" noGrp="1"/>
           </p:cNvSpPr>
@@ -6248,7 +6248,7 @@
       </p:sp>
       <p:sp>
         <p:nvSpPr>
-          <p:cNvPr id="933732781" name="Text Placeholder 3"/>
+          <p:cNvPr id="1107453346" name="Text Placeholder 3"/>
           <p:cNvSpPr>
             <a:spLocks noGrp="1"/>
           </p:cNvSpPr>
@@ -6316,7 +6316,7 @@
       </p:sp>
       <p:sp>
         <p:nvSpPr>
-          <p:cNvPr id="888328974" name="Date Placeholder 4"/>
+          <p:cNvPr id="497889693" name="Date Placeholder 4"/>
           <p:cNvSpPr>
             <a:spLocks noGrp="1"/>
           </p:cNvSpPr>
@@ -6342,7 +6342,7 @@
       </p:sp>
       <p:sp>
         <p:nvSpPr>
-          <p:cNvPr id="630732340" name="Footer Placeholder 5"/>
+          <p:cNvPr id="1257347310" name="Footer Placeholder 5"/>
           <p:cNvSpPr>
             <a:spLocks noGrp="1"/>
           </p:cNvSpPr>
@@ -6364,7 +6364,7 @@
       </p:sp>
       <p:sp>
         <p:nvSpPr>
-          <p:cNvPr id="346057190" name="Slide Number Placeholder 6"/>
+          <p:cNvPr id="944376207" name="Slide Number Placeholder 6"/>
           <p:cNvSpPr>
             <a:spLocks noGrp="1"/>
           </p:cNvSpPr>
@@ -6420,7 +6420,7 @@
       </p:grpSpPr>
       <p:pic>
         <p:nvPicPr>
-          <p:cNvPr id="1524628644" name="Picture 7" descr="HD-ShadowLong.png"/>
+          <p:cNvPr id="1024024871" name="Picture 7" descr="HD-ShadowLong.png"/>
           <p:cNvPicPr>
             <a:picLocks noChangeAspect="1"/>
           </p:cNvPicPr>
@@ -6442,7 +6442,7 @@
       </p:pic>
       <p:pic>
         <p:nvPicPr>
-          <p:cNvPr id="743276234" name="Picture 8" descr="HD-ShadowShort.png"/>
+          <p:cNvPr id="1885016797" name="Picture 8" descr="HD-ShadowShort.png"/>
           <p:cNvPicPr>
             <a:picLocks noChangeAspect="1"/>
           </p:cNvPicPr>
@@ -6464,7 +6464,7 @@
       </p:pic>
       <p:sp>
         <p:nvSpPr>
-          <p:cNvPr id="648890744" name="Rectangle 9"/>
+          <p:cNvPr id="236628158" name="Rectangle 9"/>
           <p:cNvSpPr/>
           <p:nvPr/>
         </p:nvSpPr>
@@ -6505,7 +6505,7 @@
       </p:sp>
       <p:sp>
         <p:nvSpPr>
-          <p:cNvPr id="910797804" name="Rectangle 10"/>
+          <p:cNvPr id="448025928" name="Rectangle 10"/>
           <p:cNvSpPr/>
           <p:nvPr/>
         </p:nvSpPr>
@@ -6543,7 +6543,7 @@
       </p:sp>
       <p:sp>
         <p:nvSpPr>
-          <p:cNvPr id="1563668867" name="Title 1"/>
+          <p:cNvPr id="1606407708" name="Title 1"/>
           <p:cNvSpPr>
             <a:spLocks noGrp="1"/>
           </p:cNvSpPr>
@@ -6578,7 +6578,7 @@
       </p:sp>
       <p:sp>
         <p:nvSpPr>
-          <p:cNvPr id="1183356081" name="Text Placeholder 3"/>
+          <p:cNvPr id="1949527085" name="Text Placeholder 3"/>
           <p:cNvSpPr>
             <a:spLocks noGrp="1"/>
           </p:cNvSpPr>
@@ -6646,7 +6646,7 @@
       </p:sp>
       <p:sp>
         <p:nvSpPr>
-          <p:cNvPr id="1405035263" name="Date Placeholder 4"/>
+          <p:cNvPr id="1182711108" name="Date Placeholder 4"/>
           <p:cNvSpPr>
             <a:spLocks noGrp="1"/>
           </p:cNvSpPr>
@@ -6672,7 +6672,7 @@
       </p:sp>
       <p:sp>
         <p:nvSpPr>
-          <p:cNvPr id="335846271" name="Footer Placeholder 5"/>
+          <p:cNvPr id="614418121" name="Footer Placeholder 5"/>
           <p:cNvSpPr>
             <a:spLocks noGrp="1"/>
           </p:cNvSpPr>
@@ -6694,7 +6694,7 @@
       </p:sp>
       <p:sp>
         <p:nvSpPr>
-          <p:cNvPr id="1603097143" name="Slide Number Placeholder 6"/>
+          <p:cNvPr id="782309395" name="Slide Number Placeholder 6"/>
           <p:cNvSpPr>
             <a:spLocks noGrp="1"/>
           </p:cNvSpPr>
@@ -6750,7 +6750,7 @@
       </p:grpSpPr>
       <p:pic>
         <p:nvPicPr>
-          <p:cNvPr id="1202112170" name="Picture 10" descr="HD-ShadowLong.png"/>
+          <p:cNvPr id="1457067148" name="Picture 10" descr="HD-ShadowLong.png"/>
           <p:cNvPicPr>
             <a:picLocks noChangeAspect="1"/>
           </p:cNvPicPr>
@@ -6772,7 +6772,7 @@
       </p:pic>
       <p:pic>
         <p:nvPicPr>
-          <p:cNvPr id="1793643335" name="Picture 12" descr="HD-ShadowShort.png"/>
+          <p:cNvPr id="711294609" name="Picture 12" descr="HD-ShadowShort.png"/>
           <p:cNvPicPr>
             <a:picLocks noChangeAspect="1"/>
           </p:cNvPicPr>
@@ -6794,7 +6794,7 @@
       </p:pic>
       <p:sp>
         <p:nvSpPr>
-          <p:cNvPr id="743134224" name="Rectangle 13"/>
+          <p:cNvPr id="388347452" name="Rectangle 13"/>
           <p:cNvSpPr/>
           <p:nvPr/>
         </p:nvSpPr>
@@ -6835,7 +6835,7 @@
       </p:sp>
       <p:sp>
         <p:nvSpPr>
-          <p:cNvPr id="1351984263" name="Rectangle 14"/>
+          <p:cNvPr id="2060412866" name="Rectangle 14"/>
           <p:cNvSpPr/>
           <p:nvPr/>
         </p:nvSpPr>
@@ -6873,7 +6873,7 @@
       </p:sp>
       <p:sp>
         <p:nvSpPr>
-          <p:cNvPr id="327205382" name="Title 1"/>
+          <p:cNvPr id="2065366973" name="Title 1"/>
           <p:cNvSpPr>
             <a:spLocks noGrp="1"/>
           </p:cNvSpPr>
@@ -6908,7 +6908,7 @@
       </p:sp>
       <p:sp>
         <p:nvSpPr>
-          <p:cNvPr id="1770587646" name="Text Placeholder 3"/>
+          <p:cNvPr id="661387424" name="Text Placeholder 3"/>
           <p:cNvSpPr>
             <a:spLocks noGrp="1"/>
           </p:cNvSpPr>
@@ -6978,7 +6978,7 @@
       </p:sp>
       <p:sp>
         <p:nvSpPr>
-          <p:cNvPr id="987261513" name="Text Placeholder 3"/>
+          <p:cNvPr id="74249810" name="Text Placeholder 3"/>
           <p:cNvSpPr>
             <a:spLocks noGrp="1"/>
           </p:cNvSpPr>
@@ -7048,7 +7048,7 @@
       </p:sp>
       <p:sp>
         <p:nvSpPr>
-          <p:cNvPr id="625480251" name="Date Placeholder 4"/>
+          <p:cNvPr id="1838721618" name="Date Placeholder 4"/>
           <p:cNvSpPr>
             <a:spLocks noGrp="1"/>
           </p:cNvSpPr>
@@ -7074,7 +7074,7 @@
       </p:sp>
       <p:sp>
         <p:nvSpPr>
-          <p:cNvPr id="1182948243" name="Footer Placeholder 5"/>
+          <p:cNvPr id="268184312" name="Footer Placeholder 5"/>
           <p:cNvSpPr>
             <a:spLocks noGrp="1"/>
           </p:cNvSpPr>
@@ -7096,7 +7096,7 @@
       </p:sp>
       <p:sp>
         <p:nvSpPr>
-          <p:cNvPr id="1892899862" name="Slide Number Placeholder 6"/>
+          <p:cNvPr id="1782452591" name="Slide Number Placeholder 6"/>
           <p:cNvSpPr>
             <a:spLocks noGrp="1"/>
           </p:cNvSpPr>
@@ -7127,7 +7127,7 @@
       </p:sp>
       <p:sp>
         <p:nvSpPr>
-          <p:cNvPr id="943070463" name="TextBox 15"/>
+          <p:cNvPr id="178672157" name="TextBox 15"/>
           <p:cNvSpPr txBox="1"/>
           <p:nvPr/>
         </p:nvSpPr>
@@ -7231,7 +7231,7 @@
       </p:sp>
       <p:sp>
         <p:nvSpPr>
-          <p:cNvPr id="1295003461" name="TextBox 16"/>
+          <p:cNvPr id="1999115095" name="TextBox 16"/>
           <p:cNvSpPr txBox="1"/>
           <p:nvPr/>
         </p:nvSpPr>
@@ -7360,7 +7360,7 @@
       </p:grpSpPr>
       <p:pic>
         <p:nvPicPr>
-          <p:cNvPr id="500702290" name="Picture 8" descr="HD-ShadowLong.png"/>
+          <p:cNvPr id="1829018697" name="Picture 8" descr="HD-ShadowLong.png"/>
           <p:cNvPicPr>
             <a:picLocks noChangeAspect="1"/>
           </p:cNvPicPr>
@@ -7382,7 +7382,7 @@
       </p:pic>
       <p:pic>
         <p:nvPicPr>
-          <p:cNvPr id="305400705" name="Picture 9" descr="HD-ShadowShort.png"/>
+          <p:cNvPr id="430388794" name="Picture 9" descr="HD-ShadowShort.png"/>
           <p:cNvPicPr>
             <a:picLocks noChangeAspect="1"/>
           </p:cNvPicPr>
@@ -7404,7 +7404,7 @@
       </p:pic>
       <p:sp>
         <p:nvSpPr>
-          <p:cNvPr id="2060369209" name="Rectangle 10"/>
+          <p:cNvPr id="143397274" name="Rectangle 10"/>
           <p:cNvSpPr/>
           <p:nvPr/>
         </p:nvSpPr>
@@ -7445,7 +7445,7 @@
       </p:sp>
       <p:sp>
         <p:nvSpPr>
-          <p:cNvPr id="1310659683" name="Rectangle 11"/>
+          <p:cNvPr id="300482164" name="Rectangle 11"/>
           <p:cNvSpPr/>
           <p:nvPr/>
         </p:nvSpPr>
@@ -7483,7 +7483,7 @@
       </p:sp>
       <p:sp>
         <p:nvSpPr>
-          <p:cNvPr id="1415063036" name="Title 1"/>
+          <p:cNvPr id="1109534929" name="Title 1"/>
           <p:cNvSpPr>
             <a:spLocks noGrp="1"/>
           </p:cNvSpPr>
@@ -7518,7 +7518,7 @@
       </p:sp>
       <p:sp>
         <p:nvSpPr>
-          <p:cNvPr id="1633970637" name="Text Placeholder 3"/>
+          <p:cNvPr id="1578795525" name="Text Placeholder 3"/>
           <p:cNvSpPr>
             <a:spLocks noGrp="1"/>
           </p:cNvSpPr>
@@ -7586,7 +7586,7 @@
       </p:sp>
       <p:sp>
         <p:nvSpPr>
-          <p:cNvPr id="1583586363" name="Date Placeholder 4"/>
+          <p:cNvPr id="221521166" name="Date Placeholder 4"/>
           <p:cNvSpPr>
             <a:spLocks noGrp="1"/>
           </p:cNvSpPr>
@@ -7612,7 +7612,7 @@
       </p:sp>
       <p:sp>
         <p:nvSpPr>
-          <p:cNvPr id="1453205426" name="Footer Placeholder 5"/>
+          <p:cNvPr id="728527617" name="Footer Placeholder 5"/>
           <p:cNvSpPr>
             <a:spLocks noGrp="1"/>
           </p:cNvSpPr>
@@ -7634,7 +7634,7 @@
       </p:sp>
       <p:sp>
         <p:nvSpPr>
-          <p:cNvPr id="1706099540" name="Slide Number Placeholder 6"/>
+          <p:cNvPr id="2093252349" name="Slide Number Placeholder 6"/>
           <p:cNvSpPr>
             <a:spLocks noGrp="1"/>
           </p:cNvSpPr>
@@ -7690,7 +7690,7 @@
       </p:grpSpPr>
       <p:pic>
         <p:nvPicPr>
-          <p:cNvPr id="1477814288" name="Picture 12" descr="HD-ShadowLong.png"/>
+          <p:cNvPr id="889953066" name="Picture 12" descr="HD-ShadowLong.png"/>
           <p:cNvPicPr>
             <a:picLocks noChangeAspect="1"/>
           </p:cNvPicPr>
@@ -7712,7 +7712,7 @@
       </p:pic>
       <p:pic>
         <p:nvPicPr>
-          <p:cNvPr id="1474409693" name="Picture 13" descr="HD-ShadowShort.png"/>
+          <p:cNvPr id="1094233558" name="Picture 13" descr="HD-ShadowShort.png"/>
           <p:cNvPicPr>
             <a:picLocks noChangeAspect="1"/>
           </p:cNvPicPr>
@@ -7734,7 +7734,7 @@
       </p:pic>
       <p:sp>
         <p:nvSpPr>
-          <p:cNvPr id="1502383493" name="Rectangle 15"/>
+          <p:cNvPr id="1301817553" name="Rectangle 15"/>
           <p:cNvSpPr/>
           <p:nvPr/>
         </p:nvSpPr>
@@ -7775,7 +7775,7 @@
       </p:sp>
       <p:sp>
         <p:nvSpPr>
-          <p:cNvPr id="444764156" name="Rectangle 16"/>
+          <p:cNvPr id="922768528" name="Rectangle 16"/>
           <p:cNvSpPr/>
           <p:nvPr/>
         </p:nvSpPr>
@@ -7813,7 +7813,7 @@
       </p:sp>
       <p:sp>
         <p:nvSpPr>
-          <p:cNvPr id="1720872390" name="Title 1"/>
+          <p:cNvPr id="1003240476" name="Title 1"/>
           <p:cNvSpPr>
             <a:spLocks noGrp="1"/>
           </p:cNvSpPr>
@@ -7844,7 +7844,7 @@
       </p:sp>
       <p:sp>
         <p:nvSpPr>
-          <p:cNvPr id="705802294" name="Text Placeholder 2"/>
+          <p:cNvPr id="494429455" name="Text Placeholder 2"/>
           <p:cNvSpPr>
             <a:spLocks noGrp="1"/>
           </p:cNvSpPr>
@@ -7918,7 +7918,7 @@
       </p:sp>
       <p:sp>
         <p:nvSpPr>
-          <p:cNvPr id="1882390533" name="Text Placeholder 3"/>
+          <p:cNvPr id="1644864955" name="Text Placeholder 3"/>
           <p:cNvSpPr>
             <a:spLocks noGrp="1"/>
           </p:cNvSpPr>
@@ -7988,7 +7988,7 @@
       </p:sp>
       <p:sp>
         <p:nvSpPr>
-          <p:cNvPr id="1821758088" name="Text Placeholder 4"/>
+          <p:cNvPr id="210271091" name="Text Placeholder 4"/>
           <p:cNvSpPr>
             <a:spLocks noGrp="1"/>
           </p:cNvSpPr>
@@ -8062,7 +8062,7 @@
       </p:sp>
       <p:sp>
         <p:nvSpPr>
-          <p:cNvPr id="1898725430" name="Text Placeholder 3"/>
+          <p:cNvPr id="410560384" name="Text Placeholder 3"/>
           <p:cNvSpPr>
             <a:spLocks noGrp="1"/>
           </p:cNvSpPr>
@@ -8132,7 +8132,7 @@
       </p:sp>
       <p:sp>
         <p:nvSpPr>
-          <p:cNvPr id="270585860" name="Text Placeholder 4"/>
+          <p:cNvPr id="728272296" name="Text Placeholder 4"/>
           <p:cNvSpPr>
             <a:spLocks noGrp="1"/>
           </p:cNvSpPr>
@@ -8206,7 +8206,7 @@
       </p:sp>
       <p:sp>
         <p:nvSpPr>
-          <p:cNvPr id="472500792" name="Text Placeholder 3"/>
+          <p:cNvPr id="936341538" name="Text Placeholder 3"/>
           <p:cNvSpPr>
             <a:spLocks noGrp="1"/>
           </p:cNvSpPr>
@@ -8276,7 +8276,7 @@
       </p:sp>
       <p:sp>
         <p:nvSpPr>
-          <p:cNvPr id="970873882" name="Date Placeholder 2"/>
+          <p:cNvPr id="1991485055" name="Date Placeholder 2"/>
           <p:cNvSpPr>
             <a:spLocks noGrp="1"/>
           </p:cNvSpPr>
@@ -8302,7 +8302,7 @@
       </p:sp>
       <p:sp>
         <p:nvSpPr>
-          <p:cNvPr id="1575933730" name="Footer Placeholder 3"/>
+          <p:cNvPr id="819068279" name="Footer Placeholder 3"/>
           <p:cNvSpPr>
             <a:spLocks noGrp="1"/>
           </p:cNvSpPr>
@@ -8324,7 +8324,7 @@
       </p:sp>
       <p:sp>
         <p:nvSpPr>
-          <p:cNvPr id="192018026" name="Slide Number Placeholder 4"/>
+          <p:cNvPr id="1385469199" name="Slide Number Placeholder 4"/>
           <p:cNvSpPr>
             <a:spLocks noGrp="1"/>
           </p:cNvSpPr>
@@ -8375,7 +8375,7 @@
       </p:grpSpPr>
       <p:pic>
         <p:nvPicPr>
-          <p:cNvPr id="1645990442" name="Picture 14" descr="HD-ShadowLong.png"/>
+          <p:cNvPr id="693996211" name="Picture 14" descr="HD-ShadowLong.png"/>
           <p:cNvPicPr>
             <a:picLocks noChangeAspect="1"/>
           </p:cNvPicPr>
@@ -8397,7 +8397,7 @@
       </p:pic>
       <p:pic>
         <p:nvPicPr>
-          <p:cNvPr id="1354810208" name="Picture 15" descr="HD-ShadowShort.png"/>
+          <p:cNvPr id="997687383" name="Picture 15" descr="HD-ShadowShort.png"/>
           <p:cNvPicPr>
             <a:picLocks noChangeAspect="1"/>
           </p:cNvPicPr>
@@ -8419,7 +8419,7 @@
       </p:pic>
       <p:sp>
         <p:nvSpPr>
-          <p:cNvPr id="1292919341" name="Rectangle 16"/>
+          <p:cNvPr id="1626372026" name="Rectangle 16"/>
           <p:cNvSpPr/>
           <p:nvPr/>
         </p:nvSpPr>
@@ -8460,7 +8460,7 @@
       </p:sp>
       <p:sp>
         <p:nvSpPr>
-          <p:cNvPr id="1430309795" name="Rectangle 17"/>
+          <p:cNvPr id="1769236282" name="Rectangle 17"/>
           <p:cNvSpPr/>
           <p:nvPr/>
         </p:nvSpPr>
@@ -8498,7 +8498,7 @@
       </p:sp>
       <p:sp>
         <p:nvSpPr>
-          <p:cNvPr id="285094060" name="Title 1"/>
+          <p:cNvPr id="1606673457" name="Title 1"/>
           <p:cNvSpPr>
             <a:spLocks noGrp="1"/>
           </p:cNvSpPr>
@@ -8529,7 +8529,7 @@
       </p:sp>
       <p:sp>
         <p:nvSpPr>
-          <p:cNvPr id="276891140" name="Text Placeholder 2"/>
+          <p:cNvPr id="1849351955" name="Text Placeholder 2"/>
           <p:cNvSpPr>
             <a:spLocks noGrp="1"/>
           </p:cNvSpPr>
@@ -8603,7 +8603,7 @@
       </p:sp>
       <p:sp>
         <p:nvSpPr>
-          <p:cNvPr id="41151580" name="Picture Placeholder 2"/>
+          <p:cNvPr id="1104409243" name="Picture Placeholder 2"/>
           <p:cNvSpPr>
             <a:spLocks noChangeAspect="1" noGrp="1"/>
           </p:cNvSpPr>
@@ -8685,7 +8685,7 @@
       </p:sp>
       <p:sp>
         <p:nvSpPr>
-          <p:cNvPr id="1934907076" name="Text Placeholder 3"/>
+          <p:cNvPr id="272534458" name="Text Placeholder 3"/>
           <p:cNvSpPr>
             <a:spLocks noGrp="1"/>
           </p:cNvSpPr>
@@ -8755,7 +8755,7 @@
       </p:sp>
       <p:sp>
         <p:nvSpPr>
-          <p:cNvPr id="614845576" name="Text Placeholder 4"/>
+          <p:cNvPr id="1243475628" name="Text Placeholder 4"/>
           <p:cNvSpPr>
             <a:spLocks noGrp="1"/>
           </p:cNvSpPr>
@@ -8829,7 +8829,7 @@
       </p:sp>
       <p:sp>
         <p:nvSpPr>
-          <p:cNvPr id="352062566" name="Picture Placeholder 2"/>
+          <p:cNvPr id="712344562" name="Picture Placeholder 2"/>
           <p:cNvSpPr>
             <a:spLocks noChangeAspect="1" noGrp="1"/>
           </p:cNvSpPr>
@@ -8911,7 +8911,7 @@
       </p:sp>
       <p:sp>
         <p:nvSpPr>
-          <p:cNvPr id="1559801176" name="Text Placeholder 3"/>
+          <p:cNvPr id="1513721926" name="Text Placeholder 3"/>
           <p:cNvSpPr>
             <a:spLocks noGrp="1"/>
           </p:cNvSpPr>
@@ -8981,7 +8981,7 @@
       </p:sp>
       <p:sp>
         <p:nvSpPr>
-          <p:cNvPr id="2140153181" name="Text Placeholder 4"/>
+          <p:cNvPr id="1155659608" name="Text Placeholder 4"/>
           <p:cNvSpPr>
             <a:spLocks noGrp="1"/>
           </p:cNvSpPr>
@@ -9055,7 +9055,7 @@
       </p:sp>
       <p:sp>
         <p:nvSpPr>
-          <p:cNvPr id="674669207" name="Picture Placeholder 2"/>
+          <p:cNvPr id="257422467" name="Picture Placeholder 2"/>
           <p:cNvSpPr>
             <a:spLocks noChangeAspect="1" noGrp="1"/>
           </p:cNvSpPr>
@@ -9137,7 +9137,7 @@
       </p:sp>
       <p:sp>
         <p:nvSpPr>
-          <p:cNvPr id="1559794484" name="Text Placeholder 3"/>
+          <p:cNvPr id="1310464587" name="Text Placeholder 3"/>
           <p:cNvSpPr>
             <a:spLocks noGrp="1"/>
           </p:cNvSpPr>
@@ -9207,7 +9207,7 @@
       </p:sp>
       <p:sp>
         <p:nvSpPr>
-          <p:cNvPr id="31281894" name="Date Placeholder 2"/>
+          <p:cNvPr id="73639870" name="Date Placeholder 2"/>
           <p:cNvSpPr>
             <a:spLocks noGrp="1"/>
           </p:cNvSpPr>
@@ -9233,7 +9233,7 @@
       </p:sp>
       <p:sp>
         <p:nvSpPr>
-          <p:cNvPr id="750022855" name="Footer Placeholder 3"/>
+          <p:cNvPr id="1545841524" name="Footer Placeholder 3"/>
           <p:cNvSpPr>
             <a:spLocks noGrp="1"/>
           </p:cNvSpPr>
@@ -9255,7 +9255,7 @@
       </p:sp>
       <p:sp>
         <p:nvSpPr>
-          <p:cNvPr id="1346498643" name="Slide Number Placeholder 4"/>
+          <p:cNvPr id="2142156168" name="Slide Number Placeholder 4"/>
           <p:cNvSpPr>
             <a:spLocks noGrp="1"/>
           </p:cNvSpPr>
@@ -9306,7 +9306,7 @@
       </p:grpSpPr>
       <p:pic>
         <p:nvPicPr>
-          <p:cNvPr id="1652516757" name="Picture 6" descr="HD-ShadowLong.png"/>
+          <p:cNvPr id="635726077" name="Picture 6" descr="HD-ShadowLong.png"/>
           <p:cNvPicPr>
             <a:picLocks noChangeAspect="1"/>
           </p:cNvPicPr>
@@ -9328,7 +9328,7 @@
       </p:pic>
       <p:pic>
         <p:nvPicPr>
-          <p:cNvPr id="1493073894" name="Picture 7" descr="HD-ShadowShort.png"/>
+          <p:cNvPr id="1106140487" name="Picture 7" descr="HD-ShadowShort.png"/>
           <p:cNvPicPr>
             <a:picLocks noChangeAspect="1"/>
           </p:cNvPicPr>
@@ -9350,7 +9350,7 @@
       </p:pic>
       <p:sp>
         <p:nvSpPr>
-          <p:cNvPr id="706581129" name="Rectangle 8"/>
+          <p:cNvPr id="958481301" name="Rectangle 8"/>
           <p:cNvSpPr/>
           <p:nvPr/>
         </p:nvSpPr>
@@ -9391,7 +9391,7 @@
       </p:sp>
       <p:sp>
         <p:nvSpPr>
-          <p:cNvPr id="1589870076" name="Rectangle 9"/>
+          <p:cNvPr id="799359145" name="Rectangle 9"/>
           <p:cNvSpPr/>
           <p:nvPr/>
         </p:nvSpPr>
@@ -9429,7 +9429,7 @@
       </p:sp>
       <p:sp>
         <p:nvSpPr>
-          <p:cNvPr id="1004436172" name="Title 1"/>
+          <p:cNvPr id="1960860606" name="Title 1"/>
           <p:cNvSpPr>
             <a:spLocks noGrp="1"/>
           </p:cNvSpPr>
@@ -9459,7 +9459,7 @@
       </p:sp>
       <p:sp>
         <p:nvSpPr>
-          <p:cNvPr id="1658302288" name="Vertical Text Placeholder 2"/>
+          <p:cNvPr id="233910515" name="Vertical Text Placeholder 2"/>
           <p:cNvSpPr>
             <a:spLocks noGrp="1"/>
           </p:cNvSpPr>
@@ -9525,7 +9525,7 @@
       </p:sp>
       <p:sp>
         <p:nvSpPr>
-          <p:cNvPr id="2118259019" name="Date Placeholder 3"/>
+          <p:cNvPr id="1873375737" name="Date Placeholder 3"/>
           <p:cNvSpPr>
             <a:spLocks noGrp="1"/>
           </p:cNvSpPr>
@@ -9551,7 +9551,7 @@
       </p:sp>
       <p:sp>
         <p:nvSpPr>
-          <p:cNvPr id="1298939837" name="Footer Placeholder 4"/>
+          <p:cNvPr id="253140161" name="Footer Placeholder 4"/>
           <p:cNvSpPr>
             <a:spLocks noGrp="1"/>
           </p:cNvSpPr>
@@ -9573,7 +9573,7 @@
       </p:sp>
       <p:sp>
         <p:nvSpPr>
-          <p:cNvPr id="735650626" name="Slide Number Placeholder 5"/>
+          <p:cNvPr id="471689633" name="Slide Number Placeholder 5"/>
           <p:cNvSpPr>
             <a:spLocks noGrp="1"/>
           </p:cNvSpPr>
@@ -9624,7 +9624,7 @@
       </p:grpSpPr>
       <p:sp>
         <p:nvSpPr>
-          <p:cNvPr id="1579822142" name="Rectangle 6"/>
+          <p:cNvPr id="611772232" name="Rectangle 6"/>
           <p:cNvSpPr/>
           <p:nvPr/>
         </p:nvSpPr>
@@ -9665,7 +9665,7 @@
       </p:sp>
       <p:sp>
         <p:nvSpPr>
-          <p:cNvPr id="1676670777" name="Rectangle 7"/>
+          <p:cNvPr id="1698801795" name="Rectangle 7"/>
           <p:cNvSpPr/>
           <p:nvPr/>
         </p:nvSpPr>
@@ -9703,7 +9703,7 @@
       </p:sp>
       <p:sp>
         <p:nvSpPr>
-          <p:cNvPr id="348164760" name="Vertical Title 1"/>
+          <p:cNvPr id="1507996443" name="Vertical Title 1"/>
           <p:cNvSpPr>
             <a:spLocks noGrp="1"/>
           </p:cNvSpPr>
@@ -9734,7 +9734,7 @@
       </p:sp>
       <p:sp>
         <p:nvSpPr>
-          <p:cNvPr id="1904941572" name="Vertical Text Placeholder 2"/>
+          <p:cNvPr id="765034626" name="Vertical Text Placeholder 2"/>
           <p:cNvSpPr>
             <a:spLocks noGrp="1"/>
           </p:cNvSpPr>
@@ -9805,7 +9805,7 @@
       </p:sp>
       <p:sp>
         <p:nvSpPr>
-          <p:cNvPr id="1691887511" name="Date Placeholder 3"/>
+          <p:cNvPr id="292813309" name="Date Placeholder 3"/>
           <p:cNvSpPr>
             <a:spLocks noGrp="1"/>
           </p:cNvSpPr>
@@ -9836,7 +9836,7 @@
       </p:sp>
       <p:sp>
         <p:nvSpPr>
-          <p:cNvPr id="92779191" name="Footer Placeholder 4"/>
+          <p:cNvPr id="2044184931" name="Footer Placeholder 4"/>
           <p:cNvSpPr>
             <a:spLocks noGrp="1"/>
           </p:cNvSpPr>
@@ -9863,7 +9863,7 @@
       </p:sp>
       <p:sp>
         <p:nvSpPr>
-          <p:cNvPr id="618751683" name="Slide Number Placeholder 5"/>
+          <p:cNvPr id="415967423" name="Slide Number Placeholder 5"/>
           <p:cNvSpPr>
             <a:spLocks noGrp="1"/>
           </p:cNvSpPr>
@@ -9923,7 +9923,7 @@
       </p:grpSpPr>
       <p:sp>
         <p:nvSpPr>
-          <p:cNvPr id="591645988" name="Заголовок 1"/>
+          <p:cNvPr id="90352421" name="Заголовок 1"/>
           <p:cNvSpPr>
             <a:spLocks noGrp="1"/>
           </p:cNvSpPr>
@@ -9958,7 +9958,7 @@
       </p:sp>
       <p:sp>
         <p:nvSpPr>
-          <p:cNvPr id="1534187374" name="Текст 2"/>
+          <p:cNvPr id="197272312" name="Текст 2"/>
           <p:cNvSpPr>
             <a:spLocks noGrp="1"/>
           </p:cNvSpPr>
@@ -10080,7 +10080,7 @@
       </p:sp>
       <p:sp>
         <p:nvSpPr>
-          <p:cNvPr id="575576146" name="Дата 3"/>
+          <p:cNvPr id="1164809881" name="Дата 3"/>
           <p:cNvSpPr>
             <a:spLocks noGrp="1"/>
           </p:cNvSpPr>
@@ -10106,7 +10106,7 @@
       </p:sp>
       <p:sp>
         <p:nvSpPr>
-          <p:cNvPr id="508223457" name="Нижний колонтитул 4"/>
+          <p:cNvPr id="1523346878" name="Нижний колонтитул 4"/>
           <p:cNvSpPr>
             <a:spLocks noGrp="1"/>
           </p:cNvSpPr>
@@ -10128,7 +10128,7 @@
       </p:sp>
       <p:sp>
         <p:nvSpPr>
-          <p:cNvPr id="2133204204" name="Номер слайда 5"/>
+          <p:cNvPr id="313159955" name="Номер слайда 5"/>
           <p:cNvSpPr>
             <a:spLocks noGrp="1"/>
           </p:cNvSpPr>
@@ -10179,7 +10179,7 @@
       </p:grpSpPr>
       <p:sp>
         <p:nvSpPr>
-          <p:cNvPr id="1650488093" name="Заголовок 1"/>
+          <p:cNvPr id="153384421" name="Заголовок 1"/>
           <p:cNvSpPr>
             <a:spLocks noGrp="1"/>
           </p:cNvSpPr>
@@ -10205,7 +10205,7 @@
       </p:sp>
       <p:sp>
         <p:nvSpPr>
-          <p:cNvPr id="362469501" name="Объект 2"/>
+          <p:cNvPr id="1932377722" name="Объект 2"/>
           <p:cNvSpPr>
             <a:spLocks noGrp="1"/>
           </p:cNvSpPr>
@@ -10276,7 +10276,7 @@
       </p:sp>
       <p:sp>
         <p:nvSpPr>
-          <p:cNvPr id="56365839" name="Объект 3"/>
+          <p:cNvPr id="155224274" name="Объект 3"/>
           <p:cNvSpPr>
             <a:spLocks noGrp="1"/>
           </p:cNvSpPr>
@@ -10347,7 +10347,7 @@
       </p:sp>
       <p:sp>
         <p:nvSpPr>
-          <p:cNvPr id="1448704947" name="Дата 4"/>
+          <p:cNvPr id="133709103" name="Дата 4"/>
           <p:cNvSpPr>
             <a:spLocks noGrp="1"/>
           </p:cNvSpPr>
@@ -10373,7 +10373,7 @@
       </p:sp>
       <p:sp>
         <p:nvSpPr>
-          <p:cNvPr id="46957694" name="Нижний колонтитул 5"/>
+          <p:cNvPr id="526452534" name="Нижний колонтитул 5"/>
           <p:cNvSpPr>
             <a:spLocks noGrp="1"/>
           </p:cNvSpPr>
@@ -10395,7 +10395,7 @@
       </p:sp>
       <p:sp>
         <p:nvSpPr>
-          <p:cNvPr id="20609956" name="Номер слайда 6"/>
+          <p:cNvPr id="843596659" name="Номер слайда 6"/>
           <p:cNvSpPr>
             <a:spLocks noGrp="1"/>
           </p:cNvSpPr>
@@ -10446,7 +10446,7 @@
       </p:grpSpPr>
       <p:sp>
         <p:nvSpPr>
-          <p:cNvPr id="1242151261" name="Заголовок 1"/>
+          <p:cNvPr id="1938430853" name="Заголовок 1"/>
           <p:cNvSpPr>
             <a:spLocks noGrp="1"/>
           </p:cNvSpPr>
@@ -10477,7 +10477,7 @@
       </p:sp>
       <p:sp>
         <p:nvSpPr>
-          <p:cNvPr id="1842301384" name="Текст 2"/>
+          <p:cNvPr id="1138628305" name="Текст 2"/>
           <p:cNvSpPr>
             <a:spLocks noGrp="1"/>
           </p:cNvSpPr>
@@ -10545,7 +10545,7 @@
       </p:sp>
       <p:sp>
         <p:nvSpPr>
-          <p:cNvPr id="392195090" name="Объект 3"/>
+          <p:cNvPr id="1910403037" name="Объект 3"/>
           <p:cNvSpPr>
             <a:spLocks noGrp="1"/>
           </p:cNvSpPr>
@@ -10616,7 +10616,7 @@
       </p:sp>
       <p:sp>
         <p:nvSpPr>
-          <p:cNvPr id="1865615867" name="Текст 4"/>
+          <p:cNvPr id="668301499" name="Текст 4"/>
           <p:cNvSpPr>
             <a:spLocks noGrp="1"/>
           </p:cNvSpPr>
@@ -10684,7 +10684,7 @@
       </p:sp>
       <p:sp>
         <p:nvSpPr>
-          <p:cNvPr id="1593258210" name="Объект 5"/>
+          <p:cNvPr id="364067113" name="Объект 5"/>
           <p:cNvSpPr>
             <a:spLocks noGrp="1"/>
           </p:cNvSpPr>
@@ -10755,7 +10755,7 @@
       </p:sp>
       <p:sp>
         <p:nvSpPr>
-          <p:cNvPr id="1634035583" name="Дата 6"/>
+          <p:cNvPr id="237900348" name="Дата 6"/>
           <p:cNvSpPr>
             <a:spLocks noGrp="1"/>
           </p:cNvSpPr>
@@ -10781,7 +10781,7 @@
       </p:sp>
       <p:sp>
         <p:nvSpPr>
-          <p:cNvPr id="937505948" name="Нижний колонтитул 7"/>
+          <p:cNvPr id="815626076" name="Нижний колонтитул 7"/>
           <p:cNvSpPr>
             <a:spLocks noGrp="1"/>
           </p:cNvSpPr>
@@ -10803,7 +10803,7 @@
       </p:sp>
       <p:sp>
         <p:nvSpPr>
-          <p:cNvPr id="249317406" name="Номер слайда 8"/>
+          <p:cNvPr id="613588913" name="Номер слайда 8"/>
           <p:cNvSpPr>
             <a:spLocks noGrp="1"/>
           </p:cNvSpPr>
@@ -10854,7 +10854,7 @@
       </p:grpSpPr>
       <p:sp>
         <p:nvSpPr>
-          <p:cNvPr id="810583327" name="Заголовок 1"/>
+          <p:cNvPr id="1370988970" name="Заголовок 1"/>
           <p:cNvSpPr>
             <a:spLocks noGrp="1"/>
           </p:cNvSpPr>
@@ -10880,7 +10880,7 @@
       </p:sp>
       <p:sp>
         <p:nvSpPr>
-          <p:cNvPr id="1041368458" name="Дата 2"/>
+          <p:cNvPr id="639522050" name="Дата 2"/>
           <p:cNvSpPr>
             <a:spLocks noGrp="1"/>
           </p:cNvSpPr>
@@ -10906,7 +10906,7 @@
       </p:sp>
       <p:sp>
         <p:nvSpPr>
-          <p:cNvPr id="312357175" name="Нижний колонтитул 3"/>
+          <p:cNvPr id="406946662" name="Нижний колонтитул 3"/>
           <p:cNvSpPr>
             <a:spLocks noGrp="1"/>
           </p:cNvSpPr>
@@ -10928,7 +10928,7 @@
       </p:sp>
       <p:sp>
         <p:nvSpPr>
-          <p:cNvPr id="1207151119" name="Номер слайда 4"/>
+          <p:cNvPr id="1827563355" name="Номер слайда 4"/>
           <p:cNvSpPr>
             <a:spLocks noGrp="1"/>
           </p:cNvSpPr>
@@ -10979,7 +10979,7 @@
       </p:grpSpPr>
       <p:sp>
         <p:nvSpPr>
-          <p:cNvPr id="2093100909" name="Дата 1"/>
+          <p:cNvPr id="35589581" name="Дата 1"/>
           <p:cNvSpPr>
             <a:spLocks noGrp="1"/>
           </p:cNvSpPr>
@@ -11005,7 +11005,7 @@
       </p:sp>
       <p:sp>
         <p:nvSpPr>
-          <p:cNvPr id="1267232492" name="Нижний колонтитул 2"/>
+          <p:cNvPr id="2110352055" name="Нижний колонтитул 2"/>
           <p:cNvSpPr>
             <a:spLocks noGrp="1"/>
           </p:cNvSpPr>
@@ -11027,7 +11027,7 @@
       </p:sp>
       <p:sp>
         <p:nvSpPr>
-          <p:cNvPr id="721910885" name="Номер слайда 3"/>
+          <p:cNvPr id="2029374689" name="Номер слайда 3"/>
           <p:cNvSpPr>
             <a:spLocks noGrp="1"/>
           </p:cNvSpPr>
@@ -11078,7 +11078,7 @@
       </p:grpSpPr>
       <p:sp>
         <p:nvSpPr>
-          <p:cNvPr id="1941388685" name="Заголовок 1"/>
+          <p:cNvPr id="1053905603" name="Заголовок 1"/>
           <p:cNvSpPr>
             <a:spLocks noGrp="1"/>
           </p:cNvSpPr>
@@ -11113,7 +11113,7 @@
       </p:sp>
       <p:sp>
         <p:nvSpPr>
-          <p:cNvPr id="1647706847" name="Объект 2"/>
+          <p:cNvPr id="454665124" name="Объект 2"/>
           <p:cNvSpPr>
             <a:spLocks noGrp="1"/>
           </p:cNvSpPr>
@@ -11212,7 +11212,7 @@
       </p:sp>
       <p:sp>
         <p:nvSpPr>
-          <p:cNvPr id="234275794" name="Текст 3"/>
+          <p:cNvPr id="1659291953" name="Текст 3"/>
           <p:cNvSpPr>
             <a:spLocks noGrp="1"/>
           </p:cNvSpPr>
@@ -11280,7 +11280,7 @@
       </p:sp>
       <p:sp>
         <p:nvSpPr>
-          <p:cNvPr id="129125042" name="Дата 4"/>
+          <p:cNvPr id="553538432" name="Дата 4"/>
           <p:cNvSpPr>
             <a:spLocks noGrp="1"/>
           </p:cNvSpPr>
@@ -11306,7 +11306,7 @@
       </p:sp>
       <p:sp>
         <p:nvSpPr>
-          <p:cNvPr id="970550267" name="Нижний колонтитул 5"/>
+          <p:cNvPr id="1058047554" name="Нижний колонтитул 5"/>
           <p:cNvSpPr>
             <a:spLocks noGrp="1"/>
           </p:cNvSpPr>
@@ -11328,7 +11328,7 @@
       </p:sp>
       <p:sp>
         <p:nvSpPr>
-          <p:cNvPr id="2031982839" name="Номер слайда 6"/>
+          <p:cNvPr id="897083730" name="Номер слайда 6"/>
           <p:cNvSpPr>
             <a:spLocks noGrp="1"/>
           </p:cNvSpPr>
@@ -11379,7 +11379,7 @@
       </p:grpSpPr>
       <p:sp>
         <p:nvSpPr>
-          <p:cNvPr id="1670765905" name="Заголовок 1"/>
+          <p:cNvPr id="2068804395" name="Заголовок 1"/>
           <p:cNvSpPr>
             <a:spLocks noGrp="1"/>
           </p:cNvSpPr>
@@ -11414,7 +11414,7 @@
       </p:sp>
       <p:sp>
         <p:nvSpPr>
-          <p:cNvPr id="1132818048" name="Рисунок 2"/>
+          <p:cNvPr id="356437849" name="Рисунок 2"/>
           <p:cNvSpPr>
             <a:spLocks noGrp="1"/>
           </p:cNvSpPr>
@@ -11478,7 +11478,7 @@
       </p:sp>
       <p:sp>
         <p:nvSpPr>
-          <p:cNvPr id="720037525" name="Текст 3"/>
+          <p:cNvPr id="1513351880" name="Текст 3"/>
           <p:cNvSpPr>
             <a:spLocks noGrp="1"/>
           </p:cNvSpPr>
@@ -11546,7 +11546,7 @@
       </p:sp>
       <p:sp>
         <p:nvSpPr>
-          <p:cNvPr id="527548720" name="Дата 4"/>
+          <p:cNvPr id="476075612" name="Дата 4"/>
           <p:cNvSpPr>
             <a:spLocks noGrp="1"/>
           </p:cNvSpPr>
@@ -11572,7 +11572,7 @@
       </p:sp>
       <p:sp>
         <p:nvSpPr>
-          <p:cNvPr id="649449264" name="Нижний колонтитул 5"/>
+          <p:cNvPr id="804877427" name="Нижний колонтитул 5"/>
           <p:cNvSpPr>
             <a:spLocks noGrp="1"/>
           </p:cNvSpPr>
@@ -11594,7 +11594,7 @@
       </p:sp>
       <p:sp>
         <p:nvSpPr>
-          <p:cNvPr id="1760301776" name="Номер слайда 6"/>
+          <p:cNvPr id="120120460" name="Номер слайда 6"/>
           <p:cNvSpPr>
             <a:spLocks noGrp="1"/>
           </p:cNvSpPr>
@@ -11650,7 +11650,7 @@
       </p:grpSpPr>
       <p:sp>
         <p:nvSpPr>
-          <p:cNvPr id="1753740332" name="Заголовок 1"/>
+          <p:cNvPr id="1308531905" name="Заголовок 1"/>
           <p:cNvSpPr>
             <a:spLocks noGrp="1"/>
           </p:cNvSpPr>
@@ -11686,7 +11686,7 @@
       </p:sp>
       <p:sp>
         <p:nvSpPr>
-          <p:cNvPr id="955472939" name="Текст 2"/>
+          <p:cNvPr id="106378323" name="Текст 2"/>
           <p:cNvSpPr>
             <a:spLocks noGrp="1"/>
           </p:cNvSpPr>
@@ -11762,7 +11762,7 @@
       </p:sp>
       <p:sp>
         <p:nvSpPr>
-          <p:cNvPr id="1340174794" name="Дата 3"/>
+          <p:cNvPr id="350507497" name="Дата 3"/>
           <p:cNvSpPr>
             <a:spLocks noGrp="1"/>
           </p:cNvSpPr>
@@ -11806,7 +11806,7 @@
       </p:sp>
       <p:sp>
         <p:nvSpPr>
-          <p:cNvPr id="102164760" name="Нижний колонтитул 4"/>
+          <p:cNvPr id="1502558059" name="Нижний колонтитул 4"/>
           <p:cNvSpPr>
             <a:spLocks noGrp="1"/>
           </p:cNvSpPr>
@@ -11846,7 +11846,7 @@
       </p:sp>
       <p:sp>
         <p:nvSpPr>
-          <p:cNvPr id="692280782" name="Номер слайда 5"/>
+          <p:cNvPr id="1505657200" name="Номер слайда 5"/>
           <p:cNvSpPr>
             <a:spLocks noGrp="1"/>
           </p:cNvSpPr>
@@ -12257,7 +12257,7 @@
       </p:grpSpPr>
       <p:sp>
         <p:nvSpPr>
-          <p:cNvPr id="1795020893" name="Прямоугольник 3"/>
+          <p:cNvPr id="339552046" name="Прямоугольник 3"/>
           <p:cNvSpPr/>
           <p:nvPr/>
         </p:nvSpPr>
@@ -12307,7 +12307,7 @@
       </p:sp>
       <p:sp>
         <p:nvSpPr>
-          <p:cNvPr id="522773401" name="Прямоугольник 4"/>
+          <p:cNvPr id="1701220026" name="Прямоугольник 4"/>
           <p:cNvSpPr/>
           <p:nvPr/>
         </p:nvSpPr>
@@ -12357,7 +12357,7 @@
       </p:sp>
       <p:sp>
         <p:nvSpPr>
-          <p:cNvPr id="1740115863" name="Заголовок 1"/>
+          <p:cNvPr id="1181381679" name="Заголовок 1"/>
           <p:cNvSpPr>
             <a:spLocks noGrp="1"/>
           </p:cNvSpPr>
@@ -12422,7 +12422,7 @@
       </p:sp>
       <p:sp>
         <p:nvSpPr>
-          <p:cNvPr id="913434310" name="Подзаголовок 2"/>
+          <p:cNvPr id="330377713" name="Подзаголовок 2"/>
           <p:cNvSpPr>
             <a:spLocks noGrp="1"/>
           </p:cNvSpPr>
@@ -12501,7 +12501,7 @@
       </p:sp>
       <p:sp>
         <p:nvSpPr>
-          <p:cNvPr id="1173006462" name="Заголовок 1"/>
+          <p:cNvPr id="12378809" name="Заголовок 1"/>
           <p:cNvSpPr>
             <a:spLocks noGrp="1"/>
           </p:cNvSpPr>
@@ -12563,7 +12563,7 @@
       </p:sp>
       <p:sp>
         <p:nvSpPr>
-          <p:cNvPr id="614951249" name="Заголовок 1"/>
+          <p:cNvPr id="1238035579" name="Заголовок 1"/>
           <p:cNvSpPr>
             <a:spLocks noGrp="1"/>
           </p:cNvSpPr>
@@ -12625,7 +12625,7 @@
       </p:sp>
       <p:sp>
         <p:nvSpPr>
-          <p:cNvPr id="1678758342" name="Заголовок 1"/>
+          <p:cNvPr id="307863095" name="Заголовок 1"/>
           <p:cNvSpPr>
             <a:spLocks noGrp="1"/>
           </p:cNvSpPr>
@@ -12712,7 +12712,7 @@
       </p:sp>
       <p:sp>
         <p:nvSpPr>
-          <p:cNvPr id="409678823" name="Заголовок 1"/>
+          <p:cNvPr id="1396297499" name="Заголовок 1"/>
           <p:cNvSpPr>
             <a:spLocks noGrp="1"/>
           </p:cNvSpPr>
@@ -12840,7 +12840,7 @@
       </p:grpSpPr>
       <p:sp>
         <p:nvSpPr>
-          <p:cNvPr id="349654219" name="Объект 2"/>
+          <p:cNvPr id="1250480467" name="Объект 2"/>
           <p:cNvSpPr>
             <a:spLocks noGrp="1"/>
           </p:cNvSpPr>
@@ -12961,7 +12961,7 @@
       </p:sp>
       <p:sp>
         <p:nvSpPr>
-          <p:cNvPr id="2035826893" name="Номер слайда 3"/>
+          <p:cNvPr id="813278743" name="Номер слайда 3"/>
           <p:cNvSpPr>
             <a:spLocks noGrp="1"/>
           </p:cNvSpPr>
@@ -13002,7 +13002,7 @@
       </p:sp>
       <p:sp>
         <p:nvSpPr>
-          <p:cNvPr id="1134814939" name="Прямоугольник 6"/>
+          <p:cNvPr id="11166619" name="Прямоугольник 6"/>
           <p:cNvSpPr/>
           <p:nvPr/>
         </p:nvSpPr>
@@ -13052,7 +13052,7 @@
       </p:sp>
       <p:sp>
         <p:nvSpPr>
-          <p:cNvPr id="1151867970" name="Прямоугольник 7"/>
+          <p:cNvPr id="464849650" name="Прямоугольник 7"/>
           <p:cNvSpPr/>
           <p:nvPr/>
         </p:nvSpPr>
@@ -13102,7 +13102,7 @@
       </p:sp>
       <p:sp>
         <p:nvSpPr>
-          <p:cNvPr id="284852237" name="Заголовок 1"/>
+          <p:cNvPr id="1875130202" name="Заголовок 1"/>
           <p:cNvSpPr>
             <a:spLocks noGrp="1"/>
           </p:cNvSpPr>
@@ -13154,7 +13154,7 @@
       </p:sp>
       <p:pic>
         <p:nvPicPr>
-          <p:cNvPr id="1531096696" name=""/>
+          <p:cNvPr id="1831157032" name=""/>
           <p:cNvPicPr>
             <a:picLocks noChangeAspect="1"/>
           </p:cNvPicPr>
@@ -13248,7 +13248,7 @@
       </p:grpSpPr>
       <p:sp>
         <p:nvSpPr>
-          <p:cNvPr id="2031984234" name="Объект 2"/>
+          <p:cNvPr id="1160999098" name="Объект 2"/>
           <p:cNvSpPr>
             <a:spLocks noGrp="1"/>
           </p:cNvSpPr>
@@ -13347,7 +13347,7 @@
       </p:sp>
       <p:sp>
         <p:nvSpPr>
-          <p:cNvPr id="1878264434" name="Номер слайда 3"/>
+          <p:cNvPr id="2143837197" name="Номер слайда 3"/>
           <p:cNvSpPr>
             <a:spLocks noGrp="1"/>
           </p:cNvSpPr>
@@ -13388,7 +13388,7 @@
       </p:sp>
       <p:sp>
         <p:nvSpPr>
-          <p:cNvPr id="1776334560" name="Прямоугольник 5"/>
+          <p:cNvPr id="647825523" name="Прямоугольник 5"/>
           <p:cNvSpPr/>
           <p:nvPr/>
         </p:nvSpPr>
@@ -13438,7 +13438,7 @@
       </p:sp>
       <p:sp>
         <p:nvSpPr>
-          <p:cNvPr id="1866550093" name="Прямоугольник 6"/>
+          <p:cNvPr id="1907294269" name="Прямоугольник 6"/>
           <p:cNvSpPr/>
           <p:nvPr/>
         </p:nvSpPr>
@@ -13488,7 +13488,7 @@
       </p:sp>
       <p:sp>
         <p:nvSpPr>
-          <p:cNvPr id="1766437462" name="Заголовок 1"/>
+          <p:cNvPr id="976845758" name="Заголовок 1"/>
           <p:cNvSpPr>
             <a:spLocks noGrp="1"/>
           </p:cNvSpPr>
@@ -13525,7 +13525,7 @@
       </p:sp>
       <p:pic>
         <p:nvPicPr>
-          <p:cNvPr id="613794049" name=""/>
+          <p:cNvPr id="50381630" name=""/>
           <p:cNvPicPr>
             <a:picLocks noChangeAspect="1"/>
           </p:cNvPicPr>
@@ -13619,7 +13619,7 @@
       </p:grpSpPr>
       <p:sp>
         <p:nvSpPr>
-          <p:cNvPr id="1526714233" name="Объект 2"/>
+          <p:cNvPr id="77825369" name="Объект 2"/>
           <p:cNvSpPr>
             <a:spLocks noGrp="1"/>
           </p:cNvSpPr>
@@ -13717,7 +13717,7 @@
       </p:sp>
       <p:sp>
         <p:nvSpPr>
-          <p:cNvPr id="1602057177" name="Номер слайда 3"/>
+          <p:cNvPr id="890523569" name="Номер слайда 3"/>
           <p:cNvSpPr>
             <a:spLocks noGrp="1"/>
           </p:cNvSpPr>
@@ -13758,7 +13758,7 @@
       </p:sp>
       <p:sp>
         <p:nvSpPr>
-          <p:cNvPr id="178426784" name="Прямоугольник 5"/>
+          <p:cNvPr id="345669249" name="Прямоугольник 5"/>
           <p:cNvSpPr/>
           <p:nvPr/>
         </p:nvSpPr>
@@ -13808,7 +13808,7 @@
       </p:sp>
       <p:sp>
         <p:nvSpPr>
-          <p:cNvPr id="92457800" name="Прямоугольник 6"/>
+          <p:cNvPr id="1771153361" name="Прямоугольник 6"/>
           <p:cNvSpPr/>
           <p:nvPr/>
         </p:nvSpPr>
@@ -13858,7 +13858,7 @@
       </p:sp>
       <p:sp>
         <p:nvSpPr>
-          <p:cNvPr id="1899184066" name="Заголовок 1"/>
+          <p:cNvPr id="1219828253" name="Заголовок 1"/>
           <p:cNvSpPr>
             <a:spLocks noGrp="1"/>
           </p:cNvSpPr>
@@ -13923,7 +13923,7 @@
       </p:sp>
       <p:pic>
         <p:nvPicPr>
-          <p:cNvPr id="270544937" name=""/>
+          <p:cNvPr id="689196611" name=""/>
           <p:cNvPicPr>
             <a:picLocks noChangeAspect="1"/>
           </p:cNvPicPr>
@@ -14017,7 +14017,7 @@
       </p:grpSpPr>
       <p:sp>
         <p:nvSpPr>
-          <p:cNvPr id="1491693079" name="Объект 2"/>
+          <p:cNvPr id="451346274" name="Объект 2"/>
           <p:cNvSpPr>
             <a:spLocks noGrp="1"/>
           </p:cNvSpPr>
@@ -14092,7 +14092,7 @@
       </p:sp>
       <p:sp>
         <p:nvSpPr>
-          <p:cNvPr id="794364055" name="Номер слайда 3"/>
+          <p:cNvPr id="1434346772" name="Номер слайда 3"/>
           <p:cNvSpPr>
             <a:spLocks noGrp="1"/>
           </p:cNvSpPr>
@@ -14133,7 +14133,7 @@
       </p:sp>
       <p:sp>
         <p:nvSpPr>
-          <p:cNvPr id="1894471373" name="Прямоугольник 5"/>
+          <p:cNvPr id="424289974" name="Прямоугольник 5"/>
           <p:cNvSpPr/>
           <p:nvPr/>
         </p:nvSpPr>
@@ -14183,7 +14183,7 @@
       </p:sp>
       <p:sp>
         <p:nvSpPr>
-          <p:cNvPr id="2132353222" name="Прямоугольник 6"/>
+          <p:cNvPr id="1465794781" name="Прямоугольник 6"/>
           <p:cNvSpPr/>
           <p:nvPr/>
         </p:nvSpPr>
@@ -14233,7 +14233,7 @@
       </p:sp>
       <p:sp>
         <p:nvSpPr>
-          <p:cNvPr id="1010093458" name="Заголовок 1"/>
+          <p:cNvPr id="1846930637" name="Заголовок 1"/>
           <p:cNvSpPr>
             <a:spLocks noGrp="1"/>
           </p:cNvSpPr>
@@ -14274,7 +14274,7 @@
       </p:sp>
       <p:pic>
         <p:nvPicPr>
-          <p:cNvPr id="1227987581" name=""/>
+          <p:cNvPr id="1617031162" name=""/>
           <p:cNvPicPr>
             <a:picLocks noChangeAspect="1"/>
           </p:cNvPicPr>
@@ -14368,7 +14368,7 @@
       </p:grpSpPr>
       <p:sp>
         <p:nvSpPr>
-          <p:cNvPr id="1256890979" name="Объект 2"/>
+          <p:cNvPr id="396936832" name="Объект 2"/>
           <p:cNvSpPr>
             <a:spLocks noGrp="1"/>
           </p:cNvSpPr>
@@ -14465,7 +14465,7 @@
       </p:sp>
       <p:sp>
         <p:nvSpPr>
-          <p:cNvPr id="1162946526" name="Номер слайда 3"/>
+          <p:cNvPr id="1318244973" name="Номер слайда 3"/>
           <p:cNvSpPr>
             <a:spLocks noGrp="1"/>
           </p:cNvSpPr>
@@ -14506,7 +14506,7 @@
       </p:sp>
       <p:sp>
         <p:nvSpPr>
-          <p:cNvPr id="1747357668" name="Прямоугольник 4"/>
+          <p:cNvPr id="1111771651" name="Прямоугольник 4"/>
           <p:cNvSpPr/>
           <p:nvPr/>
         </p:nvSpPr>
@@ -14556,7 +14556,7 @@
       </p:sp>
       <p:sp>
         <p:nvSpPr>
-          <p:cNvPr id="1346254602" name="Прямоугольник 5"/>
+          <p:cNvPr id="341103037" name="Прямоугольник 5"/>
           <p:cNvSpPr/>
           <p:nvPr/>
         </p:nvSpPr>
@@ -14606,7 +14606,7 @@
       </p:sp>
       <p:sp>
         <p:nvSpPr>
-          <p:cNvPr id="1275204830" name="Заголовок 1"/>
+          <p:cNvPr id="296589953" name="Заголовок 1"/>
           <p:cNvSpPr>
             <a:spLocks noGrp="1"/>
           </p:cNvSpPr>
@@ -14645,7 +14645,7 @@
       </p:sp>
       <p:pic>
         <p:nvPicPr>
-          <p:cNvPr id="235346357" name=""/>
+          <p:cNvPr id="574366871" name=""/>
           <p:cNvPicPr>
             <a:picLocks noChangeAspect="1"/>
           </p:cNvPicPr>
@@ -14733,7 +14733,7 @@
       </p:grpSpPr>
       <p:sp>
         <p:nvSpPr>
-          <p:cNvPr id="48757452" name="Объект 2"/>
+          <p:cNvPr id="1326251966" name="Объект 2"/>
           <p:cNvSpPr>
             <a:spLocks noGrp="1"/>
           </p:cNvSpPr>
@@ -14882,7 +14882,7 @@
       </p:sp>
       <p:sp>
         <p:nvSpPr>
-          <p:cNvPr id="206755022" name="Номер слайда 3"/>
+          <p:cNvPr id="112582413" name="Номер слайда 3"/>
           <p:cNvSpPr>
             <a:spLocks noGrp="1"/>
           </p:cNvSpPr>
@@ -14923,7 +14923,7 @@
       </p:sp>
       <p:sp>
         <p:nvSpPr>
-          <p:cNvPr id="991181727" name="Прямоугольник 4"/>
+          <p:cNvPr id="2382963" name="Прямоугольник 4"/>
           <p:cNvSpPr/>
           <p:nvPr/>
         </p:nvSpPr>
@@ -14973,7 +14973,7 @@
       </p:sp>
       <p:sp>
         <p:nvSpPr>
-          <p:cNvPr id="2145317706" name="Прямоугольник 5"/>
+          <p:cNvPr id="1500170895" name="Прямоугольник 5"/>
           <p:cNvSpPr/>
           <p:nvPr/>
         </p:nvSpPr>
@@ -15023,7 +15023,7 @@
       </p:sp>
       <p:sp>
         <p:nvSpPr>
-          <p:cNvPr id="462162977" name="Заголовок 1"/>
+          <p:cNvPr id="2017034737" name="Заголовок 1"/>
           <p:cNvSpPr>
             <a:spLocks noGrp="1"/>
           </p:cNvSpPr>
@@ -15128,7 +15128,7 @@
       </p:grpSpPr>
       <p:sp>
         <p:nvSpPr>
-          <p:cNvPr id="1694982185" name="Объект 2"/>
+          <p:cNvPr id="238512612" name="Объект 2"/>
           <p:cNvSpPr>
             <a:spLocks noGrp="1"/>
           </p:cNvSpPr>
@@ -15169,7 +15169,7 @@
       </p:sp>
       <p:sp>
         <p:nvSpPr>
-          <p:cNvPr id="1615170719" name="Номер слайда 3"/>
+          <p:cNvPr id="1270996363" name="Номер слайда 3"/>
           <p:cNvSpPr>
             <a:spLocks noGrp="1"/>
           </p:cNvSpPr>
@@ -15210,7 +15210,7 @@
       </p:sp>
       <p:sp>
         <p:nvSpPr>
-          <p:cNvPr id="50905720" name="Прямоугольник 4"/>
+          <p:cNvPr id="1011535576" name="Прямоугольник 4"/>
           <p:cNvSpPr/>
           <p:nvPr/>
         </p:nvSpPr>
@@ -15260,7 +15260,7 @@
       </p:sp>
       <p:sp>
         <p:nvSpPr>
-          <p:cNvPr id="1170983545" name="Прямоугольник 5"/>
+          <p:cNvPr id="626725030" name="Прямоугольник 5"/>
           <p:cNvSpPr/>
           <p:nvPr/>
         </p:nvSpPr>
@@ -15310,7 +15310,7 @@
       </p:sp>
       <p:sp>
         <p:nvSpPr>
-          <p:cNvPr id="954249315" name="Заголовок 1"/>
+          <p:cNvPr id="986145827" name="Заголовок 1"/>
           <p:cNvSpPr>
             <a:spLocks noGrp="1"/>
           </p:cNvSpPr>
@@ -15415,7 +15415,7 @@
       </p:grpSpPr>
       <p:sp>
         <p:nvSpPr>
-          <p:cNvPr id="757263584" name="Объект 2"/>
+          <p:cNvPr id="885834110" name="Объект 2"/>
           <p:cNvSpPr>
             <a:spLocks noGrp="1"/>
           </p:cNvSpPr>
@@ -15441,7 +15441,7 @@
       </p:sp>
       <p:sp>
         <p:nvSpPr>
-          <p:cNvPr id="1808773600" name="Номер слайда 3"/>
+          <p:cNvPr id="595679095" name="Номер слайда 3"/>
           <p:cNvSpPr>
             <a:spLocks noGrp="1"/>
           </p:cNvSpPr>
@@ -15482,7 +15482,7 @@
       </p:sp>
       <p:sp>
         <p:nvSpPr>
-          <p:cNvPr id="1574214106" name="Прямоугольник 4"/>
+          <p:cNvPr id="788740094" name="Прямоугольник 4"/>
           <p:cNvSpPr/>
           <p:nvPr/>
         </p:nvSpPr>
@@ -15532,7 +15532,7 @@
       </p:sp>
       <p:sp>
         <p:nvSpPr>
-          <p:cNvPr id="942950245" name="Прямоугольник 5"/>
+          <p:cNvPr id="1468456797" name="Прямоугольник 5"/>
           <p:cNvSpPr/>
           <p:nvPr/>
         </p:nvSpPr>
@@ -15582,7 +15582,7 @@
       </p:sp>
       <p:sp>
         <p:nvSpPr>
-          <p:cNvPr id="93761591" name="Заголовок 1"/>
+          <p:cNvPr id="1478181003" name="Заголовок 1"/>
           <p:cNvSpPr>
             <a:spLocks noGrp="1"/>
           </p:cNvSpPr>
@@ -15687,7 +15687,7 @@
       </p:grpSpPr>
       <p:sp>
         <p:nvSpPr>
-          <p:cNvPr id="354833914" name="Прямоугольник 3"/>
+          <p:cNvPr id="416704479" name="Прямоугольник 3"/>
           <p:cNvSpPr/>
           <p:nvPr/>
         </p:nvSpPr>
@@ -15737,7 +15737,7 @@
       </p:sp>
       <p:sp>
         <p:nvSpPr>
-          <p:cNvPr id="300333708" name="Прямоугольник 4"/>
+          <p:cNvPr id="1591989968" name="Прямоугольник 4"/>
           <p:cNvSpPr/>
           <p:nvPr/>
         </p:nvSpPr>
@@ -15787,7 +15787,7 @@
       </p:sp>
       <p:sp>
         <p:nvSpPr>
-          <p:cNvPr id="1109579211" name="Заголовок 1"/>
+          <p:cNvPr id="165050687" name="Заголовок 1"/>
           <p:cNvSpPr>
             <a:spLocks noGrp="1"/>
           </p:cNvSpPr>
@@ -15852,7 +15852,7 @@
       </p:sp>
       <p:sp>
         <p:nvSpPr>
-          <p:cNvPr id="416488080" name="Подзаголовок 2"/>
+          <p:cNvPr id="658869768" name="Подзаголовок 2"/>
           <p:cNvSpPr>
             <a:spLocks noGrp="1"/>
           </p:cNvSpPr>
@@ -15931,7 +15931,7 @@
       </p:sp>
       <p:sp>
         <p:nvSpPr>
-          <p:cNvPr id="1895930118" name="Заголовок 1"/>
+          <p:cNvPr id="109138294" name="Заголовок 1"/>
           <p:cNvSpPr>
             <a:spLocks noGrp="1"/>
           </p:cNvSpPr>
@@ -15993,7 +15993,7 @@
       </p:sp>
       <p:sp>
         <p:nvSpPr>
-          <p:cNvPr id="1296297913" name="Заголовок 1"/>
+          <p:cNvPr id="355553338" name="Заголовок 1"/>
           <p:cNvSpPr>
             <a:spLocks noGrp="1"/>
           </p:cNvSpPr>
@@ -16055,7 +16055,7 @@
       </p:sp>
       <p:sp>
         <p:nvSpPr>
-          <p:cNvPr id="1709871118" name="Заголовок 1"/>
+          <p:cNvPr id="261394047" name="Заголовок 1"/>
           <p:cNvSpPr>
             <a:spLocks noGrp="1"/>
           </p:cNvSpPr>
@@ -16142,7 +16142,7 @@
       </p:sp>
       <p:sp>
         <p:nvSpPr>
-          <p:cNvPr id="182876864" name="Заголовок 1"/>
+          <p:cNvPr id="498371073" name="Заголовок 1"/>
           <p:cNvSpPr>
             <a:spLocks noGrp="1"/>
           </p:cNvSpPr>
@@ -16270,7 +16270,7 @@
       </p:grpSpPr>
       <p:sp>
         <p:nvSpPr>
-          <p:cNvPr id="1565779063" name="Прямоугольник 4"/>
+          <p:cNvPr id="1013927557" name="Прямоугольник 4"/>
           <p:cNvSpPr/>
           <p:nvPr/>
         </p:nvSpPr>
@@ -16320,7 +16320,7 @@
       </p:sp>
       <p:sp>
         <p:nvSpPr>
-          <p:cNvPr id="515862974" name="Заголовок 1"/>
+          <p:cNvPr id="1340720440" name="Заголовок 1"/>
           <p:cNvSpPr>
             <a:spLocks noGrp="1"/>
           </p:cNvSpPr>
@@ -16359,7 +16359,7 @@
       </p:sp>
       <p:sp>
         <p:nvSpPr>
-          <p:cNvPr id="1358657633" name="Объект 2"/>
+          <p:cNvPr id="1987370582" name="Объект 2"/>
           <p:cNvSpPr>
             <a:spLocks noGrp="1"/>
           </p:cNvSpPr>
@@ -16493,7 +16493,7 @@
       </p:sp>
       <p:sp>
         <p:nvSpPr>
-          <p:cNvPr id="838486096" name="Номер слайда 3"/>
+          <p:cNvPr id="444316814" name="Номер слайда 3"/>
           <p:cNvSpPr>
             <a:spLocks noGrp="1"/>
           </p:cNvSpPr>
@@ -16534,7 +16534,7 @@
       </p:sp>
       <p:sp>
         <p:nvSpPr>
-          <p:cNvPr id="2054196351" name="Прямоугольник 5"/>
+          <p:cNvPr id="1764720608" name="Прямоугольник 5"/>
           <p:cNvSpPr/>
           <p:nvPr/>
         </p:nvSpPr>
@@ -16650,7 +16650,7 @@
       </p:grpSpPr>
       <p:sp>
         <p:nvSpPr>
-          <p:cNvPr id="1875691032" name="Объект 2"/>
+          <p:cNvPr id="2099542214" name="Объект 2"/>
           <p:cNvSpPr>
             <a:spLocks noGrp="1"/>
           </p:cNvSpPr>
@@ -16816,7 +16816,7 @@
       </p:sp>
       <p:sp>
         <p:nvSpPr>
-          <p:cNvPr id="2128433960" name="Номер слайда 3"/>
+          <p:cNvPr id="1360108284" name="Номер слайда 3"/>
           <p:cNvSpPr>
             <a:spLocks noGrp="1"/>
           </p:cNvSpPr>
@@ -16857,7 +16857,7 @@
       </p:sp>
       <p:sp>
         <p:nvSpPr>
-          <p:cNvPr id="1685427653" name="Прямоугольник 4"/>
+          <p:cNvPr id="490098247" name="Прямоугольник 4"/>
           <p:cNvSpPr/>
           <p:nvPr/>
         </p:nvSpPr>
@@ -16907,7 +16907,7 @@
       </p:sp>
       <p:sp>
         <p:nvSpPr>
-          <p:cNvPr id="2103475145" name="Заголовок 1"/>
+          <p:cNvPr id="1458651063" name="Заголовок 1"/>
           <p:cNvSpPr>
             <a:spLocks noGrp="1"/>
           </p:cNvSpPr>
@@ -16946,7 +16946,7 @@
       </p:sp>
       <p:sp>
         <p:nvSpPr>
-          <p:cNvPr id="62659119" name="Прямоугольник 5"/>
+          <p:cNvPr id="709893478" name="Прямоугольник 5"/>
           <p:cNvSpPr/>
           <p:nvPr/>
         </p:nvSpPr>
@@ -17062,7 +17062,7 @@
       </p:grpSpPr>
       <p:sp>
         <p:nvSpPr>
-          <p:cNvPr id="1225500309" name="Объект 2"/>
+          <p:cNvPr id="708254905" name="Объект 2"/>
           <p:cNvSpPr>
             <a:spLocks noGrp="1"/>
           </p:cNvSpPr>
@@ -17175,7 +17175,7 @@
       </p:sp>
       <p:sp>
         <p:nvSpPr>
-          <p:cNvPr id="370870461" name="Номер слайда 3"/>
+          <p:cNvPr id="858755408" name="Номер слайда 3"/>
           <p:cNvSpPr>
             <a:spLocks noGrp="1"/>
           </p:cNvSpPr>
@@ -17216,7 +17216,7 @@
       </p:sp>
       <p:sp>
         <p:nvSpPr>
-          <p:cNvPr id="879430464" name="Прямоугольник 5"/>
+          <p:cNvPr id="183037624" name="Прямоугольник 5"/>
           <p:cNvSpPr/>
           <p:nvPr/>
         </p:nvSpPr>
@@ -17266,7 +17266,7 @@
       </p:sp>
       <p:sp>
         <p:nvSpPr>
-          <p:cNvPr id="526278542" name="Заголовок 1"/>
+          <p:cNvPr id="1748601754" name="Заголовок 1"/>
           <p:cNvSpPr>
             <a:spLocks noGrp="1"/>
           </p:cNvSpPr>
@@ -17305,7 +17305,7 @@
       </p:sp>
       <p:sp>
         <p:nvSpPr>
-          <p:cNvPr id="651187755" name="Прямоугольник 6"/>
+          <p:cNvPr id="127536176" name="Прямоугольник 6"/>
           <p:cNvSpPr/>
           <p:nvPr/>
         </p:nvSpPr>
@@ -17421,7 +17421,7 @@
       </p:grpSpPr>
       <p:sp>
         <p:nvSpPr>
-          <p:cNvPr id="1543479085" name="Объект 2"/>
+          <p:cNvPr id="151114935" name="Объект 2"/>
           <p:cNvSpPr>
             <a:spLocks noGrp="1"/>
           </p:cNvSpPr>
@@ -17476,7 +17476,7 @@
       </p:sp>
       <p:sp>
         <p:nvSpPr>
-          <p:cNvPr id="1361445578" name="Номер слайда 3"/>
+          <p:cNvPr id="53331097" name="Номер слайда 3"/>
           <p:cNvSpPr>
             <a:spLocks noGrp="1"/>
           </p:cNvSpPr>
@@ -17517,7 +17517,7 @@
       </p:sp>
       <p:sp>
         <p:nvSpPr>
-          <p:cNvPr id="378098118" name="Прямоугольник 5"/>
+          <p:cNvPr id="1203541227" name="Прямоугольник 5"/>
           <p:cNvSpPr/>
           <p:nvPr/>
         </p:nvSpPr>
@@ -17567,7 +17567,7 @@
       </p:sp>
       <p:sp>
         <p:nvSpPr>
-          <p:cNvPr id="144945904" name="Заголовок 1"/>
+          <p:cNvPr id="752921264" name="Заголовок 1"/>
           <p:cNvSpPr>
             <a:spLocks noGrp="1"/>
           </p:cNvSpPr>
@@ -17606,7 +17606,7 @@
       </p:sp>
       <p:sp>
         <p:nvSpPr>
-          <p:cNvPr id="1146587446" name="Прямоугольник 6"/>
+          <p:cNvPr id="1333037433" name="Прямоугольник 6"/>
           <p:cNvSpPr/>
           <p:nvPr/>
         </p:nvSpPr>
@@ -17656,7 +17656,7 @@
       </p:sp>
       <p:pic>
         <p:nvPicPr>
-          <p:cNvPr id="1781676119" name=""/>
+          <p:cNvPr id="1575760557" name=""/>
           <p:cNvPicPr>
             <a:picLocks noChangeAspect="1"/>
           </p:cNvPicPr>
@@ -17750,7 +17750,7 @@
       </p:grpSpPr>
       <p:sp>
         <p:nvSpPr>
-          <p:cNvPr id="2019281279" name="Прямоугольник 9"/>
+          <p:cNvPr id="934681327" name="Прямоугольник 9"/>
           <p:cNvSpPr/>
           <p:nvPr/>
         </p:nvSpPr>
@@ -17800,7 +17800,7 @@
       </p:sp>
       <p:sp>
         <p:nvSpPr>
-          <p:cNvPr id="1976699372" name="Прямоугольник 10"/>
+          <p:cNvPr id="698523736" name="Прямоугольник 10"/>
           <p:cNvSpPr/>
           <p:nvPr/>
         </p:nvSpPr>
@@ -17850,7 +17850,7 @@
       </p:sp>
       <p:sp>
         <p:nvSpPr>
-          <p:cNvPr id="1041080130" name="Заголовок 1"/>
+          <p:cNvPr id="891853707" name="Заголовок 1"/>
           <p:cNvSpPr>
             <a:spLocks noGrp="1"/>
           </p:cNvSpPr>
@@ -17912,7 +17912,7 @@
       </p:sp>
       <p:sp>
         <p:nvSpPr>
-          <p:cNvPr id="1537813849" name="Объект 2"/>
+          <p:cNvPr id="1198156923" name="Объект 2"/>
           <p:cNvSpPr>
             <a:spLocks noGrp="1"/>
           </p:cNvSpPr>
@@ -18063,7 +18063,7 @@
       </p:sp>
       <p:sp>
         <p:nvSpPr>
-          <p:cNvPr id="1247746418" name="Номер слайда 3"/>
+          <p:cNvPr id="282678274" name="Номер слайда 3"/>
           <p:cNvSpPr>
             <a:spLocks noGrp="1"/>
           </p:cNvSpPr>
@@ -18104,7 +18104,7 @@
       </p:sp>
       <p:pic>
         <p:nvPicPr>
-          <p:cNvPr id="1656802653" name="Рисунок 7"/>
+          <p:cNvPr id="934980864" name="Рисунок 7"/>
           <p:cNvPicPr>
             <a:picLocks noChangeAspect="1"/>
           </p:cNvPicPr>
@@ -18138,7 +18138,7 @@
       </p:pic>
       <p:pic>
         <p:nvPicPr>
-          <p:cNvPr id="365062225" name=""/>
+          <p:cNvPr id="1527068866" name=""/>
           <p:cNvPicPr>
             <a:picLocks noChangeAspect="1"/>
           </p:cNvPicPr>
@@ -18234,7 +18234,7 @@
       </p:grpSpPr>
       <p:sp>
         <p:nvSpPr>
-          <p:cNvPr id="586043087" name="Прямоугольник 9"/>
+          <p:cNvPr id="2001752862" name="Прямоугольник 9"/>
           <p:cNvSpPr/>
           <p:nvPr/>
         </p:nvSpPr>
@@ -18284,7 +18284,7 @@
       </p:sp>
       <p:sp>
         <p:nvSpPr>
-          <p:cNvPr id="529859763" name="Прямоугольник 10"/>
+          <p:cNvPr id="149974264" name="Прямоугольник 10"/>
           <p:cNvSpPr/>
           <p:nvPr/>
         </p:nvSpPr>
@@ -18334,7 +18334,7 @@
       </p:sp>
       <p:sp>
         <p:nvSpPr>
-          <p:cNvPr id="560072677" name="Заголовок 1"/>
+          <p:cNvPr id="1386251121" name="Заголовок 1"/>
           <p:cNvSpPr>
             <a:spLocks noGrp="1"/>
           </p:cNvSpPr>
@@ -18396,7 +18396,7 @@
       </p:sp>
       <p:sp>
         <p:nvSpPr>
-          <p:cNvPr id="1680346621" name="Объект 2"/>
+          <p:cNvPr id="1598290698" name="Объект 2"/>
           <p:cNvSpPr>
             <a:spLocks noGrp="1"/>
           </p:cNvSpPr>
@@ -18501,7 +18501,7 @@
       </p:sp>
       <p:sp>
         <p:nvSpPr>
-          <p:cNvPr id="1949388289" name="Номер слайда 3"/>
+          <p:cNvPr id="1030686044" name="Номер слайда 3"/>
           <p:cNvSpPr>
             <a:spLocks noGrp="1"/>
           </p:cNvSpPr>
@@ -18542,7 +18542,7 @@
       </p:sp>
       <p:pic>
         <p:nvPicPr>
-          <p:cNvPr id="1573154655" name="Рисунок 5"/>
+          <p:cNvPr id="1596213455" name="Рисунок 5"/>
           <p:cNvPicPr>
             <a:picLocks noChangeAspect="1"/>
           </p:cNvPicPr>
@@ -18643,7 +18643,7 @@
       </p:grpSpPr>
       <p:sp>
         <p:nvSpPr>
-          <p:cNvPr id="540126628" name="Объект 2"/>
+          <p:cNvPr id="1158872260" name="Объект 2"/>
           <p:cNvSpPr>
             <a:spLocks noGrp="1"/>
           </p:cNvSpPr>
@@ -18714,7 +18714,7 @@
       </p:sp>
       <p:sp>
         <p:nvSpPr>
-          <p:cNvPr id="1524166395" name="Номер слайда 3"/>
+          <p:cNvPr id="30732547" name="Номер слайда 3"/>
           <p:cNvSpPr>
             <a:spLocks noGrp="1"/>
           </p:cNvSpPr>
@@ -18755,7 +18755,7 @@
       </p:sp>
       <p:pic>
         <p:nvPicPr>
-          <p:cNvPr id="1785505106" name="Рисунок 5"/>
+          <p:cNvPr id="778076655" name="Рисунок 5"/>
           <p:cNvPicPr>
             <a:picLocks noChangeAspect="1"/>
           </p:cNvPicPr>
@@ -18785,7 +18785,7 @@
       </p:pic>
       <p:pic>
         <p:nvPicPr>
-          <p:cNvPr id="2008336051" name="Рисунок 1421075015"/>
+          <p:cNvPr id="442764175" name="Рисунок 1421075015"/>
           <p:cNvPicPr>
             <a:picLocks noChangeAspect="1"/>
           </p:cNvPicPr>
@@ -18820,7 +18820,7 @@
       </p:pic>
       <p:sp>
         <p:nvSpPr>
-          <p:cNvPr id="2045719039" name="Прямоугольник 10"/>
+          <p:cNvPr id="1226761381" name="Прямоугольник 10"/>
           <p:cNvSpPr/>
           <p:nvPr/>
         </p:nvSpPr>
@@ -18870,7 +18870,7 @@
       </p:sp>
       <p:sp>
         <p:nvSpPr>
-          <p:cNvPr id="245975416" name="Прямоугольник 11"/>
+          <p:cNvPr id="1814104726" name="Прямоугольник 11"/>
           <p:cNvSpPr/>
           <p:nvPr/>
         </p:nvSpPr>
@@ -18920,7 +18920,7 @@
       </p:sp>
       <p:sp>
         <p:nvSpPr>
-          <p:cNvPr id="580665397" name="Заголовок 1"/>
+          <p:cNvPr id="501955925" name="Заголовок 1"/>
           <p:cNvSpPr>
             <a:spLocks noGrp="1"/>
           </p:cNvSpPr>
@@ -18969,7 +18969,7 @@
       </p:sp>
       <p:pic>
         <p:nvPicPr>
-          <p:cNvPr id="1701558354" name="Рисунок 2"/>
+          <p:cNvPr id="1628664448" name="Рисунок 2"/>
           <p:cNvPicPr>
             <a:picLocks noChangeAspect="1"/>
           </p:cNvPicPr>
@@ -18983,12 +18983,11 @@
               </a:ext>
             </a:extLst>
           </a:blip>
-          <a:stretch/>
         </p:blipFill>
         <p:spPr bwMode="auto">
           <a:xfrm flipH="0" flipV="0">
-            <a:off x="8265294" y="5237432"/>
-            <a:ext cx="3763471" cy="1228079"/>
+            <a:off x="8480073" y="5206830"/>
+            <a:ext cx="3548691" cy="1376882"/>
           </a:xfrm>
           <a:prstGeom prst="rect">
             <a:avLst/>
@@ -18997,7 +18996,7 @@
       </p:pic>
       <p:pic>
         <p:nvPicPr>
-          <p:cNvPr id="2025097376" name=""/>
+          <p:cNvPr id="1306253939" name=""/>
           <p:cNvPicPr>
             <a:picLocks noChangeAspect="1"/>
           </p:cNvPicPr>
@@ -19027,17 +19026,17 @@
       </p:pic>
       <p:cxnSp>
         <p:nvCxnSpPr>
-          <p:cNvPr id="451818861" name=""/>
+          <p:cNvPr id="455070794" name=""/>
           <p:cNvCxnSpPr>
-            <a:stCxn id="1785505106" idx="3"/>
-            <a:endCxn id="1701558354" idx="1"/>
+            <a:stCxn id="778076655" idx="3"/>
+            <a:endCxn id="1628664448" idx="1"/>
           </p:cNvCxnSpPr>
           <p:nvPr/>
         </p:nvCxnSpPr>
         <p:spPr bwMode="auto">
           <a:xfrm rot="0" flipH="0" flipV="0">
-            <a:off x="7837801" y="5628176"/>
-            <a:ext cx="427492" cy="223295"/>
+            <a:off x="7837799" y="5628176"/>
+            <a:ext cx="642273" cy="267095"/>
           </a:xfrm>
           <a:prstGeom prst="line">
             <a:avLst/>
@@ -19070,10 +19069,10 @@
       </p:cxnSp>
       <p:cxnSp>
         <p:nvCxnSpPr>
-          <p:cNvPr id="368556323" name=""/>
+          <p:cNvPr id="225548558" name=""/>
           <p:cNvCxnSpPr>
-            <a:stCxn id="1785505106" idx="3"/>
-            <a:endCxn id="2008336051" idx="2"/>
+            <a:stCxn id="778076655" idx="3"/>
+            <a:endCxn id="442764175" idx="2"/>
           </p:cNvCxnSpPr>
           <p:nvPr/>
         </p:nvCxnSpPr>
@@ -19113,10 +19112,10 @@
       </p:cxnSp>
       <p:cxnSp>
         <p:nvCxnSpPr>
-          <p:cNvPr id="1096949245" name=""/>
+          <p:cNvPr id="374224083" name=""/>
           <p:cNvCxnSpPr>
-            <a:stCxn id="2025097376" idx="3"/>
-            <a:endCxn id="2008336051" idx="1"/>
+            <a:stCxn id="1306253939" idx="3"/>
+            <a:endCxn id="442764175" idx="1"/>
           </p:cNvCxnSpPr>
           <p:nvPr/>
         </p:nvCxnSpPr>
@@ -19156,17 +19155,17 @@
       </p:cxnSp>
       <p:cxnSp>
         <p:nvCxnSpPr>
-          <p:cNvPr id="481502652" name=""/>
+          <p:cNvPr id="354315911" name=""/>
           <p:cNvCxnSpPr>
-            <a:stCxn id="2025097376" idx="3"/>
-            <a:endCxn id="1701558354" idx="0"/>
+            <a:stCxn id="1306253939" idx="3"/>
+            <a:endCxn id="1628664448" idx="0"/>
           </p:cNvCxnSpPr>
           <p:nvPr/>
         </p:nvCxnSpPr>
         <p:spPr bwMode="auto">
           <a:xfrm rot="0" flipH="0" flipV="0">
-            <a:off x="8651715" y="2920446"/>
-            <a:ext cx="1495313" cy="2316986"/>
+            <a:off x="8651714" y="2920445"/>
+            <a:ext cx="1602704" cy="2286385"/>
           </a:xfrm>
           <a:prstGeom prst="line">
             <a:avLst/>
@@ -19265,7 +19264,7 @@
       </p:grpSpPr>
       <p:sp>
         <p:nvSpPr>
-          <p:cNvPr id="1843145468" name="Объект 2"/>
+          <p:cNvPr id="795627399" name="Объект 2"/>
           <p:cNvSpPr>
             <a:spLocks noGrp="1"/>
           </p:cNvSpPr>
@@ -19404,7 +19403,7 @@
       </p:sp>
       <p:sp>
         <p:nvSpPr>
-          <p:cNvPr id="533920025" name="Номер слайда 3"/>
+          <p:cNvPr id="1933376662" name="Номер слайда 3"/>
           <p:cNvSpPr>
             <a:spLocks noGrp="1"/>
           </p:cNvSpPr>
@@ -19445,7 +19444,7 @@
       </p:sp>
       <p:sp>
         <p:nvSpPr>
-          <p:cNvPr id="1707214923" name="Прямоугольник 5"/>
+          <p:cNvPr id="1719004998" name="Прямоугольник 5"/>
           <p:cNvSpPr/>
           <p:nvPr/>
         </p:nvSpPr>
@@ -19495,7 +19494,7 @@
       </p:sp>
       <p:sp>
         <p:nvSpPr>
-          <p:cNvPr id="1482991266" name="Прямоугольник 6"/>
+          <p:cNvPr id="34947425" name="Прямоугольник 6"/>
           <p:cNvSpPr/>
           <p:nvPr/>
         </p:nvSpPr>
@@ -19545,7 +19544,7 @@
       </p:sp>
       <p:sp>
         <p:nvSpPr>
-          <p:cNvPr id="406811040" name="Заголовок 1"/>
+          <p:cNvPr id="1043383581" name="Заголовок 1"/>
           <p:cNvSpPr>
             <a:spLocks noGrp="1"/>
           </p:cNvSpPr>
@@ -19597,7 +19596,7 @@
       </p:sp>
       <p:pic>
         <p:nvPicPr>
-          <p:cNvPr id="769429157" name=""/>
+          <p:cNvPr id="79438118" name=""/>
           <p:cNvPicPr>
             <a:picLocks noChangeAspect="1"/>
           </p:cNvPicPr>

--- a/docs/starukhin_dissertation/magister_pres.pptx
+++ b/docs/starukhin_dissertation/magister_pres.pptx
@@ -151,7 +151,7 @@
       </p:grpSpPr>
       <p:sp>
         <p:nvSpPr>
-          <p:cNvPr id="613492894" name="Верхний колонтитул 1"/>
+          <p:cNvPr id="1994621397" name="Верхний колонтитул 1"/>
           <p:cNvSpPr>
             <a:spLocks noGrp="1"/>
           </p:cNvSpPr>
@@ -185,7 +185,7 @@
       </p:sp>
       <p:sp>
         <p:nvSpPr>
-          <p:cNvPr id="1451211002" name="Дата 2"/>
+          <p:cNvPr id="1879859652" name="Дата 2"/>
           <p:cNvSpPr>
             <a:spLocks noGrp="1"/>
           </p:cNvSpPr>
@@ -223,7 +223,7 @@
       </p:sp>
       <p:sp>
         <p:nvSpPr>
-          <p:cNvPr id="1923654100" name="Образ слайда 3"/>
+          <p:cNvPr id="1006772333" name="Образ слайда 3"/>
           <p:cNvSpPr>
             <a:spLocks noChangeAspect="1" noGrp="1" noRot="1"/>
           </p:cNvSpPr>
@@ -259,7 +259,7 @@
       </p:sp>
       <p:sp>
         <p:nvSpPr>
-          <p:cNvPr id="1837309069" name="Заметки 4"/>
+          <p:cNvPr id="2110414089" name="Заметки 4"/>
           <p:cNvSpPr>
             <a:spLocks noGrp="1"/>
           </p:cNvSpPr>
@@ -333,7 +333,7 @@
       </p:sp>
       <p:sp>
         <p:nvSpPr>
-          <p:cNvPr id="961089406" name="Нижний колонтитул 5"/>
+          <p:cNvPr id="472631752" name="Нижний колонтитул 5"/>
           <p:cNvSpPr>
             <a:spLocks noGrp="1"/>
           </p:cNvSpPr>
@@ -367,7 +367,7 @@
       </p:sp>
       <p:sp>
         <p:nvSpPr>
-          <p:cNvPr id="985991578" name="Номер слайда 6"/>
+          <p:cNvPr id="1150720254" name="Номер слайда 6"/>
           <p:cNvSpPr>
             <a:spLocks noGrp="1"/>
           </p:cNvSpPr>
@@ -520,7 +520,7 @@
       </p:grpSpPr>
       <p:sp>
         <p:nvSpPr>
-          <p:cNvPr id="1200468979" name="Slide Image Placeholder 1"/>
+          <p:cNvPr id="2049855219" name="Slide Image Placeholder 1"/>
           <p:cNvSpPr>
             <a:spLocks noChangeAspect="1" noGrp="1" noRot="1"/>
           </p:cNvSpPr>
@@ -532,7 +532,7 @@
       </p:sp>
       <p:sp>
         <p:nvSpPr>
-          <p:cNvPr id="1533459332" name="Notes Placeholder 2"/>
+          <p:cNvPr id="1678332493" name="Notes Placeholder 2"/>
           <p:cNvSpPr>
             <a:spLocks noGrp="1"/>
           </p:cNvSpPr>
@@ -554,7 +554,7 @@
       </p:sp>
       <p:sp>
         <p:nvSpPr>
-          <p:cNvPr id="798826818" name="Slide Number Placeholder 3"/>
+          <p:cNvPr id="1483129251" name="Slide Number Placeholder 3"/>
           <p:cNvSpPr>
             <a:spLocks noGrp="1"/>
           </p:cNvSpPr>
@@ -605,7 +605,7 @@
       </p:grpSpPr>
       <p:sp>
         <p:nvSpPr>
-          <p:cNvPr id="230713662" name="Slide Image Placeholder 1"/>
+          <p:cNvPr id="546986335" name="Slide Image Placeholder 1"/>
           <p:cNvSpPr>
             <a:spLocks noChangeAspect="1" noGrp="1" noRot="1"/>
           </p:cNvSpPr>
@@ -617,7 +617,7 @@
       </p:sp>
       <p:sp>
         <p:nvSpPr>
-          <p:cNvPr id="676609688" name="Notes Placeholder 2"/>
+          <p:cNvPr id="516427946" name="Notes Placeholder 2"/>
           <p:cNvSpPr>
             <a:spLocks noGrp="1"/>
           </p:cNvSpPr>
@@ -639,7 +639,7 @@
       </p:sp>
       <p:sp>
         <p:nvSpPr>
-          <p:cNvPr id="1578448574" name="Slide Number Placeholder 3"/>
+          <p:cNvPr id="1289768327" name="Slide Number Placeholder 3"/>
           <p:cNvSpPr>
             <a:spLocks noGrp="1"/>
           </p:cNvSpPr>
@@ -690,7 +690,7 @@
       </p:grpSpPr>
       <p:sp>
         <p:nvSpPr>
-          <p:cNvPr id="1930854287" name="Slide Image Placeholder 1"/>
+          <p:cNvPr id="1237585104" name="Slide Image Placeholder 1"/>
           <p:cNvSpPr>
             <a:spLocks noChangeAspect="1" noGrp="1" noRot="1"/>
           </p:cNvSpPr>
@@ -702,7 +702,7 @@
       </p:sp>
       <p:sp>
         <p:nvSpPr>
-          <p:cNvPr id="99185634" name="Notes Placeholder 2"/>
+          <p:cNvPr id="1393844513" name="Notes Placeholder 2"/>
           <p:cNvSpPr>
             <a:spLocks noGrp="1"/>
           </p:cNvSpPr>
@@ -724,7 +724,7 @@
       </p:sp>
       <p:sp>
         <p:nvSpPr>
-          <p:cNvPr id="1158794774" name="Slide Number Placeholder 3"/>
+          <p:cNvPr id="691617621" name="Slide Number Placeholder 3"/>
           <p:cNvSpPr>
             <a:spLocks noGrp="1"/>
           </p:cNvSpPr>
@@ -775,7 +775,7 @@
       </p:grpSpPr>
       <p:sp>
         <p:nvSpPr>
-          <p:cNvPr id="850822328" name="Slide Image Placeholder 1"/>
+          <p:cNvPr id="1577987428" name="Slide Image Placeholder 1"/>
           <p:cNvSpPr>
             <a:spLocks noChangeAspect="1" noGrp="1" noRot="1"/>
           </p:cNvSpPr>
@@ -787,7 +787,7 @@
       </p:sp>
       <p:sp>
         <p:nvSpPr>
-          <p:cNvPr id="720177746" name="Notes Placeholder 2"/>
+          <p:cNvPr id="1750309421" name="Notes Placeholder 2"/>
           <p:cNvSpPr>
             <a:spLocks noGrp="1"/>
           </p:cNvSpPr>
@@ -809,7 +809,7 @@
       </p:sp>
       <p:sp>
         <p:nvSpPr>
-          <p:cNvPr id="1694362018" name="Slide Number Placeholder 3"/>
+          <p:cNvPr id="542079749" name="Slide Number Placeholder 3"/>
           <p:cNvSpPr>
             <a:spLocks noGrp="1"/>
           </p:cNvSpPr>
@@ -860,7 +860,7 @@
       </p:grpSpPr>
       <p:sp>
         <p:nvSpPr>
-          <p:cNvPr id="1925336933" name="Slide Image Placeholder 1"/>
+          <p:cNvPr id="1017504938" name="Slide Image Placeholder 1"/>
           <p:cNvSpPr>
             <a:spLocks noChangeAspect="1" noGrp="1" noRot="1"/>
           </p:cNvSpPr>
@@ -872,7 +872,7 @@
       </p:sp>
       <p:sp>
         <p:nvSpPr>
-          <p:cNvPr id="1243346850" name="Notes Placeholder 2"/>
+          <p:cNvPr id="369708593" name="Notes Placeholder 2"/>
           <p:cNvSpPr>
             <a:spLocks noGrp="1"/>
           </p:cNvSpPr>
@@ -894,7 +894,7 @@
       </p:sp>
       <p:sp>
         <p:nvSpPr>
-          <p:cNvPr id="554086966" name="Slide Number Placeholder 3"/>
+          <p:cNvPr id="1063645783" name="Slide Number Placeholder 3"/>
           <p:cNvSpPr>
             <a:spLocks noGrp="1"/>
           </p:cNvSpPr>
@@ -945,7 +945,7 @@
       </p:grpSpPr>
       <p:sp>
         <p:nvSpPr>
-          <p:cNvPr id="581956924" name="Slide Image Placeholder 1"/>
+          <p:cNvPr id="192314068" name="Slide Image Placeholder 1"/>
           <p:cNvSpPr>
             <a:spLocks noChangeAspect="1" noGrp="1" noRot="1"/>
           </p:cNvSpPr>
@@ -957,7 +957,7 @@
       </p:sp>
       <p:sp>
         <p:nvSpPr>
-          <p:cNvPr id="886435613" name="Notes Placeholder 2"/>
+          <p:cNvPr id="247430647" name="Notes Placeholder 2"/>
           <p:cNvSpPr>
             <a:spLocks noGrp="1"/>
           </p:cNvSpPr>
@@ -979,7 +979,7 @@
       </p:sp>
       <p:sp>
         <p:nvSpPr>
-          <p:cNvPr id="125210300" name="Slide Number Placeholder 3"/>
+          <p:cNvPr id="163804326" name="Slide Number Placeholder 3"/>
           <p:cNvSpPr>
             <a:spLocks noGrp="1"/>
           </p:cNvSpPr>
@@ -1030,7 +1030,7 @@
       </p:grpSpPr>
       <p:sp>
         <p:nvSpPr>
-          <p:cNvPr id="1944066094" name="Slide Image Placeholder 1"/>
+          <p:cNvPr id="1554483612" name="Slide Image Placeholder 1"/>
           <p:cNvSpPr>
             <a:spLocks noChangeAspect="1" noGrp="1" noRot="1"/>
           </p:cNvSpPr>
@@ -1042,7 +1042,7 @@
       </p:sp>
       <p:sp>
         <p:nvSpPr>
-          <p:cNvPr id="1722288007" name="Notes Placeholder 2"/>
+          <p:cNvPr id="323883903" name="Notes Placeholder 2"/>
           <p:cNvSpPr>
             <a:spLocks noGrp="1"/>
           </p:cNvSpPr>
@@ -1064,7 +1064,7 @@
       </p:sp>
       <p:sp>
         <p:nvSpPr>
-          <p:cNvPr id="792690866" name="Slide Number Placeholder 3"/>
+          <p:cNvPr id="935598509" name="Slide Number Placeholder 3"/>
           <p:cNvSpPr>
             <a:spLocks noGrp="1"/>
           </p:cNvSpPr>
@@ -1115,7 +1115,7 @@
       </p:grpSpPr>
       <p:sp>
         <p:nvSpPr>
-          <p:cNvPr id="1333211821" name="Slide Image Placeholder 1"/>
+          <p:cNvPr id="1201975293" name="Slide Image Placeholder 1"/>
           <p:cNvSpPr>
             <a:spLocks noChangeAspect="1" noGrp="1" noRot="1"/>
           </p:cNvSpPr>
@@ -1127,7 +1127,7 @@
       </p:sp>
       <p:sp>
         <p:nvSpPr>
-          <p:cNvPr id="1061664223" name="Notes Placeholder 2"/>
+          <p:cNvPr id="1507447223" name="Notes Placeholder 2"/>
           <p:cNvSpPr>
             <a:spLocks noGrp="1"/>
           </p:cNvSpPr>
@@ -1149,7 +1149,7 @@
       </p:sp>
       <p:sp>
         <p:nvSpPr>
-          <p:cNvPr id="479548429" name="Slide Number Placeholder 3"/>
+          <p:cNvPr id="638268999" name="Slide Number Placeholder 3"/>
           <p:cNvSpPr>
             <a:spLocks noGrp="1"/>
           </p:cNvSpPr>
@@ -1200,7 +1200,7 @@
       </p:grpSpPr>
       <p:sp>
         <p:nvSpPr>
-          <p:cNvPr id="995372931" name="Slide Image Placeholder 1"/>
+          <p:cNvPr id="1225103498" name="Slide Image Placeholder 1"/>
           <p:cNvSpPr>
             <a:spLocks noChangeAspect="1" noGrp="1" noRot="1"/>
           </p:cNvSpPr>
@@ -1212,7 +1212,7 @@
       </p:sp>
       <p:sp>
         <p:nvSpPr>
-          <p:cNvPr id="1535050605" name="Notes Placeholder 2"/>
+          <p:cNvPr id="1198839971" name="Notes Placeholder 2"/>
           <p:cNvSpPr>
             <a:spLocks noGrp="1"/>
           </p:cNvSpPr>
@@ -1234,7 +1234,7 @@
       </p:sp>
       <p:sp>
         <p:nvSpPr>
-          <p:cNvPr id="550258393" name="Slide Number Placeholder 3"/>
+          <p:cNvPr id="57987747" name="Slide Number Placeholder 3"/>
           <p:cNvSpPr>
             <a:spLocks noGrp="1"/>
           </p:cNvSpPr>
@@ -1285,7 +1285,7 @@
       </p:grpSpPr>
       <p:sp>
         <p:nvSpPr>
-          <p:cNvPr id="91154543" name="Slide Image Placeholder 1"/>
+          <p:cNvPr id="1186598178" name="Slide Image Placeholder 1"/>
           <p:cNvSpPr>
             <a:spLocks noChangeAspect="1" noGrp="1" noRot="1"/>
           </p:cNvSpPr>
@@ -1297,7 +1297,7 @@
       </p:sp>
       <p:sp>
         <p:nvSpPr>
-          <p:cNvPr id="776915959" name="Notes Placeholder 2"/>
+          <p:cNvPr id="1586705116" name="Notes Placeholder 2"/>
           <p:cNvSpPr>
             <a:spLocks noGrp="1"/>
           </p:cNvSpPr>
@@ -1319,7 +1319,7 @@
       </p:sp>
       <p:sp>
         <p:nvSpPr>
-          <p:cNvPr id="78952644" name="Slide Number Placeholder 3"/>
+          <p:cNvPr id="231778056" name="Slide Number Placeholder 3"/>
           <p:cNvSpPr>
             <a:spLocks noGrp="1"/>
           </p:cNvSpPr>
@@ -1370,7 +1370,7 @@
       </p:grpSpPr>
       <p:sp>
         <p:nvSpPr>
-          <p:cNvPr id="1653231406" name="Slide Image Placeholder 1"/>
+          <p:cNvPr id="1900417451" name="Slide Image Placeholder 1"/>
           <p:cNvSpPr>
             <a:spLocks noChangeAspect="1" noGrp="1" noRot="1"/>
           </p:cNvSpPr>
@@ -1382,7 +1382,7 @@
       </p:sp>
       <p:sp>
         <p:nvSpPr>
-          <p:cNvPr id="778572678" name="Notes Placeholder 2"/>
+          <p:cNvPr id="1466291171" name="Notes Placeholder 2"/>
           <p:cNvSpPr>
             <a:spLocks noGrp="1"/>
           </p:cNvSpPr>
@@ -1404,7 +1404,7 @@
       </p:sp>
       <p:sp>
         <p:nvSpPr>
-          <p:cNvPr id="2086018418" name="Slide Number Placeholder 3"/>
+          <p:cNvPr id="1564973864" name="Slide Number Placeholder 3"/>
           <p:cNvSpPr>
             <a:spLocks noGrp="1"/>
           </p:cNvSpPr>
@@ -1455,7 +1455,7 @@
       </p:grpSpPr>
       <p:sp>
         <p:nvSpPr>
-          <p:cNvPr id="966336959" name="Slide Image Placeholder 1"/>
+          <p:cNvPr id="798887161" name="Slide Image Placeholder 1"/>
           <p:cNvSpPr>
             <a:spLocks noChangeAspect="1" noGrp="1" noRot="1"/>
           </p:cNvSpPr>
@@ -1467,7 +1467,7 @@
       </p:sp>
       <p:sp>
         <p:nvSpPr>
-          <p:cNvPr id="133267500" name="Notes Placeholder 2"/>
+          <p:cNvPr id="500406238" name="Notes Placeholder 2"/>
           <p:cNvSpPr>
             <a:spLocks noGrp="1"/>
           </p:cNvSpPr>
@@ -1489,7 +1489,7 @@
       </p:sp>
       <p:sp>
         <p:nvSpPr>
-          <p:cNvPr id="880027123" name="Slide Number Placeholder 3"/>
+          <p:cNvPr id="1028821843" name="Slide Number Placeholder 3"/>
           <p:cNvSpPr>
             <a:spLocks noGrp="1"/>
           </p:cNvSpPr>
@@ -1540,7 +1540,7 @@
       </p:grpSpPr>
       <p:sp>
         <p:nvSpPr>
-          <p:cNvPr id="1098142643" name="Slide Image Placeholder 1"/>
+          <p:cNvPr id="220610037" name="Slide Image Placeholder 1"/>
           <p:cNvSpPr>
             <a:spLocks noChangeAspect="1" noGrp="1" noRot="1"/>
           </p:cNvSpPr>
@@ -1552,7 +1552,7 @@
       </p:sp>
       <p:sp>
         <p:nvSpPr>
-          <p:cNvPr id="1726465862" name="Notes Placeholder 2"/>
+          <p:cNvPr id="1856139828" name="Notes Placeholder 2"/>
           <p:cNvSpPr>
             <a:spLocks noGrp="1"/>
           </p:cNvSpPr>
@@ -1574,7 +1574,7 @@
       </p:sp>
       <p:sp>
         <p:nvSpPr>
-          <p:cNvPr id="532480724" name="Slide Number Placeholder 3"/>
+          <p:cNvPr id="776698893" name="Slide Number Placeholder 3"/>
           <p:cNvSpPr>
             <a:spLocks noGrp="1"/>
           </p:cNvSpPr>
@@ -1625,7 +1625,7 @@
       </p:grpSpPr>
       <p:sp>
         <p:nvSpPr>
-          <p:cNvPr id="572187620" name="Slide Image Placeholder 1"/>
+          <p:cNvPr id="1281688486" name="Slide Image Placeholder 1"/>
           <p:cNvSpPr>
             <a:spLocks noChangeAspect="1" noGrp="1" noRot="1"/>
           </p:cNvSpPr>
@@ -1637,7 +1637,7 @@
       </p:sp>
       <p:sp>
         <p:nvSpPr>
-          <p:cNvPr id="1776485501" name="Notes Placeholder 2"/>
+          <p:cNvPr id="118146038" name="Notes Placeholder 2"/>
           <p:cNvSpPr>
             <a:spLocks noGrp="1"/>
           </p:cNvSpPr>
@@ -1659,7 +1659,7 @@
       </p:sp>
       <p:sp>
         <p:nvSpPr>
-          <p:cNvPr id="1783218809" name="Slide Number Placeholder 3"/>
+          <p:cNvPr id="722036935" name="Slide Number Placeholder 3"/>
           <p:cNvSpPr>
             <a:spLocks noGrp="1"/>
           </p:cNvSpPr>
@@ -1710,7 +1710,7 @@
       </p:grpSpPr>
       <p:sp>
         <p:nvSpPr>
-          <p:cNvPr id="266269361" name="Slide Image Placeholder 1"/>
+          <p:cNvPr id="1873452942" name="Slide Image Placeholder 1"/>
           <p:cNvSpPr>
             <a:spLocks noChangeAspect="1" noGrp="1" noRot="1"/>
           </p:cNvSpPr>
@@ -1722,7 +1722,7 @@
       </p:sp>
       <p:sp>
         <p:nvSpPr>
-          <p:cNvPr id="1166872284" name="Notes Placeholder 2"/>
+          <p:cNvPr id="808951900" name="Notes Placeholder 2"/>
           <p:cNvSpPr>
             <a:spLocks noGrp="1"/>
           </p:cNvSpPr>
@@ -1744,7 +1744,7 @@
       </p:sp>
       <p:sp>
         <p:nvSpPr>
-          <p:cNvPr id="574958795" name="Slide Number Placeholder 3"/>
+          <p:cNvPr id="1970038609" name="Slide Number Placeholder 3"/>
           <p:cNvSpPr>
             <a:spLocks noGrp="1"/>
           </p:cNvSpPr>
@@ -1795,7 +1795,7 @@
       </p:grpSpPr>
       <p:sp>
         <p:nvSpPr>
-          <p:cNvPr id="182036509" name="Slide Image Placeholder 1"/>
+          <p:cNvPr id="665538760" name="Slide Image Placeholder 1"/>
           <p:cNvSpPr>
             <a:spLocks noChangeAspect="1" noGrp="1" noRot="1"/>
           </p:cNvSpPr>
@@ -1807,7 +1807,7 @@
       </p:sp>
       <p:sp>
         <p:nvSpPr>
-          <p:cNvPr id="401701879" name="Notes Placeholder 2"/>
+          <p:cNvPr id="259926159" name="Notes Placeholder 2"/>
           <p:cNvSpPr>
             <a:spLocks noGrp="1"/>
           </p:cNvSpPr>
@@ -1829,7 +1829,7 @@
       </p:sp>
       <p:sp>
         <p:nvSpPr>
-          <p:cNvPr id="1211305767" name="Slide Number Placeholder 3"/>
+          <p:cNvPr id="515582515" name="Slide Number Placeholder 3"/>
           <p:cNvSpPr>
             <a:spLocks noGrp="1"/>
           </p:cNvSpPr>
@@ -1880,7 +1880,7 @@
       </p:grpSpPr>
       <p:sp>
         <p:nvSpPr>
-          <p:cNvPr id="1817775596" name="Slide Image Placeholder 1"/>
+          <p:cNvPr id="339773094" name="Slide Image Placeholder 1"/>
           <p:cNvSpPr>
             <a:spLocks noChangeAspect="1" noGrp="1" noRot="1"/>
           </p:cNvSpPr>
@@ -1892,7 +1892,7 @@
       </p:sp>
       <p:sp>
         <p:nvSpPr>
-          <p:cNvPr id="472292892" name="Notes Placeholder 2"/>
+          <p:cNvPr id="1358214891" name="Notes Placeholder 2"/>
           <p:cNvSpPr>
             <a:spLocks noGrp="1"/>
           </p:cNvSpPr>
@@ -1914,7 +1914,7 @@
       </p:sp>
       <p:sp>
         <p:nvSpPr>
-          <p:cNvPr id="1549381218" name="Slide Number Placeholder 3"/>
+          <p:cNvPr id="965361886" name="Slide Number Placeholder 3"/>
           <p:cNvSpPr>
             <a:spLocks noGrp="1"/>
           </p:cNvSpPr>
@@ -1965,7 +1965,7 @@
       </p:grpSpPr>
       <p:sp>
         <p:nvSpPr>
-          <p:cNvPr id="1017770136" name="Slide Image Placeholder 1"/>
+          <p:cNvPr id="519179697" name="Slide Image Placeholder 1"/>
           <p:cNvSpPr>
             <a:spLocks noChangeAspect="1" noGrp="1" noRot="1"/>
           </p:cNvSpPr>
@@ -1977,7 +1977,7 @@
       </p:sp>
       <p:sp>
         <p:nvSpPr>
-          <p:cNvPr id="890895803" name="Notes Placeholder 2"/>
+          <p:cNvPr id="1054274137" name="Notes Placeholder 2"/>
           <p:cNvSpPr>
             <a:spLocks noGrp="1"/>
           </p:cNvSpPr>
@@ -1999,7 +1999,7 @@
       </p:sp>
       <p:sp>
         <p:nvSpPr>
-          <p:cNvPr id="115694462" name="Slide Number Placeholder 3"/>
+          <p:cNvPr id="607271822" name="Slide Number Placeholder 3"/>
           <p:cNvSpPr>
             <a:spLocks noGrp="1"/>
           </p:cNvSpPr>
@@ -2050,7 +2050,7 @@
       </p:grpSpPr>
       <p:sp>
         <p:nvSpPr>
-          <p:cNvPr id="2080928051" name="Заголовок 1"/>
+          <p:cNvPr id="175897794" name="Заголовок 1"/>
           <p:cNvSpPr>
             <a:spLocks noGrp="1"/>
           </p:cNvSpPr>
@@ -2085,7 +2085,7 @@
       </p:sp>
       <p:sp>
         <p:nvSpPr>
-          <p:cNvPr id="1024859571" name="Подзаголовок 2"/>
+          <p:cNvPr id="190189854" name="Подзаголовок 2"/>
           <p:cNvSpPr>
             <a:spLocks noGrp="1"/>
           </p:cNvSpPr>
@@ -2153,7 +2153,7 @@
       </p:sp>
       <p:sp>
         <p:nvSpPr>
-          <p:cNvPr id="999610919" name="Дата 3"/>
+          <p:cNvPr id="668543748" name="Дата 3"/>
           <p:cNvSpPr>
             <a:spLocks noGrp="1"/>
           </p:cNvSpPr>
@@ -2179,7 +2179,7 @@
       </p:sp>
       <p:sp>
         <p:nvSpPr>
-          <p:cNvPr id="352256580" name="Нижний колонтитул 4"/>
+          <p:cNvPr id="1343382821" name="Нижний колонтитул 4"/>
           <p:cNvSpPr>
             <a:spLocks noGrp="1"/>
           </p:cNvSpPr>
@@ -2201,7 +2201,7 @@
       </p:sp>
       <p:sp>
         <p:nvSpPr>
-          <p:cNvPr id="434250292" name="Номер слайда 5"/>
+          <p:cNvPr id="2024685688" name="Номер слайда 5"/>
           <p:cNvSpPr>
             <a:spLocks noGrp="1"/>
           </p:cNvSpPr>
@@ -2252,7 +2252,7 @@
       </p:grpSpPr>
       <p:sp>
         <p:nvSpPr>
-          <p:cNvPr id="2033299201" name="Заголовок 1"/>
+          <p:cNvPr id="1273556936" name="Заголовок 1"/>
           <p:cNvSpPr>
             <a:spLocks noGrp="1"/>
           </p:cNvSpPr>
@@ -2278,7 +2278,7 @@
       </p:sp>
       <p:sp>
         <p:nvSpPr>
-          <p:cNvPr id="1232915827" name="Вертикальный текст 2"/>
+          <p:cNvPr id="345082521" name="Вертикальный текст 2"/>
           <p:cNvSpPr>
             <a:spLocks noGrp="1"/>
           </p:cNvSpPr>
@@ -2344,7 +2344,7 @@
       </p:sp>
       <p:sp>
         <p:nvSpPr>
-          <p:cNvPr id="1660309105" name="Дата 3"/>
+          <p:cNvPr id="2070776165" name="Дата 3"/>
           <p:cNvSpPr>
             <a:spLocks noGrp="1"/>
           </p:cNvSpPr>
@@ -2370,7 +2370,7 @@
       </p:sp>
       <p:sp>
         <p:nvSpPr>
-          <p:cNvPr id="1661826262" name="Нижний колонтитул 4"/>
+          <p:cNvPr id="846666649" name="Нижний колонтитул 4"/>
           <p:cNvSpPr>
             <a:spLocks noGrp="1"/>
           </p:cNvSpPr>
@@ -2392,7 +2392,7 @@
       </p:sp>
       <p:sp>
         <p:nvSpPr>
-          <p:cNvPr id="1070288153" name="Номер слайда 5"/>
+          <p:cNvPr id="1586527107" name="Номер слайда 5"/>
           <p:cNvSpPr>
             <a:spLocks noGrp="1"/>
           </p:cNvSpPr>
@@ -2443,7 +2443,7 @@
       </p:grpSpPr>
       <p:sp>
         <p:nvSpPr>
-          <p:cNvPr id="615955108" name="Вертикальный заголовок 1"/>
+          <p:cNvPr id="2069547509" name="Вертикальный заголовок 1"/>
           <p:cNvSpPr>
             <a:spLocks noGrp="1"/>
           </p:cNvSpPr>
@@ -2474,7 +2474,7 @@
       </p:sp>
       <p:sp>
         <p:nvSpPr>
-          <p:cNvPr id="1769331192" name="Вертикальный текст 2"/>
+          <p:cNvPr id="446883292" name="Вертикальный текст 2"/>
           <p:cNvSpPr>
             <a:spLocks noGrp="1"/>
           </p:cNvSpPr>
@@ -2545,7 +2545,7 @@
       </p:sp>
       <p:sp>
         <p:nvSpPr>
-          <p:cNvPr id="1132875379" name="Дата 3"/>
+          <p:cNvPr id="304056710" name="Дата 3"/>
           <p:cNvSpPr>
             <a:spLocks noGrp="1"/>
           </p:cNvSpPr>
@@ -2571,7 +2571,7 @@
       </p:sp>
       <p:sp>
         <p:nvSpPr>
-          <p:cNvPr id="17132060" name="Нижний колонтитул 4"/>
+          <p:cNvPr id="1950181647" name="Нижний колонтитул 4"/>
           <p:cNvSpPr>
             <a:spLocks noGrp="1"/>
           </p:cNvSpPr>
@@ -2593,7 +2593,7 @@
       </p:sp>
       <p:sp>
         <p:nvSpPr>
-          <p:cNvPr id="1001010915" name="Номер слайда 5"/>
+          <p:cNvPr id="2069908581" name="Номер слайда 5"/>
           <p:cNvSpPr>
             <a:spLocks noGrp="1"/>
           </p:cNvSpPr>
@@ -2644,7 +2644,7 @@
       </p:grpSpPr>
       <p:pic>
         <p:nvPicPr>
-          <p:cNvPr id="1347165987" name="Picture 6" descr="HD-ShadowLong.png"/>
+          <p:cNvPr id="793643432" name="Picture 6" descr="HD-ShadowLong.png"/>
           <p:cNvPicPr>
             <a:picLocks noChangeAspect="1"/>
           </p:cNvPicPr>
@@ -2666,7 +2666,7 @@
       </p:pic>
       <p:pic>
         <p:nvPicPr>
-          <p:cNvPr id="617970983" name="Picture 7" descr="HD-ShadowShort.png"/>
+          <p:cNvPr id="1768246924" name="Picture 7" descr="HD-ShadowShort.png"/>
           <p:cNvPicPr>
             <a:picLocks noChangeAspect="1"/>
           </p:cNvPicPr>
@@ -2688,7 +2688,7 @@
       </p:pic>
       <p:sp>
         <p:nvSpPr>
-          <p:cNvPr id="853541788" name="Rectangle 8"/>
+          <p:cNvPr id="794257679" name="Rectangle 8"/>
           <p:cNvSpPr/>
           <p:nvPr/>
         </p:nvSpPr>
@@ -2729,7 +2729,7 @@
       </p:sp>
       <p:sp>
         <p:nvSpPr>
-          <p:cNvPr id="673055578" name="Rectangle 9"/>
+          <p:cNvPr id="1917465969" name="Rectangle 9"/>
           <p:cNvSpPr/>
           <p:nvPr/>
         </p:nvSpPr>
@@ -2767,7 +2767,7 @@
       </p:sp>
       <p:sp>
         <p:nvSpPr>
-          <p:cNvPr id="827577626" name="Title 1"/>
+          <p:cNvPr id="1612059635" name="Title 1"/>
           <p:cNvSpPr>
             <a:spLocks noGrp="1"/>
           </p:cNvSpPr>
@@ -2804,7 +2804,7 @@
       </p:sp>
       <p:sp>
         <p:nvSpPr>
-          <p:cNvPr id="684495137" name="Subtitle 2"/>
+          <p:cNvPr id="1455690020" name="Subtitle 2"/>
           <p:cNvSpPr>
             <a:spLocks noGrp="1"/>
           </p:cNvSpPr>
@@ -2874,7 +2874,7 @@
       </p:sp>
       <p:sp>
         <p:nvSpPr>
-          <p:cNvPr id="1110430350" name="Date Placeholder 3"/>
+          <p:cNvPr id="1214868787" name="Date Placeholder 3"/>
           <p:cNvSpPr>
             <a:spLocks noGrp="1"/>
           </p:cNvSpPr>
@@ -2900,7 +2900,7 @@
       </p:sp>
       <p:sp>
         <p:nvSpPr>
-          <p:cNvPr id="1667690485" name="Footer Placeholder 4"/>
+          <p:cNvPr id="1828808208" name="Footer Placeholder 4"/>
           <p:cNvSpPr>
             <a:spLocks noGrp="1"/>
           </p:cNvSpPr>
@@ -2922,7 +2922,7 @@
       </p:sp>
       <p:sp>
         <p:nvSpPr>
-          <p:cNvPr id="892209424" name="Slide Number Placeholder 5"/>
+          <p:cNvPr id="1511464003" name="Slide Number Placeholder 5"/>
           <p:cNvSpPr>
             <a:spLocks noGrp="1"/>
           </p:cNvSpPr>
@@ -2978,7 +2978,7 @@
       </p:grpSpPr>
       <p:pic>
         <p:nvPicPr>
-          <p:cNvPr id="1834700556" name="Picture 14" descr="HD-ShadowLong.png"/>
+          <p:cNvPr id="876764738" name="Picture 14" descr="HD-ShadowLong.png"/>
           <p:cNvPicPr>
             <a:picLocks noChangeAspect="1"/>
           </p:cNvPicPr>
@@ -3000,7 +3000,7 @@
       </p:pic>
       <p:pic>
         <p:nvPicPr>
-          <p:cNvPr id="811837007" name="Picture 15" descr="HD-ShadowShort.png"/>
+          <p:cNvPr id="173452132" name="Picture 15" descr="HD-ShadowShort.png"/>
           <p:cNvPicPr>
             <a:picLocks noChangeAspect="1"/>
           </p:cNvPicPr>
@@ -3022,7 +3022,7 @@
       </p:pic>
       <p:sp>
         <p:nvSpPr>
-          <p:cNvPr id="393035077" name="Rectangle 16"/>
+          <p:cNvPr id="172333308" name="Rectangle 16"/>
           <p:cNvSpPr/>
           <p:nvPr/>
         </p:nvSpPr>
@@ -3063,7 +3063,7 @@
       </p:sp>
       <p:sp>
         <p:nvSpPr>
-          <p:cNvPr id="643690548" name="Rectangle 17"/>
+          <p:cNvPr id="2123915880" name="Rectangle 17"/>
           <p:cNvSpPr/>
           <p:nvPr/>
         </p:nvSpPr>
@@ -3101,7 +3101,7 @@
       </p:sp>
       <p:sp>
         <p:nvSpPr>
-          <p:cNvPr id="454811574" name="Title 1"/>
+          <p:cNvPr id="1971475932" name="Title 1"/>
           <p:cNvSpPr>
             <a:spLocks noGrp="1"/>
           </p:cNvSpPr>
@@ -3127,7 +3127,7 @@
       </p:sp>
       <p:sp>
         <p:nvSpPr>
-          <p:cNvPr id="1857867045" name="Content Placeholder 2"/>
+          <p:cNvPr id="2091675304" name="Content Placeholder 2"/>
           <p:cNvSpPr>
             <a:spLocks noGrp="1"/>
           </p:cNvSpPr>
@@ -3193,7 +3193,7 @@
       </p:sp>
       <p:sp>
         <p:nvSpPr>
-          <p:cNvPr id="308771421" name="Date Placeholder 3"/>
+          <p:cNvPr id="84246940" name="Date Placeholder 3"/>
           <p:cNvSpPr>
             <a:spLocks noGrp="1"/>
           </p:cNvSpPr>
@@ -3219,7 +3219,7 @@
       </p:sp>
       <p:sp>
         <p:nvSpPr>
-          <p:cNvPr id="1049347105" name="Footer Placeholder 4"/>
+          <p:cNvPr id="1648952554" name="Footer Placeholder 4"/>
           <p:cNvSpPr>
             <a:spLocks noGrp="1"/>
           </p:cNvSpPr>
@@ -3241,7 +3241,7 @@
       </p:sp>
       <p:sp>
         <p:nvSpPr>
-          <p:cNvPr id="1968246769" name="Slide Number Placeholder 5"/>
+          <p:cNvPr id="1127786240" name="Slide Number Placeholder 5"/>
           <p:cNvSpPr>
             <a:spLocks noGrp="1"/>
           </p:cNvSpPr>
@@ -3292,7 +3292,7 @@
       </p:grpSpPr>
       <p:pic>
         <p:nvPicPr>
-          <p:cNvPr id="47848199" name="Picture 6" descr="HD-ShadowLong.png"/>
+          <p:cNvPr id="273017644" name="Picture 6" descr="HD-ShadowLong.png"/>
           <p:cNvPicPr>
             <a:picLocks noChangeAspect="1"/>
           </p:cNvPicPr>
@@ -3314,7 +3314,7 @@
       </p:pic>
       <p:pic>
         <p:nvPicPr>
-          <p:cNvPr id="70626481" name="Picture 7" descr="HD-ShadowShort.png"/>
+          <p:cNvPr id="1073199399" name="Picture 7" descr="HD-ShadowShort.png"/>
           <p:cNvPicPr>
             <a:picLocks noChangeAspect="1"/>
           </p:cNvPicPr>
@@ -3336,7 +3336,7 @@
       </p:pic>
       <p:sp>
         <p:nvSpPr>
-          <p:cNvPr id="223293187" name="Rectangle 8"/>
+          <p:cNvPr id="1901606843" name="Rectangle 8"/>
           <p:cNvSpPr/>
           <p:nvPr/>
         </p:nvSpPr>
@@ -3377,7 +3377,7 @@
       </p:sp>
       <p:sp>
         <p:nvSpPr>
-          <p:cNvPr id="187340680" name="Rectangle 9"/>
+          <p:cNvPr id="547389118" name="Rectangle 9"/>
           <p:cNvSpPr/>
           <p:nvPr/>
         </p:nvSpPr>
@@ -3415,7 +3415,7 @@
       </p:sp>
       <p:sp>
         <p:nvSpPr>
-          <p:cNvPr id="1041177092" name="Title 1"/>
+          <p:cNvPr id="751544624" name="Title 1"/>
           <p:cNvSpPr>
             <a:spLocks noGrp="1"/>
           </p:cNvSpPr>
@@ -3452,7 +3452,7 @@
       </p:sp>
       <p:sp>
         <p:nvSpPr>
-          <p:cNvPr id="1887224217" name="Text Placeholder 2"/>
+          <p:cNvPr id="2014375602" name="Text Placeholder 2"/>
           <p:cNvSpPr>
             <a:spLocks noGrp="1"/>
           </p:cNvSpPr>
@@ -3576,7 +3576,7 @@
       </p:sp>
       <p:sp>
         <p:nvSpPr>
-          <p:cNvPr id="1029104409" name="Date Placeholder 3"/>
+          <p:cNvPr id="1923863657" name="Date Placeholder 3"/>
           <p:cNvSpPr>
             <a:spLocks noGrp="1"/>
           </p:cNvSpPr>
@@ -3602,7 +3602,7 @@
       </p:sp>
       <p:sp>
         <p:nvSpPr>
-          <p:cNvPr id="318126034" name="Footer Placeholder 4"/>
+          <p:cNvPr id="781626906" name="Footer Placeholder 4"/>
           <p:cNvSpPr>
             <a:spLocks noGrp="1"/>
           </p:cNvSpPr>
@@ -3624,7 +3624,7 @@
       </p:sp>
       <p:sp>
         <p:nvSpPr>
-          <p:cNvPr id="1582887656" name="Slide Number Placeholder 5"/>
+          <p:cNvPr id="1943457015" name="Slide Number Placeholder 5"/>
           <p:cNvSpPr>
             <a:spLocks noGrp="1"/>
           </p:cNvSpPr>
@@ -3680,7 +3680,7 @@
       </p:grpSpPr>
       <p:pic>
         <p:nvPicPr>
-          <p:cNvPr id="1990530080" name="Picture 7" descr="HD-ShadowLong.png"/>
+          <p:cNvPr id="715013635" name="Picture 7" descr="HD-ShadowLong.png"/>
           <p:cNvPicPr>
             <a:picLocks noChangeAspect="1"/>
           </p:cNvPicPr>
@@ -3702,7 +3702,7 @@
       </p:pic>
       <p:pic>
         <p:nvPicPr>
-          <p:cNvPr id="569431448" name="Picture 8" descr="HD-ShadowShort.png"/>
+          <p:cNvPr id="275764393" name="Picture 8" descr="HD-ShadowShort.png"/>
           <p:cNvPicPr>
             <a:picLocks noChangeAspect="1"/>
           </p:cNvPicPr>
@@ -3724,7 +3724,7 @@
       </p:pic>
       <p:sp>
         <p:nvSpPr>
-          <p:cNvPr id="1364202438" name="Rectangle 9"/>
+          <p:cNvPr id="270794006" name="Rectangle 9"/>
           <p:cNvSpPr/>
           <p:nvPr/>
         </p:nvSpPr>
@@ -3765,7 +3765,7 @@
       </p:sp>
       <p:sp>
         <p:nvSpPr>
-          <p:cNvPr id="918307440" name="Rectangle 10"/>
+          <p:cNvPr id="925018658" name="Rectangle 10"/>
           <p:cNvSpPr/>
           <p:nvPr/>
         </p:nvSpPr>
@@ -3803,7 +3803,7 @@
       </p:sp>
       <p:sp>
         <p:nvSpPr>
-          <p:cNvPr id="1573780824" name="Title 1"/>
+          <p:cNvPr id="149841134" name="Title 1"/>
           <p:cNvSpPr>
             <a:spLocks noGrp="1"/>
           </p:cNvSpPr>
@@ -3829,7 +3829,7 @@
       </p:sp>
       <p:sp>
         <p:nvSpPr>
-          <p:cNvPr id="834016053" name="Content Placeholder 2"/>
+          <p:cNvPr id="1753203016" name="Content Placeholder 2"/>
           <p:cNvSpPr>
             <a:spLocks noGrp="1"/>
           </p:cNvSpPr>
@@ -3900,7 +3900,7 @@
       </p:sp>
       <p:sp>
         <p:nvSpPr>
-          <p:cNvPr id="639522489" name="Content Placeholder 3"/>
+          <p:cNvPr id="1445469297" name="Content Placeholder 3"/>
           <p:cNvSpPr>
             <a:spLocks noGrp="1"/>
           </p:cNvSpPr>
@@ -3971,7 +3971,7 @@
       </p:sp>
       <p:sp>
         <p:nvSpPr>
-          <p:cNvPr id="1986750372" name="Date Placeholder 4"/>
+          <p:cNvPr id="1080741401" name="Date Placeholder 4"/>
           <p:cNvSpPr>
             <a:spLocks noGrp="1"/>
           </p:cNvSpPr>
@@ -3997,7 +3997,7 @@
       </p:sp>
       <p:sp>
         <p:nvSpPr>
-          <p:cNvPr id="204817690" name="Footer Placeholder 5"/>
+          <p:cNvPr id="1173709945" name="Footer Placeholder 5"/>
           <p:cNvSpPr>
             <a:spLocks noGrp="1"/>
           </p:cNvSpPr>
@@ -4019,7 +4019,7 @@
       </p:sp>
       <p:sp>
         <p:nvSpPr>
-          <p:cNvPr id="1982600501" name="Slide Number Placeholder 6"/>
+          <p:cNvPr id="898760746" name="Slide Number Placeholder 6"/>
           <p:cNvSpPr>
             <a:spLocks noGrp="1"/>
           </p:cNvSpPr>
@@ -4070,7 +4070,7 @@
       </p:grpSpPr>
       <p:pic>
         <p:nvPicPr>
-          <p:cNvPr id="940321677" name="Picture 9" descr="HD-ShadowLong.png"/>
+          <p:cNvPr id="996666029" name="Picture 9" descr="HD-ShadowLong.png"/>
           <p:cNvPicPr>
             <a:picLocks noChangeAspect="1"/>
           </p:cNvPicPr>
@@ -4092,7 +4092,7 @@
       </p:pic>
       <p:pic>
         <p:nvPicPr>
-          <p:cNvPr id="2021696965" name="Picture 10" descr="HD-ShadowShort.png"/>
+          <p:cNvPr id="1540406872" name="Picture 10" descr="HD-ShadowShort.png"/>
           <p:cNvPicPr>
             <a:picLocks noChangeAspect="1"/>
           </p:cNvPicPr>
@@ -4114,7 +4114,7 @@
       </p:pic>
       <p:sp>
         <p:nvSpPr>
-          <p:cNvPr id="326980156" name="Rectangle 11"/>
+          <p:cNvPr id="1679919062" name="Rectangle 11"/>
           <p:cNvSpPr/>
           <p:nvPr/>
         </p:nvSpPr>
@@ -4155,7 +4155,7 @@
       </p:sp>
       <p:sp>
         <p:nvSpPr>
-          <p:cNvPr id="1591714048" name="Rectangle 12"/>
+          <p:cNvPr id="963701510" name="Rectangle 12"/>
           <p:cNvSpPr/>
           <p:nvPr/>
         </p:nvSpPr>
@@ -4193,7 +4193,7 @@
       </p:sp>
       <p:sp>
         <p:nvSpPr>
-          <p:cNvPr id="2123285681" name="Title 1"/>
+          <p:cNvPr id="209389481" name="Title 1"/>
           <p:cNvSpPr>
             <a:spLocks noGrp="1"/>
           </p:cNvSpPr>
@@ -4224,7 +4224,7 @@
       </p:sp>
       <p:sp>
         <p:nvSpPr>
-          <p:cNvPr id="1490518794" name="Text Placeholder 2"/>
+          <p:cNvPr id="1506239929" name="Text Placeholder 2"/>
           <p:cNvSpPr>
             <a:spLocks noGrp="1"/>
           </p:cNvSpPr>
@@ -4292,7 +4292,7 @@
       </p:sp>
       <p:sp>
         <p:nvSpPr>
-          <p:cNvPr id="1746759790" name="Content Placeholder 3"/>
+          <p:cNvPr id="843667430" name="Content Placeholder 3"/>
           <p:cNvSpPr>
             <a:spLocks noGrp="1"/>
           </p:cNvSpPr>
@@ -4363,7 +4363,7 @@
       </p:sp>
       <p:sp>
         <p:nvSpPr>
-          <p:cNvPr id="412860913" name="Text Placeholder 4"/>
+          <p:cNvPr id="1536034060" name="Text Placeholder 4"/>
           <p:cNvSpPr>
             <a:spLocks noGrp="1"/>
           </p:cNvSpPr>
@@ -4431,7 +4431,7 @@
       </p:sp>
       <p:sp>
         <p:nvSpPr>
-          <p:cNvPr id="825345860" name="Content Placeholder 5"/>
+          <p:cNvPr id="1617947894" name="Content Placeholder 5"/>
           <p:cNvSpPr>
             <a:spLocks noGrp="1"/>
           </p:cNvSpPr>
@@ -4502,7 +4502,7 @@
       </p:sp>
       <p:sp>
         <p:nvSpPr>
-          <p:cNvPr id="1099224981" name="Date Placeholder 6"/>
+          <p:cNvPr id="100304079" name="Date Placeholder 6"/>
           <p:cNvSpPr>
             <a:spLocks noGrp="1"/>
           </p:cNvSpPr>
@@ -4528,7 +4528,7 @@
       </p:sp>
       <p:sp>
         <p:nvSpPr>
-          <p:cNvPr id="359672024" name="Footer Placeholder 7"/>
+          <p:cNvPr id="1854237017" name="Footer Placeholder 7"/>
           <p:cNvSpPr>
             <a:spLocks noGrp="1"/>
           </p:cNvSpPr>
@@ -4550,7 +4550,7 @@
       </p:sp>
       <p:sp>
         <p:nvSpPr>
-          <p:cNvPr id="879293271" name="Slide Number Placeholder 8"/>
+          <p:cNvPr id="2046668031" name="Slide Number Placeholder 8"/>
           <p:cNvSpPr>
             <a:spLocks noGrp="1"/>
           </p:cNvSpPr>
@@ -4601,7 +4601,7 @@
       </p:grpSpPr>
       <p:pic>
         <p:nvPicPr>
-          <p:cNvPr id="472328068" name="Picture 5" descr="HD-ShadowLong.png"/>
+          <p:cNvPr id="1542267524" name="Picture 5" descr="HD-ShadowLong.png"/>
           <p:cNvPicPr>
             <a:picLocks noChangeAspect="1"/>
           </p:cNvPicPr>
@@ -4623,7 +4623,7 @@
       </p:pic>
       <p:pic>
         <p:nvPicPr>
-          <p:cNvPr id="210114609" name="Picture 6" descr="HD-ShadowShort.png"/>
+          <p:cNvPr id="78270752" name="Picture 6" descr="HD-ShadowShort.png"/>
           <p:cNvPicPr>
             <a:picLocks noChangeAspect="1"/>
           </p:cNvPicPr>
@@ -4645,7 +4645,7 @@
       </p:pic>
       <p:sp>
         <p:nvSpPr>
-          <p:cNvPr id="1327167317" name="Rectangle 7"/>
+          <p:cNvPr id="1278352640" name="Rectangle 7"/>
           <p:cNvSpPr/>
           <p:nvPr/>
         </p:nvSpPr>
@@ -4686,7 +4686,7 @@
       </p:sp>
       <p:sp>
         <p:nvSpPr>
-          <p:cNvPr id="708377840" name="Rectangle 8"/>
+          <p:cNvPr id="1750296704" name="Rectangle 8"/>
           <p:cNvSpPr/>
           <p:nvPr/>
         </p:nvSpPr>
@@ -4724,7 +4724,7 @@
       </p:sp>
       <p:sp>
         <p:nvSpPr>
-          <p:cNvPr id="2001909140" name="Title 1"/>
+          <p:cNvPr id="1460357284" name="Title 1"/>
           <p:cNvSpPr>
             <a:spLocks noGrp="1"/>
           </p:cNvSpPr>
@@ -4750,7 +4750,7 @@
       </p:sp>
       <p:sp>
         <p:nvSpPr>
-          <p:cNvPr id="1830228862" name="Date Placeholder 2"/>
+          <p:cNvPr id="1797222027" name="Date Placeholder 2"/>
           <p:cNvSpPr>
             <a:spLocks noGrp="1"/>
           </p:cNvSpPr>
@@ -4776,7 +4776,7 @@
       </p:sp>
       <p:sp>
         <p:nvSpPr>
-          <p:cNvPr id="765661052" name="Footer Placeholder 3"/>
+          <p:cNvPr id="1641891263" name="Footer Placeholder 3"/>
           <p:cNvSpPr>
             <a:spLocks noGrp="1"/>
           </p:cNvSpPr>
@@ -4798,7 +4798,7 @@
       </p:sp>
       <p:sp>
         <p:nvSpPr>
-          <p:cNvPr id="179690220" name="Slide Number Placeholder 4"/>
+          <p:cNvPr id="1864952229" name="Slide Number Placeholder 4"/>
           <p:cNvSpPr>
             <a:spLocks noGrp="1"/>
           </p:cNvSpPr>
@@ -4849,7 +4849,7 @@
       </p:grpSpPr>
       <p:pic>
         <p:nvPicPr>
-          <p:cNvPr id="449675574" name="Picture 4" descr="HD-ShadowShort.png"/>
+          <p:cNvPr id="358528735" name="Picture 4" descr="HD-ShadowShort.png"/>
           <p:cNvPicPr>
             <a:picLocks noChangeAspect="1"/>
           </p:cNvPicPr>
@@ -4871,7 +4871,7 @@
       </p:pic>
       <p:sp>
         <p:nvSpPr>
-          <p:cNvPr id="500199933" name="Rectangle 5"/>
+          <p:cNvPr id="197733676" name="Rectangle 5"/>
           <p:cNvSpPr/>
           <p:nvPr/>
         </p:nvSpPr>
@@ -4909,7 +4909,7 @@
       </p:sp>
       <p:sp>
         <p:nvSpPr>
-          <p:cNvPr id="1916627774" name="Date Placeholder 1"/>
+          <p:cNvPr id="204576908" name="Date Placeholder 1"/>
           <p:cNvSpPr>
             <a:spLocks noGrp="1"/>
           </p:cNvSpPr>
@@ -4935,7 +4935,7 @@
       </p:sp>
       <p:sp>
         <p:nvSpPr>
-          <p:cNvPr id="1222793595" name="Footer Placeholder 2"/>
+          <p:cNvPr id="1745613692" name="Footer Placeholder 2"/>
           <p:cNvSpPr>
             <a:spLocks noGrp="1"/>
           </p:cNvSpPr>
@@ -4957,7 +4957,7 @@
       </p:sp>
       <p:sp>
         <p:nvSpPr>
-          <p:cNvPr id="1466886564" name="Slide Number Placeholder 3"/>
+          <p:cNvPr id="1307291959" name="Slide Number Placeholder 3"/>
           <p:cNvSpPr>
             <a:spLocks noGrp="1"/>
           </p:cNvSpPr>
@@ -5008,7 +5008,7 @@
       </p:grpSpPr>
       <p:pic>
         <p:nvPicPr>
-          <p:cNvPr id="1285177234" name="Picture 7" descr="HD-ShadowLong.png"/>
+          <p:cNvPr id="836214736" name="Picture 7" descr="HD-ShadowLong.png"/>
           <p:cNvPicPr>
             <a:picLocks noChangeAspect="1"/>
           </p:cNvPicPr>
@@ -5030,7 +5030,7 @@
       </p:pic>
       <p:pic>
         <p:nvPicPr>
-          <p:cNvPr id="1524121593" name="Picture 8" descr="HD-ShadowShort.png"/>
+          <p:cNvPr id="1371526800" name="Picture 8" descr="HD-ShadowShort.png"/>
           <p:cNvPicPr>
             <a:picLocks noChangeAspect="1"/>
           </p:cNvPicPr>
@@ -5052,7 +5052,7 @@
       </p:pic>
       <p:sp>
         <p:nvSpPr>
-          <p:cNvPr id="1427733504" name="Rectangle 9"/>
+          <p:cNvPr id="90075046" name="Rectangle 9"/>
           <p:cNvSpPr/>
           <p:nvPr/>
         </p:nvSpPr>
@@ -5093,7 +5093,7 @@
       </p:sp>
       <p:sp>
         <p:nvSpPr>
-          <p:cNvPr id="107972478" name="Rectangle 10"/>
+          <p:cNvPr id="1680166379" name="Rectangle 10"/>
           <p:cNvSpPr/>
           <p:nvPr/>
         </p:nvSpPr>
@@ -5131,7 +5131,7 @@
       </p:sp>
       <p:sp>
         <p:nvSpPr>
-          <p:cNvPr id="1108915019" name="Title 1"/>
+          <p:cNvPr id="2092484877" name="Title 1"/>
           <p:cNvSpPr>
             <a:spLocks noGrp="1"/>
           </p:cNvSpPr>
@@ -5168,7 +5168,7 @@
       </p:sp>
       <p:sp>
         <p:nvSpPr>
-          <p:cNvPr id="1864279751" name="Content Placeholder 2"/>
+          <p:cNvPr id="248542299" name="Content Placeholder 2"/>
           <p:cNvSpPr>
             <a:spLocks noGrp="1"/>
           </p:cNvSpPr>
@@ -5239,7 +5239,7 @@
       </p:sp>
       <p:sp>
         <p:nvSpPr>
-          <p:cNvPr id="1551444133" name="Text Placeholder 3"/>
+          <p:cNvPr id="1353456584" name="Text Placeholder 3"/>
           <p:cNvSpPr>
             <a:spLocks noGrp="1"/>
           </p:cNvSpPr>
@@ -5307,7 +5307,7 @@
       </p:sp>
       <p:sp>
         <p:nvSpPr>
-          <p:cNvPr id="1751702281" name="Date Placeholder 4"/>
+          <p:cNvPr id="678070271" name="Date Placeholder 4"/>
           <p:cNvSpPr>
             <a:spLocks noGrp="1"/>
           </p:cNvSpPr>
@@ -5333,7 +5333,7 @@
       </p:sp>
       <p:sp>
         <p:nvSpPr>
-          <p:cNvPr id="1914220232" name="Footer Placeholder 5"/>
+          <p:cNvPr id="2042056188" name="Footer Placeholder 5"/>
           <p:cNvSpPr>
             <a:spLocks noGrp="1"/>
           </p:cNvSpPr>
@@ -5355,7 +5355,7 @@
       </p:sp>
       <p:sp>
         <p:nvSpPr>
-          <p:cNvPr id="9543168" name="Slide Number Placeholder 6"/>
+          <p:cNvPr id="841692473" name="Slide Number Placeholder 6"/>
           <p:cNvSpPr>
             <a:spLocks noGrp="1"/>
           </p:cNvSpPr>
@@ -5406,7 +5406,7 @@
       </p:grpSpPr>
       <p:sp>
         <p:nvSpPr>
-          <p:cNvPr id="955896150" name="Заголовок 1"/>
+          <p:cNvPr id="877498755" name="Заголовок 1"/>
           <p:cNvSpPr>
             <a:spLocks noGrp="1"/>
           </p:cNvSpPr>
@@ -5432,7 +5432,7 @@
       </p:sp>
       <p:sp>
         <p:nvSpPr>
-          <p:cNvPr id="2146656591" name="Объект 2"/>
+          <p:cNvPr id="1649996580" name="Объект 2"/>
           <p:cNvSpPr>
             <a:spLocks noGrp="1"/>
           </p:cNvSpPr>
@@ -5498,7 +5498,7 @@
       </p:sp>
       <p:sp>
         <p:nvSpPr>
-          <p:cNvPr id="708094448" name="Дата 3"/>
+          <p:cNvPr id="539416928" name="Дата 3"/>
           <p:cNvSpPr>
             <a:spLocks noGrp="1"/>
           </p:cNvSpPr>
@@ -5524,7 +5524,7 @@
       </p:sp>
       <p:sp>
         <p:nvSpPr>
-          <p:cNvPr id="9125617" name="Нижний колонтитул 4"/>
+          <p:cNvPr id="373508275" name="Нижний колонтитул 4"/>
           <p:cNvSpPr>
             <a:spLocks noGrp="1"/>
           </p:cNvSpPr>
@@ -5546,7 +5546,7 @@
       </p:sp>
       <p:sp>
         <p:nvSpPr>
-          <p:cNvPr id="1035869192" name="Номер слайда 5"/>
+          <p:cNvPr id="1617710353" name="Номер слайда 5"/>
           <p:cNvSpPr>
             <a:spLocks noGrp="1"/>
           </p:cNvSpPr>
@@ -5597,7 +5597,7 @@
       </p:grpSpPr>
       <p:pic>
         <p:nvPicPr>
-          <p:cNvPr id="1804106501" name="Picture 7" descr="HD-ShadowLong.png"/>
+          <p:cNvPr id="2046555126" name="Picture 7" descr="HD-ShadowLong.png"/>
           <p:cNvPicPr>
             <a:picLocks noChangeAspect="1"/>
           </p:cNvPicPr>
@@ -5619,7 +5619,7 @@
       </p:pic>
       <p:pic>
         <p:nvPicPr>
-          <p:cNvPr id="912628000" name="Picture 8" descr="HD-ShadowShort.png"/>
+          <p:cNvPr id="853817117" name="Picture 8" descr="HD-ShadowShort.png"/>
           <p:cNvPicPr>
             <a:picLocks noChangeAspect="1"/>
           </p:cNvPicPr>
@@ -5641,7 +5641,7 @@
       </p:pic>
       <p:sp>
         <p:nvSpPr>
-          <p:cNvPr id="832092858" name="Rectangle 9"/>
+          <p:cNvPr id="887632515" name="Rectangle 9"/>
           <p:cNvSpPr/>
           <p:nvPr/>
         </p:nvSpPr>
@@ -5682,7 +5682,7 @@
       </p:sp>
       <p:sp>
         <p:nvSpPr>
-          <p:cNvPr id="1215719611" name="Rectangle 10"/>
+          <p:cNvPr id="301825935" name="Rectangle 10"/>
           <p:cNvSpPr/>
           <p:nvPr/>
         </p:nvSpPr>
@@ -5720,7 +5720,7 @@
       </p:sp>
       <p:sp>
         <p:nvSpPr>
-          <p:cNvPr id="2005596291" name="Title 1"/>
+          <p:cNvPr id="511077936" name="Title 1"/>
           <p:cNvSpPr>
             <a:spLocks noGrp="1"/>
           </p:cNvSpPr>
@@ -5757,7 +5757,7 @@
       </p:sp>
       <p:sp>
         <p:nvSpPr>
-          <p:cNvPr id="394012585" name="Picture Placeholder 2"/>
+          <p:cNvPr id="494512508" name="Picture Placeholder 2"/>
           <p:cNvSpPr>
             <a:spLocks noChangeAspect="1" noGrp="1"/>
           </p:cNvSpPr>
@@ -5839,7 +5839,7 @@
       </p:sp>
       <p:sp>
         <p:nvSpPr>
-          <p:cNvPr id="1852015701" name="Text Placeholder 3"/>
+          <p:cNvPr id="2012689798" name="Text Placeholder 3"/>
           <p:cNvSpPr>
             <a:spLocks noGrp="1"/>
           </p:cNvSpPr>
@@ -5907,7 +5907,7 @@
       </p:sp>
       <p:sp>
         <p:nvSpPr>
-          <p:cNvPr id="1114559009" name="Date Placeholder 4"/>
+          <p:cNvPr id="1482660192" name="Date Placeholder 4"/>
           <p:cNvSpPr>
             <a:spLocks noGrp="1"/>
           </p:cNvSpPr>
@@ -5933,7 +5933,7 @@
       </p:sp>
       <p:sp>
         <p:nvSpPr>
-          <p:cNvPr id="408358131" name="Footer Placeholder 5"/>
+          <p:cNvPr id="1557256038" name="Footer Placeholder 5"/>
           <p:cNvSpPr>
             <a:spLocks noGrp="1"/>
           </p:cNvSpPr>
@@ -5955,7 +5955,7 @@
       </p:sp>
       <p:sp>
         <p:nvSpPr>
-          <p:cNvPr id="1718108850" name="Slide Number Placeholder 6"/>
+          <p:cNvPr id="1044366022" name="Slide Number Placeholder 6"/>
           <p:cNvSpPr>
             <a:spLocks noGrp="1"/>
           </p:cNvSpPr>
@@ -6006,7 +6006,7 @@
       </p:grpSpPr>
       <p:pic>
         <p:nvPicPr>
-          <p:cNvPr id="987565293" name="Picture 7" descr="HD-ShadowLong.png"/>
+          <p:cNvPr id="2060062332" name="Picture 7" descr="HD-ShadowLong.png"/>
           <p:cNvPicPr>
             <a:picLocks noChangeAspect="1"/>
           </p:cNvPicPr>
@@ -6028,7 +6028,7 @@
       </p:pic>
       <p:pic>
         <p:nvPicPr>
-          <p:cNvPr id="1948382810" name="Picture 8" descr="HD-ShadowShort.png"/>
+          <p:cNvPr id="347545903" name="Picture 8" descr="HD-ShadowShort.png"/>
           <p:cNvPicPr>
             <a:picLocks noChangeAspect="1"/>
           </p:cNvPicPr>
@@ -6050,7 +6050,7 @@
       </p:pic>
       <p:sp>
         <p:nvSpPr>
-          <p:cNvPr id="608905111" name="Rectangle 9"/>
+          <p:cNvPr id="2130835739" name="Rectangle 9"/>
           <p:cNvSpPr/>
           <p:nvPr/>
         </p:nvSpPr>
@@ -6091,7 +6091,7 @@
       </p:sp>
       <p:sp>
         <p:nvSpPr>
-          <p:cNvPr id="1770411865" name="Rectangle 10"/>
+          <p:cNvPr id="2097230994" name="Rectangle 10"/>
           <p:cNvSpPr/>
           <p:nvPr/>
         </p:nvSpPr>
@@ -6129,7 +6129,7 @@
       </p:sp>
       <p:sp>
         <p:nvSpPr>
-          <p:cNvPr id="339355642" name="Title 1"/>
+          <p:cNvPr id="615266043" name="Title 1"/>
           <p:cNvSpPr>
             <a:spLocks noGrp="1"/>
           </p:cNvSpPr>
@@ -6166,7 +6166,7 @@
       </p:sp>
       <p:sp>
         <p:nvSpPr>
-          <p:cNvPr id="626131037" name="Picture Placeholder 2"/>
+          <p:cNvPr id="962049135" name="Picture Placeholder 2"/>
           <p:cNvSpPr>
             <a:spLocks noChangeAspect="1" noGrp="1"/>
           </p:cNvSpPr>
@@ -6248,7 +6248,7 @@
       </p:sp>
       <p:sp>
         <p:nvSpPr>
-          <p:cNvPr id="1107453346" name="Text Placeholder 3"/>
+          <p:cNvPr id="686671806" name="Text Placeholder 3"/>
           <p:cNvSpPr>
             <a:spLocks noGrp="1"/>
           </p:cNvSpPr>
@@ -6316,7 +6316,7 @@
       </p:sp>
       <p:sp>
         <p:nvSpPr>
-          <p:cNvPr id="497889693" name="Date Placeholder 4"/>
+          <p:cNvPr id="827949522" name="Date Placeholder 4"/>
           <p:cNvSpPr>
             <a:spLocks noGrp="1"/>
           </p:cNvSpPr>
@@ -6342,7 +6342,7 @@
       </p:sp>
       <p:sp>
         <p:nvSpPr>
-          <p:cNvPr id="1257347310" name="Footer Placeholder 5"/>
+          <p:cNvPr id="1514250910" name="Footer Placeholder 5"/>
           <p:cNvSpPr>
             <a:spLocks noGrp="1"/>
           </p:cNvSpPr>
@@ -6364,7 +6364,7 @@
       </p:sp>
       <p:sp>
         <p:nvSpPr>
-          <p:cNvPr id="944376207" name="Slide Number Placeholder 6"/>
+          <p:cNvPr id="251829417" name="Slide Number Placeholder 6"/>
           <p:cNvSpPr>
             <a:spLocks noGrp="1"/>
           </p:cNvSpPr>
@@ -6420,7 +6420,7 @@
       </p:grpSpPr>
       <p:pic>
         <p:nvPicPr>
-          <p:cNvPr id="1024024871" name="Picture 7" descr="HD-ShadowLong.png"/>
+          <p:cNvPr id="416913952" name="Picture 7" descr="HD-ShadowLong.png"/>
           <p:cNvPicPr>
             <a:picLocks noChangeAspect="1"/>
           </p:cNvPicPr>
@@ -6442,7 +6442,7 @@
       </p:pic>
       <p:pic>
         <p:nvPicPr>
-          <p:cNvPr id="1885016797" name="Picture 8" descr="HD-ShadowShort.png"/>
+          <p:cNvPr id="249288123" name="Picture 8" descr="HD-ShadowShort.png"/>
           <p:cNvPicPr>
             <a:picLocks noChangeAspect="1"/>
           </p:cNvPicPr>
@@ -6464,7 +6464,7 @@
       </p:pic>
       <p:sp>
         <p:nvSpPr>
-          <p:cNvPr id="236628158" name="Rectangle 9"/>
+          <p:cNvPr id="1477942715" name="Rectangle 9"/>
           <p:cNvSpPr/>
           <p:nvPr/>
         </p:nvSpPr>
@@ -6505,7 +6505,7 @@
       </p:sp>
       <p:sp>
         <p:nvSpPr>
-          <p:cNvPr id="448025928" name="Rectangle 10"/>
+          <p:cNvPr id="1156204209" name="Rectangle 10"/>
           <p:cNvSpPr/>
           <p:nvPr/>
         </p:nvSpPr>
@@ -6543,7 +6543,7 @@
       </p:sp>
       <p:sp>
         <p:nvSpPr>
-          <p:cNvPr id="1606407708" name="Title 1"/>
+          <p:cNvPr id="795143720" name="Title 1"/>
           <p:cNvSpPr>
             <a:spLocks noGrp="1"/>
           </p:cNvSpPr>
@@ -6578,7 +6578,7 @@
       </p:sp>
       <p:sp>
         <p:nvSpPr>
-          <p:cNvPr id="1949527085" name="Text Placeholder 3"/>
+          <p:cNvPr id="659802012" name="Text Placeholder 3"/>
           <p:cNvSpPr>
             <a:spLocks noGrp="1"/>
           </p:cNvSpPr>
@@ -6646,7 +6646,7 @@
       </p:sp>
       <p:sp>
         <p:nvSpPr>
-          <p:cNvPr id="1182711108" name="Date Placeholder 4"/>
+          <p:cNvPr id="989325142" name="Date Placeholder 4"/>
           <p:cNvSpPr>
             <a:spLocks noGrp="1"/>
           </p:cNvSpPr>
@@ -6672,7 +6672,7 @@
       </p:sp>
       <p:sp>
         <p:nvSpPr>
-          <p:cNvPr id="614418121" name="Footer Placeholder 5"/>
+          <p:cNvPr id="1069597934" name="Footer Placeholder 5"/>
           <p:cNvSpPr>
             <a:spLocks noGrp="1"/>
           </p:cNvSpPr>
@@ -6694,7 +6694,7 @@
       </p:sp>
       <p:sp>
         <p:nvSpPr>
-          <p:cNvPr id="782309395" name="Slide Number Placeholder 6"/>
+          <p:cNvPr id="1465284660" name="Slide Number Placeholder 6"/>
           <p:cNvSpPr>
             <a:spLocks noGrp="1"/>
           </p:cNvSpPr>
@@ -6750,7 +6750,7 @@
       </p:grpSpPr>
       <p:pic>
         <p:nvPicPr>
-          <p:cNvPr id="1457067148" name="Picture 10" descr="HD-ShadowLong.png"/>
+          <p:cNvPr id="1621971362" name="Picture 10" descr="HD-ShadowLong.png"/>
           <p:cNvPicPr>
             <a:picLocks noChangeAspect="1"/>
           </p:cNvPicPr>
@@ -6772,7 +6772,7 @@
       </p:pic>
       <p:pic>
         <p:nvPicPr>
-          <p:cNvPr id="711294609" name="Picture 12" descr="HD-ShadowShort.png"/>
+          <p:cNvPr id="30138758" name="Picture 12" descr="HD-ShadowShort.png"/>
           <p:cNvPicPr>
             <a:picLocks noChangeAspect="1"/>
           </p:cNvPicPr>
@@ -6794,7 +6794,7 @@
       </p:pic>
       <p:sp>
         <p:nvSpPr>
-          <p:cNvPr id="388347452" name="Rectangle 13"/>
+          <p:cNvPr id="1217562408" name="Rectangle 13"/>
           <p:cNvSpPr/>
           <p:nvPr/>
         </p:nvSpPr>
@@ -6835,7 +6835,7 @@
       </p:sp>
       <p:sp>
         <p:nvSpPr>
-          <p:cNvPr id="2060412866" name="Rectangle 14"/>
+          <p:cNvPr id="530357184" name="Rectangle 14"/>
           <p:cNvSpPr/>
           <p:nvPr/>
         </p:nvSpPr>
@@ -6873,7 +6873,7 @@
       </p:sp>
       <p:sp>
         <p:nvSpPr>
-          <p:cNvPr id="2065366973" name="Title 1"/>
+          <p:cNvPr id="1432462105" name="Title 1"/>
           <p:cNvSpPr>
             <a:spLocks noGrp="1"/>
           </p:cNvSpPr>
@@ -6908,7 +6908,7 @@
       </p:sp>
       <p:sp>
         <p:nvSpPr>
-          <p:cNvPr id="661387424" name="Text Placeholder 3"/>
+          <p:cNvPr id="645844534" name="Text Placeholder 3"/>
           <p:cNvSpPr>
             <a:spLocks noGrp="1"/>
           </p:cNvSpPr>
@@ -6978,7 +6978,7 @@
       </p:sp>
       <p:sp>
         <p:nvSpPr>
-          <p:cNvPr id="74249810" name="Text Placeholder 3"/>
+          <p:cNvPr id="1113970974" name="Text Placeholder 3"/>
           <p:cNvSpPr>
             <a:spLocks noGrp="1"/>
           </p:cNvSpPr>
@@ -7048,7 +7048,7 @@
       </p:sp>
       <p:sp>
         <p:nvSpPr>
-          <p:cNvPr id="1838721618" name="Date Placeholder 4"/>
+          <p:cNvPr id="1820181809" name="Date Placeholder 4"/>
           <p:cNvSpPr>
             <a:spLocks noGrp="1"/>
           </p:cNvSpPr>
@@ -7074,7 +7074,7 @@
       </p:sp>
       <p:sp>
         <p:nvSpPr>
-          <p:cNvPr id="268184312" name="Footer Placeholder 5"/>
+          <p:cNvPr id="2136562073" name="Footer Placeholder 5"/>
           <p:cNvSpPr>
             <a:spLocks noGrp="1"/>
           </p:cNvSpPr>
@@ -7096,7 +7096,7 @@
       </p:sp>
       <p:sp>
         <p:nvSpPr>
-          <p:cNvPr id="1782452591" name="Slide Number Placeholder 6"/>
+          <p:cNvPr id="971000793" name="Slide Number Placeholder 6"/>
           <p:cNvSpPr>
             <a:spLocks noGrp="1"/>
           </p:cNvSpPr>
@@ -7127,7 +7127,7 @@
       </p:sp>
       <p:sp>
         <p:nvSpPr>
-          <p:cNvPr id="178672157" name="TextBox 15"/>
+          <p:cNvPr id="166039225" name="TextBox 15"/>
           <p:cNvSpPr txBox="1"/>
           <p:nvPr/>
         </p:nvSpPr>
@@ -7231,7 +7231,7 @@
       </p:sp>
       <p:sp>
         <p:nvSpPr>
-          <p:cNvPr id="1999115095" name="TextBox 16"/>
+          <p:cNvPr id="693514685" name="TextBox 16"/>
           <p:cNvSpPr txBox="1"/>
           <p:nvPr/>
         </p:nvSpPr>
@@ -7360,7 +7360,7 @@
       </p:grpSpPr>
       <p:pic>
         <p:nvPicPr>
-          <p:cNvPr id="1829018697" name="Picture 8" descr="HD-ShadowLong.png"/>
+          <p:cNvPr id="1435523145" name="Picture 8" descr="HD-ShadowLong.png"/>
           <p:cNvPicPr>
             <a:picLocks noChangeAspect="1"/>
           </p:cNvPicPr>
@@ -7382,7 +7382,7 @@
       </p:pic>
       <p:pic>
         <p:nvPicPr>
-          <p:cNvPr id="430388794" name="Picture 9" descr="HD-ShadowShort.png"/>
+          <p:cNvPr id="1694119683" name="Picture 9" descr="HD-ShadowShort.png"/>
           <p:cNvPicPr>
             <a:picLocks noChangeAspect="1"/>
           </p:cNvPicPr>
@@ -7404,7 +7404,7 @@
       </p:pic>
       <p:sp>
         <p:nvSpPr>
-          <p:cNvPr id="143397274" name="Rectangle 10"/>
+          <p:cNvPr id="1861207402" name="Rectangle 10"/>
           <p:cNvSpPr/>
           <p:nvPr/>
         </p:nvSpPr>
@@ -7445,7 +7445,7 @@
       </p:sp>
       <p:sp>
         <p:nvSpPr>
-          <p:cNvPr id="300482164" name="Rectangle 11"/>
+          <p:cNvPr id="589285336" name="Rectangle 11"/>
           <p:cNvSpPr/>
           <p:nvPr/>
         </p:nvSpPr>
@@ -7483,7 +7483,7 @@
       </p:sp>
       <p:sp>
         <p:nvSpPr>
-          <p:cNvPr id="1109534929" name="Title 1"/>
+          <p:cNvPr id="881122765" name="Title 1"/>
           <p:cNvSpPr>
             <a:spLocks noGrp="1"/>
           </p:cNvSpPr>
@@ -7518,7 +7518,7 @@
       </p:sp>
       <p:sp>
         <p:nvSpPr>
-          <p:cNvPr id="1578795525" name="Text Placeholder 3"/>
+          <p:cNvPr id="865621959" name="Text Placeholder 3"/>
           <p:cNvSpPr>
             <a:spLocks noGrp="1"/>
           </p:cNvSpPr>
@@ -7586,7 +7586,7 @@
       </p:sp>
       <p:sp>
         <p:nvSpPr>
-          <p:cNvPr id="221521166" name="Date Placeholder 4"/>
+          <p:cNvPr id="1781817160" name="Date Placeholder 4"/>
           <p:cNvSpPr>
             <a:spLocks noGrp="1"/>
           </p:cNvSpPr>
@@ -7612,7 +7612,7 @@
       </p:sp>
       <p:sp>
         <p:nvSpPr>
-          <p:cNvPr id="728527617" name="Footer Placeholder 5"/>
+          <p:cNvPr id="821830588" name="Footer Placeholder 5"/>
           <p:cNvSpPr>
             <a:spLocks noGrp="1"/>
           </p:cNvSpPr>
@@ -7634,7 +7634,7 @@
       </p:sp>
       <p:sp>
         <p:nvSpPr>
-          <p:cNvPr id="2093252349" name="Slide Number Placeholder 6"/>
+          <p:cNvPr id="273537634" name="Slide Number Placeholder 6"/>
           <p:cNvSpPr>
             <a:spLocks noGrp="1"/>
           </p:cNvSpPr>
@@ -7690,7 +7690,7 @@
       </p:grpSpPr>
       <p:pic>
         <p:nvPicPr>
-          <p:cNvPr id="889953066" name="Picture 12" descr="HD-ShadowLong.png"/>
+          <p:cNvPr id="1012745737" name="Picture 12" descr="HD-ShadowLong.png"/>
           <p:cNvPicPr>
             <a:picLocks noChangeAspect="1"/>
           </p:cNvPicPr>
@@ -7712,7 +7712,7 @@
       </p:pic>
       <p:pic>
         <p:nvPicPr>
-          <p:cNvPr id="1094233558" name="Picture 13" descr="HD-ShadowShort.png"/>
+          <p:cNvPr id="556837063" name="Picture 13" descr="HD-ShadowShort.png"/>
           <p:cNvPicPr>
             <a:picLocks noChangeAspect="1"/>
           </p:cNvPicPr>
@@ -7734,7 +7734,7 @@
       </p:pic>
       <p:sp>
         <p:nvSpPr>
-          <p:cNvPr id="1301817553" name="Rectangle 15"/>
+          <p:cNvPr id="64992336" name="Rectangle 15"/>
           <p:cNvSpPr/>
           <p:nvPr/>
         </p:nvSpPr>
@@ -7775,7 +7775,7 @@
       </p:sp>
       <p:sp>
         <p:nvSpPr>
-          <p:cNvPr id="922768528" name="Rectangle 16"/>
+          <p:cNvPr id="1395071012" name="Rectangle 16"/>
           <p:cNvSpPr/>
           <p:nvPr/>
         </p:nvSpPr>
@@ -7813,7 +7813,7 @@
       </p:sp>
       <p:sp>
         <p:nvSpPr>
-          <p:cNvPr id="1003240476" name="Title 1"/>
+          <p:cNvPr id="867232608" name="Title 1"/>
           <p:cNvSpPr>
             <a:spLocks noGrp="1"/>
           </p:cNvSpPr>
@@ -7844,7 +7844,7 @@
       </p:sp>
       <p:sp>
         <p:nvSpPr>
-          <p:cNvPr id="494429455" name="Text Placeholder 2"/>
+          <p:cNvPr id="1014623507" name="Text Placeholder 2"/>
           <p:cNvSpPr>
             <a:spLocks noGrp="1"/>
           </p:cNvSpPr>
@@ -7918,7 +7918,7 @@
       </p:sp>
       <p:sp>
         <p:nvSpPr>
-          <p:cNvPr id="1644864955" name="Text Placeholder 3"/>
+          <p:cNvPr id="1739404180" name="Text Placeholder 3"/>
           <p:cNvSpPr>
             <a:spLocks noGrp="1"/>
           </p:cNvSpPr>
@@ -7988,7 +7988,7 @@
       </p:sp>
       <p:sp>
         <p:nvSpPr>
-          <p:cNvPr id="210271091" name="Text Placeholder 4"/>
+          <p:cNvPr id="555966503" name="Text Placeholder 4"/>
           <p:cNvSpPr>
             <a:spLocks noGrp="1"/>
           </p:cNvSpPr>
@@ -8062,7 +8062,7 @@
       </p:sp>
       <p:sp>
         <p:nvSpPr>
-          <p:cNvPr id="410560384" name="Text Placeholder 3"/>
+          <p:cNvPr id="1963102833" name="Text Placeholder 3"/>
           <p:cNvSpPr>
             <a:spLocks noGrp="1"/>
           </p:cNvSpPr>
@@ -8132,7 +8132,7 @@
       </p:sp>
       <p:sp>
         <p:nvSpPr>
-          <p:cNvPr id="728272296" name="Text Placeholder 4"/>
+          <p:cNvPr id="2002909073" name="Text Placeholder 4"/>
           <p:cNvSpPr>
             <a:spLocks noGrp="1"/>
           </p:cNvSpPr>
@@ -8206,7 +8206,7 @@
       </p:sp>
       <p:sp>
         <p:nvSpPr>
-          <p:cNvPr id="936341538" name="Text Placeholder 3"/>
+          <p:cNvPr id="54621266" name="Text Placeholder 3"/>
           <p:cNvSpPr>
             <a:spLocks noGrp="1"/>
           </p:cNvSpPr>
@@ -8276,7 +8276,7 @@
       </p:sp>
       <p:sp>
         <p:nvSpPr>
-          <p:cNvPr id="1991485055" name="Date Placeholder 2"/>
+          <p:cNvPr id="700466178" name="Date Placeholder 2"/>
           <p:cNvSpPr>
             <a:spLocks noGrp="1"/>
           </p:cNvSpPr>
@@ -8302,7 +8302,7 @@
       </p:sp>
       <p:sp>
         <p:nvSpPr>
-          <p:cNvPr id="819068279" name="Footer Placeholder 3"/>
+          <p:cNvPr id="1563316361" name="Footer Placeholder 3"/>
           <p:cNvSpPr>
             <a:spLocks noGrp="1"/>
           </p:cNvSpPr>
@@ -8324,7 +8324,7 @@
       </p:sp>
       <p:sp>
         <p:nvSpPr>
-          <p:cNvPr id="1385469199" name="Slide Number Placeholder 4"/>
+          <p:cNvPr id="339593160" name="Slide Number Placeholder 4"/>
           <p:cNvSpPr>
             <a:spLocks noGrp="1"/>
           </p:cNvSpPr>
@@ -8375,7 +8375,7 @@
       </p:grpSpPr>
       <p:pic>
         <p:nvPicPr>
-          <p:cNvPr id="693996211" name="Picture 14" descr="HD-ShadowLong.png"/>
+          <p:cNvPr id="249626116" name="Picture 14" descr="HD-ShadowLong.png"/>
           <p:cNvPicPr>
             <a:picLocks noChangeAspect="1"/>
           </p:cNvPicPr>
@@ -8397,7 +8397,7 @@
       </p:pic>
       <p:pic>
         <p:nvPicPr>
-          <p:cNvPr id="997687383" name="Picture 15" descr="HD-ShadowShort.png"/>
+          <p:cNvPr id="1233124268" name="Picture 15" descr="HD-ShadowShort.png"/>
           <p:cNvPicPr>
             <a:picLocks noChangeAspect="1"/>
           </p:cNvPicPr>
@@ -8419,7 +8419,7 @@
       </p:pic>
       <p:sp>
         <p:nvSpPr>
-          <p:cNvPr id="1626372026" name="Rectangle 16"/>
+          <p:cNvPr id="1135396588" name="Rectangle 16"/>
           <p:cNvSpPr/>
           <p:nvPr/>
         </p:nvSpPr>
@@ -8460,7 +8460,7 @@
       </p:sp>
       <p:sp>
         <p:nvSpPr>
-          <p:cNvPr id="1769236282" name="Rectangle 17"/>
+          <p:cNvPr id="1213840310" name="Rectangle 17"/>
           <p:cNvSpPr/>
           <p:nvPr/>
         </p:nvSpPr>
@@ -8498,7 +8498,7 @@
       </p:sp>
       <p:sp>
         <p:nvSpPr>
-          <p:cNvPr id="1606673457" name="Title 1"/>
+          <p:cNvPr id="779735678" name="Title 1"/>
           <p:cNvSpPr>
             <a:spLocks noGrp="1"/>
           </p:cNvSpPr>
@@ -8529,7 +8529,7 @@
       </p:sp>
       <p:sp>
         <p:nvSpPr>
-          <p:cNvPr id="1849351955" name="Text Placeholder 2"/>
+          <p:cNvPr id="1491318342" name="Text Placeholder 2"/>
           <p:cNvSpPr>
             <a:spLocks noGrp="1"/>
           </p:cNvSpPr>
@@ -8603,7 +8603,7 @@
       </p:sp>
       <p:sp>
         <p:nvSpPr>
-          <p:cNvPr id="1104409243" name="Picture Placeholder 2"/>
+          <p:cNvPr id="289936537" name="Picture Placeholder 2"/>
           <p:cNvSpPr>
             <a:spLocks noChangeAspect="1" noGrp="1"/>
           </p:cNvSpPr>
@@ -8685,7 +8685,7 @@
       </p:sp>
       <p:sp>
         <p:nvSpPr>
-          <p:cNvPr id="272534458" name="Text Placeholder 3"/>
+          <p:cNvPr id="1068997560" name="Text Placeholder 3"/>
           <p:cNvSpPr>
             <a:spLocks noGrp="1"/>
           </p:cNvSpPr>
@@ -8755,7 +8755,7 @@
       </p:sp>
       <p:sp>
         <p:nvSpPr>
-          <p:cNvPr id="1243475628" name="Text Placeholder 4"/>
+          <p:cNvPr id="4587444" name="Text Placeholder 4"/>
           <p:cNvSpPr>
             <a:spLocks noGrp="1"/>
           </p:cNvSpPr>
@@ -8829,7 +8829,7 @@
       </p:sp>
       <p:sp>
         <p:nvSpPr>
-          <p:cNvPr id="712344562" name="Picture Placeholder 2"/>
+          <p:cNvPr id="1224020366" name="Picture Placeholder 2"/>
           <p:cNvSpPr>
             <a:spLocks noChangeAspect="1" noGrp="1"/>
           </p:cNvSpPr>
@@ -8911,7 +8911,7 @@
       </p:sp>
       <p:sp>
         <p:nvSpPr>
-          <p:cNvPr id="1513721926" name="Text Placeholder 3"/>
+          <p:cNvPr id="722994144" name="Text Placeholder 3"/>
           <p:cNvSpPr>
             <a:spLocks noGrp="1"/>
           </p:cNvSpPr>
@@ -8981,7 +8981,7 @@
       </p:sp>
       <p:sp>
         <p:nvSpPr>
-          <p:cNvPr id="1155659608" name="Text Placeholder 4"/>
+          <p:cNvPr id="406511120" name="Text Placeholder 4"/>
           <p:cNvSpPr>
             <a:spLocks noGrp="1"/>
           </p:cNvSpPr>
@@ -9055,7 +9055,7 @@
       </p:sp>
       <p:sp>
         <p:nvSpPr>
-          <p:cNvPr id="257422467" name="Picture Placeholder 2"/>
+          <p:cNvPr id="1892102309" name="Picture Placeholder 2"/>
           <p:cNvSpPr>
             <a:spLocks noChangeAspect="1" noGrp="1"/>
           </p:cNvSpPr>
@@ -9137,7 +9137,7 @@
       </p:sp>
       <p:sp>
         <p:nvSpPr>
-          <p:cNvPr id="1310464587" name="Text Placeholder 3"/>
+          <p:cNvPr id="1757669270" name="Text Placeholder 3"/>
           <p:cNvSpPr>
             <a:spLocks noGrp="1"/>
           </p:cNvSpPr>
@@ -9207,7 +9207,7 @@
       </p:sp>
       <p:sp>
         <p:nvSpPr>
-          <p:cNvPr id="73639870" name="Date Placeholder 2"/>
+          <p:cNvPr id="1757338300" name="Date Placeholder 2"/>
           <p:cNvSpPr>
             <a:spLocks noGrp="1"/>
           </p:cNvSpPr>
@@ -9233,7 +9233,7 @@
       </p:sp>
       <p:sp>
         <p:nvSpPr>
-          <p:cNvPr id="1545841524" name="Footer Placeholder 3"/>
+          <p:cNvPr id="1117077570" name="Footer Placeholder 3"/>
           <p:cNvSpPr>
             <a:spLocks noGrp="1"/>
           </p:cNvSpPr>
@@ -9255,7 +9255,7 @@
       </p:sp>
       <p:sp>
         <p:nvSpPr>
-          <p:cNvPr id="2142156168" name="Slide Number Placeholder 4"/>
+          <p:cNvPr id="604005283" name="Slide Number Placeholder 4"/>
           <p:cNvSpPr>
             <a:spLocks noGrp="1"/>
           </p:cNvSpPr>
@@ -9306,7 +9306,7 @@
       </p:grpSpPr>
       <p:pic>
         <p:nvPicPr>
-          <p:cNvPr id="635726077" name="Picture 6" descr="HD-ShadowLong.png"/>
+          <p:cNvPr id="1199191336" name="Picture 6" descr="HD-ShadowLong.png"/>
           <p:cNvPicPr>
             <a:picLocks noChangeAspect="1"/>
           </p:cNvPicPr>
@@ -9328,7 +9328,7 @@
       </p:pic>
       <p:pic>
         <p:nvPicPr>
-          <p:cNvPr id="1106140487" name="Picture 7" descr="HD-ShadowShort.png"/>
+          <p:cNvPr id="825691708" name="Picture 7" descr="HD-ShadowShort.png"/>
           <p:cNvPicPr>
             <a:picLocks noChangeAspect="1"/>
           </p:cNvPicPr>
@@ -9350,7 +9350,7 @@
       </p:pic>
       <p:sp>
         <p:nvSpPr>
-          <p:cNvPr id="958481301" name="Rectangle 8"/>
+          <p:cNvPr id="601113253" name="Rectangle 8"/>
           <p:cNvSpPr/>
           <p:nvPr/>
         </p:nvSpPr>
@@ -9391,7 +9391,7 @@
       </p:sp>
       <p:sp>
         <p:nvSpPr>
-          <p:cNvPr id="799359145" name="Rectangle 9"/>
+          <p:cNvPr id="1891179467" name="Rectangle 9"/>
           <p:cNvSpPr/>
           <p:nvPr/>
         </p:nvSpPr>
@@ -9429,7 +9429,7 @@
       </p:sp>
       <p:sp>
         <p:nvSpPr>
-          <p:cNvPr id="1960860606" name="Title 1"/>
+          <p:cNvPr id="1455656708" name="Title 1"/>
           <p:cNvSpPr>
             <a:spLocks noGrp="1"/>
           </p:cNvSpPr>
@@ -9459,7 +9459,7 @@
       </p:sp>
       <p:sp>
         <p:nvSpPr>
-          <p:cNvPr id="233910515" name="Vertical Text Placeholder 2"/>
+          <p:cNvPr id="1015329539" name="Vertical Text Placeholder 2"/>
           <p:cNvSpPr>
             <a:spLocks noGrp="1"/>
           </p:cNvSpPr>
@@ -9525,7 +9525,7 @@
       </p:sp>
       <p:sp>
         <p:nvSpPr>
-          <p:cNvPr id="1873375737" name="Date Placeholder 3"/>
+          <p:cNvPr id="1790581476" name="Date Placeholder 3"/>
           <p:cNvSpPr>
             <a:spLocks noGrp="1"/>
           </p:cNvSpPr>
@@ -9551,7 +9551,7 @@
       </p:sp>
       <p:sp>
         <p:nvSpPr>
-          <p:cNvPr id="253140161" name="Footer Placeholder 4"/>
+          <p:cNvPr id="272559971" name="Footer Placeholder 4"/>
           <p:cNvSpPr>
             <a:spLocks noGrp="1"/>
           </p:cNvSpPr>
@@ -9573,7 +9573,7 @@
       </p:sp>
       <p:sp>
         <p:nvSpPr>
-          <p:cNvPr id="471689633" name="Slide Number Placeholder 5"/>
+          <p:cNvPr id="1013903517" name="Slide Number Placeholder 5"/>
           <p:cNvSpPr>
             <a:spLocks noGrp="1"/>
           </p:cNvSpPr>
@@ -9624,7 +9624,7 @@
       </p:grpSpPr>
       <p:sp>
         <p:nvSpPr>
-          <p:cNvPr id="611772232" name="Rectangle 6"/>
+          <p:cNvPr id="2012456003" name="Rectangle 6"/>
           <p:cNvSpPr/>
           <p:nvPr/>
         </p:nvSpPr>
@@ -9665,7 +9665,7 @@
       </p:sp>
       <p:sp>
         <p:nvSpPr>
-          <p:cNvPr id="1698801795" name="Rectangle 7"/>
+          <p:cNvPr id="462219503" name="Rectangle 7"/>
           <p:cNvSpPr/>
           <p:nvPr/>
         </p:nvSpPr>
@@ -9703,7 +9703,7 @@
       </p:sp>
       <p:sp>
         <p:nvSpPr>
-          <p:cNvPr id="1507996443" name="Vertical Title 1"/>
+          <p:cNvPr id="1582890235" name="Vertical Title 1"/>
           <p:cNvSpPr>
             <a:spLocks noGrp="1"/>
           </p:cNvSpPr>
@@ -9734,7 +9734,7 @@
       </p:sp>
       <p:sp>
         <p:nvSpPr>
-          <p:cNvPr id="765034626" name="Vertical Text Placeholder 2"/>
+          <p:cNvPr id="513025347" name="Vertical Text Placeholder 2"/>
           <p:cNvSpPr>
             <a:spLocks noGrp="1"/>
           </p:cNvSpPr>
@@ -9805,7 +9805,7 @@
       </p:sp>
       <p:sp>
         <p:nvSpPr>
-          <p:cNvPr id="292813309" name="Date Placeholder 3"/>
+          <p:cNvPr id="283945582" name="Date Placeholder 3"/>
           <p:cNvSpPr>
             <a:spLocks noGrp="1"/>
           </p:cNvSpPr>
@@ -9836,7 +9836,7 @@
       </p:sp>
       <p:sp>
         <p:nvSpPr>
-          <p:cNvPr id="2044184931" name="Footer Placeholder 4"/>
+          <p:cNvPr id="389457287" name="Footer Placeholder 4"/>
           <p:cNvSpPr>
             <a:spLocks noGrp="1"/>
           </p:cNvSpPr>
@@ -9863,7 +9863,7 @@
       </p:sp>
       <p:sp>
         <p:nvSpPr>
-          <p:cNvPr id="415967423" name="Slide Number Placeholder 5"/>
+          <p:cNvPr id="1632147467" name="Slide Number Placeholder 5"/>
           <p:cNvSpPr>
             <a:spLocks noGrp="1"/>
           </p:cNvSpPr>
@@ -9923,7 +9923,7 @@
       </p:grpSpPr>
       <p:sp>
         <p:nvSpPr>
-          <p:cNvPr id="90352421" name="Заголовок 1"/>
+          <p:cNvPr id="1807230937" name="Заголовок 1"/>
           <p:cNvSpPr>
             <a:spLocks noGrp="1"/>
           </p:cNvSpPr>
@@ -9958,7 +9958,7 @@
       </p:sp>
       <p:sp>
         <p:nvSpPr>
-          <p:cNvPr id="197272312" name="Текст 2"/>
+          <p:cNvPr id="1460664230" name="Текст 2"/>
           <p:cNvSpPr>
             <a:spLocks noGrp="1"/>
           </p:cNvSpPr>
@@ -10080,7 +10080,7 @@
       </p:sp>
       <p:sp>
         <p:nvSpPr>
-          <p:cNvPr id="1164809881" name="Дата 3"/>
+          <p:cNvPr id="758628714" name="Дата 3"/>
           <p:cNvSpPr>
             <a:spLocks noGrp="1"/>
           </p:cNvSpPr>
@@ -10106,7 +10106,7 @@
       </p:sp>
       <p:sp>
         <p:nvSpPr>
-          <p:cNvPr id="1523346878" name="Нижний колонтитул 4"/>
+          <p:cNvPr id="2073942706" name="Нижний колонтитул 4"/>
           <p:cNvSpPr>
             <a:spLocks noGrp="1"/>
           </p:cNvSpPr>
@@ -10128,7 +10128,7 @@
       </p:sp>
       <p:sp>
         <p:nvSpPr>
-          <p:cNvPr id="313159955" name="Номер слайда 5"/>
+          <p:cNvPr id="447291429" name="Номер слайда 5"/>
           <p:cNvSpPr>
             <a:spLocks noGrp="1"/>
           </p:cNvSpPr>
@@ -10179,7 +10179,7 @@
       </p:grpSpPr>
       <p:sp>
         <p:nvSpPr>
-          <p:cNvPr id="153384421" name="Заголовок 1"/>
+          <p:cNvPr id="1522593520" name="Заголовок 1"/>
           <p:cNvSpPr>
             <a:spLocks noGrp="1"/>
           </p:cNvSpPr>
@@ -10205,7 +10205,7 @@
       </p:sp>
       <p:sp>
         <p:nvSpPr>
-          <p:cNvPr id="1932377722" name="Объект 2"/>
+          <p:cNvPr id="788426679" name="Объект 2"/>
           <p:cNvSpPr>
             <a:spLocks noGrp="1"/>
           </p:cNvSpPr>
@@ -10276,7 +10276,7 @@
       </p:sp>
       <p:sp>
         <p:nvSpPr>
-          <p:cNvPr id="155224274" name="Объект 3"/>
+          <p:cNvPr id="630851584" name="Объект 3"/>
           <p:cNvSpPr>
             <a:spLocks noGrp="1"/>
           </p:cNvSpPr>
@@ -10347,7 +10347,7 @@
       </p:sp>
       <p:sp>
         <p:nvSpPr>
-          <p:cNvPr id="133709103" name="Дата 4"/>
+          <p:cNvPr id="1588641861" name="Дата 4"/>
           <p:cNvSpPr>
             <a:spLocks noGrp="1"/>
           </p:cNvSpPr>
@@ -10373,7 +10373,7 @@
       </p:sp>
       <p:sp>
         <p:nvSpPr>
-          <p:cNvPr id="526452534" name="Нижний колонтитул 5"/>
+          <p:cNvPr id="2142398954" name="Нижний колонтитул 5"/>
           <p:cNvSpPr>
             <a:spLocks noGrp="1"/>
           </p:cNvSpPr>
@@ -10395,7 +10395,7 @@
       </p:sp>
       <p:sp>
         <p:nvSpPr>
-          <p:cNvPr id="843596659" name="Номер слайда 6"/>
+          <p:cNvPr id="511895506" name="Номер слайда 6"/>
           <p:cNvSpPr>
             <a:spLocks noGrp="1"/>
           </p:cNvSpPr>
@@ -10446,7 +10446,7 @@
       </p:grpSpPr>
       <p:sp>
         <p:nvSpPr>
-          <p:cNvPr id="1938430853" name="Заголовок 1"/>
+          <p:cNvPr id="910902298" name="Заголовок 1"/>
           <p:cNvSpPr>
             <a:spLocks noGrp="1"/>
           </p:cNvSpPr>
@@ -10477,7 +10477,7 @@
       </p:sp>
       <p:sp>
         <p:nvSpPr>
-          <p:cNvPr id="1138628305" name="Текст 2"/>
+          <p:cNvPr id="1299720604" name="Текст 2"/>
           <p:cNvSpPr>
             <a:spLocks noGrp="1"/>
           </p:cNvSpPr>
@@ -10545,7 +10545,7 @@
       </p:sp>
       <p:sp>
         <p:nvSpPr>
-          <p:cNvPr id="1910403037" name="Объект 3"/>
+          <p:cNvPr id="2133595330" name="Объект 3"/>
           <p:cNvSpPr>
             <a:spLocks noGrp="1"/>
           </p:cNvSpPr>
@@ -10616,7 +10616,7 @@
       </p:sp>
       <p:sp>
         <p:nvSpPr>
-          <p:cNvPr id="668301499" name="Текст 4"/>
+          <p:cNvPr id="1899566868" name="Текст 4"/>
           <p:cNvSpPr>
             <a:spLocks noGrp="1"/>
           </p:cNvSpPr>
@@ -10684,7 +10684,7 @@
       </p:sp>
       <p:sp>
         <p:nvSpPr>
-          <p:cNvPr id="364067113" name="Объект 5"/>
+          <p:cNvPr id="305117972" name="Объект 5"/>
           <p:cNvSpPr>
             <a:spLocks noGrp="1"/>
           </p:cNvSpPr>
@@ -10755,7 +10755,7 @@
       </p:sp>
       <p:sp>
         <p:nvSpPr>
-          <p:cNvPr id="237900348" name="Дата 6"/>
+          <p:cNvPr id="1714388893" name="Дата 6"/>
           <p:cNvSpPr>
             <a:spLocks noGrp="1"/>
           </p:cNvSpPr>
@@ -10781,7 +10781,7 @@
       </p:sp>
       <p:sp>
         <p:nvSpPr>
-          <p:cNvPr id="815626076" name="Нижний колонтитул 7"/>
+          <p:cNvPr id="860970306" name="Нижний колонтитул 7"/>
           <p:cNvSpPr>
             <a:spLocks noGrp="1"/>
           </p:cNvSpPr>
@@ -10803,7 +10803,7 @@
       </p:sp>
       <p:sp>
         <p:nvSpPr>
-          <p:cNvPr id="613588913" name="Номер слайда 8"/>
+          <p:cNvPr id="605035003" name="Номер слайда 8"/>
           <p:cNvSpPr>
             <a:spLocks noGrp="1"/>
           </p:cNvSpPr>
@@ -10854,7 +10854,7 @@
       </p:grpSpPr>
       <p:sp>
         <p:nvSpPr>
-          <p:cNvPr id="1370988970" name="Заголовок 1"/>
+          <p:cNvPr id="1039837368" name="Заголовок 1"/>
           <p:cNvSpPr>
             <a:spLocks noGrp="1"/>
           </p:cNvSpPr>
@@ -10880,7 +10880,7 @@
       </p:sp>
       <p:sp>
         <p:nvSpPr>
-          <p:cNvPr id="639522050" name="Дата 2"/>
+          <p:cNvPr id="728152656" name="Дата 2"/>
           <p:cNvSpPr>
             <a:spLocks noGrp="1"/>
           </p:cNvSpPr>
@@ -10906,7 +10906,7 @@
       </p:sp>
       <p:sp>
         <p:nvSpPr>
-          <p:cNvPr id="406946662" name="Нижний колонтитул 3"/>
+          <p:cNvPr id="1544063319" name="Нижний колонтитул 3"/>
           <p:cNvSpPr>
             <a:spLocks noGrp="1"/>
           </p:cNvSpPr>
@@ -10928,7 +10928,7 @@
       </p:sp>
       <p:sp>
         <p:nvSpPr>
-          <p:cNvPr id="1827563355" name="Номер слайда 4"/>
+          <p:cNvPr id="128635796" name="Номер слайда 4"/>
           <p:cNvSpPr>
             <a:spLocks noGrp="1"/>
           </p:cNvSpPr>
@@ -10979,7 +10979,7 @@
       </p:grpSpPr>
       <p:sp>
         <p:nvSpPr>
-          <p:cNvPr id="35589581" name="Дата 1"/>
+          <p:cNvPr id="1951262470" name="Дата 1"/>
           <p:cNvSpPr>
             <a:spLocks noGrp="1"/>
           </p:cNvSpPr>
@@ -11005,7 +11005,7 @@
       </p:sp>
       <p:sp>
         <p:nvSpPr>
-          <p:cNvPr id="2110352055" name="Нижний колонтитул 2"/>
+          <p:cNvPr id="568008551" name="Нижний колонтитул 2"/>
           <p:cNvSpPr>
             <a:spLocks noGrp="1"/>
           </p:cNvSpPr>
@@ -11027,7 +11027,7 @@
       </p:sp>
       <p:sp>
         <p:nvSpPr>
-          <p:cNvPr id="2029374689" name="Номер слайда 3"/>
+          <p:cNvPr id="1139819034" name="Номер слайда 3"/>
           <p:cNvSpPr>
             <a:spLocks noGrp="1"/>
           </p:cNvSpPr>
@@ -11078,7 +11078,7 @@
       </p:grpSpPr>
       <p:sp>
         <p:nvSpPr>
-          <p:cNvPr id="1053905603" name="Заголовок 1"/>
+          <p:cNvPr id="305027121" name="Заголовок 1"/>
           <p:cNvSpPr>
             <a:spLocks noGrp="1"/>
           </p:cNvSpPr>
@@ -11113,7 +11113,7 @@
       </p:sp>
       <p:sp>
         <p:nvSpPr>
-          <p:cNvPr id="454665124" name="Объект 2"/>
+          <p:cNvPr id="22950140" name="Объект 2"/>
           <p:cNvSpPr>
             <a:spLocks noGrp="1"/>
           </p:cNvSpPr>
@@ -11212,7 +11212,7 @@
       </p:sp>
       <p:sp>
         <p:nvSpPr>
-          <p:cNvPr id="1659291953" name="Текст 3"/>
+          <p:cNvPr id="849905224" name="Текст 3"/>
           <p:cNvSpPr>
             <a:spLocks noGrp="1"/>
           </p:cNvSpPr>
@@ -11280,7 +11280,7 @@
       </p:sp>
       <p:sp>
         <p:nvSpPr>
-          <p:cNvPr id="553538432" name="Дата 4"/>
+          <p:cNvPr id="1375702608" name="Дата 4"/>
           <p:cNvSpPr>
             <a:spLocks noGrp="1"/>
           </p:cNvSpPr>
@@ -11306,7 +11306,7 @@
       </p:sp>
       <p:sp>
         <p:nvSpPr>
-          <p:cNvPr id="1058047554" name="Нижний колонтитул 5"/>
+          <p:cNvPr id="504648355" name="Нижний колонтитул 5"/>
           <p:cNvSpPr>
             <a:spLocks noGrp="1"/>
           </p:cNvSpPr>
@@ -11328,7 +11328,7 @@
       </p:sp>
       <p:sp>
         <p:nvSpPr>
-          <p:cNvPr id="897083730" name="Номер слайда 6"/>
+          <p:cNvPr id="47897952" name="Номер слайда 6"/>
           <p:cNvSpPr>
             <a:spLocks noGrp="1"/>
           </p:cNvSpPr>
@@ -11379,7 +11379,7 @@
       </p:grpSpPr>
       <p:sp>
         <p:nvSpPr>
-          <p:cNvPr id="2068804395" name="Заголовок 1"/>
+          <p:cNvPr id="1828902388" name="Заголовок 1"/>
           <p:cNvSpPr>
             <a:spLocks noGrp="1"/>
           </p:cNvSpPr>
@@ -11414,7 +11414,7 @@
       </p:sp>
       <p:sp>
         <p:nvSpPr>
-          <p:cNvPr id="356437849" name="Рисунок 2"/>
+          <p:cNvPr id="83345023" name="Рисунок 2"/>
           <p:cNvSpPr>
             <a:spLocks noGrp="1"/>
           </p:cNvSpPr>
@@ -11478,7 +11478,7 @@
       </p:sp>
       <p:sp>
         <p:nvSpPr>
-          <p:cNvPr id="1513351880" name="Текст 3"/>
+          <p:cNvPr id="1495637404" name="Текст 3"/>
           <p:cNvSpPr>
             <a:spLocks noGrp="1"/>
           </p:cNvSpPr>
@@ -11546,7 +11546,7 @@
       </p:sp>
       <p:sp>
         <p:nvSpPr>
-          <p:cNvPr id="476075612" name="Дата 4"/>
+          <p:cNvPr id="1181650567" name="Дата 4"/>
           <p:cNvSpPr>
             <a:spLocks noGrp="1"/>
           </p:cNvSpPr>
@@ -11572,7 +11572,7 @@
       </p:sp>
       <p:sp>
         <p:nvSpPr>
-          <p:cNvPr id="804877427" name="Нижний колонтитул 5"/>
+          <p:cNvPr id="1675183024" name="Нижний колонтитул 5"/>
           <p:cNvSpPr>
             <a:spLocks noGrp="1"/>
           </p:cNvSpPr>
@@ -11594,7 +11594,7 @@
       </p:sp>
       <p:sp>
         <p:nvSpPr>
-          <p:cNvPr id="120120460" name="Номер слайда 6"/>
+          <p:cNvPr id="1151890348" name="Номер слайда 6"/>
           <p:cNvSpPr>
             <a:spLocks noGrp="1"/>
           </p:cNvSpPr>
@@ -11650,7 +11650,7 @@
       </p:grpSpPr>
       <p:sp>
         <p:nvSpPr>
-          <p:cNvPr id="1308531905" name="Заголовок 1"/>
+          <p:cNvPr id="1586961880" name="Заголовок 1"/>
           <p:cNvSpPr>
             <a:spLocks noGrp="1"/>
           </p:cNvSpPr>
@@ -11686,7 +11686,7 @@
       </p:sp>
       <p:sp>
         <p:nvSpPr>
-          <p:cNvPr id="106378323" name="Текст 2"/>
+          <p:cNvPr id="911351292" name="Текст 2"/>
           <p:cNvSpPr>
             <a:spLocks noGrp="1"/>
           </p:cNvSpPr>
@@ -11762,7 +11762,7 @@
       </p:sp>
       <p:sp>
         <p:nvSpPr>
-          <p:cNvPr id="350507497" name="Дата 3"/>
+          <p:cNvPr id="1568956287" name="Дата 3"/>
           <p:cNvSpPr>
             <a:spLocks noGrp="1"/>
           </p:cNvSpPr>
@@ -11806,7 +11806,7 @@
       </p:sp>
       <p:sp>
         <p:nvSpPr>
-          <p:cNvPr id="1502558059" name="Нижний колонтитул 4"/>
+          <p:cNvPr id="899097166" name="Нижний колонтитул 4"/>
           <p:cNvSpPr>
             <a:spLocks noGrp="1"/>
           </p:cNvSpPr>
@@ -11846,7 +11846,7 @@
       </p:sp>
       <p:sp>
         <p:nvSpPr>
-          <p:cNvPr id="1505657200" name="Номер слайда 5"/>
+          <p:cNvPr id="2045880962" name="Номер слайда 5"/>
           <p:cNvSpPr>
             <a:spLocks noGrp="1"/>
           </p:cNvSpPr>
@@ -12257,7 +12257,7 @@
       </p:grpSpPr>
       <p:sp>
         <p:nvSpPr>
-          <p:cNvPr id="339552046" name="Прямоугольник 3"/>
+          <p:cNvPr id="536486598" name="Прямоугольник 3"/>
           <p:cNvSpPr/>
           <p:nvPr/>
         </p:nvSpPr>
@@ -12307,7 +12307,7 @@
       </p:sp>
       <p:sp>
         <p:nvSpPr>
-          <p:cNvPr id="1701220026" name="Прямоугольник 4"/>
+          <p:cNvPr id="450836964" name="Прямоугольник 4"/>
           <p:cNvSpPr/>
           <p:nvPr/>
         </p:nvSpPr>
@@ -12357,7 +12357,7 @@
       </p:sp>
       <p:sp>
         <p:nvSpPr>
-          <p:cNvPr id="1181381679" name="Заголовок 1"/>
+          <p:cNvPr id="1552972019" name="Заголовок 1"/>
           <p:cNvSpPr>
             <a:spLocks noGrp="1"/>
           </p:cNvSpPr>
@@ -12394,7 +12394,7 @@
                   <a:schemeClr val="bg1"/>
                 </a:solidFill>
               </a:rPr>
-              <a:t>ядра упрощенного графического ускорителя. Разработка </a:t>
+              <a:t>ядра упрощенного графического ускорителя: </a:t>
             </a:r>
             <a:r>
               <a:rPr lang="en-US" sz="3200" b="1">
@@ -12410,7 +12410,15 @@
                   <a:schemeClr val="bg1"/>
                 </a:solidFill>
               </a:rPr>
-              <a:t>модели</a:t>
+              <a:t>модел</a:t>
+            </a:r>
+            <a:r>
+              <a:rPr lang="ru-RU" sz="3200" b="1">
+                <a:solidFill>
+                  <a:schemeClr val="bg1"/>
+                </a:solidFill>
+              </a:rPr>
+              <a:t>ь</a:t>
             </a:r>
             <a:endParaRPr b="1">
               <a:solidFill>
@@ -12422,7 +12430,7 @@
       </p:sp>
       <p:sp>
         <p:nvSpPr>
-          <p:cNvPr id="330377713" name="Подзаголовок 2"/>
+          <p:cNvPr id="2037473090" name="Подзаголовок 2"/>
           <p:cNvSpPr>
             <a:spLocks noGrp="1"/>
           </p:cNvSpPr>
@@ -12501,7 +12509,7 @@
       </p:sp>
       <p:sp>
         <p:nvSpPr>
-          <p:cNvPr id="12378809" name="Заголовок 1"/>
+          <p:cNvPr id="1660120845" name="Заголовок 1"/>
           <p:cNvSpPr>
             <a:spLocks noGrp="1"/>
           </p:cNvSpPr>
@@ -12563,7 +12571,7 @@
       </p:sp>
       <p:sp>
         <p:nvSpPr>
-          <p:cNvPr id="1238035579" name="Заголовок 1"/>
+          <p:cNvPr id="636386105" name="Заголовок 1"/>
           <p:cNvSpPr>
             <a:spLocks noGrp="1"/>
           </p:cNvSpPr>
@@ -12625,7 +12633,7 @@
       </p:sp>
       <p:sp>
         <p:nvSpPr>
-          <p:cNvPr id="307863095" name="Заголовок 1"/>
+          <p:cNvPr id="877877864" name="Заголовок 1"/>
           <p:cNvSpPr>
             <a:spLocks noGrp="1"/>
           </p:cNvSpPr>
@@ -12712,7 +12720,7 @@
       </p:sp>
       <p:sp>
         <p:nvSpPr>
-          <p:cNvPr id="1396297499" name="Заголовок 1"/>
+          <p:cNvPr id="1274511686" name="Заголовок 1"/>
           <p:cNvSpPr>
             <a:spLocks noGrp="1"/>
           </p:cNvSpPr>
@@ -12840,7 +12848,7 @@
       </p:grpSpPr>
       <p:sp>
         <p:nvSpPr>
-          <p:cNvPr id="1250480467" name="Объект 2"/>
+          <p:cNvPr id="902120669" name="Объект 2"/>
           <p:cNvSpPr>
             <a:spLocks noGrp="1"/>
           </p:cNvSpPr>
@@ -12961,7 +12969,7 @@
       </p:sp>
       <p:sp>
         <p:nvSpPr>
-          <p:cNvPr id="813278743" name="Номер слайда 3"/>
+          <p:cNvPr id="2032625062" name="Номер слайда 3"/>
           <p:cNvSpPr>
             <a:spLocks noGrp="1"/>
           </p:cNvSpPr>
@@ -13002,7 +13010,7 @@
       </p:sp>
       <p:sp>
         <p:nvSpPr>
-          <p:cNvPr id="11166619" name="Прямоугольник 6"/>
+          <p:cNvPr id="2147309450" name="Прямоугольник 6"/>
           <p:cNvSpPr/>
           <p:nvPr/>
         </p:nvSpPr>
@@ -13052,7 +13060,7 @@
       </p:sp>
       <p:sp>
         <p:nvSpPr>
-          <p:cNvPr id="464849650" name="Прямоугольник 7"/>
+          <p:cNvPr id="26091720" name="Прямоугольник 7"/>
           <p:cNvSpPr/>
           <p:nvPr/>
         </p:nvSpPr>
@@ -13102,7 +13110,7 @@
       </p:sp>
       <p:sp>
         <p:nvSpPr>
-          <p:cNvPr id="1875130202" name="Заголовок 1"/>
+          <p:cNvPr id="1948347044" name="Заголовок 1"/>
           <p:cNvSpPr>
             <a:spLocks noGrp="1"/>
           </p:cNvSpPr>
@@ -13154,7 +13162,7 @@
       </p:sp>
       <p:pic>
         <p:nvPicPr>
-          <p:cNvPr id="1831157032" name=""/>
+          <p:cNvPr id="672231900" name=""/>
           <p:cNvPicPr>
             <a:picLocks noChangeAspect="1"/>
           </p:cNvPicPr>
@@ -13248,7 +13256,7 @@
       </p:grpSpPr>
       <p:sp>
         <p:nvSpPr>
-          <p:cNvPr id="1160999098" name="Объект 2"/>
+          <p:cNvPr id="1050648561" name="Объект 2"/>
           <p:cNvSpPr>
             <a:spLocks noGrp="1"/>
           </p:cNvSpPr>
@@ -13347,7 +13355,7 @@
       </p:sp>
       <p:sp>
         <p:nvSpPr>
-          <p:cNvPr id="2143837197" name="Номер слайда 3"/>
+          <p:cNvPr id="1835783607" name="Номер слайда 3"/>
           <p:cNvSpPr>
             <a:spLocks noGrp="1"/>
           </p:cNvSpPr>
@@ -13388,7 +13396,7 @@
       </p:sp>
       <p:sp>
         <p:nvSpPr>
-          <p:cNvPr id="647825523" name="Прямоугольник 5"/>
+          <p:cNvPr id="2057672954" name="Прямоугольник 5"/>
           <p:cNvSpPr/>
           <p:nvPr/>
         </p:nvSpPr>
@@ -13438,7 +13446,7 @@
       </p:sp>
       <p:sp>
         <p:nvSpPr>
-          <p:cNvPr id="1907294269" name="Прямоугольник 6"/>
+          <p:cNvPr id="1535929783" name="Прямоугольник 6"/>
           <p:cNvSpPr/>
           <p:nvPr/>
         </p:nvSpPr>
@@ -13488,7 +13496,7 @@
       </p:sp>
       <p:sp>
         <p:nvSpPr>
-          <p:cNvPr id="976845758" name="Заголовок 1"/>
+          <p:cNvPr id="379635589" name="Заголовок 1"/>
           <p:cNvSpPr>
             <a:spLocks noGrp="1"/>
           </p:cNvSpPr>
@@ -13525,7 +13533,7 @@
       </p:sp>
       <p:pic>
         <p:nvPicPr>
-          <p:cNvPr id="50381630" name=""/>
+          <p:cNvPr id="1840929737" name=""/>
           <p:cNvPicPr>
             <a:picLocks noChangeAspect="1"/>
           </p:cNvPicPr>
@@ -13619,7 +13627,7 @@
       </p:grpSpPr>
       <p:sp>
         <p:nvSpPr>
-          <p:cNvPr id="77825369" name="Объект 2"/>
+          <p:cNvPr id="1575503186" name="Объект 2"/>
           <p:cNvSpPr>
             <a:spLocks noGrp="1"/>
           </p:cNvSpPr>
@@ -13717,7 +13725,7 @@
       </p:sp>
       <p:sp>
         <p:nvSpPr>
-          <p:cNvPr id="890523569" name="Номер слайда 3"/>
+          <p:cNvPr id="362099798" name="Номер слайда 3"/>
           <p:cNvSpPr>
             <a:spLocks noGrp="1"/>
           </p:cNvSpPr>
@@ -13758,7 +13766,7 @@
       </p:sp>
       <p:sp>
         <p:nvSpPr>
-          <p:cNvPr id="345669249" name="Прямоугольник 5"/>
+          <p:cNvPr id="814142450" name="Прямоугольник 5"/>
           <p:cNvSpPr/>
           <p:nvPr/>
         </p:nvSpPr>
@@ -13808,7 +13816,7 @@
       </p:sp>
       <p:sp>
         <p:nvSpPr>
-          <p:cNvPr id="1771153361" name="Прямоугольник 6"/>
+          <p:cNvPr id="1118277487" name="Прямоугольник 6"/>
           <p:cNvSpPr/>
           <p:nvPr/>
         </p:nvSpPr>
@@ -13858,7 +13866,7 @@
       </p:sp>
       <p:sp>
         <p:nvSpPr>
-          <p:cNvPr id="1219828253" name="Заголовок 1"/>
+          <p:cNvPr id="715905666" name="Заголовок 1"/>
           <p:cNvSpPr>
             <a:spLocks noGrp="1"/>
           </p:cNvSpPr>
@@ -13923,7 +13931,7 @@
       </p:sp>
       <p:pic>
         <p:nvPicPr>
-          <p:cNvPr id="689196611" name=""/>
+          <p:cNvPr id="1014880010" name=""/>
           <p:cNvPicPr>
             <a:picLocks noChangeAspect="1"/>
           </p:cNvPicPr>
@@ -14017,7 +14025,7 @@
       </p:grpSpPr>
       <p:sp>
         <p:nvSpPr>
-          <p:cNvPr id="451346274" name="Объект 2"/>
+          <p:cNvPr id="39017167" name="Объект 2"/>
           <p:cNvSpPr>
             <a:spLocks noGrp="1"/>
           </p:cNvSpPr>
@@ -14092,7 +14100,7 @@
       </p:sp>
       <p:sp>
         <p:nvSpPr>
-          <p:cNvPr id="1434346772" name="Номер слайда 3"/>
+          <p:cNvPr id="1943454834" name="Номер слайда 3"/>
           <p:cNvSpPr>
             <a:spLocks noGrp="1"/>
           </p:cNvSpPr>
@@ -14133,7 +14141,7 @@
       </p:sp>
       <p:sp>
         <p:nvSpPr>
-          <p:cNvPr id="424289974" name="Прямоугольник 5"/>
+          <p:cNvPr id="1960363529" name="Прямоугольник 5"/>
           <p:cNvSpPr/>
           <p:nvPr/>
         </p:nvSpPr>
@@ -14183,7 +14191,7 @@
       </p:sp>
       <p:sp>
         <p:nvSpPr>
-          <p:cNvPr id="1465794781" name="Прямоугольник 6"/>
+          <p:cNvPr id="2089817248" name="Прямоугольник 6"/>
           <p:cNvSpPr/>
           <p:nvPr/>
         </p:nvSpPr>
@@ -14233,7 +14241,7 @@
       </p:sp>
       <p:sp>
         <p:nvSpPr>
-          <p:cNvPr id="1846930637" name="Заголовок 1"/>
+          <p:cNvPr id="1701635477" name="Заголовок 1"/>
           <p:cNvSpPr>
             <a:spLocks noGrp="1"/>
           </p:cNvSpPr>
@@ -14274,7 +14282,7 @@
       </p:sp>
       <p:pic>
         <p:nvPicPr>
-          <p:cNvPr id="1617031162" name=""/>
+          <p:cNvPr id="1786174538" name=""/>
           <p:cNvPicPr>
             <a:picLocks noChangeAspect="1"/>
           </p:cNvPicPr>
@@ -14368,7 +14376,7 @@
       </p:grpSpPr>
       <p:sp>
         <p:nvSpPr>
-          <p:cNvPr id="396936832" name="Объект 2"/>
+          <p:cNvPr id="837354651" name="Объект 2"/>
           <p:cNvSpPr>
             <a:spLocks noGrp="1"/>
           </p:cNvSpPr>
@@ -14465,7 +14473,7 @@
       </p:sp>
       <p:sp>
         <p:nvSpPr>
-          <p:cNvPr id="1318244973" name="Номер слайда 3"/>
+          <p:cNvPr id="564720886" name="Номер слайда 3"/>
           <p:cNvSpPr>
             <a:spLocks noGrp="1"/>
           </p:cNvSpPr>
@@ -14506,7 +14514,7 @@
       </p:sp>
       <p:sp>
         <p:nvSpPr>
-          <p:cNvPr id="1111771651" name="Прямоугольник 4"/>
+          <p:cNvPr id="581631391" name="Прямоугольник 4"/>
           <p:cNvSpPr/>
           <p:nvPr/>
         </p:nvSpPr>
@@ -14556,7 +14564,7 @@
       </p:sp>
       <p:sp>
         <p:nvSpPr>
-          <p:cNvPr id="341103037" name="Прямоугольник 5"/>
+          <p:cNvPr id="823140641" name="Прямоугольник 5"/>
           <p:cNvSpPr/>
           <p:nvPr/>
         </p:nvSpPr>
@@ -14606,7 +14614,7 @@
       </p:sp>
       <p:sp>
         <p:nvSpPr>
-          <p:cNvPr id="296589953" name="Заголовок 1"/>
+          <p:cNvPr id="90351176" name="Заголовок 1"/>
           <p:cNvSpPr>
             <a:spLocks noGrp="1"/>
           </p:cNvSpPr>
@@ -14645,7 +14653,7 @@
       </p:sp>
       <p:pic>
         <p:nvPicPr>
-          <p:cNvPr id="574366871" name=""/>
+          <p:cNvPr id="1113674391" name=""/>
           <p:cNvPicPr>
             <a:picLocks noChangeAspect="1"/>
           </p:cNvPicPr>
@@ -14733,7 +14741,7 @@
       </p:grpSpPr>
       <p:sp>
         <p:nvSpPr>
-          <p:cNvPr id="1326251966" name="Объект 2"/>
+          <p:cNvPr id="983034835" name="Объект 2"/>
           <p:cNvSpPr>
             <a:spLocks noGrp="1"/>
           </p:cNvSpPr>
@@ -14882,7 +14890,7 @@
       </p:sp>
       <p:sp>
         <p:nvSpPr>
-          <p:cNvPr id="112582413" name="Номер слайда 3"/>
+          <p:cNvPr id="181066449" name="Номер слайда 3"/>
           <p:cNvSpPr>
             <a:spLocks noGrp="1"/>
           </p:cNvSpPr>
@@ -14923,7 +14931,7 @@
       </p:sp>
       <p:sp>
         <p:nvSpPr>
-          <p:cNvPr id="2382963" name="Прямоугольник 4"/>
+          <p:cNvPr id="1444704025" name="Прямоугольник 4"/>
           <p:cNvSpPr/>
           <p:nvPr/>
         </p:nvSpPr>
@@ -14973,7 +14981,7 @@
       </p:sp>
       <p:sp>
         <p:nvSpPr>
-          <p:cNvPr id="1500170895" name="Прямоугольник 5"/>
+          <p:cNvPr id="570909226" name="Прямоугольник 5"/>
           <p:cNvSpPr/>
           <p:nvPr/>
         </p:nvSpPr>
@@ -15023,7 +15031,7 @@
       </p:sp>
       <p:sp>
         <p:nvSpPr>
-          <p:cNvPr id="2017034737" name="Заголовок 1"/>
+          <p:cNvPr id="2126831691" name="Заголовок 1"/>
           <p:cNvSpPr>
             <a:spLocks noGrp="1"/>
           </p:cNvSpPr>
@@ -15128,7 +15136,7 @@
       </p:grpSpPr>
       <p:sp>
         <p:nvSpPr>
-          <p:cNvPr id="238512612" name="Объект 2"/>
+          <p:cNvPr id="1609356744" name="Объект 2"/>
           <p:cNvSpPr>
             <a:spLocks noGrp="1"/>
           </p:cNvSpPr>
@@ -15169,7 +15177,7 @@
       </p:sp>
       <p:sp>
         <p:nvSpPr>
-          <p:cNvPr id="1270996363" name="Номер слайда 3"/>
+          <p:cNvPr id="616057970" name="Номер слайда 3"/>
           <p:cNvSpPr>
             <a:spLocks noGrp="1"/>
           </p:cNvSpPr>
@@ -15210,7 +15218,7 @@
       </p:sp>
       <p:sp>
         <p:nvSpPr>
-          <p:cNvPr id="1011535576" name="Прямоугольник 4"/>
+          <p:cNvPr id="1850575339" name="Прямоугольник 4"/>
           <p:cNvSpPr/>
           <p:nvPr/>
         </p:nvSpPr>
@@ -15260,7 +15268,7 @@
       </p:sp>
       <p:sp>
         <p:nvSpPr>
-          <p:cNvPr id="626725030" name="Прямоугольник 5"/>
+          <p:cNvPr id="647076292" name="Прямоугольник 5"/>
           <p:cNvSpPr/>
           <p:nvPr/>
         </p:nvSpPr>
@@ -15310,7 +15318,7 @@
       </p:sp>
       <p:sp>
         <p:nvSpPr>
-          <p:cNvPr id="986145827" name="Заголовок 1"/>
+          <p:cNvPr id="170225618" name="Заголовок 1"/>
           <p:cNvSpPr>
             <a:spLocks noGrp="1"/>
           </p:cNvSpPr>
@@ -15415,7 +15423,7 @@
       </p:grpSpPr>
       <p:sp>
         <p:nvSpPr>
-          <p:cNvPr id="885834110" name="Объект 2"/>
+          <p:cNvPr id="1513918151" name="Объект 2"/>
           <p:cNvSpPr>
             <a:spLocks noGrp="1"/>
           </p:cNvSpPr>
@@ -15441,7 +15449,7 @@
       </p:sp>
       <p:sp>
         <p:nvSpPr>
-          <p:cNvPr id="595679095" name="Номер слайда 3"/>
+          <p:cNvPr id="368254803" name="Номер слайда 3"/>
           <p:cNvSpPr>
             <a:spLocks noGrp="1"/>
           </p:cNvSpPr>
@@ -15482,7 +15490,7 @@
       </p:sp>
       <p:sp>
         <p:nvSpPr>
-          <p:cNvPr id="788740094" name="Прямоугольник 4"/>
+          <p:cNvPr id="1683107362" name="Прямоугольник 4"/>
           <p:cNvSpPr/>
           <p:nvPr/>
         </p:nvSpPr>
@@ -15532,7 +15540,7 @@
       </p:sp>
       <p:sp>
         <p:nvSpPr>
-          <p:cNvPr id="1468456797" name="Прямоугольник 5"/>
+          <p:cNvPr id="537606377" name="Прямоугольник 5"/>
           <p:cNvSpPr/>
           <p:nvPr/>
         </p:nvSpPr>
@@ -15582,7 +15590,7 @@
       </p:sp>
       <p:sp>
         <p:nvSpPr>
-          <p:cNvPr id="1478181003" name="Заголовок 1"/>
+          <p:cNvPr id="1399791167" name="Заголовок 1"/>
           <p:cNvSpPr>
             <a:spLocks noGrp="1"/>
           </p:cNvSpPr>
@@ -15687,7 +15695,7 @@
       </p:grpSpPr>
       <p:sp>
         <p:nvSpPr>
-          <p:cNvPr id="416704479" name="Прямоугольник 3"/>
+          <p:cNvPr id="1539169919" name="Прямоугольник 3"/>
           <p:cNvSpPr/>
           <p:nvPr/>
         </p:nvSpPr>
@@ -15737,7 +15745,7 @@
       </p:sp>
       <p:sp>
         <p:nvSpPr>
-          <p:cNvPr id="1591989968" name="Прямоугольник 4"/>
+          <p:cNvPr id="1614470452" name="Прямоугольник 4"/>
           <p:cNvSpPr/>
           <p:nvPr/>
         </p:nvSpPr>
@@ -15787,7 +15795,7 @@
       </p:sp>
       <p:sp>
         <p:nvSpPr>
-          <p:cNvPr id="165050687" name="Заголовок 1"/>
+          <p:cNvPr id="302617831" name="Заголовок 1"/>
           <p:cNvSpPr>
             <a:spLocks noGrp="1"/>
           </p:cNvSpPr>
@@ -15852,7 +15860,7 @@
       </p:sp>
       <p:sp>
         <p:nvSpPr>
-          <p:cNvPr id="658869768" name="Подзаголовок 2"/>
+          <p:cNvPr id="1202635747" name="Подзаголовок 2"/>
           <p:cNvSpPr>
             <a:spLocks noGrp="1"/>
           </p:cNvSpPr>
@@ -15931,7 +15939,7 @@
       </p:sp>
       <p:sp>
         <p:nvSpPr>
-          <p:cNvPr id="109138294" name="Заголовок 1"/>
+          <p:cNvPr id="663392197" name="Заголовок 1"/>
           <p:cNvSpPr>
             <a:spLocks noGrp="1"/>
           </p:cNvSpPr>
@@ -15993,7 +16001,7 @@
       </p:sp>
       <p:sp>
         <p:nvSpPr>
-          <p:cNvPr id="355553338" name="Заголовок 1"/>
+          <p:cNvPr id="1845622317" name="Заголовок 1"/>
           <p:cNvSpPr>
             <a:spLocks noGrp="1"/>
           </p:cNvSpPr>
@@ -16055,7 +16063,7 @@
       </p:sp>
       <p:sp>
         <p:nvSpPr>
-          <p:cNvPr id="261394047" name="Заголовок 1"/>
+          <p:cNvPr id="1865693039" name="Заголовок 1"/>
           <p:cNvSpPr>
             <a:spLocks noGrp="1"/>
           </p:cNvSpPr>
@@ -16142,7 +16150,7 @@
       </p:sp>
       <p:sp>
         <p:nvSpPr>
-          <p:cNvPr id="498371073" name="Заголовок 1"/>
+          <p:cNvPr id="224178088" name="Заголовок 1"/>
           <p:cNvSpPr>
             <a:spLocks noGrp="1"/>
           </p:cNvSpPr>
@@ -16270,7 +16278,7 @@
       </p:grpSpPr>
       <p:sp>
         <p:nvSpPr>
-          <p:cNvPr id="1013927557" name="Прямоугольник 4"/>
+          <p:cNvPr id="1964938761" name="Прямоугольник 4"/>
           <p:cNvSpPr/>
           <p:nvPr/>
         </p:nvSpPr>
@@ -16320,7 +16328,7 @@
       </p:sp>
       <p:sp>
         <p:nvSpPr>
-          <p:cNvPr id="1340720440" name="Заголовок 1"/>
+          <p:cNvPr id="955695666" name="Заголовок 1"/>
           <p:cNvSpPr>
             <a:spLocks noGrp="1"/>
           </p:cNvSpPr>
@@ -16359,7 +16367,7 @@
       </p:sp>
       <p:sp>
         <p:nvSpPr>
-          <p:cNvPr id="1987370582" name="Объект 2"/>
+          <p:cNvPr id="2081048642" name="Объект 2"/>
           <p:cNvSpPr>
             <a:spLocks noGrp="1"/>
           </p:cNvSpPr>
@@ -16493,7 +16501,7 @@
       </p:sp>
       <p:sp>
         <p:nvSpPr>
-          <p:cNvPr id="444316814" name="Номер слайда 3"/>
+          <p:cNvPr id="1056046758" name="Номер слайда 3"/>
           <p:cNvSpPr>
             <a:spLocks noGrp="1"/>
           </p:cNvSpPr>
@@ -16534,7 +16542,7 @@
       </p:sp>
       <p:sp>
         <p:nvSpPr>
-          <p:cNvPr id="1764720608" name="Прямоугольник 5"/>
+          <p:cNvPr id="1554808838" name="Прямоугольник 5"/>
           <p:cNvSpPr/>
           <p:nvPr/>
         </p:nvSpPr>
@@ -16650,7 +16658,7 @@
       </p:grpSpPr>
       <p:sp>
         <p:nvSpPr>
-          <p:cNvPr id="2099542214" name="Объект 2"/>
+          <p:cNvPr id="2050022185" name="Объект 2"/>
           <p:cNvSpPr>
             <a:spLocks noGrp="1"/>
           </p:cNvSpPr>
@@ -16816,7 +16824,7 @@
       </p:sp>
       <p:sp>
         <p:nvSpPr>
-          <p:cNvPr id="1360108284" name="Номер слайда 3"/>
+          <p:cNvPr id="162578355" name="Номер слайда 3"/>
           <p:cNvSpPr>
             <a:spLocks noGrp="1"/>
           </p:cNvSpPr>
@@ -16857,7 +16865,7 @@
       </p:sp>
       <p:sp>
         <p:nvSpPr>
-          <p:cNvPr id="490098247" name="Прямоугольник 4"/>
+          <p:cNvPr id="25781537" name="Прямоугольник 4"/>
           <p:cNvSpPr/>
           <p:nvPr/>
         </p:nvSpPr>
@@ -16907,7 +16915,7 @@
       </p:sp>
       <p:sp>
         <p:nvSpPr>
-          <p:cNvPr id="1458651063" name="Заголовок 1"/>
+          <p:cNvPr id="21356312" name="Заголовок 1"/>
           <p:cNvSpPr>
             <a:spLocks noGrp="1"/>
           </p:cNvSpPr>
@@ -16946,7 +16954,7 @@
       </p:sp>
       <p:sp>
         <p:nvSpPr>
-          <p:cNvPr id="709893478" name="Прямоугольник 5"/>
+          <p:cNvPr id="1166379215" name="Прямоугольник 5"/>
           <p:cNvSpPr/>
           <p:nvPr/>
         </p:nvSpPr>
@@ -17062,7 +17070,7 @@
       </p:grpSpPr>
       <p:sp>
         <p:nvSpPr>
-          <p:cNvPr id="708254905" name="Объект 2"/>
+          <p:cNvPr id="2038122079" name="Объект 2"/>
           <p:cNvSpPr>
             <a:spLocks noGrp="1"/>
           </p:cNvSpPr>
@@ -17175,7 +17183,7 @@
       </p:sp>
       <p:sp>
         <p:nvSpPr>
-          <p:cNvPr id="858755408" name="Номер слайда 3"/>
+          <p:cNvPr id="658365991" name="Номер слайда 3"/>
           <p:cNvSpPr>
             <a:spLocks noGrp="1"/>
           </p:cNvSpPr>
@@ -17216,7 +17224,7 @@
       </p:sp>
       <p:sp>
         <p:nvSpPr>
-          <p:cNvPr id="183037624" name="Прямоугольник 5"/>
+          <p:cNvPr id="1634131261" name="Прямоугольник 5"/>
           <p:cNvSpPr/>
           <p:nvPr/>
         </p:nvSpPr>
@@ -17266,7 +17274,7 @@
       </p:sp>
       <p:sp>
         <p:nvSpPr>
-          <p:cNvPr id="1748601754" name="Заголовок 1"/>
+          <p:cNvPr id="1538459728" name="Заголовок 1"/>
           <p:cNvSpPr>
             <a:spLocks noGrp="1"/>
           </p:cNvSpPr>
@@ -17305,7 +17313,7 @@
       </p:sp>
       <p:sp>
         <p:nvSpPr>
-          <p:cNvPr id="127536176" name="Прямоугольник 6"/>
+          <p:cNvPr id="102407284" name="Прямоугольник 6"/>
           <p:cNvSpPr/>
           <p:nvPr/>
         </p:nvSpPr>
@@ -17421,7 +17429,7 @@
       </p:grpSpPr>
       <p:sp>
         <p:nvSpPr>
-          <p:cNvPr id="151114935" name="Объект 2"/>
+          <p:cNvPr id="1999283796" name="Объект 2"/>
           <p:cNvSpPr>
             <a:spLocks noGrp="1"/>
           </p:cNvSpPr>
@@ -17476,7 +17484,7 @@
       </p:sp>
       <p:sp>
         <p:nvSpPr>
-          <p:cNvPr id="53331097" name="Номер слайда 3"/>
+          <p:cNvPr id="715756810" name="Номер слайда 3"/>
           <p:cNvSpPr>
             <a:spLocks noGrp="1"/>
           </p:cNvSpPr>
@@ -17517,7 +17525,7 @@
       </p:sp>
       <p:sp>
         <p:nvSpPr>
-          <p:cNvPr id="1203541227" name="Прямоугольник 5"/>
+          <p:cNvPr id="1260798391" name="Прямоугольник 5"/>
           <p:cNvSpPr/>
           <p:nvPr/>
         </p:nvSpPr>
@@ -17567,7 +17575,7 @@
       </p:sp>
       <p:sp>
         <p:nvSpPr>
-          <p:cNvPr id="752921264" name="Заголовок 1"/>
+          <p:cNvPr id="1741315016" name="Заголовок 1"/>
           <p:cNvSpPr>
             <a:spLocks noGrp="1"/>
           </p:cNvSpPr>
@@ -17606,7 +17614,7 @@
       </p:sp>
       <p:sp>
         <p:nvSpPr>
-          <p:cNvPr id="1333037433" name="Прямоугольник 6"/>
+          <p:cNvPr id="965472291" name="Прямоугольник 6"/>
           <p:cNvSpPr/>
           <p:nvPr/>
         </p:nvSpPr>
@@ -17656,7 +17664,7 @@
       </p:sp>
       <p:pic>
         <p:nvPicPr>
-          <p:cNvPr id="1575760557" name=""/>
+          <p:cNvPr id="543394343" name=""/>
           <p:cNvPicPr>
             <a:picLocks noChangeAspect="1"/>
           </p:cNvPicPr>
@@ -17750,7 +17758,7 @@
       </p:grpSpPr>
       <p:sp>
         <p:nvSpPr>
-          <p:cNvPr id="934681327" name="Прямоугольник 9"/>
+          <p:cNvPr id="1986756197" name="Прямоугольник 9"/>
           <p:cNvSpPr/>
           <p:nvPr/>
         </p:nvSpPr>
@@ -17800,7 +17808,7 @@
       </p:sp>
       <p:sp>
         <p:nvSpPr>
-          <p:cNvPr id="698523736" name="Прямоугольник 10"/>
+          <p:cNvPr id="499459330" name="Прямоугольник 10"/>
           <p:cNvSpPr/>
           <p:nvPr/>
         </p:nvSpPr>
@@ -17850,7 +17858,7 @@
       </p:sp>
       <p:sp>
         <p:nvSpPr>
-          <p:cNvPr id="891853707" name="Заголовок 1"/>
+          <p:cNvPr id="597341898" name="Заголовок 1"/>
           <p:cNvSpPr>
             <a:spLocks noGrp="1"/>
           </p:cNvSpPr>
@@ -17912,7 +17920,7 @@
       </p:sp>
       <p:sp>
         <p:nvSpPr>
-          <p:cNvPr id="1198156923" name="Объект 2"/>
+          <p:cNvPr id="1936873006" name="Объект 2"/>
           <p:cNvSpPr>
             <a:spLocks noGrp="1"/>
           </p:cNvSpPr>
@@ -18063,7 +18071,7 @@
       </p:sp>
       <p:sp>
         <p:nvSpPr>
-          <p:cNvPr id="282678274" name="Номер слайда 3"/>
+          <p:cNvPr id="479881067" name="Номер слайда 3"/>
           <p:cNvSpPr>
             <a:spLocks noGrp="1"/>
           </p:cNvSpPr>
@@ -18104,7 +18112,7 @@
       </p:sp>
       <p:pic>
         <p:nvPicPr>
-          <p:cNvPr id="934980864" name="Рисунок 7"/>
+          <p:cNvPr id="584781242" name="Рисунок 7"/>
           <p:cNvPicPr>
             <a:picLocks noChangeAspect="1"/>
           </p:cNvPicPr>
@@ -18138,7 +18146,7 @@
       </p:pic>
       <p:pic>
         <p:nvPicPr>
-          <p:cNvPr id="1527068866" name=""/>
+          <p:cNvPr id="29648412" name=""/>
           <p:cNvPicPr>
             <a:picLocks noChangeAspect="1"/>
           </p:cNvPicPr>
@@ -18234,7 +18242,7 @@
       </p:grpSpPr>
       <p:sp>
         <p:nvSpPr>
-          <p:cNvPr id="2001752862" name="Прямоугольник 9"/>
+          <p:cNvPr id="1531614552" name="Прямоугольник 9"/>
           <p:cNvSpPr/>
           <p:nvPr/>
         </p:nvSpPr>
@@ -18284,7 +18292,7 @@
       </p:sp>
       <p:sp>
         <p:nvSpPr>
-          <p:cNvPr id="149974264" name="Прямоугольник 10"/>
+          <p:cNvPr id="172050281" name="Прямоугольник 10"/>
           <p:cNvSpPr/>
           <p:nvPr/>
         </p:nvSpPr>
@@ -18334,7 +18342,7 @@
       </p:sp>
       <p:sp>
         <p:nvSpPr>
-          <p:cNvPr id="1386251121" name="Заголовок 1"/>
+          <p:cNvPr id="1672284683" name="Заголовок 1"/>
           <p:cNvSpPr>
             <a:spLocks noGrp="1"/>
           </p:cNvSpPr>
@@ -18396,7 +18404,7 @@
       </p:sp>
       <p:sp>
         <p:nvSpPr>
-          <p:cNvPr id="1598290698" name="Объект 2"/>
+          <p:cNvPr id="1844392733" name="Объект 2"/>
           <p:cNvSpPr>
             <a:spLocks noGrp="1"/>
           </p:cNvSpPr>
@@ -18501,7 +18509,7 @@
       </p:sp>
       <p:sp>
         <p:nvSpPr>
-          <p:cNvPr id="1030686044" name="Номер слайда 3"/>
+          <p:cNvPr id="2004110169" name="Номер слайда 3"/>
           <p:cNvSpPr>
             <a:spLocks noGrp="1"/>
           </p:cNvSpPr>
@@ -18542,7 +18550,7 @@
       </p:sp>
       <p:pic>
         <p:nvPicPr>
-          <p:cNvPr id="1596213455" name="Рисунок 5"/>
+          <p:cNvPr id="258219235" name="Рисунок 5"/>
           <p:cNvPicPr>
             <a:picLocks noChangeAspect="1"/>
           </p:cNvPicPr>
@@ -18643,7 +18651,7 @@
       </p:grpSpPr>
       <p:sp>
         <p:nvSpPr>
-          <p:cNvPr id="1158872260" name="Объект 2"/>
+          <p:cNvPr id="682831535" name="Объект 2"/>
           <p:cNvSpPr>
             <a:spLocks noGrp="1"/>
           </p:cNvSpPr>
@@ -18714,7 +18722,7 @@
       </p:sp>
       <p:sp>
         <p:nvSpPr>
-          <p:cNvPr id="30732547" name="Номер слайда 3"/>
+          <p:cNvPr id="280238473" name="Номер слайда 3"/>
           <p:cNvSpPr>
             <a:spLocks noGrp="1"/>
           </p:cNvSpPr>
@@ -18755,7 +18763,7 @@
       </p:sp>
       <p:pic>
         <p:nvPicPr>
-          <p:cNvPr id="778076655" name="Рисунок 5"/>
+          <p:cNvPr id="142624812" name="Рисунок 5"/>
           <p:cNvPicPr>
             <a:picLocks noChangeAspect="1"/>
           </p:cNvPicPr>
@@ -18785,7 +18793,7 @@
       </p:pic>
       <p:pic>
         <p:nvPicPr>
-          <p:cNvPr id="442764175" name="Рисунок 1421075015"/>
+          <p:cNvPr id="1937440151" name="Рисунок 1421075015"/>
           <p:cNvPicPr>
             <a:picLocks noChangeAspect="1"/>
           </p:cNvPicPr>
@@ -18820,7 +18828,7 @@
       </p:pic>
       <p:sp>
         <p:nvSpPr>
-          <p:cNvPr id="1226761381" name="Прямоугольник 10"/>
+          <p:cNvPr id="1887870065" name="Прямоугольник 10"/>
           <p:cNvSpPr/>
           <p:nvPr/>
         </p:nvSpPr>
@@ -18870,7 +18878,7 @@
       </p:sp>
       <p:sp>
         <p:nvSpPr>
-          <p:cNvPr id="1814104726" name="Прямоугольник 11"/>
+          <p:cNvPr id="76421527" name="Прямоугольник 11"/>
           <p:cNvSpPr/>
           <p:nvPr/>
         </p:nvSpPr>
@@ -18920,7 +18928,7 @@
       </p:sp>
       <p:sp>
         <p:nvSpPr>
-          <p:cNvPr id="501955925" name="Заголовок 1"/>
+          <p:cNvPr id="1689660852" name="Заголовок 1"/>
           <p:cNvSpPr>
             <a:spLocks noGrp="1"/>
           </p:cNvSpPr>
@@ -18969,7 +18977,7 @@
       </p:sp>
       <p:pic>
         <p:nvPicPr>
-          <p:cNvPr id="1628664448" name="Рисунок 2"/>
+          <p:cNvPr id="1528119454" name="Рисунок 2"/>
           <p:cNvPicPr>
             <a:picLocks noChangeAspect="1"/>
           </p:cNvPicPr>
@@ -18996,7 +19004,7 @@
       </p:pic>
       <p:pic>
         <p:nvPicPr>
-          <p:cNvPr id="1306253939" name=""/>
+          <p:cNvPr id="1736709910" name=""/>
           <p:cNvPicPr>
             <a:picLocks noChangeAspect="1"/>
           </p:cNvPicPr>
@@ -19026,17 +19034,17 @@
       </p:pic>
       <p:cxnSp>
         <p:nvCxnSpPr>
-          <p:cNvPr id="455070794" name=""/>
+          <p:cNvPr id="1511808802" name=""/>
           <p:cNvCxnSpPr>
-            <a:stCxn id="778076655" idx="3"/>
-            <a:endCxn id="1628664448" idx="1"/>
+            <a:stCxn id="142624812" idx="3"/>
+            <a:endCxn id="1528119454" idx="1"/>
           </p:cNvCxnSpPr>
           <p:nvPr/>
         </p:nvCxnSpPr>
         <p:spPr bwMode="auto">
           <a:xfrm rot="0" flipH="0" flipV="0">
             <a:off x="7837799" y="5628176"/>
-            <a:ext cx="642273" cy="267095"/>
+            <a:ext cx="642272" cy="267095"/>
           </a:xfrm>
           <a:prstGeom prst="line">
             <a:avLst/>
@@ -19069,10 +19077,10 @@
       </p:cxnSp>
       <p:cxnSp>
         <p:nvCxnSpPr>
-          <p:cNvPr id="225548558" name=""/>
+          <p:cNvPr id="873958203" name=""/>
           <p:cNvCxnSpPr>
-            <a:stCxn id="778076655" idx="3"/>
-            <a:endCxn id="442764175" idx="2"/>
+            <a:stCxn id="142624812" idx="3"/>
+            <a:endCxn id="1937440151" idx="2"/>
           </p:cNvCxnSpPr>
           <p:nvPr/>
         </p:nvCxnSpPr>
@@ -19112,10 +19120,10 @@
       </p:cxnSp>
       <p:cxnSp>
         <p:nvCxnSpPr>
-          <p:cNvPr id="374224083" name=""/>
+          <p:cNvPr id="1473911929" name=""/>
           <p:cNvCxnSpPr>
-            <a:stCxn id="1306253939" idx="3"/>
-            <a:endCxn id="442764175" idx="1"/>
+            <a:stCxn id="1736709910" idx="3"/>
+            <a:endCxn id="1937440151" idx="1"/>
           </p:cNvCxnSpPr>
           <p:nvPr/>
         </p:nvCxnSpPr>
@@ -19155,10 +19163,10 @@
       </p:cxnSp>
       <p:cxnSp>
         <p:nvCxnSpPr>
-          <p:cNvPr id="354315911" name=""/>
+          <p:cNvPr id="120675869" name=""/>
           <p:cNvCxnSpPr>
-            <a:stCxn id="1306253939" idx="3"/>
-            <a:endCxn id="1628664448" idx="0"/>
+            <a:stCxn id="1736709910" idx="3"/>
+            <a:endCxn id="1528119454" idx="0"/>
           </p:cNvCxnSpPr>
           <p:nvPr/>
         </p:nvCxnSpPr>
@@ -19264,7 +19272,7 @@
       </p:grpSpPr>
       <p:sp>
         <p:nvSpPr>
-          <p:cNvPr id="795627399" name="Объект 2"/>
+          <p:cNvPr id="906370212" name="Объект 2"/>
           <p:cNvSpPr>
             <a:spLocks noGrp="1"/>
           </p:cNvSpPr>
@@ -19403,7 +19411,7 @@
       </p:sp>
       <p:sp>
         <p:nvSpPr>
-          <p:cNvPr id="1933376662" name="Номер слайда 3"/>
+          <p:cNvPr id="544941026" name="Номер слайда 3"/>
           <p:cNvSpPr>
             <a:spLocks noGrp="1"/>
           </p:cNvSpPr>
@@ -19444,7 +19452,7 @@
       </p:sp>
       <p:sp>
         <p:nvSpPr>
-          <p:cNvPr id="1719004998" name="Прямоугольник 5"/>
+          <p:cNvPr id="1301988378" name="Прямоугольник 5"/>
           <p:cNvSpPr/>
           <p:nvPr/>
         </p:nvSpPr>
@@ -19494,7 +19502,7 @@
       </p:sp>
       <p:sp>
         <p:nvSpPr>
-          <p:cNvPr id="34947425" name="Прямоугольник 6"/>
+          <p:cNvPr id="1512940575" name="Прямоугольник 6"/>
           <p:cNvSpPr/>
           <p:nvPr/>
         </p:nvSpPr>
@@ -19544,7 +19552,7 @@
       </p:sp>
       <p:sp>
         <p:nvSpPr>
-          <p:cNvPr id="1043383581" name="Заголовок 1"/>
+          <p:cNvPr id="1127627799" name="Заголовок 1"/>
           <p:cNvSpPr>
             <a:spLocks noGrp="1"/>
           </p:cNvSpPr>
@@ -19596,7 +19604,7 @@
       </p:sp>
       <p:pic>
         <p:nvPicPr>
-          <p:cNvPr id="79438118" name=""/>
+          <p:cNvPr id="1840874631" name=""/>
           <p:cNvPicPr>
             <a:picLocks noChangeAspect="1"/>
           </p:cNvPicPr>

--- a/docs/starukhin_dissertation/magister_pres.pptx
+++ b/docs/starukhin_dissertation/magister_pres.pptx
@@ -1,31 +1,31 @@
 
 <file path=ppt/presentation.xml><?xml version="1.0" encoding="utf-8"?>
-<p:presentation xmlns:a="http://schemas.openxmlformats.org/drawingml/2006/main" xmlns:r="http://schemas.openxmlformats.org/officeDocument/2006/relationships" xmlns:p="http://schemas.openxmlformats.org/presentationml/2006/main" xmlns:m="http://schemas.openxmlformats.org/officeDocument/2006/math" xmlns:w="http://schemas.openxmlformats.org/wordprocessingml/2006/main" saveSubsetFonts="1" showSpecialPlsOnTitleSld="0">
+<p:presentation xmlns:a="http://schemas.openxmlformats.org/drawingml/2006/main" xmlns:r="http://schemas.openxmlformats.org/officeDocument/2006/relationships" xmlns:p="http://schemas.openxmlformats.org/presentationml/2006/main" showSpecialPlsOnTitleSld="0" saveSubsetFonts="1">
   <p:sldMasterIdLst>
     <p:sldMasterId id="2147483648" r:id="rId1"/>
   </p:sldMasterIdLst>
   <p:notesMasterIdLst>
-    <p:notesMasterId r:id="rId22"/>
+    <p:notesMasterId r:id="rId20"/>
   </p:notesMasterIdLst>
   <p:sldIdLst>
-    <p:sldId id="256" r:id="rId4"/>
-    <p:sldId id="257" r:id="rId5"/>
-    <p:sldId id="258" r:id="rId6"/>
-    <p:sldId id="259" r:id="rId7"/>
-    <p:sldId id="260" r:id="rId8"/>
-    <p:sldId id="261" r:id="rId9"/>
-    <p:sldId id="262" r:id="rId10"/>
-    <p:sldId id="263" r:id="rId11"/>
-    <p:sldId id="264" r:id="rId12"/>
-    <p:sldId id="265" r:id="rId13"/>
-    <p:sldId id="266" r:id="rId14"/>
-    <p:sldId id="267" r:id="rId15"/>
-    <p:sldId id="268" r:id="rId16"/>
-    <p:sldId id="269" r:id="rId17"/>
-    <p:sldId id="270" r:id="rId18"/>
-    <p:sldId id="271" r:id="rId19"/>
-    <p:sldId id="272" r:id="rId20"/>
-    <p:sldId id="273" r:id="rId21"/>
+    <p:sldId id="256" r:id="rId2"/>
+    <p:sldId id="257" r:id="rId3"/>
+    <p:sldId id="258" r:id="rId4"/>
+    <p:sldId id="259" r:id="rId5"/>
+    <p:sldId id="260" r:id="rId6"/>
+    <p:sldId id="261" r:id="rId7"/>
+    <p:sldId id="262" r:id="rId8"/>
+    <p:sldId id="263" r:id="rId9"/>
+    <p:sldId id="264" r:id="rId10"/>
+    <p:sldId id="265" r:id="rId11"/>
+    <p:sldId id="266" r:id="rId12"/>
+    <p:sldId id="267" r:id="rId13"/>
+    <p:sldId id="268" r:id="rId14"/>
+    <p:sldId id="269" r:id="rId15"/>
+    <p:sldId id="270" r:id="rId16"/>
+    <p:sldId id="271" r:id="rId17"/>
+    <p:sldId id="272" r:id="rId18"/>
+    <p:sldId id="273" r:id="rId19"/>
   </p:sldIdLst>
   <p:sldSz cx="12192000" cy="6858000"/>
   <p:notesSz cx="6858000" cy="9144000"/>
@@ -124,12 +124,28 @@
       </a:defRPr>
     </a:lvl9pPr>
   </p:defaultTextStyle>
+  <p:extLst>
+    <p:ext uri="{EFAFB233-063F-42B5-8137-9DF3F51BA10A}">
+      <p15:sldGuideLst xmlns:p15="http://schemas.microsoft.com/office/powerpoint/2012/main">
+        <p15:guide id="1" pos="3840">
+          <p15:clr>
+            <a:srgbClr val="A4A3A4"/>
+          </p15:clr>
+        </p15:guide>
+        <p15:guide id="2" orient="horz" pos="2160">
+          <p15:clr>
+            <a:srgbClr val="A4A3A4"/>
+          </p15:clr>
+        </p15:guide>
+      </p15:sldGuideLst>
+    </p:ext>
+  </p:extLst>
 </p:presentation>
 </file>
 
 <file path=ppt/notesMasters/notesMaster1.xml><?xml version="1.0" encoding="utf-8"?>
 <p:notesMaster xmlns:a="http://schemas.openxmlformats.org/drawingml/2006/main" xmlns:r="http://schemas.openxmlformats.org/officeDocument/2006/relationships" xmlns:p="http://schemas.openxmlformats.org/presentationml/2006/main">
-  <p:cSld name="">
+  <p:cSld>
     <p:bg>
       <p:bgRef idx="1001">
         <a:schemeClr val="bg1"/>
@@ -215,7 +231,7 @@
             </a:pPr>
             <a:fld id="{0BF8B4CA-290A-45FF-AF47-6D7BC9CA84C9}" type="datetimeFigureOut">
               <a:rPr lang="ru-RU"/>
-              <a:t>02.06.2026</a:t>
+              <a:t>23.06.2026</a:t>
             </a:fld>
             <a:endParaRPr lang="ru-RU"/>
           </a:p>
@@ -225,7 +241,7 @@
         <p:nvSpPr>
           <p:cNvPr id="1006772333" name="Образ слайда 3"/>
           <p:cNvSpPr>
-            <a:spLocks noChangeAspect="1" noGrp="1" noRot="1"/>
+            <a:spLocks noGrp="1" noRot="1" noChangeAspect="1"/>
           </p:cNvSpPr>
           <p:nvPr>
             <p:ph type="sldImg" idx="2"/>
@@ -502,8 +518,8 @@
 </file>
 
 <file path=ppt/notesSlides/notesSlide1.xml><?xml version="1.0" encoding="utf-8"?>
-<p:notes xmlns:a="http://schemas.openxmlformats.org/drawingml/2006/main" xmlns:r="http://schemas.openxmlformats.org/officeDocument/2006/relationships" xmlns:p="http://schemas.openxmlformats.org/presentationml/2006/main" xmlns:m="http://schemas.openxmlformats.org/officeDocument/2006/math" xmlns:w="http://schemas.openxmlformats.org/wordprocessingml/2006/main">
-  <p:cSld name="">
+<p:notes xmlns:a="http://schemas.openxmlformats.org/drawingml/2006/main" xmlns:r="http://schemas.openxmlformats.org/officeDocument/2006/relationships" xmlns:p="http://schemas.openxmlformats.org/presentationml/2006/main">
+  <p:cSld>
     <p:spTree>
       <p:nvGrpSpPr>
         <p:cNvPr id="1" name=""/>
@@ -522,7 +538,7 @@
         <p:nvSpPr>
           <p:cNvPr id="2049855219" name="Slide Image Placeholder 1"/>
           <p:cNvSpPr>
-            <a:spLocks noChangeAspect="1" noGrp="1" noRot="1"/>
+            <a:spLocks noGrp="1" noRot="1" noChangeAspect="1"/>
           </p:cNvSpPr>
           <p:nvPr>
             <p:ph type="sldImg"/>
@@ -587,8 +603,8 @@
 </file>
 
 <file path=ppt/notesSlides/notesSlide10.xml><?xml version="1.0" encoding="utf-8"?>
-<p:notes xmlns:a="http://schemas.openxmlformats.org/drawingml/2006/main" xmlns:r="http://schemas.openxmlformats.org/officeDocument/2006/relationships" xmlns:p="http://schemas.openxmlformats.org/presentationml/2006/main" xmlns:m="http://schemas.openxmlformats.org/officeDocument/2006/math" xmlns:w="http://schemas.openxmlformats.org/wordprocessingml/2006/main">
-  <p:cSld name="">
+<p:notes xmlns:a="http://schemas.openxmlformats.org/drawingml/2006/main" xmlns:r="http://schemas.openxmlformats.org/officeDocument/2006/relationships" xmlns:p="http://schemas.openxmlformats.org/presentationml/2006/main">
+  <p:cSld>
     <p:spTree>
       <p:nvGrpSpPr>
         <p:cNvPr id="1" name=""/>
@@ -607,7 +623,7 @@
         <p:nvSpPr>
           <p:cNvPr id="546986335" name="Slide Image Placeholder 1"/>
           <p:cNvSpPr>
-            <a:spLocks noChangeAspect="1" noGrp="1" noRot="1"/>
+            <a:spLocks noGrp="1" noRot="1" noChangeAspect="1"/>
           </p:cNvSpPr>
           <p:nvPr>
             <p:ph type="sldImg"/>
@@ -657,7 +673,7 @@
             </a:pPr>
             <a:fld id="{E59DD143-F230-8BE5-DF47-2F712C202B39}" type="slidenum">
               <a:rPr/>
-              <a:t>8</a:t>
+              <a:t>10</a:t>
             </a:fld>
             <a:endParaRPr/>
           </a:p>
@@ -672,8 +688,8 @@
 </file>
 
 <file path=ppt/notesSlides/notesSlide11.xml><?xml version="1.0" encoding="utf-8"?>
-<p:notes xmlns:a="http://schemas.openxmlformats.org/drawingml/2006/main" xmlns:r="http://schemas.openxmlformats.org/officeDocument/2006/relationships" xmlns:p="http://schemas.openxmlformats.org/presentationml/2006/main" xmlns:m="http://schemas.openxmlformats.org/officeDocument/2006/math" xmlns:w="http://schemas.openxmlformats.org/wordprocessingml/2006/main">
-  <p:cSld name="">
+<p:notes xmlns:a="http://schemas.openxmlformats.org/drawingml/2006/main" xmlns:r="http://schemas.openxmlformats.org/officeDocument/2006/relationships" xmlns:p="http://schemas.openxmlformats.org/presentationml/2006/main">
+  <p:cSld>
     <p:spTree>
       <p:nvGrpSpPr>
         <p:cNvPr id="1" name=""/>
@@ -692,7 +708,7 @@
         <p:nvSpPr>
           <p:cNvPr id="1237585104" name="Slide Image Placeholder 1"/>
           <p:cNvSpPr>
-            <a:spLocks noChangeAspect="1" noGrp="1" noRot="1"/>
+            <a:spLocks noGrp="1" noRot="1" noChangeAspect="1"/>
           </p:cNvSpPr>
           <p:nvPr>
             <p:ph type="sldImg"/>
@@ -742,7 +758,7 @@
             </a:pPr>
             <a:fld id="{6478E094-64B7-2766-BCC3-6C48145F116B}" type="slidenum">
               <a:rPr/>
-              <a:t>9</a:t>
+              <a:t>11</a:t>
             </a:fld>
             <a:endParaRPr/>
           </a:p>
@@ -757,8 +773,8 @@
 </file>
 
 <file path=ppt/notesSlides/notesSlide12.xml><?xml version="1.0" encoding="utf-8"?>
-<p:notes xmlns:a="http://schemas.openxmlformats.org/drawingml/2006/main" xmlns:r="http://schemas.openxmlformats.org/officeDocument/2006/relationships" xmlns:p="http://schemas.openxmlformats.org/presentationml/2006/main" xmlns:m="http://schemas.openxmlformats.org/officeDocument/2006/math" xmlns:w="http://schemas.openxmlformats.org/wordprocessingml/2006/main">
-  <p:cSld name="">
+<p:notes xmlns:a="http://schemas.openxmlformats.org/drawingml/2006/main" xmlns:r="http://schemas.openxmlformats.org/officeDocument/2006/relationships" xmlns:p="http://schemas.openxmlformats.org/presentationml/2006/main">
+  <p:cSld>
     <p:spTree>
       <p:nvGrpSpPr>
         <p:cNvPr id="1" name=""/>
@@ -777,7 +793,7 @@
         <p:nvSpPr>
           <p:cNvPr id="1577987428" name="Slide Image Placeholder 1"/>
           <p:cNvSpPr>
-            <a:spLocks noChangeAspect="1" noGrp="1" noRot="1"/>
+            <a:spLocks noGrp="1" noRot="1" noChangeAspect="1"/>
           </p:cNvSpPr>
           <p:nvPr>
             <p:ph type="sldImg"/>
@@ -827,7 +843,7 @@
             </a:pPr>
             <a:fld id="{4A85B0B4-A097-EC80-6511-5CB349CFD099}" type="slidenum">
               <a:rPr/>
-              <a:t>10</a:t>
+              <a:t>12</a:t>
             </a:fld>
             <a:endParaRPr/>
           </a:p>
@@ -842,8 +858,8 @@
 </file>
 
 <file path=ppt/notesSlides/notesSlide13.xml><?xml version="1.0" encoding="utf-8"?>
-<p:notes xmlns:a="http://schemas.openxmlformats.org/drawingml/2006/main" xmlns:r="http://schemas.openxmlformats.org/officeDocument/2006/relationships" xmlns:p="http://schemas.openxmlformats.org/presentationml/2006/main" xmlns:m="http://schemas.openxmlformats.org/officeDocument/2006/math" xmlns:w="http://schemas.openxmlformats.org/wordprocessingml/2006/main">
-  <p:cSld name="">
+<p:notes xmlns:a="http://schemas.openxmlformats.org/drawingml/2006/main" xmlns:r="http://schemas.openxmlformats.org/officeDocument/2006/relationships" xmlns:p="http://schemas.openxmlformats.org/presentationml/2006/main">
+  <p:cSld>
     <p:spTree>
       <p:nvGrpSpPr>
         <p:cNvPr id="1" name=""/>
@@ -862,7 +878,7 @@
         <p:nvSpPr>
           <p:cNvPr id="1017504938" name="Slide Image Placeholder 1"/>
           <p:cNvSpPr>
-            <a:spLocks noChangeAspect="1" noGrp="1" noRot="1"/>
+            <a:spLocks noGrp="1" noRot="1" noChangeAspect="1"/>
           </p:cNvSpPr>
           <p:nvPr>
             <p:ph type="sldImg"/>
@@ -912,7 +928,7 @@
             </a:pPr>
             <a:fld id="{A4FE7883-973B-878E-357F-41AA8BFE4543}" type="slidenum">
               <a:rPr/>
-              <a:t>11</a:t>
+              <a:t>13</a:t>
             </a:fld>
             <a:endParaRPr/>
           </a:p>
@@ -927,8 +943,8 @@
 </file>
 
 <file path=ppt/notesSlides/notesSlide14.xml><?xml version="1.0" encoding="utf-8"?>
-<p:notes xmlns:a="http://schemas.openxmlformats.org/drawingml/2006/main" xmlns:r="http://schemas.openxmlformats.org/officeDocument/2006/relationships" xmlns:p="http://schemas.openxmlformats.org/presentationml/2006/main" xmlns:m="http://schemas.openxmlformats.org/officeDocument/2006/math" xmlns:w="http://schemas.openxmlformats.org/wordprocessingml/2006/main">
-  <p:cSld name="">
+<p:notes xmlns:a="http://schemas.openxmlformats.org/drawingml/2006/main" xmlns:r="http://schemas.openxmlformats.org/officeDocument/2006/relationships" xmlns:p="http://schemas.openxmlformats.org/presentationml/2006/main">
+  <p:cSld>
     <p:spTree>
       <p:nvGrpSpPr>
         <p:cNvPr id="1" name=""/>
@@ -947,7 +963,7 @@
         <p:nvSpPr>
           <p:cNvPr id="192314068" name="Slide Image Placeholder 1"/>
           <p:cNvSpPr>
-            <a:spLocks noChangeAspect="1" noGrp="1" noRot="1"/>
+            <a:spLocks noGrp="1" noRot="1" noChangeAspect="1"/>
           </p:cNvSpPr>
           <p:nvPr>
             <p:ph type="sldImg"/>
@@ -997,7 +1013,7 @@
             </a:pPr>
             <a:fld id="{463C25AB-F75B-ED55-9B43-2E895322D2B6}" type="slidenum">
               <a:rPr/>
-              <a:t>13</a:t>
+              <a:t>14</a:t>
             </a:fld>
             <a:endParaRPr/>
           </a:p>
@@ -1012,8 +1028,8 @@
 </file>
 
 <file path=ppt/notesSlides/notesSlide15.xml><?xml version="1.0" encoding="utf-8"?>
-<p:notes xmlns:a="http://schemas.openxmlformats.org/drawingml/2006/main" xmlns:r="http://schemas.openxmlformats.org/officeDocument/2006/relationships" xmlns:p="http://schemas.openxmlformats.org/presentationml/2006/main" xmlns:m="http://schemas.openxmlformats.org/officeDocument/2006/math" xmlns:w="http://schemas.openxmlformats.org/wordprocessingml/2006/main">
-  <p:cSld name="">
+<p:notes xmlns:a="http://schemas.openxmlformats.org/drawingml/2006/main" xmlns:r="http://schemas.openxmlformats.org/officeDocument/2006/relationships" xmlns:p="http://schemas.openxmlformats.org/presentationml/2006/main">
+  <p:cSld>
     <p:spTree>
       <p:nvGrpSpPr>
         <p:cNvPr id="1" name=""/>
@@ -1032,7 +1048,7 @@
         <p:nvSpPr>
           <p:cNvPr id="1554483612" name="Slide Image Placeholder 1"/>
           <p:cNvSpPr>
-            <a:spLocks noChangeAspect="1" noGrp="1" noRot="1"/>
+            <a:spLocks noGrp="1" noRot="1" noChangeAspect="1"/>
           </p:cNvSpPr>
           <p:nvPr>
             <p:ph type="sldImg"/>
@@ -1082,7 +1098,7 @@
             </a:pPr>
             <a:fld id="{0E3B1206-5BC8-D1E1-57C3-7D177AE62E15}" type="slidenum">
               <a:rPr/>
-              <a:t>14</a:t>
+              <a:t>15</a:t>
             </a:fld>
             <a:endParaRPr/>
           </a:p>
@@ -1097,8 +1113,8 @@
 </file>
 
 <file path=ppt/notesSlides/notesSlide16.xml><?xml version="1.0" encoding="utf-8"?>
-<p:notes xmlns:a="http://schemas.openxmlformats.org/drawingml/2006/main" xmlns:r="http://schemas.openxmlformats.org/officeDocument/2006/relationships" xmlns:p="http://schemas.openxmlformats.org/presentationml/2006/main" xmlns:m="http://schemas.openxmlformats.org/officeDocument/2006/math" xmlns:w="http://schemas.openxmlformats.org/wordprocessingml/2006/main">
-  <p:cSld name="">
+<p:notes xmlns:a="http://schemas.openxmlformats.org/drawingml/2006/main" xmlns:r="http://schemas.openxmlformats.org/officeDocument/2006/relationships" xmlns:p="http://schemas.openxmlformats.org/presentationml/2006/main">
+  <p:cSld>
     <p:spTree>
       <p:nvGrpSpPr>
         <p:cNvPr id="1" name=""/>
@@ -1117,7 +1133,7 @@
         <p:nvSpPr>
           <p:cNvPr id="1201975293" name="Slide Image Placeholder 1"/>
           <p:cNvSpPr>
-            <a:spLocks noChangeAspect="1" noGrp="1" noRot="1"/>
+            <a:spLocks noGrp="1" noRot="1" noChangeAspect="1"/>
           </p:cNvSpPr>
           <p:nvPr>
             <p:ph type="sldImg"/>
@@ -1167,7 +1183,7 @@
             </a:pPr>
             <a:fld id="{FF611C26-A18A-CE56-9368-8EAD053C4851}" type="slidenum">
               <a:rPr/>
-              <a:t>14</a:t>
+              <a:t>16</a:t>
             </a:fld>
             <a:endParaRPr/>
           </a:p>
@@ -1182,8 +1198,8 @@
 </file>
 
 <file path=ppt/notesSlides/notesSlide17.xml><?xml version="1.0" encoding="utf-8"?>
-<p:notes xmlns:a="http://schemas.openxmlformats.org/drawingml/2006/main" xmlns:r="http://schemas.openxmlformats.org/officeDocument/2006/relationships" xmlns:p="http://schemas.openxmlformats.org/presentationml/2006/main" xmlns:m="http://schemas.openxmlformats.org/officeDocument/2006/math" xmlns:w="http://schemas.openxmlformats.org/wordprocessingml/2006/main">
-  <p:cSld name="">
+<p:notes xmlns:a="http://schemas.openxmlformats.org/drawingml/2006/main" xmlns:r="http://schemas.openxmlformats.org/officeDocument/2006/relationships" xmlns:p="http://schemas.openxmlformats.org/presentationml/2006/main">
+  <p:cSld>
     <p:spTree>
       <p:nvGrpSpPr>
         <p:cNvPr id="1" name=""/>
@@ -1202,7 +1218,7 @@
         <p:nvSpPr>
           <p:cNvPr id="1225103498" name="Slide Image Placeholder 1"/>
           <p:cNvSpPr>
-            <a:spLocks noChangeAspect="1" noGrp="1" noRot="1"/>
+            <a:spLocks noGrp="1" noRot="1" noChangeAspect="1"/>
           </p:cNvSpPr>
           <p:nvPr>
             <p:ph type="sldImg"/>
@@ -1252,7 +1268,7 @@
             </a:pPr>
             <a:fld id="{188C1104-84A8-CC17-258A-A96B99F9A95E}" type="slidenum">
               <a:rPr/>
-              <a:t>15</a:t>
+              <a:t>17</a:t>
             </a:fld>
             <a:endParaRPr/>
           </a:p>
@@ -1267,8 +1283,8 @@
 </file>
 
 <file path=ppt/notesSlides/notesSlide18.xml><?xml version="1.0" encoding="utf-8"?>
-<p:notes xmlns:a="http://schemas.openxmlformats.org/drawingml/2006/main" xmlns:r="http://schemas.openxmlformats.org/officeDocument/2006/relationships" xmlns:p="http://schemas.openxmlformats.org/presentationml/2006/main" xmlns:m="http://schemas.openxmlformats.org/officeDocument/2006/math" xmlns:w="http://schemas.openxmlformats.org/wordprocessingml/2006/main">
-  <p:cSld name="">
+<p:notes xmlns:a="http://schemas.openxmlformats.org/drawingml/2006/main" xmlns:r="http://schemas.openxmlformats.org/officeDocument/2006/relationships" xmlns:p="http://schemas.openxmlformats.org/presentationml/2006/main">
+  <p:cSld>
     <p:spTree>
       <p:nvGrpSpPr>
         <p:cNvPr id="1" name=""/>
@@ -1287,7 +1303,7 @@
         <p:nvSpPr>
           <p:cNvPr id="1186598178" name="Slide Image Placeholder 1"/>
           <p:cNvSpPr>
-            <a:spLocks noChangeAspect="1" noGrp="1" noRot="1"/>
+            <a:spLocks noGrp="1" noRot="1" noChangeAspect="1"/>
           </p:cNvSpPr>
           <p:nvPr>
             <p:ph type="sldImg"/>
@@ -1337,7 +1353,7 @@
             </a:pPr>
             <a:fld id="{88900006-DE8E-E061-C9AE-0E64162B086A}" type="slidenum">
               <a:rPr/>
-              <a:t>1</a:t>
+              <a:t>18</a:t>
             </a:fld>
             <a:endParaRPr/>
           </a:p>
@@ -1352,8 +1368,8 @@
 </file>
 
 <file path=ppt/notesSlides/notesSlide2.xml><?xml version="1.0" encoding="utf-8"?>
-<p:notes xmlns:a="http://schemas.openxmlformats.org/drawingml/2006/main" xmlns:r="http://schemas.openxmlformats.org/officeDocument/2006/relationships" xmlns:p="http://schemas.openxmlformats.org/presentationml/2006/main" xmlns:m="http://schemas.openxmlformats.org/officeDocument/2006/math" xmlns:w="http://schemas.openxmlformats.org/wordprocessingml/2006/main">
-  <p:cSld name="">
+<p:notes xmlns:a="http://schemas.openxmlformats.org/drawingml/2006/main" xmlns:r="http://schemas.openxmlformats.org/officeDocument/2006/relationships" xmlns:p="http://schemas.openxmlformats.org/presentationml/2006/main">
+  <p:cSld>
     <p:spTree>
       <p:nvGrpSpPr>
         <p:cNvPr id="1" name=""/>
@@ -1372,7 +1388,7 @@
         <p:nvSpPr>
           <p:cNvPr id="1900417451" name="Slide Image Placeholder 1"/>
           <p:cNvSpPr>
-            <a:spLocks noChangeAspect="1" noGrp="1" noRot="1"/>
+            <a:spLocks noGrp="1" noRot="1" noChangeAspect="1"/>
           </p:cNvSpPr>
           <p:nvPr>
             <p:ph type="sldImg"/>
@@ -1437,8 +1453,8 @@
 </file>
 
 <file path=ppt/notesSlides/notesSlide3.xml><?xml version="1.0" encoding="utf-8"?>
-<p:notes xmlns:a="http://schemas.openxmlformats.org/drawingml/2006/main" xmlns:r="http://schemas.openxmlformats.org/officeDocument/2006/relationships" xmlns:p="http://schemas.openxmlformats.org/presentationml/2006/main" xmlns:m="http://schemas.openxmlformats.org/officeDocument/2006/math" xmlns:w="http://schemas.openxmlformats.org/wordprocessingml/2006/main">
-  <p:cSld name="">
+<p:notes xmlns:a="http://schemas.openxmlformats.org/drawingml/2006/main" xmlns:r="http://schemas.openxmlformats.org/officeDocument/2006/relationships" xmlns:p="http://schemas.openxmlformats.org/presentationml/2006/main">
+  <p:cSld>
     <p:spTree>
       <p:nvGrpSpPr>
         <p:cNvPr id="1" name=""/>
@@ -1457,7 +1473,7 @@
         <p:nvSpPr>
           <p:cNvPr id="798887161" name="Slide Image Placeholder 1"/>
           <p:cNvSpPr>
-            <a:spLocks noChangeAspect="1" noGrp="1" noRot="1"/>
+            <a:spLocks noGrp="1" noRot="1" noChangeAspect="1"/>
           </p:cNvSpPr>
           <p:nvPr>
             <p:ph type="sldImg"/>
@@ -1507,7 +1523,7 @@
             </a:pPr>
             <a:fld id="{B355F3D9-BDFF-EDB5-6FC0-3B806BA109F3}" type="slidenum">
               <a:rPr/>
-              <a:t>4</a:t>
+              <a:t>3</a:t>
             </a:fld>
             <a:endParaRPr/>
           </a:p>
@@ -1522,8 +1538,8 @@
 </file>
 
 <file path=ppt/notesSlides/notesSlide4.xml><?xml version="1.0" encoding="utf-8"?>
-<p:notes xmlns:a="http://schemas.openxmlformats.org/drawingml/2006/main" xmlns:r="http://schemas.openxmlformats.org/officeDocument/2006/relationships" xmlns:p="http://schemas.openxmlformats.org/presentationml/2006/main" xmlns:m="http://schemas.openxmlformats.org/officeDocument/2006/math" xmlns:w="http://schemas.openxmlformats.org/wordprocessingml/2006/main">
-  <p:cSld name="">
+<p:notes xmlns:a="http://schemas.openxmlformats.org/drawingml/2006/main" xmlns:r="http://schemas.openxmlformats.org/officeDocument/2006/relationships" xmlns:p="http://schemas.openxmlformats.org/presentationml/2006/main">
+  <p:cSld>
     <p:spTree>
       <p:nvGrpSpPr>
         <p:cNvPr id="1" name=""/>
@@ -1542,7 +1558,7 @@
         <p:nvSpPr>
           <p:cNvPr id="220610037" name="Slide Image Placeholder 1"/>
           <p:cNvSpPr>
-            <a:spLocks noChangeAspect="1" noGrp="1" noRot="1"/>
+            <a:spLocks noGrp="1" noRot="1" noChangeAspect="1"/>
           </p:cNvSpPr>
           <p:nvPr>
             <p:ph type="sldImg"/>
@@ -1592,7 +1608,7 @@
             </a:pPr>
             <a:fld id="{F20EB7B1-6B7D-5CE5-D95F-5ED0A7232503}" type="slidenum">
               <a:rPr/>
-              <a:t>3</a:t>
+              <a:t>4</a:t>
             </a:fld>
             <a:endParaRPr/>
           </a:p>
@@ -1607,8 +1623,8 @@
 </file>
 
 <file path=ppt/notesSlides/notesSlide5.xml><?xml version="1.0" encoding="utf-8"?>
-<p:notes xmlns:a="http://schemas.openxmlformats.org/drawingml/2006/main" xmlns:r="http://schemas.openxmlformats.org/officeDocument/2006/relationships" xmlns:p="http://schemas.openxmlformats.org/presentationml/2006/main" xmlns:m="http://schemas.openxmlformats.org/officeDocument/2006/math" xmlns:w="http://schemas.openxmlformats.org/wordprocessingml/2006/main">
-  <p:cSld name="">
+<p:notes xmlns:a="http://schemas.openxmlformats.org/drawingml/2006/main" xmlns:r="http://schemas.openxmlformats.org/officeDocument/2006/relationships" xmlns:p="http://schemas.openxmlformats.org/presentationml/2006/main">
+  <p:cSld>
     <p:spTree>
       <p:nvGrpSpPr>
         <p:cNvPr id="1" name=""/>
@@ -1627,7 +1643,7 @@
         <p:nvSpPr>
           <p:cNvPr id="1281688486" name="Slide Image Placeholder 1"/>
           <p:cNvSpPr>
-            <a:spLocks noChangeAspect="1" noGrp="1" noRot="1"/>
+            <a:spLocks noGrp="1" noRot="1" noChangeAspect="1"/>
           </p:cNvSpPr>
           <p:nvPr>
             <p:ph type="sldImg"/>
@@ -1677,7 +1693,7 @@
             </a:pPr>
             <a:fld id="{9F6C2A48-3D77-7BE2-EE5A-0222396F1E07}" type="slidenum">
               <a:rPr/>
-              <a:t>3</a:t>
+              <a:t>5</a:t>
             </a:fld>
             <a:endParaRPr/>
           </a:p>
@@ -1692,8 +1708,8 @@
 </file>
 
 <file path=ppt/notesSlides/notesSlide6.xml><?xml version="1.0" encoding="utf-8"?>
-<p:notes xmlns:a="http://schemas.openxmlformats.org/drawingml/2006/main" xmlns:r="http://schemas.openxmlformats.org/officeDocument/2006/relationships" xmlns:p="http://schemas.openxmlformats.org/presentationml/2006/main" xmlns:m="http://schemas.openxmlformats.org/officeDocument/2006/math" xmlns:w="http://schemas.openxmlformats.org/wordprocessingml/2006/main">
-  <p:cSld name="">
+<p:notes xmlns:a="http://schemas.openxmlformats.org/drawingml/2006/main" xmlns:r="http://schemas.openxmlformats.org/officeDocument/2006/relationships" xmlns:p="http://schemas.openxmlformats.org/presentationml/2006/main">
+  <p:cSld>
     <p:spTree>
       <p:nvGrpSpPr>
         <p:cNvPr id="1" name=""/>
@@ -1712,7 +1728,7 @@
         <p:nvSpPr>
           <p:cNvPr id="1873452942" name="Slide Image Placeholder 1"/>
           <p:cNvSpPr>
-            <a:spLocks noChangeAspect="1" noGrp="1" noRot="1"/>
+            <a:spLocks noGrp="1" noRot="1" noChangeAspect="1"/>
           </p:cNvSpPr>
           <p:nvPr>
             <p:ph type="sldImg"/>
@@ -1762,7 +1778,7 @@
             </a:pPr>
             <a:fld id="{18768EC4-D344-67C3-1C24-CF724D34C290}" type="slidenum">
               <a:rPr/>
-              <a:t>5</a:t>
+              <a:t>6</a:t>
             </a:fld>
             <a:endParaRPr/>
           </a:p>
@@ -1777,8 +1793,8 @@
 </file>
 
 <file path=ppt/notesSlides/notesSlide7.xml><?xml version="1.0" encoding="utf-8"?>
-<p:notes xmlns:a="http://schemas.openxmlformats.org/drawingml/2006/main" xmlns:r="http://schemas.openxmlformats.org/officeDocument/2006/relationships" xmlns:p="http://schemas.openxmlformats.org/presentationml/2006/main" xmlns:m="http://schemas.openxmlformats.org/officeDocument/2006/math" xmlns:w="http://schemas.openxmlformats.org/wordprocessingml/2006/main">
-  <p:cSld name="">
+<p:notes xmlns:a="http://schemas.openxmlformats.org/drawingml/2006/main" xmlns:r="http://schemas.openxmlformats.org/officeDocument/2006/relationships" xmlns:p="http://schemas.openxmlformats.org/presentationml/2006/main">
+  <p:cSld>
     <p:spTree>
       <p:nvGrpSpPr>
         <p:cNvPr id="1" name=""/>
@@ -1797,7 +1813,7 @@
         <p:nvSpPr>
           <p:cNvPr id="665538760" name="Slide Image Placeholder 1"/>
           <p:cNvSpPr>
-            <a:spLocks noChangeAspect="1" noGrp="1" noRot="1"/>
+            <a:spLocks noGrp="1" noRot="1" noChangeAspect="1"/>
           </p:cNvSpPr>
           <p:nvPr>
             <p:ph type="sldImg"/>
@@ -1847,7 +1863,7 @@
             </a:pPr>
             <a:fld id="{EADFCB82-4ABC-C1C4-5E79-18F3785DD755}" type="slidenum">
               <a:rPr/>
-              <a:t>5</a:t>
+              <a:t>7</a:t>
             </a:fld>
             <a:endParaRPr/>
           </a:p>
@@ -1862,8 +1878,8 @@
 </file>
 
 <file path=ppt/notesSlides/notesSlide8.xml><?xml version="1.0" encoding="utf-8"?>
-<p:notes xmlns:a="http://schemas.openxmlformats.org/drawingml/2006/main" xmlns:r="http://schemas.openxmlformats.org/officeDocument/2006/relationships" xmlns:p="http://schemas.openxmlformats.org/presentationml/2006/main" xmlns:m="http://schemas.openxmlformats.org/officeDocument/2006/math" xmlns:w="http://schemas.openxmlformats.org/wordprocessingml/2006/main">
-  <p:cSld name="">
+<p:notes xmlns:a="http://schemas.openxmlformats.org/drawingml/2006/main" xmlns:r="http://schemas.openxmlformats.org/officeDocument/2006/relationships" xmlns:p="http://schemas.openxmlformats.org/presentationml/2006/main">
+  <p:cSld>
     <p:spTree>
       <p:nvGrpSpPr>
         <p:cNvPr id="1" name=""/>
@@ -1882,7 +1898,7 @@
         <p:nvSpPr>
           <p:cNvPr id="339773094" name="Slide Image Placeholder 1"/>
           <p:cNvSpPr>
-            <a:spLocks noChangeAspect="1" noGrp="1" noRot="1"/>
+            <a:spLocks noGrp="1" noRot="1" noChangeAspect="1"/>
           </p:cNvSpPr>
           <p:nvPr>
             <p:ph type="sldImg"/>
@@ -1932,7 +1948,7 @@
             </a:pPr>
             <a:fld id="{C7A0886C-666E-9836-41C4-83E600BD9668}" type="slidenum">
               <a:rPr/>
-              <a:t>6</a:t>
+              <a:t>8</a:t>
             </a:fld>
             <a:endParaRPr/>
           </a:p>
@@ -1947,8 +1963,8 @@
 </file>
 
 <file path=ppt/notesSlides/notesSlide9.xml><?xml version="1.0" encoding="utf-8"?>
-<p:notes xmlns:a="http://schemas.openxmlformats.org/drawingml/2006/main" xmlns:r="http://schemas.openxmlformats.org/officeDocument/2006/relationships" xmlns:p="http://schemas.openxmlformats.org/presentationml/2006/main" xmlns:m="http://schemas.openxmlformats.org/officeDocument/2006/math" xmlns:w="http://schemas.openxmlformats.org/wordprocessingml/2006/main">
-  <p:cSld name="">
+<p:notes xmlns:a="http://schemas.openxmlformats.org/drawingml/2006/main" xmlns:r="http://schemas.openxmlformats.org/officeDocument/2006/relationships" xmlns:p="http://schemas.openxmlformats.org/presentationml/2006/main">
+  <p:cSld>
     <p:spTree>
       <p:nvGrpSpPr>
         <p:cNvPr id="1" name=""/>
@@ -1967,7 +1983,7 @@
         <p:nvSpPr>
           <p:cNvPr id="519179697" name="Slide Image Placeholder 1"/>
           <p:cNvSpPr>
-            <a:spLocks noChangeAspect="1" noGrp="1" noRot="1"/>
+            <a:spLocks noGrp="1" noRot="1" noChangeAspect="1"/>
           </p:cNvSpPr>
           <p:nvPr>
             <p:ph type="sldImg"/>
@@ -2017,7 +2033,7 @@
             </a:pPr>
             <a:fld id="{86902816-76A5-4AF4-1E9E-ABAE37AB74E6}" type="slidenum">
               <a:rPr/>
-              <a:t>7</a:t>
+              <a:t>9</a:t>
             </a:fld>
             <a:endParaRPr/>
           </a:p>
@@ -2032,7 +2048,7 @@
 </file>
 
 <file path=ppt/slideLayouts/slideLayout1.xml><?xml version="1.0" encoding="utf-8"?>
-<p:sldLayout xmlns:a="http://schemas.openxmlformats.org/drawingml/2006/main" xmlns:r="http://schemas.openxmlformats.org/officeDocument/2006/relationships" xmlns:p="http://schemas.openxmlformats.org/presentationml/2006/main" xmlns:m="http://schemas.openxmlformats.org/officeDocument/2006/math" xmlns:w="http://schemas.openxmlformats.org/wordprocessingml/2006/main" matchingName="" preserve="1" showMasterPhAnim="0" showMasterSp="1" type="title" userDrawn="1">
+<p:sldLayout xmlns:a="http://schemas.openxmlformats.org/drawingml/2006/main" xmlns:r="http://schemas.openxmlformats.org/officeDocument/2006/relationships" xmlns:p="http://schemas.openxmlformats.org/presentationml/2006/main" showMasterPhAnim="0" type="title" preserve="1" userDrawn="1">
   <p:cSld name="Титульный слайд">
     <p:spTree>
       <p:nvGrpSpPr>
@@ -2171,7 +2187,7 @@
             </a:pPr>
             <a:fld id="{464E949B-752F-4A71-A243-047E6613A32E}" type="datetime1">
               <a:rPr lang="ru-RU"/>
-              <a:t>02.06.2026</a:t>
+              <a:t>23.06.2026</a:t>
             </a:fld>
             <a:endParaRPr lang="ru-RU"/>
           </a:p>
@@ -2234,7 +2250,7 @@
 </file>
 
 <file path=ppt/slideLayouts/slideLayout10.xml><?xml version="1.0" encoding="utf-8"?>
-<p:sldLayout xmlns:a="http://schemas.openxmlformats.org/drawingml/2006/main" xmlns:r="http://schemas.openxmlformats.org/officeDocument/2006/relationships" xmlns:p="http://schemas.openxmlformats.org/presentationml/2006/main" xmlns:m="http://schemas.openxmlformats.org/officeDocument/2006/math" xmlns:w="http://schemas.openxmlformats.org/wordprocessingml/2006/main" matchingName="" preserve="1" showMasterPhAnim="0" showMasterSp="1" type="vertTx" userDrawn="1">
+<p:sldLayout xmlns:a="http://schemas.openxmlformats.org/drawingml/2006/main" xmlns:r="http://schemas.openxmlformats.org/officeDocument/2006/relationships" xmlns:p="http://schemas.openxmlformats.org/presentationml/2006/main" showMasterPhAnim="0" type="vertTx" preserve="1" userDrawn="1">
   <p:cSld name="Заголовок и вертикальный текст">
     <p:spTree>
       <p:nvGrpSpPr>
@@ -2362,7 +2378,7 @@
             </a:pPr>
             <a:fld id="{9A5CB82E-191B-43B0-A738-8B9909F88B35}" type="datetime1">
               <a:rPr lang="ru-RU"/>
-              <a:t>02.06.2026</a:t>
+              <a:t>23.06.2026</a:t>
             </a:fld>
             <a:endParaRPr lang="ru-RU"/>
           </a:p>
@@ -2425,7 +2441,7 @@
 </file>
 
 <file path=ppt/slideLayouts/slideLayout11.xml><?xml version="1.0" encoding="utf-8"?>
-<p:sldLayout xmlns:a="http://schemas.openxmlformats.org/drawingml/2006/main" xmlns:r="http://schemas.openxmlformats.org/officeDocument/2006/relationships" xmlns:p="http://schemas.openxmlformats.org/presentationml/2006/main" xmlns:m="http://schemas.openxmlformats.org/officeDocument/2006/math" xmlns:w="http://schemas.openxmlformats.org/wordprocessingml/2006/main" matchingName="" preserve="1" showMasterPhAnim="0" showMasterSp="1" type="vertTitleAndTx" userDrawn="1">
+<p:sldLayout xmlns:a="http://schemas.openxmlformats.org/drawingml/2006/main" xmlns:r="http://schemas.openxmlformats.org/officeDocument/2006/relationships" xmlns:p="http://schemas.openxmlformats.org/presentationml/2006/main" showMasterPhAnim="0" type="vertTitleAndTx" preserve="1" userDrawn="1">
   <p:cSld name="Вертикальный заголовок и текст">
     <p:spTree>
       <p:nvGrpSpPr>
@@ -2563,7 +2579,7 @@
             </a:pPr>
             <a:fld id="{9730D1F9-634A-465B-B25E-CF53749F388C}" type="datetime1">
               <a:rPr lang="ru-RU"/>
-              <a:t>02.06.2026</a:t>
+              <a:t>23.06.2026</a:t>
             </a:fld>
             <a:endParaRPr lang="ru-RU"/>
           </a:p>
@@ -2626,7 +2642,7 @@
 </file>
 
 <file path=ppt/slideLayouts/slideLayout12.xml><?xml version="1.0" encoding="utf-8"?>
-<p:sldLayout xmlns:a="http://schemas.openxmlformats.org/drawingml/2006/main" xmlns:r="http://schemas.openxmlformats.org/officeDocument/2006/relationships" xmlns:p="http://schemas.openxmlformats.org/presentationml/2006/main" xmlns:m="http://schemas.openxmlformats.org/officeDocument/2006/math" xmlns:w="http://schemas.openxmlformats.org/wordprocessingml/2006/main" matchingName="" preserve="1" showMasterPhAnim="0" showMasterSp="1" type="title" userDrawn="1">
+<p:sldLayout xmlns:a="http://schemas.openxmlformats.org/drawingml/2006/main" xmlns:r="http://schemas.openxmlformats.org/officeDocument/2006/relationships" xmlns:p="http://schemas.openxmlformats.org/presentationml/2006/main" showMasterPhAnim="0" type="title" preserve="1" userDrawn="1">
   <p:cSld name="1_Титульный слайд">
     <p:spTree>
       <p:nvGrpSpPr>
@@ -2892,7 +2908,7 @@
             </a:pPr>
             <a:fld id="{62D43468-8071-4A79-9713-FA03F2A56FC7}" type="datetime1">
               <a:rPr lang="ru-RU"/>
-              <a:t>02.06.2026</a:t>
+              <a:t>23.06.2026</a:t>
             </a:fld>
             <a:endParaRPr lang="ru-RU"/>
           </a:p>
@@ -2960,7 +2976,7 @@
 </file>
 
 <file path=ppt/slideLayouts/slideLayout13.xml><?xml version="1.0" encoding="utf-8"?>
-<p:sldLayout xmlns:a="http://schemas.openxmlformats.org/drawingml/2006/main" xmlns:r="http://schemas.openxmlformats.org/officeDocument/2006/relationships" xmlns:p="http://schemas.openxmlformats.org/presentationml/2006/main" xmlns:m="http://schemas.openxmlformats.org/officeDocument/2006/math" xmlns:w="http://schemas.openxmlformats.org/wordprocessingml/2006/main" matchingName="" preserve="1" showMasterPhAnim="0" showMasterSp="1" type="obj" userDrawn="1">
+<p:sldLayout xmlns:a="http://schemas.openxmlformats.org/drawingml/2006/main" xmlns:r="http://schemas.openxmlformats.org/officeDocument/2006/relationships" xmlns:p="http://schemas.openxmlformats.org/presentationml/2006/main" showMasterPhAnim="0" type="obj" preserve="1" userDrawn="1">
   <p:cSld name="1_Заголовок и объект">
     <p:spTree>
       <p:nvGrpSpPr>
@@ -3211,7 +3227,7 @@
             </a:pPr>
             <a:fld id="{3AAA47A0-2EBA-44E2-BFE5-02832F0BA229}" type="datetime1">
               <a:rPr lang="ru-RU"/>
-              <a:t>02.06.2026</a:t>
+              <a:t>23.06.2026</a:t>
             </a:fld>
             <a:endParaRPr lang="ru-RU"/>
           </a:p>
@@ -3274,7 +3290,7 @@
 </file>
 
 <file path=ppt/slideLayouts/slideLayout14.xml><?xml version="1.0" encoding="utf-8"?>
-<p:sldLayout xmlns:a="http://schemas.openxmlformats.org/drawingml/2006/main" xmlns:r="http://schemas.openxmlformats.org/officeDocument/2006/relationships" xmlns:p="http://schemas.openxmlformats.org/presentationml/2006/main" xmlns:m="http://schemas.openxmlformats.org/officeDocument/2006/math" xmlns:w="http://schemas.openxmlformats.org/wordprocessingml/2006/main" matchingName="" preserve="1" showMasterPhAnim="0" showMasterSp="1" type="secHead" userDrawn="1">
+<p:sldLayout xmlns:a="http://schemas.openxmlformats.org/drawingml/2006/main" xmlns:r="http://schemas.openxmlformats.org/officeDocument/2006/relationships" xmlns:p="http://schemas.openxmlformats.org/presentationml/2006/main" showMasterPhAnim="0" type="secHead" preserve="1" userDrawn="1">
   <p:cSld name="1_Заголовок раздела">
     <p:spTree>
       <p:nvGrpSpPr>
@@ -3594,7 +3610,7 @@
             </a:pPr>
             <a:fld id="{3E3FDA68-1834-4C1F-B2CC-B0A0766ED8A5}" type="datetime1">
               <a:rPr lang="ru-RU"/>
-              <a:t>02.06.2026</a:t>
+              <a:t>23.06.2026</a:t>
             </a:fld>
             <a:endParaRPr lang="ru-RU"/>
           </a:p>
@@ -3662,7 +3678,7 @@
 </file>
 
 <file path=ppt/slideLayouts/slideLayout15.xml><?xml version="1.0" encoding="utf-8"?>
-<p:sldLayout xmlns:a="http://schemas.openxmlformats.org/drawingml/2006/main" xmlns:r="http://schemas.openxmlformats.org/officeDocument/2006/relationships" xmlns:p="http://schemas.openxmlformats.org/presentationml/2006/main" xmlns:m="http://schemas.openxmlformats.org/officeDocument/2006/math" xmlns:w="http://schemas.openxmlformats.org/wordprocessingml/2006/main" matchingName="" preserve="1" showMasterPhAnim="0" showMasterSp="1" type="twoObj" userDrawn="1">
+<p:sldLayout xmlns:a="http://schemas.openxmlformats.org/drawingml/2006/main" xmlns:r="http://schemas.openxmlformats.org/officeDocument/2006/relationships" xmlns:p="http://schemas.openxmlformats.org/presentationml/2006/main" showMasterPhAnim="0" type="twoObj" preserve="1" userDrawn="1">
   <p:cSld name="1_Два объекта">
     <p:spTree>
       <p:nvGrpSpPr>
@@ -3989,7 +4005,7 @@
             </a:pPr>
             <a:fld id="{29303EE3-BBFB-41F4-B1FB-4E4CF27ED9D2}" type="datetime1">
               <a:rPr lang="ru-RU"/>
-              <a:t>02.06.2026</a:t>
+              <a:t>23.06.2026</a:t>
             </a:fld>
             <a:endParaRPr lang="ru-RU"/>
           </a:p>
@@ -4052,7 +4068,7 @@
 </file>
 
 <file path=ppt/slideLayouts/slideLayout16.xml><?xml version="1.0" encoding="utf-8"?>
-<p:sldLayout xmlns:a="http://schemas.openxmlformats.org/drawingml/2006/main" xmlns:r="http://schemas.openxmlformats.org/officeDocument/2006/relationships" xmlns:p="http://schemas.openxmlformats.org/presentationml/2006/main" xmlns:m="http://schemas.openxmlformats.org/officeDocument/2006/math" xmlns:w="http://schemas.openxmlformats.org/wordprocessingml/2006/main" matchingName="" preserve="1" showMasterPhAnim="0" showMasterSp="1" type="twoTxTwoObj" userDrawn="1">
+<p:sldLayout xmlns:a="http://schemas.openxmlformats.org/drawingml/2006/main" xmlns:r="http://schemas.openxmlformats.org/officeDocument/2006/relationships" xmlns:p="http://schemas.openxmlformats.org/presentationml/2006/main" showMasterPhAnim="0" type="twoTxTwoObj" preserve="1" userDrawn="1">
   <p:cSld name="1_Сравнение">
     <p:spTree>
       <p:nvGrpSpPr>
@@ -4520,7 +4536,7 @@
             </a:pPr>
             <a:fld id="{596D59AE-5854-4542-9FF1-1EC4E5A530D5}" type="datetime1">
               <a:rPr lang="ru-RU"/>
-              <a:t>02.06.2026</a:t>
+              <a:t>23.06.2026</a:t>
             </a:fld>
             <a:endParaRPr lang="ru-RU"/>
           </a:p>
@@ -4583,7 +4599,7 @@
 </file>
 
 <file path=ppt/slideLayouts/slideLayout17.xml><?xml version="1.0" encoding="utf-8"?>
-<p:sldLayout xmlns:a="http://schemas.openxmlformats.org/drawingml/2006/main" xmlns:r="http://schemas.openxmlformats.org/officeDocument/2006/relationships" xmlns:p="http://schemas.openxmlformats.org/presentationml/2006/main" xmlns:m="http://schemas.openxmlformats.org/officeDocument/2006/math" xmlns:w="http://schemas.openxmlformats.org/wordprocessingml/2006/main" matchingName="" preserve="1" showMasterPhAnim="0" showMasterSp="1" type="titleOnly" userDrawn="1">
+<p:sldLayout xmlns:a="http://schemas.openxmlformats.org/drawingml/2006/main" xmlns:r="http://schemas.openxmlformats.org/officeDocument/2006/relationships" xmlns:p="http://schemas.openxmlformats.org/presentationml/2006/main" showMasterPhAnim="0" type="titleOnly" preserve="1" userDrawn="1">
   <p:cSld name="1_Только заголовок">
     <p:spTree>
       <p:nvGrpSpPr>
@@ -4768,7 +4784,7 @@
             </a:pPr>
             <a:fld id="{0C785264-56B0-460E-A2C2-C886D7CC0782}" type="datetime1">
               <a:rPr lang="ru-RU"/>
-              <a:t>02.06.2026</a:t>
+              <a:t>23.06.2026</a:t>
             </a:fld>
             <a:endParaRPr lang="ru-RU"/>
           </a:p>
@@ -4831,7 +4847,7 @@
 </file>
 
 <file path=ppt/slideLayouts/slideLayout18.xml><?xml version="1.0" encoding="utf-8"?>
-<p:sldLayout xmlns:a="http://schemas.openxmlformats.org/drawingml/2006/main" xmlns:r="http://schemas.openxmlformats.org/officeDocument/2006/relationships" xmlns:p="http://schemas.openxmlformats.org/presentationml/2006/main" xmlns:m="http://schemas.openxmlformats.org/officeDocument/2006/math" xmlns:w="http://schemas.openxmlformats.org/wordprocessingml/2006/main" matchingName="" preserve="1" showMasterPhAnim="0" showMasterSp="1" type="blank" userDrawn="1">
+<p:sldLayout xmlns:a="http://schemas.openxmlformats.org/drawingml/2006/main" xmlns:r="http://schemas.openxmlformats.org/officeDocument/2006/relationships" xmlns:p="http://schemas.openxmlformats.org/presentationml/2006/main" showMasterPhAnim="0" type="blank" preserve="1" userDrawn="1">
   <p:cSld name="1_Пустой слайд">
     <p:spTree>
       <p:nvGrpSpPr>
@@ -4927,7 +4943,7 @@
             </a:pPr>
             <a:fld id="{0AAA0283-F641-48C8-BAB7-8AC6BD361923}" type="datetime1">
               <a:rPr lang="ru-RU"/>
-              <a:t>02.06.2026</a:t>
+              <a:t>23.06.2026</a:t>
             </a:fld>
             <a:endParaRPr lang="ru-RU"/>
           </a:p>
@@ -4990,7 +5006,7 @@
 </file>
 
 <file path=ppt/slideLayouts/slideLayout19.xml><?xml version="1.0" encoding="utf-8"?>
-<p:sldLayout xmlns:a="http://schemas.openxmlformats.org/drawingml/2006/main" xmlns:r="http://schemas.openxmlformats.org/officeDocument/2006/relationships" xmlns:p="http://schemas.openxmlformats.org/presentationml/2006/main" xmlns:m="http://schemas.openxmlformats.org/officeDocument/2006/math" xmlns:w="http://schemas.openxmlformats.org/wordprocessingml/2006/main" matchingName="" preserve="1" showMasterPhAnim="0" showMasterSp="1" type="objTx" userDrawn="1">
+<p:sldLayout xmlns:a="http://schemas.openxmlformats.org/drawingml/2006/main" xmlns:r="http://schemas.openxmlformats.org/officeDocument/2006/relationships" xmlns:p="http://schemas.openxmlformats.org/presentationml/2006/main" showMasterPhAnim="0" type="objTx" preserve="1" userDrawn="1">
   <p:cSld name="1_Объект с подписью">
     <p:spTree>
       <p:nvGrpSpPr>
@@ -5325,7 +5341,7 @@
             </a:pPr>
             <a:fld id="{8C10133D-16A4-41F1-B8F2-C1B694F00730}" type="datetime1">
               <a:rPr lang="ru-RU"/>
-              <a:t>02.06.2026</a:t>
+              <a:t>23.06.2026</a:t>
             </a:fld>
             <a:endParaRPr lang="ru-RU"/>
           </a:p>
@@ -5388,7 +5404,7 @@
 </file>
 
 <file path=ppt/slideLayouts/slideLayout2.xml><?xml version="1.0" encoding="utf-8"?>
-<p:sldLayout xmlns:a="http://schemas.openxmlformats.org/drawingml/2006/main" xmlns:r="http://schemas.openxmlformats.org/officeDocument/2006/relationships" xmlns:p="http://schemas.openxmlformats.org/presentationml/2006/main" xmlns:m="http://schemas.openxmlformats.org/officeDocument/2006/math" xmlns:w="http://schemas.openxmlformats.org/wordprocessingml/2006/main" matchingName="" preserve="1" showMasterPhAnim="0" showMasterSp="1" type="obj" userDrawn="1">
+<p:sldLayout xmlns:a="http://schemas.openxmlformats.org/drawingml/2006/main" xmlns:r="http://schemas.openxmlformats.org/officeDocument/2006/relationships" xmlns:p="http://schemas.openxmlformats.org/presentationml/2006/main" showMasterPhAnim="0" type="obj" preserve="1" userDrawn="1">
   <p:cSld name="Заголовок и объект">
     <p:spTree>
       <p:nvGrpSpPr>
@@ -5516,7 +5532,7 @@
             </a:pPr>
             <a:fld id="{DB2D18A6-5519-416E-A160-669FC8C75E20}" type="datetime1">
               <a:rPr lang="ru-RU"/>
-              <a:t>02.06.2026</a:t>
+              <a:t>23.06.2026</a:t>
             </a:fld>
             <a:endParaRPr lang="ru-RU"/>
           </a:p>
@@ -5579,7 +5595,7 @@
 </file>
 
 <file path=ppt/slideLayouts/slideLayout20.xml><?xml version="1.0" encoding="utf-8"?>
-<p:sldLayout xmlns:a="http://schemas.openxmlformats.org/drawingml/2006/main" xmlns:r="http://schemas.openxmlformats.org/officeDocument/2006/relationships" xmlns:p="http://schemas.openxmlformats.org/presentationml/2006/main" xmlns:m="http://schemas.openxmlformats.org/officeDocument/2006/math" xmlns:w="http://schemas.openxmlformats.org/wordprocessingml/2006/main" matchingName="" preserve="1" showMasterPhAnim="0" showMasterSp="1" type="picTx" userDrawn="1">
+<p:sldLayout xmlns:a="http://schemas.openxmlformats.org/drawingml/2006/main" xmlns:r="http://schemas.openxmlformats.org/officeDocument/2006/relationships" xmlns:p="http://schemas.openxmlformats.org/presentationml/2006/main" showMasterPhAnim="0" type="picTx" preserve="1" userDrawn="1">
   <p:cSld name="1_Рисунок с подписью">
     <p:spTree>
       <p:nvGrpSpPr>
@@ -5759,7 +5775,7 @@
         <p:nvSpPr>
           <p:cNvPr id="494512508" name="Picture Placeholder 2"/>
           <p:cNvSpPr>
-            <a:spLocks noChangeAspect="1" noGrp="1"/>
+            <a:spLocks noGrp="1" noChangeAspect="1"/>
           </p:cNvSpPr>
           <p:nvPr>
             <p:ph type="pic" idx="1"/>
@@ -5925,7 +5941,7 @@
             </a:pPr>
             <a:fld id="{665D9257-9E03-404F-95EE-486F8868E3F2}" type="datetime1">
               <a:rPr lang="ru-RU"/>
-              <a:t>02.06.2026</a:t>
+              <a:t>23.06.2026</a:t>
             </a:fld>
             <a:endParaRPr lang="ru-RU"/>
           </a:p>
@@ -5988,7 +6004,7 @@
 </file>
 
 <file path=ppt/slideLayouts/slideLayout21.xml><?xml version="1.0" encoding="utf-8"?>
-<p:sldLayout xmlns:a="http://schemas.openxmlformats.org/drawingml/2006/main" xmlns:r="http://schemas.openxmlformats.org/officeDocument/2006/relationships" xmlns:p="http://schemas.openxmlformats.org/presentationml/2006/main" xmlns:m="http://schemas.openxmlformats.org/officeDocument/2006/math" xmlns:w="http://schemas.openxmlformats.org/wordprocessingml/2006/main" matchingName="" preserve="1" showMasterPhAnim="0" showMasterSp="1" userDrawn="1">
+<p:sldLayout xmlns:a="http://schemas.openxmlformats.org/drawingml/2006/main" xmlns:r="http://schemas.openxmlformats.org/officeDocument/2006/relationships" xmlns:p="http://schemas.openxmlformats.org/presentationml/2006/main" showMasterPhAnim="0" preserve="1" userDrawn="1">
   <p:cSld name="Панорамная фотография с подписью">
     <p:spTree>
       <p:nvGrpSpPr>
@@ -6168,7 +6184,7 @@
         <p:nvSpPr>
           <p:cNvPr id="962049135" name="Picture Placeholder 2"/>
           <p:cNvSpPr>
-            <a:spLocks noChangeAspect="1" noGrp="1"/>
+            <a:spLocks noGrp="1" noChangeAspect="1"/>
           </p:cNvSpPr>
           <p:nvPr>
             <p:ph type="pic" idx="1"/>
@@ -6334,7 +6350,7 @@
             </a:pPr>
             <a:fld id="{8C6571D8-6559-4269-B7BA-EACD5F8873B8}" type="datetime1">
               <a:rPr lang="ru-RU"/>
-              <a:t>02.06.2026</a:t>
+              <a:t>23.06.2026</a:t>
             </a:fld>
             <a:endParaRPr lang="ru-RU"/>
           </a:p>
@@ -6402,7 +6418,7 @@
 </file>
 
 <file path=ppt/slideLayouts/slideLayout22.xml><?xml version="1.0" encoding="utf-8"?>
-<p:sldLayout xmlns:a="http://schemas.openxmlformats.org/drawingml/2006/main" xmlns:r="http://schemas.openxmlformats.org/officeDocument/2006/relationships" xmlns:p="http://schemas.openxmlformats.org/presentationml/2006/main" xmlns:m="http://schemas.openxmlformats.org/officeDocument/2006/math" xmlns:w="http://schemas.openxmlformats.org/wordprocessingml/2006/main" matchingName="" preserve="1" showMasterPhAnim="0" showMasterSp="1" userDrawn="1">
+<p:sldLayout xmlns:a="http://schemas.openxmlformats.org/drawingml/2006/main" xmlns:r="http://schemas.openxmlformats.org/officeDocument/2006/relationships" xmlns:p="http://schemas.openxmlformats.org/presentationml/2006/main" showMasterPhAnim="0" preserve="1" userDrawn="1">
   <p:cSld name="Заголовок и подпись">
     <p:spTree>
       <p:nvGrpSpPr>
@@ -6664,7 +6680,7 @@
             </a:pPr>
             <a:fld id="{952607F1-4CB0-4741-B752-77795AAFB6CE}" type="datetime1">
               <a:rPr lang="ru-RU"/>
-              <a:t>02.06.2026</a:t>
+              <a:t>23.06.2026</a:t>
             </a:fld>
             <a:endParaRPr lang="ru-RU"/>
           </a:p>
@@ -6732,7 +6748,7 @@
 </file>
 
 <file path=ppt/slideLayouts/slideLayout23.xml><?xml version="1.0" encoding="utf-8"?>
-<p:sldLayout xmlns:a="http://schemas.openxmlformats.org/drawingml/2006/main" xmlns:r="http://schemas.openxmlformats.org/officeDocument/2006/relationships" xmlns:p="http://schemas.openxmlformats.org/presentationml/2006/main" xmlns:m="http://schemas.openxmlformats.org/officeDocument/2006/math" xmlns:w="http://schemas.openxmlformats.org/wordprocessingml/2006/main" matchingName="" preserve="1" showMasterPhAnim="0" showMasterSp="1" userDrawn="1">
+<p:sldLayout xmlns:a="http://schemas.openxmlformats.org/drawingml/2006/main" xmlns:r="http://schemas.openxmlformats.org/officeDocument/2006/relationships" xmlns:p="http://schemas.openxmlformats.org/presentationml/2006/main" showMasterPhAnim="0" preserve="1" userDrawn="1">
   <p:cSld name="Цитата с подписью">
     <p:spTree>
       <p:nvGrpSpPr>
@@ -7066,7 +7082,7 @@
             </a:pPr>
             <a:fld id="{4D0F2E69-AF6B-4D0C-824F-3DADD254BF95}" type="datetime1">
               <a:rPr lang="ru-RU"/>
-              <a:t>02.06.2026</a:t>
+              <a:t>23.06.2026</a:t>
             </a:fld>
             <a:endParaRPr lang="ru-RU"/>
           </a:p>
@@ -7342,7 +7358,7 @@
 </file>
 
 <file path=ppt/slideLayouts/slideLayout24.xml><?xml version="1.0" encoding="utf-8"?>
-<p:sldLayout xmlns:a="http://schemas.openxmlformats.org/drawingml/2006/main" xmlns:r="http://schemas.openxmlformats.org/officeDocument/2006/relationships" xmlns:p="http://schemas.openxmlformats.org/presentationml/2006/main" xmlns:m="http://schemas.openxmlformats.org/officeDocument/2006/math" xmlns:w="http://schemas.openxmlformats.org/wordprocessingml/2006/main" matchingName="" preserve="1" showMasterPhAnim="0" showMasterSp="1" userDrawn="1">
+<p:sldLayout xmlns:a="http://schemas.openxmlformats.org/drawingml/2006/main" xmlns:r="http://schemas.openxmlformats.org/officeDocument/2006/relationships" xmlns:p="http://schemas.openxmlformats.org/presentationml/2006/main" showMasterPhAnim="0" preserve="1" userDrawn="1">
   <p:cSld name="Карточка имени">
     <p:spTree>
       <p:nvGrpSpPr>
@@ -7604,7 +7620,7 @@
             </a:pPr>
             <a:fld id="{7B61B190-EA0F-465A-8B4C-40AE0FF8CD42}" type="datetime1">
               <a:rPr lang="ru-RU"/>
-              <a:t>02.06.2026</a:t>
+              <a:t>23.06.2026</a:t>
             </a:fld>
             <a:endParaRPr lang="ru-RU"/>
           </a:p>
@@ -7672,7 +7688,7 @@
 </file>
 
 <file path=ppt/slideLayouts/slideLayout25.xml><?xml version="1.0" encoding="utf-8"?>
-<p:sldLayout xmlns:a="http://schemas.openxmlformats.org/drawingml/2006/main" xmlns:r="http://schemas.openxmlformats.org/officeDocument/2006/relationships" xmlns:p="http://schemas.openxmlformats.org/presentationml/2006/main" xmlns:m="http://schemas.openxmlformats.org/officeDocument/2006/math" xmlns:w="http://schemas.openxmlformats.org/wordprocessingml/2006/main" matchingName="" preserve="1" showMasterPhAnim="0" showMasterSp="1" userDrawn="1">
+<p:sldLayout xmlns:a="http://schemas.openxmlformats.org/drawingml/2006/main" xmlns:r="http://schemas.openxmlformats.org/officeDocument/2006/relationships" xmlns:p="http://schemas.openxmlformats.org/presentationml/2006/main" showMasterPhAnim="0" preserve="1" userDrawn="1">
   <p:cSld name="Три колонки">
     <p:spTree>
       <p:nvGrpSpPr>
@@ -8294,7 +8310,7 @@
             </a:pPr>
             <a:fld id="{EABFF2AA-51FD-495E-9B6C-53E0CCE8720E}" type="datetime1">
               <a:rPr lang="ru-RU"/>
-              <a:t>02.06.2026</a:t>
+              <a:t>23.06.2026</a:t>
             </a:fld>
             <a:endParaRPr lang="ru-RU"/>
           </a:p>
@@ -8357,7 +8373,7 @@
 </file>
 
 <file path=ppt/slideLayouts/slideLayout26.xml><?xml version="1.0" encoding="utf-8"?>
-<p:sldLayout xmlns:a="http://schemas.openxmlformats.org/drawingml/2006/main" xmlns:r="http://schemas.openxmlformats.org/officeDocument/2006/relationships" xmlns:p="http://schemas.openxmlformats.org/presentationml/2006/main" xmlns:m="http://schemas.openxmlformats.org/officeDocument/2006/math" xmlns:w="http://schemas.openxmlformats.org/wordprocessingml/2006/main" matchingName="" preserve="1" showMasterPhAnim="0" showMasterSp="1" userDrawn="1">
+<p:sldLayout xmlns:a="http://schemas.openxmlformats.org/drawingml/2006/main" xmlns:r="http://schemas.openxmlformats.org/officeDocument/2006/relationships" xmlns:p="http://schemas.openxmlformats.org/presentationml/2006/main" showMasterPhAnim="0" preserve="1" userDrawn="1">
   <p:cSld name="Столбец с тремя рисунками">
     <p:spTree>
       <p:nvGrpSpPr>
@@ -8605,7 +8621,7 @@
         <p:nvSpPr>
           <p:cNvPr id="289936537" name="Picture Placeholder 2"/>
           <p:cNvSpPr>
-            <a:spLocks noChangeAspect="1" noGrp="1"/>
+            <a:spLocks noGrp="1" noChangeAspect="1"/>
           </p:cNvSpPr>
           <p:nvPr>
             <p:ph type="pic" idx="15"/>
@@ -8831,7 +8847,7 @@
         <p:nvSpPr>
           <p:cNvPr id="1224020366" name="Picture Placeholder 2"/>
           <p:cNvSpPr>
-            <a:spLocks noChangeAspect="1" noGrp="1"/>
+            <a:spLocks noGrp="1" noChangeAspect="1"/>
           </p:cNvSpPr>
           <p:nvPr>
             <p:ph type="pic" idx="21"/>
@@ -9057,7 +9073,7 @@
         <p:nvSpPr>
           <p:cNvPr id="1892102309" name="Picture Placeholder 2"/>
           <p:cNvSpPr>
-            <a:spLocks noChangeAspect="1" noGrp="1"/>
+            <a:spLocks noGrp="1" noChangeAspect="1"/>
           </p:cNvSpPr>
           <p:nvPr>
             <p:ph type="pic" idx="22"/>
@@ -9225,7 +9241,7 @@
             </a:pPr>
             <a:fld id="{AA532452-DB40-464D-817C-83D7743D6F57}" type="datetime1">
               <a:rPr lang="ru-RU"/>
-              <a:t>02.06.2026</a:t>
+              <a:t>23.06.2026</a:t>
             </a:fld>
             <a:endParaRPr lang="ru-RU"/>
           </a:p>
@@ -9288,7 +9304,7 @@
 </file>
 
 <file path=ppt/slideLayouts/slideLayout27.xml><?xml version="1.0" encoding="utf-8"?>
-<p:sldLayout xmlns:a="http://schemas.openxmlformats.org/drawingml/2006/main" xmlns:r="http://schemas.openxmlformats.org/officeDocument/2006/relationships" xmlns:p="http://schemas.openxmlformats.org/presentationml/2006/main" xmlns:m="http://schemas.openxmlformats.org/officeDocument/2006/math" xmlns:w="http://schemas.openxmlformats.org/wordprocessingml/2006/main" matchingName="" preserve="1" showMasterPhAnim="0" showMasterSp="1" type="vertTx" userDrawn="1">
+<p:sldLayout xmlns:a="http://schemas.openxmlformats.org/drawingml/2006/main" xmlns:r="http://schemas.openxmlformats.org/officeDocument/2006/relationships" xmlns:p="http://schemas.openxmlformats.org/presentationml/2006/main" showMasterPhAnim="0" type="vertTx" preserve="1" userDrawn="1">
   <p:cSld name="1_Заголовок и вертикальный текст">
     <p:spTree>
       <p:nvGrpSpPr>
@@ -9543,7 +9559,7 @@
             </a:pPr>
             <a:fld id="{F87BE9EF-9137-4EC0-A2FE-700F392F3BEF}" type="datetime1">
               <a:rPr lang="ru-RU"/>
-              <a:t>02.06.2026</a:t>
+              <a:t>23.06.2026</a:t>
             </a:fld>
             <a:endParaRPr lang="ru-RU"/>
           </a:p>
@@ -9606,7 +9622,7 @@
 </file>
 
 <file path=ppt/slideLayouts/slideLayout28.xml><?xml version="1.0" encoding="utf-8"?>
-<p:sldLayout xmlns:a="http://schemas.openxmlformats.org/drawingml/2006/main" xmlns:r="http://schemas.openxmlformats.org/officeDocument/2006/relationships" xmlns:p="http://schemas.openxmlformats.org/presentationml/2006/main" xmlns:m="http://schemas.openxmlformats.org/officeDocument/2006/math" xmlns:w="http://schemas.openxmlformats.org/wordprocessingml/2006/main" matchingName="" preserve="1" showMasterPhAnim="0" showMasterSp="1" type="vertTitleAndTx" userDrawn="1">
+<p:sldLayout xmlns:a="http://schemas.openxmlformats.org/drawingml/2006/main" xmlns:r="http://schemas.openxmlformats.org/officeDocument/2006/relationships" xmlns:p="http://schemas.openxmlformats.org/presentationml/2006/main" showMasterPhAnim="0" type="vertTitleAndTx" preserve="1" userDrawn="1">
   <p:cSld name="1_Вертикальный заголовок и текст">
     <p:spTree>
       <p:nvGrpSpPr>
@@ -9828,7 +9844,7 @@
             </a:pPr>
             <a:fld id="{2BF7793B-D180-44C4-B91E-57912C70F4D0}" type="datetime1">
               <a:rPr lang="ru-RU"/>
-              <a:t>02.06.2026</a:t>
+              <a:t>23.06.2026</a:t>
             </a:fld>
             <a:endParaRPr lang="ru-RU"/>
           </a:p>
@@ -9905,7 +9921,7 @@
 </file>
 
 <file path=ppt/slideLayouts/slideLayout3.xml><?xml version="1.0" encoding="utf-8"?>
-<p:sldLayout xmlns:a="http://schemas.openxmlformats.org/drawingml/2006/main" xmlns:r="http://schemas.openxmlformats.org/officeDocument/2006/relationships" xmlns:p="http://schemas.openxmlformats.org/presentationml/2006/main" xmlns:m="http://schemas.openxmlformats.org/officeDocument/2006/math" xmlns:w="http://schemas.openxmlformats.org/wordprocessingml/2006/main" matchingName="" preserve="1" showMasterPhAnim="0" showMasterSp="1" type="secHead" userDrawn="1">
+<p:sldLayout xmlns:a="http://schemas.openxmlformats.org/drawingml/2006/main" xmlns:r="http://schemas.openxmlformats.org/officeDocument/2006/relationships" xmlns:p="http://schemas.openxmlformats.org/presentationml/2006/main" showMasterPhAnim="0" type="secHead" preserve="1" userDrawn="1">
   <p:cSld name="Заголовок раздела">
     <p:spTree>
       <p:nvGrpSpPr>
@@ -10098,7 +10114,7 @@
             </a:pPr>
             <a:fld id="{9FDFF63E-A7E5-4C7D-A2C9-DA69D5675040}" type="datetime1">
               <a:rPr lang="ru-RU"/>
-              <a:t>02.06.2026</a:t>
+              <a:t>23.06.2026</a:t>
             </a:fld>
             <a:endParaRPr lang="ru-RU"/>
           </a:p>
@@ -10161,7 +10177,7 @@
 </file>
 
 <file path=ppt/slideLayouts/slideLayout4.xml><?xml version="1.0" encoding="utf-8"?>
-<p:sldLayout xmlns:a="http://schemas.openxmlformats.org/drawingml/2006/main" xmlns:r="http://schemas.openxmlformats.org/officeDocument/2006/relationships" xmlns:p="http://schemas.openxmlformats.org/presentationml/2006/main" xmlns:m="http://schemas.openxmlformats.org/officeDocument/2006/math" xmlns:w="http://schemas.openxmlformats.org/wordprocessingml/2006/main" matchingName="" preserve="1" showMasterPhAnim="0" showMasterSp="1" type="twoObj" userDrawn="1">
+<p:sldLayout xmlns:a="http://schemas.openxmlformats.org/drawingml/2006/main" xmlns:r="http://schemas.openxmlformats.org/officeDocument/2006/relationships" xmlns:p="http://schemas.openxmlformats.org/presentationml/2006/main" showMasterPhAnim="0" type="twoObj" preserve="1" userDrawn="1">
   <p:cSld name="Два объекта">
     <p:spTree>
       <p:nvGrpSpPr>
@@ -10365,7 +10381,7 @@
             </a:pPr>
             <a:fld id="{8464CDE6-6F92-4C74-BFB3-7167DEA2EA4E}" type="datetime1">
               <a:rPr lang="ru-RU"/>
-              <a:t>02.06.2026</a:t>
+              <a:t>23.06.2026</a:t>
             </a:fld>
             <a:endParaRPr lang="ru-RU"/>
           </a:p>
@@ -10428,7 +10444,7 @@
 </file>
 
 <file path=ppt/slideLayouts/slideLayout5.xml><?xml version="1.0" encoding="utf-8"?>
-<p:sldLayout xmlns:a="http://schemas.openxmlformats.org/drawingml/2006/main" xmlns:r="http://schemas.openxmlformats.org/officeDocument/2006/relationships" xmlns:p="http://schemas.openxmlformats.org/presentationml/2006/main" xmlns:m="http://schemas.openxmlformats.org/officeDocument/2006/math" xmlns:w="http://schemas.openxmlformats.org/wordprocessingml/2006/main" matchingName="" preserve="1" showMasterPhAnim="0" showMasterSp="1" type="twoTxTwoObj" userDrawn="1">
+<p:sldLayout xmlns:a="http://schemas.openxmlformats.org/drawingml/2006/main" xmlns:r="http://schemas.openxmlformats.org/officeDocument/2006/relationships" xmlns:p="http://schemas.openxmlformats.org/presentationml/2006/main" showMasterPhAnim="0" type="twoTxTwoObj" preserve="1" userDrawn="1">
   <p:cSld name="Сравнение">
     <p:spTree>
       <p:nvGrpSpPr>
@@ -10773,7 +10789,7 @@
             </a:pPr>
             <a:fld id="{79B7B28A-94DD-44EC-83BF-F9E9490C49B9}" type="datetime1">
               <a:rPr lang="ru-RU"/>
-              <a:t>02.06.2026</a:t>
+              <a:t>23.06.2026</a:t>
             </a:fld>
             <a:endParaRPr lang="ru-RU"/>
           </a:p>
@@ -10836,7 +10852,7 @@
 </file>
 
 <file path=ppt/slideLayouts/slideLayout6.xml><?xml version="1.0" encoding="utf-8"?>
-<p:sldLayout xmlns:a="http://schemas.openxmlformats.org/drawingml/2006/main" xmlns:r="http://schemas.openxmlformats.org/officeDocument/2006/relationships" xmlns:p="http://schemas.openxmlformats.org/presentationml/2006/main" xmlns:m="http://schemas.openxmlformats.org/officeDocument/2006/math" xmlns:w="http://schemas.openxmlformats.org/wordprocessingml/2006/main" matchingName="" preserve="1" showMasterPhAnim="0" showMasterSp="1" type="titleOnly" userDrawn="1">
+<p:sldLayout xmlns:a="http://schemas.openxmlformats.org/drawingml/2006/main" xmlns:r="http://schemas.openxmlformats.org/officeDocument/2006/relationships" xmlns:p="http://schemas.openxmlformats.org/presentationml/2006/main" showMasterPhAnim="0" type="titleOnly" preserve="1" userDrawn="1">
   <p:cSld name="Только заголовок">
     <p:spTree>
       <p:nvGrpSpPr>
@@ -10898,7 +10914,7 @@
             </a:pPr>
             <a:fld id="{19CBEF87-A1CE-4AD3-B312-24E4060B669E}" type="datetime1">
               <a:rPr lang="ru-RU"/>
-              <a:t>02.06.2026</a:t>
+              <a:t>23.06.2026</a:t>
             </a:fld>
             <a:endParaRPr lang="ru-RU"/>
           </a:p>
@@ -10961,7 +10977,7 @@
 </file>
 
 <file path=ppt/slideLayouts/slideLayout7.xml><?xml version="1.0" encoding="utf-8"?>
-<p:sldLayout xmlns:a="http://schemas.openxmlformats.org/drawingml/2006/main" xmlns:r="http://schemas.openxmlformats.org/officeDocument/2006/relationships" xmlns:p="http://schemas.openxmlformats.org/presentationml/2006/main" xmlns:m="http://schemas.openxmlformats.org/officeDocument/2006/math" xmlns:w="http://schemas.openxmlformats.org/wordprocessingml/2006/main" matchingName="" preserve="1" showMasterPhAnim="0" showMasterSp="1" type="blank" userDrawn="1">
+<p:sldLayout xmlns:a="http://schemas.openxmlformats.org/drawingml/2006/main" xmlns:r="http://schemas.openxmlformats.org/officeDocument/2006/relationships" xmlns:p="http://schemas.openxmlformats.org/presentationml/2006/main" showMasterPhAnim="0" type="blank" preserve="1" userDrawn="1">
   <p:cSld name="Пустой слайд">
     <p:spTree>
       <p:nvGrpSpPr>
@@ -10997,7 +11013,7 @@
             </a:pPr>
             <a:fld id="{C1A3597E-B3B5-450E-90FE-FB59F904A164}" type="datetime1">
               <a:rPr lang="ru-RU"/>
-              <a:t>02.06.2026</a:t>
+              <a:t>23.06.2026</a:t>
             </a:fld>
             <a:endParaRPr lang="ru-RU"/>
           </a:p>
@@ -11060,7 +11076,7 @@
 </file>
 
 <file path=ppt/slideLayouts/slideLayout8.xml><?xml version="1.0" encoding="utf-8"?>
-<p:sldLayout xmlns:a="http://schemas.openxmlformats.org/drawingml/2006/main" xmlns:r="http://schemas.openxmlformats.org/officeDocument/2006/relationships" xmlns:p="http://schemas.openxmlformats.org/presentationml/2006/main" xmlns:m="http://schemas.openxmlformats.org/officeDocument/2006/math" xmlns:w="http://schemas.openxmlformats.org/wordprocessingml/2006/main" matchingName="" preserve="1" showMasterPhAnim="0" showMasterSp="1" type="objTx" userDrawn="1">
+<p:sldLayout xmlns:a="http://schemas.openxmlformats.org/drawingml/2006/main" xmlns:r="http://schemas.openxmlformats.org/officeDocument/2006/relationships" xmlns:p="http://schemas.openxmlformats.org/presentationml/2006/main" showMasterPhAnim="0" type="objTx" preserve="1" userDrawn="1">
   <p:cSld name="Объект с подписью">
     <p:spTree>
       <p:nvGrpSpPr>
@@ -11298,7 +11314,7 @@
             </a:pPr>
             <a:fld id="{51C926F4-5876-4D6C-B300-7031A7F64CBB}" type="datetime1">
               <a:rPr lang="ru-RU"/>
-              <a:t>02.06.2026</a:t>
+              <a:t>23.06.2026</a:t>
             </a:fld>
             <a:endParaRPr lang="ru-RU"/>
           </a:p>
@@ -11361,7 +11377,7 @@
 </file>
 
 <file path=ppt/slideLayouts/slideLayout9.xml><?xml version="1.0" encoding="utf-8"?>
-<p:sldLayout xmlns:a="http://schemas.openxmlformats.org/drawingml/2006/main" xmlns:r="http://schemas.openxmlformats.org/officeDocument/2006/relationships" xmlns:p="http://schemas.openxmlformats.org/presentationml/2006/main" xmlns:m="http://schemas.openxmlformats.org/officeDocument/2006/math" xmlns:w="http://schemas.openxmlformats.org/wordprocessingml/2006/main" matchingName="" preserve="1" showMasterPhAnim="0" showMasterSp="1" type="picTx" userDrawn="1">
+<p:sldLayout xmlns:a="http://schemas.openxmlformats.org/drawingml/2006/main" xmlns:r="http://schemas.openxmlformats.org/officeDocument/2006/relationships" xmlns:p="http://schemas.openxmlformats.org/presentationml/2006/main" showMasterPhAnim="0" type="picTx" preserve="1" userDrawn="1">
   <p:cSld name="Рисунок с подписью">
     <p:spTree>
       <p:nvGrpSpPr>
@@ -11564,7 +11580,7 @@
             </a:pPr>
             <a:fld id="{5C357E52-6772-44D2-9B1A-046730665B12}" type="datetime1">
               <a:rPr lang="ru-RU"/>
-              <a:t>02.06.2026</a:t>
+              <a:t>23.06.2026</a:t>
             </a:fld>
             <a:endParaRPr lang="ru-RU"/>
           </a:p>
@@ -11627,8 +11643,8 @@
 </file>
 
 <file path=ppt/slideMasters/slideMaster1.xml><?xml version="1.0" encoding="utf-8"?>
-<p:sldMaster xmlns:a="http://schemas.openxmlformats.org/drawingml/2006/main" xmlns:r="http://schemas.openxmlformats.org/officeDocument/2006/relationships" xmlns:p="http://schemas.openxmlformats.org/presentationml/2006/main" xmlns:m="http://schemas.openxmlformats.org/officeDocument/2006/math" xmlns:w="http://schemas.openxmlformats.org/wordprocessingml/2006/main" preserve="0">
-  <p:cSld name="">
+<p:sldMaster xmlns:a="http://schemas.openxmlformats.org/drawingml/2006/main" xmlns:r="http://schemas.openxmlformats.org/officeDocument/2006/relationships" xmlns:p="http://schemas.openxmlformats.org/presentationml/2006/main">
+  <p:cSld>
     <p:bg>
       <p:bgRef idx="1001">
         <a:schemeClr val="bg1"/>
@@ -11798,7 +11814,7 @@
             </a:pPr>
             <a:fld id="{E01D4F3A-ABC6-43DF-ACA3-965C94B45EAB}" type="datetime1">
               <a:rPr lang="ru-RU"/>
-              <a:t>02.06.2026</a:t>
+              <a:t>23.06.2026</a:t>
             </a:fld>
             <a:endParaRPr lang="ru-RU"/>
           </a:p>
@@ -11921,7 +11937,7 @@
     <p:sldLayoutId id="2147483675" r:id="rId27"/>
     <p:sldLayoutId id="2147483676" r:id="rId28"/>
   </p:sldLayoutIdLst>
-  <p:hf dt="0" ftr="0" hdr="0" sldNum="1"/>
+  <p:hf hdr="0" ftr="0" dt="0"/>
   <p:txStyles>
     <p:titleStyle>
       <a:lvl1pPr algn="l" defTabSz="914400" rtl="0">
@@ -12206,10 +12222,10 @@
 </file>
 
 <file path=ppt/slides/slide1.xml><?xml version="1.0" encoding="utf-8"?>
-<p:sld xmlns:a="http://schemas.openxmlformats.org/drawingml/2006/main" xmlns:r="http://schemas.openxmlformats.org/officeDocument/2006/relationships" xmlns:p="http://schemas.openxmlformats.org/presentationml/2006/main" xmlns:m="http://schemas.openxmlformats.org/officeDocument/2006/math" xmlns:w="http://schemas.openxmlformats.org/wordprocessingml/2006/main" xmlns:mc="http://schemas.openxmlformats.org/markup-compatibility/2006" showMasterPhAnim="0" showMasterSp="1" show="1">
-  <p:cSld name="">
+<p:sld xmlns:a="http://schemas.openxmlformats.org/drawingml/2006/main" xmlns:r="http://schemas.openxmlformats.org/officeDocument/2006/relationships" xmlns:p="http://schemas.openxmlformats.org/presentationml/2006/main" showMasterPhAnim="0">
+  <p:cSld>
     <p:bg>
-      <p:bgPr shadeToTitle="0">
+      <p:bgPr>
         <a:gradFill>
           <a:gsLst>
             <a:gs pos="0">
@@ -12239,6 +12255,7 @@
           </a:gsLst>
           <a:lin ang="5400000" scaled="1"/>
         </a:gradFill>
+        <a:effectLst/>
       </p:bgPr>
     </p:bg>
     <p:spTree>
@@ -12262,7 +12279,7 @@
           <p:nvPr/>
         </p:nvSpPr>
         <p:spPr bwMode="auto">
-          <a:xfrm flipH="0" flipV="0">
+          <a:xfrm>
             <a:off x="0" y="246891"/>
             <a:ext cx="12191999" cy="4221198"/>
           </a:xfrm>
@@ -12312,7 +12329,7 @@
           <p:nvPr/>
         </p:nvSpPr>
         <p:spPr bwMode="auto">
-          <a:xfrm flipH="0" flipV="0">
+          <a:xfrm>
             <a:off x="0" y="5021125"/>
             <a:ext cx="12191999" cy="1646373"/>
           </a:xfrm>
@@ -12386,15 +12403,7 @@
                   <a:schemeClr val="bg1"/>
                 </a:solidFill>
               </a:rPr>
-              <a:t>Разработка </a:t>
-            </a:r>
-            <a:r>
-              <a:rPr lang="ru-RU" sz="3200" b="1">
-                <a:solidFill>
-                  <a:schemeClr val="bg1"/>
-                </a:solidFill>
-              </a:rPr>
-              <a:t>ядра упрощенного графического ускорителя: </a:t>
+              <a:t>Разработка ядра упрощенного графического ускорителя: </a:t>
             </a:r>
             <a:r>
               <a:rPr lang="en-US" sz="3200" b="1">
@@ -12410,15 +12419,7 @@
                   <a:schemeClr val="bg1"/>
                 </a:solidFill>
               </a:rPr>
-              <a:t>модел</a:t>
-            </a:r>
-            <a:r>
-              <a:rPr lang="ru-RU" sz="3200" b="1">
-                <a:solidFill>
-                  <a:schemeClr val="bg1"/>
-                </a:solidFill>
-              </a:rPr>
-              <a:t>ь</a:t>
+              <a:t>модель</a:t>
             </a:r>
             <a:endParaRPr b="1">
               <a:solidFill>
@@ -12445,8 +12446,8 @@
           </a:xfrm>
         </p:spPr>
         <p:txBody>
-          <a:bodyPr vertOverflow="overflow" horzOverflow="overflow" vert="horz" wrap="square" lIns="91440" tIns="45720" rIns="91440" bIns="45720" numCol="1" spcCol="0" rtlCol="0" fromWordArt="0" anchor="t" anchorCtr="0" forceAA="0" upright="0" compatLnSpc="0">
-            <a:normAutofit fontScale="55000" lnSpcReduction="9000"/>
+          <a:bodyPr vertOverflow="overflow" horzOverflow="overflow" vert="horz" wrap="square" lIns="91440" tIns="45720" rIns="91440" bIns="45720" numCol="1" spcCol="0" rtlCol="0" fromWordArt="0" anchor="t" anchorCtr="0" forceAA="0" compatLnSpc="0">
+            <a:normAutofit fontScale="62500" lnSpcReduction="19000"/>
           </a:bodyPr>
           <a:lstStyle/>
           <a:p>
@@ -12516,7 +12517,7 @@
           <p:nvPr/>
         </p:nvSpPr>
         <p:spPr bwMode="auto">
-          <a:xfrm flipH="0" flipV="0">
+          <a:xfrm>
             <a:off x="1644243" y="383435"/>
             <a:ext cx="8345667" cy="766221"/>
           </a:xfrm>
@@ -12578,7 +12579,7 @@
           <p:nvPr/>
         </p:nvSpPr>
         <p:spPr bwMode="auto">
-          <a:xfrm flipH="0" flipV="0">
+          <a:xfrm>
             <a:off x="1644243" y="1149656"/>
             <a:ext cx="8345667" cy="766220"/>
           </a:xfrm>
@@ -12640,7 +12641,7 @@
           <p:nvPr/>
         </p:nvSpPr>
         <p:spPr bwMode="auto">
-          <a:xfrm flipH="0" flipV="0">
+          <a:xfrm>
             <a:off x="1644243" y="3544760"/>
             <a:ext cx="8345667" cy="766220"/>
           </a:xfrm>
@@ -12683,14 +12684,6 @@
               </a:rPr>
               <a:t>Магистерская диссертация</a:t>
             </a:r>
-            <a:endParaRPr lang="ru-RU" sz="1600" b="0" i="0" u="none">
-              <a:solidFill>
-                <a:schemeClr val="bg1"/>
-              </a:solidFill>
-              <a:latin typeface="Trebuchet MS"/>
-              <a:ea typeface="Trebuchet MS"/>
-              <a:cs typeface="Trebuchet MS"/>
-            </a:endParaRPr>
           </a:p>
           <a:p>
             <a:pPr>
@@ -12707,14 +12700,6 @@
               </a:rPr>
               <a:t>Направление 01.04.02 Прикладная математика и информатика</a:t>
             </a:r>
-            <a:endParaRPr lang="ru-RU" sz="1600" b="0" i="0" u="none">
-              <a:solidFill>
-                <a:schemeClr val="bg1"/>
-              </a:solidFill>
-              <a:latin typeface="Trebuchet MS"/>
-              <a:ea typeface="Trebuchet MS"/>
-              <a:cs typeface="Trebuchet MS"/>
-            </a:endParaRPr>
           </a:p>
         </p:txBody>
       </p:sp>
@@ -12727,7 +12712,7 @@
           <p:nvPr/>
         </p:nvSpPr>
         <p:spPr bwMode="auto">
-          <a:xfrm flipH="0" flipV="0">
+          <a:xfrm>
             <a:off x="5170877" y="5951875"/>
             <a:ext cx="1850245" cy="630957"/>
           </a:xfrm>
@@ -12785,11 +12770,11 @@
   <p:clrMapOvr>
     <a:masterClrMapping/>
   </p:clrMapOvr>
-  <mc:AlternateContent xmlns:mc="http://schemas.openxmlformats.org/markup-compatibility/2006">
-    <mc:Choice xmlns:p159="http://schemas.microsoft.com/office/powerpoint/2015/09/main" xmlns:p14="http://schemas.microsoft.com/office/powerpoint/2010/main" Requires="p159">
-      <p:transition p14:dur="500" advClick="1"/>
+  <mc:AlternateContent xmlns:mc="http://schemas.openxmlformats.org/markup-compatibility/2006" xmlns:p159="http://schemas.microsoft.com/office/powerpoint/2015/09/main">
+    <mc:Choice Requires="p159">
+      <p:transition/>
     </mc:Choice>
-    <mc:Fallback>
+    <mc:Fallback xmlns:w="http://schemas.openxmlformats.org/wordprocessingml/2006/main" xmlns:m="http://schemas.openxmlformats.org/officeDocument/2006/math" xmlns="">
       <p:transition advClick="1"/>
     </mc:Fallback>
   </mc:AlternateContent>
@@ -12797,10 +12782,10 @@
 </file>
 
 <file path=ppt/slides/slide10.xml><?xml version="1.0" encoding="utf-8"?>
-<p:sld xmlns:a="http://schemas.openxmlformats.org/drawingml/2006/main" xmlns:r="http://schemas.openxmlformats.org/officeDocument/2006/relationships" xmlns:p="http://schemas.openxmlformats.org/presentationml/2006/main" xmlns:m="http://schemas.openxmlformats.org/officeDocument/2006/math" xmlns:w="http://schemas.openxmlformats.org/wordprocessingml/2006/main" xmlns:mc="http://schemas.openxmlformats.org/markup-compatibility/2006" showMasterPhAnim="0" showMasterSp="1" show="1">
-  <p:cSld name="">
+<p:sld xmlns:a="http://schemas.openxmlformats.org/drawingml/2006/main" xmlns:r="http://schemas.openxmlformats.org/officeDocument/2006/relationships" xmlns:p="http://schemas.openxmlformats.org/presentationml/2006/main" showMasterPhAnim="0">
+  <p:cSld>
     <p:bg>
-      <p:bgPr shadeToTitle="0">
+      <p:bgPr>
         <a:gradFill>
           <a:gsLst>
             <a:gs pos="0">
@@ -12830,6 +12815,7 @@
           </a:gsLst>
           <a:lin ang="13500000" scaled="1"/>
         </a:gradFill>
+        <a:effectLst/>
       </p:bgPr>
     </p:bg>
     <p:spTree>
@@ -12857,13 +12843,13 @@
           </p:nvPr>
         </p:nvSpPr>
         <p:spPr bwMode="auto">
-          <a:xfrm flipH="0" flipV="0">
+          <a:xfrm>
             <a:off x="66674" y="1350173"/>
             <a:ext cx="4134825" cy="5142700"/>
           </a:xfrm>
         </p:spPr>
         <p:txBody>
-          <a:bodyPr vertOverflow="overflow" horzOverflow="overflow" vert="horz" wrap="square" lIns="91440" tIns="45720" rIns="91440" bIns="45720" numCol="1" spcCol="0" rtlCol="0" fromWordArt="0" anchor="t" anchorCtr="0" forceAA="0" upright="0" compatLnSpc="0">
+          <a:bodyPr vertOverflow="overflow" horzOverflow="overflow" vert="horz" wrap="square" lIns="91440" tIns="45720" rIns="91440" bIns="45720" numCol="1" spcCol="0" rtlCol="0" fromWordArt="0" anchor="t" anchorCtr="0" forceAA="0" compatLnSpc="0">
             <a:normAutofit/>
           </a:bodyPr>
           <a:lstStyle/>
@@ -12873,11 +12859,7 @@
             </a:pPr>
             <a:r>
               <a:rPr lang="ru-RU" sz="1600"/>
-              <a:t>Вычислительный </a:t>
-            </a:r>
-            <a:r>
-              <a:rPr lang="ru-RU" sz="1600"/>
-              <a:t>блок </a:t>
+              <a:t>Вычислительный блок </a:t>
             </a:r>
             <a:r>
               <a:rPr lang="en-US" sz="1600"/>
@@ -12885,11 +12867,7 @@
             </a:r>
             <a:r>
               <a:rPr lang="ru-RU" sz="1600"/>
-              <a:t>обрабатывает вещественные и целочисленные данные из регистрового файла</a:t>
-            </a:r>
-            <a:r>
-              <a:rPr lang="ru-RU" sz="1600"/>
-              <a:t> (</a:t>
+              <a:t>обрабатывает вещественные и целочисленные данные из регистрового файла (</a:t>
             </a:r>
             <a:r>
               <a:rPr lang="en-US" sz="1600"/>
@@ -12897,11 +12875,7 @@
             </a:r>
             <a:r>
               <a:rPr lang="ru-RU" sz="1600"/>
-              <a:t>) и сохраняет их обратно</a:t>
-            </a:r>
-            <a:r>
-              <a:rPr lang="ru-RU" sz="1600"/>
-              <a:t>;</a:t>
+              <a:t>) и сохраняет их обратно;</a:t>
             </a:r>
             <a:endParaRPr sz="1600"/>
           </a:p>
@@ -12997,7 +12971,7 @@
                 </a:solidFill>
                 <a:latin typeface="Trebuchet MS"/>
               </a:rPr>
-              <a:t>8</a:t>
+              <a:t>10</a:t>
             </a:fld>
             <a:endParaRPr lang="ru-RU" sz="1800">
               <a:solidFill>
@@ -13162,7 +13136,7 @@
       </p:sp>
       <p:pic>
         <p:nvPicPr>
-          <p:cNvPr id="672231900" name=""/>
+          <p:cNvPr id="672231900" name="Рисунок 672231899"/>
           <p:cNvPicPr>
             <a:picLocks noChangeAspect="1"/>
           </p:cNvPicPr>
@@ -13179,7 +13153,7 @@
           <a:stretch/>
         </p:blipFill>
         <p:spPr bwMode="auto">
-          <a:xfrm flipH="0" flipV="0">
+          <a:xfrm>
             <a:off x="5207840" y="1443556"/>
             <a:ext cx="5541424" cy="5157668"/>
           </a:xfrm>
@@ -13193,11 +13167,11 @@
   <p:clrMapOvr>
     <a:masterClrMapping/>
   </p:clrMapOvr>
-  <mc:AlternateContent xmlns:mc="http://schemas.openxmlformats.org/markup-compatibility/2006">
-    <mc:Choice xmlns:p159="http://schemas.microsoft.com/office/powerpoint/2015/09/main" xmlns:p14="http://schemas.microsoft.com/office/powerpoint/2010/main" Requires="p159">
-      <p:transition p14:dur="500" advClick="1"/>
+  <mc:AlternateContent xmlns:mc="http://schemas.openxmlformats.org/markup-compatibility/2006" xmlns:p159="http://schemas.microsoft.com/office/powerpoint/2015/09/main">
+    <mc:Choice Requires="p159">
+      <p:transition/>
     </mc:Choice>
-    <mc:Fallback>
+    <mc:Fallback xmlns:w="http://schemas.openxmlformats.org/wordprocessingml/2006/main" xmlns:m="http://schemas.openxmlformats.org/officeDocument/2006/math" xmlns="">
       <p:transition advClick="1"/>
     </mc:Fallback>
   </mc:AlternateContent>
@@ -13205,10 +13179,10 @@
 </file>
 
 <file path=ppt/slides/slide11.xml><?xml version="1.0" encoding="utf-8"?>
-<p:sld xmlns:a="http://schemas.openxmlformats.org/drawingml/2006/main" xmlns:r="http://schemas.openxmlformats.org/officeDocument/2006/relationships" xmlns:p="http://schemas.openxmlformats.org/presentationml/2006/main" xmlns:m="http://schemas.openxmlformats.org/officeDocument/2006/math" xmlns:w="http://schemas.openxmlformats.org/wordprocessingml/2006/main" xmlns:mc="http://schemas.openxmlformats.org/markup-compatibility/2006" showMasterPhAnim="0" showMasterSp="1" show="1">
-  <p:cSld name="">
+<p:sld xmlns:a="http://schemas.openxmlformats.org/drawingml/2006/main" xmlns:r="http://schemas.openxmlformats.org/officeDocument/2006/relationships" xmlns:p="http://schemas.openxmlformats.org/presentationml/2006/main" showMasterPhAnim="0">
+  <p:cSld>
     <p:bg>
-      <p:bgPr shadeToTitle="0">
+      <p:bgPr>
         <a:gradFill>
           <a:gsLst>
             <a:gs pos="0">
@@ -13238,6 +13212,7 @@
           </a:gsLst>
           <a:lin ang="13500000" scaled="1"/>
         </a:gradFill>
+        <a:effectLst/>
       </p:bgPr>
     </p:bg>
     <p:spTree>
@@ -13265,13 +13240,13 @@
           </p:nvPr>
         </p:nvSpPr>
         <p:spPr bwMode="auto">
-          <a:xfrm flipH="0" flipV="0">
+          <a:xfrm>
             <a:off x="208734" y="1552574"/>
             <a:ext cx="4736810" cy="4940299"/>
           </a:xfrm>
         </p:spPr>
         <p:txBody>
-          <a:bodyPr vertOverflow="overflow" horzOverflow="overflow" vert="horz" wrap="square" lIns="91440" tIns="45720" rIns="91440" bIns="45720" numCol="1" spcCol="0" rtlCol="0" fromWordArt="0" anchor="t" anchorCtr="0" forceAA="0" upright="0" compatLnSpc="0">
+          <a:bodyPr vertOverflow="overflow" horzOverflow="overflow" vert="horz" wrap="square" lIns="91440" tIns="45720" rIns="91440" bIns="45720" numCol="1" spcCol="0" rtlCol="0" fromWordArt="0" anchor="t" anchorCtr="0" forceAA="0" compatLnSpc="0">
             <a:normAutofit/>
           </a:bodyPr>
           <a:lstStyle/>
@@ -13307,11 +13282,7 @@
             </a:r>
             <a:r>
               <a:rPr lang="ru-RU"/>
-              <a:t> данные</a:t>
-            </a:r>
-            <a:r>
-              <a:rPr lang="ru-RU"/>
-              <a:t>;</a:t>
+              <a:t> данные;</a:t>
             </a:r>
             <a:endParaRPr/>
           </a:p>
@@ -13321,11 +13292,7 @@
             </a:pPr>
             <a:r>
               <a:rPr lang="ru-RU"/>
-              <a:t>Работает </a:t>
-            </a:r>
-            <a:r>
-              <a:rPr lang="ru-RU"/>
-              <a:t>только при получении </a:t>
+              <a:t>Работает только при получении </a:t>
             </a:r>
             <a:r>
               <a:rPr lang="en-US"/>
@@ -13333,11 +13300,7 @@
             </a:r>
             <a:r>
               <a:rPr lang="ru-RU"/>
-              <a:t>инструкции</a:t>
-            </a:r>
-            <a:r>
-              <a:rPr lang="ru-RU"/>
-              <a:t>.</a:t>
+              <a:t>инструкции.</a:t>
             </a:r>
             <a:endParaRPr/>
           </a:p>
@@ -13383,7 +13346,7 @@
                 </a:solidFill>
                 <a:latin typeface="Trebuchet MS"/>
               </a:rPr>
-              <a:t>9</a:t>
+              <a:t>11</a:t>
             </a:fld>
             <a:endParaRPr lang="ru-RU" sz="1800">
               <a:solidFill>
@@ -13533,7 +13496,7 @@
       </p:sp>
       <p:pic>
         <p:nvPicPr>
-          <p:cNvPr id="1840929737" name=""/>
+          <p:cNvPr id="1840929737" name="Рисунок 1840929736"/>
           <p:cNvPicPr>
             <a:picLocks noChangeAspect="1"/>
           </p:cNvPicPr>
@@ -13550,7 +13513,7 @@
           <a:stretch/>
         </p:blipFill>
         <p:spPr bwMode="auto">
-          <a:xfrm flipH="0" flipV="0">
+          <a:xfrm>
             <a:off x="5025437" y="1481884"/>
             <a:ext cx="7175859" cy="5010990"/>
           </a:xfrm>
@@ -13564,11 +13527,11 @@
   <p:clrMapOvr>
     <a:masterClrMapping/>
   </p:clrMapOvr>
-  <mc:AlternateContent xmlns:mc="http://schemas.openxmlformats.org/markup-compatibility/2006">
-    <mc:Choice xmlns:p159="http://schemas.microsoft.com/office/powerpoint/2015/09/main" xmlns:p14="http://schemas.microsoft.com/office/powerpoint/2010/main" Requires="p159">
-      <p:transition p14:dur="500" advClick="1"/>
+  <mc:AlternateContent xmlns:mc="http://schemas.openxmlformats.org/markup-compatibility/2006" xmlns:p159="http://schemas.microsoft.com/office/powerpoint/2015/09/main">
+    <mc:Choice Requires="p159">
+      <p:transition/>
     </mc:Choice>
-    <mc:Fallback>
+    <mc:Fallback xmlns:w="http://schemas.openxmlformats.org/wordprocessingml/2006/main" xmlns:m="http://schemas.openxmlformats.org/officeDocument/2006/math" xmlns="">
       <p:transition advClick="1"/>
     </mc:Fallback>
   </mc:AlternateContent>
@@ -13576,10 +13539,10 @@
 </file>
 
 <file path=ppt/slides/slide12.xml><?xml version="1.0" encoding="utf-8"?>
-<p:sld xmlns:a="http://schemas.openxmlformats.org/drawingml/2006/main" xmlns:r="http://schemas.openxmlformats.org/officeDocument/2006/relationships" xmlns:p="http://schemas.openxmlformats.org/presentationml/2006/main" xmlns:m="http://schemas.openxmlformats.org/officeDocument/2006/math" xmlns:w="http://schemas.openxmlformats.org/wordprocessingml/2006/main" xmlns:mc="http://schemas.openxmlformats.org/markup-compatibility/2006" showMasterPhAnim="0" showMasterSp="1" show="1">
-  <p:cSld name="">
+<p:sld xmlns:a="http://schemas.openxmlformats.org/drawingml/2006/main" xmlns:r="http://schemas.openxmlformats.org/officeDocument/2006/relationships" xmlns:p="http://schemas.openxmlformats.org/presentationml/2006/main" showMasterPhAnim="0">
+  <p:cSld>
     <p:bg>
-      <p:bgPr shadeToTitle="0">
+      <p:bgPr>
         <a:gradFill>
           <a:gsLst>
             <a:gs pos="0">
@@ -13609,6 +13572,7 @@
           </a:gsLst>
           <a:lin ang="13500000" scaled="1"/>
         </a:gradFill>
+        <a:effectLst/>
       </p:bgPr>
     </p:bg>
     <p:spTree>
@@ -13636,13 +13600,13 @@
           </p:nvPr>
         </p:nvSpPr>
         <p:spPr bwMode="auto">
-          <a:xfrm flipH="0" flipV="0">
+          <a:xfrm>
             <a:off x="0" y="1350173"/>
             <a:ext cx="5668349" cy="5507825"/>
           </a:xfrm>
         </p:spPr>
         <p:txBody>
-          <a:bodyPr vertOverflow="overflow" horzOverflow="overflow" vert="horz" wrap="square" lIns="91440" tIns="45720" rIns="91440" bIns="45720" numCol="1" spcCol="0" rtlCol="0" fromWordArt="0" anchor="t" anchorCtr="0" forceAA="0" upright="0" compatLnSpc="0">
+          <a:bodyPr vertOverflow="overflow" horzOverflow="overflow" vert="horz" wrap="square" lIns="91440" tIns="45720" rIns="91440" bIns="45720" numCol="1" spcCol="0" rtlCol="0" fromWordArt="0" anchor="t" anchorCtr="0" forceAA="0" compatLnSpc="0">
             <a:normAutofit/>
           </a:bodyPr>
           <a:lstStyle/>
@@ -13652,11 +13616,7 @@
             </a:pPr>
             <a:r>
               <a:rPr lang="ru-RU"/>
-              <a:t>Арбитр </a:t>
-            </a:r>
-            <a:r>
-              <a:rPr lang="ru-RU"/>
-              <a:t>отслеживает запросы к памяти данных от вычислительных блоков;</a:t>
+              <a:t>Арбитр отслеживает запросы к памяти данных от вычислительных блоков;</a:t>
             </a:r>
             <a:endParaRPr/>
           </a:p>
@@ -13680,7 +13640,6 @@
               <a:rPr lang="ru-RU"/>
               <a:t>);</a:t>
             </a:r>
-            <a:endParaRPr lang="ru-RU"/>
           </a:p>
           <a:p>
             <a:pPr>
@@ -13695,29 +13654,7 @@
                 <a:ea typeface="Arial"/>
                 <a:cs typeface="Arial"/>
               </a:rPr>
-              <a:t>Арбитр </a:t>
-            </a:r>
-            <a:r>
-              <a:rPr lang="ru-RU" sz="2800" b="0" i="0" u="none" strike="noStrike" cap="none" spc="0">
-                <a:solidFill>
-                  <a:schemeClr val="tx1"/>
-                </a:solidFill>
-                <a:latin typeface="Calibri"/>
-                <a:ea typeface="Arial"/>
-                <a:cs typeface="Arial"/>
-              </a:rPr>
-              <a:t>управляет </a:t>
-            </a:r>
-            <a:r>
-              <a:rPr lang="ru-RU" sz="2800" b="0" i="0" u="none" strike="noStrike" cap="none" spc="0">
-                <a:solidFill>
-                  <a:schemeClr val="tx1"/>
-                </a:solidFill>
-                <a:latin typeface="Calibri"/>
-                <a:ea typeface="Arial"/>
-                <a:cs typeface="Arial"/>
-              </a:rPr>
-              <a:t>демультиплексором считанных данных и мультиплексором записываемых данных.</a:t>
+              <a:t>Арбитр управляет демультиплексором считанных данных и мультиплексором записываемых данных.</a:t>
             </a:r>
             <a:endParaRPr/>
           </a:p>
@@ -13753,7 +13690,7 @@
                 </a:solidFill>
                 <a:latin typeface="Trebuchet MS"/>
               </a:rPr>
-              <a:t>10</a:t>
+              <a:t>12</a:t>
             </a:fld>
             <a:endParaRPr lang="ru-RU" sz="1800">
               <a:solidFill>
@@ -13895,15 +13832,7 @@
                   <a:schemeClr val="bg1"/>
                 </a:solidFill>
               </a:rPr>
-              <a:t>Интерконнект</a:t>
-            </a:r>
-            <a:r>
-              <a:rPr lang="ru-RU" sz="3600">
-                <a:solidFill>
-                  <a:schemeClr val="bg1"/>
-                </a:solidFill>
-              </a:rPr>
-              <a:t> между </a:t>
+              <a:t>Интерконнект между </a:t>
             </a:r>
             <a:r>
               <a:rPr lang="en-US" sz="3600">
@@ -13931,7 +13860,7 @@
       </p:sp>
       <p:pic>
         <p:nvPicPr>
-          <p:cNvPr id="1014880010" name=""/>
+          <p:cNvPr id="1014880010" name="Рисунок 1014880009"/>
           <p:cNvPicPr>
             <a:picLocks noChangeAspect="1"/>
           </p:cNvPicPr>
@@ -13948,7 +13877,7 @@
           <a:stretch/>
         </p:blipFill>
         <p:spPr bwMode="auto">
-          <a:xfrm flipH="0" flipV="0">
+          <a:xfrm>
             <a:off x="6868500" y="1437959"/>
             <a:ext cx="5268560" cy="5237478"/>
           </a:xfrm>
@@ -13962,11 +13891,11 @@
   <p:clrMapOvr>
     <a:masterClrMapping/>
   </p:clrMapOvr>
-  <mc:AlternateContent xmlns:mc="http://schemas.openxmlformats.org/markup-compatibility/2006">
-    <mc:Choice xmlns:p159="http://schemas.microsoft.com/office/powerpoint/2015/09/main" xmlns:p14="http://schemas.microsoft.com/office/powerpoint/2010/main" Requires="p159">
-      <p:transition p14:dur="500" advClick="1"/>
+  <mc:AlternateContent xmlns:mc="http://schemas.openxmlformats.org/markup-compatibility/2006" xmlns:p159="http://schemas.microsoft.com/office/powerpoint/2015/09/main">
+    <mc:Choice Requires="p159">
+      <p:transition/>
     </mc:Choice>
-    <mc:Fallback>
+    <mc:Fallback xmlns:w="http://schemas.openxmlformats.org/wordprocessingml/2006/main" xmlns:m="http://schemas.openxmlformats.org/officeDocument/2006/math" xmlns="">
       <p:transition advClick="1"/>
     </mc:Fallback>
   </mc:AlternateContent>
@@ -13974,10 +13903,10 @@
 </file>
 
 <file path=ppt/slides/slide13.xml><?xml version="1.0" encoding="utf-8"?>
-<p:sld xmlns:a="http://schemas.openxmlformats.org/drawingml/2006/main" xmlns:r="http://schemas.openxmlformats.org/officeDocument/2006/relationships" xmlns:p="http://schemas.openxmlformats.org/presentationml/2006/main" xmlns:m="http://schemas.openxmlformats.org/officeDocument/2006/math" xmlns:w="http://schemas.openxmlformats.org/wordprocessingml/2006/main" xmlns:mc="http://schemas.openxmlformats.org/markup-compatibility/2006" showMasterPhAnim="0" showMasterSp="1" show="1">
-  <p:cSld name="">
+<p:sld xmlns:a="http://schemas.openxmlformats.org/drawingml/2006/main" xmlns:r="http://schemas.openxmlformats.org/officeDocument/2006/relationships" xmlns:p="http://schemas.openxmlformats.org/presentationml/2006/main" showMasterPhAnim="0">
+  <p:cSld>
     <p:bg>
-      <p:bgPr shadeToTitle="0">
+      <p:bgPr>
         <a:gradFill>
           <a:gsLst>
             <a:gs pos="0">
@@ -14007,6 +13936,7 @@
           </a:gsLst>
           <a:lin ang="13500000" scaled="1"/>
         </a:gradFill>
+        <a:effectLst/>
       </p:bgPr>
     </p:bg>
     <p:spTree>
@@ -14034,13 +13964,13 @@
           </p:nvPr>
         </p:nvSpPr>
         <p:spPr bwMode="auto">
-          <a:xfrm flipH="0" flipV="0">
+          <a:xfrm>
             <a:off x="77173" y="1350172"/>
             <a:ext cx="4826355" cy="5507824"/>
           </a:xfrm>
         </p:spPr>
         <p:txBody>
-          <a:bodyPr vertOverflow="overflow" horzOverflow="overflow" vert="horz" wrap="square" lIns="91440" tIns="45720" rIns="91440" bIns="45720" numCol="1" spcCol="0" rtlCol="0" fromWordArt="0" anchor="t" anchorCtr="0" forceAA="0" upright="0" compatLnSpc="0">
+          <a:bodyPr vertOverflow="overflow" horzOverflow="overflow" vert="horz" wrap="square" lIns="91440" tIns="45720" rIns="91440" bIns="45720" numCol="1" spcCol="0" rtlCol="0" fromWordArt="0" anchor="t" anchorCtr="0" forceAA="0" compatLnSpc="0">
             <a:normAutofit/>
           </a:bodyPr>
           <a:lstStyle/>
@@ -14076,11 +14006,7 @@
             </a:r>
             <a:r>
               <a:rPr lang="ru-RU"/>
-              <a:t> – преобразование инструкций в </a:t>
-            </a:r>
-            <a:r>
-              <a:rPr lang="ru-RU"/>
-              <a:t>управляющие сигналы для исполнительных блоков (</a:t>
+              <a:t> – преобразование инструкций в управляющие сигналы для исполнительных блоков (</a:t>
             </a:r>
             <a:r>
               <a:rPr lang="en-US"/>
@@ -14128,7 +14054,7 @@
                 </a:solidFill>
                 <a:latin typeface="Trebuchet MS"/>
               </a:rPr>
-              <a:t>11</a:t>
+              <a:t>13</a:t>
             </a:fld>
             <a:endParaRPr lang="ru-RU">
               <a:solidFill>
@@ -14282,7 +14208,7 @@
       </p:sp>
       <p:pic>
         <p:nvPicPr>
-          <p:cNvPr id="1786174538" name=""/>
+          <p:cNvPr id="1786174538" name="Рисунок 1786174537"/>
           <p:cNvPicPr>
             <a:picLocks noChangeAspect="1"/>
           </p:cNvPicPr>
@@ -14299,7 +14225,7 @@
           <a:stretch/>
         </p:blipFill>
         <p:spPr bwMode="auto">
-          <a:xfrm flipH="0" flipV="0">
+          <a:xfrm>
             <a:off x="4996910" y="1396865"/>
             <a:ext cx="6875366" cy="5133470"/>
           </a:xfrm>
@@ -14313,11 +14239,11 @@
   <p:clrMapOvr>
     <a:masterClrMapping/>
   </p:clrMapOvr>
-  <mc:AlternateContent xmlns:mc="http://schemas.openxmlformats.org/markup-compatibility/2006">
-    <mc:Choice xmlns:p159="http://schemas.microsoft.com/office/powerpoint/2015/09/main" xmlns:p14="http://schemas.microsoft.com/office/powerpoint/2010/main" Requires="p159">
-      <p:transition p14:dur="500" advClick="1"/>
+  <mc:AlternateContent xmlns:mc="http://schemas.openxmlformats.org/markup-compatibility/2006" xmlns:p159="http://schemas.microsoft.com/office/powerpoint/2015/09/main">
+    <mc:Choice Requires="p159">
+      <p:transition/>
     </mc:Choice>
-    <mc:Fallback>
+    <mc:Fallback xmlns:w="http://schemas.openxmlformats.org/wordprocessingml/2006/main" xmlns:m="http://schemas.openxmlformats.org/officeDocument/2006/math" xmlns="">
       <p:transition advClick="1"/>
     </mc:Fallback>
   </mc:AlternateContent>
@@ -14325,10 +14251,10 @@
 </file>
 
 <file path=ppt/slides/slide14.xml><?xml version="1.0" encoding="utf-8"?>
-<p:sld xmlns:a="http://schemas.openxmlformats.org/drawingml/2006/main" xmlns:r="http://schemas.openxmlformats.org/officeDocument/2006/relationships" xmlns:p="http://schemas.openxmlformats.org/presentationml/2006/main" xmlns:m="http://schemas.openxmlformats.org/officeDocument/2006/math" xmlns:w="http://schemas.openxmlformats.org/wordprocessingml/2006/main" xmlns:mc="http://schemas.openxmlformats.org/markup-compatibility/2006" showMasterPhAnim="0" showMasterSp="1" show="1">
-  <p:cSld name="">
+<p:sld xmlns:a="http://schemas.openxmlformats.org/drawingml/2006/main" xmlns:r="http://schemas.openxmlformats.org/officeDocument/2006/relationships" xmlns:p="http://schemas.openxmlformats.org/presentationml/2006/main" showMasterPhAnim="0">
+  <p:cSld>
     <p:bg>
-      <p:bgPr shadeToTitle="0">
+      <p:bgPr>
         <a:gradFill>
           <a:gsLst>
             <a:gs pos="0">
@@ -14358,6 +14284,7 @@
           </a:gsLst>
           <a:lin ang="13500000" scaled="1"/>
         </a:gradFill>
+        <a:effectLst/>
       </p:bgPr>
     </p:bg>
     <p:spTree>
@@ -14385,13 +14312,13 @@
           </p:nvPr>
         </p:nvSpPr>
         <p:spPr bwMode="auto">
-          <a:xfrm flipH="0" flipV="0">
+          <a:xfrm>
             <a:off x="156445" y="1959773"/>
             <a:ext cx="4816578" cy="3599316"/>
           </a:xfrm>
         </p:spPr>
         <p:txBody>
-          <a:bodyPr vertOverflow="overflow" horzOverflow="overflow" vert="horz" wrap="square" lIns="91440" tIns="45720" rIns="91440" bIns="45720" numCol="1" spcCol="0" rtlCol="0" fromWordArt="0" anchor="t" anchorCtr="0" forceAA="0" upright="0" compatLnSpc="0">
+          <a:bodyPr vertOverflow="overflow" horzOverflow="overflow" vert="horz" wrap="square" lIns="91440" tIns="45720" rIns="91440" bIns="45720" numCol="1" spcCol="0" rtlCol="0" fromWordArt="0" anchor="t" anchorCtr="0" forceAA="0" compatLnSpc="0">
             <a:normAutofit/>
           </a:bodyPr>
           <a:lstStyle/>
@@ -14501,7 +14428,7 @@
                 </a:solidFill>
                 <a:latin typeface="Trebuchet MS"/>
               </a:rPr>
-              <a:t>13</a:t>
+              <a:t>14</a:t>
             </a:fld>
             <a:endParaRPr lang="ru-RU">
               <a:solidFill>
@@ -14653,7 +14580,7 @@
       </p:sp>
       <p:pic>
         <p:nvPicPr>
-          <p:cNvPr id="1113674391" name=""/>
+          <p:cNvPr id="1113674391" name="Рисунок 1113674390"/>
           <p:cNvPicPr>
             <a:picLocks noChangeAspect="1"/>
           </p:cNvPicPr>
@@ -14664,7 +14591,7 @@
           <a:stretch/>
         </p:blipFill>
         <p:spPr bwMode="auto">
-          <a:xfrm flipH="0" flipV="0">
+          <a:xfrm>
             <a:off x="4952470" y="1438274"/>
             <a:ext cx="7184591" cy="4905374"/>
           </a:xfrm>
@@ -14678,11 +14605,11 @@
   <p:clrMapOvr>
     <a:masterClrMapping/>
   </p:clrMapOvr>
-  <mc:AlternateContent xmlns:mc="http://schemas.openxmlformats.org/markup-compatibility/2006">
-    <mc:Choice xmlns:p159="http://schemas.microsoft.com/office/powerpoint/2015/09/main" xmlns:p14="http://schemas.microsoft.com/office/powerpoint/2010/main" Requires="p159">
-      <p:transition p14:dur="500" advClick="1"/>
+  <mc:AlternateContent xmlns:mc="http://schemas.openxmlformats.org/markup-compatibility/2006" xmlns:p159="http://schemas.microsoft.com/office/powerpoint/2015/09/main">
+    <mc:Choice Requires="p159">
+      <p:transition/>
     </mc:Choice>
-    <mc:Fallback>
+    <mc:Fallback xmlns:w="http://schemas.openxmlformats.org/wordprocessingml/2006/main" xmlns:m="http://schemas.openxmlformats.org/officeDocument/2006/math" xmlns="">
       <p:transition advClick="1"/>
     </mc:Fallback>
   </mc:AlternateContent>
@@ -14690,10 +14617,10 @@
 </file>
 
 <file path=ppt/slides/slide15.xml><?xml version="1.0" encoding="utf-8"?>
-<p:sld xmlns:a="http://schemas.openxmlformats.org/drawingml/2006/main" xmlns:r="http://schemas.openxmlformats.org/officeDocument/2006/relationships" xmlns:p="http://schemas.openxmlformats.org/presentationml/2006/main" xmlns:m="http://schemas.openxmlformats.org/officeDocument/2006/math" xmlns:w="http://schemas.openxmlformats.org/wordprocessingml/2006/main" xmlns:mc="http://schemas.openxmlformats.org/markup-compatibility/2006" showMasterPhAnim="0" showMasterSp="1" show="1">
-  <p:cSld name="">
+<p:sld xmlns:a="http://schemas.openxmlformats.org/drawingml/2006/main" xmlns:r="http://schemas.openxmlformats.org/officeDocument/2006/relationships" xmlns:p="http://schemas.openxmlformats.org/presentationml/2006/main" showMasterPhAnim="0">
+  <p:cSld>
     <p:bg>
-      <p:bgPr shadeToTitle="0">
+      <p:bgPr>
         <a:gradFill>
           <a:gsLst>
             <a:gs pos="0">
@@ -14723,6 +14650,7 @@
           </a:gsLst>
           <a:lin ang="13500000" scaled="1"/>
         </a:gradFill>
+        <a:effectLst/>
       </p:bgPr>
     </p:bg>
     <p:spTree>
@@ -14918,7 +14846,7 @@
                 </a:solidFill>
                 <a:latin typeface="Trebuchet MS"/>
               </a:rPr>
-              <a:t>14</a:t>
+              <a:t>15</a:t>
             </a:fld>
             <a:endParaRPr lang="ru-RU">
               <a:solidFill>
@@ -15073,11 +15001,11 @@
   <p:clrMapOvr>
     <a:masterClrMapping/>
   </p:clrMapOvr>
-  <mc:AlternateContent xmlns:mc="http://schemas.openxmlformats.org/markup-compatibility/2006">
-    <mc:Choice xmlns:p159="http://schemas.microsoft.com/office/powerpoint/2015/09/main" xmlns:p14="http://schemas.microsoft.com/office/powerpoint/2010/main" Requires="p159">
-      <p:transition p14:dur="500" advClick="1"/>
+  <mc:AlternateContent xmlns:mc="http://schemas.openxmlformats.org/markup-compatibility/2006" xmlns:p159="http://schemas.microsoft.com/office/powerpoint/2015/09/main">
+    <mc:Choice Requires="p159">
+      <p:transition/>
     </mc:Choice>
-    <mc:Fallback>
+    <mc:Fallback xmlns:w="http://schemas.openxmlformats.org/wordprocessingml/2006/main" xmlns:m="http://schemas.openxmlformats.org/officeDocument/2006/math" xmlns="">
       <p:transition advClick="1"/>
     </mc:Fallback>
   </mc:AlternateContent>
@@ -15085,10 +15013,10 @@
 </file>
 
 <file path=ppt/slides/slide16.xml><?xml version="1.0" encoding="utf-8"?>
-<p:sld xmlns:a="http://schemas.openxmlformats.org/drawingml/2006/main" xmlns:r="http://schemas.openxmlformats.org/officeDocument/2006/relationships" xmlns:p="http://schemas.openxmlformats.org/presentationml/2006/main" xmlns:m="http://schemas.openxmlformats.org/officeDocument/2006/math" xmlns:w="http://schemas.openxmlformats.org/wordprocessingml/2006/main" xmlns:mc="http://schemas.openxmlformats.org/markup-compatibility/2006" showMasterPhAnim="0" showMasterSp="1" show="1">
-  <p:cSld name="">
+<p:sld xmlns:a="http://schemas.openxmlformats.org/drawingml/2006/main" xmlns:r="http://schemas.openxmlformats.org/officeDocument/2006/relationships" xmlns:p="http://schemas.openxmlformats.org/presentationml/2006/main" showMasterPhAnim="0">
+  <p:cSld>
     <p:bg>
-      <p:bgPr shadeToTitle="0">
+      <p:bgPr>
         <a:gradFill>
           <a:gsLst>
             <a:gs pos="0">
@@ -15118,6 +15046,7 @@
           </a:gsLst>
           <a:lin ang="13500000" scaled="1"/>
         </a:gradFill>
+        <a:effectLst/>
       </p:bgPr>
     </p:bg>
     <p:spTree>
@@ -15205,7 +15134,7 @@
                 </a:solidFill>
                 <a:latin typeface="Trebuchet MS"/>
               </a:rPr>
-              <a:t>15</a:t>
+              <a:t>16</a:t>
             </a:fld>
             <a:endParaRPr lang="ru-RU">
               <a:solidFill>
@@ -15360,11 +15289,11 @@
   <p:clrMapOvr>
     <a:masterClrMapping/>
   </p:clrMapOvr>
-  <mc:AlternateContent xmlns:mc="http://schemas.openxmlformats.org/markup-compatibility/2006">
-    <mc:Choice xmlns:p159="http://schemas.microsoft.com/office/powerpoint/2015/09/main" xmlns:p14="http://schemas.microsoft.com/office/powerpoint/2010/main" Requires="p159">
-      <p:transition p14:dur="500" advClick="1"/>
+  <mc:AlternateContent xmlns:mc="http://schemas.openxmlformats.org/markup-compatibility/2006" xmlns:p159="http://schemas.microsoft.com/office/powerpoint/2015/09/main">
+    <mc:Choice Requires="p159">
+      <p:transition/>
     </mc:Choice>
-    <mc:Fallback>
+    <mc:Fallback xmlns:w="http://schemas.openxmlformats.org/wordprocessingml/2006/main" xmlns:m="http://schemas.openxmlformats.org/officeDocument/2006/math" xmlns="">
       <p:transition advClick="1"/>
     </mc:Fallback>
   </mc:AlternateContent>
@@ -15372,10 +15301,10 @@
 </file>
 
 <file path=ppt/slides/slide17.xml><?xml version="1.0" encoding="utf-8"?>
-<p:sld xmlns:a="http://schemas.openxmlformats.org/drawingml/2006/main" xmlns:r="http://schemas.openxmlformats.org/officeDocument/2006/relationships" xmlns:p="http://schemas.openxmlformats.org/presentationml/2006/main" xmlns:m="http://schemas.openxmlformats.org/officeDocument/2006/math" xmlns:w="http://schemas.openxmlformats.org/wordprocessingml/2006/main" xmlns:mc="http://schemas.openxmlformats.org/markup-compatibility/2006" showMasterPhAnim="0" showMasterSp="1" show="1">
-  <p:cSld name="">
+<p:sld xmlns:a="http://schemas.openxmlformats.org/drawingml/2006/main" xmlns:r="http://schemas.openxmlformats.org/officeDocument/2006/relationships" xmlns:p="http://schemas.openxmlformats.org/presentationml/2006/main" showMasterPhAnim="0">
+  <p:cSld>
     <p:bg>
-      <p:bgPr shadeToTitle="0">
+      <p:bgPr>
         <a:gradFill>
           <a:gsLst>
             <a:gs pos="0">
@@ -15405,6 +15334,7 @@
           </a:gsLst>
           <a:lin ang="13500000" scaled="1"/>
         </a:gradFill>
+        <a:effectLst/>
       </p:bgPr>
     </p:bg>
     <p:spTree>
@@ -15477,7 +15407,7 @@
                 </a:solidFill>
                 <a:latin typeface="Trebuchet MS"/>
               </a:rPr>
-              <a:t>15</a:t>
+              <a:t>17</a:t>
             </a:fld>
             <a:endParaRPr lang="ru-RU" sz="1800">
               <a:solidFill>
@@ -15632,11 +15562,11 @@
   <p:clrMapOvr>
     <a:masterClrMapping/>
   </p:clrMapOvr>
-  <mc:AlternateContent xmlns:mc="http://schemas.openxmlformats.org/markup-compatibility/2006">
-    <mc:Choice xmlns:p159="http://schemas.microsoft.com/office/powerpoint/2015/09/main" xmlns:p14="http://schemas.microsoft.com/office/powerpoint/2010/main" Requires="p159">
-      <p:transition p14:dur="500" advClick="1"/>
+  <mc:AlternateContent xmlns:mc="http://schemas.openxmlformats.org/markup-compatibility/2006" xmlns:p159="http://schemas.microsoft.com/office/powerpoint/2015/09/main">
+    <mc:Choice Requires="p159">
+      <p:transition/>
     </mc:Choice>
-    <mc:Fallback>
+    <mc:Fallback xmlns:w="http://schemas.openxmlformats.org/wordprocessingml/2006/main" xmlns:m="http://schemas.openxmlformats.org/officeDocument/2006/math" xmlns="">
       <p:transition advClick="1"/>
     </mc:Fallback>
   </mc:AlternateContent>
@@ -15644,10 +15574,10 @@
 </file>
 
 <file path=ppt/slides/slide18.xml><?xml version="1.0" encoding="utf-8"?>
-<p:sld xmlns:a="http://schemas.openxmlformats.org/drawingml/2006/main" xmlns:r="http://schemas.openxmlformats.org/officeDocument/2006/relationships" xmlns:p="http://schemas.openxmlformats.org/presentationml/2006/main" xmlns:m="http://schemas.openxmlformats.org/officeDocument/2006/math" xmlns:w="http://schemas.openxmlformats.org/wordprocessingml/2006/main" xmlns:mc="http://schemas.openxmlformats.org/markup-compatibility/2006" showMasterPhAnim="0" showMasterSp="1" show="1">
-  <p:cSld name="">
+<p:sld xmlns:a="http://schemas.openxmlformats.org/drawingml/2006/main" xmlns:r="http://schemas.openxmlformats.org/officeDocument/2006/relationships" xmlns:p="http://schemas.openxmlformats.org/presentationml/2006/main" showMasterPhAnim="0">
+  <p:cSld>
     <p:bg>
-      <p:bgPr shadeToTitle="0">
+      <p:bgPr>
         <a:gradFill>
           <a:gsLst>
             <a:gs pos="0">
@@ -15677,6 +15607,7 @@
           </a:gsLst>
           <a:lin ang="5400000" scaled="1"/>
         </a:gradFill>
+        <a:effectLst/>
       </p:bgPr>
     </p:bg>
     <p:spTree>
@@ -15700,7 +15631,7 @@
           <p:nvPr/>
         </p:nvSpPr>
         <p:spPr bwMode="auto">
-          <a:xfrm flipH="0" flipV="0">
+          <a:xfrm>
             <a:off x="0" y="246891"/>
             <a:ext cx="12191999" cy="4221198"/>
           </a:xfrm>
@@ -15750,7 +15681,7 @@
           <p:nvPr/>
         </p:nvSpPr>
         <p:spPr bwMode="auto">
-          <a:xfrm flipH="0" flipV="0">
+          <a:xfrm>
             <a:off x="0" y="5021125"/>
             <a:ext cx="12191999" cy="1646373"/>
           </a:xfrm>
@@ -15824,15 +15755,7 @@
                   <a:schemeClr val="bg1"/>
                 </a:solidFill>
               </a:rPr>
-              <a:t>Разработка </a:t>
-            </a:r>
-            <a:r>
-              <a:rPr lang="ru-RU" sz="3200" b="1">
-                <a:solidFill>
-                  <a:schemeClr val="bg1"/>
-                </a:solidFill>
-              </a:rPr>
-              <a:t>ядра упрощенного графического ускорителя. Разработка </a:t>
+              <a:t>Разработка ядра упрощенного графического ускорителя. Разработка </a:t>
             </a:r>
             <a:r>
               <a:rPr lang="en-US" sz="3200" b="1">
@@ -15875,8 +15798,8 @@
           </a:xfrm>
         </p:spPr>
         <p:txBody>
-          <a:bodyPr vertOverflow="overflow" horzOverflow="overflow" vert="horz" wrap="square" lIns="91440" tIns="45720" rIns="91440" bIns="45720" numCol="1" spcCol="0" rtlCol="0" fromWordArt="0" anchor="t" anchorCtr="0" forceAA="0" upright="0" compatLnSpc="0">
-            <a:normAutofit fontScale="55000" lnSpcReduction="9000"/>
+          <a:bodyPr vertOverflow="overflow" horzOverflow="overflow" vert="horz" wrap="square" lIns="91440" tIns="45720" rIns="91440" bIns="45720" numCol="1" spcCol="0" rtlCol="0" fromWordArt="0" anchor="t" anchorCtr="0" forceAA="0" compatLnSpc="0">
+            <a:normAutofit fontScale="62500" lnSpcReduction="19000"/>
           </a:bodyPr>
           <a:lstStyle/>
           <a:p>
@@ -15946,7 +15869,7 @@
           <p:nvPr/>
         </p:nvSpPr>
         <p:spPr bwMode="auto">
-          <a:xfrm flipH="0" flipV="0">
+          <a:xfrm>
             <a:off x="1644243" y="383435"/>
             <a:ext cx="8345667" cy="766221"/>
           </a:xfrm>
@@ -16008,7 +15931,7 @@
           <p:nvPr/>
         </p:nvSpPr>
         <p:spPr bwMode="auto">
-          <a:xfrm flipH="0" flipV="0">
+          <a:xfrm>
             <a:off x="1644243" y="1149656"/>
             <a:ext cx="8345667" cy="766220"/>
           </a:xfrm>
@@ -16070,7 +15993,7 @@
           <p:nvPr/>
         </p:nvSpPr>
         <p:spPr bwMode="auto">
-          <a:xfrm flipH="0" flipV="0">
+          <a:xfrm>
             <a:off x="1644243" y="3544760"/>
             <a:ext cx="8345667" cy="766220"/>
           </a:xfrm>
@@ -16113,14 +16036,6 @@
               </a:rPr>
               <a:t>Магистерская диссертация</a:t>
             </a:r>
-            <a:endParaRPr lang="ru-RU" sz="1600" b="0" i="0" u="none">
-              <a:solidFill>
-                <a:schemeClr val="bg1"/>
-              </a:solidFill>
-              <a:latin typeface="Trebuchet MS"/>
-              <a:ea typeface="Trebuchet MS"/>
-              <a:cs typeface="Trebuchet MS"/>
-            </a:endParaRPr>
           </a:p>
           <a:p>
             <a:pPr>
@@ -16137,14 +16052,6 @@
               </a:rPr>
               <a:t>Направление 01.04.02 Прикладная математика и информатика</a:t>
             </a:r>
-            <a:endParaRPr lang="ru-RU" sz="1600" b="0" i="0" u="none">
-              <a:solidFill>
-                <a:schemeClr val="bg1"/>
-              </a:solidFill>
-              <a:latin typeface="Trebuchet MS"/>
-              <a:ea typeface="Trebuchet MS"/>
-              <a:cs typeface="Trebuchet MS"/>
-            </a:endParaRPr>
           </a:p>
         </p:txBody>
       </p:sp>
@@ -16157,7 +16064,7 @@
           <p:nvPr/>
         </p:nvSpPr>
         <p:spPr bwMode="auto">
-          <a:xfrm flipH="0" flipV="0">
+          <a:xfrm>
             <a:off x="5170877" y="5951875"/>
             <a:ext cx="1850245" cy="630957"/>
           </a:xfrm>
@@ -16215,11 +16122,11 @@
   <p:clrMapOvr>
     <a:masterClrMapping/>
   </p:clrMapOvr>
-  <mc:AlternateContent xmlns:mc="http://schemas.openxmlformats.org/markup-compatibility/2006">
-    <mc:Choice xmlns:p159="http://schemas.microsoft.com/office/powerpoint/2015/09/main" xmlns:p14="http://schemas.microsoft.com/office/powerpoint/2010/main" Requires="p159">
-      <p:transition p14:dur="500" advClick="1"/>
+  <mc:AlternateContent xmlns:mc="http://schemas.openxmlformats.org/markup-compatibility/2006" xmlns:p159="http://schemas.microsoft.com/office/powerpoint/2015/09/main">
+    <mc:Choice Requires="p159">
+      <p:transition/>
     </mc:Choice>
-    <mc:Fallback>
+    <mc:Fallback xmlns:w="http://schemas.openxmlformats.org/wordprocessingml/2006/main" xmlns:m="http://schemas.openxmlformats.org/officeDocument/2006/math" xmlns="">
       <p:transition advClick="1"/>
     </mc:Fallback>
   </mc:AlternateContent>
@@ -16227,10 +16134,10 @@
 </file>
 
 <file path=ppt/slides/slide2.xml><?xml version="1.0" encoding="utf-8"?>
-<p:sld xmlns:a="http://schemas.openxmlformats.org/drawingml/2006/main" xmlns:r="http://schemas.openxmlformats.org/officeDocument/2006/relationships" xmlns:p="http://schemas.openxmlformats.org/presentationml/2006/main" xmlns:m="http://schemas.openxmlformats.org/officeDocument/2006/math" xmlns:w="http://schemas.openxmlformats.org/wordprocessingml/2006/main" xmlns:mc="http://schemas.openxmlformats.org/markup-compatibility/2006" showMasterPhAnim="0" showMasterSp="1" show="1">
-  <p:cSld name="">
+<p:sld xmlns:a="http://schemas.openxmlformats.org/drawingml/2006/main" xmlns:r="http://schemas.openxmlformats.org/officeDocument/2006/relationships" xmlns:p="http://schemas.openxmlformats.org/presentationml/2006/main" showMasterPhAnim="0">
+  <p:cSld>
     <p:bg>
-      <p:bgPr shadeToTitle="0">
+      <p:bgPr>
         <a:gradFill>
           <a:gsLst>
             <a:gs pos="0">
@@ -16260,6 +16167,7 @@
           </a:gsLst>
           <a:lin ang="13500000" scaled="1"/>
         </a:gradFill>
+        <a:effectLst/>
       </p:bgPr>
     </p:bg>
     <p:spTree>
@@ -16407,11 +16315,6 @@
               </a:rPr>
               <a:t> – это специализированный процессор, оптимизированный для параллельной обработки данных;</a:t>
             </a:r>
-            <a:endParaRPr lang="ru-RU">
-              <a:solidFill>
-                <a:schemeClr val="tx1"/>
-              </a:solidFill>
-            </a:endParaRPr>
           </a:p>
           <a:p>
             <a:pPr>
@@ -16425,11 +16328,6 @@
               </a:rPr>
               <a:t>Графическое ядро – это специализированный микропроцессор, созданный для математических вычислений, обработки изображений и рендеринга;</a:t>
             </a:r>
-            <a:endParaRPr lang="ru-RU">
-              <a:solidFill>
-                <a:schemeClr val="tx1"/>
-              </a:solidFill>
-            </a:endParaRPr>
           </a:p>
           <a:p>
             <a:pPr>
@@ -16491,11 +16389,6 @@
               </a:rPr>
               <a:t>.</a:t>
             </a:r>
-            <a:endParaRPr lang="ru-RU">
-              <a:solidFill>
-                <a:schemeClr val="tx1"/>
-              </a:solidFill>
-            </a:endParaRPr>
           </a:p>
         </p:txBody>
       </p:sp>
@@ -16595,11 +16488,11 @@
   <p:clrMapOvr>
     <a:masterClrMapping/>
   </p:clrMapOvr>
-  <mc:AlternateContent xmlns:mc="http://schemas.openxmlformats.org/markup-compatibility/2006">
-    <mc:Choice xmlns:p159="http://schemas.microsoft.com/office/powerpoint/2015/09/main" xmlns:p14="http://schemas.microsoft.com/office/powerpoint/2010/main" Requires="p159">
-      <p:transition p14:dur="500" advClick="1"/>
+  <mc:AlternateContent xmlns:mc="http://schemas.openxmlformats.org/markup-compatibility/2006" xmlns:p159="http://schemas.microsoft.com/office/powerpoint/2015/09/main">
+    <mc:Choice Requires="p159">
+      <p:transition/>
     </mc:Choice>
-    <mc:Fallback>
+    <mc:Fallback xmlns:w="http://schemas.openxmlformats.org/wordprocessingml/2006/main" xmlns:m="http://schemas.openxmlformats.org/officeDocument/2006/math" xmlns="">
       <p:transition advClick="1"/>
     </mc:Fallback>
   </mc:AlternateContent>
@@ -16607,10 +16500,10 @@
 </file>
 
 <file path=ppt/slides/slide3.xml><?xml version="1.0" encoding="utf-8"?>
-<p:sld xmlns:a="http://schemas.openxmlformats.org/drawingml/2006/main" xmlns:r="http://schemas.openxmlformats.org/officeDocument/2006/relationships" xmlns:p="http://schemas.openxmlformats.org/presentationml/2006/main" xmlns:m="http://schemas.openxmlformats.org/officeDocument/2006/math" xmlns:w="http://schemas.openxmlformats.org/wordprocessingml/2006/main" xmlns:mc="http://schemas.openxmlformats.org/markup-compatibility/2006" showMasterPhAnim="0" showMasterSp="1" show="1">
-  <p:cSld name="">
+<p:sld xmlns:a="http://schemas.openxmlformats.org/drawingml/2006/main" xmlns:r="http://schemas.openxmlformats.org/officeDocument/2006/relationships" xmlns:p="http://schemas.openxmlformats.org/presentationml/2006/main" showMasterPhAnim="0">
+  <p:cSld>
     <p:bg>
-      <p:bgPr shadeToTitle="0">
+      <p:bgPr>
         <a:gradFill>
           <a:gsLst>
             <a:gs pos="0">
@@ -16640,6 +16533,7 @@
           </a:gsLst>
           <a:lin ang="13500000" scaled="1"/>
         </a:gradFill>
+        <a:effectLst/>
       </p:bgPr>
     </p:bg>
     <p:spTree>
@@ -16668,7 +16562,7 @@
         </p:nvSpPr>
         <p:spPr bwMode="auto"/>
         <p:txBody>
-          <a:bodyPr vertOverflow="overflow" horzOverflow="overflow" vert="horz" wrap="square" lIns="91440" tIns="45720" rIns="91440" bIns="45720" numCol="1" spcCol="0" rtlCol="0" fromWordArt="0" anchor="t" anchorCtr="0" forceAA="0" upright="0" compatLnSpc="0">
+          <a:bodyPr vertOverflow="overflow" horzOverflow="overflow" vert="horz" wrap="square" lIns="91440" tIns="45720" rIns="91440" bIns="45720" numCol="1" spcCol="0" rtlCol="0" fromWordArt="0" anchor="t" anchorCtr="0" forceAA="0" compatLnSpc="0">
             <a:normAutofit fontScale="95000" lnSpcReduction="1000"/>
           </a:bodyPr>
           <a:lstStyle/>
@@ -16694,11 +16588,6 @@
               </a:rPr>
               <a:t>позволит:</a:t>
             </a:r>
-            <a:endParaRPr>
-              <a:solidFill>
-                <a:schemeClr val="tx1"/>
-              </a:solidFill>
-            </a:endParaRPr>
           </a:p>
           <a:p>
             <a:pPr>
@@ -16712,21 +16601,8 @@
                   <a:schemeClr val="tx1"/>
                 </a:solidFill>
               </a:rPr>
-              <a:t> Определить</a:t>
-            </a:r>
-            <a:r>
-              <a:rPr>
-                <a:solidFill>
-                  <a:schemeClr val="tx1"/>
-                </a:solidFill>
-              </a:rPr>
-              <a:t> требования для построения минимального графического ядра и минимальный набор инструкций;</a:t>
-            </a:r>
-            <a:endParaRPr>
-              <a:solidFill>
-                <a:schemeClr val="tx1"/>
-              </a:solidFill>
-            </a:endParaRPr>
+              <a:t> Определить требования для построения минимального графического ядра и минимальный набор инструкций;</a:t>
+            </a:r>
           </a:p>
           <a:p>
             <a:pPr>
@@ -16742,11 +16618,6 @@
               </a:rPr>
               <a:t> Разработать модель упрощенного графического ядра, которую можно модернизировать и изучать;</a:t>
             </a:r>
-            <a:endParaRPr>
-              <a:solidFill>
-                <a:schemeClr val="tx1"/>
-              </a:solidFill>
-            </a:endParaRPr>
           </a:p>
           <a:p>
             <a:pPr>
@@ -16776,15 +16647,7 @@
                   <a:schemeClr val="tx1"/>
                 </a:solidFill>
               </a:rPr>
-              <a:t>построения </a:t>
-            </a:r>
-            <a:r>
-              <a:rPr lang="ru-RU">
-                <a:solidFill>
-                  <a:schemeClr val="tx1"/>
-                </a:solidFill>
-              </a:rPr>
-              <a:t>архитектур процессорных систем</a:t>
+              <a:t>построения архитектур процессорных систем</a:t>
             </a:r>
             <a:r>
               <a:rPr>
@@ -16794,11 +16657,6 @@
               </a:rPr>
               <a:t>;</a:t>
             </a:r>
-            <a:endParaRPr>
-              <a:solidFill>
-                <a:schemeClr val="tx1"/>
-              </a:solidFill>
-            </a:endParaRPr>
           </a:p>
           <a:p>
             <a:pPr>
@@ -16814,11 +16672,6 @@
               </a:rPr>
               <a:t> Приблизиться к реализации полноценного графического ядра, а в перспективе и полноценного графического ускорителя.</a:t>
             </a:r>
-            <a:endParaRPr>
-              <a:solidFill>
-                <a:schemeClr val="tx1"/>
-              </a:solidFill>
-            </a:endParaRPr>
           </a:p>
         </p:txBody>
       </p:sp>
@@ -16852,7 +16705,7 @@
                 </a:solidFill>
                 <a:latin typeface="Trebuchet MS"/>
               </a:rPr>
-              <a:t>4</a:t>
+              <a:t>3</a:t>
             </a:fld>
             <a:endParaRPr lang="ru-RU">
               <a:solidFill>
@@ -17007,11 +16860,11 @@
   <p:clrMapOvr>
     <a:masterClrMapping/>
   </p:clrMapOvr>
-  <mc:AlternateContent xmlns:mc="http://schemas.openxmlformats.org/markup-compatibility/2006">
-    <mc:Choice xmlns:p159="http://schemas.microsoft.com/office/powerpoint/2015/09/main" xmlns:p14="http://schemas.microsoft.com/office/powerpoint/2010/main" Requires="p159">
-      <p:transition p14:dur="500" advClick="1"/>
+  <mc:AlternateContent xmlns:mc="http://schemas.openxmlformats.org/markup-compatibility/2006" xmlns:p159="http://schemas.microsoft.com/office/powerpoint/2015/09/main">
+    <mc:Choice Requires="p159">
+      <p:transition/>
     </mc:Choice>
-    <mc:Fallback>
+    <mc:Fallback xmlns:w="http://schemas.openxmlformats.org/wordprocessingml/2006/main" xmlns:m="http://schemas.openxmlformats.org/officeDocument/2006/math" xmlns="">
       <p:transition advClick="1"/>
     </mc:Fallback>
   </mc:AlternateContent>
@@ -17019,10 +16872,10 @@
 </file>
 
 <file path=ppt/slides/slide4.xml><?xml version="1.0" encoding="utf-8"?>
-<p:sld xmlns:a="http://schemas.openxmlformats.org/drawingml/2006/main" xmlns:r="http://schemas.openxmlformats.org/officeDocument/2006/relationships" xmlns:p="http://schemas.openxmlformats.org/presentationml/2006/main" xmlns:m="http://schemas.openxmlformats.org/officeDocument/2006/math" xmlns:w="http://schemas.openxmlformats.org/wordprocessingml/2006/main" xmlns:mc="http://schemas.openxmlformats.org/markup-compatibility/2006" showMasterPhAnim="0" showMasterSp="1" show="1">
-  <p:cSld name="">
+<p:sld xmlns:a="http://schemas.openxmlformats.org/drawingml/2006/main" xmlns:r="http://schemas.openxmlformats.org/officeDocument/2006/relationships" xmlns:p="http://schemas.openxmlformats.org/presentationml/2006/main" showMasterPhAnim="0">
+  <p:cSld>
     <p:bg>
-      <p:bgPr shadeToTitle="0">
+      <p:bgPr>
         <a:gradFill>
           <a:gsLst>
             <a:gs pos="0">
@@ -17052,6 +16905,7 @@
           </a:gsLst>
           <a:lin ang="13500000" scaled="1"/>
         </a:gradFill>
+        <a:effectLst/>
       </p:bgPr>
     </p:bg>
     <p:spTree>
@@ -17211,7 +17065,7 @@
                 </a:solidFill>
                 <a:latin typeface="Trebuchet MS"/>
               </a:rPr>
-              <a:t>3</a:t>
+              <a:t>4</a:t>
             </a:fld>
             <a:endParaRPr lang="ru-RU" sz="1800">
               <a:solidFill>
@@ -17366,11 +17220,11 @@
   <p:clrMapOvr>
     <a:masterClrMapping/>
   </p:clrMapOvr>
-  <mc:AlternateContent xmlns:mc="http://schemas.openxmlformats.org/markup-compatibility/2006">
-    <mc:Choice xmlns:p159="http://schemas.microsoft.com/office/powerpoint/2015/09/main" xmlns:p14="http://schemas.microsoft.com/office/powerpoint/2010/main" Requires="p159">
-      <p:transition p14:dur="500" advClick="1"/>
+  <mc:AlternateContent xmlns:mc="http://schemas.openxmlformats.org/markup-compatibility/2006" xmlns:p159="http://schemas.microsoft.com/office/powerpoint/2015/09/main">
+    <mc:Choice Requires="p159">
+      <p:transition/>
     </mc:Choice>
-    <mc:Fallback>
+    <mc:Fallback xmlns:w="http://schemas.openxmlformats.org/wordprocessingml/2006/main" xmlns:m="http://schemas.openxmlformats.org/officeDocument/2006/math" xmlns="">
       <p:transition advClick="1"/>
     </mc:Fallback>
   </mc:AlternateContent>
@@ -17378,10 +17232,10 @@
 </file>
 
 <file path=ppt/slides/slide5.xml><?xml version="1.0" encoding="utf-8"?>
-<p:sld xmlns:a="http://schemas.openxmlformats.org/drawingml/2006/main" xmlns:r="http://schemas.openxmlformats.org/officeDocument/2006/relationships" xmlns:p="http://schemas.openxmlformats.org/presentationml/2006/main" xmlns:m="http://schemas.openxmlformats.org/officeDocument/2006/math" xmlns:w="http://schemas.openxmlformats.org/wordprocessingml/2006/main" xmlns:mc="http://schemas.openxmlformats.org/markup-compatibility/2006" showMasterPhAnim="0" showMasterSp="1" show="1">
-  <p:cSld name="">
+<p:sld xmlns:a="http://schemas.openxmlformats.org/drawingml/2006/main" xmlns:r="http://schemas.openxmlformats.org/officeDocument/2006/relationships" xmlns:p="http://schemas.openxmlformats.org/presentationml/2006/main" showMasterPhAnim="0">
+  <p:cSld>
     <p:bg>
-      <p:bgPr shadeToTitle="0">
+      <p:bgPr>
         <a:gradFill>
           <a:gsLst>
             <a:gs pos="0">
@@ -17411,6 +17265,7 @@
           </a:gsLst>
           <a:lin ang="13500000" scaled="1"/>
         </a:gradFill>
+        <a:effectLst/>
       </p:bgPr>
     </p:bg>
     <p:spTree>
@@ -17438,7 +17293,7 @@
           </p:nvPr>
         </p:nvSpPr>
         <p:spPr bwMode="auto">
-          <a:xfrm flipH="0" flipV="0">
+          <a:xfrm>
             <a:off x="320620" y="1628766"/>
             <a:ext cx="2592336" cy="4864108"/>
           </a:xfrm>
@@ -17448,8 +17303,8 @@
           <a:noFill/>
         </p:spPr>
         <p:txBody>
-          <a:bodyPr vertOverflow="overflow" horzOverflow="overflow" vert="horz" wrap="square" lIns="91440" tIns="45720" rIns="91440" bIns="45720" numCol="1" spcCol="0" rtlCol="0" fromWordArt="0" anchor="t" anchorCtr="0" forceAA="0" upright="0" compatLnSpc="0">
-            <a:normAutofit fontScale="80000" lnSpcReduction="4000"/>
+          <a:bodyPr vertOverflow="overflow" horzOverflow="overflow" vert="horz" wrap="square" lIns="91440" tIns="45720" rIns="91440" bIns="45720" numCol="1" spcCol="0" rtlCol="0" fromWordArt="0" anchor="t" anchorCtr="0" forceAA="0" compatLnSpc="0">
+            <a:normAutofit fontScale="87500" lnSpcReduction="20000"/>
           </a:bodyPr>
           <a:lstStyle/>
           <a:p>
@@ -17457,17 +17312,14 @@
               <a:defRPr/>
             </a:pPr>
             <a:r>
-              <a:rPr/>
               <a:t>Работа является общим проектом по теме: разработка ядра упрощенного графического ускорителя;</a:t>
             </a:r>
-            <a:endParaRPr/>
-          </a:p>
-          <a:p>
-            <a:pPr>
-              <a:defRPr/>
-            </a:pPr>
-            <a:r>
-              <a:rPr/>
+          </a:p>
+          <a:p>
+            <a:pPr>
+              <a:defRPr/>
+            </a:pPr>
+            <a:r>
               <a:t>В данной работе выполнена конкретная часть проекта: </a:t>
             </a:r>
             <a:r>
@@ -17512,7 +17364,7 @@
                 </a:solidFill>
                 <a:latin typeface="Trebuchet MS"/>
               </a:rPr>
-              <a:t>4</a:t>
+              <a:t>5</a:t>
             </a:fld>
             <a:endParaRPr lang="ru-RU" sz="1800">
               <a:solidFill>
@@ -17664,7 +17516,7 @@
       </p:sp>
       <p:pic>
         <p:nvPicPr>
-          <p:cNvPr id="543394343" name=""/>
+          <p:cNvPr id="543394343" name="Рисунок 543394342"/>
           <p:cNvPicPr>
             <a:picLocks noChangeAspect="1"/>
           </p:cNvPicPr>
@@ -17681,7 +17533,7 @@
           <a:stretch/>
         </p:blipFill>
         <p:spPr bwMode="auto">
-          <a:xfrm flipH="0" flipV="0">
+          <a:xfrm>
             <a:off x="3328593" y="2135569"/>
             <a:ext cx="8156721" cy="3575954"/>
           </a:xfrm>
@@ -17695,11 +17547,11 @@
   <p:clrMapOvr>
     <a:masterClrMapping/>
   </p:clrMapOvr>
-  <mc:AlternateContent xmlns:mc="http://schemas.openxmlformats.org/markup-compatibility/2006">
-    <mc:Choice xmlns:p159="http://schemas.microsoft.com/office/powerpoint/2015/09/main" xmlns:p14="http://schemas.microsoft.com/office/powerpoint/2010/main" Requires="p159">
-      <p:transition p14:dur="500" advClick="1"/>
+  <mc:AlternateContent xmlns:mc="http://schemas.openxmlformats.org/markup-compatibility/2006" xmlns:p159="http://schemas.microsoft.com/office/powerpoint/2015/09/main">
+    <mc:Choice Requires="p159">
+      <p:transition/>
     </mc:Choice>
-    <mc:Fallback>
+    <mc:Fallback xmlns:w="http://schemas.openxmlformats.org/wordprocessingml/2006/main" xmlns:m="http://schemas.openxmlformats.org/officeDocument/2006/math" xmlns="">
       <p:transition advClick="1"/>
     </mc:Fallback>
   </mc:AlternateContent>
@@ -17707,10 +17559,10 @@
 </file>
 
 <file path=ppt/slides/slide6.xml><?xml version="1.0" encoding="utf-8"?>
-<p:sld xmlns:a="http://schemas.openxmlformats.org/drawingml/2006/main" xmlns:r="http://schemas.openxmlformats.org/officeDocument/2006/relationships" xmlns:p="http://schemas.openxmlformats.org/presentationml/2006/main" xmlns:m="http://schemas.openxmlformats.org/officeDocument/2006/math" xmlns:w="http://schemas.openxmlformats.org/wordprocessingml/2006/main" xmlns:mc="http://schemas.openxmlformats.org/markup-compatibility/2006" showMasterPhAnim="0" showMasterSp="1" show="1">
-  <p:cSld name="">
+<p:sld xmlns:a="http://schemas.openxmlformats.org/drawingml/2006/main" xmlns:r="http://schemas.openxmlformats.org/officeDocument/2006/relationships" xmlns:p="http://schemas.openxmlformats.org/presentationml/2006/main" showMasterPhAnim="0">
+  <p:cSld>
     <p:bg>
-      <p:bgPr shadeToTitle="0">
+      <p:bgPr>
         <a:gradFill>
           <a:gsLst>
             <a:gs pos="0">
@@ -17740,6 +17592,7 @@
           </a:gsLst>
           <a:lin ang="13500000" scaled="1"/>
         </a:gradFill>
+        <a:effectLst/>
       </p:bgPr>
     </p:bg>
     <p:spTree>
@@ -17929,14 +17782,14 @@
           </p:nvPr>
         </p:nvSpPr>
         <p:spPr bwMode="auto">
-          <a:xfrm flipH="0" flipV="0">
+          <a:xfrm>
             <a:off x="383823" y="1350173"/>
             <a:ext cx="3684326" cy="2802726"/>
           </a:xfrm>
         </p:spPr>
         <p:txBody>
-          <a:bodyPr vertOverflow="overflow" horzOverflow="overflow" vert="horz" wrap="square" lIns="91440" tIns="45720" rIns="91440" bIns="45720" numCol="1" spcCol="0" rtlCol="0" fromWordArt="0" anchor="t" anchorCtr="0" forceAA="0" upright="0" compatLnSpc="0">
-            <a:normAutofit fontScale="85000" lnSpcReduction="3000"/>
+          <a:bodyPr vertOverflow="overflow" horzOverflow="overflow" vert="horz" wrap="square" lIns="91440" tIns="45720" rIns="91440" bIns="45720" numCol="1" spcCol="0" rtlCol="0" fromWordArt="0" anchor="t" anchorCtr="0" forceAA="0" compatLnSpc="0">
+            <a:normAutofit fontScale="92500" lnSpcReduction="20000"/>
           </a:bodyPr>
           <a:lstStyle/>
           <a:p>
@@ -18019,11 +17872,7 @@
             </a:r>
             <a:r>
               <a:rPr lang="en-US" sz="2000"/>
-              <a:t> (</a:t>
-            </a:r>
-            <a:r>
-              <a:rPr lang="en-US" sz="2000"/>
-              <a:t>INT </a:t>
+              <a:t> (INT </a:t>
             </a:r>
             <a:r>
               <a:rPr lang="ru-RU" sz="2000"/>
@@ -18031,11 +17880,7 @@
             </a:r>
             <a:r>
               <a:rPr lang="en-US" sz="2000"/>
-              <a:t>FP</a:t>
-            </a:r>
-            <a:r>
-              <a:rPr lang="en-US" sz="2000"/>
-              <a:t>);</a:t>
+              <a:t>FP);</a:t>
             </a:r>
             <a:endParaRPr sz="2000"/>
           </a:p>
@@ -18047,11 +17892,7 @@
             </a:pPr>
             <a:r>
               <a:rPr lang="ru-RU" sz="2000"/>
-              <a:t>Блок получения, декодирования и планирования инструкций</a:t>
-            </a:r>
-            <a:r>
-              <a:rPr lang="ru-RU" sz="2000"/>
-              <a:t>;</a:t>
+              <a:t>Блок получения, декодирования и планирования инструкций;</a:t>
             </a:r>
             <a:endParaRPr sz="2000"/>
           </a:p>
@@ -18099,7 +17940,7 @@
                 </a:solidFill>
                 <a:latin typeface="Trebuchet MS"/>
               </a:rPr>
-              <a:t>5</a:t>
+              <a:t>6</a:t>
             </a:fld>
             <a:endParaRPr lang="ru-RU" sz="1800">
               <a:solidFill>
@@ -18123,7 +17964,7 @@
           <a:stretch/>
         </p:blipFill>
         <p:spPr bwMode="auto">
-          <a:xfrm flipH="0" flipV="0">
+          <a:xfrm>
             <a:off x="4152516" y="2208315"/>
             <a:ext cx="7854704" cy="4271176"/>
           </a:xfrm>
@@ -18146,7 +17987,7 @@
       </p:pic>
       <p:pic>
         <p:nvPicPr>
-          <p:cNvPr id="29648412" name=""/>
+          <p:cNvPr id="29648412" name="Рисунок 29648411"/>
           <p:cNvPicPr>
             <a:picLocks noChangeAspect="1"/>
           </p:cNvPicPr>
@@ -18157,7 +17998,7 @@
           <a:stretch/>
         </p:blipFill>
         <p:spPr bwMode="auto">
-          <a:xfrm flipH="0" flipV="0">
+          <a:xfrm>
             <a:off x="383823" y="4250145"/>
             <a:ext cx="3576543" cy="2229347"/>
           </a:xfrm>
@@ -18179,11 +18020,11 @@
   <p:clrMapOvr>
     <a:masterClrMapping/>
   </p:clrMapOvr>
-  <mc:AlternateContent xmlns:mc="http://schemas.openxmlformats.org/markup-compatibility/2006">
-    <mc:Choice xmlns:p159="http://schemas.microsoft.com/office/powerpoint/2015/09/main" xmlns:p14="http://schemas.microsoft.com/office/powerpoint/2010/main" Requires="p159">
-      <p:transition p14:dur="500" advClick="1"/>
+  <mc:AlternateContent xmlns:mc="http://schemas.openxmlformats.org/markup-compatibility/2006" xmlns:p159="http://schemas.microsoft.com/office/powerpoint/2015/09/main">
+    <mc:Choice Requires="p159">
+      <p:transition/>
     </mc:Choice>
-    <mc:Fallback>
+    <mc:Fallback xmlns:w="http://schemas.openxmlformats.org/wordprocessingml/2006/main" xmlns:m="http://schemas.openxmlformats.org/officeDocument/2006/math" xmlns="">
       <p:transition advClick="1"/>
     </mc:Fallback>
   </mc:AlternateContent>
@@ -18191,10 +18032,10 @@
 </file>
 
 <file path=ppt/slides/slide7.xml><?xml version="1.0" encoding="utf-8"?>
-<p:sld xmlns:a="http://schemas.openxmlformats.org/drawingml/2006/main" xmlns:r="http://schemas.openxmlformats.org/officeDocument/2006/relationships" xmlns:p="http://schemas.openxmlformats.org/presentationml/2006/main" xmlns:m="http://schemas.openxmlformats.org/officeDocument/2006/math" xmlns:w="http://schemas.openxmlformats.org/wordprocessingml/2006/main" xmlns:mc="http://schemas.openxmlformats.org/markup-compatibility/2006" showMasterPhAnim="0" showMasterSp="1" show="1">
-  <p:cSld name="">
+<p:sld xmlns:a="http://schemas.openxmlformats.org/drawingml/2006/main" xmlns:r="http://schemas.openxmlformats.org/officeDocument/2006/relationships" xmlns:p="http://schemas.openxmlformats.org/presentationml/2006/main" showMasterPhAnim="0">
+  <p:cSld>
     <p:bg>
-      <p:bgPr shadeToTitle="0">
+      <p:bgPr>
         <a:gradFill>
           <a:gsLst>
             <a:gs pos="0">
@@ -18224,6 +18065,7 @@
           </a:gsLst>
           <a:lin ang="13500000" scaled="1"/>
         </a:gradFill>
+        <a:effectLst/>
       </p:bgPr>
     </p:bg>
     <p:spTree>
@@ -18413,13 +18255,13 @@
           </p:nvPr>
         </p:nvSpPr>
         <p:spPr bwMode="auto">
-          <a:xfrm flipH="0" flipV="0">
+          <a:xfrm>
             <a:off x="285750" y="1444489"/>
             <a:ext cx="6925649" cy="5035002"/>
           </a:xfrm>
         </p:spPr>
         <p:txBody>
-          <a:bodyPr vertOverflow="overflow" horzOverflow="overflow" vert="horz" wrap="square" lIns="91440" tIns="45720" rIns="91440" bIns="45720" numCol="1" spcCol="0" rtlCol="0" fromWordArt="0" anchor="t" anchorCtr="0" forceAA="0" upright="0" compatLnSpc="0">
+          <a:bodyPr vertOverflow="overflow" horzOverflow="overflow" vert="horz" wrap="square" lIns="91440" tIns="45720" rIns="91440" bIns="45720" numCol="1" spcCol="0" rtlCol="0" fromWordArt="0" anchor="t" anchorCtr="0" forceAA="0" compatLnSpc="0">
             <a:normAutofit/>
           </a:bodyPr>
           <a:lstStyle/>
@@ -18431,7 +18273,6 @@
               <a:rPr lang="ru-RU"/>
               <a:t>Общий регистровый файл большого размера для множества ядер;</a:t>
             </a:r>
-            <a:endParaRPr lang="ru-RU"/>
           </a:p>
           <a:p>
             <a:pPr>
@@ -18441,7 +18282,6 @@
               <a:rPr lang="ru-RU"/>
               <a:t>Каждому ядру в регистровом файле выделена своя область;</a:t>
             </a:r>
-            <a:endParaRPr lang="ru-RU"/>
           </a:p>
           <a:p>
             <a:pPr>
@@ -18459,7 +18299,6 @@
               <a:rPr lang="ru-RU"/>
               <a:t>является однопоточным;</a:t>
             </a:r>
-            <a:endParaRPr lang="ru-RU"/>
           </a:p>
           <a:p>
             <a:pPr>
@@ -18497,11 +18336,7 @@
             </a:r>
             <a:r>
               <a:rPr lang="ru-RU"/>
-              <a:t>специализированный ускоритель, в частности для тригонометрических функций</a:t>
-            </a:r>
-            <a:r>
-              <a:rPr lang="ru-RU"/>
-              <a:t>.</a:t>
+              <a:t>специализированный ускоритель, в частности для тригонометрических функций.</a:t>
             </a:r>
             <a:endParaRPr/>
           </a:p>
@@ -18537,7 +18372,7 @@
                 </a:solidFill>
                 <a:latin typeface="Trebuchet MS"/>
               </a:rPr>
-              <a:t>5</a:t>
+              <a:t>7</a:t>
             </a:fld>
             <a:endParaRPr lang="ru-RU" sz="1800">
               <a:solidFill>
@@ -18558,11 +18393,11 @@
         </p:nvPicPr>
         <p:blipFill rotWithShape="1">
           <a:blip r:embed="rId3"/>
-          <a:srcRect l="0" t="0" r="33408" b="0"/>
+          <a:srcRect r="33408"/>
           <a:stretch/>
         </p:blipFill>
         <p:spPr bwMode="auto">
-          <a:xfrm flipH="0" flipV="0">
+          <a:xfrm>
             <a:off x="7284603" y="1568869"/>
             <a:ext cx="4326204" cy="4910622"/>
           </a:xfrm>
@@ -18588,11 +18423,11 @@
   <p:clrMapOvr>
     <a:masterClrMapping/>
   </p:clrMapOvr>
-  <mc:AlternateContent xmlns:mc="http://schemas.openxmlformats.org/markup-compatibility/2006">
-    <mc:Choice xmlns:p159="http://schemas.microsoft.com/office/powerpoint/2015/09/main" xmlns:p14="http://schemas.microsoft.com/office/powerpoint/2010/main" Requires="p159">
-      <p:transition p14:dur="500" advClick="1"/>
+  <mc:AlternateContent xmlns:mc="http://schemas.openxmlformats.org/markup-compatibility/2006" xmlns:p159="http://schemas.microsoft.com/office/powerpoint/2015/09/main">
+    <mc:Choice Requires="p159">
+      <p:transition/>
     </mc:Choice>
-    <mc:Fallback>
+    <mc:Fallback xmlns:w="http://schemas.openxmlformats.org/wordprocessingml/2006/main" xmlns:m="http://schemas.openxmlformats.org/officeDocument/2006/math" xmlns="">
       <p:transition advClick="1"/>
     </mc:Fallback>
   </mc:AlternateContent>
@@ -18600,10 +18435,10 @@
 </file>
 
 <file path=ppt/slides/slide8.xml><?xml version="1.0" encoding="utf-8"?>
-<p:sld xmlns:a="http://schemas.openxmlformats.org/drawingml/2006/main" xmlns:r="http://schemas.openxmlformats.org/officeDocument/2006/relationships" xmlns:p="http://schemas.openxmlformats.org/presentationml/2006/main" xmlns:m="http://schemas.openxmlformats.org/officeDocument/2006/math" xmlns:w="http://schemas.openxmlformats.org/wordprocessingml/2006/main" xmlns:mc="http://schemas.openxmlformats.org/markup-compatibility/2006" showMasterPhAnim="0" showMasterSp="1" show="1">
-  <p:cSld name="">
+<p:sld xmlns:a="http://schemas.openxmlformats.org/drawingml/2006/main" xmlns:r="http://schemas.openxmlformats.org/officeDocument/2006/relationships" xmlns:p="http://schemas.openxmlformats.org/presentationml/2006/main" showMasterPhAnim="0">
+  <p:cSld>
     <p:bg>
-      <p:bgPr shadeToTitle="0">
+      <p:bgPr>
         <a:gradFill>
           <a:gsLst>
             <a:gs pos="0">
@@ -18633,6 +18468,7 @@
           </a:gsLst>
           <a:lin ang="13500000" scaled="1"/>
         </a:gradFill>
+        <a:effectLst/>
       </p:bgPr>
     </p:bg>
     <p:spTree>
@@ -18660,14 +18496,14 @@
           </p:nvPr>
         </p:nvSpPr>
         <p:spPr bwMode="auto">
-          <a:xfrm flipH="0" flipV="0">
+          <a:xfrm>
             <a:off x="-9297" y="1350173"/>
             <a:ext cx="3310846" cy="3599316"/>
           </a:xfrm>
         </p:spPr>
         <p:txBody>
-          <a:bodyPr vertOverflow="overflow" horzOverflow="overflow" vert="horz" wrap="square" lIns="91440" tIns="45720" rIns="91440" bIns="45720" numCol="1" spcCol="0" rtlCol="0" fromWordArt="0" anchor="t" anchorCtr="0" forceAA="0" upright="0" compatLnSpc="0">
-            <a:normAutofit fontScale="90000" lnSpcReduction="2000"/>
+          <a:bodyPr vertOverflow="overflow" horzOverflow="overflow" vert="horz" wrap="square" lIns="91440" tIns="45720" rIns="91440" bIns="45720" numCol="1" spcCol="0" rtlCol="0" fromWordArt="0" anchor="t" anchorCtr="0" forceAA="0" compatLnSpc="0">
+            <a:normAutofit fontScale="97500" lnSpcReduction="12000"/>
           </a:bodyPr>
           <a:lstStyle/>
           <a:p>
@@ -18684,21 +18520,15 @@
             </a:r>
             <a:r>
               <a:rPr lang="ru-RU"/>
-              <a:t>шейдера </a:t>
-            </a:r>
-            <a:r>
-              <a:rPr lang="ru-RU"/>
-              <a:t>из </a:t>
+              <a:t>шейдера из </a:t>
             </a:r>
             <a:r>
               <a:rPr lang="en-US"/>
               <a:t>VKCUBE</a:t>
             </a:r>
             <a:r>
-              <a:rPr/>
               <a:t>;</a:t>
             </a:r>
-            <a:endParaRPr/>
           </a:p>
           <a:p>
             <a:pPr>
@@ -18716,7 +18546,6 @@
               <a:rPr lang="ru-RU"/>
               <a:t>.</a:t>
             </a:r>
-            <a:endParaRPr lang="ru-RU"/>
           </a:p>
         </p:txBody>
       </p:sp>
@@ -18750,7 +18579,7 @@
                 </a:solidFill>
                 <a:latin typeface="Trebuchet MS"/>
               </a:rPr>
-              <a:t>6</a:t>
+              <a:t>8</a:t>
             </a:fld>
             <a:endParaRPr lang="ru-RU" sz="1800">
               <a:solidFill>
@@ -18774,7 +18603,7 @@
           <a:stretch/>
         </p:blipFill>
         <p:spPr bwMode="auto">
-          <a:xfrm flipH="0" flipV="0">
+          <a:xfrm>
             <a:off x="2856290" y="4580893"/>
             <a:ext cx="4981510" cy="2094567"/>
           </a:xfrm>
@@ -18799,19 +18628,24 @@
           </p:cNvPicPr>
           <p:nvPr/>
         </p:nvPicPr>
-        <p:blipFill rotWithShape="1">
+        <p:blipFill>
           <a:blip r:embed="rId4">
             <a:extLst>
+              <a:ext uri="{28A0092B-C50C-407E-A947-70E740481C1C}">
+                <a14:useLocalDpi xmlns:a14="http://schemas.microsoft.com/office/drawing/2010/main" val="0"/>
+              </a:ext>
               <a:ext uri="{96DAC541-7B7A-43D3-8B79-37D633B846F1}">
                 <asvg:svgBlip xmlns:asvg="http://schemas.microsoft.com/office/drawing/2016/SVG/main" r:embed="rId5"/>
               </a:ext>
             </a:extLst>
           </a:blip>
+          <a:srcRect/>
+          <a:stretch/>
         </p:blipFill>
         <p:spPr bwMode="auto">
-          <a:xfrm flipH="0" flipV="0">
-            <a:off x="9204466" y="1593351"/>
-            <a:ext cx="2824299" cy="2035947"/>
+          <a:xfrm>
+            <a:off x="9272601" y="1593351"/>
+            <a:ext cx="2688029" cy="2035947"/>
           </a:xfrm>
           <a:prstGeom prst="rect">
             <a:avLst/>
@@ -18943,8 +18777,8 @@
           </a:xfrm>
         </p:spPr>
         <p:txBody>
-          <a:bodyPr vertOverflow="overflow" horzOverflow="overflow" vert="horz" wrap="square" lIns="91440" tIns="45720" rIns="91440" bIns="45720" numCol="1" spcCol="0" rtlCol="0" fromWordArt="0" anchor="ctr" anchorCtr="0" forceAA="0" upright="0" compatLnSpc="0">
-            <a:normAutofit fontScale="90000" lnSpcReduction="2000"/>
+          <a:bodyPr vertOverflow="overflow" horzOverflow="overflow" vert="horz" wrap="square" lIns="91440" tIns="45720" rIns="91440" bIns="45720" numCol="1" spcCol="0" rtlCol="0" fromWordArt="0" anchor="ctr" anchorCtr="0" forceAA="0" compatLnSpc="0">
+            <a:normAutofit fontScale="90000"/>
           </a:bodyPr>
           <a:lstStyle/>
           <a:p>
@@ -18983,19 +18817,24 @@
           </p:cNvPicPr>
           <p:nvPr/>
         </p:nvPicPr>
-        <p:blipFill rotWithShape="1">
+        <p:blipFill>
           <a:blip r:embed="rId6">
             <a:extLst>
+              <a:ext uri="{28A0092B-C50C-407E-A947-70E740481C1C}">
+                <a14:useLocalDpi xmlns:a14="http://schemas.microsoft.com/office/drawing/2010/main" val="0"/>
+              </a:ext>
               <a:ext uri="{96DAC541-7B7A-43D3-8B79-37D633B846F1}">
                 <asvg:svgBlip xmlns:asvg="http://schemas.microsoft.com/office/drawing/2016/SVG/main" r:embed="rId7"/>
               </a:ext>
             </a:extLst>
           </a:blip>
+          <a:srcRect/>
+          <a:stretch/>
         </p:blipFill>
         <p:spPr bwMode="auto">
-          <a:xfrm flipH="0" flipV="0">
-            <a:off x="8480073" y="5206830"/>
-            <a:ext cx="3548691" cy="1376882"/>
+          <a:xfrm>
+            <a:off x="8672115" y="5206830"/>
+            <a:ext cx="3164607" cy="1376882"/>
           </a:xfrm>
           <a:prstGeom prst="rect">
             <a:avLst/>
@@ -19004,7 +18843,7 @@
       </p:pic>
       <p:pic>
         <p:nvPicPr>
-          <p:cNvPr id="1736709910" name=""/>
+          <p:cNvPr id="1736709910" name="Рисунок 1736709909"/>
           <p:cNvPicPr>
             <a:picLocks noChangeAspect="1"/>
           </p:cNvPicPr>
@@ -19015,7 +18854,7 @@
           <a:stretch/>
         </p:blipFill>
         <p:spPr bwMode="auto">
-          <a:xfrm flipH="0" flipV="0">
+          <a:xfrm>
             <a:off x="3122609" y="1415540"/>
             <a:ext cx="5529106" cy="3009811"/>
           </a:xfrm>
@@ -19034,7 +18873,7 @@
       </p:pic>
       <p:cxnSp>
         <p:nvCxnSpPr>
-          <p:cNvPr id="1511808802" name=""/>
+          <p:cNvPr id="1511808802" name="Прямая соединительная линия 1511808801"/>
           <p:cNvCxnSpPr>
             <a:stCxn id="142624812" idx="3"/>
             <a:endCxn id="1528119454" idx="1"/>
@@ -19042,7 +18881,7 @@
           <p:nvPr/>
         </p:nvCxnSpPr>
         <p:spPr bwMode="auto">
-          <a:xfrm rot="0" flipH="0" flipV="0">
+          <a:xfrm>
             <a:off x="7837799" y="5628176"/>
             <a:ext cx="642272" cy="267095"/>
           </a:xfrm>
@@ -19077,7 +18916,7 @@
       </p:cxnSp>
       <p:cxnSp>
         <p:nvCxnSpPr>
-          <p:cNvPr id="873958203" name=""/>
+          <p:cNvPr id="873958203" name="Прямая соединительная линия 873958202"/>
           <p:cNvCxnSpPr>
             <a:stCxn id="142624812" idx="3"/>
             <a:endCxn id="1937440151" idx="2"/>
@@ -19085,7 +18924,7 @@
           <p:nvPr/>
         </p:nvCxnSpPr>
         <p:spPr bwMode="auto">
-          <a:xfrm rot="0" flipH="0" flipV="1">
+          <a:xfrm flipV="1">
             <a:off x="7837801" y="3629299"/>
             <a:ext cx="2778814" cy="1998876"/>
           </a:xfrm>
@@ -19120,7 +18959,7 @@
       </p:cxnSp>
       <p:cxnSp>
         <p:nvCxnSpPr>
-          <p:cNvPr id="1473911929" name=""/>
+          <p:cNvPr id="1473911929" name="Прямая соединительная линия 1473911928"/>
           <p:cNvCxnSpPr>
             <a:stCxn id="1736709910" idx="3"/>
             <a:endCxn id="1937440151" idx="1"/>
@@ -19128,7 +18967,7 @@
           <p:nvPr/>
         </p:nvCxnSpPr>
         <p:spPr bwMode="auto">
-          <a:xfrm rot="0" flipH="0" flipV="1">
+          <a:xfrm flipV="1">
             <a:off x="8651715" y="2611325"/>
             <a:ext cx="552751" cy="309120"/>
           </a:xfrm>
@@ -19163,7 +19002,7 @@
       </p:cxnSp>
       <p:cxnSp>
         <p:nvCxnSpPr>
-          <p:cNvPr id="120675869" name=""/>
+          <p:cNvPr id="120675869" name="Прямая соединительная линия 120675868"/>
           <p:cNvCxnSpPr>
             <a:stCxn id="1736709910" idx="3"/>
             <a:endCxn id="1528119454" idx="0"/>
@@ -19171,7 +19010,7 @@
           <p:nvPr/>
         </p:nvCxnSpPr>
         <p:spPr bwMode="auto">
-          <a:xfrm rot="0" flipH="0" flipV="0">
+          <a:xfrm>
             <a:off x="8651714" y="2920445"/>
             <a:ext cx="1602704" cy="2286385"/>
           </a:xfrm>
@@ -19209,11 +19048,11 @@
   <p:clrMapOvr>
     <a:masterClrMapping/>
   </p:clrMapOvr>
-  <mc:AlternateContent xmlns:mc="http://schemas.openxmlformats.org/markup-compatibility/2006">
-    <mc:Choice xmlns:p159="http://schemas.microsoft.com/office/powerpoint/2015/09/main" xmlns:p14="http://schemas.microsoft.com/office/powerpoint/2010/main" Requires="p159">
-      <p:transition p14:dur="500" advClick="1"/>
+  <mc:AlternateContent xmlns:mc="http://schemas.openxmlformats.org/markup-compatibility/2006" xmlns:p159="http://schemas.microsoft.com/office/powerpoint/2015/09/main">
+    <mc:Choice Requires="p159">
+      <p:transition/>
     </mc:Choice>
-    <mc:Fallback>
+    <mc:Fallback xmlns:w="http://schemas.openxmlformats.org/wordprocessingml/2006/main" xmlns:m="http://schemas.openxmlformats.org/officeDocument/2006/math" xmlns="">
       <p:transition advClick="1"/>
     </mc:Fallback>
   </mc:AlternateContent>
@@ -19221,10 +19060,10 @@
 </file>
 
 <file path=ppt/slides/slide9.xml><?xml version="1.0" encoding="utf-8"?>
-<p:sld xmlns:a="http://schemas.openxmlformats.org/drawingml/2006/main" xmlns:r="http://schemas.openxmlformats.org/officeDocument/2006/relationships" xmlns:p="http://schemas.openxmlformats.org/presentationml/2006/main" xmlns:m="http://schemas.openxmlformats.org/officeDocument/2006/math" xmlns:w="http://schemas.openxmlformats.org/wordprocessingml/2006/main" xmlns:mc="http://schemas.openxmlformats.org/markup-compatibility/2006" showMasterPhAnim="0" showMasterSp="1" show="1">
-  <p:cSld name="">
+<p:sld xmlns:a="http://schemas.openxmlformats.org/drawingml/2006/main" xmlns:r="http://schemas.openxmlformats.org/officeDocument/2006/relationships" xmlns:p="http://schemas.openxmlformats.org/presentationml/2006/main" showMasterPhAnim="0">
+  <p:cSld>
     <p:bg>
-      <p:bgPr shadeToTitle="0">
+      <p:bgPr>
         <a:gradFill>
           <a:gsLst>
             <a:gs pos="0">
@@ -19254,6 +19093,7 @@
           </a:gsLst>
           <a:lin ang="13500000" scaled="1"/>
         </a:gradFill>
+        <a:effectLst/>
       </p:bgPr>
     </p:bg>
     <p:spTree>
@@ -19281,14 +19121,14 @@
           </p:nvPr>
         </p:nvSpPr>
         <p:spPr bwMode="auto">
-          <a:xfrm flipH="0" flipV="0">
+          <a:xfrm>
             <a:off x="153374" y="1523999"/>
             <a:ext cx="5067299" cy="4762499"/>
           </a:xfrm>
         </p:spPr>
         <p:txBody>
-          <a:bodyPr vertOverflow="overflow" horzOverflow="overflow" vert="horz" wrap="square" lIns="91440" tIns="45720" rIns="91440" bIns="45720" numCol="1" spcCol="0" rtlCol="0" fromWordArt="0" anchor="t" anchorCtr="0" forceAA="0" upright="0" compatLnSpc="0">
-            <a:normAutofit fontScale="90000" lnSpcReduction="2000"/>
+          <a:bodyPr vertOverflow="overflow" horzOverflow="overflow" vert="horz" wrap="square" lIns="91440" tIns="45720" rIns="91440" bIns="45720" numCol="1" spcCol="0" rtlCol="0" fromWordArt="0" anchor="t" anchorCtr="0" forceAA="0" compatLnSpc="0">
+            <a:normAutofit fontScale="90000" lnSpcReduction="12000"/>
           </a:bodyPr>
           <a:lstStyle/>
           <a:p>
@@ -19345,11 +19185,7 @@
             </a:r>
             <a:r>
               <a:rPr lang="ru-RU"/>
-              <a:t> </a:t>
-            </a:r>
-            <a:r>
-              <a:rPr lang="ru-RU"/>
-              <a:t>– вычислительный блок;</a:t>
+              <a:t> – вычислительный блок;</a:t>
             </a:r>
             <a:endParaRPr/>
           </a:p>
@@ -19363,11 +19199,7 @@
             </a:r>
             <a:r>
               <a:rPr lang="ru-RU"/>
-              <a:t>блок загрузки/сохранения данных</a:t>
-            </a:r>
-            <a:r>
-              <a:rPr lang="ru-RU"/>
-              <a:t>;</a:t>
+              <a:t>блок загрузки/сохранения данных;</a:t>
             </a:r>
             <a:endParaRPr/>
           </a:p>
@@ -19381,13 +19213,8 @@
             </a:r>
             <a:r>
               <a:rPr lang="ru-RU"/>
-              <a:t>- контрольно-статусные регистры. </a:t>
-            </a:r>
-            <a:r>
-              <a:rPr lang="ru-RU"/>
-              <a:t>Содержат статусные и управляющие сигналы связанные с самим графическим ядром;</a:t>
-            </a:r>
-            <a:endParaRPr lang="ru-RU"/>
+              <a:t>- контрольно-статусные регистры. Содержат статусные и управляющие сигналы связанные с самим графическим ядром;</a:t>
+            </a:r>
           </a:p>
           <a:p>
             <a:pPr>
@@ -19399,11 +19226,7 @@
             </a:r>
             <a:r>
               <a:rPr lang="ru-RU"/>
-              <a:t>счётчик инструкций</a:t>
-            </a:r>
-            <a:r>
-              <a:rPr lang="ru-RU"/>
-              <a:t>.</a:t>
+              <a:t>счётчик инструкций.</a:t>
             </a:r>
             <a:endParaRPr lang="en-US"/>
           </a:p>
@@ -19439,7 +19262,7 @@
                 </a:solidFill>
                 <a:latin typeface="Trebuchet MS"/>
               </a:rPr>
-              <a:t>7</a:t>
+              <a:t>9</a:t>
             </a:fld>
             <a:endParaRPr lang="ru-RU" sz="1800">
               <a:solidFill>
@@ -19604,26 +19427,30 @@
       </p:sp>
       <p:pic>
         <p:nvPicPr>
-          <p:cNvPr id="1840874631" name=""/>
+          <p:cNvPr id="1840874631" name="Рисунок 1840874630"/>
           <p:cNvPicPr>
             <a:picLocks noChangeAspect="1"/>
           </p:cNvPicPr>
           <p:nvPr/>
         </p:nvPicPr>
-        <p:blipFill rotWithShape="1">
+        <p:blipFill>
           <a:blip r:embed="rId3">
             <a:extLst>
+              <a:ext uri="{28A0092B-C50C-407E-A947-70E740481C1C}">
+                <a14:useLocalDpi xmlns:a14="http://schemas.microsoft.com/office/drawing/2010/main" val="0"/>
+              </a:ext>
               <a:ext uri="{96DAC541-7B7A-43D3-8B79-37D633B846F1}">
                 <asvg:svgBlip xmlns:asvg="http://schemas.microsoft.com/office/drawing/2016/SVG/main" r:embed="rId4"/>
               </a:ext>
             </a:extLst>
           </a:blip>
+          <a:srcRect/>
           <a:stretch/>
         </p:blipFill>
         <p:spPr bwMode="auto">
-          <a:xfrm flipH="0" flipV="0">
-            <a:off x="5603317" y="1473409"/>
-            <a:ext cx="5766954" cy="5249527"/>
+          <a:xfrm>
+            <a:off x="5603317" y="1477684"/>
+            <a:ext cx="5766954" cy="5240977"/>
           </a:xfrm>
           <a:prstGeom prst="rect">
             <a:avLst/>
@@ -19635,11 +19462,11 @@
   <p:clrMapOvr>
     <a:masterClrMapping/>
   </p:clrMapOvr>
-  <mc:AlternateContent xmlns:mc="http://schemas.openxmlformats.org/markup-compatibility/2006">
-    <mc:Choice xmlns:p159="http://schemas.microsoft.com/office/powerpoint/2015/09/main" xmlns:p14="http://schemas.microsoft.com/office/powerpoint/2010/main" Requires="p159">
-      <p:transition p14:dur="500" advClick="1"/>
+  <mc:AlternateContent xmlns:mc="http://schemas.openxmlformats.org/markup-compatibility/2006" xmlns:p159="http://schemas.microsoft.com/office/powerpoint/2015/09/main">
+    <mc:Choice Requires="p159">
+      <p:transition/>
     </mc:Choice>
-    <mc:Fallback>
+    <mc:Fallback xmlns:w="http://schemas.openxmlformats.org/wordprocessingml/2006/main" xmlns:m="http://schemas.openxmlformats.org/officeDocument/2006/math" xmlns="">
       <p:transition advClick="1"/>
     </mc:Fallback>
   </mc:AlternateContent>
@@ -19647,7 +19474,7 @@
 </file>
 
 <file path=ppt/theme/theme1.xml><?xml version="1.0" encoding="utf-8"?>
-<a:theme xmlns:a="http://schemas.openxmlformats.org/drawingml/2006/main" xmlns:r="http://schemas.openxmlformats.org/officeDocument/2006/relationships" xmlns:p="http://schemas.openxmlformats.org/presentationml/2006/main" name="Тема Office">
+<a:theme xmlns:a="http://schemas.openxmlformats.org/drawingml/2006/main" name="Тема Office">
   <a:themeElements>
     <a:clrScheme name="Стандартная">
       <a:dk1>
@@ -19838,11 +19665,12 @@
     </a:fmtScheme>
   </a:themeElements>
   <a:objectDefaults/>
+  <a:extraClrSchemeLst/>
 </a:theme>
 </file>
 
 <file path=ppt/theme/theme2.xml><?xml version="1.0" encoding="utf-8"?>
-<a:theme xmlns:a="http://schemas.openxmlformats.org/drawingml/2006/main" xmlns:r="http://schemas.openxmlformats.org/officeDocument/2006/relationships" xmlns:p="http://schemas.openxmlformats.org/presentationml/2006/main" name="Тема Office">
+<a:theme xmlns:a="http://schemas.openxmlformats.org/drawingml/2006/main" name="Тема Office">
   <a:themeElements>
     <a:clrScheme name="Стандартная">
       <a:dk1>
@@ -20033,5 +19861,6 @@
     </a:fmtScheme>
   </a:themeElements>
   <a:objectDefaults/>
+  <a:extraClrSchemeLst/>
 </a:theme>
 </file>
--- a/docs/starukhin_dissertation/magister_pres.pptx
+++ b/docs/starukhin_dissertation/magister_pres.pptx
@@ -1,31 +1,31 @@
 
 <file path=ppt/presentation.xml><?xml version="1.0" encoding="utf-8"?>
-<p:presentation xmlns:a="http://schemas.openxmlformats.org/drawingml/2006/main" xmlns:r="http://schemas.openxmlformats.org/officeDocument/2006/relationships" xmlns:p="http://schemas.openxmlformats.org/presentationml/2006/main" showSpecialPlsOnTitleSld="0" saveSubsetFonts="1">
+<p:presentation xmlns:a="http://schemas.openxmlformats.org/drawingml/2006/main" xmlns:r="http://schemas.openxmlformats.org/officeDocument/2006/relationships" xmlns:p="http://schemas.openxmlformats.org/presentationml/2006/main" xmlns:m="http://schemas.openxmlformats.org/officeDocument/2006/math" xmlns:w="http://schemas.openxmlformats.org/wordprocessingml/2006/main" saveSubsetFonts="1" showSpecialPlsOnTitleSld="0">
   <p:sldMasterIdLst>
     <p:sldMasterId id="2147483648" r:id="rId1"/>
   </p:sldMasterIdLst>
   <p:notesMasterIdLst>
-    <p:notesMasterId r:id="rId20"/>
+    <p:notesMasterId r:id="rId22"/>
   </p:notesMasterIdLst>
   <p:sldIdLst>
-    <p:sldId id="256" r:id="rId2"/>
-    <p:sldId id="257" r:id="rId3"/>
-    <p:sldId id="258" r:id="rId4"/>
-    <p:sldId id="259" r:id="rId5"/>
-    <p:sldId id="260" r:id="rId6"/>
-    <p:sldId id="261" r:id="rId7"/>
-    <p:sldId id="262" r:id="rId8"/>
-    <p:sldId id="263" r:id="rId9"/>
-    <p:sldId id="264" r:id="rId10"/>
-    <p:sldId id="265" r:id="rId11"/>
-    <p:sldId id="266" r:id="rId12"/>
-    <p:sldId id="267" r:id="rId13"/>
-    <p:sldId id="268" r:id="rId14"/>
-    <p:sldId id="269" r:id="rId15"/>
-    <p:sldId id="270" r:id="rId16"/>
-    <p:sldId id="271" r:id="rId17"/>
-    <p:sldId id="272" r:id="rId18"/>
-    <p:sldId id="273" r:id="rId19"/>
+    <p:sldId id="256" r:id="rId4"/>
+    <p:sldId id="257" r:id="rId5"/>
+    <p:sldId id="258" r:id="rId6"/>
+    <p:sldId id="259" r:id="rId7"/>
+    <p:sldId id="260" r:id="rId8"/>
+    <p:sldId id="261" r:id="rId9"/>
+    <p:sldId id="262" r:id="rId10"/>
+    <p:sldId id="263" r:id="rId11"/>
+    <p:sldId id="264" r:id="rId12"/>
+    <p:sldId id="265" r:id="rId13"/>
+    <p:sldId id="266" r:id="rId14"/>
+    <p:sldId id="267" r:id="rId15"/>
+    <p:sldId id="268" r:id="rId16"/>
+    <p:sldId id="269" r:id="rId17"/>
+    <p:sldId id="270" r:id="rId18"/>
+    <p:sldId id="271" r:id="rId19"/>
+    <p:sldId id="272" r:id="rId20"/>
+    <p:sldId id="273" r:id="rId21"/>
   </p:sldIdLst>
   <p:sldSz cx="12192000" cy="6858000"/>
   <p:notesSz cx="6858000" cy="9144000"/>
@@ -124,28 +124,12 @@
       </a:defRPr>
     </a:lvl9pPr>
   </p:defaultTextStyle>
-  <p:extLst>
-    <p:ext uri="{EFAFB233-063F-42B5-8137-9DF3F51BA10A}">
-      <p15:sldGuideLst xmlns:p15="http://schemas.microsoft.com/office/powerpoint/2012/main">
-        <p15:guide id="1" pos="3840">
-          <p15:clr>
-            <a:srgbClr val="A4A3A4"/>
-          </p15:clr>
-        </p15:guide>
-        <p15:guide id="2" orient="horz" pos="2160">
-          <p15:clr>
-            <a:srgbClr val="A4A3A4"/>
-          </p15:clr>
-        </p15:guide>
-      </p15:sldGuideLst>
-    </p:ext>
-  </p:extLst>
 </p:presentation>
 </file>
 
 <file path=ppt/notesMasters/notesMaster1.xml><?xml version="1.0" encoding="utf-8"?>
 <p:notesMaster xmlns:a="http://schemas.openxmlformats.org/drawingml/2006/main" xmlns:r="http://schemas.openxmlformats.org/officeDocument/2006/relationships" xmlns:p="http://schemas.openxmlformats.org/presentationml/2006/main">
-  <p:cSld>
+  <p:cSld name="">
     <p:bg>
       <p:bgRef idx="1001">
         <a:schemeClr val="bg1"/>
@@ -167,7 +151,7 @@
       </p:grpSpPr>
       <p:sp>
         <p:nvSpPr>
-          <p:cNvPr id="1994621397" name="Верхний колонтитул 1"/>
+          <p:cNvPr id="328729014" name="Верхний колонтитул 1"/>
           <p:cNvSpPr>
             <a:spLocks noGrp="1"/>
           </p:cNvSpPr>
@@ -201,7 +185,7 @@
       </p:sp>
       <p:sp>
         <p:nvSpPr>
-          <p:cNvPr id="1879859652" name="Дата 2"/>
+          <p:cNvPr id="1436104561" name="Дата 2"/>
           <p:cNvSpPr>
             <a:spLocks noGrp="1"/>
           </p:cNvSpPr>
@@ -239,9 +223,9 @@
       </p:sp>
       <p:sp>
         <p:nvSpPr>
-          <p:cNvPr id="1006772333" name="Образ слайда 3"/>
-          <p:cNvSpPr>
-            <a:spLocks noGrp="1" noRot="1" noChangeAspect="1"/>
+          <p:cNvPr id="1820111621" name="Образ слайда 3"/>
+          <p:cNvSpPr>
+            <a:spLocks noChangeAspect="1" noGrp="1" noRot="1"/>
           </p:cNvSpPr>
           <p:nvPr>
             <p:ph type="sldImg" idx="2"/>
@@ -275,7 +259,7 @@
       </p:sp>
       <p:sp>
         <p:nvSpPr>
-          <p:cNvPr id="2110414089" name="Заметки 4"/>
+          <p:cNvPr id="500008442" name="Заметки 4"/>
           <p:cNvSpPr>
             <a:spLocks noGrp="1"/>
           </p:cNvSpPr>
@@ -349,7 +333,7 @@
       </p:sp>
       <p:sp>
         <p:nvSpPr>
-          <p:cNvPr id="472631752" name="Нижний колонтитул 5"/>
+          <p:cNvPr id="589964211" name="Нижний колонтитул 5"/>
           <p:cNvSpPr>
             <a:spLocks noGrp="1"/>
           </p:cNvSpPr>
@@ -383,7 +367,7 @@
       </p:sp>
       <p:sp>
         <p:nvSpPr>
-          <p:cNvPr id="1150720254" name="Номер слайда 6"/>
+          <p:cNvPr id="1509303888" name="Номер слайда 6"/>
           <p:cNvSpPr>
             <a:spLocks noGrp="1"/>
           </p:cNvSpPr>
@@ -518,8 +502,8 @@
 </file>
 
 <file path=ppt/notesSlides/notesSlide1.xml><?xml version="1.0" encoding="utf-8"?>
-<p:notes xmlns:a="http://schemas.openxmlformats.org/drawingml/2006/main" xmlns:r="http://schemas.openxmlformats.org/officeDocument/2006/relationships" xmlns:p="http://schemas.openxmlformats.org/presentationml/2006/main">
-  <p:cSld>
+<p:notes xmlns:a="http://schemas.openxmlformats.org/drawingml/2006/main" xmlns:r="http://schemas.openxmlformats.org/officeDocument/2006/relationships" xmlns:p="http://schemas.openxmlformats.org/presentationml/2006/main" xmlns:m="http://schemas.openxmlformats.org/officeDocument/2006/math" xmlns:w="http://schemas.openxmlformats.org/wordprocessingml/2006/main">
+  <p:cSld name="">
     <p:spTree>
       <p:nvGrpSpPr>
         <p:cNvPr id="1" name=""/>
@@ -536,9 +520,9 @@
       </p:grpSpPr>
       <p:sp>
         <p:nvSpPr>
-          <p:cNvPr id="2049855219" name="Slide Image Placeholder 1"/>
-          <p:cNvSpPr>
-            <a:spLocks noGrp="1" noRot="1" noChangeAspect="1"/>
+          <p:cNvPr id="453990364" name="Slide Image Placeholder 1"/>
+          <p:cNvSpPr>
+            <a:spLocks noChangeAspect="1" noGrp="1" noRot="1"/>
           </p:cNvSpPr>
           <p:nvPr>
             <p:ph type="sldImg"/>
@@ -548,7 +532,7 @@
       </p:sp>
       <p:sp>
         <p:nvSpPr>
-          <p:cNvPr id="1678332493" name="Notes Placeholder 2"/>
+          <p:cNvPr id="845678139" name="Notes Placeholder 2"/>
           <p:cNvSpPr>
             <a:spLocks noGrp="1"/>
           </p:cNvSpPr>
@@ -570,7 +554,7 @@
       </p:sp>
       <p:sp>
         <p:nvSpPr>
-          <p:cNvPr id="1483129251" name="Slide Number Placeholder 3"/>
+          <p:cNvPr id="1320793979" name="Slide Number Placeholder 3"/>
           <p:cNvSpPr>
             <a:spLocks noGrp="1"/>
           </p:cNvSpPr>
@@ -603,8 +587,8 @@
 </file>
 
 <file path=ppt/notesSlides/notesSlide10.xml><?xml version="1.0" encoding="utf-8"?>
-<p:notes xmlns:a="http://schemas.openxmlformats.org/drawingml/2006/main" xmlns:r="http://schemas.openxmlformats.org/officeDocument/2006/relationships" xmlns:p="http://schemas.openxmlformats.org/presentationml/2006/main">
-  <p:cSld>
+<p:notes xmlns:a="http://schemas.openxmlformats.org/drawingml/2006/main" xmlns:r="http://schemas.openxmlformats.org/officeDocument/2006/relationships" xmlns:p="http://schemas.openxmlformats.org/presentationml/2006/main" xmlns:m="http://schemas.openxmlformats.org/officeDocument/2006/math" xmlns:w="http://schemas.openxmlformats.org/wordprocessingml/2006/main">
+  <p:cSld name="">
     <p:spTree>
       <p:nvGrpSpPr>
         <p:cNvPr id="1" name=""/>
@@ -621,9 +605,9 @@
       </p:grpSpPr>
       <p:sp>
         <p:nvSpPr>
-          <p:cNvPr id="546986335" name="Slide Image Placeholder 1"/>
-          <p:cNvSpPr>
-            <a:spLocks noGrp="1" noRot="1" noChangeAspect="1"/>
+          <p:cNvPr id="1276892176" name="Slide Image Placeholder 1"/>
+          <p:cNvSpPr>
+            <a:spLocks noChangeAspect="1" noGrp="1" noRot="1"/>
           </p:cNvSpPr>
           <p:nvPr>
             <p:ph type="sldImg"/>
@@ -633,7 +617,7 @@
       </p:sp>
       <p:sp>
         <p:nvSpPr>
-          <p:cNvPr id="516427946" name="Notes Placeholder 2"/>
+          <p:cNvPr id="1877539247" name="Notes Placeholder 2"/>
           <p:cNvSpPr>
             <a:spLocks noGrp="1"/>
           </p:cNvSpPr>
@@ -655,7 +639,7 @@
       </p:sp>
       <p:sp>
         <p:nvSpPr>
-          <p:cNvPr id="1289768327" name="Slide Number Placeholder 3"/>
+          <p:cNvPr id="543993787" name="Slide Number Placeholder 3"/>
           <p:cNvSpPr>
             <a:spLocks noGrp="1"/>
           </p:cNvSpPr>
@@ -688,8 +672,8 @@
 </file>
 
 <file path=ppt/notesSlides/notesSlide11.xml><?xml version="1.0" encoding="utf-8"?>
-<p:notes xmlns:a="http://schemas.openxmlformats.org/drawingml/2006/main" xmlns:r="http://schemas.openxmlformats.org/officeDocument/2006/relationships" xmlns:p="http://schemas.openxmlformats.org/presentationml/2006/main">
-  <p:cSld>
+<p:notes xmlns:a="http://schemas.openxmlformats.org/drawingml/2006/main" xmlns:r="http://schemas.openxmlformats.org/officeDocument/2006/relationships" xmlns:p="http://schemas.openxmlformats.org/presentationml/2006/main" xmlns:m="http://schemas.openxmlformats.org/officeDocument/2006/math" xmlns:w="http://schemas.openxmlformats.org/wordprocessingml/2006/main">
+  <p:cSld name="">
     <p:spTree>
       <p:nvGrpSpPr>
         <p:cNvPr id="1" name=""/>
@@ -706,9 +690,9 @@
       </p:grpSpPr>
       <p:sp>
         <p:nvSpPr>
-          <p:cNvPr id="1237585104" name="Slide Image Placeholder 1"/>
-          <p:cNvSpPr>
-            <a:spLocks noGrp="1" noRot="1" noChangeAspect="1"/>
+          <p:cNvPr id="874271851" name="Slide Image Placeholder 1"/>
+          <p:cNvSpPr>
+            <a:spLocks noChangeAspect="1" noGrp="1" noRot="1"/>
           </p:cNvSpPr>
           <p:nvPr>
             <p:ph type="sldImg"/>
@@ -718,7 +702,7 @@
       </p:sp>
       <p:sp>
         <p:nvSpPr>
-          <p:cNvPr id="1393844513" name="Notes Placeholder 2"/>
+          <p:cNvPr id="202080477" name="Notes Placeholder 2"/>
           <p:cNvSpPr>
             <a:spLocks noGrp="1"/>
           </p:cNvSpPr>
@@ -740,7 +724,7 @@
       </p:sp>
       <p:sp>
         <p:nvSpPr>
-          <p:cNvPr id="691617621" name="Slide Number Placeholder 3"/>
+          <p:cNvPr id="1623572930" name="Slide Number Placeholder 3"/>
           <p:cNvSpPr>
             <a:spLocks noGrp="1"/>
           </p:cNvSpPr>
@@ -773,8 +757,8 @@
 </file>
 
 <file path=ppt/notesSlides/notesSlide12.xml><?xml version="1.0" encoding="utf-8"?>
-<p:notes xmlns:a="http://schemas.openxmlformats.org/drawingml/2006/main" xmlns:r="http://schemas.openxmlformats.org/officeDocument/2006/relationships" xmlns:p="http://schemas.openxmlformats.org/presentationml/2006/main">
-  <p:cSld>
+<p:notes xmlns:a="http://schemas.openxmlformats.org/drawingml/2006/main" xmlns:r="http://schemas.openxmlformats.org/officeDocument/2006/relationships" xmlns:p="http://schemas.openxmlformats.org/presentationml/2006/main" xmlns:m="http://schemas.openxmlformats.org/officeDocument/2006/math" xmlns:w="http://schemas.openxmlformats.org/wordprocessingml/2006/main">
+  <p:cSld name="">
     <p:spTree>
       <p:nvGrpSpPr>
         <p:cNvPr id="1" name=""/>
@@ -791,9 +775,9 @@
       </p:grpSpPr>
       <p:sp>
         <p:nvSpPr>
-          <p:cNvPr id="1577987428" name="Slide Image Placeholder 1"/>
-          <p:cNvSpPr>
-            <a:spLocks noGrp="1" noRot="1" noChangeAspect="1"/>
+          <p:cNvPr id="740885667" name="Slide Image Placeholder 1"/>
+          <p:cNvSpPr>
+            <a:spLocks noChangeAspect="1" noGrp="1" noRot="1"/>
           </p:cNvSpPr>
           <p:nvPr>
             <p:ph type="sldImg"/>
@@ -803,7 +787,7 @@
       </p:sp>
       <p:sp>
         <p:nvSpPr>
-          <p:cNvPr id="1750309421" name="Notes Placeholder 2"/>
+          <p:cNvPr id="1714209693" name="Notes Placeholder 2"/>
           <p:cNvSpPr>
             <a:spLocks noGrp="1"/>
           </p:cNvSpPr>
@@ -825,7 +809,7 @@
       </p:sp>
       <p:sp>
         <p:nvSpPr>
-          <p:cNvPr id="542079749" name="Slide Number Placeholder 3"/>
+          <p:cNvPr id="196467664" name="Slide Number Placeholder 3"/>
           <p:cNvSpPr>
             <a:spLocks noGrp="1"/>
           </p:cNvSpPr>
@@ -858,8 +842,8 @@
 </file>
 
 <file path=ppt/notesSlides/notesSlide13.xml><?xml version="1.0" encoding="utf-8"?>
-<p:notes xmlns:a="http://schemas.openxmlformats.org/drawingml/2006/main" xmlns:r="http://schemas.openxmlformats.org/officeDocument/2006/relationships" xmlns:p="http://schemas.openxmlformats.org/presentationml/2006/main">
-  <p:cSld>
+<p:notes xmlns:a="http://schemas.openxmlformats.org/drawingml/2006/main" xmlns:r="http://schemas.openxmlformats.org/officeDocument/2006/relationships" xmlns:p="http://schemas.openxmlformats.org/presentationml/2006/main" xmlns:m="http://schemas.openxmlformats.org/officeDocument/2006/math" xmlns:w="http://schemas.openxmlformats.org/wordprocessingml/2006/main">
+  <p:cSld name="">
     <p:spTree>
       <p:nvGrpSpPr>
         <p:cNvPr id="1" name=""/>
@@ -876,9 +860,9 @@
       </p:grpSpPr>
       <p:sp>
         <p:nvSpPr>
-          <p:cNvPr id="1017504938" name="Slide Image Placeholder 1"/>
-          <p:cNvSpPr>
-            <a:spLocks noGrp="1" noRot="1" noChangeAspect="1"/>
+          <p:cNvPr id="2002513575" name="Slide Image Placeholder 1"/>
+          <p:cNvSpPr>
+            <a:spLocks noChangeAspect="1" noGrp="1" noRot="1"/>
           </p:cNvSpPr>
           <p:nvPr>
             <p:ph type="sldImg"/>
@@ -888,7 +872,7 @@
       </p:sp>
       <p:sp>
         <p:nvSpPr>
-          <p:cNvPr id="369708593" name="Notes Placeholder 2"/>
+          <p:cNvPr id="1667421754" name="Notes Placeholder 2"/>
           <p:cNvSpPr>
             <a:spLocks noGrp="1"/>
           </p:cNvSpPr>
@@ -910,7 +894,7 @@
       </p:sp>
       <p:sp>
         <p:nvSpPr>
-          <p:cNvPr id="1063645783" name="Slide Number Placeholder 3"/>
+          <p:cNvPr id="1458005655" name="Slide Number Placeholder 3"/>
           <p:cNvSpPr>
             <a:spLocks noGrp="1"/>
           </p:cNvSpPr>
@@ -943,8 +927,8 @@
 </file>
 
 <file path=ppt/notesSlides/notesSlide14.xml><?xml version="1.0" encoding="utf-8"?>
-<p:notes xmlns:a="http://schemas.openxmlformats.org/drawingml/2006/main" xmlns:r="http://schemas.openxmlformats.org/officeDocument/2006/relationships" xmlns:p="http://schemas.openxmlformats.org/presentationml/2006/main">
-  <p:cSld>
+<p:notes xmlns:a="http://schemas.openxmlformats.org/drawingml/2006/main" xmlns:r="http://schemas.openxmlformats.org/officeDocument/2006/relationships" xmlns:p="http://schemas.openxmlformats.org/presentationml/2006/main" xmlns:m="http://schemas.openxmlformats.org/officeDocument/2006/math" xmlns:w="http://schemas.openxmlformats.org/wordprocessingml/2006/main">
+  <p:cSld name="">
     <p:spTree>
       <p:nvGrpSpPr>
         <p:cNvPr id="1" name=""/>
@@ -961,9 +945,9 @@
       </p:grpSpPr>
       <p:sp>
         <p:nvSpPr>
-          <p:cNvPr id="192314068" name="Slide Image Placeholder 1"/>
-          <p:cNvSpPr>
-            <a:spLocks noGrp="1" noRot="1" noChangeAspect="1"/>
+          <p:cNvPr id="903649583" name="Slide Image Placeholder 1"/>
+          <p:cNvSpPr>
+            <a:spLocks noChangeAspect="1" noGrp="1" noRot="1"/>
           </p:cNvSpPr>
           <p:nvPr>
             <p:ph type="sldImg"/>
@@ -973,7 +957,7 @@
       </p:sp>
       <p:sp>
         <p:nvSpPr>
-          <p:cNvPr id="247430647" name="Notes Placeholder 2"/>
+          <p:cNvPr id="1799598859" name="Notes Placeholder 2"/>
           <p:cNvSpPr>
             <a:spLocks noGrp="1"/>
           </p:cNvSpPr>
@@ -995,7 +979,7 @@
       </p:sp>
       <p:sp>
         <p:nvSpPr>
-          <p:cNvPr id="163804326" name="Slide Number Placeholder 3"/>
+          <p:cNvPr id="1739996846" name="Slide Number Placeholder 3"/>
           <p:cNvSpPr>
             <a:spLocks noGrp="1"/>
           </p:cNvSpPr>
@@ -1028,8 +1012,8 @@
 </file>
 
 <file path=ppt/notesSlides/notesSlide15.xml><?xml version="1.0" encoding="utf-8"?>
-<p:notes xmlns:a="http://schemas.openxmlformats.org/drawingml/2006/main" xmlns:r="http://schemas.openxmlformats.org/officeDocument/2006/relationships" xmlns:p="http://schemas.openxmlformats.org/presentationml/2006/main">
-  <p:cSld>
+<p:notes xmlns:a="http://schemas.openxmlformats.org/drawingml/2006/main" xmlns:r="http://schemas.openxmlformats.org/officeDocument/2006/relationships" xmlns:p="http://schemas.openxmlformats.org/presentationml/2006/main" xmlns:m="http://schemas.openxmlformats.org/officeDocument/2006/math" xmlns:w="http://schemas.openxmlformats.org/wordprocessingml/2006/main">
+  <p:cSld name="">
     <p:spTree>
       <p:nvGrpSpPr>
         <p:cNvPr id="1" name=""/>
@@ -1046,9 +1030,9 @@
       </p:grpSpPr>
       <p:sp>
         <p:nvSpPr>
-          <p:cNvPr id="1554483612" name="Slide Image Placeholder 1"/>
-          <p:cNvSpPr>
-            <a:spLocks noGrp="1" noRot="1" noChangeAspect="1"/>
+          <p:cNvPr id="1764045747" name="Slide Image Placeholder 1"/>
+          <p:cNvSpPr>
+            <a:spLocks noChangeAspect="1" noGrp="1" noRot="1"/>
           </p:cNvSpPr>
           <p:nvPr>
             <p:ph type="sldImg"/>
@@ -1058,7 +1042,7 @@
       </p:sp>
       <p:sp>
         <p:nvSpPr>
-          <p:cNvPr id="323883903" name="Notes Placeholder 2"/>
+          <p:cNvPr id="348159897" name="Notes Placeholder 2"/>
           <p:cNvSpPr>
             <a:spLocks noGrp="1"/>
           </p:cNvSpPr>
@@ -1080,7 +1064,7 @@
       </p:sp>
       <p:sp>
         <p:nvSpPr>
-          <p:cNvPr id="935598509" name="Slide Number Placeholder 3"/>
+          <p:cNvPr id="1654083344" name="Slide Number Placeholder 3"/>
           <p:cNvSpPr>
             <a:spLocks noGrp="1"/>
           </p:cNvSpPr>
@@ -1113,8 +1097,8 @@
 </file>
 
 <file path=ppt/notesSlides/notesSlide16.xml><?xml version="1.0" encoding="utf-8"?>
-<p:notes xmlns:a="http://schemas.openxmlformats.org/drawingml/2006/main" xmlns:r="http://schemas.openxmlformats.org/officeDocument/2006/relationships" xmlns:p="http://schemas.openxmlformats.org/presentationml/2006/main">
-  <p:cSld>
+<p:notes xmlns:a="http://schemas.openxmlformats.org/drawingml/2006/main" xmlns:r="http://schemas.openxmlformats.org/officeDocument/2006/relationships" xmlns:p="http://schemas.openxmlformats.org/presentationml/2006/main" xmlns:m="http://schemas.openxmlformats.org/officeDocument/2006/math" xmlns:w="http://schemas.openxmlformats.org/wordprocessingml/2006/main">
+  <p:cSld name="">
     <p:spTree>
       <p:nvGrpSpPr>
         <p:cNvPr id="1" name=""/>
@@ -1131,9 +1115,9 @@
       </p:grpSpPr>
       <p:sp>
         <p:nvSpPr>
-          <p:cNvPr id="1201975293" name="Slide Image Placeholder 1"/>
-          <p:cNvSpPr>
-            <a:spLocks noGrp="1" noRot="1" noChangeAspect="1"/>
+          <p:cNvPr id="1604334002" name="Slide Image Placeholder 1"/>
+          <p:cNvSpPr>
+            <a:spLocks noChangeAspect="1" noGrp="1" noRot="1"/>
           </p:cNvSpPr>
           <p:nvPr>
             <p:ph type="sldImg"/>
@@ -1143,7 +1127,7 @@
       </p:sp>
       <p:sp>
         <p:nvSpPr>
-          <p:cNvPr id="1507447223" name="Notes Placeholder 2"/>
+          <p:cNvPr id="1270353206" name="Notes Placeholder 2"/>
           <p:cNvSpPr>
             <a:spLocks noGrp="1"/>
           </p:cNvSpPr>
@@ -1165,7 +1149,7 @@
       </p:sp>
       <p:sp>
         <p:nvSpPr>
-          <p:cNvPr id="638268999" name="Slide Number Placeholder 3"/>
+          <p:cNvPr id="1223510478" name="Slide Number Placeholder 3"/>
           <p:cNvSpPr>
             <a:spLocks noGrp="1"/>
           </p:cNvSpPr>
@@ -1198,8 +1182,8 @@
 </file>
 
 <file path=ppt/notesSlides/notesSlide17.xml><?xml version="1.0" encoding="utf-8"?>
-<p:notes xmlns:a="http://schemas.openxmlformats.org/drawingml/2006/main" xmlns:r="http://schemas.openxmlformats.org/officeDocument/2006/relationships" xmlns:p="http://schemas.openxmlformats.org/presentationml/2006/main">
-  <p:cSld>
+<p:notes xmlns:a="http://schemas.openxmlformats.org/drawingml/2006/main" xmlns:r="http://schemas.openxmlformats.org/officeDocument/2006/relationships" xmlns:p="http://schemas.openxmlformats.org/presentationml/2006/main" xmlns:m="http://schemas.openxmlformats.org/officeDocument/2006/math" xmlns:w="http://schemas.openxmlformats.org/wordprocessingml/2006/main">
+  <p:cSld name="">
     <p:spTree>
       <p:nvGrpSpPr>
         <p:cNvPr id="1" name=""/>
@@ -1216,9 +1200,9 @@
       </p:grpSpPr>
       <p:sp>
         <p:nvSpPr>
-          <p:cNvPr id="1225103498" name="Slide Image Placeholder 1"/>
-          <p:cNvSpPr>
-            <a:spLocks noGrp="1" noRot="1" noChangeAspect="1"/>
+          <p:cNvPr id="1671846535" name="Slide Image Placeholder 1"/>
+          <p:cNvSpPr>
+            <a:spLocks noChangeAspect="1" noGrp="1" noRot="1"/>
           </p:cNvSpPr>
           <p:nvPr>
             <p:ph type="sldImg"/>
@@ -1228,7 +1212,7 @@
       </p:sp>
       <p:sp>
         <p:nvSpPr>
-          <p:cNvPr id="1198839971" name="Notes Placeholder 2"/>
+          <p:cNvPr id="1865250595" name="Notes Placeholder 2"/>
           <p:cNvSpPr>
             <a:spLocks noGrp="1"/>
           </p:cNvSpPr>
@@ -1250,7 +1234,7 @@
       </p:sp>
       <p:sp>
         <p:nvSpPr>
-          <p:cNvPr id="57987747" name="Slide Number Placeholder 3"/>
+          <p:cNvPr id="1863608359" name="Slide Number Placeholder 3"/>
           <p:cNvSpPr>
             <a:spLocks noGrp="1"/>
           </p:cNvSpPr>
@@ -1283,8 +1267,8 @@
 </file>
 
 <file path=ppt/notesSlides/notesSlide18.xml><?xml version="1.0" encoding="utf-8"?>
-<p:notes xmlns:a="http://schemas.openxmlformats.org/drawingml/2006/main" xmlns:r="http://schemas.openxmlformats.org/officeDocument/2006/relationships" xmlns:p="http://schemas.openxmlformats.org/presentationml/2006/main">
-  <p:cSld>
+<p:notes xmlns:a="http://schemas.openxmlformats.org/drawingml/2006/main" xmlns:r="http://schemas.openxmlformats.org/officeDocument/2006/relationships" xmlns:p="http://schemas.openxmlformats.org/presentationml/2006/main" xmlns:m="http://schemas.openxmlformats.org/officeDocument/2006/math" xmlns:w="http://schemas.openxmlformats.org/wordprocessingml/2006/main">
+  <p:cSld name="">
     <p:spTree>
       <p:nvGrpSpPr>
         <p:cNvPr id="1" name=""/>
@@ -1301,9 +1285,9 @@
       </p:grpSpPr>
       <p:sp>
         <p:nvSpPr>
-          <p:cNvPr id="1186598178" name="Slide Image Placeholder 1"/>
-          <p:cNvSpPr>
-            <a:spLocks noGrp="1" noRot="1" noChangeAspect="1"/>
+          <p:cNvPr id="1118913442" name="Slide Image Placeholder 1"/>
+          <p:cNvSpPr>
+            <a:spLocks noChangeAspect="1" noGrp="1" noRot="1"/>
           </p:cNvSpPr>
           <p:nvPr>
             <p:ph type="sldImg"/>
@@ -1313,7 +1297,7 @@
       </p:sp>
       <p:sp>
         <p:nvSpPr>
-          <p:cNvPr id="1586705116" name="Notes Placeholder 2"/>
+          <p:cNvPr id="178402828" name="Notes Placeholder 2"/>
           <p:cNvSpPr>
             <a:spLocks noGrp="1"/>
           </p:cNvSpPr>
@@ -1335,7 +1319,7 @@
       </p:sp>
       <p:sp>
         <p:nvSpPr>
-          <p:cNvPr id="231778056" name="Slide Number Placeholder 3"/>
+          <p:cNvPr id="1937245433" name="Slide Number Placeholder 3"/>
           <p:cNvSpPr>
             <a:spLocks noGrp="1"/>
           </p:cNvSpPr>
@@ -1368,8 +1352,8 @@
 </file>
 
 <file path=ppt/notesSlides/notesSlide2.xml><?xml version="1.0" encoding="utf-8"?>
-<p:notes xmlns:a="http://schemas.openxmlformats.org/drawingml/2006/main" xmlns:r="http://schemas.openxmlformats.org/officeDocument/2006/relationships" xmlns:p="http://schemas.openxmlformats.org/presentationml/2006/main">
-  <p:cSld>
+<p:notes xmlns:a="http://schemas.openxmlformats.org/drawingml/2006/main" xmlns:r="http://schemas.openxmlformats.org/officeDocument/2006/relationships" xmlns:p="http://schemas.openxmlformats.org/presentationml/2006/main" xmlns:m="http://schemas.openxmlformats.org/officeDocument/2006/math" xmlns:w="http://schemas.openxmlformats.org/wordprocessingml/2006/main">
+  <p:cSld name="">
     <p:spTree>
       <p:nvGrpSpPr>
         <p:cNvPr id="1" name=""/>
@@ -1386,9 +1370,9 @@
       </p:grpSpPr>
       <p:sp>
         <p:nvSpPr>
-          <p:cNvPr id="1900417451" name="Slide Image Placeholder 1"/>
-          <p:cNvSpPr>
-            <a:spLocks noGrp="1" noRot="1" noChangeAspect="1"/>
+          <p:cNvPr id="1904775497" name="Slide Image Placeholder 1"/>
+          <p:cNvSpPr>
+            <a:spLocks noChangeAspect="1" noGrp="1" noRot="1"/>
           </p:cNvSpPr>
           <p:nvPr>
             <p:ph type="sldImg"/>
@@ -1398,7 +1382,7 @@
       </p:sp>
       <p:sp>
         <p:nvSpPr>
-          <p:cNvPr id="1466291171" name="Notes Placeholder 2"/>
+          <p:cNvPr id="232514638" name="Notes Placeholder 2"/>
           <p:cNvSpPr>
             <a:spLocks noGrp="1"/>
           </p:cNvSpPr>
@@ -1420,7 +1404,7 @@
       </p:sp>
       <p:sp>
         <p:nvSpPr>
-          <p:cNvPr id="1564973864" name="Slide Number Placeholder 3"/>
+          <p:cNvPr id="1071684346" name="Slide Number Placeholder 3"/>
           <p:cNvSpPr>
             <a:spLocks noGrp="1"/>
           </p:cNvSpPr>
@@ -1453,8 +1437,8 @@
 </file>
 
 <file path=ppt/notesSlides/notesSlide3.xml><?xml version="1.0" encoding="utf-8"?>
-<p:notes xmlns:a="http://schemas.openxmlformats.org/drawingml/2006/main" xmlns:r="http://schemas.openxmlformats.org/officeDocument/2006/relationships" xmlns:p="http://schemas.openxmlformats.org/presentationml/2006/main">
-  <p:cSld>
+<p:notes xmlns:a="http://schemas.openxmlformats.org/drawingml/2006/main" xmlns:r="http://schemas.openxmlformats.org/officeDocument/2006/relationships" xmlns:p="http://schemas.openxmlformats.org/presentationml/2006/main" xmlns:m="http://schemas.openxmlformats.org/officeDocument/2006/math" xmlns:w="http://schemas.openxmlformats.org/wordprocessingml/2006/main">
+  <p:cSld name="">
     <p:spTree>
       <p:nvGrpSpPr>
         <p:cNvPr id="1" name=""/>
@@ -1471,9 +1455,9 @@
       </p:grpSpPr>
       <p:sp>
         <p:nvSpPr>
-          <p:cNvPr id="798887161" name="Slide Image Placeholder 1"/>
-          <p:cNvSpPr>
-            <a:spLocks noGrp="1" noRot="1" noChangeAspect="1"/>
+          <p:cNvPr id="912391992" name="Slide Image Placeholder 1"/>
+          <p:cNvSpPr>
+            <a:spLocks noChangeAspect="1" noGrp="1" noRot="1"/>
           </p:cNvSpPr>
           <p:nvPr>
             <p:ph type="sldImg"/>
@@ -1483,7 +1467,7 @@
       </p:sp>
       <p:sp>
         <p:nvSpPr>
-          <p:cNvPr id="500406238" name="Notes Placeholder 2"/>
+          <p:cNvPr id="155026390" name="Notes Placeholder 2"/>
           <p:cNvSpPr>
             <a:spLocks noGrp="1"/>
           </p:cNvSpPr>
@@ -1505,7 +1489,7 @@
       </p:sp>
       <p:sp>
         <p:nvSpPr>
-          <p:cNvPr id="1028821843" name="Slide Number Placeholder 3"/>
+          <p:cNvPr id="1562643773" name="Slide Number Placeholder 3"/>
           <p:cNvSpPr>
             <a:spLocks noGrp="1"/>
           </p:cNvSpPr>
@@ -1538,8 +1522,8 @@
 </file>
 
 <file path=ppt/notesSlides/notesSlide4.xml><?xml version="1.0" encoding="utf-8"?>
-<p:notes xmlns:a="http://schemas.openxmlformats.org/drawingml/2006/main" xmlns:r="http://schemas.openxmlformats.org/officeDocument/2006/relationships" xmlns:p="http://schemas.openxmlformats.org/presentationml/2006/main">
-  <p:cSld>
+<p:notes xmlns:a="http://schemas.openxmlformats.org/drawingml/2006/main" xmlns:r="http://schemas.openxmlformats.org/officeDocument/2006/relationships" xmlns:p="http://schemas.openxmlformats.org/presentationml/2006/main" xmlns:m="http://schemas.openxmlformats.org/officeDocument/2006/math" xmlns:w="http://schemas.openxmlformats.org/wordprocessingml/2006/main">
+  <p:cSld name="">
     <p:spTree>
       <p:nvGrpSpPr>
         <p:cNvPr id="1" name=""/>
@@ -1556,9 +1540,9 @@
       </p:grpSpPr>
       <p:sp>
         <p:nvSpPr>
-          <p:cNvPr id="220610037" name="Slide Image Placeholder 1"/>
-          <p:cNvSpPr>
-            <a:spLocks noGrp="1" noRot="1" noChangeAspect="1"/>
+          <p:cNvPr id="1462549026" name="Slide Image Placeholder 1"/>
+          <p:cNvSpPr>
+            <a:spLocks noChangeAspect="1" noGrp="1" noRot="1"/>
           </p:cNvSpPr>
           <p:nvPr>
             <p:ph type="sldImg"/>
@@ -1568,7 +1552,7 @@
       </p:sp>
       <p:sp>
         <p:nvSpPr>
-          <p:cNvPr id="1856139828" name="Notes Placeholder 2"/>
+          <p:cNvPr id="222748299" name="Notes Placeholder 2"/>
           <p:cNvSpPr>
             <a:spLocks noGrp="1"/>
           </p:cNvSpPr>
@@ -1590,7 +1574,7 @@
       </p:sp>
       <p:sp>
         <p:nvSpPr>
-          <p:cNvPr id="776698893" name="Slide Number Placeholder 3"/>
+          <p:cNvPr id="651372603" name="Slide Number Placeholder 3"/>
           <p:cNvSpPr>
             <a:spLocks noGrp="1"/>
           </p:cNvSpPr>
@@ -1623,8 +1607,8 @@
 </file>
 
 <file path=ppt/notesSlides/notesSlide5.xml><?xml version="1.0" encoding="utf-8"?>
-<p:notes xmlns:a="http://schemas.openxmlformats.org/drawingml/2006/main" xmlns:r="http://schemas.openxmlformats.org/officeDocument/2006/relationships" xmlns:p="http://schemas.openxmlformats.org/presentationml/2006/main">
-  <p:cSld>
+<p:notes xmlns:a="http://schemas.openxmlformats.org/drawingml/2006/main" xmlns:r="http://schemas.openxmlformats.org/officeDocument/2006/relationships" xmlns:p="http://schemas.openxmlformats.org/presentationml/2006/main" xmlns:m="http://schemas.openxmlformats.org/officeDocument/2006/math" xmlns:w="http://schemas.openxmlformats.org/wordprocessingml/2006/main">
+  <p:cSld name="">
     <p:spTree>
       <p:nvGrpSpPr>
         <p:cNvPr id="1" name=""/>
@@ -1641,9 +1625,9 @@
       </p:grpSpPr>
       <p:sp>
         <p:nvSpPr>
-          <p:cNvPr id="1281688486" name="Slide Image Placeholder 1"/>
-          <p:cNvSpPr>
-            <a:spLocks noGrp="1" noRot="1" noChangeAspect="1"/>
+          <p:cNvPr id="1427600072" name="Slide Image Placeholder 1"/>
+          <p:cNvSpPr>
+            <a:spLocks noChangeAspect="1" noGrp="1" noRot="1"/>
           </p:cNvSpPr>
           <p:nvPr>
             <p:ph type="sldImg"/>
@@ -1653,7 +1637,7 @@
       </p:sp>
       <p:sp>
         <p:nvSpPr>
-          <p:cNvPr id="118146038" name="Notes Placeholder 2"/>
+          <p:cNvPr id="1482943245" name="Notes Placeholder 2"/>
           <p:cNvSpPr>
             <a:spLocks noGrp="1"/>
           </p:cNvSpPr>
@@ -1675,7 +1659,7 @@
       </p:sp>
       <p:sp>
         <p:nvSpPr>
-          <p:cNvPr id="722036935" name="Slide Number Placeholder 3"/>
+          <p:cNvPr id="1787990720" name="Slide Number Placeholder 3"/>
           <p:cNvSpPr>
             <a:spLocks noGrp="1"/>
           </p:cNvSpPr>
@@ -1708,8 +1692,8 @@
 </file>
 
 <file path=ppt/notesSlides/notesSlide6.xml><?xml version="1.0" encoding="utf-8"?>
-<p:notes xmlns:a="http://schemas.openxmlformats.org/drawingml/2006/main" xmlns:r="http://schemas.openxmlformats.org/officeDocument/2006/relationships" xmlns:p="http://schemas.openxmlformats.org/presentationml/2006/main">
-  <p:cSld>
+<p:notes xmlns:a="http://schemas.openxmlformats.org/drawingml/2006/main" xmlns:r="http://schemas.openxmlformats.org/officeDocument/2006/relationships" xmlns:p="http://schemas.openxmlformats.org/presentationml/2006/main" xmlns:m="http://schemas.openxmlformats.org/officeDocument/2006/math" xmlns:w="http://schemas.openxmlformats.org/wordprocessingml/2006/main">
+  <p:cSld name="">
     <p:spTree>
       <p:nvGrpSpPr>
         <p:cNvPr id="1" name=""/>
@@ -1726,9 +1710,9 @@
       </p:grpSpPr>
       <p:sp>
         <p:nvSpPr>
-          <p:cNvPr id="1873452942" name="Slide Image Placeholder 1"/>
-          <p:cNvSpPr>
-            <a:spLocks noGrp="1" noRot="1" noChangeAspect="1"/>
+          <p:cNvPr id="1940117044" name="Slide Image Placeholder 1"/>
+          <p:cNvSpPr>
+            <a:spLocks noChangeAspect="1" noGrp="1" noRot="1"/>
           </p:cNvSpPr>
           <p:nvPr>
             <p:ph type="sldImg"/>
@@ -1738,7 +1722,7 @@
       </p:sp>
       <p:sp>
         <p:nvSpPr>
-          <p:cNvPr id="808951900" name="Notes Placeholder 2"/>
+          <p:cNvPr id="1995928901" name="Notes Placeholder 2"/>
           <p:cNvSpPr>
             <a:spLocks noGrp="1"/>
           </p:cNvSpPr>
@@ -1760,7 +1744,7 @@
       </p:sp>
       <p:sp>
         <p:nvSpPr>
-          <p:cNvPr id="1970038609" name="Slide Number Placeholder 3"/>
+          <p:cNvPr id="1714555169" name="Slide Number Placeholder 3"/>
           <p:cNvSpPr>
             <a:spLocks noGrp="1"/>
           </p:cNvSpPr>
@@ -1793,8 +1777,8 @@
 </file>
 
 <file path=ppt/notesSlides/notesSlide7.xml><?xml version="1.0" encoding="utf-8"?>
-<p:notes xmlns:a="http://schemas.openxmlformats.org/drawingml/2006/main" xmlns:r="http://schemas.openxmlformats.org/officeDocument/2006/relationships" xmlns:p="http://schemas.openxmlformats.org/presentationml/2006/main">
-  <p:cSld>
+<p:notes xmlns:a="http://schemas.openxmlformats.org/drawingml/2006/main" xmlns:r="http://schemas.openxmlformats.org/officeDocument/2006/relationships" xmlns:p="http://schemas.openxmlformats.org/presentationml/2006/main" xmlns:m="http://schemas.openxmlformats.org/officeDocument/2006/math" xmlns:w="http://schemas.openxmlformats.org/wordprocessingml/2006/main">
+  <p:cSld name="">
     <p:spTree>
       <p:nvGrpSpPr>
         <p:cNvPr id="1" name=""/>
@@ -1811,9 +1795,9 @@
       </p:grpSpPr>
       <p:sp>
         <p:nvSpPr>
-          <p:cNvPr id="665538760" name="Slide Image Placeholder 1"/>
-          <p:cNvSpPr>
-            <a:spLocks noGrp="1" noRot="1" noChangeAspect="1"/>
+          <p:cNvPr id="363347569" name="Slide Image Placeholder 1"/>
+          <p:cNvSpPr>
+            <a:spLocks noChangeAspect="1" noGrp="1" noRot="1"/>
           </p:cNvSpPr>
           <p:nvPr>
             <p:ph type="sldImg"/>
@@ -1823,7 +1807,7 @@
       </p:sp>
       <p:sp>
         <p:nvSpPr>
-          <p:cNvPr id="259926159" name="Notes Placeholder 2"/>
+          <p:cNvPr id="1697290776" name="Notes Placeholder 2"/>
           <p:cNvSpPr>
             <a:spLocks noGrp="1"/>
           </p:cNvSpPr>
@@ -1845,7 +1829,7 @@
       </p:sp>
       <p:sp>
         <p:nvSpPr>
-          <p:cNvPr id="515582515" name="Slide Number Placeholder 3"/>
+          <p:cNvPr id="527234781" name="Slide Number Placeholder 3"/>
           <p:cNvSpPr>
             <a:spLocks noGrp="1"/>
           </p:cNvSpPr>
@@ -1878,8 +1862,8 @@
 </file>
 
 <file path=ppt/notesSlides/notesSlide8.xml><?xml version="1.0" encoding="utf-8"?>
-<p:notes xmlns:a="http://schemas.openxmlformats.org/drawingml/2006/main" xmlns:r="http://schemas.openxmlformats.org/officeDocument/2006/relationships" xmlns:p="http://schemas.openxmlformats.org/presentationml/2006/main">
-  <p:cSld>
+<p:notes xmlns:a="http://schemas.openxmlformats.org/drawingml/2006/main" xmlns:r="http://schemas.openxmlformats.org/officeDocument/2006/relationships" xmlns:p="http://schemas.openxmlformats.org/presentationml/2006/main" xmlns:m="http://schemas.openxmlformats.org/officeDocument/2006/math" xmlns:w="http://schemas.openxmlformats.org/wordprocessingml/2006/main">
+  <p:cSld name="">
     <p:spTree>
       <p:nvGrpSpPr>
         <p:cNvPr id="1" name=""/>
@@ -1896,9 +1880,9 @@
       </p:grpSpPr>
       <p:sp>
         <p:nvSpPr>
-          <p:cNvPr id="339773094" name="Slide Image Placeholder 1"/>
-          <p:cNvSpPr>
-            <a:spLocks noGrp="1" noRot="1" noChangeAspect="1"/>
+          <p:cNvPr id="1199767989" name="Slide Image Placeholder 1"/>
+          <p:cNvSpPr>
+            <a:spLocks noChangeAspect="1" noGrp="1" noRot="1"/>
           </p:cNvSpPr>
           <p:nvPr>
             <p:ph type="sldImg"/>
@@ -1908,7 +1892,7 @@
       </p:sp>
       <p:sp>
         <p:nvSpPr>
-          <p:cNvPr id="1358214891" name="Notes Placeholder 2"/>
+          <p:cNvPr id="1036092463" name="Notes Placeholder 2"/>
           <p:cNvSpPr>
             <a:spLocks noGrp="1"/>
           </p:cNvSpPr>
@@ -1930,7 +1914,7 @@
       </p:sp>
       <p:sp>
         <p:nvSpPr>
-          <p:cNvPr id="965361886" name="Slide Number Placeholder 3"/>
+          <p:cNvPr id="165675992" name="Slide Number Placeholder 3"/>
           <p:cNvSpPr>
             <a:spLocks noGrp="1"/>
           </p:cNvSpPr>
@@ -1963,8 +1947,8 @@
 </file>
 
 <file path=ppt/notesSlides/notesSlide9.xml><?xml version="1.0" encoding="utf-8"?>
-<p:notes xmlns:a="http://schemas.openxmlformats.org/drawingml/2006/main" xmlns:r="http://schemas.openxmlformats.org/officeDocument/2006/relationships" xmlns:p="http://schemas.openxmlformats.org/presentationml/2006/main">
-  <p:cSld>
+<p:notes xmlns:a="http://schemas.openxmlformats.org/drawingml/2006/main" xmlns:r="http://schemas.openxmlformats.org/officeDocument/2006/relationships" xmlns:p="http://schemas.openxmlformats.org/presentationml/2006/main" xmlns:m="http://schemas.openxmlformats.org/officeDocument/2006/math" xmlns:w="http://schemas.openxmlformats.org/wordprocessingml/2006/main">
+  <p:cSld name="">
     <p:spTree>
       <p:nvGrpSpPr>
         <p:cNvPr id="1" name=""/>
@@ -1981,9 +1965,9 @@
       </p:grpSpPr>
       <p:sp>
         <p:nvSpPr>
-          <p:cNvPr id="519179697" name="Slide Image Placeholder 1"/>
-          <p:cNvSpPr>
-            <a:spLocks noGrp="1" noRot="1" noChangeAspect="1"/>
+          <p:cNvPr id="184030983" name="Slide Image Placeholder 1"/>
+          <p:cNvSpPr>
+            <a:spLocks noChangeAspect="1" noGrp="1" noRot="1"/>
           </p:cNvSpPr>
           <p:nvPr>
             <p:ph type="sldImg"/>
@@ -1993,7 +1977,7 @@
       </p:sp>
       <p:sp>
         <p:nvSpPr>
-          <p:cNvPr id="1054274137" name="Notes Placeholder 2"/>
+          <p:cNvPr id="118734316" name="Notes Placeholder 2"/>
           <p:cNvSpPr>
             <a:spLocks noGrp="1"/>
           </p:cNvSpPr>
@@ -2015,7 +1999,7 @@
       </p:sp>
       <p:sp>
         <p:nvSpPr>
-          <p:cNvPr id="607271822" name="Slide Number Placeholder 3"/>
+          <p:cNvPr id="1423045010" name="Slide Number Placeholder 3"/>
           <p:cNvSpPr>
             <a:spLocks noGrp="1"/>
           </p:cNvSpPr>
@@ -2048,7 +2032,7 @@
 </file>
 
 <file path=ppt/slideLayouts/slideLayout1.xml><?xml version="1.0" encoding="utf-8"?>
-<p:sldLayout xmlns:a="http://schemas.openxmlformats.org/drawingml/2006/main" xmlns:r="http://schemas.openxmlformats.org/officeDocument/2006/relationships" xmlns:p="http://schemas.openxmlformats.org/presentationml/2006/main" showMasterPhAnim="0" type="title" preserve="1" userDrawn="1">
+<p:sldLayout xmlns:a="http://schemas.openxmlformats.org/drawingml/2006/main" xmlns:r="http://schemas.openxmlformats.org/officeDocument/2006/relationships" xmlns:p="http://schemas.openxmlformats.org/presentationml/2006/main" xmlns:m="http://schemas.openxmlformats.org/officeDocument/2006/math" xmlns:w="http://schemas.openxmlformats.org/wordprocessingml/2006/main" matchingName="" preserve="1" showMasterPhAnim="0" showMasterSp="1" type="title" userDrawn="1">
   <p:cSld name="Титульный слайд">
     <p:spTree>
       <p:nvGrpSpPr>
@@ -2066,7 +2050,7 @@
       </p:grpSpPr>
       <p:sp>
         <p:nvSpPr>
-          <p:cNvPr id="175897794" name="Заголовок 1"/>
+          <p:cNvPr id="892168400" name="Заголовок 1"/>
           <p:cNvSpPr>
             <a:spLocks noGrp="1"/>
           </p:cNvSpPr>
@@ -2101,7 +2085,7 @@
       </p:sp>
       <p:sp>
         <p:nvSpPr>
-          <p:cNvPr id="190189854" name="Подзаголовок 2"/>
+          <p:cNvPr id="185562916" name="Подзаголовок 2"/>
           <p:cNvSpPr>
             <a:spLocks noGrp="1"/>
           </p:cNvSpPr>
@@ -2169,7 +2153,7 @@
       </p:sp>
       <p:sp>
         <p:nvSpPr>
-          <p:cNvPr id="668543748" name="Дата 3"/>
+          <p:cNvPr id="1094230440" name="Дата 3"/>
           <p:cNvSpPr>
             <a:spLocks noGrp="1"/>
           </p:cNvSpPr>
@@ -2195,7 +2179,7 @@
       </p:sp>
       <p:sp>
         <p:nvSpPr>
-          <p:cNvPr id="1343382821" name="Нижний колонтитул 4"/>
+          <p:cNvPr id="258930921" name="Нижний колонтитул 4"/>
           <p:cNvSpPr>
             <a:spLocks noGrp="1"/>
           </p:cNvSpPr>
@@ -2217,7 +2201,7 @@
       </p:sp>
       <p:sp>
         <p:nvSpPr>
-          <p:cNvPr id="2024685688" name="Номер слайда 5"/>
+          <p:cNvPr id="1560449230" name="Номер слайда 5"/>
           <p:cNvSpPr>
             <a:spLocks noGrp="1"/>
           </p:cNvSpPr>
@@ -2250,7 +2234,7 @@
 </file>
 
 <file path=ppt/slideLayouts/slideLayout10.xml><?xml version="1.0" encoding="utf-8"?>
-<p:sldLayout xmlns:a="http://schemas.openxmlformats.org/drawingml/2006/main" xmlns:r="http://schemas.openxmlformats.org/officeDocument/2006/relationships" xmlns:p="http://schemas.openxmlformats.org/presentationml/2006/main" showMasterPhAnim="0" type="vertTx" preserve="1" userDrawn="1">
+<p:sldLayout xmlns:a="http://schemas.openxmlformats.org/drawingml/2006/main" xmlns:r="http://schemas.openxmlformats.org/officeDocument/2006/relationships" xmlns:p="http://schemas.openxmlformats.org/presentationml/2006/main" xmlns:m="http://schemas.openxmlformats.org/officeDocument/2006/math" xmlns:w="http://schemas.openxmlformats.org/wordprocessingml/2006/main" matchingName="" preserve="1" showMasterPhAnim="0" showMasterSp="1" type="vertTx" userDrawn="1">
   <p:cSld name="Заголовок и вертикальный текст">
     <p:spTree>
       <p:nvGrpSpPr>
@@ -2268,7 +2252,7 @@
       </p:grpSpPr>
       <p:sp>
         <p:nvSpPr>
-          <p:cNvPr id="1273556936" name="Заголовок 1"/>
+          <p:cNvPr id="1174009173" name="Заголовок 1"/>
           <p:cNvSpPr>
             <a:spLocks noGrp="1"/>
           </p:cNvSpPr>
@@ -2294,7 +2278,7 @@
       </p:sp>
       <p:sp>
         <p:nvSpPr>
-          <p:cNvPr id="345082521" name="Вертикальный текст 2"/>
+          <p:cNvPr id="1247463132" name="Вертикальный текст 2"/>
           <p:cNvSpPr>
             <a:spLocks noGrp="1"/>
           </p:cNvSpPr>
@@ -2360,7 +2344,7 @@
       </p:sp>
       <p:sp>
         <p:nvSpPr>
-          <p:cNvPr id="2070776165" name="Дата 3"/>
+          <p:cNvPr id="674157802" name="Дата 3"/>
           <p:cNvSpPr>
             <a:spLocks noGrp="1"/>
           </p:cNvSpPr>
@@ -2386,7 +2370,7 @@
       </p:sp>
       <p:sp>
         <p:nvSpPr>
-          <p:cNvPr id="846666649" name="Нижний колонтитул 4"/>
+          <p:cNvPr id="744194317" name="Нижний колонтитул 4"/>
           <p:cNvSpPr>
             <a:spLocks noGrp="1"/>
           </p:cNvSpPr>
@@ -2408,7 +2392,7 @@
       </p:sp>
       <p:sp>
         <p:nvSpPr>
-          <p:cNvPr id="1586527107" name="Номер слайда 5"/>
+          <p:cNvPr id="1967643410" name="Номер слайда 5"/>
           <p:cNvSpPr>
             <a:spLocks noGrp="1"/>
           </p:cNvSpPr>
@@ -2441,7 +2425,7 @@
 </file>
 
 <file path=ppt/slideLayouts/slideLayout11.xml><?xml version="1.0" encoding="utf-8"?>
-<p:sldLayout xmlns:a="http://schemas.openxmlformats.org/drawingml/2006/main" xmlns:r="http://schemas.openxmlformats.org/officeDocument/2006/relationships" xmlns:p="http://schemas.openxmlformats.org/presentationml/2006/main" showMasterPhAnim="0" type="vertTitleAndTx" preserve="1" userDrawn="1">
+<p:sldLayout xmlns:a="http://schemas.openxmlformats.org/drawingml/2006/main" xmlns:r="http://schemas.openxmlformats.org/officeDocument/2006/relationships" xmlns:p="http://schemas.openxmlformats.org/presentationml/2006/main" xmlns:m="http://schemas.openxmlformats.org/officeDocument/2006/math" xmlns:w="http://schemas.openxmlformats.org/wordprocessingml/2006/main" matchingName="" preserve="1" showMasterPhAnim="0" showMasterSp="1" type="vertTitleAndTx" userDrawn="1">
   <p:cSld name="Вертикальный заголовок и текст">
     <p:spTree>
       <p:nvGrpSpPr>
@@ -2459,7 +2443,7 @@
       </p:grpSpPr>
       <p:sp>
         <p:nvSpPr>
-          <p:cNvPr id="2069547509" name="Вертикальный заголовок 1"/>
+          <p:cNvPr id="147847646" name="Вертикальный заголовок 1"/>
           <p:cNvSpPr>
             <a:spLocks noGrp="1"/>
           </p:cNvSpPr>
@@ -2490,7 +2474,7 @@
       </p:sp>
       <p:sp>
         <p:nvSpPr>
-          <p:cNvPr id="446883292" name="Вертикальный текст 2"/>
+          <p:cNvPr id="1875341324" name="Вертикальный текст 2"/>
           <p:cNvSpPr>
             <a:spLocks noGrp="1"/>
           </p:cNvSpPr>
@@ -2561,7 +2545,7 @@
       </p:sp>
       <p:sp>
         <p:nvSpPr>
-          <p:cNvPr id="304056710" name="Дата 3"/>
+          <p:cNvPr id="279489669" name="Дата 3"/>
           <p:cNvSpPr>
             <a:spLocks noGrp="1"/>
           </p:cNvSpPr>
@@ -2587,7 +2571,7 @@
       </p:sp>
       <p:sp>
         <p:nvSpPr>
-          <p:cNvPr id="1950181647" name="Нижний колонтитул 4"/>
+          <p:cNvPr id="320788981" name="Нижний колонтитул 4"/>
           <p:cNvSpPr>
             <a:spLocks noGrp="1"/>
           </p:cNvSpPr>
@@ -2609,7 +2593,7 @@
       </p:sp>
       <p:sp>
         <p:nvSpPr>
-          <p:cNvPr id="2069908581" name="Номер слайда 5"/>
+          <p:cNvPr id="720278066" name="Номер слайда 5"/>
           <p:cNvSpPr>
             <a:spLocks noGrp="1"/>
           </p:cNvSpPr>
@@ -2642,7 +2626,7 @@
 </file>
 
 <file path=ppt/slideLayouts/slideLayout12.xml><?xml version="1.0" encoding="utf-8"?>
-<p:sldLayout xmlns:a="http://schemas.openxmlformats.org/drawingml/2006/main" xmlns:r="http://schemas.openxmlformats.org/officeDocument/2006/relationships" xmlns:p="http://schemas.openxmlformats.org/presentationml/2006/main" showMasterPhAnim="0" type="title" preserve="1" userDrawn="1">
+<p:sldLayout xmlns:a="http://schemas.openxmlformats.org/drawingml/2006/main" xmlns:r="http://schemas.openxmlformats.org/officeDocument/2006/relationships" xmlns:p="http://schemas.openxmlformats.org/presentationml/2006/main" xmlns:m="http://schemas.openxmlformats.org/officeDocument/2006/math" xmlns:w="http://schemas.openxmlformats.org/wordprocessingml/2006/main" matchingName="" preserve="1" showMasterPhAnim="0" showMasterSp="1" type="title" userDrawn="1">
   <p:cSld name="1_Титульный слайд">
     <p:spTree>
       <p:nvGrpSpPr>
@@ -2660,7 +2644,7 @@
       </p:grpSpPr>
       <p:pic>
         <p:nvPicPr>
-          <p:cNvPr id="793643432" name="Picture 6" descr="HD-ShadowLong.png"/>
+          <p:cNvPr id="1976326578" name="Picture 6" descr="HD-ShadowLong.png"/>
           <p:cNvPicPr>
             <a:picLocks noChangeAspect="1"/>
           </p:cNvPicPr>
@@ -2682,7 +2666,7 @@
       </p:pic>
       <p:pic>
         <p:nvPicPr>
-          <p:cNvPr id="1768246924" name="Picture 7" descr="HD-ShadowShort.png"/>
+          <p:cNvPr id="1651782835" name="Picture 7" descr="HD-ShadowShort.png"/>
           <p:cNvPicPr>
             <a:picLocks noChangeAspect="1"/>
           </p:cNvPicPr>
@@ -2704,7 +2688,7 @@
       </p:pic>
       <p:sp>
         <p:nvSpPr>
-          <p:cNvPr id="794257679" name="Rectangle 8"/>
+          <p:cNvPr id="1072951864" name="Rectangle 8"/>
           <p:cNvSpPr/>
           <p:nvPr/>
         </p:nvSpPr>
@@ -2745,7 +2729,7 @@
       </p:sp>
       <p:sp>
         <p:nvSpPr>
-          <p:cNvPr id="1917465969" name="Rectangle 9"/>
+          <p:cNvPr id="1188607240" name="Rectangle 9"/>
           <p:cNvSpPr/>
           <p:nvPr/>
         </p:nvSpPr>
@@ -2783,7 +2767,7 @@
       </p:sp>
       <p:sp>
         <p:nvSpPr>
-          <p:cNvPr id="1612059635" name="Title 1"/>
+          <p:cNvPr id="1797490875" name="Title 1"/>
           <p:cNvSpPr>
             <a:spLocks noGrp="1"/>
           </p:cNvSpPr>
@@ -2820,7 +2804,7 @@
       </p:sp>
       <p:sp>
         <p:nvSpPr>
-          <p:cNvPr id="1455690020" name="Subtitle 2"/>
+          <p:cNvPr id="2023525712" name="Subtitle 2"/>
           <p:cNvSpPr>
             <a:spLocks noGrp="1"/>
           </p:cNvSpPr>
@@ -2890,7 +2874,7 @@
       </p:sp>
       <p:sp>
         <p:nvSpPr>
-          <p:cNvPr id="1214868787" name="Date Placeholder 3"/>
+          <p:cNvPr id="886177203" name="Date Placeholder 3"/>
           <p:cNvSpPr>
             <a:spLocks noGrp="1"/>
           </p:cNvSpPr>
@@ -2916,7 +2900,7 @@
       </p:sp>
       <p:sp>
         <p:nvSpPr>
-          <p:cNvPr id="1828808208" name="Footer Placeholder 4"/>
+          <p:cNvPr id="1255324921" name="Footer Placeholder 4"/>
           <p:cNvSpPr>
             <a:spLocks noGrp="1"/>
           </p:cNvSpPr>
@@ -2938,7 +2922,7 @@
       </p:sp>
       <p:sp>
         <p:nvSpPr>
-          <p:cNvPr id="1511464003" name="Slide Number Placeholder 5"/>
+          <p:cNvPr id="1828484998" name="Slide Number Placeholder 5"/>
           <p:cNvSpPr>
             <a:spLocks noGrp="1"/>
           </p:cNvSpPr>
@@ -2976,7 +2960,7 @@
 </file>
 
 <file path=ppt/slideLayouts/slideLayout13.xml><?xml version="1.0" encoding="utf-8"?>
-<p:sldLayout xmlns:a="http://schemas.openxmlformats.org/drawingml/2006/main" xmlns:r="http://schemas.openxmlformats.org/officeDocument/2006/relationships" xmlns:p="http://schemas.openxmlformats.org/presentationml/2006/main" showMasterPhAnim="0" type="obj" preserve="1" userDrawn="1">
+<p:sldLayout xmlns:a="http://schemas.openxmlformats.org/drawingml/2006/main" xmlns:r="http://schemas.openxmlformats.org/officeDocument/2006/relationships" xmlns:p="http://schemas.openxmlformats.org/presentationml/2006/main" xmlns:m="http://schemas.openxmlformats.org/officeDocument/2006/math" xmlns:w="http://schemas.openxmlformats.org/wordprocessingml/2006/main" matchingName="" preserve="1" showMasterPhAnim="0" showMasterSp="1" type="obj" userDrawn="1">
   <p:cSld name="1_Заголовок и объект">
     <p:spTree>
       <p:nvGrpSpPr>
@@ -2994,7 +2978,7 @@
       </p:grpSpPr>
       <p:pic>
         <p:nvPicPr>
-          <p:cNvPr id="876764738" name="Picture 14" descr="HD-ShadowLong.png"/>
+          <p:cNvPr id="716271052" name="Picture 14" descr="HD-ShadowLong.png"/>
           <p:cNvPicPr>
             <a:picLocks noChangeAspect="1"/>
           </p:cNvPicPr>
@@ -3016,7 +3000,7 @@
       </p:pic>
       <p:pic>
         <p:nvPicPr>
-          <p:cNvPr id="173452132" name="Picture 15" descr="HD-ShadowShort.png"/>
+          <p:cNvPr id="971822979" name="Picture 15" descr="HD-ShadowShort.png"/>
           <p:cNvPicPr>
             <a:picLocks noChangeAspect="1"/>
           </p:cNvPicPr>
@@ -3038,7 +3022,7 @@
       </p:pic>
       <p:sp>
         <p:nvSpPr>
-          <p:cNvPr id="172333308" name="Rectangle 16"/>
+          <p:cNvPr id="1641123968" name="Rectangle 16"/>
           <p:cNvSpPr/>
           <p:nvPr/>
         </p:nvSpPr>
@@ -3079,7 +3063,7 @@
       </p:sp>
       <p:sp>
         <p:nvSpPr>
-          <p:cNvPr id="2123915880" name="Rectangle 17"/>
+          <p:cNvPr id="1875311174" name="Rectangle 17"/>
           <p:cNvSpPr/>
           <p:nvPr/>
         </p:nvSpPr>
@@ -3117,7 +3101,7 @@
       </p:sp>
       <p:sp>
         <p:nvSpPr>
-          <p:cNvPr id="1971475932" name="Title 1"/>
+          <p:cNvPr id="822006650" name="Title 1"/>
           <p:cNvSpPr>
             <a:spLocks noGrp="1"/>
           </p:cNvSpPr>
@@ -3143,7 +3127,7 @@
       </p:sp>
       <p:sp>
         <p:nvSpPr>
-          <p:cNvPr id="2091675304" name="Content Placeholder 2"/>
+          <p:cNvPr id="320025749" name="Content Placeholder 2"/>
           <p:cNvSpPr>
             <a:spLocks noGrp="1"/>
           </p:cNvSpPr>
@@ -3209,7 +3193,7 @@
       </p:sp>
       <p:sp>
         <p:nvSpPr>
-          <p:cNvPr id="84246940" name="Date Placeholder 3"/>
+          <p:cNvPr id="879102963" name="Date Placeholder 3"/>
           <p:cNvSpPr>
             <a:spLocks noGrp="1"/>
           </p:cNvSpPr>
@@ -3235,7 +3219,7 @@
       </p:sp>
       <p:sp>
         <p:nvSpPr>
-          <p:cNvPr id="1648952554" name="Footer Placeholder 4"/>
+          <p:cNvPr id="2001348089" name="Footer Placeholder 4"/>
           <p:cNvSpPr>
             <a:spLocks noGrp="1"/>
           </p:cNvSpPr>
@@ -3257,7 +3241,7 @@
       </p:sp>
       <p:sp>
         <p:nvSpPr>
-          <p:cNvPr id="1127786240" name="Slide Number Placeholder 5"/>
+          <p:cNvPr id="1705267915" name="Slide Number Placeholder 5"/>
           <p:cNvSpPr>
             <a:spLocks noGrp="1"/>
           </p:cNvSpPr>
@@ -3290,7 +3274,7 @@
 </file>
 
 <file path=ppt/slideLayouts/slideLayout14.xml><?xml version="1.0" encoding="utf-8"?>
-<p:sldLayout xmlns:a="http://schemas.openxmlformats.org/drawingml/2006/main" xmlns:r="http://schemas.openxmlformats.org/officeDocument/2006/relationships" xmlns:p="http://schemas.openxmlformats.org/presentationml/2006/main" showMasterPhAnim="0" type="secHead" preserve="1" userDrawn="1">
+<p:sldLayout xmlns:a="http://schemas.openxmlformats.org/drawingml/2006/main" xmlns:r="http://schemas.openxmlformats.org/officeDocument/2006/relationships" xmlns:p="http://schemas.openxmlformats.org/presentationml/2006/main" xmlns:m="http://schemas.openxmlformats.org/officeDocument/2006/math" xmlns:w="http://schemas.openxmlformats.org/wordprocessingml/2006/main" matchingName="" preserve="1" showMasterPhAnim="0" showMasterSp="1" type="secHead" userDrawn="1">
   <p:cSld name="1_Заголовок раздела">
     <p:spTree>
       <p:nvGrpSpPr>
@@ -3308,7 +3292,7 @@
       </p:grpSpPr>
       <p:pic>
         <p:nvPicPr>
-          <p:cNvPr id="273017644" name="Picture 6" descr="HD-ShadowLong.png"/>
+          <p:cNvPr id="1693659924" name="Picture 6" descr="HD-ShadowLong.png"/>
           <p:cNvPicPr>
             <a:picLocks noChangeAspect="1"/>
           </p:cNvPicPr>
@@ -3330,7 +3314,7 @@
       </p:pic>
       <p:pic>
         <p:nvPicPr>
-          <p:cNvPr id="1073199399" name="Picture 7" descr="HD-ShadowShort.png"/>
+          <p:cNvPr id="1563711507" name="Picture 7" descr="HD-ShadowShort.png"/>
           <p:cNvPicPr>
             <a:picLocks noChangeAspect="1"/>
           </p:cNvPicPr>
@@ -3352,7 +3336,7 @@
       </p:pic>
       <p:sp>
         <p:nvSpPr>
-          <p:cNvPr id="1901606843" name="Rectangle 8"/>
+          <p:cNvPr id="669502740" name="Rectangle 8"/>
           <p:cNvSpPr/>
           <p:nvPr/>
         </p:nvSpPr>
@@ -3393,7 +3377,7 @@
       </p:sp>
       <p:sp>
         <p:nvSpPr>
-          <p:cNvPr id="547389118" name="Rectangle 9"/>
+          <p:cNvPr id="1178891066" name="Rectangle 9"/>
           <p:cNvSpPr/>
           <p:nvPr/>
         </p:nvSpPr>
@@ -3431,7 +3415,7 @@
       </p:sp>
       <p:sp>
         <p:nvSpPr>
-          <p:cNvPr id="751544624" name="Title 1"/>
+          <p:cNvPr id="105913394" name="Title 1"/>
           <p:cNvSpPr>
             <a:spLocks noGrp="1"/>
           </p:cNvSpPr>
@@ -3468,7 +3452,7 @@
       </p:sp>
       <p:sp>
         <p:nvSpPr>
-          <p:cNvPr id="2014375602" name="Text Placeholder 2"/>
+          <p:cNvPr id="854882404" name="Text Placeholder 2"/>
           <p:cNvSpPr>
             <a:spLocks noGrp="1"/>
           </p:cNvSpPr>
@@ -3592,7 +3576,7 @@
       </p:sp>
       <p:sp>
         <p:nvSpPr>
-          <p:cNvPr id="1923863657" name="Date Placeholder 3"/>
+          <p:cNvPr id="479746541" name="Date Placeholder 3"/>
           <p:cNvSpPr>
             <a:spLocks noGrp="1"/>
           </p:cNvSpPr>
@@ -3618,7 +3602,7 @@
       </p:sp>
       <p:sp>
         <p:nvSpPr>
-          <p:cNvPr id="781626906" name="Footer Placeholder 4"/>
+          <p:cNvPr id="1629987233" name="Footer Placeholder 4"/>
           <p:cNvSpPr>
             <a:spLocks noGrp="1"/>
           </p:cNvSpPr>
@@ -3640,7 +3624,7 @@
       </p:sp>
       <p:sp>
         <p:nvSpPr>
-          <p:cNvPr id="1943457015" name="Slide Number Placeholder 5"/>
+          <p:cNvPr id="1955289442" name="Slide Number Placeholder 5"/>
           <p:cNvSpPr>
             <a:spLocks noGrp="1"/>
           </p:cNvSpPr>
@@ -3678,7 +3662,7 @@
 </file>
 
 <file path=ppt/slideLayouts/slideLayout15.xml><?xml version="1.0" encoding="utf-8"?>
-<p:sldLayout xmlns:a="http://schemas.openxmlformats.org/drawingml/2006/main" xmlns:r="http://schemas.openxmlformats.org/officeDocument/2006/relationships" xmlns:p="http://schemas.openxmlformats.org/presentationml/2006/main" showMasterPhAnim="0" type="twoObj" preserve="1" userDrawn="1">
+<p:sldLayout xmlns:a="http://schemas.openxmlformats.org/drawingml/2006/main" xmlns:r="http://schemas.openxmlformats.org/officeDocument/2006/relationships" xmlns:p="http://schemas.openxmlformats.org/presentationml/2006/main" xmlns:m="http://schemas.openxmlformats.org/officeDocument/2006/math" xmlns:w="http://schemas.openxmlformats.org/wordprocessingml/2006/main" matchingName="" preserve="1" showMasterPhAnim="0" showMasterSp="1" type="twoObj" userDrawn="1">
   <p:cSld name="1_Два объекта">
     <p:spTree>
       <p:nvGrpSpPr>
@@ -3696,7 +3680,7 @@
       </p:grpSpPr>
       <p:pic>
         <p:nvPicPr>
-          <p:cNvPr id="715013635" name="Picture 7" descr="HD-ShadowLong.png"/>
+          <p:cNvPr id="1921874136" name="Picture 7" descr="HD-ShadowLong.png"/>
           <p:cNvPicPr>
             <a:picLocks noChangeAspect="1"/>
           </p:cNvPicPr>
@@ -3718,7 +3702,7 @@
       </p:pic>
       <p:pic>
         <p:nvPicPr>
-          <p:cNvPr id="275764393" name="Picture 8" descr="HD-ShadowShort.png"/>
+          <p:cNvPr id="908210447" name="Picture 8" descr="HD-ShadowShort.png"/>
           <p:cNvPicPr>
             <a:picLocks noChangeAspect="1"/>
           </p:cNvPicPr>
@@ -3740,7 +3724,7 @@
       </p:pic>
       <p:sp>
         <p:nvSpPr>
-          <p:cNvPr id="270794006" name="Rectangle 9"/>
+          <p:cNvPr id="766165719" name="Rectangle 9"/>
           <p:cNvSpPr/>
           <p:nvPr/>
         </p:nvSpPr>
@@ -3781,7 +3765,7 @@
       </p:sp>
       <p:sp>
         <p:nvSpPr>
-          <p:cNvPr id="925018658" name="Rectangle 10"/>
+          <p:cNvPr id="1739285334" name="Rectangle 10"/>
           <p:cNvSpPr/>
           <p:nvPr/>
         </p:nvSpPr>
@@ -3819,7 +3803,7 @@
       </p:sp>
       <p:sp>
         <p:nvSpPr>
-          <p:cNvPr id="149841134" name="Title 1"/>
+          <p:cNvPr id="2106284761" name="Title 1"/>
           <p:cNvSpPr>
             <a:spLocks noGrp="1"/>
           </p:cNvSpPr>
@@ -3845,7 +3829,7 @@
       </p:sp>
       <p:sp>
         <p:nvSpPr>
-          <p:cNvPr id="1753203016" name="Content Placeholder 2"/>
+          <p:cNvPr id="2039297381" name="Content Placeholder 2"/>
           <p:cNvSpPr>
             <a:spLocks noGrp="1"/>
           </p:cNvSpPr>
@@ -3916,7 +3900,7 @@
       </p:sp>
       <p:sp>
         <p:nvSpPr>
-          <p:cNvPr id="1445469297" name="Content Placeholder 3"/>
+          <p:cNvPr id="1825243879" name="Content Placeholder 3"/>
           <p:cNvSpPr>
             <a:spLocks noGrp="1"/>
           </p:cNvSpPr>
@@ -3987,7 +3971,7 @@
       </p:sp>
       <p:sp>
         <p:nvSpPr>
-          <p:cNvPr id="1080741401" name="Date Placeholder 4"/>
+          <p:cNvPr id="1931135278" name="Date Placeholder 4"/>
           <p:cNvSpPr>
             <a:spLocks noGrp="1"/>
           </p:cNvSpPr>
@@ -4013,7 +3997,7 @@
       </p:sp>
       <p:sp>
         <p:nvSpPr>
-          <p:cNvPr id="1173709945" name="Footer Placeholder 5"/>
+          <p:cNvPr id="1211919741" name="Footer Placeholder 5"/>
           <p:cNvSpPr>
             <a:spLocks noGrp="1"/>
           </p:cNvSpPr>
@@ -4035,7 +4019,7 @@
       </p:sp>
       <p:sp>
         <p:nvSpPr>
-          <p:cNvPr id="898760746" name="Slide Number Placeholder 6"/>
+          <p:cNvPr id="1961761271" name="Slide Number Placeholder 6"/>
           <p:cNvSpPr>
             <a:spLocks noGrp="1"/>
           </p:cNvSpPr>
@@ -4068,7 +4052,7 @@
 </file>
 
 <file path=ppt/slideLayouts/slideLayout16.xml><?xml version="1.0" encoding="utf-8"?>
-<p:sldLayout xmlns:a="http://schemas.openxmlformats.org/drawingml/2006/main" xmlns:r="http://schemas.openxmlformats.org/officeDocument/2006/relationships" xmlns:p="http://schemas.openxmlformats.org/presentationml/2006/main" showMasterPhAnim="0" type="twoTxTwoObj" preserve="1" userDrawn="1">
+<p:sldLayout xmlns:a="http://schemas.openxmlformats.org/drawingml/2006/main" xmlns:r="http://schemas.openxmlformats.org/officeDocument/2006/relationships" xmlns:p="http://schemas.openxmlformats.org/presentationml/2006/main" xmlns:m="http://schemas.openxmlformats.org/officeDocument/2006/math" xmlns:w="http://schemas.openxmlformats.org/wordprocessingml/2006/main" matchingName="" preserve="1" showMasterPhAnim="0" showMasterSp="1" type="twoTxTwoObj" userDrawn="1">
   <p:cSld name="1_Сравнение">
     <p:spTree>
       <p:nvGrpSpPr>
@@ -4086,7 +4070,7 @@
       </p:grpSpPr>
       <p:pic>
         <p:nvPicPr>
-          <p:cNvPr id="996666029" name="Picture 9" descr="HD-ShadowLong.png"/>
+          <p:cNvPr id="1297753000" name="Picture 9" descr="HD-ShadowLong.png"/>
           <p:cNvPicPr>
             <a:picLocks noChangeAspect="1"/>
           </p:cNvPicPr>
@@ -4108,7 +4092,7 @@
       </p:pic>
       <p:pic>
         <p:nvPicPr>
-          <p:cNvPr id="1540406872" name="Picture 10" descr="HD-ShadowShort.png"/>
+          <p:cNvPr id="973481190" name="Picture 10" descr="HD-ShadowShort.png"/>
           <p:cNvPicPr>
             <a:picLocks noChangeAspect="1"/>
           </p:cNvPicPr>
@@ -4130,7 +4114,7 @@
       </p:pic>
       <p:sp>
         <p:nvSpPr>
-          <p:cNvPr id="1679919062" name="Rectangle 11"/>
+          <p:cNvPr id="2132473942" name="Rectangle 11"/>
           <p:cNvSpPr/>
           <p:nvPr/>
         </p:nvSpPr>
@@ -4171,7 +4155,7 @@
       </p:sp>
       <p:sp>
         <p:nvSpPr>
-          <p:cNvPr id="963701510" name="Rectangle 12"/>
+          <p:cNvPr id="991608533" name="Rectangle 12"/>
           <p:cNvSpPr/>
           <p:nvPr/>
         </p:nvSpPr>
@@ -4209,7 +4193,7 @@
       </p:sp>
       <p:sp>
         <p:nvSpPr>
-          <p:cNvPr id="209389481" name="Title 1"/>
+          <p:cNvPr id="1994401756" name="Title 1"/>
           <p:cNvSpPr>
             <a:spLocks noGrp="1"/>
           </p:cNvSpPr>
@@ -4240,7 +4224,7 @@
       </p:sp>
       <p:sp>
         <p:nvSpPr>
-          <p:cNvPr id="1506239929" name="Text Placeholder 2"/>
+          <p:cNvPr id="21663112" name="Text Placeholder 2"/>
           <p:cNvSpPr>
             <a:spLocks noGrp="1"/>
           </p:cNvSpPr>
@@ -4308,7 +4292,7 @@
       </p:sp>
       <p:sp>
         <p:nvSpPr>
-          <p:cNvPr id="843667430" name="Content Placeholder 3"/>
+          <p:cNvPr id="1886987920" name="Content Placeholder 3"/>
           <p:cNvSpPr>
             <a:spLocks noGrp="1"/>
           </p:cNvSpPr>
@@ -4379,7 +4363,7 @@
       </p:sp>
       <p:sp>
         <p:nvSpPr>
-          <p:cNvPr id="1536034060" name="Text Placeholder 4"/>
+          <p:cNvPr id="2113272949" name="Text Placeholder 4"/>
           <p:cNvSpPr>
             <a:spLocks noGrp="1"/>
           </p:cNvSpPr>
@@ -4447,7 +4431,7 @@
       </p:sp>
       <p:sp>
         <p:nvSpPr>
-          <p:cNvPr id="1617947894" name="Content Placeholder 5"/>
+          <p:cNvPr id="2032461547" name="Content Placeholder 5"/>
           <p:cNvSpPr>
             <a:spLocks noGrp="1"/>
           </p:cNvSpPr>
@@ -4518,7 +4502,7 @@
       </p:sp>
       <p:sp>
         <p:nvSpPr>
-          <p:cNvPr id="100304079" name="Date Placeholder 6"/>
+          <p:cNvPr id="366842921" name="Date Placeholder 6"/>
           <p:cNvSpPr>
             <a:spLocks noGrp="1"/>
           </p:cNvSpPr>
@@ -4544,7 +4528,7 @@
       </p:sp>
       <p:sp>
         <p:nvSpPr>
-          <p:cNvPr id="1854237017" name="Footer Placeholder 7"/>
+          <p:cNvPr id="724836726" name="Footer Placeholder 7"/>
           <p:cNvSpPr>
             <a:spLocks noGrp="1"/>
           </p:cNvSpPr>
@@ -4566,7 +4550,7 @@
       </p:sp>
       <p:sp>
         <p:nvSpPr>
-          <p:cNvPr id="2046668031" name="Slide Number Placeholder 8"/>
+          <p:cNvPr id="469226667" name="Slide Number Placeholder 8"/>
           <p:cNvSpPr>
             <a:spLocks noGrp="1"/>
           </p:cNvSpPr>
@@ -4599,7 +4583,7 @@
 </file>
 
 <file path=ppt/slideLayouts/slideLayout17.xml><?xml version="1.0" encoding="utf-8"?>
-<p:sldLayout xmlns:a="http://schemas.openxmlformats.org/drawingml/2006/main" xmlns:r="http://schemas.openxmlformats.org/officeDocument/2006/relationships" xmlns:p="http://schemas.openxmlformats.org/presentationml/2006/main" showMasterPhAnim="0" type="titleOnly" preserve="1" userDrawn="1">
+<p:sldLayout xmlns:a="http://schemas.openxmlformats.org/drawingml/2006/main" xmlns:r="http://schemas.openxmlformats.org/officeDocument/2006/relationships" xmlns:p="http://schemas.openxmlformats.org/presentationml/2006/main" xmlns:m="http://schemas.openxmlformats.org/officeDocument/2006/math" xmlns:w="http://schemas.openxmlformats.org/wordprocessingml/2006/main" matchingName="" preserve="1" showMasterPhAnim="0" showMasterSp="1" type="titleOnly" userDrawn="1">
   <p:cSld name="1_Только заголовок">
     <p:spTree>
       <p:nvGrpSpPr>
@@ -4617,7 +4601,7 @@
       </p:grpSpPr>
       <p:pic>
         <p:nvPicPr>
-          <p:cNvPr id="1542267524" name="Picture 5" descr="HD-ShadowLong.png"/>
+          <p:cNvPr id="616744993" name="Picture 5" descr="HD-ShadowLong.png"/>
           <p:cNvPicPr>
             <a:picLocks noChangeAspect="1"/>
           </p:cNvPicPr>
@@ -4639,7 +4623,7 @@
       </p:pic>
       <p:pic>
         <p:nvPicPr>
-          <p:cNvPr id="78270752" name="Picture 6" descr="HD-ShadowShort.png"/>
+          <p:cNvPr id="284767527" name="Picture 6" descr="HD-ShadowShort.png"/>
           <p:cNvPicPr>
             <a:picLocks noChangeAspect="1"/>
           </p:cNvPicPr>
@@ -4661,7 +4645,7 @@
       </p:pic>
       <p:sp>
         <p:nvSpPr>
-          <p:cNvPr id="1278352640" name="Rectangle 7"/>
+          <p:cNvPr id="790945289" name="Rectangle 7"/>
           <p:cNvSpPr/>
           <p:nvPr/>
         </p:nvSpPr>
@@ -4702,7 +4686,7 @@
       </p:sp>
       <p:sp>
         <p:nvSpPr>
-          <p:cNvPr id="1750296704" name="Rectangle 8"/>
+          <p:cNvPr id="1701997261" name="Rectangle 8"/>
           <p:cNvSpPr/>
           <p:nvPr/>
         </p:nvSpPr>
@@ -4740,7 +4724,7 @@
       </p:sp>
       <p:sp>
         <p:nvSpPr>
-          <p:cNvPr id="1460357284" name="Title 1"/>
+          <p:cNvPr id="1202576083" name="Title 1"/>
           <p:cNvSpPr>
             <a:spLocks noGrp="1"/>
           </p:cNvSpPr>
@@ -4766,7 +4750,7 @@
       </p:sp>
       <p:sp>
         <p:nvSpPr>
-          <p:cNvPr id="1797222027" name="Date Placeholder 2"/>
+          <p:cNvPr id="1299887261" name="Date Placeholder 2"/>
           <p:cNvSpPr>
             <a:spLocks noGrp="1"/>
           </p:cNvSpPr>
@@ -4792,7 +4776,7 @@
       </p:sp>
       <p:sp>
         <p:nvSpPr>
-          <p:cNvPr id="1641891263" name="Footer Placeholder 3"/>
+          <p:cNvPr id="876966470" name="Footer Placeholder 3"/>
           <p:cNvSpPr>
             <a:spLocks noGrp="1"/>
           </p:cNvSpPr>
@@ -4814,7 +4798,7 @@
       </p:sp>
       <p:sp>
         <p:nvSpPr>
-          <p:cNvPr id="1864952229" name="Slide Number Placeholder 4"/>
+          <p:cNvPr id="753202702" name="Slide Number Placeholder 4"/>
           <p:cNvSpPr>
             <a:spLocks noGrp="1"/>
           </p:cNvSpPr>
@@ -4847,7 +4831,7 @@
 </file>
 
 <file path=ppt/slideLayouts/slideLayout18.xml><?xml version="1.0" encoding="utf-8"?>
-<p:sldLayout xmlns:a="http://schemas.openxmlformats.org/drawingml/2006/main" xmlns:r="http://schemas.openxmlformats.org/officeDocument/2006/relationships" xmlns:p="http://schemas.openxmlformats.org/presentationml/2006/main" showMasterPhAnim="0" type="blank" preserve="1" userDrawn="1">
+<p:sldLayout xmlns:a="http://schemas.openxmlformats.org/drawingml/2006/main" xmlns:r="http://schemas.openxmlformats.org/officeDocument/2006/relationships" xmlns:p="http://schemas.openxmlformats.org/presentationml/2006/main" xmlns:m="http://schemas.openxmlformats.org/officeDocument/2006/math" xmlns:w="http://schemas.openxmlformats.org/wordprocessingml/2006/main" matchingName="" preserve="1" showMasterPhAnim="0" showMasterSp="1" type="blank" userDrawn="1">
   <p:cSld name="1_Пустой слайд">
     <p:spTree>
       <p:nvGrpSpPr>
@@ -4865,7 +4849,7 @@
       </p:grpSpPr>
       <p:pic>
         <p:nvPicPr>
-          <p:cNvPr id="358528735" name="Picture 4" descr="HD-ShadowShort.png"/>
+          <p:cNvPr id="2087485471" name="Picture 4" descr="HD-ShadowShort.png"/>
           <p:cNvPicPr>
             <a:picLocks noChangeAspect="1"/>
           </p:cNvPicPr>
@@ -4887,7 +4871,7 @@
       </p:pic>
       <p:sp>
         <p:nvSpPr>
-          <p:cNvPr id="197733676" name="Rectangle 5"/>
+          <p:cNvPr id="1107181730" name="Rectangle 5"/>
           <p:cNvSpPr/>
           <p:nvPr/>
         </p:nvSpPr>
@@ -4925,7 +4909,7 @@
       </p:sp>
       <p:sp>
         <p:nvSpPr>
-          <p:cNvPr id="204576908" name="Date Placeholder 1"/>
+          <p:cNvPr id="2007338700" name="Date Placeholder 1"/>
           <p:cNvSpPr>
             <a:spLocks noGrp="1"/>
           </p:cNvSpPr>
@@ -4951,7 +4935,7 @@
       </p:sp>
       <p:sp>
         <p:nvSpPr>
-          <p:cNvPr id="1745613692" name="Footer Placeholder 2"/>
+          <p:cNvPr id="293761747" name="Footer Placeholder 2"/>
           <p:cNvSpPr>
             <a:spLocks noGrp="1"/>
           </p:cNvSpPr>
@@ -4973,7 +4957,7 @@
       </p:sp>
       <p:sp>
         <p:nvSpPr>
-          <p:cNvPr id="1307291959" name="Slide Number Placeholder 3"/>
+          <p:cNvPr id="789017665" name="Slide Number Placeholder 3"/>
           <p:cNvSpPr>
             <a:spLocks noGrp="1"/>
           </p:cNvSpPr>
@@ -5006,7 +4990,7 @@
 </file>
 
 <file path=ppt/slideLayouts/slideLayout19.xml><?xml version="1.0" encoding="utf-8"?>
-<p:sldLayout xmlns:a="http://schemas.openxmlformats.org/drawingml/2006/main" xmlns:r="http://schemas.openxmlformats.org/officeDocument/2006/relationships" xmlns:p="http://schemas.openxmlformats.org/presentationml/2006/main" showMasterPhAnim="0" type="objTx" preserve="1" userDrawn="1">
+<p:sldLayout xmlns:a="http://schemas.openxmlformats.org/drawingml/2006/main" xmlns:r="http://schemas.openxmlformats.org/officeDocument/2006/relationships" xmlns:p="http://schemas.openxmlformats.org/presentationml/2006/main" xmlns:m="http://schemas.openxmlformats.org/officeDocument/2006/math" xmlns:w="http://schemas.openxmlformats.org/wordprocessingml/2006/main" matchingName="" preserve="1" showMasterPhAnim="0" showMasterSp="1" type="objTx" userDrawn="1">
   <p:cSld name="1_Объект с подписью">
     <p:spTree>
       <p:nvGrpSpPr>
@@ -5024,7 +5008,7 @@
       </p:grpSpPr>
       <p:pic>
         <p:nvPicPr>
-          <p:cNvPr id="836214736" name="Picture 7" descr="HD-ShadowLong.png"/>
+          <p:cNvPr id="4200073" name="Picture 7" descr="HD-ShadowLong.png"/>
           <p:cNvPicPr>
             <a:picLocks noChangeAspect="1"/>
           </p:cNvPicPr>
@@ -5046,7 +5030,7 @@
       </p:pic>
       <p:pic>
         <p:nvPicPr>
-          <p:cNvPr id="1371526800" name="Picture 8" descr="HD-ShadowShort.png"/>
+          <p:cNvPr id="1218234431" name="Picture 8" descr="HD-ShadowShort.png"/>
           <p:cNvPicPr>
             <a:picLocks noChangeAspect="1"/>
           </p:cNvPicPr>
@@ -5068,7 +5052,7 @@
       </p:pic>
       <p:sp>
         <p:nvSpPr>
-          <p:cNvPr id="90075046" name="Rectangle 9"/>
+          <p:cNvPr id="1058352719" name="Rectangle 9"/>
           <p:cNvSpPr/>
           <p:nvPr/>
         </p:nvSpPr>
@@ -5109,7 +5093,7 @@
       </p:sp>
       <p:sp>
         <p:nvSpPr>
-          <p:cNvPr id="1680166379" name="Rectangle 10"/>
+          <p:cNvPr id="2137916395" name="Rectangle 10"/>
           <p:cNvSpPr/>
           <p:nvPr/>
         </p:nvSpPr>
@@ -5147,7 +5131,7 @@
       </p:sp>
       <p:sp>
         <p:nvSpPr>
-          <p:cNvPr id="2092484877" name="Title 1"/>
+          <p:cNvPr id="1884816786" name="Title 1"/>
           <p:cNvSpPr>
             <a:spLocks noGrp="1"/>
           </p:cNvSpPr>
@@ -5184,7 +5168,7 @@
       </p:sp>
       <p:sp>
         <p:nvSpPr>
-          <p:cNvPr id="248542299" name="Content Placeholder 2"/>
+          <p:cNvPr id="732713882" name="Content Placeholder 2"/>
           <p:cNvSpPr>
             <a:spLocks noGrp="1"/>
           </p:cNvSpPr>
@@ -5255,7 +5239,7 @@
       </p:sp>
       <p:sp>
         <p:nvSpPr>
-          <p:cNvPr id="1353456584" name="Text Placeholder 3"/>
+          <p:cNvPr id="1948016701" name="Text Placeholder 3"/>
           <p:cNvSpPr>
             <a:spLocks noGrp="1"/>
           </p:cNvSpPr>
@@ -5323,7 +5307,7 @@
       </p:sp>
       <p:sp>
         <p:nvSpPr>
-          <p:cNvPr id="678070271" name="Date Placeholder 4"/>
+          <p:cNvPr id="123050271" name="Date Placeholder 4"/>
           <p:cNvSpPr>
             <a:spLocks noGrp="1"/>
           </p:cNvSpPr>
@@ -5349,7 +5333,7 @@
       </p:sp>
       <p:sp>
         <p:nvSpPr>
-          <p:cNvPr id="2042056188" name="Footer Placeholder 5"/>
+          <p:cNvPr id="378784196" name="Footer Placeholder 5"/>
           <p:cNvSpPr>
             <a:spLocks noGrp="1"/>
           </p:cNvSpPr>
@@ -5371,7 +5355,7 @@
       </p:sp>
       <p:sp>
         <p:nvSpPr>
-          <p:cNvPr id="841692473" name="Slide Number Placeholder 6"/>
+          <p:cNvPr id="358586295" name="Slide Number Placeholder 6"/>
           <p:cNvSpPr>
             <a:spLocks noGrp="1"/>
           </p:cNvSpPr>
@@ -5404,7 +5388,7 @@
 </file>
 
 <file path=ppt/slideLayouts/slideLayout2.xml><?xml version="1.0" encoding="utf-8"?>
-<p:sldLayout xmlns:a="http://schemas.openxmlformats.org/drawingml/2006/main" xmlns:r="http://schemas.openxmlformats.org/officeDocument/2006/relationships" xmlns:p="http://schemas.openxmlformats.org/presentationml/2006/main" showMasterPhAnim="0" type="obj" preserve="1" userDrawn="1">
+<p:sldLayout xmlns:a="http://schemas.openxmlformats.org/drawingml/2006/main" xmlns:r="http://schemas.openxmlformats.org/officeDocument/2006/relationships" xmlns:p="http://schemas.openxmlformats.org/presentationml/2006/main" xmlns:m="http://schemas.openxmlformats.org/officeDocument/2006/math" xmlns:w="http://schemas.openxmlformats.org/wordprocessingml/2006/main" matchingName="" preserve="1" showMasterPhAnim="0" showMasterSp="1" type="obj" userDrawn="1">
   <p:cSld name="Заголовок и объект">
     <p:spTree>
       <p:nvGrpSpPr>
@@ -5422,7 +5406,7 @@
       </p:grpSpPr>
       <p:sp>
         <p:nvSpPr>
-          <p:cNvPr id="877498755" name="Заголовок 1"/>
+          <p:cNvPr id="1792627385" name="Заголовок 1"/>
           <p:cNvSpPr>
             <a:spLocks noGrp="1"/>
           </p:cNvSpPr>
@@ -5448,7 +5432,7 @@
       </p:sp>
       <p:sp>
         <p:nvSpPr>
-          <p:cNvPr id="1649996580" name="Объект 2"/>
+          <p:cNvPr id="425616989" name="Объект 2"/>
           <p:cNvSpPr>
             <a:spLocks noGrp="1"/>
           </p:cNvSpPr>
@@ -5514,7 +5498,7 @@
       </p:sp>
       <p:sp>
         <p:nvSpPr>
-          <p:cNvPr id="539416928" name="Дата 3"/>
+          <p:cNvPr id="489231737" name="Дата 3"/>
           <p:cNvSpPr>
             <a:spLocks noGrp="1"/>
           </p:cNvSpPr>
@@ -5540,7 +5524,7 @@
       </p:sp>
       <p:sp>
         <p:nvSpPr>
-          <p:cNvPr id="373508275" name="Нижний колонтитул 4"/>
+          <p:cNvPr id="1192651999" name="Нижний колонтитул 4"/>
           <p:cNvSpPr>
             <a:spLocks noGrp="1"/>
           </p:cNvSpPr>
@@ -5562,7 +5546,7 @@
       </p:sp>
       <p:sp>
         <p:nvSpPr>
-          <p:cNvPr id="1617710353" name="Номер слайда 5"/>
+          <p:cNvPr id="1698005385" name="Номер слайда 5"/>
           <p:cNvSpPr>
             <a:spLocks noGrp="1"/>
           </p:cNvSpPr>
@@ -5595,7 +5579,7 @@
 </file>
 
 <file path=ppt/slideLayouts/slideLayout20.xml><?xml version="1.0" encoding="utf-8"?>
-<p:sldLayout xmlns:a="http://schemas.openxmlformats.org/drawingml/2006/main" xmlns:r="http://schemas.openxmlformats.org/officeDocument/2006/relationships" xmlns:p="http://schemas.openxmlformats.org/presentationml/2006/main" showMasterPhAnim="0" type="picTx" preserve="1" userDrawn="1">
+<p:sldLayout xmlns:a="http://schemas.openxmlformats.org/drawingml/2006/main" xmlns:r="http://schemas.openxmlformats.org/officeDocument/2006/relationships" xmlns:p="http://schemas.openxmlformats.org/presentationml/2006/main" xmlns:m="http://schemas.openxmlformats.org/officeDocument/2006/math" xmlns:w="http://schemas.openxmlformats.org/wordprocessingml/2006/main" matchingName="" preserve="1" showMasterPhAnim="0" showMasterSp="1" type="picTx" userDrawn="1">
   <p:cSld name="1_Рисунок с подписью">
     <p:spTree>
       <p:nvGrpSpPr>
@@ -5613,7 +5597,7 @@
       </p:grpSpPr>
       <p:pic>
         <p:nvPicPr>
-          <p:cNvPr id="2046555126" name="Picture 7" descr="HD-ShadowLong.png"/>
+          <p:cNvPr id="247791610" name="Picture 7" descr="HD-ShadowLong.png"/>
           <p:cNvPicPr>
             <a:picLocks noChangeAspect="1"/>
           </p:cNvPicPr>
@@ -5635,7 +5619,7 @@
       </p:pic>
       <p:pic>
         <p:nvPicPr>
-          <p:cNvPr id="853817117" name="Picture 8" descr="HD-ShadowShort.png"/>
+          <p:cNvPr id="574130562" name="Picture 8" descr="HD-ShadowShort.png"/>
           <p:cNvPicPr>
             <a:picLocks noChangeAspect="1"/>
           </p:cNvPicPr>
@@ -5657,7 +5641,7 @@
       </p:pic>
       <p:sp>
         <p:nvSpPr>
-          <p:cNvPr id="887632515" name="Rectangle 9"/>
+          <p:cNvPr id="1413802975" name="Rectangle 9"/>
           <p:cNvSpPr/>
           <p:nvPr/>
         </p:nvSpPr>
@@ -5698,7 +5682,7 @@
       </p:sp>
       <p:sp>
         <p:nvSpPr>
-          <p:cNvPr id="301825935" name="Rectangle 10"/>
+          <p:cNvPr id="1957312384" name="Rectangle 10"/>
           <p:cNvSpPr/>
           <p:nvPr/>
         </p:nvSpPr>
@@ -5736,7 +5720,7 @@
       </p:sp>
       <p:sp>
         <p:nvSpPr>
-          <p:cNvPr id="511077936" name="Title 1"/>
+          <p:cNvPr id="835046546" name="Title 1"/>
           <p:cNvSpPr>
             <a:spLocks noGrp="1"/>
           </p:cNvSpPr>
@@ -5773,9 +5757,9 @@
       </p:sp>
       <p:sp>
         <p:nvSpPr>
-          <p:cNvPr id="494512508" name="Picture Placeholder 2"/>
-          <p:cNvSpPr>
-            <a:spLocks noGrp="1" noChangeAspect="1"/>
+          <p:cNvPr id="567055316" name="Picture Placeholder 2"/>
+          <p:cNvSpPr>
+            <a:spLocks noChangeAspect="1" noGrp="1"/>
           </p:cNvSpPr>
           <p:nvPr>
             <p:ph type="pic" idx="1"/>
@@ -5855,7 +5839,7 @@
       </p:sp>
       <p:sp>
         <p:nvSpPr>
-          <p:cNvPr id="2012689798" name="Text Placeholder 3"/>
+          <p:cNvPr id="1293242754" name="Text Placeholder 3"/>
           <p:cNvSpPr>
             <a:spLocks noGrp="1"/>
           </p:cNvSpPr>
@@ -5923,7 +5907,7 @@
       </p:sp>
       <p:sp>
         <p:nvSpPr>
-          <p:cNvPr id="1482660192" name="Date Placeholder 4"/>
+          <p:cNvPr id="1252901471" name="Date Placeholder 4"/>
           <p:cNvSpPr>
             <a:spLocks noGrp="1"/>
           </p:cNvSpPr>
@@ -5949,7 +5933,7 @@
       </p:sp>
       <p:sp>
         <p:nvSpPr>
-          <p:cNvPr id="1557256038" name="Footer Placeholder 5"/>
+          <p:cNvPr id="239361988" name="Footer Placeholder 5"/>
           <p:cNvSpPr>
             <a:spLocks noGrp="1"/>
           </p:cNvSpPr>
@@ -5971,7 +5955,7 @@
       </p:sp>
       <p:sp>
         <p:nvSpPr>
-          <p:cNvPr id="1044366022" name="Slide Number Placeholder 6"/>
+          <p:cNvPr id="309922974" name="Slide Number Placeholder 6"/>
           <p:cNvSpPr>
             <a:spLocks noGrp="1"/>
           </p:cNvSpPr>
@@ -6004,7 +5988,7 @@
 </file>
 
 <file path=ppt/slideLayouts/slideLayout21.xml><?xml version="1.0" encoding="utf-8"?>
-<p:sldLayout xmlns:a="http://schemas.openxmlformats.org/drawingml/2006/main" xmlns:r="http://schemas.openxmlformats.org/officeDocument/2006/relationships" xmlns:p="http://schemas.openxmlformats.org/presentationml/2006/main" showMasterPhAnim="0" preserve="1" userDrawn="1">
+<p:sldLayout xmlns:a="http://schemas.openxmlformats.org/drawingml/2006/main" xmlns:r="http://schemas.openxmlformats.org/officeDocument/2006/relationships" xmlns:p="http://schemas.openxmlformats.org/presentationml/2006/main" xmlns:m="http://schemas.openxmlformats.org/officeDocument/2006/math" xmlns:w="http://schemas.openxmlformats.org/wordprocessingml/2006/main" matchingName="" preserve="1" showMasterPhAnim="0" showMasterSp="1" userDrawn="1">
   <p:cSld name="Панорамная фотография с подписью">
     <p:spTree>
       <p:nvGrpSpPr>
@@ -6022,7 +6006,7 @@
       </p:grpSpPr>
       <p:pic>
         <p:nvPicPr>
-          <p:cNvPr id="2060062332" name="Picture 7" descr="HD-ShadowLong.png"/>
+          <p:cNvPr id="674598386" name="Picture 7" descr="HD-ShadowLong.png"/>
           <p:cNvPicPr>
             <a:picLocks noChangeAspect="1"/>
           </p:cNvPicPr>
@@ -6044,7 +6028,7 @@
       </p:pic>
       <p:pic>
         <p:nvPicPr>
-          <p:cNvPr id="347545903" name="Picture 8" descr="HD-ShadowShort.png"/>
+          <p:cNvPr id="430630601" name="Picture 8" descr="HD-ShadowShort.png"/>
           <p:cNvPicPr>
             <a:picLocks noChangeAspect="1"/>
           </p:cNvPicPr>
@@ -6066,7 +6050,7 @@
       </p:pic>
       <p:sp>
         <p:nvSpPr>
-          <p:cNvPr id="2130835739" name="Rectangle 9"/>
+          <p:cNvPr id="1962917616" name="Rectangle 9"/>
           <p:cNvSpPr/>
           <p:nvPr/>
         </p:nvSpPr>
@@ -6107,7 +6091,7 @@
       </p:sp>
       <p:sp>
         <p:nvSpPr>
-          <p:cNvPr id="2097230994" name="Rectangle 10"/>
+          <p:cNvPr id="788762503" name="Rectangle 10"/>
           <p:cNvSpPr/>
           <p:nvPr/>
         </p:nvSpPr>
@@ -6145,7 +6129,7 @@
       </p:sp>
       <p:sp>
         <p:nvSpPr>
-          <p:cNvPr id="615266043" name="Title 1"/>
+          <p:cNvPr id="1956992913" name="Title 1"/>
           <p:cNvSpPr>
             <a:spLocks noGrp="1"/>
           </p:cNvSpPr>
@@ -6182,9 +6166,9 @@
       </p:sp>
       <p:sp>
         <p:nvSpPr>
-          <p:cNvPr id="962049135" name="Picture Placeholder 2"/>
-          <p:cNvSpPr>
-            <a:spLocks noGrp="1" noChangeAspect="1"/>
+          <p:cNvPr id="1152116120" name="Picture Placeholder 2"/>
+          <p:cNvSpPr>
+            <a:spLocks noChangeAspect="1" noGrp="1"/>
           </p:cNvSpPr>
           <p:nvPr>
             <p:ph type="pic" idx="1"/>
@@ -6264,7 +6248,7 @@
       </p:sp>
       <p:sp>
         <p:nvSpPr>
-          <p:cNvPr id="686671806" name="Text Placeholder 3"/>
+          <p:cNvPr id="524017894" name="Text Placeholder 3"/>
           <p:cNvSpPr>
             <a:spLocks noGrp="1"/>
           </p:cNvSpPr>
@@ -6332,7 +6316,7 @@
       </p:sp>
       <p:sp>
         <p:nvSpPr>
-          <p:cNvPr id="827949522" name="Date Placeholder 4"/>
+          <p:cNvPr id="1268249664" name="Date Placeholder 4"/>
           <p:cNvSpPr>
             <a:spLocks noGrp="1"/>
           </p:cNvSpPr>
@@ -6358,7 +6342,7 @@
       </p:sp>
       <p:sp>
         <p:nvSpPr>
-          <p:cNvPr id="1514250910" name="Footer Placeholder 5"/>
+          <p:cNvPr id="725157266" name="Footer Placeholder 5"/>
           <p:cNvSpPr>
             <a:spLocks noGrp="1"/>
           </p:cNvSpPr>
@@ -6380,7 +6364,7 @@
       </p:sp>
       <p:sp>
         <p:nvSpPr>
-          <p:cNvPr id="251829417" name="Slide Number Placeholder 6"/>
+          <p:cNvPr id="1108207295" name="Slide Number Placeholder 6"/>
           <p:cNvSpPr>
             <a:spLocks noGrp="1"/>
           </p:cNvSpPr>
@@ -6418,7 +6402,7 @@
 </file>
 
 <file path=ppt/slideLayouts/slideLayout22.xml><?xml version="1.0" encoding="utf-8"?>
-<p:sldLayout xmlns:a="http://schemas.openxmlformats.org/drawingml/2006/main" xmlns:r="http://schemas.openxmlformats.org/officeDocument/2006/relationships" xmlns:p="http://schemas.openxmlformats.org/presentationml/2006/main" showMasterPhAnim="0" preserve="1" userDrawn="1">
+<p:sldLayout xmlns:a="http://schemas.openxmlformats.org/drawingml/2006/main" xmlns:r="http://schemas.openxmlformats.org/officeDocument/2006/relationships" xmlns:p="http://schemas.openxmlformats.org/presentationml/2006/main" xmlns:m="http://schemas.openxmlformats.org/officeDocument/2006/math" xmlns:w="http://schemas.openxmlformats.org/wordprocessingml/2006/main" matchingName="" preserve="1" showMasterPhAnim="0" showMasterSp="1" userDrawn="1">
   <p:cSld name="Заголовок и подпись">
     <p:spTree>
       <p:nvGrpSpPr>
@@ -6436,7 +6420,7 @@
       </p:grpSpPr>
       <p:pic>
         <p:nvPicPr>
-          <p:cNvPr id="416913952" name="Picture 7" descr="HD-ShadowLong.png"/>
+          <p:cNvPr id="1536673965" name="Picture 7" descr="HD-ShadowLong.png"/>
           <p:cNvPicPr>
             <a:picLocks noChangeAspect="1"/>
           </p:cNvPicPr>
@@ -6458,7 +6442,7 @@
       </p:pic>
       <p:pic>
         <p:nvPicPr>
-          <p:cNvPr id="249288123" name="Picture 8" descr="HD-ShadowShort.png"/>
+          <p:cNvPr id="1622248004" name="Picture 8" descr="HD-ShadowShort.png"/>
           <p:cNvPicPr>
             <a:picLocks noChangeAspect="1"/>
           </p:cNvPicPr>
@@ -6480,7 +6464,7 @@
       </p:pic>
       <p:sp>
         <p:nvSpPr>
-          <p:cNvPr id="1477942715" name="Rectangle 9"/>
+          <p:cNvPr id="936001588" name="Rectangle 9"/>
           <p:cNvSpPr/>
           <p:nvPr/>
         </p:nvSpPr>
@@ -6521,7 +6505,7 @@
       </p:sp>
       <p:sp>
         <p:nvSpPr>
-          <p:cNvPr id="1156204209" name="Rectangle 10"/>
+          <p:cNvPr id="1011471511" name="Rectangle 10"/>
           <p:cNvSpPr/>
           <p:nvPr/>
         </p:nvSpPr>
@@ -6559,7 +6543,7 @@
       </p:sp>
       <p:sp>
         <p:nvSpPr>
-          <p:cNvPr id="795143720" name="Title 1"/>
+          <p:cNvPr id="355076329" name="Title 1"/>
           <p:cNvSpPr>
             <a:spLocks noGrp="1"/>
           </p:cNvSpPr>
@@ -6594,7 +6578,7 @@
       </p:sp>
       <p:sp>
         <p:nvSpPr>
-          <p:cNvPr id="659802012" name="Text Placeholder 3"/>
+          <p:cNvPr id="374690567" name="Text Placeholder 3"/>
           <p:cNvSpPr>
             <a:spLocks noGrp="1"/>
           </p:cNvSpPr>
@@ -6662,7 +6646,7 @@
       </p:sp>
       <p:sp>
         <p:nvSpPr>
-          <p:cNvPr id="989325142" name="Date Placeholder 4"/>
+          <p:cNvPr id="1305073059" name="Date Placeholder 4"/>
           <p:cNvSpPr>
             <a:spLocks noGrp="1"/>
           </p:cNvSpPr>
@@ -6688,7 +6672,7 @@
       </p:sp>
       <p:sp>
         <p:nvSpPr>
-          <p:cNvPr id="1069597934" name="Footer Placeholder 5"/>
+          <p:cNvPr id="860707599" name="Footer Placeholder 5"/>
           <p:cNvSpPr>
             <a:spLocks noGrp="1"/>
           </p:cNvSpPr>
@@ -6710,7 +6694,7 @@
       </p:sp>
       <p:sp>
         <p:nvSpPr>
-          <p:cNvPr id="1465284660" name="Slide Number Placeholder 6"/>
+          <p:cNvPr id="427177633" name="Slide Number Placeholder 6"/>
           <p:cNvSpPr>
             <a:spLocks noGrp="1"/>
           </p:cNvSpPr>
@@ -6748,7 +6732,7 @@
 </file>
 
 <file path=ppt/slideLayouts/slideLayout23.xml><?xml version="1.0" encoding="utf-8"?>
-<p:sldLayout xmlns:a="http://schemas.openxmlformats.org/drawingml/2006/main" xmlns:r="http://schemas.openxmlformats.org/officeDocument/2006/relationships" xmlns:p="http://schemas.openxmlformats.org/presentationml/2006/main" showMasterPhAnim="0" preserve="1" userDrawn="1">
+<p:sldLayout xmlns:a="http://schemas.openxmlformats.org/drawingml/2006/main" xmlns:r="http://schemas.openxmlformats.org/officeDocument/2006/relationships" xmlns:p="http://schemas.openxmlformats.org/presentationml/2006/main" xmlns:m="http://schemas.openxmlformats.org/officeDocument/2006/math" xmlns:w="http://schemas.openxmlformats.org/wordprocessingml/2006/main" matchingName="" preserve="1" showMasterPhAnim="0" showMasterSp="1" userDrawn="1">
   <p:cSld name="Цитата с подписью">
     <p:spTree>
       <p:nvGrpSpPr>
@@ -6766,7 +6750,7 @@
       </p:grpSpPr>
       <p:pic>
         <p:nvPicPr>
-          <p:cNvPr id="1621971362" name="Picture 10" descr="HD-ShadowLong.png"/>
+          <p:cNvPr id="1168271355" name="Picture 10" descr="HD-ShadowLong.png"/>
           <p:cNvPicPr>
             <a:picLocks noChangeAspect="1"/>
           </p:cNvPicPr>
@@ -6788,7 +6772,7 @@
       </p:pic>
       <p:pic>
         <p:nvPicPr>
-          <p:cNvPr id="30138758" name="Picture 12" descr="HD-ShadowShort.png"/>
+          <p:cNvPr id="1269699171" name="Picture 12" descr="HD-ShadowShort.png"/>
           <p:cNvPicPr>
             <a:picLocks noChangeAspect="1"/>
           </p:cNvPicPr>
@@ -6810,7 +6794,7 @@
       </p:pic>
       <p:sp>
         <p:nvSpPr>
-          <p:cNvPr id="1217562408" name="Rectangle 13"/>
+          <p:cNvPr id="1080723316" name="Rectangle 13"/>
           <p:cNvSpPr/>
           <p:nvPr/>
         </p:nvSpPr>
@@ -6851,7 +6835,7 @@
       </p:sp>
       <p:sp>
         <p:nvSpPr>
-          <p:cNvPr id="530357184" name="Rectangle 14"/>
+          <p:cNvPr id="621566896" name="Rectangle 14"/>
           <p:cNvSpPr/>
           <p:nvPr/>
         </p:nvSpPr>
@@ -6889,7 +6873,7 @@
       </p:sp>
       <p:sp>
         <p:nvSpPr>
-          <p:cNvPr id="1432462105" name="Title 1"/>
+          <p:cNvPr id="992448675" name="Title 1"/>
           <p:cNvSpPr>
             <a:spLocks noGrp="1"/>
           </p:cNvSpPr>
@@ -6924,7 +6908,7 @@
       </p:sp>
       <p:sp>
         <p:nvSpPr>
-          <p:cNvPr id="645844534" name="Text Placeholder 3"/>
+          <p:cNvPr id="357020191" name="Text Placeholder 3"/>
           <p:cNvSpPr>
             <a:spLocks noGrp="1"/>
           </p:cNvSpPr>
@@ -6994,7 +6978,7 @@
       </p:sp>
       <p:sp>
         <p:nvSpPr>
-          <p:cNvPr id="1113970974" name="Text Placeholder 3"/>
+          <p:cNvPr id="1569210620" name="Text Placeholder 3"/>
           <p:cNvSpPr>
             <a:spLocks noGrp="1"/>
           </p:cNvSpPr>
@@ -7064,7 +7048,7 @@
       </p:sp>
       <p:sp>
         <p:nvSpPr>
-          <p:cNvPr id="1820181809" name="Date Placeholder 4"/>
+          <p:cNvPr id="498746417" name="Date Placeholder 4"/>
           <p:cNvSpPr>
             <a:spLocks noGrp="1"/>
           </p:cNvSpPr>
@@ -7090,7 +7074,7 @@
       </p:sp>
       <p:sp>
         <p:nvSpPr>
-          <p:cNvPr id="2136562073" name="Footer Placeholder 5"/>
+          <p:cNvPr id="1921887994" name="Footer Placeholder 5"/>
           <p:cNvSpPr>
             <a:spLocks noGrp="1"/>
           </p:cNvSpPr>
@@ -7112,7 +7096,7 @@
       </p:sp>
       <p:sp>
         <p:nvSpPr>
-          <p:cNvPr id="971000793" name="Slide Number Placeholder 6"/>
+          <p:cNvPr id="1011015711" name="Slide Number Placeholder 6"/>
           <p:cNvSpPr>
             <a:spLocks noGrp="1"/>
           </p:cNvSpPr>
@@ -7143,7 +7127,7 @@
       </p:sp>
       <p:sp>
         <p:nvSpPr>
-          <p:cNvPr id="166039225" name="TextBox 15"/>
+          <p:cNvPr id="624798212" name="TextBox 15"/>
           <p:cNvSpPr txBox="1"/>
           <p:nvPr/>
         </p:nvSpPr>
@@ -7247,7 +7231,7 @@
       </p:sp>
       <p:sp>
         <p:nvSpPr>
-          <p:cNvPr id="693514685" name="TextBox 16"/>
+          <p:cNvPr id="548019932" name="TextBox 16"/>
           <p:cNvSpPr txBox="1"/>
           <p:nvPr/>
         </p:nvSpPr>
@@ -7358,7 +7342,7 @@
 </file>
 
 <file path=ppt/slideLayouts/slideLayout24.xml><?xml version="1.0" encoding="utf-8"?>
-<p:sldLayout xmlns:a="http://schemas.openxmlformats.org/drawingml/2006/main" xmlns:r="http://schemas.openxmlformats.org/officeDocument/2006/relationships" xmlns:p="http://schemas.openxmlformats.org/presentationml/2006/main" showMasterPhAnim="0" preserve="1" userDrawn="1">
+<p:sldLayout xmlns:a="http://schemas.openxmlformats.org/drawingml/2006/main" xmlns:r="http://schemas.openxmlformats.org/officeDocument/2006/relationships" xmlns:p="http://schemas.openxmlformats.org/presentationml/2006/main" xmlns:m="http://schemas.openxmlformats.org/officeDocument/2006/math" xmlns:w="http://schemas.openxmlformats.org/wordprocessingml/2006/main" matchingName="" preserve="1" showMasterPhAnim="0" showMasterSp="1" userDrawn="1">
   <p:cSld name="Карточка имени">
     <p:spTree>
       <p:nvGrpSpPr>
@@ -7376,7 +7360,7 @@
       </p:grpSpPr>
       <p:pic>
         <p:nvPicPr>
-          <p:cNvPr id="1435523145" name="Picture 8" descr="HD-ShadowLong.png"/>
+          <p:cNvPr id="1773174758" name="Picture 8" descr="HD-ShadowLong.png"/>
           <p:cNvPicPr>
             <a:picLocks noChangeAspect="1"/>
           </p:cNvPicPr>
@@ -7398,7 +7382,7 @@
       </p:pic>
       <p:pic>
         <p:nvPicPr>
-          <p:cNvPr id="1694119683" name="Picture 9" descr="HD-ShadowShort.png"/>
+          <p:cNvPr id="686124449" name="Picture 9" descr="HD-ShadowShort.png"/>
           <p:cNvPicPr>
             <a:picLocks noChangeAspect="1"/>
           </p:cNvPicPr>
@@ -7420,7 +7404,7 @@
       </p:pic>
       <p:sp>
         <p:nvSpPr>
-          <p:cNvPr id="1861207402" name="Rectangle 10"/>
+          <p:cNvPr id="368355333" name="Rectangle 10"/>
           <p:cNvSpPr/>
           <p:nvPr/>
         </p:nvSpPr>
@@ -7461,7 +7445,7 @@
       </p:sp>
       <p:sp>
         <p:nvSpPr>
-          <p:cNvPr id="589285336" name="Rectangle 11"/>
+          <p:cNvPr id="1227671795" name="Rectangle 11"/>
           <p:cNvSpPr/>
           <p:nvPr/>
         </p:nvSpPr>
@@ -7499,7 +7483,7 @@
       </p:sp>
       <p:sp>
         <p:nvSpPr>
-          <p:cNvPr id="881122765" name="Title 1"/>
+          <p:cNvPr id="698036369" name="Title 1"/>
           <p:cNvSpPr>
             <a:spLocks noGrp="1"/>
           </p:cNvSpPr>
@@ -7534,7 +7518,7 @@
       </p:sp>
       <p:sp>
         <p:nvSpPr>
-          <p:cNvPr id="865621959" name="Text Placeholder 3"/>
+          <p:cNvPr id="758583449" name="Text Placeholder 3"/>
           <p:cNvSpPr>
             <a:spLocks noGrp="1"/>
           </p:cNvSpPr>
@@ -7602,7 +7586,7 @@
       </p:sp>
       <p:sp>
         <p:nvSpPr>
-          <p:cNvPr id="1781817160" name="Date Placeholder 4"/>
+          <p:cNvPr id="2139366044" name="Date Placeholder 4"/>
           <p:cNvSpPr>
             <a:spLocks noGrp="1"/>
           </p:cNvSpPr>
@@ -7628,7 +7612,7 @@
       </p:sp>
       <p:sp>
         <p:nvSpPr>
-          <p:cNvPr id="821830588" name="Footer Placeholder 5"/>
+          <p:cNvPr id="332882289" name="Footer Placeholder 5"/>
           <p:cNvSpPr>
             <a:spLocks noGrp="1"/>
           </p:cNvSpPr>
@@ -7650,7 +7634,7 @@
       </p:sp>
       <p:sp>
         <p:nvSpPr>
-          <p:cNvPr id="273537634" name="Slide Number Placeholder 6"/>
+          <p:cNvPr id="1859085699" name="Slide Number Placeholder 6"/>
           <p:cNvSpPr>
             <a:spLocks noGrp="1"/>
           </p:cNvSpPr>
@@ -7688,7 +7672,7 @@
 </file>
 
 <file path=ppt/slideLayouts/slideLayout25.xml><?xml version="1.0" encoding="utf-8"?>
-<p:sldLayout xmlns:a="http://schemas.openxmlformats.org/drawingml/2006/main" xmlns:r="http://schemas.openxmlformats.org/officeDocument/2006/relationships" xmlns:p="http://schemas.openxmlformats.org/presentationml/2006/main" showMasterPhAnim="0" preserve="1" userDrawn="1">
+<p:sldLayout xmlns:a="http://schemas.openxmlformats.org/drawingml/2006/main" xmlns:r="http://schemas.openxmlformats.org/officeDocument/2006/relationships" xmlns:p="http://schemas.openxmlformats.org/presentationml/2006/main" xmlns:m="http://schemas.openxmlformats.org/officeDocument/2006/math" xmlns:w="http://schemas.openxmlformats.org/wordprocessingml/2006/main" matchingName="" preserve="1" showMasterPhAnim="0" showMasterSp="1" userDrawn="1">
   <p:cSld name="Три колонки">
     <p:spTree>
       <p:nvGrpSpPr>
@@ -7706,7 +7690,7 @@
       </p:grpSpPr>
       <p:pic>
         <p:nvPicPr>
-          <p:cNvPr id="1012745737" name="Picture 12" descr="HD-ShadowLong.png"/>
+          <p:cNvPr id="624838700" name="Picture 12" descr="HD-ShadowLong.png"/>
           <p:cNvPicPr>
             <a:picLocks noChangeAspect="1"/>
           </p:cNvPicPr>
@@ -7728,7 +7712,7 @@
       </p:pic>
       <p:pic>
         <p:nvPicPr>
-          <p:cNvPr id="556837063" name="Picture 13" descr="HD-ShadowShort.png"/>
+          <p:cNvPr id="1577912091" name="Picture 13" descr="HD-ShadowShort.png"/>
           <p:cNvPicPr>
             <a:picLocks noChangeAspect="1"/>
           </p:cNvPicPr>
@@ -7750,7 +7734,7 @@
       </p:pic>
       <p:sp>
         <p:nvSpPr>
-          <p:cNvPr id="64992336" name="Rectangle 15"/>
+          <p:cNvPr id="1059867467" name="Rectangle 15"/>
           <p:cNvSpPr/>
           <p:nvPr/>
         </p:nvSpPr>
@@ -7791,7 +7775,7 @@
       </p:sp>
       <p:sp>
         <p:nvSpPr>
-          <p:cNvPr id="1395071012" name="Rectangle 16"/>
+          <p:cNvPr id="410320599" name="Rectangle 16"/>
           <p:cNvSpPr/>
           <p:nvPr/>
         </p:nvSpPr>
@@ -7829,7 +7813,7 @@
       </p:sp>
       <p:sp>
         <p:nvSpPr>
-          <p:cNvPr id="867232608" name="Title 1"/>
+          <p:cNvPr id="1591297991" name="Title 1"/>
           <p:cNvSpPr>
             <a:spLocks noGrp="1"/>
           </p:cNvSpPr>
@@ -7860,7 +7844,7 @@
       </p:sp>
       <p:sp>
         <p:nvSpPr>
-          <p:cNvPr id="1014623507" name="Text Placeholder 2"/>
+          <p:cNvPr id="806822458" name="Text Placeholder 2"/>
           <p:cNvSpPr>
             <a:spLocks noGrp="1"/>
           </p:cNvSpPr>
@@ -7934,7 +7918,7 @@
       </p:sp>
       <p:sp>
         <p:nvSpPr>
-          <p:cNvPr id="1739404180" name="Text Placeholder 3"/>
+          <p:cNvPr id="923030382" name="Text Placeholder 3"/>
           <p:cNvSpPr>
             <a:spLocks noGrp="1"/>
           </p:cNvSpPr>
@@ -8004,7 +7988,7 @@
       </p:sp>
       <p:sp>
         <p:nvSpPr>
-          <p:cNvPr id="555966503" name="Text Placeholder 4"/>
+          <p:cNvPr id="2026104931" name="Text Placeholder 4"/>
           <p:cNvSpPr>
             <a:spLocks noGrp="1"/>
           </p:cNvSpPr>
@@ -8078,7 +8062,7 @@
       </p:sp>
       <p:sp>
         <p:nvSpPr>
-          <p:cNvPr id="1963102833" name="Text Placeholder 3"/>
+          <p:cNvPr id="1614409231" name="Text Placeholder 3"/>
           <p:cNvSpPr>
             <a:spLocks noGrp="1"/>
           </p:cNvSpPr>
@@ -8148,7 +8132,7 @@
       </p:sp>
       <p:sp>
         <p:nvSpPr>
-          <p:cNvPr id="2002909073" name="Text Placeholder 4"/>
+          <p:cNvPr id="953106969" name="Text Placeholder 4"/>
           <p:cNvSpPr>
             <a:spLocks noGrp="1"/>
           </p:cNvSpPr>
@@ -8222,7 +8206,7 @@
       </p:sp>
       <p:sp>
         <p:nvSpPr>
-          <p:cNvPr id="54621266" name="Text Placeholder 3"/>
+          <p:cNvPr id="1464248054" name="Text Placeholder 3"/>
           <p:cNvSpPr>
             <a:spLocks noGrp="1"/>
           </p:cNvSpPr>
@@ -8292,7 +8276,7 @@
       </p:sp>
       <p:sp>
         <p:nvSpPr>
-          <p:cNvPr id="700466178" name="Date Placeholder 2"/>
+          <p:cNvPr id="1610213526" name="Date Placeholder 2"/>
           <p:cNvSpPr>
             <a:spLocks noGrp="1"/>
           </p:cNvSpPr>
@@ -8318,7 +8302,7 @@
       </p:sp>
       <p:sp>
         <p:nvSpPr>
-          <p:cNvPr id="1563316361" name="Footer Placeholder 3"/>
+          <p:cNvPr id="1633463657" name="Footer Placeholder 3"/>
           <p:cNvSpPr>
             <a:spLocks noGrp="1"/>
           </p:cNvSpPr>
@@ -8340,7 +8324,7 @@
       </p:sp>
       <p:sp>
         <p:nvSpPr>
-          <p:cNvPr id="339593160" name="Slide Number Placeholder 4"/>
+          <p:cNvPr id="1823797117" name="Slide Number Placeholder 4"/>
           <p:cNvSpPr>
             <a:spLocks noGrp="1"/>
           </p:cNvSpPr>
@@ -8373,7 +8357,7 @@
 </file>
 
 <file path=ppt/slideLayouts/slideLayout26.xml><?xml version="1.0" encoding="utf-8"?>
-<p:sldLayout xmlns:a="http://schemas.openxmlformats.org/drawingml/2006/main" xmlns:r="http://schemas.openxmlformats.org/officeDocument/2006/relationships" xmlns:p="http://schemas.openxmlformats.org/presentationml/2006/main" showMasterPhAnim="0" preserve="1" userDrawn="1">
+<p:sldLayout xmlns:a="http://schemas.openxmlformats.org/drawingml/2006/main" xmlns:r="http://schemas.openxmlformats.org/officeDocument/2006/relationships" xmlns:p="http://schemas.openxmlformats.org/presentationml/2006/main" xmlns:m="http://schemas.openxmlformats.org/officeDocument/2006/math" xmlns:w="http://schemas.openxmlformats.org/wordprocessingml/2006/main" matchingName="" preserve="1" showMasterPhAnim="0" showMasterSp="1" userDrawn="1">
   <p:cSld name="Столбец с тремя рисунками">
     <p:spTree>
       <p:nvGrpSpPr>
@@ -8391,7 +8375,7 @@
       </p:grpSpPr>
       <p:pic>
         <p:nvPicPr>
-          <p:cNvPr id="249626116" name="Picture 14" descr="HD-ShadowLong.png"/>
+          <p:cNvPr id="988713854" name="Picture 14" descr="HD-ShadowLong.png"/>
           <p:cNvPicPr>
             <a:picLocks noChangeAspect="1"/>
           </p:cNvPicPr>
@@ -8413,7 +8397,7 @@
       </p:pic>
       <p:pic>
         <p:nvPicPr>
-          <p:cNvPr id="1233124268" name="Picture 15" descr="HD-ShadowShort.png"/>
+          <p:cNvPr id="1322757646" name="Picture 15" descr="HD-ShadowShort.png"/>
           <p:cNvPicPr>
             <a:picLocks noChangeAspect="1"/>
           </p:cNvPicPr>
@@ -8435,7 +8419,7 @@
       </p:pic>
       <p:sp>
         <p:nvSpPr>
-          <p:cNvPr id="1135396588" name="Rectangle 16"/>
+          <p:cNvPr id="1051867910" name="Rectangle 16"/>
           <p:cNvSpPr/>
           <p:nvPr/>
         </p:nvSpPr>
@@ -8476,7 +8460,7 @@
       </p:sp>
       <p:sp>
         <p:nvSpPr>
-          <p:cNvPr id="1213840310" name="Rectangle 17"/>
+          <p:cNvPr id="1322443185" name="Rectangle 17"/>
           <p:cNvSpPr/>
           <p:nvPr/>
         </p:nvSpPr>
@@ -8514,7 +8498,7 @@
       </p:sp>
       <p:sp>
         <p:nvSpPr>
-          <p:cNvPr id="779735678" name="Title 1"/>
+          <p:cNvPr id="2022278962" name="Title 1"/>
           <p:cNvSpPr>
             <a:spLocks noGrp="1"/>
           </p:cNvSpPr>
@@ -8545,7 +8529,7 @@
       </p:sp>
       <p:sp>
         <p:nvSpPr>
-          <p:cNvPr id="1491318342" name="Text Placeholder 2"/>
+          <p:cNvPr id="1879365885" name="Text Placeholder 2"/>
           <p:cNvSpPr>
             <a:spLocks noGrp="1"/>
           </p:cNvSpPr>
@@ -8619,9 +8603,9 @@
       </p:sp>
       <p:sp>
         <p:nvSpPr>
-          <p:cNvPr id="289936537" name="Picture Placeholder 2"/>
-          <p:cNvSpPr>
-            <a:spLocks noGrp="1" noChangeAspect="1"/>
+          <p:cNvPr id="1900846752" name="Picture Placeholder 2"/>
+          <p:cNvSpPr>
+            <a:spLocks noChangeAspect="1" noGrp="1"/>
           </p:cNvSpPr>
           <p:nvPr>
             <p:ph type="pic" idx="15"/>
@@ -8701,7 +8685,7 @@
       </p:sp>
       <p:sp>
         <p:nvSpPr>
-          <p:cNvPr id="1068997560" name="Text Placeholder 3"/>
+          <p:cNvPr id="1415442122" name="Text Placeholder 3"/>
           <p:cNvSpPr>
             <a:spLocks noGrp="1"/>
           </p:cNvSpPr>
@@ -8771,7 +8755,7 @@
       </p:sp>
       <p:sp>
         <p:nvSpPr>
-          <p:cNvPr id="4587444" name="Text Placeholder 4"/>
+          <p:cNvPr id="1752463169" name="Text Placeholder 4"/>
           <p:cNvSpPr>
             <a:spLocks noGrp="1"/>
           </p:cNvSpPr>
@@ -8845,9 +8829,9 @@
       </p:sp>
       <p:sp>
         <p:nvSpPr>
-          <p:cNvPr id="1224020366" name="Picture Placeholder 2"/>
-          <p:cNvSpPr>
-            <a:spLocks noGrp="1" noChangeAspect="1"/>
+          <p:cNvPr id="367317149" name="Picture Placeholder 2"/>
+          <p:cNvSpPr>
+            <a:spLocks noChangeAspect="1" noGrp="1"/>
           </p:cNvSpPr>
           <p:nvPr>
             <p:ph type="pic" idx="21"/>
@@ -8927,7 +8911,7 @@
       </p:sp>
       <p:sp>
         <p:nvSpPr>
-          <p:cNvPr id="722994144" name="Text Placeholder 3"/>
+          <p:cNvPr id="415478634" name="Text Placeholder 3"/>
           <p:cNvSpPr>
             <a:spLocks noGrp="1"/>
           </p:cNvSpPr>
@@ -8997,7 +8981,7 @@
       </p:sp>
       <p:sp>
         <p:nvSpPr>
-          <p:cNvPr id="406511120" name="Text Placeholder 4"/>
+          <p:cNvPr id="414403366" name="Text Placeholder 4"/>
           <p:cNvSpPr>
             <a:spLocks noGrp="1"/>
           </p:cNvSpPr>
@@ -9071,9 +9055,9 @@
       </p:sp>
       <p:sp>
         <p:nvSpPr>
-          <p:cNvPr id="1892102309" name="Picture Placeholder 2"/>
-          <p:cNvSpPr>
-            <a:spLocks noGrp="1" noChangeAspect="1"/>
+          <p:cNvPr id="1343560419" name="Picture Placeholder 2"/>
+          <p:cNvSpPr>
+            <a:spLocks noChangeAspect="1" noGrp="1"/>
           </p:cNvSpPr>
           <p:nvPr>
             <p:ph type="pic" idx="22"/>
@@ -9153,7 +9137,7 @@
       </p:sp>
       <p:sp>
         <p:nvSpPr>
-          <p:cNvPr id="1757669270" name="Text Placeholder 3"/>
+          <p:cNvPr id="1949649326" name="Text Placeholder 3"/>
           <p:cNvSpPr>
             <a:spLocks noGrp="1"/>
           </p:cNvSpPr>
@@ -9223,7 +9207,7 @@
       </p:sp>
       <p:sp>
         <p:nvSpPr>
-          <p:cNvPr id="1757338300" name="Date Placeholder 2"/>
+          <p:cNvPr id="705491838" name="Date Placeholder 2"/>
           <p:cNvSpPr>
             <a:spLocks noGrp="1"/>
           </p:cNvSpPr>
@@ -9249,7 +9233,7 @@
       </p:sp>
       <p:sp>
         <p:nvSpPr>
-          <p:cNvPr id="1117077570" name="Footer Placeholder 3"/>
+          <p:cNvPr id="652896200" name="Footer Placeholder 3"/>
           <p:cNvSpPr>
             <a:spLocks noGrp="1"/>
           </p:cNvSpPr>
@@ -9271,7 +9255,7 @@
       </p:sp>
       <p:sp>
         <p:nvSpPr>
-          <p:cNvPr id="604005283" name="Slide Number Placeholder 4"/>
+          <p:cNvPr id="897762578" name="Slide Number Placeholder 4"/>
           <p:cNvSpPr>
             <a:spLocks noGrp="1"/>
           </p:cNvSpPr>
@@ -9304,7 +9288,7 @@
 </file>
 
 <file path=ppt/slideLayouts/slideLayout27.xml><?xml version="1.0" encoding="utf-8"?>
-<p:sldLayout xmlns:a="http://schemas.openxmlformats.org/drawingml/2006/main" xmlns:r="http://schemas.openxmlformats.org/officeDocument/2006/relationships" xmlns:p="http://schemas.openxmlformats.org/presentationml/2006/main" showMasterPhAnim="0" type="vertTx" preserve="1" userDrawn="1">
+<p:sldLayout xmlns:a="http://schemas.openxmlformats.org/drawingml/2006/main" xmlns:r="http://schemas.openxmlformats.org/officeDocument/2006/relationships" xmlns:p="http://schemas.openxmlformats.org/presentationml/2006/main" xmlns:m="http://schemas.openxmlformats.org/officeDocument/2006/math" xmlns:w="http://schemas.openxmlformats.org/wordprocessingml/2006/main" matchingName="" preserve="1" showMasterPhAnim="0" showMasterSp="1" type="vertTx" userDrawn="1">
   <p:cSld name="1_Заголовок и вертикальный текст">
     <p:spTree>
       <p:nvGrpSpPr>
@@ -9322,7 +9306,7 @@
       </p:grpSpPr>
       <p:pic>
         <p:nvPicPr>
-          <p:cNvPr id="1199191336" name="Picture 6" descr="HD-ShadowLong.png"/>
+          <p:cNvPr id="1544574888" name="Picture 6" descr="HD-ShadowLong.png"/>
           <p:cNvPicPr>
             <a:picLocks noChangeAspect="1"/>
           </p:cNvPicPr>
@@ -9344,7 +9328,7 @@
       </p:pic>
       <p:pic>
         <p:nvPicPr>
-          <p:cNvPr id="825691708" name="Picture 7" descr="HD-ShadowShort.png"/>
+          <p:cNvPr id="2100147449" name="Picture 7" descr="HD-ShadowShort.png"/>
           <p:cNvPicPr>
             <a:picLocks noChangeAspect="1"/>
           </p:cNvPicPr>
@@ -9366,7 +9350,7 @@
       </p:pic>
       <p:sp>
         <p:nvSpPr>
-          <p:cNvPr id="601113253" name="Rectangle 8"/>
+          <p:cNvPr id="910159027" name="Rectangle 8"/>
           <p:cNvSpPr/>
           <p:nvPr/>
         </p:nvSpPr>
@@ -9407,7 +9391,7 @@
       </p:sp>
       <p:sp>
         <p:nvSpPr>
-          <p:cNvPr id="1891179467" name="Rectangle 9"/>
+          <p:cNvPr id="2081334191" name="Rectangle 9"/>
           <p:cNvSpPr/>
           <p:nvPr/>
         </p:nvSpPr>
@@ -9445,7 +9429,7 @@
       </p:sp>
       <p:sp>
         <p:nvSpPr>
-          <p:cNvPr id="1455656708" name="Title 1"/>
+          <p:cNvPr id="1198977401" name="Title 1"/>
           <p:cNvSpPr>
             <a:spLocks noGrp="1"/>
           </p:cNvSpPr>
@@ -9475,7 +9459,7 @@
       </p:sp>
       <p:sp>
         <p:nvSpPr>
-          <p:cNvPr id="1015329539" name="Vertical Text Placeholder 2"/>
+          <p:cNvPr id="506083694" name="Vertical Text Placeholder 2"/>
           <p:cNvSpPr>
             <a:spLocks noGrp="1"/>
           </p:cNvSpPr>
@@ -9541,7 +9525,7 @@
       </p:sp>
       <p:sp>
         <p:nvSpPr>
-          <p:cNvPr id="1790581476" name="Date Placeholder 3"/>
+          <p:cNvPr id="1074924969" name="Date Placeholder 3"/>
           <p:cNvSpPr>
             <a:spLocks noGrp="1"/>
           </p:cNvSpPr>
@@ -9567,7 +9551,7 @@
       </p:sp>
       <p:sp>
         <p:nvSpPr>
-          <p:cNvPr id="272559971" name="Footer Placeholder 4"/>
+          <p:cNvPr id="1801723383" name="Footer Placeholder 4"/>
           <p:cNvSpPr>
             <a:spLocks noGrp="1"/>
           </p:cNvSpPr>
@@ -9589,7 +9573,7 @@
       </p:sp>
       <p:sp>
         <p:nvSpPr>
-          <p:cNvPr id="1013903517" name="Slide Number Placeholder 5"/>
+          <p:cNvPr id="2077791674" name="Slide Number Placeholder 5"/>
           <p:cNvSpPr>
             <a:spLocks noGrp="1"/>
           </p:cNvSpPr>
@@ -9622,7 +9606,7 @@
 </file>
 
 <file path=ppt/slideLayouts/slideLayout28.xml><?xml version="1.0" encoding="utf-8"?>
-<p:sldLayout xmlns:a="http://schemas.openxmlformats.org/drawingml/2006/main" xmlns:r="http://schemas.openxmlformats.org/officeDocument/2006/relationships" xmlns:p="http://schemas.openxmlformats.org/presentationml/2006/main" showMasterPhAnim="0" type="vertTitleAndTx" preserve="1" userDrawn="1">
+<p:sldLayout xmlns:a="http://schemas.openxmlformats.org/drawingml/2006/main" xmlns:r="http://schemas.openxmlformats.org/officeDocument/2006/relationships" xmlns:p="http://schemas.openxmlformats.org/presentationml/2006/main" xmlns:m="http://schemas.openxmlformats.org/officeDocument/2006/math" xmlns:w="http://schemas.openxmlformats.org/wordprocessingml/2006/main" matchingName="" preserve="1" showMasterPhAnim="0" showMasterSp="1" type="vertTitleAndTx" userDrawn="1">
   <p:cSld name="1_Вертикальный заголовок и текст">
     <p:spTree>
       <p:nvGrpSpPr>
@@ -9640,7 +9624,7 @@
       </p:grpSpPr>
       <p:sp>
         <p:nvSpPr>
-          <p:cNvPr id="2012456003" name="Rectangle 6"/>
+          <p:cNvPr id="1159300568" name="Rectangle 6"/>
           <p:cNvSpPr/>
           <p:nvPr/>
         </p:nvSpPr>
@@ -9681,7 +9665,7 @@
       </p:sp>
       <p:sp>
         <p:nvSpPr>
-          <p:cNvPr id="462219503" name="Rectangle 7"/>
+          <p:cNvPr id="547789535" name="Rectangle 7"/>
           <p:cNvSpPr/>
           <p:nvPr/>
         </p:nvSpPr>
@@ -9719,7 +9703,7 @@
       </p:sp>
       <p:sp>
         <p:nvSpPr>
-          <p:cNvPr id="1582890235" name="Vertical Title 1"/>
+          <p:cNvPr id="1302947606" name="Vertical Title 1"/>
           <p:cNvSpPr>
             <a:spLocks noGrp="1"/>
           </p:cNvSpPr>
@@ -9750,7 +9734,7 @@
       </p:sp>
       <p:sp>
         <p:nvSpPr>
-          <p:cNvPr id="513025347" name="Vertical Text Placeholder 2"/>
+          <p:cNvPr id="948391489" name="Vertical Text Placeholder 2"/>
           <p:cNvSpPr>
             <a:spLocks noGrp="1"/>
           </p:cNvSpPr>
@@ -9821,7 +9805,7 @@
       </p:sp>
       <p:sp>
         <p:nvSpPr>
-          <p:cNvPr id="283945582" name="Date Placeholder 3"/>
+          <p:cNvPr id="1252182027" name="Date Placeholder 3"/>
           <p:cNvSpPr>
             <a:spLocks noGrp="1"/>
           </p:cNvSpPr>
@@ -9852,7 +9836,7 @@
       </p:sp>
       <p:sp>
         <p:nvSpPr>
-          <p:cNvPr id="389457287" name="Footer Placeholder 4"/>
+          <p:cNvPr id="1862504388" name="Footer Placeholder 4"/>
           <p:cNvSpPr>
             <a:spLocks noGrp="1"/>
           </p:cNvSpPr>
@@ -9879,7 +9863,7 @@
       </p:sp>
       <p:sp>
         <p:nvSpPr>
-          <p:cNvPr id="1632147467" name="Slide Number Placeholder 5"/>
+          <p:cNvPr id="651196836" name="Slide Number Placeholder 5"/>
           <p:cNvSpPr>
             <a:spLocks noGrp="1"/>
           </p:cNvSpPr>
@@ -9921,7 +9905,7 @@
 </file>
 
 <file path=ppt/slideLayouts/slideLayout3.xml><?xml version="1.0" encoding="utf-8"?>
-<p:sldLayout xmlns:a="http://schemas.openxmlformats.org/drawingml/2006/main" xmlns:r="http://schemas.openxmlformats.org/officeDocument/2006/relationships" xmlns:p="http://schemas.openxmlformats.org/presentationml/2006/main" showMasterPhAnim="0" type="secHead" preserve="1" userDrawn="1">
+<p:sldLayout xmlns:a="http://schemas.openxmlformats.org/drawingml/2006/main" xmlns:r="http://schemas.openxmlformats.org/officeDocument/2006/relationships" xmlns:p="http://schemas.openxmlformats.org/presentationml/2006/main" xmlns:m="http://schemas.openxmlformats.org/officeDocument/2006/math" xmlns:w="http://schemas.openxmlformats.org/wordprocessingml/2006/main" matchingName="" preserve="1" showMasterPhAnim="0" showMasterSp="1" type="secHead" userDrawn="1">
   <p:cSld name="Заголовок раздела">
     <p:spTree>
       <p:nvGrpSpPr>
@@ -9939,7 +9923,7 @@
       </p:grpSpPr>
       <p:sp>
         <p:nvSpPr>
-          <p:cNvPr id="1807230937" name="Заголовок 1"/>
+          <p:cNvPr id="1655391200" name="Заголовок 1"/>
           <p:cNvSpPr>
             <a:spLocks noGrp="1"/>
           </p:cNvSpPr>
@@ -9974,7 +9958,7 @@
       </p:sp>
       <p:sp>
         <p:nvSpPr>
-          <p:cNvPr id="1460664230" name="Текст 2"/>
+          <p:cNvPr id="340718460" name="Текст 2"/>
           <p:cNvSpPr>
             <a:spLocks noGrp="1"/>
           </p:cNvSpPr>
@@ -10096,7 +10080,7 @@
       </p:sp>
       <p:sp>
         <p:nvSpPr>
-          <p:cNvPr id="758628714" name="Дата 3"/>
+          <p:cNvPr id="1725978146" name="Дата 3"/>
           <p:cNvSpPr>
             <a:spLocks noGrp="1"/>
           </p:cNvSpPr>
@@ -10122,7 +10106,7 @@
       </p:sp>
       <p:sp>
         <p:nvSpPr>
-          <p:cNvPr id="2073942706" name="Нижний колонтитул 4"/>
+          <p:cNvPr id="143859557" name="Нижний колонтитул 4"/>
           <p:cNvSpPr>
             <a:spLocks noGrp="1"/>
           </p:cNvSpPr>
@@ -10144,7 +10128,7 @@
       </p:sp>
       <p:sp>
         <p:nvSpPr>
-          <p:cNvPr id="447291429" name="Номер слайда 5"/>
+          <p:cNvPr id="1594024912" name="Номер слайда 5"/>
           <p:cNvSpPr>
             <a:spLocks noGrp="1"/>
           </p:cNvSpPr>
@@ -10177,7 +10161,7 @@
 </file>
 
 <file path=ppt/slideLayouts/slideLayout4.xml><?xml version="1.0" encoding="utf-8"?>
-<p:sldLayout xmlns:a="http://schemas.openxmlformats.org/drawingml/2006/main" xmlns:r="http://schemas.openxmlformats.org/officeDocument/2006/relationships" xmlns:p="http://schemas.openxmlformats.org/presentationml/2006/main" showMasterPhAnim="0" type="twoObj" preserve="1" userDrawn="1">
+<p:sldLayout xmlns:a="http://schemas.openxmlformats.org/drawingml/2006/main" xmlns:r="http://schemas.openxmlformats.org/officeDocument/2006/relationships" xmlns:p="http://schemas.openxmlformats.org/presentationml/2006/main" xmlns:m="http://schemas.openxmlformats.org/officeDocument/2006/math" xmlns:w="http://schemas.openxmlformats.org/wordprocessingml/2006/main" matchingName="" preserve="1" showMasterPhAnim="0" showMasterSp="1" type="twoObj" userDrawn="1">
   <p:cSld name="Два объекта">
     <p:spTree>
       <p:nvGrpSpPr>
@@ -10195,7 +10179,7 @@
       </p:grpSpPr>
       <p:sp>
         <p:nvSpPr>
-          <p:cNvPr id="1522593520" name="Заголовок 1"/>
+          <p:cNvPr id="1842263721" name="Заголовок 1"/>
           <p:cNvSpPr>
             <a:spLocks noGrp="1"/>
           </p:cNvSpPr>
@@ -10221,7 +10205,7 @@
       </p:sp>
       <p:sp>
         <p:nvSpPr>
-          <p:cNvPr id="788426679" name="Объект 2"/>
+          <p:cNvPr id="450845831" name="Объект 2"/>
           <p:cNvSpPr>
             <a:spLocks noGrp="1"/>
           </p:cNvSpPr>
@@ -10292,7 +10276,7 @@
       </p:sp>
       <p:sp>
         <p:nvSpPr>
-          <p:cNvPr id="630851584" name="Объект 3"/>
+          <p:cNvPr id="1243705506" name="Объект 3"/>
           <p:cNvSpPr>
             <a:spLocks noGrp="1"/>
           </p:cNvSpPr>
@@ -10363,7 +10347,7 @@
       </p:sp>
       <p:sp>
         <p:nvSpPr>
-          <p:cNvPr id="1588641861" name="Дата 4"/>
+          <p:cNvPr id="2140895398" name="Дата 4"/>
           <p:cNvSpPr>
             <a:spLocks noGrp="1"/>
           </p:cNvSpPr>
@@ -10389,7 +10373,7 @@
       </p:sp>
       <p:sp>
         <p:nvSpPr>
-          <p:cNvPr id="2142398954" name="Нижний колонтитул 5"/>
+          <p:cNvPr id="615072606" name="Нижний колонтитул 5"/>
           <p:cNvSpPr>
             <a:spLocks noGrp="1"/>
           </p:cNvSpPr>
@@ -10411,7 +10395,7 @@
       </p:sp>
       <p:sp>
         <p:nvSpPr>
-          <p:cNvPr id="511895506" name="Номер слайда 6"/>
+          <p:cNvPr id="1635201406" name="Номер слайда 6"/>
           <p:cNvSpPr>
             <a:spLocks noGrp="1"/>
           </p:cNvSpPr>
@@ -10444,7 +10428,7 @@
 </file>
 
 <file path=ppt/slideLayouts/slideLayout5.xml><?xml version="1.0" encoding="utf-8"?>
-<p:sldLayout xmlns:a="http://schemas.openxmlformats.org/drawingml/2006/main" xmlns:r="http://schemas.openxmlformats.org/officeDocument/2006/relationships" xmlns:p="http://schemas.openxmlformats.org/presentationml/2006/main" showMasterPhAnim="0" type="twoTxTwoObj" preserve="1" userDrawn="1">
+<p:sldLayout xmlns:a="http://schemas.openxmlformats.org/drawingml/2006/main" xmlns:r="http://schemas.openxmlformats.org/officeDocument/2006/relationships" xmlns:p="http://schemas.openxmlformats.org/presentationml/2006/main" xmlns:m="http://schemas.openxmlformats.org/officeDocument/2006/math" xmlns:w="http://schemas.openxmlformats.org/wordprocessingml/2006/main" matchingName="" preserve="1" showMasterPhAnim="0" showMasterSp="1" type="twoTxTwoObj" userDrawn="1">
   <p:cSld name="Сравнение">
     <p:spTree>
       <p:nvGrpSpPr>
@@ -10462,7 +10446,7 @@
       </p:grpSpPr>
       <p:sp>
         <p:nvSpPr>
-          <p:cNvPr id="910902298" name="Заголовок 1"/>
+          <p:cNvPr id="1384586859" name="Заголовок 1"/>
           <p:cNvSpPr>
             <a:spLocks noGrp="1"/>
           </p:cNvSpPr>
@@ -10493,7 +10477,7 @@
       </p:sp>
       <p:sp>
         <p:nvSpPr>
-          <p:cNvPr id="1299720604" name="Текст 2"/>
+          <p:cNvPr id="1825986296" name="Текст 2"/>
           <p:cNvSpPr>
             <a:spLocks noGrp="1"/>
           </p:cNvSpPr>
@@ -10561,7 +10545,7 @@
       </p:sp>
       <p:sp>
         <p:nvSpPr>
-          <p:cNvPr id="2133595330" name="Объект 3"/>
+          <p:cNvPr id="247917228" name="Объект 3"/>
           <p:cNvSpPr>
             <a:spLocks noGrp="1"/>
           </p:cNvSpPr>
@@ -10632,7 +10616,7 @@
       </p:sp>
       <p:sp>
         <p:nvSpPr>
-          <p:cNvPr id="1899566868" name="Текст 4"/>
+          <p:cNvPr id="690247977" name="Текст 4"/>
           <p:cNvSpPr>
             <a:spLocks noGrp="1"/>
           </p:cNvSpPr>
@@ -10700,7 +10684,7 @@
       </p:sp>
       <p:sp>
         <p:nvSpPr>
-          <p:cNvPr id="305117972" name="Объект 5"/>
+          <p:cNvPr id="304910115" name="Объект 5"/>
           <p:cNvSpPr>
             <a:spLocks noGrp="1"/>
           </p:cNvSpPr>
@@ -10771,7 +10755,7 @@
       </p:sp>
       <p:sp>
         <p:nvSpPr>
-          <p:cNvPr id="1714388893" name="Дата 6"/>
+          <p:cNvPr id="1577713900" name="Дата 6"/>
           <p:cNvSpPr>
             <a:spLocks noGrp="1"/>
           </p:cNvSpPr>
@@ -10797,7 +10781,7 @@
       </p:sp>
       <p:sp>
         <p:nvSpPr>
-          <p:cNvPr id="860970306" name="Нижний колонтитул 7"/>
+          <p:cNvPr id="690410290" name="Нижний колонтитул 7"/>
           <p:cNvSpPr>
             <a:spLocks noGrp="1"/>
           </p:cNvSpPr>
@@ -10819,7 +10803,7 @@
       </p:sp>
       <p:sp>
         <p:nvSpPr>
-          <p:cNvPr id="605035003" name="Номер слайда 8"/>
+          <p:cNvPr id="1207500057" name="Номер слайда 8"/>
           <p:cNvSpPr>
             <a:spLocks noGrp="1"/>
           </p:cNvSpPr>
@@ -10852,7 +10836,7 @@
 </file>
 
 <file path=ppt/slideLayouts/slideLayout6.xml><?xml version="1.0" encoding="utf-8"?>
-<p:sldLayout xmlns:a="http://schemas.openxmlformats.org/drawingml/2006/main" xmlns:r="http://schemas.openxmlformats.org/officeDocument/2006/relationships" xmlns:p="http://schemas.openxmlformats.org/presentationml/2006/main" showMasterPhAnim="0" type="titleOnly" preserve="1" userDrawn="1">
+<p:sldLayout xmlns:a="http://schemas.openxmlformats.org/drawingml/2006/main" xmlns:r="http://schemas.openxmlformats.org/officeDocument/2006/relationships" xmlns:p="http://schemas.openxmlformats.org/presentationml/2006/main" xmlns:m="http://schemas.openxmlformats.org/officeDocument/2006/math" xmlns:w="http://schemas.openxmlformats.org/wordprocessingml/2006/main" matchingName="" preserve="1" showMasterPhAnim="0" showMasterSp="1" type="titleOnly" userDrawn="1">
   <p:cSld name="Только заголовок">
     <p:spTree>
       <p:nvGrpSpPr>
@@ -10870,7 +10854,7 @@
       </p:grpSpPr>
       <p:sp>
         <p:nvSpPr>
-          <p:cNvPr id="1039837368" name="Заголовок 1"/>
+          <p:cNvPr id="1893352823" name="Заголовок 1"/>
           <p:cNvSpPr>
             <a:spLocks noGrp="1"/>
           </p:cNvSpPr>
@@ -10896,7 +10880,7 @@
       </p:sp>
       <p:sp>
         <p:nvSpPr>
-          <p:cNvPr id="728152656" name="Дата 2"/>
+          <p:cNvPr id="98528078" name="Дата 2"/>
           <p:cNvSpPr>
             <a:spLocks noGrp="1"/>
           </p:cNvSpPr>
@@ -10922,7 +10906,7 @@
       </p:sp>
       <p:sp>
         <p:nvSpPr>
-          <p:cNvPr id="1544063319" name="Нижний колонтитул 3"/>
+          <p:cNvPr id="1620750494" name="Нижний колонтитул 3"/>
           <p:cNvSpPr>
             <a:spLocks noGrp="1"/>
           </p:cNvSpPr>
@@ -10944,7 +10928,7 @@
       </p:sp>
       <p:sp>
         <p:nvSpPr>
-          <p:cNvPr id="128635796" name="Номер слайда 4"/>
+          <p:cNvPr id="2030950128" name="Номер слайда 4"/>
           <p:cNvSpPr>
             <a:spLocks noGrp="1"/>
           </p:cNvSpPr>
@@ -10977,7 +10961,7 @@
 </file>
 
 <file path=ppt/slideLayouts/slideLayout7.xml><?xml version="1.0" encoding="utf-8"?>
-<p:sldLayout xmlns:a="http://schemas.openxmlformats.org/drawingml/2006/main" xmlns:r="http://schemas.openxmlformats.org/officeDocument/2006/relationships" xmlns:p="http://schemas.openxmlformats.org/presentationml/2006/main" showMasterPhAnim="0" type="blank" preserve="1" userDrawn="1">
+<p:sldLayout xmlns:a="http://schemas.openxmlformats.org/drawingml/2006/main" xmlns:r="http://schemas.openxmlformats.org/officeDocument/2006/relationships" xmlns:p="http://schemas.openxmlformats.org/presentationml/2006/main" xmlns:m="http://schemas.openxmlformats.org/officeDocument/2006/math" xmlns:w="http://schemas.openxmlformats.org/wordprocessingml/2006/main" matchingName="" preserve="1" showMasterPhAnim="0" showMasterSp="1" type="blank" userDrawn="1">
   <p:cSld name="Пустой слайд">
     <p:spTree>
       <p:nvGrpSpPr>
@@ -10995,7 +10979,7 @@
       </p:grpSpPr>
       <p:sp>
         <p:nvSpPr>
-          <p:cNvPr id="1951262470" name="Дата 1"/>
+          <p:cNvPr id="95458861" name="Дата 1"/>
           <p:cNvSpPr>
             <a:spLocks noGrp="1"/>
           </p:cNvSpPr>
@@ -11021,7 +11005,7 @@
       </p:sp>
       <p:sp>
         <p:nvSpPr>
-          <p:cNvPr id="568008551" name="Нижний колонтитул 2"/>
+          <p:cNvPr id="1176474993" name="Нижний колонтитул 2"/>
           <p:cNvSpPr>
             <a:spLocks noGrp="1"/>
           </p:cNvSpPr>
@@ -11043,7 +11027,7 @@
       </p:sp>
       <p:sp>
         <p:nvSpPr>
-          <p:cNvPr id="1139819034" name="Номер слайда 3"/>
+          <p:cNvPr id="1155852769" name="Номер слайда 3"/>
           <p:cNvSpPr>
             <a:spLocks noGrp="1"/>
           </p:cNvSpPr>
@@ -11076,7 +11060,7 @@
 </file>
 
 <file path=ppt/slideLayouts/slideLayout8.xml><?xml version="1.0" encoding="utf-8"?>
-<p:sldLayout xmlns:a="http://schemas.openxmlformats.org/drawingml/2006/main" xmlns:r="http://schemas.openxmlformats.org/officeDocument/2006/relationships" xmlns:p="http://schemas.openxmlformats.org/presentationml/2006/main" showMasterPhAnim="0" type="objTx" preserve="1" userDrawn="1">
+<p:sldLayout xmlns:a="http://schemas.openxmlformats.org/drawingml/2006/main" xmlns:r="http://schemas.openxmlformats.org/officeDocument/2006/relationships" xmlns:p="http://schemas.openxmlformats.org/presentationml/2006/main" xmlns:m="http://schemas.openxmlformats.org/officeDocument/2006/math" xmlns:w="http://schemas.openxmlformats.org/wordprocessingml/2006/main" matchingName="" preserve="1" showMasterPhAnim="0" showMasterSp="1" type="objTx" userDrawn="1">
   <p:cSld name="Объект с подписью">
     <p:spTree>
       <p:nvGrpSpPr>
@@ -11094,7 +11078,7 @@
       </p:grpSpPr>
       <p:sp>
         <p:nvSpPr>
-          <p:cNvPr id="305027121" name="Заголовок 1"/>
+          <p:cNvPr id="354886020" name="Заголовок 1"/>
           <p:cNvSpPr>
             <a:spLocks noGrp="1"/>
           </p:cNvSpPr>
@@ -11129,7 +11113,7 @@
       </p:sp>
       <p:sp>
         <p:nvSpPr>
-          <p:cNvPr id="22950140" name="Объект 2"/>
+          <p:cNvPr id="1662917372" name="Объект 2"/>
           <p:cNvSpPr>
             <a:spLocks noGrp="1"/>
           </p:cNvSpPr>
@@ -11228,7 +11212,7 @@
       </p:sp>
       <p:sp>
         <p:nvSpPr>
-          <p:cNvPr id="849905224" name="Текст 3"/>
+          <p:cNvPr id="326045024" name="Текст 3"/>
           <p:cNvSpPr>
             <a:spLocks noGrp="1"/>
           </p:cNvSpPr>
@@ -11296,7 +11280,7 @@
       </p:sp>
       <p:sp>
         <p:nvSpPr>
-          <p:cNvPr id="1375702608" name="Дата 4"/>
+          <p:cNvPr id="1542677232" name="Дата 4"/>
           <p:cNvSpPr>
             <a:spLocks noGrp="1"/>
           </p:cNvSpPr>
@@ -11322,7 +11306,7 @@
       </p:sp>
       <p:sp>
         <p:nvSpPr>
-          <p:cNvPr id="504648355" name="Нижний колонтитул 5"/>
+          <p:cNvPr id="196364537" name="Нижний колонтитул 5"/>
           <p:cNvSpPr>
             <a:spLocks noGrp="1"/>
           </p:cNvSpPr>
@@ -11344,7 +11328,7 @@
       </p:sp>
       <p:sp>
         <p:nvSpPr>
-          <p:cNvPr id="47897952" name="Номер слайда 6"/>
+          <p:cNvPr id="787761785" name="Номер слайда 6"/>
           <p:cNvSpPr>
             <a:spLocks noGrp="1"/>
           </p:cNvSpPr>
@@ -11377,7 +11361,7 @@
 </file>
 
 <file path=ppt/slideLayouts/slideLayout9.xml><?xml version="1.0" encoding="utf-8"?>
-<p:sldLayout xmlns:a="http://schemas.openxmlformats.org/drawingml/2006/main" xmlns:r="http://schemas.openxmlformats.org/officeDocument/2006/relationships" xmlns:p="http://schemas.openxmlformats.org/presentationml/2006/main" showMasterPhAnim="0" type="picTx" preserve="1" userDrawn="1">
+<p:sldLayout xmlns:a="http://schemas.openxmlformats.org/drawingml/2006/main" xmlns:r="http://schemas.openxmlformats.org/officeDocument/2006/relationships" xmlns:p="http://schemas.openxmlformats.org/presentationml/2006/main" xmlns:m="http://schemas.openxmlformats.org/officeDocument/2006/math" xmlns:w="http://schemas.openxmlformats.org/wordprocessingml/2006/main" matchingName="" preserve="1" showMasterPhAnim="0" showMasterSp="1" type="picTx" userDrawn="1">
   <p:cSld name="Рисунок с подписью">
     <p:spTree>
       <p:nvGrpSpPr>
@@ -11395,7 +11379,7 @@
       </p:grpSpPr>
       <p:sp>
         <p:nvSpPr>
-          <p:cNvPr id="1828902388" name="Заголовок 1"/>
+          <p:cNvPr id="1389829099" name="Заголовок 1"/>
           <p:cNvSpPr>
             <a:spLocks noGrp="1"/>
           </p:cNvSpPr>
@@ -11430,7 +11414,7 @@
       </p:sp>
       <p:sp>
         <p:nvSpPr>
-          <p:cNvPr id="83345023" name="Рисунок 2"/>
+          <p:cNvPr id="1735988524" name="Рисунок 2"/>
           <p:cNvSpPr>
             <a:spLocks noGrp="1"/>
           </p:cNvSpPr>
@@ -11494,7 +11478,7 @@
       </p:sp>
       <p:sp>
         <p:nvSpPr>
-          <p:cNvPr id="1495637404" name="Текст 3"/>
+          <p:cNvPr id="44470967" name="Текст 3"/>
           <p:cNvSpPr>
             <a:spLocks noGrp="1"/>
           </p:cNvSpPr>
@@ -11562,7 +11546,7 @@
       </p:sp>
       <p:sp>
         <p:nvSpPr>
-          <p:cNvPr id="1181650567" name="Дата 4"/>
+          <p:cNvPr id="372991834" name="Дата 4"/>
           <p:cNvSpPr>
             <a:spLocks noGrp="1"/>
           </p:cNvSpPr>
@@ -11588,7 +11572,7 @@
       </p:sp>
       <p:sp>
         <p:nvSpPr>
-          <p:cNvPr id="1675183024" name="Нижний колонтитул 5"/>
+          <p:cNvPr id="1952995748" name="Нижний колонтитул 5"/>
           <p:cNvSpPr>
             <a:spLocks noGrp="1"/>
           </p:cNvSpPr>
@@ -11610,7 +11594,7 @@
       </p:sp>
       <p:sp>
         <p:nvSpPr>
-          <p:cNvPr id="1151890348" name="Номер слайда 6"/>
+          <p:cNvPr id="1675715441" name="Номер слайда 6"/>
           <p:cNvSpPr>
             <a:spLocks noGrp="1"/>
           </p:cNvSpPr>
@@ -11643,8 +11627,8 @@
 </file>
 
 <file path=ppt/slideMasters/slideMaster1.xml><?xml version="1.0" encoding="utf-8"?>
-<p:sldMaster xmlns:a="http://schemas.openxmlformats.org/drawingml/2006/main" xmlns:r="http://schemas.openxmlformats.org/officeDocument/2006/relationships" xmlns:p="http://schemas.openxmlformats.org/presentationml/2006/main">
-  <p:cSld>
+<p:sldMaster xmlns:a="http://schemas.openxmlformats.org/drawingml/2006/main" xmlns:r="http://schemas.openxmlformats.org/officeDocument/2006/relationships" xmlns:p="http://schemas.openxmlformats.org/presentationml/2006/main" xmlns:m="http://schemas.openxmlformats.org/officeDocument/2006/math" xmlns:w="http://schemas.openxmlformats.org/wordprocessingml/2006/main" preserve="0">
+  <p:cSld name="">
     <p:bg>
       <p:bgRef idx="1001">
         <a:schemeClr val="bg1"/>
@@ -11666,7 +11650,7 @@
       </p:grpSpPr>
       <p:sp>
         <p:nvSpPr>
-          <p:cNvPr id="1586961880" name="Заголовок 1"/>
+          <p:cNvPr id="975488105" name="Заголовок 1"/>
           <p:cNvSpPr>
             <a:spLocks noGrp="1"/>
           </p:cNvSpPr>
@@ -11702,7 +11686,7 @@
       </p:sp>
       <p:sp>
         <p:nvSpPr>
-          <p:cNvPr id="911351292" name="Текст 2"/>
+          <p:cNvPr id="276429946" name="Текст 2"/>
           <p:cNvSpPr>
             <a:spLocks noGrp="1"/>
           </p:cNvSpPr>
@@ -11778,7 +11762,7 @@
       </p:sp>
       <p:sp>
         <p:nvSpPr>
-          <p:cNvPr id="1568956287" name="Дата 3"/>
+          <p:cNvPr id="389210764" name="Дата 3"/>
           <p:cNvSpPr>
             <a:spLocks noGrp="1"/>
           </p:cNvSpPr>
@@ -11822,7 +11806,7 @@
       </p:sp>
       <p:sp>
         <p:nvSpPr>
-          <p:cNvPr id="899097166" name="Нижний колонтитул 4"/>
+          <p:cNvPr id="1176871797" name="Нижний колонтитул 4"/>
           <p:cNvSpPr>
             <a:spLocks noGrp="1"/>
           </p:cNvSpPr>
@@ -11862,7 +11846,7 @@
       </p:sp>
       <p:sp>
         <p:nvSpPr>
-          <p:cNvPr id="2045880962" name="Номер слайда 5"/>
+          <p:cNvPr id="369152763" name="Номер слайда 5"/>
           <p:cNvSpPr>
             <a:spLocks noGrp="1"/>
           </p:cNvSpPr>
@@ -11937,7 +11921,7 @@
     <p:sldLayoutId id="2147483675" r:id="rId27"/>
     <p:sldLayoutId id="2147483676" r:id="rId28"/>
   </p:sldLayoutIdLst>
-  <p:hf hdr="0" ftr="0" dt="0"/>
+  <p:hf dt="0" ftr="0" hdr="0" sldNum="1"/>
   <p:txStyles>
     <p:titleStyle>
       <a:lvl1pPr algn="l" defTabSz="914400" rtl="0">
@@ -12222,10 +12206,10 @@
 </file>
 
 <file path=ppt/slides/slide1.xml><?xml version="1.0" encoding="utf-8"?>
-<p:sld xmlns:a="http://schemas.openxmlformats.org/drawingml/2006/main" xmlns:r="http://schemas.openxmlformats.org/officeDocument/2006/relationships" xmlns:p="http://schemas.openxmlformats.org/presentationml/2006/main" showMasterPhAnim="0">
-  <p:cSld>
+<p:sld xmlns:a="http://schemas.openxmlformats.org/drawingml/2006/main" xmlns:r="http://schemas.openxmlformats.org/officeDocument/2006/relationships" xmlns:p="http://schemas.openxmlformats.org/presentationml/2006/main" xmlns:m="http://schemas.openxmlformats.org/officeDocument/2006/math" xmlns:w="http://schemas.openxmlformats.org/wordprocessingml/2006/main" xmlns:mc="http://schemas.openxmlformats.org/markup-compatibility/2006" showMasterPhAnim="0" showMasterSp="1" show="1">
+  <p:cSld name="">
     <p:bg>
-      <p:bgPr>
+      <p:bgPr shadeToTitle="0">
         <a:gradFill>
           <a:gsLst>
             <a:gs pos="0">
@@ -12255,7 +12239,6 @@
           </a:gsLst>
           <a:lin ang="5400000" scaled="1"/>
         </a:gradFill>
-        <a:effectLst/>
       </p:bgPr>
     </p:bg>
     <p:spTree>
@@ -12274,7 +12257,7 @@
       </p:grpSpPr>
       <p:sp>
         <p:nvSpPr>
-          <p:cNvPr id="536486598" name="Прямоугольник 3"/>
+          <p:cNvPr id="706679605" name="Прямоугольник 3"/>
           <p:cNvSpPr/>
           <p:nvPr/>
         </p:nvSpPr>
@@ -12324,7 +12307,7 @@
       </p:sp>
       <p:sp>
         <p:nvSpPr>
-          <p:cNvPr id="450836964" name="Прямоугольник 4"/>
+          <p:cNvPr id="1503356251" name="Прямоугольник 4"/>
           <p:cNvSpPr/>
           <p:nvPr/>
         </p:nvSpPr>
@@ -12374,7 +12357,7 @@
       </p:sp>
       <p:sp>
         <p:nvSpPr>
-          <p:cNvPr id="1552972019" name="Заголовок 1"/>
+          <p:cNvPr id="586770963" name="Заголовок 1"/>
           <p:cNvSpPr>
             <a:spLocks noGrp="1"/>
           </p:cNvSpPr>
@@ -12431,7 +12414,7 @@
       </p:sp>
       <p:sp>
         <p:nvSpPr>
-          <p:cNvPr id="2037473090" name="Подзаголовок 2"/>
+          <p:cNvPr id="410311750" name="Подзаголовок 2"/>
           <p:cNvSpPr>
             <a:spLocks noGrp="1"/>
           </p:cNvSpPr>
@@ -12510,7 +12493,7 @@
       </p:sp>
       <p:sp>
         <p:nvSpPr>
-          <p:cNvPr id="1660120845" name="Заголовок 1"/>
+          <p:cNvPr id="1413628805" name="Заголовок 1"/>
           <p:cNvSpPr>
             <a:spLocks noGrp="1"/>
           </p:cNvSpPr>
@@ -12572,7 +12555,7 @@
       </p:sp>
       <p:sp>
         <p:nvSpPr>
-          <p:cNvPr id="636386105" name="Заголовок 1"/>
+          <p:cNvPr id="1772690287" name="Заголовок 1"/>
           <p:cNvSpPr>
             <a:spLocks noGrp="1"/>
           </p:cNvSpPr>
@@ -12634,7 +12617,7 @@
       </p:sp>
       <p:sp>
         <p:nvSpPr>
-          <p:cNvPr id="877877864" name="Заголовок 1"/>
+          <p:cNvPr id="1801507079" name="Заголовок 1"/>
           <p:cNvSpPr>
             <a:spLocks noGrp="1"/>
           </p:cNvSpPr>
@@ -12684,6 +12667,7 @@
               </a:rPr>
               <a:t>Магистерская диссертация</a:t>
             </a:r>
+            <a:endParaRPr/>
           </a:p>
           <a:p>
             <a:pPr>
@@ -12700,12 +12684,13 @@
               </a:rPr>
               <a:t>Направление 01.04.02 Прикладная математика и информатика</a:t>
             </a:r>
-          </a:p>
-        </p:txBody>
-      </p:sp>
-      <p:sp>
-        <p:nvSpPr>
-          <p:cNvPr id="1274511686" name="Заголовок 1"/>
+            <a:endParaRPr/>
+          </a:p>
+        </p:txBody>
+      </p:sp>
+      <p:sp>
+        <p:nvSpPr>
+          <p:cNvPr id="1973563900" name="Заголовок 1"/>
           <p:cNvSpPr>
             <a:spLocks noGrp="1"/>
           </p:cNvSpPr>
@@ -12770,11 +12755,11 @@
   <p:clrMapOvr>
     <a:masterClrMapping/>
   </p:clrMapOvr>
-  <mc:AlternateContent xmlns:mc="http://schemas.openxmlformats.org/markup-compatibility/2006" xmlns:p159="http://schemas.microsoft.com/office/powerpoint/2015/09/main">
-    <mc:Choice Requires="p159">
-      <p:transition/>
+  <mc:AlternateContent xmlns:mc="http://schemas.openxmlformats.org/markup-compatibility/2006">
+    <mc:Choice xmlns:p159="http://schemas.microsoft.com/office/powerpoint/2015/09/main" xmlns:p14="http://schemas.microsoft.com/office/powerpoint/2010/main" Requires="p159">
+      <p:transition p14:dur="500" advClick="1"/>
     </mc:Choice>
-    <mc:Fallback xmlns:w="http://schemas.openxmlformats.org/wordprocessingml/2006/main" xmlns:m="http://schemas.openxmlformats.org/officeDocument/2006/math" xmlns="">
+    <mc:Fallback>
       <p:transition advClick="1"/>
     </mc:Fallback>
   </mc:AlternateContent>
@@ -12782,10 +12767,10 @@
 </file>
 
 <file path=ppt/slides/slide10.xml><?xml version="1.0" encoding="utf-8"?>
-<p:sld xmlns:a="http://schemas.openxmlformats.org/drawingml/2006/main" xmlns:r="http://schemas.openxmlformats.org/officeDocument/2006/relationships" xmlns:p="http://schemas.openxmlformats.org/presentationml/2006/main" showMasterPhAnim="0">
-  <p:cSld>
+<p:sld xmlns:a="http://schemas.openxmlformats.org/drawingml/2006/main" xmlns:r="http://schemas.openxmlformats.org/officeDocument/2006/relationships" xmlns:p="http://schemas.openxmlformats.org/presentationml/2006/main" xmlns:m="http://schemas.openxmlformats.org/officeDocument/2006/math" xmlns:w="http://schemas.openxmlformats.org/wordprocessingml/2006/main" xmlns:mc="http://schemas.openxmlformats.org/markup-compatibility/2006" showMasterPhAnim="0" showMasterSp="1" show="1">
+  <p:cSld name="">
     <p:bg>
-      <p:bgPr>
+      <p:bgPr shadeToTitle="0">
         <a:gradFill>
           <a:gsLst>
             <a:gs pos="0">
@@ -12815,7 +12800,6 @@
           </a:gsLst>
           <a:lin ang="13500000" scaled="1"/>
         </a:gradFill>
-        <a:effectLst/>
       </p:bgPr>
     </p:bg>
     <p:spTree>
@@ -12834,7 +12818,7 @@
       </p:grpSpPr>
       <p:sp>
         <p:nvSpPr>
-          <p:cNvPr id="902120669" name="Объект 2"/>
+          <p:cNvPr id="1656133036" name="Объект 2"/>
           <p:cNvSpPr>
             <a:spLocks noGrp="1"/>
           </p:cNvSpPr>
@@ -12943,7 +12927,7 @@
       </p:sp>
       <p:sp>
         <p:nvSpPr>
-          <p:cNvPr id="2032625062" name="Номер слайда 3"/>
+          <p:cNvPr id="1893249658" name="Номер слайда 3"/>
           <p:cNvSpPr>
             <a:spLocks noGrp="1"/>
           </p:cNvSpPr>
@@ -12984,7 +12968,7 @@
       </p:sp>
       <p:sp>
         <p:nvSpPr>
-          <p:cNvPr id="2147309450" name="Прямоугольник 6"/>
+          <p:cNvPr id="1183193310" name="Прямоугольник 6"/>
           <p:cNvSpPr/>
           <p:nvPr/>
         </p:nvSpPr>
@@ -13034,7 +13018,7 @@
       </p:sp>
       <p:sp>
         <p:nvSpPr>
-          <p:cNvPr id="26091720" name="Прямоугольник 7"/>
+          <p:cNvPr id="1341785969" name="Прямоугольник 7"/>
           <p:cNvSpPr/>
           <p:nvPr/>
         </p:nvSpPr>
@@ -13084,7 +13068,7 @@
       </p:sp>
       <p:sp>
         <p:nvSpPr>
-          <p:cNvPr id="1948347044" name="Заголовок 1"/>
+          <p:cNvPr id="413016831" name="Заголовок 1"/>
           <p:cNvSpPr>
             <a:spLocks noGrp="1"/>
           </p:cNvSpPr>
@@ -13136,7 +13120,7 @@
       </p:sp>
       <p:pic>
         <p:nvPicPr>
-          <p:cNvPr id="672231900" name="Рисунок 672231899"/>
+          <p:cNvPr id="1817295405" name="Рисунок 672231899"/>
           <p:cNvPicPr>
             <a:picLocks noChangeAspect="1"/>
           </p:cNvPicPr>
@@ -13167,11 +13151,11 @@
   <p:clrMapOvr>
     <a:masterClrMapping/>
   </p:clrMapOvr>
-  <mc:AlternateContent xmlns:mc="http://schemas.openxmlformats.org/markup-compatibility/2006" xmlns:p159="http://schemas.microsoft.com/office/powerpoint/2015/09/main">
-    <mc:Choice Requires="p159">
-      <p:transition/>
+  <mc:AlternateContent xmlns:mc="http://schemas.openxmlformats.org/markup-compatibility/2006">
+    <mc:Choice xmlns:p159="http://schemas.microsoft.com/office/powerpoint/2015/09/main" xmlns:p14="http://schemas.microsoft.com/office/powerpoint/2010/main" Requires="p159">
+      <p:transition p14:dur="500" advClick="1"/>
     </mc:Choice>
-    <mc:Fallback xmlns:w="http://schemas.openxmlformats.org/wordprocessingml/2006/main" xmlns:m="http://schemas.openxmlformats.org/officeDocument/2006/math" xmlns="">
+    <mc:Fallback>
       <p:transition advClick="1"/>
     </mc:Fallback>
   </mc:AlternateContent>
@@ -13179,10 +13163,10 @@
 </file>
 
 <file path=ppt/slides/slide11.xml><?xml version="1.0" encoding="utf-8"?>
-<p:sld xmlns:a="http://schemas.openxmlformats.org/drawingml/2006/main" xmlns:r="http://schemas.openxmlformats.org/officeDocument/2006/relationships" xmlns:p="http://schemas.openxmlformats.org/presentationml/2006/main" showMasterPhAnim="0">
-  <p:cSld>
+<p:sld xmlns:a="http://schemas.openxmlformats.org/drawingml/2006/main" xmlns:r="http://schemas.openxmlformats.org/officeDocument/2006/relationships" xmlns:p="http://schemas.openxmlformats.org/presentationml/2006/main" xmlns:m="http://schemas.openxmlformats.org/officeDocument/2006/math" xmlns:w="http://schemas.openxmlformats.org/wordprocessingml/2006/main" xmlns:mc="http://schemas.openxmlformats.org/markup-compatibility/2006" showMasterPhAnim="0" showMasterSp="1" show="1">
+  <p:cSld name="">
     <p:bg>
-      <p:bgPr>
+      <p:bgPr shadeToTitle="0">
         <a:gradFill>
           <a:gsLst>
             <a:gs pos="0">
@@ -13212,7 +13196,6 @@
           </a:gsLst>
           <a:lin ang="13500000" scaled="1"/>
         </a:gradFill>
-        <a:effectLst/>
       </p:bgPr>
     </p:bg>
     <p:spTree>
@@ -13231,7 +13214,7 @@
       </p:grpSpPr>
       <p:sp>
         <p:nvSpPr>
-          <p:cNvPr id="1050648561" name="Объект 2"/>
+          <p:cNvPr id="1049731716" name="Объект 2"/>
           <p:cNvSpPr>
             <a:spLocks noGrp="1"/>
           </p:cNvSpPr>
@@ -13318,7 +13301,7 @@
       </p:sp>
       <p:sp>
         <p:nvSpPr>
-          <p:cNvPr id="1835783607" name="Номер слайда 3"/>
+          <p:cNvPr id="2054730352" name="Номер слайда 3"/>
           <p:cNvSpPr>
             <a:spLocks noGrp="1"/>
           </p:cNvSpPr>
@@ -13359,7 +13342,7 @@
       </p:sp>
       <p:sp>
         <p:nvSpPr>
-          <p:cNvPr id="2057672954" name="Прямоугольник 5"/>
+          <p:cNvPr id="1855561134" name="Прямоугольник 5"/>
           <p:cNvSpPr/>
           <p:nvPr/>
         </p:nvSpPr>
@@ -13409,7 +13392,7 @@
       </p:sp>
       <p:sp>
         <p:nvSpPr>
-          <p:cNvPr id="1535929783" name="Прямоугольник 6"/>
+          <p:cNvPr id="1118840909" name="Прямоугольник 6"/>
           <p:cNvSpPr/>
           <p:nvPr/>
         </p:nvSpPr>
@@ -13459,7 +13442,7 @@
       </p:sp>
       <p:sp>
         <p:nvSpPr>
-          <p:cNvPr id="379635589" name="Заголовок 1"/>
+          <p:cNvPr id="213920099" name="Заголовок 1"/>
           <p:cNvSpPr>
             <a:spLocks noGrp="1"/>
           </p:cNvSpPr>
@@ -13496,7 +13479,7 @@
       </p:sp>
       <p:pic>
         <p:nvPicPr>
-          <p:cNvPr id="1840929737" name="Рисунок 1840929736"/>
+          <p:cNvPr id="1779796541" name="Рисунок 1840929736"/>
           <p:cNvPicPr>
             <a:picLocks noChangeAspect="1"/>
           </p:cNvPicPr>
@@ -13527,11 +13510,11 @@
   <p:clrMapOvr>
     <a:masterClrMapping/>
   </p:clrMapOvr>
-  <mc:AlternateContent xmlns:mc="http://schemas.openxmlformats.org/markup-compatibility/2006" xmlns:p159="http://schemas.microsoft.com/office/powerpoint/2015/09/main">
-    <mc:Choice Requires="p159">
-      <p:transition/>
+  <mc:AlternateContent xmlns:mc="http://schemas.openxmlformats.org/markup-compatibility/2006">
+    <mc:Choice xmlns:p159="http://schemas.microsoft.com/office/powerpoint/2015/09/main" xmlns:p14="http://schemas.microsoft.com/office/powerpoint/2010/main" Requires="p159">
+      <p:transition p14:dur="500" advClick="1"/>
     </mc:Choice>
-    <mc:Fallback xmlns:w="http://schemas.openxmlformats.org/wordprocessingml/2006/main" xmlns:m="http://schemas.openxmlformats.org/officeDocument/2006/math" xmlns="">
+    <mc:Fallback>
       <p:transition advClick="1"/>
     </mc:Fallback>
   </mc:AlternateContent>
@@ -13539,10 +13522,10 @@
 </file>
 
 <file path=ppt/slides/slide12.xml><?xml version="1.0" encoding="utf-8"?>
-<p:sld xmlns:a="http://schemas.openxmlformats.org/drawingml/2006/main" xmlns:r="http://schemas.openxmlformats.org/officeDocument/2006/relationships" xmlns:p="http://schemas.openxmlformats.org/presentationml/2006/main" showMasterPhAnim="0">
-  <p:cSld>
+<p:sld xmlns:a="http://schemas.openxmlformats.org/drawingml/2006/main" xmlns:r="http://schemas.openxmlformats.org/officeDocument/2006/relationships" xmlns:p="http://schemas.openxmlformats.org/presentationml/2006/main" xmlns:m="http://schemas.openxmlformats.org/officeDocument/2006/math" xmlns:w="http://schemas.openxmlformats.org/wordprocessingml/2006/main" xmlns:mc="http://schemas.openxmlformats.org/markup-compatibility/2006" showMasterPhAnim="0" showMasterSp="1" show="1">
+  <p:cSld name="">
     <p:bg>
-      <p:bgPr>
+      <p:bgPr shadeToTitle="0">
         <a:gradFill>
           <a:gsLst>
             <a:gs pos="0">
@@ -13572,7 +13555,6 @@
           </a:gsLst>
           <a:lin ang="13500000" scaled="1"/>
         </a:gradFill>
-        <a:effectLst/>
       </p:bgPr>
     </p:bg>
     <p:spTree>
@@ -13591,7 +13573,7 @@
       </p:grpSpPr>
       <p:sp>
         <p:nvSpPr>
-          <p:cNvPr id="1575503186" name="Объект 2"/>
+          <p:cNvPr id="1910962094" name="Объект 2"/>
           <p:cNvSpPr>
             <a:spLocks noGrp="1"/>
           </p:cNvSpPr>
@@ -13640,6 +13622,7 @@
               <a:rPr lang="ru-RU"/>
               <a:t>);</a:t>
             </a:r>
+            <a:endParaRPr/>
           </a:p>
           <a:p>
             <a:pPr>
@@ -13662,7 +13645,7 @@
       </p:sp>
       <p:sp>
         <p:nvSpPr>
-          <p:cNvPr id="362099798" name="Номер слайда 3"/>
+          <p:cNvPr id="170147750" name="Номер слайда 3"/>
           <p:cNvSpPr>
             <a:spLocks noGrp="1"/>
           </p:cNvSpPr>
@@ -13703,7 +13686,7 @@
       </p:sp>
       <p:sp>
         <p:nvSpPr>
-          <p:cNvPr id="814142450" name="Прямоугольник 5"/>
+          <p:cNvPr id="1478971504" name="Прямоугольник 5"/>
           <p:cNvSpPr/>
           <p:nvPr/>
         </p:nvSpPr>
@@ -13753,7 +13736,7 @@
       </p:sp>
       <p:sp>
         <p:nvSpPr>
-          <p:cNvPr id="1118277487" name="Прямоугольник 6"/>
+          <p:cNvPr id="2108294374" name="Прямоугольник 6"/>
           <p:cNvSpPr/>
           <p:nvPr/>
         </p:nvSpPr>
@@ -13803,7 +13786,7 @@
       </p:sp>
       <p:sp>
         <p:nvSpPr>
-          <p:cNvPr id="715905666" name="Заголовок 1"/>
+          <p:cNvPr id="103744924" name="Заголовок 1"/>
           <p:cNvSpPr>
             <a:spLocks noGrp="1"/>
           </p:cNvSpPr>
@@ -13860,7 +13843,7 @@
       </p:sp>
       <p:pic>
         <p:nvPicPr>
-          <p:cNvPr id="1014880010" name="Рисунок 1014880009"/>
+          <p:cNvPr id="1733705025" name="Рисунок 1014880009"/>
           <p:cNvPicPr>
             <a:picLocks noChangeAspect="1"/>
           </p:cNvPicPr>
@@ -13891,11 +13874,11 @@
   <p:clrMapOvr>
     <a:masterClrMapping/>
   </p:clrMapOvr>
-  <mc:AlternateContent xmlns:mc="http://schemas.openxmlformats.org/markup-compatibility/2006" xmlns:p159="http://schemas.microsoft.com/office/powerpoint/2015/09/main">
-    <mc:Choice Requires="p159">
-      <p:transition/>
+  <mc:AlternateContent xmlns:mc="http://schemas.openxmlformats.org/markup-compatibility/2006">
+    <mc:Choice xmlns:p159="http://schemas.microsoft.com/office/powerpoint/2015/09/main" xmlns:p14="http://schemas.microsoft.com/office/powerpoint/2010/main" Requires="p159">
+      <p:transition p14:dur="500" advClick="1"/>
     </mc:Choice>
-    <mc:Fallback xmlns:w="http://schemas.openxmlformats.org/wordprocessingml/2006/main" xmlns:m="http://schemas.openxmlformats.org/officeDocument/2006/math" xmlns="">
+    <mc:Fallback>
       <p:transition advClick="1"/>
     </mc:Fallback>
   </mc:AlternateContent>
@@ -13903,10 +13886,10 @@
 </file>
 
 <file path=ppt/slides/slide13.xml><?xml version="1.0" encoding="utf-8"?>
-<p:sld xmlns:a="http://schemas.openxmlformats.org/drawingml/2006/main" xmlns:r="http://schemas.openxmlformats.org/officeDocument/2006/relationships" xmlns:p="http://schemas.openxmlformats.org/presentationml/2006/main" showMasterPhAnim="0">
-  <p:cSld>
+<p:sld xmlns:a="http://schemas.openxmlformats.org/drawingml/2006/main" xmlns:r="http://schemas.openxmlformats.org/officeDocument/2006/relationships" xmlns:p="http://schemas.openxmlformats.org/presentationml/2006/main" xmlns:m="http://schemas.openxmlformats.org/officeDocument/2006/math" xmlns:w="http://schemas.openxmlformats.org/wordprocessingml/2006/main" xmlns:mc="http://schemas.openxmlformats.org/markup-compatibility/2006" showMasterPhAnim="0" showMasterSp="1" show="1">
+  <p:cSld name="">
     <p:bg>
-      <p:bgPr>
+      <p:bgPr shadeToTitle="0">
         <a:gradFill>
           <a:gsLst>
             <a:gs pos="0">
@@ -13936,7 +13919,6 @@
           </a:gsLst>
           <a:lin ang="13500000" scaled="1"/>
         </a:gradFill>
-        <a:effectLst/>
       </p:bgPr>
     </p:bg>
     <p:spTree>
@@ -13955,7 +13937,7 @@
       </p:grpSpPr>
       <p:sp>
         <p:nvSpPr>
-          <p:cNvPr id="39017167" name="Объект 2"/>
+          <p:cNvPr id="1884273868" name="Объект 2"/>
           <p:cNvSpPr>
             <a:spLocks noGrp="1"/>
           </p:cNvSpPr>
@@ -14026,7 +14008,7 @@
       </p:sp>
       <p:sp>
         <p:nvSpPr>
-          <p:cNvPr id="1943454834" name="Номер слайда 3"/>
+          <p:cNvPr id="493164197" name="Номер слайда 3"/>
           <p:cNvSpPr>
             <a:spLocks noGrp="1"/>
           </p:cNvSpPr>
@@ -14067,7 +14049,7 @@
       </p:sp>
       <p:sp>
         <p:nvSpPr>
-          <p:cNvPr id="1960363529" name="Прямоугольник 5"/>
+          <p:cNvPr id="615054843" name="Прямоугольник 5"/>
           <p:cNvSpPr/>
           <p:nvPr/>
         </p:nvSpPr>
@@ -14117,7 +14099,7 @@
       </p:sp>
       <p:sp>
         <p:nvSpPr>
-          <p:cNvPr id="2089817248" name="Прямоугольник 6"/>
+          <p:cNvPr id="1254107717" name="Прямоугольник 6"/>
           <p:cNvSpPr/>
           <p:nvPr/>
         </p:nvSpPr>
@@ -14167,7 +14149,7 @@
       </p:sp>
       <p:sp>
         <p:nvSpPr>
-          <p:cNvPr id="1701635477" name="Заголовок 1"/>
+          <p:cNvPr id="939332353" name="Заголовок 1"/>
           <p:cNvSpPr>
             <a:spLocks noGrp="1"/>
           </p:cNvSpPr>
@@ -14208,7 +14190,7 @@
       </p:sp>
       <p:pic>
         <p:nvPicPr>
-          <p:cNvPr id="1786174538" name="Рисунок 1786174537"/>
+          <p:cNvPr id="2071236123" name="Рисунок 1786174537"/>
           <p:cNvPicPr>
             <a:picLocks noChangeAspect="1"/>
           </p:cNvPicPr>
@@ -14239,11 +14221,11 @@
   <p:clrMapOvr>
     <a:masterClrMapping/>
   </p:clrMapOvr>
-  <mc:AlternateContent xmlns:mc="http://schemas.openxmlformats.org/markup-compatibility/2006" xmlns:p159="http://schemas.microsoft.com/office/powerpoint/2015/09/main">
-    <mc:Choice Requires="p159">
-      <p:transition/>
+  <mc:AlternateContent xmlns:mc="http://schemas.openxmlformats.org/markup-compatibility/2006">
+    <mc:Choice xmlns:p159="http://schemas.microsoft.com/office/powerpoint/2015/09/main" xmlns:p14="http://schemas.microsoft.com/office/powerpoint/2010/main" Requires="p159">
+      <p:transition p14:dur="500" advClick="1"/>
     </mc:Choice>
-    <mc:Fallback xmlns:w="http://schemas.openxmlformats.org/wordprocessingml/2006/main" xmlns:m="http://schemas.openxmlformats.org/officeDocument/2006/math" xmlns="">
+    <mc:Fallback>
       <p:transition advClick="1"/>
     </mc:Fallback>
   </mc:AlternateContent>
@@ -14251,10 +14233,10 @@
 </file>
 
 <file path=ppt/slides/slide14.xml><?xml version="1.0" encoding="utf-8"?>
-<p:sld xmlns:a="http://schemas.openxmlformats.org/drawingml/2006/main" xmlns:r="http://schemas.openxmlformats.org/officeDocument/2006/relationships" xmlns:p="http://schemas.openxmlformats.org/presentationml/2006/main" showMasterPhAnim="0">
-  <p:cSld>
+<p:sld xmlns:a="http://schemas.openxmlformats.org/drawingml/2006/main" xmlns:r="http://schemas.openxmlformats.org/officeDocument/2006/relationships" xmlns:p="http://schemas.openxmlformats.org/presentationml/2006/main" xmlns:m="http://schemas.openxmlformats.org/officeDocument/2006/math" xmlns:w="http://schemas.openxmlformats.org/wordprocessingml/2006/main" xmlns:mc="http://schemas.openxmlformats.org/markup-compatibility/2006" showMasterPhAnim="0" showMasterSp="1" show="1">
+  <p:cSld name="">
     <p:bg>
-      <p:bgPr>
+      <p:bgPr shadeToTitle="0">
         <a:gradFill>
           <a:gsLst>
             <a:gs pos="0">
@@ -14284,7 +14266,6 @@
           </a:gsLst>
           <a:lin ang="13500000" scaled="1"/>
         </a:gradFill>
-        <a:effectLst/>
       </p:bgPr>
     </p:bg>
     <p:spTree>
@@ -14303,7 +14284,7 @@
       </p:grpSpPr>
       <p:sp>
         <p:nvSpPr>
-          <p:cNvPr id="837354651" name="Объект 2"/>
+          <p:cNvPr id="1145003361" name="Объект 2"/>
           <p:cNvSpPr>
             <a:spLocks noGrp="1"/>
           </p:cNvSpPr>
@@ -14400,7 +14381,7 @@
       </p:sp>
       <p:sp>
         <p:nvSpPr>
-          <p:cNvPr id="564720886" name="Номер слайда 3"/>
+          <p:cNvPr id="1653138967" name="Номер слайда 3"/>
           <p:cNvSpPr>
             <a:spLocks noGrp="1"/>
           </p:cNvSpPr>
@@ -14441,7 +14422,7 @@
       </p:sp>
       <p:sp>
         <p:nvSpPr>
-          <p:cNvPr id="581631391" name="Прямоугольник 4"/>
+          <p:cNvPr id="1960239869" name="Прямоугольник 4"/>
           <p:cNvSpPr/>
           <p:nvPr/>
         </p:nvSpPr>
@@ -14491,7 +14472,7 @@
       </p:sp>
       <p:sp>
         <p:nvSpPr>
-          <p:cNvPr id="823140641" name="Прямоугольник 5"/>
+          <p:cNvPr id="1594397997" name="Прямоугольник 5"/>
           <p:cNvSpPr/>
           <p:nvPr/>
         </p:nvSpPr>
@@ -14541,7 +14522,7 @@
       </p:sp>
       <p:sp>
         <p:nvSpPr>
-          <p:cNvPr id="90351176" name="Заголовок 1"/>
+          <p:cNvPr id="2083341342" name="Заголовок 1"/>
           <p:cNvSpPr>
             <a:spLocks noGrp="1"/>
           </p:cNvSpPr>
@@ -14580,7 +14561,7 @@
       </p:sp>
       <p:pic>
         <p:nvPicPr>
-          <p:cNvPr id="1113674391" name="Рисунок 1113674390"/>
+          <p:cNvPr id="1350578737" name=""/>
           <p:cNvPicPr>
             <a:picLocks noChangeAspect="1"/>
           </p:cNvPicPr>
@@ -14591,9 +14572,9 @@
           <a:stretch/>
         </p:blipFill>
         <p:spPr bwMode="auto">
-          <a:xfrm>
-            <a:off x="4952470" y="1438274"/>
-            <a:ext cx="7184591" cy="4905374"/>
+          <a:xfrm flipH="0" flipV="0">
+            <a:off x="5069018" y="1476374"/>
+            <a:ext cx="6800252" cy="4324349"/>
           </a:xfrm>
           <a:prstGeom prst="rect">
             <a:avLst/>
@@ -14605,11 +14586,11 @@
   <p:clrMapOvr>
     <a:masterClrMapping/>
   </p:clrMapOvr>
-  <mc:AlternateContent xmlns:mc="http://schemas.openxmlformats.org/markup-compatibility/2006" xmlns:p159="http://schemas.microsoft.com/office/powerpoint/2015/09/main">
-    <mc:Choice Requires="p159">
-      <p:transition/>
+  <mc:AlternateContent xmlns:mc="http://schemas.openxmlformats.org/markup-compatibility/2006">
+    <mc:Choice xmlns:p159="http://schemas.microsoft.com/office/powerpoint/2015/09/main" xmlns:p14="http://schemas.microsoft.com/office/powerpoint/2010/main" Requires="p159">
+      <p:transition p14:dur="500" advClick="1"/>
     </mc:Choice>
-    <mc:Fallback xmlns:w="http://schemas.openxmlformats.org/wordprocessingml/2006/main" xmlns:m="http://schemas.openxmlformats.org/officeDocument/2006/math" xmlns="">
+    <mc:Fallback>
       <p:transition advClick="1"/>
     </mc:Fallback>
   </mc:AlternateContent>
@@ -14617,10 +14598,10 @@
 </file>
 
 <file path=ppt/slides/slide15.xml><?xml version="1.0" encoding="utf-8"?>
-<p:sld xmlns:a="http://schemas.openxmlformats.org/drawingml/2006/main" xmlns:r="http://schemas.openxmlformats.org/officeDocument/2006/relationships" xmlns:p="http://schemas.openxmlformats.org/presentationml/2006/main" showMasterPhAnim="0">
-  <p:cSld>
+<p:sld xmlns:a="http://schemas.openxmlformats.org/drawingml/2006/main" xmlns:r="http://schemas.openxmlformats.org/officeDocument/2006/relationships" xmlns:p="http://schemas.openxmlformats.org/presentationml/2006/main" xmlns:m="http://schemas.openxmlformats.org/officeDocument/2006/math" xmlns:w="http://schemas.openxmlformats.org/wordprocessingml/2006/main" xmlns:mc="http://schemas.openxmlformats.org/markup-compatibility/2006" showMasterPhAnim="0" showMasterSp="1" show="1">
+  <p:cSld name="">
     <p:bg>
-      <p:bgPr>
+      <p:bgPr shadeToTitle="0">
         <a:gradFill>
           <a:gsLst>
             <a:gs pos="0">
@@ -14650,7 +14631,6 @@
           </a:gsLst>
           <a:lin ang="13500000" scaled="1"/>
         </a:gradFill>
-        <a:effectLst/>
       </p:bgPr>
     </p:bg>
     <p:spTree>
@@ -14669,7 +14649,7 @@
       </p:grpSpPr>
       <p:sp>
         <p:nvSpPr>
-          <p:cNvPr id="983034835" name="Объект 2"/>
+          <p:cNvPr id="2038070608" name="Объект 2"/>
           <p:cNvSpPr>
             <a:spLocks noGrp="1"/>
           </p:cNvSpPr>
@@ -14818,7 +14798,7 @@
       </p:sp>
       <p:sp>
         <p:nvSpPr>
-          <p:cNvPr id="181066449" name="Номер слайда 3"/>
+          <p:cNvPr id="1294766373" name="Номер слайда 3"/>
           <p:cNvSpPr>
             <a:spLocks noGrp="1"/>
           </p:cNvSpPr>
@@ -14859,7 +14839,7 @@
       </p:sp>
       <p:sp>
         <p:nvSpPr>
-          <p:cNvPr id="1444704025" name="Прямоугольник 4"/>
+          <p:cNvPr id="1345183864" name="Прямоугольник 4"/>
           <p:cNvSpPr/>
           <p:nvPr/>
         </p:nvSpPr>
@@ -14909,7 +14889,7 @@
       </p:sp>
       <p:sp>
         <p:nvSpPr>
-          <p:cNvPr id="570909226" name="Прямоугольник 5"/>
+          <p:cNvPr id="20888728" name="Прямоугольник 5"/>
           <p:cNvSpPr/>
           <p:nvPr/>
         </p:nvSpPr>
@@ -14959,7 +14939,7 @@
       </p:sp>
       <p:sp>
         <p:nvSpPr>
-          <p:cNvPr id="2126831691" name="Заголовок 1"/>
+          <p:cNvPr id="657099282" name="Заголовок 1"/>
           <p:cNvSpPr>
             <a:spLocks noGrp="1"/>
           </p:cNvSpPr>
@@ -15001,11 +14981,11 @@
   <p:clrMapOvr>
     <a:masterClrMapping/>
   </p:clrMapOvr>
-  <mc:AlternateContent xmlns:mc="http://schemas.openxmlformats.org/markup-compatibility/2006" xmlns:p159="http://schemas.microsoft.com/office/powerpoint/2015/09/main">
-    <mc:Choice Requires="p159">
-      <p:transition/>
+  <mc:AlternateContent xmlns:mc="http://schemas.openxmlformats.org/markup-compatibility/2006">
+    <mc:Choice xmlns:p159="http://schemas.microsoft.com/office/powerpoint/2015/09/main" xmlns:p14="http://schemas.microsoft.com/office/powerpoint/2010/main" Requires="p159">
+      <p:transition p14:dur="500" advClick="1"/>
     </mc:Choice>
-    <mc:Fallback xmlns:w="http://schemas.openxmlformats.org/wordprocessingml/2006/main" xmlns:m="http://schemas.openxmlformats.org/officeDocument/2006/math" xmlns="">
+    <mc:Fallback>
       <p:transition advClick="1"/>
     </mc:Fallback>
   </mc:AlternateContent>
@@ -15013,10 +14993,10 @@
 </file>
 
 <file path=ppt/slides/slide16.xml><?xml version="1.0" encoding="utf-8"?>
-<p:sld xmlns:a="http://schemas.openxmlformats.org/drawingml/2006/main" xmlns:r="http://schemas.openxmlformats.org/officeDocument/2006/relationships" xmlns:p="http://schemas.openxmlformats.org/presentationml/2006/main" showMasterPhAnim="0">
-  <p:cSld>
+<p:sld xmlns:a="http://schemas.openxmlformats.org/drawingml/2006/main" xmlns:r="http://schemas.openxmlformats.org/officeDocument/2006/relationships" xmlns:p="http://schemas.openxmlformats.org/presentationml/2006/main" xmlns:m="http://schemas.openxmlformats.org/officeDocument/2006/math" xmlns:w="http://schemas.openxmlformats.org/wordprocessingml/2006/main" xmlns:mc="http://schemas.openxmlformats.org/markup-compatibility/2006" showMasterPhAnim="0" showMasterSp="1" show="1">
+  <p:cSld name="">
     <p:bg>
-      <p:bgPr>
+      <p:bgPr shadeToTitle="0">
         <a:gradFill>
           <a:gsLst>
             <a:gs pos="0">
@@ -15046,7 +15026,6 @@
           </a:gsLst>
           <a:lin ang="13500000" scaled="1"/>
         </a:gradFill>
-        <a:effectLst/>
       </p:bgPr>
     </p:bg>
     <p:spTree>
@@ -15065,7 +15044,7 @@
       </p:grpSpPr>
       <p:sp>
         <p:nvSpPr>
-          <p:cNvPr id="1609356744" name="Объект 2"/>
+          <p:cNvPr id="1605006120" name="Объект 2"/>
           <p:cNvSpPr>
             <a:spLocks noGrp="1"/>
           </p:cNvSpPr>
@@ -15106,7 +15085,7 @@
       </p:sp>
       <p:sp>
         <p:nvSpPr>
-          <p:cNvPr id="616057970" name="Номер слайда 3"/>
+          <p:cNvPr id="1333985830" name="Номер слайда 3"/>
           <p:cNvSpPr>
             <a:spLocks noGrp="1"/>
           </p:cNvSpPr>
@@ -15147,7 +15126,7 @@
       </p:sp>
       <p:sp>
         <p:nvSpPr>
-          <p:cNvPr id="1850575339" name="Прямоугольник 4"/>
+          <p:cNvPr id="719032198" name="Прямоугольник 4"/>
           <p:cNvSpPr/>
           <p:nvPr/>
         </p:nvSpPr>
@@ -15197,7 +15176,7 @@
       </p:sp>
       <p:sp>
         <p:nvSpPr>
-          <p:cNvPr id="647076292" name="Прямоугольник 5"/>
+          <p:cNvPr id="928320396" name="Прямоугольник 5"/>
           <p:cNvSpPr/>
           <p:nvPr/>
         </p:nvSpPr>
@@ -15247,7 +15226,7 @@
       </p:sp>
       <p:sp>
         <p:nvSpPr>
-          <p:cNvPr id="170225618" name="Заголовок 1"/>
+          <p:cNvPr id="484811652" name="Заголовок 1"/>
           <p:cNvSpPr>
             <a:spLocks noGrp="1"/>
           </p:cNvSpPr>
@@ -15289,11 +15268,11 @@
   <p:clrMapOvr>
     <a:masterClrMapping/>
   </p:clrMapOvr>
-  <mc:AlternateContent xmlns:mc="http://schemas.openxmlformats.org/markup-compatibility/2006" xmlns:p159="http://schemas.microsoft.com/office/powerpoint/2015/09/main">
-    <mc:Choice Requires="p159">
-      <p:transition/>
+  <mc:AlternateContent xmlns:mc="http://schemas.openxmlformats.org/markup-compatibility/2006">
+    <mc:Choice xmlns:p159="http://schemas.microsoft.com/office/powerpoint/2015/09/main" xmlns:p14="http://schemas.microsoft.com/office/powerpoint/2010/main" Requires="p159">
+      <p:transition p14:dur="500" advClick="1"/>
     </mc:Choice>
-    <mc:Fallback xmlns:w="http://schemas.openxmlformats.org/wordprocessingml/2006/main" xmlns:m="http://schemas.openxmlformats.org/officeDocument/2006/math" xmlns="">
+    <mc:Fallback>
       <p:transition advClick="1"/>
     </mc:Fallback>
   </mc:AlternateContent>
@@ -15301,10 +15280,10 @@
 </file>
 
 <file path=ppt/slides/slide17.xml><?xml version="1.0" encoding="utf-8"?>
-<p:sld xmlns:a="http://schemas.openxmlformats.org/drawingml/2006/main" xmlns:r="http://schemas.openxmlformats.org/officeDocument/2006/relationships" xmlns:p="http://schemas.openxmlformats.org/presentationml/2006/main" showMasterPhAnim="0">
-  <p:cSld>
+<p:sld xmlns:a="http://schemas.openxmlformats.org/drawingml/2006/main" xmlns:r="http://schemas.openxmlformats.org/officeDocument/2006/relationships" xmlns:p="http://schemas.openxmlformats.org/presentationml/2006/main" xmlns:m="http://schemas.openxmlformats.org/officeDocument/2006/math" xmlns:w="http://schemas.openxmlformats.org/wordprocessingml/2006/main" xmlns:mc="http://schemas.openxmlformats.org/markup-compatibility/2006" showMasterPhAnim="0" showMasterSp="1" show="1">
+  <p:cSld name="">
     <p:bg>
-      <p:bgPr>
+      <p:bgPr shadeToTitle="0">
         <a:gradFill>
           <a:gsLst>
             <a:gs pos="0">
@@ -15334,7 +15313,6 @@
           </a:gsLst>
           <a:lin ang="13500000" scaled="1"/>
         </a:gradFill>
-        <a:effectLst/>
       </p:bgPr>
     </p:bg>
     <p:spTree>
@@ -15353,7 +15331,7 @@
       </p:grpSpPr>
       <p:sp>
         <p:nvSpPr>
-          <p:cNvPr id="1513918151" name="Объект 2"/>
+          <p:cNvPr id="852574557" name="Объект 2"/>
           <p:cNvSpPr>
             <a:spLocks noGrp="1"/>
           </p:cNvSpPr>
@@ -15379,7 +15357,7 @@
       </p:sp>
       <p:sp>
         <p:nvSpPr>
-          <p:cNvPr id="368254803" name="Номер слайда 3"/>
+          <p:cNvPr id="1601613939" name="Номер слайда 3"/>
           <p:cNvSpPr>
             <a:spLocks noGrp="1"/>
           </p:cNvSpPr>
@@ -15420,7 +15398,7 @@
       </p:sp>
       <p:sp>
         <p:nvSpPr>
-          <p:cNvPr id="1683107362" name="Прямоугольник 4"/>
+          <p:cNvPr id="1504108049" name="Прямоугольник 4"/>
           <p:cNvSpPr/>
           <p:nvPr/>
         </p:nvSpPr>
@@ -15470,7 +15448,7 @@
       </p:sp>
       <p:sp>
         <p:nvSpPr>
-          <p:cNvPr id="537606377" name="Прямоугольник 5"/>
+          <p:cNvPr id="411122415" name="Прямоугольник 5"/>
           <p:cNvSpPr/>
           <p:nvPr/>
         </p:nvSpPr>
@@ -15520,7 +15498,7 @@
       </p:sp>
       <p:sp>
         <p:nvSpPr>
-          <p:cNvPr id="1399791167" name="Заголовок 1"/>
+          <p:cNvPr id="58413175" name="Заголовок 1"/>
           <p:cNvSpPr>
             <a:spLocks noGrp="1"/>
           </p:cNvSpPr>
@@ -15562,11 +15540,11 @@
   <p:clrMapOvr>
     <a:masterClrMapping/>
   </p:clrMapOvr>
-  <mc:AlternateContent xmlns:mc="http://schemas.openxmlformats.org/markup-compatibility/2006" xmlns:p159="http://schemas.microsoft.com/office/powerpoint/2015/09/main">
-    <mc:Choice Requires="p159">
-      <p:transition/>
+  <mc:AlternateContent xmlns:mc="http://schemas.openxmlformats.org/markup-compatibility/2006">
+    <mc:Choice xmlns:p159="http://schemas.microsoft.com/office/powerpoint/2015/09/main" xmlns:p14="http://schemas.microsoft.com/office/powerpoint/2010/main" Requires="p159">
+      <p:transition p14:dur="500" advClick="1"/>
     </mc:Choice>
-    <mc:Fallback xmlns:w="http://schemas.openxmlformats.org/wordprocessingml/2006/main" xmlns:m="http://schemas.openxmlformats.org/officeDocument/2006/math" xmlns="">
+    <mc:Fallback>
       <p:transition advClick="1"/>
     </mc:Fallback>
   </mc:AlternateContent>
@@ -15574,10 +15552,10 @@
 </file>
 
 <file path=ppt/slides/slide18.xml><?xml version="1.0" encoding="utf-8"?>
-<p:sld xmlns:a="http://schemas.openxmlformats.org/drawingml/2006/main" xmlns:r="http://schemas.openxmlformats.org/officeDocument/2006/relationships" xmlns:p="http://schemas.openxmlformats.org/presentationml/2006/main" showMasterPhAnim="0">
-  <p:cSld>
+<p:sld xmlns:a="http://schemas.openxmlformats.org/drawingml/2006/main" xmlns:r="http://schemas.openxmlformats.org/officeDocument/2006/relationships" xmlns:p="http://schemas.openxmlformats.org/presentationml/2006/main" xmlns:m="http://schemas.openxmlformats.org/officeDocument/2006/math" xmlns:w="http://schemas.openxmlformats.org/wordprocessingml/2006/main" xmlns:mc="http://schemas.openxmlformats.org/markup-compatibility/2006" showMasterPhAnim="0" showMasterSp="1" show="1">
+  <p:cSld name="">
     <p:bg>
-      <p:bgPr>
+      <p:bgPr shadeToTitle="0">
         <a:gradFill>
           <a:gsLst>
             <a:gs pos="0">
@@ -15607,7 +15585,6 @@
           </a:gsLst>
           <a:lin ang="5400000" scaled="1"/>
         </a:gradFill>
-        <a:effectLst/>
       </p:bgPr>
     </p:bg>
     <p:spTree>
@@ -15626,7 +15603,7 @@
       </p:grpSpPr>
       <p:sp>
         <p:nvSpPr>
-          <p:cNvPr id="1539169919" name="Прямоугольник 3"/>
+          <p:cNvPr id="513461080" name="Прямоугольник 3"/>
           <p:cNvSpPr/>
           <p:nvPr/>
         </p:nvSpPr>
@@ -15676,7 +15653,7 @@
       </p:sp>
       <p:sp>
         <p:nvSpPr>
-          <p:cNvPr id="1614470452" name="Прямоугольник 4"/>
+          <p:cNvPr id="1771253766" name="Прямоугольник 4"/>
           <p:cNvSpPr/>
           <p:nvPr/>
         </p:nvSpPr>
@@ -15726,7 +15703,7 @@
       </p:sp>
       <p:sp>
         <p:nvSpPr>
-          <p:cNvPr id="302617831" name="Заголовок 1"/>
+          <p:cNvPr id="466843148" name="Заголовок 1"/>
           <p:cNvSpPr>
             <a:spLocks noGrp="1"/>
           </p:cNvSpPr>
@@ -15783,7 +15760,7 @@
       </p:sp>
       <p:sp>
         <p:nvSpPr>
-          <p:cNvPr id="1202635747" name="Подзаголовок 2"/>
+          <p:cNvPr id="1599626335" name="Подзаголовок 2"/>
           <p:cNvSpPr>
             <a:spLocks noGrp="1"/>
           </p:cNvSpPr>
@@ -15862,7 +15839,7 @@
       </p:sp>
       <p:sp>
         <p:nvSpPr>
-          <p:cNvPr id="663392197" name="Заголовок 1"/>
+          <p:cNvPr id="1712820784" name="Заголовок 1"/>
           <p:cNvSpPr>
             <a:spLocks noGrp="1"/>
           </p:cNvSpPr>
@@ -15924,7 +15901,7 @@
       </p:sp>
       <p:sp>
         <p:nvSpPr>
-          <p:cNvPr id="1845622317" name="Заголовок 1"/>
+          <p:cNvPr id="508354879" name="Заголовок 1"/>
           <p:cNvSpPr>
             <a:spLocks noGrp="1"/>
           </p:cNvSpPr>
@@ -15986,7 +15963,7 @@
       </p:sp>
       <p:sp>
         <p:nvSpPr>
-          <p:cNvPr id="1865693039" name="Заголовок 1"/>
+          <p:cNvPr id="1897184099" name="Заголовок 1"/>
           <p:cNvSpPr>
             <a:spLocks noGrp="1"/>
           </p:cNvSpPr>
@@ -16036,6 +16013,7 @@
               </a:rPr>
               <a:t>Магистерская диссертация</a:t>
             </a:r>
+            <a:endParaRPr/>
           </a:p>
           <a:p>
             <a:pPr>
@@ -16052,12 +16030,13 @@
               </a:rPr>
               <a:t>Направление 01.04.02 Прикладная математика и информатика</a:t>
             </a:r>
-          </a:p>
-        </p:txBody>
-      </p:sp>
-      <p:sp>
-        <p:nvSpPr>
-          <p:cNvPr id="224178088" name="Заголовок 1"/>
+            <a:endParaRPr/>
+          </a:p>
+        </p:txBody>
+      </p:sp>
+      <p:sp>
+        <p:nvSpPr>
+          <p:cNvPr id="141429685" name="Заголовок 1"/>
           <p:cNvSpPr>
             <a:spLocks noGrp="1"/>
           </p:cNvSpPr>
@@ -16122,11 +16101,11 @@
   <p:clrMapOvr>
     <a:masterClrMapping/>
   </p:clrMapOvr>
-  <mc:AlternateContent xmlns:mc="http://schemas.openxmlformats.org/markup-compatibility/2006" xmlns:p159="http://schemas.microsoft.com/office/powerpoint/2015/09/main">
-    <mc:Choice Requires="p159">
-      <p:transition/>
+  <mc:AlternateContent xmlns:mc="http://schemas.openxmlformats.org/markup-compatibility/2006">
+    <mc:Choice xmlns:p159="http://schemas.microsoft.com/office/powerpoint/2015/09/main" xmlns:p14="http://schemas.microsoft.com/office/powerpoint/2010/main" Requires="p159">
+      <p:transition p14:dur="500" advClick="1"/>
     </mc:Choice>
-    <mc:Fallback xmlns:w="http://schemas.openxmlformats.org/wordprocessingml/2006/main" xmlns:m="http://schemas.openxmlformats.org/officeDocument/2006/math" xmlns="">
+    <mc:Fallback>
       <p:transition advClick="1"/>
     </mc:Fallback>
   </mc:AlternateContent>
@@ -16134,10 +16113,10 @@
 </file>
 
 <file path=ppt/slides/slide2.xml><?xml version="1.0" encoding="utf-8"?>
-<p:sld xmlns:a="http://schemas.openxmlformats.org/drawingml/2006/main" xmlns:r="http://schemas.openxmlformats.org/officeDocument/2006/relationships" xmlns:p="http://schemas.openxmlformats.org/presentationml/2006/main" showMasterPhAnim="0">
-  <p:cSld>
+<p:sld xmlns:a="http://schemas.openxmlformats.org/drawingml/2006/main" xmlns:r="http://schemas.openxmlformats.org/officeDocument/2006/relationships" xmlns:p="http://schemas.openxmlformats.org/presentationml/2006/main" xmlns:m="http://schemas.openxmlformats.org/officeDocument/2006/math" xmlns:w="http://schemas.openxmlformats.org/wordprocessingml/2006/main" xmlns:mc="http://schemas.openxmlformats.org/markup-compatibility/2006" showMasterPhAnim="0" showMasterSp="1" show="1">
+  <p:cSld name="">
     <p:bg>
-      <p:bgPr>
+      <p:bgPr shadeToTitle="0">
         <a:gradFill>
           <a:gsLst>
             <a:gs pos="0">
@@ -16167,7 +16146,6 @@
           </a:gsLst>
           <a:lin ang="13500000" scaled="1"/>
         </a:gradFill>
-        <a:effectLst/>
       </p:bgPr>
     </p:bg>
     <p:spTree>
@@ -16186,7 +16164,7 @@
       </p:grpSpPr>
       <p:sp>
         <p:nvSpPr>
-          <p:cNvPr id="1964938761" name="Прямоугольник 4"/>
+          <p:cNvPr id="698801619" name="Прямоугольник 4"/>
           <p:cNvSpPr/>
           <p:nvPr/>
         </p:nvSpPr>
@@ -16236,7 +16214,7 @@
       </p:sp>
       <p:sp>
         <p:nvSpPr>
-          <p:cNvPr id="955695666" name="Заголовок 1"/>
+          <p:cNvPr id="1933480227" name="Заголовок 1"/>
           <p:cNvSpPr>
             <a:spLocks noGrp="1"/>
           </p:cNvSpPr>
@@ -16275,7 +16253,7 @@
       </p:sp>
       <p:sp>
         <p:nvSpPr>
-          <p:cNvPr id="2081048642" name="Объект 2"/>
+          <p:cNvPr id="1517325514" name="Объект 2"/>
           <p:cNvSpPr>
             <a:spLocks noGrp="1"/>
           </p:cNvSpPr>
@@ -16315,6 +16293,7 @@
               </a:rPr>
               <a:t> – это специализированный процессор, оптимизированный для параллельной обработки данных;</a:t>
             </a:r>
+            <a:endParaRPr/>
           </a:p>
           <a:p>
             <a:pPr>
@@ -16328,6 +16307,7 @@
               </a:rPr>
               <a:t>Графическое ядро – это специализированный микропроцессор, созданный для математических вычислений, обработки изображений и рендеринга;</a:t>
             </a:r>
+            <a:endParaRPr/>
           </a:p>
           <a:p>
             <a:pPr>
@@ -16389,12 +16369,13 @@
               </a:rPr>
               <a:t>.</a:t>
             </a:r>
-          </a:p>
-        </p:txBody>
-      </p:sp>
-      <p:sp>
-        <p:nvSpPr>
-          <p:cNvPr id="1056046758" name="Номер слайда 3"/>
+            <a:endParaRPr/>
+          </a:p>
+        </p:txBody>
+      </p:sp>
+      <p:sp>
+        <p:nvSpPr>
+          <p:cNvPr id="337023781" name="Номер слайда 3"/>
           <p:cNvSpPr>
             <a:spLocks noGrp="1"/>
           </p:cNvSpPr>
@@ -16435,7 +16416,7 @@
       </p:sp>
       <p:sp>
         <p:nvSpPr>
-          <p:cNvPr id="1554808838" name="Прямоугольник 5"/>
+          <p:cNvPr id="2131610167" name="Прямоугольник 5"/>
           <p:cNvSpPr/>
           <p:nvPr/>
         </p:nvSpPr>
@@ -16488,11 +16469,11 @@
   <p:clrMapOvr>
     <a:masterClrMapping/>
   </p:clrMapOvr>
-  <mc:AlternateContent xmlns:mc="http://schemas.openxmlformats.org/markup-compatibility/2006" xmlns:p159="http://schemas.microsoft.com/office/powerpoint/2015/09/main">
-    <mc:Choice Requires="p159">
-      <p:transition/>
+  <mc:AlternateContent xmlns:mc="http://schemas.openxmlformats.org/markup-compatibility/2006">
+    <mc:Choice xmlns:p159="http://schemas.microsoft.com/office/powerpoint/2015/09/main" xmlns:p14="http://schemas.microsoft.com/office/powerpoint/2010/main" Requires="p159">
+      <p:transition p14:dur="500" advClick="1"/>
     </mc:Choice>
-    <mc:Fallback xmlns:w="http://schemas.openxmlformats.org/wordprocessingml/2006/main" xmlns:m="http://schemas.openxmlformats.org/officeDocument/2006/math" xmlns="">
+    <mc:Fallback>
       <p:transition advClick="1"/>
     </mc:Fallback>
   </mc:AlternateContent>
@@ -16500,10 +16481,10 @@
 </file>
 
 <file path=ppt/slides/slide3.xml><?xml version="1.0" encoding="utf-8"?>
-<p:sld xmlns:a="http://schemas.openxmlformats.org/drawingml/2006/main" xmlns:r="http://schemas.openxmlformats.org/officeDocument/2006/relationships" xmlns:p="http://schemas.openxmlformats.org/presentationml/2006/main" showMasterPhAnim="0">
-  <p:cSld>
+<p:sld xmlns:a="http://schemas.openxmlformats.org/drawingml/2006/main" xmlns:r="http://schemas.openxmlformats.org/officeDocument/2006/relationships" xmlns:p="http://schemas.openxmlformats.org/presentationml/2006/main" xmlns:m="http://schemas.openxmlformats.org/officeDocument/2006/math" xmlns:w="http://schemas.openxmlformats.org/wordprocessingml/2006/main" xmlns:mc="http://schemas.openxmlformats.org/markup-compatibility/2006" showMasterPhAnim="0" showMasterSp="1" show="1">
+  <p:cSld name="">
     <p:bg>
-      <p:bgPr>
+      <p:bgPr shadeToTitle="0">
         <a:gradFill>
           <a:gsLst>
             <a:gs pos="0">
@@ -16533,7 +16514,6 @@
           </a:gsLst>
           <a:lin ang="13500000" scaled="1"/>
         </a:gradFill>
-        <a:effectLst/>
       </p:bgPr>
     </p:bg>
     <p:spTree>
@@ -16552,7 +16532,7 @@
       </p:grpSpPr>
       <p:sp>
         <p:nvSpPr>
-          <p:cNvPr id="2050022185" name="Объект 2"/>
+          <p:cNvPr id="1475288421" name="Объект 2"/>
           <p:cNvSpPr>
             <a:spLocks noGrp="1"/>
           </p:cNvSpPr>
@@ -16588,6 +16568,7 @@
               </a:rPr>
               <a:t>позволит:</a:t>
             </a:r>
+            <a:endParaRPr/>
           </a:p>
           <a:p>
             <a:pPr>
@@ -16603,6 +16584,7 @@
               </a:rPr>
               <a:t> Определить требования для построения минимального графического ядра и минимальный набор инструкций;</a:t>
             </a:r>
+            <a:endParaRPr/>
           </a:p>
           <a:p>
             <a:pPr>
@@ -16618,6 +16600,7 @@
               </a:rPr>
               <a:t> Разработать модель упрощенного графического ядра, которую можно модернизировать и изучать;</a:t>
             </a:r>
+            <a:endParaRPr/>
           </a:p>
           <a:p>
             <a:pPr>
@@ -16657,6 +16640,7 @@
               </a:rPr>
               <a:t>;</a:t>
             </a:r>
+            <a:endParaRPr/>
           </a:p>
           <a:p>
             <a:pPr>
@@ -16672,12 +16656,13 @@
               </a:rPr>
               <a:t> Приблизиться к реализации полноценного графического ядра, а в перспективе и полноценного графического ускорителя.</a:t>
             </a:r>
-          </a:p>
-        </p:txBody>
-      </p:sp>
-      <p:sp>
-        <p:nvSpPr>
-          <p:cNvPr id="162578355" name="Номер слайда 3"/>
+            <a:endParaRPr/>
+          </a:p>
+        </p:txBody>
+      </p:sp>
+      <p:sp>
+        <p:nvSpPr>
+          <p:cNvPr id="2003656188" name="Номер слайда 3"/>
           <p:cNvSpPr>
             <a:spLocks noGrp="1"/>
           </p:cNvSpPr>
@@ -16718,7 +16703,7 @@
       </p:sp>
       <p:sp>
         <p:nvSpPr>
-          <p:cNvPr id="25781537" name="Прямоугольник 4"/>
+          <p:cNvPr id="1188431946" name="Прямоугольник 4"/>
           <p:cNvSpPr/>
           <p:nvPr/>
         </p:nvSpPr>
@@ -16768,7 +16753,7 @@
       </p:sp>
       <p:sp>
         <p:nvSpPr>
-          <p:cNvPr id="21356312" name="Заголовок 1"/>
+          <p:cNvPr id="56381229" name="Заголовок 1"/>
           <p:cNvSpPr>
             <a:spLocks noGrp="1"/>
           </p:cNvSpPr>
@@ -16807,7 +16792,7 @@
       </p:sp>
       <p:sp>
         <p:nvSpPr>
-          <p:cNvPr id="1166379215" name="Прямоугольник 5"/>
+          <p:cNvPr id="29969674" name="Прямоугольник 5"/>
           <p:cNvSpPr/>
           <p:nvPr/>
         </p:nvSpPr>
@@ -16860,11 +16845,11 @@
   <p:clrMapOvr>
     <a:masterClrMapping/>
   </p:clrMapOvr>
-  <mc:AlternateContent xmlns:mc="http://schemas.openxmlformats.org/markup-compatibility/2006" xmlns:p159="http://schemas.microsoft.com/office/powerpoint/2015/09/main">
-    <mc:Choice Requires="p159">
-      <p:transition/>
+  <mc:AlternateContent xmlns:mc="http://schemas.openxmlformats.org/markup-compatibility/2006">
+    <mc:Choice xmlns:p159="http://schemas.microsoft.com/office/powerpoint/2015/09/main" xmlns:p14="http://schemas.microsoft.com/office/powerpoint/2010/main" Requires="p159">
+      <p:transition p14:dur="500" advClick="1"/>
     </mc:Choice>
-    <mc:Fallback xmlns:w="http://schemas.openxmlformats.org/wordprocessingml/2006/main" xmlns:m="http://schemas.openxmlformats.org/officeDocument/2006/math" xmlns="">
+    <mc:Fallback>
       <p:transition advClick="1"/>
     </mc:Fallback>
   </mc:AlternateContent>
@@ -16872,10 +16857,10 @@
 </file>
 
 <file path=ppt/slides/slide4.xml><?xml version="1.0" encoding="utf-8"?>
-<p:sld xmlns:a="http://schemas.openxmlformats.org/drawingml/2006/main" xmlns:r="http://schemas.openxmlformats.org/officeDocument/2006/relationships" xmlns:p="http://schemas.openxmlformats.org/presentationml/2006/main" showMasterPhAnim="0">
-  <p:cSld>
+<p:sld xmlns:a="http://schemas.openxmlformats.org/drawingml/2006/main" xmlns:r="http://schemas.openxmlformats.org/officeDocument/2006/relationships" xmlns:p="http://schemas.openxmlformats.org/presentationml/2006/main" xmlns:m="http://schemas.openxmlformats.org/officeDocument/2006/math" xmlns:w="http://schemas.openxmlformats.org/wordprocessingml/2006/main" xmlns:mc="http://schemas.openxmlformats.org/markup-compatibility/2006" showMasterPhAnim="0" showMasterSp="1" show="1">
+  <p:cSld name="">
     <p:bg>
-      <p:bgPr>
+      <p:bgPr shadeToTitle="0">
         <a:gradFill>
           <a:gsLst>
             <a:gs pos="0">
@@ -16905,7 +16890,6 @@
           </a:gsLst>
           <a:lin ang="13500000" scaled="1"/>
         </a:gradFill>
-        <a:effectLst/>
       </p:bgPr>
     </p:bg>
     <p:spTree>
@@ -16924,7 +16908,7 @@
       </p:grpSpPr>
       <p:sp>
         <p:nvSpPr>
-          <p:cNvPr id="2038122079" name="Объект 2"/>
+          <p:cNvPr id="1347891503" name="Объект 2"/>
           <p:cNvSpPr>
             <a:spLocks noGrp="1"/>
           </p:cNvSpPr>
@@ -17037,7 +17021,7 @@
       </p:sp>
       <p:sp>
         <p:nvSpPr>
-          <p:cNvPr id="658365991" name="Номер слайда 3"/>
+          <p:cNvPr id="1271979349" name="Номер слайда 3"/>
           <p:cNvSpPr>
             <a:spLocks noGrp="1"/>
           </p:cNvSpPr>
@@ -17078,7 +17062,7 @@
       </p:sp>
       <p:sp>
         <p:nvSpPr>
-          <p:cNvPr id="1634131261" name="Прямоугольник 5"/>
+          <p:cNvPr id="1738525317" name="Прямоугольник 5"/>
           <p:cNvSpPr/>
           <p:nvPr/>
         </p:nvSpPr>
@@ -17128,7 +17112,7 @@
       </p:sp>
       <p:sp>
         <p:nvSpPr>
-          <p:cNvPr id="1538459728" name="Заголовок 1"/>
+          <p:cNvPr id="1500108300" name="Заголовок 1"/>
           <p:cNvSpPr>
             <a:spLocks noGrp="1"/>
           </p:cNvSpPr>
@@ -17167,7 +17151,7 @@
       </p:sp>
       <p:sp>
         <p:nvSpPr>
-          <p:cNvPr id="102407284" name="Прямоугольник 6"/>
+          <p:cNvPr id="1198869182" name="Прямоугольник 6"/>
           <p:cNvSpPr/>
           <p:nvPr/>
         </p:nvSpPr>
@@ -17220,11 +17204,11 @@
   <p:clrMapOvr>
     <a:masterClrMapping/>
   </p:clrMapOvr>
-  <mc:AlternateContent xmlns:mc="http://schemas.openxmlformats.org/markup-compatibility/2006" xmlns:p159="http://schemas.microsoft.com/office/powerpoint/2015/09/main">
-    <mc:Choice Requires="p159">
-      <p:transition/>
+  <mc:AlternateContent xmlns:mc="http://schemas.openxmlformats.org/markup-compatibility/2006">
+    <mc:Choice xmlns:p159="http://schemas.microsoft.com/office/powerpoint/2015/09/main" xmlns:p14="http://schemas.microsoft.com/office/powerpoint/2010/main" Requires="p159">
+      <p:transition p14:dur="500" advClick="1"/>
     </mc:Choice>
-    <mc:Fallback xmlns:w="http://schemas.openxmlformats.org/wordprocessingml/2006/main" xmlns:m="http://schemas.openxmlformats.org/officeDocument/2006/math" xmlns="">
+    <mc:Fallback>
       <p:transition advClick="1"/>
     </mc:Fallback>
   </mc:AlternateContent>
@@ -17232,10 +17216,10 @@
 </file>
 
 <file path=ppt/slides/slide5.xml><?xml version="1.0" encoding="utf-8"?>
-<p:sld xmlns:a="http://schemas.openxmlformats.org/drawingml/2006/main" xmlns:r="http://schemas.openxmlformats.org/officeDocument/2006/relationships" xmlns:p="http://schemas.openxmlformats.org/presentationml/2006/main" showMasterPhAnim="0">
-  <p:cSld>
+<p:sld xmlns:a="http://schemas.openxmlformats.org/drawingml/2006/main" xmlns:r="http://schemas.openxmlformats.org/officeDocument/2006/relationships" xmlns:p="http://schemas.openxmlformats.org/presentationml/2006/main" xmlns:m="http://schemas.openxmlformats.org/officeDocument/2006/math" xmlns:w="http://schemas.openxmlformats.org/wordprocessingml/2006/main" xmlns:mc="http://schemas.openxmlformats.org/markup-compatibility/2006" showMasterPhAnim="0" showMasterSp="1" show="1">
+  <p:cSld name="">
     <p:bg>
-      <p:bgPr>
+      <p:bgPr shadeToTitle="0">
         <a:gradFill>
           <a:gsLst>
             <a:gs pos="0">
@@ -17265,7 +17249,6 @@
           </a:gsLst>
           <a:lin ang="13500000" scaled="1"/>
         </a:gradFill>
-        <a:effectLst/>
       </p:bgPr>
     </p:bg>
     <p:spTree>
@@ -17284,7 +17267,7 @@
       </p:grpSpPr>
       <p:sp>
         <p:nvSpPr>
-          <p:cNvPr id="1999283796" name="Объект 2"/>
+          <p:cNvPr id="1823516850" name="Объект 2"/>
           <p:cNvSpPr>
             <a:spLocks noGrp="1"/>
           </p:cNvSpPr>
@@ -17312,14 +17295,17 @@
               <a:defRPr/>
             </a:pPr>
             <a:r>
+              <a:rPr/>
               <a:t>Работа является общим проектом по теме: разработка ядра упрощенного графического ускорителя;</a:t>
             </a:r>
-          </a:p>
-          <a:p>
-            <a:pPr>
-              <a:defRPr/>
-            </a:pPr>
-            <a:r>
+            <a:endParaRPr/>
+          </a:p>
+          <a:p>
+            <a:pPr>
+              <a:defRPr/>
+            </a:pPr>
+            <a:r>
+              <a:rPr/>
               <a:t>В данной работе выполнена конкретная часть проекта: </a:t>
             </a:r>
             <a:r>
@@ -17336,7 +17322,7 @@
       </p:sp>
       <p:sp>
         <p:nvSpPr>
-          <p:cNvPr id="715756810" name="Номер слайда 3"/>
+          <p:cNvPr id="1437512633" name="Номер слайда 3"/>
           <p:cNvSpPr>
             <a:spLocks noGrp="1"/>
           </p:cNvSpPr>
@@ -17377,7 +17363,7 @@
       </p:sp>
       <p:sp>
         <p:nvSpPr>
-          <p:cNvPr id="1260798391" name="Прямоугольник 5"/>
+          <p:cNvPr id="1281608059" name="Прямоугольник 5"/>
           <p:cNvSpPr/>
           <p:nvPr/>
         </p:nvSpPr>
@@ -17427,7 +17413,7 @@
       </p:sp>
       <p:sp>
         <p:nvSpPr>
-          <p:cNvPr id="1741315016" name="Заголовок 1"/>
+          <p:cNvPr id="156498649" name="Заголовок 1"/>
           <p:cNvSpPr>
             <a:spLocks noGrp="1"/>
           </p:cNvSpPr>
@@ -17466,7 +17452,7 @@
       </p:sp>
       <p:sp>
         <p:nvSpPr>
-          <p:cNvPr id="965472291" name="Прямоугольник 6"/>
+          <p:cNvPr id="425830183" name="Прямоугольник 6"/>
           <p:cNvSpPr/>
           <p:nvPr/>
         </p:nvSpPr>
@@ -17516,7 +17502,7 @@
       </p:sp>
       <p:pic>
         <p:nvPicPr>
-          <p:cNvPr id="543394343" name="Рисунок 543394342"/>
+          <p:cNvPr id="411013976" name="Рисунок 543394342"/>
           <p:cNvPicPr>
             <a:picLocks noChangeAspect="1"/>
           </p:cNvPicPr>
@@ -17547,11 +17533,11 @@
   <p:clrMapOvr>
     <a:masterClrMapping/>
   </p:clrMapOvr>
-  <mc:AlternateContent xmlns:mc="http://schemas.openxmlformats.org/markup-compatibility/2006" xmlns:p159="http://schemas.microsoft.com/office/powerpoint/2015/09/main">
-    <mc:Choice Requires="p159">
-      <p:transition/>
+  <mc:AlternateContent xmlns:mc="http://schemas.openxmlformats.org/markup-compatibility/2006">
+    <mc:Choice xmlns:p159="http://schemas.microsoft.com/office/powerpoint/2015/09/main" xmlns:p14="http://schemas.microsoft.com/office/powerpoint/2010/main" Requires="p159">
+      <p:transition p14:dur="500" advClick="1"/>
     </mc:Choice>
-    <mc:Fallback xmlns:w="http://schemas.openxmlformats.org/wordprocessingml/2006/main" xmlns:m="http://schemas.openxmlformats.org/officeDocument/2006/math" xmlns="">
+    <mc:Fallback>
       <p:transition advClick="1"/>
     </mc:Fallback>
   </mc:AlternateContent>
@@ -17559,10 +17545,10 @@
 </file>
 
 <file path=ppt/slides/slide6.xml><?xml version="1.0" encoding="utf-8"?>
-<p:sld xmlns:a="http://schemas.openxmlformats.org/drawingml/2006/main" xmlns:r="http://schemas.openxmlformats.org/officeDocument/2006/relationships" xmlns:p="http://schemas.openxmlformats.org/presentationml/2006/main" showMasterPhAnim="0">
-  <p:cSld>
+<p:sld xmlns:a="http://schemas.openxmlformats.org/drawingml/2006/main" xmlns:r="http://schemas.openxmlformats.org/officeDocument/2006/relationships" xmlns:p="http://schemas.openxmlformats.org/presentationml/2006/main" xmlns:m="http://schemas.openxmlformats.org/officeDocument/2006/math" xmlns:w="http://schemas.openxmlformats.org/wordprocessingml/2006/main" xmlns:mc="http://schemas.openxmlformats.org/markup-compatibility/2006" showMasterPhAnim="0" showMasterSp="1" show="1">
+  <p:cSld name="">
     <p:bg>
-      <p:bgPr>
+      <p:bgPr shadeToTitle="0">
         <a:gradFill>
           <a:gsLst>
             <a:gs pos="0">
@@ -17592,7 +17578,6 @@
           </a:gsLst>
           <a:lin ang="13500000" scaled="1"/>
         </a:gradFill>
-        <a:effectLst/>
       </p:bgPr>
     </p:bg>
     <p:spTree>
@@ -17611,7 +17596,7 @@
       </p:grpSpPr>
       <p:sp>
         <p:nvSpPr>
-          <p:cNvPr id="1986756197" name="Прямоугольник 9"/>
+          <p:cNvPr id="411328885" name="Прямоугольник 9"/>
           <p:cNvSpPr/>
           <p:nvPr/>
         </p:nvSpPr>
@@ -17661,7 +17646,7 @@
       </p:sp>
       <p:sp>
         <p:nvSpPr>
-          <p:cNvPr id="499459330" name="Прямоугольник 10"/>
+          <p:cNvPr id="230985859" name="Прямоугольник 10"/>
           <p:cNvSpPr/>
           <p:nvPr/>
         </p:nvSpPr>
@@ -17711,7 +17696,7 @@
       </p:sp>
       <p:sp>
         <p:nvSpPr>
-          <p:cNvPr id="597341898" name="Заголовок 1"/>
+          <p:cNvPr id="1528273799" name="Заголовок 1"/>
           <p:cNvSpPr>
             <a:spLocks noGrp="1"/>
           </p:cNvSpPr>
@@ -17773,7 +17758,7 @@
       </p:sp>
       <p:sp>
         <p:nvSpPr>
-          <p:cNvPr id="1936873006" name="Объект 2"/>
+          <p:cNvPr id="380780232" name="Объект 2"/>
           <p:cNvSpPr>
             <a:spLocks noGrp="1"/>
           </p:cNvSpPr>
@@ -17912,7 +17897,7 @@
       </p:sp>
       <p:sp>
         <p:nvSpPr>
-          <p:cNvPr id="479881067" name="Номер слайда 3"/>
+          <p:cNvPr id="885170465" name="Номер слайда 3"/>
           <p:cNvSpPr>
             <a:spLocks noGrp="1"/>
           </p:cNvSpPr>
@@ -17953,7 +17938,7 @@
       </p:sp>
       <p:pic>
         <p:nvPicPr>
-          <p:cNvPr id="584781242" name="Рисунок 7"/>
+          <p:cNvPr id="703888944" name="Рисунок 7"/>
           <p:cNvPicPr>
             <a:picLocks noChangeAspect="1"/>
           </p:cNvPicPr>
@@ -17987,7 +17972,7 @@
       </p:pic>
       <p:pic>
         <p:nvPicPr>
-          <p:cNvPr id="29648412" name="Рисунок 29648411"/>
+          <p:cNvPr id="624566044" name="Рисунок 29648411"/>
           <p:cNvPicPr>
             <a:picLocks noChangeAspect="1"/>
           </p:cNvPicPr>
@@ -18020,11 +18005,11 @@
   <p:clrMapOvr>
     <a:masterClrMapping/>
   </p:clrMapOvr>
-  <mc:AlternateContent xmlns:mc="http://schemas.openxmlformats.org/markup-compatibility/2006" xmlns:p159="http://schemas.microsoft.com/office/powerpoint/2015/09/main">
-    <mc:Choice Requires="p159">
-      <p:transition/>
+  <mc:AlternateContent xmlns:mc="http://schemas.openxmlformats.org/markup-compatibility/2006">
+    <mc:Choice xmlns:p159="http://schemas.microsoft.com/office/powerpoint/2015/09/main" xmlns:p14="http://schemas.microsoft.com/office/powerpoint/2010/main" Requires="p159">
+      <p:transition p14:dur="500" advClick="1"/>
     </mc:Choice>
-    <mc:Fallback xmlns:w="http://schemas.openxmlformats.org/wordprocessingml/2006/main" xmlns:m="http://schemas.openxmlformats.org/officeDocument/2006/math" xmlns="">
+    <mc:Fallback>
       <p:transition advClick="1"/>
     </mc:Fallback>
   </mc:AlternateContent>
@@ -18032,10 +18017,10 @@
 </file>
 
 <file path=ppt/slides/slide7.xml><?xml version="1.0" encoding="utf-8"?>
-<p:sld xmlns:a="http://schemas.openxmlformats.org/drawingml/2006/main" xmlns:r="http://schemas.openxmlformats.org/officeDocument/2006/relationships" xmlns:p="http://schemas.openxmlformats.org/presentationml/2006/main" showMasterPhAnim="0">
-  <p:cSld>
+<p:sld xmlns:a="http://schemas.openxmlformats.org/drawingml/2006/main" xmlns:r="http://schemas.openxmlformats.org/officeDocument/2006/relationships" xmlns:p="http://schemas.openxmlformats.org/presentationml/2006/main" xmlns:m="http://schemas.openxmlformats.org/officeDocument/2006/math" xmlns:w="http://schemas.openxmlformats.org/wordprocessingml/2006/main" xmlns:mc="http://schemas.openxmlformats.org/markup-compatibility/2006" showMasterPhAnim="0" showMasterSp="1" show="1">
+  <p:cSld name="">
     <p:bg>
-      <p:bgPr>
+      <p:bgPr shadeToTitle="0">
         <a:gradFill>
           <a:gsLst>
             <a:gs pos="0">
@@ -18065,7 +18050,6 @@
           </a:gsLst>
           <a:lin ang="13500000" scaled="1"/>
         </a:gradFill>
-        <a:effectLst/>
       </p:bgPr>
     </p:bg>
     <p:spTree>
@@ -18084,7 +18068,7 @@
       </p:grpSpPr>
       <p:sp>
         <p:nvSpPr>
-          <p:cNvPr id="1531614552" name="Прямоугольник 9"/>
+          <p:cNvPr id="2140390992" name="Прямоугольник 9"/>
           <p:cNvSpPr/>
           <p:nvPr/>
         </p:nvSpPr>
@@ -18134,7 +18118,7 @@
       </p:sp>
       <p:sp>
         <p:nvSpPr>
-          <p:cNvPr id="172050281" name="Прямоугольник 10"/>
+          <p:cNvPr id="1450401640" name="Прямоугольник 10"/>
           <p:cNvSpPr/>
           <p:nvPr/>
         </p:nvSpPr>
@@ -18184,7 +18168,7 @@
       </p:sp>
       <p:sp>
         <p:nvSpPr>
-          <p:cNvPr id="1672284683" name="Заголовок 1"/>
+          <p:cNvPr id="1376385755" name="Заголовок 1"/>
           <p:cNvSpPr>
             <a:spLocks noGrp="1"/>
           </p:cNvSpPr>
@@ -18246,7 +18230,7 @@
       </p:sp>
       <p:sp>
         <p:nvSpPr>
-          <p:cNvPr id="1844392733" name="Объект 2"/>
+          <p:cNvPr id="318801559" name="Объект 2"/>
           <p:cNvSpPr>
             <a:spLocks noGrp="1"/>
           </p:cNvSpPr>
@@ -18273,6 +18257,7 @@
               <a:rPr lang="ru-RU"/>
               <a:t>Общий регистровый файл большого размера для множества ядер;</a:t>
             </a:r>
+            <a:endParaRPr/>
           </a:p>
           <a:p>
             <a:pPr>
@@ -18282,6 +18267,7 @@
               <a:rPr lang="ru-RU"/>
               <a:t>Каждому ядру в регистровом файле выделена своя область;</a:t>
             </a:r>
+            <a:endParaRPr/>
           </a:p>
           <a:p>
             <a:pPr>
@@ -18299,6 +18285,7 @@
               <a:rPr lang="ru-RU"/>
               <a:t>является однопоточным;</a:t>
             </a:r>
+            <a:endParaRPr/>
           </a:p>
           <a:p>
             <a:pPr>
@@ -18344,7 +18331,7 @@
       </p:sp>
       <p:sp>
         <p:nvSpPr>
-          <p:cNvPr id="2004110169" name="Номер слайда 3"/>
+          <p:cNvPr id="632092836" name="Номер слайда 3"/>
           <p:cNvSpPr>
             <a:spLocks noGrp="1"/>
           </p:cNvSpPr>
@@ -18385,7 +18372,7 @@
       </p:sp>
       <p:pic>
         <p:nvPicPr>
-          <p:cNvPr id="258219235" name="Рисунок 5"/>
+          <p:cNvPr id="1836341489" name="Рисунок 5"/>
           <p:cNvPicPr>
             <a:picLocks noChangeAspect="1"/>
           </p:cNvPicPr>
@@ -18393,7 +18380,7 @@
         </p:nvPicPr>
         <p:blipFill rotWithShape="1">
           <a:blip r:embed="rId3"/>
-          <a:srcRect r="33408"/>
+          <a:srcRect l="0" t="0" r="33408" b="0"/>
           <a:stretch/>
         </p:blipFill>
         <p:spPr bwMode="auto">
@@ -18423,11 +18410,11 @@
   <p:clrMapOvr>
     <a:masterClrMapping/>
   </p:clrMapOvr>
-  <mc:AlternateContent xmlns:mc="http://schemas.openxmlformats.org/markup-compatibility/2006" xmlns:p159="http://schemas.microsoft.com/office/powerpoint/2015/09/main">
-    <mc:Choice Requires="p159">
-      <p:transition/>
+  <mc:AlternateContent xmlns:mc="http://schemas.openxmlformats.org/markup-compatibility/2006">
+    <mc:Choice xmlns:p159="http://schemas.microsoft.com/office/powerpoint/2015/09/main" xmlns:p14="http://schemas.microsoft.com/office/powerpoint/2010/main" Requires="p159">
+      <p:transition p14:dur="500" advClick="1"/>
     </mc:Choice>
-    <mc:Fallback xmlns:w="http://schemas.openxmlformats.org/wordprocessingml/2006/main" xmlns:m="http://schemas.openxmlformats.org/officeDocument/2006/math" xmlns="">
+    <mc:Fallback>
       <p:transition advClick="1"/>
     </mc:Fallback>
   </mc:AlternateContent>
@@ -18435,10 +18422,10 @@
 </file>
 
 <file path=ppt/slides/slide8.xml><?xml version="1.0" encoding="utf-8"?>
-<p:sld xmlns:a="http://schemas.openxmlformats.org/drawingml/2006/main" xmlns:r="http://schemas.openxmlformats.org/officeDocument/2006/relationships" xmlns:p="http://schemas.openxmlformats.org/presentationml/2006/main" showMasterPhAnim="0">
-  <p:cSld>
+<p:sld xmlns:a="http://schemas.openxmlformats.org/drawingml/2006/main" xmlns:r="http://schemas.openxmlformats.org/officeDocument/2006/relationships" xmlns:p="http://schemas.openxmlformats.org/presentationml/2006/main" xmlns:m="http://schemas.openxmlformats.org/officeDocument/2006/math" xmlns:w="http://schemas.openxmlformats.org/wordprocessingml/2006/main" xmlns:mc="http://schemas.openxmlformats.org/markup-compatibility/2006" showMasterPhAnim="0" showMasterSp="1" show="1">
+  <p:cSld name="">
     <p:bg>
-      <p:bgPr>
+      <p:bgPr shadeToTitle="0">
         <a:gradFill>
           <a:gsLst>
             <a:gs pos="0">
@@ -18468,7 +18455,6 @@
           </a:gsLst>
           <a:lin ang="13500000" scaled="1"/>
         </a:gradFill>
-        <a:effectLst/>
       </p:bgPr>
     </p:bg>
     <p:spTree>
@@ -18487,7 +18473,7 @@
       </p:grpSpPr>
       <p:sp>
         <p:nvSpPr>
-          <p:cNvPr id="682831535" name="Объект 2"/>
+          <p:cNvPr id="1623870512" name="Объект 2"/>
           <p:cNvSpPr>
             <a:spLocks noGrp="1"/>
           </p:cNvSpPr>
@@ -18527,8 +18513,10 @@
               <a:t>VKCUBE</a:t>
             </a:r>
             <a:r>
+              <a:rPr/>
               <a:t>;</a:t>
             </a:r>
+            <a:endParaRPr/>
           </a:p>
           <a:p>
             <a:pPr>
@@ -18546,12 +18534,13 @@
               <a:rPr lang="ru-RU"/>
               <a:t>.</a:t>
             </a:r>
-          </a:p>
-        </p:txBody>
-      </p:sp>
-      <p:sp>
-        <p:nvSpPr>
-          <p:cNvPr id="280238473" name="Номер слайда 3"/>
+            <a:endParaRPr/>
+          </a:p>
+        </p:txBody>
+      </p:sp>
+      <p:sp>
+        <p:nvSpPr>
+          <p:cNvPr id="880094597" name="Номер слайда 3"/>
           <p:cNvSpPr>
             <a:spLocks noGrp="1"/>
           </p:cNvSpPr>
@@ -18592,7 +18581,7 @@
       </p:sp>
       <p:pic>
         <p:nvPicPr>
-          <p:cNvPr id="142624812" name="Рисунок 5"/>
+          <p:cNvPr id="1183040509" name="Рисунок 5"/>
           <p:cNvPicPr>
             <a:picLocks noChangeAspect="1"/>
           </p:cNvPicPr>
@@ -18622,25 +18611,14 @@
       </p:pic>
       <p:pic>
         <p:nvPicPr>
-          <p:cNvPr id="1937440151" name="Рисунок 1421075015"/>
+          <p:cNvPr id="1381976786" name="Рисунок 1421075015"/>
           <p:cNvPicPr>
             <a:picLocks noChangeAspect="1"/>
           </p:cNvPicPr>
           <p:nvPr/>
         </p:nvPicPr>
-        <p:blipFill>
-          <a:blip r:embed="rId4">
-            <a:extLst>
-              <a:ext uri="{28A0092B-C50C-407E-A947-70E740481C1C}">
-                <a14:useLocalDpi xmlns:a14="http://schemas.microsoft.com/office/drawing/2010/main" val="0"/>
-              </a:ext>
-              <a:ext uri="{96DAC541-7B7A-43D3-8B79-37D633B846F1}">
-                <asvg:svgBlip xmlns:asvg="http://schemas.microsoft.com/office/drawing/2016/SVG/main" r:embed="rId5"/>
-              </a:ext>
-            </a:extLst>
-          </a:blip>
-          <a:srcRect/>
-          <a:stretch/>
+        <p:blipFill rotWithShape="1">
+          <a:blip r:embed="rId4"/>
         </p:blipFill>
         <p:spPr bwMode="auto">
           <a:xfrm>
@@ -18662,7 +18640,7 @@
       </p:pic>
       <p:sp>
         <p:nvSpPr>
-          <p:cNvPr id="1887870065" name="Прямоугольник 10"/>
+          <p:cNvPr id="815220649" name="Прямоугольник 10"/>
           <p:cNvSpPr/>
           <p:nvPr/>
         </p:nvSpPr>
@@ -18712,7 +18690,7 @@
       </p:sp>
       <p:sp>
         <p:nvSpPr>
-          <p:cNvPr id="76421527" name="Прямоугольник 11"/>
+          <p:cNvPr id="1741335699" name="Прямоугольник 11"/>
           <p:cNvSpPr/>
           <p:nvPr/>
         </p:nvSpPr>
@@ -18762,7 +18740,7 @@
       </p:sp>
       <p:sp>
         <p:nvSpPr>
-          <p:cNvPr id="1689660852" name="Заголовок 1"/>
+          <p:cNvPr id="1312973417" name="Заголовок 1"/>
           <p:cNvSpPr>
             <a:spLocks noGrp="1"/>
           </p:cNvSpPr>
@@ -18811,46 +18789,42 @@
       </p:sp>
       <p:pic>
         <p:nvPicPr>
-          <p:cNvPr id="1528119454" name="Рисунок 2"/>
-          <p:cNvPicPr>
-            <a:picLocks noChangeAspect="1"/>
-          </p:cNvPicPr>
-          <p:nvPr/>
-        </p:nvPicPr>
-        <p:blipFill>
-          <a:blip r:embed="rId6">
-            <a:extLst>
-              <a:ext uri="{28A0092B-C50C-407E-A947-70E740481C1C}">
-                <a14:useLocalDpi xmlns:a14="http://schemas.microsoft.com/office/drawing/2010/main" val="0"/>
-              </a:ext>
-              <a:ext uri="{96DAC541-7B7A-43D3-8B79-37D633B846F1}">
-                <asvg:svgBlip xmlns:asvg="http://schemas.microsoft.com/office/drawing/2016/SVG/main" r:embed="rId7"/>
-              </a:ext>
-            </a:extLst>
-          </a:blip>
-          <a:srcRect/>
-          <a:stretch/>
-        </p:blipFill>
-        <p:spPr bwMode="auto">
-          <a:xfrm>
-            <a:off x="8672115" y="5206830"/>
-            <a:ext cx="3164607" cy="1376882"/>
-          </a:xfrm>
-          <a:prstGeom prst="rect">
-            <a:avLst/>
-          </a:prstGeom>
-        </p:spPr>
-      </p:pic>
-      <p:pic>
-        <p:nvPicPr>
-          <p:cNvPr id="1736709910" name="Рисунок 1736709909"/>
+          <p:cNvPr id="1411701265" name="Рисунок 2"/>
           <p:cNvPicPr>
             <a:picLocks noChangeAspect="1"/>
           </p:cNvPicPr>
           <p:nvPr/>
         </p:nvPicPr>
         <p:blipFill rotWithShape="1">
-          <a:blip r:embed="rId8"/>
+          <a:blip r:embed="rId5">
+            <a:extLst>
+              <a:ext uri="{96DAC541-7B7A-43D3-8B79-37D633B846F1}">
+                <asvg:svgBlip xmlns:asvg="http://schemas.microsoft.com/office/drawing/2016/SVG/main" r:embed="rId6"/>
+              </a:ext>
+            </a:extLst>
+          </a:blip>
+          <a:stretch/>
+        </p:blipFill>
+        <p:spPr bwMode="auto">
+          <a:xfrm>
+            <a:off x="8672115" y="5206830"/>
+            <a:ext cx="3164607" cy="1376882"/>
+          </a:xfrm>
+          <a:prstGeom prst="rect">
+            <a:avLst/>
+          </a:prstGeom>
+        </p:spPr>
+      </p:pic>
+      <p:pic>
+        <p:nvPicPr>
+          <p:cNvPr id="1968189078" name="Рисунок 1736709909"/>
+          <p:cNvPicPr>
+            <a:picLocks noChangeAspect="1"/>
+          </p:cNvPicPr>
+          <p:nvPr/>
+        </p:nvPicPr>
+        <p:blipFill rotWithShape="1">
+          <a:blip r:embed="rId7"/>
           <a:stretch/>
         </p:blipFill>
         <p:spPr bwMode="auto">
@@ -18873,10 +18847,10 @@
       </p:pic>
       <p:cxnSp>
         <p:nvCxnSpPr>
-          <p:cNvPr id="1511808802" name="Прямая соединительная линия 1511808801"/>
+          <p:cNvPr id="1346800815" name="Прямая соединительная линия 1511808801"/>
           <p:cNvCxnSpPr>
-            <a:stCxn id="142624812" idx="3"/>
-            <a:endCxn id="1528119454" idx="1"/>
+            <a:stCxn id="1183040509" idx="3"/>
+            <a:endCxn id="1411701265" idx="1"/>
           </p:cNvCxnSpPr>
           <p:nvPr/>
         </p:nvCxnSpPr>
@@ -18916,10 +18890,10 @@
       </p:cxnSp>
       <p:cxnSp>
         <p:nvCxnSpPr>
-          <p:cNvPr id="873958203" name="Прямая соединительная линия 873958202"/>
+          <p:cNvPr id="1480258634" name="Прямая соединительная линия 873958202"/>
           <p:cNvCxnSpPr>
-            <a:stCxn id="142624812" idx="3"/>
-            <a:endCxn id="1937440151" idx="2"/>
+            <a:stCxn id="1183040509" idx="3"/>
+            <a:endCxn id="1381976786" idx="2"/>
           </p:cNvCxnSpPr>
           <p:nvPr/>
         </p:nvCxnSpPr>
@@ -18959,10 +18933,10 @@
       </p:cxnSp>
       <p:cxnSp>
         <p:nvCxnSpPr>
-          <p:cNvPr id="1473911929" name="Прямая соединительная линия 1473911928"/>
+          <p:cNvPr id="538993982" name="Прямая соединительная линия 1473911928"/>
           <p:cNvCxnSpPr>
-            <a:stCxn id="1736709910" idx="3"/>
-            <a:endCxn id="1937440151" idx="1"/>
+            <a:stCxn id="1968189078" idx="3"/>
+            <a:endCxn id="1381976786" idx="1"/>
           </p:cNvCxnSpPr>
           <p:nvPr/>
         </p:nvCxnSpPr>
@@ -19002,10 +18976,10 @@
       </p:cxnSp>
       <p:cxnSp>
         <p:nvCxnSpPr>
-          <p:cNvPr id="120675869" name="Прямая соединительная линия 120675868"/>
+          <p:cNvPr id="207338968" name="Прямая соединительная линия 120675868"/>
           <p:cNvCxnSpPr>
-            <a:stCxn id="1736709910" idx="3"/>
-            <a:endCxn id="1528119454" idx="0"/>
+            <a:stCxn id="1968189078" idx="3"/>
+            <a:endCxn id="1411701265" idx="0"/>
           </p:cNvCxnSpPr>
           <p:nvPr/>
         </p:nvCxnSpPr>
@@ -19048,11 +19022,11 @@
   <p:clrMapOvr>
     <a:masterClrMapping/>
   </p:clrMapOvr>
-  <mc:AlternateContent xmlns:mc="http://schemas.openxmlformats.org/markup-compatibility/2006" xmlns:p159="http://schemas.microsoft.com/office/powerpoint/2015/09/main">
-    <mc:Choice Requires="p159">
-      <p:transition/>
+  <mc:AlternateContent xmlns:mc="http://schemas.openxmlformats.org/markup-compatibility/2006">
+    <mc:Choice xmlns:p159="http://schemas.microsoft.com/office/powerpoint/2015/09/main" xmlns:p14="http://schemas.microsoft.com/office/powerpoint/2010/main" Requires="p159">
+      <p:transition p14:dur="500" advClick="1"/>
     </mc:Choice>
-    <mc:Fallback xmlns:w="http://schemas.openxmlformats.org/wordprocessingml/2006/main" xmlns:m="http://schemas.openxmlformats.org/officeDocument/2006/math" xmlns="">
+    <mc:Fallback>
       <p:transition advClick="1"/>
     </mc:Fallback>
   </mc:AlternateContent>
@@ -19060,10 +19034,10 @@
 </file>
 
 <file path=ppt/slides/slide9.xml><?xml version="1.0" encoding="utf-8"?>
-<p:sld xmlns:a="http://schemas.openxmlformats.org/drawingml/2006/main" xmlns:r="http://schemas.openxmlformats.org/officeDocument/2006/relationships" xmlns:p="http://schemas.openxmlformats.org/presentationml/2006/main" showMasterPhAnim="0">
-  <p:cSld>
+<p:sld xmlns:a="http://schemas.openxmlformats.org/drawingml/2006/main" xmlns:r="http://schemas.openxmlformats.org/officeDocument/2006/relationships" xmlns:p="http://schemas.openxmlformats.org/presentationml/2006/main" xmlns:m="http://schemas.openxmlformats.org/officeDocument/2006/math" xmlns:w="http://schemas.openxmlformats.org/wordprocessingml/2006/main" xmlns:mc="http://schemas.openxmlformats.org/markup-compatibility/2006" showMasterPhAnim="0" showMasterSp="1" show="1">
+  <p:cSld name="">
     <p:bg>
-      <p:bgPr>
+      <p:bgPr shadeToTitle="0">
         <a:gradFill>
           <a:gsLst>
             <a:gs pos="0">
@@ -19093,7 +19067,6 @@
           </a:gsLst>
           <a:lin ang="13500000" scaled="1"/>
         </a:gradFill>
-        <a:effectLst/>
       </p:bgPr>
     </p:bg>
     <p:spTree>
@@ -19112,7 +19085,7 @@
       </p:grpSpPr>
       <p:sp>
         <p:nvSpPr>
-          <p:cNvPr id="906370212" name="Объект 2"/>
+          <p:cNvPr id="544120060" name="Объект 2"/>
           <p:cNvSpPr>
             <a:spLocks noGrp="1"/>
           </p:cNvSpPr>
@@ -19215,6 +19188,7 @@
               <a:rPr lang="ru-RU"/>
               <a:t>- контрольно-статусные регистры. Содержат статусные и управляющие сигналы связанные с самим графическим ядром;</a:t>
             </a:r>
+            <a:endParaRPr/>
           </a:p>
           <a:p>
             <a:pPr>
@@ -19234,7 +19208,7 @@
       </p:sp>
       <p:sp>
         <p:nvSpPr>
-          <p:cNvPr id="544941026" name="Номер слайда 3"/>
+          <p:cNvPr id="104124552" name="Номер слайда 3"/>
           <p:cNvSpPr>
             <a:spLocks noGrp="1"/>
           </p:cNvSpPr>
@@ -19275,7 +19249,7 @@
       </p:sp>
       <p:sp>
         <p:nvSpPr>
-          <p:cNvPr id="1301988378" name="Прямоугольник 5"/>
+          <p:cNvPr id="1377576508" name="Прямоугольник 5"/>
           <p:cNvSpPr/>
           <p:nvPr/>
         </p:nvSpPr>
@@ -19325,7 +19299,7 @@
       </p:sp>
       <p:sp>
         <p:nvSpPr>
-          <p:cNvPr id="1512940575" name="Прямоугольник 6"/>
+          <p:cNvPr id="1887421315" name="Прямоугольник 6"/>
           <p:cNvSpPr/>
           <p:nvPr/>
         </p:nvSpPr>
@@ -19375,7 +19349,7 @@
       </p:sp>
       <p:sp>
         <p:nvSpPr>
-          <p:cNvPr id="1127627799" name="Заголовок 1"/>
+          <p:cNvPr id="2080285273" name="Заголовок 1"/>
           <p:cNvSpPr>
             <a:spLocks noGrp="1"/>
           </p:cNvSpPr>
@@ -19427,24 +19401,20 @@
       </p:sp>
       <p:pic>
         <p:nvPicPr>
-          <p:cNvPr id="1840874631" name="Рисунок 1840874630"/>
+          <p:cNvPr id="1667381587" name="Рисунок 1840874630"/>
           <p:cNvPicPr>
             <a:picLocks noChangeAspect="1"/>
           </p:cNvPicPr>
           <p:nvPr/>
         </p:nvPicPr>
-        <p:blipFill>
+        <p:blipFill rotWithShape="1">
           <a:blip r:embed="rId3">
             <a:extLst>
-              <a:ext uri="{28A0092B-C50C-407E-A947-70E740481C1C}">
-                <a14:useLocalDpi xmlns:a14="http://schemas.microsoft.com/office/drawing/2010/main" val="0"/>
-              </a:ext>
               <a:ext uri="{96DAC541-7B7A-43D3-8B79-37D633B846F1}">
                 <asvg:svgBlip xmlns:asvg="http://schemas.microsoft.com/office/drawing/2016/SVG/main" r:embed="rId4"/>
               </a:ext>
             </a:extLst>
           </a:blip>
-          <a:srcRect/>
           <a:stretch/>
         </p:blipFill>
         <p:spPr bwMode="auto">
@@ -19462,11 +19432,11 @@
   <p:clrMapOvr>
     <a:masterClrMapping/>
   </p:clrMapOvr>
-  <mc:AlternateContent xmlns:mc="http://schemas.openxmlformats.org/markup-compatibility/2006" xmlns:p159="http://schemas.microsoft.com/office/powerpoint/2015/09/main">
-    <mc:Choice Requires="p159">
-      <p:transition/>
+  <mc:AlternateContent xmlns:mc="http://schemas.openxmlformats.org/markup-compatibility/2006">
+    <mc:Choice xmlns:p159="http://schemas.microsoft.com/office/powerpoint/2015/09/main" xmlns:p14="http://schemas.microsoft.com/office/powerpoint/2010/main" Requires="p159">
+      <p:transition p14:dur="500" advClick="1"/>
     </mc:Choice>
-    <mc:Fallback xmlns:w="http://schemas.openxmlformats.org/wordprocessingml/2006/main" xmlns:m="http://schemas.openxmlformats.org/officeDocument/2006/math" xmlns="">
+    <mc:Fallback>
       <p:transition advClick="1"/>
     </mc:Fallback>
   </mc:AlternateContent>
@@ -19474,7 +19444,7 @@
 </file>
 
 <file path=ppt/theme/theme1.xml><?xml version="1.0" encoding="utf-8"?>
-<a:theme xmlns:a="http://schemas.openxmlformats.org/drawingml/2006/main" name="Тема Office">
+<a:theme xmlns:a="http://schemas.openxmlformats.org/drawingml/2006/main" xmlns:r="http://schemas.openxmlformats.org/officeDocument/2006/relationships" xmlns:p="http://schemas.openxmlformats.org/presentationml/2006/main" name="Тема Office">
   <a:themeElements>
     <a:clrScheme name="Стандартная">
       <a:dk1>
@@ -19665,12 +19635,11 @@
     </a:fmtScheme>
   </a:themeElements>
   <a:objectDefaults/>
-  <a:extraClrSchemeLst/>
 </a:theme>
 </file>
 
 <file path=ppt/theme/theme2.xml><?xml version="1.0" encoding="utf-8"?>
-<a:theme xmlns:a="http://schemas.openxmlformats.org/drawingml/2006/main" name="Тема Office">
+<a:theme xmlns:a="http://schemas.openxmlformats.org/drawingml/2006/main" xmlns:r="http://schemas.openxmlformats.org/officeDocument/2006/relationships" xmlns:p="http://schemas.openxmlformats.org/presentationml/2006/main" name="Тема Office">
   <a:themeElements>
     <a:clrScheme name="Стандартная">
       <a:dk1>
@@ -19861,6 +19830,5 @@
     </a:fmtScheme>
   </a:themeElements>
   <a:objectDefaults/>
-  <a:extraClrSchemeLst/>
 </a:theme>
 </file>